--- a/Java/Java #4/EN/Java #4.pptx
+++ b/Java/Java #4/EN/Java #4.pptx
@@ -6,6 +6,7 @@
   </p:sldMasterIdLst>
   <p:sldIdLst>
     <p:sldId id="256" r:id="rId3"/>
+    <p:sldId id="257" r:id="rId4"/>
   </p:sldIdLst>
   <p:sldSz cx="9144000" cy="6858000"/>
   <p:notesSz cx="7772400" cy="10058400"/>
@@ -63,7 +64,7 @@
         <p:txBody>
           <a:bodyPr/>
           <a:p>
-            <a:fld id="{6404A36E-97F2-45C6-BD32-9347BAF05A1B}" type="slidenum">
+            <a:fld id="{E4C348A7-8DDD-42B3-8838-D99E7FFA9945}" type="slidenum">
               <a:t>&lt;#&gt;</a:t>
             </a:fld>
           </a:p>
@@ -114,7 +115,7 @@
       </p:grpSpPr>
       <p:sp>
         <p:nvSpPr>
-          <p:cNvPr id="24" name="PlaceHolder 1"/>
+          <p:cNvPr id="26" name="PlaceHolder 1"/>
           <p:cNvSpPr>
             <a:spLocks noGrp="1"/>
           </p:cNvSpPr>
@@ -154,7 +155,7 @@
       </p:sp>
       <p:sp>
         <p:nvSpPr>
-          <p:cNvPr id="25" name="PlaceHolder 2"/>
+          <p:cNvPr id="27" name="PlaceHolder 2"/>
           <p:cNvSpPr>
             <a:spLocks noGrp="1"/>
           </p:cNvSpPr>
@@ -197,7 +198,7 @@
       </p:sp>
       <p:sp>
         <p:nvSpPr>
-          <p:cNvPr id="26" name="PlaceHolder 3"/>
+          <p:cNvPr id="28" name="PlaceHolder 3"/>
           <p:cNvSpPr>
             <a:spLocks noGrp="1"/>
           </p:cNvSpPr>
@@ -272,7 +273,7 @@
         <p:txBody>
           <a:bodyPr/>
           <a:p>
-            <a:fld id="{B32F908C-6F65-462F-9EEA-E44CD0FF4C71}" type="slidenum">
+            <a:fld id="{8835917A-22CE-4465-BE91-27DEFC35DA15}" type="slidenum">
               <a:t>&lt;#&gt;</a:t>
             </a:fld>
           </a:p>
@@ -323,7 +324,7 @@
       </p:grpSpPr>
       <p:sp>
         <p:nvSpPr>
-          <p:cNvPr id="27" name="PlaceHolder 1"/>
+          <p:cNvPr id="29" name="PlaceHolder 1"/>
           <p:cNvSpPr>
             <a:spLocks noGrp="1"/>
           </p:cNvSpPr>
@@ -363,7 +364,7 @@
       </p:sp>
       <p:sp>
         <p:nvSpPr>
-          <p:cNvPr id="28" name="PlaceHolder 2"/>
+          <p:cNvPr id="30" name="PlaceHolder 2"/>
           <p:cNvSpPr>
             <a:spLocks noGrp="1"/>
           </p:cNvSpPr>
@@ -406,7 +407,7 @@
       </p:sp>
       <p:sp>
         <p:nvSpPr>
-          <p:cNvPr id="29" name="PlaceHolder 3"/>
+          <p:cNvPr id="31" name="PlaceHolder 3"/>
           <p:cNvSpPr>
             <a:spLocks noGrp="1"/>
           </p:cNvSpPr>
@@ -449,7 +450,7 @@
       </p:sp>
       <p:sp>
         <p:nvSpPr>
-          <p:cNvPr id="30" name="PlaceHolder 4"/>
+          <p:cNvPr id="32" name="PlaceHolder 4"/>
           <p:cNvSpPr>
             <a:spLocks noGrp="1"/>
           </p:cNvSpPr>
@@ -492,7 +493,7 @@
       </p:sp>
       <p:sp>
         <p:nvSpPr>
-          <p:cNvPr id="31" name="PlaceHolder 5"/>
+          <p:cNvPr id="33" name="PlaceHolder 5"/>
           <p:cNvSpPr>
             <a:spLocks noGrp="1"/>
           </p:cNvSpPr>
@@ -567,7 +568,7 @@
         <p:txBody>
           <a:bodyPr/>
           <a:p>
-            <a:fld id="{9EA8D832-A424-4B25-9972-563A5735F385}" type="slidenum">
+            <a:fld id="{BF89A158-2B90-4771-AD7B-393C2B2058F1}" type="slidenum">
               <a:t>&lt;#&gt;</a:t>
             </a:fld>
           </a:p>
@@ -618,7 +619,7 @@
       </p:grpSpPr>
       <p:sp>
         <p:nvSpPr>
-          <p:cNvPr id="32" name="PlaceHolder 1"/>
+          <p:cNvPr id="34" name="PlaceHolder 1"/>
           <p:cNvSpPr>
             <a:spLocks noGrp="1"/>
           </p:cNvSpPr>
@@ -658,7 +659,7 @@
       </p:sp>
       <p:sp>
         <p:nvSpPr>
-          <p:cNvPr id="33" name="PlaceHolder 2"/>
+          <p:cNvPr id="35" name="PlaceHolder 2"/>
           <p:cNvSpPr>
             <a:spLocks noGrp="1"/>
           </p:cNvSpPr>
@@ -701,7 +702,7 @@
       </p:sp>
       <p:sp>
         <p:nvSpPr>
-          <p:cNvPr id="34" name="PlaceHolder 3"/>
+          <p:cNvPr id="36" name="PlaceHolder 3"/>
           <p:cNvSpPr>
             <a:spLocks noGrp="1"/>
           </p:cNvSpPr>
@@ -744,7 +745,7 @@
       </p:sp>
       <p:sp>
         <p:nvSpPr>
-          <p:cNvPr id="35" name="PlaceHolder 4"/>
+          <p:cNvPr id="37" name="PlaceHolder 4"/>
           <p:cNvSpPr>
             <a:spLocks noGrp="1"/>
           </p:cNvSpPr>
@@ -787,7 +788,7 @@
       </p:sp>
       <p:sp>
         <p:nvSpPr>
-          <p:cNvPr id="36" name="PlaceHolder 5"/>
+          <p:cNvPr id="38" name="PlaceHolder 5"/>
           <p:cNvSpPr>
             <a:spLocks noGrp="1"/>
           </p:cNvSpPr>
@@ -830,7 +831,7 @@
       </p:sp>
       <p:sp>
         <p:nvSpPr>
-          <p:cNvPr id="37" name="PlaceHolder 6"/>
+          <p:cNvPr id="39" name="PlaceHolder 6"/>
           <p:cNvSpPr>
             <a:spLocks noGrp="1"/>
           </p:cNvSpPr>
@@ -873,7 +874,7 @@
       </p:sp>
       <p:sp>
         <p:nvSpPr>
-          <p:cNvPr id="38" name="PlaceHolder 7"/>
+          <p:cNvPr id="40" name="PlaceHolder 7"/>
           <p:cNvSpPr>
             <a:spLocks noGrp="1"/>
           </p:cNvSpPr>
@@ -948,7 +949,7 @@
         <p:txBody>
           <a:bodyPr/>
           <a:p>
-            <a:fld id="{C369596D-AEC6-4254-8EF6-4EC69271C3AE}" type="slidenum">
+            <a:fld id="{0685CD38-AC5A-4AB0-AE92-BE266C3DC282}" type="slidenum">
               <a:t>&lt;#&gt;</a:t>
             </a:fld>
           </a:p>
@@ -999,7 +1000,7 @@
       </p:grpSpPr>
       <p:sp>
         <p:nvSpPr>
-          <p:cNvPr id="3" name="PlaceHolder 1"/>
+          <p:cNvPr id="5" name="PlaceHolder 1"/>
           <p:cNvSpPr>
             <a:spLocks noGrp="1"/>
           </p:cNvSpPr>
@@ -1039,7 +1040,7 @@
       </p:sp>
       <p:sp>
         <p:nvSpPr>
-          <p:cNvPr id="4" name="PlaceHolder 2"/>
+          <p:cNvPr id="6" name="PlaceHolder 2"/>
           <p:cNvSpPr>
             <a:spLocks noGrp="1"/>
           </p:cNvSpPr>
@@ -1111,7 +1112,7 @@
         <p:txBody>
           <a:bodyPr/>
           <a:p>
-            <a:fld id="{797A7527-AA15-462A-B09B-9A952A8BB319}" type="slidenum">
+            <a:fld id="{CE69C064-A050-4652-A7E5-CD178D53DDCF}" type="slidenum">
               <a:t>&lt;#&gt;</a:t>
             </a:fld>
           </a:p>
@@ -1162,7 +1163,7 @@
       </p:grpSpPr>
       <p:sp>
         <p:nvSpPr>
-          <p:cNvPr id="5" name="PlaceHolder 1"/>
+          <p:cNvPr id="7" name="PlaceHolder 1"/>
           <p:cNvSpPr>
             <a:spLocks noGrp="1"/>
           </p:cNvSpPr>
@@ -1202,7 +1203,7 @@
       </p:sp>
       <p:sp>
         <p:nvSpPr>
-          <p:cNvPr id="6" name="PlaceHolder 2"/>
+          <p:cNvPr id="8" name="PlaceHolder 2"/>
           <p:cNvSpPr>
             <a:spLocks noGrp="1"/>
           </p:cNvSpPr>
@@ -1277,7 +1278,7 @@
         <p:txBody>
           <a:bodyPr/>
           <a:p>
-            <a:fld id="{C338566F-6D5C-4240-A64D-BCD52C4F0711}" type="slidenum">
+            <a:fld id="{5BF1FA8C-DAEE-41EF-A115-6763E78FD5F3}" type="slidenum">
               <a:t>&lt;#&gt;</a:t>
             </a:fld>
           </a:p>
@@ -1328,7 +1329,7 @@
       </p:grpSpPr>
       <p:sp>
         <p:nvSpPr>
-          <p:cNvPr id="7" name="PlaceHolder 1"/>
+          <p:cNvPr id="9" name="PlaceHolder 1"/>
           <p:cNvSpPr>
             <a:spLocks noGrp="1"/>
           </p:cNvSpPr>
@@ -1368,7 +1369,7 @@
       </p:sp>
       <p:sp>
         <p:nvSpPr>
-          <p:cNvPr id="8" name="PlaceHolder 2"/>
+          <p:cNvPr id="10" name="PlaceHolder 2"/>
           <p:cNvSpPr>
             <a:spLocks noGrp="1"/>
           </p:cNvSpPr>
@@ -1411,7 +1412,7 @@
       </p:sp>
       <p:sp>
         <p:nvSpPr>
-          <p:cNvPr id="9" name="PlaceHolder 3"/>
+          <p:cNvPr id="11" name="PlaceHolder 3"/>
           <p:cNvSpPr>
             <a:spLocks noGrp="1"/>
           </p:cNvSpPr>
@@ -1486,7 +1487,7 @@
         <p:txBody>
           <a:bodyPr/>
           <a:p>
-            <a:fld id="{AECCFB65-7780-4383-8DF9-BBFD4CF04574}" type="slidenum">
+            <a:fld id="{7DC09EA5-B12A-40DE-8CD7-1511431FB05A}" type="slidenum">
               <a:t>&lt;#&gt;</a:t>
             </a:fld>
           </a:p>
@@ -1537,7 +1538,7 @@
       </p:grpSpPr>
       <p:sp>
         <p:nvSpPr>
-          <p:cNvPr id="10" name="PlaceHolder 1"/>
+          <p:cNvPr id="12" name="PlaceHolder 1"/>
           <p:cNvSpPr>
             <a:spLocks noGrp="1"/>
           </p:cNvSpPr>
@@ -1609,7 +1610,7 @@
         <p:txBody>
           <a:bodyPr/>
           <a:p>
-            <a:fld id="{9D066A16-487D-4358-AF97-0F2A36C3B7B4}" type="slidenum">
+            <a:fld id="{7F9B879C-F10E-4A5E-9B6C-32767F3D3AEA}" type="slidenum">
               <a:t>&lt;#&gt;</a:t>
             </a:fld>
           </a:p>
@@ -1660,7 +1661,7 @@
       </p:grpSpPr>
       <p:sp>
         <p:nvSpPr>
-          <p:cNvPr id="11" name="PlaceHolder 1"/>
+          <p:cNvPr id="13" name="PlaceHolder 1"/>
           <p:cNvSpPr>
             <a:spLocks noGrp="1"/>
           </p:cNvSpPr>
@@ -1730,7 +1731,7 @@
         <p:txBody>
           <a:bodyPr/>
           <a:p>
-            <a:fld id="{D548A7B8-AD82-403E-BBC1-5BB2AFA27A99}" type="slidenum">
+            <a:fld id="{CE636013-B630-4D5C-A9D1-2C46B6669988}" type="slidenum">
               <a:t>&lt;#&gt;</a:t>
             </a:fld>
           </a:p>
@@ -1781,7 +1782,7 @@
       </p:grpSpPr>
       <p:sp>
         <p:nvSpPr>
-          <p:cNvPr id="12" name="PlaceHolder 1"/>
+          <p:cNvPr id="14" name="PlaceHolder 1"/>
           <p:cNvSpPr>
             <a:spLocks noGrp="1"/>
           </p:cNvSpPr>
@@ -1821,7 +1822,7 @@
       </p:sp>
       <p:sp>
         <p:nvSpPr>
-          <p:cNvPr id="13" name="PlaceHolder 2"/>
+          <p:cNvPr id="15" name="PlaceHolder 2"/>
           <p:cNvSpPr>
             <a:spLocks noGrp="1"/>
           </p:cNvSpPr>
@@ -1864,7 +1865,7 @@
       </p:sp>
       <p:sp>
         <p:nvSpPr>
-          <p:cNvPr id="14" name="PlaceHolder 3"/>
+          <p:cNvPr id="16" name="PlaceHolder 3"/>
           <p:cNvSpPr>
             <a:spLocks noGrp="1"/>
           </p:cNvSpPr>
@@ -1907,7 +1908,7 @@
       </p:sp>
       <p:sp>
         <p:nvSpPr>
-          <p:cNvPr id="15" name="PlaceHolder 4"/>
+          <p:cNvPr id="17" name="PlaceHolder 4"/>
           <p:cNvSpPr>
             <a:spLocks noGrp="1"/>
           </p:cNvSpPr>
@@ -1982,7 +1983,7 @@
         <p:txBody>
           <a:bodyPr/>
           <a:p>
-            <a:fld id="{58D4B3D1-C029-48BC-A52A-45E80E097C13}" type="slidenum">
+            <a:fld id="{C799AE68-126B-477B-B678-E8B912F16A40}" type="slidenum">
               <a:t>&lt;#&gt;</a:t>
             </a:fld>
           </a:p>
@@ -2033,7 +2034,7 @@
       </p:grpSpPr>
       <p:sp>
         <p:nvSpPr>
-          <p:cNvPr id="16" name="PlaceHolder 1"/>
+          <p:cNvPr id="18" name="PlaceHolder 1"/>
           <p:cNvSpPr>
             <a:spLocks noGrp="1"/>
           </p:cNvSpPr>
@@ -2073,7 +2074,7 @@
       </p:sp>
       <p:sp>
         <p:nvSpPr>
-          <p:cNvPr id="17" name="PlaceHolder 2"/>
+          <p:cNvPr id="19" name="PlaceHolder 2"/>
           <p:cNvSpPr>
             <a:spLocks noGrp="1"/>
           </p:cNvSpPr>
@@ -2116,7 +2117,7 @@
       </p:sp>
       <p:sp>
         <p:nvSpPr>
-          <p:cNvPr id="18" name="PlaceHolder 3"/>
+          <p:cNvPr id="20" name="PlaceHolder 3"/>
           <p:cNvSpPr>
             <a:spLocks noGrp="1"/>
           </p:cNvSpPr>
@@ -2159,7 +2160,7 @@
       </p:sp>
       <p:sp>
         <p:nvSpPr>
-          <p:cNvPr id="19" name="PlaceHolder 4"/>
+          <p:cNvPr id="21" name="PlaceHolder 4"/>
           <p:cNvSpPr>
             <a:spLocks noGrp="1"/>
           </p:cNvSpPr>
@@ -2234,7 +2235,7 @@
         <p:txBody>
           <a:bodyPr/>
           <a:p>
-            <a:fld id="{40B9A16F-3A28-4C92-A328-0AC556CC59B1}" type="slidenum">
+            <a:fld id="{610745FB-88F8-4491-8AB8-FA3E820F5DDB}" type="slidenum">
               <a:t>&lt;#&gt;</a:t>
             </a:fld>
           </a:p>
@@ -2285,7 +2286,7 @@
       </p:grpSpPr>
       <p:sp>
         <p:nvSpPr>
-          <p:cNvPr id="20" name="PlaceHolder 1"/>
+          <p:cNvPr id="22" name="PlaceHolder 1"/>
           <p:cNvSpPr>
             <a:spLocks noGrp="1"/>
           </p:cNvSpPr>
@@ -2325,7 +2326,7 @@
       </p:sp>
       <p:sp>
         <p:nvSpPr>
-          <p:cNvPr id="21" name="PlaceHolder 2"/>
+          <p:cNvPr id="23" name="PlaceHolder 2"/>
           <p:cNvSpPr>
             <a:spLocks noGrp="1"/>
           </p:cNvSpPr>
@@ -2368,7 +2369,7 @@
       </p:sp>
       <p:sp>
         <p:nvSpPr>
-          <p:cNvPr id="22" name="PlaceHolder 3"/>
+          <p:cNvPr id="24" name="PlaceHolder 3"/>
           <p:cNvSpPr>
             <a:spLocks noGrp="1"/>
           </p:cNvSpPr>
@@ -2411,7 +2412,7 @@
       </p:sp>
       <p:sp>
         <p:nvSpPr>
-          <p:cNvPr id="23" name="PlaceHolder 4"/>
+          <p:cNvPr id="25" name="PlaceHolder 4"/>
           <p:cNvSpPr>
             <a:spLocks noGrp="1"/>
           </p:cNvSpPr>
@@ -2486,7 +2487,7 @@
         <p:txBody>
           <a:bodyPr/>
           <a:p>
-            <a:fld id="{A5FC7FEE-DA5D-4588-84AC-BC740E5640B4}" type="slidenum">
+            <a:fld id="{46ACD4D0-D008-448C-8701-0CA8E6B248D8}" type="slidenum">
               <a:t>&lt;#&gt;</a:t>
             </a:fld>
           </a:p>
@@ -2555,7 +2556,7 @@
         <p:spPr>
           <a:xfrm>
             <a:off x="3124080" y="6356520"/>
-            <a:ext cx="2894400" cy="363960"/>
+            <a:ext cx="2894040" cy="363600"/>
           </a:xfrm>
           <a:prstGeom prst="rect">
             <a:avLst/>
@@ -2627,7 +2628,7 @@
         <p:spPr>
           <a:xfrm>
             <a:off x="6553080" y="6356520"/>
-            <a:ext cx="2132640" cy="363960"/>
+            <a:ext cx="2132280" cy="363600"/>
           </a:xfrm>
           <a:prstGeom prst="rect">
             <a:avLst/>
@@ -2668,7 +2669,7 @@
                 <a:tab algn="l" pos="0"/>
               </a:tabLst>
             </a:pPr>
-            <a:fld id="{17F3C07A-C029-428B-ABA0-93217A49AC53}" type="slidenum">
+            <a:fld id="{E0E3B680-C55C-4113-AB95-9F2F2346D455}" type="slidenum">
               <a:rPr b="0" lang="en-US" sz="1200" spc="-1" strike="noStrike">
                 <a:solidFill>
                   <a:srgbClr val="8b8b8b"/>
@@ -2699,7 +2700,7 @@
         <p:spPr>
           <a:xfrm>
             <a:off x="457200" y="6356520"/>
-            <a:ext cx="2132640" cy="363960"/>
+            <a:ext cx="2132280" cy="363600"/>
           </a:xfrm>
           <a:prstGeom prst="rect">
             <a:avLst/>
@@ -2742,6 +2743,280 @@
                 <a:srgbClr val="000000"/>
               </a:solidFill>
               <a:latin typeface="Times New Roman"/>
+            </a:endParaRPr>
+          </a:p>
+        </p:txBody>
+      </p:sp>
+      <p:sp>
+        <p:nvSpPr>
+          <p:cNvPr id="3" name="PlaceHolder 4"/>
+          <p:cNvSpPr>
+            <a:spLocks noGrp="1"/>
+          </p:cNvSpPr>
+          <p:nvPr>
+            <p:ph type="title"/>
+          </p:nvPr>
+        </p:nvSpPr>
+        <p:spPr>
+          <a:xfrm>
+            <a:off x="457200" y="273600"/>
+            <a:ext cx="8229240" cy="1144800"/>
+          </a:xfrm>
+          <a:prstGeom prst="rect">
+            <a:avLst/>
+          </a:prstGeom>
+          <a:noFill/>
+          <a:ln w="0">
+            <a:noFill/>
+          </a:ln>
+        </p:spPr>
+        <p:txBody>
+          <a:bodyPr lIns="0" rIns="0" tIns="0" bIns="0" anchor="ctr">
+            <a:noAutofit/>
+          </a:bodyPr>
+          <a:p>
+            <a:pPr indent="0" algn="ctr">
+              <a:buNone/>
+            </a:pPr>
+            <a:r>
+              <a:rPr b="0" lang="en-US" sz="4400" spc="-1" strike="noStrike">
+                <a:solidFill>
+                  <a:srgbClr val="000000"/>
+                </a:solidFill>
+                <a:latin typeface="Arial"/>
+              </a:rPr>
+              <a:t>Click to edit the title text format</a:t>
+            </a:r>
+            <a:endParaRPr b="0" lang="en-US" sz="4400" spc="-1" strike="noStrike">
+              <a:solidFill>
+                <a:srgbClr val="000000"/>
+              </a:solidFill>
+              <a:latin typeface="Arial"/>
+            </a:endParaRPr>
+          </a:p>
+        </p:txBody>
+      </p:sp>
+      <p:sp>
+        <p:nvSpPr>
+          <p:cNvPr id="4" name="PlaceHolder 5"/>
+          <p:cNvSpPr>
+            <a:spLocks noGrp="1"/>
+          </p:cNvSpPr>
+          <p:nvPr>
+            <p:ph type="body"/>
+          </p:nvPr>
+        </p:nvSpPr>
+        <p:spPr>
+          <a:xfrm>
+            <a:off x="457200" y="1604520"/>
+            <a:ext cx="8229240" cy="3977280"/>
+          </a:xfrm>
+          <a:prstGeom prst="rect">
+            <a:avLst/>
+          </a:prstGeom>
+          <a:noFill/>
+          <a:ln w="0">
+            <a:noFill/>
+          </a:ln>
+        </p:spPr>
+        <p:txBody>
+          <a:bodyPr lIns="0" rIns="0" tIns="0" bIns="0" anchor="t">
+            <a:normAutofit/>
+          </a:bodyPr>
+          <a:p>
+            <a:pPr marL="432000" indent="-324000">
+              <a:spcBef>
+                <a:spcPts val="1417"/>
+              </a:spcBef>
+              <a:buClr>
+                <a:srgbClr val="000000"/>
+              </a:buClr>
+              <a:buSzPct val="45000"/>
+              <a:buFont typeface="Wingdings" charset="2"/>
+              <a:buChar char=""/>
+            </a:pPr>
+            <a:r>
+              <a:rPr b="0" lang="en-US" sz="3200" spc="-1" strike="noStrike">
+                <a:solidFill>
+                  <a:srgbClr val="000000"/>
+                </a:solidFill>
+                <a:latin typeface="Arial"/>
+              </a:rPr>
+              <a:t>Click to edit the outline text format</a:t>
+            </a:r>
+            <a:endParaRPr b="0" lang="en-US" sz="3200" spc="-1" strike="noStrike">
+              <a:solidFill>
+                <a:srgbClr val="000000"/>
+              </a:solidFill>
+              <a:latin typeface="Arial"/>
+            </a:endParaRPr>
+          </a:p>
+          <a:p>
+            <a:pPr lvl="1" marL="864000" indent="-324000">
+              <a:spcBef>
+                <a:spcPts val="1134"/>
+              </a:spcBef>
+              <a:buClr>
+                <a:srgbClr val="000000"/>
+              </a:buClr>
+              <a:buSzPct val="75000"/>
+              <a:buFont typeface="Symbol" charset="2"/>
+              <a:buChar char=""/>
+            </a:pPr>
+            <a:r>
+              <a:rPr b="0" lang="en-US" sz="2800" spc="-1" strike="noStrike">
+                <a:solidFill>
+                  <a:srgbClr val="000000"/>
+                </a:solidFill>
+                <a:latin typeface="Arial"/>
+              </a:rPr>
+              <a:t>Second Outline Level</a:t>
+            </a:r>
+            <a:endParaRPr b="0" lang="en-US" sz="2800" spc="-1" strike="noStrike">
+              <a:solidFill>
+                <a:srgbClr val="000000"/>
+              </a:solidFill>
+              <a:latin typeface="Arial"/>
+            </a:endParaRPr>
+          </a:p>
+          <a:p>
+            <a:pPr lvl="2" marL="1296000" indent="-288000">
+              <a:spcBef>
+                <a:spcPts val="850"/>
+              </a:spcBef>
+              <a:buClr>
+                <a:srgbClr val="000000"/>
+              </a:buClr>
+              <a:buSzPct val="45000"/>
+              <a:buFont typeface="Wingdings" charset="2"/>
+              <a:buChar char=""/>
+            </a:pPr>
+            <a:r>
+              <a:rPr b="0" lang="en-US" sz="2400" spc="-1" strike="noStrike">
+                <a:solidFill>
+                  <a:srgbClr val="000000"/>
+                </a:solidFill>
+                <a:latin typeface="Arial"/>
+              </a:rPr>
+              <a:t>Third Outline Level</a:t>
+            </a:r>
+            <a:endParaRPr b="0" lang="en-US" sz="2400" spc="-1" strike="noStrike">
+              <a:solidFill>
+                <a:srgbClr val="000000"/>
+              </a:solidFill>
+              <a:latin typeface="Arial"/>
+            </a:endParaRPr>
+          </a:p>
+          <a:p>
+            <a:pPr lvl="3" marL="1728000" indent="-216000">
+              <a:spcBef>
+                <a:spcPts val="567"/>
+              </a:spcBef>
+              <a:buClr>
+                <a:srgbClr val="000000"/>
+              </a:buClr>
+              <a:buSzPct val="75000"/>
+              <a:buFont typeface="Symbol" charset="2"/>
+              <a:buChar char=""/>
+            </a:pPr>
+            <a:r>
+              <a:rPr b="0" lang="en-US" sz="2000" spc="-1" strike="noStrike">
+                <a:solidFill>
+                  <a:srgbClr val="000000"/>
+                </a:solidFill>
+                <a:latin typeface="Arial"/>
+              </a:rPr>
+              <a:t>Fourth Outline Level</a:t>
+            </a:r>
+            <a:endParaRPr b="0" lang="en-US" sz="2000" spc="-1" strike="noStrike">
+              <a:solidFill>
+                <a:srgbClr val="000000"/>
+              </a:solidFill>
+              <a:latin typeface="Arial"/>
+            </a:endParaRPr>
+          </a:p>
+          <a:p>
+            <a:pPr lvl="4" marL="2160000" indent="-216000">
+              <a:spcBef>
+                <a:spcPts val="283"/>
+              </a:spcBef>
+              <a:buClr>
+                <a:srgbClr val="000000"/>
+              </a:buClr>
+              <a:buSzPct val="45000"/>
+              <a:buFont typeface="Wingdings" charset="2"/>
+              <a:buChar char=""/>
+            </a:pPr>
+            <a:r>
+              <a:rPr b="0" lang="en-US" sz="2000" spc="-1" strike="noStrike">
+                <a:solidFill>
+                  <a:srgbClr val="000000"/>
+                </a:solidFill>
+                <a:latin typeface="Arial"/>
+              </a:rPr>
+              <a:t>Fifth Outline Level</a:t>
+            </a:r>
+            <a:endParaRPr b="0" lang="en-US" sz="2000" spc="-1" strike="noStrike">
+              <a:solidFill>
+                <a:srgbClr val="000000"/>
+              </a:solidFill>
+              <a:latin typeface="Arial"/>
+            </a:endParaRPr>
+          </a:p>
+          <a:p>
+            <a:pPr lvl="5" marL="2592000" indent="-216000">
+              <a:spcBef>
+                <a:spcPts val="283"/>
+              </a:spcBef>
+              <a:buClr>
+                <a:srgbClr val="000000"/>
+              </a:buClr>
+              <a:buSzPct val="45000"/>
+              <a:buFont typeface="Wingdings" charset="2"/>
+              <a:buChar char=""/>
+            </a:pPr>
+            <a:r>
+              <a:rPr b="0" lang="en-US" sz="2000" spc="-1" strike="noStrike">
+                <a:solidFill>
+                  <a:srgbClr val="000000"/>
+                </a:solidFill>
+                <a:latin typeface="Arial"/>
+              </a:rPr>
+              <a:t>Sixth Outline Level</a:t>
+            </a:r>
+            <a:endParaRPr b="0" lang="en-US" sz="2000" spc="-1" strike="noStrike">
+              <a:solidFill>
+                <a:srgbClr val="000000"/>
+              </a:solidFill>
+              <a:latin typeface="Arial"/>
+            </a:endParaRPr>
+          </a:p>
+          <a:p>
+            <a:pPr lvl="6" marL="3024000" indent="-216000">
+              <a:spcBef>
+                <a:spcPts val="283"/>
+              </a:spcBef>
+              <a:buClr>
+                <a:srgbClr val="000000"/>
+              </a:buClr>
+              <a:buSzPct val="45000"/>
+              <a:buFont typeface="Wingdings" charset="2"/>
+              <a:buChar char=""/>
+            </a:pPr>
+            <a:r>
+              <a:rPr b="0" lang="en-US" sz="2000" spc="-1" strike="noStrike">
+                <a:solidFill>
+                  <a:srgbClr val="000000"/>
+                </a:solidFill>
+                <a:latin typeface="Arial"/>
+              </a:rPr>
+              <a:t>Seventh Outline Level</a:t>
+            </a:r>
+            <a:endParaRPr b="0" lang="en-US" sz="2000" spc="-1" strike="noStrike">
+              <a:solidFill>
+                <a:srgbClr val="000000"/>
+              </a:solidFill>
+              <a:latin typeface="Arial"/>
             </a:endParaRPr>
           </a:p>
         </p:txBody>
@@ -2785,14 +3060,14 @@
       </p:grpSpPr>
       <p:sp>
         <p:nvSpPr>
-          <p:cNvPr id="39" name="Rectangle 1"/>
+          <p:cNvPr id="41" name="Rectangle 1"/>
           <p:cNvSpPr/>
           <p:nvPr/>
         </p:nvSpPr>
         <p:spPr>
           <a:xfrm>
             <a:off x="0" y="0"/>
-            <a:ext cx="12187800" cy="6856920"/>
+            <a:ext cx="12187440" cy="6856560"/>
           </a:xfrm>
           <a:prstGeom prst="rect">
             <a:avLst/>
@@ -2845,14 +3120,14 @@
       </p:sp>
       <p:sp>
         <p:nvSpPr>
-          <p:cNvPr id="40" name="Rectangle 2"/>
+          <p:cNvPr id="42" name="Rectangle 2"/>
           <p:cNvSpPr/>
           <p:nvPr/>
         </p:nvSpPr>
         <p:spPr>
           <a:xfrm>
             <a:off x="0" y="0"/>
-            <a:ext cx="17280" cy="6856920"/>
+            <a:ext cx="16920" cy="6856560"/>
           </a:xfrm>
           <a:prstGeom prst="rect">
             <a:avLst/>
@@ -2905,14 +3180,14 @@
       </p:sp>
       <p:sp>
         <p:nvSpPr>
-          <p:cNvPr id="41" name="Rectangle 3"/>
+          <p:cNvPr id="43" name="Rectangle 3"/>
           <p:cNvSpPr/>
           <p:nvPr/>
         </p:nvSpPr>
         <p:spPr>
           <a:xfrm>
             <a:off x="914400" y="0"/>
-            <a:ext cx="17280" cy="6856920"/>
+            <a:ext cx="16920" cy="6856560"/>
           </a:xfrm>
           <a:prstGeom prst="rect">
             <a:avLst/>
@@ -2965,14 +3240,14 @@
       </p:sp>
       <p:sp>
         <p:nvSpPr>
-          <p:cNvPr id="42" name="Rectangle 4"/>
+          <p:cNvPr id="44" name="Rectangle 4"/>
           <p:cNvSpPr/>
           <p:nvPr/>
         </p:nvSpPr>
         <p:spPr>
           <a:xfrm>
             <a:off x="1828800" y="0"/>
-            <a:ext cx="17280" cy="6856920"/>
+            <a:ext cx="16920" cy="6856560"/>
           </a:xfrm>
           <a:prstGeom prst="rect">
             <a:avLst/>
@@ -3025,14 +3300,14 @@
       </p:sp>
       <p:sp>
         <p:nvSpPr>
-          <p:cNvPr id="43" name="Rectangle 5"/>
+          <p:cNvPr id="45" name="Rectangle 5"/>
           <p:cNvSpPr/>
           <p:nvPr/>
         </p:nvSpPr>
         <p:spPr>
           <a:xfrm>
             <a:off x="2743200" y="0"/>
-            <a:ext cx="17280" cy="6856920"/>
+            <a:ext cx="16920" cy="6856560"/>
           </a:xfrm>
           <a:prstGeom prst="rect">
             <a:avLst/>
@@ -3085,14 +3360,14 @@
       </p:sp>
       <p:sp>
         <p:nvSpPr>
-          <p:cNvPr id="44" name="Rectangle 6"/>
+          <p:cNvPr id="46" name="Rectangle 6"/>
           <p:cNvSpPr/>
           <p:nvPr/>
         </p:nvSpPr>
         <p:spPr>
           <a:xfrm>
             <a:off x="3657600" y="0"/>
-            <a:ext cx="17280" cy="6856920"/>
+            <a:ext cx="16920" cy="6856560"/>
           </a:xfrm>
           <a:prstGeom prst="rect">
             <a:avLst/>
@@ -3145,14 +3420,14 @@
       </p:sp>
       <p:sp>
         <p:nvSpPr>
-          <p:cNvPr id="45" name="Rectangle 7"/>
+          <p:cNvPr id="47" name="Rectangle 7"/>
           <p:cNvSpPr/>
           <p:nvPr/>
         </p:nvSpPr>
         <p:spPr>
           <a:xfrm>
             <a:off x="4572000" y="0"/>
-            <a:ext cx="17280" cy="6856920"/>
+            <a:ext cx="16920" cy="6856560"/>
           </a:xfrm>
           <a:prstGeom prst="rect">
             <a:avLst/>
@@ -3205,14 +3480,14 @@
       </p:sp>
       <p:sp>
         <p:nvSpPr>
-          <p:cNvPr id="46" name="Rectangle 8"/>
+          <p:cNvPr id="48" name="Rectangle 8"/>
           <p:cNvSpPr/>
           <p:nvPr/>
         </p:nvSpPr>
         <p:spPr>
           <a:xfrm>
             <a:off x="5486400" y="0"/>
-            <a:ext cx="17280" cy="6856920"/>
+            <a:ext cx="16920" cy="6856560"/>
           </a:xfrm>
           <a:prstGeom prst="rect">
             <a:avLst/>
@@ -3265,14 +3540,14 @@
       </p:sp>
       <p:sp>
         <p:nvSpPr>
-          <p:cNvPr id="47" name="Rectangle 9"/>
+          <p:cNvPr id="49" name="Rectangle 9"/>
           <p:cNvSpPr/>
           <p:nvPr/>
         </p:nvSpPr>
         <p:spPr>
           <a:xfrm>
             <a:off x="6400800" y="0"/>
-            <a:ext cx="17280" cy="6856920"/>
+            <a:ext cx="16920" cy="6856560"/>
           </a:xfrm>
           <a:prstGeom prst="rect">
             <a:avLst/>
@@ -3325,14 +3600,14 @@
       </p:sp>
       <p:sp>
         <p:nvSpPr>
-          <p:cNvPr id="48" name="Rectangle 10"/>
+          <p:cNvPr id="50" name="Rectangle 10"/>
           <p:cNvSpPr/>
           <p:nvPr/>
         </p:nvSpPr>
         <p:spPr>
           <a:xfrm>
             <a:off x="7315200" y="0"/>
-            <a:ext cx="17280" cy="6856920"/>
+            <a:ext cx="16920" cy="6856560"/>
           </a:xfrm>
           <a:prstGeom prst="rect">
             <a:avLst/>
@@ -3385,14 +3660,14 @@
       </p:sp>
       <p:sp>
         <p:nvSpPr>
-          <p:cNvPr id="49" name="Rectangle 11"/>
+          <p:cNvPr id="51" name="Rectangle 11"/>
           <p:cNvSpPr/>
           <p:nvPr/>
         </p:nvSpPr>
         <p:spPr>
           <a:xfrm>
             <a:off x="8229600" y="0"/>
-            <a:ext cx="17280" cy="6856920"/>
+            <a:ext cx="16920" cy="6856560"/>
           </a:xfrm>
           <a:prstGeom prst="rect">
             <a:avLst/>
@@ -3445,14 +3720,14 @@
       </p:sp>
       <p:sp>
         <p:nvSpPr>
-          <p:cNvPr id="50" name="Rectangle 12"/>
+          <p:cNvPr id="52" name="Rectangle 12"/>
           <p:cNvSpPr/>
           <p:nvPr/>
         </p:nvSpPr>
         <p:spPr>
           <a:xfrm>
             <a:off x="9144000" y="0"/>
-            <a:ext cx="17280" cy="6856920"/>
+            <a:ext cx="16920" cy="6856560"/>
           </a:xfrm>
           <a:prstGeom prst="rect">
             <a:avLst/>
@@ -3505,14 +3780,14 @@
       </p:sp>
       <p:sp>
         <p:nvSpPr>
-          <p:cNvPr id="51" name="Rectangle 13"/>
+          <p:cNvPr id="53" name="Rectangle 13"/>
           <p:cNvSpPr/>
           <p:nvPr/>
         </p:nvSpPr>
         <p:spPr>
           <a:xfrm>
             <a:off x="10058400" y="0"/>
-            <a:ext cx="17280" cy="6856920"/>
+            <a:ext cx="16920" cy="6856560"/>
           </a:xfrm>
           <a:prstGeom prst="rect">
             <a:avLst/>
@@ -3565,14 +3840,14 @@
       </p:sp>
       <p:sp>
         <p:nvSpPr>
-          <p:cNvPr id="52" name="Rectangle 14"/>
+          <p:cNvPr id="54" name="Rectangle 14"/>
           <p:cNvSpPr/>
           <p:nvPr/>
         </p:nvSpPr>
         <p:spPr>
           <a:xfrm>
             <a:off x="10972800" y="0"/>
-            <a:ext cx="17280" cy="6856920"/>
+            <a:ext cx="16920" cy="6856560"/>
           </a:xfrm>
           <a:prstGeom prst="rect">
             <a:avLst/>
@@ -3625,14 +3900,14 @@
       </p:sp>
       <p:sp>
         <p:nvSpPr>
-          <p:cNvPr id="53" name="Rectangle 15"/>
+          <p:cNvPr id="55" name="Rectangle 15"/>
           <p:cNvSpPr/>
           <p:nvPr/>
         </p:nvSpPr>
         <p:spPr>
           <a:xfrm>
             <a:off x="11887200" y="0"/>
-            <a:ext cx="17280" cy="6856920"/>
+            <a:ext cx="16920" cy="6856560"/>
           </a:xfrm>
           <a:prstGeom prst="rect">
             <a:avLst/>
@@ -3685,14 +3960,14 @@
       </p:sp>
       <p:sp>
         <p:nvSpPr>
-          <p:cNvPr id="54" name="Rectangle 16"/>
+          <p:cNvPr id="56" name="Rectangle 16"/>
           <p:cNvSpPr/>
           <p:nvPr/>
         </p:nvSpPr>
         <p:spPr>
           <a:xfrm>
             <a:off x="0" y="0"/>
-            <a:ext cx="318960" cy="6856920"/>
+            <a:ext cx="318600" cy="6856560"/>
           </a:xfrm>
           <a:prstGeom prst="rect">
             <a:avLst/>
@@ -3745,14 +4020,14 @@
       </p:sp>
       <p:sp>
         <p:nvSpPr>
-          <p:cNvPr id="55" name="Rounded Rectangle 17"/>
+          <p:cNvPr id="57" name="Rounded Rectangle 17"/>
           <p:cNvSpPr/>
           <p:nvPr/>
         </p:nvSpPr>
         <p:spPr>
           <a:xfrm>
             <a:off x="9875520" y="365760"/>
-            <a:ext cx="2010600" cy="501840"/>
+            <a:ext cx="2010240" cy="501480"/>
           </a:xfrm>
           <a:prstGeom prst="roundRect">
             <a:avLst>
@@ -3819,7 +4094,7 @@
       </p:sp>
       <p:sp>
         <p:nvSpPr>
-          <p:cNvPr id="56" name="TextBox 18"/>
+          <p:cNvPr id="58" name="TextBox 18"/>
           <p:cNvSpPr/>
           <p:nvPr/>
         </p:nvSpPr>
@@ -3873,14 +4148,14 @@
       </p:sp>
       <p:sp>
         <p:nvSpPr>
-          <p:cNvPr id="57" name="TextBox 19"/>
+          <p:cNvPr id="59" name="TextBox 19"/>
           <p:cNvSpPr/>
           <p:nvPr/>
         </p:nvSpPr>
         <p:spPr>
           <a:xfrm>
             <a:off x="1548720" y="1785240"/>
-            <a:ext cx="8509680" cy="957960"/>
+            <a:ext cx="8509320" cy="957960"/>
           </a:xfrm>
           <a:prstGeom prst="rect">
             <a:avLst/>
@@ -3973,14 +4248,14 @@
       </p:sp>
       <p:sp>
         <p:nvSpPr>
-          <p:cNvPr id="58" name="Rounded Rectangle 20"/>
+          <p:cNvPr id="60" name="Rounded Rectangle 20"/>
           <p:cNvSpPr/>
           <p:nvPr/>
         </p:nvSpPr>
         <p:spPr>
           <a:xfrm>
             <a:off x="987480" y="3182040"/>
-            <a:ext cx="3290760" cy="2742120"/>
+            <a:ext cx="3290400" cy="2741760"/>
           </a:xfrm>
           <a:prstGeom prst="roundRect">
             <a:avLst>
@@ -4035,14 +4310,14 @@
       </p:sp>
       <p:sp>
         <p:nvSpPr>
-          <p:cNvPr id="59" name="Rounded Rectangle 21"/>
+          <p:cNvPr id="61" name="Rounded Rectangle 21"/>
           <p:cNvSpPr/>
           <p:nvPr/>
         </p:nvSpPr>
         <p:spPr>
           <a:xfrm>
             <a:off x="914400" y="3108960"/>
-            <a:ext cx="3290760" cy="2742120"/>
+            <a:ext cx="3290400" cy="2741760"/>
           </a:xfrm>
           <a:prstGeom prst="roundRect">
             <a:avLst>
@@ -4169,14 +4444,14 @@
       </p:sp>
       <p:sp>
         <p:nvSpPr>
-          <p:cNvPr id="60" name="Rounded Rectangle 22"/>
+          <p:cNvPr id="62" name="Rounded Rectangle 22"/>
           <p:cNvSpPr/>
           <p:nvPr/>
         </p:nvSpPr>
         <p:spPr>
           <a:xfrm>
             <a:off x="4507920" y="3182040"/>
-            <a:ext cx="3290760" cy="2742120"/>
+            <a:ext cx="3290400" cy="2741760"/>
           </a:xfrm>
           <a:prstGeom prst="roundRect">
             <a:avLst>
@@ -4231,14 +4506,14 @@
       </p:sp>
       <p:sp>
         <p:nvSpPr>
-          <p:cNvPr id="61" name="Rounded Rectangle 23"/>
+          <p:cNvPr id="63" name="Rounded Rectangle 23"/>
           <p:cNvSpPr/>
           <p:nvPr/>
         </p:nvSpPr>
         <p:spPr>
           <a:xfrm>
             <a:off x="4434840" y="3108960"/>
-            <a:ext cx="3290760" cy="2742120"/>
+            <a:ext cx="3290400" cy="2741760"/>
           </a:xfrm>
           <a:prstGeom prst="roundRect">
             <a:avLst>
@@ -4489,14 +4764,14 @@
       </p:sp>
       <p:sp>
         <p:nvSpPr>
-          <p:cNvPr id="62" name="Rounded Rectangle 24"/>
+          <p:cNvPr id="64" name="Rounded Rectangle 24"/>
           <p:cNvSpPr/>
           <p:nvPr/>
         </p:nvSpPr>
         <p:spPr>
           <a:xfrm>
             <a:off x="8028360" y="3182040"/>
-            <a:ext cx="3290760" cy="2742120"/>
+            <a:ext cx="3290400" cy="2741760"/>
           </a:xfrm>
           <a:prstGeom prst="roundRect">
             <a:avLst>
@@ -4551,14 +4826,14 @@
       </p:sp>
       <p:sp>
         <p:nvSpPr>
-          <p:cNvPr id="63" name="Rounded Rectangle 25"/>
+          <p:cNvPr id="65" name="Rounded Rectangle 25"/>
           <p:cNvSpPr/>
           <p:nvPr/>
         </p:nvSpPr>
         <p:spPr>
           <a:xfrm>
             <a:off x="7955280" y="2971800"/>
-            <a:ext cx="3931920" cy="3657600"/>
+            <a:ext cx="3931560" cy="3657240"/>
           </a:xfrm>
           <a:prstGeom prst="roundRect">
             <a:avLst>
@@ -4978,7 +5253,2152 @@
       </p:sp>
       <p:sp>
         <p:nvSpPr>
-          <p:cNvPr id="64" name="TextBox 26"/>
+          <p:cNvPr id="66" name="TextBox 26"/>
+          <p:cNvSpPr/>
+          <p:nvPr/>
+        </p:nvSpPr>
+        <p:spPr>
+          <a:xfrm>
+            <a:off x="4600080" y="6446520"/>
+            <a:ext cx="3051360" cy="363960"/>
+          </a:xfrm>
+          <a:prstGeom prst="rect">
+            <a:avLst/>
+          </a:prstGeom>
+          <a:noFill/>
+          <a:ln w="0">
+            <a:noFill/>
+          </a:ln>
+        </p:spPr>
+        <p:style>
+          <a:lnRef idx="0"/>
+          <a:fillRef idx="0"/>
+          <a:effectRef idx="0"/>
+          <a:fontRef idx="minor"/>
+        </p:style>
+        <p:txBody>
+          <a:bodyPr wrap="none" lIns="90000" rIns="90000" tIns="45000" bIns="45000" anchor="t">
+            <a:spAutoFit/>
+          </a:bodyPr>
+          <a:p>
+            <a:pPr>
+              <a:lnSpc>
+                <a:spcPct val="100000"/>
+              </a:lnSpc>
+            </a:pPr>
+            <a:r>
+              <a:rPr b="0" lang="en-US" sz="1800" spc="-1" strike="noStrike">
+                <a:solidFill>
+                  <a:srgbClr val="000000"/>
+                </a:solidFill>
+                <a:latin typeface="Calibri"/>
+                <a:ea typeface="DejaVu Sans"/>
+              </a:rPr>
+              <a:t>Java • Ultra Premium Template</a:t>
+            </a:r>
+            <a:endParaRPr b="0" lang="en-US" sz="1800" spc="-1" strike="noStrike">
+              <a:solidFill>
+                <a:srgbClr val="000000"/>
+              </a:solidFill>
+              <a:latin typeface="Arial"/>
+            </a:endParaRPr>
+          </a:p>
+        </p:txBody>
+      </p:sp>
+    </p:spTree>
+  </p:cSld>
+  <mc:AlternateContent>
+    <mc:Choice Requires="p14">
+      <p:transition spd="slow" p14:dur="2000"/>
+    </mc:Choice>
+    <mc:Fallback>
+      <p:transition spd="slow"/>
+    </mc:Fallback>
+  </mc:AlternateContent>
+</p:sld>
+</file>
+
+<file path=ppt/slides/slide2.xml><?xml version="1.0" encoding="utf-8"?>
+<p:sld xmlns:a="http://schemas.openxmlformats.org/drawingml/2006/main" xmlns:p="http://schemas.openxmlformats.org/presentationml/2006/main" xmlns:r="http://schemas.openxmlformats.org/officeDocument/2006/relationships" xmlns:p14="http://schemas.microsoft.com/office/powerpoint/2010/main" xmlns:p15="http://schemas.microsoft.com/office/powerpoint/2012/main" xmlns:mc="http://schemas.openxmlformats.org/markup-compatibility/2006">
+  <p:cSld>
+    <p:spTree>
+      <p:nvGrpSpPr>
+        <p:cNvPr id="1" name=""/>
+        <p:cNvGrpSpPr/>
+        <p:nvPr/>
+      </p:nvGrpSpPr>
+      <p:grpSpPr>
+        <a:xfrm>
+          <a:off x="0" y="0"/>
+          <a:ext cx="0" cy="0"/>
+          <a:chOff x="0" y="0"/>
+          <a:chExt cx="0" cy="0"/>
+        </a:xfrm>
+      </p:grpSpPr>
+      <p:sp>
+        <p:nvSpPr>
+          <p:cNvPr id="67" name="Rectangle 32"/>
+          <p:cNvSpPr/>
+          <p:nvPr/>
+        </p:nvSpPr>
+        <p:spPr>
+          <a:xfrm>
+            <a:off x="0" y="0"/>
+            <a:ext cx="12187800" cy="6856920"/>
+          </a:xfrm>
+          <a:prstGeom prst="rect">
+            <a:avLst/>
+          </a:prstGeom>
+          <a:solidFill>
+            <a:srgbClr val="0b0b0d"/>
+          </a:solidFill>
+          <a:ln>
+            <a:noFill/>
+          </a:ln>
+          <a:effectLst>
+            <a:outerShdw blurRad="39960" dir="5400000" dist="23040" rotWithShape="0">
+              <a:srgbClr val="000000">
+                <a:alpha val="35000"/>
+              </a:srgbClr>
+            </a:outerShdw>
+          </a:effectLst>
+        </p:spPr>
+        <p:style>
+          <a:lnRef idx="1">
+            <a:schemeClr val="accent1"/>
+          </a:lnRef>
+          <a:fillRef idx="3">
+            <a:schemeClr val="accent1"/>
+          </a:fillRef>
+          <a:effectRef idx="2">
+            <a:schemeClr val="accent1"/>
+          </a:effectRef>
+          <a:fontRef idx="minor"/>
+        </p:style>
+        <p:txBody>
+          <a:bodyPr lIns="90000" rIns="90000" tIns="45000" bIns="45000" anchor="ctr">
+            <a:noAutofit/>
+          </a:bodyPr>
+          <a:p>
+            <a:endParaRPr b="0" lang="en-US" sz="1800" spc="-1" strike="noStrike">
+              <a:solidFill>
+                <a:schemeClr val="lt1"/>
+              </a:solidFill>
+              <a:latin typeface="Calibri"/>
+              <a:ea typeface="DejaVu Sans"/>
+            </a:endParaRPr>
+          </a:p>
+        </p:txBody>
+      </p:sp>
+      <p:sp>
+        <p:nvSpPr>
+          <p:cNvPr id="68" name="Rectangle 17"/>
+          <p:cNvSpPr/>
+          <p:nvPr/>
+        </p:nvSpPr>
+        <p:spPr>
+          <a:xfrm>
+            <a:off x="0" y="0"/>
+            <a:ext cx="17280" cy="6856920"/>
+          </a:xfrm>
+          <a:prstGeom prst="rect">
+            <a:avLst/>
+          </a:prstGeom>
+          <a:solidFill>
+            <a:srgbClr val="121216"/>
+          </a:solidFill>
+          <a:ln>
+            <a:noFill/>
+          </a:ln>
+          <a:effectLst>
+            <a:outerShdw blurRad="39960" dir="5400000" dist="23040" rotWithShape="0">
+              <a:srgbClr val="000000">
+                <a:alpha val="35000"/>
+              </a:srgbClr>
+            </a:outerShdw>
+          </a:effectLst>
+        </p:spPr>
+        <p:style>
+          <a:lnRef idx="1">
+            <a:schemeClr val="accent1"/>
+          </a:lnRef>
+          <a:fillRef idx="3">
+            <a:schemeClr val="accent1"/>
+          </a:fillRef>
+          <a:effectRef idx="2">
+            <a:schemeClr val="accent1"/>
+          </a:effectRef>
+          <a:fontRef idx="minor"/>
+        </p:style>
+        <p:txBody>
+          <a:bodyPr lIns="90000" rIns="90000" tIns="45000" bIns="45000" anchor="ctr">
+            <a:noAutofit/>
+          </a:bodyPr>
+          <a:p>
+            <a:endParaRPr b="0" lang="en-US" sz="1800" spc="-1" strike="noStrike">
+              <a:solidFill>
+                <a:schemeClr val="lt1"/>
+              </a:solidFill>
+              <a:latin typeface="Calibri"/>
+              <a:ea typeface="DejaVu Sans"/>
+            </a:endParaRPr>
+          </a:p>
+        </p:txBody>
+      </p:sp>
+      <p:sp>
+        <p:nvSpPr>
+          <p:cNvPr id="69" name="Rectangle 18"/>
+          <p:cNvSpPr/>
+          <p:nvPr/>
+        </p:nvSpPr>
+        <p:spPr>
+          <a:xfrm>
+            <a:off x="914400" y="0"/>
+            <a:ext cx="17280" cy="6856920"/>
+          </a:xfrm>
+          <a:prstGeom prst="rect">
+            <a:avLst/>
+          </a:prstGeom>
+          <a:solidFill>
+            <a:srgbClr val="121216"/>
+          </a:solidFill>
+          <a:ln>
+            <a:noFill/>
+          </a:ln>
+          <a:effectLst>
+            <a:outerShdw blurRad="39960" dir="5400000" dist="23040" rotWithShape="0">
+              <a:srgbClr val="000000">
+                <a:alpha val="35000"/>
+              </a:srgbClr>
+            </a:outerShdw>
+          </a:effectLst>
+        </p:spPr>
+        <p:style>
+          <a:lnRef idx="1">
+            <a:schemeClr val="accent1"/>
+          </a:lnRef>
+          <a:fillRef idx="3">
+            <a:schemeClr val="accent1"/>
+          </a:fillRef>
+          <a:effectRef idx="2">
+            <a:schemeClr val="accent1"/>
+          </a:effectRef>
+          <a:fontRef idx="minor"/>
+        </p:style>
+        <p:txBody>
+          <a:bodyPr lIns="90000" rIns="90000" tIns="45000" bIns="45000" anchor="ctr">
+            <a:noAutofit/>
+          </a:bodyPr>
+          <a:p>
+            <a:endParaRPr b="0" lang="en-US" sz="1800" spc="-1" strike="noStrike">
+              <a:solidFill>
+                <a:schemeClr val="lt1"/>
+              </a:solidFill>
+              <a:latin typeface="Calibri"/>
+              <a:ea typeface="DejaVu Sans"/>
+            </a:endParaRPr>
+          </a:p>
+        </p:txBody>
+      </p:sp>
+      <p:sp>
+        <p:nvSpPr>
+          <p:cNvPr id="70" name="Rectangle 19"/>
+          <p:cNvSpPr/>
+          <p:nvPr/>
+        </p:nvSpPr>
+        <p:spPr>
+          <a:xfrm>
+            <a:off x="1828800" y="0"/>
+            <a:ext cx="17280" cy="6856920"/>
+          </a:xfrm>
+          <a:prstGeom prst="rect">
+            <a:avLst/>
+          </a:prstGeom>
+          <a:solidFill>
+            <a:srgbClr val="121216"/>
+          </a:solidFill>
+          <a:ln>
+            <a:noFill/>
+          </a:ln>
+          <a:effectLst>
+            <a:outerShdw blurRad="39960" dir="5400000" dist="23040" rotWithShape="0">
+              <a:srgbClr val="000000">
+                <a:alpha val="35000"/>
+              </a:srgbClr>
+            </a:outerShdw>
+          </a:effectLst>
+        </p:spPr>
+        <p:style>
+          <a:lnRef idx="1">
+            <a:schemeClr val="accent1"/>
+          </a:lnRef>
+          <a:fillRef idx="3">
+            <a:schemeClr val="accent1"/>
+          </a:fillRef>
+          <a:effectRef idx="2">
+            <a:schemeClr val="accent1"/>
+          </a:effectRef>
+          <a:fontRef idx="minor"/>
+        </p:style>
+        <p:txBody>
+          <a:bodyPr lIns="90000" rIns="90000" tIns="45000" bIns="45000" anchor="ctr">
+            <a:noAutofit/>
+          </a:bodyPr>
+          <a:p>
+            <a:endParaRPr b="0" lang="en-US" sz="1800" spc="-1" strike="noStrike">
+              <a:solidFill>
+                <a:schemeClr val="lt1"/>
+              </a:solidFill>
+              <a:latin typeface="Calibri"/>
+              <a:ea typeface="DejaVu Sans"/>
+            </a:endParaRPr>
+          </a:p>
+        </p:txBody>
+      </p:sp>
+      <p:sp>
+        <p:nvSpPr>
+          <p:cNvPr id="71" name="Rectangle 20"/>
+          <p:cNvSpPr/>
+          <p:nvPr/>
+        </p:nvSpPr>
+        <p:spPr>
+          <a:xfrm>
+            <a:off x="2743200" y="0"/>
+            <a:ext cx="17280" cy="6856920"/>
+          </a:xfrm>
+          <a:prstGeom prst="rect">
+            <a:avLst/>
+          </a:prstGeom>
+          <a:solidFill>
+            <a:srgbClr val="121216"/>
+          </a:solidFill>
+          <a:ln>
+            <a:noFill/>
+          </a:ln>
+          <a:effectLst>
+            <a:outerShdw blurRad="39960" dir="5400000" dist="23040" rotWithShape="0">
+              <a:srgbClr val="000000">
+                <a:alpha val="35000"/>
+              </a:srgbClr>
+            </a:outerShdw>
+          </a:effectLst>
+        </p:spPr>
+        <p:style>
+          <a:lnRef idx="1">
+            <a:schemeClr val="accent1"/>
+          </a:lnRef>
+          <a:fillRef idx="3">
+            <a:schemeClr val="accent1"/>
+          </a:fillRef>
+          <a:effectRef idx="2">
+            <a:schemeClr val="accent1"/>
+          </a:effectRef>
+          <a:fontRef idx="minor"/>
+        </p:style>
+        <p:txBody>
+          <a:bodyPr lIns="90000" rIns="90000" tIns="45000" bIns="45000" anchor="ctr">
+            <a:noAutofit/>
+          </a:bodyPr>
+          <a:p>
+            <a:endParaRPr b="0" lang="en-US" sz="1800" spc="-1" strike="noStrike">
+              <a:solidFill>
+                <a:schemeClr val="lt1"/>
+              </a:solidFill>
+              <a:latin typeface="Calibri"/>
+              <a:ea typeface="DejaVu Sans"/>
+            </a:endParaRPr>
+          </a:p>
+        </p:txBody>
+      </p:sp>
+      <p:sp>
+        <p:nvSpPr>
+          <p:cNvPr id="72" name="Rectangle 21"/>
+          <p:cNvSpPr/>
+          <p:nvPr/>
+        </p:nvSpPr>
+        <p:spPr>
+          <a:xfrm>
+            <a:off x="3657600" y="0"/>
+            <a:ext cx="17280" cy="6856920"/>
+          </a:xfrm>
+          <a:prstGeom prst="rect">
+            <a:avLst/>
+          </a:prstGeom>
+          <a:solidFill>
+            <a:srgbClr val="121216"/>
+          </a:solidFill>
+          <a:ln>
+            <a:noFill/>
+          </a:ln>
+          <a:effectLst>
+            <a:outerShdw blurRad="39960" dir="5400000" dist="23040" rotWithShape="0">
+              <a:srgbClr val="000000">
+                <a:alpha val="35000"/>
+              </a:srgbClr>
+            </a:outerShdw>
+          </a:effectLst>
+        </p:spPr>
+        <p:style>
+          <a:lnRef idx="1">
+            <a:schemeClr val="accent1"/>
+          </a:lnRef>
+          <a:fillRef idx="3">
+            <a:schemeClr val="accent1"/>
+          </a:fillRef>
+          <a:effectRef idx="2">
+            <a:schemeClr val="accent1"/>
+          </a:effectRef>
+          <a:fontRef idx="minor"/>
+        </p:style>
+        <p:txBody>
+          <a:bodyPr lIns="90000" rIns="90000" tIns="45000" bIns="45000" anchor="ctr">
+            <a:noAutofit/>
+          </a:bodyPr>
+          <a:p>
+            <a:endParaRPr b="0" lang="en-US" sz="1800" spc="-1" strike="noStrike">
+              <a:solidFill>
+                <a:schemeClr val="lt1"/>
+              </a:solidFill>
+              <a:latin typeface="Calibri"/>
+              <a:ea typeface="DejaVu Sans"/>
+            </a:endParaRPr>
+          </a:p>
+        </p:txBody>
+      </p:sp>
+      <p:sp>
+        <p:nvSpPr>
+          <p:cNvPr id="73" name="Rectangle 22"/>
+          <p:cNvSpPr/>
+          <p:nvPr/>
+        </p:nvSpPr>
+        <p:spPr>
+          <a:xfrm>
+            <a:off x="4572000" y="0"/>
+            <a:ext cx="17280" cy="6856920"/>
+          </a:xfrm>
+          <a:prstGeom prst="rect">
+            <a:avLst/>
+          </a:prstGeom>
+          <a:solidFill>
+            <a:srgbClr val="121216"/>
+          </a:solidFill>
+          <a:ln>
+            <a:noFill/>
+          </a:ln>
+          <a:effectLst>
+            <a:outerShdw blurRad="39960" dir="5400000" dist="23040" rotWithShape="0">
+              <a:srgbClr val="000000">
+                <a:alpha val="35000"/>
+              </a:srgbClr>
+            </a:outerShdw>
+          </a:effectLst>
+        </p:spPr>
+        <p:style>
+          <a:lnRef idx="1">
+            <a:schemeClr val="accent1"/>
+          </a:lnRef>
+          <a:fillRef idx="3">
+            <a:schemeClr val="accent1"/>
+          </a:fillRef>
+          <a:effectRef idx="2">
+            <a:schemeClr val="accent1"/>
+          </a:effectRef>
+          <a:fontRef idx="minor"/>
+        </p:style>
+        <p:txBody>
+          <a:bodyPr lIns="90000" rIns="90000" tIns="45000" bIns="45000" anchor="ctr">
+            <a:noAutofit/>
+          </a:bodyPr>
+          <a:p>
+            <a:endParaRPr b="0" lang="en-US" sz="1800" spc="-1" strike="noStrike">
+              <a:solidFill>
+                <a:schemeClr val="lt1"/>
+              </a:solidFill>
+              <a:latin typeface="Calibri"/>
+              <a:ea typeface="DejaVu Sans"/>
+            </a:endParaRPr>
+          </a:p>
+        </p:txBody>
+      </p:sp>
+      <p:sp>
+        <p:nvSpPr>
+          <p:cNvPr id="74" name="Rectangle 23"/>
+          <p:cNvSpPr/>
+          <p:nvPr/>
+        </p:nvSpPr>
+        <p:spPr>
+          <a:xfrm>
+            <a:off x="5486400" y="0"/>
+            <a:ext cx="17280" cy="6856920"/>
+          </a:xfrm>
+          <a:prstGeom prst="rect">
+            <a:avLst/>
+          </a:prstGeom>
+          <a:solidFill>
+            <a:srgbClr val="121216"/>
+          </a:solidFill>
+          <a:ln>
+            <a:noFill/>
+          </a:ln>
+          <a:effectLst>
+            <a:outerShdw blurRad="39960" dir="5400000" dist="23040" rotWithShape="0">
+              <a:srgbClr val="000000">
+                <a:alpha val="35000"/>
+              </a:srgbClr>
+            </a:outerShdw>
+          </a:effectLst>
+        </p:spPr>
+        <p:style>
+          <a:lnRef idx="1">
+            <a:schemeClr val="accent1"/>
+          </a:lnRef>
+          <a:fillRef idx="3">
+            <a:schemeClr val="accent1"/>
+          </a:fillRef>
+          <a:effectRef idx="2">
+            <a:schemeClr val="accent1"/>
+          </a:effectRef>
+          <a:fontRef idx="minor"/>
+        </p:style>
+        <p:txBody>
+          <a:bodyPr lIns="90000" rIns="90000" tIns="45000" bIns="45000" anchor="ctr">
+            <a:noAutofit/>
+          </a:bodyPr>
+          <a:p>
+            <a:endParaRPr b="0" lang="en-US" sz="1800" spc="-1" strike="noStrike">
+              <a:solidFill>
+                <a:schemeClr val="lt1"/>
+              </a:solidFill>
+              <a:latin typeface="Calibri"/>
+              <a:ea typeface="DejaVu Sans"/>
+            </a:endParaRPr>
+          </a:p>
+        </p:txBody>
+      </p:sp>
+      <p:sp>
+        <p:nvSpPr>
+          <p:cNvPr id="75" name="Rectangle 24"/>
+          <p:cNvSpPr/>
+          <p:nvPr/>
+        </p:nvSpPr>
+        <p:spPr>
+          <a:xfrm>
+            <a:off x="6400800" y="0"/>
+            <a:ext cx="17280" cy="6856920"/>
+          </a:xfrm>
+          <a:prstGeom prst="rect">
+            <a:avLst/>
+          </a:prstGeom>
+          <a:solidFill>
+            <a:srgbClr val="121216"/>
+          </a:solidFill>
+          <a:ln>
+            <a:noFill/>
+          </a:ln>
+          <a:effectLst>
+            <a:outerShdw blurRad="39960" dir="5400000" dist="23040" rotWithShape="0">
+              <a:srgbClr val="000000">
+                <a:alpha val="35000"/>
+              </a:srgbClr>
+            </a:outerShdw>
+          </a:effectLst>
+        </p:spPr>
+        <p:style>
+          <a:lnRef idx="1">
+            <a:schemeClr val="accent1"/>
+          </a:lnRef>
+          <a:fillRef idx="3">
+            <a:schemeClr val="accent1"/>
+          </a:fillRef>
+          <a:effectRef idx="2">
+            <a:schemeClr val="accent1"/>
+          </a:effectRef>
+          <a:fontRef idx="minor"/>
+        </p:style>
+        <p:txBody>
+          <a:bodyPr lIns="90000" rIns="90000" tIns="45000" bIns="45000" anchor="ctr">
+            <a:noAutofit/>
+          </a:bodyPr>
+          <a:p>
+            <a:endParaRPr b="0" lang="en-US" sz="1800" spc="-1" strike="noStrike">
+              <a:solidFill>
+                <a:schemeClr val="lt1"/>
+              </a:solidFill>
+              <a:latin typeface="Calibri"/>
+              <a:ea typeface="DejaVu Sans"/>
+            </a:endParaRPr>
+          </a:p>
+        </p:txBody>
+      </p:sp>
+      <p:sp>
+        <p:nvSpPr>
+          <p:cNvPr id="76" name="Rectangle 25"/>
+          <p:cNvSpPr/>
+          <p:nvPr/>
+        </p:nvSpPr>
+        <p:spPr>
+          <a:xfrm>
+            <a:off x="7315200" y="0"/>
+            <a:ext cx="17280" cy="6856920"/>
+          </a:xfrm>
+          <a:prstGeom prst="rect">
+            <a:avLst/>
+          </a:prstGeom>
+          <a:solidFill>
+            <a:srgbClr val="121216"/>
+          </a:solidFill>
+          <a:ln>
+            <a:noFill/>
+          </a:ln>
+          <a:effectLst>
+            <a:outerShdw blurRad="39960" dir="5400000" dist="23040" rotWithShape="0">
+              <a:srgbClr val="000000">
+                <a:alpha val="35000"/>
+              </a:srgbClr>
+            </a:outerShdw>
+          </a:effectLst>
+        </p:spPr>
+        <p:style>
+          <a:lnRef idx="1">
+            <a:schemeClr val="accent1"/>
+          </a:lnRef>
+          <a:fillRef idx="3">
+            <a:schemeClr val="accent1"/>
+          </a:fillRef>
+          <a:effectRef idx="2">
+            <a:schemeClr val="accent1"/>
+          </a:effectRef>
+          <a:fontRef idx="minor"/>
+        </p:style>
+        <p:txBody>
+          <a:bodyPr lIns="90000" rIns="90000" tIns="45000" bIns="45000" anchor="ctr">
+            <a:noAutofit/>
+          </a:bodyPr>
+          <a:p>
+            <a:endParaRPr b="0" lang="en-US" sz="1800" spc="-1" strike="noStrike">
+              <a:solidFill>
+                <a:schemeClr val="lt1"/>
+              </a:solidFill>
+              <a:latin typeface="Calibri"/>
+              <a:ea typeface="DejaVu Sans"/>
+            </a:endParaRPr>
+          </a:p>
+        </p:txBody>
+      </p:sp>
+      <p:sp>
+        <p:nvSpPr>
+          <p:cNvPr id="77" name="Rectangle 26"/>
+          <p:cNvSpPr/>
+          <p:nvPr/>
+        </p:nvSpPr>
+        <p:spPr>
+          <a:xfrm>
+            <a:off x="8229600" y="0"/>
+            <a:ext cx="17280" cy="6856920"/>
+          </a:xfrm>
+          <a:prstGeom prst="rect">
+            <a:avLst/>
+          </a:prstGeom>
+          <a:solidFill>
+            <a:srgbClr val="121216"/>
+          </a:solidFill>
+          <a:ln>
+            <a:noFill/>
+          </a:ln>
+          <a:effectLst>
+            <a:outerShdw blurRad="39960" dir="5400000" dist="23040" rotWithShape="0">
+              <a:srgbClr val="000000">
+                <a:alpha val="35000"/>
+              </a:srgbClr>
+            </a:outerShdw>
+          </a:effectLst>
+        </p:spPr>
+        <p:style>
+          <a:lnRef idx="1">
+            <a:schemeClr val="accent1"/>
+          </a:lnRef>
+          <a:fillRef idx="3">
+            <a:schemeClr val="accent1"/>
+          </a:fillRef>
+          <a:effectRef idx="2">
+            <a:schemeClr val="accent1"/>
+          </a:effectRef>
+          <a:fontRef idx="minor"/>
+        </p:style>
+        <p:txBody>
+          <a:bodyPr lIns="90000" rIns="90000" tIns="45000" bIns="45000" anchor="ctr">
+            <a:noAutofit/>
+          </a:bodyPr>
+          <a:p>
+            <a:endParaRPr b="0" lang="en-US" sz="1800" spc="-1" strike="noStrike">
+              <a:solidFill>
+                <a:schemeClr val="lt1"/>
+              </a:solidFill>
+              <a:latin typeface="Calibri"/>
+              <a:ea typeface="DejaVu Sans"/>
+            </a:endParaRPr>
+          </a:p>
+        </p:txBody>
+      </p:sp>
+      <p:sp>
+        <p:nvSpPr>
+          <p:cNvPr id="78" name="Rectangle 27"/>
+          <p:cNvSpPr/>
+          <p:nvPr/>
+        </p:nvSpPr>
+        <p:spPr>
+          <a:xfrm>
+            <a:off x="9144000" y="0"/>
+            <a:ext cx="17280" cy="6856920"/>
+          </a:xfrm>
+          <a:prstGeom prst="rect">
+            <a:avLst/>
+          </a:prstGeom>
+          <a:solidFill>
+            <a:srgbClr val="121216"/>
+          </a:solidFill>
+          <a:ln>
+            <a:noFill/>
+          </a:ln>
+          <a:effectLst>
+            <a:outerShdw blurRad="39960" dir="5400000" dist="23040" rotWithShape="0">
+              <a:srgbClr val="000000">
+                <a:alpha val="35000"/>
+              </a:srgbClr>
+            </a:outerShdw>
+          </a:effectLst>
+        </p:spPr>
+        <p:style>
+          <a:lnRef idx="1">
+            <a:schemeClr val="accent1"/>
+          </a:lnRef>
+          <a:fillRef idx="3">
+            <a:schemeClr val="accent1"/>
+          </a:fillRef>
+          <a:effectRef idx="2">
+            <a:schemeClr val="accent1"/>
+          </a:effectRef>
+          <a:fontRef idx="minor"/>
+        </p:style>
+        <p:txBody>
+          <a:bodyPr lIns="90000" rIns="90000" tIns="45000" bIns="45000" anchor="ctr">
+            <a:noAutofit/>
+          </a:bodyPr>
+          <a:p>
+            <a:endParaRPr b="0" lang="en-US" sz="1800" spc="-1" strike="noStrike">
+              <a:solidFill>
+                <a:schemeClr val="lt1"/>
+              </a:solidFill>
+              <a:latin typeface="Calibri"/>
+              <a:ea typeface="DejaVu Sans"/>
+            </a:endParaRPr>
+          </a:p>
+        </p:txBody>
+      </p:sp>
+      <p:sp>
+        <p:nvSpPr>
+          <p:cNvPr id="79" name="Rectangle 28"/>
+          <p:cNvSpPr/>
+          <p:nvPr/>
+        </p:nvSpPr>
+        <p:spPr>
+          <a:xfrm>
+            <a:off x="10058400" y="0"/>
+            <a:ext cx="17280" cy="6856920"/>
+          </a:xfrm>
+          <a:prstGeom prst="rect">
+            <a:avLst/>
+          </a:prstGeom>
+          <a:solidFill>
+            <a:srgbClr val="121216"/>
+          </a:solidFill>
+          <a:ln>
+            <a:noFill/>
+          </a:ln>
+          <a:effectLst>
+            <a:outerShdw blurRad="39960" dir="5400000" dist="23040" rotWithShape="0">
+              <a:srgbClr val="000000">
+                <a:alpha val="35000"/>
+              </a:srgbClr>
+            </a:outerShdw>
+          </a:effectLst>
+        </p:spPr>
+        <p:style>
+          <a:lnRef idx="1">
+            <a:schemeClr val="accent1"/>
+          </a:lnRef>
+          <a:fillRef idx="3">
+            <a:schemeClr val="accent1"/>
+          </a:fillRef>
+          <a:effectRef idx="2">
+            <a:schemeClr val="accent1"/>
+          </a:effectRef>
+          <a:fontRef idx="minor"/>
+        </p:style>
+        <p:txBody>
+          <a:bodyPr lIns="90000" rIns="90000" tIns="45000" bIns="45000" anchor="ctr">
+            <a:noAutofit/>
+          </a:bodyPr>
+          <a:p>
+            <a:endParaRPr b="0" lang="en-US" sz="1800" spc="-1" strike="noStrike">
+              <a:solidFill>
+                <a:schemeClr val="lt1"/>
+              </a:solidFill>
+              <a:latin typeface="Calibri"/>
+              <a:ea typeface="DejaVu Sans"/>
+            </a:endParaRPr>
+          </a:p>
+        </p:txBody>
+      </p:sp>
+      <p:sp>
+        <p:nvSpPr>
+          <p:cNvPr id="80" name="Rectangle 29"/>
+          <p:cNvSpPr/>
+          <p:nvPr/>
+        </p:nvSpPr>
+        <p:spPr>
+          <a:xfrm>
+            <a:off x="10972800" y="0"/>
+            <a:ext cx="17280" cy="6856920"/>
+          </a:xfrm>
+          <a:prstGeom prst="rect">
+            <a:avLst/>
+          </a:prstGeom>
+          <a:solidFill>
+            <a:srgbClr val="121216"/>
+          </a:solidFill>
+          <a:ln>
+            <a:noFill/>
+          </a:ln>
+          <a:effectLst>
+            <a:outerShdw blurRad="39960" dir="5400000" dist="23040" rotWithShape="0">
+              <a:srgbClr val="000000">
+                <a:alpha val="35000"/>
+              </a:srgbClr>
+            </a:outerShdw>
+          </a:effectLst>
+        </p:spPr>
+        <p:style>
+          <a:lnRef idx="1">
+            <a:schemeClr val="accent1"/>
+          </a:lnRef>
+          <a:fillRef idx="3">
+            <a:schemeClr val="accent1"/>
+          </a:fillRef>
+          <a:effectRef idx="2">
+            <a:schemeClr val="accent1"/>
+          </a:effectRef>
+          <a:fontRef idx="minor"/>
+        </p:style>
+        <p:txBody>
+          <a:bodyPr lIns="90000" rIns="90000" tIns="45000" bIns="45000" anchor="ctr">
+            <a:noAutofit/>
+          </a:bodyPr>
+          <a:p>
+            <a:endParaRPr b="0" lang="en-US" sz="1800" spc="-1" strike="noStrike">
+              <a:solidFill>
+                <a:schemeClr val="lt1"/>
+              </a:solidFill>
+              <a:latin typeface="Calibri"/>
+              <a:ea typeface="DejaVu Sans"/>
+            </a:endParaRPr>
+          </a:p>
+        </p:txBody>
+      </p:sp>
+      <p:sp>
+        <p:nvSpPr>
+          <p:cNvPr id="81" name="Rectangle 30"/>
+          <p:cNvSpPr/>
+          <p:nvPr/>
+        </p:nvSpPr>
+        <p:spPr>
+          <a:xfrm>
+            <a:off x="11887200" y="0"/>
+            <a:ext cx="17280" cy="6856920"/>
+          </a:xfrm>
+          <a:prstGeom prst="rect">
+            <a:avLst/>
+          </a:prstGeom>
+          <a:solidFill>
+            <a:srgbClr val="121216"/>
+          </a:solidFill>
+          <a:ln>
+            <a:noFill/>
+          </a:ln>
+          <a:effectLst>
+            <a:outerShdw blurRad="39960" dir="5400000" dist="23040" rotWithShape="0">
+              <a:srgbClr val="000000">
+                <a:alpha val="35000"/>
+              </a:srgbClr>
+            </a:outerShdw>
+          </a:effectLst>
+        </p:spPr>
+        <p:style>
+          <a:lnRef idx="1">
+            <a:schemeClr val="accent1"/>
+          </a:lnRef>
+          <a:fillRef idx="3">
+            <a:schemeClr val="accent1"/>
+          </a:fillRef>
+          <a:effectRef idx="2">
+            <a:schemeClr val="accent1"/>
+          </a:effectRef>
+          <a:fontRef idx="minor"/>
+        </p:style>
+        <p:txBody>
+          <a:bodyPr lIns="90000" rIns="90000" tIns="45000" bIns="45000" anchor="ctr">
+            <a:noAutofit/>
+          </a:bodyPr>
+          <a:p>
+            <a:endParaRPr b="0" lang="en-US" sz="1800" spc="-1" strike="noStrike">
+              <a:solidFill>
+                <a:schemeClr val="lt1"/>
+              </a:solidFill>
+              <a:latin typeface="Calibri"/>
+              <a:ea typeface="DejaVu Sans"/>
+            </a:endParaRPr>
+          </a:p>
+        </p:txBody>
+      </p:sp>
+      <p:sp>
+        <p:nvSpPr>
+          <p:cNvPr id="82" name="Rectangle 31"/>
+          <p:cNvSpPr/>
+          <p:nvPr/>
+        </p:nvSpPr>
+        <p:spPr>
+          <a:xfrm>
+            <a:off x="0" y="0"/>
+            <a:ext cx="318960" cy="6856920"/>
+          </a:xfrm>
+          <a:prstGeom prst="rect">
+            <a:avLst/>
+          </a:prstGeom>
+          <a:solidFill>
+            <a:srgbClr val="ff8c00"/>
+          </a:solidFill>
+          <a:ln>
+            <a:noFill/>
+          </a:ln>
+          <a:effectLst>
+            <a:outerShdw blurRad="39960" dir="5400000" dist="23040" rotWithShape="0">
+              <a:srgbClr val="000000">
+                <a:alpha val="35000"/>
+              </a:srgbClr>
+            </a:outerShdw>
+          </a:effectLst>
+        </p:spPr>
+        <p:style>
+          <a:lnRef idx="1">
+            <a:schemeClr val="accent1"/>
+          </a:lnRef>
+          <a:fillRef idx="3">
+            <a:schemeClr val="accent1"/>
+          </a:fillRef>
+          <a:effectRef idx="2">
+            <a:schemeClr val="accent1"/>
+          </a:effectRef>
+          <a:fontRef idx="minor"/>
+        </p:style>
+        <p:txBody>
+          <a:bodyPr lIns="90000" rIns="90000" tIns="45000" bIns="45000" anchor="ctr">
+            <a:noAutofit/>
+          </a:bodyPr>
+          <a:p>
+            <a:endParaRPr b="0" lang="en-US" sz="1800" spc="-1" strike="noStrike">
+              <a:solidFill>
+                <a:schemeClr val="lt1"/>
+              </a:solidFill>
+              <a:latin typeface="Calibri"/>
+              <a:ea typeface="DejaVu Sans"/>
+            </a:endParaRPr>
+          </a:p>
+        </p:txBody>
+      </p:sp>
+      <p:sp>
+        <p:nvSpPr>
+          <p:cNvPr id="83" name="Rounded Rectangle 8"/>
+          <p:cNvSpPr/>
+          <p:nvPr/>
+        </p:nvSpPr>
+        <p:spPr>
+          <a:xfrm>
+            <a:off x="9875520" y="365760"/>
+            <a:ext cx="2010600" cy="501840"/>
+          </a:xfrm>
+          <a:prstGeom prst="roundRect">
+            <a:avLst>
+              <a:gd name="adj" fmla="val 16667"/>
+            </a:avLst>
+          </a:prstGeom>
+          <a:solidFill>
+            <a:srgbClr val="1e1e24"/>
+          </a:solidFill>
+          <a:ln>
+            <a:solidFill>
+              <a:srgbClr val="ff8c00"/>
+            </a:solidFill>
+            <a:round/>
+          </a:ln>
+          <a:effectLst>
+            <a:outerShdw blurRad="39960" dir="5400000" dist="23040" rotWithShape="0">
+              <a:srgbClr val="000000">
+                <a:alpha val="35000"/>
+              </a:srgbClr>
+            </a:outerShdw>
+          </a:effectLst>
+        </p:spPr>
+        <p:style>
+          <a:lnRef idx="1">
+            <a:schemeClr val="accent1"/>
+          </a:lnRef>
+          <a:fillRef idx="3">
+            <a:schemeClr val="accent1"/>
+          </a:fillRef>
+          <a:effectRef idx="2">
+            <a:schemeClr val="accent1"/>
+          </a:effectRef>
+          <a:fontRef idx="minor"/>
+        </p:style>
+        <p:txBody>
+          <a:bodyPr lIns="90000" rIns="90000" tIns="45000" bIns="45000" anchor="ctr">
+            <a:noAutofit/>
+          </a:bodyPr>
+          <a:p>
+            <a:pPr algn="ctr">
+              <a:lnSpc>
+                <a:spcPct val="100000"/>
+              </a:lnSpc>
+            </a:pPr>
+            <a:r>
+              <a:rPr b="1" lang="en-US" sz="1400" spc="-1" strike="noStrike">
+                <a:solidFill>
+                  <a:srgbClr val="ffb45a"/>
+                </a:solidFill>
+                <a:latin typeface="Calibri"/>
+                <a:ea typeface="DejaVu Sans"/>
+              </a:rPr>
+              <a:t>JAVA CORE</a:t>
+            </a:r>
+            <a:endParaRPr b="0" lang="en-US" sz="1400" spc="-1" strike="noStrike">
+              <a:solidFill>
+                <a:srgbClr val="ffffff"/>
+              </a:solidFill>
+              <a:latin typeface="Arial"/>
+            </a:endParaRPr>
+          </a:p>
+        </p:txBody>
+      </p:sp>
+      <p:sp>
+        <p:nvSpPr>
+          <p:cNvPr id="84" name="TextBox 4"/>
+          <p:cNvSpPr/>
+          <p:nvPr/>
+        </p:nvSpPr>
+        <p:spPr>
+          <a:xfrm>
+            <a:off x="2219760" y="914400"/>
+            <a:ext cx="6531480" cy="639000"/>
+          </a:xfrm>
+          <a:prstGeom prst="rect">
+            <a:avLst/>
+          </a:prstGeom>
+          <a:noFill/>
+          <a:ln w="0">
+            <a:noFill/>
+          </a:ln>
+        </p:spPr>
+        <p:style>
+          <a:lnRef idx="0"/>
+          <a:fillRef idx="0"/>
+          <a:effectRef idx="0"/>
+          <a:fontRef idx="minor"/>
+        </p:style>
+        <p:txBody>
+          <a:bodyPr wrap="none" lIns="90000" rIns="90000" tIns="45000" bIns="45000" anchor="t">
+            <a:spAutoFit/>
+          </a:bodyPr>
+          <a:p>
+            <a:pPr>
+              <a:lnSpc>
+                <a:spcPct val="100000"/>
+              </a:lnSpc>
+            </a:pPr>
+            <a:r>
+              <a:rPr b="1" lang="en-US" sz="3600" spc="-1" strike="noStrike">
+                <a:solidFill>
+                  <a:srgbClr val="f5f5f5"/>
+                </a:solidFill>
+                <a:latin typeface="Calibri"/>
+                <a:ea typeface="DejaVu Sans"/>
+              </a:rPr>
+              <a:t>Java Timezone and Regional Time</a:t>
+            </a:r>
+            <a:endParaRPr b="0" lang="en-US" sz="3600" spc="-1" strike="noStrike">
+              <a:solidFill>
+                <a:srgbClr val="000000"/>
+              </a:solidFill>
+              <a:latin typeface="Arial"/>
+            </a:endParaRPr>
+          </a:p>
+        </p:txBody>
+      </p:sp>
+      <p:sp>
+        <p:nvSpPr>
+          <p:cNvPr id="85" name="TextBox 5"/>
+          <p:cNvSpPr/>
+          <p:nvPr/>
+        </p:nvSpPr>
+        <p:spPr>
+          <a:xfrm>
+            <a:off x="612000" y="1828800"/>
+            <a:ext cx="10265400" cy="819720"/>
+          </a:xfrm>
+          <a:prstGeom prst="rect">
+            <a:avLst/>
+          </a:prstGeom>
+          <a:noFill/>
+          <a:ln w="0">
+            <a:noFill/>
+          </a:ln>
+        </p:spPr>
+        <p:style>
+          <a:lnRef idx="0"/>
+          <a:fillRef idx="0"/>
+          <a:effectRef idx="0"/>
+          <a:fontRef idx="minor"/>
+        </p:style>
+        <p:txBody>
+          <a:bodyPr wrap="none" lIns="90000" rIns="90000" tIns="45000" bIns="45000" anchor="t">
+            <a:spAutoFit/>
+          </a:bodyPr>
+          <a:p>
+            <a:pPr>
+              <a:lnSpc>
+                <a:spcPct val="100000"/>
+              </a:lnSpc>
+            </a:pPr>
+            <a:r>
+              <a:rPr b="0" lang="en-US" sz="1600" spc="-1" strike="noStrike">
+                <a:solidFill>
+                  <a:srgbClr val="aaaaaa"/>
+                </a:solidFill>
+                <a:latin typeface="Calibri"/>
+                <a:ea typeface="DejaVu Sans"/>
+              </a:rPr>
+              <a:t>Timezone management in Java is used to accurately handle time across different regions. </a:t>
+            </a:r>
+            <a:endParaRPr b="0" lang="en-US" sz="1600" spc="-1" strike="noStrike">
+              <a:solidFill>
+                <a:srgbClr val="000000"/>
+              </a:solidFill>
+              <a:latin typeface="Arial"/>
+            </a:endParaRPr>
+          </a:p>
+          <a:p>
+            <a:pPr>
+              <a:lnSpc>
+                <a:spcPct val="100000"/>
+              </a:lnSpc>
+            </a:pPr>
+            <a:r>
+              <a:rPr b="0" lang="en-US" sz="1600" spc="-1" strike="noStrike">
+                <a:solidFill>
+                  <a:srgbClr val="aaaaaa"/>
+                </a:solidFill>
+                <a:latin typeface="Calibri"/>
+                <a:ea typeface="DejaVu Sans"/>
+              </a:rPr>
+              <a:t>With ZoneId, a specific region is selected, and with ZonedDateTime, the current date and time of that region are obtained. </a:t>
+            </a:r>
+            <a:endParaRPr b="0" lang="en-US" sz="1600" spc="-1" strike="noStrike">
+              <a:solidFill>
+                <a:srgbClr val="000000"/>
+              </a:solidFill>
+              <a:latin typeface="Arial"/>
+            </a:endParaRPr>
+          </a:p>
+          <a:p>
+            <a:pPr>
+              <a:lnSpc>
+                <a:spcPct val="100000"/>
+              </a:lnSpc>
+            </a:pPr>
+            <a:r>
+              <a:rPr b="0" lang="en-US" sz="1600" spc="-1" strike="noStrike">
+                <a:solidFill>
+                  <a:srgbClr val="aaaaaa"/>
+                </a:solidFill>
+                <a:latin typeface="Calibri"/>
+                <a:ea typeface="DejaVu Sans"/>
+              </a:rPr>
+              <a:t>This structure ensures that global applications display the correct time for every user.</a:t>
+            </a:r>
+            <a:endParaRPr b="0" lang="en-US" sz="1600" spc="-1" strike="noStrike">
+              <a:solidFill>
+                <a:srgbClr val="000000"/>
+              </a:solidFill>
+              <a:latin typeface="Arial"/>
+            </a:endParaRPr>
+          </a:p>
+        </p:txBody>
+      </p:sp>
+      <p:sp>
+        <p:nvSpPr>
+          <p:cNvPr id="86" name="Rounded Rectangle 9"/>
+          <p:cNvSpPr/>
+          <p:nvPr/>
+        </p:nvSpPr>
+        <p:spPr>
+          <a:xfrm>
+            <a:off x="987480" y="3182040"/>
+            <a:ext cx="3290760" cy="2742120"/>
+          </a:xfrm>
+          <a:prstGeom prst="roundRect">
+            <a:avLst>
+              <a:gd name="adj" fmla="val 16667"/>
+            </a:avLst>
+          </a:prstGeom>
+          <a:solidFill>
+            <a:srgbClr val="08080a"/>
+          </a:solidFill>
+          <a:ln>
+            <a:noFill/>
+          </a:ln>
+          <a:effectLst>
+            <a:outerShdw blurRad="39960" dir="5400000" dist="23040" rotWithShape="0">
+              <a:srgbClr val="000000">
+                <a:alpha val="35000"/>
+              </a:srgbClr>
+            </a:outerShdw>
+          </a:effectLst>
+        </p:spPr>
+        <p:style>
+          <a:lnRef idx="1">
+            <a:schemeClr val="accent1"/>
+          </a:lnRef>
+          <a:fillRef idx="3">
+            <a:schemeClr val="accent1"/>
+          </a:fillRef>
+          <a:effectRef idx="2">
+            <a:schemeClr val="accent1"/>
+          </a:effectRef>
+          <a:fontRef idx="minor"/>
+        </p:style>
+        <p:txBody>
+          <a:bodyPr lIns="90000" rIns="90000" tIns="45000" bIns="45000" anchor="ctr">
+            <a:noAutofit/>
+          </a:bodyPr>
+          <a:p>
+            <a:endParaRPr b="0" lang="en-US" sz="1800" spc="-1" strike="noStrike">
+              <a:solidFill>
+                <a:schemeClr val="lt1"/>
+              </a:solidFill>
+              <a:latin typeface="Calibri"/>
+              <a:ea typeface="DejaVu Sans"/>
+            </a:endParaRPr>
+          </a:p>
+        </p:txBody>
+      </p:sp>
+      <p:sp>
+        <p:nvSpPr>
+          <p:cNvPr id="87" name="Rounded Rectangle 10"/>
+          <p:cNvSpPr/>
+          <p:nvPr/>
+        </p:nvSpPr>
+        <p:spPr>
+          <a:xfrm>
+            <a:off x="914400" y="3108960"/>
+            <a:ext cx="3290760" cy="3063240"/>
+          </a:xfrm>
+          <a:prstGeom prst="roundRect">
+            <a:avLst>
+              <a:gd name="adj" fmla="val 16667"/>
+            </a:avLst>
+          </a:prstGeom>
+          <a:solidFill>
+            <a:srgbClr val="16161c"/>
+          </a:solidFill>
+          <a:ln>
+            <a:solidFill>
+              <a:srgbClr val="464655"/>
+            </a:solidFill>
+            <a:round/>
+          </a:ln>
+          <a:effectLst>
+            <a:outerShdw blurRad="39960" dir="5400000" dist="23040" rotWithShape="0">
+              <a:srgbClr val="000000">
+                <a:alpha val="35000"/>
+              </a:srgbClr>
+            </a:outerShdw>
+          </a:effectLst>
+        </p:spPr>
+        <p:style>
+          <a:lnRef idx="1">
+            <a:schemeClr val="accent1"/>
+          </a:lnRef>
+          <a:fillRef idx="3">
+            <a:schemeClr val="accent1"/>
+          </a:fillRef>
+          <a:effectRef idx="2">
+            <a:schemeClr val="accent1"/>
+          </a:effectRef>
+          <a:fontRef idx="minor"/>
+        </p:style>
+        <p:txBody>
+          <a:bodyPr lIns="90000" rIns="90000" tIns="45000" bIns="45000" anchor="ctr">
+            <a:noAutofit/>
+          </a:bodyPr>
+          <a:p>
+            <a:pPr marL="216000" indent="-216000">
+              <a:lnSpc>
+                <a:spcPct val="100000"/>
+              </a:lnSpc>
+              <a:buClr>
+                <a:srgbClr val="ffffff"/>
+              </a:buClr>
+              <a:buFont typeface="Wingdings" charset="2"/>
+              <a:buChar char=""/>
+            </a:pPr>
+            <a:r>
+              <a:rPr b="1" lang="en-US" sz="1800" spc="-1" strike="noStrike">
+                <a:solidFill>
+                  <a:schemeClr val="lt1"/>
+                </a:solidFill>
+                <a:latin typeface="Calibri"/>
+                <a:ea typeface="DejaVu Sans"/>
+              </a:rPr>
+              <a:t>ZoneId → Represents the time zone</a:t>
+            </a:r>
+            <a:endParaRPr b="1" lang="en-US" sz="1800" spc="-1" strike="noStrike">
+              <a:solidFill>
+                <a:srgbClr val="ffffff"/>
+              </a:solidFill>
+              <a:latin typeface="Arial"/>
+            </a:endParaRPr>
+          </a:p>
+          <a:p>
+            <a:pPr marL="216000" indent="-216000">
+              <a:lnSpc>
+                <a:spcPct val="100000"/>
+              </a:lnSpc>
+              <a:buClr>
+                <a:srgbClr val="ffffff"/>
+              </a:buClr>
+              <a:buFont typeface="Wingdings" charset="2"/>
+              <a:buChar char=""/>
+            </a:pPr>
+            <a:r>
+              <a:rPr b="1" lang="en-US" sz="1800" spc="-1" strike="noStrike">
+                <a:solidFill>
+                  <a:schemeClr val="lt1"/>
+                </a:solidFill>
+                <a:latin typeface="Calibri"/>
+                <a:ea typeface="DejaVu Sans"/>
+              </a:rPr>
+              <a:t>ZonedDateTime → Holds date and time along with the time zone</a:t>
+            </a:r>
+            <a:endParaRPr b="1" lang="en-US" sz="1800" spc="-1" strike="noStrike">
+              <a:solidFill>
+                <a:srgbClr val="ffffff"/>
+              </a:solidFill>
+              <a:latin typeface="Arial"/>
+            </a:endParaRPr>
+          </a:p>
+          <a:p>
+            <a:pPr marL="216000" indent="-216000">
+              <a:lnSpc>
+                <a:spcPct val="100000"/>
+              </a:lnSpc>
+              <a:buClr>
+                <a:srgbClr val="ffffff"/>
+              </a:buClr>
+              <a:buFont typeface="Wingdings" charset="2"/>
+              <a:buChar char=""/>
+            </a:pPr>
+            <a:r>
+              <a:rPr b="1" lang="en-US" sz="1800" spc="-1" strike="noStrike">
+                <a:solidFill>
+                  <a:schemeClr val="lt1"/>
+                </a:solidFill>
+                <a:latin typeface="Calibri"/>
+                <a:ea typeface="DejaVu Sans"/>
+              </a:rPr>
+              <a:t>Different UTC offsets are calculated automatically for each region</a:t>
+            </a:r>
+            <a:endParaRPr b="1" lang="en-US" sz="1800" spc="-1" strike="noStrike">
+              <a:solidFill>
+                <a:srgbClr val="ffffff"/>
+              </a:solidFill>
+              <a:latin typeface="Arial"/>
+            </a:endParaRPr>
+          </a:p>
+          <a:p>
+            <a:pPr marL="216000" indent="-216000">
+              <a:lnSpc>
+                <a:spcPct val="100000"/>
+              </a:lnSpc>
+              <a:buClr>
+                <a:srgbClr val="ffffff"/>
+              </a:buClr>
+              <a:buFont typeface="Wingdings" charset="2"/>
+              <a:buChar char=""/>
+            </a:pPr>
+            <a:r>
+              <a:rPr b="1" lang="en-US" sz="1800" spc="-1" strike="noStrike">
+                <a:solidFill>
+                  <a:schemeClr val="lt1"/>
+                </a:solidFill>
+                <a:latin typeface="Calibri"/>
+                <a:ea typeface="DejaVu Sans"/>
+              </a:rPr>
+              <a:t>Daylight saving time changes are handled automatically</a:t>
+            </a:r>
+            <a:endParaRPr b="1" lang="en-US" sz="1800" spc="-1" strike="noStrike">
+              <a:solidFill>
+                <a:srgbClr val="ffffff"/>
+              </a:solidFill>
+              <a:latin typeface="Arial"/>
+            </a:endParaRPr>
+          </a:p>
+        </p:txBody>
+      </p:sp>
+      <p:sp>
+        <p:nvSpPr>
+          <p:cNvPr id="88" name="Rounded Rectangle 11"/>
+          <p:cNvSpPr/>
+          <p:nvPr/>
+        </p:nvSpPr>
+        <p:spPr>
+          <a:xfrm>
+            <a:off x="4507920" y="3182040"/>
+            <a:ext cx="3290760" cy="2742120"/>
+          </a:xfrm>
+          <a:prstGeom prst="roundRect">
+            <a:avLst>
+              <a:gd name="adj" fmla="val 16667"/>
+            </a:avLst>
+          </a:prstGeom>
+          <a:solidFill>
+            <a:srgbClr val="08080a"/>
+          </a:solidFill>
+          <a:ln>
+            <a:noFill/>
+          </a:ln>
+          <a:effectLst>
+            <a:outerShdw blurRad="39960" dir="5400000" dist="23040" rotWithShape="0">
+              <a:srgbClr val="000000">
+                <a:alpha val="35000"/>
+              </a:srgbClr>
+            </a:outerShdw>
+          </a:effectLst>
+        </p:spPr>
+        <p:style>
+          <a:lnRef idx="1">
+            <a:schemeClr val="accent1"/>
+          </a:lnRef>
+          <a:fillRef idx="3">
+            <a:schemeClr val="accent1"/>
+          </a:fillRef>
+          <a:effectRef idx="2">
+            <a:schemeClr val="accent1"/>
+          </a:effectRef>
+          <a:fontRef idx="minor"/>
+        </p:style>
+        <p:txBody>
+          <a:bodyPr lIns="90000" rIns="90000" tIns="45000" bIns="45000" anchor="ctr">
+            <a:noAutofit/>
+          </a:bodyPr>
+          <a:p>
+            <a:endParaRPr b="0" lang="en-US" sz="1800" spc="-1" strike="noStrike">
+              <a:solidFill>
+                <a:schemeClr val="lt1"/>
+              </a:solidFill>
+              <a:latin typeface="Calibri"/>
+              <a:ea typeface="DejaVu Sans"/>
+            </a:endParaRPr>
+          </a:p>
+        </p:txBody>
+      </p:sp>
+      <p:sp>
+        <p:nvSpPr>
+          <p:cNvPr id="89" name="Rounded Rectangle 12"/>
+          <p:cNvSpPr/>
+          <p:nvPr/>
+        </p:nvSpPr>
+        <p:spPr>
+          <a:xfrm>
+            <a:off x="4434840" y="2971800"/>
+            <a:ext cx="3290760" cy="3429000"/>
+          </a:xfrm>
+          <a:prstGeom prst="roundRect">
+            <a:avLst>
+              <a:gd name="adj" fmla="val 16667"/>
+            </a:avLst>
+          </a:prstGeom>
+          <a:solidFill>
+            <a:srgbClr val="16161c"/>
+          </a:solidFill>
+          <a:ln>
+            <a:solidFill>
+              <a:srgbClr val="464655"/>
+            </a:solidFill>
+            <a:round/>
+          </a:ln>
+          <a:effectLst>
+            <a:outerShdw blurRad="39960" dir="5400000" dist="23040" rotWithShape="0">
+              <a:srgbClr val="000000">
+                <a:alpha val="35000"/>
+              </a:srgbClr>
+            </a:outerShdw>
+          </a:effectLst>
+        </p:spPr>
+        <p:style>
+          <a:lnRef idx="1">
+            <a:schemeClr val="accent1"/>
+          </a:lnRef>
+          <a:fillRef idx="3">
+            <a:schemeClr val="accent1"/>
+          </a:fillRef>
+          <a:effectRef idx="2">
+            <a:schemeClr val="accent1"/>
+          </a:effectRef>
+          <a:fontRef idx="minor"/>
+        </p:style>
+        <p:txBody>
+          <a:bodyPr lIns="90000" rIns="90000" tIns="45000" bIns="45000" anchor="ctr">
+            <a:noAutofit/>
+          </a:bodyPr>
+          <a:p>
+            <a:pPr>
+              <a:lnSpc>
+                <a:spcPct val="100000"/>
+              </a:lnSpc>
+            </a:pPr>
+            <a:r>
+              <a:rPr b="0" lang="en-US" sz="1800" spc="-1" strike="noStrike">
+                <a:solidFill>
+                  <a:schemeClr val="lt1"/>
+                </a:solidFill>
+                <a:latin typeface="Calibri"/>
+                <a:ea typeface="DejaVu Sans"/>
+              </a:rPr>
+              <a:t>Program Starts</a:t>
+            </a:r>
+            <a:endParaRPr b="0" lang="en-US" sz="1800" spc="-1" strike="noStrike">
+              <a:solidFill>
+                <a:srgbClr val="ffffff"/>
+              </a:solidFill>
+              <a:latin typeface="Arial"/>
+            </a:endParaRPr>
+          </a:p>
+          <a:p>
+            <a:pPr>
+              <a:lnSpc>
+                <a:spcPct val="100000"/>
+              </a:lnSpc>
+            </a:pPr>
+            <a:r>
+              <a:rPr b="0" lang="en-US" sz="1800" spc="-1" strike="noStrike">
+                <a:solidFill>
+                  <a:schemeClr val="lt1"/>
+                </a:solidFill>
+                <a:latin typeface="Calibri"/>
+                <a:ea typeface="DejaVu Sans"/>
+              </a:rPr>
+              <a:t>↓</a:t>
+            </a:r>
+            <a:endParaRPr b="0" lang="en-US" sz="1800" spc="-1" strike="noStrike">
+              <a:solidFill>
+                <a:srgbClr val="ffffff"/>
+              </a:solidFill>
+              <a:latin typeface="Arial"/>
+            </a:endParaRPr>
+          </a:p>
+          <a:p>
+            <a:pPr>
+              <a:lnSpc>
+                <a:spcPct val="100000"/>
+              </a:lnSpc>
+            </a:pPr>
+            <a:r>
+              <a:rPr b="0" lang="en-US" sz="1800" spc="-1" strike="noStrike">
+                <a:solidFill>
+                  <a:schemeClr val="lt1"/>
+                </a:solidFill>
+                <a:latin typeface="Calibri"/>
+                <a:ea typeface="DejaVu Sans"/>
+              </a:rPr>
+              <a:t>Time Zone is Selected </a:t>
+            </a:r>
+            <a:endParaRPr b="0" lang="en-US" sz="1800" spc="-1" strike="noStrike">
+              <a:solidFill>
+                <a:srgbClr val="ffffff"/>
+              </a:solidFill>
+              <a:latin typeface="Arial"/>
+            </a:endParaRPr>
+          </a:p>
+          <a:p>
+            <a:pPr>
+              <a:lnSpc>
+                <a:spcPct val="100000"/>
+              </a:lnSpc>
+            </a:pPr>
+            <a:r>
+              <a:rPr b="0" lang="en-US" sz="1800" spc="-1" strike="noStrike">
+                <a:solidFill>
+                  <a:schemeClr val="lt1"/>
+                </a:solidFill>
+                <a:latin typeface="Calibri"/>
+                <a:ea typeface="DejaVu Sans"/>
+              </a:rPr>
+              <a:t>↓</a:t>
+            </a:r>
+            <a:endParaRPr b="0" lang="en-US" sz="1800" spc="-1" strike="noStrike">
+              <a:solidFill>
+                <a:srgbClr val="ffffff"/>
+              </a:solidFill>
+              <a:latin typeface="Arial"/>
+            </a:endParaRPr>
+          </a:p>
+          <a:p>
+            <a:pPr>
+              <a:lnSpc>
+                <a:spcPct val="100000"/>
+              </a:lnSpc>
+            </a:pPr>
+            <a:r>
+              <a:rPr b="0" lang="en-US" sz="1800" spc="-1" strike="noStrike">
+                <a:solidFill>
+                  <a:schemeClr val="lt1"/>
+                </a:solidFill>
+                <a:latin typeface="Calibri"/>
+                <a:ea typeface="DejaVu Sans"/>
+              </a:rPr>
+              <a:t>Current Time of the Region is Retrieved</a:t>
+            </a:r>
+            <a:endParaRPr b="0" lang="en-US" sz="1800" spc="-1" strike="noStrike">
+              <a:solidFill>
+                <a:srgbClr val="ffffff"/>
+              </a:solidFill>
+              <a:latin typeface="Arial"/>
+            </a:endParaRPr>
+          </a:p>
+          <a:p>
+            <a:pPr>
+              <a:lnSpc>
+                <a:spcPct val="100000"/>
+              </a:lnSpc>
+            </a:pPr>
+            <a:r>
+              <a:rPr b="0" lang="en-US" sz="1800" spc="-1" strike="noStrike">
+                <a:solidFill>
+                  <a:schemeClr val="lt1"/>
+                </a:solidFill>
+                <a:latin typeface="Calibri"/>
+                <a:ea typeface="DejaVu Sans"/>
+              </a:rPr>
+              <a:t>↓</a:t>
+            </a:r>
+            <a:endParaRPr b="0" lang="en-US" sz="1800" spc="-1" strike="noStrike">
+              <a:solidFill>
+                <a:srgbClr val="ffffff"/>
+              </a:solidFill>
+              <a:latin typeface="Arial"/>
+            </a:endParaRPr>
+          </a:p>
+          <a:p>
+            <a:pPr>
+              <a:lnSpc>
+                <a:spcPct val="100000"/>
+              </a:lnSpc>
+            </a:pPr>
+            <a:r>
+              <a:rPr b="0" lang="en-US" sz="1800" spc="-1" strike="noStrike">
+                <a:solidFill>
+                  <a:schemeClr val="lt1"/>
+                </a:solidFill>
+                <a:latin typeface="Calibri"/>
+                <a:ea typeface="DejaVu Sans"/>
+              </a:rPr>
+              <a:t>Processing / Formatting is Applied</a:t>
+            </a:r>
+            <a:endParaRPr b="0" lang="en-US" sz="1800" spc="-1" strike="noStrike">
+              <a:solidFill>
+                <a:srgbClr val="ffffff"/>
+              </a:solidFill>
+              <a:latin typeface="Arial"/>
+            </a:endParaRPr>
+          </a:p>
+          <a:p>
+            <a:pPr>
+              <a:lnSpc>
+                <a:spcPct val="100000"/>
+              </a:lnSpc>
+            </a:pPr>
+            <a:r>
+              <a:rPr b="0" lang="en-US" sz="1800" spc="-1" strike="noStrike">
+                <a:solidFill>
+                  <a:schemeClr val="lt1"/>
+                </a:solidFill>
+                <a:latin typeface="Calibri"/>
+                <a:ea typeface="DejaVu Sans"/>
+              </a:rPr>
+              <a:t>↓</a:t>
+            </a:r>
+            <a:endParaRPr b="0" lang="en-US" sz="1800" spc="-1" strike="noStrike">
+              <a:solidFill>
+                <a:srgbClr val="ffffff"/>
+              </a:solidFill>
+              <a:latin typeface="Arial"/>
+            </a:endParaRPr>
+          </a:p>
+          <a:p>
+            <a:pPr>
+              <a:lnSpc>
+                <a:spcPct val="100000"/>
+              </a:lnSpc>
+            </a:pPr>
+            <a:r>
+              <a:rPr b="0" lang="en-US" sz="1800" spc="-1" strike="noStrike">
+                <a:solidFill>
+                  <a:schemeClr val="lt1"/>
+                </a:solidFill>
+                <a:latin typeface="Calibri"/>
+                <a:ea typeface="DejaVu Sans"/>
+              </a:rPr>
+              <a:t>Result is Displayed to the User</a:t>
+            </a:r>
+            <a:endParaRPr b="0" lang="en-US" sz="1800" spc="-1" strike="noStrike">
+              <a:solidFill>
+                <a:srgbClr val="ffffff"/>
+              </a:solidFill>
+              <a:latin typeface="Arial"/>
+            </a:endParaRPr>
+          </a:p>
+        </p:txBody>
+      </p:sp>
+      <p:sp>
+        <p:nvSpPr>
+          <p:cNvPr id="90" name="Rounded Rectangle 13"/>
+          <p:cNvSpPr/>
+          <p:nvPr/>
+        </p:nvSpPr>
+        <p:spPr>
+          <a:xfrm>
+            <a:off x="8028360" y="3182040"/>
+            <a:ext cx="3290760" cy="2742120"/>
+          </a:xfrm>
+          <a:prstGeom prst="roundRect">
+            <a:avLst>
+              <a:gd name="adj" fmla="val 16667"/>
+            </a:avLst>
+          </a:prstGeom>
+          <a:solidFill>
+            <a:srgbClr val="08080a"/>
+          </a:solidFill>
+          <a:ln>
+            <a:noFill/>
+          </a:ln>
+          <a:effectLst>
+            <a:outerShdw blurRad="39960" dir="5400000" dist="23040" rotWithShape="0">
+              <a:srgbClr val="000000">
+                <a:alpha val="35000"/>
+              </a:srgbClr>
+            </a:outerShdw>
+          </a:effectLst>
+        </p:spPr>
+        <p:style>
+          <a:lnRef idx="1">
+            <a:schemeClr val="accent1"/>
+          </a:lnRef>
+          <a:fillRef idx="3">
+            <a:schemeClr val="accent1"/>
+          </a:fillRef>
+          <a:effectRef idx="2">
+            <a:schemeClr val="accent1"/>
+          </a:effectRef>
+          <a:fontRef idx="minor"/>
+        </p:style>
+        <p:txBody>
+          <a:bodyPr lIns="90000" rIns="90000" tIns="45000" bIns="45000" anchor="ctr">
+            <a:noAutofit/>
+          </a:bodyPr>
+          <a:p>
+            <a:endParaRPr b="0" lang="en-US" sz="1800" spc="-1" strike="noStrike">
+              <a:solidFill>
+                <a:schemeClr val="lt1"/>
+              </a:solidFill>
+              <a:latin typeface="Calibri"/>
+              <a:ea typeface="DejaVu Sans"/>
+            </a:endParaRPr>
+          </a:p>
+        </p:txBody>
+      </p:sp>
+      <p:sp>
+        <p:nvSpPr>
+          <p:cNvPr id="91" name="Rounded Rectangle 14"/>
+          <p:cNvSpPr/>
+          <p:nvPr/>
+        </p:nvSpPr>
+        <p:spPr>
+          <a:xfrm>
+            <a:off x="7955280" y="3108960"/>
+            <a:ext cx="3703320" cy="3063240"/>
+          </a:xfrm>
+          <a:prstGeom prst="roundRect">
+            <a:avLst>
+              <a:gd name="adj" fmla="val 16667"/>
+            </a:avLst>
+          </a:prstGeom>
+          <a:solidFill>
+            <a:srgbClr val="16161c"/>
+          </a:solidFill>
+          <a:ln>
+            <a:solidFill>
+              <a:srgbClr val="464655"/>
+            </a:solidFill>
+            <a:round/>
+          </a:ln>
+          <a:effectLst>
+            <a:outerShdw blurRad="39960" dir="5400000" dist="23040" rotWithShape="0">
+              <a:srgbClr val="000000">
+                <a:alpha val="35000"/>
+              </a:srgbClr>
+            </a:outerShdw>
+          </a:effectLst>
+        </p:spPr>
+        <p:style>
+          <a:lnRef idx="1">
+            <a:schemeClr val="accent1"/>
+          </a:lnRef>
+          <a:fillRef idx="3">
+            <a:schemeClr val="accent1"/>
+          </a:fillRef>
+          <a:effectRef idx="2">
+            <a:schemeClr val="accent1"/>
+          </a:effectRef>
+          <a:fontRef idx="minor"/>
+        </p:style>
+        <p:txBody>
+          <a:bodyPr lIns="90000" rIns="90000" tIns="45000" bIns="45000" anchor="ctr">
+            <a:noAutofit/>
+          </a:bodyPr>
+          <a:p>
+            <a:pPr algn="ctr">
+              <a:lnSpc>
+                <a:spcPct val="100000"/>
+              </a:lnSpc>
+            </a:pPr>
+            <a:r>
+              <a:rPr b="0" lang="en-US" sz="1200" spc="-1" strike="noStrike">
+                <a:solidFill>
+                  <a:srgbClr val="78ffc8"/>
+                </a:solidFill>
+                <a:latin typeface="Consolas"/>
+                <a:ea typeface="DejaVu Sans"/>
+              </a:rPr>
+              <a:t>public class TimezoneExample {</a:t>
+            </a:r>
+            <a:endParaRPr b="0" lang="en-US" sz="1200" spc="-1" strike="noStrike">
+              <a:solidFill>
+                <a:srgbClr val="ffffff"/>
+              </a:solidFill>
+              <a:latin typeface="Arial"/>
+            </a:endParaRPr>
+          </a:p>
+          <a:p>
+            <a:pPr algn="ctr">
+              <a:lnSpc>
+                <a:spcPct val="100000"/>
+              </a:lnSpc>
+            </a:pPr>
+            <a:r>
+              <a:rPr b="0" lang="en-US" sz="1200" spc="-1" strike="noStrike">
+                <a:solidFill>
+                  <a:srgbClr val="78ffc8"/>
+                </a:solidFill>
+                <a:latin typeface="Consolas"/>
+                <a:ea typeface="DejaVu Sans"/>
+              </a:rPr>
+              <a:t>    </a:t>
+            </a:r>
+            <a:r>
+              <a:rPr b="0" lang="en-US" sz="1200" spc="-1" strike="noStrike">
+                <a:solidFill>
+                  <a:srgbClr val="78ffc8"/>
+                </a:solidFill>
+                <a:latin typeface="Consolas"/>
+                <a:ea typeface="DejaVu Sans"/>
+              </a:rPr>
+              <a:t>public static void main(String[] args) {</a:t>
+            </a:r>
+            <a:endParaRPr b="0" lang="en-US" sz="1200" spc="-1" strike="noStrike">
+              <a:solidFill>
+                <a:srgbClr val="ffffff"/>
+              </a:solidFill>
+              <a:latin typeface="Arial"/>
+            </a:endParaRPr>
+          </a:p>
+          <a:p>
+            <a:pPr algn="ctr">
+              <a:lnSpc>
+                <a:spcPct val="100000"/>
+              </a:lnSpc>
+            </a:pPr>
+            <a:r>
+              <a:rPr b="0" lang="en-US" sz="1200" spc="-1" strike="noStrike">
+                <a:solidFill>
+                  <a:srgbClr val="78ffc8"/>
+                </a:solidFill>
+                <a:latin typeface="Consolas"/>
+                <a:ea typeface="DejaVu Sans"/>
+              </a:rPr>
+              <a:t>        </a:t>
+            </a:r>
+            <a:r>
+              <a:rPr b="0" lang="en-US" sz="1200" spc="-1" strike="noStrike">
+                <a:solidFill>
+                  <a:srgbClr val="78ffc8"/>
+                </a:solidFill>
+                <a:latin typeface="Consolas"/>
+                <a:ea typeface="DejaVu Sans"/>
+              </a:rPr>
+              <a:t>ZoneId istanbul = ZoneId.of("Europe/Istanbul");</a:t>
+            </a:r>
+            <a:endParaRPr b="0" lang="en-US" sz="1200" spc="-1" strike="noStrike">
+              <a:solidFill>
+                <a:srgbClr val="ffffff"/>
+              </a:solidFill>
+              <a:latin typeface="Arial"/>
+            </a:endParaRPr>
+          </a:p>
+          <a:p>
+            <a:pPr algn="ctr">
+              <a:lnSpc>
+                <a:spcPct val="100000"/>
+              </a:lnSpc>
+            </a:pPr>
+            <a:r>
+              <a:rPr b="0" lang="en-US" sz="1200" spc="-1" strike="noStrike">
+                <a:solidFill>
+                  <a:srgbClr val="78ffc8"/>
+                </a:solidFill>
+                <a:latin typeface="Consolas"/>
+                <a:ea typeface="DejaVu Sans"/>
+              </a:rPr>
+              <a:t>        </a:t>
+            </a:r>
+            <a:r>
+              <a:rPr b="0" lang="en-US" sz="1200" spc="-1" strike="noStrike">
+                <a:solidFill>
+                  <a:srgbClr val="78ffc8"/>
+                </a:solidFill>
+                <a:latin typeface="Consolas"/>
+                <a:ea typeface="DejaVu Sans"/>
+              </a:rPr>
+              <a:t>ZoneId newYork = ZoneId.of("America/New_York");</a:t>
+            </a:r>
+            <a:endParaRPr b="0" lang="en-US" sz="1200" spc="-1" strike="noStrike">
+              <a:solidFill>
+                <a:srgbClr val="ffffff"/>
+              </a:solidFill>
+              <a:latin typeface="Arial"/>
+            </a:endParaRPr>
+          </a:p>
+          <a:p>
+            <a:pPr algn="ctr">
+              <a:lnSpc>
+                <a:spcPct val="100000"/>
+              </a:lnSpc>
+            </a:pPr>
+            <a:r>
+              <a:rPr b="0" lang="en-US" sz="1200" spc="-1" strike="noStrike">
+                <a:solidFill>
+                  <a:srgbClr val="78ffc8"/>
+                </a:solidFill>
+                <a:latin typeface="Consolas"/>
+                <a:ea typeface="DejaVu Sans"/>
+              </a:rPr>
+              <a:t>        </a:t>
+            </a:r>
+            <a:r>
+              <a:rPr b="0" lang="en-US" sz="1200" spc="-1" strike="noStrike">
+                <a:solidFill>
+                  <a:srgbClr val="78ffc8"/>
+                </a:solidFill>
+                <a:latin typeface="Consolas"/>
+                <a:ea typeface="DejaVu Sans"/>
+              </a:rPr>
+              <a:t>ZonedDateTime timeInIstanbul = ZonedDateTime.now(istanbul);</a:t>
+            </a:r>
+            <a:endParaRPr b="0" lang="en-US" sz="1200" spc="-1" strike="noStrike">
+              <a:solidFill>
+                <a:srgbClr val="ffffff"/>
+              </a:solidFill>
+              <a:latin typeface="Arial"/>
+            </a:endParaRPr>
+          </a:p>
+          <a:p>
+            <a:pPr algn="ctr">
+              <a:lnSpc>
+                <a:spcPct val="100000"/>
+              </a:lnSpc>
+            </a:pPr>
+            <a:r>
+              <a:rPr b="0" lang="en-US" sz="1200" spc="-1" strike="noStrike">
+                <a:solidFill>
+                  <a:srgbClr val="78ffc8"/>
+                </a:solidFill>
+                <a:latin typeface="Consolas"/>
+                <a:ea typeface="DejaVu Sans"/>
+              </a:rPr>
+              <a:t>        </a:t>
+            </a:r>
+            <a:r>
+              <a:rPr b="0" lang="en-US" sz="1200" spc="-1" strike="noStrike">
+                <a:solidFill>
+                  <a:srgbClr val="78ffc8"/>
+                </a:solidFill>
+                <a:latin typeface="Consolas"/>
+                <a:ea typeface="DejaVu Sans"/>
+              </a:rPr>
+              <a:t>ZonedDateTime timeInNewYork = ZonedDateTime.now(newYork);</a:t>
+            </a:r>
+            <a:endParaRPr b="0" lang="en-US" sz="1200" spc="-1" strike="noStrike">
+              <a:solidFill>
+                <a:srgbClr val="ffffff"/>
+              </a:solidFill>
+              <a:latin typeface="Arial"/>
+            </a:endParaRPr>
+          </a:p>
+          <a:p>
+            <a:pPr algn="ctr">
+              <a:lnSpc>
+                <a:spcPct val="100000"/>
+              </a:lnSpc>
+            </a:pPr>
+            <a:r>
+              <a:rPr b="0" lang="en-US" sz="1200" spc="-1" strike="noStrike">
+                <a:solidFill>
+                  <a:srgbClr val="78ffc8"/>
+                </a:solidFill>
+                <a:latin typeface="Consolas"/>
+                <a:ea typeface="DejaVu Sans"/>
+              </a:rPr>
+              <a:t>        </a:t>
+            </a:r>
+            <a:r>
+              <a:rPr b="0" lang="en-US" sz="1200" spc="-1" strike="noStrike">
+                <a:solidFill>
+                  <a:srgbClr val="78ffc8"/>
+                </a:solidFill>
+                <a:latin typeface="Consolas"/>
+                <a:ea typeface="DejaVu Sans"/>
+              </a:rPr>
+              <a:t>System.out.println("Istanbul Time: " + timeInIstanbul);</a:t>
+            </a:r>
+            <a:endParaRPr b="0" lang="en-US" sz="1200" spc="-1" strike="noStrike">
+              <a:solidFill>
+                <a:srgbClr val="ffffff"/>
+              </a:solidFill>
+              <a:latin typeface="Arial"/>
+            </a:endParaRPr>
+          </a:p>
+          <a:p>
+            <a:pPr algn="ctr">
+              <a:lnSpc>
+                <a:spcPct val="100000"/>
+              </a:lnSpc>
+            </a:pPr>
+            <a:r>
+              <a:rPr b="0" lang="en-US" sz="1200" spc="-1" strike="noStrike">
+                <a:solidFill>
+                  <a:srgbClr val="78ffc8"/>
+                </a:solidFill>
+                <a:latin typeface="Consolas"/>
+                <a:ea typeface="DejaVu Sans"/>
+              </a:rPr>
+              <a:t>        </a:t>
+            </a:r>
+            <a:r>
+              <a:rPr b="0" lang="en-US" sz="1200" spc="-1" strike="noStrike">
+                <a:solidFill>
+                  <a:srgbClr val="78ffc8"/>
+                </a:solidFill>
+                <a:latin typeface="Consolas"/>
+                <a:ea typeface="DejaVu Sans"/>
+              </a:rPr>
+              <a:t>System.out.println("New York Time: " + timeInNewYork);</a:t>
+            </a:r>
+            <a:endParaRPr b="0" lang="en-US" sz="1200" spc="-1" strike="noStrike">
+              <a:solidFill>
+                <a:srgbClr val="ffffff"/>
+              </a:solidFill>
+              <a:latin typeface="Arial"/>
+            </a:endParaRPr>
+          </a:p>
+          <a:p>
+            <a:pPr algn="ctr">
+              <a:lnSpc>
+                <a:spcPct val="100000"/>
+              </a:lnSpc>
+            </a:pPr>
+            <a:r>
+              <a:rPr b="0" lang="en-US" sz="1200" spc="-1" strike="noStrike">
+                <a:solidFill>
+                  <a:srgbClr val="78ffc8"/>
+                </a:solidFill>
+                <a:latin typeface="Consolas"/>
+                <a:ea typeface="DejaVu Sans"/>
+              </a:rPr>
+              <a:t>    </a:t>
+            </a:r>
+            <a:r>
+              <a:rPr b="0" lang="en-US" sz="1200" spc="-1" strike="noStrike">
+                <a:solidFill>
+                  <a:srgbClr val="78ffc8"/>
+                </a:solidFill>
+                <a:latin typeface="Consolas"/>
+                <a:ea typeface="DejaVu Sans"/>
+              </a:rPr>
+              <a:t>}</a:t>
+            </a:r>
+            <a:endParaRPr b="0" lang="en-US" sz="1200" spc="-1" strike="noStrike">
+              <a:solidFill>
+                <a:srgbClr val="ffffff"/>
+              </a:solidFill>
+              <a:latin typeface="Arial"/>
+            </a:endParaRPr>
+          </a:p>
+          <a:p>
+            <a:pPr algn="ctr">
+              <a:lnSpc>
+                <a:spcPct val="100000"/>
+              </a:lnSpc>
+            </a:pPr>
+            <a:r>
+              <a:rPr b="0" lang="en-US" sz="1200" spc="-1" strike="noStrike">
+                <a:solidFill>
+                  <a:srgbClr val="78ffc8"/>
+                </a:solidFill>
+                <a:latin typeface="Consolas"/>
+                <a:ea typeface="DejaVu Sans"/>
+              </a:rPr>
+              <a:t>}</a:t>
+            </a:r>
+            <a:endParaRPr b="0" lang="en-US" sz="1200" spc="-1" strike="noStrike">
+              <a:solidFill>
+                <a:srgbClr val="ffffff"/>
+              </a:solidFill>
+              <a:latin typeface="Arial"/>
+            </a:endParaRPr>
+          </a:p>
+        </p:txBody>
+      </p:sp>
+      <p:sp>
+        <p:nvSpPr>
+          <p:cNvPr id="92" name="TextBox 6"/>
           <p:cNvSpPr/>
           <p:nvPr/>
         </p:nvSpPr>

--- a/Java/Java #4/EN/Java #4.pptx
+++ b/Java/Java #4/EN/Java #4.pptx
@@ -7,6 +7,7 @@
   <p:sldIdLst>
     <p:sldId id="256" r:id="rId3"/>
     <p:sldId id="257" r:id="rId4"/>
+    <p:sldId id="258" r:id="rId5"/>
   </p:sldIdLst>
   <p:sldSz cx="9144000" cy="6858000"/>
   <p:notesSz cx="7772400" cy="10058400"/>
@@ -64,7 +65,7 @@
         <p:txBody>
           <a:bodyPr/>
           <a:p>
-            <a:fld id="{E4C348A7-8DDD-42B3-8838-D99E7FFA9945}" type="slidenum">
+            <a:fld id="{A1076792-F458-4D4F-A458-6BA8A7193C72}" type="slidenum">
               <a:t>&lt;#&gt;</a:t>
             </a:fld>
           </a:p>
@@ -273,7 +274,7 @@
         <p:txBody>
           <a:bodyPr/>
           <a:p>
-            <a:fld id="{8835917A-22CE-4465-BE91-27DEFC35DA15}" type="slidenum">
+            <a:fld id="{A969FC5D-332C-4B53-B37C-45A96468C8D4}" type="slidenum">
               <a:t>&lt;#&gt;</a:t>
             </a:fld>
           </a:p>
@@ -568,7 +569,7 @@
         <p:txBody>
           <a:bodyPr/>
           <a:p>
-            <a:fld id="{BF89A158-2B90-4771-AD7B-393C2B2058F1}" type="slidenum">
+            <a:fld id="{E2343228-E8BA-4703-8FCD-2AF1D8B558E2}" type="slidenum">
               <a:t>&lt;#&gt;</a:t>
             </a:fld>
           </a:p>
@@ -949,7 +950,7 @@
         <p:txBody>
           <a:bodyPr/>
           <a:p>
-            <a:fld id="{0685CD38-AC5A-4AB0-AE92-BE266C3DC282}" type="slidenum">
+            <a:fld id="{C763599D-1916-44C1-B8C7-05487F673A4E}" type="slidenum">
               <a:t>&lt;#&gt;</a:t>
             </a:fld>
           </a:p>
@@ -1112,7 +1113,7 @@
         <p:txBody>
           <a:bodyPr/>
           <a:p>
-            <a:fld id="{CE69C064-A050-4652-A7E5-CD178D53DDCF}" type="slidenum">
+            <a:fld id="{6B4A4909-A62C-4496-A179-3CB5B87F2095}" type="slidenum">
               <a:t>&lt;#&gt;</a:t>
             </a:fld>
           </a:p>
@@ -1278,7 +1279,7 @@
         <p:txBody>
           <a:bodyPr/>
           <a:p>
-            <a:fld id="{5BF1FA8C-DAEE-41EF-A115-6763E78FD5F3}" type="slidenum">
+            <a:fld id="{6D084580-6157-435D-861C-1AB83DBE38AA}" type="slidenum">
               <a:t>&lt;#&gt;</a:t>
             </a:fld>
           </a:p>
@@ -1487,7 +1488,7 @@
         <p:txBody>
           <a:bodyPr/>
           <a:p>
-            <a:fld id="{7DC09EA5-B12A-40DE-8CD7-1511431FB05A}" type="slidenum">
+            <a:fld id="{3518A6B2-5C61-47B6-BDD6-1BC7BCF6EF6E}" type="slidenum">
               <a:t>&lt;#&gt;</a:t>
             </a:fld>
           </a:p>
@@ -1610,7 +1611,7 @@
         <p:txBody>
           <a:bodyPr/>
           <a:p>
-            <a:fld id="{7F9B879C-F10E-4A5E-9B6C-32767F3D3AEA}" type="slidenum">
+            <a:fld id="{BC855FC0-5622-4475-A252-3D975DFDF4FD}" type="slidenum">
               <a:t>&lt;#&gt;</a:t>
             </a:fld>
           </a:p>
@@ -1731,7 +1732,7 @@
         <p:txBody>
           <a:bodyPr/>
           <a:p>
-            <a:fld id="{CE636013-B630-4D5C-A9D1-2C46B6669988}" type="slidenum">
+            <a:fld id="{4E193E59-8586-48F1-ABA0-5C7C38C049D4}" type="slidenum">
               <a:t>&lt;#&gt;</a:t>
             </a:fld>
           </a:p>
@@ -1983,7 +1984,7 @@
         <p:txBody>
           <a:bodyPr/>
           <a:p>
-            <a:fld id="{C799AE68-126B-477B-B678-E8B912F16A40}" type="slidenum">
+            <a:fld id="{57CBB68C-C053-410E-9B53-C9C2E23CE10F}" type="slidenum">
               <a:t>&lt;#&gt;</a:t>
             </a:fld>
           </a:p>
@@ -2235,7 +2236,7 @@
         <p:txBody>
           <a:bodyPr/>
           <a:p>
-            <a:fld id="{610745FB-88F8-4491-8AB8-FA3E820F5DDB}" type="slidenum">
+            <a:fld id="{9115456F-0348-426C-A3F6-2A9E40792512}" type="slidenum">
               <a:t>&lt;#&gt;</a:t>
             </a:fld>
           </a:p>
@@ -2487,7 +2488,7 @@
         <p:txBody>
           <a:bodyPr/>
           <a:p>
-            <a:fld id="{46ACD4D0-D008-448C-8701-0CA8E6B248D8}" type="slidenum">
+            <a:fld id="{F34B22E4-47D4-4DFE-AD44-19BB06530CF9}" type="slidenum">
               <a:t>&lt;#&gt;</a:t>
             </a:fld>
           </a:p>
@@ -2556,7 +2557,7 @@
         <p:spPr>
           <a:xfrm>
             <a:off x="3124080" y="6356520"/>
-            <a:ext cx="2894040" cy="363600"/>
+            <a:ext cx="2893680" cy="363240"/>
           </a:xfrm>
           <a:prstGeom prst="rect">
             <a:avLst/>
@@ -2628,7 +2629,7 @@
         <p:spPr>
           <a:xfrm>
             <a:off x="6553080" y="6356520"/>
-            <a:ext cx="2132280" cy="363600"/>
+            <a:ext cx="2131920" cy="363240"/>
           </a:xfrm>
           <a:prstGeom prst="rect">
             <a:avLst/>
@@ -2669,7 +2670,7 @@
                 <a:tab algn="l" pos="0"/>
               </a:tabLst>
             </a:pPr>
-            <a:fld id="{E0E3B680-C55C-4113-AB95-9F2F2346D455}" type="slidenum">
+            <a:fld id="{9D160896-877A-4296-A3CC-5E4E8B715B6A}" type="slidenum">
               <a:rPr b="0" lang="en-US" sz="1200" spc="-1" strike="noStrike">
                 <a:solidFill>
                   <a:srgbClr val="8b8b8b"/>
@@ -2700,7 +2701,7 @@
         <p:spPr>
           <a:xfrm>
             <a:off x="457200" y="6356520"/>
-            <a:ext cx="2132280" cy="363600"/>
+            <a:ext cx="2131920" cy="363240"/>
           </a:xfrm>
           <a:prstGeom prst="rect">
             <a:avLst/>
@@ -3067,7 +3068,7 @@
         <p:spPr>
           <a:xfrm>
             <a:off x="0" y="0"/>
-            <a:ext cx="12187440" cy="6856560"/>
+            <a:ext cx="12187080" cy="6856200"/>
           </a:xfrm>
           <a:prstGeom prst="rect">
             <a:avLst/>
@@ -3127,7 +3128,7 @@
         <p:spPr>
           <a:xfrm>
             <a:off x="0" y="0"/>
-            <a:ext cx="16920" cy="6856560"/>
+            <a:ext cx="16560" cy="6856200"/>
           </a:xfrm>
           <a:prstGeom prst="rect">
             <a:avLst/>
@@ -3187,7 +3188,7 @@
         <p:spPr>
           <a:xfrm>
             <a:off x="914400" y="0"/>
-            <a:ext cx="16920" cy="6856560"/>
+            <a:ext cx="16560" cy="6856200"/>
           </a:xfrm>
           <a:prstGeom prst="rect">
             <a:avLst/>
@@ -3247,7 +3248,7 @@
         <p:spPr>
           <a:xfrm>
             <a:off x="1828800" y="0"/>
-            <a:ext cx="16920" cy="6856560"/>
+            <a:ext cx="16560" cy="6856200"/>
           </a:xfrm>
           <a:prstGeom prst="rect">
             <a:avLst/>
@@ -3307,7 +3308,7 @@
         <p:spPr>
           <a:xfrm>
             <a:off x="2743200" y="0"/>
-            <a:ext cx="16920" cy="6856560"/>
+            <a:ext cx="16560" cy="6856200"/>
           </a:xfrm>
           <a:prstGeom prst="rect">
             <a:avLst/>
@@ -3367,7 +3368,7 @@
         <p:spPr>
           <a:xfrm>
             <a:off x="3657600" y="0"/>
-            <a:ext cx="16920" cy="6856560"/>
+            <a:ext cx="16560" cy="6856200"/>
           </a:xfrm>
           <a:prstGeom prst="rect">
             <a:avLst/>
@@ -3427,7 +3428,7 @@
         <p:spPr>
           <a:xfrm>
             <a:off x="4572000" y="0"/>
-            <a:ext cx="16920" cy="6856560"/>
+            <a:ext cx="16560" cy="6856200"/>
           </a:xfrm>
           <a:prstGeom prst="rect">
             <a:avLst/>
@@ -3487,7 +3488,7 @@
         <p:spPr>
           <a:xfrm>
             <a:off x="5486400" y="0"/>
-            <a:ext cx="16920" cy="6856560"/>
+            <a:ext cx="16560" cy="6856200"/>
           </a:xfrm>
           <a:prstGeom prst="rect">
             <a:avLst/>
@@ -3547,7 +3548,7 @@
         <p:spPr>
           <a:xfrm>
             <a:off x="6400800" y="0"/>
-            <a:ext cx="16920" cy="6856560"/>
+            <a:ext cx="16560" cy="6856200"/>
           </a:xfrm>
           <a:prstGeom prst="rect">
             <a:avLst/>
@@ -3607,7 +3608,7 @@
         <p:spPr>
           <a:xfrm>
             <a:off x="7315200" y="0"/>
-            <a:ext cx="16920" cy="6856560"/>
+            <a:ext cx="16560" cy="6856200"/>
           </a:xfrm>
           <a:prstGeom prst="rect">
             <a:avLst/>
@@ -3667,7 +3668,7 @@
         <p:spPr>
           <a:xfrm>
             <a:off x="8229600" y="0"/>
-            <a:ext cx="16920" cy="6856560"/>
+            <a:ext cx="16560" cy="6856200"/>
           </a:xfrm>
           <a:prstGeom prst="rect">
             <a:avLst/>
@@ -3727,7 +3728,7 @@
         <p:spPr>
           <a:xfrm>
             <a:off x="9144000" y="0"/>
-            <a:ext cx="16920" cy="6856560"/>
+            <a:ext cx="16560" cy="6856200"/>
           </a:xfrm>
           <a:prstGeom prst="rect">
             <a:avLst/>
@@ -3787,7 +3788,7 @@
         <p:spPr>
           <a:xfrm>
             <a:off x="10058400" y="0"/>
-            <a:ext cx="16920" cy="6856560"/>
+            <a:ext cx="16560" cy="6856200"/>
           </a:xfrm>
           <a:prstGeom prst="rect">
             <a:avLst/>
@@ -3847,7 +3848,7 @@
         <p:spPr>
           <a:xfrm>
             <a:off x="10972800" y="0"/>
-            <a:ext cx="16920" cy="6856560"/>
+            <a:ext cx="16560" cy="6856200"/>
           </a:xfrm>
           <a:prstGeom prst="rect">
             <a:avLst/>
@@ -3907,7 +3908,7 @@
         <p:spPr>
           <a:xfrm>
             <a:off x="11887200" y="0"/>
-            <a:ext cx="16920" cy="6856560"/>
+            <a:ext cx="16560" cy="6856200"/>
           </a:xfrm>
           <a:prstGeom prst="rect">
             <a:avLst/>
@@ -3967,7 +3968,7 @@
         <p:spPr>
           <a:xfrm>
             <a:off x="0" y="0"/>
-            <a:ext cx="318600" cy="6856560"/>
+            <a:ext cx="318240" cy="6856200"/>
           </a:xfrm>
           <a:prstGeom prst="rect">
             <a:avLst/>
@@ -4027,7 +4028,7 @@
         <p:spPr>
           <a:xfrm>
             <a:off x="9875520" y="365760"/>
-            <a:ext cx="2010240" cy="501480"/>
+            <a:ext cx="2009880" cy="501120"/>
           </a:xfrm>
           <a:prstGeom prst="roundRect">
             <a:avLst>
@@ -4155,7 +4156,7 @@
         <p:spPr>
           <a:xfrm>
             <a:off x="1548720" y="1785240"/>
-            <a:ext cx="8509320" cy="957960"/>
+            <a:ext cx="8508960" cy="957960"/>
           </a:xfrm>
           <a:prstGeom prst="rect">
             <a:avLst/>
@@ -4255,7 +4256,7 @@
         <p:spPr>
           <a:xfrm>
             <a:off x="987480" y="3182040"/>
-            <a:ext cx="3290400" cy="2741760"/>
+            <a:ext cx="3290040" cy="2741400"/>
           </a:xfrm>
           <a:prstGeom prst="roundRect">
             <a:avLst>
@@ -4317,7 +4318,7 @@
         <p:spPr>
           <a:xfrm>
             <a:off x="914400" y="3108960"/>
-            <a:ext cx="3290400" cy="2741760"/>
+            <a:ext cx="3290040" cy="2741400"/>
           </a:xfrm>
           <a:prstGeom prst="roundRect">
             <a:avLst>
@@ -4451,7 +4452,7 @@
         <p:spPr>
           <a:xfrm>
             <a:off x="4507920" y="3182040"/>
-            <a:ext cx="3290400" cy="2741760"/>
+            <a:ext cx="3290040" cy="2741400"/>
           </a:xfrm>
           <a:prstGeom prst="roundRect">
             <a:avLst>
@@ -4513,7 +4514,7 @@
         <p:spPr>
           <a:xfrm>
             <a:off x="4434840" y="3108960"/>
-            <a:ext cx="3290400" cy="2741760"/>
+            <a:ext cx="3290040" cy="2741400"/>
           </a:xfrm>
           <a:prstGeom prst="roundRect">
             <a:avLst>
@@ -4771,7 +4772,7 @@
         <p:spPr>
           <a:xfrm>
             <a:off x="8028360" y="3182040"/>
-            <a:ext cx="3290400" cy="2741760"/>
+            <a:ext cx="3290040" cy="2741400"/>
           </a:xfrm>
           <a:prstGeom prst="roundRect">
             <a:avLst>
@@ -4833,7 +4834,7 @@
         <p:spPr>
           <a:xfrm>
             <a:off x="7955280" y="2971800"/>
-            <a:ext cx="3931560" cy="3657240"/>
+            <a:ext cx="3931200" cy="3656880"/>
           </a:xfrm>
           <a:prstGeom prst="roundRect">
             <a:avLst>
@@ -5260,7 +5261,7 @@
         <p:spPr>
           <a:xfrm>
             <a:off x="4600080" y="6446520"/>
-            <a:ext cx="3051360" cy="363960"/>
+            <a:ext cx="3051000" cy="363960"/>
           </a:xfrm>
           <a:prstGeom prst="rect">
             <a:avLst/>
@@ -5344,7 +5345,7 @@
         <p:spPr>
           <a:xfrm>
             <a:off x="0" y="0"/>
-            <a:ext cx="12187800" cy="6856920"/>
+            <a:ext cx="12187440" cy="6856560"/>
           </a:xfrm>
           <a:prstGeom prst="rect">
             <a:avLst/>
@@ -5380,6 +5381,11 @@
             <a:noAutofit/>
           </a:bodyPr>
           <a:p>
+            <a:pPr>
+              <a:lnSpc>
+                <a:spcPct val="100000"/>
+              </a:lnSpc>
+            </a:pPr>
             <a:endParaRPr b="0" lang="en-US" sz="1800" spc="-1" strike="noStrike">
               <a:solidFill>
                 <a:schemeClr val="lt1"/>
@@ -5399,7 +5405,7 @@
         <p:spPr>
           <a:xfrm>
             <a:off x="0" y="0"/>
-            <a:ext cx="17280" cy="6856920"/>
+            <a:ext cx="16920" cy="6856560"/>
           </a:xfrm>
           <a:prstGeom prst="rect">
             <a:avLst/>
@@ -5435,6 +5441,11 @@
             <a:noAutofit/>
           </a:bodyPr>
           <a:p>
+            <a:pPr>
+              <a:lnSpc>
+                <a:spcPct val="100000"/>
+              </a:lnSpc>
+            </a:pPr>
             <a:endParaRPr b="0" lang="en-US" sz="1800" spc="-1" strike="noStrike">
               <a:solidFill>
                 <a:schemeClr val="lt1"/>
@@ -5454,7 +5465,7 @@
         <p:spPr>
           <a:xfrm>
             <a:off x="914400" y="0"/>
-            <a:ext cx="17280" cy="6856920"/>
+            <a:ext cx="16920" cy="6856560"/>
           </a:xfrm>
           <a:prstGeom prst="rect">
             <a:avLst/>
@@ -5490,6 +5501,11 @@
             <a:noAutofit/>
           </a:bodyPr>
           <a:p>
+            <a:pPr>
+              <a:lnSpc>
+                <a:spcPct val="100000"/>
+              </a:lnSpc>
+            </a:pPr>
             <a:endParaRPr b="0" lang="en-US" sz="1800" spc="-1" strike="noStrike">
               <a:solidFill>
                 <a:schemeClr val="lt1"/>
@@ -5509,7 +5525,7 @@
         <p:spPr>
           <a:xfrm>
             <a:off x="1828800" y="0"/>
-            <a:ext cx="17280" cy="6856920"/>
+            <a:ext cx="16920" cy="6856560"/>
           </a:xfrm>
           <a:prstGeom prst="rect">
             <a:avLst/>
@@ -5545,6 +5561,11 @@
             <a:noAutofit/>
           </a:bodyPr>
           <a:p>
+            <a:pPr>
+              <a:lnSpc>
+                <a:spcPct val="100000"/>
+              </a:lnSpc>
+            </a:pPr>
             <a:endParaRPr b="0" lang="en-US" sz="1800" spc="-1" strike="noStrike">
               <a:solidFill>
                 <a:schemeClr val="lt1"/>
@@ -5564,7 +5585,7 @@
         <p:spPr>
           <a:xfrm>
             <a:off x="2743200" y="0"/>
-            <a:ext cx="17280" cy="6856920"/>
+            <a:ext cx="16920" cy="6856560"/>
           </a:xfrm>
           <a:prstGeom prst="rect">
             <a:avLst/>
@@ -5600,6 +5621,11 @@
             <a:noAutofit/>
           </a:bodyPr>
           <a:p>
+            <a:pPr>
+              <a:lnSpc>
+                <a:spcPct val="100000"/>
+              </a:lnSpc>
+            </a:pPr>
             <a:endParaRPr b="0" lang="en-US" sz="1800" spc="-1" strike="noStrike">
               <a:solidFill>
                 <a:schemeClr val="lt1"/>
@@ -5619,7 +5645,7 @@
         <p:spPr>
           <a:xfrm>
             <a:off x="3657600" y="0"/>
-            <a:ext cx="17280" cy="6856920"/>
+            <a:ext cx="16920" cy="6856560"/>
           </a:xfrm>
           <a:prstGeom prst="rect">
             <a:avLst/>
@@ -5655,6 +5681,11 @@
             <a:noAutofit/>
           </a:bodyPr>
           <a:p>
+            <a:pPr>
+              <a:lnSpc>
+                <a:spcPct val="100000"/>
+              </a:lnSpc>
+            </a:pPr>
             <a:endParaRPr b="0" lang="en-US" sz="1800" spc="-1" strike="noStrike">
               <a:solidFill>
                 <a:schemeClr val="lt1"/>
@@ -5674,7 +5705,7 @@
         <p:spPr>
           <a:xfrm>
             <a:off x="4572000" y="0"/>
-            <a:ext cx="17280" cy="6856920"/>
+            <a:ext cx="16920" cy="6856560"/>
           </a:xfrm>
           <a:prstGeom prst="rect">
             <a:avLst/>
@@ -5710,6 +5741,11 @@
             <a:noAutofit/>
           </a:bodyPr>
           <a:p>
+            <a:pPr>
+              <a:lnSpc>
+                <a:spcPct val="100000"/>
+              </a:lnSpc>
+            </a:pPr>
             <a:endParaRPr b="0" lang="en-US" sz="1800" spc="-1" strike="noStrike">
               <a:solidFill>
                 <a:schemeClr val="lt1"/>
@@ -5729,7 +5765,7 @@
         <p:spPr>
           <a:xfrm>
             <a:off x="5486400" y="0"/>
-            <a:ext cx="17280" cy="6856920"/>
+            <a:ext cx="16920" cy="6856560"/>
           </a:xfrm>
           <a:prstGeom prst="rect">
             <a:avLst/>
@@ -5765,6 +5801,11 @@
             <a:noAutofit/>
           </a:bodyPr>
           <a:p>
+            <a:pPr>
+              <a:lnSpc>
+                <a:spcPct val="100000"/>
+              </a:lnSpc>
+            </a:pPr>
             <a:endParaRPr b="0" lang="en-US" sz="1800" spc="-1" strike="noStrike">
               <a:solidFill>
                 <a:schemeClr val="lt1"/>
@@ -5784,7 +5825,7 @@
         <p:spPr>
           <a:xfrm>
             <a:off x="6400800" y="0"/>
-            <a:ext cx="17280" cy="6856920"/>
+            <a:ext cx="16920" cy="6856560"/>
           </a:xfrm>
           <a:prstGeom prst="rect">
             <a:avLst/>
@@ -5820,6 +5861,11 @@
             <a:noAutofit/>
           </a:bodyPr>
           <a:p>
+            <a:pPr>
+              <a:lnSpc>
+                <a:spcPct val="100000"/>
+              </a:lnSpc>
+            </a:pPr>
             <a:endParaRPr b="0" lang="en-US" sz="1800" spc="-1" strike="noStrike">
               <a:solidFill>
                 <a:schemeClr val="lt1"/>
@@ -5839,7 +5885,7 @@
         <p:spPr>
           <a:xfrm>
             <a:off x="7315200" y="0"/>
-            <a:ext cx="17280" cy="6856920"/>
+            <a:ext cx="16920" cy="6856560"/>
           </a:xfrm>
           <a:prstGeom prst="rect">
             <a:avLst/>
@@ -5875,6 +5921,11 @@
             <a:noAutofit/>
           </a:bodyPr>
           <a:p>
+            <a:pPr>
+              <a:lnSpc>
+                <a:spcPct val="100000"/>
+              </a:lnSpc>
+            </a:pPr>
             <a:endParaRPr b="0" lang="en-US" sz="1800" spc="-1" strike="noStrike">
               <a:solidFill>
                 <a:schemeClr val="lt1"/>
@@ -5894,7 +5945,7 @@
         <p:spPr>
           <a:xfrm>
             <a:off x="8229600" y="0"/>
-            <a:ext cx="17280" cy="6856920"/>
+            <a:ext cx="16920" cy="6856560"/>
           </a:xfrm>
           <a:prstGeom prst="rect">
             <a:avLst/>
@@ -5930,6 +5981,11 @@
             <a:noAutofit/>
           </a:bodyPr>
           <a:p>
+            <a:pPr>
+              <a:lnSpc>
+                <a:spcPct val="100000"/>
+              </a:lnSpc>
+            </a:pPr>
             <a:endParaRPr b="0" lang="en-US" sz="1800" spc="-1" strike="noStrike">
               <a:solidFill>
                 <a:schemeClr val="lt1"/>
@@ -5949,7 +6005,7 @@
         <p:spPr>
           <a:xfrm>
             <a:off x="9144000" y="0"/>
-            <a:ext cx="17280" cy="6856920"/>
+            <a:ext cx="16920" cy="6856560"/>
           </a:xfrm>
           <a:prstGeom prst="rect">
             <a:avLst/>
@@ -5985,6 +6041,11 @@
             <a:noAutofit/>
           </a:bodyPr>
           <a:p>
+            <a:pPr>
+              <a:lnSpc>
+                <a:spcPct val="100000"/>
+              </a:lnSpc>
+            </a:pPr>
             <a:endParaRPr b="0" lang="en-US" sz="1800" spc="-1" strike="noStrike">
               <a:solidFill>
                 <a:schemeClr val="lt1"/>
@@ -6004,7 +6065,7 @@
         <p:spPr>
           <a:xfrm>
             <a:off x="10058400" y="0"/>
-            <a:ext cx="17280" cy="6856920"/>
+            <a:ext cx="16920" cy="6856560"/>
           </a:xfrm>
           <a:prstGeom prst="rect">
             <a:avLst/>
@@ -6040,6 +6101,11 @@
             <a:noAutofit/>
           </a:bodyPr>
           <a:p>
+            <a:pPr>
+              <a:lnSpc>
+                <a:spcPct val="100000"/>
+              </a:lnSpc>
+            </a:pPr>
             <a:endParaRPr b="0" lang="en-US" sz="1800" spc="-1" strike="noStrike">
               <a:solidFill>
                 <a:schemeClr val="lt1"/>
@@ -6059,7 +6125,7 @@
         <p:spPr>
           <a:xfrm>
             <a:off x="10972800" y="0"/>
-            <a:ext cx="17280" cy="6856920"/>
+            <a:ext cx="16920" cy="6856560"/>
           </a:xfrm>
           <a:prstGeom prst="rect">
             <a:avLst/>
@@ -6095,6 +6161,11 @@
             <a:noAutofit/>
           </a:bodyPr>
           <a:p>
+            <a:pPr>
+              <a:lnSpc>
+                <a:spcPct val="100000"/>
+              </a:lnSpc>
+            </a:pPr>
             <a:endParaRPr b="0" lang="en-US" sz="1800" spc="-1" strike="noStrike">
               <a:solidFill>
                 <a:schemeClr val="lt1"/>
@@ -6114,7 +6185,7 @@
         <p:spPr>
           <a:xfrm>
             <a:off x="11887200" y="0"/>
-            <a:ext cx="17280" cy="6856920"/>
+            <a:ext cx="16920" cy="6856560"/>
           </a:xfrm>
           <a:prstGeom prst="rect">
             <a:avLst/>
@@ -6150,6 +6221,11 @@
             <a:noAutofit/>
           </a:bodyPr>
           <a:p>
+            <a:pPr>
+              <a:lnSpc>
+                <a:spcPct val="100000"/>
+              </a:lnSpc>
+            </a:pPr>
             <a:endParaRPr b="0" lang="en-US" sz="1800" spc="-1" strike="noStrike">
               <a:solidFill>
                 <a:schemeClr val="lt1"/>
@@ -6169,7 +6245,7 @@
         <p:spPr>
           <a:xfrm>
             <a:off x="0" y="0"/>
-            <a:ext cx="318960" cy="6856920"/>
+            <a:ext cx="318600" cy="6856560"/>
           </a:xfrm>
           <a:prstGeom prst="rect">
             <a:avLst/>
@@ -6205,6 +6281,11 @@
             <a:noAutofit/>
           </a:bodyPr>
           <a:p>
+            <a:pPr>
+              <a:lnSpc>
+                <a:spcPct val="100000"/>
+              </a:lnSpc>
+            </a:pPr>
             <a:endParaRPr b="0" lang="en-US" sz="1800" spc="-1" strike="noStrike">
               <a:solidFill>
                 <a:schemeClr val="lt1"/>
@@ -6224,7 +6305,7 @@
         <p:spPr>
           <a:xfrm>
             <a:off x="9875520" y="365760"/>
-            <a:ext cx="2010600" cy="501840"/>
+            <a:ext cx="2010240" cy="501480"/>
           </a:xfrm>
           <a:prstGeom prst="roundRect">
             <a:avLst>
@@ -6298,7 +6379,7 @@
         <p:spPr>
           <a:xfrm>
             <a:off x="2219760" y="914400"/>
-            <a:ext cx="6531480" cy="639000"/>
+            <a:ext cx="6531120" cy="638280"/>
           </a:xfrm>
           <a:prstGeom prst="rect">
             <a:avLst/>
@@ -6352,7 +6433,7 @@
         <p:spPr>
           <a:xfrm>
             <a:off x="612000" y="1828800"/>
-            <a:ext cx="10265400" cy="819720"/>
+            <a:ext cx="10265040" cy="819720"/>
           </a:xfrm>
           <a:prstGeom prst="rect">
             <a:avLst/>
@@ -6452,7 +6533,7 @@
         <p:spPr>
           <a:xfrm>
             <a:off x="987480" y="3182040"/>
-            <a:ext cx="3290760" cy="2742120"/>
+            <a:ext cx="3290400" cy="2741760"/>
           </a:xfrm>
           <a:prstGeom prst="roundRect">
             <a:avLst>
@@ -6490,6 +6571,11 @@
             <a:noAutofit/>
           </a:bodyPr>
           <a:p>
+            <a:pPr>
+              <a:lnSpc>
+                <a:spcPct val="100000"/>
+              </a:lnSpc>
+            </a:pPr>
             <a:endParaRPr b="0" lang="en-US" sz="1800" spc="-1" strike="noStrike">
               <a:solidFill>
                 <a:schemeClr val="lt1"/>
@@ -6509,7 +6595,7 @@
         <p:spPr>
           <a:xfrm>
             <a:off x="914400" y="3108960"/>
-            <a:ext cx="3290760" cy="3063240"/>
+            <a:ext cx="3290400" cy="3062880"/>
           </a:xfrm>
           <a:prstGeom prst="roundRect">
             <a:avLst>
@@ -6570,7 +6656,7 @@
               </a:rPr>
               <a:t>ZoneId → Represents the time zone</a:t>
             </a:r>
-            <a:endParaRPr b="1" lang="en-US" sz="1800" spc="-1" strike="noStrike">
+            <a:endParaRPr b="0" lang="en-US" sz="1800" spc="-1" strike="noStrike">
               <a:solidFill>
                 <a:srgbClr val="ffffff"/>
               </a:solidFill>
@@ -6598,7 +6684,7 @@
               </a:rPr>
               <a:t>ZonedDateTime → Holds date and time along with the time zone</a:t>
             </a:r>
-            <a:endParaRPr b="1" lang="en-US" sz="1800" spc="-1" strike="noStrike">
+            <a:endParaRPr b="0" lang="en-US" sz="1800" spc="-1" strike="noStrike">
               <a:solidFill>
                 <a:srgbClr val="ffffff"/>
               </a:solidFill>
@@ -6626,7 +6712,7 @@
               </a:rPr>
               <a:t>Different UTC offsets are calculated automatically for each region</a:t>
             </a:r>
-            <a:endParaRPr b="1" lang="en-US" sz="1800" spc="-1" strike="noStrike">
+            <a:endParaRPr b="0" lang="en-US" sz="1800" spc="-1" strike="noStrike">
               <a:solidFill>
                 <a:srgbClr val="ffffff"/>
               </a:solidFill>
@@ -6654,7 +6740,7 @@
               </a:rPr>
               <a:t>Daylight saving time changes are handled automatically</a:t>
             </a:r>
-            <a:endParaRPr b="1" lang="en-US" sz="1800" spc="-1" strike="noStrike">
+            <a:endParaRPr b="0" lang="en-US" sz="1800" spc="-1" strike="noStrike">
               <a:solidFill>
                 <a:srgbClr val="ffffff"/>
               </a:solidFill>
@@ -6672,7 +6758,7 @@
         <p:spPr>
           <a:xfrm>
             <a:off x="4507920" y="3182040"/>
-            <a:ext cx="3290760" cy="2742120"/>
+            <a:ext cx="3290400" cy="2741760"/>
           </a:xfrm>
           <a:prstGeom prst="roundRect">
             <a:avLst>
@@ -6710,6 +6796,11 @@
             <a:noAutofit/>
           </a:bodyPr>
           <a:p>
+            <a:pPr>
+              <a:lnSpc>
+                <a:spcPct val="100000"/>
+              </a:lnSpc>
+            </a:pPr>
             <a:endParaRPr b="0" lang="en-US" sz="1800" spc="-1" strike="noStrike">
               <a:solidFill>
                 <a:schemeClr val="lt1"/>
@@ -6729,7 +6820,7 @@
         <p:spPr>
           <a:xfrm>
             <a:off x="4434840" y="2971800"/>
-            <a:ext cx="3290760" cy="3429000"/>
+            <a:ext cx="3290400" cy="3428640"/>
           </a:xfrm>
           <a:prstGeom prst="roundRect">
             <a:avLst>
@@ -6987,7 +7078,7 @@
         <p:spPr>
           <a:xfrm>
             <a:off x="8028360" y="3182040"/>
-            <a:ext cx="3290760" cy="2742120"/>
+            <a:ext cx="3290400" cy="2741760"/>
           </a:xfrm>
           <a:prstGeom prst="roundRect">
             <a:avLst>
@@ -7025,6 +7116,11 @@
             <a:noAutofit/>
           </a:bodyPr>
           <a:p>
+            <a:pPr>
+              <a:lnSpc>
+                <a:spcPct val="100000"/>
+              </a:lnSpc>
+            </a:pPr>
             <a:endParaRPr b="0" lang="en-US" sz="1800" spc="-1" strike="noStrike">
               <a:solidFill>
                 <a:schemeClr val="lt1"/>
@@ -7044,7 +7140,7 @@
         <p:spPr>
           <a:xfrm>
             <a:off x="7955280" y="3108960"/>
-            <a:ext cx="3703320" cy="3063240"/>
+            <a:ext cx="3702960" cy="3062880"/>
           </a:xfrm>
           <a:prstGeom prst="roundRect">
             <a:avLst>
@@ -7405,7 +7501,2180 @@
         <p:spPr>
           <a:xfrm>
             <a:off x="4600080" y="6446520"/>
-            <a:ext cx="3051720" cy="363960"/>
+            <a:ext cx="3051360" cy="363960"/>
+          </a:xfrm>
+          <a:prstGeom prst="rect">
+            <a:avLst/>
+          </a:prstGeom>
+          <a:noFill/>
+          <a:ln w="0">
+            <a:noFill/>
+          </a:ln>
+        </p:spPr>
+        <p:style>
+          <a:lnRef idx="0"/>
+          <a:fillRef idx="0"/>
+          <a:effectRef idx="0"/>
+          <a:fontRef idx="minor"/>
+        </p:style>
+        <p:txBody>
+          <a:bodyPr wrap="none" lIns="90000" rIns="90000" tIns="45000" bIns="45000" anchor="t">
+            <a:spAutoFit/>
+          </a:bodyPr>
+          <a:p>
+            <a:pPr>
+              <a:lnSpc>
+                <a:spcPct val="100000"/>
+              </a:lnSpc>
+            </a:pPr>
+            <a:r>
+              <a:rPr b="0" lang="en-US" sz="1800" spc="-1" strike="noStrike">
+                <a:solidFill>
+                  <a:srgbClr val="000000"/>
+                </a:solidFill>
+                <a:latin typeface="Calibri"/>
+                <a:ea typeface="DejaVu Sans"/>
+              </a:rPr>
+              <a:t>Java • Ultra Premium Template</a:t>
+            </a:r>
+            <a:endParaRPr b="0" lang="en-US" sz="1800" spc="-1" strike="noStrike">
+              <a:solidFill>
+                <a:srgbClr val="000000"/>
+              </a:solidFill>
+              <a:latin typeface="Arial"/>
+            </a:endParaRPr>
+          </a:p>
+        </p:txBody>
+      </p:sp>
+    </p:spTree>
+  </p:cSld>
+  <mc:AlternateContent>
+    <mc:Choice Requires="p14">
+      <p:transition spd="slow" p14:dur="2000"/>
+    </mc:Choice>
+    <mc:Fallback>
+      <p:transition spd="slow"/>
+    </mc:Fallback>
+  </mc:AlternateContent>
+</p:sld>
+</file>
+
+<file path=ppt/slides/slide3.xml><?xml version="1.0" encoding="utf-8"?>
+<p:sld xmlns:a="http://schemas.openxmlformats.org/drawingml/2006/main" xmlns:p="http://schemas.openxmlformats.org/presentationml/2006/main" xmlns:r="http://schemas.openxmlformats.org/officeDocument/2006/relationships" xmlns:p14="http://schemas.microsoft.com/office/powerpoint/2010/main" xmlns:p15="http://schemas.microsoft.com/office/powerpoint/2012/main" xmlns:mc="http://schemas.openxmlformats.org/markup-compatibility/2006">
+  <p:cSld>
+    <p:spTree>
+      <p:nvGrpSpPr>
+        <p:cNvPr id="1" name=""/>
+        <p:cNvGrpSpPr/>
+        <p:nvPr/>
+      </p:nvGrpSpPr>
+      <p:grpSpPr>
+        <a:xfrm>
+          <a:off x="0" y="0"/>
+          <a:ext cx="0" cy="0"/>
+          <a:chOff x="0" y="0"/>
+          <a:chExt cx="0" cy="0"/>
+        </a:xfrm>
+      </p:grpSpPr>
+      <p:sp>
+        <p:nvSpPr>
+          <p:cNvPr id="93" name="Rectangle 33"/>
+          <p:cNvSpPr/>
+          <p:nvPr/>
+        </p:nvSpPr>
+        <p:spPr>
+          <a:xfrm>
+            <a:off x="0" y="0"/>
+            <a:ext cx="12187440" cy="6856560"/>
+          </a:xfrm>
+          <a:prstGeom prst="rect">
+            <a:avLst/>
+          </a:prstGeom>
+          <a:solidFill>
+            <a:srgbClr val="0b0b0d"/>
+          </a:solidFill>
+          <a:ln>
+            <a:noFill/>
+          </a:ln>
+          <a:effectLst>
+            <a:outerShdw blurRad="39960" dir="5400000" dist="23040" rotWithShape="0">
+              <a:srgbClr val="000000">
+                <a:alpha val="35000"/>
+              </a:srgbClr>
+            </a:outerShdw>
+          </a:effectLst>
+        </p:spPr>
+        <p:style>
+          <a:lnRef idx="1">
+            <a:schemeClr val="accent1"/>
+          </a:lnRef>
+          <a:fillRef idx="3">
+            <a:schemeClr val="accent1"/>
+          </a:fillRef>
+          <a:effectRef idx="2">
+            <a:schemeClr val="accent1"/>
+          </a:effectRef>
+          <a:fontRef idx="minor"/>
+        </p:style>
+        <p:txBody>
+          <a:bodyPr lIns="90000" rIns="90000" tIns="45000" bIns="45000" anchor="ctr">
+            <a:noAutofit/>
+          </a:bodyPr>
+          <a:p>
+            <a:endParaRPr b="0" lang="en-US" sz="1800" spc="-1" strike="noStrike">
+              <a:solidFill>
+                <a:schemeClr val="lt1"/>
+              </a:solidFill>
+              <a:latin typeface="Calibri"/>
+              <a:ea typeface="DejaVu Sans"/>
+            </a:endParaRPr>
+          </a:p>
+        </p:txBody>
+      </p:sp>
+      <p:sp>
+        <p:nvSpPr>
+          <p:cNvPr id="94" name="Rectangle 34"/>
+          <p:cNvSpPr/>
+          <p:nvPr/>
+        </p:nvSpPr>
+        <p:spPr>
+          <a:xfrm>
+            <a:off x="0" y="0"/>
+            <a:ext cx="16920" cy="6856560"/>
+          </a:xfrm>
+          <a:prstGeom prst="rect">
+            <a:avLst/>
+          </a:prstGeom>
+          <a:solidFill>
+            <a:srgbClr val="121216"/>
+          </a:solidFill>
+          <a:ln>
+            <a:noFill/>
+          </a:ln>
+          <a:effectLst>
+            <a:outerShdw blurRad="39960" dir="5400000" dist="23040" rotWithShape="0">
+              <a:srgbClr val="000000">
+                <a:alpha val="35000"/>
+              </a:srgbClr>
+            </a:outerShdw>
+          </a:effectLst>
+        </p:spPr>
+        <p:style>
+          <a:lnRef idx="1">
+            <a:schemeClr val="accent1"/>
+          </a:lnRef>
+          <a:fillRef idx="3">
+            <a:schemeClr val="accent1"/>
+          </a:fillRef>
+          <a:effectRef idx="2">
+            <a:schemeClr val="accent1"/>
+          </a:effectRef>
+          <a:fontRef idx="minor"/>
+        </p:style>
+        <p:txBody>
+          <a:bodyPr lIns="90000" rIns="90000" tIns="45000" bIns="45000" anchor="ctr">
+            <a:noAutofit/>
+          </a:bodyPr>
+          <a:p>
+            <a:endParaRPr b="0" lang="en-US" sz="1800" spc="-1" strike="noStrike">
+              <a:solidFill>
+                <a:schemeClr val="lt1"/>
+              </a:solidFill>
+              <a:latin typeface="Calibri"/>
+              <a:ea typeface="DejaVu Sans"/>
+            </a:endParaRPr>
+          </a:p>
+        </p:txBody>
+      </p:sp>
+      <p:sp>
+        <p:nvSpPr>
+          <p:cNvPr id="95" name="Rectangle 35"/>
+          <p:cNvSpPr/>
+          <p:nvPr/>
+        </p:nvSpPr>
+        <p:spPr>
+          <a:xfrm>
+            <a:off x="914400" y="0"/>
+            <a:ext cx="16920" cy="6856560"/>
+          </a:xfrm>
+          <a:prstGeom prst="rect">
+            <a:avLst/>
+          </a:prstGeom>
+          <a:solidFill>
+            <a:srgbClr val="121216"/>
+          </a:solidFill>
+          <a:ln>
+            <a:noFill/>
+          </a:ln>
+          <a:effectLst>
+            <a:outerShdw blurRad="39960" dir="5400000" dist="23040" rotWithShape="0">
+              <a:srgbClr val="000000">
+                <a:alpha val="35000"/>
+              </a:srgbClr>
+            </a:outerShdw>
+          </a:effectLst>
+        </p:spPr>
+        <p:style>
+          <a:lnRef idx="1">
+            <a:schemeClr val="accent1"/>
+          </a:lnRef>
+          <a:fillRef idx="3">
+            <a:schemeClr val="accent1"/>
+          </a:fillRef>
+          <a:effectRef idx="2">
+            <a:schemeClr val="accent1"/>
+          </a:effectRef>
+          <a:fontRef idx="minor"/>
+        </p:style>
+        <p:txBody>
+          <a:bodyPr lIns="90000" rIns="90000" tIns="45000" bIns="45000" anchor="ctr">
+            <a:noAutofit/>
+          </a:bodyPr>
+          <a:p>
+            <a:endParaRPr b="0" lang="en-US" sz="1800" spc="-1" strike="noStrike">
+              <a:solidFill>
+                <a:schemeClr val="lt1"/>
+              </a:solidFill>
+              <a:latin typeface="Calibri"/>
+              <a:ea typeface="DejaVu Sans"/>
+            </a:endParaRPr>
+          </a:p>
+        </p:txBody>
+      </p:sp>
+      <p:sp>
+        <p:nvSpPr>
+          <p:cNvPr id="96" name="Rectangle 36"/>
+          <p:cNvSpPr/>
+          <p:nvPr/>
+        </p:nvSpPr>
+        <p:spPr>
+          <a:xfrm>
+            <a:off x="1828800" y="0"/>
+            <a:ext cx="16920" cy="6856560"/>
+          </a:xfrm>
+          <a:prstGeom prst="rect">
+            <a:avLst/>
+          </a:prstGeom>
+          <a:solidFill>
+            <a:srgbClr val="121216"/>
+          </a:solidFill>
+          <a:ln>
+            <a:noFill/>
+          </a:ln>
+          <a:effectLst>
+            <a:outerShdw blurRad="39960" dir="5400000" dist="23040" rotWithShape="0">
+              <a:srgbClr val="000000">
+                <a:alpha val="35000"/>
+              </a:srgbClr>
+            </a:outerShdw>
+          </a:effectLst>
+        </p:spPr>
+        <p:style>
+          <a:lnRef idx="1">
+            <a:schemeClr val="accent1"/>
+          </a:lnRef>
+          <a:fillRef idx="3">
+            <a:schemeClr val="accent1"/>
+          </a:fillRef>
+          <a:effectRef idx="2">
+            <a:schemeClr val="accent1"/>
+          </a:effectRef>
+          <a:fontRef idx="minor"/>
+        </p:style>
+        <p:txBody>
+          <a:bodyPr lIns="90000" rIns="90000" tIns="45000" bIns="45000" anchor="ctr">
+            <a:noAutofit/>
+          </a:bodyPr>
+          <a:p>
+            <a:endParaRPr b="0" lang="en-US" sz="1800" spc="-1" strike="noStrike">
+              <a:solidFill>
+                <a:schemeClr val="lt1"/>
+              </a:solidFill>
+              <a:latin typeface="Calibri"/>
+              <a:ea typeface="DejaVu Sans"/>
+            </a:endParaRPr>
+          </a:p>
+        </p:txBody>
+      </p:sp>
+      <p:sp>
+        <p:nvSpPr>
+          <p:cNvPr id="97" name="Rectangle 37"/>
+          <p:cNvSpPr/>
+          <p:nvPr/>
+        </p:nvSpPr>
+        <p:spPr>
+          <a:xfrm>
+            <a:off x="2743200" y="0"/>
+            <a:ext cx="16920" cy="6856560"/>
+          </a:xfrm>
+          <a:prstGeom prst="rect">
+            <a:avLst/>
+          </a:prstGeom>
+          <a:solidFill>
+            <a:srgbClr val="121216"/>
+          </a:solidFill>
+          <a:ln>
+            <a:noFill/>
+          </a:ln>
+          <a:effectLst>
+            <a:outerShdw blurRad="39960" dir="5400000" dist="23040" rotWithShape="0">
+              <a:srgbClr val="000000">
+                <a:alpha val="35000"/>
+              </a:srgbClr>
+            </a:outerShdw>
+          </a:effectLst>
+        </p:spPr>
+        <p:style>
+          <a:lnRef idx="1">
+            <a:schemeClr val="accent1"/>
+          </a:lnRef>
+          <a:fillRef idx="3">
+            <a:schemeClr val="accent1"/>
+          </a:fillRef>
+          <a:effectRef idx="2">
+            <a:schemeClr val="accent1"/>
+          </a:effectRef>
+          <a:fontRef idx="minor"/>
+        </p:style>
+        <p:txBody>
+          <a:bodyPr lIns="90000" rIns="90000" tIns="45000" bIns="45000" anchor="ctr">
+            <a:noAutofit/>
+          </a:bodyPr>
+          <a:p>
+            <a:endParaRPr b="0" lang="en-US" sz="1800" spc="-1" strike="noStrike">
+              <a:solidFill>
+                <a:schemeClr val="lt1"/>
+              </a:solidFill>
+              <a:latin typeface="Calibri"/>
+              <a:ea typeface="DejaVu Sans"/>
+            </a:endParaRPr>
+          </a:p>
+        </p:txBody>
+      </p:sp>
+      <p:sp>
+        <p:nvSpPr>
+          <p:cNvPr id="98" name="Rectangle 38"/>
+          <p:cNvSpPr/>
+          <p:nvPr/>
+        </p:nvSpPr>
+        <p:spPr>
+          <a:xfrm>
+            <a:off x="3657600" y="0"/>
+            <a:ext cx="16920" cy="6856560"/>
+          </a:xfrm>
+          <a:prstGeom prst="rect">
+            <a:avLst/>
+          </a:prstGeom>
+          <a:solidFill>
+            <a:srgbClr val="121216"/>
+          </a:solidFill>
+          <a:ln>
+            <a:noFill/>
+          </a:ln>
+          <a:effectLst>
+            <a:outerShdw blurRad="39960" dir="5400000" dist="23040" rotWithShape="0">
+              <a:srgbClr val="000000">
+                <a:alpha val="35000"/>
+              </a:srgbClr>
+            </a:outerShdw>
+          </a:effectLst>
+        </p:spPr>
+        <p:style>
+          <a:lnRef idx="1">
+            <a:schemeClr val="accent1"/>
+          </a:lnRef>
+          <a:fillRef idx="3">
+            <a:schemeClr val="accent1"/>
+          </a:fillRef>
+          <a:effectRef idx="2">
+            <a:schemeClr val="accent1"/>
+          </a:effectRef>
+          <a:fontRef idx="minor"/>
+        </p:style>
+        <p:txBody>
+          <a:bodyPr lIns="90000" rIns="90000" tIns="45000" bIns="45000" anchor="ctr">
+            <a:noAutofit/>
+          </a:bodyPr>
+          <a:p>
+            <a:endParaRPr b="0" lang="en-US" sz="1800" spc="-1" strike="noStrike">
+              <a:solidFill>
+                <a:schemeClr val="lt1"/>
+              </a:solidFill>
+              <a:latin typeface="Calibri"/>
+              <a:ea typeface="DejaVu Sans"/>
+            </a:endParaRPr>
+          </a:p>
+        </p:txBody>
+      </p:sp>
+      <p:sp>
+        <p:nvSpPr>
+          <p:cNvPr id="99" name="Rectangle 39"/>
+          <p:cNvSpPr/>
+          <p:nvPr/>
+        </p:nvSpPr>
+        <p:spPr>
+          <a:xfrm>
+            <a:off x="4572000" y="0"/>
+            <a:ext cx="16920" cy="6856560"/>
+          </a:xfrm>
+          <a:prstGeom prst="rect">
+            <a:avLst/>
+          </a:prstGeom>
+          <a:solidFill>
+            <a:srgbClr val="121216"/>
+          </a:solidFill>
+          <a:ln>
+            <a:noFill/>
+          </a:ln>
+          <a:effectLst>
+            <a:outerShdw blurRad="39960" dir="5400000" dist="23040" rotWithShape="0">
+              <a:srgbClr val="000000">
+                <a:alpha val="35000"/>
+              </a:srgbClr>
+            </a:outerShdw>
+          </a:effectLst>
+        </p:spPr>
+        <p:style>
+          <a:lnRef idx="1">
+            <a:schemeClr val="accent1"/>
+          </a:lnRef>
+          <a:fillRef idx="3">
+            <a:schemeClr val="accent1"/>
+          </a:fillRef>
+          <a:effectRef idx="2">
+            <a:schemeClr val="accent1"/>
+          </a:effectRef>
+          <a:fontRef idx="minor"/>
+        </p:style>
+        <p:txBody>
+          <a:bodyPr lIns="90000" rIns="90000" tIns="45000" bIns="45000" anchor="ctr">
+            <a:noAutofit/>
+          </a:bodyPr>
+          <a:p>
+            <a:endParaRPr b="0" lang="en-US" sz="1800" spc="-1" strike="noStrike">
+              <a:solidFill>
+                <a:schemeClr val="lt1"/>
+              </a:solidFill>
+              <a:latin typeface="Calibri"/>
+              <a:ea typeface="DejaVu Sans"/>
+            </a:endParaRPr>
+          </a:p>
+        </p:txBody>
+      </p:sp>
+      <p:sp>
+        <p:nvSpPr>
+          <p:cNvPr id="100" name="Rectangle 40"/>
+          <p:cNvSpPr/>
+          <p:nvPr/>
+        </p:nvSpPr>
+        <p:spPr>
+          <a:xfrm>
+            <a:off x="5486400" y="0"/>
+            <a:ext cx="16920" cy="6856560"/>
+          </a:xfrm>
+          <a:prstGeom prst="rect">
+            <a:avLst/>
+          </a:prstGeom>
+          <a:solidFill>
+            <a:srgbClr val="121216"/>
+          </a:solidFill>
+          <a:ln>
+            <a:noFill/>
+          </a:ln>
+          <a:effectLst>
+            <a:outerShdw blurRad="39960" dir="5400000" dist="23040" rotWithShape="0">
+              <a:srgbClr val="000000">
+                <a:alpha val="35000"/>
+              </a:srgbClr>
+            </a:outerShdw>
+          </a:effectLst>
+        </p:spPr>
+        <p:style>
+          <a:lnRef idx="1">
+            <a:schemeClr val="accent1"/>
+          </a:lnRef>
+          <a:fillRef idx="3">
+            <a:schemeClr val="accent1"/>
+          </a:fillRef>
+          <a:effectRef idx="2">
+            <a:schemeClr val="accent1"/>
+          </a:effectRef>
+          <a:fontRef idx="minor"/>
+        </p:style>
+        <p:txBody>
+          <a:bodyPr lIns="90000" rIns="90000" tIns="45000" bIns="45000" anchor="ctr">
+            <a:noAutofit/>
+          </a:bodyPr>
+          <a:p>
+            <a:endParaRPr b="0" lang="en-US" sz="1800" spc="-1" strike="noStrike">
+              <a:solidFill>
+                <a:schemeClr val="lt1"/>
+              </a:solidFill>
+              <a:latin typeface="Calibri"/>
+              <a:ea typeface="DejaVu Sans"/>
+            </a:endParaRPr>
+          </a:p>
+        </p:txBody>
+      </p:sp>
+      <p:sp>
+        <p:nvSpPr>
+          <p:cNvPr id="101" name="Rectangle 41"/>
+          <p:cNvSpPr/>
+          <p:nvPr/>
+        </p:nvSpPr>
+        <p:spPr>
+          <a:xfrm>
+            <a:off x="6400800" y="0"/>
+            <a:ext cx="16920" cy="6856560"/>
+          </a:xfrm>
+          <a:prstGeom prst="rect">
+            <a:avLst/>
+          </a:prstGeom>
+          <a:solidFill>
+            <a:srgbClr val="121216"/>
+          </a:solidFill>
+          <a:ln>
+            <a:noFill/>
+          </a:ln>
+          <a:effectLst>
+            <a:outerShdw blurRad="39960" dir="5400000" dist="23040" rotWithShape="0">
+              <a:srgbClr val="000000">
+                <a:alpha val="35000"/>
+              </a:srgbClr>
+            </a:outerShdw>
+          </a:effectLst>
+        </p:spPr>
+        <p:style>
+          <a:lnRef idx="1">
+            <a:schemeClr val="accent1"/>
+          </a:lnRef>
+          <a:fillRef idx="3">
+            <a:schemeClr val="accent1"/>
+          </a:fillRef>
+          <a:effectRef idx="2">
+            <a:schemeClr val="accent1"/>
+          </a:effectRef>
+          <a:fontRef idx="minor"/>
+        </p:style>
+        <p:txBody>
+          <a:bodyPr lIns="90000" rIns="90000" tIns="45000" bIns="45000" anchor="ctr">
+            <a:noAutofit/>
+          </a:bodyPr>
+          <a:p>
+            <a:endParaRPr b="0" lang="en-US" sz="1800" spc="-1" strike="noStrike">
+              <a:solidFill>
+                <a:schemeClr val="lt1"/>
+              </a:solidFill>
+              <a:latin typeface="Calibri"/>
+              <a:ea typeface="DejaVu Sans"/>
+            </a:endParaRPr>
+          </a:p>
+        </p:txBody>
+      </p:sp>
+      <p:sp>
+        <p:nvSpPr>
+          <p:cNvPr id="102" name="Rectangle 42"/>
+          <p:cNvSpPr/>
+          <p:nvPr/>
+        </p:nvSpPr>
+        <p:spPr>
+          <a:xfrm>
+            <a:off x="7315200" y="0"/>
+            <a:ext cx="16920" cy="6856560"/>
+          </a:xfrm>
+          <a:prstGeom prst="rect">
+            <a:avLst/>
+          </a:prstGeom>
+          <a:solidFill>
+            <a:srgbClr val="121216"/>
+          </a:solidFill>
+          <a:ln>
+            <a:noFill/>
+          </a:ln>
+          <a:effectLst>
+            <a:outerShdw blurRad="39960" dir="5400000" dist="23040" rotWithShape="0">
+              <a:srgbClr val="000000">
+                <a:alpha val="35000"/>
+              </a:srgbClr>
+            </a:outerShdw>
+          </a:effectLst>
+        </p:spPr>
+        <p:style>
+          <a:lnRef idx="1">
+            <a:schemeClr val="accent1"/>
+          </a:lnRef>
+          <a:fillRef idx="3">
+            <a:schemeClr val="accent1"/>
+          </a:fillRef>
+          <a:effectRef idx="2">
+            <a:schemeClr val="accent1"/>
+          </a:effectRef>
+          <a:fontRef idx="minor"/>
+        </p:style>
+        <p:txBody>
+          <a:bodyPr lIns="90000" rIns="90000" tIns="45000" bIns="45000" anchor="ctr">
+            <a:noAutofit/>
+          </a:bodyPr>
+          <a:p>
+            <a:endParaRPr b="0" lang="en-US" sz="1800" spc="-1" strike="noStrike">
+              <a:solidFill>
+                <a:schemeClr val="lt1"/>
+              </a:solidFill>
+              <a:latin typeface="Calibri"/>
+              <a:ea typeface="DejaVu Sans"/>
+            </a:endParaRPr>
+          </a:p>
+        </p:txBody>
+      </p:sp>
+      <p:sp>
+        <p:nvSpPr>
+          <p:cNvPr id="103" name="Rectangle 43"/>
+          <p:cNvSpPr/>
+          <p:nvPr/>
+        </p:nvSpPr>
+        <p:spPr>
+          <a:xfrm>
+            <a:off x="8229600" y="0"/>
+            <a:ext cx="16920" cy="6856560"/>
+          </a:xfrm>
+          <a:prstGeom prst="rect">
+            <a:avLst/>
+          </a:prstGeom>
+          <a:solidFill>
+            <a:srgbClr val="121216"/>
+          </a:solidFill>
+          <a:ln>
+            <a:noFill/>
+          </a:ln>
+          <a:effectLst>
+            <a:outerShdw blurRad="39960" dir="5400000" dist="23040" rotWithShape="0">
+              <a:srgbClr val="000000">
+                <a:alpha val="35000"/>
+              </a:srgbClr>
+            </a:outerShdw>
+          </a:effectLst>
+        </p:spPr>
+        <p:style>
+          <a:lnRef idx="1">
+            <a:schemeClr val="accent1"/>
+          </a:lnRef>
+          <a:fillRef idx="3">
+            <a:schemeClr val="accent1"/>
+          </a:fillRef>
+          <a:effectRef idx="2">
+            <a:schemeClr val="accent1"/>
+          </a:effectRef>
+          <a:fontRef idx="minor"/>
+        </p:style>
+        <p:txBody>
+          <a:bodyPr lIns="90000" rIns="90000" tIns="45000" bIns="45000" anchor="ctr">
+            <a:noAutofit/>
+          </a:bodyPr>
+          <a:p>
+            <a:endParaRPr b="0" lang="en-US" sz="1800" spc="-1" strike="noStrike">
+              <a:solidFill>
+                <a:schemeClr val="lt1"/>
+              </a:solidFill>
+              <a:latin typeface="Calibri"/>
+              <a:ea typeface="DejaVu Sans"/>
+            </a:endParaRPr>
+          </a:p>
+        </p:txBody>
+      </p:sp>
+      <p:sp>
+        <p:nvSpPr>
+          <p:cNvPr id="104" name="Rectangle 44"/>
+          <p:cNvSpPr/>
+          <p:nvPr/>
+        </p:nvSpPr>
+        <p:spPr>
+          <a:xfrm>
+            <a:off x="9144000" y="0"/>
+            <a:ext cx="16920" cy="6856560"/>
+          </a:xfrm>
+          <a:prstGeom prst="rect">
+            <a:avLst/>
+          </a:prstGeom>
+          <a:solidFill>
+            <a:srgbClr val="121216"/>
+          </a:solidFill>
+          <a:ln>
+            <a:noFill/>
+          </a:ln>
+          <a:effectLst>
+            <a:outerShdw blurRad="39960" dir="5400000" dist="23040" rotWithShape="0">
+              <a:srgbClr val="000000">
+                <a:alpha val="35000"/>
+              </a:srgbClr>
+            </a:outerShdw>
+          </a:effectLst>
+        </p:spPr>
+        <p:style>
+          <a:lnRef idx="1">
+            <a:schemeClr val="accent1"/>
+          </a:lnRef>
+          <a:fillRef idx="3">
+            <a:schemeClr val="accent1"/>
+          </a:fillRef>
+          <a:effectRef idx="2">
+            <a:schemeClr val="accent1"/>
+          </a:effectRef>
+          <a:fontRef idx="minor"/>
+        </p:style>
+        <p:txBody>
+          <a:bodyPr lIns="90000" rIns="90000" tIns="45000" bIns="45000" anchor="ctr">
+            <a:noAutofit/>
+          </a:bodyPr>
+          <a:p>
+            <a:endParaRPr b="0" lang="en-US" sz="1800" spc="-1" strike="noStrike">
+              <a:solidFill>
+                <a:schemeClr val="lt1"/>
+              </a:solidFill>
+              <a:latin typeface="Calibri"/>
+              <a:ea typeface="DejaVu Sans"/>
+            </a:endParaRPr>
+          </a:p>
+        </p:txBody>
+      </p:sp>
+      <p:sp>
+        <p:nvSpPr>
+          <p:cNvPr id="105" name="Rectangle 45"/>
+          <p:cNvSpPr/>
+          <p:nvPr/>
+        </p:nvSpPr>
+        <p:spPr>
+          <a:xfrm>
+            <a:off x="10058400" y="0"/>
+            <a:ext cx="16920" cy="6856560"/>
+          </a:xfrm>
+          <a:prstGeom prst="rect">
+            <a:avLst/>
+          </a:prstGeom>
+          <a:solidFill>
+            <a:srgbClr val="121216"/>
+          </a:solidFill>
+          <a:ln>
+            <a:noFill/>
+          </a:ln>
+          <a:effectLst>
+            <a:outerShdw blurRad="39960" dir="5400000" dist="23040" rotWithShape="0">
+              <a:srgbClr val="000000">
+                <a:alpha val="35000"/>
+              </a:srgbClr>
+            </a:outerShdw>
+          </a:effectLst>
+        </p:spPr>
+        <p:style>
+          <a:lnRef idx="1">
+            <a:schemeClr val="accent1"/>
+          </a:lnRef>
+          <a:fillRef idx="3">
+            <a:schemeClr val="accent1"/>
+          </a:fillRef>
+          <a:effectRef idx="2">
+            <a:schemeClr val="accent1"/>
+          </a:effectRef>
+          <a:fontRef idx="minor"/>
+        </p:style>
+        <p:txBody>
+          <a:bodyPr lIns="90000" rIns="90000" tIns="45000" bIns="45000" anchor="ctr">
+            <a:noAutofit/>
+          </a:bodyPr>
+          <a:p>
+            <a:endParaRPr b="0" lang="en-US" sz="1800" spc="-1" strike="noStrike">
+              <a:solidFill>
+                <a:schemeClr val="lt1"/>
+              </a:solidFill>
+              <a:latin typeface="Calibri"/>
+              <a:ea typeface="DejaVu Sans"/>
+            </a:endParaRPr>
+          </a:p>
+        </p:txBody>
+      </p:sp>
+      <p:sp>
+        <p:nvSpPr>
+          <p:cNvPr id="106" name="Rectangle 46"/>
+          <p:cNvSpPr/>
+          <p:nvPr/>
+        </p:nvSpPr>
+        <p:spPr>
+          <a:xfrm>
+            <a:off x="10972800" y="0"/>
+            <a:ext cx="16920" cy="6856560"/>
+          </a:xfrm>
+          <a:prstGeom prst="rect">
+            <a:avLst/>
+          </a:prstGeom>
+          <a:solidFill>
+            <a:srgbClr val="121216"/>
+          </a:solidFill>
+          <a:ln>
+            <a:noFill/>
+          </a:ln>
+          <a:effectLst>
+            <a:outerShdw blurRad="39960" dir="5400000" dist="23040" rotWithShape="0">
+              <a:srgbClr val="000000">
+                <a:alpha val="35000"/>
+              </a:srgbClr>
+            </a:outerShdw>
+          </a:effectLst>
+        </p:spPr>
+        <p:style>
+          <a:lnRef idx="1">
+            <a:schemeClr val="accent1"/>
+          </a:lnRef>
+          <a:fillRef idx="3">
+            <a:schemeClr val="accent1"/>
+          </a:fillRef>
+          <a:effectRef idx="2">
+            <a:schemeClr val="accent1"/>
+          </a:effectRef>
+          <a:fontRef idx="minor"/>
+        </p:style>
+        <p:txBody>
+          <a:bodyPr lIns="90000" rIns="90000" tIns="45000" bIns="45000" anchor="ctr">
+            <a:noAutofit/>
+          </a:bodyPr>
+          <a:p>
+            <a:endParaRPr b="0" lang="en-US" sz="1800" spc="-1" strike="noStrike">
+              <a:solidFill>
+                <a:schemeClr val="lt1"/>
+              </a:solidFill>
+              <a:latin typeface="Calibri"/>
+              <a:ea typeface="DejaVu Sans"/>
+            </a:endParaRPr>
+          </a:p>
+        </p:txBody>
+      </p:sp>
+      <p:sp>
+        <p:nvSpPr>
+          <p:cNvPr id="107" name="Rectangle 47"/>
+          <p:cNvSpPr/>
+          <p:nvPr/>
+        </p:nvSpPr>
+        <p:spPr>
+          <a:xfrm>
+            <a:off x="11887200" y="0"/>
+            <a:ext cx="16920" cy="6856560"/>
+          </a:xfrm>
+          <a:prstGeom prst="rect">
+            <a:avLst/>
+          </a:prstGeom>
+          <a:solidFill>
+            <a:srgbClr val="121216"/>
+          </a:solidFill>
+          <a:ln>
+            <a:noFill/>
+          </a:ln>
+          <a:effectLst>
+            <a:outerShdw blurRad="39960" dir="5400000" dist="23040" rotWithShape="0">
+              <a:srgbClr val="000000">
+                <a:alpha val="35000"/>
+              </a:srgbClr>
+            </a:outerShdw>
+          </a:effectLst>
+        </p:spPr>
+        <p:style>
+          <a:lnRef idx="1">
+            <a:schemeClr val="accent1"/>
+          </a:lnRef>
+          <a:fillRef idx="3">
+            <a:schemeClr val="accent1"/>
+          </a:fillRef>
+          <a:effectRef idx="2">
+            <a:schemeClr val="accent1"/>
+          </a:effectRef>
+          <a:fontRef idx="minor"/>
+        </p:style>
+        <p:txBody>
+          <a:bodyPr lIns="90000" rIns="90000" tIns="45000" bIns="45000" anchor="ctr">
+            <a:noAutofit/>
+          </a:bodyPr>
+          <a:p>
+            <a:endParaRPr b="0" lang="en-US" sz="1800" spc="-1" strike="noStrike">
+              <a:solidFill>
+                <a:schemeClr val="lt1"/>
+              </a:solidFill>
+              <a:latin typeface="Calibri"/>
+              <a:ea typeface="DejaVu Sans"/>
+            </a:endParaRPr>
+          </a:p>
+        </p:txBody>
+      </p:sp>
+      <p:sp>
+        <p:nvSpPr>
+          <p:cNvPr id="108" name="Rectangle 48"/>
+          <p:cNvSpPr/>
+          <p:nvPr/>
+        </p:nvSpPr>
+        <p:spPr>
+          <a:xfrm>
+            <a:off x="0" y="0"/>
+            <a:ext cx="318600" cy="6856560"/>
+          </a:xfrm>
+          <a:prstGeom prst="rect">
+            <a:avLst/>
+          </a:prstGeom>
+          <a:solidFill>
+            <a:srgbClr val="ff8c00"/>
+          </a:solidFill>
+          <a:ln>
+            <a:noFill/>
+          </a:ln>
+          <a:effectLst>
+            <a:outerShdw blurRad="39960" dir="5400000" dist="23040" rotWithShape="0">
+              <a:srgbClr val="000000">
+                <a:alpha val="35000"/>
+              </a:srgbClr>
+            </a:outerShdw>
+          </a:effectLst>
+        </p:spPr>
+        <p:style>
+          <a:lnRef idx="1">
+            <a:schemeClr val="accent1"/>
+          </a:lnRef>
+          <a:fillRef idx="3">
+            <a:schemeClr val="accent1"/>
+          </a:fillRef>
+          <a:effectRef idx="2">
+            <a:schemeClr val="accent1"/>
+          </a:effectRef>
+          <a:fontRef idx="minor"/>
+        </p:style>
+        <p:txBody>
+          <a:bodyPr lIns="90000" rIns="90000" tIns="45000" bIns="45000" anchor="ctr">
+            <a:noAutofit/>
+          </a:bodyPr>
+          <a:p>
+            <a:endParaRPr b="0" lang="en-US" sz="1800" spc="-1" strike="noStrike">
+              <a:solidFill>
+                <a:schemeClr val="lt1"/>
+              </a:solidFill>
+              <a:latin typeface="Calibri"/>
+              <a:ea typeface="DejaVu Sans"/>
+            </a:endParaRPr>
+          </a:p>
+        </p:txBody>
+      </p:sp>
+      <p:sp>
+        <p:nvSpPr>
+          <p:cNvPr id="109" name="Rounded Rectangle 15"/>
+          <p:cNvSpPr/>
+          <p:nvPr/>
+        </p:nvSpPr>
+        <p:spPr>
+          <a:xfrm>
+            <a:off x="9875520" y="365760"/>
+            <a:ext cx="2010240" cy="501480"/>
+          </a:xfrm>
+          <a:prstGeom prst="roundRect">
+            <a:avLst>
+              <a:gd name="adj" fmla="val 16667"/>
+            </a:avLst>
+          </a:prstGeom>
+          <a:solidFill>
+            <a:srgbClr val="1e1e24"/>
+          </a:solidFill>
+          <a:ln>
+            <a:solidFill>
+              <a:srgbClr val="ff8c00"/>
+            </a:solidFill>
+            <a:round/>
+          </a:ln>
+          <a:effectLst>
+            <a:outerShdw blurRad="39960" dir="5400000" dist="23040" rotWithShape="0">
+              <a:srgbClr val="000000">
+                <a:alpha val="35000"/>
+              </a:srgbClr>
+            </a:outerShdw>
+          </a:effectLst>
+        </p:spPr>
+        <p:style>
+          <a:lnRef idx="1">
+            <a:schemeClr val="accent1"/>
+          </a:lnRef>
+          <a:fillRef idx="3">
+            <a:schemeClr val="accent1"/>
+          </a:fillRef>
+          <a:effectRef idx="2">
+            <a:schemeClr val="accent1"/>
+          </a:effectRef>
+          <a:fontRef idx="minor"/>
+        </p:style>
+        <p:txBody>
+          <a:bodyPr lIns="90000" rIns="90000" tIns="45000" bIns="45000" anchor="ctr">
+            <a:noAutofit/>
+          </a:bodyPr>
+          <a:p>
+            <a:pPr algn="ctr">
+              <a:lnSpc>
+                <a:spcPct val="100000"/>
+              </a:lnSpc>
+            </a:pPr>
+            <a:r>
+              <a:rPr b="1" lang="en-US" sz="1400" spc="-1" strike="noStrike">
+                <a:solidFill>
+                  <a:srgbClr val="ffb45a"/>
+                </a:solidFill>
+                <a:latin typeface="Calibri"/>
+                <a:ea typeface="DejaVu Sans"/>
+              </a:rPr>
+              <a:t>JAVA CORE</a:t>
+            </a:r>
+            <a:endParaRPr b="0" lang="en-US" sz="1400" spc="-1" strike="noStrike">
+              <a:solidFill>
+                <a:srgbClr val="ffffff"/>
+              </a:solidFill>
+              <a:latin typeface="Arial"/>
+            </a:endParaRPr>
+          </a:p>
+        </p:txBody>
+      </p:sp>
+      <p:sp>
+        <p:nvSpPr>
+          <p:cNvPr id="110" name="TextBox 7"/>
+          <p:cNvSpPr/>
+          <p:nvPr/>
+        </p:nvSpPr>
+        <p:spPr>
+          <a:xfrm>
+            <a:off x="855000" y="914400"/>
+            <a:ext cx="9261000" cy="638280"/>
+          </a:xfrm>
+          <a:prstGeom prst="rect">
+            <a:avLst/>
+          </a:prstGeom>
+          <a:noFill/>
+          <a:ln w="0">
+            <a:noFill/>
+          </a:ln>
+        </p:spPr>
+        <p:style>
+          <a:lnRef idx="0"/>
+          <a:fillRef idx="0"/>
+          <a:effectRef idx="0"/>
+          <a:fontRef idx="minor"/>
+        </p:style>
+        <p:txBody>
+          <a:bodyPr wrap="none" lIns="90000" rIns="90000" tIns="45000" bIns="45000" anchor="t">
+            <a:spAutoFit/>
+          </a:bodyPr>
+          <a:p>
+            <a:pPr>
+              <a:lnSpc>
+                <a:spcPct val="100000"/>
+              </a:lnSpc>
+            </a:pPr>
+            <a:r>
+              <a:rPr b="1" lang="en-US" sz="3600" spc="-1" strike="noStrike">
+                <a:solidFill>
+                  <a:srgbClr val="f5f5f5"/>
+                </a:solidFill>
+                <a:latin typeface="Calibri"/>
+                <a:ea typeface="DejaVu Sans"/>
+              </a:rPr>
+              <a:t>LocalDate, LocalTime and LocalDateTime in Java</a:t>
+            </a:r>
+            <a:endParaRPr b="0" lang="en-US" sz="3600" spc="-1" strike="noStrike">
+              <a:solidFill>
+                <a:srgbClr val="000000"/>
+              </a:solidFill>
+              <a:latin typeface="Arial"/>
+            </a:endParaRPr>
+          </a:p>
+        </p:txBody>
+      </p:sp>
+      <p:sp>
+        <p:nvSpPr>
+          <p:cNvPr id="111" name="TextBox 8"/>
+          <p:cNvSpPr/>
+          <p:nvPr/>
+        </p:nvSpPr>
+        <p:spPr>
+          <a:xfrm>
+            <a:off x="1304280" y="1828800"/>
+            <a:ext cx="8880120" cy="819720"/>
+          </a:xfrm>
+          <a:prstGeom prst="rect">
+            <a:avLst/>
+          </a:prstGeom>
+          <a:noFill/>
+          <a:ln w="0">
+            <a:noFill/>
+          </a:ln>
+        </p:spPr>
+        <p:style>
+          <a:lnRef idx="0"/>
+          <a:fillRef idx="0"/>
+          <a:effectRef idx="0"/>
+          <a:fontRef idx="minor"/>
+        </p:style>
+        <p:txBody>
+          <a:bodyPr wrap="none" lIns="90000" rIns="90000" tIns="45000" bIns="45000" anchor="t">
+            <a:spAutoFit/>
+          </a:bodyPr>
+          <a:p>
+            <a:pPr>
+              <a:lnSpc>
+                <a:spcPct val="100000"/>
+              </a:lnSpc>
+            </a:pPr>
+            <a:r>
+              <a:rPr b="0" lang="en-US" sz="1600" spc="-1" strike="noStrike">
+                <a:solidFill>
+                  <a:srgbClr val="aaaaaa"/>
+                </a:solidFill>
+                <a:latin typeface="Calibri"/>
+                <a:ea typeface="DejaVu Sans"/>
+              </a:rPr>
+              <a:t>In Java, date and time handling is not always dependent on time zones. In some cases, only the date, only </a:t>
+            </a:r>
+            <a:endParaRPr b="0" lang="en-US" sz="1600" spc="-1" strike="noStrike">
+              <a:solidFill>
+                <a:srgbClr val="000000"/>
+              </a:solidFill>
+              <a:latin typeface="Arial"/>
+            </a:endParaRPr>
+          </a:p>
+          <a:p>
+            <a:pPr>
+              <a:lnSpc>
+                <a:spcPct val="100000"/>
+              </a:lnSpc>
+            </a:pPr>
+            <a:r>
+              <a:rPr b="0" lang="en-US" sz="1600" spc="-1" strike="noStrike">
+                <a:solidFill>
+                  <a:srgbClr val="aaaaaa"/>
+                </a:solidFill>
+                <a:latin typeface="Calibri"/>
+                <a:ea typeface="DejaVu Sans"/>
+              </a:rPr>
+              <a:t>the time, or both together are needed. </a:t>
+            </a:r>
+            <a:endParaRPr b="0" lang="en-US" sz="1600" spc="-1" strike="noStrike">
+              <a:solidFill>
+                <a:srgbClr val="000000"/>
+              </a:solidFill>
+              <a:latin typeface="Arial"/>
+            </a:endParaRPr>
+          </a:p>
+          <a:p>
+            <a:pPr>
+              <a:lnSpc>
+                <a:spcPct val="100000"/>
+              </a:lnSpc>
+            </a:pPr>
+            <a:r>
+              <a:rPr b="0" lang="en-US" sz="1600" spc="-1" strike="noStrike">
+                <a:solidFill>
+                  <a:srgbClr val="aaaaaa"/>
+                </a:solidFill>
+                <a:latin typeface="Calibri"/>
+                <a:ea typeface="DejaVu Sans"/>
+              </a:rPr>
+              <a:t>For these purposes, LocalDate, LocalTime, and LocalDateTime classes are used.</a:t>
+            </a:r>
+            <a:endParaRPr b="0" lang="en-US" sz="1600" spc="-1" strike="noStrike">
+              <a:solidFill>
+                <a:srgbClr val="000000"/>
+              </a:solidFill>
+              <a:latin typeface="Arial"/>
+            </a:endParaRPr>
+          </a:p>
+        </p:txBody>
+      </p:sp>
+      <p:sp>
+        <p:nvSpPr>
+          <p:cNvPr id="112" name="Rounded Rectangle 16"/>
+          <p:cNvSpPr/>
+          <p:nvPr/>
+        </p:nvSpPr>
+        <p:spPr>
+          <a:xfrm>
+            <a:off x="987480" y="3182040"/>
+            <a:ext cx="3290400" cy="2741760"/>
+          </a:xfrm>
+          <a:prstGeom prst="roundRect">
+            <a:avLst>
+              <a:gd name="adj" fmla="val 16667"/>
+            </a:avLst>
+          </a:prstGeom>
+          <a:solidFill>
+            <a:srgbClr val="08080a"/>
+          </a:solidFill>
+          <a:ln>
+            <a:noFill/>
+          </a:ln>
+          <a:effectLst>
+            <a:outerShdw blurRad="39960" dir="5400000" dist="23040" rotWithShape="0">
+              <a:srgbClr val="000000">
+                <a:alpha val="35000"/>
+              </a:srgbClr>
+            </a:outerShdw>
+          </a:effectLst>
+        </p:spPr>
+        <p:style>
+          <a:lnRef idx="1">
+            <a:schemeClr val="accent1"/>
+          </a:lnRef>
+          <a:fillRef idx="3">
+            <a:schemeClr val="accent1"/>
+          </a:fillRef>
+          <a:effectRef idx="2">
+            <a:schemeClr val="accent1"/>
+          </a:effectRef>
+          <a:fontRef idx="minor"/>
+        </p:style>
+        <p:txBody>
+          <a:bodyPr lIns="90000" rIns="90000" tIns="45000" bIns="45000" anchor="ctr">
+            <a:noAutofit/>
+          </a:bodyPr>
+          <a:p>
+            <a:endParaRPr b="0" lang="en-US" sz="1800" spc="-1" strike="noStrike">
+              <a:solidFill>
+                <a:schemeClr val="lt1"/>
+              </a:solidFill>
+              <a:latin typeface="Calibri"/>
+              <a:ea typeface="DejaVu Sans"/>
+            </a:endParaRPr>
+          </a:p>
+        </p:txBody>
+      </p:sp>
+      <p:sp>
+        <p:nvSpPr>
+          <p:cNvPr id="113" name="Rounded Rectangle 18"/>
+          <p:cNvSpPr/>
+          <p:nvPr/>
+        </p:nvSpPr>
+        <p:spPr>
+          <a:xfrm>
+            <a:off x="685800" y="2971800"/>
+            <a:ext cx="3519000" cy="3200040"/>
+          </a:xfrm>
+          <a:prstGeom prst="roundRect">
+            <a:avLst>
+              <a:gd name="adj" fmla="val 16667"/>
+            </a:avLst>
+          </a:prstGeom>
+          <a:solidFill>
+            <a:srgbClr val="16161c"/>
+          </a:solidFill>
+          <a:ln>
+            <a:solidFill>
+              <a:srgbClr val="464655"/>
+            </a:solidFill>
+            <a:round/>
+          </a:ln>
+          <a:effectLst>
+            <a:outerShdw blurRad="39960" dir="5400000" dist="23040" rotWithShape="0">
+              <a:srgbClr val="000000">
+                <a:alpha val="35000"/>
+              </a:srgbClr>
+            </a:outerShdw>
+          </a:effectLst>
+        </p:spPr>
+        <p:style>
+          <a:lnRef idx="1">
+            <a:schemeClr val="accent1"/>
+          </a:lnRef>
+          <a:fillRef idx="3">
+            <a:schemeClr val="accent1"/>
+          </a:fillRef>
+          <a:effectRef idx="2">
+            <a:schemeClr val="accent1"/>
+          </a:effectRef>
+          <a:fontRef idx="minor"/>
+        </p:style>
+        <p:txBody>
+          <a:bodyPr lIns="90000" rIns="90000" tIns="45000" bIns="45000" anchor="ctr">
+            <a:noAutofit/>
+          </a:bodyPr>
+          <a:p>
+            <a:pPr marL="216000" indent="-216000">
+              <a:lnSpc>
+                <a:spcPct val="100000"/>
+              </a:lnSpc>
+              <a:buClr>
+                <a:srgbClr val="ffffff"/>
+              </a:buClr>
+              <a:buFont typeface="Wingdings" charset="2"/>
+              <a:buChar char=""/>
+            </a:pPr>
+            <a:r>
+              <a:rPr b="1" lang="en-US" sz="1800" spc="-1" strike="noStrike">
+                <a:solidFill>
+                  <a:schemeClr val="lt1"/>
+                </a:solidFill>
+                <a:latin typeface="Calibri"/>
+                <a:ea typeface="DejaVu Sans"/>
+              </a:rPr>
+              <a:t>LocalDate → Stores only date information (year, month, day)</a:t>
+            </a:r>
+            <a:endParaRPr b="0" lang="en-US" sz="1800" spc="-1" strike="noStrike">
+              <a:solidFill>
+                <a:srgbClr val="ffffff"/>
+              </a:solidFill>
+              <a:latin typeface="Arial"/>
+            </a:endParaRPr>
+          </a:p>
+          <a:p>
+            <a:pPr marL="216000" indent="-216000">
+              <a:lnSpc>
+                <a:spcPct val="100000"/>
+              </a:lnSpc>
+              <a:buClr>
+                <a:srgbClr val="ffffff"/>
+              </a:buClr>
+              <a:buFont typeface="Wingdings" charset="2"/>
+              <a:buChar char=""/>
+            </a:pPr>
+            <a:r>
+              <a:rPr b="1" lang="en-US" sz="1800" spc="-1" strike="noStrike">
+                <a:solidFill>
+                  <a:schemeClr val="lt1"/>
+                </a:solidFill>
+                <a:latin typeface="Calibri"/>
+                <a:ea typeface="DejaVu Sans"/>
+              </a:rPr>
+              <a:t>LocalTime → Stores only time information (hour, minute, second)</a:t>
+            </a:r>
+            <a:endParaRPr b="0" lang="en-US" sz="1800" spc="-1" strike="noStrike">
+              <a:solidFill>
+                <a:srgbClr val="ffffff"/>
+              </a:solidFill>
+              <a:latin typeface="Arial"/>
+            </a:endParaRPr>
+          </a:p>
+          <a:p>
+            <a:pPr marL="216000" indent="-216000">
+              <a:lnSpc>
+                <a:spcPct val="100000"/>
+              </a:lnSpc>
+              <a:buClr>
+                <a:srgbClr val="ffffff"/>
+              </a:buClr>
+              <a:buFont typeface="Wingdings" charset="2"/>
+              <a:buChar char=""/>
+            </a:pPr>
+            <a:r>
+              <a:rPr b="1" lang="en-US" sz="1800" spc="-1" strike="noStrike">
+                <a:solidFill>
+                  <a:schemeClr val="lt1"/>
+                </a:solidFill>
+                <a:latin typeface="Calibri"/>
+                <a:ea typeface="DejaVu Sans"/>
+              </a:rPr>
+              <a:t>LocalDateTime → Stores both date and time together</a:t>
+            </a:r>
+            <a:endParaRPr b="0" lang="en-US" sz="1800" spc="-1" strike="noStrike">
+              <a:solidFill>
+                <a:srgbClr val="ffffff"/>
+              </a:solidFill>
+              <a:latin typeface="Arial"/>
+            </a:endParaRPr>
+          </a:p>
+          <a:p>
+            <a:pPr marL="216000" indent="-216000">
+              <a:lnSpc>
+                <a:spcPct val="100000"/>
+              </a:lnSpc>
+              <a:buClr>
+                <a:srgbClr val="ffffff"/>
+              </a:buClr>
+              <a:buFont typeface="Wingdings" charset="2"/>
+              <a:buChar char=""/>
+            </a:pPr>
+            <a:r>
+              <a:rPr b="1" lang="en-US" sz="1800" spc="-1" strike="noStrike">
+                <a:solidFill>
+                  <a:schemeClr val="lt1"/>
+                </a:solidFill>
+                <a:latin typeface="Calibri"/>
+                <a:ea typeface="DejaVu Sans"/>
+              </a:rPr>
+              <a:t>They do not include time zone information</a:t>
+            </a:r>
+            <a:endParaRPr b="0" lang="en-US" sz="1800" spc="-1" strike="noStrike">
+              <a:solidFill>
+                <a:srgbClr val="ffffff"/>
+              </a:solidFill>
+              <a:latin typeface="Arial"/>
+            </a:endParaRPr>
+          </a:p>
+          <a:p>
+            <a:pPr marL="216000" indent="-216000">
+              <a:lnSpc>
+                <a:spcPct val="100000"/>
+              </a:lnSpc>
+              <a:buClr>
+                <a:srgbClr val="ffffff"/>
+              </a:buClr>
+              <a:buFont typeface="Wingdings" charset="2"/>
+              <a:buChar char=""/>
+            </a:pPr>
+            <a:r>
+              <a:rPr b="1" lang="en-US" sz="1800" spc="-1" strike="noStrike">
+                <a:solidFill>
+                  <a:schemeClr val="lt1"/>
+                </a:solidFill>
+                <a:latin typeface="Calibri"/>
+                <a:ea typeface="DejaVu Sans"/>
+              </a:rPr>
+              <a:t>Provide a simpler and more efficient usage</a:t>
+            </a:r>
+            <a:endParaRPr b="0" lang="en-US" sz="1800" spc="-1" strike="noStrike">
+              <a:solidFill>
+                <a:srgbClr val="ffffff"/>
+              </a:solidFill>
+              <a:latin typeface="Arial"/>
+            </a:endParaRPr>
+          </a:p>
+        </p:txBody>
+      </p:sp>
+      <p:sp>
+        <p:nvSpPr>
+          <p:cNvPr id="114" name="Rounded Rectangle 19"/>
+          <p:cNvSpPr/>
+          <p:nvPr/>
+        </p:nvSpPr>
+        <p:spPr>
+          <a:xfrm>
+            <a:off x="4507920" y="3182040"/>
+            <a:ext cx="3290400" cy="2741760"/>
+          </a:xfrm>
+          <a:prstGeom prst="roundRect">
+            <a:avLst>
+              <a:gd name="adj" fmla="val 16667"/>
+            </a:avLst>
+          </a:prstGeom>
+          <a:solidFill>
+            <a:srgbClr val="08080a"/>
+          </a:solidFill>
+          <a:ln>
+            <a:noFill/>
+          </a:ln>
+          <a:effectLst>
+            <a:outerShdw blurRad="39960" dir="5400000" dist="23040" rotWithShape="0">
+              <a:srgbClr val="000000">
+                <a:alpha val="35000"/>
+              </a:srgbClr>
+            </a:outerShdw>
+          </a:effectLst>
+        </p:spPr>
+        <p:style>
+          <a:lnRef idx="1">
+            <a:schemeClr val="accent1"/>
+          </a:lnRef>
+          <a:fillRef idx="3">
+            <a:schemeClr val="accent1"/>
+          </a:fillRef>
+          <a:effectRef idx="2">
+            <a:schemeClr val="accent1"/>
+          </a:effectRef>
+          <a:fontRef idx="minor"/>
+        </p:style>
+        <p:txBody>
+          <a:bodyPr lIns="90000" rIns="90000" tIns="45000" bIns="45000" anchor="ctr">
+            <a:noAutofit/>
+          </a:bodyPr>
+          <a:p>
+            <a:endParaRPr b="0" lang="en-US" sz="1800" spc="-1" strike="noStrike">
+              <a:solidFill>
+                <a:schemeClr val="lt1"/>
+              </a:solidFill>
+              <a:latin typeface="Calibri"/>
+              <a:ea typeface="DejaVu Sans"/>
+            </a:endParaRPr>
+          </a:p>
+        </p:txBody>
+      </p:sp>
+      <p:sp>
+        <p:nvSpPr>
+          <p:cNvPr id="115" name="Rounded Rectangle 26"/>
+          <p:cNvSpPr/>
+          <p:nvPr/>
+        </p:nvSpPr>
+        <p:spPr>
+          <a:xfrm>
+            <a:off x="4434840" y="2971800"/>
+            <a:ext cx="3290400" cy="3428640"/>
+          </a:xfrm>
+          <a:prstGeom prst="roundRect">
+            <a:avLst>
+              <a:gd name="adj" fmla="val 16667"/>
+            </a:avLst>
+          </a:prstGeom>
+          <a:solidFill>
+            <a:srgbClr val="16161c"/>
+          </a:solidFill>
+          <a:ln>
+            <a:solidFill>
+              <a:srgbClr val="464655"/>
+            </a:solidFill>
+            <a:round/>
+          </a:ln>
+          <a:effectLst>
+            <a:outerShdw blurRad="39960" dir="5400000" dist="23040" rotWithShape="0">
+              <a:srgbClr val="000000">
+                <a:alpha val="35000"/>
+              </a:srgbClr>
+            </a:outerShdw>
+          </a:effectLst>
+        </p:spPr>
+        <p:style>
+          <a:lnRef idx="1">
+            <a:schemeClr val="accent1"/>
+          </a:lnRef>
+          <a:fillRef idx="3">
+            <a:schemeClr val="accent1"/>
+          </a:fillRef>
+          <a:effectRef idx="2">
+            <a:schemeClr val="accent1"/>
+          </a:effectRef>
+          <a:fontRef idx="minor"/>
+        </p:style>
+        <p:txBody>
+          <a:bodyPr lIns="90000" rIns="90000" tIns="45000" bIns="45000" anchor="ctr">
+            <a:noAutofit/>
+          </a:bodyPr>
+          <a:p>
+            <a:pPr>
+              <a:lnSpc>
+                <a:spcPct val="100000"/>
+              </a:lnSpc>
+            </a:pPr>
+            <a:r>
+              <a:rPr b="0" lang="en-US" sz="1800" spc="-1" strike="noStrike">
+                <a:solidFill>
+                  <a:schemeClr val="lt1"/>
+                </a:solidFill>
+                <a:latin typeface="Calibri"/>
+                <a:ea typeface="DejaVu Sans"/>
+              </a:rPr>
+              <a:t>Program Starts</a:t>
+            </a:r>
+            <a:endParaRPr b="0" lang="en-US" sz="1800" spc="-1" strike="noStrike">
+              <a:solidFill>
+                <a:srgbClr val="ffffff"/>
+              </a:solidFill>
+              <a:latin typeface="Arial"/>
+            </a:endParaRPr>
+          </a:p>
+          <a:p>
+            <a:pPr>
+              <a:lnSpc>
+                <a:spcPct val="100000"/>
+              </a:lnSpc>
+            </a:pPr>
+            <a:r>
+              <a:rPr b="0" lang="en-US" sz="1800" spc="-1" strike="noStrike">
+                <a:solidFill>
+                  <a:schemeClr val="lt1"/>
+                </a:solidFill>
+                <a:latin typeface="Calibri"/>
+                <a:ea typeface="DejaVu Sans"/>
+              </a:rPr>
+              <a:t>↓</a:t>
+            </a:r>
+            <a:endParaRPr b="0" lang="en-US" sz="1800" spc="-1" strike="noStrike">
+              <a:solidFill>
+                <a:srgbClr val="ffffff"/>
+              </a:solidFill>
+              <a:latin typeface="Arial"/>
+            </a:endParaRPr>
+          </a:p>
+          <a:p>
+            <a:pPr>
+              <a:lnSpc>
+                <a:spcPct val="100000"/>
+              </a:lnSpc>
+            </a:pPr>
+            <a:r>
+              <a:rPr b="0" lang="en-US" sz="1800" spc="-1" strike="noStrike">
+                <a:solidFill>
+                  <a:schemeClr val="lt1"/>
+                </a:solidFill>
+                <a:latin typeface="Calibri"/>
+                <a:ea typeface="DejaVu Sans"/>
+              </a:rPr>
+              <a:t>Appropriate Class is Selected (LocalDate / LocalTime / LocalDateTime)</a:t>
+            </a:r>
+            <a:endParaRPr b="0" lang="en-US" sz="1800" spc="-1" strike="noStrike">
+              <a:solidFill>
+                <a:srgbClr val="ffffff"/>
+              </a:solidFill>
+              <a:latin typeface="Arial"/>
+            </a:endParaRPr>
+          </a:p>
+          <a:p>
+            <a:pPr>
+              <a:lnSpc>
+                <a:spcPct val="100000"/>
+              </a:lnSpc>
+            </a:pPr>
+            <a:r>
+              <a:rPr b="0" lang="en-US" sz="1800" spc="-1" strike="noStrike">
+                <a:solidFill>
+                  <a:schemeClr val="lt1"/>
+                </a:solidFill>
+                <a:latin typeface="Calibri"/>
+                <a:ea typeface="DejaVu Sans"/>
+              </a:rPr>
+              <a:t>↓</a:t>
+            </a:r>
+            <a:endParaRPr b="0" lang="en-US" sz="1800" spc="-1" strike="noStrike">
+              <a:solidFill>
+                <a:srgbClr val="ffffff"/>
+              </a:solidFill>
+              <a:latin typeface="Arial"/>
+            </a:endParaRPr>
+          </a:p>
+          <a:p>
+            <a:pPr>
+              <a:lnSpc>
+                <a:spcPct val="100000"/>
+              </a:lnSpc>
+            </a:pPr>
+            <a:r>
+              <a:rPr b="0" lang="en-US" sz="1800" spc="-1" strike="noStrike">
+                <a:solidFill>
+                  <a:schemeClr val="lt1"/>
+                </a:solidFill>
+                <a:latin typeface="Calibri"/>
+                <a:ea typeface="DejaVu Sans"/>
+              </a:rPr>
+              <a:t>Current Value is Retrieved</a:t>
+            </a:r>
+            <a:endParaRPr b="0" lang="en-US" sz="1800" spc="-1" strike="noStrike">
+              <a:solidFill>
+                <a:srgbClr val="ffffff"/>
+              </a:solidFill>
+              <a:latin typeface="Arial"/>
+            </a:endParaRPr>
+          </a:p>
+          <a:p>
+            <a:pPr>
+              <a:lnSpc>
+                <a:spcPct val="100000"/>
+              </a:lnSpc>
+            </a:pPr>
+            <a:r>
+              <a:rPr b="0" lang="en-US" sz="1800" spc="-1" strike="noStrike">
+                <a:solidFill>
+                  <a:schemeClr val="lt1"/>
+                </a:solidFill>
+                <a:latin typeface="Calibri"/>
+                <a:ea typeface="DejaVu Sans"/>
+              </a:rPr>
+              <a:t>↓</a:t>
+            </a:r>
+            <a:endParaRPr b="0" lang="en-US" sz="1800" spc="-1" strike="noStrike">
+              <a:solidFill>
+                <a:srgbClr val="ffffff"/>
+              </a:solidFill>
+              <a:latin typeface="Arial"/>
+            </a:endParaRPr>
+          </a:p>
+          <a:p>
+            <a:pPr>
+              <a:lnSpc>
+                <a:spcPct val="100000"/>
+              </a:lnSpc>
+            </a:pPr>
+            <a:r>
+              <a:rPr b="0" lang="en-US" sz="1800" spc="-1" strike="noStrike">
+                <a:solidFill>
+                  <a:schemeClr val="lt1"/>
+                </a:solidFill>
+                <a:latin typeface="Calibri"/>
+                <a:ea typeface="DejaVu Sans"/>
+              </a:rPr>
+              <a:t>Processing / Formatting is Applied</a:t>
+            </a:r>
+            <a:endParaRPr b="0" lang="en-US" sz="1800" spc="-1" strike="noStrike">
+              <a:solidFill>
+                <a:srgbClr val="ffffff"/>
+              </a:solidFill>
+              <a:latin typeface="Arial"/>
+            </a:endParaRPr>
+          </a:p>
+          <a:p>
+            <a:pPr>
+              <a:lnSpc>
+                <a:spcPct val="100000"/>
+              </a:lnSpc>
+            </a:pPr>
+            <a:r>
+              <a:rPr b="0" lang="en-US" sz="1800" spc="-1" strike="noStrike">
+                <a:solidFill>
+                  <a:schemeClr val="lt1"/>
+                </a:solidFill>
+                <a:latin typeface="Calibri"/>
+                <a:ea typeface="DejaVu Sans"/>
+              </a:rPr>
+              <a:t>↓</a:t>
+            </a:r>
+            <a:endParaRPr b="0" lang="en-US" sz="1800" spc="-1" strike="noStrike">
+              <a:solidFill>
+                <a:srgbClr val="ffffff"/>
+              </a:solidFill>
+              <a:latin typeface="Arial"/>
+            </a:endParaRPr>
+          </a:p>
+          <a:p>
+            <a:pPr>
+              <a:lnSpc>
+                <a:spcPct val="100000"/>
+              </a:lnSpc>
+            </a:pPr>
+            <a:r>
+              <a:rPr b="0" lang="en-US" sz="1800" spc="-1" strike="noStrike">
+                <a:solidFill>
+                  <a:schemeClr val="lt1"/>
+                </a:solidFill>
+                <a:latin typeface="Calibri"/>
+                <a:ea typeface="DejaVu Sans"/>
+              </a:rPr>
+              <a:t>Result is Displayed</a:t>
+            </a:r>
+            <a:endParaRPr b="0" lang="en-US" sz="1800" spc="-1" strike="noStrike">
+              <a:solidFill>
+                <a:srgbClr val="ffffff"/>
+              </a:solidFill>
+              <a:latin typeface="Arial"/>
+            </a:endParaRPr>
+          </a:p>
+        </p:txBody>
+      </p:sp>
+      <p:sp>
+        <p:nvSpPr>
+          <p:cNvPr id="116" name="Rounded Rectangle 27"/>
+          <p:cNvSpPr/>
+          <p:nvPr/>
+        </p:nvSpPr>
+        <p:spPr>
+          <a:xfrm>
+            <a:off x="8028360" y="3182040"/>
+            <a:ext cx="3290400" cy="2741760"/>
+          </a:xfrm>
+          <a:prstGeom prst="roundRect">
+            <a:avLst>
+              <a:gd name="adj" fmla="val 16667"/>
+            </a:avLst>
+          </a:prstGeom>
+          <a:solidFill>
+            <a:srgbClr val="08080a"/>
+          </a:solidFill>
+          <a:ln>
+            <a:noFill/>
+          </a:ln>
+          <a:effectLst>
+            <a:outerShdw blurRad="39960" dir="5400000" dist="23040" rotWithShape="0">
+              <a:srgbClr val="000000">
+                <a:alpha val="35000"/>
+              </a:srgbClr>
+            </a:outerShdw>
+          </a:effectLst>
+        </p:spPr>
+        <p:style>
+          <a:lnRef idx="1">
+            <a:schemeClr val="accent1"/>
+          </a:lnRef>
+          <a:fillRef idx="3">
+            <a:schemeClr val="accent1"/>
+          </a:fillRef>
+          <a:effectRef idx="2">
+            <a:schemeClr val="accent1"/>
+          </a:effectRef>
+          <a:fontRef idx="minor"/>
+        </p:style>
+        <p:txBody>
+          <a:bodyPr lIns="90000" rIns="90000" tIns="45000" bIns="45000" anchor="ctr">
+            <a:noAutofit/>
+          </a:bodyPr>
+          <a:p>
+            <a:endParaRPr b="0" lang="en-US" sz="1800" spc="-1" strike="noStrike">
+              <a:solidFill>
+                <a:schemeClr val="lt1"/>
+              </a:solidFill>
+              <a:latin typeface="Calibri"/>
+              <a:ea typeface="DejaVu Sans"/>
+            </a:endParaRPr>
+          </a:p>
+        </p:txBody>
+      </p:sp>
+      <p:sp>
+        <p:nvSpPr>
+          <p:cNvPr id="117" name="Rounded Rectangle 28"/>
+          <p:cNvSpPr/>
+          <p:nvPr/>
+        </p:nvSpPr>
+        <p:spPr>
+          <a:xfrm>
+            <a:off x="7955280" y="3108960"/>
+            <a:ext cx="3702960" cy="3062880"/>
+          </a:xfrm>
+          <a:prstGeom prst="roundRect">
+            <a:avLst>
+              <a:gd name="adj" fmla="val 16667"/>
+            </a:avLst>
+          </a:prstGeom>
+          <a:solidFill>
+            <a:srgbClr val="16161c"/>
+          </a:solidFill>
+          <a:ln>
+            <a:solidFill>
+              <a:srgbClr val="464655"/>
+            </a:solidFill>
+            <a:round/>
+          </a:ln>
+          <a:effectLst>
+            <a:outerShdw blurRad="39960" dir="5400000" dist="23040" rotWithShape="0">
+              <a:srgbClr val="000000">
+                <a:alpha val="35000"/>
+              </a:srgbClr>
+            </a:outerShdw>
+          </a:effectLst>
+        </p:spPr>
+        <p:style>
+          <a:lnRef idx="1">
+            <a:schemeClr val="accent1"/>
+          </a:lnRef>
+          <a:fillRef idx="3">
+            <a:schemeClr val="accent1"/>
+          </a:fillRef>
+          <a:effectRef idx="2">
+            <a:schemeClr val="accent1"/>
+          </a:effectRef>
+          <a:fontRef idx="minor"/>
+        </p:style>
+        <p:txBody>
+          <a:bodyPr lIns="90000" rIns="90000" tIns="45000" bIns="45000" anchor="ctr">
+            <a:noAutofit/>
+          </a:bodyPr>
+          <a:p>
+            <a:pPr algn="ctr">
+              <a:lnSpc>
+                <a:spcPct val="100000"/>
+              </a:lnSpc>
+            </a:pPr>
+            <a:r>
+              <a:rPr b="0" lang="en-US" sz="1200" spc="-1" strike="noStrike">
+                <a:solidFill>
+                  <a:srgbClr val="78ffc8"/>
+                </a:solidFill>
+                <a:latin typeface="Consolas"/>
+                <a:ea typeface="DejaVu Sans"/>
+              </a:rPr>
+              <a:t>public class LocalDateTimeExample {</a:t>
+            </a:r>
+            <a:endParaRPr b="0" lang="en-US" sz="1200" spc="-1" strike="noStrike">
+              <a:solidFill>
+                <a:srgbClr val="ffffff"/>
+              </a:solidFill>
+              <a:latin typeface="Arial"/>
+            </a:endParaRPr>
+          </a:p>
+          <a:p>
+            <a:pPr algn="ctr">
+              <a:lnSpc>
+                <a:spcPct val="100000"/>
+              </a:lnSpc>
+            </a:pPr>
+            <a:r>
+              <a:rPr b="0" lang="en-US" sz="1200" spc="-1" strike="noStrike">
+                <a:solidFill>
+                  <a:srgbClr val="78ffc8"/>
+                </a:solidFill>
+                <a:latin typeface="Consolas"/>
+                <a:ea typeface="DejaVu Sans"/>
+              </a:rPr>
+              <a:t>    </a:t>
+            </a:r>
+            <a:r>
+              <a:rPr b="0" lang="en-US" sz="1200" spc="-1" strike="noStrike">
+                <a:solidFill>
+                  <a:srgbClr val="78ffc8"/>
+                </a:solidFill>
+                <a:latin typeface="Consolas"/>
+                <a:ea typeface="DejaVu Sans"/>
+              </a:rPr>
+              <a:t>public static void main(String[] args) {</a:t>
+            </a:r>
+            <a:endParaRPr b="0" lang="en-US" sz="1200" spc="-1" strike="noStrike">
+              <a:solidFill>
+                <a:srgbClr val="ffffff"/>
+              </a:solidFill>
+              <a:latin typeface="Arial"/>
+            </a:endParaRPr>
+          </a:p>
+          <a:p>
+            <a:pPr algn="ctr">
+              <a:lnSpc>
+                <a:spcPct val="100000"/>
+              </a:lnSpc>
+            </a:pPr>
+            <a:r>
+              <a:rPr b="0" lang="en-US" sz="1200" spc="-1" strike="noStrike">
+                <a:solidFill>
+                  <a:srgbClr val="78ffc8"/>
+                </a:solidFill>
+                <a:latin typeface="Consolas"/>
+                <a:ea typeface="DejaVu Sans"/>
+              </a:rPr>
+              <a:t>        </a:t>
+            </a:r>
+            <a:r>
+              <a:rPr b="0" lang="en-US" sz="1200" spc="-1" strike="noStrike">
+                <a:solidFill>
+                  <a:srgbClr val="78ffc8"/>
+                </a:solidFill>
+                <a:latin typeface="Consolas"/>
+                <a:ea typeface="DejaVu Sans"/>
+              </a:rPr>
+              <a:t>LocalDate date = LocalDate.now();</a:t>
+            </a:r>
+            <a:endParaRPr b="0" lang="en-US" sz="1200" spc="-1" strike="noStrike">
+              <a:solidFill>
+                <a:srgbClr val="ffffff"/>
+              </a:solidFill>
+              <a:latin typeface="Arial"/>
+            </a:endParaRPr>
+          </a:p>
+          <a:p>
+            <a:pPr algn="ctr">
+              <a:lnSpc>
+                <a:spcPct val="100000"/>
+              </a:lnSpc>
+            </a:pPr>
+            <a:r>
+              <a:rPr b="0" lang="en-US" sz="1200" spc="-1" strike="noStrike">
+                <a:solidFill>
+                  <a:srgbClr val="78ffc8"/>
+                </a:solidFill>
+                <a:latin typeface="Consolas"/>
+                <a:ea typeface="DejaVu Sans"/>
+              </a:rPr>
+              <a:t>        </a:t>
+            </a:r>
+            <a:r>
+              <a:rPr b="0" lang="en-US" sz="1200" spc="-1" strike="noStrike">
+                <a:solidFill>
+                  <a:srgbClr val="78ffc8"/>
+                </a:solidFill>
+                <a:latin typeface="Consolas"/>
+                <a:ea typeface="DejaVu Sans"/>
+              </a:rPr>
+              <a:t>LocalTime time = LocalTime.now();</a:t>
+            </a:r>
+            <a:endParaRPr b="0" lang="en-US" sz="1200" spc="-1" strike="noStrike">
+              <a:solidFill>
+                <a:srgbClr val="ffffff"/>
+              </a:solidFill>
+              <a:latin typeface="Arial"/>
+            </a:endParaRPr>
+          </a:p>
+          <a:p>
+            <a:pPr algn="ctr">
+              <a:lnSpc>
+                <a:spcPct val="100000"/>
+              </a:lnSpc>
+            </a:pPr>
+            <a:r>
+              <a:rPr b="0" lang="en-US" sz="1200" spc="-1" strike="noStrike">
+                <a:solidFill>
+                  <a:srgbClr val="78ffc8"/>
+                </a:solidFill>
+                <a:latin typeface="Consolas"/>
+                <a:ea typeface="DejaVu Sans"/>
+              </a:rPr>
+              <a:t>        </a:t>
+            </a:r>
+            <a:r>
+              <a:rPr b="0" lang="en-US" sz="1200" spc="-1" strike="noStrike">
+                <a:solidFill>
+                  <a:srgbClr val="78ffc8"/>
+                </a:solidFill>
+                <a:latin typeface="Consolas"/>
+                <a:ea typeface="DejaVu Sans"/>
+              </a:rPr>
+              <a:t>LocalDateTime dateTime = LocalDateTime.now();</a:t>
+            </a:r>
+            <a:endParaRPr b="0" lang="en-US" sz="1200" spc="-1" strike="noStrike">
+              <a:solidFill>
+                <a:srgbClr val="ffffff"/>
+              </a:solidFill>
+              <a:latin typeface="Arial"/>
+            </a:endParaRPr>
+          </a:p>
+          <a:p>
+            <a:pPr algn="ctr">
+              <a:lnSpc>
+                <a:spcPct val="100000"/>
+              </a:lnSpc>
+            </a:pPr>
+            <a:r>
+              <a:rPr b="0" lang="en-US" sz="1200" spc="-1" strike="noStrike">
+                <a:solidFill>
+                  <a:srgbClr val="78ffc8"/>
+                </a:solidFill>
+                <a:latin typeface="Consolas"/>
+                <a:ea typeface="DejaVu Sans"/>
+              </a:rPr>
+              <a:t>        </a:t>
+            </a:r>
+            <a:r>
+              <a:rPr b="0" lang="en-US" sz="1200" spc="-1" strike="noStrike">
+                <a:solidFill>
+                  <a:srgbClr val="78ffc8"/>
+                </a:solidFill>
+                <a:latin typeface="Consolas"/>
+                <a:ea typeface="DejaVu Sans"/>
+              </a:rPr>
+              <a:t>System.out.println("Date: " + date);</a:t>
+            </a:r>
+            <a:endParaRPr b="0" lang="en-US" sz="1200" spc="-1" strike="noStrike">
+              <a:solidFill>
+                <a:srgbClr val="ffffff"/>
+              </a:solidFill>
+              <a:latin typeface="Arial"/>
+            </a:endParaRPr>
+          </a:p>
+          <a:p>
+            <a:pPr algn="ctr">
+              <a:lnSpc>
+                <a:spcPct val="100000"/>
+              </a:lnSpc>
+            </a:pPr>
+            <a:r>
+              <a:rPr b="0" lang="en-US" sz="1200" spc="-1" strike="noStrike">
+                <a:solidFill>
+                  <a:srgbClr val="78ffc8"/>
+                </a:solidFill>
+                <a:latin typeface="Consolas"/>
+                <a:ea typeface="DejaVu Sans"/>
+              </a:rPr>
+              <a:t>        </a:t>
+            </a:r>
+            <a:r>
+              <a:rPr b="0" lang="en-US" sz="1200" spc="-1" strike="noStrike">
+                <a:solidFill>
+                  <a:srgbClr val="78ffc8"/>
+                </a:solidFill>
+                <a:latin typeface="Consolas"/>
+                <a:ea typeface="DejaVu Sans"/>
+              </a:rPr>
+              <a:t>System.out.println("Time: " + time);</a:t>
+            </a:r>
+            <a:endParaRPr b="0" lang="en-US" sz="1200" spc="-1" strike="noStrike">
+              <a:solidFill>
+                <a:srgbClr val="ffffff"/>
+              </a:solidFill>
+              <a:latin typeface="Arial"/>
+            </a:endParaRPr>
+          </a:p>
+          <a:p>
+            <a:pPr algn="ctr">
+              <a:lnSpc>
+                <a:spcPct val="100000"/>
+              </a:lnSpc>
+            </a:pPr>
+            <a:r>
+              <a:rPr b="0" lang="en-US" sz="1200" spc="-1" strike="noStrike">
+                <a:solidFill>
+                  <a:srgbClr val="78ffc8"/>
+                </a:solidFill>
+                <a:latin typeface="Consolas"/>
+                <a:ea typeface="DejaVu Sans"/>
+              </a:rPr>
+              <a:t>        </a:t>
+            </a:r>
+            <a:r>
+              <a:rPr b="0" lang="en-US" sz="1200" spc="-1" strike="noStrike">
+                <a:solidFill>
+                  <a:srgbClr val="78ffc8"/>
+                </a:solidFill>
+                <a:latin typeface="Consolas"/>
+                <a:ea typeface="DejaVu Sans"/>
+              </a:rPr>
+              <a:t>System.out.println("Date and Time: " + dateTime);</a:t>
+            </a:r>
+            <a:endParaRPr b="0" lang="en-US" sz="1200" spc="-1" strike="noStrike">
+              <a:solidFill>
+                <a:srgbClr val="ffffff"/>
+              </a:solidFill>
+              <a:latin typeface="Arial"/>
+            </a:endParaRPr>
+          </a:p>
+          <a:p>
+            <a:pPr algn="ctr">
+              <a:lnSpc>
+                <a:spcPct val="100000"/>
+              </a:lnSpc>
+            </a:pPr>
+            <a:r>
+              <a:rPr b="0" lang="en-US" sz="1200" spc="-1" strike="noStrike">
+                <a:solidFill>
+                  <a:srgbClr val="78ffc8"/>
+                </a:solidFill>
+                <a:latin typeface="Consolas"/>
+                <a:ea typeface="DejaVu Sans"/>
+              </a:rPr>
+              <a:t>    </a:t>
+            </a:r>
+            <a:r>
+              <a:rPr b="0" lang="en-US" sz="1200" spc="-1" strike="noStrike">
+                <a:solidFill>
+                  <a:srgbClr val="78ffc8"/>
+                </a:solidFill>
+                <a:latin typeface="Consolas"/>
+                <a:ea typeface="DejaVu Sans"/>
+              </a:rPr>
+              <a:t>}</a:t>
+            </a:r>
+            <a:endParaRPr b="0" lang="en-US" sz="1200" spc="-1" strike="noStrike">
+              <a:solidFill>
+                <a:srgbClr val="ffffff"/>
+              </a:solidFill>
+              <a:latin typeface="Arial"/>
+            </a:endParaRPr>
+          </a:p>
+          <a:p>
+            <a:pPr algn="ctr">
+              <a:lnSpc>
+                <a:spcPct val="100000"/>
+              </a:lnSpc>
+            </a:pPr>
+            <a:r>
+              <a:rPr b="0" lang="en-US" sz="1200" spc="-1" strike="noStrike">
+                <a:solidFill>
+                  <a:srgbClr val="78ffc8"/>
+                </a:solidFill>
+                <a:latin typeface="Consolas"/>
+                <a:ea typeface="DejaVu Sans"/>
+              </a:rPr>
+              <a:t>}</a:t>
+            </a:r>
+            <a:endParaRPr b="0" lang="en-US" sz="1200" spc="-1" strike="noStrike">
+              <a:solidFill>
+                <a:srgbClr val="ffffff"/>
+              </a:solidFill>
+              <a:latin typeface="Arial"/>
+            </a:endParaRPr>
+          </a:p>
+        </p:txBody>
+      </p:sp>
+      <p:sp>
+        <p:nvSpPr>
+          <p:cNvPr id="118" name="TextBox 9"/>
+          <p:cNvSpPr/>
+          <p:nvPr/>
+        </p:nvSpPr>
+        <p:spPr>
+          <a:xfrm>
+            <a:off x="4600080" y="6446520"/>
+            <a:ext cx="3051360" cy="363960"/>
           </a:xfrm>
           <a:prstGeom prst="rect">
             <a:avLst/>

--- a/Java/Java #4/EN/Java #4.pptx
+++ b/Java/Java #4/EN/Java #4.pptx
@@ -8,6 +8,7 @@
     <p:sldId id="256" r:id="rId3"/>
     <p:sldId id="257" r:id="rId4"/>
     <p:sldId id="258" r:id="rId5"/>
+    <p:sldId id="259" r:id="rId6"/>
   </p:sldIdLst>
   <p:sldSz cx="9144000" cy="6858000"/>
   <p:notesSz cx="7772400" cy="10058400"/>
@@ -65,7 +66,7 @@
         <p:txBody>
           <a:bodyPr/>
           <a:p>
-            <a:fld id="{A1076792-F458-4D4F-A458-6BA8A7193C72}" type="slidenum">
+            <a:fld id="{46D8EFB3-D884-4042-89D1-9E1880297477}" type="slidenum">
               <a:t>&lt;#&gt;</a:t>
             </a:fld>
           </a:p>
@@ -274,7 +275,7 @@
         <p:txBody>
           <a:bodyPr/>
           <a:p>
-            <a:fld id="{A969FC5D-332C-4B53-B37C-45A96468C8D4}" type="slidenum">
+            <a:fld id="{83607E36-69E5-4861-8449-5C716F6E5D23}" type="slidenum">
               <a:t>&lt;#&gt;</a:t>
             </a:fld>
           </a:p>
@@ -569,7 +570,7 @@
         <p:txBody>
           <a:bodyPr/>
           <a:p>
-            <a:fld id="{E2343228-E8BA-4703-8FCD-2AF1D8B558E2}" type="slidenum">
+            <a:fld id="{CDE79773-2AF3-4588-BE6D-3625087D05AC}" type="slidenum">
               <a:t>&lt;#&gt;</a:t>
             </a:fld>
           </a:p>
@@ -950,7 +951,7 @@
         <p:txBody>
           <a:bodyPr/>
           <a:p>
-            <a:fld id="{C763599D-1916-44C1-B8C7-05487F673A4E}" type="slidenum">
+            <a:fld id="{F918DD0E-9114-4A2E-80FF-A2BE5B0B1C4D}" type="slidenum">
               <a:t>&lt;#&gt;</a:t>
             </a:fld>
           </a:p>
@@ -1113,7 +1114,7 @@
         <p:txBody>
           <a:bodyPr/>
           <a:p>
-            <a:fld id="{6B4A4909-A62C-4496-A179-3CB5B87F2095}" type="slidenum">
+            <a:fld id="{472C8311-8197-40E4-95E5-4BFB3B07553C}" type="slidenum">
               <a:t>&lt;#&gt;</a:t>
             </a:fld>
           </a:p>
@@ -1279,7 +1280,7 @@
         <p:txBody>
           <a:bodyPr/>
           <a:p>
-            <a:fld id="{6D084580-6157-435D-861C-1AB83DBE38AA}" type="slidenum">
+            <a:fld id="{F534F754-F9DA-4622-ABF4-53688B73AC75}" type="slidenum">
               <a:t>&lt;#&gt;</a:t>
             </a:fld>
           </a:p>
@@ -1488,7 +1489,7 @@
         <p:txBody>
           <a:bodyPr/>
           <a:p>
-            <a:fld id="{3518A6B2-5C61-47B6-BDD6-1BC7BCF6EF6E}" type="slidenum">
+            <a:fld id="{FB81D979-0CAF-4190-97AA-8FD03752EA0B}" type="slidenum">
               <a:t>&lt;#&gt;</a:t>
             </a:fld>
           </a:p>
@@ -1611,7 +1612,7 @@
         <p:txBody>
           <a:bodyPr/>
           <a:p>
-            <a:fld id="{BC855FC0-5622-4475-A252-3D975DFDF4FD}" type="slidenum">
+            <a:fld id="{A0497624-444A-4EF3-ADB8-26E5C1DC02F0}" type="slidenum">
               <a:t>&lt;#&gt;</a:t>
             </a:fld>
           </a:p>
@@ -1732,7 +1733,7 @@
         <p:txBody>
           <a:bodyPr/>
           <a:p>
-            <a:fld id="{4E193E59-8586-48F1-ABA0-5C7C38C049D4}" type="slidenum">
+            <a:fld id="{53869071-88D0-4740-AFCE-E9D18533D472}" type="slidenum">
               <a:t>&lt;#&gt;</a:t>
             </a:fld>
           </a:p>
@@ -1984,7 +1985,7 @@
         <p:txBody>
           <a:bodyPr/>
           <a:p>
-            <a:fld id="{57CBB68C-C053-410E-9B53-C9C2E23CE10F}" type="slidenum">
+            <a:fld id="{D8ABFA91-84E3-4B9C-AD48-82DB436805C2}" type="slidenum">
               <a:t>&lt;#&gt;</a:t>
             </a:fld>
           </a:p>
@@ -2236,7 +2237,7 @@
         <p:txBody>
           <a:bodyPr/>
           <a:p>
-            <a:fld id="{9115456F-0348-426C-A3F6-2A9E40792512}" type="slidenum">
+            <a:fld id="{95EAE932-8315-4B78-8B12-8B6EA1E7DA47}" type="slidenum">
               <a:t>&lt;#&gt;</a:t>
             </a:fld>
           </a:p>
@@ -2488,7 +2489,7 @@
         <p:txBody>
           <a:bodyPr/>
           <a:p>
-            <a:fld id="{F34B22E4-47D4-4DFE-AD44-19BB06530CF9}" type="slidenum">
+            <a:fld id="{BF4C5CF2-9BD8-4B01-99B7-4968E5632AA5}" type="slidenum">
               <a:t>&lt;#&gt;</a:t>
             </a:fld>
           </a:p>
@@ -2557,7 +2558,7 @@
         <p:spPr>
           <a:xfrm>
             <a:off x="3124080" y="6356520"/>
-            <a:ext cx="2893680" cy="363240"/>
+            <a:ext cx="2893320" cy="362880"/>
           </a:xfrm>
           <a:prstGeom prst="rect">
             <a:avLst/>
@@ -2629,7 +2630,7 @@
         <p:spPr>
           <a:xfrm>
             <a:off x="6553080" y="6356520"/>
-            <a:ext cx="2131920" cy="363240"/>
+            <a:ext cx="2131560" cy="362880"/>
           </a:xfrm>
           <a:prstGeom prst="rect">
             <a:avLst/>
@@ -2670,7 +2671,7 @@
                 <a:tab algn="l" pos="0"/>
               </a:tabLst>
             </a:pPr>
-            <a:fld id="{9D160896-877A-4296-A3CC-5E4E8B715B6A}" type="slidenum">
+            <a:fld id="{8937DDA0-1946-428B-B461-18013A02BC92}" type="slidenum">
               <a:rPr b="0" lang="en-US" sz="1200" spc="-1" strike="noStrike">
                 <a:solidFill>
                   <a:srgbClr val="8b8b8b"/>
@@ -2701,7 +2702,7 @@
         <p:spPr>
           <a:xfrm>
             <a:off x="457200" y="6356520"/>
-            <a:ext cx="2131920" cy="363240"/>
+            <a:ext cx="2131560" cy="362880"/>
           </a:xfrm>
           <a:prstGeom prst="rect">
             <a:avLst/>
@@ -3068,7 +3069,7 @@
         <p:spPr>
           <a:xfrm>
             <a:off x="0" y="0"/>
-            <a:ext cx="12187080" cy="6856200"/>
+            <a:ext cx="12186720" cy="6855840"/>
           </a:xfrm>
           <a:prstGeom prst="rect">
             <a:avLst/>
@@ -3128,7 +3129,7 @@
         <p:spPr>
           <a:xfrm>
             <a:off x="0" y="0"/>
-            <a:ext cx="16560" cy="6856200"/>
+            <a:ext cx="16200" cy="6855840"/>
           </a:xfrm>
           <a:prstGeom prst="rect">
             <a:avLst/>
@@ -3188,7 +3189,7 @@
         <p:spPr>
           <a:xfrm>
             <a:off x="914400" y="0"/>
-            <a:ext cx="16560" cy="6856200"/>
+            <a:ext cx="16200" cy="6855840"/>
           </a:xfrm>
           <a:prstGeom prst="rect">
             <a:avLst/>
@@ -3248,7 +3249,7 @@
         <p:spPr>
           <a:xfrm>
             <a:off x="1828800" y="0"/>
-            <a:ext cx="16560" cy="6856200"/>
+            <a:ext cx="16200" cy="6855840"/>
           </a:xfrm>
           <a:prstGeom prst="rect">
             <a:avLst/>
@@ -3308,7 +3309,7 @@
         <p:spPr>
           <a:xfrm>
             <a:off x="2743200" y="0"/>
-            <a:ext cx="16560" cy="6856200"/>
+            <a:ext cx="16200" cy="6855840"/>
           </a:xfrm>
           <a:prstGeom prst="rect">
             <a:avLst/>
@@ -3368,7 +3369,7 @@
         <p:spPr>
           <a:xfrm>
             <a:off x="3657600" y="0"/>
-            <a:ext cx="16560" cy="6856200"/>
+            <a:ext cx="16200" cy="6855840"/>
           </a:xfrm>
           <a:prstGeom prst="rect">
             <a:avLst/>
@@ -3428,7 +3429,7 @@
         <p:spPr>
           <a:xfrm>
             <a:off x="4572000" y="0"/>
-            <a:ext cx="16560" cy="6856200"/>
+            <a:ext cx="16200" cy="6855840"/>
           </a:xfrm>
           <a:prstGeom prst="rect">
             <a:avLst/>
@@ -3488,7 +3489,7 @@
         <p:spPr>
           <a:xfrm>
             <a:off x="5486400" y="0"/>
-            <a:ext cx="16560" cy="6856200"/>
+            <a:ext cx="16200" cy="6855840"/>
           </a:xfrm>
           <a:prstGeom prst="rect">
             <a:avLst/>
@@ -3548,7 +3549,7 @@
         <p:spPr>
           <a:xfrm>
             <a:off x="6400800" y="0"/>
-            <a:ext cx="16560" cy="6856200"/>
+            <a:ext cx="16200" cy="6855840"/>
           </a:xfrm>
           <a:prstGeom prst="rect">
             <a:avLst/>
@@ -3608,7 +3609,7 @@
         <p:spPr>
           <a:xfrm>
             <a:off x="7315200" y="0"/>
-            <a:ext cx="16560" cy="6856200"/>
+            <a:ext cx="16200" cy="6855840"/>
           </a:xfrm>
           <a:prstGeom prst="rect">
             <a:avLst/>
@@ -3668,7 +3669,7 @@
         <p:spPr>
           <a:xfrm>
             <a:off x="8229600" y="0"/>
-            <a:ext cx="16560" cy="6856200"/>
+            <a:ext cx="16200" cy="6855840"/>
           </a:xfrm>
           <a:prstGeom prst="rect">
             <a:avLst/>
@@ -3728,7 +3729,7 @@
         <p:spPr>
           <a:xfrm>
             <a:off x="9144000" y="0"/>
-            <a:ext cx="16560" cy="6856200"/>
+            <a:ext cx="16200" cy="6855840"/>
           </a:xfrm>
           <a:prstGeom prst="rect">
             <a:avLst/>
@@ -3788,7 +3789,7 @@
         <p:spPr>
           <a:xfrm>
             <a:off x="10058400" y="0"/>
-            <a:ext cx="16560" cy="6856200"/>
+            <a:ext cx="16200" cy="6855840"/>
           </a:xfrm>
           <a:prstGeom prst="rect">
             <a:avLst/>
@@ -3848,7 +3849,7 @@
         <p:spPr>
           <a:xfrm>
             <a:off x="10972800" y="0"/>
-            <a:ext cx="16560" cy="6856200"/>
+            <a:ext cx="16200" cy="6855840"/>
           </a:xfrm>
           <a:prstGeom prst="rect">
             <a:avLst/>
@@ -3908,7 +3909,7 @@
         <p:spPr>
           <a:xfrm>
             <a:off x="11887200" y="0"/>
-            <a:ext cx="16560" cy="6856200"/>
+            <a:ext cx="16200" cy="6855840"/>
           </a:xfrm>
           <a:prstGeom prst="rect">
             <a:avLst/>
@@ -3968,7 +3969,7 @@
         <p:spPr>
           <a:xfrm>
             <a:off x="0" y="0"/>
-            <a:ext cx="318240" cy="6856200"/>
+            <a:ext cx="317880" cy="6855840"/>
           </a:xfrm>
           <a:prstGeom prst="rect">
             <a:avLst/>
@@ -4028,7 +4029,7 @@
         <p:spPr>
           <a:xfrm>
             <a:off x="9875520" y="365760"/>
-            <a:ext cx="2009880" cy="501120"/>
+            <a:ext cx="2009520" cy="500760"/>
           </a:xfrm>
           <a:prstGeom prst="roundRect">
             <a:avLst>
@@ -4156,7 +4157,7 @@
         <p:spPr>
           <a:xfrm>
             <a:off x="1548720" y="1785240"/>
-            <a:ext cx="8508960" cy="957960"/>
+            <a:ext cx="8508600" cy="957960"/>
           </a:xfrm>
           <a:prstGeom prst="rect">
             <a:avLst/>
@@ -4256,7 +4257,7 @@
         <p:spPr>
           <a:xfrm>
             <a:off x="987480" y="3182040"/>
-            <a:ext cx="3290040" cy="2741400"/>
+            <a:ext cx="3289680" cy="2741040"/>
           </a:xfrm>
           <a:prstGeom prst="roundRect">
             <a:avLst>
@@ -4318,7 +4319,7 @@
         <p:spPr>
           <a:xfrm>
             <a:off x="914400" y="3108960"/>
-            <a:ext cx="3290040" cy="2741400"/>
+            <a:ext cx="3289680" cy="2741040"/>
           </a:xfrm>
           <a:prstGeom prst="roundRect">
             <a:avLst>
@@ -4452,7 +4453,7 @@
         <p:spPr>
           <a:xfrm>
             <a:off x="4507920" y="3182040"/>
-            <a:ext cx="3290040" cy="2741400"/>
+            <a:ext cx="3289680" cy="2741040"/>
           </a:xfrm>
           <a:prstGeom prst="roundRect">
             <a:avLst>
@@ -4514,7 +4515,7 @@
         <p:spPr>
           <a:xfrm>
             <a:off x="4434840" y="3108960"/>
-            <a:ext cx="3290040" cy="2741400"/>
+            <a:ext cx="3289680" cy="2741040"/>
           </a:xfrm>
           <a:prstGeom prst="roundRect">
             <a:avLst>
@@ -4772,7 +4773,7 @@
         <p:spPr>
           <a:xfrm>
             <a:off x="8028360" y="3182040"/>
-            <a:ext cx="3290040" cy="2741400"/>
+            <a:ext cx="3289680" cy="2741040"/>
           </a:xfrm>
           <a:prstGeom prst="roundRect">
             <a:avLst>
@@ -4834,7 +4835,7 @@
         <p:spPr>
           <a:xfrm>
             <a:off x="7955280" y="2971800"/>
-            <a:ext cx="3931200" cy="3656880"/>
+            <a:ext cx="3930840" cy="3656520"/>
           </a:xfrm>
           <a:prstGeom prst="roundRect">
             <a:avLst>
@@ -5345,7 +5346,7 @@
         <p:spPr>
           <a:xfrm>
             <a:off x="0" y="0"/>
-            <a:ext cx="12187440" cy="6856560"/>
+            <a:ext cx="12187080" cy="6856200"/>
           </a:xfrm>
           <a:prstGeom prst="rect">
             <a:avLst/>
@@ -5405,7 +5406,7 @@
         <p:spPr>
           <a:xfrm>
             <a:off x="0" y="0"/>
-            <a:ext cx="16920" cy="6856560"/>
+            <a:ext cx="16560" cy="6856200"/>
           </a:xfrm>
           <a:prstGeom prst="rect">
             <a:avLst/>
@@ -5465,7 +5466,7 @@
         <p:spPr>
           <a:xfrm>
             <a:off x="914400" y="0"/>
-            <a:ext cx="16920" cy="6856560"/>
+            <a:ext cx="16560" cy="6856200"/>
           </a:xfrm>
           <a:prstGeom prst="rect">
             <a:avLst/>
@@ -5525,7 +5526,7 @@
         <p:spPr>
           <a:xfrm>
             <a:off x="1828800" y="0"/>
-            <a:ext cx="16920" cy="6856560"/>
+            <a:ext cx="16560" cy="6856200"/>
           </a:xfrm>
           <a:prstGeom prst="rect">
             <a:avLst/>
@@ -5585,7 +5586,7 @@
         <p:spPr>
           <a:xfrm>
             <a:off x="2743200" y="0"/>
-            <a:ext cx="16920" cy="6856560"/>
+            <a:ext cx="16560" cy="6856200"/>
           </a:xfrm>
           <a:prstGeom prst="rect">
             <a:avLst/>
@@ -5645,7 +5646,7 @@
         <p:spPr>
           <a:xfrm>
             <a:off x="3657600" y="0"/>
-            <a:ext cx="16920" cy="6856560"/>
+            <a:ext cx="16560" cy="6856200"/>
           </a:xfrm>
           <a:prstGeom prst="rect">
             <a:avLst/>
@@ -5705,7 +5706,7 @@
         <p:spPr>
           <a:xfrm>
             <a:off x="4572000" y="0"/>
-            <a:ext cx="16920" cy="6856560"/>
+            <a:ext cx="16560" cy="6856200"/>
           </a:xfrm>
           <a:prstGeom prst="rect">
             <a:avLst/>
@@ -5765,7 +5766,7 @@
         <p:spPr>
           <a:xfrm>
             <a:off x="5486400" y="0"/>
-            <a:ext cx="16920" cy="6856560"/>
+            <a:ext cx="16560" cy="6856200"/>
           </a:xfrm>
           <a:prstGeom prst="rect">
             <a:avLst/>
@@ -5825,7 +5826,7 @@
         <p:spPr>
           <a:xfrm>
             <a:off x="6400800" y="0"/>
-            <a:ext cx="16920" cy="6856560"/>
+            <a:ext cx="16560" cy="6856200"/>
           </a:xfrm>
           <a:prstGeom prst="rect">
             <a:avLst/>
@@ -5885,7 +5886,7 @@
         <p:spPr>
           <a:xfrm>
             <a:off x="7315200" y="0"/>
-            <a:ext cx="16920" cy="6856560"/>
+            <a:ext cx="16560" cy="6856200"/>
           </a:xfrm>
           <a:prstGeom prst="rect">
             <a:avLst/>
@@ -5945,7 +5946,7 @@
         <p:spPr>
           <a:xfrm>
             <a:off x="8229600" y="0"/>
-            <a:ext cx="16920" cy="6856560"/>
+            <a:ext cx="16560" cy="6856200"/>
           </a:xfrm>
           <a:prstGeom prst="rect">
             <a:avLst/>
@@ -6005,7 +6006,7 @@
         <p:spPr>
           <a:xfrm>
             <a:off x="9144000" y="0"/>
-            <a:ext cx="16920" cy="6856560"/>
+            <a:ext cx="16560" cy="6856200"/>
           </a:xfrm>
           <a:prstGeom prst="rect">
             <a:avLst/>
@@ -6065,7 +6066,7 @@
         <p:spPr>
           <a:xfrm>
             <a:off x="10058400" y="0"/>
-            <a:ext cx="16920" cy="6856560"/>
+            <a:ext cx="16560" cy="6856200"/>
           </a:xfrm>
           <a:prstGeom prst="rect">
             <a:avLst/>
@@ -6125,7 +6126,7 @@
         <p:spPr>
           <a:xfrm>
             <a:off x="10972800" y="0"/>
-            <a:ext cx="16920" cy="6856560"/>
+            <a:ext cx="16560" cy="6856200"/>
           </a:xfrm>
           <a:prstGeom prst="rect">
             <a:avLst/>
@@ -6185,7 +6186,7 @@
         <p:spPr>
           <a:xfrm>
             <a:off x="11887200" y="0"/>
-            <a:ext cx="16920" cy="6856560"/>
+            <a:ext cx="16560" cy="6856200"/>
           </a:xfrm>
           <a:prstGeom prst="rect">
             <a:avLst/>
@@ -6245,7 +6246,7 @@
         <p:spPr>
           <a:xfrm>
             <a:off x="0" y="0"/>
-            <a:ext cx="318600" cy="6856560"/>
+            <a:ext cx="318240" cy="6856200"/>
           </a:xfrm>
           <a:prstGeom prst="rect">
             <a:avLst/>
@@ -6305,7 +6306,7 @@
         <p:spPr>
           <a:xfrm>
             <a:off x="9875520" y="365760"/>
-            <a:ext cx="2010240" cy="501480"/>
+            <a:ext cx="2009880" cy="501120"/>
           </a:xfrm>
           <a:prstGeom prst="roundRect">
             <a:avLst>
@@ -6379,7 +6380,7 @@
         <p:spPr>
           <a:xfrm>
             <a:off x="2219760" y="914400"/>
-            <a:ext cx="6531120" cy="638280"/>
+            <a:ext cx="6530760" cy="638280"/>
           </a:xfrm>
           <a:prstGeom prst="rect">
             <a:avLst/>
@@ -6433,7 +6434,7 @@
         <p:spPr>
           <a:xfrm>
             <a:off x="612000" y="1828800"/>
-            <a:ext cx="10265040" cy="819720"/>
+            <a:ext cx="10264680" cy="819720"/>
           </a:xfrm>
           <a:prstGeom prst="rect">
             <a:avLst/>
@@ -6533,7 +6534,7 @@
         <p:spPr>
           <a:xfrm>
             <a:off x="987480" y="3182040"/>
-            <a:ext cx="3290400" cy="2741760"/>
+            <a:ext cx="3290040" cy="2741400"/>
           </a:xfrm>
           <a:prstGeom prst="roundRect">
             <a:avLst>
@@ -6595,7 +6596,7 @@
         <p:spPr>
           <a:xfrm>
             <a:off x="914400" y="3108960"/>
-            <a:ext cx="3290400" cy="3062880"/>
+            <a:ext cx="3290040" cy="3062520"/>
           </a:xfrm>
           <a:prstGeom prst="roundRect">
             <a:avLst>
@@ -6758,7 +6759,7 @@
         <p:spPr>
           <a:xfrm>
             <a:off x="4507920" y="3182040"/>
-            <a:ext cx="3290400" cy="2741760"/>
+            <a:ext cx="3290040" cy="2741400"/>
           </a:xfrm>
           <a:prstGeom prst="roundRect">
             <a:avLst>
@@ -6820,7 +6821,7 @@
         <p:spPr>
           <a:xfrm>
             <a:off x="4434840" y="2971800"/>
-            <a:ext cx="3290400" cy="3428640"/>
+            <a:ext cx="3290040" cy="3428280"/>
           </a:xfrm>
           <a:prstGeom prst="roundRect">
             <a:avLst>
@@ -7078,7 +7079,7 @@
         <p:spPr>
           <a:xfrm>
             <a:off x="8028360" y="3182040"/>
-            <a:ext cx="3290400" cy="2741760"/>
+            <a:ext cx="3290040" cy="2741400"/>
           </a:xfrm>
           <a:prstGeom prst="roundRect">
             <a:avLst>
@@ -7140,7 +7141,7 @@
         <p:spPr>
           <a:xfrm>
             <a:off x="7955280" y="3108960"/>
-            <a:ext cx="3702960" cy="3062880"/>
+            <a:ext cx="3702600" cy="3062520"/>
           </a:xfrm>
           <a:prstGeom prst="roundRect">
             <a:avLst>
@@ -7501,7 +7502,7 @@
         <p:spPr>
           <a:xfrm>
             <a:off x="4600080" y="6446520"/>
-            <a:ext cx="3051360" cy="363960"/>
+            <a:ext cx="3051000" cy="363960"/>
           </a:xfrm>
           <a:prstGeom prst="rect">
             <a:avLst/>
@@ -7585,7 +7586,7 @@
         <p:spPr>
           <a:xfrm>
             <a:off x="0" y="0"/>
-            <a:ext cx="12187440" cy="6856560"/>
+            <a:ext cx="12187080" cy="6856200"/>
           </a:xfrm>
           <a:prstGeom prst="rect">
             <a:avLst/>
@@ -7621,6 +7622,11 @@
             <a:noAutofit/>
           </a:bodyPr>
           <a:p>
+            <a:pPr>
+              <a:lnSpc>
+                <a:spcPct val="100000"/>
+              </a:lnSpc>
+            </a:pPr>
             <a:endParaRPr b="0" lang="en-US" sz="1800" spc="-1" strike="noStrike">
               <a:solidFill>
                 <a:schemeClr val="lt1"/>
@@ -7640,7 +7646,7 @@
         <p:spPr>
           <a:xfrm>
             <a:off x="0" y="0"/>
-            <a:ext cx="16920" cy="6856560"/>
+            <a:ext cx="16560" cy="6856200"/>
           </a:xfrm>
           <a:prstGeom prst="rect">
             <a:avLst/>
@@ -7676,6 +7682,11 @@
             <a:noAutofit/>
           </a:bodyPr>
           <a:p>
+            <a:pPr>
+              <a:lnSpc>
+                <a:spcPct val="100000"/>
+              </a:lnSpc>
+            </a:pPr>
             <a:endParaRPr b="0" lang="en-US" sz="1800" spc="-1" strike="noStrike">
               <a:solidFill>
                 <a:schemeClr val="lt1"/>
@@ -7695,7 +7706,7 @@
         <p:spPr>
           <a:xfrm>
             <a:off x="914400" y="0"/>
-            <a:ext cx="16920" cy="6856560"/>
+            <a:ext cx="16560" cy="6856200"/>
           </a:xfrm>
           <a:prstGeom prst="rect">
             <a:avLst/>
@@ -7731,6 +7742,11 @@
             <a:noAutofit/>
           </a:bodyPr>
           <a:p>
+            <a:pPr>
+              <a:lnSpc>
+                <a:spcPct val="100000"/>
+              </a:lnSpc>
+            </a:pPr>
             <a:endParaRPr b="0" lang="en-US" sz="1800" spc="-1" strike="noStrike">
               <a:solidFill>
                 <a:schemeClr val="lt1"/>
@@ -7750,7 +7766,7 @@
         <p:spPr>
           <a:xfrm>
             <a:off x="1828800" y="0"/>
-            <a:ext cx="16920" cy="6856560"/>
+            <a:ext cx="16560" cy="6856200"/>
           </a:xfrm>
           <a:prstGeom prst="rect">
             <a:avLst/>
@@ -7786,6 +7802,11 @@
             <a:noAutofit/>
           </a:bodyPr>
           <a:p>
+            <a:pPr>
+              <a:lnSpc>
+                <a:spcPct val="100000"/>
+              </a:lnSpc>
+            </a:pPr>
             <a:endParaRPr b="0" lang="en-US" sz="1800" spc="-1" strike="noStrike">
               <a:solidFill>
                 <a:schemeClr val="lt1"/>
@@ -7805,7 +7826,7 @@
         <p:spPr>
           <a:xfrm>
             <a:off x="2743200" y="0"/>
-            <a:ext cx="16920" cy="6856560"/>
+            <a:ext cx="16560" cy="6856200"/>
           </a:xfrm>
           <a:prstGeom prst="rect">
             <a:avLst/>
@@ -7841,6 +7862,11 @@
             <a:noAutofit/>
           </a:bodyPr>
           <a:p>
+            <a:pPr>
+              <a:lnSpc>
+                <a:spcPct val="100000"/>
+              </a:lnSpc>
+            </a:pPr>
             <a:endParaRPr b="0" lang="en-US" sz="1800" spc="-1" strike="noStrike">
               <a:solidFill>
                 <a:schemeClr val="lt1"/>
@@ -7860,7 +7886,7 @@
         <p:spPr>
           <a:xfrm>
             <a:off x="3657600" y="0"/>
-            <a:ext cx="16920" cy="6856560"/>
+            <a:ext cx="16560" cy="6856200"/>
           </a:xfrm>
           <a:prstGeom prst="rect">
             <a:avLst/>
@@ -7896,6 +7922,11 @@
             <a:noAutofit/>
           </a:bodyPr>
           <a:p>
+            <a:pPr>
+              <a:lnSpc>
+                <a:spcPct val="100000"/>
+              </a:lnSpc>
+            </a:pPr>
             <a:endParaRPr b="0" lang="en-US" sz="1800" spc="-1" strike="noStrike">
               <a:solidFill>
                 <a:schemeClr val="lt1"/>
@@ -7915,7 +7946,7 @@
         <p:spPr>
           <a:xfrm>
             <a:off x="4572000" y="0"/>
-            <a:ext cx="16920" cy="6856560"/>
+            <a:ext cx="16560" cy="6856200"/>
           </a:xfrm>
           <a:prstGeom prst="rect">
             <a:avLst/>
@@ -7951,6 +7982,11 @@
             <a:noAutofit/>
           </a:bodyPr>
           <a:p>
+            <a:pPr>
+              <a:lnSpc>
+                <a:spcPct val="100000"/>
+              </a:lnSpc>
+            </a:pPr>
             <a:endParaRPr b="0" lang="en-US" sz="1800" spc="-1" strike="noStrike">
               <a:solidFill>
                 <a:schemeClr val="lt1"/>
@@ -7970,7 +8006,7 @@
         <p:spPr>
           <a:xfrm>
             <a:off x="5486400" y="0"/>
-            <a:ext cx="16920" cy="6856560"/>
+            <a:ext cx="16560" cy="6856200"/>
           </a:xfrm>
           <a:prstGeom prst="rect">
             <a:avLst/>
@@ -8006,6 +8042,11 @@
             <a:noAutofit/>
           </a:bodyPr>
           <a:p>
+            <a:pPr>
+              <a:lnSpc>
+                <a:spcPct val="100000"/>
+              </a:lnSpc>
+            </a:pPr>
             <a:endParaRPr b="0" lang="en-US" sz="1800" spc="-1" strike="noStrike">
               <a:solidFill>
                 <a:schemeClr val="lt1"/>
@@ -8025,7 +8066,7 @@
         <p:spPr>
           <a:xfrm>
             <a:off x="6400800" y="0"/>
-            <a:ext cx="16920" cy="6856560"/>
+            <a:ext cx="16560" cy="6856200"/>
           </a:xfrm>
           <a:prstGeom prst="rect">
             <a:avLst/>
@@ -8061,6 +8102,11 @@
             <a:noAutofit/>
           </a:bodyPr>
           <a:p>
+            <a:pPr>
+              <a:lnSpc>
+                <a:spcPct val="100000"/>
+              </a:lnSpc>
+            </a:pPr>
             <a:endParaRPr b="0" lang="en-US" sz="1800" spc="-1" strike="noStrike">
               <a:solidFill>
                 <a:schemeClr val="lt1"/>
@@ -8080,7 +8126,7 @@
         <p:spPr>
           <a:xfrm>
             <a:off x="7315200" y="0"/>
-            <a:ext cx="16920" cy="6856560"/>
+            <a:ext cx="16560" cy="6856200"/>
           </a:xfrm>
           <a:prstGeom prst="rect">
             <a:avLst/>
@@ -8116,6 +8162,11 @@
             <a:noAutofit/>
           </a:bodyPr>
           <a:p>
+            <a:pPr>
+              <a:lnSpc>
+                <a:spcPct val="100000"/>
+              </a:lnSpc>
+            </a:pPr>
             <a:endParaRPr b="0" lang="en-US" sz="1800" spc="-1" strike="noStrike">
               <a:solidFill>
                 <a:schemeClr val="lt1"/>
@@ -8135,7 +8186,7 @@
         <p:spPr>
           <a:xfrm>
             <a:off x="8229600" y="0"/>
-            <a:ext cx="16920" cy="6856560"/>
+            <a:ext cx="16560" cy="6856200"/>
           </a:xfrm>
           <a:prstGeom prst="rect">
             <a:avLst/>
@@ -8171,6 +8222,11 @@
             <a:noAutofit/>
           </a:bodyPr>
           <a:p>
+            <a:pPr>
+              <a:lnSpc>
+                <a:spcPct val="100000"/>
+              </a:lnSpc>
+            </a:pPr>
             <a:endParaRPr b="0" lang="en-US" sz="1800" spc="-1" strike="noStrike">
               <a:solidFill>
                 <a:schemeClr val="lt1"/>
@@ -8190,7 +8246,7 @@
         <p:spPr>
           <a:xfrm>
             <a:off x="9144000" y="0"/>
-            <a:ext cx="16920" cy="6856560"/>
+            <a:ext cx="16560" cy="6856200"/>
           </a:xfrm>
           <a:prstGeom prst="rect">
             <a:avLst/>
@@ -8226,6 +8282,11 @@
             <a:noAutofit/>
           </a:bodyPr>
           <a:p>
+            <a:pPr>
+              <a:lnSpc>
+                <a:spcPct val="100000"/>
+              </a:lnSpc>
+            </a:pPr>
             <a:endParaRPr b="0" lang="en-US" sz="1800" spc="-1" strike="noStrike">
               <a:solidFill>
                 <a:schemeClr val="lt1"/>
@@ -8245,7 +8306,7 @@
         <p:spPr>
           <a:xfrm>
             <a:off x="10058400" y="0"/>
-            <a:ext cx="16920" cy="6856560"/>
+            <a:ext cx="16560" cy="6856200"/>
           </a:xfrm>
           <a:prstGeom prst="rect">
             <a:avLst/>
@@ -8281,6 +8342,11 @@
             <a:noAutofit/>
           </a:bodyPr>
           <a:p>
+            <a:pPr>
+              <a:lnSpc>
+                <a:spcPct val="100000"/>
+              </a:lnSpc>
+            </a:pPr>
             <a:endParaRPr b="0" lang="en-US" sz="1800" spc="-1" strike="noStrike">
               <a:solidFill>
                 <a:schemeClr val="lt1"/>
@@ -8300,7 +8366,7 @@
         <p:spPr>
           <a:xfrm>
             <a:off x="10972800" y="0"/>
-            <a:ext cx="16920" cy="6856560"/>
+            <a:ext cx="16560" cy="6856200"/>
           </a:xfrm>
           <a:prstGeom prst="rect">
             <a:avLst/>
@@ -8336,6 +8402,11 @@
             <a:noAutofit/>
           </a:bodyPr>
           <a:p>
+            <a:pPr>
+              <a:lnSpc>
+                <a:spcPct val="100000"/>
+              </a:lnSpc>
+            </a:pPr>
             <a:endParaRPr b="0" lang="en-US" sz="1800" spc="-1" strike="noStrike">
               <a:solidFill>
                 <a:schemeClr val="lt1"/>
@@ -8355,7 +8426,7 @@
         <p:spPr>
           <a:xfrm>
             <a:off x="11887200" y="0"/>
-            <a:ext cx="16920" cy="6856560"/>
+            <a:ext cx="16560" cy="6856200"/>
           </a:xfrm>
           <a:prstGeom prst="rect">
             <a:avLst/>
@@ -8391,6 +8462,11 @@
             <a:noAutofit/>
           </a:bodyPr>
           <a:p>
+            <a:pPr>
+              <a:lnSpc>
+                <a:spcPct val="100000"/>
+              </a:lnSpc>
+            </a:pPr>
             <a:endParaRPr b="0" lang="en-US" sz="1800" spc="-1" strike="noStrike">
               <a:solidFill>
                 <a:schemeClr val="lt1"/>
@@ -8410,7 +8486,7 @@
         <p:spPr>
           <a:xfrm>
             <a:off x="0" y="0"/>
-            <a:ext cx="318600" cy="6856560"/>
+            <a:ext cx="318240" cy="6856200"/>
           </a:xfrm>
           <a:prstGeom prst="rect">
             <a:avLst/>
@@ -8446,6 +8522,11 @@
             <a:noAutofit/>
           </a:bodyPr>
           <a:p>
+            <a:pPr>
+              <a:lnSpc>
+                <a:spcPct val="100000"/>
+              </a:lnSpc>
+            </a:pPr>
             <a:endParaRPr b="0" lang="en-US" sz="1800" spc="-1" strike="noStrike">
               <a:solidFill>
                 <a:schemeClr val="lt1"/>
@@ -8465,7 +8546,7 @@
         <p:spPr>
           <a:xfrm>
             <a:off x="9875520" y="365760"/>
-            <a:ext cx="2010240" cy="501480"/>
+            <a:ext cx="2009880" cy="501120"/>
           </a:xfrm>
           <a:prstGeom prst="roundRect">
             <a:avLst>
@@ -8593,7 +8674,7 @@
         <p:spPr>
           <a:xfrm>
             <a:off x="1304280" y="1828800"/>
-            <a:ext cx="8880120" cy="819720"/>
+            <a:ext cx="8879760" cy="819720"/>
           </a:xfrm>
           <a:prstGeom prst="rect">
             <a:avLst/>
@@ -8693,7 +8774,7 @@
         <p:spPr>
           <a:xfrm>
             <a:off x="987480" y="3182040"/>
-            <a:ext cx="3290400" cy="2741760"/>
+            <a:ext cx="3290040" cy="2741400"/>
           </a:xfrm>
           <a:prstGeom prst="roundRect">
             <a:avLst>
@@ -8731,6 +8812,11 @@
             <a:noAutofit/>
           </a:bodyPr>
           <a:p>
+            <a:pPr>
+              <a:lnSpc>
+                <a:spcPct val="100000"/>
+              </a:lnSpc>
+            </a:pPr>
             <a:endParaRPr b="0" lang="en-US" sz="1800" spc="-1" strike="noStrike">
               <a:solidFill>
                 <a:schemeClr val="lt1"/>
@@ -8750,7 +8836,7 @@
         <p:spPr>
           <a:xfrm>
             <a:off x="685800" y="2971800"/>
-            <a:ext cx="3519000" cy="3200040"/>
+            <a:ext cx="3518640" cy="3199680"/>
           </a:xfrm>
           <a:prstGeom prst="roundRect">
             <a:avLst>
@@ -8941,7 +9027,7 @@
         <p:spPr>
           <a:xfrm>
             <a:off x="4507920" y="3182040"/>
-            <a:ext cx="3290400" cy="2741760"/>
+            <a:ext cx="3290040" cy="2741400"/>
           </a:xfrm>
           <a:prstGeom prst="roundRect">
             <a:avLst>
@@ -8979,6 +9065,11 @@
             <a:noAutofit/>
           </a:bodyPr>
           <a:p>
+            <a:pPr>
+              <a:lnSpc>
+                <a:spcPct val="100000"/>
+              </a:lnSpc>
+            </a:pPr>
             <a:endParaRPr b="0" lang="en-US" sz="1800" spc="-1" strike="noStrike">
               <a:solidFill>
                 <a:schemeClr val="lt1"/>
@@ -8998,7 +9089,7 @@
         <p:spPr>
           <a:xfrm>
             <a:off x="4434840" y="2971800"/>
-            <a:ext cx="3290400" cy="3428640"/>
+            <a:ext cx="3290040" cy="3428280"/>
           </a:xfrm>
           <a:prstGeom prst="roundRect">
             <a:avLst>
@@ -9256,7 +9347,7 @@
         <p:spPr>
           <a:xfrm>
             <a:off x="8028360" y="3182040"/>
-            <a:ext cx="3290400" cy="2741760"/>
+            <a:ext cx="3290040" cy="2741400"/>
           </a:xfrm>
           <a:prstGeom prst="roundRect">
             <a:avLst>
@@ -9294,6 +9385,11 @@
             <a:noAutofit/>
           </a:bodyPr>
           <a:p>
+            <a:pPr>
+              <a:lnSpc>
+                <a:spcPct val="100000"/>
+              </a:lnSpc>
+            </a:pPr>
             <a:endParaRPr b="0" lang="en-US" sz="1800" spc="-1" strike="noStrike">
               <a:solidFill>
                 <a:schemeClr val="lt1"/>
@@ -9313,7 +9409,7 @@
         <p:spPr>
           <a:xfrm>
             <a:off x="7955280" y="3108960"/>
-            <a:ext cx="3702960" cy="3062880"/>
+            <a:ext cx="3702600" cy="3062520"/>
           </a:xfrm>
           <a:prstGeom prst="roundRect">
             <a:avLst>
@@ -9674,7 +9770,2226 @@
         <p:spPr>
           <a:xfrm>
             <a:off x="4600080" y="6446520"/>
-            <a:ext cx="3051360" cy="363960"/>
+            <a:ext cx="3051000" cy="363960"/>
+          </a:xfrm>
+          <a:prstGeom prst="rect">
+            <a:avLst/>
+          </a:prstGeom>
+          <a:noFill/>
+          <a:ln w="0">
+            <a:noFill/>
+          </a:ln>
+        </p:spPr>
+        <p:style>
+          <a:lnRef idx="0"/>
+          <a:fillRef idx="0"/>
+          <a:effectRef idx="0"/>
+          <a:fontRef idx="minor"/>
+        </p:style>
+        <p:txBody>
+          <a:bodyPr wrap="none" lIns="90000" rIns="90000" tIns="45000" bIns="45000" anchor="t">
+            <a:spAutoFit/>
+          </a:bodyPr>
+          <a:p>
+            <a:pPr>
+              <a:lnSpc>
+                <a:spcPct val="100000"/>
+              </a:lnSpc>
+            </a:pPr>
+            <a:r>
+              <a:rPr b="0" lang="en-US" sz="1800" spc="-1" strike="noStrike">
+                <a:solidFill>
+                  <a:srgbClr val="000000"/>
+                </a:solidFill>
+                <a:latin typeface="Calibri"/>
+                <a:ea typeface="DejaVu Sans"/>
+              </a:rPr>
+              <a:t>Java • Ultra Premium Template</a:t>
+            </a:r>
+            <a:endParaRPr b="0" lang="en-US" sz="1800" spc="-1" strike="noStrike">
+              <a:solidFill>
+                <a:srgbClr val="000000"/>
+              </a:solidFill>
+              <a:latin typeface="Arial"/>
+            </a:endParaRPr>
+          </a:p>
+        </p:txBody>
+      </p:sp>
+    </p:spTree>
+  </p:cSld>
+  <mc:AlternateContent>
+    <mc:Choice Requires="p14">
+      <p:transition spd="slow" p14:dur="2000"/>
+    </mc:Choice>
+    <mc:Fallback>
+      <p:transition spd="slow"/>
+    </mc:Fallback>
+  </mc:AlternateContent>
+</p:sld>
+</file>
+
+<file path=ppt/slides/slide4.xml><?xml version="1.0" encoding="utf-8"?>
+<p:sld xmlns:a="http://schemas.openxmlformats.org/drawingml/2006/main" xmlns:p="http://schemas.openxmlformats.org/presentationml/2006/main" xmlns:r="http://schemas.openxmlformats.org/officeDocument/2006/relationships" xmlns:p14="http://schemas.microsoft.com/office/powerpoint/2010/main" xmlns:p15="http://schemas.microsoft.com/office/powerpoint/2012/main" xmlns:mc="http://schemas.openxmlformats.org/markup-compatibility/2006">
+  <p:cSld>
+    <p:spTree>
+      <p:nvGrpSpPr>
+        <p:cNvPr id="1" name=""/>
+        <p:cNvGrpSpPr/>
+        <p:nvPr/>
+      </p:nvGrpSpPr>
+      <p:grpSpPr>
+        <a:xfrm>
+          <a:off x="0" y="0"/>
+          <a:ext cx="0" cy="0"/>
+          <a:chOff x="0" y="0"/>
+          <a:chExt cx="0" cy="0"/>
+        </a:xfrm>
+      </p:grpSpPr>
+      <p:sp>
+        <p:nvSpPr>
+          <p:cNvPr id="119" name="Rectangle 49"/>
+          <p:cNvSpPr/>
+          <p:nvPr/>
+        </p:nvSpPr>
+        <p:spPr>
+          <a:xfrm>
+            <a:off x="0" y="0"/>
+            <a:ext cx="12187080" cy="6856200"/>
+          </a:xfrm>
+          <a:prstGeom prst="rect">
+            <a:avLst/>
+          </a:prstGeom>
+          <a:solidFill>
+            <a:srgbClr val="0b0b0d"/>
+          </a:solidFill>
+          <a:ln>
+            <a:noFill/>
+          </a:ln>
+          <a:effectLst>
+            <a:outerShdw blurRad="39960" dir="5400000" dist="23040" rotWithShape="0">
+              <a:srgbClr val="000000">
+                <a:alpha val="35000"/>
+              </a:srgbClr>
+            </a:outerShdw>
+          </a:effectLst>
+        </p:spPr>
+        <p:style>
+          <a:lnRef idx="1">
+            <a:schemeClr val="accent1"/>
+          </a:lnRef>
+          <a:fillRef idx="3">
+            <a:schemeClr val="accent1"/>
+          </a:fillRef>
+          <a:effectRef idx="2">
+            <a:schemeClr val="accent1"/>
+          </a:effectRef>
+          <a:fontRef idx="minor"/>
+        </p:style>
+        <p:txBody>
+          <a:bodyPr lIns="90000" rIns="90000" tIns="45000" bIns="45000" anchor="ctr">
+            <a:noAutofit/>
+          </a:bodyPr>
+          <a:p>
+            <a:endParaRPr b="0" lang="en-US" sz="1800" spc="-1" strike="noStrike">
+              <a:solidFill>
+                <a:schemeClr val="lt1"/>
+              </a:solidFill>
+              <a:latin typeface="Calibri"/>
+              <a:ea typeface="DejaVu Sans"/>
+            </a:endParaRPr>
+          </a:p>
+        </p:txBody>
+      </p:sp>
+      <p:sp>
+        <p:nvSpPr>
+          <p:cNvPr id="120" name="Rectangle 50"/>
+          <p:cNvSpPr/>
+          <p:nvPr/>
+        </p:nvSpPr>
+        <p:spPr>
+          <a:xfrm>
+            <a:off x="0" y="0"/>
+            <a:ext cx="16560" cy="6856200"/>
+          </a:xfrm>
+          <a:prstGeom prst="rect">
+            <a:avLst/>
+          </a:prstGeom>
+          <a:solidFill>
+            <a:srgbClr val="121216"/>
+          </a:solidFill>
+          <a:ln>
+            <a:noFill/>
+          </a:ln>
+          <a:effectLst>
+            <a:outerShdw blurRad="39960" dir="5400000" dist="23040" rotWithShape="0">
+              <a:srgbClr val="000000">
+                <a:alpha val="35000"/>
+              </a:srgbClr>
+            </a:outerShdw>
+          </a:effectLst>
+        </p:spPr>
+        <p:style>
+          <a:lnRef idx="1">
+            <a:schemeClr val="accent1"/>
+          </a:lnRef>
+          <a:fillRef idx="3">
+            <a:schemeClr val="accent1"/>
+          </a:fillRef>
+          <a:effectRef idx="2">
+            <a:schemeClr val="accent1"/>
+          </a:effectRef>
+          <a:fontRef idx="minor"/>
+        </p:style>
+        <p:txBody>
+          <a:bodyPr lIns="90000" rIns="90000" tIns="45000" bIns="45000" anchor="ctr">
+            <a:noAutofit/>
+          </a:bodyPr>
+          <a:p>
+            <a:endParaRPr b="0" lang="en-US" sz="1800" spc="-1" strike="noStrike">
+              <a:solidFill>
+                <a:schemeClr val="lt1"/>
+              </a:solidFill>
+              <a:latin typeface="Calibri"/>
+              <a:ea typeface="DejaVu Sans"/>
+            </a:endParaRPr>
+          </a:p>
+        </p:txBody>
+      </p:sp>
+      <p:sp>
+        <p:nvSpPr>
+          <p:cNvPr id="121" name="Rectangle 51"/>
+          <p:cNvSpPr/>
+          <p:nvPr/>
+        </p:nvSpPr>
+        <p:spPr>
+          <a:xfrm>
+            <a:off x="914400" y="0"/>
+            <a:ext cx="16560" cy="6856200"/>
+          </a:xfrm>
+          <a:prstGeom prst="rect">
+            <a:avLst/>
+          </a:prstGeom>
+          <a:solidFill>
+            <a:srgbClr val="121216"/>
+          </a:solidFill>
+          <a:ln>
+            <a:noFill/>
+          </a:ln>
+          <a:effectLst>
+            <a:outerShdw blurRad="39960" dir="5400000" dist="23040" rotWithShape="0">
+              <a:srgbClr val="000000">
+                <a:alpha val="35000"/>
+              </a:srgbClr>
+            </a:outerShdw>
+          </a:effectLst>
+        </p:spPr>
+        <p:style>
+          <a:lnRef idx="1">
+            <a:schemeClr val="accent1"/>
+          </a:lnRef>
+          <a:fillRef idx="3">
+            <a:schemeClr val="accent1"/>
+          </a:fillRef>
+          <a:effectRef idx="2">
+            <a:schemeClr val="accent1"/>
+          </a:effectRef>
+          <a:fontRef idx="minor"/>
+        </p:style>
+        <p:txBody>
+          <a:bodyPr lIns="90000" rIns="90000" tIns="45000" bIns="45000" anchor="ctr">
+            <a:noAutofit/>
+          </a:bodyPr>
+          <a:p>
+            <a:endParaRPr b="0" lang="en-US" sz="1800" spc="-1" strike="noStrike">
+              <a:solidFill>
+                <a:schemeClr val="lt1"/>
+              </a:solidFill>
+              <a:latin typeface="Calibri"/>
+              <a:ea typeface="DejaVu Sans"/>
+            </a:endParaRPr>
+          </a:p>
+        </p:txBody>
+      </p:sp>
+      <p:sp>
+        <p:nvSpPr>
+          <p:cNvPr id="122" name="Rectangle 52"/>
+          <p:cNvSpPr/>
+          <p:nvPr/>
+        </p:nvSpPr>
+        <p:spPr>
+          <a:xfrm>
+            <a:off x="1828800" y="0"/>
+            <a:ext cx="16560" cy="6856200"/>
+          </a:xfrm>
+          <a:prstGeom prst="rect">
+            <a:avLst/>
+          </a:prstGeom>
+          <a:solidFill>
+            <a:srgbClr val="121216"/>
+          </a:solidFill>
+          <a:ln>
+            <a:noFill/>
+          </a:ln>
+          <a:effectLst>
+            <a:outerShdw blurRad="39960" dir="5400000" dist="23040" rotWithShape="0">
+              <a:srgbClr val="000000">
+                <a:alpha val="35000"/>
+              </a:srgbClr>
+            </a:outerShdw>
+          </a:effectLst>
+        </p:spPr>
+        <p:style>
+          <a:lnRef idx="1">
+            <a:schemeClr val="accent1"/>
+          </a:lnRef>
+          <a:fillRef idx="3">
+            <a:schemeClr val="accent1"/>
+          </a:fillRef>
+          <a:effectRef idx="2">
+            <a:schemeClr val="accent1"/>
+          </a:effectRef>
+          <a:fontRef idx="minor"/>
+        </p:style>
+        <p:txBody>
+          <a:bodyPr lIns="90000" rIns="90000" tIns="45000" bIns="45000" anchor="ctr">
+            <a:noAutofit/>
+          </a:bodyPr>
+          <a:p>
+            <a:endParaRPr b="0" lang="en-US" sz="1800" spc="-1" strike="noStrike">
+              <a:solidFill>
+                <a:schemeClr val="lt1"/>
+              </a:solidFill>
+              <a:latin typeface="Calibri"/>
+              <a:ea typeface="DejaVu Sans"/>
+            </a:endParaRPr>
+          </a:p>
+        </p:txBody>
+      </p:sp>
+      <p:sp>
+        <p:nvSpPr>
+          <p:cNvPr id="123" name="Rectangle 53"/>
+          <p:cNvSpPr/>
+          <p:nvPr/>
+        </p:nvSpPr>
+        <p:spPr>
+          <a:xfrm>
+            <a:off x="2743200" y="0"/>
+            <a:ext cx="16560" cy="6856200"/>
+          </a:xfrm>
+          <a:prstGeom prst="rect">
+            <a:avLst/>
+          </a:prstGeom>
+          <a:solidFill>
+            <a:srgbClr val="121216"/>
+          </a:solidFill>
+          <a:ln>
+            <a:noFill/>
+          </a:ln>
+          <a:effectLst>
+            <a:outerShdw blurRad="39960" dir="5400000" dist="23040" rotWithShape="0">
+              <a:srgbClr val="000000">
+                <a:alpha val="35000"/>
+              </a:srgbClr>
+            </a:outerShdw>
+          </a:effectLst>
+        </p:spPr>
+        <p:style>
+          <a:lnRef idx="1">
+            <a:schemeClr val="accent1"/>
+          </a:lnRef>
+          <a:fillRef idx="3">
+            <a:schemeClr val="accent1"/>
+          </a:fillRef>
+          <a:effectRef idx="2">
+            <a:schemeClr val="accent1"/>
+          </a:effectRef>
+          <a:fontRef idx="minor"/>
+        </p:style>
+        <p:txBody>
+          <a:bodyPr lIns="90000" rIns="90000" tIns="45000" bIns="45000" anchor="ctr">
+            <a:noAutofit/>
+          </a:bodyPr>
+          <a:p>
+            <a:endParaRPr b="0" lang="en-US" sz="1800" spc="-1" strike="noStrike">
+              <a:solidFill>
+                <a:schemeClr val="lt1"/>
+              </a:solidFill>
+              <a:latin typeface="Calibri"/>
+              <a:ea typeface="DejaVu Sans"/>
+            </a:endParaRPr>
+          </a:p>
+        </p:txBody>
+      </p:sp>
+      <p:sp>
+        <p:nvSpPr>
+          <p:cNvPr id="124" name="Rectangle 54"/>
+          <p:cNvSpPr/>
+          <p:nvPr/>
+        </p:nvSpPr>
+        <p:spPr>
+          <a:xfrm>
+            <a:off x="3657600" y="0"/>
+            <a:ext cx="16560" cy="6856200"/>
+          </a:xfrm>
+          <a:prstGeom prst="rect">
+            <a:avLst/>
+          </a:prstGeom>
+          <a:solidFill>
+            <a:srgbClr val="121216"/>
+          </a:solidFill>
+          <a:ln>
+            <a:noFill/>
+          </a:ln>
+          <a:effectLst>
+            <a:outerShdw blurRad="39960" dir="5400000" dist="23040" rotWithShape="0">
+              <a:srgbClr val="000000">
+                <a:alpha val="35000"/>
+              </a:srgbClr>
+            </a:outerShdw>
+          </a:effectLst>
+        </p:spPr>
+        <p:style>
+          <a:lnRef idx="1">
+            <a:schemeClr val="accent1"/>
+          </a:lnRef>
+          <a:fillRef idx="3">
+            <a:schemeClr val="accent1"/>
+          </a:fillRef>
+          <a:effectRef idx="2">
+            <a:schemeClr val="accent1"/>
+          </a:effectRef>
+          <a:fontRef idx="minor"/>
+        </p:style>
+        <p:txBody>
+          <a:bodyPr lIns="90000" rIns="90000" tIns="45000" bIns="45000" anchor="ctr">
+            <a:noAutofit/>
+          </a:bodyPr>
+          <a:p>
+            <a:endParaRPr b="0" lang="en-US" sz="1800" spc="-1" strike="noStrike">
+              <a:solidFill>
+                <a:schemeClr val="lt1"/>
+              </a:solidFill>
+              <a:latin typeface="Calibri"/>
+              <a:ea typeface="DejaVu Sans"/>
+            </a:endParaRPr>
+          </a:p>
+        </p:txBody>
+      </p:sp>
+      <p:sp>
+        <p:nvSpPr>
+          <p:cNvPr id="125" name="Rectangle 55"/>
+          <p:cNvSpPr/>
+          <p:nvPr/>
+        </p:nvSpPr>
+        <p:spPr>
+          <a:xfrm>
+            <a:off x="4572000" y="0"/>
+            <a:ext cx="16560" cy="6856200"/>
+          </a:xfrm>
+          <a:prstGeom prst="rect">
+            <a:avLst/>
+          </a:prstGeom>
+          <a:solidFill>
+            <a:srgbClr val="121216"/>
+          </a:solidFill>
+          <a:ln>
+            <a:noFill/>
+          </a:ln>
+          <a:effectLst>
+            <a:outerShdw blurRad="39960" dir="5400000" dist="23040" rotWithShape="0">
+              <a:srgbClr val="000000">
+                <a:alpha val="35000"/>
+              </a:srgbClr>
+            </a:outerShdw>
+          </a:effectLst>
+        </p:spPr>
+        <p:style>
+          <a:lnRef idx="1">
+            <a:schemeClr val="accent1"/>
+          </a:lnRef>
+          <a:fillRef idx="3">
+            <a:schemeClr val="accent1"/>
+          </a:fillRef>
+          <a:effectRef idx="2">
+            <a:schemeClr val="accent1"/>
+          </a:effectRef>
+          <a:fontRef idx="minor"/>
+        </p:style>
+        <p:txBody>
+          <a:bodyPr lIns="90000" rIns="90000" tIns="45000" bIns="45000" anchor="ctr">
+            <a:noAutofit/>
+          </a:bodyPr>
+          <a:p>
+            <a:endParaRPr b="0" lang="en-US" sz="1800" spc="-1" strike="noStrike">
+              <a:solidFill>
+                <a:schemeClr val="lt1"/>
+              </a:solidFill>
+              <a:latin typeface="Calibri"/>
+              <a:ea typeface="DejaVu Sans"/>
+            </a:endParaRPr>
+          </a:p>
+        </p:txBody>
+      </p:sp>
+      <p:sp>
+        <p:nvSpPr>
+          <p:cNvPr id="126" name="Rectangle 56"/>
+          <p:cNvSpPr/>
+          <p:nvPr/>
+        </p:nvSpPr>
+        <p:spPr>
+          <a:xfrm>
+            <a:off x="5486400" y="0"/>
+            <a:ext cx="16560" cy="6856200"/>
+          </a:xfrm>
+          <a:prstGeom prst="rect">
+            <a:avLst/>
+          </a:prstGeom>
+          <a:solidFill>
+            <a:srgbClr val="121216"/>
+          </a:solidFill>
+          <a:ln>
+            <a:noFill/>
+          </a:ln>
+          <a:effectLst>
+            <a:outerShdw blurRad="39960" dir="5400000" dist="23040" rotWithShape="0">
+              <a:srgbClr val="000000">
+                <a:alpha val="35000"/>
+              </a:srgbClr>
+            </a:outerShdw>
+          </a:effectLst>
+        </p:spPr>
+        <p:style>
+          <a:lnRef idx="1">
+            <a:schemeClr val="accent1"/>
+          </a:lnRef>
+          <a:fillRef idx="3">
+            <a:schemeClr val="accent1"/>
+          </a:fillRef>
+          <a:effectRef idx="2">
+            <a:schemeClr val="accent1"/>
+          </a:effectRef>
+          <a:fontRef idx="minor"/>
+        </p:style>
+        <p:txBody>
+          <a:bodyPr lIns="90000" rIns="90000" tIns="45000" bIns="45000" anchor="ctr">
+            <a:noAutofit/>
+          </a:bodyPr>
+          <a:p>
+            <a:endParaRPr b="0" lang="en-US" sz="1800" spc="-1" strike="noStrike">
+              <a:solidFill>
+                <a:schemeClr val="lt1"/>
+              </a:solidFill>
+              <a:latin typeface="Calibri"/>
+              <a:ea typeface="DejaVu Sans"/>
+            </a:endParaRPr>
+          </a:p>
+        </p:txBody>
+      </p:sp>
+      <p:sp>
+        <p:nvSpPr>
+          <p:cNvPr id="127" name="Rectangle 57"/>
+          <p:cNvSpPr/>
+          <p:nvPr/>
+        </p:nvSpPr>
+        <p:spPr>
+          <a:xfrm>
+            <a:off x="6400800" y="0"/>
+            <a:ext cx="16560" cy="6856200"/>
+          </a:xfrm>
+          <a:prstGeom prst="rect">
+            <a:avLst/>
+          </a:prstGeom>
+          <a:solidFill>
+            <a:srgbClr val="121216"/>
+          </a:solidFill>
+          <a:ln>
+            <a:noFill/>
+          </a:ln>
+          <a:effectLst>
+            <a:outerShdw blurRad="39960" dir="5400000" dist="23040" rotWithShape="0">
+              <a:srgbClr val="000000">
+                <a:alpha val="35000"/>
+              </a:srgbClr>
+            </a:outerShdw>
+          </a:effectLst>
+        </p:spPr>
+        <p:style>
+          <a:lnRef idx="1">
+            <a:schemeClr val="accent1"/>
+          </a:lnRef>
+          <a:fillRef idx="3">
+            <a:schemeClr val="accent1"/>
+          </a:fillRef>
+          <a:effectRef idx="2">
+            <a:schemeClr val="accent1"/>
+          </a:effectRef>
+          <a:fontRef idx="minor"/>
+        </p:style>
+        <p:txBody>
+          <a:bodyPr lIns="90000" rIns="90000" tIns="45000" bIns="45000" anchor="ctr">
+            <a:noAutofit/>
+          </a:bodyPr>
+          <a:p>
+            <a:endParaRPr b="0" lang="en-US" sz="1800" spc="-1" strike="noStrike">
+              <a:solidFill>
+                <a:schemeClr val="lt1"/>
+              </a:solidFill>
+              <a:latin typeface="Calibri"/>
+              <a:ea typeface="DejaVu Sans"/>
+            </a:endParaRPr>
+          </a:p>
+        </p:txBody>
+      </p:sp>
+      <p:sp>
+        <p:nvSpPr>
+          <p:cNvPr id="128" name="Rectangle 58"/>
+          <p:cNvSpPr/>
+          <p:nvPr/>
+        </p:nvSpPr>
+        <p:spPr>
+          <a:xfrm>
+            <a:off x="7315200" y="0"/>
+            <a:ext cx="16560" cy="6856200"/>
+          </a:xfrm>
+          <a:prstGeom prst="rect">
+            <a:avLst/>
+          </a:prstGeom>
+          <a:solidFill>
+            <a:srgbClr val="121216"/>
+          </a:solidFill>
+          <a:ln>
+            <a:noFill/>
+          </a:ln>
+          <a:effectLst>
+            <a:outerShdw blurRad="39960" dir="5400000" dist="23040" rotWithShape="0">
+              <a:srgbClr val="000000">
+                <a:alpha val="35000"/>
+              </a:srgbClr>
+            </a:outerShdw>
+          </a:effectLst>
+        </p:spPr>
+        <p:style>
+          <a:lnRef idx="1">
+            <a:schemeClr val="accent1"/>
+          </a:lnRef>
+          <a:fillRef idx="3">
+            <a:schemeClr val="accent1"/>
+          </a:fillRef>
+          <a:effectRef idx="2">
+            <a:schemeClr val="accent1"/>
+          </a:effectRef>
+          <a:fontRef idx="minor"/>
+        </p:style>
+        <p:txBody>
+          <a:bodyPr lIns="90000" rIns="90000" tIns="45000" bIns="45000" anchor="ctr">
+            <a:noAutofit/>
+          </a:bodyPr>
+          <a:p>
+            <a:endParaRPr b="0" lang="en-US" sz="1800" spc="-1" strike="noStrike">
+              <a:solidFill>
+                <a:schemeClr val="lt1"/>
+              </a:solidFill>
+              <a:latin typeface="Calibri"/>
+              <a:ea typeface="DejaVu Sans"/>
+            </a:endParaRPr>
+          </a:p>
+        </p:txBody>
+      </p:sp>
+      <p:sp>
+        <p:nvSpPr>
+          <p:cNvPr id="129" name="Rectangle 59"/>
+          <p:cNvSpPr/>
+          <p:nvPr/>
+        </p:nvSpPr>
+        <p:spPr>
+          <a:xfrm>
+            <a:off x="8229600" y="0"/>
+            <a:ext cx="16560" cy="6856200"/>
+          </a:xfrm>
+          <a:prstGeom prst="rect">
+            <a:avLst/>
+          </a:prstGeom>
+          <a:solidFill>
+            <a:srgbClr val="121216"/>
+          </a:solidFill>
+          <a:ln>
+            <a:noFill/>
+          </a:ln>
+          <a:effectLst>
+            <a:outerShdw blurRad="39960" dir="5400000" dist="23040" rotWithShape="0">
+              <a:srgbClr val="000000">
+                <a:alpha val="35000"/>
+              </a:srgbClr>
+            </a:outerShdw>
+          </a:effectLst>
+        </p:spPr>
+        <p:style>
+          <a:lnRef idx="1">
+            <a:schemeClr val="accent1"/>
+          </a:lnRef>
+          <a:fillRef idx="3">
+            <a:schemeClr val="accent1"/>
+          </a:fillRef>
+          <a:effectRef idx="2">
+            <a:schemeClr val="accent1"/>
+          </a:effectRef>
+          <a:fontRef idx="minor"/>
+        </p:style>
+        <p:txBody>
+          <a:bodyPr lIns="90000" rIns="90000" tIns="45000" bIns="45000" anchor="ctr">
+            <a:noAutofit/>
+          </a:bodyPr>
+          <a:p>
+            <a:endParaRPr b="0" lang="en-US" sz="1800" spc="-1" strike="noStrike">
+              <a:solidFill>
+                <a:schemeClr val="lt1"/>
+              </a:solidFill>
+              <a:latin typeface="Calibri"/>
+              <a:ea typeface="DejaVu Sans"/>
+            </a:endParaRPr>
+          </a:p>
+        </p:txBody>
+      </p:sp>
+      <p:sp>
+        <p:nvSpPr>
+          <p:cNvPr id="130" name="Rectangle 60"/>
+          <p:cNvSpPr/>
+          <p:nvPr/>
+        </p:nvSpPr>
+        <p:spPr>
+          <a:xfrm>
+            <a:off x="9144000" y="0"/>
+            <a:ext cx="16560" cy="6856200"/>
+          </a:xfrm>
+          <a:prstGeom prst="rect">
+            <a:avLst/>
+          </a:prstGeom>
+          <a:solidFill>
+            <a:srgbClr val="121216"/>
+          </a:solidFill>
+          <a:ln>
+            <a:noFill/>
+          </a:ln>
+          <a:effectLst>
+            <a:outerShdw blurRad="39960" dir="5400000" dist="23040" rotWithShape="0">
+              <a:srgbClr val="000000">
+                <a:alpha val="35000"/>
+              </a:srgbClr>
+            </a:outerShdw>
+          </a:effectLst>
+        </p:spPr>
+        <p:style>
+          <a:lnRef idx="1">
+            <a:schemeClr val="accent1"/>
+          </a:lnRef>
+          <a:fillRef idx="3">
+            <a:schemeClr val="accent1"/>
+          </a:fillRef>
+          <a:effectRef idx="2">
+            <a:schemeClr val="accent1"/>
+          </a:effectRef>
+          <a:fontRef idx="minor"/>
+        </p:style>
+        <p:txBody>
+          <a:bodyPr lIns="90000" rIns="90000" tIns="45000" bIns="45000" anchor="ctr">
+            <a:noAutofit/>
+          </a:bodyPr>
+          <a:p>
+            <a:endParaRPr b="0" lang="en-US" sz="1800" spc="-1" strike="noStrike">
+              <a:solidFill>
+                <a:schemeClr val="lt1"/>
+              </a:solidFill>
+              <a:latin typeface="Calibri"/>
+              <a:ea typeface="DejaVu Sans"/>
+            </a:endParaRPr>
+          </a:p>
+        </p:txBody>
+      </p:sp>
+      <p:sp>
+        <p:nvSpPr>
+          <p:cNvPr id="131" name="Rectangle 61"/>
+          <p:cNvSpPr/>
+          <p:nvPr/>
+        </p:nvSpPr>
+        <p:spPr>
+          <a:xfrm>
+            <a:off x="10058400" y="0"/>
+            <a:ext cx="16560" cy="6856200"/>
+          </a:xfrm>
+          <a:prstGeom prst="rect">
+            <a:avLst/>
+          </a:prstGeom>
+          <a:solidFill>
+            <a:srgbClr val="121216"/>
+          </a:solidFill>
+          <a:ln>
+            <a:noFill/>
+          </a:ln>
+          <a:effectLst>
+            <a:outerShdw blurRad="39960" dir="5400000" dist="23040" rotWithShape="0">
+              <a:srgbClr val="000000">
+                <a:alpha val="35000"/>
+              </a:srgbClr>
+            </a:outerShdw>
+          </a:effectLst>
+        </p:spPr>
+        <p:style>
+          <a:lnRef idx="1">
+            <a:schemeClr val="accent1"/>
+          </a:lnRef>
+          <a:fillRef idx="3">
+            <a:schemeClr val="accent1"/>
+          </a:fillRef>
+          <a:effectRef idx="2">
+            <a:schemeClr val="accent1"/>
+          </a:effectRef>
+          <a:fontRef idx="minor"/>
+        </p:style>
+        <p:txBody>
+          <a:bodyPr lIns="90000" rIns="90000" tIns="45000" bIns="45000" anchor="ctr">
+            <a:noAutofit/>
+          </a:bodyPr>
+          <a:p>
+            <a:endParaRPr b="0" lang="en-US" sz="1800" spc="-1" strike="noStrike">
+              <a:solidFill>
+                <a:schemeClr val="lt1"/>
+              </a:solidFill>
+              <a:latin typeface="Calibri"/>
+              <a:ea typeface="DejaVu Sans"/>
+            </a:endParaRPr>
+          </a:p>
+        </p:txBody>
+      </p:sp>
+      <p:sp>
+        <p:nvSpPr>
+          <p:cNvPr id="132" name="Rectangle 62"/>
+          <p:cNvSpPr/>
+          <p:nvPr/>
+        </p:nvSpPr>
+        <p:spPr>
+          <a:xfrm>
+            <a:off x="10972800" y="0"/>
+            <a:ext cx="16560" cy="6856200"/>
+          </a:xfrm>
+          <a:prstGeom prst="rect">
+            <a:avLst/>
+          </a:prstGeom>
+          <a:solidFill>
+            <a:srgbClr val="121216"/>
+          </a:solidFill>
+          <a:ln>
+            <a:noFill/>
+          </a:ln>
+          <a:effectLst>
+            <a:outerShdw blurRad="39960" dir="5400000" dist="23040" rotWithShape="0">
+              <a:srgbClr val="000000">
+                <a:alpha val="35000"/>
+              </a:srgbClr>
+            </a:outerShdw>
+          </a:effectLst>
+        </p:spPr>
+        <p:style>
+          <a:lnRef idx="1">
+            <a:schemeClr val="accent1"/>
+          </a:lnRef>
+          <a:fillRef idx="3">
+            <a:schemeClr val="accent1"/>
+          </a:fillRef>
+          <a:effectRef idx="2">
+            <a:schemeClr val="accent1"/>
+          </a:effectRef>
+          <a:fontRef idx="minor"/>
+        </p:style>
+        <p:txBody>
+          <a:bodyPr lIns="90000" rIns="90000" tIns="45000" bIns="45000" anchor="ctr">
+            <a:noAutofit/>
+          </a:bodyPr>
+          <a:p>
+            <a:endParaRPr b="0" lang="en-US" sz="1800" spc="-1" strike="noStrike">
+              <a:solidFill>
+                <a:schemeClr val="lt1"/>
+              </a:solidFill>
+              <a:latin typeface="Calibri"/>
+              <a:ea typeface="DejaVu Sans"/>
+            </a:endParaRPr>
+          </a:p>
+        </p:txBody>
+      </p:sp>
+      <p:sp>
+        <p:nvSpPr>
+          <p:cNvPr id="133" name="Rectangle 63"/>
+          <p:cNvSpPr/>
+          <p:nvPr/>
+        </p:nvSpPr>
+        <p:spPr>
+          <a:xfrm>
+            <a:off x="11887200" y="0"/>
+            <a:ext cx="16560" cy="6856200"/>
+          </a:xfrm>
+          <a:prstGeom prst="rect">
+            <a:avLst/>
+          </a:prstGeom>
+          <a:solidFill>
+            <a:srgbClr val="121216"/>
+          </a:solidFill>
+          <a:ln>
+            <a:noFill/>
+          </a:ln>
+          <a:effectLst>
+            <a:outerShdw blurRad="39960" dir="5400000" dist="23040" rotWithShape="0">
+              <a:srgbClr val="000000">
+                <a:alpha val="35000"/>
+              </a:srgbClr>
+            </a:outerShdw>
+          </a:effectLst>
+        </p:spPr>
+        <p:style>
+          <a:lnRef idx="1">
+            <a:schemeClr val="accent1"/>
+          </a:lnRef>
+          <a:fillRef idx="3">
+            <a:schemeClr val="accent1"/>
+          </a:fillRef>
+          <a:effectRef idx="2">
+            <a:schemeClr val="accent1"/>
+          </a:effectRef>
+          <a:fontRef idx="minor"/>
+        </p:style>
+        <p:txBody>
+          <a:bodyPr lIns="90000" rIns="90000" tIns="45000" bIns="45000" anchor="ctr">
+            <a:noAutofit/>
+          </a:bodyPr>
+          <a:p>
+            <a:endParaRPr b="0" lang="en-US" sz="1800" spc="-1" strike="noStrike">
+              <a:solidFill>
+                <a:schemeClr val="lt1"/>
+              </a:solidFill>
+              <a:latin typeface="Calibri"/>
+              <a:ea typeface="DejaVu Sans"/>
+            </a:endParaRPr>
+          </a:p>
+        </p:txBody>
+      </p:sp>
+      <p:sp>
+        <p:nvSpPr>
+          <p:cNvPr id="134" name="Rectangle 64"/>
+          <p:cNvSpPr/>
+          <p:nvPr/>
+        </p:nvSpPr>
+        <p:spPr>
+          <a:xfrm>
+            <a:off x="0" y="0"/>
+            <a:ext cx="318240" cy="6856200"/>
+          </a:xfrm>
+          <a:prstGeom prst="rect">
+            <a:avLst/>
+          </a:prstGeom>
+          <a:solidFill>
+            <a:srgbClr val="ff8c00"/>
+          </a:solidFill>
+          <a:ln>
+            <a:noFill/>
+          </a:ln>
+          <a:effectLst>
+            <a:outerShdw blurRad="39960" dir="5400000" dist="23040" rotWithShape="0">
+              <a:srgbClr val="000000">
+                <a:alpha val="35000"/>
+              </a:srgbClr>
+            </a:outerShdw>
+          </a:effectLst>
+        </p:spPr>
+        <p:style>
+          <a:lnRef idx="1">
+            <a:schemeClr val="accent1"/>
+          </a:lnRef>
+          <a:fillRef idx="3">
+            <a:schemeClr val="accent1"/>
+          </a:fillRef>
+          <a:effectRef idx="2">
+            <a:schemeClr val="accent1"/>
+          </a:effectRef>
+          <a:fontRef idx="minor"/>
+        </p:style>
+        <p:txBody>
+          <a:bodyPr lIns="90000" rIns="90000" tIns="45000" bIns="45000" anchor="ctr">
+            <a:noAutofit/>
+          </a:bodyPr>
+          <a:p>
+            <a:endParaRPr b="0" lang="en-US" sz="1800" spc="-1" strike="noStrike">
+              <a:solidFill>
+                <a:schemeClr val="lt1"/>
+              </a:solidFill>
+              <a:latin typeface="Calibri"/>
+              <a:ea typeface="DejaVu Sans"/>
+            </a:endParaRPr>
+          </a:p>
+        </p:txBody>
+      </p:sp>
+      <p:sp>
+        <p:nvSpPr>
+          <p:cNvPr id="135" name="Rounded Rectangle 29"/>
+          <p:cNvSpPr/>
+          <p:nvPr/>
+        </p:nvSpPr>
+        <p:spPr>
+          <a:xfrm>
+            <a:off x="9875520" y="365760"/>
+            <a:ext cx="2009880" cy="501120"/>
+          </a:xfrm>
+          <a:prstGeom prst="roundRect">
+            <a:avLst>
+              <a:gd name="adj" fmla="val 16667"/>
+            </a:avLst>
+          </a:prstGeom>
+          <a:solidFill>
+            <a:srgbClr val="1e1e24"/>
+          </a:solidFill>
+          <a:ln>
+            <a:solidFill>
+              <a:srgbClr val="ff8c00"/>
+            </a:solidFill>
+            <a:round/>
+          </a:ln>
+          <a:effectLst>
+            <a:outerShdw blurRad="39960" dir="5400000" dist="23040" rotWithShape="0">
+              <a:srgbClr val="000000">
+                <a:alpha val="35000"/>
+              </a:srgbClr>
+            </a:outerShdw>
+          </a:effectLst>
+        </p:spPr>
+        <p:style>
+          <a:lnRef idx="1">
+            <a:schemeClr val="accent1"/>
+          </a:lnRef>
+          <a:fillRef idx="3">
+            <a:schemeClr val="accent1"/>
+          </a:fillRef>
+          <a:effectRef idx="2">
+            <a:schemeClr val="accent1"/>
+          </a:effectRef>
+          <a:fontRef idx="minor"/>
+        </p:style>
+        <p:txBody>
+          <a:bodyPr lIns="90000" rIns="90000" tIns="45000" bIns="45000" anchor="ctr">
+            <a:noAutofit/>
+          </a:bodyPr>
+          <a:p>
+            <a:pPr algn="ctr">
+              <a:lnSpc>
+                <a:spcPct val="100000"/>
+              </a:lnSpc>
+            </a:pPr>
+            <a:r>
+              <a:rPr b="1" lang="en-US" sz="1400" spc="-1" strike="noStrike">
+                <a:solidFill>
+                  <a:srgbClr val="ffb45a"/>
+                </a:solidFill>
+                <a:latin typeface="Calibri"/>
+                <a:ea typeface="DejaVu Sans"/>
+              </a:rPr>
+              <a:t>JAVA CORE</a:t>
+            </a:r>
+            <a:endParaRPr b="0" lang="en-US" sz="1400" spc="-1" strike="noStrike">
+              <a:solidFill>
+                <a:srgbClr val="ffffff"/>
+              </a:solidFill>
+              <a:latin typeface="Arial"/>
+            </a:endParaRPr>
+          </a:p>
+        </p:txBody>
+      </p:sp>
+      <p:sp>
+        <p:nvSpPr>
+          <p:cNvPr id="136" name="TextBox 10"/>
+          <p:cNvSpPr/>
+          <p:nvPr/>
+        </p:nvSpPr>
+        <p:spPr>
+          <a:xfrm>
+            <a:off x="2845800" y="914400"/>
+            <a:ext cx="5279040" cy="638280"/>
+          </a:xfrm>
+          <a:prstGeom prst="rect">
+            <a:avLst/>
+          </a:prstGeom>
+          <a:noFill/>
+          <a:ln w="0">
+            <a:noFill/>
+          </a:ln>
+        </p:spPr>
+        <p:style>
+          <a:lnRef idx="0"/>
+          <a:fillRef idx="0"/>
+          <a:effectRef idx="0"/>
+          <a:fontRef idx="minor"/>
+        </p:style>
+        <p:txBody>
+          <a:bodyPr wrap="none" lIns="90000" rIns="90000" tIns="45000" bIns="45000" anchor="t">
+            <a:spAutoFit/>
+          </a:bodyPr>
+          <a:p>
+            <a:pPr>
+              <a:lnSpc>
+                <a:spcPct val="100000"/>
+              </a:lnSpc>
+            </a:pPr>
+            <a:r>
+              <a:rPr b="1" lang="en-US" sz="3600" spc="-1" strike="noStrike">
+                <a:solidFill>
+                  <a:srgbClr val="f5f5f5"/>
+                </a:solidFill>
+                <a:latin typeface="Calibri"/>
+                <a:ea typeface="DejaVu Sans"/>
+              </a:rPr>
+              <a:t>DateTimeFormatter in Java</a:t>
+            </a:r>
+            <a:endParaRPr b="0" lang="en-US" sz="3600" spc="-1" strike="noStrike">
+              <a:solidFill>
+                <a:srgbClr val="000000"/>
+              </a:solidFill>
+              <a:latin typeface="Arial"/>
+            </a:endParaRPr>
+          </a:p>
+        </p:txBody>
+      </p:sp>
+      <p:sp>
+        <p:nvSpPr>
+          <p:cNvPr id="137" name="TextBox 11"/>
+          <p:cNvSpPr/>
+          <p:nvPr/>
+        </p:nvSpPr>
+        <p:spPr>
+          <a:xfrm>
+            <a:off x="1726200" y="1828800"/>
+            <a:ext cx="8035920" cy="576360"/>
+          </a:xfrm>
+          <a:prstGeom prst="rect">
+            <a:avLst/>
+          </a:prstGeom>
+          <a:noFill/>
+          <a:ln w="0">
+            <a:noFill/>
+          </a:ln>
+        </p:spPr>
+        <p:style>
+          <a:lnRef idx="0"/>
+          <a:fillRef idx="0"/>
+          <a:effectRef idx="0"/>
+          <a:fontRef idx="minor"/>
+        </p:style>
+        <p:txBody>
+          <a:bodyPr wrap="none" lIns="90000" rIns="90000" tIns="45000" bIns="45000" anchor="t">
+            <a:spAutoFit/>
+          </a:bodyPr>
+          <a:p>
+            <a:pPr>
+              <a:lnSpc>
+                <a:spcPct val="100000"/>
+              </a:lnSpc>
+            </a:pPr>
+            <a:r>
+              <a:rPr b="0" lang="en-US" sz="1600" spc="-1" strike="noStrike">
+                <a:solidFill>
+                  <a:srgbClr val="aaaaaa"/>
+                </a:solidFill>
+                <a:latin typeface="Calibri"/>
+                <a:ea typeface="DejaVu Sans"/>
+              </a:rPr>
+              <a:t>In Java, date and time values are not always displayed in a user-friendly format. </a:t>
+            </a:r>
+            <a:endParaRPr b="0" lang="en-US" sz="1600" spc="-1" strike="noStrike">
+              <a:solidFill>
+                <a:srgbClr val="000000"/>
+              </a:solidFill>
+              <a:latin typeface="Arial"/>
+            </a:endParaRPr>
+          </a:p>
+          <a:p>
+            <a:pPr>
+              <a:lnSpc>
+                <a:spcPct val="100000"/>
+              </a:lnSpc>
+            </a:pPr>
+            <a:r>
+              <a:rPr b="0" lang="en-US" sz="1600" spc="-1" strike="noStrike">
+                <a:solidFill>
+                  <a:srgbClr val="aaaaaa"/>
+                </a:solidFill>
+                <a:latin typeface="Calibri"/>
+                <a:ea typeface="DejaVu Sans"/>
+              </a:rPr>
+              <a:t>DateTimeFormatter is used to format date and time into a readable and customizable structure.</a:t>
+            </a:r>
+            <a:endParaRPr b="0" lang="en-US" sz="1600" spc="-1" strike="noStrike">
+              <a:solidFill>
+                <a:srgbClr val="000000"/>
+              </a:solidFill>
+              <a:latin typeface="Arial"/>
+            </a:endParaRPr>
+          </a:p>
+        </p:txBody>
+      </p:sp>
+      <p:sp>
+        <p:nvSpPr>
+          <p:cNvPr id="138" name="Rounded Rectangle 30"/>
+          <p:cNvSpPr/>
+          <p:nvPr/>
+        </p:nvSpPr>
+        <p:spPr>
+          <a:xfrm>
+            <a:off x="987480" y="3182040"/>
+            <a:ext cx="3290040" cy="2741400"/>
+          </a:xfrm>
+          <a:prstGeom prst="roundRect">
+            <a:avLst>
+              <a:gd name="adj" fmla="val 16667"/>
+            </a:avLst>
+          </a:prstGeom>
+          <a:solidFill>
+            <a:srgbClr val="08080a"/>
+          </a:solidFill>
+          <a:ln>
+            <a:noFill/>
+          </a:ln>
+          <a:effectLst>
+            <a:outerShdw blurRad="39960" dir="5400000" dist="23040" rotWithShape="0">
+              <a:srgbClr val="000000">
+                <a:alpha val="35000"/>
+              </a:srgbClr>
+            </a:outerShdw>
+          </a:effectLst>
+        </p:spPr>
+        <p:style>
+          <a:lnRef idx="1">
+            <a:schemeClr val="accent1"/>
+          </a:lnRef>
+          <a:fillRef idx="3">
+            <a:schemeClr val="accent1"/>
+          </a:fillRef>
+          <a:effectRef idx="2">
+            <a:schemeClr val="accent1"/>
+          </a:effectRef>
+          <a:fontRef idx="minor"/>
+        </p:style>
+        <p:txBody>
+          <a:bodyPr lIns="90000" rIns="90000" tIns="45000" bIns="45000" anchor="ctr">
+            <a:noAutofit/>
+          </a:bodyPr>
+          <a:p>
+            <a:endParaRPr b="0" lang="en-US" sz="1800" spc="-1" strike="noStrike">
+              <a:solidFill>
+                <a:schemeClr val="lt1"/>
+              </a:solidFill>
+              <a:latin typeface="Calibri"/>
+              <a:ea typeface="DejaVu Sans"/>
+            </a:endParaRPr>
+          </a:p>
+        </p:txBody>
+      </p:sp>
+      <p:sp>
+        <p:nvSpPr>
+          <p:cNvPr id="139" name="Rounded Rectangle 31"/>
+          <p:cNvSpPr/>
+          <p:nvPr/>
+        </p:nvSpPr>
+        <p:spPr>
+          <a:xfrm>
+            <a:off x="685800" y="2971800"/>
+            <a:ext cx="3518640" cy="3199680"/>
+          </a:xfrm>
+          <a:prstGeom prst="roundRect">
+            <a:avLst>
+              <a:gd name="adj" fmla="val 16667"/>
+            </a:avLst>
+          </a:prstGeom>
+          <a:solidFill>
+            <a:srgbClr val="16161c"/>
+          </a:solidFill>
+          <a:ln>
+            <a:solidFill>
+              <a:srgbClr val="464655"/>
+            </a:solidFill>
+            <a:round/>
+          </a:ln>
+          <a:effectLst>
+            <a:outerShdw blurRad="39960" dir="5400000" dist="23040" rotWithShape="0">
+              <a:srgbClr val="000000">
+                <a:alpha val="35000"/>
+              </a:srgbClr>
+            </a:outerShdw>
+          </a:effectLst>
+        </p:spPr>
+        <p:style>
+          <a:lnRef idx="1">
+            <a:schemeClr val="accent1"/>
+          </a:lnRef>
+          <a:fillRef idx="3">
+            <a:schemeClr val="accent1"/>
+          </a:fillRef>
+          <a:effectRef idx="2">
+            <a:schemeClr val="accent1"/>
+          </a:effectRef>
+          <a:fontRef idx="minor"/>
+        </p:style>
+        <p:txBody>
+          <a:bodyPr lIns="90000" rIns="90000" tIns="45000" bIns="45000" anchor="ctr">
+            <a:noAutofit/>
+          </a:bodyPr>
+          <a:p>
+            <a:pPr marL="216000" indent="-216000">
+              <a:lnSpc>
+                <a:spcPct val="100000"/>
+              </a:lnSpc>
+              <a:buClr>
+                <a:srgbClr val="ffffff"/>
+              </a:buClr>
+              <a:buFont typeface="Wingdings" charset="2"/>
+              <a:buChar char=""/>
+            </a:pPr>
+            <a:r>
+              <a:rPr b="1" lang="en-US" sz="1800" spc="-1" strike="noStrike">
+                <a:solidFill>
+                  <a:schemeClr val="lt1"/>
+                </a:solidFill>
+                <a:latin typeface="Calibri"/>
+                <a:ea typeface="DejaVu Sans"/>
+              </a:rPr>
+              <a:t>DateTimeFormatter → Formats date and time</a:t>
+            </a:r>
+            <a:endParaRPr b="0" lang="en-US" sz="1800" spc="-1" strike="noStrike">
+              <a:solidFill>
+                <a:srgbClr val="ffffff"/>
+              </a:solidFill>
+              <a:latin typeface="Arial"/>
+            </a:endParaRPr>
+          </a:p>
+          <a:p>
+            <a:pPr marL="216000" indent="-216000">
+              <a:lnSpc>
+                <a:spcPct val="100000"/>
+              </a:lnSpc>
+              <a:buClr>
+                <a:srgbClr val="ffffff"/>
+              </a:buClr>
+              <a:buFont typeface="Wingdings" charset="2"/>
+              <a:buChar char=""/>
+            </a:pPr>
+            <a:r>
+              <a:rPr b="1" lang="en-US" sz="1800" spc="-1" strike="noStrike">
+                <a:solidFill>
+                  <a:schemeClr val="lt1"/>
+                </a:solidFill>
+                <a:latin typeface="Calibri"/>
+                <a:ea typeface="DejaVu Sans"/>
+              </a:rPr>
+              <a:t>Supports custom patterns (dd/MM/yyyy, HH:mm, etc.)</a:t>
+            </a:r>
+            <a:endParaRPr b="0" lang="en-US" sz="1800" spc="-1" strike="noStrike">
+              <a:solidFill>
+                <a:srgbClr val="ffffff"/>
+              </a:solidFill>
+              <a:latin typeface="Arial"/>
+            </a:endParaRPr>
+          </a:p>
+          <a:p>
+            <a:pPr marL="216000" indent="-216000">
+              <a:lnSpc>
+                <a:spcPct val="100000"/>
+              </a:lnSpc>
+              <a:buClr>
+                <a:srgbClr val="ffffff"/>
+              </a:buClr>
+              <a:buFont typeface="Wingdings" charset="2"/>
+              <a:buChar char=""/>
+            </a:pPr>
+            <a:r>
+              <a:rPr b="1" lang="en-US" sz="1800" spc="-1" strike="noStrike">
+                <a:solidFill>
+                  <a:schemeClr val="lt1"/>
+                </a:solidFill>
+                <a:latin typeface="Calibri"/>
+                <a:ea typeface="DejaVu Sans"/>
+              </a:rPr>
+              <a:t>Can be used with LocalDateTime, ZonedDateTime, etc.</a:t>
+            </a:r>
+            <a:endParaRPr b="0" lang="en-US" sz="1800" spc="-1" strike="noStrike">
+              <a:solidFill>
+                <a:srgbClr val="ffffff"/>
+              </a:solidFill>
+              <a:latin typeface="Arial"/>
+            </a:endParaRPr>
+          </a:p>
+          <a:p>
+            <a:pPr marL="216000" indent="-216000">
+              <a:lnSpc>
+                <a:spcPct val="100000"/>
+              </a:lnSpc>
+              <a:buClr>
+                <a:srgbClr val="ffffff"/>
+              </a:buClr>
+              <a:buFont typeface="Wingdings" charset="2"/>
+              <a:buChar char=""/>
+            </a:pPr>
+            <a:r>
+              <a:rPr b="1" lang="en-US" sz="1800" spc="-1" strike="noStrike">
+                <a:solidFill>
+                  <a:schemeClr val="lt1"/>
+                </a:solidFill>
+                <a:latin typeface="Calibri"/>
+                <a:ea typeface="DejaVu Sans"/>
+              </a:rPr>
+              <a:t>Provides locale-based formatting (language support)</a:t>
+            </a:r>
+            <a:endParaRPr b="0" lang="en-US" sz="1800" spc="-1" strike="noStrike">
+              <a:solidFill>
+                <a:srgbClr val="ffffff"/>
+              </a:solidFill>
+              <a:latin typeface="Arial"/>
+            </a:endParaRPr>
+          </a:p>
+          <a:p>
+            <a:pPr marL="216000" indent="-216000">
+              <a:lnSpc>
+                <a:spcPct val="100000"/>
+              </a:lnSpc>
+              <a:buClr>
+                <a:srgbClr val="ffffff"/>
+              </a:buClr>
+              <a:buFont typeface="Wingdings" charset="2"/>
+              <a:buChar char=""/>
+            </a:pPr>
+            <a:r>
+              <a:rPr b="1" lang="en-US" sz="1800" spc="-1" strike="noStrike">
+                <a:solidFill>
+                  <a:schemeClr val="lt1"/>
+                </a:solidFill>
+                <a:latin typeface="Calibri"/>
+                <a:ea typeface="DejaVu Sans"/>
+              </a:rPr>
+              <a:t>Improves readability of date-time output</a:t>
+            </a:r>
+            <a:endParaRPr b="0" lang="en-US" sz="1800" spc="-1" strike="noStrike">
+              <a:solidFill>
+                <a:srgbClr val="ffffff"/>
+              </a:solidFill>
+              <a:latin typeface="Arial"/>
+            </a:endParaRPr>
+          </a:p>
+        </p:txBody>
+      </p:sp>
+      <p:sp>
+        <p:nvSpPr>
+          <p:cNvPr id="140" name="Rounded Rectangle 32"/>
+          <p:cNvSpPr/>
+          <p:nvPr/>
+        </p:nvSpPr>
+        <p:spPr>
+          <a:xfrm>
+            <a:off x="4507920" y="3182040"/>
+            <a:ext cx="3290040" cy="2741400"/>
+          </a:xfrm>
+          <a:prstGeom prst="roundRect">
+            <a:avLst>
+              <a:gd name="adj" fmla="val 16667"/>
+            </a:avLst>
+          </a:prstGeom>
+          <a:solidFill>
+            <a:srgbClr val="08080a"/>
+          </a:solidFill>
+          <a:ln>
+            <a:noFill/>
+          </a:ln>
+          <a:effectLst>
+            <a:outerShdw blurRad="39960" dir="5400000" dist="23040" rotWithShape="0">
+              <a:srgbClr val="000000">
+                <a:alpha val="35000"/>
+              </a:srgbClr>
+            </a:outerShdw>
+          </a:effectLst>
+        </p:spPr>
+        <p:style>
+          <a:lnRef idx="1">
+            <a:schemeClr val="accent1"/>
+          </a:lnRef>
+          <a:fillRef idx="3">
+            <a:schemeClr val="accent1"/>
+          </a:fillRef>
+          <a:effectRef idx="2">
+            <a:schemeClr val="accent1"/>
+          </a:effectRef>
+          <a:fontRef idx="minor"/>
+        </p:style>
+        <p:txBody>
+          <a:bodyPr lIns="90000" rIns="90000" tIns="45000" bIns="45000" anchor="ctr">
+            <a:noAutofit/>
+          </a:bodyPr>
+          <a:p>
+            <a:endParaRPr b="0" lang="en-US" sz="1800" spc="-1" strike="noStrike">
+              <a:solidFill>
+                <a:schemeClr val="lt1"/>
+              </a:solidFill>
+              <a:latin typeface="Calibri"/>
+              <a:ea typeface="DejaVu Sans"/>
+            </a:endParaRPr>
+          </a:p>
+        </p:txBody>
+      </p:sp>
+      <p:sp>
+        <p:nvSpPr>
+          <p:cNvPr id="141" name="Rounded Rectangle 33"/>
+          <p:cNvSpPr/>
+          <p:nvPr/>
+        </p:nvSpPr>
+        <p:spPr>
+          <a:xfrm>
+            <a:off x="4434840" y="2971800"/>
+            <a:ext cx="3290040" cy="3428280"/>
+          </a:xfrm>
+          <a:prstGeom prst="roundRect">
+            <a:avLst>
+              <a:gd name="adj" fmla="val 16667"/>
+            </a:avLst>
+          </a:prstGeom>
+          <a:solidFill>
+            <a:srgbClr val="16161c"/>
+          </a:solidFill>
+          <a:ln>
+            <a:solidFill>
+              <a:srgbClr val="464655"/>
+            </a:solidFill>
+            <a:round/>
+          </a:ln>
+          <a:effectLst>
+            <a:outerShdw blurRad="39960" dir="5400000" dist="23040" rotWithShape="0">
+              <a:srgbClr val="000000">
+                <a:alpha val="35000"/>
+              </a:srgbClr>
+            </a:outerShdw>
+          </a:effectLst>
+        </p:spPr>
+        <p:style>
+          <a:lnRef idx="1">
+            <a:schemeClr val="accent1"/>
+          </a:lnRef>
+          <a:fillRef idx="3">
+            <a:schemeClr val="accent1"/>
+          </a:fillRef>
+          <a:effectRef idx="2">
+            <a:schemeClr val="accent1"/>
+          </a:effectRef>
+          <a:fontRef idx="minor"/>
+        </p:style>
+        <p:txBody>
+          <a:bodyPr lIns="90000" rIns="90000" tIns="45000" bIns="45000" anchor="ctr">
+            <a:noAutofit/>
+          </a:bodyPr>
+          <a:p>
+            <a:pPr>
+              <a:lnSpc>
+                <a:spcPct val="100000"/>
+              </a:lnSpc>
+            </a:pPr>
+            <a:r>
+              <a:rPr b="0" lang="en-US" sz="1800" spc="-1" strike="noStrike">
+                <a:solidFill>
+                  <a:schemeClr val="lt1"/>
+                </a:solidFill>
+                <a:latin typeface="Calibri"/>
+                <a:ea typeface="DejaVu Sans"/>
+              </a:rPr>
+              <a:t>Application runs</a:t>
+            </a:r>
+            <a:endParaRPr b="0" lang="en-US" sz="1800" spc="-1" strike="noStrike">
+              <a:solidFill>
+                <a:srgbClr val="ffffff"/>
+              </a:solidFill>
+              <a:latin typeface="Arial"/>
+            </a:endParaRPr>
+          </a:p>
+          <a:p>
+            <a:pPr>
+              <a:lnSpc>
+                <a:spcPct val="100000"/>
+              </a:lnSpc>
+            </a:pPr>
+            <a:r>
+              <a:rPr b="0" lang="en-US" sz="1800" spc="-1" strike="noStrike">
+                <a:solidFill>
+                  <a:schemeClr val="lt1"/>
+                </a:solidFill>
+                <a:latin typeface="Calibri"/>
+                <a:ea typeface="DejaVu Sans"/>
+              </a:rPr>
+              <a:t>Date/Time is required</a:t>
+            </a:r>
+            <a:endParaRPr b="0" lang="en-US" sz="1800" spc="-1" strike="noStrike">
+              <a:solidFill>
+                <a:srgbClr val="ffffff"/>
+              </a:solidFill>
+              <a:latin typeface="Arial"/>
+            </a:endParaRPr>
+          </a:p>
+          <a:p>
+            <a:pPr>
+              <a:lnSpc>
+                <a:spcPct val="100000"/>
+              </a:lnSpc>
+            </a:pPr>
+            <a:r>
+              <a:rPr b="0" lang="en-US" sz="1800" spc="-1" strike="noStrike">
+                <a:solidFill>
+                  <a:schemeClr val="lt1"/>
+                </a:solidFill>
+                <a:latin typeface="Calibri"/>
+                <a:ea typeface="DejaVu Sans"/>
+              </a:rPr>
+              <a:t>A date-time object is created</a:t>
+            </a:r>
+            <a:endParaRPr b="0" lang="en-US" sz="1800" spc="-1" strike="noStrike">
+              <a:solidFill>
+                <a:srgbClr val="ffffff"/>
+              </a:solidFill>
+              <a:latin typeface="Arial"/>
+            </a:endParaRPr>
+          </a:p>
+          <a:p>
+            <a:pPr>
+              <a:lnSpc>
+                <a:spcPct val="100000"/>
+              </a:lnSpc>
+            </a:pPr>
+            <a:r>
+              <a:rPr b="0" lang="en-US" sz="1800" spc="-1" strike="noStrike">
+                <a:solidFill>
+                  <a:schemeClr val="lt1"/>
+                </a:solidFill>
+                <a:latin typeface="Calibri"/>
+                <a:ea typeface="DejaVu Sans"/>
+              </a:rPr>
+              <a:t>A custom format pattern is defined</a:t>
+            </a:r>
+            <a:endParaRPr b="0" lang="en-US" sz="1800" spc="-1" strike="noStrike">
+              <a:solidFill>
+                <a:srgbClr val="ffffff"/>
+              </a:solidFill>
+              <a:latin typeface="Arial"/>
+            </a:endParaRPr>
+          </a:p>
+          <a:p>
+            <a:pPr>
+              <a:lnSpc>
+                <a:spcPct val="100000"/>
+              </a:lnSpc>
+            </a:pPr>
+            <a:r>
+              <a:rPr b="0" lang="en-US" sz="1800" spc="-1" strike="noStrike">
+                <a:solidFill>
+                  <a:schemeClr val="lt1"/>
+                </a:solidFill>
+                <a:latin typeface="Calibri"/>
+                <a:ea typeface="DejaVu Sans"/>
+              </a:rPr>
+              <a:t>The formatter processes the data</a:t>
+            </a:r>
+            <a:endParaRPr b="0" lang="en-US" sz="1800" spc="-1" strike="noStrike">
+              <a:solidFill>
+                <a:srgbClr val="ffffff"/>
+              </a:solidFill>
+              <a:latin typeface="Arial"/>
+            </a:endParaRPr>
+          </a:p>
+          <a:p>
+            <a:pPr>
+              <a:lnSpc>
+                <a:spcPct val="100000"/>
+              </a:lnSpc>
+            </a:pPr>
+            <a:r>
+              <a:rPr b="0" lang="en-US" sz="1800" spc="-1" strike="noStrike">
+                <a:solidFill>
+                  <a:schemeClr val="lt1"/>
+                </a:solidFill>
+                <a:latin typeface="Calibri"/>
+                <a:ea typeface="DejaVu Sans"/>
+              </a:rPr>
+              <a:t>A readable formatted output is produced</a:t>
+            </a:r>
+            <a:endParaRPr b="0" lang="en-US" sz="1800" spc="-1" strike="noStrike">
+              <a:solidFill>
+                <a:srgbClr val="ffffff"/>
+              </a:solidFill>
+              <a:latin typeface="Arial"/>
+            </a:endParaRPr>
+          </a:p>
+          <a:p>
+            <a:pPr>
+              <a:lnSpc>
+                <a:spcPct val="100000"/>
+              </a:lnSpc>
+            </a:pPr>
+            <a:r>
+              <a:rPr b="0" lang="en-US" sz="1800" spc="-1" strike="noStrike">
+                <a:solidFill>
+                  <a:schemeClr val="lt1"/>
+                </a:solidFill>
+                <a:latin typeface="Calibri"/>
+                <a:ea typeface="DejaVu Sans"/>
+              </a:rPr>
+              <a:t>Result is displayed to the user</a:t>
+            </a:r>
+            <a:endParaRPr b="0" lang="en-US" sz="1800" spc="-1" strike="noStrike">
+              <a:solidFill>
+                <a:srgbClr val="ffffff"/>
+              </a:solidFill>
+              <a:latin typeface="Arial"/>
+            </a:endParaRPr>
+          </a:p>
+        </p:txBody>
+      </p:sp>
+      <p:sp>
+        <p:nvSpPr>
+          <p:cNvPr id="142" name="Rounded Rectangle 34"/>
+          <p:cNvSpPr/>
+          <p:nvPr/>
+        </p:nvSpPr>
+        <p:spPr>
+          <a:xfrm>
+            <a:off x="8028360" y="3182040"/>
+            <a:ext cx="3290040" cy="2741400"/>
+          </a:xfrm>
+          <a:prstGeom prst="roundRect">
+            <a:avLst>
+              <a:gd name="adj" fmla="val 16667"/>
+            </a:avLst>
+          </a:prstGeom>
+          <a:solidFill>
+            <a:srgbClr val="08080a"/>
+          </a:solidFill>
+          <a:ln>
+            <a:noFill/>
+          </a:ln>
+          <a:effectLst>
+            <a:outerShdw blurRad="39960" dir="5400000" dist="23040" rotWithShape="0">
+              <a:srgbClr val="000000">
+                <a:alpha val="35000"/>
+              </a:srgbClr>
+            </a:outerShdw>
+          </a:effectLst>
+        </p:spPr>
+        <p:style>
+          <a:lnRef idx="1">
+            <a:schemeClr val="accent1"/>
+          </a:lnRef>
+          <a:fillRef idx="3">
+            <a:schemeClr val="accent1"/>
+          </a:fillRef>
+          <a:effectRef idx="2">
+            <a:schemeClr val="accent1"/>
+          </a:effectRef>
+          <a:fontRef idx="minor"/>
+        </p:style>
+        <p:txBody>
+          <a:bodyPr lIns="90000" rIns="90000" tIns="45000" bIns="45000" anchor="ctr">
+            <a:noAutofit/>
+          </a:bodyPr>
+          <a:p>
+            <a:endParaRPr b="0" lang="en-US" sz="1800" spc="-1" strike="noStrike">
+              <a:solidFill>
+                <a:schemeClr val="lt1"/>
+              </a:solidFill>
+              <a:latin typeface="Calibri"/>
+              <a:ea typeface="DejaVu Sans"/>
+            </a:endParaRPr>
+          </a:p>
+        </p:txBody>
+      </p:sp>
+      <p:sp>
+        <p:nvSpPr>
+          <p:cNvPr id="143" name="Rounded Rectangle 35"/>
+          <p:cNvSpPr/>
+          <p:nvPr/>
+        </p:nvSpPr>
+        <p:spPr>
+          <a:xfrm>
+            <a:off x="7955280" y="2743200"/>
+            <a:ext cx="3931920" cy="3886200"/>
+          </a:xfrm>
+          <a:prstGeom prst="roundRect">
+            <a:avLst>
+              <a:gd name="adj" fmla="val 16667"/>
+            </a:avLst>
+          </a:prstGeom>
+          <a:solidFill>
+            <a:srgbClr val="16161c"/>
+          </a:solidFill>
+          <a:ln>
+            <a:solidFill>
+              <a:srgbClr val="464655"/>
+            </a:solidFill>
+            <a:round/>
+          </a:ln>
+          <a:effectLst>
+            <a:outerShdw blurRad="39960" dir="5400000" dist="23040" rotWithShape="0">
+              <a:srgbClr val="000000">
+                <a:alpha val="35000"/>
+              </a:srgbClr>
+            </a:outerShdw>
+          </a:effectLst>
+        </p:spPr>
+        <p:style>
+          <a:lnRef idx="1">
+            <a:schemeClr val="accent1"/>
+          </a:lnRef>
+          <a:fillRef idx="3">
+            <a:schemeClr val="accent1"/>
+          </a:fillRef>
+          <a:effectRef idx="2">
+            <a:schemeClr val="accent1"/>
+          </a:effectRef>
+          <a:fontRef idx="minor"/>
+        </p:style>
+        <p:txBody>
+          <a:bodyPr lIns="90000" rIns="90000" tIns="45000" bIns="45000" anchor="ctr">
+            <a:noAutofit/>
+          </a:bodyPr>
+          <a:p>
+            <a:pPr algn="ctr">
+              <a:lnSpc>
+                <a:spcPct val="100000"/>
+              </a:lnSpc>
+            </a:pPr>
+            <a:r>
+              <a:rPr b="0" lang="en-US" sz="1100" spc="-1" strike="noStrike">
+                <a:solidFill>
+                  <a:srgbClr val="78ffc8"/>
+                </a:solidFill>
+                <a:latin typeface="Consolas"/>
+                <a:ea typeface="DejaVu Sans"/>
+              </a:rPr>
+              <a:t>import java.time.LocalDateTime;</a:t>
+            </a:r>
+            <a:endParaRPr b="0" lang="en-US" sz="1100" spc="-1" strike="noStrike">
+              <a:solidFill>
+                <a:srgbClr val="ffffff"/>
+              </a:solidFill>
+              <a:latin typeface="Arial"/>
+            </a:endParaRPr>
+          </a:p>
+          <a:p>
+            <a:pPr algn="ctr">
+              <a:lnSpc>
+                <a:spcPct val="100000"/>
+              </a:lnSpc>
+            </a:pPr>
+            <a:r>
+              <a:rPr b="0" lang="en-US" sz="1100" spc="-1" strike="noStrike">
+                <a:solidFill>
+                  <a:srgbClr val="78ffc8"/>
+                </a:solidFill>
+                <a:latin typeface="Consolas"/>
+                <a:ea typeface="DejaVu Sans"/>
+              </a:rPr>
+              <a:t>import java.time.format.DateTimeFormatter;</a:t>
+            </a:r>
+            <a:endParaRPr b="0" lang="en-US" sz="1100" spc="-1" strike="noStrike">
+              <a:solidFill>
+                <a:srgbClr val="ffffff"/>
+              </a:solidFill>
+              <a:latin typeface="Arial"/>
+            </a:endParaRPr>
+          </a:p>
+          <a:p>
+            <a:pPr algn="ctr">
+              <a:lnSpc>
+                <a:spcPct val="100000"/>
+              </a:lnSpc>
+            </a:pPr>
+            <a:r>
+              <a:rPr b="0" lang="en-US" sz="1100" spc="-1" strike="noStrike">
+                <a:solidFill>
+                  <a:srgbClr val="78ffc8"/>
+                </a:solidFill>
+                <a:latin typeface="Consolas"/>
+                <a:ea typeface="DejaVu Sans"/>
+              </a:rPr>
+              <a:t>import java.util.Locale;</a:t>
+            </a:r>
+            <a:endParaRPr b="0" lang="en-US" sz="1100" spc="-1" strike="noStrike">
+              <a:solidFill>
+                <a:srgbClr val="ffffff"/>
+              </a:solidFill>
+              <a:latin typeface="Arial"/>
+            </a:endParaRPr>
+          </a:p>
+          <a:p>
+            <a:pPr algn="ctr">
+              <a:lnSpc>
+                <a:spcPct val="100000"/>
+              </a:lnSpc>
+            </a:pPr>
+            <a:r>
+              <a:rPr b="0" lang="en-US" sz="1100" spc="-1" strike="noStrike">
+                <a:solidFill>
+                  <a:srgbClr val="78ffc8"/>
+                </a:solidFill>
+                <a:latin typeface="Consolas"/>
+                <a:ea typeface="DejaVu Sans"/>
+              </a:rPr>
+              <a:t>public class LocaleFormatterExample {</a:t>
+            </a:r>
+            <a:endParaRPr b="0" lang="en-US" sz="1100" spc="-1" strike="noStrike">
+              <a:solidFill>
+                <a:srgbClr val="ffffff"/>
+              </a:solidFill>
+              <a:latin typeface="Arial"/>
+            </a:endParaRPr>
+          </a:p>
+          <a:p>
+            <a:pPr algn="ctr">
+              <a:lnSpc>
+                <a:spcPct val="100000"/>
+              </a:lnSpc>
+            </a:pPr>
+            <a:r>
+              <a:rPr b="0" lang="en-US" sz="1100" spc="-1" strike="noStrike">
+                <a:solidFill>
+                  <a:srgbClr val="78ffc8"/>
+                </a:solidFill>
+                <a:latin typeface="Consolas"/>
+                <a:ea typeface="DejaVu Sans"/>
+              </a:rPr>
+              <a:t>    </a:t>
+            </a:r>
+            <a:r>
+              <a:rPr b="0" lang="en-US" sz="1100" spc="-1" strike="noStrike">
+                <a:solidFill>
+                  <a:srgbClr val="78ffc8"/>
+                </a:solidFill>
+                <a:latin typeface="Consolas"/>
+                <a:ea typeface="DejaVu Sans"/>
+              </a:rPr>
+              <a:t>public static void main(String[] args) {</a:t>
+            </a:r>
+            <a:endParaRPr b="0" lang="en-US" sz="1100" spc="-1" strike="noStrike">
+              <a:solidFill>
+                <a:srgbClr val="ffffff"/>
+              </a:solidFill>
+              <a:latin typeface="Arial"/>
+            </a:endParaRPr>
+          </a:p>
+          <a:p>
+            <a:pPr algn="ctr">
+              <a:lnSpc>
+                <a:spcPct val="100000"/>
+              </a:lnSpc>
+            </a:pPr>
+            <a:r>
+              <a:rPr b="0" lang="en-US" sz="1100" spc="-1" strike="noStrike">
+                <a:solidFill>
+                  <a:srgbClr val="78ffc8"/>
+                </a:solidFill>
+                <a:latin typeface="Consolas"/>
+                <a:ea typeface="DejaVu Sans"/>
+              </a:rPr>
+              <a:t>        </a:t>
+            </a:r>
+            <a:r>
+              <a:rPr b="0" lang="en-US" sz="1100" spc="-1" strike="noStrike">
+                <a:solidFill>
+                  <a:srgbClr val="78ffc8"/>
+                </a:solidFill>
+                <a:latin typeface="Consolas"/>
+                <a:ea typeface="DejaVu Sans"/>
+              </a:rPr>
+              <a:t>LocalDateTime now = LocalDateTime.now();</a:t>
+            </a:r>
+            <a:endParaRPr b="0" lang="en-US" sz="1100" spc="-1" strike="noStrike">
+              <a:solidFill>
+                <a:srgbClr val="ffffff"/>
+              </a:solidFill>
+              <a:latin typeface="Arial"/>
+            </a:endParaRPr>
+          </a:p>
+          <a:p>
+            <a:pPr algn="ctr">
+              <a:lnSpc>
+                <a:spcPct val="100000"/>
+              </a:lnSpc>
+            </a:pPr>
+            <a:r>
+              <a:rPr b="0" lang="en-US" sz="1100" spc="-1" strike="noStrike">
+                <a:solidFill>
+                  <a:srgbClr val="78ffc8"/>
+                </a:solidFill>
+                <a:latin typeface="Consolas"/>
+                <a:ea typeface="DejaVu Sans"/>
+              </a:rPr>
+              <a:t>        </a:t>
+            </a:r>
+            <a:r>
+              <a:rPr b="0" lang="en-US" sz="1100" spc="-1" strike="noStrike">
+                <a:solidFill>
+                  <a:srgbClr val="78ffc8"/>
+                </a:solidFill>
+                <a:latin typeface="Consolas"/>
+                <a:ea typeface="DejaVu Sans"/>
+              </a:rPr>
+              <a:t>DateTimeFormatter formatterTR =</a:t>
+            </a:r>
+            <a:endParaRPr b="0" lang="en-US" sz="1100" spc="-1" strike="noStrike">
+              <a:solidFill>
+                <a:srgbClr val="ffffff"/>
+              </a:solidFill>
+              <a:latin typeface="Arial"/>
+            </a:endParaRPr>
+          </a:p>
+          <a:p>
+            <a:pPr algn="ctr">
+              <a:lnSpc>
+                <a:spcPct val="100000"/>
+              </a:lnSpc>
+            </a:pPr>
+            <a:r>
+              <a:rPr b="0" lang="en-US" sz="1100" spc="-1" strike="noStrike">
+                <a:solidFill>
+                  <a:srgbClr val="78ffc8"/>
+                </a:solidFill>
+                <a:latin typeface="Consolas"/>
+                <a:ea typeface="DejaVu Sans"/>
+              </a:rPr>
+              <a:t>                </a:t>
+            </a:r>
+            <a:r>
+              <a:rPr b="0" lang="en-US" sz="1100" spc="-1" strike="noStrike">
+                <a:solidFill>
+                  <a:srgbClr val="78ffc8"/>
+                </a:solidFill>
+                <a:latin typeface="Consolas"/>
+                <a:ea typeface="DejaVu Sans"/>
+              </a:rPr>
+              <a:t>DateTimeFormatter.ofPattern("dd MMMM yyyy HH:mm", new Locale("tr", "TR"));</a:t>
+            </a:r>
+            <a:endParaRPr b="0" lang="en-US" sz="1100" spc="-1" strike="noStrike">
+              <a:solidFill>
+                <a:srgbClr val="ffffff"/>
+              </a:solidFill>
+              <a:latin typeface="Arial"/>
+            </a:endParaRPr>
+          </a:p>
+          <a:p>
+            <a:pPr algn="ctr">
+              <a:lnSpc>
+                <a:spcPct val="100000"/>
+              </a:lnSpc>
+            </a:pPr>
+            <a:endParaRPr b="0" lang="en-US" sz="1100" spc="-1" strike="noStrike">
+              <a:solidFill>
+                <a:srgbClr val="ffffff"/>
+              </a:solidFill>
+              <a:latin typeface="Arial"/>
+            </a:endParaRPr>
+          </a:p>
+          <a:p>
+            <a:pPr algn="ctr">
+              <a:lnSpc>
+                <a:spcPct val="100000"/>
+              </a:lnSpc>
+            </a:pPr>
+            <a:r>
+              <a:rPr b="0" lang="en-US" sz="1100" spc="-1" strike="noStrike">
+                <a:solidFill>
+                  <a:srgbClr val="78ffc8"/>
+                </a:solidFill>
+                <a:latin typeface="Consolas"/>
+                <a:ea typeface="DejaVu Sans"/>
+              </a:rPr>
+              <a:t>        </a:t>
+            </a:r>
+            <a:r>
+              <a:rPr b="0" lang="en-US" sz="1100" spc="-1" strike="noStrike">
+                <a:solidFill>
+                  <a:srgbClr val="78ffc8"/>
+                </a:solidFill>
+                <a:latin typeface="Consolas"/>
+                <a:ea typeface="DejaVu Sans"/>
+              </a:rPr>
+              <a:t>DateTimeFormatter formatterUS =</a:t>
+            </a:r>
+            <a:endParaRPr b="0" lang="en-US" sz="1100" spc="-1" strike="noStrike">
+              <a:solidFill>
+                <a:srgbClr val="ffffff"/>
+              </a:solidFill>
+              <a:latin typeface="Arial"/>
+            </a:endParaRPr>
+          </a:p>
+          <a:p>
+            <a:pPr algn="ctr">
+              <a:lnSpc>
+                <a:spcPct val="100000"/>
+              </a:lnSpc>
+            </a:pPr>
+            <a:r>
+              <a:rPr b="0" lang="en-US" sz="1100" spc="-1" strike="noStrike">
+                <a:solidFill>
+                  <a:srgbClr val="78ffc8"/>
+                </a:solidFill>
+                <a:latin typeface="Consolas"/>
+                <a:ea typeface="DejaVu Sans"/>
+              </a:rPr>
+              <a:t>                </a:t>
+            </a:r>
+            <a:r>
+              <a:rPr b="0" lang="en-US" sz="1100" spc="-1" strike="noStrike">
+                <a:solidFill>
+                  <a:srgbClr val="78ffc8"/>
+                </a:solidFill>
+                <a:latin typeface="Consolas"/>
+                <a:ea typeface="DejaVu Sans"/>
+              </a:rPr>
+              <a:t>DateTimeFormatter.ofPattern("MMMM dd, yyyy hh:mm a", Locale.US);</a:t>
+            </a:r>
+            <a:endParaRPr b="0" lang="en-US" sz="1100" spc="-1" strike="noStrike">
+              <a:solidFill>
+                <a:srgbClr val="ffffff"/>
+              </a:solidFill>
+              <a:latin typeface="Arial"/>
+            </a:endParaRPr>
+          </a:p>
+          <a:p>
+            <a:pPr algn="ctr">
+              <a:lnSpc>
+                <a:spcPct val="100000"/>
+              </a:lnSpc>
+            </a:pPr>
+            <a:r>
+              <a:rPr b="0" lang="en-US" sz="1100" spc="-1" strike="noStrike">
+                <a:solidFill>
+                  <a:srgbClr val="78ffc8"/>
+                </a:solidFill>
+                <a:latin typeface="Consolas"/>
+                <a:ea typeface="DejaVu Sans"/>
+              </a:rPr>
+              <a:t>        </a:t>
+            </a:r>
+            <a:r>
+              <a:rPr b="0" lang="en-US" sz="1100" spc="-1" strike="noStrike">
+                <a:solidFill>
+                  <a:srgbClr val="78ffc8"/>
+                </a:solidFill>
+                <a:latin typeface="Consolas"/>
+                <a:ea typeface="DejaVu Sans"/>
+              </a:rPr>
+              <a:t>System.out.println("Turkish Format: " + now.format(formatterTR));</a:t>
+            </a:r>
+            <a:endParaRPr b="0" lang="en-US" sz="1100" spc="-1" strike="noStrike">
+              <a:solidFill>
+                <a:srgbClr val="ffffff"/>
+              </a:solidFill>
+              <a:latin typeface="Arial"/>
+            </a:endParaRPr>
+          </a:p>
+          <a:p>
+            <a:pPr algn="ctr">
+              <a:lnSpc>
+                <a:spcPct val="100000"/>
+              </a:lnSpc>
+            </a:pPr>
+            <a:r>
+              <a:rPr b="0" lang="en-US" sz="1100" spc="-1" strike="noStrike">
+                <a:solidFill>
+                  <a:srgbClr val="78ffc8"/>
+                </a:solidFill>
+                <a:latin typeface="Consolas"/>
+                <a:ea typeface="DejaVu Sans"/>
+              </a:rPr>
+              <a:t>        </a:t>
+            </a:r>
+            <a:r>
+              <a:rPr b="0" lang="en-US" sz="1100" spc="-1" strike="noStrike">
+                <a:solidFill>
+                  <a:srgbClr val="78ffc8"/>
+                </a:solidFill>
+                <a:latin typeface="Consolas"/>
+                <a:ea typeface="DejaVu Sans"/>
+              </a:rPr>
+              <a:t>System.out.println("US Format: " + now.format(formatterUS));</a:t>
+            </a:r>
+            <a:endParaRPr b="0" lang="en-US" sz="1100" spc="-1" strike="noStrike">
+              <a:solidFill>
+                <a:srgbClr val="ffffff"/>
+              </a:solidFill>
+              <a:latin typeface="Arial"/>
+            </a:endParaRPr>
+          </a:p>
+          <a:p>
+            <a:pPr algn="ctr">
+              <a:lnSpc>
+                <a:spcPct val="100000"/>
+              </a:lnSpc>
+            </a:pPr>
+            <a:r>
+              <a:rPr b="0" lang="en-US" sz="1100" spc="-1" strike="noStrike">
+                <a:solidFill>
+                  <a:srgbClr val="78ffc8"/>
+                </a:solidFill>
+                <a:latin typeface="Consolas"/>
+                <a:ea typeface="DejaVu Sans"/>
+              </a:rPr>
+              <a:t>    </a:t>
+            </a:r>
+            <a:r>
+              <a:rPr b="0" lang="en-US" sz="1100" spc="-1" strike="noStrike">
+                <a:solidFill>
+                  <a:srgbClr val="78ffc8"/>
+                </a:solidFill>
+                <a:latin typeface="Consolas"/>
+                <a:ea typeface="DejaVu Sans"/>
+              </a:rPr>
+              <a:t>}</a:t>
+            </a:r>
+            <a:endParaRPr b="0" lang="en-US" sz="1100" spc="-1" strike="noStrike">
+              <a:solidFill>
+                <a:srgbClr val="ffffff"/>
+              </a:solidFill>
+              <a:latin typeface="Arial"/>
+            </a:endParaRPr>
+          </a:p>
+          <a:p>
+            <a:pPr algn="ctr">
+              <a:lnSpc>
+                <a:spcPct val="100000"/>
+              </a:lnSpc>
+            </a:pPr>
+            <a:r>
+              <a:rPr b="0" lang="en-US" sz="1100" spc="-1" strike="noStrike">
+                <a:solidFill>
+                  <a:srgbClr val="78ffc8"/>
+                </a:solidFill>
+                <a:latin typeface="Consolas"/>
+                <a:ea typeface="DejaVu Sans"/>
+              </a:rPr>
+              <a:t>}</a:t>
+            </a:r>
+            <a:endParaRPr b="0" lang="en-US" sz="1100" spc="-1" strike="noStrike">
+              <a:solidFill>
+                <a:srgbClr val="ffffff"/>
+              </a:solidFill>
+              <a:latin typeface="Arial"/>
+            </a:endParaRPr>
+          </a:p>
+        </p:txBody>
+      </p:sp>
+      <p:sp>
+        <p:nvSpPr>
+          <p:cNvPr id="144" name="TextBox 12"/>
+          <p:cNvSpPr/>
+          <p:nvPr/>
+        </p:nvSpPr>
+        <p:spPr>
+          <a:xfrm>
+            <a:off x="4600080" y="6446520"/>
+            <a:ext cx="3051000" cy="363960"/>
           </a:xfrm>
           <a:prstGeom prst="rect">
             <a:avLst/>

--- a/Java/Java #4/EN/Java #4.pptx
+++ b/Java/Java #4/EN/Java #4.pptx
@@ -9,6 +9,7 @@
     <p:sldId id="257" r:id="rId4"/>
     <p:sldId id="258" r:id="rId5"/>
     <p:sldId id="259" r:id="rId6"/>
+    <p:sldId id="260" r:id="rId7"/>
   </p:sldIdLst>
   <p:sldSz cx="9144000" cy="6858000"/>
   <p:notesSz cx="7772400" cy="10058400"/>
@@ -66,7 +67,7 @@
         <p:txBody>
           <a:bodyPr/>
           <a:p>
-            <a:fld id="{46D8EFB3-D884-4042-89D1-9E1880297477}" type="slidenum">
+            <a:fld id="{CAE70256-ED47-4FE6-815B-8EDD1A001B10}" type="slidenum">
               <a:t>&lt;#&gt;</a:t>
             </a:fld>
           </a:p>
@@ -275,7 +276,7 @@
         <p:txBody>
           <a:bodyPr/>
           <a:p>
-            <a:fld id="{83607E36-69E5-4861-8449-5C716F6E5D23}" type="slidenum">
+            <a:fld id="{BCE207A7-1AFC-44F7-9B76-4A76A126BCD2}" type="slidenum">
               <a:t>&lt;#&gt;</a:t>
             </a:fld>
           </a:p>
@@ -570,7 +571,7 @@
         <p:txBody>
           <a:bodyPr/>
           <a:p>
-            <a:fld id="{CDE79773-2AF3-4588-BE6D-3625087D05AC}" type="slidenum">
+            <a:fld id="{782BCE27-2F59-4C73-92DC-B2251B65DEA9}" type="slidenum">
               <a:t>&lt;#&gt;</a:t>
             </a:fld>
           </a:p>
@@ -951,7 +952,7 @@
         <p:txBody>
           <a:bodyPr/>
           <a:p>
-            <a:fld id="{F918DD0E-9114-4A2E-80FF-A2BE5B0B1C4D}" type="slidenum">
+            <a:fld id="{29C83C8A-E728-4C16-864A-491FE3FA08C4}" type="slidenum">
               <a:t>&lt;#&gt;</a:t>
             </a:fld>
           </a:p>
@@ -1114,7 +1115,7 @@
         <p:txBody>
           <a:bodyPr/>
           <a:p>
-            <a:fld id="{472C8311-8197-40E4-95E5-4BFB3B07553C}" type="slidenum">
+            <a:fld id="{48FA3982-C6D3-41E5-BA6E-F49BD71592F9}" type="slidenum">
               <a:t>&lt;#&gt;</a:t>
             </a:fld>
           </a:p>
@@ -1280,7 +1281,7 @@
         <p:txBody>
           <a:bodyPr/>
           <a:p>
-            <a:fld id="{F534F754-F9DA-4622-ABF4-53688B73AC75}" type="slidenum">
+            <a:fld id="{6AAD5A26-B1B2-47DF-959B-A9D80369F0BB}" type="slidenum">
               <a:t>&lt;#&gt;</a:t>
             </a:fld>
           </a:p>
@@ -1489,7 +1490,7 @@
         <p:txBody>
           <a:bodyPr/>
           <a:p>
-            <a:fld id="{FB81D979-0CAF-4190-97AA-8FD03752EA0B}" type="slidenum">
+            <a:fld id="{6654359F-CA34-4643-9D2F-756615137AA1}" type="slidenum">
               <a:t>&lt;#&gt;</a:t>
             </a:fld>
           </a:p>
@@ -1612,7 +1613,7 @@
         <p:txBody>
           <a:bodyPr/>
           <a:p>
-            <a:fld id="{A0497624-444A-4EF3-ADB8-26E5C1DC02F0}" type="slidenum">
+            <a:fld id="{8AFD04AB-BD9D-448C-BD79-7139C3776CEC}" type="slidenum">
               <a:t>&lt;#&gt;</a:t>
             </a:fld>
           </a:p>
@@ -1733,7 +1734,7 @@
         <p:txBody>
           <a:bodyPr/>
           <a:p>
-            <a:fld id="{53869071-88D0-4740-AFCE-E9D18533D472}" type="slidenum">
+            <a:fld id="{E1C8AB4B-CE98-41EE-8355-262BBB9028BD}" type="slidenum">
               <a:t>&lt;#&gt;</a:t>
             </a:fld>
           </a:p>
@@ -1985,7 +1986,7 @@
         <p:txBody>
           <a:bodyPr/>
           <a:p>
-            <a:fld id="{D8ABFA91-84E3-4B9C-AD48-82DB436805C2}" type="slidenum">
+            <a:fld id="{56270B2D-AFE0-4BCB-AB73-3941C0E9E8AB}" type="slidenum">
               <a:t>&lt;#&gt;</a:t>
             </a:fld>
           </a:p>
@@ -2237,7 +2238,7 @@
         <p:txBody>
           <a:bodyPr/>
           <a:p>
-            <a:fld id="{95EAE932-8315-4B78-8B12-8B6EA1E7DA47}" type="slidenum">
+            <a:fld id="{FE9A5FF6-47D2-4A9F-96C4-35DB656DB56C}" type="slidenum">
               <a:t>&lt;#&gt;</a:t>
             </a:fld>
           </a:p>
@@ -2489,7 +2490,7 @@
         <p:txBody>
           <a:bodyPr/>
           <a:p>
-            <a:fld id="{BF4C5CF2-9BD8-4B01-99B7-4968E5632AA5}" type="slidenum">
+            <a:fld id="{A641E268-A85B-4E6D-9808-1BA158309996}" type="slidenum">
               <a:t>&lt;#&gt;</a:t>
             </a:fld>
           </a:p>
@@ -2558,7 +2559,7 @@
         <p:spPr>
           <a:xfrm>
             <a:off x="3124080" y="6356520"/>
-            <a:ext cx="2893320" cy="362880"/>
+            <a:ext cx="2892960" cy="362520"/>
           </a:xfrm>
           <a:prstGeom prst="rect">
             <a:avLst/>
@@ -2630,7 +2631,7 @@
         <p:spPr>
           <a:xfrm>
             <a:off x="6553080" y="6356520"/>
-            <a:ext cx="2131560" cy="362880"/>
+            <a:ext cx="2131200" cy="362520"/>
           </a:xfrm>
           <a:prstGeom prst="rect">
             <a:avLst/>
@@ -2671,7 +2672,7 @@
                 <a:tab algn="l" pos="0"/>
               </a:tabLst>
             </a:pPr>
-            <a:fld id="{8937DDA0-1946-428B-B461-18013A02BC92}" type="slidenum">
+            <a:fld id="{3AFBC365-BBA2-49FF-A7B4-9A083ACEE66C}" type="slidenum">
               <a:rPr b="0" lang="en-US" sz="1200" spc="-1" strike="noStrike">
                 <a:solidFill>
                   <a:srgbClr val="8b8b8b"/>
@@ -2702,7 +2703,7 @@
         <p:spPr>
           <a:xfrm>
             <a:off x="457200" y="6356520"/>
-            <a:ext cx="2131560" cy="362880"/>
+            <a:ext cx="2131200" cy="362520"/>
           </a:xfrm>
           <a:prstGeom prst="rect">
             <a:avLst/>
@@ -3069,7 +3070,7 @@
         <p:spPr>
           <a:xfrm>
             <a:off x="0" y="0"/>
-            <a:ext cx="12186720" cy="6855840"/>
+            <a:ext cx="12186360" cy="6855480"/>
           </a:xfrm>
           <a:prstGeom prst="rect">
             <a:avLst/>
@@ -3129,7 +3130,7 @@
         <p:spPr>
           <a:xfrm>
             <a:off x="0" y="0"/>
-            <a:ext cx="16200" cy="6855840"/>
+            <a:ext cx="15840" cy="6855480"/>
           </a:xfrm>
           <a:prstGeom prst="rect">
             <a:avLst/>
@@ -3189,7 +3190,7 @@
         <p:spPr>
           <a:xfrm>
             <a:off x="914400" y="0"/>
-            <a:ext cx="16200" cy="6855840"/>
+            <a:ext cx="15840" cy="6855480"/>
           </a:xfrm>
           <a:prstGeom prst="rect">
             <a:avLst/>
@@ -3249,7 +3250,7 @@
         <p:spPr>
           <a:xfrm>
             <a:off x="1828800" y="0"/>
-            <a:ext cx="16200" cy="6855840"/>
+            <a:ext cx="15840" cy="6855480"/>
           </a:xfrm>
           <a:prstGeom prst="rect">
             <a:avLst/>
@@ -3309,7 +3310,7 @@
         <p:spPr>
           <a:xfrm>
             <a:off x="2743200" y="0"/>
-            <a:ext cx="16200" cy="6855840"/>
+            <a:ext cx="15840" cy="6855480"/>
           </a:xfrm>
           <a:prstGeom prst="rect">
             <a:avLst/>
@@ -3369,7 +3370,7 @@
         <p:spPr>
           <a:xfrm>
             <a:off x="3657600" y="0"/>
-            <a:ext cx="16200" cy="6855840"/>
+            <a:ext cx="15840" cy="6855480"/>
           </a:xfrm>
           <a:prstGeom prst="rect">
             <a:avLst/>
@@ -3429,7 +3430,7 @@
         <p:spPr>
           <a:xfrm>
             <a:off x="4572000" y="0"/>
-            <a:ext cx="16200" cy="6855840"/>
+            <a:ext cx="15840" cy="6855480"/>
           </a:xfrm>
           <a:prstGeom prst="rect">
             <a:avLst/>
@@ -3489,7 +3490,7 @@
         <p:spPr>
           <a:xfrm>
             <a:off x="5486400" y="0"/>
-            <a:ext cx="16200" cy="6855840"/>
+            <a:ext cx="15840" cy="6855480"/>
           </a:xfrm>
           <a:prstGeom prst="rect">
             <a:avLst/>
@@ -3549,7 +3550,7 @@
         <p:spPr>
           <a:xfrm>
             <a:off x="6400800" y="0"/>
-            <a:ext cx="16200" cy="6855840"/>
+            <a:ext cx="15840" cy="6855480"/>
           </a:xfrm>
           <a:prstGeom prst="rect">
             <a:avLst/>
@@ -3609,7 +3610,7 @@
         <p:spPr>
           <a:xfrm>
             <a:off x="7315200" y="0"/>
-            <a:ext cx="16200" cy="6855840"/>
+            <a:ext cx="15840" cy="6855480"/>
           </a:xfrm>
           <a:prstGeom prst="rect">
             <a:avLst/>
@@ -3669,7 +3670,7 @@
         <p:spPr>
           <a:xfrm>
             <a:off x="8229600" y="0"/>
-            <a:ext cx="16200" cy="6855840"/>
+            <a:ext cx="15840" cy="6855480"/>
           </a:xfrm>
           <a:prstGeom prst="rect">
             <a:avLst/>
@@ -3729,7 +3730,7 @@
         <p:spPr>
           <a:xfrm>
             <a:off x="9144000" y="0"/>
-            <a:ext cx="16200" cy="6855840"/>
+            <a:ext cx="15840" cy="6855480"/>
           </a:xfrm>
           <a:prstGeom prst="rect">
             <a:avLst/>
@@ -3789,7 +3790,7 @@
         <p:spPr>
           <a:xfrm>
             <a:off x="10058400" y="0"/>
-            <a:ext cx="16200" cy="6855840"/>
+            <a:ext cx="15840" cy="6855480"/>
           </a:xfrm>
           <a:prstGeom prst="rect">
             <a:avLst/>
@@ -3849,7 +3850,7 @@
         <p:spPr>
           <a:xfrm>
             <a:off x="10972800" y="0"/>
-            <a:ext cx="16200" cy="6855840"/>
+            <a:ext cx="15840" cy="6855480"/>
           </a:xfrm>
           <a:prstGeom prst="rect">
             <a:avLst/>
@@ -3909,7 +3910,7 @@
         <p:spPr>
           <a:xfrm>
             <a:off x="11887200" y="0"/>
-            <a:ext cx="16200" cy="6855840"/>
+            <a:ext cx="15840" cy="6855480"/>
           </a:xfrm>
           <a:prstGeom prst="rect">
             <a:avLst/>
@@ -3969,7 +3970,7 @@
         <p:spPr>
           <a:xfrm>
             <a:off x="0" y="0"/>
-            <a:ext cx="317880" cy="6855840"/>
+            <a:ext cx="317520" cy="6855480"/>
           </a:xfrm>
           <a:prstGeom prst="rect">
             <a:avLst/>
@@ -4029,7 +4030,7 @@
         <p:spPr>
           <a:xfrm>
             <a:off x="9875520" y="365760"/>
-            <a:ext cx="2009520" cy="500760"/>
+            <a:ext cx="2009160" cy="500400"/>
           </a:xfrm>
           <a:prstGeom prst="roundRect">
             <a:avLst>
@@ -4157,7 +4158,7 @@
         <p:spPr>
           <a:xfrm>
             <a:off x="1548720" y="1785240"/>
-            <a:ext cx="8508600" cy="957960"/>
+            <a:ext cx="8508240" cy="957960"/>
           </a:xfrm>
           <a:prstGeom prst="rect">
             <a:avLst/>
@@ -4257,7 +4258,7 @@
         <p:spPr>
           <a:xfrm>
             <a:off x="987480" y="3182040"/>
-            <a:ext cx="3289680" cy="2741040"/>
+            <a:ext cx="3289320" cy="2740680"/>
           </a:xfrm>
           <a:prstGeom prst="roundRect">
             <a:avLst>
@@ -4319,7 +4320,7 @@
         <p:spPr>
           <a:xfrm>
             <a:off x="914400" y="3108960"/>
-            <a:ext cx="3289680" cy="2741040"/>
+            <a:ext cx="3289320" cy="2740680"/>
           </a:xfrm>
           <a:prstGeom prst="roundRect">
             <a:avLst>
@@ -4453,7 +4454,7 @@
         <p:spPr>
           <a:xfrm>
             <a:off x="4507920" y="3182040"/>
-            <a:ext cx="3289680" cy="2741040"/>
+            <a:ext cx="3289320" cy="2740680"/>
           </a:xfrm>
           <a:prstGeom prst="roundRect">
             <a:avLst>
@@ -4515,7 +4516,7 @@
         <p:spPr>
           <a:xfrm>
             <a:off x="4434840" y="3108960"/>
-            <a:ext cx="3289680" cy="2741040"/>
+            <a:ext cx="3289320" cy="2740680"/>
           </a:xfrm>
           <a:prstGeom prst="roundRect">
             <a:avLst>
@@ -4773,7 +4774,7 @@
         <p:spPr>
           <a:xfrm>
             <a:off x="8028360" y="3182040"/>
-            <a:ext cx="3289680" cy="2741040"/>
+            <a:ext cx="3289320" cy="2740680"/>
           </a:xfrm>
           <a:prstGeom prst="roundRect">
             <a:avLst>
@@ -4835,7 +4836,7 @@
         <p:spPr>
           <a:xfrm>
             <a:off x="7955280" y="2971800"/>
-            <a:ext cx="3930840" cy="3656520"/>
+            <a:ext cx="3930480" cy="3656160"/>
           </a:xfrm>
           <a:prstGeom prst="roundRect">
             <a:avLst>
@@ -5346,7 +5347,7 @@
         <p:spPr>
           <a:xfrm>
             <a:off x="0" y="0"/>
-            <a:ext cx="12187080" cy="6856200"/>
+            <a:ext cx="12186720" cy="6855840"/>
           </a:xfrm>
           <a:prstGeom prst="rect">
             <a:avLst/>
@@ -5406,7 +5407,7 @@
         <p:spPr>
           <a:xfrm>
             <a:off x="0" y="0"/>
-            <a:ext cx="16560" cy="6856200"/>
+            <a:ext cx="16200" cy="6855840"/>
           </a:xfrm>
           <a:prstGeom prst="rect">
             <a:avLst/>
@@ -5466,7 +5467,7 @@
         <p:spPr>
           <a:xfrm>
             <a:off x="914400" y="0"/>
-            <a:ext cx="16560" cy="6856200"/>
+            <a:ext cx="16200" cy="6855840"/>
           </a:xfrm>
           <a:prstGeom prst="rect">
             <a:avLst/>
@@ -5526,7 +5527,7 @@
         <p:spPr>
           <a:xfrm>
             <a:off x="1828800" y="0"/>
-            <a:ext cx="16560" cy="6856200"/>
+            <a:ext cx="16200" cy="6855840"/>
           </a:xfrm>
           <a:prstGeom prst="rect">
             <a:avLst/>
@@ -5586,7 +5587,7 @@
         <p:spPr>
           <a:xfrm>
             <a:off x="2743200" y="0"/>
-            <a:ext cx="16560" cy="6856200"/>
+            <a:ext cx="16200" cy="6855840"/>
           </a:xfrm>
           <a:prstGeom prst="rect">
             <a:avLst/>
@@ -5646,7 +5647,7 @@
         <p:spPr>
           <a:xfrm>
             <a:off x="3657600" y="0"/>
-            <a:ext cx="16560" cy="6856200"/>
+            <a:ext cx="16200" cy="6855840"/>
           </a:xfrm>
           <a:prstGeom prst="rect">
             <a:avLst/>
@@ -5706,7 +5707,7 @@
         <p:spPr>
           <a:xfrm>
             <a:off x="4572000" y="0"/>
-            <a:ext cx="16560" cy="6856200"/>
+            <a:ext cx="16200" cy="6855840"/>
           </a:xfrm>
           <a:prstGeom prst="rect">
             <a:avLst/>
@@ -5766,7 +5767,7 @@
         <p:spPr>
           <a:xfrm>
             <a:off x="5486400" y="0"/>
-            <a:ext cx="16560" cy="6856200"/>
+            <a:ext cx="16200" cy="6855840"/>
           </a:xfrm>
           <a:prstGeom prst="rect">
             <a:avLst/>
@@ -5826,7 +5827,7 @@
         <p:spPr>
           <a:xfrm>
             <a:off x="6400800" y="0"/>
-            <a:ext cx="16560" cy="6856200"/>
+            <a:ext cx="16200" cy="6855840"/>
           </a:xfrm>
           <a:prstGeom prst="rect">
             <a:avLst/>
@@ -5886,7 +5887,7 @@
         <p:spPr>
           <a:xfrm>
             <a:off x="7315200" y="0"/>
-            <a:ext cx="16560" cy="6856200"/>
+            <a:ext cx="16200" cy="6855840"/>
           </a:xfrm>
           <a:prstGeom prst="rect">
             <a:avLst/>
@@ -5946,7 +5947,7 @@
         <p:spPr>
           <a:xfrm>
             <a:off x="8229600" y="0"/>
-            <a:ext cx="16560" cy="6856200"/>
+            <a:ext cx="16200" cy="6855840"/>
           </a:xfrm>
           <a:prstGeom prst="rect">
             <a:avLst/>
@@ -6006,7 +6007,7 @@
         <p:spPr>
           <a:xfrm>
             <a:off x="9144000" y="0"/>
-            <a:ext cx="16560" cy="6856200"/>
+            <a:ext cx="16200" cy="6855840"/>
           </a:xfrm>
           <a:prstGeom prst="rect">
             <a:avLst/>
@@ -6066,7 +6067,7 @@
         <p:spPr>
           <a:xfrm>
             <a:off x="10058400" y="0"/>
-            <a:ext cx="16560" cy="6856200"/>
+            <a:ext cx="16200" cy="6855840"/>
           </a:xfrm>
           <a:prstGeom prst="rect">
             <a:avLst/>
@@ -6126,7 +6127,7 @@
         <p:spPr>
           <a:xfrm>
             <a:off x="10972800" y="0"/>
-            <a:ext cx="16560" cy="6856200"/>
+            <a:ext cx="16200" cy="6855840"/>
           </a:xfrm>
           <a:prstGeom prst="rect">
             <a:avLst/>
@@ -6186,7 +6187,7 @@
         <p:spPr>
           <a:xfrm>
             <a:off x="11887200" y="0"/>
-            <a:ext cx="16560" cy="6856200"/>
+            <a:ext cx="16200" cy="6855840"/>
           </a:xfrm>
           <a:prstGeom prst="rect">
             <a:avLst/>
@@ -6246,7 +6247,7 @@
         <p:spPr>
           <a:xfrm>
             <a:off x="0" y="0"/>
-            <a:ext cx="318240" cy="6856200"/>
+            <a:ext cx="317880" cy="6855840"/>
           </a:xfrm>
           <a:prstGeom prst="rect">
             <a:avLst/>
@@ -6306,7 +6307,7 @@
         <p:spPr>
           <a:xfrm>
             <a:off x="9875520" y="365760"/>
-            <a:ext cx="2009880" cy="501120"/>
+            <a:ext cx="2009520" cy="500760"/>
           </a:xfrm>
           <a:prstGeom prst="roundRect">
             <a:avLst>
@@ -6380,7 +6381,7 @@
         <p:spPr>
           <a:xfrm>
             <a:off x="2219760" y="914400"/>
-            <a:ext cx="6530760" cy="638280"/>
+            <a:ext cx="6530400" cy="638280"/>
           </a:xfrm>
           <a:prstGeom prst="rect">
             <a:avLst/>
@@ -6434,7 +6435,7 @@
         <p:spPr>
           <a:xfrm>
             <a:off x="612000" y="1828800"/>
-            <a:ext cx="10264680" cy="819720"/>
+            <a:ext cx="10264320" cy="819720"/>
           </a:xfrm>
           <a:prstGeom prst="rect">
             <a:avLst/>
@@ -6534,7 +6535,7 @@
         <p:spPr>
           <a:xfrm>
             <a:off x="987480" y="3182040"/>
-            <a:ext cx="3290040" cy="2741400"/>
+            <a:ext cx="3289680" cy="2741040"/>
           </a:xfrm>
           <a:prstGeom prst="roundRect">
             <a:avLst>
@@ -6596,7 +6597,7 @@
         <p:spPr>
           <a:xfrm>
             <a:off x="914400" y="3108960"/>
-            <a:ext cx="3290040" cy="3062520"/>
+            <a:ext cx="3289680" cy="3062160"/>
           </a:xfrm>
           <a:prstGeom prst="roundRect">
             <a:avLst>
@@ -6759,7 +6760,7 @@
         <p:spPr>
           <a:xfrm>
             <a:off x="4507920" y="3182040"/>
-            <a:ext cx="3290040" cy="2741400"/>
+            <a:ext cx="3289680" cy="2741040"/>
           </a:xfrm>
           <a:prstGeom prst="roundRect">
             <a:avLst>
@@ -6821,7 +6822,7 @@
         <p:spPr>
           <a:xfrm>
             <a:off x="4434840" y="2971800"/>
-            <a:ext cx="3290040" cy="3428280"/>
+            <a:ext cx="3289680" cy="3427920"/>
           </a:xfrm>
           <a:prstGeom prst="roundRect">
             <a:avLst>
@@ -7079,7 +7080,7 @@
         <p:spPr>
           <a:xfrm>
             <a:off x="8028360" y="3182040"/>
-            <a:ext cx="3290040" cy="2741400"/>
+            <a:ext cx="3289680" cy="2741040"/>
           </a:xfrm>
           <a:prstGeom prst="roundRect">
             <a:avLst>
@@ -7141,7 +7142,7 @@
         <p:spPr>
           <a:xfrm>
             <a:off x="7955280" y="3108960"/>
-            <a:ext cx="3702600" cy="3062520"/>
+            <a:ext cx="3702240" cy="3062160"/>
           </a:xfrm>
           <a:prstGeom prst="roundRect">
             <a:avLst>
@@ -7586,7 +7587,7 @@
         <p:spPr>
           <a:xfrm>
             <a:off x="0" y="0"/>
-            <a:ext cx="12187080" cy="6856200"/>
+            <a:ext cx="12186720" cy="6855840"/>
           </a:xfrm>
           <a:prstGeom prst="rect">
             <a:avLst/>
@@ -7646,7 +7647,7 @@
         <p:spPr>
           <a:xfrm>
             <a:off x="0" y="0"/>
-            <a:ext cx="16560" cy="6856200"/>
+            <a:ext cx="16200" cy="6855840"/>
           </a:xfrm>
           <a:prstGeom prst="rect">
             <a:avLst/>
@@ -7706,7 +7707,7 @@
         <p:spPr>
           <a:xfrm>
             <a:off x="914400" y="0"/>
-            <a:ext cx="16560" cy="6856200"/>
+            <a:ext cx="16200" cy="6855840"/>
           </a:xfrm>
           <a:prstGeom prst="rect">
             <a:avLst/>
@@ -7766,7 +7767,7 @@
         <p:spPr>
           <a:xfrm>
             <a:off x="1828800" y="0"/>
-            <a:ext cx="16560" cy="6856200"/>
+            <a:ext cx="16200" cy="6855840"/>
           </a:xfrm>
           <a:prstGeom prst="rect">
             <a:avLst/>
@@ -7826,7 +7827,7 @@
         <p:spPr>
           <a:xfrm>
             <a:off x="2743200" y="0"/>
-            <a:ext cx="16560" cy="6856200"/>
+            <a:ext cx="16200" cy="6855840"/>
           </a:xfrm>
           <a:prstGeom prst="rect">
             <a:avLst/>
@@ -7886,7 +7887,7 @@
         <p:spPr>
           <a:xfrm>
             <a:off x="3657600" y="0"/>
-            <a:ext cx="16560" cy="6856200"/>
+            <a:ext cx="16200" cy="6855840"/>
           </a:xfrm>
           <a:prstGeom prst="rect">
             <a:avLst/>
@@ -7946,7 +7947,7 @@
         <p:spPr>
           <a:xfrm>
             <a:off x="4572000" y="0"/>
-            <a:ext cx="16560" cy="6856200"/>
+            <a:ext cx="16200" cy="6855840"/>
           </a:xfrm>
           <a:prstGeom prst="rect">
             <a:avLst/>
@@ -8006,7 +8007,7 @@
         <p:spPr>
           <a:xfrm>
             <a:off x="5486400" y="0"/>
-            <a:ext cx="16560" cy="6856200"/>
+            <a:ext cx="16200" cy="6855840"/>
           </a:xfrm>
           <a:prstGeom prst="rect">
             <a:avLst/>
@@ -8066,7 +8067,7 @@
         <p:spPr>
           <a:xfrm>
             <a:off x="6400800" y="0"/>
-            <a:ext cx="16560" cy="6856200"/>
+            <a:ext cx="16200" cy="6855840"/>
           </a:xfrm>
           <a:prstGeom prst="rect">
             <a:avLst/>
@@ -8126,7 +8127,7 @@
         <p:spPr>
           <a:xfrm>
             <a:off x="7315200" y="0"/>
-            <a:ext cx="16560" cy="6856200"/>
+            <a:ext cx="16200" cy="6855840"/>
           </a:xfrm>
           <a:prstGeom prst="rect">
             <a:avLst/>
@@ -8186,7 +8187,7 @@
         <p:spPr>
           <a:xfrm>
             <a:off x="8229600" y="0"/>
-            <a:ext cx="16560" cy="6856200"/>
+            <a:ext cx="16200" cy="6855840"/>
           </a:xfrm>
           <a:prstGeom prst="rect">
             <a:avLst/>
@@ -8246,7 +8247,7 @@
         <p:spPr>
           <a:xfrm>
             <a:off x="9144000" y="0"/>
-            <a:ext cx="16560" cy="6856200"/>
+            <a:ext cx="16200" cy="6855840"/>
           </a:xfrm>
           <a:prstGeom prst="rect">
             <a:avLst/>
@@ -8306,7 +8307,7 @@
         <p:spPr>
           <a:xfrm>
             <a:off x="10058400" y="0"/>
-            <a:ext cx="16560" cy="6856200"/>
+            <a:ext cx="16200" cy="6855840"/>
           </a:xfrm>
           <a:prstGeom prst="rect">
             <a:avLst/>
@@ -8366,7 +8367,7 @@
         <p:spPr>
           <a:xfrm>
             <a:off x="10972800" y="0"/>
-            <a:ext cx="16560" cy="6856200"/>
+            <a:ext cx="16200" cy="6855840"/>
           </a:xfrm>
           <a:prstGeom prst="rect">
             <a:avLst/>
@@ -8426,7 +8427,7 @@
         <p:spPr>
           <a:xfrm>
             <a:off x="11887200" y="0"/>
-            <a:ext cx="16560" cy="6856200"/>
+            <a:ext cx="16200" cy="6855840"/>
           </a:xfrm>
           <a:prstGeom prst="rect">
             <a:avLst/>
@@ -8486,7 +8487,7 @@
         <p:spPr>
           <a:xfrm>
             <a:off x="0" y="0"/>
-            <a:ext cx="318240" cy="6856200"/>
+            <a:ext cx="317880" cy="6855840"/>
           </a:xfrm>
           <a:prstGeom prst="rect">
             <a:avLst/>
@@ -8546,7 +8547,7 @@
         <p:spPr>
           <a:xfrm>
             <a:off x="9875520" y="365760"/>
-            <a:ext cx="2009880" cy="501120"/>
+            <a:ext cx="2009520" cy="500760"/>
           </a:xfrm>
           <a:prstGeom prst="roundRect">
             <a:avLst>
@@ -8674,7 +8675,7 @@
         <p:spPr>
           <a:xfrm>
             <a:off x="1304280" y="1828800"/>
-            <a:ext cx="8879760" cy="819720"/>
+            <a:ext cx="8879400" cy="819720"/>
           </a:xfrm>
           <a:prstGeom prst="rect">
             <a:avLst/>
@@ -8774,7 +8775,7 @@
         <p:spPr>
           <a:xfrm>
             <a:off x="987480" y="3182040"/>
-            <a:ext cx="3290040" cy="2741400"/>
+            <a:ext cx="3289680" cy="2741040"/>
           </a:xfrm>
           <a:prstGeom prst="roundRect">
             <a:avLst>
@@ -8836,7 +8837,7 @@
         <p:spPr>
           <a:xfrm>
             <a:off x="685800" y="2971800"/>
-            <a:ext cx="3518640" cy="3199680"/>
+            <a:ext cx="3518280" cy="3199320"/>
           </a:xfrm>
           <a:prstGeom prst="roundRect">
             <a:avLst>
@@ -9027,7 +9028,7 @@
         <p:spPr>
           <a:xfrm>
             <a:off x="4507920" y="3182040"/>
-            <a:ext cx="3290040" cy="2741400"/>
+            <a:ext cx="3289680" cy="2741040"/>
           </a:xfrm>
           <a:prstGeom prst="roundRect">
             <a:avLst>
@@ -9089,7 +9090,7 @@
         <p:spPr>
           <a:xfrm>
             <a:off x="4434840" y="2971800"/>
-            <a:ext cx="3290040" cy="3428280"/>
+            <a:ext cx="3289680" cy="3427920"/>
           </a:xfrm>
           <a:prstGeom prst="roundRect">
             <a:avLst>
@@ -9347,7 +9348,7 @@
         <p:spPr>
           <a:xfrm>
             <a:off x="8028360" y="3182040"/>
-            <a:ext cx="3290040" cy="2741400"/>
+            <a:ext cx="3289680" cy="2741040"/>
           </a:xfrm>
           <a:prstGeom prst="roundRect">
             <a:avLst>
@@ -9409,7 +9410,7 @@
         <p:spPr>
           <a:xfrm>
             <a:off x="7955280" y="3108960"/>
-            <a:ext cx="3702600" cy="3062520"/>
+            <a:ext cx="3702240" cy="3062160"/>
           </a:xfrm>
           <a:prstGeom prst="roundRect">
             <a:avLst>
@@ -9854,7 +9855,7 @@
         <p:spPr>
           <a:xfrm>
             <a:off x="0" y="0"/>
-            <a:ext cx="12187080" cy="6856200"/>
+            <a:ext cx="12186720" cy="6855840"/>
           </a:xfrm>
           <a:prstGeom prst="rect">
             <a:avLst/>
@@ -9890,6 +9891,11 @@
             <a:noAutofit/>
           </a:bodyPr>
           <a:p>
+            <a:pPr>
+              <a:lnSpc>
+                <a:spcPct val="100000"/>
+              </a:lnSpc>
+            </a:pPr>
             <a:endParaRPr b="0" lang="en-US" sz="1800" spc="-1" strike="noStrike">
               <a:solidFill>
                 <a:schemeClr val="lt1"/>
@@ -9909,7 +9915,7 @@
         <p:spPr>
           <a:xfrm>
             <a:off x="0" y="0"/>
-            <a:ext cx="16560" cy="6856200"/>
+            <a:ext cx="16200" cy="6855840"/>
           </a:xfrm>
           <a:prstGeom prst="rect">
             <a:avLst/>
@@ -9945,6 +9951,11 @@
             <a:noAutofit/>
           </a:bodyPr>
           <a:p>
+            <a:pPr>
+              <a:lnSpc>
+                <a:spcPct val="100000"/>
+              </a:lnSpc>
+            </a:pPr>
             <a:endParaRPr b="0" lang="en-US" sz="1800" spc="-1" strike="noStrike">
               <a:solidFill>
                 <a:schemeClr val="lt1"/>
@@ -9964,7 +9975,7 @@
         <p:spPr>
           <a:xfrm>
             <a:off x="914400" y="0"/>
-            <a:ext cx="16560" cy="6856200"/>
+            <a:ext cx="16200" cy="6855840"/>
           </a:xfrm>
           <a:prstGeom prst="rect">
             <a:avLst/>
@@ -10000,6 +10011,11 @@
             <a:noAutofit/>
           </a:bodyPr>
           <a:p>
+            <a:pPr>
+              <a:lnSpc>
+                <a:spcPct val="100000"/>
+              </a:lnSpc>
+            </a:pPr>
             <a:endParaRPr b="0" lang="en-US" sz="1800" spc="-1" strike="noStrike">
               <a:solidFill>
                 <a:schemeClr val="lt1"/>
@@ -10019,7 +10035,7 @@
         <p:spPr>
           <a:xfrm>
             <a:off x="1828800" y="0"/>
-            <a:ext cx="16560" cy="6856200"/>
+            <a:ext cx="16200" cy="6855840"/>
           </a:xfrm>
           <a:prstGeom prst="rect">
             <a:avLst/>
@@ -10055,6 +10071,11 @@
             <a:noAutofit/>
           </a:bodyPr>
           <a:p>
+            <a:pPr>
+              <a:lnSpc>
+                <a:spcPct val="100000"/>
+              </a:lnSpc>
+            </a:pPr>
             <a:endParaRPr b="0" lang="en-US" sz="1800" spc="-1" strike="noStrike">
               <a:solidFill>
                 <a:schemeClr val="lt1"/>
@@ -10074,7 +10095,7 @@
         <p:spPr>
           <a:xfrm>
             <a:off x="2743200" y="0"/>
-            <a:ext cx="16560" cy="6856200"/>
+            <a:ext cx="16200" cy="6855840"/>
           </a:xfrm>
           <a:prstGeom prst="rect">
             <a:avLst/>
@@ -10110,6 +10131,11 @@
             <a:noAutofit/>
           </a:bodyPr>
           <a:p>
+            <a:pPr>
+              <a:lnSpc>
+                <a:spcPct val="100000"/>
+              </a:lnSpc>
+            </a:pPr>
             <a:endParaRPr b="0" lang="en-US" sz="1800" spc="-1" strike="noStrike">
               <a:solidFill>
                 <a:schemeClr val="lt1"/>
@@ -10129,7 +10155,7 @@
         <p:spPr>
           <a:xfrm>
             <a:off x="3657600" y="0"/>
-            <a:ext cx="16560" cy="6856200"/>
+            <a:ext cx="16200" cy="6855840"/>
           </a:xfrm>
           <a:prstGeom prst="rect">
             <a:avLst/>
@@ -10165,6 +10191,11 @@
             <a:noAutofit/>
           </a:bodyPr>
           <a:p>
+            <a:pPr>
+              <a:lnSpc>
+                <a:spcPct val="100000"/>
+              </a:lnSpc>
+            </a:pPr>
             <a:endParaRPr b="0" lang="en-US" sz="1800" spc="-1" strike="noStrike">
               <a:solidFill>
                 <a:schemeClr val="lt1"/>
@@ -10184,7 +10215,7 @@
         <p:spPr>
           <a:xfrm>
             <a:off x="4572000" y="0"/>
-            <a:ext cx="16560" cy="6856200"/>
+            <a:ext cx="16200" cy="6855840"/>
           </a:xfrm>
           <a:prstGeom prst="rect">
             <a:avLst/>
@@ -10220,6 +10251,11 @@
             <a:noAutofit/>
           </a:bodyPr>
           <a:p>
+            <a:pPr>
+              <a:lnSpc>
+                <a:spcPct val="100000"/>
+              </a:lnSpc>
+            </a:pPr>
             <a:endParaRPr b="0" lang="en-US" sz="1800" spc="-1" strike="noStrike">
               <a:solidFill>
                 <a:schemeClr val="lt1"/>
@@ -10239,7 +10275,7 @@
         <p:spPr>
           <a:xfrm>
             <a:off x="5486400" y="0"/>
-            <a:ext cx="16560" cy="6856200"/>
+            <a:ext cx="16200" cy="6855840"/>
           </a:xfrm>
           <a:prstGeom prst="rect">
             <a:avLst/>
@@ -10275,6 +10311,11 @@
             <a:noAutofit/>
           </a:bodyPr>
           <a:p>
+            <a:pPr>
+              <a:lnSpc>
+                <a:spcPct val="100000"/>
+              </a:lnSpc>
+            </a:pPr>
             <a:endParaRPr b="0" lang="en-US" sz="1800" spc="-1" strike="noStrike">
               <a:solidFill>
                 <a:schemeClr val="lt1"/>
@@ -10294,7 +10335,7 @@
         <p:spPr>
           <a:xfrm>
             <a:off x="6400800" y="0"/>
-            <a:ext cx="16560" cy="6856200"/>
+            <a:ext cx="16200" cy="6855840"/>
           </a:xfrm>
           <a:prstGeom prst="rect">
             <a:avLst/>
@@ -10330,6 +10371,11 @@
             <a:noAutofit/>
           </a:bodyPr>
           <a:p>
+            <a:pPr>
+              <a:lnSpc>
+                <a:spcPct val="100000"/>
+              </a:lnSpc>
+            </a:pPr>
             <a:endParaRPr b="0" lang="en-US" sz="1800" spc="-1" strike="noStrike">
               <a:solidFill>
                 <a:schemeClr val="lt1"/>
@@ -10349,7 +10395,7 @@
         <p:spPr>
           <a:xfrm>
             <a:off x="7315200" y="0"/>
-            <a:ext cx="16560" cy="6856200"/>
+            <a:ext cx="16200" cy="6855840"/>
           </a:xfrm>
           <a:prstGeom prst="rect">
             <a:avLst/>
@@ -10385,6 +10431,11 @@
             <a:noAutofit/>
           </a:bodyPr>
           <a:p>
+            <a:pPr>
+              <a:lnSpc>
+                <a:spcPct val="100000"/>
+              </a:lnSpc>
+            </a:pPr>
             <a:endParaRPr b="0" lang="en-US" sz="1800" spc="-1" strike="noStrike">
               <a:solidFill>
                 <a:schemeClr val="lt1"/>
@@ -10404,7 +10455,7 @@
         <p:spPr>
           <a:xfrm>
             <a:off x="8229600" y="0"/>
-            <a:ext cx="16560" cy="6856200"/>
+            <a:ext cx="16200" cy="6855840"/>
           </a:xfrm>
           <a:prstGeom prst="rect">
             <a:avLst/>
@@ -10440,6 +10491,11 @@
             <a:noAutofit/>
           </a:bodyPr>
           <a:p>
+            <a:pPr>
+              <a:lnSpc>
+                <a:spcPct val="100000"/>
+              </a:lnSpc>
+            </a:pPr>
             <a:endParaRPr b="0" lang="en-US" sz="1800" spc="-1" strike="noStrike">
               <a:solidFill>
                 <a:schemeClr val="lt1"/>
@@ -10459,7 +10515,7 @@
         <p:spPr>
           <a:xfrm>
             <a:off x="9144000" y="0"/>
-            <a:ext cx="16560" cy="6856200"/>
+            <a:ext cx="16200" cy="6855840"/>
           </a:xfrm>
           <a:prstGeom prst="rect">
             <a:avLst/>
@@ -10495,6 +10551,11 @@
             <a:noAutofit/>
           </a:bodyPr>
           <a:p>
+            <a:pPr>
+              <a:lnSpc>
+                <a:spcPct val="100000"/>
+              </a:lnSpc>
+            </a:pPr>
             <a:endParaRPr b="0" lang="en-US" sz="1800" spc="-1" strike="noStrike">
               <a:solidFill>
                 <a:schemeClr val="lt1"/>
@@ -10514,7 +10575,7 @@
         <p:spPr>
           <a:xfrm>
             <a:off x="10058400" y="0"/>
-            <a:ext cx="16560" cy="6856200"/>
+            <a:ext cx="16200" cy="6855840"/>
           </a:xfrm>
           <a:prstGeom prst="rect">
             <a:avLst/>
@@ -10550,6 +10611,11 @@
             <a:noAutofit/>
           </a:bodyPr>
           <a:p>
+            <a:pPr>
+              <a:lnSpc>
+                <a:spcPct val="100000"/>
+              </a:lnSpc>
+            </a:pPr>
             <a:endParaRPr b="0" lang="en-US" sz="1800" spc="-1" strike="noStrike">
               <a:solidFill>
                 <a:schemeClr val="lt1"/>
@@ -10569,7 +10635,7 @@
         <p:spPr>
           <a:xfrm>
             <a:off x="10972800" y="0"/>
-            <a:ext cx="16560" cy="6856200"/>
+            <a:ext cx="16200" cy="6855840"/>
           </a:xfrm>
           <a:prstGeom prst="rect">
             <a:avLst/>
@@ -10605,6 +10671,11 @@
             <a:noAutofit/>
           </a:bodyPr>
           <a:p>
+            <a:pPr>
+              <a:lnSpc>
+                <a:spcPct val="100000"/>
+              </a:lnSpc>
+            </a:pPr>
             <a:endParaRPr b="0" lang="en-US" sz="1800" spc="-1" strike="noStrike">
               <a:solidFill>
                 <a:schemeClr val="lt1"/>
@@ -10624,7 +10695,7 @@
         <p:spPr>
           <a:xfrm>
             <a:off x="11887200" y="0"/>
-            <a:ext cx="16560" cy="6856200"/>
+            <a:ext cx="16200" cy="6855840"/>
           </a:xfrm>
           <a:prstGeom prst="rect">
             <a:avLst/>
@@ -10660,6 +10731,11 @@
             <a:noAutofit/>
           </a:bodyPr>
           <a:p>
+            <a:pPr>
+              <a:lnSpc>
+                <a:spcPct val="100000"/>
+              </a:lnSpc>
+            </a:pPr>
             <a:endParaRPr b="0" lang="en-US" sz="1800" spc="-1" strike="noStrike">
               <a:solidFill>
                 <a:schemeClr val="lt1"/>
@@ -10679,7 +10755,7 @@
         <p:spPr>
           <a:xfrm>
             <a:off x="0" y="0"/>
-            <a:ext cx="318240" cy="6856200"/>
+            <a:ext cx="317880" cy="6855840"/>
           </a:xfrm>
           <a:prstGeom prst="rect">
             <a:avLst/>
@@ -10715,6 +10791,11 @@
             <a:noAutofit/>
           </a:bodyPr>
           <a:p>
+            <a:pPr>
+              <a:lnSpc>
+                <a:spcPct val="100000"/>
+              </a:lnSpc>
+            </a:pPr>
             <a:endParaRPr b="0" lang="en-US" sz="1800" spc="-1" strike="noStrike">
               <a:solidFill>
                 <a:schemeClr val="lt1"/>
@@ -10734,7 +10815,7 @@
         <p:spPr>
           <a:xfrm>
             <a:off x="9875520" y="365760"/>
-            <a:ext cx="2009880" cy="501120"/>
+            <a:ext cx="2009520" cy="500760"/>
           </a:xfrm>
           <a:prstGeom prst="roundRect">
             <a:avLst>
@@ -10808,7 +10889,7 @@
         <p:spPr>
           <a:xfrm>
             <a:off x="2845800" y="914400"/>
-            <a:ext cx="5279040" cy="638280"/>
+            <a:ext cx="5278680" cy="638280"/>
           </a:xfrm>
           <a:prstGeom prst="rect">
             <a:avLst/>
@@ -10862,7 +10943,7 @@
         <p:spPr>
           <a:xfrm>
             <a:off x="1726200" y="1828800"/>
-            <a:ext cx="8035920" cy="576360"/>
+            <a:ext cx="8035560" cy="576360"/>
           </a:xfrm>
           <a:prstGeom prst="rect">
             <a:avLst/>
@@ -10939,7 +11020,7 @@
         <p:spPr>
           <a:xfrm>
             <a:off x="987480" y="3182040"/>
-            <a:ext cx="3290040" cy="2741400"/>
+            <a:ext cx="3289680" cy="2741040"/>
           </a:xfrm>
           <a:prstGeom prst="roundRect">
             <a:avLst>
@@ -10977,6 +11058,11 @@
             <a:noAutofit/>
           </a:bodyPr>
           <a:p>
+            <a:pPr>
+              <a:lnSpc>
+                <a:spcPct val="100000"/>
+              </a:lnSpc>
+            </a:pPr>
             <a:endParaRPr b="0" lang="en-US" sz="1800" spc="-1" strike="noStrike">
               <a:solidFill>
                 <a:schemeClr val="lt1"/>
@@ -10996,7 +11082,7 @@
         <p:spPr>
           <a:xfrm>
             <a:off x="685800" y="2971800"/>
-            <a:ext cx="3518640" cy="3199680"/>
+            <a:ext cx="3518280" cy="3199320"/>
           </a:xfrm>
           <a:prstGeom prst="roundRect">
             <a:avLst>
@@ -11187,7 +11273,7 @@
         <p:spPr>
           <a:xfrm>
             <a:off x="4507920" y="3182040"/>
-            <a:ext cx="3290040" cy="2741400"/>
+            <a:ext cx="3289680" cy="2741040"/>
           </a:xfrm>
           <a:prstGeom prst="roundRect">
             <a:avLst>
@@ -11225,6 +11311,11 @@
             <a:noAutofit/>
           </a:bodyPr>
           <a:p>
+            <a:pPr>
+              <a:lnSpc>
+                <a:spcPct val="100000"/>
+              </a:lnSpc>
+            </a:pPr>
             <a:endParaRPr b="0" lang="en-US" sz="1800" spc="-1" strike="noStrike">
               <a:solidFill>
                 <a:schemeClr val="lt1"/>
@@ -11244,7 +11335,7 @@
         <p:spPr>
           <a:xfrm>
             <a:off x="4434840" y="2971800"/>
-            <a:ext cx="3290040" cy="3428280"/>
+            <a:ext cx="3289680" cy="3427920"/>
           </a:xfrm>
           <a:prstGeom prst="roundRect">
             <a:avLst>
@@ -11456,7 +11547,7 @@
         <p:spPr>
           <a:xfrm>
             <a:off x="8028360" y="3182040"/>
-            <a:ext cx="3290040" cy="2741400"/>
+            <a:ext cx="3289680" cy="2741040"/>
           </a:xfrm>
           <a:prstGeom prst="roundRect">
             <a:avLst>
@@ -11494,6 +11585,11 @@
             <a:noAutofit/>
           </a:bodyPr>
           <a:p>
+            <a:pPr>
+              <a:lnSpc>
+                <a:spcPct val="100000"/>
+              </a:lnSpc>
+            </a:pPr>
             <a:endParaRPr b="0" lang="en-US" sz="1800" spc="-1" strike="noStrike">
               <a:solidFill>
                 <a:schemeClr val="lt1"/>
@@ -11513,7 +11609,7 @@
         <p:spPr>
           <a:xfrm>
             <a:off x="7955280" y="2743200"/>
-            <a:ext cx="3931920" cy="3886200"/>
+            <a:ext cx="3931560" cy="3885840"/>
           </a:xfrm>
           <a:prstGeom prst="roundRect">
             <a:avLst>
@@ -11983,6 +12079,2131 @@
       <p:sp>
         <p:nvSpPr>
           <p:cNvPr id="144" name="TextBox 12"/>
+          <p:cNvSpPr/>
+          <p:nvPr/>
+        </p:nvSpPr>
+        <p:spPr>
+          <a:xfrm>
+            <a:off x="4600080" y="6446520"/>
+            <a:ext cx="3051000" cy="363960"/>
+          </a:xfrm>
+          <a:prstGeom prst="rect">
+            <a:avLst/>
+          </a:prstGeom>
+          <a:noFill/>
+          <a:ln w="0">
+            <a:noFill/>
+          </a:ln>
+        </p:spPr>
+        <p:style>
+          <a:lnRef idx="0"/>
+          <a:fillRef idx="0"/>
+          <a:effectRef idx="0"/>
+          <a:fontRef idx="minor"/>
+        </p:style>
+        <p:txBody>
+          <a:bodyPr wrap="none" lIns="90000" rIns="90000" tIns="45000" bIns="45000" anchor="t">
+            <a:spAutoFit/>
+          </a:bodyPr>
+          <a:p>
+            <a:pPr>
+              <a:lnSpc>
+                <a:spcPct val="100000"/>
+              </a:lnSpc>
+            </a:pPr>
+            <a:r>
+              <a:rPr b="0" lang="en-US" sz="1800" spc="-1" strike="noStrike">
+                <a:solidFill>
+                  <a:srgbClr val="000000"/>
+                </a:solidFill>
+                <a:latin typeface="Calibri"/>
+                <a:ea typeface="DejaVu Sans"/>
+              </a:rPr>
+              <a:t>Java • Ultra Premium Template</a:t>
+            </a:r>
+            <a:endParaRPr b="0" lang="en-US" sz="1800" spc="-1" strike="noStrike">
+              <a:solidFill>
+                <a:srgbClr val="000000"/>
+              </a:solidFill>
+              <a:latin typeface="Arial"/>
+            </a:endParaRPr>
+          </a:p>
+        </p:txBody>
+      </p:sp>
+    </p:spTree>
+  </p:cSld>
+  <mc:AlternateContent>
+    <mc:Choice Requires="p14">
+      <p:transition spd="slow" p14:dur="2000"/>
+    </mc:Choice>
+    <mc:Fallback>
+      <p:transition spd="slow"/>
+    </mc:Fallback>
+  </mc:AlternateContent>
+</p:sld>
+</file>
+
+<file path=ppt/slides/slide5.xml><?xml version="1.0" encoding="utf-8"?>
+<p:sld xmlns:a="http://schemas.openxmlformats.org/drawingml/2006/main" xmlns:p="http://schemas.openxmlformats.org/presentationml/2006/main" xmlns:r="http://schemas.openxmlformats.org/officeDocument/2006/relationships" xmlns:p14="http://schemas.microsoft.com/office/powerpoint/2010/main" xmlns:p15="http://schemas.microsoft.com/office/powerpoint/2012/main" xmlns:mc="http://schemas.openxmlformats.org/markup-compatibility/2006">
+  <p:cSld>
+    <p:spTree>
+      <p:nvGrpSpPr>
+        <p:cNvPr id="1" name=""/>
+        <p:cNvGrpSpPr/>
+        <p:nvPr/>
+      </p:nvGrpSpPr>
+      <p:grpSpPr>
+        <a:xfrm>
+          <a:off x="0" y="0"/>
+          <a:ext cx="0" cy="0"/>
+          <a:chOff x="0" y="0"/>
+          <a:chExt cx="0" cy="0"/>
+        </a:xfrm>
+      </p:grpSpPr>
+      <p:sp>
+        <p:nvSpPr>
+          <p:cNvPr id="145" name="Rectangle 65"/>
+          <p:cNvSpPr/>
+          <p:nvPr/>
+        </p:nvSpPr>
+        <p:spPr>
+          <a:xfrm>
+            <a:off x="0" y="0"/>
+            <a:ext cx="12186720" cy="6855840"/>
+          </a:xfrm>
+          <a:prstGeom prst="rect">
+            <a:avLst/>
+          </a:prstGeom>
+          <a:solidFill>
+            <a:srgbClr val="0b0b0d"/>
+          </a:solidFill>
+          <a:ln>
+            <a:noFill/>
+          </a:ln>
+          <a:effectLst>
+            <a:outerShdw blurRad="39960" dir="5400000" dist="23040" rotWithShape="0">
+              <a:srgbClr val="000000">
+                <a:alpha val="35000"/>
+              </a:srgbClr>
+            </a:outerShdw>
+          </a:effectLst>
+        </p:spPr>
+        <p:style>
+          <a:lnRef idx="1">
+            <a:schemeClr val="accent1"/>
+          </a:lnRef>
+          <a:fillRef idx="3">
+            <a:schemeClr val="accent1"/>
+          </a:fillRef>
+          <a:effectRef idx="2">
+            <a:schemeClr val="accent1"/>
+          </a:effectRef>
+          <a:fontRef idx="minor"/>
+        </p:style>
+        <p:txBody>
+          <a:bodyPr lIns="90000" rIns="90000" tIns="45000" bIns="45000" anchor="ctr">
+            <a:noAutofit/>
+          </a:bodyPr>
+          <a:p>
+            <a:endParaRPr b="0" lang="en-US" sz="1800" spc="-1" strike="noStrike">
+              <a:solidFill>
+                <a:schemeClr val="lt1"/>
+              </a:solidFill>
+              <a:latin typeface="Calibri"/>
+              <a:ea typeface="DejaVu Sans"/>
+            </a:endParaRPr>
+          </a:p>
+        </p:txBody>
+      </p:sp>
+      <p:sp>
+        <p:nvSpPr>
+          <p:cNvPr id="146" name="Rectangle 66"/>
+          <p:cNvSpPr/>
+          <p:nvPr/>
+        </p:nvSpPr>
+        <p:spPr>
+          <a:xfrm>
+            <a:off x="0" y="0"/>
+            <a:ext cx="16200" cy="6855840"/>
+          </a:xfrm>
+          <a:prstGeom prst="rect">
+            <a:avLst/>
+          </a:prstGeom>
+          <a:solidFill>
+            <a:srgbClr val="121216"/>
+          </a:solidFill>
+          <a:ln>
+            <a:noFill/>
+          </a:ln>
+          <a:effectLst>
+            <a:outerShdw blurRad="39960" dir="5400000" dist="23040" rotWithShape="0">
+              <a:srgbClr val="000000">
+                <a:alpha val="35000"/>
+              </a:srgbClr>
+            </a:outerShdw>
+          </a:effectLst>
+        </p:spPr>
+        <p:style>
+          <a:lnRef idx="1">
+            <a:schemeClr val="accent1"/>
+          </a:lnRef>
+          <a:fillRef idx="3">
+            <a:schemeClr val="accent1"/>
+          </a:fillRef>
+          <a:effectRef idx="2">
+            <a:schemeClr val="accent1"/>
+          </a:effectRef>
+          <a:fontRef idx="minor"/>
+        </p:style>
+        <p:txBody>
+          <a:bodyPr lIns="90000" rIns="90000" tIns="45000" bIns="45000" anchor="ctr">
+            <a:noAutofit/>
+          </a:bodyPr>
+          <a:p>
+            <a:endParaRPr b="0" lang="en-US" sz="1800" spc="-1" strike="noStrike">
+              <a:solidFill>
+                <a:schemeClr val="lt1"/>
+              </a:solidFill>
+              <a:latin typeface="Calibri"/>
+              <a:ea typeface="DejaVu Sans"/>
+            </a:endParaRPr>
+          </a:p>
+        </p:txBody>
+      </p:sp>
+      <p:sp>
+        <p:nvSpPr>
+          <p:cNvPr id="147" name="Rectangle 67"/>
+          <p:cNvSpPr/>
+          <p:nvPr/>
+        </p:nvSpPr>
+        <p:spPr>
+          <a:xfrm>
+            <a:off x="914400" y="0"/>
+            <a:ext cx="16200" cy="6855840"/>
+          </a:xfrm>
+          <a:prstGeom prst="rect">
+            <a:avLst/>
+          </a:prstGeom>
+          <a:solidFill>
+            <a:srgbClr val="121216"/>
+          </a:solidFill>
+          <a:ln>
+            <a:noFill/>
+          </a:ln>
+          <a:effectLst>
+            <a:outerShdw blurRad="39960" dir="5400000" dist="23040" rotWithShape="0">
+              <a:srgbClr val="000000">
+                <a:alpha val="35000"/>
+              </a:srgbClr>
+            </a:outerShdw>
+          </a:effectLst>
+        </p:spPr>
+        <p:style>
+          <a:lnRef idx="1">
+            <a:schemeClr val="accent1"/>
+          </a:lnRef>
+          <a:fillRef idx="3">
+            <a:schemeClr val="accent1"/>
+          </a:fillRef>
+          <a:effectRef idx="2">
+            <a:schemeClr val="accent1"/>
+          </a:effectRef>
+          <a:fontRef idx="minor"/>
+        </p:style>
+        <p:txBody>
+          <a:bodyPr lIns="90000" rIns="90000" tIns="45000" bIns="45000" anchor="ctr">
+            <a:noAutofit/>
+          </a:bodyPr>
+          <a:p>
+            <a:endParaRPr b="0" lang="en-US" sz="1800" spc="-1" strike="noStrike">
+              <a:solidFill>
+                <a:schemeClr val="lt1"/>
+              </a:solidFill>
+              <a:latin typeface="Calibri"/>
+              <a:ea typeface="DejaVu Sans"/>
+            </a:endParaRPr>
+          </a:p>
+        </p:txBody>
+      </p:sp>
+      <p:sp>
+        <p:nvSpPr>
+          <p:cNvPr id="148" name="Rectangle 68"/>
+          <p:cNvSpPr/>
+          <p:nvPr/>
+        </p:nvSpPr>
+        <p:spPr>
+          <a:xfrm>
+            <a:off x="1828800" y="0"/>
+            <a:ext cx="16200" cy="6855840"/>
+          </a:xfrm>
+          <a:prstGeom prst="rect">
+            <a:avLst/>
+          </a:prstGeom>
+          <a:solidFill>
+            <a:srgbClr val="121216"/>
+          </a:solidFill>
+          <a:ln>
+            <a:noFill/>
+          </a:ln>
+          <a:effectLst>
+            <a:outerShdw blurRad="39960" dir="5400000" dist="23040" rotWithShape="0">
+              <a:srgbClr val="000000">
+                <a:alpha val="35000"/>
+              </a:srgbClr>
+            </a:outerShdw>
+          </a:effectLst>
+        </p:spPr>
+        <p:style>
+          <a:lnRef idx="1">
+            <a:schemeClr val="accent1"/>
+          </a:lnRef>
+          <a:fillRef idx="3">
+            <a:schemeClr val="accent1"/>
+          </a:fillRef>
+          <a:effectRef idx="2">
+            <a:schemeClr val="accent1"/>
+          </a:effectRef>
+          <a:fontRef idx="minor"/>
+        </p:style>
+        <p:txBody>
+          <a:bodyPr lIns="90000" rIns="90000" tIns="45000" bIns="45000" anchor="ctr">
+            <a:noAutofit/>
+          </a:bodyPr>
+          <a:p>
+            <a:endParaRPr b="0" lang="en-US" sz="1800" spc="-1" strike="noStrike">
+              <a:solidFill>
+                <a:schemeClr val="lt1"/>
+              </a:solidFill>
+              <a:latin typeface="Calibri"/>
+              <a:ea typeface="DejaVu Sans"/>
+            </a:endParaRPr>
+          </a:p>
+        </p:txBody>
+      </p:sp>
+      <p:sp>
+        <p:nvSpPr>
+          <p:cNvPr id="149" name="Rectangle 69"/>
+          <p:cNvSpPr/>
+          <p:nvPr/>
+        </p:nvSpPr>
+        <p:spPr>
+          <a:xfrm>
+            <a:off x="2743200" y="0"/>
+            <a:ext cx="16200" cy="6855840"/>
+          </a:xfrm>
+          <a:prstGeom prst="rect">
+            <a:avLst/>
+          </a:prstGeom>
+          <a:solidFill>
+            <a:srgbClr val="121216"/>
+          </a:solidFill>
+          <a:ln>
+            <a:noFill/>
+          </a:ln>
+          <a:effectLst>
+            <a:outerShdw blurRad="39960" dir="5400000" dist="23040" rotWithShape="0">
+              <a:srgbClr val="000000">
+                <a:alpha val="35000"/>
+              </a:srgbClr>
+            </a:outerShdw>
+          </a:effectLst>
+        </p:spPr>
+        <p:style>
+          <a:lnRef idx="1">
+            <a:schemeClr val="accent1"/>
+          </a:lnRef>
+          <a:fillRef idx="3">
+            <a:schemeClr val="accent1"/>
+          </a:fillRef>
+          <a:effectRef idx="2">
+            <a:schemeClr val="accent1"/>
+          </a:effectRef>
+          <a:fontRef idx="minor"/>
+        </p:style>
+        <p:txBody>
+          <a:bodyPr lIns="90000" rIns="90000" tIns="45000" bIns="45000" anchor="ctr">
+            <a:noAutofit/>
+          </a:bodyPr>
+          <a:p>
+            <a:endParaRPr b="0" lang="en-US" sz="1800" spc="-1" strike="noStrike">
+              <a:solidFill>
+                <a:schemeClr val="lt1"/>
+              </a:solidFill>
+              <a:latin typeface="Calibri"/>
+              <a:ea typeface="DejaVu Sans"/>
+            </a:endParaRPr>
+          </a:p>
+        </p:txBody>
+      </p:sp>
+      <p:sp>
+        <p:nvSpPr>
+          <p:cNvPr id="150" name="Rectangle 70"/>
+          <p:cNvSpPr/>
+          <p:nvPr/>
+        </p:nvSpPr>
+        <p:spPr>
+          <a:xfrm>
+            <a:off x="3657600" y="0"/>
+            <a:ext cx="16200" cy="6855840"/>
+          </a:xfrm>
+          <a:prstGeom prst="rect">
+            <a:avLst/>
+          </a:prstGeom>
+          <a:solidFill>
+            <a:srgbClr val="121216"/>
+          </a:solidFill>
+          <a:ln>
+            <a:noFill/>
+          </a:ln>
+          <a:effectLst>
+            <a:outerShdw blurRad="39960" dir="5400000" dist="23040" rotWithShape="0">
+              <a:srgbClr val="000000">
+                <a:alpha val="35000"/>
+              </a:srgbClr>
+            </a:outerShdw>
+          </a:effectLst>
+        </p:spPr>
+        <p:style>
+          <a:lnRef idx="1">
+            <a:schemeClr val="accent1"/>
+          </a:lnRef>
+          <a:fillRef idx="3">
+            <a:schemeClr val="accent1"/>
+          </a:fillRef>
+          <a:effectRef idx="2">
+            <a:schemeClr val="accent1"/>
+          </a:effectRef>
+          <a:fontRef idx="minor"/>
+        </p:style>
+        <p:txBody>
+          <a:bodyPr lIns="90000" rIns="90000" tIns="45000" bIns="45000" anchor="ctr">
+            <a:noAutofit/>
+          </a:bodyPr>
+          <a:p>
+            <a:endParaRPr b="0" lang="en-US" sz="1800" spc="-1" strike="noStrike">
+              <a:solidFill>
+                <a:schemeClr val="lt1"/>
+              </a:solidFill>
+              <a:latin typeface="Calibri"/>
+              <a:ea typeface="DejaVu Sans"/>
+            </a:endParaRPr>
+          </a:p>
+        </p:txBody>
+      </p:sp>
+      <p:sp>
+        <p:nvSpPr>
+          <p:cNvPr id="151" name="Rectangle 71"/>
+          <p:cNvSpPr/>
+          <p:nvPr/>
+        </p:nvSpPr>
+        <p:spPr>
+          <a:xfrm>
+            <a:off x="4572000" y="0"/>
+            <a:ext cx="16200" cy="6855840"/>
+          </a:xfrm>
+          <a:prstGeom prst="rect">
+            <a:avLst/>
+          </a:prstGeom>
+          <a:solidFill>
+            <a:srgbClr val="121216"/>
+          </a:solidFill>
+          <a:ln>
+            <a:noFill/>
+          </a:ln>
+          <a:effectLst>
+            <a:outerShdw blurRad="39960" dir="5400000" dist="23040" rotWithShape="0">
+              <a:srgbClr val="000000">
+                <a:alpha val="35000"/>
+              </a:srgbClr>
+            </a:outerShdw>
+          </a:effectLst>
+        </p:spPr>
+        <p:style>
+          <a:lnRef idx="1">
+            <a:schemeClr val="accent1"/>
+          </a:lnRef>
+          <a:fillRef idx="3">
+            <a:schemeClr val="accent1"/>
+          </a:fillRef>
+          <a:effectRef idx="2">
+            <a:schemeClr val="accent1"/>
+          </a:effectRef>
+          <a:fontRef idx="minor"/>
+        </p:style>
+        <p:txBody>
+          <a:bodyPr lIns="90000" rIns="90000" tIns="45000" bIns="45000" anchor="ctr">
+            <a:noAutofit/>
+          </a:bodyPr>
+          <a:p>
+            <a:endParaRPr b="0" lang="en-US" sz="1800" spc="-1" strike="noStrike">
+              <a:solidFill>
+                <a:schemeClr val="lt1"/>
+              </a:solidFill>
+              <a:latin typeface="Calibri"/>
+              <a:ea typeface="DejaVu Sans"/>
+            </a:endParaRPr>
+          </a:p>
+        </p:txBody>
+      </p:sp>
+      <p:sp>
+        <p:nvSpPr>
+          <p:cNvPr id="152" name="Rectangle 72"/>
+          <p:cNvSpPr/>
+          <p:nvPr/>
+        </p:nvSpPr>
+        <p:spPr>
+          <a:xfrm>
+            <a:off x="5486400" y="0"/>
+            <a:ext cx="16200" cy="6855840"/>
+          </a:xfrm>
+          <a:prstGeom prst="rect">
+            <a:avLst/>
+          </a:prstGeom>
+          <a:solidFill>
+            <a:srgbClr val="121216"/>
+          </a:solidFill>
+          <a:ln>
+            <a:noFill/>
+          </a:ln>
+          <a:effectLst>
+            <a:outerShdw blurRad="39960" dir="5400000" dist="23040" rotWithShape="0">
+              <a:srgbClr val="000000">
+                <a:alpha val="35000"/>
+              </a:srgbClr>
+            </a:outerShdw>
+          </a:effectLst>
+        </p:spPr>
+        <p:style>
+          <a:lnRef idx="1">
+            <a:schemeClr val="accent1"/>
+          </a:lnRef>
+          <a:fillRef idx="3">
+            <a:schemeClr val="accent1"/>
+          </a:fillRef>
+          <a:effectRef idx="2">
+            <a:schemeClr val="accent1"/>
+          </a:effectRef>
+          <a:fontRef idx="minor"/>
+        </p:style>
+        <p:txBody>
+          <a:bodyPr lIns="90000" rIns="90000" tIns="45000" bIns="45000" anchor="ctr">
+            <a:noAutofit/>
+          </a:bodyPr>
+          <a:p>
+            <a:endParaRPr b="0" lang="en-US" sz="1800" spc="-1" strike="noStrike">
+              <a:solidFill>
+                <a:schemeClr val="lt1"/>
+              </a:solidFill>
+              <a:latin typeface="Calibri"/>
+              <a:ea typeface="DejaVu Sans"/>
+            </a:endParaRPr>
+          </a:p>
+        </p:txBody>
+      </p:sp>
+      <p:sp>
+        <p:nvSpPr>
+          <p:cNvPr id="153" name="Rectangle 73"/>
+          <p:cNvSpPr/>
+          <p:nvPr/>
+        </p:nvSpPr>
+        <p:spPr>
+          <a:xfrm>
+            <a:off x="6400800" y="0"/>
+            <a:ext cx="16200" cy="6855840"/>
+          </a:xfrm>
+          <a:prstGeom prst="rect">
+            <a:avLst/>
+          </a:prstGeom>
+          <a:solidFill>
+            <a:srgbClr val="121216"/>
+          </a:solidFill>
+          <a:ln>
+            <a:noFill/>
+          </a:ln>
+          <a:effectLst>
+            <a:outerShdw blurRad="39960" dir="5400000" dist="23040" rotWithShape="0">
+              <a:srgbClr val="000000">
+                <a:alpha val="35000"/>
+              </a:srgbClr>
+            </a:outerShdw>
+          </a:effectLst>
+        </p:spPr>
+        <p:style>
+          <a:lnRef idx="1">
+            <a:schemeClr val="accent1"/>
+          </a:lnRef>
+          <a:fillRef idx="3">
+            <a:schemeClr val="accent1"/>
+          </a:fillRef>
+          <a:effectRef idx="2">
+            <a:schemeClr val="accent1"/>
+          </a:effectRef>
+          <a:fontRef idx="minor"/>
+        </p:style>
+        <p:txBody>
+          <a:bodyPr lIns="90000" rIns="90000" tIns="45000" bIns="45000" anchor="ctr">
+            <a:noAutofit/>
+          </a:bodyPr>
+          <a:p>
+            <a:endParaRPr b="0" lang="en-US" sz="1800" spc="-1" strike="noStrike">
+              <a:solidFill>
+                <a:schemeClr val="lt1"/>
+              </a:solidFill>
+              <a:latin typeface="Calibri"/>
+              <a:ea typeface="DejaVu Sans"/>
+            </a:endParaRPr>
+          </a:p>
+        </p:txBody>
+      </p:sp>
+      <p:sp>
+        <p:nvSpPr>
+          <p:cNvPr id="154" name="Rectangle 74"/>
+          <p:cNvSpPr/>
+          <p:nvPr/>
+        </p:nvSpPr>
+        <p:spPr>
+          <a:xfrm>
+            <a:off x="7315200" y="0"/>
+            <a:ext cx="16200" cy="6855840"/>
+          </a:xfrm>
+          <a:prstGeom prst="rect">
+            <a:avLst/>
+          </a:prstGeom>
+          <a:solidFill>
+            <a:srgbClr val="121216"/>
+          </a:solidFill>
+          <a:ln>
+            <a:noFill/>
+          </a:ln>
+          <a:effectLst>
+            <a:outerShdw blurRad="39960" dir="5400000" dist="23040" rotWithShape="0">
+              <a:srgbClr val="000000">
+                <a:alpha val="35000"/>
+              </a:srgbClr>
+            </a:outerShdw>
+          </a:effectLst>
+        </p:spPr>
+        <p:style>
+          <a:lnRef idx="1">
+            <a:schemeClr val="accent1"/>
+          </a:lnRef>
+          <a:fillRef idx="3">
+            <a:schemeClr val="accent1"/>
+          </a:fillRef>
+          <a:effectRef idx="2">
+            <a:schemeClr val="accent1"/>
+          </a:effectRef>
+          <a:fontRef idx="minor"/>
+        </p:style>
+        <p:txBody>
+          <a:bodyPr lIns="90000" rIns="90000" tIns="45000" bIns="45000" anchor="ctr">
+            <a:noAutofit/>
+          </a:bodyPr>
+          <a:p>
+            <a:endParaRPr b="0" lang="en-US" sz="1800" spc="-1" strike="noStrike">
+              <a:solidFill>
+                <a:schemeClr val="lt1"/>
+              </a:solidFill>
+              <a:latin typeface="Calibri"/>
+              <a:ea typeface="DejaVu Sans"/>
+            </a:endParaRPr>
+          </a:p>
+        </p:txBody>
+      </p:sp>
+      <p:sp>
+        <p:nvSpPr>
+          <p:cNvPr id="155" name="Rectangle 75"/>
+          <p:cNvSpPr/>
+          <p:nvPr/>
+        </p:nvSpPr>
+        <p:spPr>
+          <a:xfrm>
+            <a:off x="8229600" y="0"/>
+            <a:ext cx="16200" cy="6855840"/>
+          </a:xfrm>
+          <a:prstGeom prst="rect">
+            <a:avLst/>
+          </a:prstGeom>
+          <a:solidFill>
+            <a:srgbClr val="121216"/>
+          </a:solidFill>
+          <a:ln>
+            <a:noFill/>
+          </a:ln>
+          <a:effectLst>
+            <a:outerShdw blurRad="39960" dir="5400000" dist="23040" rotWithShape="0">
+              <a:srgbClr val="000000">
+                <a:alpha val="35000"/>
+              </a:srgbClr>
+            </a:outerShdw>
+          </a:effectLst>
+        </p:spPr>
+        <p:style>
+          <a:lnRef idx="1">
+            <a:schemeClr val="accent1"/>
+          </a:lnRef>
+          <a:fillRef idx="3">
+            <a:schemeClr val="accent1"/>
+          </a:fillRef>
+          <a:effectRef idx="2">
+            <a:schemeClr val="accent1"/>
+          </a:effectRef>
+          <a:fontRef idx="minor"/>
+        </p:style>
+        <p:txBody>
+          <a:bodyPr lIns="90000" rIns="90000" tIns="45000" bIns="45000" anchor="ctr">
+            <a:noAutofit/>
+          </a:bodyPr>
+          <a:p>
+            <a:endParaRPr b="0" lang="en-US" sz="1800" spc="-1" strike="noStrike">
+              <a:solidFill>
+                <a:schemeClr val="lt1"/>
+              </a:solidFill>
+              <a:latin typeface="Calibri"/>
+              <a:ea typeface="DejaVu Sans"/>
+            </a:endParaRPr>
+          </a:p>
+        </p:txBody>
+      </p:sp>
+      <p:sp>
+        <p:nvSpPr>
+          <p:cNvPr id="156" name="Rectangle 76"/>
+          <p:cNvSpPr/>
+          <p:nvPr/>
+        </p:nvSpPr>
+        <p:spPr>
+          <a:xfrm>
+            <a:off x="9144000" y="0"/>
+            <a:ext cx="16200" cy="6855840"/>
+          </a:xfrm>
+          <a:prstGeom prst="rect">
+            <a:avLst/>
+          </a:prstGeom>
+          <a:solidFill>
+            <a:srgbClr val="121216"/>
+          </a:solidFill>
+          <a:ln>
+            <a:noFill/>
+          </a:ln>
+          <a:effectLst>
+            <a:outerShdw blurRad="39960" dir="5400000" dist="23040" rotWithShape="0">
+              <a:srgbClr val="000000">
+                <a:alpha val="35000"/>
+              </a:srgbClr>
+            </a:outerShdw>
+          </a:effectLst>
+        </p:spPr>
+        <p:style>
+          <a:lnRef idx="1">
+            <a:schemeClr val="accent1"/>
+          </a:lnRef>
+          <a:fillRef idx="3">
+            <a:schemeClr val="accent1"/>
+          </a:fillRef>
+          <a:effectRef idx="2">
+            <a:schemeClr val="accent1"/>
+          </a:effectRef>
+          <a:fontRef idx="minor"/>
+        </p:style>
+        <p:txBody>
+          <a:bodyPr lIns="90000" rIns="90000" tIns="45000" bIns="45000" anchor="ctr">
+            <a:noAutofit/>
+          </a:bodyPr>
+          <a:p>
+            <a:endParaRPr b="0" lang="en-US" sz="1800" spc="-1" strike="noStrike">
+              <a:solidFill>
+                <a:schemeClr val="lt1"/>
+              </a:solidFill>
+              <a:latin typeface="Calibri"/>
+              <a:ea typeface="DejaVu Sans"/>
+            </a:endParaRPr>
+          </a:p>
+        </p:txBody>
+      </p:sp>
+      <p:sp>
+        <p:nvSpPr>
+          <p:cNvPr id="157" name="Rectangle 77"/>
+          <p:cNvSpPr/>
+          <p:nvPr/>
+        </p:nvSpPr>
+        <p:spPr>
+          <a:xfrm>
+            <a:off x="10058400" y="0"/>
+            <a:ext cx="16200" cy="6855840"/>
+          </a:xfrm>
+          <a:prstGeom prst="rect">
+            <a:avLst/>
+          </a:prstGeom>
+          <a:solidFill>
+            <a:srgbClr val="121216"/>
+          </a:solidFill>
+          <a:ln>
+            <a:noFill/>
+          </a:ln>
+          <a:effectLst>
+            <a:outerShdw blurRad="39960" dir="5400000" dist="23040" rotWithShape="0">
+              <a:srgbClr val="000000">
+                <a:alpha val="35000"/>
+              </a:srgbClr>
+            </a:outerShdw>
+          </a:effectLst>
+        </p:spPr>
+        <p:style>
+          <a:lnRef idx="1">
+            <a:schemeClr val="accent1"/>
+          </a:lnRef>
+          <a:fillRef idx="3">
+            <a:schemeClr val="accent1"/>
+          </a:fillRef>
+          <a:effectRef idx="2">
+            <a:schemeClr val="accent1"/>
+          </a:effectRef>
+          <a:fontRef idx="minor"/>
+        </p:style>
+        <p:txBody>
+          <a:bodyPr lIns="90000" rIns="90000" tIns="45000" bIns="45000" anchor="ctr">
+            <a:noAutofit/>
+          </a:bodyPr>
+          <a:p>
+            <a:endParaRPr b="0" lang="en-US" sz="1800" spc="-1" strike="noStrike">
+              <a:solidFill>
+                <a:schemeClr val="lt1"/>
+              </a:solidFill>
+              <a:latin typeface="Calibri"/>
+              <a:ea typeface="DejaVu Sans"/>
+            </a:endParaRPr>
+          </a:p>
+        </p:txBody>
+      </p:sp>
+      <p:sp>
+        <p:nvSpPr>
+          <p:cNvPr id="158" name="Rectangle 78"/>
+          <p:cNvSpPr/>
+          <p:nvPr/>
+        </p:nvSpPr>
+        <p:spPr>
+          <a:xfrm>
+            <a:off x="10972800" y="0"/>
+            <a:ext cx="16200" cy="6855840"/>
+          </a:xfrm>
+          <a:prstGeom prst="rect">
+            <a:avLst/>
+          </a:prstGeom>
+          <a:solidFill>
+            <a:srgbClr val="121216"/>
+          </a:solidFill>
+          <a:ln>
+            <a:noFill/>
+          </a:ln>
+          <a:effectLst>
+            <a:outerShdw blurRad="39960" dir="5400000" dist="23040" rotWithShape="0">
+              <a:srgbClr val="000000">
+                <a:alpha val="35000"/>
+              </a:srgbClr>
+            </a:outerShdw>
+          </a:effectLst>
+        </p:spPr>
+        <p:style>
+          <a:lnRef idx="1">
+            <a:schemeClr val="accent1"/>
+          </a:lnRef>
+          <a:fillRef idx="3">
+            <a:schemeClr val="accent1"/>
+          </a:fillRef>
+          <a:effectRef idx="2">
+            <a:schemeClr val="accent1"/>
+          </a:effectRef>
+          <a:fontRef idx="minor"/>
+        </p:style>
+        <p:txBody>
+          <a:bodyPr lIns="90000" rIns="90000" tIns="45000" bIns="45000" anchor="ctr">
+            <a:noAutofit/>
+          </a:bodyPr>
+          <a:p>
+            <a:endParaRPr b="0" lang="en-US" sz="1800" spc="-1" strike="noStrike">
+              <a:solidFill>
+                <a:schemeClr val="lt1"/>
+              </a:solidFill>
+              <a:latin typeface="Calibri"/>
+              <a:ea typeface="DejaVu Sans"/>
+            </a:endParaRPr>
+          </a:p>
+        </p:txBody>
+      </p:sp>
+      <p:sp>
+        <p:nvSpPr>
+          <p:cNvPr id="159" name="Rectangle 79"/>
+          <p:cNvSpPr/>
+          <p:nvPr/>
+        </p:nvSpPr>
+        <p:spPr>
+          <a:xfrm>
+            <a:off x="11887200" y="0"/>
+            <a:ext cx="16200" cy="6855840"/>
+          </a:xfrm>
+          <a:prstGeom prst="rect">
+            <a:avLst/>
+          </a:prstGeom>
+          <a:solidFill>
+            <a:srgbClr val="121216"/>
+          </a:solidFill>
+          <a:ln>
+            <a:noFill/>
+          </a:ln>
+          <a:effectLst>
+            <a:outerShdw blurRad="39960" dir="5400000" dist="23040" rotWithShape="0">
+              <a:srgbClr val="000000">
+                <a:alpha val="35000"/>
+              </a:srgbClr>
+            </a:outerShdw>
+          </a:effectLst>
+        </p:spPr>
+        <p:style>
+          <a:lnRef idx="1">
+            <a:schemeClr val="accent1"/>
+          </a:lnRef>
+          <a:fillRef idx="3">
+            <a:schemeClr val="accent1"/>
+          </a:fillRef>
+          <a:effectRef idx="2">
+            <a:schemeClr val="accent1"/>
+          </a:effectRef>
+          <a:fontRef idx="minor"/>
+        </p:style>
+        <p:txBody>
+          <a:bodyPr lIns="90000" rIns="90000" tIns="45000" bIns="45000" anchor="ctr">
+            <a:noAutofit/>
+          </a:bodyPr>
+          <a:p>
+            <a:endParaRPr b="0" lang="en-US" sz="1800" spc="-1" strike="noStrike">
+              <a:solidFill>
+                <a:schemeClr val="lt1"/>
+              </a:solidFill>
+              <a:latin typeface="Calibri"/>
+              <a:ea typeface="DejaVu Sans"/>
+            </a:endParaRPr>
+          </a:p>
+        </p:txBody>
+      </p:sp>
+      <p:sp>
+        <p:nvSpPr>
+          <p:cNvPr id="160" name="Rectangle 80"/>
+          <p:cNvSpPr/>
+          <p:nvPr/>
+        </p:nvSpPr>
+        <p:spPr>
+          <a:xfrm>
+            <a:off x="0" y="0"/>
+            <a:ext cx="317880" cy="6855840"/>
+          </a:xfrm>
+          <a:prstGeom prst="rect">
+            <a:avLst/>
+          </a:prstGeom>
+          <a:solidFill>
+            <a:srgbClr val="ff8c00"/>
+          </a:solidFill>
+          <a:ln>
+            <a:noFill/>
+          </a:ln>
+          <a:effectLst>
+            <a:outerShdw blurRad="39960" dir="5400000" dist="23040" rotWithShape="0">
+              <a:srgbClr val="000000">
+                <a:alpha val="35000"/>
+              </a:srgbClr>
+            </a:outerShdw>
+          </a:effectLst>
+        </p:spPr>
+        <p:style>
+          <a:lnRef idx="1">
+            <a:schemeClr val="accent1"/>
+          </a:lnRef>
+          <a:fillRef idx="3">
+            <a:schemeClr val="accent1"/>
+          </a:fillRef>
+          <a:effectRef idx="2">
+            <a:schemeClr val="accent1"/>
+          </a:effectRef>
+          <a:fontRef idx="minor"/>
+        </p:style>
+        <p:txBody>
+          <a:bodyPr lIns="90000" rIns="90000" tIns="45000" bIns="45000" anchor="ctr">
+            <a:noAutofit/>
+          </a:bodyPr>
+          <a:p>
+            <a:endParaRPr b="0" lang="en-US" sz="1800" spc="-1" strike="noStrike">
+              <a:solidFill>
+                <a:schemeClr val="lt1"/>
+              </a:solidFill>
+              <a:latin typeface="Calibri"/>
+              <a:ea typeface="DejaVu Sans"/>
+            </a:endParaRPr>
+          </a:p>
+        </p:txBody>
+      </p:sp>
+      <p:sp>
+        <p:nvSpPr>
+          <p:cNvPr id="161" name="Rounded Rectangle 36"/>
+          <p:cNvSpPr/>
+          <p:nvPr/>
+        </p:nvSpPr>
+        <p:spPr>
+          <a:xfrm>
+            <a:off x="9875520" y="365760"/>
+            <a:ext cx="2009520" cy="500760"/>
+          </a:xfrm>
+          <a:prstGeom prst="roundRect">
+            <a:avLst>
+              <a:gd name="adj" fmla="val 16667"/>
+            </a:avLst>
+          </a:prstGeom>
+          <a:solidFill>
+            <a:srgbClr val="1e1e24"/>
+          </a:solidFill>
+          <a:ln>
+            <a:solidFill>
+              <a:srgbClr val="ff8c00"/>
+            </a:solidFill>
+            <a:round/>
+          </a:ln>
+          <a:effectLst>
+            <a:outerShdw blurRad="39960" dir="5400000" dist="23040" rotWithShape="0">
+              <a:srgbClr val="000000">
+                <a:alpha val="35000"/>
+              </a:srgbClr>
+            </a:outerShdw>
+          </a:effectLst>
+        </p:spPr>
+        <p:style>
+          <a:lnRef idx="1">
+            <a:schemeClr val="accent1"/>
+          </a:lnRef>
+          <a:fillRef idx="3">
+            <a:schemeClr val="accent1"/>
+          </a:fillRef>
+          <a:effectRef idx="2">
+            <a:schemeClr val="accent1"/>
+          </a:effectRef>
+          <a:fontRef idx="minor"/>
+        </p:style>
+        <p:txBody>
+          <a:bodyPr lIns="90000" rIns="90000" tIns="45000" bIns="45000" anchor="ctr">
+            <a:noAutofit/>
+          </a:bodyPr>
+          <a:p>
+            <a:pPr algn="ctr">
+              <a:lnSpc>
+                <a:spcPct val="100000"/>
+              </a:lnSpc>
+            </a:pPr>
+            <a:r>
+              <a:rPr b="1" lang="en-US" sz="1400" spc="-1" strike="noStrike">
+                <a:solidFill>
+                  <a:srgbClr val="ffb45a"/>
+                </a:solidFill>
+                <a:latin typeface="Calibri"/>
+                <a:ea typeface="DejaVu Sans"/>
+              </a:rPr>
+              <a:t>JAVA CORE</a:t>
+            </a:r>
+            <a:endParaRPr b="0" lang="en-US" sz="1400" spc="-1" strike="noStrike">
+              <a:solidFill>
+                <a:srgbClr val="ffffff"/>
+              </a:solidFill>
+              <a:latin typeface="Arial"/>
+            </a:endParaRPr>
+          </a:p>
+        </p:txBody>
+      </p:sp>
+      <p:sp>
+        <p:nvSpPr>
+          <p:cNvPr id="162" name="TextBox 13"/>
+          <p:cNvSpPr/>
+          <p:nvPr/>
+        </p:nvSpPr>
+        <p:spPr>
+          <a:xfrm>
+            <a:off x="2592000" y="914400"/>
+            <a:ext cx="5786280" cy="638280"/>
+          </a:xfrm>
+          <a:prstGeom prst="rect">
+            <a:avLst/>
+          </a:prstGeom>
+          <a:noFill/>
+          <a:ln w="0">
+            <a:noFill/>
+          </a:ln>
+        </p:spPr>
+        <p:style>
+          <a:lnRef idx="0"/>
+          <a:fillRef idx="0"/>
+          <a:effectRef idx="0"/>
+          <a:fontRef idx="minor"/>
+        </p:style>
+        <p:txBody>
+          <a:bodyPr wrap="none" lIns="90000" rIns="90000" tIns="45000" bIns="45000" anchor="t">
+            <a:spAutoFit/>
+          </a:bodyPr>
+          <a:p>
+            <a:pPr>
+              <a:lnSpc>
+                <a:spcPct val="100000"/>
+              </a:lnSpc>
+            </a:pPr>
+            <a:r>
+              <a:rPr b="1" lang="en-US" sz="3600" spc="-1" strike="noStrike">
+                <a:solidFill>
+                  <a:srgbClr val="f5f5f5"/>
+                </a:solidFill>
+                <a:latin typeface="Calibri"/>
+                <a:ea typeface="DejaVu Sans"/>
+              </a:rPr>
+              <a:t>Parsing Date and Time in Java</a:t>
+            </a:r>
+            <a:endParaRPr b="0" lang="en-US" sz="3600" spc="-1" strike="noStrike">
+              <a:solidFill>
+                <a:srgbClr val="000000"/>
+              </a:solidFill>
+              <a:latin typeface="Arial"/>
+            </a:endParaRPr>
+          </a:p>
+        </p:txBody>
+      </p:sp>
+      <p:sp>
+        <p:nvSpPr>
+          <p:cNvPr id="163" name="TextBox 14"/>
+          <p:cNvSpPr/>
+          <p:nvPr/>
+        </p:nvSpPr>
+        <p:spPr>
+          <a:xfrm>
+            <a:off x="2278800" y="1828800"/>
+            <a:ext cx="6930720" cy="576360"/>
+          </a:xfrm>
+          <a:prstGeom prst="rect">
+            <a:avLst/>
+          </a:prstGeom>
+          <a:noFill/>
+          <a:ln w="0">
+            <a:noFill/>
+          </a:ln>
+        </p:spPr>
+        <p:style>
+          <a:lnRef idx="0"/>
+          <a:fillRef idx="0"/>
+          <a:effectRef idx="0"/>
+          <a:fontRef idx="minor"/>
+        </p:style>
+        <p:txBody>
+          <a:bodyPr wrap="none" lIns="90000" rIns="90000" tIns="45000" bIns="45000" anchor="t">
+            <a:spAutoFit/>
+          </a:bodyPr>
+          <a:p>
+            <a:pPr>
+              <a:lnSpc>
+                <a:spcPct val="100000"/>
+              </a:lnSpc>
+            </a:pPr>
+            <a:r>
+              <a:rPr b="0" lang="en-US" sz="1600" spc="-1" strike="noStrike">
+                <a:solidFill>
+                  <a:srgbClr val="aaaaaa"/>
+                </a:solidFill>
+                <a:latin typeface="Calibri"/>
+                <a:ea typeface="DejaVu Sans"/>
+              </a:rPr>
+              <a:t>In Java, parsing is the process of converting text-based date values into structured </a:t>
+            </a:r>
+            <a:endParaRPr b="0" lang="en-US" sz="1600" spc="-1" strike="noStrike">
+              <a:solidFill>
+                <a:srgbClr val="000000"/>
+              </a:solidFill>
+              <a:latin typeface="Arial"/>
+            </a:endParaRPr>
+          </a:p>
+          <a:p>
+            <a:pPr>
+              <a:lnSpc>
+                <a:spcPct val="100000"/>
+              </a:lnSpc>
+            </a:pPr>
+            <a:r>
+              <a:rPr b="0" lang="en-US" sz="1600" spc="-1" strike="noStrike">
+                <a:solidFill>
+                  <a:srgbClr val="aaaaaa"/>
+                </a:solidFill>
+                <a:latin typeface="Calibri"/>
+                <a:ea typeface="DejaVu Sans"/>
+              </a:rPr>
+              <a:t>date-time objects that can be used within the application.</a:t>
+            </a:r>
+            <a:endParaRPr b="0" lang="en-US" sz="1600" spc="-1" strike="noStrike">
+              <a:solidFill>
+                <a:srgbClr val="000000"/>
+              </a:solidFill>
+              <a:latin typeface="Arial"/>
+            </a:endParaRPr>
+          </a:p>
+        </p:txBody>
+      </p:sp>
+      <p:sp>
+        <p:nvSpPr>
+          <p:cNvPr id="164" name="Rounded Rectangle 37"/>
+          <p:cNvSpPr/>
+          <p:nvPr/>
+        </p:nvSpPr>
+        <p:spPr>
+          <a:xfrm>
+            <a:off x="987480" y="3182040"/>
+            <a:ext cx="3289680" cy="2741040"/>
+          </a:xfrm>
+          <a:prstGeom prst="roundRect">
+            <a:avLst>
+              <a:gd name="adj" fmla="val 16667"/>
+            </a:avLst>
+          </a:prstGeom>
+          <a:solidFill>
+            <a:srgbClr val="08080a"/>
+          </a:solidFill>
+          <a:ln>
+            <a:noFill/>
+          </a:ln>
+          <a:effectLst>
+            <a:outerShdw blurRad="39960" dir="5400000" dist="23040" rotWithShape="0">
+              <a:srgbClr val="000000">
+                <a:alpha val="35000"/>
+              </a:srgbClr>
+            </a:outerShdw>
+          </a:effectLst>
+        </p:spPr>
+        <p:style>
+          <a:lnRef idx="1">
+            <a:schemeClr val="accent1"/>
+          </a:lnRef>
+          <a:fillRef idx="3">
+            <a:schemeClr val="accent1"/>
+          </a:fillRef>
+          <a:effectRef idx="2">
+            <a:schemeClr val="accent1"/>
+          </a:effectRef>
+          <a:fontRef idx="minor"/>
+        </p:style>
+        <p:txBody>
+          <a:bodyPr lIns="90000" rIns="90000" tIns="45000" bIns="45000" anchor="ctr">
+            <a:noAutofit/>
+          </a:bodyPr>
+          <a:p>
+            <a:endParaRPr b="0" lang="en-US" sz="1800" spc="-1" strike="noStrike">
+              <a:solidFill>
+                <a:schemeClr val="lt1"/>
+              </a:solidFill>
+              <a:latin typeface="Calibri"/>
+              <a:ea typeface="DejaVu Sans"/>
+            </a:endParaRPr>
+          </a:p>
+        </p:txBody>
+      </p:sp>
+      <p:sp>
+        <p:nvSpPr>
+          <p:cNvPr id="165" name="Rounded Rectangle 38"/>
+          <p:cNvSpPr/>
+          <p:nvPr/>
+        </p:nvSpPr>
+        <p:spPr>
+          <a:xfrm>
+            <a:off x="457200" y="2743200"/>
+            <a:ext cx="3746880" cy="3886200"/>
+          </a:xfrm>
+          <a:prstGeom prst="roundRect">
+            <a:avLst>
+              <a:gd name="adj" fmla="val 16667"/>
+            </a:avLst>
+          </a:prstGeom>
+          <a:solidFill>
+            <a:srgbClr val="16161c"/>
+          </a:solidFill>
+          <a:ln>
+            <a:solidFill>
+              <a:srgbClr val="464655"/>
+            </a:solidFill>
+            <a:round/>
+          </a:ln>
+          <a:effectLst>
+            <a:outerShdw blurRad="39960" dir="5400000" dist="23040" rotWithShape="0">
+              <a:srgbClr val="000000">
+                <a:alpha val="35000"/>
+              </a:srgbClr>
+            </a:outerShdw>
+          </a:effectLst>
+        </p:spPr>
+        <p:style>
+          <a:lnRef idx="1">
+            <a:schemeClr val="accent1"/>
+          </a:lnRef>
+          <a:fillRef idx="3">
+            <a:schemeClr val="accent1"/>
+          </a:fillRef>
+          <a:effectRef idx="2">
+            <a:schemeClr val="accent1"/>
+          </a:effectRef>
+          <a:fontRef idx="minor"/>
+        </p:style>
+        <p:txBody>
+          <a:bodyPr lIns="90000" rIns="90000" tIns="45000" bIns="45000" anchor="ctr">
+            <a:noAutofit/>
+          </a:bodyPr>
+          <a:p>
+            <a:pPr>
+              <a:lnSpc>
+                <a:spcPct val="100000"/>
+              </a:lnSpc>
+            </a:pPr>
+            <a:r>
+              <a:rPr b="1" lang="en-US" sz="1800" spc="-1" strike="noStrike">
+                <a:solidFill>
+                  <a:schemeClr val="lt1"/>
+                </a:solidFill>
+                <a:latin typeface="Calibri"/>
+                <a:ea typeface="DejaVu Sans"/>
+              </a:rPr>
+              <a:t>Dates often arrive as plain text.</a:t>
+            </a:r>
+            <a:endParaRPr b="0" lang="en-US" sz="1800" spc="-1" strike="noStrike">
+              <a:solidFill>
+                <a:srgbClr val="ffffff"/>
+              </a:solidFill>
+              <a:latin typeface="Arial"/>
+            </a:endParaRPr>
+          </a:p>
+          <a:p>
+            <a:pPr>
+              <a:lnSpc>
+                <a:spcPct val="100000"/>
+              </a:lnSpc>
+            </a:pPr>
+            <a:r>
+              <a:rPr b="1" lang="en-US" sz="1800" spc="-1" strike="noStrike">
+                <a:solidFill>
+                  <a:schemeClr val="lt1"/>
+                </a:solidFill>
+                <a:latin typeface="Calibri"/>
+                <a:ea typeface="DejaVu Sans"/>
+              </a:rPr>
+              <a:t>Text cannot be calculated or compared.</a:t>
+            </a:r>
+            <a:endParaRPr b="0" lang="en-US" sz="1800" spc="-1" strike="noStrike">
+              <a:solidFill>
+                <a:srgbClr val="ffffff"/>
+              </a:solidFill>
+              <a:latin typeface="Arial"/>
+            </a:endParaRPr>
+          </a:p>
+          <a:p>
+            <a:pPr>
+              <a:lnSpc>
+                <a:spcPct val="100000"/>
+              </a:lnSpc>
+            </a:pPr>
+            <a:r>
+              <a:rPr b="1" lang="en-US" sz="1800" spc="-1" strike="noStrike">
+                <a:solidFill>
+                  <a:schemeClr val="lt1"/>
+                </a:solidFill>
+                <a:latin typeface="Calibri"/>
+                <a:ea typeface="DejaVu Sans"/>
+              </a:rPr>
+              <a:t>It must be transformed into a real date object.</a:t>
+            </a:r>
+            <a:endParaRPr b="0" lang="en-US" sz="1800" spc="-1" strike="noStrike">
+              <a:solidFill>
+                <a:srgbClr val="ffffff"/>
+              </a:solidFill>
+              <a:latin typeface="Arial"/>
+            </a:endParaRPr>
+          </a:p>
+          <a:p>
+            <a:pPr>
+              <a:lnSpc>
+                <a:spcPct val="100000"/>
+              </a:lnSpc>
+            </a:pPr>
+            <a:endParaRPr b="0" lang="en-US" sz="1800" spc="-1" strike="noStrike">
+              <a:solidFill>
+                <a:srgbClr val="ffffff"/>
+              </a:solidFill>
+              <a:latin typeface="Arial"/>
+            </a:endParaRPr>
+          </a:p>
+          <a:p>
+            <a:pPr>
+              <a:lnSpc>
+                <a:spcPct val="100000"/>
+              </a:lnSpc>
+            </a:pPr>
+            <a:r>
+              <a:rPr b="0" lang="en-US" sz="1800" spc="-1" strike="noStrike">
+                <a:solidFill>
+                  <a:schemeClr val="lt1"/>
+                </a:solidFill>
+                <a:latin typeface="Calibri"/>
+                <a:ea typeface="DejaVu Sans"/>
+              </a:rPr>
+              <a:t>A pattern defines how the text should be read.</a:t>
+            </a:r>
+            <a:endParaRPr b="0" lang="en-US" sz="1800" spc="-1" strike="noStrike">
+              <a:solidFill>
+                <a:srgbClr val="ffffff"/>
+              </a:solidFill>
+              <a:latin typeface="Arial"/>
+            </a:endParaRPr>
+          </a:p>
+          <a:p>
+            <a:pPr>
+              <a:lnSpc>
+                <a:spcPct val="100000"/>
+              </a:lnSpc>
+            </a:pPr>
+            <a:r>
+              <a:rPr b="0" lang="en-US" sz="1800" spc="-1" strike="noStrike">
+                <a:solidFill>
+                  <a:schemeClr val="lt1"/>
+                </a:solidFill>
+                <a:latin typeface="Calibri"/>
+                <a:ea typeface="DejaVu Sans"/>
+              </a:rPr>
+              <a:t>The formatter follows this pattern strictly.</a:t>
+            </a:r>
+            <a:endParaRPr b="0" lang="en-US" sz="1800" spc="-1" strike="noStrike">
+              <a:solidFill>
+                <a:srgbClr val="ffffff"/>
+              </a:solidFill>
+              <a:latin typeface="Arial"/>
+            </a:endParaRPr>
+          </a:p>
+          <a:p>
+            <a:pPr>
+              <a:lnSpc>
+                <a:spcPct val="100000"/>
+              </a:lnSpc>
+            </a:pPr>
+            <a:endParaRPr b="0" lang="en-US" sz="1800" spc="-1" strike="noStrike">
+              <a:solidFill>
+                <a:srgbClr val="ffffff"/>
+              </a:solidFill>
+              <a:latin typeface="Arial"/>
+            </a:endParaRPr>
+          </a:p>
+          <a:p>
+            <a:pPr>
+              <a:lnSpc>
+                <a:spcPct val="100000"/>
+              </a:lnSpc>
+            </a:pPr>
+            <a:r>
+              <a:rPr b="0" lang="en-US" sz="1800" spc="-1" strike="noStrike">
+                <a:solidFill>
+                  <a:schemeClr val="lt1"/>
+                </a:solidFill>
+                <a:latin typeface="Calibri"/>
+                <a:ea typeface="DejaVu Sans"/>
+              </a:rPr>
+              <a:t>If the format matches, conversion succeeds.</a:t>
+            </a:r>
+            <a:endParaRPr b="0" lang="en-US" sz="1800" spc="-1" strike="noStrike">
+              <a:solidFill>
+                <a:srgbClr val="ffffff"/>
+              </a:solidFill>
+              <a:latin typeface="Arial"/>
+            </a:endParaRPr>
+          </a:p>
+          <a:p>
+            <a:pPr>
+              <a:lnSpc>
+                <a:spcPct val="100000"/>
+              </a:lnSpc>
+            </a:pPr>
+            <a:r>
+              <a:rPr b="0" lang="en-US" sz="1800" spc="-1" strike="noStrike">
+                <a:solidFill>
+                  <a:schemeClr val="lt1"/>
+                </a:solidFill>
+                <a:latin typeface="Calibri"/>
+                <a:ea typeface="DejaVu Sans"/>
+              </a:rPr>
+              <a:t>If not, an error occurs.</a:t>
+            </a:r>
+            <a:endParaRPr b="0" lang="en-US" sz="1800" spc="-1" strike="noStrike">
+              <a:solidFill>
+                <a:srgbClr val="ffffff"/>
+              </a:solidFill>
+              <a:latin typeface="Arial"/>
+            </a:endParaRPr>
+          </a:p>
+        </p:txBody>
+      </p:sp>
+      <p:sp>
+        <p:nvSpPr>
+          <p:cNvPr id="166" name="Rounded Rectangle 39"/>
+          <p:cNvSpPr/>
+          <p:nvPr/>
+        </p:nvSpPr>
+        <p:spPr>
+          <a:xfrm>
+            <a:off x="4507920" y="3182040"/>
+            <a:ext cx="3289680" cy="2741040"/>
+          </a:xfrm>
+          <a:prstGeom prst="roundRect">
+            <a:avLst>
+              <a:gd name="adj" fmla="val 16667"/>
+            </a:avLst>
+          </a:prstGeom>
+          <a:solidFill>
+            <a:srgbClr val="08080a"/>
+          </a:solidFill>
+          <a:ln>
+            <a:noFill/>
+          </a:ln>
+          <a:effectLst>
+            <a:outerShdw blurRad="39960" dir="5400000" dist="23040" rotWithShape="0">
+              <a:srgbClr val="000000">
+                <a:alpha val="35000"/>
+              </a:srgbClr>
+            </a:outerShdw>
+          </a:effectLst>
+        </p:spPr>
+        <p:style>
+          <a:lnRef idx="1">
+            <a:schemeClr val="accent1"/>
+          </a:lnRef>
+          <a:fillRef idx="3">
+            <a:schemeClr val="accent1"/>
+          </a:fillRef>
+          <a:effectRef idx="2">
+            <a:schemeClr val="accent1"/>
+          </a:effectRef>
+          <a:fontRef idx="minor"/>
+        </p:style>
+        <p:txBody>
+          <a:bodyPr lIns="90000" rIns="90000" tIns="45000" bIns="45000" anchor="ctr">
+            <a:noAutofit/>
+          </a:bodyPr>
+          <a:p>
+            <a:endParaRPr b="0" lang="en-US" sz="1800" spc="-1" strike="noStrike">
+              <a:solidFill>
+                <a:schemeClr val="lt1"/>
+              </a:solidFill>
+              <a:latin typeface="Calibri"/>
+              <a:ea typeface="DejaVu Sans"/>
+            </a:endParaRPr>
+          </a:p>
+        </p:txBody>
+      </p:sp>
+      <p:sp>
+        <p:nvSpPr>
+          <p:cNvPr id="167" name="Rounded Rectangle 40"/>
+          <p:cNvSpPr/>
+          <p:nvPr/>
+        </p:nvSpPr>
+        <p:spPr>
+          <a:xfrm>
+            <a:off x="4434840" y="2971800"/>
+            <a:ext cx="3289680" cy="3427920"/>
+          </a:xfrm>
+          <a:prstGeom prst="roundRect">
+            <a:avLst>
+              <a:gd name="adj" fmla="val 16667"/>
+            </a:avLst>
+          </a:prstGeom>
+          <a:solidFill>
+            <a:srgbClr val="16161c"/>
+          </a:solidFill>
+          <a:ln>
+            <a:solidFill>
+              <a:srgbClr val="464655"/>
+            </a:solidFill>
+            <a:round/>
+          </a:ln>
+          <a:effectLst>
+            <a:outerShdw blurRad="39960" dir="5400000" dist="23040" rotWithShape="0">
+              <a:srgbClr val="000000">
+                <a:alpha val="35000"/>
+              </a:srgbClr>
+            </a:outerShdw>
+          </a:effectLst>
+        </p:spPr>
+        <p:style>
+          <a:lnRef idx="1">
+            <a:schemeClr val="accent1"/>
+          </a:lnRef>
+          <a:fillRef idx="3">
+            <a:schemeClr val="accent1"/>
+          </a:fillRef>
+          <a:effectRef idx="2">
+            <a:schemeClr val="accent1"/>
+          </a:effectRef>
+          <a:fontRef idx="minor"/>
+        </p:style>
+        <p:txBody>
+          <a:bodyPr lIns="90000" rIns="90000" tIns="45000" bIns="45000" anchor="ctr">
+            <a:noAutofit/>
+          </a:bodyPr>
+          <a:p>
+            <a:pPr marL="216000" indent="-216000">
+              <a:lnSpc>
+                <a:spcPct val="100000"/>
+              </a:lnSpc>
+              <a:buClr>
+                <a:srgbClr val="ffffff"/>
+              </a:buClr>
+              <a:buFont typeface="Wingdings" charset="2"/>
+              <a:buChar char=""/>
+            </a:pPr>
+            <a:r>
+              <a:rPr b="0" lang="en-US" sz="1800" spc="-1" strike="noStrike">
+                <a:solidFill>
+                  <a:schemeClr val="lt1"/>
+                </a:solidFill>
+                <a:latin typeface="Calibri"/>
+                <a:ea typeface="DejaVu Sans"/>
+              </a:rPr>
+              <a:t>Raw text data enters the system</a:t>
+            </a:r>
+            <a:endParaRPr b="0" lang="en-US" sz="1800" spc="-1" strike="noStrike">
+              <a:solidFill>
+                <a:srgbClr val="ffffff"/>
+              </a:solidFill>
+              <a:latin typeface="Arial"/>
+            </a:endParaRPr>
+          </a:p>
+          <a:p>
+            <a:pPr marL="216000" indent="-216000">
+              <a:lnSpc>
+                <a:spcPct val="100000"/>
+              </a:lnSpc>
+              <a:buClr>
+                <a:srgbClr val="ffffff"/>
+              </a:buClr>
+              <a:buFont typeface="Wingdings" charset="2"/>
+              <a:buChar char=""/>
+            </a:pPr>
+            <a:r>
+              <a:rPr b="0" lang="en-US" sz="1800" spc="-1" strike="noStrike">
+                <a:solidFill>
+                  <a:schemeClr val="lt1"/>
+                </a:solidFill>
+                <a:latin typeface="Calibri"/>
+                <a:ea typeface="DejaVu Sans"/>
+              </a:rPr>
+              <a:t>System identifies expected date structure</a:t>
+            </a:r>
+            <a:endParaRPr b="0" lang="en-US" sz="1800" spc="-1" strike="noStrike">
+              <a:solidFill>
+                <a:srgbClr val="ffffff"/>
+              </a:solidFill>
+              <a:latin typeface="Arial"/>
+            </a:endParaRPr>
+          </a:p>
+          <a:p>
+            <a:pPr marL="216000" indent="-216000">
+              <a:lnSpc>
+                <a:spcPct val="100000"/>
+              </a:lnSpc>
+              <a:buClr>
+                <a:srgbClr val="ffffff"/>
+              </a:buClr>
+              <a:buFont typeface="Wingdings" charset="2"/>
+              <a:buChar char=""/>
+            </a:pPr>
+            <a:r>
+              <a:rPr b="0" lang="en-US" sz="1800" spc="-1" strike="noStrike">
+                <a:solidFill>
+                  <a:schemeClr val="lt1"/>
+                </a:solidFill>
+                <a:latin typeface="Calibri"/>
+                <a:ea typeface="DejaVu Sans"/>
+              </a:rPr>
+              <a:t>A conversion rule (pattern) is prepared</a:t>
+            </a:r>
+            <a:endParaRPr b="0" lang="en-US" sz="1800" spc="-1" strike="noStrike">
+              <a:solidFill>
+                <a:srgbClr val="ffffff"/>
+              </a:solidFill>
+              <a:latin typeface="Arial"/>
+            </a:endParaRPr>
+          </a:p>
+          <a:p>
+            <a:pPr marL="216000" indent="-216000">
+              <a:lnSpc>
+                <a:spcPct val="100000"/>
+              </a:lnSpc>
+              <a:buClr>
+                <a:srgbClr val="ffffff"/>
+              </a:buClr>
+              <a:buFont typeface="Wingdings" charset="2"/>
+              <a:buChar char=""/>
+            </a:pPr>
+            <a:r>
+              <a:rPr b="0" lang="en-US" sz="1800" spc="-1" strike="noStrike">
+                <a:solidFill>
+                  <a:schemeClr val="lt1"/>
+                </a:solidFill>
+                <a:latin typeface="Calibri"/>
+                <a:ea typeface="DejaVu Sans"/>
+              </a:rPr>
+              <a:t>Text is interpreted based on the rule</a:t>
+            </a:r>
+            <a:endParaRPr b="0" lang="en-US" sz="1800" spc="-1" strike="noStrike">
+              <a:solidFill>
+                <a:srgbClr val="ffffff"/>
+              </a:solidFill>
+              <a:latin typeface="Arial"/>
+            </a:endParaRPr>
+          </a:p>
+          <a:p>
+            <a:pPr marL="216000" indent="-216000">
+              <a:lnSpc>
+                <a:spcPct val="100000"/>
+              </a:lnSpc>
+              <a:buClr>
+                <a:srgbClr val="ffffff"/>
+              </a:buClr>
+              <a:buFont typeface="Wingdings" charset="2"/>
+              <a:buChar char=""/>
+            </a:pPr>
+            <a:r>
+              <a:rPr b="0" lang="en-US" sz="1800" spc="-1" strike="noStrike">
+                <a:solidFill>
+                  <a:schemeClr val="lt1"/>
+                </a:solidFill>
+                <a:latin typeface="Calibri"/>
+                <a:ea typeface="DejaVu Sans"/>
+              </a:rPr>
+              <a:t>A valid date-time object is created</a:t>
+            </a:r>
+            <a:endParaRPr b="0" lang="en-US" sz="1800" spc="-1" strike="noStrike">
+              <a:solidFill>
+                <a:srgbClr val="ffffff"/>
+              </a:solidFill>
+              <a:latin typeface="Arial"/>
+            </a:endParaRPr>
+          </a:p>
+          <a:p>
+            <a:pPr marL="216000" indent="-216000">
+              <a:lnSpc>
+                <a:spcPct val="100000"/>
+              </a:lnSpc>
+              <a:buClr>
+                <a:srgbClr val="ffffff"/>
+              </a:buClr>
+              <a:buFont typeface="Wingdings" charset="2"/>
+              <a:buChar char=""/>
+            </a:pPr>
+            <a:r>
+              <a:rPr b="0" lang="en-US" sz="1800" spc="-1" strike="noStrike">
+                <a:solidFill>
+                  <a:schemeClr val="lt1"/>
+                </a:solidFill>
+                <a:latin typeface="Calibri"/>
+                <a:ea typeface="DejaVu Sans"/>
+              </a:rPr>
+              <a:t>The object becomes usable for operations</a:t>
+            </a:r>
+            <a:endParaRPr b="0" lang="en-US" sz="1800" spc="-1" strike="noStrike">
+              <a:solidFill>
+                <a:srgbClr val="ffffff"/>
+              </a:solidFill>
+              <a:latin typeface="Arial"/>
+            </a:endParaRPr>
+          </a:p>
+        </p:txBody>
+      </p:sp>
+      <p:sp>
+        <p:nvSpPr>
+          <p:cNvPr id="168" name="Rounded Rectangle 41"/>
+          <p:cNvSpPr/>
+          <p:nvPr/>
+        </p:nvSpPr>
+        <p:spPr>
+          <a:xfrm>
+            <a:off x="8028360" y="3182040"/>
+            <a:ext cx="3289680" cy="2741040"/>
+          </a:xfrm>
+          <a:prstGeom prst="roundRect">
+            <a:avLst>
+              <a:gd name="adj" fmla="val 16667"/>
+            </a:avLst>
+          </a:prstGeom>
+          <a:solidFill>
+            <a:srgbClr val="08080a"/>
+          </a:solidFill>
+          <a:ln>
+            <a:noFill/>
+          </a:ln>
+          <a:effectLst>
+            <a:outerShdw blurRad="39960" dir="5400000" dist="23040" rotWithShape="0">
+              <a:srgbClr val="000000">
+                <a:alpha val="35000"/>
+              </a:srgbClr>
+            </a:outerShdw>
+          </a:effectLst>
+        </p:spPr>
+        <p:style>
+          <a:lnRef idx="1">
+            <a:schemeClr val="accent1"/>
+          </a:lnRef>
+          <a:fillRef idx="3">
+            <a:schemeClr val="accent1"/>
+          </a:fillRef>
+          <a:effectRef idx="2">
+            <a:schemeClr val="accent1"/>
+          </a:effectRef>
+          <a:fontRef idx="minor"/>
+        </p:style>
+        <p:txBody>
+          <a:bodyPr lIns="90000" rIns="90000" tIns="45000" bIns="45000" anchor="ctr">
+            <a:noAutofit/>
+          </a:bodyPr>
+          <a:p>
+            <a:endParaRPr b="0" lang="en-US" sz="1800" spc="-1" strike="noStrike">
+              <a:solidFill>
+                <a:schemeClr val="lt1"/>
+              </a:solidFill>
+              <a:latin typeface="Calibri"/>
+              <a:ea typeface="DejaVu Sans"/>
+            </a:endParaRPr>
+          </a:p>
+        </p:txBody>
+      </p:sp>
+      <p:sp>
+        <p:nvSpPr>
+          <p:cNvPr id="169" name="Rounded Rectangle 42"/>
+          <p:cNvSpPr/>
+          <p:nvPr/>
+        </p:nvSpPr>
+        <p:spPr>
+          <a:xfrm>
+            <a:off x="8001000" y="3200400"/>
+            <a:ext cx="3474720" cy="2743200"/>
+          </a:xfrm>
+          <a:prstGeom prst="roundRect">
+            <a:avLst>
+              <a:gd name="adj" fmla="val 16667"/>
+            </a:avLst>
+          </a:prstGeom>
+          <a:solidFill>
+            <a:srgbClr val="16161c"/>
+          </a:solidFill>
+          <a:ln>
+            <a:solidFill>
+              <a:srgbClr val="464655"/>
+            </a:solidFill>
+            <a:round/>
+          </a:ln>
+          <a:effectLst>
+            <a:outerShdw blurRad="39960" dir="5400000" dist="23040" rotWithShape="0">
+              <a:srgbClr val="000000">
+                <a:alpha val="35000"/>
+              </a:srgbClr>
+            </a:outerShdw>
+          </a:effectLst>
+        </p:spPr>
+        <p:style>
+          <a:lnRef idx="1">
+            <a:schemeClr val="accent1"/>
+          </a:lnRef>
+          <a:fillRef idx="3">
+            <a:schemeClr val="accent1"/>
+          </a:fillRef>
+          <a:effectRef idx="2">
+            <a:schemeClr val="accent1"/>
+          </a:effectRef>
+          <a:fontRef idx="minor"/>
+        </p:style>
+        <p:txBody>
+          <a:bodyPr lIns="90000" rIns="90000" tIns="45000" bIns="45000" anchor="ctr">
+            <a:noAutofit/>
+          </a:bodyPr>
+          <a:p>
+            <a:pPr algn="ctr">
+              <a:lnSpc>
+                <a:spcPct val="100000"/>
+              </a:lnSpc>
+            </a:pPr>
+            <a:r>
+              <a:rPr b="0" lang="en-US" sz="1100" spc="-1" strike="noStrike">
+                <a:solidFill>
+                  <a:srgbClr val="78ffc8"/>
+                </a:solidFill>
+                <a:latin typeface="Consolas"/>
+                <a:ea typeface="DejaVu Sans"/>
+              </a:rPr>
+              <a:t>public class ParsingExample {</a:t>
+            </a:r>
+            <a:endParaRPr b="0" lang="en-US" sz="1100" spc="-1" strike="noStrike">
+              <a:solidFill>
+                <a:srgbClr val="ffffff"/>
+              </a:solidFill>
+              <a:latin typeface="Arial"/>
+            </a:endParaRPr>
+          </a:p>
+          <a:p>
+            <a:pPr algn="ctr">
+              <a:lnSpc>
+                <a:spcPct val="100000"/>
+              </a:lnSpc>
+            </a:pPr>
+            <a:r>
+              <a:rPr b="0" lang="en-US" sz="1100" spc="-1" strike="noStrike">
+                <a:solidFill>
+                  <a:srgbClr val="78ffc8"/>
+                </a:solidFill>
+                <a:latin typeface="Consolas"/>
+                <a:ea typeface="DejaVu Sans"/>
+              </a:rPr>
+              <a:t>    </a:t>
+            </a:r>
+            <a:r>
+              <a:rPr b="0" lang="en-US" sz="1100" spc="-1" strike="noStrike">
+                <a:solidFill>
+                  <a:srgbClr val="78ffc8"/>
+                </a:solidFill>
+                <a:latin typeface="Consolas"/>
+                <a:ea typeface="DejaVu Sans"/>
+              </a:rPr>
+              <a:t>public static void main(String[] args) {</a:t>
+            </a:r>
+            <a:endParaRPr b="0" lang="en-US" sz="1100" spc="-1" strike="noStrike">
+              <a:solidFill>
+                <a:srgbClr val="ffffff"/>
+              </a:solidFill>
+              <a:latin typeface="Arial"/>
+            </a:endParaRPr>
+          </a:p>
+          <a:p>
+            <a:pPr algn="ctr">
+              <a:lnSpc>
+                <a:spcPct val="100000"/>
+              </a:lnSpc>
+            </a:pPr>
+            <a:r>
+              <a:rPr b="0" lang="en-US" sz="1100" spc="-1" strike="noStrike">
+                <a:solidFill>
+                  <a:srgbClr val="78ffc8"/>
+                </a:solidFill>
+                <a:latin typeface="Consolas"/>
+                <a:ea typeface="DejaVu Sans"/>
+              </a:rPr>
+              <a:t>        </a:t>
+            </a:r>
+            <a:r>
+              <a:rPr b="0" lang="en-US" sz="1100" spc="-1" strike="noStrike">
+                <a:solidFill>
+                  <a:srgbClr val="78ffc8"/>
+                </a:solidFill>
+                <a:latin typeface="Consolas"/>
+                <a:ea typeface="DejaVu Sans"/>
+              </a:rPr>
+              <a:t>String dateText = "28/04/2026";</a:t>
+            </a:r>
+            <a:endParaRPr b="0" lang="en-US" sz="1100" spc="-1" strike="noStrike">
+              <a:solidFill>
+                <a:srgbClr val="ffffff"/>
+              </a:solidFill>
+              <a:latin typeface="Arial"/>
+            </a:endParaRPr>
+          </a:p>
+          <a:p>
+            <a:pPr algn="ctr">
+              <a:lnSpc>
+                <a:spcPct val="100000"/>
+              </a:lnSpc>
+            </a:pPr>
+            <a:r>
+              <a:rPr b="0" lang="en-US" sz="1100" spc="-1" strike="noStrike">
+                <a:solidFill>
+                  <a:srgbClr val="78ffc8"/>
+                </a:solidFill>
+                <a:latin typeface="Consolas"/>
+                <a:ea typeface="DejaVu Sans"/>
+              </a:rPr>
+              <a:t>        </a:t>
+            </a:r>
+            <a:r>
+              <a:rPr b="0" lang="en-US" sz="1100" spc="-1" strike="noStrike">
+                <a:solidFill>
+                  <a:srgbClr val="78ffc8"/>
+                </a:solidFill>
+                <a:latin typeface="Consolas"/>
+                <a:ea typeface="DejaVu Sans"/>
+              </a:rPr>
+              <a:t>DateTimeFormatter formatter =</a:t>
+            </a:r>
+            <a:endParaRPr b="0" lang="en-US" sz="1100" spc="-1" strike="noStrike">
+              <a:solidFill>
+                <a:srgbClr val="ffffff"/>
+              </a:solidFill>
+              <a:latin typeface="Arial"/>
+            </a:endParaRPr>
+          </a:p>
+          <a:p>
+            <a:pPr algn="ctr">
+              <a:lnSpc>
+                <a:spcPct val="100000"/>
+              </a:lnSpc>
+            </a:pPr>
+            <a:r>
+              <a:rPr b="0" lang="en-US" sz="1100" spc="-1" strike="noStrike">
+                <a:solidFill>
+                  <a:srgbClr val="78ffc8"/>
+                </a:solidFill>
+                <a:latin typeface="Consolas"/>
+                <a:ea typeface="DejaVu Sans"/>
+              </a:rPr>
+              <a:t>                </a:t>
+            </a:r>
+            <a:r>
+              <a:rPr b="0" lang="en-US" sz="1100" spc="-1" strike="noStrike">
+                <a:solidFill>
+                  <a:srgbClr val="78ffc8"/>
+                </a:solidFill>
+                <a:latin typeface="Consolas"/>
+                <a:ea typeface="DejaVu Sans"/>
+              </a:rPr>
+              <a:t>DateTimeFormatter.ofPattern("dd/MM/yyyy");</a:t>
+            </a:r>
+            <a:endParaRPr b="0" lang="en-US" sz="1100" spc="-1" strike="noStrike">
+              <a:solidFill>
+                <a:srgbClr val="ffffff"/>
+              </a:solidFill>
+              <a:latin typeface="Arial"/>
+            </a:endParaRPr>
+          </a:p>
+          <a:p>
+            <a:pPr algn="ctr">
+              <a:lnSpc>
+                <a:spcPct val="100000"/>
+              </a:lnSpc>
+            </a:pPr>
+            <a:r>
+              <a:rPr b="0" lang="en-US" sz="1100" spc="-1" strike="noStrike">
+                <a:solidFill>
+                  <a:srgbClr val="78ffc8"/>
+                </a:solidFill>
+                <a:latin typeface="Consolas"/>
+                <a:ea typeface="DejaVu Sans"/>
+              </a:rPr>
+              <a:t>        </a:t>
+            </a:r>
+            <a:r>
+              <a:rPr b="0" lang="en-US" sz="1100" spc="-1" strike="noStrike">
+                <a:solidFill>
+                  <a:srgbClr val="78ffc8"/>
+                </a:solidFill>
+                <a:latin typeface="Consolas"/>
+                <a:ea typeface="DejaVu Sans"/>
+              </a:rPr>
+              <a:t>LocalDate date = LocalDate.parse(dateText, formatter);</a:t>
+            </a:r>
+            <a:endParaRPr b="0" lang="en-US" sz="1100" spc="-1" strike="noStrike">
+              <a:solidFill>
+                <a:srgbClr val="ffffff"/>
+              </a:solidFill>
+              <a:latin typeface="Arial"/>
+            </a:endParaRPr>
+          </a:p>
+          <a:p>
+            <a:pPr algn="ctr">
+              <a:lnSpc>
+                <a:spcPct val="100000"/>
+              </a:lnSpc>
+            </a:pPr>
+            <a:r>
+              <a:rPr b="0" lang="en-US" sz="1100" spc="-1" strike="noStrike">
+                <a:solidFill>
+                  <a:srgbClr val="78ffc8"/>
+                </a:solidFill>
+                <a:latin typeface="Consolas"/>
+                <a:ea typeface="DejaVu Sans"/>
+              </a:rPr>
+              <a:t>        </a:t>
+            </a:r>
+            <a:r>
+              <a:rPr b="0" lang="en-US" sz="1100" spc="-1" strike="noStrike">
+                <a:solidFill>
+                  <a:srgbClr val="78ffc8"/>
+                </a:solidFill>
+                <a:latin typeface="Consolas"/>
+                <a:ea typeface="DejaVu Sans"/>
+              </a:rPr>
+              <a:t>System.out.println("Parsed Date: " + date);</a:t>
+            </a:r>
+            <a:endParaRPr b="0" lang="en-US" sz="1100" spc="-1" strike="noStrike">
+              <a:solidFill>
+                <a:srgbClr val="ffffff"/>
+              </a:solidFill>
+              <a:latin typeface="Arial"/>
+            </a:endParaRPr>
+          </a:p>
+          <a:p>
+            <a:pPr algn="ctr">
+              <a:lnSpc>
+                <a:spcPct val="100000"/>
+              </a:lnSpc>
+            </a:pPr>
+            <a:r>
+              <a:rPr b="0" lang="en-US" sz="1100" spc="-1" strike="noStrike">
+                <a:solidFill>
+                  <a:srgbClr val="78ffc8"/>
+                </a:solidFill>
+                <a:latin typeface="Consolas"/>
+                <a:ea typeface="DejaVu Sans"/>
+              </a:rPr>
+              <a:t>    </a:t>
+            </a:r>
+            <a:r>
+              <a:rPr b="0" lang="en-US" sz="1100" spc="-1" strike="noStrike">
+                <a:solidFill>
+                  <a:srgbClr val="78ffc8"/>
+                </a:solidFill>
+                <a:latin typeface="Consolas"/>
+                <a:ea typeface="DejaVu Sans"/>
+              </a:rPr>
+              <a:t>}</a:t>
+            </a:r>
+            <a:endParaRPr b="0" lang="en-US" sz="1100" spc="-1" strike="noStrike">
+              <a:solidFill>
+                <a:srgbClr val="ffffff"/>
+              </a:solidFill>
+              <a:latin typeface="Arial"/>
+            </a:endParaRPr>
+          </a:p>
+          <a:p>
+            <a:pPr algn="ctr">
+              <a:lnSpc>
+                <a:spcPct val="100000"/>
+              </a:lnSpc>
+            </a:pPr>
+            <a:r>
+              <a:rPr b="0" lang="en-US" sz="1100" spc="-1" strike="noStrike">
+                <a:solidFill>
+                  <a:srgbClr val="78ffc8"/>
+                </a:solidFill>
+                <a:latin typeface="Consolas"/>
+                <a:ea typeface="DejaVu Sans"/>
+              </a:rPr>
+              <a:t>}</a:t>
+            </a:r>
+            <a:endParaRPr b="0" lang="en-US" sz="1100" spc="-1" strike="noStrike">
+              <a:solidFill>
+                <a:srgbClr val="ffffff"/>
+              </a:solidFill>
+              <a:latin typeface="Arial"/>
+            </a:endParaRPr>
+          </a:p>
+        </p:txBody>
+      </p:sp>
+      <p:sp>
+        <p:nvSpPr>
+          <p:cNvPr id="170" name="TextBox 15"/>
           <p:cNvSpPr/>
           <p:nvPr/>
         </p:nvSpPr>

--- a/Java/Java #4/EN/Java #4.pptx
+++ b/Java/Java #4/EN/Java #4.pptx
@@ -10,6 +10,7 @@
     <p:sldId id="258" r:id="rId5"/>
     <p:sldId id="259" r:id="rId6"/>
     <p:sldId id="260" r:id="rId7"/>
+    <p:sldId id="261" r:id="rId8"/>
   </p:sldIdLst>
   <p:sldSz cx="9144000" cy="6858000"/>
   <p:notesSz cx="7772400" cy="10058400"/>
@@ -67,7 +68,7 @@
         <p:txBody>
           <a:bodyPr/>
           <a:p>
-            <a:fld id="{CAE70256-ED47-4FE6-815B-8EDD1A001B10}" type="slidenum">
+            <a:fld id="{876F7108-6294-4180-8C9D-6B11BF0FF3CA}" type="slidenum">
               <a:t>&lt;#&gt;</a:t>
             </a:fld>
           </a:p>
@@ -276,7 +277,7 @@
         <p:txBody>
           <a:bodyPr/>
           <a:p>
-            <a:fld id="{BCE207A7-1AFC-44F7-9B76-4A76A126BCD2}" type="slidenum">
+            <a:fld id="{518FE690-DF57-486B-841F-8923D9B2942C}" type="slidenum">
               <a:t>&lt;#&gt;</a:t>
             </a:fld>
           </a:p>
@@ -571,7 +572,7 @@
         <p:txBody>
           <a:bodyPr/>
           <a:p>
-            <a:fld id="{782BCE27-2F59-4C73-92DC-B2251B65DEA9}" type="slidenum">
+            <a:fld id="{7BADACA6-FEC7-4846-920B-245565DEEA66}" type="slidenum">
               <a:t>&lt;#&gt;</a:t>
             </a:fld>
           </a:p>
@@ -952,7 +953,7 @@
         <p:txBody>
           <a:bodyPr/>
           <a:p>
-            <a:fld id="{29C83C8A-E728-4C16-864A-491FE3FA08C4}" type="slidenum">
+            <a:fld id="{BEC3E169-7FFB-41FC-8C67-F2A7553A3B9A}" type="slidenum">
               <a:t>&lt;#&gt;</a:t>
             </a:fld>
           </a:p>
@@ -1115,7 +1116,7 @@
         <p:txBody>
           <a:bodyPr/>
           <a:p>
-            <a:fld id="{48FA3982-C6D3-41E5-BA6E-F49BD71592F9}" type="slidenum">
+            <a:fld id="{ADF568D4-2035-420B-9A2C-9CAD494E81E3}" type="slidenum">
               <a:t>&lt;#&gt;</a:t>
             </a:fld>
           </a:p>
@@ -1281,7 +1282,7 @@
         <p:txBody>
           <a:bodyPr/>
           <a:p>
-            <a:fld id="{6AAD5A26-B1B2-47DF-959B-A9D80369F0BB}" type="slidenum">
+            <a:fld id="{39088647-2018-45BE-82C6-617B56794C4D}" type="slidenum">
               <a:t>&lt;#&gt;</a:t>
             </a:fld>
           </a:p>
@@ -1490,7 +1491,7 @@
         <p:txBody>
           <a:bodyPr/>
           <a:p>
-            <a:fld id="{6654359F-CA34-4643-9D2F-756615137AA1}" type="slidenum">
+            <a:fld id="{865A2949-EAC2-4A55-8B2D-2402C800C3EF}" type="slidenum">
               <a:t>&lt;#&gt;</a:t>
             </a:fld>
           </a:p>
@@ -1613,7 +1614,7 @@
         <p:txBody>
           <a:bodyPr/>
           <a:p>
-            <a:fld id="{8AFD04AB-BD9D-448C-BD79-7139C3776CEC}" type="slidenum">
+            <a:fld id="{3D9FE6C1-E1D0-403F-AF85-C6946D07AA53}" type="slidenum">
               <a:t>&lt;#&gt;</a:t>
             </a:fld>
           </a:p>
@@ -1734,7 +1735,7 @@
         <p:txBody>
           <a:bodyPr/>
           <a:p>
-            <a:fld id="{E1C8AB4B-CE98-41EE-8355-262BBB9028BD}" type="slidenum">
+            <a:fld id="{AF31966E-DFC5-48D1-95F1-E9CA8968151D}" type="slidenum">
               <a:t>&lt;#&gt;</a:t>
             </a:fld>
           </a:p>
@@ -1986,7 +1987,7 @@
         <p:txBody>
           <a:bodyPr/>
           <a:p>
-            <a:fld id="{56270B2D-AFE0-4BCB-AB73-3941C0E9E8AB}" type="slidenum">
+            <a:fld id="{D1055276-1187-428D-A551-119921929C76}" type="slidenum">
               <a:t>&lt;#&gt;</a:t>
             </a:fld>
           </a:p>
@@ -2238,7 +2239,7 @@
         <p:txBody>
           <a:bodyPr/>
           <a:p>
-            <a:fld id="{FE9A5FF6-47D2-4A9F-96C4-35DB656DB56C}" type="slidenum">
+            <a:fld id="{929A5B6B-4E9D-4CB7-8DE6-D0FD08621DDC}" type="slidenum">
               <a:t>&lt;#&gt;</a:t>
             </a:fld>
           </a:p>
@@ -2490,7 +2491,7 @@
         <p:txBody>
           <a:bodyPr/>
           <a:p>
-            <a:fld id="{A641E268-A85B-4E6D-9808-1BA158309996}" type="slidenum">
+            <a:fld id="{A3B693F8-BBA8-4372-86FC-33A3ADE7335B}" type="slidenum">
               <a:t>&lt;#&gt;</a:t>
             </a:fld>
           </a:p>
@@ -2559,7 +2560,7 @@
         <p:spPr>
           <a:xfrm>
             <a:off x="3124080" y="6356520"/>
-            <a:ext cx="2892960" cy="362520"/>
+            <a:ext cx="2892600" cy="362160"/>
           </a:xfrm>
           <a:prstGeom prst="rect">
             <a:avLst/>
@@ -2631,7 +2632,7 @@
         <p:spPr>
           <a:xfrm>
             <a:off x="6553080" y="6356520"/>
-            <a:ext cx="2131200" cy="362520"/>
+            <a:ext cx="2130840" cy="362160"/>
           </a:xfrm>
           <a:prstGeom prst="rect">
             <a:avLst/>
@@ -2672,7 +2673,7 @@
                 <a:tab algn="l" pos="0"/>
               </a:tabLst>
             </a:pPr>
-            <a:fld id="{3AFBC365-BBA2-49FF-A7B4-9A083ACEE66C}" type="slidenum">
+            <a:fld id="{E6F05F21-1922-473A-8ED2-A3D0B352A3CF}" type="slidenum">
               <a:rPr b="0" lang="en-US" sz="1200" spc="-1" strike="noStrike">
                 <a:solidFill>
                   <a:srgbClr val="8b8b8b"/>
@@ -2703,7 +2704,7 @@
         <p:spPr>
           <a:xfrm>
             <a:off x="457200" y="6356520"/>
-            <a:ext cx="2131200" cy="362520"/>
+            <a:ext cx="2130840" cy="362160"/>
           </a:xfrm>
           <a:prstGeom prst="rect">
             <a:avLst/>
@@ -3070,7 +3071,7 @@
         <p:spPr>
           <a:xfrm>
             <a:off x="0" y="0"/>
-            <a:ext cx="12186360" cy="6855480"/>
+            <a:ext cx="12186000" cy="6855120"/>
           </a:xfrm>
           <a:prstGeom prst="rect">
             <a:avLst/>
@@ -3130,7 +3131,7 @@
         <p:spPr>
           <a:xfrm>
             <a:off x="0" y="0"/>
-            <a:ext cx="15840" cy="6855480"/>
+            <a:ext cx="15480" cy="6855120"/>
           </a:xfrm>
           <a:prstGeom prst="rect">
             <a:avLst/>
@@ -3190,7 +3191,7 @@
         <p:spPr>
           <a:xfrm>
             <a:off x="914400" y="0"/>
-            <a:ext cx="15840" cy="6855480"/>
+            <a:ext cx="15480" cy="6855120"/>
           </a:xfrm>
           <a:prstGeom prst="rect">
             <a:avLst/>
@@ -3250,7 +3251,7 @@
         <p:spPr>
           <a:xfrm>
             <a:off x="1828800" y="0"/>
-            <a:ext cx="15840" cy="6855480"/>
+            <a:ext cx="15480" cy="6855120"/>
           </a:xfrm>
           <a:prstGeom prst="rect">
             <a:avLst/>
@@ -3310,7 +3311,7 @@
         <p:spPr>
           <a:xfrm>
             <a:off x="2743200" y="0"/>
-            <a:ext cx="15840" cy="6855480"/>
+            <a:ext cx="15480" cy="6855120"/>
           </a:xfrm>
           <a:prstGeom prst="rect">
             <a:avLst/>
@@ -3370,7 +3371,7 @@
         <p:spPr>
           <a:xfrm>
             <a:off x="3657600" y="0"/>
-            <a:ext cx="15840" cy="6855480"/>
+            <a:ext cx="15480" cy="6855120"/>
           </a:xfrm>
           <a:prstGeom prst="rect">
             <a:avLst/>
@@ -3430,7 +3431,7 @@
         <p:spPr>
           <a:xfrm>
             <a:off x="4572000" y="0"/>
-            <a:ext cx="15840" cy="6855480"/>
+            <a:ext cx="15480" cy="6855120"/>
           </a:xfrm>
           <a:prstGeom prst="rect">
             <a:avLst/>
@@ -3490,7 +3491,7 @@
         <p:spPr>
           <a:xfrm>
             <a:off x="5486400" y="0"/>
-            <a:ext cx="15840" cy="6855480"/>
+            <a:ext cx="15480" cy="6855120"/>
           </a:xfrm>
           <a:prstGeom prst="rect">
             <a:avLst/>
@@ -3550,7 +3551,7 @@
         <p:spPr>
           <a:xfrm>
             <a:off x="6400800" y="0"/>
-            <a:ext cx="15840" cy="6855480"/>
+            <a:ext cx="15480" cy="6855120"/>
           </a:xfrm>
           <a:prstGeom prst="rect">
             <a:avLst/>
@@ -3610,7 +3611,7 @@
         <p:spPr>
           <a:xfrm>
             <a:off x="7315200" y="0"/>
-            <a:ext cx="15840" cy="6855480"/>
+            <a:ext cx="15480" cy="6855120"/>
           </a:xfrm>
           <a:prstGeom prst="rect">
             <a:avLst/>
@@ -3670,7 +3671,7 @@
         <p:spPr>
           <a:xfrm>
             <a:off x="8229600" y="0"/>
-            <a:ext cx="15840" cy="6855480"/>
+            <a:ext cx="15480" cy="6855120"/>
           </a:xfrm>
           <a:prstGeom prst="rect">
             <a:avLst/>
@@ -3730,7 +3731,7 @@
         <p:spPr>
           <a:xfrm>
             <a:off x="9144000" y="0"/>
-            <a:ext cx="15840" cy="6855480"/>
+            <a:ext cx="15480" cy="6855120"/>
           </a:xfrm>
           <a:prstGeom prst="rect">
             <a:avLst/>
@@ -3790,7 +3791,7 @@
         <p:spPr>
           <a:xfrm>
             <a:off x="10058400" y="0"/>
-            <a:ext cx="15840" cy="6855480"/>
+            <a:ext cx="15480" cy="6855120"/>
           </a:xfrm>
           <a:prstGeom prst="rect">
             <a:avLst/>
@@ -3850,7 +3851,7 @@
         <p:spPr>
           <a:xfrm>
             <a:off x="10972800" y="0"/>
-            <a:ext cx="15840" cy="6855480"/>
+            <a:ext cx="15480" cy="6855120"/>
           </a:xfrm>
           <a:prstGeom prst="rect">
             <a:avLst/>
@@ -3910,7 +3911,7 @@
         <p:spPr>
           <a:xfrm>
             <a:off x="11887200" y="0"/>
-            <a:ext cx="15840" cy="6855480"/>
+            <a:ext cx="15480" cy="6855120"/>
           </a:xfrm>
           <a:prstGeom prst="rect">
             <a:avLst/>
@@ -3970,7 +3971,7 @@
         <p:spPr>
           <a:xfrm>
             <a:off x="0" y="0"/>
-            <a:ext cx="317520" cy="6855480"/>
+            <a:ext cx="317160" cy="6855120"/>
           </a:xfrm>
           <a:prstGeom prst="rect">
             <a:avLst/>
@@ -4030,7 +4031,7 @@
         <p:spPr>
           <a:xfrm>
             <a:off x="9875520" y="365760"/>
-            <a:ext cx="2009160" cy="500400"/>
+            <a:ext cx="2008800" cy="500040"/>
           </a:xfrm>
           <a:prstGeom prst="roundRect">
             <a:avLst>
@@ -4258,7 +4259,7 @@
         <p:spPr>
           <a:xfrm>
             <a:off x="987480" y="3182040"/>
-            <a:ext cx="3289320" cy="2740680"/>
+            <a:ext cx="3288960" cy="2740320"/>
           </a:xfrm>
           <a:prstGeom prst="roundRect">
             <a:avLst>
@@ -4320,7 +4321,7 @@
         <p:spPr>
           <a:xfrm>
             <a:off x="914400" y="3108960"/>
-            <a:ext cx="3289320" cy="2740680"/>
+            <a:ext cx="3288960" cy="2740320"/>
           </a:xfrm>
           <a:prstGeom prst="roundRect">
             <a:avLst>
@@ -4454,7 +4455,7 @@
         <p:spPr>
           <a:xfrm>
             <a:off x="4507920" y="3182040"/>
-            <a:ext cx="3289320" cy="2740680"/>
+            <a:ext cx="3288960" cy="2740320"/>
           </a:xfrm>
           <a:prstGeom prst="roundRect">
             <a:avLst>
@@ -4516,7 +4517,7 @@
         <p:spPr>
           <a:xfrm>
             <a:off x="4434840" y="3108960"/>
-            <a:ext cx="3289320" cy="2740680"/>
+            <a:ext cx="3288960" cy="2740320"/>
           </a:xfrm>
           <a:prstGeom prst="roundRect">
             <a:avLst>
@@ -4774,7 +4775,7 @@
         <p:spPr>
           <a:xfrm>
             <a:off x="8028360" y="3182040"/>
-            <a:ext cx="3289320" cy="2740680"/>
+            <a:ext cx="3288960" cy="2740320"/>
           </a:xfrm>
           <a:prstGeom prst="roundRect">
             <a:avLst>
@@ -4836,7 +4837,7 @@
         <p:spPr>
           <a:xfrm>
             <a:off x="7955280" y="2971800"/>
-            <a:ext cx="3930480" cy="3656160"/>
+            <a:ext cx="3930120" cy="3655800"/>
           </a:xfrm>
           <a:prstGeom prst="roundRect">
             <a:avLst>
@@ -5347,7 +5348,7 @@
         <p:spPr>
           <a:xfrm>
             <a:off x="0" y="0"/>
-            <a:ext cx="12186720" cy="6855840"/>
+            <a:ext cx="12186360" cy="6855480"/>
           </a:xfrm>
           <a:prstGeom prst="rect">
             <a:avLst/>
@@ -5407,7 +5408,7 @@
         <p:spPr>
           <a:xfrm>
             <a:off x="0" y="0"/>
-            <a:ext cx="16200" cy="6855840"/>
+            <a:ext cx="15840" cy="6855480"/>
           </a:xfrm>
           <a:prstGeom prst="rect">
             <a:avLst/>
@@ -5467,7 +5468,7 @@
         <p:spPr>
           <a:xfrm>
             <a:off x="914400" y="0"/>
-            <a:ext cx="16200" cy="6855840"/>
+            <a:ext cx="15840" cy="6855480"/>
           </a:xfrm>
           <a:prstGeom prst="rect">
             <a:avLst/>
@@ -5527,7 +5528,7 @@
         <p:spPr>
           <a:xfrm>
             <a:off x="1828800" y="0"/>
-            <a:ext cx="16200" cy="6855840"/>
+            <a:ext cx="15840" cy="6855480"/>
           </a:xfrm>
           <a:prstGeom prst="rect">
             <a:avLst/>
@@ -5587,7 +5588,7 @@
         <p:spPr>
           <a:xfrm>
             <a:off x="2743200" y="0"/>
-            <a:ext cx="16200" cy="6855840"/>
+            <a:ext cx="15840" cy="6855480"/>
           </a:xfrm>
           <a:prstGeom prst="rect">
             <a:avLst/>
@@ -5647,7 +5648,7 @@
         <p:spPr>
           <a:xfrm>
             <a:off x="3657600" y="0"/>
-            <a:ext cx="16200" cy="6855840"/>
+            <a:ext cx="15840" cy="6855480"/>
           </a:xfrm>
           <a:prstGeom prst="rect">
             <a:avLst/>
@@ -5707,7 +5708,7 @@
         <p:spPr>
           <a:xfrm>
             <a:off x="4572000" y="0"/>
-            <a:ext cx="16200" cy="6855840"/>
+            <a:ext cx="15840" cy="6855480"/>
           </a:xfrm>
           <a:prstGeom prst="rect">
             <a:avLst/>
@@ -5767,7 +5768,7 @@
         <p:spPr>
           <a:xfrm>
             <a:off x="5486400" y="0"/>
-            <a:ext cx="16200" cy="6855840"/>
+            <a:ext cx="15840" cy="6855480"/>
           </a:xfrm>
           <a:prstGeom prst="rect">
             <a:avLst/>
@@ -5827,7 +5828,7 @@
         <p:spPr>
           <a:xfrm>
             <a:off x="6400800" y="0"/>
-            <a:ext cx="16200" cy="6855840"/>
+            <a:ext cx="15840" cy="6855480"/>
           </a:xfrm>
           <a:prstGeom prst="rect">
             <a:avLst/>
@@ -5887,7 +5888,7 @@
         <p:spPr>
           <a:xfrm>
             <a:off x="7315200" y="0"/>
-            <a:ext cx="16200" cy="6855840"/>
+            <a:ext cx="15840" cy="6855480"/>
           </a:xfrm>
           <a:prstGeom prst="rect">
             <a:avLst/>
@@ -5947,7 +5948,7 @@
         <p:spPr>
           <a:xfrm>
             <a:off x="8229600" y="0"/>
-            <a:ext cx="16200" cy="6855840"/>
+            <a:ext cx="15840" cy="6855480"/>
           </a:xfrm>
           <a:prstGeom prst="rect">
             <a:avLst/>
@@ -6007,7 +6008,7 @@
         <p:spPr>
           <a:xfrm>
             <a:off x="9144000" y="0"/>
-            <a:ext cx="16200" cy="6855840"/>
+            <a:ext cx="15840" cy="6855480"/>
           </a:xfrm>
           <a:prstGeom prst="rect">
             <a:avLst/>
@@ -6067,7 +6068,7 @@
         <p:spPr>
           <a:xfrm>
             <a:off x="10058400" y="0"/>
-            <a:ext cx="16200" cy="6855840"/>
+            <a:ext cx="15840" cy="6855480"/>
           </a:xfrm>
           <a:prstGeom prst="rect">
             <a:avLst/>
@@ -6127,7 +6128,7 @@
         <p:spPr>
           <a:xfrm>
             <a:off x="10972800" y="0"/>
-            <a:ext cx="16200" cy="6855840"/>
+            <a:ext cx="15840" cy="6855480"/>
           </a:xfrm>
           <a:prstGeom prst="rect">
             <a:avLst/>
@@ -6187,7 +6188,7 @@
         <p:spPr>
           <a:xfrm>
             <a:off x="11887200" y="0"/>
-            <a:ext cx="16200" cy="6855840"/>
+            <a:ext cx="15840" cy="6855480"/>
           </a:xfrm>
           <a:prstGeom prst="rect">
             <a:avLst/>
@@ -6247,7 +6248,7 @@
         <p:spPr>
           <a:xfrm>
             <a:off x="0" y="0"/>
-            <a:ext cx="317880" cy="6855840"/>
+            <a:ext cx="317520" cy="6855480"/>
           </a:xfrm>
           <a:prstGeom prst="rect">
             <a:avLst/>
@@ -6307,7 +6308,7 @@
         <p:spPr>
           <a:xfrm>
             <a:off x="9875520" y="365760"/>
-            <a:ext cx="2009520" cy="500760"/>
+            <a:ext cx="2009160" cy="500400"/>
           </a:xfrm>
           <a:prstGeom prst="roundRect">
             <a:avLst>
@@ -6381,7 +6382,7 @@
         <p:spPr>
           <a:xfrm>
             <a:off x="2219760" y="914400"/>
-            <a:ext cx="6530400" cy="638280"/>
+            <a:ext cx="6530040" cy="638280"/>
           </a:xfrm>
           <a:prstGeom prst="rect">
             <a:avLst/>
@@ -6435,7 +6436,7 @@
         <p:spPr>
           <a:xfrm>
             <a:off x="612000" y="1828800"/>
-            <a:ext cx="10264320" cy="819720"/>
+            <a:ext cx="10263960" cy="819720"/>
           </a:xfrm>
           <a:prstGeom prst="rect">
             <a:avLst/>
@@ -6535,7 +6536,7 @@
         <p:spPr>
           <a:xfrm>
             <a:off x="987480" y="3182040"/>
-            <a:ext cx="3289680" cy="2741040"/>
+            <a:ext cx="3289320" cy="2740680"/>
           </a:xfrm>
           <a:prstGeom prst="roundRect">
             <a:avLst>
@@ -6597,7 +6598,7 @@
         <p:spPr>
           <a:xfrm>
             <a:off x="914400" y="3108960"/>
-            <a:ext cx="3289680" cy="3062160"/>
+            <a:ext cx="3289320" cy="3061800"/>
           </a:xfrm>
           <a:prstGeom prst="roundRect">
             <a:avLst>
@@ -6760,7 +6761,7 @@
         <p:spPr>
           <a:xfrm>
             <a:off x="4507920" y="3182040"/>
-            <a:ext cx="3289680" cy="2741040"/>
+            <a:ext cx="3289320" cy="2740680"/>
           </a:xfrm>
           <a:prstGeom prst="roundRect">
             <a:avLst>
@@ -6822,7 +6823,7 @@
         <p:spPr>
           <a:xfrm>
             <a:off x="4434840" y="2971800"/>
-            <a:ext cx="3289680" cy="3427920"/>
+            <a:ext cx="3289320" cy="3427560"/>
           </a:xfrm>
           <a:prstGeom prst="roundRect">
             <a:avLst>
@@ -7080,7 +7081,7 @@
         <p:spPr>
           <a:xfrm>
             <a:off x="8028360" y="3182040"/>
-            <a:ext cx="3289680" cy="2741040"/>
+            <a:ext cx="3289320" cy="2740680"/>
           </a:xfrm>
           <a:prstGeom prst="roundRect">
             <a:avLst>
@@ -7142,7 +7143,7 @@
         <p:spPr>
           <a:xfrm>
             <a:off x="7955280" y="3108960"/>
-            <a:ext cx="3702240" cy="3062160"/>
+            <a:ext cx="3701880" cy="3061800"/>
           </a:xfrm>
           <a:prstGeom prst="roundRect">
             <a:avLst>
@@ -7587,7 +7588,7 @@
         <p:spPr>
           <a:xfrm>
             <a:off x="0" y="0"/>
-            <a:ext cx="12186720" cy="6855840"/>
+            <a:ext cx="12186360" cy="6855480"/>
           </a:xfrm>
           <a:prstGeom prst="rect">
             <a:avLst/>
@@ -7647,7 +7648,7 @@
         <p:spPr>
           <a:xfrm>
             <a:off x="0" y="0"/>
-            <a:ext cx="16200" cy="6855840"/>
+            <a:ext cx="15840" cy="6855480"/>
           </a:xfrm>
           <a:prstGeom prst="rect">
             <a:avLst/>
@@ -7707,7 +7708,7 @@
         <p:spPr>
           <a:xfrm>
             <a:off x="914400" y="0"/>
-            <a:ext cx="16200" cy="6855840"/>
+            <a:ext cx="15840" cy="6855480"/>
           </a:xfrm>
           <a:prstGeom prst="rect">
             <a:avLst/>
@@ -7767,7 +7768,7 @@
         <p:spPr>
           <a:xfrm>
             <a:off x="1828800" y="0"/>
-            <a:ext cx="16200" cy="6855840"/>
+            <a:ext cx="15840" cy="6855480"/>
           </a:xfrm>
           <a:prstGeom prst="rect">
             <a:avLst/>
@@ -7827,7 +7828,7 @@
         <p:spPr>
           <a:xfrm>
             <a:off x="2743200" y="0"/>
-            <a:ext cx="16200" cy="6855840"/>
+            <a:ext cx="15840" cy="6855480"/>
           </a:xfrm>
           <a:prstGeom prst="rect">
             <a:avLst/>
@@ -7887,7 +7888,7 @@
         <p:spPr>
           <a:xfrm>
             <a:off x="3657600" y="0"/>
-            <a:ext cx="16200" cy="6855840"/>
+            <a:ext cx="15840" cy="6855480"/>
           </a:xfrm>
           <a:prstGeom prst="rect">
             <a:avLst/>
@@ -7947,7 +7948,7 @@
         <p:spPr>
           <a:xfrm>
             <a:off x="4572000" y="0"/>
-            <a:ext cx="16200" cy="6855840"/>
+            <a:ext cx="15840" cy="6855480"/>
           </a:xfrm>
           <a:prstGeom prst="rect">
             <a:avLst/>
@@ -8007,7 +8008,7 @@
         <p:spPr>
           <a:xfrm>
             <a:off x="5486400" y="0"/>
-            <a:ext cx="16200" cy="6855840"/>
+            <a:ext cx="15840" cy="6855480"/>
           </a:xfrm>
           <a:prstGeom prst="rect">
             <a:avLst/>
@@ -8067,7 +8068,7 @@
         <p:spPr>
           <a:xfrm>
             <a:off x="6400800" y="0"/>
-            <a:ext cx="16200" cy="6855840"/>
+            <a:ext cx="15840" cy="6855480"/>
           </a:xfrm>
           <a:prstGeom prst="rect">
             <a:avLst/>
@@ -8127,7 +8128,7 @@
         <p:spPr>
           <a:xfrm>
             <a:off x="7315200" y="0"/>
-            <a:ext cx="16200" cy="6855840"/>
+            <a:ext cx="15840" cy="6855480"/>
           </a:xfrm>
           <a:prstGeom prst="rect">
             <a:avLst/>
@@ -8187,7 +8188,7 @@
         <p:spPr>
           <a:xfrm>
             <a:off x="8229600" y="0"/>
-            <a:ext cx="16200" cy="6855840"/>
+            <a:ext cx="15840" cy="6855480"/>
           </a:xfrm>
           <a:prstGeom prst="rect">
             <a:avLst/>
@@ -8247,7 +8248,7 @@
         <p:spPr>
           <a:xfrm>
             <a:off x="9144000" y="0"/>
-            <a:ext cx="16200" cy="6855840"/>
+            <a:ext cx="15840" cy="6855480"/>
           </a:xfrm>
           <a:prstGeom prst="rect">
             <a:avLst/>
@@ -8307,7 +8308,7 @@
         <p:spPr>
           <a:xfrm>
             <a:off x="10058400" y="0"/>
-            <a:ext cx="16200" cy="6855840"/>
+            <a:ext cx="15840" cy="6855480"/>
           </a:xfrm>
           <a:prstGeom prst="rect">
             <a:avLst/>
@@ -8367,7 +8368,7 @@
         <p:spPr>
           <a:xfrm>
             <a:off x="10972800" y="0"/>
-            <a:ext cx="16200" cy="6855840"/>
+            <a:ext cx="15840" cy="6855480"/>
           </a:xfrm>
           <a:prstGeom prst="rect">
             <a:avLst/>
@@ -8427,7 +8428,7 @@
         <p:spPr>
           <a:xfrm>
             <a:off x="11887200" y="0"/>
-            <a:ext cx="16200" cy="6855840"/>
+            <a:ext cx="15840" cy="6855480"/>
           </a:xfrm>
           <a:prstGeom prst="rect">
             <a:avLst/>
@@ -8487,7 +8488,7 @@
         <p:spPr>
           <a:xfrm>
             <a:off x="0" y="0"/>
-            <a:ext cx="317880" cy="6855840"/>
+            <a:ext cx="317520" cy="6855480"/>
           </a:xfrm>
           <a:prstGeom prst="rect">
             <a:avLst/>
@@ -8547,7 +8548,7 @@
         <p:spPr>
           <a:xfrm>
             <a:off x="9875520" y="365760"/>
-            <a:ext cx="2009520" cy="500760"/>
+            <a:ext cx="2009160" cy="500400"/>
           </a:xfrm>
           <a:prstGeom prst="roundRect">
             <a:avLst>
@@ -8675,7 +8676,7 @@
         <p:spPr>
           <a:xfrm>
             <a:off x="1304280" y="1828800"/>
-            <a:ext cx="8879400" cy="819720"/>
+            <a:ext cx="8879040" cy="819720"/>
           </a:xfrm>
           <a:prstGeom prst="rect">
             <a:avLst/>
@@ -8775,7 +8776,7 @@
         <p:spPr>
           <a:xfrm>
             <a:off x="987480" y="3182040"/>
-            <a:ext cx="3289680" cy="2741040"/>
+            <a:ext cx="3289320" cy="2740680"/>
           </a:xfrm>
           <a:prstGeom prst="roundRect">
             <a:avLst>
@@ -8837,7 +8838,7 @@
         <p:spPr>
           <a:xfrm>
             <a:off x="685800" y="2971800"/>
-            <a:ext cx="3518280" cy="3199320"/>
+            <a:ext cx="3517920" cy="3198960"/>
           </a:xfrm>
           <a:prstGeom prst="roundRect">
             <a:avLst>
@@ -9028,7 +9029,7 @@
         <p:spPr>
           <a:xfrm>
             <a:off x="4507920" y="3182040"/>
-            <a:ext cx="3289680" cy="2741040"/>
+            <a:ext cx="3289320" cy="2740680"/>
           </a:xfrm>
           <a:prstGeom prst="roundRect">
             <a:avLst>
@@ -9090,7 +9091,7 @@
         <p:spPr>
           <a:xfrm>
             <a:off x="4434840" y="2971800"/>
-            <a:ext cx="3289680" cy="3427920"/>
+            <a:ext cx="3289320" cy="3427560"/>
           </a:xfrm>
           <a:prstGeom prst="roundRect">
             <a:avLst>
@@ -9348,7 +9349,7 @@
         <p:spPr>
           <a:xfrm>
             <a:off x="8028360" y="3182040"/>
-            <a:ext cx="3289680" cy="2741040"/>
+            <a:ext cx="3289320" cy="2740680"/>
           </a:xfrm>
           <a:prstGeom prst="roundRect">
             <a:avLst>
@@ -9410,7 +9411,7 @@
         <p:spPr>
           <a:xfrm>
             <a:off x="7955280" y="3108960"/>
-            <a:ext cx="3702240" cy="3062160"/>
+            <a:ext cx="3701880" cy="3061800"/>
           </a:xfrm>
           <a:prstGeom prst="roundRect">
             <a:avLst>
@@ -9855,7 +9856,7 @@
         <p:spPr>
           <a:xfrm>
             <a:off x="0" y="0"/>
-            <a:ext cx="12186720" cy="6855840"/>
+            <a:ext cx="12186360" cy="6855480"/>
           </a:xfrm>
           <a:prstGeom prst="rect">
             <a:avLst/>
@@ -9915,7 +9916,7 @@
         <p:spPr>
           <a:xfrm>
             <a:off x="0" y="0"/>
-            <a:ext cx="16200" cy="6855840"/>
+            <a:ext cx="15840" cy="6855480"/>
           </a:xfrm>
           <a:prstGeom prst="rect">
             <a:avLst/>
@@ -9975,7 +9976,7 @@
         <p:spPr>
           <a:xfrm>
             <a:off x="914400" y="0"/>
-            <a:ext cx="16200" cy="6855840"/>
+            <a:ext cx="15840" cy="6855480"/>
           </a:xfrm>
           <a:prstGeom prst="rect">
             <a:avLst/>
@@ -10035,7 +10036,7 @@
         <p:spPr>
           <a:xfrm>
             <a:off x="1828800" y="0"/>
-            <a:ext cx="16200" cy="6855840"/>
+            <a:ext cx="15840" cy="6855480"/>
           </a:xfrm>
           <a:prstGeom prst="rect">
             <a:avLst/>
@@ -10095,7 +10096,7 @@
         <p:spPr>
           <a:xfrm>
             <a:off x="2743200" y="0"/>
-            <a:ext cx="16200" cy="6855840"/>
+            <a:ext cx="15840" cy="6855480"/>
           </a:xfrm>
           <a:prstGeom prst="rect">
             <a:avLst/>
@@ -10155,7 +10156,7 @@
         <p:spPr>
           <a:xfrm>
             <a:off x="3657600" y="0"/>
-            <a:ext cx="16200" cy="6855840"/>
+            <a:ext cx="15840" cy="6855480"/>
           </a:xfrm>
           <a:prstGeom prst="rect">
             <a:avLst/>
@@ -10215,7 +10216,7 @@
         <p:spPr>
           <a:xfrm>
             <a:off x="4572000" y="0"/>
-            <a:ext cx="16200" cy="6855840"/>
+            <a:ext cx="15840" cy="6855480"/>
           </a:xfrm>
           <a:prstGeom prst="rect">
             <a:avLst/>
@@ -10275,7 +10276,7 @@
         <p:spPr>
           <a:xfrm>
             <a:off x="5486400" y="0"/>
-            <a:ext cx="16200" cy="6855840"/>
+            <a:ext cx="15840" cy="6855480"/>
           </a:xfrm>
           <a:prstGeom prst="rect">
             <a:avLst/>
@@ -10335,7 +10336,7 @@
         <p:spPr>
           <a:xfrm>
             <a:off x="6400800" y="0"/>
-            <a:ext cx="16200" cy="6855840"/>
+            <a:ext cx="15840" cy="6855480"/>
           </a:xfrm>
           <a:prstGeom prst="rect">
             <a:avLst/>
@@ -10395,7 +10396,7 @@
         <p:spPr>
           <a:xfrm>
             <a:off x="7315200" y="0"/>
-            <a:ext cx="16200" cy="6855840"/>
+            <a:ext cx="15840" cy="6855480"/>
           </a:xfrm>
           <a:prstGeom prst="rect">
             <a:avLst/>
@@ -10455,7 +10456,7 @@
         <p:spPr>
           <a:xfrm>
             <a:off x="8229600" y="0"/>
-            <a:ext cx="16200" cy="6855840"/>
+            <a:ext cx="15840" cy="6855480"/>
           </a:xfrm>
           <a:prstGeom prst="rect">
             <a:avLst/>
@@ -10515,7 +10516,7 @@
         <p:spPr>
           <a:xfrm>
             <a:off x="9144000" y="0"/>
-            <a:ext cx="16200" cy="6855840"/>
+            <a:ext cx="15840" cy="6855480"/>
           </a:xfrm>
           <a:prstGeom prst="rect">
             <a:avLst/>
@@ -10575,7 +10576,7 @@
         <p:spPr>
           <a:xfrm>
             <a:off x="10058400" y="0"/>
-            <a:ext cx="16200" cy="6855840"/>
+            <a:ext cx="15840" cy="6855480"/>
           </a:xfrm>
           <a:prstGeom prst="rect">
             <a:avLst/>
@@ -10635,7 +10636,7 @@
         <p:spPr>
           <a:xfrm>
             <a:off x="10972800" y="0"/>
-            <a:ext cx="16200" cy="6855840"/>
+            <a:ext cx="15840" cy="6855480"/>
           </a:xfrm>
           <a:prstGeom prst="rect">
             <a:avLst/>
@@ -10695,7 +10696,7 @@
         <p:spPr>
           <a:xfrm>
             <a:off x="11887200" y="0"/>
-            <a:ext cx="16200" cy="6855840"/>
+            <a:ext cx="15840" cy="6855480"/>
           </a:xfrm>
           <a:prstGeom prst="rect">
             <a:avLst/>
@@ -10755,7 +10756,7 @@
         <p:spPr>
           <a:xfrm>
             <a:off x="0" y="0"/>
-            <a:ext cx="317880" cy="6855840"/>
+            <a:ext cx="317520" cy="6855480"/>
           </a:xfrm>
           <a:prstGeom prst="rect">
             <a:avLst/>
@@ -10815,7 +10816,7 @@
         <p:spPr>
           <a:xfrm>
             <a:off x="9875520" y="365760"/>
-            <a:ext cx="2009520" cy="500760"/>
+            <a:ext cx="2009160" cy="500400"/>
           </a:xfrm>
           <a:prstGeom prst="roundRect">
             <a:avLst>
@@ -10889,7 +10890,7 @@
         <p:spPr>
           <a:xfrm>
             <a:off x="2845800" y="914400"/>
-            <a:ext cx="5278680" cy="638280"/>
+            <a:ext cx="5278320" cy="638280"/>
           </a:xfrm>
           <a:prstGeom prst="rect">
             <a:avLst/>
@@ -10943,7 +10944,7 @@
         <p:spPr>
           <a:xfrm>
             <a:off x="1726200" y="1828800"/>
-            <a:ext cx="8035560" cy="576360"/>
+            <a:ext cx="8035200" cy="576360"/>
           </a:xfrm>
           <a:prstGeom prst="rect">
             <a:avLst/>
@@ -11020,7 +11021,7 @@
         <p:spPr>
           <a:xfrm>
             <a:off x="987480" y="3182040"/>
-            <a:ext cx="3289680" cy="2741040"/>
+            <a:ext cx="3289320" cy="2740680"/>
           </a:xfrm>
           <a:prstGeom prst="roundRect">
             <a:avLst>
@@ -11082,7 +11083,7 @@
         <p:spPr>
           <a:xfrm>
             <a:off x="685800" y="2971800"/>
-            <a:ext cx="3518280" cy="3199320"/>
+            <a:ext cx="3517920" cy="3198960"/>
           </a:xfrm>
           <a:prstGeom prst="roundRect">
             <a:avLst>
@@ -11273,7 +11274,7 @@
         <p:spPr>
           <a:xfrm>
             <a:off x="4507920" y="3182040"/>
-            <a:ext cx="3289680" cy="2741040"/>
+            <a:ext cx="3289320" cy="2740680"/>
           </a:xfrm>
           <a:prstGeom prst="roundRect">
             <a:avLst>
@@ -11335,7 +11336,7 @@
         <p:spPr>
           <a:xfrm>
             <a:off x="4434840" y="2971800"/>
-            <a:ext cx="3289680" cy="3427920"/>
+            <a:ext cx="3289320" cy="3427560"/>
           </a:xfrm>
           <a:prstGeom prst="roundRect">
             <a:avLst>
@@ -11547,7 +11548,7 @@
         <p:spPr>
           <a:xfrm>
             <a:off x="8028360" y="3182040"/>
-            <a:ext cx="3289680" cy="2741040"/>
+            <a:ext cx="3289320" cy="2740680"/>
           </a:xfrm>
           <a:prstGeom prst="roundRect">
             <a:avLst>
@@ -11609,7 +11610,7 @@
         <p:spPr>
           <a:xfrm>
             <a:off x="7955280" y="2743200"/>
-            <a:ext cx="3931560" cy="3885840"/>
+            <a:ext cx="3931200" cy="3885480"/>
           </a:xfrm>
           <a:prstGeom prst="roundRect">
             <a:avLst>
@@ -12169,7 +12170,7 @@
         <p:spPr>
           <a:xfrm>
             <a:off x="0" y="0"/>
-            <a:ext cx="12186720" cy="6855840"/>
+            <a:ext cx="12186360" cy="6855480"/>
           </a:xfrm>
           <a:prstGeom prst="rect">
             <a:avLst/>
@@ -12205,6 +12206,11 @@
             <a:noAutofit/>
           </a:bodyPr>
           <a:p>
+            <a:pPr>
+              <a:lnSpc>
+                <a:spcPct val="100000"/>
+              </a:lnSpc>
+            </a:pPr>
             <a:endParaRPr b="0" lang="en-US" sz="1800" spc="-1" strike="noStrike">
               <a:solidFill>
                 <a:schemeClr val="lt1"/>
@@ -12224,7 +12230,7 @@
         <p:spPr>
           <a:xfrm>
             <a:off x="0" y="0"/>
-            <a:ext cx="16200" cy="6855840"/>
+            <a:ext cx="15840" cy="6855480"/>
           </a:xfrm>
           <a:prstGeom prst="rect">
             <a:avLst/>
@@ -12260,6 +12266,11 @@
             <a:noAutofit/>
           </a:bodyPr>
           <a:p>
+            <a:pPr>
+              <a:lnSpc>
+                <a:spcPct val="100000"/>
+              </a:lnSpc>
+            </a:pPr>
             <a:endParaRPr b="0" lang="en-US" sz="1800" spc="-1" strike="noStrike">
               <a:solidFill>
                 <a:schemeClr val="lt1"/>
@@ -12279,7 +12290,7 @@
         <p:spPr>
           <a:xfrm>
             <a:off x="914400" y="0"/>
-            <a:ext cx="16200" cy="6855840"/>
+            <a:ext cx="15840" cy="6855480"/>
           </a:xfrm>
           <a:prstGeom prst="rect">
             <a:avLst/>
@@ -12315,6 +12326,11 @@
             <a:noAutofit/>
           </a:bodyPr>
           <a:p>
+            <a:pPr>
+              <a:lnSpc>
+                <a:spcPct val="100000"/>
+              </a:lnSpc>
+            </a:pPr>
             <a:endParaRPr b="0" lang="en-US" sz="1800" spc="-1" strike="noStrike">
               <a:solidFill>
                 <a:schemeClr val="lt1"/>
@@ -12334,7 +12350,7 @@
         <p:spPr>
           <a:xfrm>
             <a:off x="1828800" y="0"/>
-            <a:ext cx="16200" cy="6855840"/>
+            <a:ext cx="15840" cy="6855480"/>
           </a:xfrm>
           <a:prstGeom prst="rect">
             <a:avLst/>
@@ -12370,6 +12386,11 @@
             <a:noAutofit/>
           </a:bodyPr>
           <a:p>
+            <a:pPr>
+              <a:lnSpc>
+                <a:spcPct val="100000"/>
+              </a:lnSpc>
+            </a:pPr>
             <a:endParaRPr b="0" lang="en-US" sz="1800" spc="-1" strike="noStrike">
               <a:solidFill>
                 <a:schemeClr val="lt1"/>
@@ -12389,7 +12410,7 @@
         <p:spPr>
           <a:xfrm>
             <a:off x="2743200" y="0"/>
-            <a:ext cx="16200" cy="6855840"/>
+            <a:ext cx="15840" cy="6855480"/>
           </a:xfrm>
           <a:prstGeom prst="rect">
             <a:avLst/>
@@ -12425,6 +12446,11 @@
             <a:noAutofit/>
           </a:bodyPr>
           <a:p>
+            <a:pPr>
+              <a:lnSpc>
+                <a:spcPct val="100000"/>
+              </a:lnSpc>
+            </a:pPr>
             <a:endParaRPr b="0" lang="en-US" sz="1800" spc="-1" strike="noStrike">
               <a:solidFill>
                 <a:schemeClr val="lt1"/>
@@ -12444,7 +12470,7 @@
         <p:spPr>
           <a:xfrm>
             <a:off x="3657600" y="0"/>
-            <a:ext cx="16200" cy="6855840"/>
+            <a:ext cx="15840" cy="6855480"/>
           </a:xfrm>
           <a:prstGeom prst="rect">
             <a:avLst/>
@@ -12480,6 +12506,11 @@
             <a:noAutofit/>
           </a:bodyPr>
           <a:p>
+            <a:pPr>
+              <a:lnSpc>
+                <a:spcPct val="100000"/>
+              </a:lnSpc>
+            </a:pPr>
             <a:endParaRPr b="0" lang="en-US" sz="1800" spc="-1" strike="noStrike">
               <a:solidFill>
                 <a:schemeClr val="lt1"/>
@@ -12499,7 +12530,7 @@
         <p:spPr>
           <a:xfrm>
             <a:off x="4572000" y="0"/>
-            <a:ext cx="16200" cy="6855840"/>
+            <a:ext cx="15840" cy="6855480"/>
           </a:xfrm>
           <a:prstGeom prst="rect">
             <a:avLst/>
@@ -12535,6 +12566,11 @@
             <a:noAutofit/>
           </a:bodyPr>
           <a:p>
+            <a:pPr>
+              <a:lnSpc>
+                <a:spcPct val="100000"/>
+              </a:lnSpc>
+            </a:pPr>
             <a:endParaRPr b="0" lang="en-US" sz="1800" spc="-1" strike="noStrike">
               <a:solidFill>
                 <a:schemeClr val="lt1"/>
@@ -12554,7 +12590,7 @@
         <p:spPr>
           <a:xfrm>
             <a:off x="5486400" y="0"/>
-            <a:ext cx="16200" cy="6855840"/>
+            <a:ext cx="15840" cy="6855480"/>
           </a:xfrm>
           <a:prstGeom prst="rect">
             <a:avLst/>
@@ -12590,6 +12626,11 @@
             <a:noAutofit/>
           </a:bodyPr>
           <a:p>
+            <a:pPr>
+              <a:lnSpc>
+                <a:spcPct val="100000"/>
+              </a:lnSpc>
+            </a:pPr>
             <a:endParaRPr b="0" lang="en-US" sz="1800" spc="-1" strike="noStrike">
               <a:solidFill>
                 <a:schemeClr val="lt1"/>
@@ -12609,7 +12650,7 @@
         <p:spPr>
           <a:xfrm>
             <a:off x="6400800" y="0"/>
-            <a:ext cx="16200" cy="6855840"/>
+            <a:ext cx="15840" cy="6855480"/>
           </a:xfrm>
           <a:prstGeom prst="rect">
             <a:avLst/>
@@ -12645,6 +12686,11 @@
             <a:noAutofit/>
           </a:bodyPr>
           <a:p>
+            <a:pPr>
+              <a:lnSpc>
+                <a:spcPct val="100000"/>
+              </a:lnSpc>
+            </a:pPr>
             <a:endParaRPr b="0" lang="en-US" sz="1800" spc="-1" strike="noStrike">
               <a:solidFill>
                 <a:schemeClr val="lt1"/>
@@ -12664,7 +12710,7 @@
         <p:spPr>
           <a:xfrm>
             <a:off x="7315200" y="0"/>
-            <a:ext cx="16200" cy="6855840"/>
+            <a:ext cx="15840" cy="6855480"/>
           </a:xfrm>
           <a:prstGeom prst="rect">
             <a:avLst/>
@@ -12700,6 +12746,11 @@
             <a:noAutofit/>
           </a:bodyPr>
           <a:p>
+            <a:pPr>
+              <a:lnSpc>
+                <a:spcPct val="100000"/>
+              </a:lnSpc>
+            </a:pPr>
             <a:endParaRPr b="0" lang="en-US" sz="1800" spc="-1" strike="noStrike">
               <a:solidFill>
                 <a:schemeClr val="lt1"/>
@@ -12719,7 +12770,7 @@
         <p:spPr>
           <a:xfrm>
             <a:off x="8229600" y="0"/>
-            <a:ext cx="16200" cy="6855840"/>
+            <a:ext cx="15840" cy="6855480"/>
           </a:xfrm>
           <a:prstGeom prst="rect">
             <a:avLst/>
@@ -12755,6 +12806,11 @@
             <a:noAutofit/>
           </a:bodyPr>
           <a:p>
+            <a:pPr>
+              <a:lnSpc>
+                <a:spcPct val="100000"/>
+              </a:lnSpc>
+            </a:pPr>
             <a:endParaRPr b="0" lang="en-US" sz="1800" spc="-1" strike="noStrike">
               <a:solidFill>
                 <a:schemeClr val="lt1"/>
@@ -12774,7 +12830,7 @@
         <p:spPr>
           <a:xfrm>
             <a:off x="9144000" y="0"/>
-            <a:ext cx="16200" cy="6855840"/>
+            <a:ext cx="15840" cy="6855480"/>
           </a:xfrm>
           <a:prstGeom prst="rect">
             <a:avLst/>
@@ -12810,6 +12866,11 @@
             <a:noAutofit/>
           </a:bodyPr>
           <a:p>
+            <a:pPr>
+              <a:lnSpc>
+                <a:spcPct val="100000"/>
+              </a:lnSpc>
+            </a:pPr>
             <a:endParaRPr b="0" lang="en-US" sz="1800" spc="-1" strike="noStrike">
               <a:solidFill>
                 <a:schemeClr val="lt1"/>
@@ -12829,7 +12890,7 @@
         <p:spPr>
           <a:xfrm>
             <a:off x="10058400" y="0"/>
-            <a:ext cx="16200" cy="6855840"/>
+            <a:ext cx="15840" cy="6855480"/>
           </a:xfrm>
           <a:prstGeom prst="rect">
             <a:avLst/>
@@ -12865,6 +12926,11 @@
             <a:noAutofit/>
           </a:bodyPr>
           <a:p>
+            <a:pPr>
+              <a:lnSpc>
+                <a:spcPct val="100000"/>
+              </a:lnSpc>
+            </a:pPr>
             <a:endParaRPr b="0" lang="en-US" sz="1800" spc="-1" strike="noStrike">
               <a:solidFill>
                 <a:schemeClr val="lt1"/>
@@ -12884,7 +12950,7 @@
         <p:spPr>
           <a:xfrm>
             <a:off x="10972800" y="0"/>
-            <a:ext cx="16200" cy="6855840"/>
+            <a:ext cx="15840" cy="6855480"/>
           </a:xfrm>
           <a:prstGeom prst="rect">
             <a:avLst/>
@@ -12920,6 +12986,11 @@
             <a:noAutofit/>
           </a:bodyPr>
           <a:p>
+            <a:pPr>
+              <a:lnSpc>
+                <a:spcPct val="100000"/>
+              </a:lnSpc>
+            </a:pPr>
             <a:endParaRPr b="0" lang="en-US" sz="1800" spc="-1" strike="noStrike">
               <a:solidFill>
                 <a:schemeClr val="lt1"/>
@@ -12939,7 +13010,7 @@
         <p:spPr>
           <a:xfrm>
             <a:off x="11887200" y="0"/>
-            <a:ext cx="16200" cy="6855840"/>
+            <a:ext cx="15840" cy="6855480"/>
           </a:xfrm>
           <a:prstGeom prst="rect">
             <a:avLst/>
@@ -12975,6 +13046,11 @@
             <a:noAutofit/>
           </a:bodyPr>
           <a:p>
+            <a:pPr>
+              <a:lnSpc>
+                <a:spcPct val="100000"/>
+              </a:lnSpc>
+            </a:pPr>
             <a:endParaRPr b="0" lang="en-US" sz="1800" spc="-1" strike="noStrike">
               <a:solidFill>
                 <a:schemeClr val="lt1"/>
@@ -12994,7 +13070,7 @@
         <p:spPr>
           <a:xfrm>
             <a:off x="0" y="0"/>
-            <a:ext cx="317880" cy="6855840"/>
+            <a:ext cx="317520" cy="6855480"/>
           </a:xfrm>
           <a:prstGeom prst="rect">
             <a:avLst/>
@@ -13030,6 +13106,11 @@
             <a:noAutofit/>
           </a:bodyPr>
           <a:p>
+            <a:pPr>
+              <a:lnSpc>
+                <a:spcPct val="100000"/>
+              </a:lnSpc>
+            </a:pPr>
             <a:endParaRPr b="0" lang="en-US" sz="1800" spc="-1" strike="noStrike">
               <a:solidFill>
                 <a:schemeClr val="lt1"/>
@@ -13049,7 +13130,7 @@
         <p:spPr>
           <a:xfrm>
             <a:off x="9875520" y="365760"/>
-            <a:ext cx="2009520" cy="500760"/>
+            <a:ext cx="2009160" cy="500400"/>
           </a:xfrm>
           <a:prstGeom prst="roundRect">
             <a:avLst>
@@ -13177,7 +13258,7 @@
         <p:spPr>
           <a:xfrm>
             <a:off x="2278800" y="1828800"/>
-            <a:ext cx="6930720" cy="576360"/>
+            <a:ext cx="6930360" cy="576360"/>
           </a:xfrm>
           <a:prstGeom prst="rect">
             <a:avLst/>
@@ -13254,7 +13335,7 @@
         <p:spPr>
           <a:xfrm>
             <a:off x="987480" y="3182040"/>
-            <a:ext cx="3289680" cy="2741040"/>
+            <a:ext cx="3289320" cy="2740680"/>
           </a:xfrm>
           <a:prstGeom prst="roundRect">
             <a:avLst>
@@ -13292,6 +13373,11 @@
             <a:noAutofit/>
           </a:bodyPr>
           <a:p>
+            <a:pPr>
+              <a:lnSpc>
+                <a:spcPct val="100000"/>
+              </a:lnSpc>
+            </a:pPr>
             <a:endParaRPr b="0" lang="en-US" sz="1800" spc="-1" strike="noStrike">
               <a:solidFill>
                 <a:schemeClr val="lt1"/>
@@ -13311,7 +13397,7 @@
         <p:spPr>
           <a:xfrm>
             <a:off x="457200" y="2743200"/>
-            <a:ext cx="3746880" cy="3886200"/>
+            <a:ext cx="3746520" cy="3885840"/>
           </a:xfrm>
           <a:prstGeom prst="roundRect">
             <a:avLst>
@@ -13549,7 +13635,7 @@
         <p:spPr>
           <a:xfrm>
             <a:off x="4507920" y="3182040"/>
-            <a:ext cx="3289680" cy="2741040"/>
+            <a:ext cx="3289320" cy="2740680"/>
           </a:xfrm>
           <a:prstGeom prst="roundRect">
             <a:avLst>
@@ -13587,6 +13673,11 @@
             <a:noAutofit/>
           </a:bodyPr>
           <a:p>
+            <a:pPr>
+              <a:lnSpc>
+                <a:spcPct val="100000"/>
+              </a:lnSpc>
+            </a:pPr>
             <a:endParaRPr b="0" lang="en-US" sz="1800" spc="-1" strike="noStrike">
               <a:solidFill>
                 <a:schemeClr val="lt1"/>
@@ -13606,7 +13697,7 @@
         <p:spPr>
           <a:xfrm>
             <a:off x="4434840" y="2971800"/>
-            <a:ext cx="3289680" cy="3427920"/>
+            <a:ext cx="3289320" cy="3427560"/>
           </a:xfrm>
           <a:prstGeom prst="roundRect">
             <a:avLst>
@@ -13825,7 +13916,7 @@
         <p:spPr>
           <a:xfrm>
             <a:off x="8028360" y="3182040"/>
-            <a:ext cx="3289680" cy="2741040"/>
+            <a:ext cx="3289320" cy="2740680"/>
           </a:xfrm>
           <a:prstGeom prst="roundRect">
             <a:avLst>
@@ -13863,6 +13954,11 @@
             <a:noAutofit/>
           </a:bodyPr>
           <a:p>
+            <a:pPr>
+              <a:lnSpc>
+                <a:spcPct val="100000"/>
+              </a:lnSpc>
+            </a:pPr>
             <a:endParaRPr b="0" lang="en-US" sz="1800" spc="-1" strike="noStrike">
               <a:solidFill>
                 <a:schemeClr val="lt1"/>
@@ -13882,7 +13978,7 @@
         <p:spPr>
           <a:xfrm>
             <a:off x="8001000" y="3200400"/>
-            <a:ext cx="3474720" cy="2743200"/>
+            <a:ext cx="3474360" cy="2742840"/>
           </a:xfrm>
           <a:prstGeom prst="roundRect">
             <a:avLst>
@@ -14204,6 +14300,2417 @@
       <p:sp>
         <p:nvSpPr>
           <p:cNvPr id="170" name="TextBox 15"/>
+          <p:cNvSpPr/>
+          <p:nvPr/>
+        </p:nvSpPr>
+        <p:spPr>
+          <a:xfrm>
+            <a:off x="4600080" y="6446520"/>
+            <a:ext cx="3051000" cy="363960"/>
+          </a:xfrm>
+          <a:prstGeom prst="rect">
+            <a:avLst/>
+          </a:prstGeom>
+          <a:noFill/>
+          <a:ln w="0">
+            <a:noFill/>
+          </a:ln>
+        </p:spPr>
+        <p:style>
+          <a:lnRef idx="0"/>
+          <a:fillRef idx="0"/>
+          <a:effectRef idx="0"/>
+          <a:fontRef idx="minor"/>
+        </p:style>
+        <p:txBody>
+          <a:bodyPr wrap="none" lIns="90000" rIns="90000" tIns="45000" bIns="45000" anchor="t">
+            <a:spAutoFit/>
+          </a:bodyPr>
+          <a:p>
+            <a:pPr>
+              <a:lnSpc>
+                <a:spcPct val="100000"/>
+              </a:lnSpc>
+            </a:pPr>
+            <a:r>
+              <a:rPr b="0" lang="en-US" sz="1800" spc="-1" strike="noStrike">
+                <a:solidFill>
+                  <a:srgbClr val="000000"/>
+                </a:solidFill>
+                <a:latin typeface="Calibri"/>
+                <a:ea typeface="DejaVu Sans"/>
+              </a:rPr>
+              <a:t>Java • Ultra Premium Template</a:t>
+            </a:r>
+            <a:endParaRPr b="0" lang="en-US" sz="1800" spc="-1" strike="noStrike">
+              <a:solidFill>
+                <a:srgbClr val="000000"/>
+              </a:solidFill>
+              <a:latin typeface="Arial"/>
+            </a:endParaRPr>
+          </a:p>
+        </p:txBody>
+      </p:sp>
+    </p:spTree>
+  </p:cSld>
+  <mc:AlternateContent>
+    <mc:Choice Requires="p14">
+      <p:transition spd="slow" p14:dur="2000"/>
+    </mc:Choice>
+    <mc:Fallback>
+      <p:transition spd="slow"/>
+    </mc:Fallback>
+  </mc:AlternateContent>
+</p:sld>
+</file>
+
+<file path=ppt/slides/slide6.xml><?xml version="1.0" encoding="utf-8"?>
+<p:sld xmlns:a="http://schemas.openxmlformats.org/drawingml/2006/main" xmlns:p="http://schemas.openxmlformats.org/presentationml/2006/main" xmlns:r="http://schemas.openxmlformats.org/officeDocument/2006/relationships" xmlns:p14="http://schemas.microsoft.com/office/powerpoint/2010/main" xmlns:p15="http://schemas.microsoft.com/office/powerpoint/2012/main" xmlns:mc="http://schemas.openxmlformats.org/markup-compatibility/2006">
+  <p:cSld>
+    <p:spTree>
+      <p:nvGrpSpPr>
+        <p:cNvPr id="1" name=""/>
+        <p:cNvGrpSpPr/>
+        <p:nvPr/>
+      </p:nvGrpSpPr>
+      <p:grpSpPr>
+        <a:xfrm>
+          <a:off x="0" y="0"/>
+          <a:ext cx="0" cy="0"/>
+          <a:chOff x="0" y="0"/>
+          <a:chExt cx="0" cy="0"/>
+        </a:xfrm>
+      </p:grpSpPr>
+      <p:sp>
+        <p:nvSpPr>
+          <p:cNvPr id="171" name="Rectangle 81"/>
+          <p:cNvSpPr/>
+          <p:nvPr/>
+        </p:nvSpPr>
+        <p:spPr>
+          <a:xfrm>
+            <a:off x="0" y="0"/>
+            <a:ext cx="12186000" cy="6855120"/>
+          </a:xfrm>
+          <a:prstGeom prst="rect">
+            <a:avLst/>
+          </a:prstGeom>
+          <a:solidFill>
+            <a:srgbClr val="0b0b0d"/>
+          </a:solidFill>
+          <a:ln>
+            <a:noFill/>
+          </a:ln>
+          <a:effectLst>
+            <a:outerShdw blurRad="39960" dir="5400000" dist="23040" rotWithShape="0">
+              <a:srgbClr val="000000">
+                <a:alpha val="35000"/>
+              </a:srgbClr>
+            </a:outerShdw>
+          </a:effectLst>
+        </p:spPr>
+        <p:style>
+          <a:lnRef idx="1">
+            <a:schemeClr val="accent1"/>
+          </a:lnRef>
+          <a:fillRef idx="3">
+            <a:schemeClr val="accent1"/>
+          </a:fillRef>
+          <a:effectRef idx="2">
+            <a:schemeClr val="accent1"/>
+          </a:effectRef>
+          <a:fontRef idx="minor"/>
+        </p:style>
+        <p:txBody>
+          <a:bodyPr lIns="90000" rIns="90000" tIns="45000" bIns="45000" anchor="ctr">
+            <a:noAutofit/>
+          </a:bodyPr>
+          <a:p>
+            <a:endParaRPr b="0" lang="en-US" sz="1800" spc="-1" strike="noStrike">
+              <a:solidFill>
+                <a:schemeClr val="lt1"/>
+              </a:solidFill>
+              <a:latin typeface="Calibri"/>
+              <a:ea typeface="DejaVu Sans"/>
+            </a:endParaRPr>
+          </a:p>
+        </p:txBody>
+      </p:sp>
+      <p:sp>
+        <p:nvSpPr>
+          <p:cNvPr id="172" name="Rectangle 82"/>
+          <p:cNvSpPr/>
+          <p:nvPr/>
+        </p:nvSpPr>
+        <p:spPr>
+          <a:xfrm>
+            <a:off x="0" y="0"/>
+            <a:ext cx="15480" cy="6855120"/>
+          </a:xfrm>
+          <a:prstGeom prst="rect">
+            <a:avLst/>
+          </a:prstGeom>
+          <a:solidFill>
+            <a:srgbClr val="121216"/>
+          </a:solidFill>
+          <a:ln>
+            <a:noFill/>
+          </a:ln>
+          <a:effectLst>
+            <a:outerShdw blurRad="39960" dir="5400000" dist="23040" rotWithShape="0">
+              <a:srgbClr val="000000">
+                <a:alpha val="35000"/>
+              </a:srgbClr>
+            </a:outerShdw>
+          </a:effectLst>
+        </p:spPr>
+        <p:style>
+          <a:lnRef idx="1">
+            <a:schemeClr val="accent1"/>
+          </a:lnRef>
+          <a:fillRef idx="3">
+            <a:schemeClr val="accent1"/>
+          </a:fillRef>
+          <a:effectRef idx="2">
+            <a:schemeClr val="accent1"/>
+          </a:effectRef>
+          <a:fontRef idx="minor"/>
+        </p:style>
+        <p:txBody>
+          <a:bodyPr lIns="90000" rIns="90000" tIns="45000" bIns="45000" anchor="ctr">
+            <a:noAutofit/>
+          </a:bodyPr>
+          <a:p>
+            <a:endParaRPr b="0" lang="en-US" sz="1800" spc="-1" strike="noStrike">
+              <a:solidFill>
+                <a:schemeClr val="lt1"/>
+              </a:solidFill>
+              <a:latin typeface="Calibri"/>
+              <a:ea typeface="DejaVu Sans"/>
+            </a:endParaRPr>
+          </a:p>
+        </p:txBody>
+      </p:sp>
+      <p:sp>
+        <p:nvSpPr>
+          <p:cNvPr id="173" name="Rectangle 83"/>
+          <p:cNvSpPr/>
+          <p:nvPr/>
+        </p:nvSpPr>
+        <p:spPr>
+          <a:xfrm>
+            <a:off x="914400" y="0"/>
+            <a:ext cx="15480" cy="6855120"/>
+          </a:xfrm>
+          <a:prstGeom prst="rect">
+            <a:avLst/>
+          </a:prstGeom>
+          <a:solidFill>
+            <a:srgbClr val="121216"/>
+          </a:solidFill>
+          <a:ln>
+            <a:noFill/>
+          </a:ln>
+          <a:effectLst>
+            <a:outerShdw blurRad="39960" dir="5400000" dist="23040" rotWithShape="0">
+              <a:srgbClr val="000000">
+                <a:alpha val="35000"/>
+              </a:srgbClr>
+            </a:outerShdw>
+          </a:effectLst>
+        </p:spPr>
+        <p:style>
+          <a:lnRef idx="1">
+            <a:schemeClr val="accent1"/>
+          </a:lnRef>
+          <a:fillRef idx="3">
+            <a:schemeClr val="accent1"/>
+          </a:fillRef>
+          <a:effectRef idx="2">
+            <a:schemeClr val="accent1"/>
+          </a:effectRef>
+          <a:fontRef idx="minor"/>
+        </p:style>
+        <p:txBody>
+          <a:bodyPr lIns="90000" rIns="90000" tIns="45000" bIns="45000" anchor="ctr">
+            <a:noAutofit/>
+          </a:bodyPr>
+          <a:p>
+            <a:endParaRPr b="0" lang="en-US" sz="1800" spc="-1" strike="noStrike">
+              <a:solidFill>
+                <a:schemeClr val="lt1"/>
+              </a:solidFill>
+              <a:latin typeface="Calibri"/>
+              <a:ea typeface="DejaVu Sans"/>
+            </a:endParaRPr>
+          </a:p>
+        </p:txBody>
+      </p:sp>
+      <p:sp>
+        <p:nvSpPr>
+          <p:cNvPr id="174" name="Rectangle 84"/>
+          <p:cNvSpPr/>
+          <p:nvPr/>
+        </p:nvSpPr>
+        <p:spPr>
+          <a:xfrm>
+            <a:off x="1828800" y="0"/>
+            <a:ext cx="15480" cy="6855120"/>
+          </a:xfrm>
+          <a:prstGeom prst="rect">
+            <a:avLst/>
+          </a:prstGeom>
+          <a:solidFill>
+            <a:srgbClr val="121216"/>
+          </a:solidFill>
+          <a:ln>
+            <a:noFill/>
+          </a:ln>
+          <a:effectLst>
+            <a:outerShdw blurRad="39960" dir="5400000" dist="23040" rotWithShape="0">
+              <a:srgbClr val="000000">
+                <a:alpha val="35000"/>
+              </a:srgbClr>
+            </a:outerShdw>
+          </a:effectLst>
+        </p:spPr>
+        <p:style>
+          <a:lnRef idx="1">
+            <a:schemeClr val="accent1"/>
+          </a:lnRef>
+          <a:fillRef idx="3">
+            <a:schemeClr val="accent1"/>
+          </a:fillRef>
+          <a:effectRef idx="2">
+            <a:schemeClr val="accent1"/>
+          </a:effectRef>
+          <a:fontRef idx="minor"/>
+        </p:style>
+        <p:txBody>
+          <a:bodyPr lIns="90000" rIns="90000" tIns="45000" bIns="45000" anchor="ctr">
+            <a:noAutofit/>
+          </a:bodyPr>
+          <a:p>
+            <a:endParaRPr b="0" lang="en-US" sz="1800" spc="-1" strike="noStrike">
+              <a:solidFill>
+                <a:schemeClr val="lt1"/>
+              </a:solidFill>
+              <a:latin typeface="Calibri"/>
+              <a:ea typeface="DejaVu Sans"/>
+            </a:endParaRPr>
+          </a:p>
+        </p:txBody>
+      </p:sp>
+      <p:sp>
+        <p:nvSpPr>
+          <p:cNvPr id="175" name="Rectangle 85"/>
+          <p:cNvSpPr/>
+          <p:nvPr/>
+        </p:nvSpPr>
+        <p:spPr>
+          <a:xfrm>
+            <a:off x="2743200" y="0"/>
+            <a:ext cx="15480" cy="6855120"/>
+          </a:xfrm>
+          <a:prstGeom prst="rect">
+            <a:avLst/>
+          </a:prstGeom>
+          <a:solidFill>
+            <a:srgbClr val="121216"/>
+          </a:solidFill>
+          <a:ln>
+            <a:noFill/>
+          </a:ln>
+          <a:effectLst>
+            <a:outerShdw blurRad="39960" dir="5400000" dist="23040" rotWithShape="0">
+              <a:srgbClr val="000000">
+                <a:alpha val="35000"/>
+              </a:srgbClr>
+            </a:outerShdw>
+          </a:effectLst>
+        </p:spPr>
+        <p:style>
+          <a:lnRef idx="1">
+            <a:schemeClr val="accent1"/>
+          </a:lnRef>
+          <a:fillRef idx="3">
+            <a:schemeClr val="accent1"/>
+          </a:fillRef>
+          <a:effectRef idx="2">
+            <a:schemeClr val="accent1"/>
+          </a:effectRef>
+          <a:fontRef idx="minor"/>
+        </p:style>
+        <p:txBody>
+          <a:bodyPr lIns="90000" rIns="90000" tIns="45000" bIns="45000" anchor="ctr">
+            <a:noAutofit/>
+          </a:bodyPr>
+          <a:p>
+            <a:endParaRPr b="0" lang="en-US" sz="1800" spc="-1" strike="noStrike">
+              <a:solidFill>
+                <a:schemeClr val="lt1"/>
+              </a:solidFill>
+              <a:latin typeface="Calibri"/>
+              <a:ea typeface="DejaVu Sans"/>
+            </a:endParaRPr>
+          </a:p>
+        </p:txBody>
+      </p:sp>
+      <p:sp>
+        <p:nvSpPr>
+          <p:cNvPr id="176" name="Rectangle 86"/>
+          <p:cNvSpPr/>
+          <p:nvPr/>
+        </p:nvSpPr>
+        <p:spPr>
+          <a:xfrm>
+            <a:off x="3657600" y="0"/>
+            <a:ext cx="15480" cy="6855120"/>
+          </a:xfrm>
+          <a:prstGeom prst="rect">
+            <a:avLst/>
+          </a:prstGeom>
+          <a:solidFill>
+            <a:srgbClr val="121216"/>
+          </a:solidFill>
+          <a:ln>
+            <a:noFill/>
+          </a:ln>
+          <a:effectLst>
+            <a:outerShdw blurRad="39960" dir="5400000" dist="23040" rotWithShape="0">
+              <a:srgbClr val="000000">
+                <a:alpha val="35000"/>
+              </a:srgbClr>
+            </a:outerShdw>
+          </a:effectLst>
+        </p:spPr>
+        <p:style>
+          <a:lnRef idx="1">
+            <a:schemeClr val="accent1"/>
+          </a:lnRef>
+          <a:fillRef idx="3">
+            <a:schemeClr val="accent1"/>
+          </a:fillRef>
+          <a:effectRef idx="2">
+            <a:schemeClr val="accent1"/>
+          </a:effectRef>
+          <a:fontRef idx="minor"/>
+        </p:style>
+        <p:txBody>
+          <a:bodyPr lIns="90000" rIns="90000" tIns="45000" bIns="45000" anchor="ctr">
+            <a:noAutofit/>
+          </a:bodyPr>
+          <a:p>
+            <a:endParaRPr b="0" lang="en-US" sz="1800" spc="-1" strike="noStrike">
+              <a:solidFill>
+                <a:schemeClr val="lt1"/>
+              </a:solidFill>
+              <a:latin typeface="Calibri"/>
+              <a:ea typeface="DejaVu Sans"/>
+            </a:endParaRPr>
+          </a:p>
+        </p:txBody>
+      </p:sp>
+      <p:sp>
+        <p:nvSpPr>
+          <p:cNvPr id="177" name="Rectangle 87"/>
+          <p:cNvSpPr/>
+          <p:nvPr/>
+        </p:nvSpPr>
+        <p:spPr>
+          <a:xfrm>
+            <a:off x="4572000" y="0"/>
+            <a:ext cx="15480" cy="6855120"/>
+          </a:xfrm>
+          <a:prstGeom prst="rect">
+            <a:avLst/>
+          </a:prstGeom>
+          <a:solidFill>
+            <a:srgbClr val="121216"/>
+          </a:solidFill>
+          <a:ln>
+            <a:noFill/>
+          </a:ln>
+          <a:effectLst>
+            <a:outerShdw blurRad="39960" dir="5400000" dist="23040" rotWithShape="0">
+              <a:srgbClr val="000000">
+                <a:alpha val="35000"/>
+              </a:srgbClr>
+            </a:outerShdw>
+          </a:effectLst>
+        </p:spPr>
+        <p:style>
+          <a:lnRef idx="1">
+            <a:schemeClr val="accent1"/>
+          </a:lnRef>
+          <a:fillRef idx="3">
+            <a:schemeClr val="accent1"/>
+          </a:fillRef>
+          <a:effectRef idx="2">
+            <a:schemeClr val="accent1"/>
+          </a:effectRef>
+          <a:fontRef idx="minor"/>
+        </p:style>
+        <p:txBody>
+          <a:bodyPr lIns="90000" rIns="90000" tIns="45000" bIns="45000" anchor="ctr">
+            <a:noAutofit/>
+          </a:bodyPr>
+          <a:p>
+            <a:endParaRPr b="0" lang="en-US" sz="1800" spc="-1" strike="noStrike">
+              <a:solidFill>
+                <a:schemeClr val="lt1"/>
+              </a:solidFill>
+              <a:latin typeface="Calibri"/>
+              <a:ea typeface="DejaVu Sans"/>
+            </a:endParaRPr>
+          </a:p>
+        </p:txBody>
+      </p:sp>
+      <p:sp>
+        <p:nvSpPr>
+          <p:cNvPr id="178" name="Rectangle 88"/>
+          <p:cNvSpPr/>
+          <p:nvPr/>
+        </p:nvSpPr>
+        <p:spPr>
+          <a:xfrm>
+            <a:off x="5486400" y="0"/>
+            <a:ext cx="15480" cy="6855120"/>
+          </a:xfrm>
+          <a:prstGeom prst="rect">
+            <a:avLst/>
+          </a:prstGeom>
+          <a:solidFill>
+            <a:srgbClr val="121216"/>
+          </a:solidFill>
+          <a:ln>
+            <a:noFill/>
+          </a:ln>
+          <a:effectLst>
+            <a:outerShdw blurRad="39960" dir="5400000" dist="23040" rotWithShape="0">
+              <a:srgbClr val="000000">
+                <a:alpha val="35000"/>
+              </a:srgbClr>
+            </a:outerShdw>
+          </a:effectLst>
+        </p:spPr>
+        <p:style>
+          <a:lnRef idx="1">
+            <a:schemeClr val="accent1"/>
+          </a:lnRef>
+          <a:fillRef idx="3">
+            <a:schemeClr val="accent1"/>
+          </a:fillRef>
+          <a:effectRef idx="2">
+            <a:schemeClr val="accent1"/>
+          </a:effectRef>
+          <a:fontRef idx="minor"/>
+        </p:style>
+        <p:txBody>
+          <a:bodyPr lIns="90000" rIns="90000" tIns="45000" bIns="45000" anchor="ctr">
+            <a:noAutofit/>
+          </a:bodyPr>
+          <a:p>
+            <a:endParaRPr b="0" lang="en-US" sz="1800" spc="-1" strike="noStrike">
+              <a:solidFill>
+                <a:schemeClr val="lt1"/>
+              </a:solidFill>
+              <a:latin typeface="Calibri"/>
+              <a:ea typeface="DejaVu Sans"/>
+            </a:endParaRPr>
+          </a:p>
+        </p:txBody>
+      </p:sp>
+      <p:sp>
+        <p:nvSpPr>
+          <p:cNvPr id="179" name="Rectangle 89"/>
+          <p:cNvSpPr/>
+          <p:nvPr/>
+        </p:nvSpPr>
+        <p:spPr>
+          <a:xfrm>
+            <a:off x="6400800" y="0"/>
+            <a:ext cx="15480" cy="6855120"/>
+          </a:xfrm>
+          <a:prstGeom prst="rect">
+            <a:avLst/>
+          </a:prstGeom>
+          <a:solidFill>
+            <a:srgbClr val="121216"/>
+          </a:solidFill>
+          <a:ln>
+            <a:noFill/>
+          </a:ln>
+          <a:effectLst>
+            <a:outerShdw blurRad="39960" dir="5400000" dist="23040" rotWithShape="0">
+              <a:srgbClr val="000000">
+                <a:alpha val="35000"/>
+              </a:srgbClr>
+            </a:outerShdw>
+          </a:effectLst>
+        </p:spPr>
+        <p:style>
+          <a:lnRef idx="1">
+            <a:schemeClr val="accent1"/>
+          </a:lnRef>
+          <a:fillRef idx="3">
+            <a:schemeClr val="accent1"/>
+          </a:fillRef>
+          <a:effectRef idx="2">
+            <a:schemeClr val="accent1"/>
+          </a:effectRef>
+          <a:fontRef idx="minor"/>
+        </p:style>
+        <p:txBody>
+          <a:bodyPr lIns="90000" rIns="90000" tIns="45000" bIns="45000" anchor="ctr">
+            <a:noAutofit/>
+          </a:bodyPr>
+          <a:p>
+            <a:endParaRPr b="0" lang="en-US" sz="1800" spc="-1" strike="noStrike">
+              <a:solidFill>
+                <a:schemeClr val="lt1"/>
+              </a:solidFill>
+              <a:latin typeface="Calibri"/>
+              <a:ea typeface="DejaVu Sans"/>
+            </a:endParaRPr>
+          </a:p>
+        </p:txBody>
+      </p:sp>
+      <p:sp>
+        <p:nvSpPr>
+          <p:cNvPr id="180" name="Rectangle 90"/>
+          <p:cNvSpPr/>
+          <p:nvPr/>
+        </p:nvSpPr>
+        <p:spPr>
+          <a:xfrm>
+            <a:off x="7315200" y="0"/>
+            <a:ext cx="15480" cy="6855120"/>
+          </a:xfrm>
+          <a:prstGeom prst="rect">
+            <a:avLst/>
+          </a:prstGeom>
+          <a:solidFill>
+            <a:srgbClr val="121216"/>
+          </a:solidFill>
+          <a:ln>
+            <a:noFill/>
+          </a:ln>
+          <a:effectLst>
+            <a:outerShdw blurRad="39960" dir="5400000" dist="23040" rotWithShape="0">
+              <a:srgbClr val="000000">
+                <a:alpha val="35000"/>
+              </a:srgbClr>
+            </a:outerShdw>
+          </a:effectLst>
+        </p:spPr>
+        <p:style>
+          <a:lnRef idx="1">
+            <a:schemeClr val="accent1"/>
+          </a:lnRef>
+          <a:fillRef idx="3">
+            <a:schemeClr val="accent1"/>
+          </a:fillRef>
+          <a:effectRef idx="2">
+            <a:schemeClr val="accent1"/>
+          </a:effectRef>
+          <a:fontRef idx="minor"/>
+        </p:style>
+        <p:txBody>
+          <a:bodyPr lIns="90000" rIns="90000" tIns="45000" bIns="45000" anchor="ctr">
+            <a:noAutofit/>
+          </a:bodyPr>
+          <a:p>
+            <a:endParaRPr b="0" lang="en-US" sz="1800" spc="-1" strike="noStrike">
+              <a:solidFill>
+                <a:schemeClr val="lt1"/>
+              </a:solidFill>
+              <a:latin typeface="Calibri"/>
+              <a:ea typeface="DejaVu Sans"/>
+            </a:endParaRPr>
+          </a:p>
+        </p:txBody>
+      </p:sp>
+      <p:sp>
+        <p:nvSpPr>
+          <p:cNvPr id="181" name="Rectangle 91"/>
+          <p:cNvSpPr/>
+          <p:nvPr/>
+        </p:nvSpPr>
+        <p:spPr>
+          <a:xfrm>
+            <a:off x="8229600" y="0"/>
+            <a:ext cx="15480" cy="6855120"/>
+          </a:xfrm>
+          <a:prstGeom prst="rect">
+            <a:avLst/>
+          </a:prstGeom>
+          <a:solidFill>
+            <a:srgbClr val="121216"/>
+          </a:solidFill>
+          <a:ln>
+            <a:noFill/>
+          </a:ln>
+          <a:effectLst>
+            <a:outerShdw blurRad="39960" dir="5400000" dist="23040" rotWithShape="0">
+              <a:srgbClr val="000000">
+                <a:alpha val="35000"/>
+              </a:srgbClr>
+            </a:outerShdw>
+          </a:effectLst>
+        </p:spPr>
+        <p:style>
+          <a:lnRef idx="1">
+            <a:schemeClr val="accent1"/>
+          </a:lnRef>
+          <a:fillRef idx="3">
+            <a:schemeClr val="accent1"/>
+          </a:fillRef>
+          <a:effectRef idx="2">
+            <a:schemeClr val="accent1"/>
+          </a:effectRef>
+          <a:fontRef idx="minor"/>
+        </p:style>
+        <p:txBody>
+          <a:bodyPr lIns="90000" rIns="90000" tIns="45000" bIns="45000" anchor="ctr">
+            <a:noAutofit/>
+          </a:bodyPr>
+          <a:p>
+            <a:endParaRPr b="0" lang="en-US" sz="1800" spc="-1" strike="noStrike">
+              <a:solidFill>
+                <a:schemeClr val="lt1"/>
+              </a:solidFill>
+              <a:latin typeface="Calibri"/>
+              <a:ea typeface="DejaVu Sans"/>
+            </a:endParaRPr>
+          </a:p>
+        </p:txBody>
+      </p:sp>
+      <p:sp>
+        <p:nvSpPr>
+          <p:cNvPr id="182" name="Rectangle 92"/>
+          <p:cNvSpPr/>
+          <p:nvPr/>
+        </p:nvSpPr>
+        <p:spPr>
+          <a:xfrm>
+            <a:off x="9144000" y="0"/>
+            <a:ext cx="15480" cy="6855120"/>
+          </a:xfrm>
+          <a:prstGeom prst="rect">
+            <a:avLst/>
+          </a:prstGeom>
+          <a:solidFill>
+            <a:srgbClr val="121216"/>
+          </a:solidFill>
+          <a:ln>
+            <a:noFill/>
+          </a:ln>
+          <a:effectLst>
+            <a:outerShdw blurRad="39960" dir="5400000" dist="23040" rotWithShape="0">
+              <a:srgbClr val="000000">
+                <a:alpha val="35000"/>
+              </a:srgbClr>
+            </a:outerShdw>
+          </a:effectLst>
+        </p:spPr>
+        <p:style>
+          <a:lnRef idx="1">
+            <a:schemeClr val="accent1"/>
+          </a:lnRef>
+          <a:fillRef idx="3">
+            <a:schemeClr val="accent1"/>
+          </a:fillRef>
+          <a:effectRef idx="2">
+            <a:schemeClr val="accent1"/>
+          </a:effectRef>
+          <a:fontRef idx="minor"/>
+        </p:style>
+        <p:txBody>
+          <a:bodyPr lIns="90000" rIns="90000" tIns="45000" bIns="45000" anchor="ctr">
+            <a:noAutofit/>
+          </a:bodyPr>
+          <a:p>
+            <a:endParaRPr b="0" lang="en-US" sz="1800" spc="-1" strike="noStrike">
+              <a:solidFill>
+                <a:schemeClr val="lt1"/>
+              </a:solidFill>
+              <a:latin typeface="Calibri"/>
+              <a:ea typeface="DejaVu Sans"/>
+            </a:endParaRPr>
+          </a:p>
+        </p:txBody>
+      </p:sp>
+      <p:sp>
+        <p:nvSpPr>
+          <p:cNvPr id="183" name="Rectangle 93"/>
+          <p:cNvSpPr/>
+          <p:nvPr/>
+        </p:nvSpPr>
+        <p:spPr>
+          <a:xfrm>
+            <a:off x="10058400" y="0"/>
+            <a:ext cx="15480" cy="6855120"/>
+          </a:xfrm>
+          <a:prstGeom prst="rect">
+            <a:avLst/>
+          </a:prstGeom>
+          <a:solidFill>
+            <a:srgbClr val="121216"/>
+          </a:solidFill>
+          <a:ln>
+            <a:noFill/>
+          </a:ln>
+          <a:effectLst>
+            <a:outerShdw blurRad="39960" dir="5400000" dist="23040" rotWithShape="0">
+              <a:srgbClr val="000000">
+                <a:alpha val="35000"/>
+              </a:srgbClr>
+            </a:outerShdw>
+          </a:effectLst>
+        </p:spPr>
+        <p:style>
+          <a:lnRef idx="1">
+            <a:schemeClr val="accent1"/>
+          </a:lnRef>
+          <a:fillRef idx="3">
+            <a:schemeClr val="accent1"/>
+          </a:fillRef>
+          <a:effectRef idx="2">
+            <a:schemeClr val="accent1"/>
+          </a:effectRef>
+          <a:fontRef idx="minor"/>
+        </p:style>
+        <p:txBody>
+          <a:bodyPr lIns="90000" rIns="90000" tIns="45000" bIns="45000" anchor="ctr">
+            <a:noAutofit/>
+          </a:bodyPr>
+          <a:p>
+            <a:endParaRPr b="0" lang="en-US" sz="1800" spc="-1" strike="noStrike">
+              <a:solidFill>
+                <a:schemeClr val="lt1"/>
+              </a:solidFill>
+              <a:latin typeface="Calibri"/>
+              <a:ea typeface="DejaVu Sans"/>
+            </a:endParaRPr>
+          </a:p>
+        </p:txBody>
+      </p:sp>
+      <p:sp>
+        <p:nvSpPr>
+          <p:cNvPr id="184" name="Rectangle 94"/>
+          <p:cNvSpPr/>
+          <p:nvPr/>
+        </p:nvSpPr>
+        <p:spPr>
+          <a:xfrm>
+            <a:off x="10972800" y="0"/>
+            <a:ext cx="15480" cy="6855120"/>
+          </a:xfrm>
+          <a:prstGeom prst="rect">
+            <a:avLst/>
+          </a:prstGeom>
+          <a:solidFill>
+            <a:srgbClr val="121216"/>
+          </a:solidFill>
+          <a:ln>
+            <a:noFill/>
+          </a:ln>
+          <a:effectLst>
+            <a:outerShdw blurRad="39960" dir="5400000" dist="23040" rotWithShape="0">
+              <a:srgbClr val="000000">
+                <a:alpha val="35000"/>
+              </a:srgbClr>
+            </a:outerShdw>
+          </a:effectLst>
+        </p:spPr>
+        <p:style>
+          <a:lnRef idx="1">
+            <a:schemeClr val="accent1"/>
+          </a:lnRef>
+          <a:fillRef idx="3">
+            <a:schemeClr val="accent1"/>
+          </a:fillRef>
+          <a:effectRef idx="2">
+            <a:schemeClr val="accent1"/>
+          </a:effectRef>
+          <a:fontRef idx="minor"/>
+        </p:style>
+        <p:txBody>
+          <a:bodyPr lIns="90000" rIns="90000" tIns="45000" bIns="45000" anchor="ctr">
+            <a:noAutofit/>
+          </a:bodyPr>
+          <a:p>
+            <a:endParaRPr b="0" lang="en-US" sz="1800" spc="-1" strike="noStrike">
+              <a:solidFill>
+                <a:schemeClr val="lt1"/>
+              </a:solidFill>
+              <a:latin typeface="Calibri"/>
+              <a:ea typeface="DejaVu Sans"/>
+            </a:endParaRPr>
+          </a:p>
+        </p:txBody>
+      </p:sp>
+      <p:sp>
+        <p:nvSpPr>
+          <p:cNvPr id="185" name="Rectangle 95"/>
+          <p:cNvSpPr/>
+          <p:nvPr/>
+        </p:nvSpPr>
+        <p:spPr>
+          <a:xfrm>
+            <a:off x="11887200" y="0"/>
+            <a:ext cx="15480" cy="6855120"/>
+          </a:xfrm>
+          <a:prstGeom prst="rect">
+            <a:avLst/>
+          </a:prstGeom>
+          <a:solidFill>
+            <a:srgbClr val="121216"/>
+          </a:solidFill>
+          <a:ln>
+            <a:noFill/>
+          </a:ln>
+          <a:effectLst>
+            <a:outerShdw blurRad="39960" dir="5400000" dist="23040" rotWithShape="0">
+              <a:srgbClr val="000000">
+                <a:alpha val="35000"/>
+              </a:srgbClr>
+            </a:outerShdw>
+          </a:effectLst>
+        </p:spPr>
+        <p:style>
+          <a:lnRef idx="1">
+            <a:schemeClr val="accent1"/>
+          </a:lnRef>
+          <a:fillRef idx="3">
+            <a:schemeClr val="accent1"/>
+          </a:fillRef>
+          <a:effectRef idx="2">
+            <a:schemeClr val="accent1"/>
+          </a:effectRef>
+          <a:fontRef idx="minor"/>
+        </p:style>
+        <p:txBody>
+          <a:bodyPr lIns="90000" rIns="90000" tIns="45000" bIns="45000" anchor="ctr">
+            <a:noAutofit/>
+          </a:bodyPr>
+          <a:p>
+            <a:endParaRPr b="0" lang="en-US" sz="1800" spc="-1" strike="noStrike">
+              <a:solidFill>
+                <a:schemeClr val="lt1"/>
+              </a:solidFill>
+              <a:latin typeface="Calibri"/>
+              <a:ea typeface="DejaVu Sans"/>
+            </a:endParaRPr>
+          </a:p>
+        </p:txBody>
+      </p:sp>
+      <p:sp>
+        <p:nvSpPr>
+          <p:cNvPr id="186" name="Rectangle 96"/>
+          <p:cNvSpPr/>
+          <p:nvPr/>
+        </p:nvSpPr>
+        <p:spPr>
+          <a:xfrm>
+            <a:off x="0" y="0"/>
+            <a:ext cx="317160" cy="6855120"/>
+          </a:xfrm>
+          <a:prstGeom prst="rect">
+            <a:avLst/>
+          </a:prstGeom>
+          <a:solidFill>
+            <a:srgbClr val="ff8c00"/>
+          </a:solidFill>
+          <a:ln>
+            <a:noFill/>
+          </a:ln>
+          <a:effectLst>
+            <a:outerShdw blurRad="39960" dir="5400000" dist="23040" rotWithShape="0">
+              <a:srgbClr val="000000">
+                <a:alpha val="35000"/>
+              </a:srgbClr>
+            </a:outerShdw>
+          </a:effectLst>
+        </p:spPr>
+        <p:style>
+          <a:lnRef idx="1">
+            <a:schemeClr val="accent1"/>
+          </a:lnRef>
+          <a:fillRef idx="3">
+            <a:schemeClr val="accent1"/>
+          </a:fillRef>
+          <a:effectRef idx="2">
+            <a:schemeClr val="accent1"/>
+          </a:effectRef>
+          <a:fontRef idx="minor"/>
+        </p:style>
+        <p:txBody>
+          <a:bodyPr lIns="90000" rIns="90000" tIns="45000" bIns="45000" anchor="ctr">
+            <a:noAutofit/>
+          </a:bodyPr>
+          <a:p>
+            <a:endParaRPr b="0" lang="en-US" sz="1800" spc="-1" strike="noStrike">
+              <a:solidFill>
+                <a:schemeClr val="lt1"/>
+              </a:solidFill>
+              <a:latin typeface="Calibri"/>
+              <a:ea typeface="DejaVu Sans"/>
+            </a:endParaRPr>
+          </a:p>
+        </p:txBody>
+      </p:sp>
+      <p:sp>
+        <p:nvSpPr>
+          <p:cNvPr id="187" name="Rounded Rectangle 43"/>
+          <p:cNvSpPr/>
+          <p:nvPr/>
+        </p:nvSpPr>
+        <p:spPr>
+          <a:xfrm>
+            <a:off x="9875520" y="365760"/>
+            <a:ext cx="2008800" cy="500040"/>
+          </a:xfrm>
+          <a:prstGeom prst="roundRect">
+            <a:avLst>
+              <a:gd name="adj" fmla="val 16667"/>
+            </a:avLst>
+          </a:prstGeom>
+          <a:solidFill>
+            <a:srgbClr val="1e1e24"/>
+          </a:solidFill>
+          <a:ln>
+            <a:solidFill>
+              <a:srgbClr val="ff8c00"/>
+            </a:solidFill>
+            <a:round/>
+          </a:ln>
+          <a:effectLst>
+            <a:outerShdw blurRad="39960" dir="5400000" dist="23040" rotWithShape="0">
+              <a:srgbClr val="000000">
+                <a:alpha val="35000"/>
+              </a:srgbClr>
+            </a:outerShdw>
+          </a:effectLst>
+        </p:spPr>
+        <p:style>
+          <a:lnRef idx="1">
+            <a:schemeClr val="accent1"/>
+          </a:lnRef>
+          <a:fillRef idx="3">
+            <a:schemeClr val="accent1"/>
+          </a:fillRef>
+          <a:effectRef idx="2">
+            <a:schemeClr val="accent1"/>
+          </a:effectRef>
+          <a:fontRef idx="minor"/>
+        </p:style>
+        <p:txBody>
+          <a:bodyPr lIns="90000" rIns="90000" tIns="45000" bIns="45000" anchor="ctr">
+            <a:noAutofit/>
+          </a:bodyPr>
+          <a:p>
+            <a:pPr algn="ctr">
+              <a:lnSpc>
+                <a:spcPct val="100000"/>
+              </a:lnSpc>
+            </a:pPr>
+            <a:r>
+              <a:rPr b="1" lang="en-US" sz="1400" spc="-1" strike="noStrike">
+                <a:solidFill>
+                  <a:srgbClr val="ffb45a"/>
+                </a:solidFill>
+                <a:latin typeface="Calibri"/>
+                <a:ea typeface="DejaVu Sans"/>
+              </a:rPr>
+              <a:t>JAVA CORE</a:t>
+            </a:r>
+            <a:endParaRPr b="0" lang="en-US" sz="1400" spc="-1" strike="noStrike">
+              <a:solidFill>
+                <a:srgbClr val="ffffff"/>
+              </a:solidFill>
+              <a:latin typeface="Arial"/>
+            </a:endParaRPr>
+          </a:p>
+        </p:txBody>
+      </p:sp>
+      <p:sp>
+        <p:nvSpPr>
+          <p:cNvPr id="188" name="TextBox 16"/>
+          <p:cNvSpPr/>
+          <p:nvPr/>
+        </p:nvSpPr>
+        <p:spPr>
+          <a:xfrm>
+            <a:off x="1146240" y="914400"/>
+            <a:ext cx="8677440" cy="516960"/>
+          </a:xfrm>
+          <a:prstGeom prst="rect">
+            <a:avLst/>
+          </a:prstGeom>
+          <a:noFill/>
+          <a:ln w="0">
+            <a:noFill/>
+          </a:ln>
+        </p:spPr>
+        <p:style>
+          <a:lnRef idx="0"/>
+          <a:fillRef idx="0"/>
+          <a:effectRef idx="0"/>
+          <a:fontRef idx="minor"/>
+        </p:style>
+        <p:txBody>
+          <a:bodyPr wrap="none" lIns="90000" rIns="90000" tIns="45000" bIns="45000" anchor="t">
+            <a:spAutoFit/>
+          </a:bodyPr>
+          <a:p>
+            <a:pPr>
+              <a:lnSpc>
+                <a:spcPct val="100000"/>
+              </a:lnSpc>
+            </a:pPr>
+            <a:r>
+              <a:rPr b="1" lang="en-US" sz="2800" spc="-1" strike="noStrike">
+                <a:solidFill>
+                  <a:srgbClr val="f5f5f5"/>
+                </a:solidFill>
+                <a:latin typeface="Calibri"/>
+                <a:ea typeface="DejaVu Sans"/>
+              </a:rPr>
+              <a:t>Period and Duration in Java (Calculating Time Differences)</a:t>
+            </a:r>
+            <a:endParaRPr b="0" lang="en-US" sz="2800" spc="-1" strike="noStrike">
+              <a:solidFill>
+                <a:srgbClr val="000000"/>
+              </a:solidFill>
+              <a:latin typeface="Arial"/>
+            </a:endParaRPr>
+          </a:p>
+        </p:txBody>
+      </p:sp>
+      <p:sp>
+        <p:nvSpPr>
+          <p:cNvPr id="189" name="TextBox 17"/>
+          <p:cNvSpPr/>
+          <p:nvPr/>
+        </p:nvSpPr>
+        <p:spPr>
+          <a:xfrm>
+            <a:off x="668520" y="1600200"/>
+            <a:ext cx="10353960" cy="516600"/>
+          </a:xfrm>
+          <a:prstGeom prst="rect">
+            <a:avLst/>
+          </a:prstGeom>
+          <a:noFill/>
+          <a:ln w="0">
+            <a:noFill/>
+          </a:ln>
+        </p:spPr>
+        <p:style>
+          <a:lnRef idx="0"/>
+          <a:fillRef idx="0"/>
+          <a:effectRef idx="0"/>
+          <a:fontRef idx="minor"/>
+        </p:style>
+        <p:txBody>
+          <a:bodyPr wrap="none" lIns="90000" rIns="90000" tIns="45000" bIns="45000" anchor="t">
+            <a:spAutoFit/>
+          </a:bodyPr>
+          <a:p>
+            <a:pPr>
+              <a:lnSpc>
+                <a:spcPct val="100000"/>
+              </a:lnSpc>
+            </a:pPr>
+            <a:r>
+              <a:rPr b="0" lang="en-US" sz="1400" spc="-1" strike="noStrike">
+                <a:solidFill>
+                  <a:srgbClr val="aaaaaa"/>
+                </a:solidFill>
+                <a:latin typeface="Calibri"/>
+                <a:ea typeface="DejaVu Sans"/>
+              </a:rPr>
+              <a:t>In Java, to measure the time difference between two dates or two times, and to add or subtract specific </a:t>
+            </a:r>
+            <a:endParaRPr b="0" lang="en-US" sz="1400" spc="-1" strike="noStrike">
+              <a:solidFill>
+                <a:srgbClr val="000000"/>
+              </a:solidFill>
+              <a:latin typeface="Arial"/>
+            </a:endParaRPr>
+          </a:p>
+          <a:p>
+            <a:pPr>
+              <a:lnSpc>
+                <a:spcPct val="100000"/>
+              </a:lnSpc>
+            </a:pPr>
+            <a:r>
+              <a:rPr b="0" lang="en-US" sz="1400" spc="-1" strike="noStrike">
+                <a:solidFill>
+                  <a:srgbClr val="aaaaaa"/>
+                </a:solidFill>
+                <a:latin typeface="Calibri"/>
+                <a:ea typeface="DejaVu Sans"/>
+              </a:rPr>
+              <a:t>durations to/from dates, the Period class is used for date-based measurements, and the Duration class is used for time-based measurements.</a:t>
+            </a:r>
+            <a:endParaRPr b="0" lang="en-US" sz="1400" spc="-1" strike="noStrike">
+              <a:solidFill>
+                <a:srgbClr val="000000"/>
+              </a:solidFill>
+              <a:latin typeface="Arial"/>
+            </a:endParaRPr>
+          </a:p>
+        </p:txBody>
+      </p:sp>
+      <p:sp>
+        <p:nvSpPr>
+          <p:cNvPr id="190" name="Rounded Rectangle 44"/>
+          <p:cNvSpPr/>
+          <p:nvPr/>
+        </p:nvSpPr>
+        <p:spPr>
+          <a:xfrm>
+            <a:off x="987480" y="3182040"/>
+            <a:ext cx="3288960" cy="2740320"/>
+          </a:xfrm>
+          <a:prstGeom prst="roundRect">
+            <a:avLst>
+              <a:gd name="adj" fmla="val 16667"/>
+            </a:avLst>
+          </a:prstGeom>
+          <a:solidFill>
+            <a:srgbClr val="08080a"/>
+          </a:solidFill>
+          <a:ln>
+            <a:noFill/>
+          </a:ln>
+          <a:effectLst>
+            <a:outerShdw blurRad="39960" dir="5400000" dist="23040" rotWithShape="0">
+              <a:srgbClr val="000000">
+                <a:alpha val="35000"/>
+              </a:srgbClr>
+            </a:outerShdw>
+          </a:effectLst>
+        </p:spPr>
+        <p:style>
+          <a:lnRef idx="1">
+            <a:schemeClr val="accent1"/>
+          </a:lnRef>
+          <a:fillRef idx="3">
+            <a:schemeClr val="accent1"/>
+          </a:fillRef>
+          <a:effectRef idx="2">
+            <a:schemeClr val="accent1"/>
+          </a:effectRef>
+          <a:fontRef idx="minor"/>
+        </p:style>
+        <p:txBody>
+          <a:bodyPr lIns="90000" rIns="90000" tIns="45000" bIns="45000" anchor="ctr">
+            <a:noAutofit/>
+          </a:bodyPr>
+          <a:p>
+            <a:endParaRPr b="0" lang="en-US" sz="1800" spc="-1" strike="noStrike">
+              <a:solidFill>
+                <a:schemeClr val="lt1"/>
+              </a:solidFill>
+              <a:latin typeface="Calibri"/>
+              <a:ea typeface="DejaVu Sans"/>
+            </a:endParaRPr>
+          </a:p>
+        </p:txBody>
+      </p:sp>
+      <p:sp>
+        <p:nvSpPr>
+          <p:cNvPr id="191" name="Rounded Rectangle 45"/>
+          <p:cNvSpPr/>
+          <p:nvPr/>
+        </p:nvSpPr>
+        <p:spPr>
+          <a:xfrm>
+            <a:off x="457200" y="2514600"/>
+            <a:ext cx="3746160" cy="4114080"/>
+          </a:xfrm>
+          <a:prstGeom prst="roundRect">
+            <a:avLst>
+              <a:gd name="adj" fmla="val 16667"/>
+            </a:avLst>
+          </a:prstGeom>
+          <a:solidFill>
+            <a:srgbClr val="16161c"/>
+          </a:solidFill>
+          <a:ln>
+            <a:solidFill>
+              <a:srgbClr val="464655"/>
+            </a:solidFill>
+            <a:round/>
+          </a:ln>
+          <a:effectLst>
+            <a:outerShdw blurRad="39960" dir="5400000" dist="23040" rotWithShape="0">
+              <a:srgbClr val="000000">
+                <a:alpha val="35000"/>
+              </a:srgbClr>
+            </a:outerShdw>
+          </a:effectLst>
+        </p:spPr>
+        <p:style>
+          <a:lnRef idx="1">
+            <a:schemeClr val="accent1"/>
+          </a:lnRef>
+          <a:fillRef idx="3">
+            <a:schemeClr val="accent1"/>
+          </a:fillRef>
+          <a:effectRef idx="2">
+            <a:schemeClr val="accent1"/>
+          </a:effectRef>
+          <a:fontRef idx="minor"/>
+        </p:style>
+        <p:txBody>
+          <a:bodyPr lIns="90000" rIns="90000" tIns="45000" bIns="45000" anchor="ctr">
+            <a:noAutofit/>
+          </a:bodyPr>
+          <a:p>
+            <a:pPr>
+              <a:lnSpc>
+                <a:spcPct val="100000"/>
+              </a:lnSpc>
+            </a:pPr>
+            <a:r>
+              <a:rPr b="1" lang="en-US" sz="1300" spc="-1" strike="noStrike">
+                <a:solidFill>
+                  <a:schemeClr val="lt1"/>
+                </a:solidFill>
+                <a:latin typeface="Calibri"/>
+                <a:ea typeface="DejaVu Sans"/>
+              </a:rPr>
+              <a:t>Period:</a:t>
+            </a:r>
+            <a:r>
+              <a:rPr b="0" lang="en-US" sz="1300" spc="-1" strike="noStrike">
+                <a:solidFill>
+                  <a:schemeClr val="lt1"/>
+                </a:solidFill>
+                <a:latin typeface="Calibri"/>
+                <a:ea typeface="DejaVu Sans"/>
+              </a:rPr>
+              <a:t> Represents date-based differences (years, months, days). It is generally used with LocalDate objects.</a:t>
+            </a:r>
+            <a:endParaRPr b="0" lang="en-US" sz="1300" spc="-1" strike="noStrike">
+              <a:solidFill>
+                <a:srgbClr val="ffffff"/>
+              </a:solidFill>
+              <a:latin typeface="Arial"/>
+            </a:endParaRPr>
+          </a:p>
+          <a:p>
+            <a:pPr>
+              <a:lnSpc>
+                <a:spcPct val="100000"/>
+              </a:lnSpc>
+            </a:pPr>
+            <a:endParaRPr b="0" lang="en-US" sz="1300" spc="-1" strike="noStrike">
+              <a:solidFill>
+                <a:srgbClr val="ffffff"/>
+              </a:solidFill>
+              <a:latin typeface="Arial"/>
+            </a:endParaRPr>
+          </a:p>
+          <a:p>
+            <a:pPr>
+              <a:lnSpc>
+                <a:spcPct val="100000"/>
+              </a:lnSpc>
+            </a:pPr>
+            <a:r>
+              <a:rPr b="1" lang="en-US" sz="1300" spc="-1" strike="noStrike">
+                <a:solidFill>
+                  <a:schemeClr val="lt1"/>
+                </a:solidFill>
+                <a:latin typeface="Calibri"/>
+                <a:ea typeface="DejaVu Sans"/>
+              </a:rPr>
+              <a:t>Duration:</a:t>
+            </a:r>
+            <a:r>
+              <a:rPr b="0" lang="en-US" sz="1300" spc="-1" strike="noStrike">
+                <a:solidFill>
+                  <a:schemeClr val="lt1"/>
+                </a:solidFill>
+                <a:latin typeface="Calibri"/>
+                <a:ea typeface="DejaVu Sans"/>
+              </a:rPr>
+              <a:t> Represents time-based differences (hours, minutes, seconds, nanoseconds). It is generally used with LocalTime or LocalDateTime objects.</a:t>
+            </a:r>
+            <a:endParaRPr b="0" lang="en-US" sz="1300" spc="-1" strike="noStrike">
+              <a:solidFill>
+                <a:srgbClr val="ffffff"/>
+              </a:solidFill>
+              <a:latin typeface="Arial"/>
+            </a:endParaRPr>
+          </a:p>
+          <a:p>
+            <a:pPr>
+              <a:lnSpc>
+                <a:spcPct val="100000"/>
+              </a:lnSpc>
+            </a:pPr>
+            <a:endParaRPr b="0" lang="en-US" sz="1300" spc="-1" strike="noStrike">
+              <a:solidFill>
+                <a:srgbClr val="ffffff"/>
+              </a:solidFill>
+              <a:latin typeface="Arial"/>
+            </a:endParaRPr>
+          </a:p>
+          <a:p>
+            <a:pPr marL="216000" indent="-216000">
+              <a:lnSpc>
+                <a:spcPct val="100000"/>
+              </a:lnSpc>
+              <a:buClr>
+                <a:srgbClr val="ffffff"/>
+              </a:buClr>
+              <a:buFont typeface="Wingdings" charset="2"/>
+              <a:buChar char=""/>
+            </a:pPr>
+            <a:r>
+              <a:rPr b="0" lang="en-US" sz="1300" spc="-1" strike="noStrike">
+                <a:solidFill>
+                  <a:schemeClr val="lt1"/>
+                </a:solidFill>
+                <a:latin typeface="Calibri"/>
+                <a:ea typeface="DejaVu Sans"/>
+              </a:rPr>
+              <a:t>The between() method is used to find the difference between two date/time points.</a:t>
+            </a:r>
+            <a:endParaRPr b="0" lang="en-US" sz="1300" spc="-1" strike="noStrike">
+              <a:solidFill>
+                <a:srgbClr val="ffffff"/>
+              </a:solidFill>
+              <a:latin typeface="Arial"/>
+            </a:endParaRPr>
+          </a:p>
+          <a:p>
+            <a:pPr marL="216000" indent="-216000">
+              <a:lnSpc>
+                <a:spcPct val="100000"/>
+              </a:lnSpc>
+              <a:buClr>
+                <a:srgbClr val="ffffff"/>
+              </a:buClr>
+              <a:buFont typeface="Wingdings" charset="2"/>
+              <a:buChar char=""/>
+            </a:pPr>
+            <a:endParaRPr b="0" lang="en-US" sz="1300" spc="-1" strike="noStrike">
+              <a:solidFill>
+                <a:srgbClr val="ffffff"/>
+              </a:solidFill>
+              <a:latin typeface="Arial"/>
+            </a:endParaRPr>
+          </a:p>
+          <a:p>
+            <a:pPr marL="216000" indent="-216000">
+              <a:lnSpc>
+                <a:spcPct val="100000"/>
+              </a:lnSpc>
+              <a:buClr>
+                <a:srgbClr val="ffffff"/>
+              </a:buClr>
+              <a:buFont typeface="Wingdings" charset="2"/>
+              <a:buChar char=""/>
+            </a:pPr>
+            <a:r>
+              <a:rPr b="0" lang="en-US" sz="1300" spc="-1" strike="noStrike">
+                <a:solidFill>
+                  <a:schemeClr val="lt1"/>
+                </a:solidFill>
+                <a:latin typeface="Calibri"/>
+                <a:ea typeface="DejaVu Sans"/>
+              </a:rPr>
+              <a:t>They can be used with plus() and minus() methods to add or subtract time from an existing date.</a:t>
+            </a:r>
+            <a:endParaRPr b="0" lang="en-US" sz="1300" spc="-1" strike="noStrike">
+              <a:solidFill>
+                <a:srgbClr val="ffffff"/>
+              </a:solidFill>
+              <a:latin typeface="Arial"/>
+            </a:endParaRPr>
+          </a:p>
+          <a:p>
+            <a:pPr marL="216000" indent="-216000">
+              <a:lnSpc>
+                <a:spcPct val="100000"/>
+              </a:lnSpc>
+              <a:buClr>
+                <a:srgbClr val="ffffff"/>
+              </a:buClr>
+              <a:buFont typeface="Wingdings" charset="2"/>
+              <a:buChar char=""/>
+            </a:pPr>
+            <a:endParaRPr b="0" lang="en-US" sz="1300" spc="-1" strike="noStrike">
+              <a:solidFill>
+                <a:srgbClr val="ffffff"/>
+              </a:solidFill>
+              <a:latin typeface="Arial"/>
+            </a:endParaRPr>
+          </a:p>
+          <a:p>
+            <a:pPr marL="216000" indent="-216000">
+              <a:lnSpc>
+                <a:spcPct val="100000"/>
+              </a:lnSpc>
+              <a:buClr>
+                <a:srgbClr val="ffffff"/>
+              </a:buClr>
+              <a:buFont typeface="Wingdings" charset="2"/>
+              <a:buChar char=""/>
+            </a:pPr>
+            <a:r>
+              <a:rPr b="0" lang="en-US" sz="1300" spc="-1" strike="noStrike">
+                <a:solidFill>
+                  <a:schemeClr val="lt1"/>
+                </a:solidFill>
+                <a:latin typeface="Calibri"/>
+                <a:ea typeface="DejaVu Sans"/>
+              </a:rPr>
+              <a:t>Using these APIs instead of manual mathematical calculations prevents errors when handling complex situations like Daylight Saving Time (DST).</a:t>
+            </a:r>
+            <a:endParaRPr b="0" lang="en-US" sz="1300" spc="-1" strike="noStrike">
+              <a:solidFill>
+                <a:srgbClr val="ffffff"/>
+              </a:solidFill>
+              <a:latin typeface="Arial"/>
+            </a:endParaRPr>
+          </a:p>
+        </p:txBody>
+      </p:sp>
+      <p:sp>
+        <p:nvSpPr>
+          <p:cNvPr id="192" name="Rounded Rectangle 46"/>
+          <p:cNvSpPr/>
+          <p:nvPr/>
+        </p:nvSpPr>
+        <p:spPr>
+          <a:xfrm>
+            <a:off x="4507920" y="3182040"/>
+            <a:ext cx="3288960" cy="2740320"/>
+          </a:xfrm>
+          <a:prstGeom prst="roundRect">
+            <a:avLst>
+              <a:gd name="adj" fmla="val 16667"/>
+            </a:avLst>
+          </a:prstGeom>
+          <a:solidFill>
+            <a:srgbClr val="08080a"/>
+          </a:solidFill>
+          <a:ln>
+            <a:noFill/>
+          </a:ln>
+          <a:effectLst>
+            <a:outerShdw blurRad="39960" dir="5400000" dist="23040" rotWithShape="0">
+              <a:srgbClr val="000000">
+                <a:alpha val="35000"/>
+              </a:srgbClr>
+            </a:outerShdw>
+          </a:effectLst>
+        </p:spPr>
+        <p:style>
+          <a:lnRef idx="1">
+            <a:schemeClr val="accent1"/>
+          </a:lnRef>
+          <a:fillRef idx="3">
+            <a:schemeClr val="accent1"/>
+          </a:fillRef>
+          <a:effectRef idx="2">
+            <a:schemeClr val="accent1"/>
+          </a:effectRef>
+          <a:fontRef idx="minor"/>
+        </p:style>
+        <p:txBody>
+          <a:bodyPr lIns="90000" rIns="90000" tIns="45000" bIns="45000" anchor="ctr">
+            <a:noAutofit/>
+          </a:bodyPr>
+          <a:p>
+            <a:endParaRPr b="0" lang="en-US" sz="1800" spc="-1" strike="noStrike">
+              <a:solidFill>
+                <a:schemeClr val="lt1"/>
+              </a:solidFill>
+              <a:latin typeface="Calibri"/>
+              <a:ea typeface="DejaVu Sans"/>
+            </a:endParaRPr>
+          </a:p>
+        </p:txBody>
+      </p:sp>
+      <p:sp>
+        <p:nvSpPr>
+          <p:cNvPr id="193" name="Rounded Rectangle 47"/>
+          <p:cNvSpPr/>
+          <p:nvPr/>
+        </p:nvSpPr>
+        <p:spPr>
+          <a:xfrm>
+            <a:off x="4434840" y="2514600"/>
+            <a:ext cx="3288960" cy="3884400"/>
+          </a:xfrm>
+          <a:prstGeom prst="roundRect">
+            <a:avLst>
+              <a:gd name="adj" fmla="val 16667"/>
+            </a:avLst>
+          </a:prstGeom>
+          <a:solidFill>
+            <a:srgbClr val="16161c"/>
+          </a:solidFill>
+          <a:ln>
+            <a:solidFill>
+              <a:srgbClr val="464655"/>
+            </a:solidFill>
+            <a:round/>
+          </a:ln>
+          <a:effectLst>
+            <a:outerShdw blurRad="39960" dir="5400000" dist="23040" rotWithShape="0">
+              <a:srgbClr val="000000">
+                <a:alpha val="35000"/>
+              </a:srgbClr>
+            </a:outerShdw>
+          </a:effectLst>
+        </p:spPr>
+        <p:style>
+          <a:lnRef idx="1">
+            <a:schemeClr val="accent1"/>
+          </a:lnRef>
+          <a:fillRef idx="3">
+            <a:schemeClr val="accent1"/>
+          </a:fillRef>
+          <a:effectRef idx="2">
+            <a:schemeClr val="accent1"/>
+          </a:effectRef>
+          <a:fontRef idx="minor"/>
+        </p:style>
+        <p:txBody>
+          <a:bodyPr lIns="90000" rIns="90000" tIns="45000" bIns="45000" anchor="ctr">
+            <a:noAutofit/>
+          </a:bodyPr>
+          <a:p>
+            <a:pPr>
+              <a:lnSpc>
+                <a:spcPct val="100000"/>
+              </a:lnSpc>
+            </a:pPr>
+            <a:r>
+              <a:rPr b="0" lang="en-US" sz="1600" spc="-1" strike="noStrike">
+                <a:solidFill>
+                  <a:schemeClr val="lt1"/>
+                </a:solidFill>
+                <a:latin typeface="Calibri"/>
+                <a:ea typeface="DejaVu Sans"/>
+              </a:rPr>
+              <a:t>↓ </a:t>
+            </a:r>
+            <a:r>
+              <a:rPr b="0" lang="en-US" sz="1600" spc="-1" strike="noStrike">
+                <a:solidFill>
+                  <a:schemeClr val="lt1"/>
+                </a:solidFill>
+                <a:latin typeface="Calibri"/>
+                <a:ea typeface="DejaVu Sans"/>
+              </a:rPr>
+              <a:t>Start and end times (Date/Time objects) are created</a:t>
+            </a:r>
+            <a:endParaRPr b="0" lang="en-US" sz="1600" spc="-1" strike="noStrike">
+              <a:solidFill>
+                <a:srgbClr val="ffffff"/>
+              </a:solidFill>
+              <a:latin typeface="Arial"/>
+            </a:endParaRPr>
+          </a:p>
+          <a:p>
+            <a:pPr>
+              <a:lnSpc>
+                <a:spcPct val="100000"/>
+              </a:lnSpc>
+            </a:pPr>
+            <a:r>
+              <a:rPr b="0" lang="en-US" sz="1600" spc="-1" strike="noStrike">
+                <a:solidFill>
+                  <a:schemeClr val="lt1"/>
+                </a:solidFill>
+                <a:latin typeface="Calibri"/>
+                <a:ea typeface="DejaVu Sans"/>
+              </a:rPr>
+              <a:t>↓ </a:t>
+            </a:r>
+            <a:r>
+              <a:rPr b="0" lang="en-US" sz="1600" spc="-1" strike="noStrike">
+                <a:solidFill>
+                  <a:schemeClr val="lt1"/>
+                </a:solidFill>
+                <a:latin typeface="Calibri"/>
+                <a:ea typeface="DejaVu Sans"/>
+              </a:rPr>
+              <a:t>The appropriate class (Period or Duration) is selected based on the requirement</a:t>
+            </a:r>
+            <a:endParaRPr b="0" lang="en-US" sz="1600" spc="-1" strike="noStrike">
+              <a:solidFill>
+                <a:srgbClr val="ffffff"/>
+              </a:solidFill>
+              <a:latin typeface="Arial"/>
+            </a:endParaRPr>
+          </a:p>
+          <a:p>
+            <a:pPr>
+              <a:lnSpc>
+                <a:spcPct val="100000"/>
+              </a:lnSpc>
+            </a:pPr>
+            <a:r>
+              <a:rPr b="0" lang="en-US" sz="1600" spc="-1" strike="noStrike">
+                <a:solidFill>
+                  <a:schemeClr val="lt1"/>
+                </a:solidFill>
+                <a:latin typeface="Calibri"/>
+                <a:ea typeface="DejaVu Sans"/>
+              </a:rPr>
+              <a:t>↓ </a:t>
+            </a:r>
+            <a:r>
+              <a:rPr b="0" lang="en-US" sz="1600" spc="-1" strike="noStrike">
+                <a:solidFill>
+                  <a:schemeClr val="lt1"/>
+                </a:solidFill>
+                <a:latin typeface="Calibri"/>
+                <a:ea typeface="DejaVu Sans"/>
+              </a:rPr>
+              <a:t>The difference between the two times is calculated by calling the between() method</a:t>
+            </a:r>
+            <a:endParaRPr b="0" lang="en-US" sz="1600" spc="-1" strike="noStrike">
+              <a:solidFill>
+                <a:srgbClr val="ffffff"/>
+              </a:solidFill>
+              <a:latin typeface="Arial"/>
+            </a:endParaRPr>
+          </a:p>
+          <a:p>
+            <a:pPr>
+              <a:lnSpc>
+                <a:spcPct val="100000"/>
+              </a:lnSpc>
+            </a:pPr>
+            <a:r>
+              <a:rPr b="0" lang="en-US" sz="1600" spc="-1" strike="noStrike">
+                <a:solidFill>
+                  <a:schemeClr val="lt1"/>
+                </a:solidFill>
+                <a:latin typeface="Calibri"/>
+                <a:ea typeface="DejaVu Sans"/>
+              </a:rPr>
+              <a:t>↓ </a:t>
+            </a:r>
+            <a:r>
+              <a:rPr b="0" lang="en-US" sz="1600" spc="-1" strike="noStrike">
+                <a:solidFill>
+                  <a:schemeClr val="lt1"/>
+                </a:solidFill>
+                <a:latin typeface="Calibri"/>
+                <a:ea typeface="DejaVu Sans"/>
+              </a:rPr>
+              <a:t>The details of the difference are retrieved using relevant methods (e.g., getDays(), toHours())</a:t>
+            </a:r>
+            <a:endParaRPr b="0" lang="en-US" sz="1600" spc="-1" strike="noStrike">
+              <a:solidFill>
+                <a:srgbClr val="ffffff"/>
+              </a:solidFill>
+              <a:latin typeface="Arial"/>
+            </a:endParaRPr>
+          </a:p>
+          <a:p>
+            <a:pPr>
+              <a:lnSpc>
+                <a:spcPct val="100000"/>
+              </a:lnSpc>
+            </a:pPr>
+            <a:r>
+              <a:rPr b="0" lang="en-US" sz="1600" spc="-1" strike="noStrike">
+                <a:solidFill>
+                  <a:schemeClr val="lt1"/>
+                </a:solidFill>
+                <a:latin typeface="Calibri"/>
+                <a:ea typeface="DejaVu Sans"/>
+              </a:rPr>
+              <a:t>↓ </a:t>
+            </a:r>
+            <a:r>
+              <a:rPr b="0" lang="en-US" sz="1600" spc="-1" strike="noStrike">
+                <a:solidFill>
+                  <a:schemeClr val="lt1"/>
+                </a:solidFill>
+                <a:latin typeface="Calibri"/>
+                <a:ea typeface="DejaVu Sans"/>
+              </a:rPr>
+              <a:t>The result is printed to the screen or used in different business logic</a:t>
+            </a:r>
+            <a:endParaRPr b="0" lang="en-US" sz="1600" spc="-1" strike="noStrike">
+              <a:solidFill>
+                <a:srgbClr val="ffffff"/>
+              </a:solidFill>
+              <a:latin typeface="Arial"/>
+            </a:endParaRPr>
+          </a:p>
+        </p:txBody>
+      </p:sp>
+      <p:sp>
+        <p:nvSpPr>
+          <p:cNvPr id="194" name="Rounded Rectangle 48"/>
+          <p:cNvSpPr/>
+          <p:nvPr/>
+        </p:nvSpPr>
+        <p:spPr>
+          <a:xfrm>
+            <a:off x="8028360" y="3182040"/>
+            <a:ext cx="3288960" cy="2740320"/>
+          </a:xfrm>
+          <a:prstGeom prst="roundRect">
+            <a:avLst>
+              <a:gd name="adj" fmla="val 16667"/>
+            </a:avLst>
+          </a:prstGeom>
+          <a:solidFill>
+            <a:srgbClr val="08080a"/>
+          </a:solidFill>
+          <a:ln>
+            <a:noFill/>
+          </a:ln>
+          <a:effectLst>
+            <a:outerShdw blurRad="39960" dir="5400000" dist="23040" rotWithShape="0">
+              <a:srgbClr val="000000">
+                <a:alpha val="35000"/>
+              </a:srgbClr>
+            </a:outerShdw>
+          </a:effectLst>
+        </p:spPr>
+        <p:style>
+          <a:lnRef idx="1">
+            <a:schemeClr val="accent1"/>
+          </a:lnRef>
+          <a:fillRef idx="3">
+            <a:schemeClr val="accent1"/>
+          </a:fillRef>
+          <a:effectRef idx="2">
+            <a:schemeClr val="accent1"/>
+          </a:effectRef>
+          <a:fontRef idx="minor"/>
+        </p:style>
+        <p:txBody>
+          <a:bodyPr lIns="90000" rIns="90000" tIns="45000" bIns="45000" anchor="ctr">
+            <a:noAutofit/>
+          </a:bodyPr>
+          <a:p>
+            <a:endParaRPr b="0" lang="en-US" sz="1800" spc="-1" strike="noStrike">
+              <a:solidFill>
+                <a:schemeClr val="lt1"/>
+              </a:solidFill>
+              <a:latin typeface="Calibri"/>
+              <a:ea typeface="DejaVu Sans"/>
+            </a:endParaRPr>
+          </a:p>
+        </p:txBody>
+      </p:sp>
+      <p:sp>
+        <p:nvSpPr>
+          <p:cNvPr id="195" name="Rounded Rectangle 49"/>
+          <p:cNvSpPr/>
+          <p:nvPr/>
+        </p:nvSpPr>
+        <p:spPr>
+          <a:xfrm>
+            <a:off x="8001000" y="2286000"/>
+            <a:ext cx="3657600" cy="4114800"/>
+          </a:xfrm>
+          <a:prstGeom prst="roundRect">
+            <a:avLst>
+              <a:gd name="adj" fmla="val 16667"/>
+            </a:avLst>
+          </a:prstGeom>
+          <a:solidFill>
+            <a:srgbClr val="16161c"/>
+          </a:solidFill>
+          <a:ln>
+            <a:solidFill>
+              <a:srgbClr val="464655"/>
+            </a:solidFill>
+            <a:round/>
+          </a:ln>
+          <a:effectLst>
+            <a:outerShdw blurRad="39960" dir="5400000" dist="23040" rotWithShape="0">
+              <a:srgbClr val="000000">
+                <a:alpha val="35000"/>
+              </a:srgbClr>
+            </a:outerShdw>
+          </a:effectLst>
+        </p:spPr>
+        <p:style>
+          <a:lnRef idx="1">
+            <a:schemeClr val="accent1"/>
+          </a:lnRef>
+          <a:fillRef idx="3">
+            <a:schemeClr val="accent1"/>
+          </a:fillRef>
+          <a:effectRef idx="2">
+            <a:schemeClr val="accent1"/>
+          </a:effectRef>
+          <a:fontRef idx="minor"/>
+        </p:style>
+        <p:txBody>
+          <a:bodyPr lIns="90000" rIns="90000" tIns="45000" bIns="45000" anchor="ctr">
+            <a:noAutofit/>
+          </a:bodyPr>
+          <a:p>
+            <a:pPr algn="ctr">
+              <a:lnSpc>
+                <a:spcPct val="100000"/>
+              </a:lnSpc>
+            </a:pPr>
+            <a:r>
+              <a:rPr b="0" lang="en-US" sz="900" spc="-1" strike="noStrike">
+                <a:solidFill>
+                  <a:srgbClr val="78ffc8"/>
+                </a:solidFill>
+                <a:latin typeface="Consolas"/>
+                <a:ea typeface="DejaVu Sans"/>
+              </a:rPr>
+              <a:t>public class DurationPeriodExample {</a:t>
+            </a:r>
+            <a:endParaRPr b="0" lang="en-US" sz="900" spc="-1" strike="noStrike">
+              <a:solidFill>
+                <a:srgbClr val="ffffff"/>
+              </a:solidFill>
+              <a:latin typeface="Arial"/>
+            </a:endParaRPr>
+          </a:p>
+          <a:p>
+            <a:pPr algn="ctr">
+              <a:lnSpc>
+                <a:spcPct val="100000"/>
+              </a:lnSpc>
+            </a:pPr>
+            <a:r>
+              <a:rPr b="0" lang="en-US" sz="900" spc="-1" strike="noStrike">
+                <a:solidFill>
+                  <a:srgbClr val="78ffc8"/>
+                </a:solidFill>
+                <a:latin typeface="Consolas"/>
+                <a:ea typeface="DejaVu Sans"/>
+              </a:rPr>
+              <a:t>    </a:t>
+            </a:r>
+            <a:r>
+              <a:rPr b="0" lang="en-US" sz="900" spc="-1" strike="noStrike">
+                <a:solidFill>
+                  <a:srgbClr val="78ffc8"/>
+                </a:solidFill>
+                <a:latin typeface="Consolas"/>
+                <a:ea typeface="DejaVu Sans"/>
+              </a:rPr>
+              <a:t>public static void main(String[] args) {</a:t>
+            </a:r>
+            <a:endParaRPr b="0" lang="en-US" sz="900" spc="-1" strike="noStrike">
+              <a:solidFill>
+                <a:srgbClr val="ffffff"/>
+              </a:solidFill>
+              <a:latin typeface="Arial"/>
+            </a:endParaRPr>
+          </a:p>
+          <a:p>
+            <a:pPr algn="ctr">
+              <a:lnSpc>
+                <a:spcPct val="100000"/>
+              </a:lnSpc>
+            </a:pPr>
+            <a:r>
+              <a:rPr b="0" lang="en-US" sz="900" spc="-1" strike="noStrike">
+                <a:solidFill>
+                  <a:srgbClr val="78ffc8"/>
+                </a:solidFill>
+                <a:latin typeface="Consolas"/>
+                <a:ea typeface="DejaVu Sans"/>
+              </a:rPr>
+              <a:t>        </a:t>
+            </a:r>
+            <a:r>
+              <a:rPr b="0" lang="en-US" sz="900" spc="-1" strike="noStrike">
+                <a:solidFill>
+                  <a:srgbClr val="78ffc8"/>
+                </a:solidFill>
+                <a:latin typeface="Consolas"/>
+                <a:ea typeface="DejaVu Sans"/>
+              </a:rPr>
+              <a:t>// --- PERIOD EXAMPLE (Date Difference) ---</a:t>
+            </a:r>
+            <a:endParaRPr b="0" lang="en-US" sz="900" spc="-1" strike="noStrike">
+              <a:solidFill>
+                <a:srgbClr val="ffffff"/>
+              </a:solidFill>
+              <a:latin typeface="Arial"/>
+            </a:endParaRPr>
+          </a:p>
+          <a:p>
+            <a:pPr algn="ctr">
+              <a:lnSpc>
+                <a:spcPct val="100000"/>
+              </a:lnSpc>
+            </a:pPr>
+            <a:r>
+              <a:rPr b="0" lang="en-US" sz="900" spc="-1" strike="noStrike">
+                <a:solidFill>
+                  <a:srgbClr val="78ffc8"/>
+                </a:solidFill>
+                <a:latin typeface="Consolas"/>
+                <a:ea typeface="DejaVu Sans"/>
+              </a:rPr>
+              <a:t>        </a:t>
+            </a:r>
+            <a:r>
+              <a:rPr b="0" lang="en-US" sz="900" spc="-1" strike="noStrike">
+                <a:solidFill>
+                  <a:srgbClr val="78ffc8"/>
+                </a:solidFill>
+                <a:latin typeface="Consolas"/>
+                <a:ea typeface="DejaVu Sans"/>
+              </a:rPr>
+              <a:t>LocalDate oldDate = LocalDate.of(2022, 5, 10);</a:t>
+            </a:r>
+            <a:endParaRPr b="0" lang="en-US" sz="900" spc="-1" strike="noStrike">
+              <a:solidFill>
+                <a:srgbClr val="ffffff"/>
+              </a:solidFill>
+              <a:latin typeface="Arial"/>
+            </a:endParaRPr>
+          </a:p>
+          <a:p>
+            <a:pPr algn="ctr">
+              <a:lnSpc>
+                <a:spcPct val="100000"/>
+              </a:lnSpc>
+            </a:pPr>
+            <a:r>
+              <a:rPr b="0" lang="en-US" sz="900" spc="-1" strike="noStrike">
+                <a:solidFill>
+                  <a:srgbClr val="78ffc8"/>
+                </a:solidFill>
+                <a:latin typeface="Consolas"/>
+                <a:ea typeface="DejaVu Sans"/>
+              </a:rPr>
+              <a:t>        </a:t>
+            </a:r>
+            <a:r>
+              <a:rPr b="0" lang="en-US" sz="900" spc="-1" strike="noStrike">
+                <a:solidFill>
+                  <a:srgbClr val="78ffc8"/>
+                </a:solidFill>
+                <a:latin typeface="Consolas"/>
+                <a:ea typeface="DejaVu Sans"/>
+              </a:rPr>
+              <a:t>LocalDate currentDate = LocalDate.now(); // e.g., April 28, 2024</a:t>
+            </a:r>
+            <a:endParaRPr b="0" lang="en-US" sz="900" spc="-1" strike="noStrike">
+              <a:solidFill>
+                <a:srgbClr val="ffffff"/>
+              </a:solidFill>
+              <a:latin typeface="Arial"/>
+            </a:endParaRPr>
+          </a:p>
+          <a:p>
+            <a:pPr algn="ctr">
+              <a:lnSpc>
+                <a:spcPct val="100000"/>
+              </a:lnSpc>
+            </a:pPr>
+            <a:r>
+              <a:rPr b="0" lang="en-US" sz="900" spc="-1" strike="noStrike">
+                <a:solidFill>
+                  <a:srgbClr val="78ffc8"/>
+                </a:solidFill>
+                <a:latin typeface="Consolas"/>
+                <a:ea typeface="DejaVu Sans"/>
+              </a:rPr>
+              <a:t>        </a:t>
+            </a:r>
+            <a:r>
+              <a:rPr b="0" lang="en-US" sz="900" spc="-1" strike="noStrike">
+                <a:solidFill>
+                  <a:srgbClr val="78ffc8"/>
+                </a:solidFill>
+                <a:latin typeface="Consolas"/>
+                <a:ea typeface="DejaVu Sans"/>
+              </a:rPr>
+              <a:t>Period period = Period.between(oldDate, currentDate);</a:t>
+            </a:r>
+            <a:endParaRPr b="0" lang="en-US" sz="900" spc="-1" strike="noStrike">
+              <a:solidFill>
+                <a:srgbClr val="ffffff"/>
+              </a:solidFill>
+              <a:latin typeface="Arial"/>
+            </a:endParaRPr>
+          </a:p>
+          <a:p>
+            <a:pPr algn="ctr">
+              <a:lnSpc>
+                <a:spcPct val="100000"/>
+              </a:lnSpc>
+            </a:pPr>
+            <a:r>
+              <a:rPr b="0" lang="en-US" sz="900" spc="-1" strike="noStrike">
+                <a:solidFill>
+                  <a:srgbClr val="78ffc8"/>
+                </a:solidFill>
+                <a:latin typeface="Consolas"/>
+                <a:ea typeface="DejaVu Sans"/>
+              </a:rPr>
+              <a:t>        </a:t>
+            </a:r>
+            <a:r>
+              <a:rPr b="0" lang="en-US" sz="900" spc="-1" strike="noStrike">
+                <a:solidFill>
+                  <a:srgbClr val="78ffc8"/>
+                </a:solidFill>
+                <a:latin typeface="Consolas"/>
+                <a:ea typeface="DejaVu Sans"/>
+              </a:rPr>
+              <a:t>System.out.println("Date Difference: " + period.getYears() + " years, " </a:t>
+            </a:r>
+            <a:endParaRPr b="0" lang="en-US" sz="900" spc="-1" strike="noStrike">
+              <a:solidFill>
+                <a:srgbClr val="ffffff"/>
+              </a:solidFill>
+              <a:latin typeface="Arial"/>
+            </a:endParaRPr>
+          </a:p>
+          <a:p>
+            <a:pPr algn="ctr">
+              <a:lnSpc>
+                <a:spcPct val="100000"/>
+              </a:lnSpc>
+            </a:pPr>
+            <a:r>
+              <a:rPr b="0" lang="en-US" sz="900" spc="-1" strike="noStrike">
+                <a:solidFill>
+                  <a:srgbClr val="78ffc8"/>
+                </a:solidFill>
+                <a:latin typeface="Consolas"/>
+                <a:ea typeface="DejaVu Sans"/>
+              </a:rPr>
+              <a:t>                           </a:t>
+            </a:r>
+            <a:r>
+              <a:rPr b="0" lang="en-US" sz="900" spc="-1" strike="noStrike">
+                <a:solidFill>
+                  <a:srgbClr val="78ffc8"/>
+                </a:solidFill>
+                <a:latin typeface="Consolas"/>
+                <a:ea typeface="DejaVu Sans"/>
+              </a:rPr>
+              <a:t>+ period.getMonths() + " months, " </a:t>
+            </a:r>
+            <a:endParaRPr b="0" lang="en-US" sz="900" spc="-1" strike="noStrike">
+              <a:solidFill>
+                <a:srgbClr val="ffffff"/>
+              </a:solidFill>
+              <a:latin typeface="Arial"/>
+            </a:endParaRPr>
+          </a:p>
+          <a:p>
+            <a:pPr algn="ctr">
+              <a:lnSpc>
+                <a:spcPct val="100000"/>
+              </a:lnSpc>
+            </a:pPr>
+            <a:r>
+              <a:rPr b="0" lang="en-US" sz="900" spc="-1" strike="noStrike">
+                <a:solidFill>
+                  <a:srgbClr val="78ffc8"/>
+                </a:solidFill>
+                <a:latin typeface="Consolas"/>
+                <a:ea typeface="DejaVu Sans"/>
+              </a:rPr>
+              <a:t>                           </a:t>
+            </a:r>
+            <a:r>
+              <a:rPr b="0" lang="en-US" sz="900" spc="-1" strike="noStrike">
+                <a:solidFill>
+                  <a:srgbClr val="78ffc8"/>
+                </a:solidFill>
+                <a:latin typeface="Consolas"/>
+                <a:ea typeface="DejaVu Sans"/>
+              </a:rPr>
+              <a:t>+ period.getDays() + " days");</a:t>
+            </a:r>
+            <a:endParaRPr b="0" lang="en-US" sz="900" spc="-1" strike="noStrike">
+              <a:solidFill>
+                <a:srgbClr val="ffffff"/>
+              </a:solidFill>
+              <a:latin typeface="Arial"/>
+            </a:endParaRPr>
+          </a:p>
+          <a:p>
+            <a:pPr algn="ctr">
+              <a:lnSpc>
+                <a:spcPct val="100000"/>
+              </a:lnSpc>
+            </a:pPr>
+            <a:r>
+              <a:rPr b="0" lang="en-US" sz="900" spc="-1" strike="noStrike">
+                <a:solidFill>
+                  <a:srgbClr val="78ffc8"/>
+                </a:solidFill>
+                <a:latin typeface="Consolas"/>
+                <a:ea typeface="DejaVu Sans"/>
+              </a:rPr>
+              <a:t>        </a:t>
+            </a:r>
+            <a:r>
+              <a:rPr b="0" lang="en-US" sz="900" spc="-1" strike="noStrike">
+                <a:solidFill>
+                  <a:srgbClr val="78ffc8"/>
+                </a:solidFill>
+                <a:latin typeface="Consolas"/>
+                <a:ea typeface="DejaVu Sans"/>
+              </a:rPr>
+              <a:t>// --- DURATION EXAMPLE (Time Difference) ---</a:t>
+            </a:r>
+            <a:endParaRPr b="0" lang="en-US" sz="900" spc="-1" strike="noStrike">
+              <a:solidFill>
+                <a:srgbClr val="ffffff"/>
+              </a:solidFill>
+              <a:latin typeface="Arial"/>
+            </a:endParaRPr>
+          </a:p>
+          <a:p>
+            <a:pPr algn="ctr">
+              <a:lnSpc>
+                <a:spcPct val="100000"/>
+              </a:lnSpc>
+            </a:pPr>
+            <a:r>
+              <a:rPr b="0" lang="en-US" sz="900" spc="-1" strike="noStrike">
+                <a:solidFill>
+                  <a:srgbClr val="78ffc8"/>
+                </a:solidFill>
+                <a:latin typeface="Consolas"/>
+                <a:ea typeface="DejaVu Sans"/>
+              </a:rPr>
+              <a:t>        </a:t>
+            </a:r>
+            <a:r>
+              <a:rPr b="0" lang="en-US" sz="900" spc="-1" strike="noStrike">
+                <a:solidFill>
+                  <a:srgbClr val="78ffc8"/>
+                </a:solidFill>
+                <a:latin typeface="Consolas"/>
+                <a:ea typeface="DejaVu Sans"/>
+              </a:rPr>
+              <a:t>LocalTime startTime = LocalTime.of(9, 30);</a:t>
+            </a:r>
+            <a:endParaRPr b="0" lang="en-US" sz="900" spc="-1" strike="noStrike">
+              <a:solidFill>
+                <a:srgbClr val="ffffff"/>
+              </a:solidFill>
+              <a:latin typeface="Arial"/>
+            </a:endParaRPr>
+          </a:p>
+          <a:p>
+            <a:pPr algn="ctr">
+              <a:lnSpc>
+                <a:spcPct val="100000"/>
+              </a:lnSpc>
+            </a:pPr>
+            <a:r>
+              <a:rPr b="0" lang="en-US" sz="900" spc="-1" strike="noStrike">
+                <a:solidFill>
+                  <a:srgbClr val="78ffc8"/>
+                </a:solidFill>
+                <a:latin typeface="Consolas"/>
+                <a:ea typeface="DejaVu Sans"/>
+              </a:rPr>
+              <a:t>        </a:t>
+            </a:r>
+            <a:r>
+              <a:rPr b="0" lang="en-US" sz="900" spc="-1" strike="noStrike">
+                <a:solidFill>
+                  <a:srgbClr val="78ffc8"/>
+                </a:solidFill>
+                <a:latin typeface="Consolas"/>
+                <a:ea typeface="DejaVu Sans"/>
+              </a:rPr>
+              <a:t>LocalTime endTime = LocalTime.of(17, 15);</a:t>
+            </a:r>
+            <a:endParaRPr b="0" lang="en-US" sz="900" spc="-1" strike="noStrike">
+              <a:solidFill>
+                <a:srgbClr val="ffffff"/>
+              </a:solidFill>
+              <a:latin typeface="Arial"/>
+            </a:endParaRPr>
+          </a:p>
+          <a:p>
+            <a:pPr algn="ctr">
+              <a:lnSpc>
+                <a:spcPct val="100000"/>
+              </a:lnSpc>
+            </a:pPr>
+            <a:r>
+              <a:rPr b="0" lang="en-US" sz="900" spc="-1" strike="noStrike">
+                <a:solidFill>
+                  <a:srgbClr val="78ffc8"/>
+                </a:solidFill>
+                <a:latin typeface="Consolas"/>
+                <a:ea typeface="DejaVu Sans"/>
+              </a:rPr>
+              <a:t>        </a:t>
+            </a:r>
+            <a:r>
+              <a:rPr b="0" lang="en-US" sz="900" spc="-1" strike="noStrike">
+                <a:solidFill>
+                  <a:srgbClr val="78ffc8"/>
+                </a:solidFill>
+                <a:latin typeface="Consolas"/>
+                <a:ea typeface="DejaVu Sans"/>
+              </a:rPr>
+              <a:t>Duration duration = Duration.between(startTime, endTime);</a:t>
+            </a:r>
+            <a:endParaRPr b="0" lang="en-US" sz="900" spc="-1" strike="noStrike">
+              <a:solidFill>
+                <a:srgbClr val="ffffff"/>
+              </a:solidFill>
+              <a:latin typeface="Arial"/>
+            </a:endParaRPr>
+          </a:p>
+          <a:p>
+            <a:pPr algn="ctr">
+              <a:lnSpc>
+                <a:spcPct val="100000"/>
+              </a:lnSpc>
+            </a:pPr>
+            <a:r>
+              <a:rPr b="0" lang="en-US" sz="900" spc="-1" strike="noStrike">
+                <a:solidFill>
+                  <a:srgbClr val="78ffc8"/>
+                </a:solidFill>
+                <a:latin typeface="Consolas"/>
+                <a:ea typeface="DejaVu Sans"/>
+              </a:rPr>
+              <a:t>        </a:t>
+            </a:r>
+            <a:r>
+              <a:rPr b="0" lang="en-US" sz="900" spc="-1" strike="noStrike">
+                <a:solidFill>
+                  <a:srgbClr val="78ffc8"/>
+                </a:solidFill>
+                <a:latin typeface="Consolas"/>
+                <a:ea typeface="DejaVu Sans"/>
+              </a:rPr>
+              <a:t>System.out.println("Elapsed Time: " + duration.toHours() + " hours, " </a:t>
+            </a:r>
+            <a:endParaRPr b="0" lang="en-US" sz="900" spc="-1" strike="noStrike">
+              <a:solidFill>
+                <a:srgbClr val="ffffff"/>
+              </a:solidFill>
+              <a:latin typeface="Arial"/>
+            </a:endParaRPr>
+          </a:p>
+          <a:p>
+            <a:pPr algn="ctr">
+              <a:lnSpc>
+                <a:spcPct val="100000"/>
+              </a:lnSpc>
+            </a:pPr>
+            <a:r>
+              <a:rPr b="0" lang="en-US" sz="900" spc="-1" strike="noStrike">
+                <a:solidFill>
+                  <a:srgbClr val="78ffc8"/>
+                </a:solidFill>
+                <a:latin typeface="Consolas"/>
+                <a:ea typeface="DejaVu Sans"/>
+              </a:rPr>
+              <a:t>                           </a:t>
+            </a:r>
+            <a:r>
+              <a:rPr b="0" lang="en-US" sz="900" spc="-1" strike="noStrike">
+                <a:solidFill>
+                  <a:srgbClr val="78ffc8"/>
+                </a:solidFill>
+                <a:latin typeface="Consolas"/>
+                <a:ea typeface="DejaVu Sans"/>
+              </a:rPr>
+              <a:t>+ (duration.toMinutes() % 60) + " minutes");</a:t>
+            </a:r>
+            <a:endParaRPr b="0" lang="en-US" sz="900" spc="-1" strike="noStrike">
+              <a:solidFill>
+                <a:srgbClr val="ffffff"/>
+              </a:solidFill>
+              <a:latin typeface="Arial"/>
+            </a:endParaRPr>
+          </a:p>
+          <a:p>
+            <a:pPr algn="ctr">
+              <a:lnSpc>
+                <a:spcPct val="100000"/>
+              </a:lnSpc>
+            </a:pPr>
+            <a:r>
+              <a:rPr b="0" lang="en-US" sz="900" spc="-1" strike="noStrike">
+                <a:solidFill>
+                  <a:srgbClr val="78ffc8"/>
+                </a:solidFill>
+                <a:latin typeface="Consolas"/>
+                <a:ea typeface="DejaVu Sans"/>
+              </a:rPr>
+              <a:t>    </a:t>
+            </a:r>
+            <a:r>
+              <a:rPr b="0" lang="en-US" sz="900" spc="-1" strike="noStrike">
+                <a:solidFill>
+                  <a:srgbClr val="78ffc8"/>
+                </a:solidFill>
+                <a:latin typeface="Consolas"/>
+                <a:ea typeface="DejaVu Sans"/>
+              </a:rPr>
+              <a:t>}</a:t>
+            </a:r>
+            <a:endParaRPr b="0" lang="en-US" sz="900" spc="-1" strike="noStrike">
+              <a:solidFill>
+                <a:srgbClr val="ffffff"/>
+              </a:solidFill>
+              <a:latin typeface="Arial"/>
+            </a:endParaRPr>
+          </a:p>
+          <a:p>
+            <a:pPr algn="ctr">
+              <a:lnSpc>
+                <a:spcPct val="100000"/>
+              </a:lnSpc>
+            </a:pPr>
+            <a:r>
+              <a:rPr b="0" lang="en-US" sz="900" spc="-1" strike="noStrike">
+                <a:solidFill>
+                  <a:srgbClr val="78ffc8"/>
+                </a:solidFill>
+                <a:latin typeface="Consolas"/>
+                <a:ea typeface="DejaVu Sans"/>
+              </a:rPr>
+              <a:t>}</a:t>
+            </a:r>
+            <a:endParaRPr b="0" lang="en-US" sz="900" spc="-1" strike="noStrike">
+              <a:solidFill>
+                <a:srgbClr val="ffffff"/>
+              </a:solidFill>
+              <a:latin typeface="Arial"/>
+            </a:endParaRPr>
+          </a:p>
+        </p:txBody>
+      </p:sp>
+      <p:sp>
+        <p:nvSpPr>
+          <p:cNvPr id="196" name="TextBox 20"/>
           <p:cNvSpPr/>
           <p:nvPr/>
         </p:nvSpPr>

--- a/Java/Java #4/EN/Java #4.pptx
+++ b/Java/Java #4/EN/Java #4.pptx
@@ -11,6 +11,7 @@
     <p:sldId id="259" r:id="rId6"/>
     <p:sldId id="260" r:id="rId7"/>
     <p:sldId id="261" r:id="rId8"/>
+    <p:sldId id="262" r:id="rId9"/>
   </p:sldIdLst>
   <p:sldSz cx="9144000" cy="6858000"/>
   <p:notesSz cx="7772400" cy="10058400"/>
@@ -68,7 +69,7 @@
         <p:txBody>
           <a:bodyPr/>
           <a:p>
-            <a:fld id="{876F7108-6294-4180-8C9D-6B11BF0FF3CA}" type="slidenum">
+            <a:fld id="{D629C701-B00C-4DCB-BB1D-1543740781D5}" type="slidenum">
               <a:t>&lt;#&gt;</a:t>
             </a:fld>
           </a:p>
@@ -277,7 +278,7 @@
         <p:txBody>
           <a:bodyPr/>
           <a:p>
-            <a:fld id="{518FE690-DF57-486B-841F-8923D9B2942C}" type="slidenum">
+            <a:fld id="{EA964133-01CA-4543-B67D-4296C113F452}" type="slidenum">
               <a:t>&lt;#&gt;</a:t>
             </a:fld>
           </a:p>
@@ -572,7 +573,7 @@
         <p:txBody>
           <a:bodyPr/>
           <a:p>
-            <a:fld id="{7BADACA6-FEC7-4846-920B-245565DEEA66}" type="slidenum">
+            <a:fld id="{C5C64549-3694-47FA-93A4-C1DF53D801D2}" type="slidenum">
               <a:t>&lt;#&gt;</a:t>
             </a:fld>
           </a:p>
@@ -953,7 +954,7 @@
         <p:txBody>
           <a:bodyPr/>
           <a:p>
-            <a:fld id="{BEC3E169-7FFB-41FC-8C67-F2A7553A3B9A}" type="slidenum">
+            <a:fld id="{F9939FAD-74F7-4C39-9101-CF0DEF8C3B8B}" type="slidenum">
               <a:t>&lt;#&gt;</a:t>
             </a:fld>
           </a:p>
@@ -1116,7 +1117,7 @@
         <p:txBody>
           <a:bodyPr/>
           <a:p>
-            <a:fld id="{ADF568D4-2035-420B-9A2C-9CAD494E81E3}" type="slidenum">
+            <a:fld id="{182FA720-1FD9-4C57-9BFB-9BDA214560FC}" type="slidenum">
               <a:t>&lt;#&gt;</a:t>
             </a:fld>
           </a:p>
@@ -1282,7 +1283,7 @@
         <p:txBody>
           <a:bodyPr/>
           <a:p>
-            <a:fld id="{39088647-2018-45BE-82C6-617B56794C4D}" type="slidenum">
+            <a:fld id="{46AF6A8D-231B-4139-BC97-AD77F1C95CA7}" type="slidenum">
               <a:t>&lt;#&gt;</a:t>
             </a:fld>
           </a:p>
@@ -1491,7 +1492,7 @@
         <p:txBody>
           <a:bodyPr/>
           <a:p>
-            <a:fld id="{865A2949-EAC2-4A55-8B2D-2402C800C3EF}" type="slidenum">
+            <a:fld id="{42053E97-7459-4E4F-816C-E152A667E700}" type="slidenum">
               <a:t>&lt;#&gt;</a:t>
             </a:fld>
           </a:p>
@@ -1614,7 +1615,7 @@
         <p:txBody>
           <a:bodyPr/>
           <a:p>
-            <a:fld id="{3D9FE6C1-E1D0-403F-AF85-C6946D07AA53}" type="slidenum">
+            <a:fld id="{F2E786D7-05EA-472F-AE14-EECFAC2B1E1E}" type="slidenum">
               <a:t>&lt;#&gt;</a:t>
             </a:fld>
           </a:p>
@@ -1735,7 +1736,7 @@
         <p:txBody>
           <a:bodyPr/>
           <a:p>
-            <a:fld id="{AF31966E-DFC5-48D1-95F1-E9CA8968151D}" type="slidenum">
+            <a:fld id="{6EC86901-79F3-45CA-8C76-A94EA32CB2AF}" type="slidenum">
               <a:t>&lt;#&gt;</a:t>
             </a:fld>
           </a:p>
@@ -1987,7 +1988,7 @@
         <p:txBody>
           <a:bodyPr/>
           <a:p>
-            <a:fld id="{D1055276-1187-428D-A551-119921929C76}" type="slidenum">
+            <a:fld id="{139FDB95-A9C0-4D43-8953-CF0B704806A7}" type="slidenum">
               <a:t>&lt;#&gt;</a:t>
             </a:fld>
           </a:p>
@@ -2239,7 +2240,7 @@
         <p:txBody>
           <a:bodyPr/>
           <a:p>
-            <a:fld id="{929A5B6B-4E9D-4CB7-8DE6-D0FD08621DDC}" type="slidenum">
+            <a:fld id="{6B7F32D8-2E19-4B17-92C0-E5EC687041E2}" type="slidenum">
               <a:t>&lt;#&gt;</a:t>
             </a:fld>
           </a:p>
@@ -2491,7 +2492,7 @@
         <p:txBody>
           <a:bodyPr/>
           <a:p>
-            <a:fld id="{A3B693F8-BBA8-4372-86FC-33A3ADE7335B}" type="slidenum">
+            <a:fld id="{05635452-61CC-49B4-92F0-BA7D96EF9BDA}" type="slidenum">
               <a:t>&lt;#&gt;</a:t>
             </a:fld>
           </a:p>
@@ -2560,7 +2561,7 @@
         <p:spPr>
           <a:xfrm>
             <a:off x="3124080" y="6356520"/>
-            <a:ext cx="2892600" cy="362160"/>
+            <a:ext cx="2892240" cy="361800"/>
           </a:xfrm>
           <a:prstGeom prst="rect">
             <a:avLst/>
@@ -2632,7 +2633,7 @@
         <p:spPr>
           <a:xfrm>
             <a:off x="6553080" y="6356520"/>
-            <a:ext cx="2130840" cy="362160"/>
+            <a:ext cx="2130480" cy="361800"/>
           </a:xfrm>
           <a:prstGeom prst="rect">
             <a:avLst/>
@@ -2673,7 +2674,7 @@
                 <a:tab algn="l" pos="0"/>
               </a:tabLst>
             </a:pPr>
-            <a:fld id="{E6F05F21-1922-473A-8ED2-A3D0B352A3CF}" type="slidenum">
+            <a:fld id="{91025779-ED93-4024-B660-58B9161CC407}" type="slidenum">
               <a:rPr b="0" lang="en-US" sz="1200" spc="-1" strike="noStrike">
                 <a:solidFill>
                   <a:srgbClr val="8b8b8b"/>
@@ -2704,7 +2705,7 @@
         <p:spPr>
           <a:xfrm>
             <a:off x="457200" y="6356520"/>
-            <a:ext cx="2130840" cy="362160"/>
+            <a:ext cx="2130480" cy="361800"/>
           </a:xfrm>
           <a:prstGeom prst="rect">
             <a:avLst/>
@@ -3071,7 +3072,7 @@
         <p:spPr>
           <a:xfrm>
             <a:off x="0" y="0"/>
-            <a:ext cx="12186000" cy="6855120"/>
+            <a:ext cx="12185640" cy="6854760"/>
           </a:xfrm>
           <a:prstGeom prst="rect">
             <a:avLst/>
@@ -3131,7 +3132,7 @@
         <p:spPr>
           <a:xfrm>
             <a:off x="0" y="0"/>
-            <a:ext cx="15480" cy="6855120"/>
+            <a:ext cx="15120" cy="6854760"/>
           </a:xfrm>
           <a:prstGeom prst="rect">
             <a:avLst/>
@@ -3191,7 +3192,7 @@
         <p:spPr>
           <a:xfrm>
             <a:off x="914400" y="0"/>
-            <a:ext cx="15480" cy="6855120"/>
+            <a:ext cx="15120" cy="6854760"/>
           </a:xfrm>
           <a:prstGeom prst="rect">
             <a:avLst/>
@@ -3251,7 +3252,7 @@
         <p:spPr>
           <a:xfrm>
             <a:off x="1828800" y="0"/>
-            <a:ext cx="15480" cy="6855120"/>
+            <a:ext cx="15120" cy="6854760"/>
           </a:xfrm>
           <a:prstGeom prst="rect">
             <a:avLst/>
@@ -3311,7 +3312,7 @@
         <p:spPr>
           <a:xfrm>
             <a:off x="2743200" y="0"/>
-            <a:ext cx="15480" cy="6855120"/>
+            <a:ext cx="15120" cy="6854760"/>
           </a:xfrm>
           <a:prstGeom prst="rect">
             <a:avLst/>
@@ -3371,7 +3372,7 @@
         <p:spPr>
           <a:xfrm>
             <a:off x="3657600" y="0"/>
-            <a:ext cx="15480" cy="6855120"/>
+            <a:ext cx="15120" cy="6854760"/>
           </a:xfrm>
           <a:prstGeom prst="rect">
             <a:avLst/>
@@ -3431,7 +3432,7 @@
         <p:spPr>
           <a:xfrm>
             <a:off x="4572000" y="0"/>
-            <a:ext cx="15480" cy="6855120"/>
+            <a:ext cx="15120" cy="6854760"/>
           </a:xfrm>
           <a:prstGeom prst="rect">
             <a:avLst/>
@@ -3491,7 +3492,7 @@
         <p:spPr>
           <a:xfrm>
             <a:off x="5486400" y="0"/>
-            <a:ext cx="15480" cy="6855120"/>
+            <a:ext cx="15120" cy="6854760"/>
           </a:xfrm>
           <a:prstGeom prst="rect">
             <a:avLst/>
@@ -3551,7 +3552,7 @@
         <p:spPr>
           <a:xfrm>
             <a:off x="6400800" y="0"/>
-            <a:ext cx="15480" cy="6855120"/>
+            <a:ext cx="15120" cy="6854760"/>
           </a:xfrm>
           <a:prstGeom prst="rect">
             <a:avLst/>
@@ -3611,7 +3612,7 @@
         <p:spPr>
           <a:xfrm>
             <a:off x="7315200" y="0"/>
-            <a:ext cx="15480" cy="6855120"/>
+            <a:ext cx="15120" cy="6854760"/>
           </a:xfrm>
           <a:prstGeom prst="rect">
             <a:avLst/>
@@ -3671,7 +3672,7 @@
         <p:spPr>
           <a:xfrm>
             <a:off x="8229600" y="0"/>
-            <a:ext cx="15480" cy="6855120"/>
+            <a:ext cx="15120" cy="6854760"/>
           </a:xfrm>
           <a:prstGeom prst="rect">
             <a:avLst/>
@@ -3731,7 +3732,7 @@
         <p:spPr>
           <a:xfrm>
             <a:off x="9144000" y="0"/>
-            <a:ext cx="15480" cy="6855120"/>
+            <a:ext cx="15120" cy="6854760"/>
           </a:xfrm>
           <a:prstGeom prst="rect">
             <a:avLst/>
@@ -3791,7 +3792,7 @@
         <p:spPr>
           <a:xfrm>
             <a:off x="10058400" y="0"/>
-            <a:ext cx="15480" cy="6855120"/>
+            <a:ext cx="15120" cy="6854760"/>
           </a:xfrm>
           <a:prstGeom prst="rect">
             <a:avLst/>
@@ -3851,7 +3852,7 @@
         <p:spPr>
           <a:xfrm>
             <a:off x="10972800" y="0"/>
-            <a:ext cx="15480" cy="6855120"/>
+            <a:ext cx="15120" cy="6854760"/>
           </a:xfrm>
           <a:prstGeom prst="rect">
             <a:avLst/>
@@ -3911,7 +3912,7 @@
         <p:spPr>
           <a:xfrm>
             <a:off x="11887200" y="0"/>
-            <a:ext cx="15480" cy="6855120"/>
+            <a:ext cx="15120" cy="6854760"/>
           </a:xfrm>
           <a:prstGeom prst="rect">
             <a:avLst/>
@@ -3971,7 +3972,7 @@
         <p:spPr>
           <a:xfrm>
             <a:off x="0" y="0"/>
-            <a:ext cx="317160" cy="6855120"/>
+            <a:ext cx="316800" cy="6854760"/>
           </a:xfrm>
           <a:prstGeom prst="rect">
             <a:avLst/>
@@ -4031,7 +4032,7 @@
         <p:spPr>
           <a:xfrm>
             <a:off x="9875520" y="365760"/>
-            <a:ext cx="2008800" cy="500040"/>
+            <a:ext cx="2008440" cy="499680"/>
           </a:xfrm>
           <a:prstGeom prst="roundRect">
             <a:avLst>
@@ -4259,7 +4260,7 @@
         <p:spPr>
           <a:xfrm>
             <a:off x="987480" y="3182040"/>
-            <a:ext cx="3288960" cy="2740320"/>
+            <a:ext cx="3288600" cy="2739960"/>
           </a:xfrm>
           <a:prstGeom prst="roundRect">
             <a:avLst>
@@ -4321,7 +4322,7 @@
         <p:spPr>
           <a:xfrm>
             <a:off x="914400" y="3108960"/>
-            <a:ext cx="3288960" cy="2740320"/>
+            <a:ext cx="3288600" cy="2739960"/>
           </a:xfrm>
           <a:prstGeom prst="roundRect">
             <a:avLst>
@@ -4455,7 +4456,7 @@
         <p:spPr>
           <a:xfrm>
             <a:off x="4507920" y="3182040"/>
-            <a:ext cx="3288960" cy="2740320"/>
+            <a:ext cx="3288600" cy="2739960"/>
           </a:xfrm>
           <a:prstGeom prst="roundRect">
             <a:avLst>
@@ -4517,7 +4518,7 @@
         <p:spPr>
           <a:xfrm>
             <a:off x="4434840" y="3108960"/>
-            <a:ext cx="3288960" cy="2740320"/>
+            <a:ext cx="3288600" cy="2739960"/>
           </a:xfrm>
           <a:prstGeom prst="roundRect">
             <a:avLst>
@@ -4775,7 +4776,7 @@
         <p:spPr>
           <a:xfrm>
             <a:off x="8028360" y="3182040"/>
-            <a:ext cx="3288960" cy="2740320"/>
+            <a:ext cx="3288600" cy="2739960"/>
           </a:xfrm>
           <a:prstGeom prst="roundRect">
             <a:avLst>
@@ -4837,7 +4838,7 @@
         <p:spPr>
           <a:xfrm>
             <a:off x="7955280" y="2971800"/>
-            <a:ext cx="3930120" cy="3655800"/>
+            <a:ext cx="3929760" cy="3655440"/>
           </a:xfrm>
           <a:prstGeom prst="roundRect">
             <a:avLst>
@@ -5348,7 +5349,7 @@
         <p:spPr>
           <a:xfrm>
             <a:off x="0" y="0"/>
-            <a:ext cx="12186360" cy="6855480"/>
+            <a:ext cx="12186000" cy="6855120"/>
           </a:xfrm>
           <a:prstGeom prst="rect">
             <a:avLst/>
@@ -5408,7 +5409,7 @@
         <p:spPr>
           <a:xfrm>
             <a:off x="0" y="0"/>
-            <a:ext cx="15840" cy="6855480"/>
+            <a:ext cx="15480" cy="6855120"/>
           </a:xfrm>
           <a:prstGeom prst="rect">
             <a:avLst/>
@@ -5468,7 +5469,7 @@
         <p:spPr>
           <a:xfrm>
             <a:off x="914400" y="0"/>
-            <a:ext cx="15840" cy="6855480"/>
+            <a:ext cx="15480" cy="6855120"/>
           </a:xfrm>
           <a:prstGeom prst="rect">
             <a:avLst/>
@@ -5528,7 +5529,7 @@
         <p:spPr>
           <a:xfrm>
             <a:off x="1828800" y="0"/>
-            <a:ext cx="15840" cy="6855480"/>
+            <a:ext cx="15480" cy="6855120"/>
           </a:xfrm>
           <a:prstGeom prst="rect">
             <a:avLst/>
@@ -5588,7 +5589,7 @@
         <p:spPr>
           <a:xfrm>
             <a:off x="2743200" y="0"/>
-            <a:ext cx="15840" cy="6855480"/>
+            <a:ext cx="15480" cy="6855120"/>
           </a:xfrm>
           <a:prstGeom prst="rect">
             <a:avLst/>
@@ -5648,7 +5649,7 @@
         <p:spPr>
           <a:xfrm>
             <a:off x="3657600" y="0"/>
-            <a:ext cx="15840" cy="6855480"/>
+            <a:ext cx="15480" cy="6855120"/>
           </a:xfrm>
           <a:prstGeom prst="rect">
             <a:avLst/>
@@ -5708,7 +5709,7 @@
         <p:spPr>
           <a:xfrm>
             <a:off x="4572000" y="0"/>
-            <a:ext cx="15840" cy="6855480"/>
+            <a:ext cx="15480" cy="6855120"/>
           </a:xfrm>
           <a:prstGeom prst="rect">
             <a:avLst/>
@@ -5768,7 +5769,7 @@
         <p:spPr>
           <a:xfrm>
             <a:off x="5486400" y="0"/>
-            <a:ext cx="15840" cy="6855480"/>
+            <a:ext cx="15480" cy="6855120"/>
           </a:xfrm>
           <a:prstGeom prst="rect">
             <a:avLst/>
@@ -5828,7 +5829,7 @@
         <p:spPr>
           <a:xfrm>
             <a:off x="6400800" y="0"/>
-            <a:ext cx="15840" cy="6855480"/>
+            <a:ext cx="15480" cy="6855120"/>
           </a:xfrm>
           <a:prstGeom prst="rect">
             <a:avLst/>
@@ -5888,7 +5889,7 @@
         <p:spPr>
           <a:xfrm>
             <a:off x="7315200" y="0"/>
-            <a:ext cx="15840" cy="6855480"/>
+            <a:ext cx="15480" cy="6855120"/>
           </a:xfrm>
           <a:prstGeom prst="rect">
             <a:avLst/>
@@ -5948,7 +5949,7 @@
         <p:spPr>
           <a:xfrm>
             <a:off x="8229600" y="0"/>
-            <a:ext cx="15840" cy="6855480"/>
+            <a:ext cx="15480" cy="6855120"/>
           </a:xfrm>
           <a:prstGeom prst="rect">
             <a:avLst/>
@@ -6008,7 +6009,7 @@
         <p:spPr>
           <a:xfrm>
             <a:off x="9144000" y="0"/>
-            <a:ext cx="15840" cy="6855480"/>
+            <a:ext cx="15480" cy="6855120"/>
           </a:xfrm>
           <a:prstGeom prst="rect">
             <a:avLst/>
@@ -6068,7 +6069,7 @@
         <p:spPr>
           <a:xfrm>
             <a:off x="10058400" y="0"/>
-            <a:ext cx="15840" cy="6855480"/>
+            <a:ext cx="15480" cy="6855120"/>
           </a:xfrm>
           <a:prstGeom prst="rect">
             <a:avLst/>
@@ -6128,7 +6129,7 @@
         <p:spPr>
           <a:xfrm>
             <a:off x="10972800" y="0"/>
-            <a:ext cx="15840" cy="6855480"/>
+            <a:ext cx="15480" cy="6855120"/>
           </a:xfrm>
           <a:prstGeom prst="rect">
             <a:avLst/>
@@ -6188,7 +6189,7 @@
         <p:spPr>
           <a:xfrm>
             <a:off x="11887200" y="0"/>
-            <a:ext cx="15840" cy="6855480"/>
+            <a:ext cx="15480" cy="6855120"/>
           </a:xfrm>
           <a:prstGeom prst="rect">
             <a:avLst/>
@@ -6248,7 +6249,7 @@
         <p:spPr>
           <a:xfrm>
             <a:off x="0" y="0"/>
-            <a:ext cx="317520" cy="6855480"/>
+            <a:ext cx="317160" cy="6855120"/>
           </a:xfrm>
           <a:prstGeom prst="rect">
             <a:avLst/>
@@ -6308,7 +6309,7 @@
         <p:spPr>
           <a:xfrm>
             <a:off x="9875520" y="365760"/>
-            <a:ext cx="2009160" cy="500400"/>
+            <a:ext cx="2008800" cy="500040"/>
           </a:xfrm>
           <a:prstGeom prst="roundRect">
             <a:avLst>
@@ -6536,7 +6537,7 @@
         <p:spPr>
           <a:xfrm>
             <a:off x="987480" y="3182040"/>
-            <a:ext cx="3289320" cy="2740680"/>
+            <a:ext cx="3288960" cy="2740320"/>
           </a:xfrm>
           <a:prstGeom prst="roundRect">
             <a:avLst>
@@ -6598,7 +6599,7 @@
         <p:spPr>
           <a:xfrm>
             <a:off x="914400" y="3108960"/>
-            <a:ext cx="3289320" cy="3061800"/>
+            <a:ext cx="3288960" cy="3061440"/>
           </a:xfrm>
           <a:prstGeom prst="roundRect">
             <a:avLst>
@@ -6761,7 +6762,7 @@
         <p:spPr>
           <a:xfrm>
             <a:off x="4507920" y="3182040"/>
-            <a:ext cx="3289320" cy="2740680"/>
+            <a:ext cx="3288960" cy="2740320"/>
           </a:xfrm>
           <a:prstGeom prst="roundRect">
             <a:avLst>
@@ -6823,7 +6824,7 @@
         <p:spPr>
           <a:xfrm>
             <a:off x="4434840" y="2971800"/>
-            <a:ext cx="3289320" cy="3427560"/>
+            <a:ext cx="3288960" cy="3427200"/>
           </a:xfrm>
           <a:prstGeom prst="roundRect">
             <a:avLst>
@@ -7081,7 +7082,7 @@
         <p:spPr>
           <a:xfrm>
             <a:off x="8028360" y="3182040"/>
-            <a:ext cx="3289320" cy="2740680"/>
+            <a:ext cx="3288960" cy="2740320"/>
           </a:xfrm>
           <a:prstGeom prst="roundRect">
             <a:avLst>
@@ -7143,7 +7144,7 @@
         <p:spPr>
           <a:xfrm>
             <a:off x="7955280" y="3108960"/>
-            <a:ext cx="3701880" cy="3061800"/>
+            <a:ext cx="3701520" cy="3061440"/>
           </a:xfrm>
           <a:prstGeom prst="roundRect">
             <a:avLst>
@@ -7588,7 +7589,7 @@
         <p:spPr>
           <a:xfrm>
             <a:off x="0" y="0"/>
-            <a:ext cx="12186360" cy="6855480"/>
+            <a:ext cx="12186000" cy="6855120"/>
           </a:xfrm>
           <a:prstGeom prst="rect">
             <a:avLst/>
@@ -7648,7 +7649,7 @@
         <p:spPr>
           <a:xfrm>
             <a:off x="0" y="0"/>
-            <a:ext cx="15840" cy="6855480"/>
+            <a:ext cx="15480" cy="6855120"/>
           </a:xfrm>
           <a:prstGeom prst="rect">
             <a:avLst/>
@@ -7708,7 +7709,7 @@
         <p:spPr>
           <a:xfrm>
             <a:off x="914400" y="0"/>
-            <a:ext cx="15840" cy="6855480"/>
+            <a:ext cx="15480" cy="6855120"/>
           </a:xfrm>
           <a:prstGeom prst="rect">
             <a:avLst/>
@@ -7768,7 +7769,7 @@
         <p:spPr>
           <a:xfrm>
             <a:off x="1828800" y="0"/>
-            <a:ext cx="15840" cy="6855480"/>
+            <a:ext cx="15480" cy="6855120"/>
           </a:xfrm>
           <a:prstGeom prst="rect">
             <a:avLst/>
@@ -7828,7 +7829,7 @@
         <p:spPr>
           <a:xfrm>
             <a:off x="2743200" y="0"/>
-            <a:ext cx="15840" cy="6855480"/>
+            <a:ext cx="15480" cy="6855120"/>
           </a:xfrm>
           <a:prstGeom prst="rect">
             <a:avLst/>
@@ -7888,7 +7889,7 @@
         <p:spPr>
           <a:xfrm>
             <a:off x="3657600" y="0"/>
-            <a:ext cx="15840" cy="6855480"/>
+            <a:ext cx="15480" cy="6855120"/>
           </a:xfrm>
           <a:prstGeom prst="rect">
             <a:avLst/>
@@ -7948,7 +7949,7 @@
         <p:spPr>
           <a:xfrm>
             <a:off x="4572000" y="0"/>
-            <a:ext cx="15840" cy="6855480"/>
+            <a:ext cx="15480" cy="6855120"/>
           </a:xfrm>
           <a:prstGeom prst="rect">
             <a:avLst/>
@@ -8008,7 +8009,7 @@
         <p:spPr>
           <a:xfrm>
             <a:off x="5486400" y="0"/>
-            <a:ext cx="15840" cy="6855480"/>
+            <a:ext cx="15480" cy="6855120"/>
           </a:xfrm>
           <a:prstGeom prst="rect">
             <a:avLst/>
@@ -8068,7 +8069,7 @@
         <p:spPr>
           <a:xfrm>
             <a:off x="6400800" y="0"/>
-            <a:ext cx="15840" cy="6855480"/>
+            <a:ext cx="15480" cy="6855120"/>
           </a:xfrm>
           <a:prstGeom prst="rect">
             <a:avLst/>
@@ -8128,7 +8129,7 @@
         <p:spPr>
           <a:xfrm>
             <a:off x="7315200" y="0"/>
-            <a:ext cx="15840" cy="6855480"/>
+            <a:ext cx="15480" cy="6855120"/>
           </a:xfrm>
           <a:prstGeom prst="rect">
             <a:avLst/>
@@ -8188,7 +8189,7 @@
         <p:spPr>
           <a:xfrm>
             <a:off x="8229600" y="0"/>
-            <a:ext cx="15840" cy="6855480"/>
+            <a:ext cx="15480" cy="6855120"/>
           </a:xfrm>
           <a:prstGeom prst="rect">
             <a:avLst/>
@@ -8248,7 +8249,7 @@
         <p:spPr>
           <a:xfrm>
             <a:off x="9144000" y="0"/>
-            <a:ext cx="15840" cy="6855480"/>
+            <a:ext cx="15480" cy="6855120"/>
           </a:xfrm>
           <a:prstGeom prst="rect">
             <a:avLst/>
@@ -8308,7 +8309,7 @@
         <p:spPr>
           <a:xfrm>
             <a:off x="10058400" y="0"/>
-            <a:ext cx="15840" cy="6855480"/>
+            <a:ext cx="15480" cy="6855120"/>
           </a:xfrm>
           <a:prstGeom prst="rect">
             <a:avLst/>
@@ -8368,7 +8369,7 @@
         <p:spPr>
           <a:xfrm>
             <a:off x="10972800" y="0"/>
-            <a:ext cx="15840" cy="6855480"/>
+            <a:ext cx="15480" cy="6855120"/>
           </a:xfrm>
           <a:prstGeom prst="rect">
             <a:avLst/>
@@ -8428,7 +8429,7 @@
         <p:spPr>
           <a:xfrm>
             <a:off x="11887200" y="0"/>
-            <a:ext cx="15840" cy="6855480"/>
+            <a:ext cx="15480" cy="6855120"/>
           </a:xfrm>
           <a:prstGeom prst="rect">
             <a:avLst/>
@@ -8488,7 +8489,7 @@
         <p:spPr>
           <a:xfrm>
             <a:off x="0" y="0"/>
-            <a:ext cx="317520" cy="6855480"/>
+            <a:ext cx="317160" cy="6855120"/>
           </a:xfrm>
           <a:prstGeom prst="rect">
             <a:avLst/>
@@ -8548,7 +8549,7 @@
         <p:spPr>
           <a:xfrm>
             <a:off x="9875520" y="365760"/>
-            <a:ext cx="2009160" cy="500400"/>
+            <a:ext cx="2008800" cy="500040"/>
           </a:xfrm>
           <a:prstGeom prst="roundRect">
             <a:avLst>
@@ -8676,7 +8677,7 @@
         <p:spPr>
           <a:xfrm>
             <a:off x="1304280" y="1828800"/>
-            <a:ext cx="8879040" cy="819720"/>
+            <a:ext cx="8878680" cy="819720"/>
           </a:xfrm>
           <a:prstGeom prst="rect">
             <a:avLst/>
@@ -8776,7 +8777,7 @@
         <p:spPr>
           <a:xfrm>
             <a:off x="987480" y="3182040"/>
-            <a:ext cx="3289320" cy="2740680"/>
+            <a:ext cx="3288960" cy="2740320"/>
           </a:xfrm>
           <a:prstGeom prst="roundRect">
             <a:avLst>
@@ -8838,7 +8839,7 @@
         <p:spPr>
           <a:xfrm>
             <a:off x="685800" y="2971800"/>
-            <a:ext cx="3517920" cy="3198960"/>
+            <a:ext cx="3517560" cy="3198600"/>
           </a:xfrm>
           <a:prstGeom prst="roundRect">
             <a:avLst>
@@ -9029,7 +9030,7 @@
         <p:spPr>
           <a:xfrm>
             <a:off x="4507920" y="3182040"/>
-            <a:ext cx="3289320" cy="2740680"/>
+            <a:ext cx="3288960" cy="2740320"/>
           </a:xfrm>
           <a:prstGeom prst="roundRect">
             <a:avLst>
@@ -9091,7 +9092,7 @@
         <p:spPr>
           <a:xfrm>
             <a:off x="4434840" y="2971800"/>
-            <a:ext cx="3289320" cy="3427560"/>
+            <a:ext cx="3288960" cy="3427200"/>
           </a:xfrm>
           <a:prstGeom prst="roundRect">
             <a:avLst>
@@ -9349,7 +9350,7 @@
         <p:spPr>
           <a:xfrm>
             <a:off x="8028360" y="3182040"/>
-            <a:ext cx="3289320" cy="2740680"/>
+            <a:ext cx="3288960" cy="2740320"/>
           </a:xfrm>
           <a:prstGeom prst="roundRect">
             <a:avLst>
@@ -9411,7 +9412,7 @@
         <p:spPr>
           <a:xfrm>
             <a:off x="7955280" y="3108960"/>
-            <a:ext cx="3701880" cy="3061800"/>
+            <a:ext cx="3701520" cy="3061440"/>
           </a:xfrm>
           <a:prstGeom prst="roundRect">
             <a:avLst>
@@ -9856,7 +9857,7 @@
         <p:spPr>
           <a:xfrm>
             <a:off x="0" y="0"/>
-            <a:ext cx="12186360" cy="6855480"/>
+            <a:ext cx="12186000" cy="6855120"/>
           </a:xfrm>
           <a:prstGeom prst="rect">
             <a:avLst/>
@@ -9916,7 +9917,7 @@
         <p:spPr>
           <a:xfrm>
             <a:off x="0" y="0"/>
-            <a:ext cx="15840" cy="6855480"/>
+            <a:ext cx="15480" cy="6855120"/>
           </a:xfrm>
           <a:prstGeom prst="rect">
             <a:avLst/>
@@ -9976,7 +9977,7 @@
         <p:spPr>
           <a:xfrm>
             <a:off x="914400" y="0"/>
-            <a:ext cx="15840" cy="6855480"/>
+            <a:ext cx="15480" cy="6855120"/>
           </a:xfrm>
           <a:prstGeom prst="rect">
             <a:avLst/>
@@ -10036,7 +10037,7 @@
         <p:spPr>
           <a:xfrm>
             <a:off x="1828800" y="0"/>
-            <a:ext cx="15840" cy="6855480"/>
+            <a:ext cx="15480" cy="6855120"/>
           </a:xfrm>
           <a:prstGeom prst="rect">
             <a:avLst/>
@@ -10096,7 +10097,7 @@
         <p:spPr>
           <a:xfrm>
             <a:off x="2743200" y="0"/>
-            <a:ext cx="15840" cy="6855480"/>
+            <a:ext cx="15480" cy="6855120"/>
           </a:xfrm>
           <a:prstGeom prst="rect">
             <a:avLst/>
@@ -10156,7 +10157,7 @@
         <p:spPr>
           <a:xfrm>
             <a:off x="3657600" y="0"/>
-            <a:ext cx="15840" cy="6855480"/>
+            <a:ext cx="15480" cy="6855120"/>
           </a:xfrm>
           <a:prstGeom prst="rect">
             <a:avLst/>
@@ -10216,7 +10217,7 @@
         <p:spPr>
           <a:xfrm>
             <a:off x="4572000" y="0"/>
-            <a:ext cx="15840" cy="6855480"/>
+            <a:ext cx="15480" cy="6855120"/>
           </a:xfrm>
           <a:prstGeom prst="rect">
             <a:avLst/>
@@ -10276,7 +10277,7 @@
         <p:spPr>
           <a:xfrm>
             <a:off x="5486400" y="0"/>
-            <a:ext cx="15840" cy="6855480"/>
+            <a:ext cx="15480" cy="6855120"/>
           </a:xfrm>
           <a:prstGeom prst="rect">
             <a:avLst/>
@@ -10336,7 +10337,7 @@
         <p:spPr>
           <a:xfrm>
             <a:off x="6400800" y="0"/>
-            <a:ext cx="15840" cy="6855480"/>
+            <a:ext cx="15480" cy="6855120"/>
           </a:xfrm>
           <a:prstGeom prst="rect">
             <a:avLst/>
@@ -10396,7 +10397,7 @@
         <p:spPr>
           <a:xfrm>
             <a:off x="7315200" y="0"/>
-            <a:ext cx="15840" cy="6855480"/>
+            <a:ext cx="15480" cy="6855120"/>
           </a:xfrm>
           <a:prstGeom prst="rect">
             <a:avLst/>
@@ -10456,7 +10457,7 @@
         <p:spPr>
           <a:xfrm>
             <a:off x="8229600" y="0"/>
-            <a:ext cx="15840" cy="6855480"/>
+            <a:ext cx="15480" cy="6855120"/>
           </a:xfrm>
           <a:prstGeom prst="rect">
             <a:avLst/>
@@ -10516,7 +10517,7 @@
         <p:spPr>
           <a:xfrm>
             <a:off x="9144000" y="0"/>
-            <a:ext cx="15840" cy="6855480"/>
+            <a:ext cx="15480" cy="6855120"/>
           </a:xfrm>
           <a:prstGeom prst="rect">
             <a:avLst/>
@@ -10576,7 +10577,7 @@
         <p:spPr>
           <a:xfrm>
             <a:off x="10058400" y="0"/>
-            <a:ext cx="15840" cy="6855480"/>
+            <a:ext cx="15480" cy="6855120"/>
           </a:xfrm>
           <a:prstGeom prst="rect">
             <a:avLst/>
@@ -10636,7 +10637,7 @@
         <p:spPr>
           <a:xfrm>
             <a:off x="10972800" y="0"/>
-            <a:ext cx="15840" cy="6855480"/>
+            <a:ext cx="15480" cy="6855120"/>
           </a:xfrm>
           <a:prstGeom prst="rect">
             <a:avLst/>
@@ -10696,7 +10697,7 @@
         <p:spPr>
           <a:xfrm>
             <a:off x="11887200" y="0"/>
-            <a:ext cx="15840" cy="6855480"/>
+            <a:ext cx="15480" cy="6855120"/>
           </a:xfrm>
           <a:prstGeom prst="rect">
             <a:avLst/>
@@ -10756,7 +10757,7 @@
         <p:spPr>
           <a:xfrm>
             <a:off x="0" y="0"/>
-            <a:ext cx="317520" cy="6855480"/>
+            <a:ext cx="317160" cy="6855120"/>
           </a:xfrm>
           <a:prstGeom prst="rect">
             <a:avLst/>
@@ -10816,7 +10817,7 @@
         <p:spPr>
           <a:xfrm>
             <a:off x="9875520" y="365760"/>
-            <a:ext cx="2009160" cy="500400"/>
+            <a:ext cx="2008800" cy="500040"/>
           </a:xfrm>
           <a:prstGeom prst="roundRect">
             <a:avLst>
@@ -10890,7 +10891,7 @@
         <p:spPr>
           <a:xfrm>
             <a:off x="2845800" y="914400"/>
-            <a:ext cx="5278320" cy="638280"/>
+            <a:ext cx="5277960" cy="638280"/>
           </a:xfrm>
           <a:prstGeom prst="rect">
             <a:avLst/>
@@ -10944,7 +10945,7 @@
         <p:spPr>
           <a:xfrm>
             <a:off x="1726200" y="1828800"/>
-            <a:ext cx="8035200" cy="576360"/>
+            <a:ext cx="8034840" cy="576360"/>
           </a:xfrm>
           <a:prstGeom prst="rect">
             <a:avLst/>
@@ -11021,7 +11022,7 @@
         <p:spPr>
           <a:xfrm>
             <a:off x="987480" y="3182040"/>
-            <a:ext cx="3289320" cy="2740680"/>
+            <a:ext cx="3288960" cy="2740320"/>
           </a:xfrm>
           <a:prstGeom prst="roundRect">
             <a:avLst>
@@ -11083,7 +11084,7 @@
         <p:spPr>
           <a:xfrm>
             <a:off x="685800" y="2971800"/>
-            <a:ext cx="3517920" cy="3198960"/>
+            <a:ext cx="3517560" cy="3198600"/>
           </a:xfrm>
           <a:prstGeom prst="roundRect">
             <a:avLst>
@@ -11274,7 +11275,7 @@
         <p:spPr>
           <a:xfrm>
             <a:off x="4507920" y="3182040"/>
-            <a:ext cx="3289320" cy="2740680"/>
+            <a:ext cx="3288960" cy="2740320"/>
           </a:xfrm>
           <a:prstGeom prst="roundRect">
             <a:avLst>
@@ -11336,7 +11337,7 @@
         <p:spPr>
           <a:xfrm>
             <a:off x="4434840" y="2971800"/>
-            <a:ext cx="3289320" cy="3427560"/>
+            <a:ext cx="3288960" cy="3427200"/>
           </a:xfrm>
           <a:prstGeom prst="roundRect">
             <a:avLst>
@@ -11548,7 +11549,7 @@
         <p:spPr>
           <a:xfrm>
             <a:off x="8028360" y="3182040"/>
-            <a:ext cx="3289320" cy="2740680"/>
+            <a:ext cx="3288960" cy="2740320"/>
           </a:xfrm>
           <a:prstGeom prst="roundRect">
             <a:avLst>
@@ -11610,7 +11611,7 @@
         <p:spPr>
           <a:xfrm>
             <a:off x="7955280" y="2743200"/>
-            <a:ext cx="3931200" cy="3885480"/>
+            <a:ext cx="3930840" cy="3885120"/>
           </a:xfrm>
           <a:prstGeom prst="roundRect">
             <a:avLst>
@@ -12170,7 +12171,7 @@
         <p:spPr>
           <a:xfrm>
             <a:off x="0" y="0"/>
-            <a:ext cx="12186360" cy="6855480"/>
+            <a:ext cx="12186000" cy="6855120"/>
           </a:xfrm>
           <a:prstGeom prst="rect">
             <a:avLst/>
@@ -12230,7 +12231,7 @@
         <p:spPr>
           <a:xfrm>
             <a:off x="0" y="0"/>
-            <a:ext cx="15840" cy="6855480"/>
+            <a:ext cx="15480" cy="6855120"/>
           </a:xfrm>
           <a:prstGeom prst="rect">
             <a:avLst/>
@@ -12290,7 +12291,7 @@
         <p:spPr>
           <a:xfrm>
             <a:off x="914400" y="0"/>
-            <a:ext cx="15840" cy="6855480"/>
+            <a:ext cx="15480" cy="6855120"/>
           </a:xfrm>
           <a:prstGeom prst="rect">
             <a:avLst/>
@@ -12350,7 +12351,7 @@
         <p:spPr>
           <a:xfrm>
             <a:off x="1828800" y="0"/>
-            <a:ext cx="15840" cy="6855480"/>
+            <a:ext cx="15480" cy="6855120"/>
           </a:xfrm>
           <a:prstGeom prst="rect">
             <a:avLst/>
@@ -12410,7 +12411,7 @@
         <p:spPr>
           <a:xfrm>
             <a:off x="2743200" y="0"/>
-            <a:ext cx="15840" cy="6855480"/>
+            <a:ext cx="15480" cy="6855120"/>
           </a:xfrm>
           <a:prstGeom prst="rect">
             <a:avLst/>
@@ -12470,7 +12471,7 @@
         <p:spPr>
           <a:xfrm>
             <a:off x="3657600" y="0"/>
-            <a:ext cx="15840" cy="6855480"/>
+            <a:ext cx="15480" cy="6855120"/>
           </a:xfrm>
           <a:prstGeom prst="rect">
             <a:avLst/>
@@ -12530,7 +12531,7 @@
         <p:spPr>
           <a:xfrm>
             <a:off x="4572000" y="0"/>
-            <a:ext cx="15840" cy="6855480"/>
+            <a:ext cx="15480" cy="6855120"/>
           </a:xfrm>
           <a:prstGeom prst="rect">
             <a:avLst/>
@@ -12590,7 +12591,7 @@
         <p:spPr>
           <a:xfrm>
             <a:off x="5486400" y="0"/>
-            <a:ext cx="15840" cy="6855480"/>
+            <a:ext cx="15480" cy="6855120"/>
           </a:xfrm>
           <a:prstGeom prst="rect">
             <a:avLst/>
@@ -12650,7 +12651,7 @@
         <p:spPr>
           <a:xfrm>
             <a:off x="6400800" y="0"/>
-            <a:ext cx="15840" cy="6855480"/>
+            <a:ext cx="15480" cy="6855120"/>
           </a:xfrm>
           <a:prstGeom prst="rect">
             <a:avLst/>
@@ -12710,7 +12711,7 @@
         <p:spPr>
           <a:xfrm>
             <a:off x="7315200" y="0"/>
-            <a:ext cx="15840" cy="6855480"/>
+            <a:ext cx="15480" cy="6855120"/>
           </a:xfrm>
           <a:prstGeom prst="rect">
             <a:avLst/>
@@ -12770,7 +12771,7 @@
         <p:spPr>
           <a:xfrm>
             <a:off x="8229600" y="0"/>
-            <a:ext cx="15840" cy="6855480"/>
+            <a:ext cx="15480" cy="6855120"/>
           </a:xfrm>
           <a:prstGeom prst="rect">
             <a:avLst/>
@@ -12830,7 +12831,7 @@
         <p:spPr>
           <a:xfrm>
             <a:off x="9144000" y="0"/>
-            <a:ext cx="15840" cy="6855480"/>
+            <a:ext cx="15480" cy="6855120"/>
           </a:xfrm>
           <a:prstGeom prst="rect">
             <a:avLst/>
@@ -12890,7 +12891,7 @@
         <p:spPr>
           <a:xfrm>
             <a:off x="10058400" y="0"/>
-            <a:ext cx="15840" cy="6855480"/>
+            <a:ext cx="15480" cy="6855120"/>
           </a:xfrm>
           <a:prstGeom prst="rect">
             <a:avLst/>
@@ -12950,7 +12951,7 @@
         <p:spPr>
           <a:xfrm>
             <a:off x="10972800" y="0"/>
-            <a:ext cx="15840" cy="6855480"/>
+            <a:ext cx="15480" cy="6855120"/>
           </a:xfrm>
           <a:prstGeom prst="rect">
             <a:avLst/>
@@ -13010,7 +13011,7 @@
         <p:spPr>
           <a:xfrm>
             <a:off x="11887200" y="0"/>
-            <a:ext cx="15840" cy="6855480"/>
+            <a:ext cx="15480" cy="6855120"/>
           </a:xfrm>
           <a:prstGeom prst="rect">
             <a:avLst/>
@@ -13070,7 +13071,7 @@
         <p:spPr>
           <a:xfrm>
             <a:off x="0" y="0"/>
-            <a:ext cx="317520" cy="6855480"/>
+            <a:ext cx="317160" cy="6855120"/>
           </a:xfrm>
           <a:prstGeom prst="rect">
             <a:avLst/>
@@ -13130,7 +13131,7 @@
         <p:spPr>
           <a:xfrm>
             <a:off x="9875520" y="365760"/>
-            <a:ext cx="2009160" cy="500400"/>
+            <a:ext cx="2008800" cy="500040"/>
           </a:xfrm>
           <a:prstGeom prst="roundRect">
             <a:avLst>
@@ -13258,7 +13259,7 @@
         <p:spPr>
           <a:xfrm>
             <a:off x="2278800" y="1828800"/>
-            <a:ext cx="6930360" cy="576360"/>
+            <a:ext cx="6930000" cy="576360"/>
           </a:xfrm>
           <a:prstGeom prst="rect">
             <a:avLst/>
@@ -13335,7 +13336,7 @@
         <p:spPr>
           <a:xfrm>
             <a:off x="987480" y="3182040"/>
-            <a:ext cx="3289320" cy="2740680"/>
+            <a:ext cx="3288960" cy="2740320"/>
           </a:xfrm>
           <a:prstGeom prst="roundRect">
             <a:avLst>
@@ -13397,7 +13398,7 @@
         <p:spPr>
           <a:xfrm>
             <a:off x="457200" y="2743200"/>
-            <a:ext cx="3746520" cy="3885840"/>
+            <a:ext cx="3746160" cy="3885480"/>
           </a:xfrm>
           <a:prstGeom prst="roundRect">
             <a:avLst>
@@ -13635,7 +13636,7 @@
         <p:spPr>
           <a:xfrm>
             <a:off x="4507920" y="3182040"/>
-            <a:ext cx="3289320" cy="2740680"/>
+            <a:ext cx="3288960" cy="2740320"/>
           </a:xfrm>
           <a:prstGeom prst="roundRect">
             <a:avLst>
@@ -13697,7 +13698,7 @@
         <p:spPr>
           <a:xfrm>
             <a:off x="4434840" y="2971800"/>
-            <a:ext cx="3289320" cy="3427560"/>
+            <a:ext cx="3288960" cy="3427200"/>
           </a:xfrm>
           <a:prstGeom prst="roundRect">
             <a:avLst>
@@ -13916,7 +13917,7 @@
         <p:spPr>
           <a:xfrm>
             <a:off x="8028360" y="3182040"/>
-            <a:ext cx="3289320" cy="2740680"/>
+            <a:ext cx="3288960" cy="2740320"/>
           </a:xfrm>
           <a:prstGeom prst="roundRect">
             <a:avLst>
@@ -13978,7 +13979,7 @@
         <p:spPr>
           <a:xfrm>
             <a:off x="8001000" y="3200400"/>
-            <a:ext cx="3474360" cy="2742840"/>
+            <a:ext cx="3474000" cy="2742480"/>
           </a:xfrm>
           <a:prstGeom prst="roundRect">
             <a:avLst>
@@ -14390,7 +14391,7 @@
         <p:spPr>
           <a:xfrm>
             <a:off x="0" y="0"/>
-            <a:ext cx="12186000" cy="6855120"/>
+            <a:ext cx="12185640" cy="6854760"/>
           </a:xfrm>
           <a:prstGeom prst="rect">
             <a:avLst/>
@@ -14426,6 +14427,11 @@
             <a:noAutofit/>
           </a:bodyPr>
           <a:p>
+            <a:pPr>
+              <a:lnSpc>
+                <a:spcPct val="100000"/>
+              </a:lnSpc>
+            </a:pPr>
             <a:endParaRPr b="0" lang="en-US" sz="1800" spc="-1" strike="noStrike">
               <a:solidFill>
                 <a:schemeClr val="lt1"/>
@@ -14445,7 +14451,7 @@
         <p:spPr>
           <a:xfrm>
             <a:off x="0" y="0"/>
-            <a:ext cx="15480" cy="6855120"/>
+            <a:ext cx="15120" cy="6854760"/>
           </a:xfrm>
           <a:prstGeom prst="rect">
             <a:avLst/>
@@ -14481,6 +14487,11 @@
             <a:noAutofit/>
           </a:bodyPr>
           <a:p>
+            <a:pPr>
+              <a:lnSpc>
+                <a:spcPct val="100000"/>
+              </a:lnSpc>
+            </a:pPr>
             <a:endParaRPr b="0" lang="en-US" sz="1800" spc="-1" strike="noStrike">
               <a:solidFill>
                 <a:schemeClr val="lt1"/>
@@ -14500,7 +14511,7 @@
         <p:spPr>
           <a:xfrm>
             <a:off x="914400" y="0"/>
-            <a:ext cx="15480" cy="6855120"/>
+            <a:ext cx="15120" cy="6854760"/>
           </a:xfrm>
           <a:prstGeom prst="rect">
             <a:avLst/>
@@ -14536,6 +14547,11 @@
             <a:noAutofit/>
           </a:bodyPr>
           <a:p>
+            <a:pPr>
+              <a:lnSpc>
+                <a:spcPct val="100000"/>
+              </a:lnSpc>
+            </a:pPr>
             <a:endParaRPr b="0" lang="en-US" sz="1800" spc="-1" strike="noStrike">
               <a:solidFill>
                 <a:schemeClr val="lt1"/>
@@ -14555,7 +14571,7 @@
         <p:spPr>
           <a:xfrm>
             <a:off x="1828800" y="0"/>
-            <a:ext cx="15480" cy="6855120"/>
+            <a:ext cx="15120" cy="6854760"/>
           </a:xfrm>
           <a:prstGeom prst="rect">
             <a:avLst/>
@@ -14591,6 +14607,11 @@
             <a:noAutofit/>
           </a:bodyPr>
           <a:p>
+            <a:pPr>
+              <a:lnSpc>
+                <a:spcPct val="100000"/>
+              </a:lnSpc>
+            </a:pPr>
             <a:endParaRPr b="0" lang="en-US" sz="1800" spc="-1" strike="noStrike">
               <a:solidFill>
                 <a:schemeClr val="lt1"/>
@@ -14610,7 +14631,7 @@
         <p:spPr>
           <a:xfrm>
             <a:off x="2743200" y="0"/>
-            <a:ext cx="15480" cy="6855120"/>
+            <a:ext cx="15120" cy="6854760"/>
           </a:xfrm>
           <a:prstGeom prst="rect">
             <a:avLst/>
@@ -14646,6 +14667,11 @@
             <a:noAutofit/>
           </a:bodyPr>
           <a:p>
+            <a:pPr>
+              <a:lnSpc>
+                <a:spcPct val="100000"/>
+              </a:lnSpc>
+            </a:pPr>
             <a:endParaRPr b="0" lang="en-US" sz="1800" spc="-1" strike="noStrike">
               <a:solidFill>
                 <a:schemeClr val="lt1"/>
@@ -14665,7 +14691,7 @@
         <p:spPr>
           <a:xfrm>
             <a:off x="3657600" y="0"/>
-            <a:ext cx="15480" cy="6855120"/>
+            <a:ext cx="15120" cy="6854760"/>
           </a:xfrm>
           <a:prstGeom prst="rect">
             <a:avLst/>
@@ -14701,6 +14727,11 @@
             <a:noAutofit/>
           </a:bodyPr>
           <a:p>
+            <a:pPr>
+              <a:lnSpc>
+                <a:spcPct val="100000"/>
+              </a:lnSpc>
+            </a:pPr>
             <a:endParaRPr b="0" lang="en-US" sz="1800" spc="-1" strike="noStrike">
               <a:solidFill>
                 <a:schemeClr val="lt1"/>
@@ -14720,7 +14751,7 @@
         <p:spPr>
           <a:xfrm>
             <a:off x="4572000" y="0"/>
-            <a:ext cx="15480" cy="6855120"/>
+            <a:ext cx="15120" cy="6854760"/>
           </a:xfrm>
           <a:prstGeom prst="rect">
             <a:avLst/>
@@ -14756,6 +14787,11 @@
             <a:noAutofit/>
           </a:bodyPr>
           <a:p>
+            <a:pPr>
+              <a:lnSpc>
+                <a:spcPct val="100000"/>
+              </a:lnSpc>
+            </a:pPr>
             <a:endParaRPr b="0" lang="en-US" sz="1800" spc="-1" strike="noStrike">
               <a:solidFill>
                 <a:schemeClr val="lt1"/>
@@ -14775,7 +14811,7 @@
         <p:spPr>
           <a:xfrm>
             <a:off x="5486400" y="0"/>
-            <a:ext cx="15480" cy="6855120"/>
+            <a:ext cx="15120" cy="6854760"/>
           </a:xfrm>
           <a:prstGeom prst="rect">
             <a:avLst/>
@@ -14811,6 +14847,11 @@
             <a:noAutofit/>
           </a:bodyPr>
           <a:p>
+            <a:pPr>
+              <a:lnSpc>
+                <a:spcPct val="100000"/>
+              </a:lnSpc>
+            </a:pPr>
             <a:endParaRPr b="0" lang="en-US" sz="1800" spc="-1" strike="noStrike">
               <a:solidFill>
                 <a:schemeClr val="lt1"/>
@@ -14830,7 +14871,7 @@
         <p:spPr>
           <a:xfrm>
             <a:off x="6400800" y="0"/>
-            <a:ext cx="15480" cy="6855120"/>
+            <a:ext cx="15120" cy="6854760"/>
           </a:xfrm>
           <a:prstGeom prst="rect">
             <a:avLst/>
@@ -14866,6 +14907,11 @@
             <a:noAutofit/>
           </a:bodyPr>
           <a:p>
+            <a:pPr>
+              <a:lnSpc>
+                <a:spcPct val="100000"/>
+              </a:lnSpc>
+            </a:pPr>
             <a:endParaRPr b="0" lang="en-US" sz="1800" spc="-1" strike="noStrike">
               <a:solidFill>
                 <a:schemeClr val="lt1"/>
@@ -14885,7 +14931,7 @@
         <p:spPr>
           <a:xfrm>
             <a:off x="7315200" y="0"/>
-            <a:ext cx="15480" cy="6855120"/>
+            <a:ext cx="15120" cy="6854760"/>
           </a:xfrm>
           <a:prstGeom prst="rect">
             <a:avLst/>
@@ -14921,6 +14967,11 @@
             <a:noAutofit/>
           </a:bodyPr>
           <a:p>
+            <a:pPr>
+              <a:lnSpc>
+                <a:spcPct val="100000"/>
+              </a:lnSpc>
+            </a:pPr>
             <a:endParaRPr b="0" lang="en-US" sz="1800" spc="-1" strike="noStrike">
               <a:solidFill>
                 <a:schemeClr val="lt1"/>
@@ -14940,7 +14991,7 @@
         <p:spPr>
           <a:xfrm>
             <a:off x="8229600" y="0"/>
-            <a:ext cx="15480" cy="6855120"/>
+            <a:ext cx="15120" cy="6854760"/>
           </a:xfrm>
           <a:prstGeom prst="rect">
             <a:avLst/>
@@ -14976,6 +15027,11 @@
             <a:noAutofit/>
           </a:bodyPr>
           <a:p>
+            <a:pPr>
+              <a:lnSpc>
+                <a:spcPct val="100000"/>
+              </a:lnSpc>
+            </a:pPr>
             <a:endParaRPr b="0" lang="en-US" sz="1800" spc="-1" strike="noStrike">
               <a:solidFill>
                 <a:schemeClr val="lt1"/>
@@ -14995,7 +15051,7 @@
         <p:spPr>
           <a:xfrm>
             <a:off x="9144000" y="0"/>
-            <a:ext cx="15480" cy="6855120"/>
+            <a:ext cx="15120" cy="6854760"/>
           </a:xfrm>
           <a:prstGeom prst="rect">
             <a:avLst/>
@@ -15031,6 +15087,11 @@
             <a:noAutofit/>
           </a:bodyPr>
           <a:p>
+            <a:pPr>
+              <a:lnSpc>
+                <a:spcPct val="100000"/>
+              </a:lnSpc>
+            </a:pPr>
             <a:endParaRPr b="0" lang="en-US" sz="1800" spc="-1" strike="noStrike">
               <a:solidFill>
                 <a:schemeClr val="lt1"/>
@@ -15050,7 +15111,7 @@
         <p:spPr>
           <a:xfrm>
             <a:off x="10058400" y="0"/>
-            <a:ext cx="15480" cy="6855120"/>
+            <a:ext cx="15120" cy="6854760"/>
           </a:xfrm>
           <a:prstGeom prst="rect">
             <a:avLst/>
@@ -15086,6 +15147,11 @@
             <a:noAutofit/>
           </a:bodyPr>
           <a:p>
+            <a:pPr>
+              <a:lnSpc>
+                <a:spcPct val="100000"/>
+              </a:lnSpc>
+            </a:pPr>
             <a:endParaRPr b="0" lang="en-US" sz="1800" spc="-1" strike="noStrike">
               <a:solidFill>
                 <a:schemeClr val="lt1"/>
@@ -15105,7 +15171,7 @@
         <p:spPr>
           <a:xfrm>
             <a:off x="10972800" y="0"/>
-            <a:ext cx="15480" cy="6855120"/>
+            <a:ext cx="15120" cy="6854760"/>
           </a:xfrm>
           <a:prstGeom prst="rect">
             <a:avLst/>
@@ -15141,6 +15207,11 @@
             <a:noAutofit/>
           </a:bodyPr>
           <a:p>
+            <a:pPr>
+              <a:lnSpc>
+                <a:spcPct val="100000"/>
+              </a:lnSpc>
+            </a:pPr>
             <a:endParaRPr b="0" lang="en-US" sz="1800" spc="-1" strike="noStrike">
               <a:solidFill>
                 <a:schemeClr val="lt1"/>
@@ -15160,7 +15231,7 @@
         <p:spPr>
           <a:xfrm>
             <a:off x="11887200" y="0"/>
-            <a:ext cx="15480" cy="6855120"/>
+            <a:ext cx="15120" cy="6854760"/>
           </a:xfrm>
           <a:prstGeom prst="rect">
             <a:avLst/>
@@ -15196,6 +15267,11 @@
             <a:noAutofit/>
           </a:bodyPr>
           <a:p>
+            <a:pPr>
+              <a:lnSpc>
+                <a:spcPct val="100000"/>
+              </a:lnSpc>
+            </a:pPr>
             <a:endParaRPr b="0" lang="en-US" sz="1800" spc="-1" strike="noStrike">
               <a:solidFill>
                 <a:schemeClr val="lt1"/>
@@ -15215,7 +15291,7 @@
         <p:spPr>
           <a:xfrm>
             <a:off x="0" y="0"/>
-            <a:ext cx="317160" cy="6855120"/>
+            <a:ext cx="316800" cy="6854760"/>
           </a:xfrm>
           <a:prstGeom prst="rect">
             <a:avLst/>
@@ -15251,6 +15327,11 @@
             <a:noAutofit/>
           </a:bodyPr>
           <a:p>
+            <a:pPr>
+              <a:lnSpc>
+                <a:spcPct val="100000"/>
+              </a:lnSpc>
+            </a:pPr>
             <a:endParaRPr b="0" lang="en-US" sz="1800" spc="-1" strike="noStrike">
               <a:solidFill>
                 <a:schemeClr val="lt1"/>
@@ -15270,7 +15351,7 @@
         <p:spPr>
           <a:xfrm>
             <a:off x="9875520" y="365760"/>
-            <a:ext cx="2008800" cy="500040"/>
+            <a:ext cx="2008440" cy="499680"/>
           </a:xfrm>
           <a:prstGeom prst="roundRect">
             <a:avLst>
@@ -15344,7 +15425,7 @@
         <p:spPr>
           <a:xfrm>
             <a:off x="1146240" y="914400"/>
-            <a:ext cx="8677440" cy="516960"/>
+            <a:ext cx="8677440" cy="516240"/>
           </a:xfrm>
           <a:prstGeom prst="rect">
             <a:avLst/>
@@ -15398,7 +15479,7 @@
         <p:spPr>
           <a:xfrm>
             <a:off x="668520" y="1600200"/>
-            <a:ext cx="10353960" cy="516600"/>
+            <a:ext cx="10353600" cy="515880"/>
           </a:xfrm>
           <a:prstGeom prst="rect">
             <a:avLst/>
@@ -15475,7 +15556,7 @@
         <p:spPr>
           <a:xfrm>
             <a:off x="987480" y="3182040"/>
-            <a:ext cx="3288960" cy="2740320"/>
+            <a:ext cx="3288600" cy="2739960"/>
           </a:xfrm>
           <a:prstGeom prst="roundRect">
             <a:avLst>
@@ -15513,6 +15594,11 @@
             <a:noAutofit/>
           </a:bodyPr>
           <a:p>
+            <a:pPr>
+              <a:lnSpc>
+                <a:spcPct val="100000"/>
+              </a:lnSpc>
+            </a:pPr>
             <a:endParaRPr b="0" lang="en-US" sz="1800" spc="-1" strike="noStrike">
               <a:solidFill>
                 <a:schemeClr val="lt1"/>
@@ -15532,7 +15618,7 @@
         <p:spPr>
           <a:xfrm>
             <a:off x="457200" y="2514600"/>
-            <a:ext cx="3746160" cy="4114080"/>
+            <a:ext cx="3745800" cy="4113720"/>
           </a:xfrm>
           <a:prstGeom prst="roundRect">
             <a:avLst>
@@ -15693,6 +15779,19 @@
             </a:endParaRPr>
           </a:p>
           <a:p>
+            <a:pPr>
+              <a:lnSpc>
+                <a:spcPct val="100000"/>
+              </a:lnSpc>
+            </a:pPr>
+            <a:endParaRPr b="0" lang="en-US" sz="1300" spc="-1" strike="noStrike">
+              <a:solidFill>
+                <a:srgbClr val="ffffff"/>
+              </a:solidFill>
+              <a:latin typeface="Arial"/>
+            </a:endParaRPr>
+          </a:p>
+          <a:p>
             <a:pPr marL="216000" indent="-216000">
               <a:lnSpc>
                 <a:spcPct val="100000"/>
@@ -15703,6 +15802,29 @@
               <a:buFont typeface="Wingdings" charset="2"/>
               <a:buChar char=""/>
             </a:pPr>
+            <a:r>
+              <a:rPr b="0" lang="en-US" sz="1300" spc="-1" strike="noStrike">
+                <a:solidFill>
+                  <a:schemeClr val="lt1"/>
+                </a:solidFill>
+                <a:latin typeface="Calibri"/>
+                <a:ea typeface="DejaVu Sans"/>
+              </a:rPr>
+              <a:t>They can be used with plus() and minus() methods to add or subtract time from an existing date.</a:t>
+            </a:r>
+            <a:endParaRPr b="0" lang="en-US" sz="1300" spc="-1" strike="noStrike">
+              <a:solidFill>
+                <a:srgbClr val="ffffff"/>
+              </a:solidFill>
+              <a:latin typeface="Arial"/>
+            </a:endParaRPr>
+          </a:p>
+          <a:p>
+            <a:pPr>
+              <a:lnSpc>
+                <a:spcPct val="100000"/>
+              </a:lnSpc>
+            </a:pPr>
             <a:endParaRPr b="0" lang="en-US" sz="1300" spc="-1" strike="noStrike">
               <a:solidFill>
                 <a:srgbClr val="ffffff"/>
@@ -15729,52 +15851,6 @@
                 <a:latin typeface="Calibri"/>
                 <a:ea typeface="DejaVu Sans"/>
               </a:rPr>
-              <a:t>They can be used with plus() and minus() methods to add or subtract time from an existing date.</a:t>
-            </a:r>
-            <a:endParaRPr b="0" lang="en-US" sz="1300" spc="-1" strike="noStrike">
-              <a:solidFill>
-                <a:srgbClr val="ffffff"/>
-              </a:solidFill>
-              <a:latin typeface="Arial"/>
-            </a:endParaRPr>
-          </a:p>
-          <a:p>
-            <a:pPr marL="216000" indent="-216000">
-              <a:lnSpc>
-                <a:spcPct val="100000"/>
-              </a:lnSpc>
-              <a:buClr>
-                <a:srgbClr val="ffffff"/>
-              </a:buClr>
-              <a:buFont typeface="Wingdings" charset="2"/>
-              <a:buChar char=""/>
-            </a:pPr>
-            <a:endParaRPr b="0" lang="en-US" sz="1300" spc="-1" strike="noStrike">
-              <a:solidFill>
-                <a:srgbClr val="ffffff"/>
-              </a:solidFill>
-              <a:latin typeface="Arial"/>
-            </a:endParaRPr>
-          </a:p>
-          <a:p>
-            <a:pPr marL="216000" indent="-216000">
-              <a:lnSpc>
-                <a:spcPct val="100000"/>
-              </a:lnSpc>
-              <a:buClr>
-                <a:srgbClr val="ffffff"/>
-              </a:buClr>
-              <a:buFont typeface="Wingdings" charset="2"/>
-              <a:buChar char=""/>
-            </a:pPr>
-            <a:r>
-              <a:rPr b="0" lang="en-US" sz="1300" spc="-1" strike="noStrike">
-                <a:solidFill>
-                  <a:schemeClr val="lt1"/>
-                </a:solidFill>
-                <a:latin typeface="Calibri"/>
-                <a:ea typeface="DejaVu Sans"/>
-              </a:rPr>
               <a:t>Using these APIs instead of manual mathematical calculations prevents errors when handling complex situations like Daylight Saving Time (DST).</a:t>
             </a:r>
             <a:endParaRPr b="0" lang="en-US" sz="1300" spc="-1" strike="noStrike">
@@ -15795,7 +15871,7 @@
         <p:spPr>
           <a:xfrm>
             <a:off x="4507920" y="3182040"/>
-            <a:ext cx="3288960" cy="2740320"/>
+            <a:ext cx="3288600" cy="2739960"/>
           </a:xfrm>
           <a:prstGeom prst="roundRect">
             <a:avLst>
@@ -15833,6 +15909,11 @@
             <a:noAutofit/>
           </a:bodyPr>
           <a:p>
+            <a:pPr>
+              <a:lnSpc>
+                <a:spcPct val="100000"/>
+              </a:lnSpc>
+            </a:pPr>
             <a:endParaRPr b="0" lang="en-US" sz="1800" spc="-1" strike="noStrike">
               <a:solidFill>
                 <a:schemeClr val="lt1"/>
@@ -15852,7 +15933,7 @@
         <p:spPr>
           <a:xfrm>
             <a:off x="4434840" y="2514600"/>
-            <a:ext cx="3288960" cy="3884400"/>
+            <a:ext cx="3288600" cy="3884040"/>
           </a:xfrm>
           <a:prstGeom prst="roundRect">
             <a:avLst>
@@ -16068,7 +16149,7 @@
         <p:spPr>
           <a:xfrm>
             <a:off x="8028360" y="3182040"/>
-            <a:ext cx="3288960" cy="2740320"/>
+            <a:ext cx="3288600" cy="2739960"/>
           </a:xfrm>
           <a:prstGeom prst="roundRect">
             <a:avLst>
@@ -16106,6 +16187,11 @@
             <a:noAutofit/>
           </a:bodyPr>
           <a:p>
+            <a:pPr>
+              <a:lnSpc>
+                <a:spcPct val="100000"/>
+              </a:lnSpc>
+            </a:pPr>
             <a:endParaRPr b="0" lang="en-US" sz="1800" spc="-1" strike="noStrike">
               <a:solidFill>
                 <a:schemeClr val="lt1"/>
@@ -16125,7 +16211,7 @@
         <p:spPr>
           <a:xfrm>
             <a:off x="8001000" y="2286000"/>
-            <a:ext cx="3657600" cy="4114800"/>
+            <a:ext cx="3657240" cy="4114440"/>
           </a:xfrm>
           <a:prstGeom prst="roundRect">
             <a:avLst>
@@ -16711,6 +16797,3176 @@
       <p:sp>
         <p:nvSpPr>
           <p:cNvPr id="196" name="TextBox 20"/>
+          <p:cNvSpPr/>
+          <p:nvPr/>
+        </p:nvSpPr>
+        <p:spPr>
+          <a:xfrm>
+            <a:off x="4600080" y="6446520"/>
+            <a:ext cx="3051000" cy="363960"/>
+          </a:xfrm>
+          <a:prstGeom prst="rect">
+            <a:avLst/>
+          </a:prstGeom>
+          <a:noFill/>
+          <a:ln w="0">
+            <a:noFill/>
+          </a:ln>
+        </p:spPr>
+        <p:style>
+          <a:lnRef idx="0"/>
+          <a:fillRef idx="0"/>
+          <a:effectRef idx="0"/>
+          <a:fontRef idx="minor"/>
+        </p:style>
+        <p:txBody>
+          <a:bodyPr wrap="none" lIns="90000" rIns="90000" tIns="45000" bIns="45000" anchor="t">
+            <a:spAutoFit/>
+          </a:bodyPr>
+          <a:p>
+            <a:pPr>
+              <a:lnSpc>
+                <a:spcPct val="100000"/>
+              </a:lnSpc>
+            </a:pPr>
+            <a:r>
+              <a:rPr b="0" lang="en-US" sz="1800" spc="-1" strike="noStrike">
+                <a:solidFill>
+                  <a:srgbClr val="000000"/>
+                </a:solidFill>
+                <a:latin typeface="Calibri"/>
+                <a:ea typeface="DejaVu Sans"/>
+              </a:rPr>
+              <a:t>Java • Ultra Premium Template</a:t>
+            </a:r>
+            <a:endParaRPr b="0" lang="en-US" sz="1800" spc="-1" strike="noStrike">
+              <a:solidFill>
+                <a:srgbClr val="000000"/>
+              </a:solidFill>
+              <a:latin typeface="Arial"/>
+            </a:endParaRPr>
+          </a:p>
+        </p:txBody>
+      </p:sp>
+    </p:spTree>
+  </p:cSld>
+  <mc:AlternateContent>
+    <mc:Choice Requires="p14">
+      <p:transition spd="slow" p14:dur="2000"/>
+    </mc:Choice>
+    <mc:Fallback>
+      <p:transition spd="slow"/>
+    </mc:Fallback>
+  </mc:AlternateContent>
+</p:sld>
+</file>
+
+<file path=ppt/slides/slide7.xml><?xml version="1.0" encoding="utf-8"?>
+<p:sld xmlns:a="http://schemas.openxmlformats.org/drawingml/2006/main" xmlns:p="http://schemas.openxmlformats.org/presentationml/2006/main" xmlns:r="http://schemas.openxmlformats.org/officeDocument/2006/relationships" xmlns:p14="http://schemas.microsoft.com/office/powerpoint/2010/main" xmlns:p15="http://schemas.microsoft.com/office/powerpoint/2012/main" xmlns:mc="http://schemas.openxmlformats.org/markup-compatibility/2006">
+  <p:cSld>
+    <p:spTree>
+      <p:nvGrpSpPr>
+        <p:cNvPr id="1" name=""/>
+        <p:cNvGrpSpPr/>
+        <p:nvPr/>
+      </p:nvGrpSpPr>
+      <p:grpSpPr>
+        <a:xfrm>
+          <a:off x="0" y="0"/>
+          <a:ext cx="0" cy="0"/>
+          <a:chOff x="0" y="0"/>
+          <a:chExt cx="0" cy="0"/>
+        </a:xfrm>
+      </p:grpSpPr>
+      <p:sp>
+        <p:nvSpPr>
+          <p:cNvPr id="197" name="Rectangle 97"/>
+          <p:cNvSpPr/>
+          <p:nvPr/>
+        </p:nvSpPr>
+        <p:spPr>
+          <a:xfrm>
+            <a:off x="0" y="0"/>
+            <a:ext cx="12186000" cy="6855120"/>
+          </a:xfrm>
+          <a:prstGeom prst="rect">
+            <a:avLst/>
+          </a:prstGeom>
+          <a:solidFill>
+            <a:srgbClr val="0b0b0d"/>
+          </a:solidFill>
+          <a:ln>
+            <a:noFill/>
+          </a:ln>
+          <a:effectLst>
+            <a:outerShdw blurRad="39960" dir="5400000" dist="23040" rotWithShape="0">
+              <a:srgbClr val="000000">
+                <a:alpha val="35000"/>
+              </a:srgbClr>
+            </a:outerShdw>
+          </a:effectLst>
+        </p:spPr>
+        <p:style>
+          <a:lnRef idx="1">
+            <a:schemeClr val="accent1"/>
+          </a:lnRef>
+          <a:fillRef idx="3">
+            <a:schemeClr val="accent1"/>
+          </a:fillRef>
+          <a:effectRef idx="2">
+            <a:schemeClr val="accent1"/>
+          </a:effectRef>
+          <a:fontRef idx="minor"/>
+        </p:style>
+        <p:txBody>
+          <a:bodyPr lIns="90000" rIns="90000" tIns="45000" bIns="45000" anchor="ctr">
+            <a:noAutofit/>
+          </a:bodyPr>
+          <a:p>
+            <a:endParaRPr b="0" lang="en-US" sz="1800" spc="-1" strike="noStrike">
+              <a:solidFill>
+                <a:schemeClr val="lt1"/>
+              </a:solidFill>
+              <a:latin typeface="Calibri"/>
+              <a:ea typeface="DejaVu Sans"/>
+            </a:endParaRPr>
+          </a:p>
+        </p:txBody>
+      </p:sp>
+      <p:sp>
+        <p:nvSpPr>
+          <p:cNvPr id="198" name="Rectangle 98"/>
+          <p:cNvSpPr/>
+          <p:nvPr/>
+        </p:nvSpPr>
+        <p:spPr>
+          <a:xfrm>
+            <a:off x="0" y="0"/>
+            <a:ext cx="15480" cy="6855120"/>
+          </a:xfrm>
+          <a:prstGeom prst="rect">
+            <a:avLst/>
+          </a:prstGeom>
+          <a:solidFill>
+            <a:srgbClr val="121216"/>
+          </a:solidFill>
+          <a:ln>
+            <a:noFill/>
+          </a:ln>
+          <a:effectLst>
+            <a:outerShdw blurRad="39960" dir="5400000" dist="23040" rotWithShape="0">
+              <a:srgbClr val="000000">
+                <a:alpha val="35000"/>
+              </a:srgbClr>
+            </a:outerShdw>
+          </a:effectLst>
+        </p:spPr>
+        <p:style>
+          <a:lnRef idx="1">
+            <a:schemeClr val="accent1"/>
+          </a:lnRef>
+          <a:fillRef idx="3">
+            <a:schemeClr val="accent1"/>
+          </a:fillRef>
+          <a:effectRef idx="2">
+            <a:schemeClr val="accent1"/>
+          </a:effectRef>
+          <a:fontRef idx="minor"/>
+        </p:style>
+        <p:txBody>
+          <a:bodyPr lIns="90000" rIns="90000" tIns="45000" bIns="45000" anchor="ctr">
+            <a:noAutofit/>
+          </a:bodyPr>
+          <a:p>
+            <a:endParaRPr b="0" lang="en-US" sz="1800" spc="-1" strike="noStrike">
+              <a:solidFill>
+                <a:schemeClr val="lt1"/>
+              </a:solidFill>
+              <a:latin typeface="Calibri"/>
+              <a:ea typeface="DejaVu Sans"/>
+            </a:endParaRPr>
+          </a:p>
+        </p:txBody>
+      </p:sp>
+      <p:sp>
+        <p:nvSpPr>
+          <p:cNvPr id="199" name="Rectangle 99"/>
+          <p:cNvSpPr/>
+          <p:nvPr/>
+        </p:nvSpPr>
+        <p:spPr>
+          <a:xfrm>
+            <a:off x="914400" y="0"/>
+            <a:ext cx="15480" cy="6855120"/>
+          </a:xfrm>
+          <a:prstGeom prst="rect">
+            <a:avLst/>
+          </a:prstGeom>
+          <a:solidFill>
+            <a:srgbClr val="121216"/>
+          </a:solidFill>
+          <a:ln>
+            <a:noFill/>
+          </a:ln>
+          <a:effectLst>
+            <a:outerShdw blurRad="39960" dir="5400000" dist="23040" rotWithShape="0">
+              <a:srgbClr val="000000">
+                <a:alpha val="35000"/>
+              </a:srgbClr>
+            </a:outerShdw>
+          </a:effectLst>
+        </p:spPr>
+        <p:style>
+          <a:lnRef idx="1">
+            <a:schemeClr val="accent1"/>
+          </a:lnRef>
+          <a:fillRef idx="3">
+            <a:schemeClr val="accent1"/>
+          </a:fillRef>
+          <a:effectRef idx="2">
+            <a:schemeClr val="accent1"/>
+          </a:effectRef>
+          <a:fontRef idx="minor"/>
+        </p:style>
+        <p:txBody>
+          <a:bodyPr lIns="90000" rIns="90000" tIns="45000" bIns="45000" anchor="ctr">
+            <a:noAutofit/>
+          </a:bodyPr>
+          <a:p>
+            <a:endParaRPr b="0" lang="en-US" sz="1800" spc="-1" strike="noStrike">
+              <a:solidFill>
+                <a:schemeClr val="lt1"/>
+              </a:solidFill>
+              <a:latin typeface="Calibri"/>
+              <a:ea typeface="DejaVu Sans"/>
+            </a:endParaRPr>
+          </a:p>
+        </p:txBody>
+      </p:sp>
+      <p:sp>
+        <p:nvSpPr>
+          <p:cNvPr id="200" name="Rectangle 100"/>
+          <p:cNvSpPr/>
+          <p:nvPr/>
+        </p:nvSpPr>
+        <p:spPr>
+          <a:xfrm>
+            <a:off x="1828800" y="0"/>
+            <a:ext cx="15480" cy="6855120"/>
+          </a:xfrm>
+          <a:prstGeom prst="rect">
+            <a:avLst/>
+          </a:prstGeom>
+          <a:solidFill>
+            <a:srgbClr val="121216"/>
+          </a:solidFill>
+          <a:ln>
+            <a:noFill/>
+          </a:ln>
+          <a:effectLst>
+            <a:outerShdw blurRad="39960" dir="5400000" dist="23040" rotWithShape="0">
+              <a:srgbClr val="000000">
+                <a:alpha val="35000"/>
+              </a:srgbClr>
+            </a:outerShdw>
+          </a:effectLst>
+        </p:spPr>
+        <p:style>
+          <a:lnRef idx="1">
+            <a:schemeClr val="accent1"/>
+          </a:lnRef>
+          <a:fillRef idx="3">
+            <a:schemeClr val="accent1"/>
+          </a:fillRef>
+          <a:effectRef idx="2">
+            <a:schemeClr val="accent1"/>
+          </a:effectRef>
+          <a:fontRef idx="minor"/>
+        </p:style>
+        <p:txBody>
+          <a:bodyPr lIns="90000" rIns="90000" tIns="45000" bIns="45000" anchor="ctr">
+            <a:noAutofit/>
+          </a:bodyPr>
+          <a:p>
+            <a:endParaRPr b="0" lang="en-US" sz="1800" spc="-1" strike="noStrike">
+              <a:solidFill>
+                <a:schemeClr val="lt1"/>
+              </a:solidFill>
+              <a:latin typeface="Calibri"/>
+              <a:ea typeface="DejaVu Sans"/>
+            </a:endParaRPr>
+          </a:p>
+        </p:txBody>
+      </p:sp>
+      <p:sp>
+        <p:nvSpPr>
+          <p:cNvPr id="201" name="Rectangle 101"/>
+          <p:cNvSpPr/>
+          <p:nvPr/>
+        </p:nvSpPr>
+        <p:spPr>
+          <a:xfrm>
+            <a:off x="2743200" y="0"/>
+            <a:ext cx="15480" cy="6855120"/>
+          </a:xfrm>
+          <a:prstGeom prst="rect">
+            <a:avLst/>
+          </a:prstGeom>
+          <a:solidFill>
+            <a:srgbClr val="121216"/>
+          </a:solidFill>
+          <a:ln>
+            <a:noFill/>
+          </a:ln>
+          <a:effectLst>
+            <a:outerShdw blurRad="39960" dir="5400000" dist="23040" rotWithShape="0">
+              <a:srgbClr val="000000">
+                <a:alpha val="35000"/>
+              </a:srgbClr>
+            </a:outerShdw>
+          </a:effectLst>
+        </p:spPr>
+        <p:style>
+          <a:lnRef idx="1">
+            <a:schemeClr val="accent1"/>
+          </a:lnRef>
+          <a:fillRef idx="3">
+            <a:schemeClr val="accent1"/>
+          </a:fillRef>
+          <a:effectRef idx="2">
+            <a:schemeClr val="accent1"/>
+          </a:effectRef>
+          <a:fontRef idx="minor"/>
+        </p:style>
+        <p:txBody>
+          <a:bodyPr lIns="90000" rIns="90000" tIns="45000" bIns="45000" anchor="ctr">
+            <a:noAutofit/>
+          </a:bodyPr>
+          <a:p>
+            <a:endParaRPr b="0" lang="en-US" sz="1800" spc="-1" strike="noStrike">
+              <a:solidFill>
+                <a:schemeClr val="lt1"/>
+              </a:solidFill>
+              <a:latin typeface="Calibri"/>
+              <a:ea typeface="DejaVu Sans"/>
+            </a:endParaRPr>
+          </a:p>
+        </p:txBody>
+      </p:sp>
+      <p:sp>
+        <p:nvSpPr>
+          <p:cNvPr id="202" name="Rectangle 102"/>
+          <p:cNvSpPr/>
+          <p:nvPr/>
+        </p:nvSpPr>
+        <p:spPr>
+          <a:xfrm>
+            <a:off x="3657600" y="0"/>
+            <a:ext cx="15480" cy="6855120"/>
+          </a:xfrm>
+          <a:prstGeom prst="rect">
+            <a:avLst/>
+          </a:prstGeom>
+          <a:solidFill>
+            <a:srgbClr val="121216"/>
+          </a:solidFill>
+          <a:ln>
+            <a:noFill/>
+          </a:ln>
+          <a:effectLst>
+            <a:outerShdw blurRad="39960" dir="5400000" dist="23040" rotWithShape="0">
+              <a:srgbClr val="000000">
+                <a:alpha val="35000"/>
+              </a:srgbClr>
+            </a:outerShdw>
+          </a:effectLst>
+        </p:spPr>
+        <p:style>
+          <a:lnRef idx="1">
+            <a:schemeClr val="accent1"/>
+          </a:lnRef>
+          <a:fillRef idx="3">
+            <a:schemeClr val="accent1"/>
+          </a:fillRef>
+          <a:effectRef idx="2">
+            <a:schemeClr val="accent1"/>
+          </a:effectRef>
+          <a:fontRef idx="minor"/>
+        </p:style>
+        <p:txBody>
+          <a:bodyPr lIns="90000" rIns="90000" tIns="45000" bIns="45000" anchor="ctr">
+            <a:noAutofit/>
+          </a:bodyPr>
+          <a:p>
+            <a:endParaRPr b="0" lang="en-US" sz="1800" spc="-1" strike="noStrike">
+              <a:solidFill>
+                <a:schemeClr val="lt1"/>
+              </a:solidFill>
+              <a:latin typeface="Calibri"/>
+              <a:ea typeface="DejaVu Sans"/>
+            </a:endParaRPr>
+          </a:p>
+        </p:txBody>
+      </p:sp>
+      <p:sp>
+        <p:nvSpPr>
+          <p:cNvPr id="203" name="Rectangle 103"/>
+          <p:cNvSpPr/>
+          <p:nvPr/>
+        </p:nvSpPr>
+        <p:spPr>
+          <a:xfrm>
+            <a:off x="4572000" y="0"/>
+            <a:ext cx="15480" cy="6855120"/>
+          </a:xfrm>
+          <a:prstGeom prst="rect">
+            <a:avLst/>
+          </a:prstGeom>
+          <a:solidFill>
+            <a:srgbClr val="121216"/>
+          </a:solidFill>
+          <a:ln>
+            <a:noFill/>
+          </a:ln>
+          <a:effectLst>
+            <a:outerShdw blurRad="39960" dir="5400000" dist="23040" rotWithShape="0">
+              <a:srgbClr val="000000">
+                <a:alpha val="35000"/>
+              </a:srgbClr>
+            </a:outerShdw>
+          </a:effectLst>
+        </p:spPr>
+        <p:style>
+          <a:lnRef idx="1">
+            <a:schemeClr val="accent1"/>
+          </a:lnRef>
+          <a:fillRef idx="3">
+            <a:schemeClr val="accent1"/>
+          </a:fillRef>
+          <a:effectRef idx="2">
+            <a:schemeClr val="accent1"/>
+          </a:effectRef>
+          <a:fontRef idx="minor"/>
+        </p:style>
+        <p:txBody>
+          <a:bodyPr lIns="90000" rIns="90000" tIns="45000" bIns="45000" anchor="ctr">
+            <a:noAutofit/>
+          </a:bodyPr>
+          <a:p>
+            <a:endParaRPr b="0" lang="en-US" sz="1800" spc="-1" strike="noStrike">
+              <a:solidFill>
+                <a:schemeClr val="lt1"/>
+              </a:solidFill>
+              <a:latin typeface="Calibri"/>
+              <a:ea typeface="DejaVu Sans"/>
+            </a:endParaRPr>
+          </a:p>
+        </p:txBody>
+      </p:sp>
+      <p:sp>
+        <p:nvSpPr>
+          <p:cNvPr id="204" name="Rectangle 104"/>
+          <p:cNvSpPr/>
+          <p:nvPr/>
+        </p:nvSpPr>
+        <p:spPr>
+          <a:xfrm>
+            <a:off x="5486400" y="0"/>
+            <a:ext cx="15480" cy="6855120"/>
+          </a:xfrm>
+          <a:prstGeom prst="rect">
+            <a:avLst/>
+          </a:prstGeom>
+          <a:solidFill>
+            <a:srgbClr val="121216"/>
+          </a:solidFill>
+          <a:ln>
+            <a:noFill/>
+          </a:ln>
+          <a:effectLst>
+            <a:outerShdw blurRad="39960" dir="5400000" dist="23040" rotWithShape="0">
+              <a:srgbClr val="000000">
+                <a:alpha val="35000"/>
+              </a:srgbClr>
+            </a:outerShdw>
+          </a:effectLst>
+        </p:spPr>
+        <p:style>
+          <a:lnRef idx="1">
+            <a:schemeClr val="accent1"/>
+          </a:lnRef>
+          <a:fillRef idx="3">
+            <a:schemeClr val="accent1"/>
+          </a:fillRef>
+          <a:effectRef idx="2">
+            <a:schemeClr val="accent1"/>
+          </a:effectRef>
+          <a:fontRef idx="minor"/>
+        </p:style>
+        <p:txBody>
+          <a:bodyPr lIns="90000" rIns="90000" tIns="45000" bIns="45000" anchor="ctr">
+            <a:noAutofit/>
+          </a:bodyPr>
+          <a:p>
+            <a:endParaRPr b="0" lang="en-US" sz="1800" spc="-1" strike="noStrike">
+              <a:solidFill>
+                <a:schemeClr val="lt1"/>
+              </a:solidFill>
+              <a:latin typeface="Calibri"/>
+              <a:ea typeface="DejaVu Sans"/>
+            </a:endParaRPr>
+          </a:p>
+        </p:txBody>
+      </p:sp>
+      <p:sp>
+        <p:nvSpPr>
+          <p:cNvPr id="205" name="Rectangle 105"/>
+          <p:cNvSpPr/>
+          <p:nvPr/>
+        </p:nvSpPr>
+        <p:spPr>
+          <a:xfrm>
+            <a:off x="6400800" y="0"/>
+            <a:ext cx="15480" cy="6855120"/>
+          </a:xfrm>
+          <a:prstGeom prst="rect">
+            <a:avLst/>
+          </a:prstGeom>
+          <a:solidFill>
+            <a:srgbClr val="121216"/>
+          </a:solidFill>
+          <a:ln>
+            <a:noFill/>
+          </a:ln>
+          <a:effectLst>
+            <a:outerShdw blurRad="39960" dir="5400000" dist="23040" rotWithShape="0">
+              <a:srgbClr val="000000">
+                <a:alpha val="35000"/>
+              </a:srgbClr>
+            </a:outerShdw>
+          </a:effectLst>
+        </p:spPr>
+        <p:style>
+          <a:lnRef idx="1">
+            <a:schemeClr val="accent1"/>
+          </a:lnRef>
+          <a:fillRef idx="3">
+            <a:schemeClr val="accent1"/>
+          </a:fillRef>
+          <a:effectRef idx="2">
+            <a:schemeClr val="accent1"/>
+          </a:effectRef>
+          <a:fontRef idx="minor"/>
+        </p:style>
+        <p:txBody>
+          <a:bodyPr lIns="90000" rIns="90000" tIns="45000" bIns="45000" anchor="ctr">
+            <a:noAutofit/>
+          </a:bodyPr>
+          <a:p>
+            <a:endParaRPr b="0" lang="en-US" sz="1800" spc="-1" strike="noStrike">
+              <a:solidFill>
+                <a:schemeClr val="lt1"/>
+              </a:solidFill>
+              <a:latin typeface="Calibri"/>
+              <a:ea typeface="DejaVu Sans"/>
+            </a:endParaRPr>
+          </a:p>
+        </p:txBody>
+      </p:sp>
+      <p:sp>
+        <p:nvSpPr>
+          <p:cNvPr id="206" name="Rectangle 106"/>
+          <p:cNvSpPr/>
+          <p:nvPr/>
+        </p:nvSpPr>
+        <p:spPr>
+          <a:xfrm>
+            <a:off x="7315200" y="0"/>
+            <a:ext cx="15480" cy="6855120"/>
+          </a:xfrm>
+          <a:prstGeom prst="rect">
+            <a:avLst/>
+          </a:prstGeom>
+          <a:solidFill>
+            <a:srgbClr val="121216"/>
+          </a:solidFill>
+          <a:ln>
+            <a:noFill/>
+          </a:ln>
+          <a:effectLst>
+            <a:outerShdw blurRad="39960" dir="5400000" dist="23040" rotWithShape="0">
+              <a:srgbClr val="000000">
+                <a:alpha val="35000"/>
+              </a:srgbClr>
+            </a:outerShdw>
+          </a:effectLst>
+        </p:spPr>
+        <p:style>
+          <a:lnRef idx="1">
+            <a:schemeClr val="accent1"/>
+          </a:lnRef>
+          <a:fillRef idx="3">
+            <a:schemeClr val="accent1"/>
+          </a:fillRef>
+          <a:effectRef idx="2">
+            <a:schemeClr val="accent1"/>
+          </a:effectRef>
+          <a:fontRef idx="minor"/>
+        </p:style>
+        <p:txBody>
+          <a:bodyPr lIns="90000" rIns="90000" tIns="45000" bIns="45000" anchor="ctr">
+            <a:noAutofit/>
+          </a:bodyPr>
+          <a:p>
+            <a:endParaRPr b="0" lang="en-US" sz="1800" spc="-1" strike="noStrike">
+              <a:solidFill>
+                <a:schemeClr val="lt1"/>
+              </a:solidFill>
+              <a:latin typeface="Calibri"/>
+              <a:ea typeface="DejaVu Sans"/>
+            </a:endParaRPr>
+          </a:p>
+        </p:txBody>
+      </p:sp>
+      <p:sp>
+        <p:nvSpPr>
+          <p:cNvPr id="207" name="Rectangle 107"/>
+          <p:cNvSpPr/>
+          <p:nvPr/>
+        </p:nvSpPr>
+        <p:spPr>
+          <a:xfrm>
+            <a:off x="8229600" y="0"/>
+            <a:ext cx="15480" cy="6855120"/>
+          </a:xfrm>
+          <a:prstGeom prst="rect">
+            <a:avLst/>
+          </a:prstGeom>
+          <a:solidFill>
+            <a:srgbClr val="121216"/>
+          </a:solidFill>
+          <a:ln>
+            <a:noFill/>
+          </a:ln>
+          <a:effectLst>
+            <a:outerShdw blurRad="39960" dir="5400000" dist="23040" rotWithShape="0">
+              <a:srgbClr val="000000">
+                <a:alpha val="35000"/>
+              </a:srgbClr>
+            </a:outerShdw>
+          </a:effectLst>
+        </p:spPr>
+        <p:style>
+          <a:lnRef idx="1">
+            <a:schemeClr val="accent1"/>
+          </a:lnRef>
+          <a:fillRef idx="3">
+            <a:schemeClr val="accent1"/>
+          </a:fillRef>
+          <a:effectRef idx="2">
+            <a:schemeClr val="accent1"/>
+          </a:effectRef>
+          <a:fontRef idx="minor"/>
+        </p:style>
+        <p:txBody>
+          <a:bodyPr lIns="90000" rIns="90000" tIns="45000" bIns="45000" anchor="ctr">
+            <a:noAutofit/>
+          </a:bodyPr>
+          <a:p>
+            <a:endParaRPr b="0" lang="en-US" sz="1800" spc="-1" strike="noStrike">
+              <a:solidFill>
+                <a:schemeClr val="lt1"/>
+              </a:solidFill>
+              <a:latin typeface="Calibri"/>
+              <a:ea typeface="DejaVu Sans"/>
+            </a:endParaRPr>
+          </a:p>
+        </p:txBody>
+      </p:sp>
+      <p:sp>
+        <p:nvSpPr>
+          <p:cNvPr id="208" name="Rectangle 108"/>
+          <p:cNvSpPr/>
+          <p:nvPr/>
+        </p:nvSpPr>
+        <p:spPr>
+          <a:xfrm>
+            <a:off x="9144000" y="0"/>
+            <a:ext cx="15480" cy="6855120"/>
+          </a:xfrm>
+          <a:prstGeom prst="rect">
+            <a:avLst/>
+          </a:prstGeom>
+          <a:solidFill>
+            <a:srgbClr val="121216"/>
+          </a:solidFill>
+          <a:ln>
+            <a:noFill/>
+          </a:ln>
+          <a:effectLst>
+            <a:outerShdw blurRad="39960" dir="5400000" dist="23040" rotWithShape="0">
+              <a:srgbClr val="000000">
+                <a:alpha val="35000"/>
+              </a:srgbClr>
+            </a:outerShdw>
+          </a:effectLst>
+        </p:spPr>
+        <p:style>
+          <a:lnRef idx="1">
+            <a:schemeClr val="accent1"/>
+          </a:lnRef>
+          <a:fillRef idx="3">
+            <a:schemeClr val="accent1"/>
+          </a:fillRef>
+          <a:effectRef idx="2">
+            <a:schemeClr val="accent1"/>
+          </a:effectRef>
+          <a:fontRef idx="minor"/>
+        </p:style>
+        <p:txBody>
+          <a:bodyPr lIns="90000" rIns="90000" tIns="45000" bIns="45000" anchor="ctr">
+            <a:noAutofit/>
+          </a:bodyPr>
+          <a:p>
+            <a:endParaRPr b="0" lang="en-US" sz="1800" spc="-1" strike="noStrike">
+              <a:solidFill>
+                <a:schemeClr val="lt1"/>
+              </a:solidFill>
+              <a:latin typeface="Calibri"/>
+              <a:ea typeface="DejaVu Sans"/>
+            </a:endParaRPr>
+          </a:p>
+        </p:txBody>
+      </p:sp>
+      <p:sp>
+        <p:nvSpPr>
+          <p:cNvPr id="209" name="Rectangle 109"/>
+          <p:cNvSpPr/>
+          <p:nvPr/>
+        </p:nvSpPr>
+        <p:spPr>
+          <a:xfrm>
+            <a:off x="10058400" y="0"/>
+            <a:ext cx="15480" cy="6855120"/>
+          </a:xfrm>
+          <a:prstGeom prst="rect">
+            <a:avLst/>
+          </a:prstGeom>
+          <a:solidFill>
+            <a:srgbClr val="121216"/>
+          </a:solidFill>
+          <a:ln>
+            <a:noFill/>
+          </a:ln>
+          <a:effectLst>
+            <a:outerShdw blurRad="39960" dir="5400000" dist="23040" rotWithShape="0">
+              <a:srgbClr val="000000">
+                <a:alpha val="35000"/>
+              </a:srgbClr>
+            </a:outerShdw>
+          </a:effectLst>
+        </p:spPr>
+        <p:style>
+          <a:lnRef idx="1">
+            <a:schemeClr val="accent1"/>
+          </a:lnRef>
+          <a:fillRef idx="3">
+            <a:schemeClr val="accent1"/>
+          </a:fillRef>
+          <a:effectRef idx="2">
+            <a:schemeClr val="accent1"/>
+          </a:effectRef>
+          <a:fontRef idx="minor"/>
+        </p:style>
+        <p:txBody>
+          <a:bodyPr lIns="90000" rIns="90000" tIns="45000" bIns="45000" anchor="ctr">
+            <a:noAutofit/>
+          </a:bodyPr>
+          <a:p>
+            <a:endParaRPr b="0" lang="en-US" sz="1800" spc="-1" strike="noStrike">
+              <a:solidFill>
+                <a:schemeClr val="lt1"/>
+              </a:solidFill>
+              <a:latin typeface="Calibri"/>
+              <a:ea typeface="DejaVu Sans"/>
+            </a:endParaRPr>
+          </a:p>
+        </p:txBody>
+      </p:sp>
+      <p:sp>
+        <p:nvSpPr>
+          <p:cNvPr id="210" name="Rectangle 110"/>
+          <p:cNvSpPr/>
+          <p:nvPr/>
+        </p:nvSpPr>
+        <p:spPr>
+          <a:xfrm>
+            <a:off x="10972800" y="0"/>
+            <a:ext cx="15480" cy="6855120"/>
+          </a:xfrm>
+          <a:prstGeom prst="rect">
+            <a:avLst/>
+          </a:prstGeom>
+          <a:solidFill>
+            <a:srgbClr val="121216"/>
+          </a:solidFill>
+          <a:ln>
+            <a:noFill/>
+          </a:ln>
+          <a:effectLst>
+            <a:outerShdw blurRad="39960" dir="5400000" dist="23040" rotWithShape="0">
+              <a:srgbClr val="000000">
+                <a:alpha val="35000"/>
+              </a:srgbClr>
+            </a:outerShdw>
+          </a:effectLst>
+        </p:spPr>
+        <p:style>
+          <a:lnRef idx="1">
+            <a:schemeClr val="accent1"/>
+          </a:lnRef>
+          <a:fillRef idx="3">
+            <a:schemeClr val="accent1"/>
+          </a:fillRef>
+          <a:effectRef idx="2">
+            <a:schemeClr val="accent1"/>
+          </a:effectRef>
+          <a:fontRef idx="minor"/>
+        </p:style>
+        <p:txBody>
+          <a:bodyPr lIns="90000" rIns="90000" tIns="45000" bIns="45000" anchor="ctr">
+            <a:noAutofit/>
+          </a:bodyPr>
+          <a:p>
+            <a:endParaRPr b="0" lang="en-US" sz="1800" spc="-1" strike="noStrike">
+              <a:solidFill>
+                <a:schemeClr val="lt1"/>
+              </a:solidFill>
+              <a:latin typeface="Calibri"/>
+              <a:ea typeface="DejaVu Sans"/>
+            </a:endParaRPr>
+          </a:p>
+        </p:txBody>
+      </p:sp>
+      <p:sp>
+        <p:nvSpPr>
+          <p:cNvPr id="211" name="Rectangle 111"/>
+          <p:cNvSpPr/>
+          <p:nvPr/>
+        </p:nvSpPr>
+        <p:spPr>
+          <a:xfrm>
+            <a:off x="11887200" y="0"/>
+            <a:ext cx="15480" cy="6855120"/>
+          </a:xfrm>
+          <a:prstGeom prst="rect">
+            <a:avLst/>
+          </a:prstGeom>
+          <a:solidFill>
+            <a:srgbClr val="121216"/>
+          </a:solidFill>
+          <a:ln>
+            <a:noFill/>
+          </a:ln>
+          <a:effectLst>
+            <a:outerShdw blurRad="39960" dir="5400000" dist="23040" rotWithShape="0">
+              <a:srgbClr val="000000">
+                <a:alpha val="35000"/>
+              </a:srgbClr>
+            </a:outerShdw>
+          </a:effectLst>
+        </p:spPr>
+        <p:style>
+          <a:lnRef idx="1">
+            <a:schemeClr val="accent1"/>
+          </a:lnRef>
+          <a:fillRef idx="3">
+            <a:schemeClr val="accent1"/>
+          </a:fillRef>
+          <a:effectRef idx="2">
+            <a:schemeClr val="accent1"/>
+          </a:effectRef>
+          <a:fontRef idx="minor"/>
+        </p:style>
+        <p:txBody>
+          <a:bodyPr lIns="90000" rIns="90000" tIns="45000" bIns="45000" anchor="ctr">
+            <a:noAutofit/>
+          </a:bodyPr>
+          <a:p>
+            <a:endParaRPr b="0" lang="en-US" sz="1800" spc="-1" strike="noStrike">
+              <a:solidFill>
+                <a:schemeClr val="lt1"/>
+              </a:solidFill>
+              <a:latin typeface="Calibri"/>
+              <a:ea typeface="DejaVu Sans"/>
+            </a:endParaRPr>
+          </a:p>
+        </p:txBody>
+      </p:sp>
+      <p:sp>
+        <p:nvSpPr>
+          <p:cNvPr id="212" name="Rectangle 112"/>
+          <p:cNvSpPr/>
+          <p:nvPr/>
+        </p:nvSpPr>
+        <p:spPr>
+          <a:xfrm>
+            <a:off x="0" y="0"/>
+            <a:ext cx="317160" cy="6855120"/>
+          </a:xfrm>
+          <a:prstGeom prst="rect">
+            <a:avLst/>
+          </a:prstGeom>
+          <a:solidFill>
+            <a:srgbClr val="ff8c00"/>
+          </a:solidFill>
+          <a:ln>
+            <a:noFill/>
+          </a:ln>
+          <a:effectLst>
+            <a:outerShdw blurRad="39960" dir="5400000" dist="23040" rotWithShape="0">
+              <a:srgbClr val="000000">
+                <a:alpha val="35000"/>
+              </a:srgbClr>
+            </a:outerShdw>
+          </a:effectLst>
+        </p:spPr>
+        <p:style>
+          <a:lnRef idx="1">
+            <a:schemeClr val="accent1"/>
+          </a:lnRef>
+          <a:fillRef idx="3">
+            <a:schemeClr val="accent1"/>
+          </a:fillRef>
+          <a:effectRef idx="2">
+            <a:schemeClr val="accent1"/>
+          </a:effectRef>
+          <a:fontRef idx="minor"/>
+        </p:style>
+        <p:txBody>
+          <a:bodyPr lIns="90000" rIns="90000" tIns="45000" bIns="45000" anchor="ctr">
+            <a:noAutofit/>
+          </a:bodyPr>
+          <a:p>
+            <a:endParaRPr b="0" lang="en-US" sz="1800" spc="-1" strike="noStrike">
+              <a:solidFill>
+                <a:schemeClr val="lt1"/>
+              </a:solidFill>
+              <a:latin typeface="Calibri"/>
+              <a:ea typeface="DejaVu Sans"/>
+            </a:endParaRPr>
+          </a:p>
+        </p:txBody>
+      </p:sp>
+      <p:sp>
+        <p:nvSpPr>
+          <p:cNvPr id="213" name="Rounded Rectangle 50"/>
+          <p:cNvSpPr/>
+          <p:nvPr/>
+        </p:nvSpPr>
+        <p:spPr>
+          <a:xfrm>
+            <a:off x="9875520" y="365760"/>
+            <a:ext cx="2008800" cy="500040"/>
+          </a:xfrm>
+          <a:prstGeom prst="roundRect">
+            <a:avLst>
+              <a:gd name="adj" fmla="val 16667"/>
+            </a:avLst>
+          </a:prstGeom>
+          <a:solidFill>
+            <a:srgbClr val="1e1e24"/>
+          </a:solidFill>
+          <a:ln>
+            <a:solidFill>
+              <a:srgbClr val="ff8c00"/>
+            </a:solidFill>
+            <a:round/>
+          </a:ln>
+          <a:effectLst>
+            <a:outerShdw blurRad="39960" dir="5400000" dist="23040" rotWithShape="0">
+              <a:srgbClr val="000000">
+                <a:alpha val="35000"/>
+              </a:srgbClr>
+            </a:outerShdw>
+          </a:effectLst>
+        </p:spPr>
+        <p:style>
+          <a:lnRef idx="1">
+            <a:schemeClr val="accent1"/>
+          </a:lnRef>
+          <a:fillRef idx="3">
+            <a:schemeClr val="accent1"/>
+          </a:fillRef>
+          <a:effectRef idx="2">
+            <a:schemeClr val="accent1"/>
+          </a:effectRef>
+          <a:fontRef idx="minor"/>
+        </p:style>
+        <p:txBody>
+          <a:bodyPr lIns="90000" rIns="90000" tIns="45000" bIns="45000" anchor="ctr">
+            <a:noAutofit/>
+          </a:bodyPr>
+          <a:p>
+            <a:pPr algn="ctr">
+              <a:lnSpc>
+                <a:spcPct val="100000"/>
+              </a:lnSpc>
+            </a:pPr>
+            <a:r>
+              <a:rPr b="1" lang="en-US" sz="1400" spc="-1" strike="noStrike">
+                <a:solidFill>
+                  <a:srgbClr val="ffb45a"/>
+                </a:solidFill>
+                <a:latin typeface="Calibri"/>
+                <a:ea typeface="DejaVu Sans"/>
+              </a:rPr>
+              <a:t>JAVA CORE</a:t>
+            </a:r>
+            <a:endParaRPr b="0" lang="en-US" sz="1400" spc="-1" strike="noStrike">
+              <a:solidFill>
+                <a:srgbClr val="ffffff"/>
+              </a:solidFill>
+              <a:latin typeface="Arial"/>
+            </a:endParaRPr>
+          </a:p>
+        </p:txBody>
+      </p:sp>
+      <p:sp>
+        <p:nvSpPr>
+          <p:cNvPr id="214" name="TextBox 21"/>
+          <p:cNvSpPr/>
+          <p:nvPr/>
+        </p:nvSpPr>
+        <p:spPr>
+          <a:xfrm>
+            <a:off x="1466280" y="914400"/>
+            <a:ext cx="8037360" cy="516960"/>
+          </a:xfrm>
+          <a:prstGeom prst="rect">
+            <a:avLst/>
+          </a:prstGeom>
+          <a:noFill/>
+          <a:ln w="0">
+            <a:noFill/>
+          </a:ln>
+        </p:spPr>
+        <p:style>
+          <a:lnRef idx="0"/>
+          <a:fillRef idx="0"/>
+          <a:effectRef idx="0"/>
+          <a:fontRef idx="minor"/>
+        </p:style>
+        <p:txBody>
+          <a:bodyPr wrap="none" lIns="90000" rIns="90000" tIns="45000" bIns="45000" anchor="t">
+            <a:spAutoFit/>
+          </a:bodyPr>
+          <a:p>
+            <a:pPr>
+              <a:lnSpc>
+                <a:spcPct val="100000"/>
+              </a:lnSpc>
+            </a:pPr>
+            <a:r>
+              <a:rPr b="1" lang="en-US" sz="2800" spc="-1" strike="noStrike">
+                <a:solidFill>
+                  <a:srgbClr val="f5f5f5"/>
+                </a:solidFill>
+                <a:latin typeface="Calibri"/>
+                <a:ea typeface="DejaVu Sans"/>
+              </a:rPr>
+              <a:t>The Ultimate Java Date &amp; Time Ecosystem (Summary)</a:t>
+            </a:r>
+            <a:endParaRPr b="0" lang="en-US" sz="2800" spc="-1" strike="noStrike">
+              <a:solidFill>
+                <a:srgbClr val="000000"/>
+              </a:solidFill>
+              <a:latin typeface="Arial"/>
+            </a:endParaRPr>
+          </a:p>
+        </p:txBody>
+      </p:sp>
+      <p:sp>
+        <p:nvSpPr>
+          <p:cNvPr id="215" name="TextBox 22"/>
+          <p:cNvSpPr/>
+          <p:nvPr/>
+        </p:nvSpPr>
+        <p:spPr>
+          <a:xfrm>
+            <a:off x="1767600" y="1694880"/>
+            <a:ext cx="7952040" cy="819720"/>
+          </a:xfrm>
+          <a:prstGeom prst="rect">
+            <a:avLst/>
+          </a:prstGeom>
+          <a:noFill/>
+          <a:ln w="0">
+            <a:noFill/>
+          </a:ln>
+        </p:spPr>
+        <p:style>
+          <a:lnRef idx="0"/>
+          <a:fillRef idx="0"/>
+          <a:effectRef idx="0"/>
+          <a:fontRef idx="minor"/>
+        </p:style>
+        <p:txBody>
+          <a:bodyPr wrap="none" lIns="90000" rIns="90000" tIns="45000" bIns="45000" anchor="t">
+            <a:spAutoFit/>
+          </a:bodyPr>
+          <a:p>
+            <a:pPr>
+              <a:lnSpc>
+                <a:spcPct val="100000"/>
+              </a:lnSpc>
+            </a:pPr>
+            <a:r>
+              <a:rPr b="0" lang="en-US" sz="1600" spc="-1" strike="noStrike">
+                <a:solidFill>
+                  <a:srgbClr val="aaaaaa"/>
+                </a:solidFill>
+                <a:latin typeface="Calibri"/>
+                <a:ea typeface="DejaVu Sans"/>
+              </a:rPr>
+              <a:t>The java.time package (introduced in Java 8) is a paradigm shift in Java. It offers an immutable, </a:t>
+            </a:r>
+            <a:endParaRPr b="0" lang="en-US" sz="1600" spc="-1" strike="noStrike">
+              <a:solidFill>
+                <a:srgbClr val="000000"/>
+              </a:solidFill>
+              <a:latin typeface="Arial"/>
+            </a:endParaRPr>
+          </a:p>
+          <a:p>
+            <a:pPr>
+              <a:lnSpc>
+                <a:spcPct val="100000"/>
+              </a:lnSpc>
+            </a:pPr>
+            <a:r>
+              <a:rPr b="0" lang="en-US" sz="1600" spc="-1" strike="noStrike">
+                <a:solidFill>
+                  <a:srgbClr val="aaaaaa"/>
+                </a:solidFill>
+                <a:latin typeface="Calibri"/>
+                <a:ea typeface="DejaVu Sans"/>
+              </a:rPr>
+              <a:t>thread-safe, and domain-driven approach to modeling human time,</a:t>
+            </a:r>
+            <a:endParaRPr b="0" lang="en-US" sz="1600" spc="-1" strike="noStrike">
+              <a:solidFill>
+                <a:srgbClr val="000000"/>
+              </a:solidFill>
+              <a:latin typeface="Arial"/>
+            </a:endParaRPr>
+          </a:p>
+          <a:p>
+            <a:pPr>
+              <a:lnSpc>
+                <a:spcPct val="100000"/>
+              </a:lnSpc>
+            </a:pPr>
+            <a:r>
+              <a:rPr b="0" lang="en-US" sz="1600" spc="-1" strike="noStrike">
+                <a:solidFill>
+                  <a:srgbClr val="aaaaaa"/>
+                </a:solidFill>
+                <a:latin typeface="Calibri"/>
+                <a:ea typeface="DejaVu Sans"/>
+              </a:rPr>
+              <a:t> </a:t>
+            </a:r>
+            <a:r>
+              <a:rPr b="0" lang="en-US" sz="1600" spc="-1" strike="noStrike">
+                <a:solidFill>
+                  <a:srgbClr val="aaaaaa"/>
+                </a:solidFill>
+                <a:latin typeface="Calibri"/>
+                <a:ea typeface="DejaVu Sans"/>
+              </a:rPr>
+              <a:t>machine time, and the complex geographical rules that connect them.</a:t>
+            </a:r>
+            <a:endParaRPr b="0" lang="en-US" sz="1600" spc="-1" strike="noStrike">
+              <a:solidFill>
+                <a:srgbClr val="000000"/>
+              </a:solidFill>
+              <a:latin typeface="Arial"/>
+            </a:endParaRPr>
+          </a:p>
+        </p:txBody>
+      </p:sp>
+      <p:sp>
+        <p:nvSpPr>
+          <p:cNvPr id="216" name="Rounded Rectangle 51"/>
+          <p:cNvSpPr/>
+          <p:nvPr/>
+        </p:nvSpPr>
+        <p:spPr>
+          <a:xfrm>
+            <a:off x="987480" y="3182040"/>
+            <a:ext cx="3288960" cy="2740320"/>
+          </a:xfrm>
+          <a:prstGeom prst="roundRect">
+            <a:avLst>
+              <a:gd name="adj" fmla="val 16667"/>
+            </a:avLst>
+          </a:prstGeom>
+          <a:solidFill>
+            <a:srgbClr val="08080a"/>
+          </a:solidFill>
+          <a:ln>
+            <a:noFill/>
+          </a:ln>
+          <a:effectLst>
+            <a:outerShdw blurRad="39960" dir="5400000" dist="23040" rotWithShape="0">
+              <a:srgbClr val="000000">
+                <a:alpha val="35000"/>
+              </a:srgbClr>
+            </a:outerShdw>
+          </a:effectLst>
+        </p:spPr>
+        <p:style>
+          <a:lnRef idx="1">
+            <a:schemeClr val="accent1"/>
+          </a:lnRef>
+          <a:fillRef idx="3">
+            <a:schemeClr val="accent1"/>
+          </a:fillRef>
+          <a:effectRef idx="2">
+            <a:schemeClr val="accent1"/>
+          </a:effectRef>
+          <a:fontRef idx="minor"/>
+        </p:style>
+        <p:txBody>
+          <a:bodyPr lIns="90000" rIns="90000" tIns="45000" bIns="45000" anchor="ctr">
+            <a:noAutofit/>
+          </a:bodyPr>
+          <a:p>
+            <a:endParaRPr b="0" lang="en-US" sz="1800" spc="-1" strike="noStrike">
+              <a:solidFill>
+                <a:schemeClr val="lt1"/>
+              </a:solidFill>
+              <a:latin typeface="Calibri"/>
+              <a:ea typeface="DejaVu Sans"/>
+            </a:endParaRPr>
+          </a:p>
+        </p:txBody>
+      </p:sp>
+      <p:sp>
+        <p:nvSpPr>
+          <p:cNvPr id="217" name="Rounded Rectangle 52"/>
+          <p:cNvSpPr/>
+          <p:nvPr/>
+        </p:nvSpPr>
+        <p:spPr>
+          <a:xfrm>
+            <a:off x="457200" y="2743200"/>
+            <a:ext cx="3886200" cy="3885480"/>
+          </a:xfrm>
+          <a:prstGeom prst="roundRect">
+            <a:avLst>
+              <a:gd name="adj" fmla="val 16667"/>
+            </a:avLst>
+          </a:prstGeom>
+          <a:solidFill>
+            <a:srgbClr val="16161c"/>
+          </a:solidFill>
+          <a:ln>
+            <a:solidFill>
+              <a:srgbClr val="464655"/>
+            </a:solidFill>
+            <a:round/>
+          </a:ln>
+          <a:effectLst>
+            <a:outerShdw blurRad="39960" dir="5400000" dist="23040" rotWithShape="0">
+              <a:srgbClr val="000000">
+                <a:alpha val="35000"/>
+              </a:srgbClr>
+            </a:outerShdw>
+          </a:effectLst>
+        </p:spPr>
+        <p:style>
+          <a:lnRef idx="1">
+            <a:schemeClr val="accent1"/>
+          </a:lnRef>
+          <a:fillRef idx="3">
+            <a:schemeClr val="accent1"/>
+          </a:fillRef>
+          <a:effectRef idx="2">
+            <a:schemeClr val="accent1"/>
+          </a:effectRef>
+          <a:fontRef idx="minor"/>
+        </p:style>
+        <p:txBody>
+          <a:bodyPr lIns="90000" rIns="90000" tIns="45000" bIns="45000" anchor="ctr">
+            <a:noAutofit/>
+          </a:bodyPr>
+          <a:p>
+            <a:pPr>
+              <a:lnSpc>
+                <a:spcPct val="100000"/>
+              </a:lnSpc>
+            </a:pPr>
+            <a:r>
+              <a:rPr b="1" lang="en-US" sz="1100" spc="-1" strike="noStrike">
+                <a:solidFill>
+                  <a:schemeClr val="lt1"/>
+                </a:solidFill>
+                <a:latin typeface="Calibri"/>
+                <a:ea typeface="DejaVu Sans"/>
+              </a:rPr>
+              <a:t>Dimension 1: </a:t>
+            </a:r>
+            <a:r>
+              <a:rPr b="0" lang="en-US" sz="1100" spc="-1" strike="noStrike">
+                <a:solidFill>
+                  <a:schemeClr val="lt1"/>
+                </a:solidFill>
+                <a:latin typeface="Calibri"/>
+                <a:ea typeface="DejaVu Sans"/>
+              </a:rPr>
+              <a:t>The Human Timeline (Ignorant of Geography)</a:t>
+            </a:r>
+            <a:endParaRPr b="0" lang="en-US" sz="1100" spc="-1" strike="noStrike">
+              <a:solidFill>
+                <a:srgbClr val="ffffff"/>
+              </a:solidFill>
+              <a:latin typeface="Arial"/>
+            </a:endParaRPr>
+          </a:p>
+          <a:p>
+            <a:pPr>
+              <a:lnSpc>
+                <a:spcPct val="100000"/>
+              </a:lnSpc>
+            </a:pPr>
+            <a:r>
+              <a:rPr b="1" lang="en-US" sz="1100" spc="-1" strike="noStrike">
+                <a:solidFill>
+                  <a:schemeClr val="lt1"/>
+                </a:solidFill>
+                <a:latin typeface="Calibri"/>
+                <a:ea typeface="DejaVu Sans"/>
+              </a:rPr>
+              <a:t>LocalDate, LocalTime, LocalDateTime represent time exactly as you see it on a wall clock or a paper calendar. They don't know where in the world they are.</a:t>
+            </a:r>
+            <a:endParaRPr b="0" lang="en-US" sz="1100" spc="-1" strike="noStrike">
+              <a:solidFill>
+                <a:srgbClr val="ffffff"/>
+              </a:solidFill>
+              <a:latin typeface="Arial"/>
+            </a:endParaRPr>
+          </a:p>
+          <a:p>
+            <a:pPr>
+              <a:lnSpc>
+                <a:spcPct val="100000"/>
+              </a:lnSpc>
+            </a:pPr>
+            <a:endParaRPr b="0" lang="en-US" sz="1100" spc="-1" strike="noStrike">
+              <a:solidFill>
+                <a:srgbClr val="ffffff"/>
+              </a:solidFill>
+              <a:latin typeface="Arial"/>
+            </a:endParaRPr>
+          </a:p>
+          <a:p>
+            <a:pPr>
+              <a:lnSpc>
+                <a:spcPct val="100000"/>
+              </a:lnSpc>
+            </a:pPr>
+            <a:r>
+              <a:rPr b="1" lang="en-US" sz="1100" spc="-1" strike="noStrike">
+                <a:solidFill>
+                  <a:schemeClr val="lt1"/>
+                </a:solidFill>
+                <a:latin typeface="Calibri"/>
+                <a:ea typeface="DejaVu Sans"/>
+              </a:rPr>
+              <a:t>Dimension 2: </a:t>
+            </a:r>
+            <a:r>
+              <a:rPr b="0" lang="en-US" sz="1100" spc="-1" strike="noStrike">
+                <a:solidFill>
+                  <a:schemeClr val="lt1"/>
+                </a:solidFill>
+                <a:latin typeface="Calibri"/>
+                <a:ea typeface="DejaVu Sans"/>
+              </a:rPr>
+              <a:t>The Earth's Grid (Geographical Reality)</a:t>
+            </a:r>
+            <a:endParaRPr b="0" lang="en-US" sz="1100" spc="-1" strike="noStrike">
+              <a:solidFill>
+                <a:srgbClr val="ffffff"/>
+              </a:solidFill>
+              <a:latin typeface="Arial"/>
+            </a:endParaRPr>
+          </a:p>
+          <a:p>
+            <a:pPr>
+              <a:lnSpc>
+                <a:spcPct val="100000"/>
+              </a:lnSpc>
+            </a:pPr>
+            <a:r>
+              <a:rPr b="1" lang="en-US" sz="1100" spc="-1" strike="noStrike">
+                <a:solidFill>
+                  <a:schemeClr val="lt1"/>
+                </a:solidFill>
+                <a:latin typeface="Calibri"/>
+                <a:ea typeface="DejaVu Sans"/>
+              </a:rPr>
+              <a:t>ZoneId and ZonedDateTime anchor the human timeline to a specific coordinate on Earth. They automatically absorb the chaos of Daylight Saving Time (DST) and UTC offsets.</a:t>
+            </a:r>
+            <a:endParaRPr b="0" lang="en-US" sz="1100" spc="-1" strike="noStrike">
+              <a:solidFill>
+                <a:srgbClr val="ffffff"/>
+              </a:solidFill>
+              <a:latin typeface="Arial"/>
+            </a:endParaRPr>
+          </a:p>
+          <a:p>
+            <a:pPr>
+              <a:lnSpc>
+                <a:spcPct val="100000"/>
+              </a:lnSpc>
+            </a:pPr>
+            <a:endParaRPr b="0" lang="en-US" sz="1100" spc="-1" strike="noStrike">
+              <a:solidFill>
+                <a:srgbClr val="ffffff"/>
+              </a:solidFill>
+              <a:latin typeface="Arial"/>
+            </a:endParaRPr>
+          </a:p>
+          <a:p>
+            <a:pPr>
+              <a:lnSpc>
+                <a:spcPct val="100000"/>
+              </a:lnSpc>
+            </a:pPr>
+            <a:r>
+              <a:rPr b="1" lang="en-US" sz="1100" spc="-1" strike="noStrike">
+                <a:solidFill>
+                  <a:schemeClr val="lt1"/>
+                </a:solidFill>
+                <a:latin typeface="Calibri"/>
+                <a:ea typeface="DejaVu Sans"/>
+              </a:rPr>
+              <a:t>Dimension 3: </a:t>
+            </a:r>
+            <a:r>
+              <a:rPr b="0" lang="en-US" sz="1100" spc="-1" strike="noStrike">
+                <a:solidFill>
+                  <a:schemeClr val="lt1"/>
+                </a:solidFill>
+                <a:latin typeface="Calibri"/>
+                <a:ea typeface="DejaVu Sans"/>
+              </a:rPr>
+              <a:t>The Measurement (Space between moments)</a:t>
+            </a:r>
+            <a:endParaRPr b="0" lang="en-US" sz="1100" spc="-1" strike="noStrike">
+              <a:solidFill>
+                <a:srgbClr val="ffffff"/>
+              </a:solidFill>
+              <a:latin typeface="Arial"/>
+            </a:endParaRPr>
+          </a:p>
+          <a:p>
+            <a:pPr>
+              <a:lnSpc>
+                <a:spcPct val="100000"/>
+              </a:lnSpc>
+            </a:pPr>
+            <a:r>
+              <a:rPr b="1" lang="en-US" sz="1100" spc="-1" strike="noStrike">
+                <a:solidFill>
+                  <a:schemeClr val="lt1"/>
+                </a:solidFill>
+                <a:latin typeface="Calibri"/>
+                <a:ea typeface="DejaVu Sans"/>
+              </a:rPr>
+              <a:t>Time is not just points; it's distances. Period measures calendar distances (years, months, days), while Duration measures clock distances (hours, minutes, seconds).</a:t>
+            </a:r>
+            <a:endParaRPr b="0" lang="en-US" sz="1100" spc="-1" strike="noStrike">
+              <a:solidFill>
+                <a:srgbClr val="ffffff"/>
+              </a:solidFill>
+              <a:latin typeface="Arial"/>
+            </a:endParaRPr>
+          </a:p>
+          <a:p>
+            <a:pPr>
+              <a:lnSpc>
+                <a:spcPct val="100000"/>
+              </a:lnSpc>
+            </a:pPr>
+            <a:endParaRPr b="0" lang="en-US" sz="1100" spc="-1" strike="noStrike">
+              <a:solidFill>
+                <a:srgbClr val="ffffff"/>
+              </a:solidFill>
+              <a:latin typeface="Arial"/>
+            </a:endParaRPr>
+          </a:p>
+          <a:p>
+            <a:pPr>
+              <a:lnSpc>
+                <a:spcPct val="100000"/>
+              </a:lnSpc>
+            </a:pPr>
+            <a:r>
+              <a:rPr b="1" lang="en-US" sz="1100" spc="-1" strike="noStrike">
+                <a:solidFill>
+                  <a:schemeClr val="lt1"/>
+                </a:solidFill>
+                <a:latin typeface="Calibri"/>
+                <a:ea typeface="DejaVu Sans"/>
+              </a:rPr>
+              <a:t>Dimension 4:  </a:t>
+            </a:r>
+            <a:r>
+              <a:rPr b="0" lang="en-US" sz="1100" spc="-1" strike="noStrike">
+                <a:solidFill>
+                  <a:schemeClr val="lt1"/>
+                </a:solidFill>
+                <a:latin typeface="Calibri"/>
+                <a:ea typeface="DejaVu Sans"/>
+              </a:rPr>
+              <a:t>The Translation Layer (The Bridge)</a:t>
+            </a:r>
+            <a:endParaRPr b="0" lang="en-US" sz="1100" spc="-1" strike="noStrike">
+              <a:solidFill>
+                <a:srgbClr val="ffffff"/>
+              </a:solidFill>
+              <a:latin typeface="Arial"/>
+            </a:endParaRPr>
+          </a:p>
+          <a:p>
+            <a:pPr>
+              <a:lnSpc>
+                <a:spcPct val="100000"/>
+              </a:lnSpc>
+            </a:pPr>
+            <a:r>
+              <a:rPr b="1" lang="en-US" sz="1100" spc="-1" strike="noStrike">
+                <a:solidFill>
+                  <a:schemeClr val="lt1"/>
+                </a:solidFill>
+                <a:latin typeface="Calibri"/>
+                <a:ea typeface="DejaVu Sans"/>
+              </a:rPr>
+              <a:t>DateTimeFormatter acts as the universal translator between raw string text (Parsing) and human-readable UI outputs (Formatting).</a:t>
+            </a:r>
+            <a:endParaRPr b="0" lang="en-US" sz="1100" spc="-1" strike="noStrike">
+              <a:solidFill>
+                <a:srgbClr val="ffffff"/>
+              </a:solidFill>
+              <a:latin typeface="Arial"/>
+            </a:endParaRPr>
+          </a:p>
+        </p:txBody>
+      </p:sp>
+      <p:sp>
+        <p:nvSpPr>
+          <p:cNvPr id="218" name="Rounded Rectangle 53"/>
+          <p:cNvSpPr/>
+          <p:nvPr/>
+        </p:nvSpPr>
+        <p:spPr>
+          <a:xfrm>
+            <a:off x="4507920" y="3182040"/>
+            <a:ext cx="3288960" cy="2740320"/>
+          </a:xfrm>
+          <a:prstGeom prst="roundRect">
+            <a:avLst>
+              <a:gd name="adj" fmla="val 16667"/>
+            </a:avLst>
+          </a:prstGeom>
+          <a:solidFill>
+            <a:srgbClr val="08080a"/>
+          </a:solidFill>
+          <a:ln>
+            <a:noFill/>
+          </a:ln>
+          <a:effectLst>
+            <a:outerShdw blurRad="39960" dir="5400000" dist="23040" rotWithShape="0">
+              <a:srgbClr val="000000">
+                <a:alpha val="35000"/>
+              </a:srgbClr>
+            </a:outerShdw>
+          </a:effectLst>
+        </p:spPr>
+        <p:style>
+          <a:lnRef idx="1">
+            <a:schemeClr val="accent1"/>
+          </a:lnRef>
+          <a:fillRef idx="3">
+            <a:schemeClr val="accent1"/>
+          </a:fillRef>
+          <a:effectRef idx="2">
+            <a:schemeClr val="accent1"/>
+          </a:effectRef>
+          <a:fontRef idx="minor"/>
+        </p:style>
+        <p:txBody>
+          <a:bodyPr lIns="90000" rIns="90000" tIns="45000" bIns="45000" anchor="ctr">
+            <a:noAutofit/>
+          </a:bodyPr>
+          <a:p>
+            <a:endParaRPr b="0" lang="en-US" sz="1800" spc="-1" strike="noStrike">
+              <a:solidFill>
+                <a:schemeClr val="lt1"/>
+              </a:solidFill>
+              <a:latin typeface="Calibri"/>
+              <a:ea typeface="DejaVu Sans"/>
+            </a:endParaRPr>
+          </a:p>
+        </p:txBody>
+      </p:sp>
+      <p:sp>
+        <p:nvSpPr>
+          <p:cNvPr id="219" name="Rounded Rectangle 54"/>
+          <p:cNvSpPr/>
+          <p:nvPr/>
+        </p:nvSpPr>
+        <p:spPr>
+          <a:xfrm>
+            <a:off x="4572000" y="2743200"/>
+            <a:ext cx="3429000" cy="3657600"/>
+          </a:xfrm>
+          <a:prstGeom prst="roundRect">
+            <a:avLst>
+              <a:gd name="adj" fmla="val 16667"/>
+            </a:avLst>
+          </a:prstGeom>
+          <a:solidFill>
+            <a:srgbClr val="16161c"/>
+          </a:solidFill>
+          <a:ln>
+            <a:solidFill>
+              <a:srgbClr val="464655"/>
+            </a:solidFill>
+            <a:round/>
+          </a:ln>
+          <a:effectLst>
+            <a:outerShdw blurRad="39960" dir="5400000" dist="23040" rotWithShape="0">
+              <a:srgbClr val="000000">
+                <a:alpha val="35000"/>
+              </a:srgbClr>
+            </a:outerShdw>
+          </a:effectLst>
+        </p:spPr>
+        <p:style>
+          <a:lnRef idx="1">
+            <a:schemeClr val="accent1"/>
+          </a:lnRef>
+          <a:fillRef idx="3">
+            <a:schemeClr val="accent1"/>
+          </a:fillRef>
+          <a:effectRef idx="2">
+            <a:schemeClr val="accent1"/>
+          </a:effectRef>
+          <a:fontRef idx="minor"/>
+        </p:style>
+        <p:txBody>
+          <a:bodyPr lIns="90000" rIns="90000" tIns="45000" bIns="45000" anchor="ctr">
+            <a:noAutofit/>
+          </a:bodyPr>
+          <a:p>
+            <a:pPr>
+              <a:lnSpc>
+                <a:spcPct val="100000"/>
+              </a:lnSpc>
+            </a:pPr>
+            <a:r>
+              <a:rPr b="0" lang="en-US" sz="1100" spc="-1" strike="noStrike">
+                <a:solidFill>
+                  <a:schemeClr val="lt1"/>
+                </a:solidFill>
+                <a:latin typeface="Calibri"/>
+                <a:ea typeface="DejaVu Sans"/>
+              </a:rPr>
+              <a:t>[ What kind of time do you need to model? ]</a:t>
+            </a:r>
+            <a:endParaRPr b="0" lang="en-US" sz="1100" spc="-1" strike="noStrike">
+              <a:solidFill>
+                <a:srgbClr val="ffffff"/>
+              </a:solidFill>
+              <a:latin typeface="Arial"/>
+            </a:endParaRPr>
+          </a:p>
+          <a:p>
+            <a:pPr>
+              <a:lnSpc>
+                <a:spcPct val="100000"/>
+              </a:lnSpc>
+            </a:pPr>
+            <a:r>
+              <a:rPr b="0" lang="en-US" sz="1100" spc="-1" strike="noStrike">
+                <a:solidFill>
+                  <a:schemeClr val="lt1"/>
+                </a:solidFill>
+                <a:latin typeface="Calibri"/>
+                <a:ea typeface="DejaVu Sans"/>
+              </a:rPr>
+              <a:t>│</a:t>
+            </a:r>
+            <a:endParaRPr b="0" lang="en-US" sz="1100" spc="-1" strike="noStrike">
+              <a:solidFill>
+                <a:srgbClr val="ffffff"/>
+              </a:solidFill>
+              <a:latin typeface="Arial"/>
+            </a:endParaRPr>
+          </a:p>
+          <a:p>
+            <a:pPr>
+              <a:lnSpc>
+                <a:spcPct val="100000"/>
+              </a:lnSpc>
+            </a:pPr>
+            <a:r>
+              <a:rPr b="0" lang="en-US" sz="1100" spc="-1" strike="noStrike">
+                <a:solidFill>
+                  <a:schemeClr val="lt1"/>
+                </a:solidFill>
+                <a:latin typeface="Calibri"/>
+                <a:ea typeface="DejaVu Sans"/>
+              </a:rPr>
+              <a:t>├──</a:t>
+            </a:r>
+            <a:r>
+              <a:rPr b="0" lang="en-US" sz="1100" spc="-1" strike="noStrike">
+                <a:solidFill>
+                  <a:schemeClr val="lt1"/>
+                </a:solidFill>
+                <a:latin typeface="Calibri"/>
+                <a:ea typeface="DejaVu Sans"/>
+              </a:rPr>
+              <a:t>&gt; Does geography matter? (Global Events, Flights)</a:t>
+            </a:r>
+            <a:endParaRPr b="0" lang="en-US" sz="1100" spc="-1" strike="noStrike">
+              <a:solidFill>
+                <a:srgbClr val="ffffff"/>
+              </a:solidFill>
+              <a:latin typeface="Arial"/>
+            </a:endParaRPr>
+          </a:p>
+          <a:p>
+            <a:pPr>
+              <a:lnSpc>
+                <a:spcPct val="100000"/>
+              </a:lnSpc>
+            </a:pPr>
+            <a:r>
+              <a:rPr b="0" lang="en-US" sz="1100" spc="-1" strike="noStrike">
+                <a:solidFill>
+                  <a:schemeClr val="lt1"/>
+                </a:solidFill>
+                <a:latin typeface="Calibri"/>
+                <a:ea typeface="DejaVu Sans"/>
+              </a:rPr>
+              <a:t>│ └── </a:t>
+            </a:r>
+            <a:r>
+              <a:rPr b="0" lang="en-US" sz="1100" spc="-1" strike="noStrike">
+                <a:solidFill>
+                  <a:schemeClr val="lt1"/>
+                </a:solidFill>
+                <a:latin typeface="Calibri"/>
+                <a:ea typeface="DejaVu Sans"/>
+              </a:rPr>
+              <a:t>YES ─&gt; Bind with ZoneId ─&gt; ZonedDateTime</a:t>
+            </a:r>
+            <a:endParaRPr b="0" lang="en-US" sz="1100" spc="-1" strike="noStrike">
+              <a:solidFill>
+                <a:srgbClr val="ffffff"/>
+              </a:solidFill>
+              <a:latin typeface="Arial"/>
+            </a:endParaRPr>
+          </a:p>
+          <a:p>
+            <a:pPr>
+              <a:lnSpc>
+                <a:spcPct val="100000"/>
+              </a:lnSpc>
+            </a:pPr>
+            <a:r>
+              <a:rPr b="0" lang="en-US" sz="1100" spc="-1" strike="noStrike">
+                <a:solidFill>
+                  <a:schemeClr val="lt1"/>
+                </a:solidFill>
+                <a:latin typeface="Calibri"/>
+                <a:ea typeface="DejaVu Sans"/>
+              </a:rPr>
+              <a:t>│</a:t>
+            </a:r>
+            <a:endParaRPr b="0" lang="en-US" sz="1100" spc="-1" strike="noStrike">
+              <a:solidFill>
+                <a:srgbClr val="ffffff"/>
+              </a:solidFill>
+              <a:latin typeface="Arial"/>
+            </a:endParaRPr>
+          </a:p>
+          <a:p>
+            <a:pPr>
+              <a:lnSpc>
+                <a:spcPct val="100000"/>
+              </a:lnSpc>
+            </a:pPr>
+            <a:r>
+              <a:rPr b="0" lang="en-US" sz="1100" spc="-1" strike="noStrike">
+                <a:solidFill>
+                  <a:schemeClr val="lt1"/>
+                </a:solidFill>
+                <a:latin typeface="Calibri"/>
+                <a:ea typeface="DejaVu Sans"/>
+              </a:rPr>
+              <a:t>├──</a:t>
+            </a:r>
+            <a:r>
+              <a:rPr b="0" lang="en-US" sz="1100" spc="-1" strike="noStrike">
+                <a:solidFill>
+                  <a:schemeClr val="lt1"/>
+                </a:solidFill>
+                <a:latin typeface="Calibri"/>
+                <a:ea typeface="DejaVu Sans"/>
+              </a:rPr>
+              <a:t>&gt; Is it just a local daily concept? (Birthdays, Alarms)</a:t>
+            </a:r>
+            <a:endParaRPr b="0" lang="en-US" sz="1100" spc="-1" strike="noStrike">
+              <a:solidFill>
+                <a:srgbClr val="ffffff"/>
+              </a:solidFill>
+              <a:latin typeface="Arial"/>
+            </a:endParaRPr>
+          </a:p>
+          <a:p>
+            <a:pPr>
+              <a:lnSpc>
+                <a:spcPct val="100000"/>
+              </a:lnSpc>
+            </a:pPr>
+            <a:r>
+              <a:rPr b="0" lang="en-US" sz="1100" spc="-1" strike="noStrike">
+                <a:solidFill>
+                  <a:schemeClr val="lt1"/>
+                </a:solidFill>
+                <a:latin typeface="Calibri"/>
+                <a:ea typeface="DejaVu Sans"/>
+              </a:rPr>
+              <a:t>│ ├── </a:t>
+            </a:r>
+            <a:r>
+              <a:rPr b="0" lang="en-US" sz="1100" spc="-1" strike="noStrike">
+                <a:solidFill>
+                  <a:schemeClr val="lt1"/>
+                </a:solidFill>
+                <a:latin typeface="Calibri"/>
+                <a:ea typeface="DejaVu Sans"/>
+              </a:rPr>
+              <a:t>Need Date Only? ─&gt; LocalDate</a:t>
+            </a:r>
+            <a:endParaRPr b="0" lang="en-US" sz="1100" spc="-1" strike="noStrike">
+              <a:solidFill>
+                <a:srgbClr val="ffffff"/>
+              </a:solidFill>
+              <a:latin typeface="Arial"/>
+            </a:endParaRPr>
+          </a:p>
+          <a:p>
+            <a:pPr>
+              <a:lnSpc>
+                <a:spcPct val="100000"/>
+              </a:lnSpc>
+            </a:pPr>
+            <a:r>
+              <a:rPr b="0" lang="en-US" sz="1100" spc="-1" strike="noStrike">
+                <a:solidFill>
+                  <a:schemeClr val="lt1"/>
+                </a:solidFill>
+                <a:latin typeface="Calibri"/>
+                <a:ea typeface="DejaVu Sans"/>
+              </a:rPr>
+              <a:t>│ ├── </a:t>
+            </a:r>
+            <a:r>
+              <a:rPr b="0" lang="en-US" sz="1100" spc="-1" strike="noStrike">
+                <a:solidFill>
+                  <a:schemeClr val="lt1"/>
+                </a:solidFill>
+                <a:latin typeface="Calibri"/>
+                <a:ea typeface="DejaVu Sans"/>
+              </a:rPr>
+              <a:t>Need Time Only? ─&gt; LocalTime</a:t>
+            </a:r>
+            <a:endParaRPr b="0" lang="en-US" sz="1100" spc="-1" strike="noStrike">
+              <a:solidFill>
+                <a:srgbClr val="ffffff"/>
+              </a:solidFill>
+              <a:latin typeface="Arial"/>
+            </a:endParaRPr>
+          </a:p>
+          <a:p>
+            <a:pPr>
+              <a:lnSpc>
+                <a:spcPct val="100000"/>
+              </a:lnSpc>
+            </a:pPr>
+            <a:r>
+              <a:rPr b="0" lang="en-US" sz="1100" spc="-1" strike="noStrike">
+                <a:solidFill>
+                  <a:schemeClr val="lt1"/>
+                </a:solidFill>
+                <a:latin typeface="Calibri"/>
+                <a:ea typeface="DejaVu Sans"/>
+              </a:rPr>
+              <a:t>│ └── </a:t>
+            </a:r>
+            <a:r>
+              <a:rPr b="0" lang="en-US" sz="1100" spc="-1" strike="noStrike">
+                <a:solidFill>
+                  <a:schemeClr val="lt1"/>
+                </a:solidFill>
+                <a:latin typeface="Calibri"/>
+                <a:ea typeface="DejaVu Sans"/>
+              </a:rPr>
+              <a:t>Need Both? ─&gt; LocalDateTime</a:t>
+            </a:r>
+            <a:endParaRPr b="0" lang="en-US" sz="1100" spc="-1" strike="noStrike">
+              <a:solidFill>
+                <a:srgbClr val="ffffff"/>
+              </a:solidFill>
+              <a:latin typeface="Arial"/>
+            </a:endParaRPr>
+          </a:p>
+          <a:p>
+            <a:pPr>
+              <a:lnSpc>
+                <a:spcPct val="100000"/>
+              </a:lnSpc>
+            </a:pPr>
+            <a:r>
+              <a:rPr b="0" lang="en-US" sz="1100" spc="-1" strike="noStrike">
+                <a:solidFill>
+                  <a:schemeClr val="lt1"/>
+                </a:solidFill>
+                <a:latin typeface="Calibri"/>
+                <a:ea typeface="DejaVu Sans"/>
+              </a:rPr>
+              <a:t>│</a:t>
+            </a:r>
+            <a:endParaRPr b="0" lang="en-US" sz="1100" spc="-1" strike="noStrike">
+              <a:solidFill>
+                <a:srgbClr val="ffffff"/>
+              </a:solidFill>
+              <a:latin typeface="Arial"/>
+            </a:endParaRPr>
+          </a:p>
+          <a:p>
+            <a:pPr>
+              <a:lnSpc>
+                <a:spcPct val="100000"/>
+              </a:lnSpc>
+            </a:pPr>
+            <a:r>
+              <a:rPr b="0" lang="en-US" sz="1100" spc="-1" strike="noStrike">
+                <a:solidFill>
+                  <a:schemeClr val="lt1"/>
+                </a:solidFill>
+                <a:latin typeface="Calibri"/>
+                <a:ea typeface="DejaVu Sans"/>
+              </a:rPr>
+              <a:t>[ Action Phase: What do you want to do with it? ]</a:t>
+            </a:r>
+            <a:endParaRPr b="0" lang="en-US" sz="1100" spc="-1" strike="noStrike">
+              <a:solidFill>
+                <a:srgbClr val="ffffff"/>
+              </a:solidFill>
+              <a:latin typeface="Arial"/>
+            </a:endParaRPr>
+          </a:p>
+          <a:p>
+            <a:pPr>
+              <a:lnSpc>
+                <a:spcPct val="100000"/>
+              </a:lnSpc>
+            </a:pPr>
+            <a:r>
+              <a:rPr b="0" lang="en-US" sz="1100" spc="-1" strike="noStrike">
+                <a:solidFill>
+                  <a:schemeClr val="lt1"/>
+                </a:solidFill>
+                <a:latin typeface="Calibri"/>
+                <a:ea typeface="DejaVu Sans"/>
+              </a:rPr>
+              <a:t>│</a:t>
+            </a:r>
+            <a:endParaRPr b="0" lang="en-US" sz="1100" spc="-1" strike="noStrike">
+              <a:solidFill>
+                <a:srgbClr val="ffffff"/>
+              </a:solidFill>
+              <a:latin typeface="Arial"/>
+            </a:endParaRPr>
+          </a:p>
+          <a:p>
+            <a:pPr>
+              <a:lnSpc>
+                <a:spcPct val="100000"/>
+              </a:lnSpc>
+            </a:pPr>
+            <a:r>
+              <a:rPr b="0" lang="en-US" sz="1100" spc="-1" strike="noStrike">
+                <a:solidFill>
+                  <a:schemeClr val="lt1"/>
+                </a:solidFill>
+                <a:latin typeface="Calibri"/>
+                <a:ea typeface="DejaVu Sans"/>
+              </a:rPr>
+              <a:t>├──</a:t>
+            </a:r>
+            <a:r>
+              <a:rPr b="0" lang="en-US" sz="1100" spc="-1" strike="noStrike">
+                <a:solidFill>
+                  <a:schemeClr val="lt1"/>
+                </a:solidFill>
+                <a:latin typeface="Calibri"/>
+                <a:ea typeface="DejaVu Sans"/>
+              </a:rPr>
+              <a:t>&gt; Calculate a Countdown/Distance?</a:t>
+            </a:r>
+            <a:endParaRPr b="0" lang="en-US" sz="1100" spc="-1" strike="noStrike">
+              <a:solidFill>
+                <a:srgbClr val="ffffff"/>
+              </a:solidFill>
+              <a:latin typeface="Arial"/>
+            </a:endParaRPr>
+          </a:p>
+          <a:p>
+            <a:pPr>
+              <a:lnSpc>
+                <a:spcPct val="100000"/>
+              </a:lnSpc>
+            </a:pPr>
+            <a:r>
+              <a:rPr b="0" lang="en-US" sz="1100" spc="-1" strike="noStrike">
+                <a:solidFill>
+                  <a:schemeClr val="lt1"/>
+                </a:solidFill>
+                <a:latin typeface="Calibri"/>
+                <a:ea typeface="DejaVu Sans"/>
+              </a:rPr>
+              <a:t>│ ├── </a:t>
+            </a:r>
+            <a:r>
+              <a:rPr b="0" lang="en-US" sz="1100" spc="-1" strike="noStrike">
+                <a:solidFill>
+                  <a:schemeClr val="lt1"/>
+                </a:solidFill>
+                <a:latin typeface="Calibri"/>
+                <a:ea typeface="DejaVu Sans"/>
+              </a:rPr>
+              <a:t>Calendar-based? ─&gt; Use Period</a:t>
+            </a:r>
+            <a:endParaRPr b="0" lang="en-US" sz="1100" spc="-1" strike="noStrike">
+              <a:solidFill>
+                <a:srgbClr val="ffffff"/>
+              </a:solidFill>
+              <a:latin typeface="Arial"/>
+            </a:endParaRPr>
+          </a:p>
+          <a:p>
+            <a:pPr>
+              <a:lnSpc>
+                <a:spcPct val="100000"/>
+              </a:lnSpc>
+            </a:pPr>
+            <a:r>
+              <a:rPr b="0" lang="en-US" sz="1100" spc="-1" strike="noStrike">
+                <a:solidFill>
+                  <a:schemeClr val="lt1"/>
+                </a:solidFill>
+                <a:latin typeface="Calibri"/>
+                <a:ea typeface="DejaVu Sans"/>
+              </a:rPr>
+              <a:t>│ └── </a:t>
+            </a:r>
+            <a:r>
+              <a:rPr b="0" lang="en-US" sz="1100" spc="-1" strike="noStrike">
+                <a:solidFill>
+                  <a:schemeClr val="lt1"/>
+                </a:solidFill>
+                <a:latin typeface="Calibri"/>
+                <a:ea typeface="DejaVu Sans"/>
+              </a:rPr>
+              <a:t>Clock-based? ─&gt; Use Duration</a:t>
+            </a:r>
+            <a:endParaRPr b="0" lang="en-US" sz="1100" spc="-1" strike="noStrike">
+              <a:solidFill>
+                <a:srgbClr val="ffffff"/>
+              </a:solidFill>
+              <a:latin typeface="Arial"/>
+            </a:endParaRPr>
+          </a:p>
+          <a:p>
+            <a:pPr>
+              <a:lnSpc>
+                <a:spcPct val="100000"/>
+              </a:lnSpc>
+            </a:pPr>
+            <a:r>
+              <a:rPr b="0" lang="en-US" sz="1100" spc="-1" strike="noStrike">
+                <a:solidFill>
+                  <a:schemeClr val="lt1"/>
+                </a:solidFill>
+                <a:latin typeface="Calibri"/>
+                <a:ea typeface="DejaVu Sans"/>
+              </a:rPr>
+              <a:t>│</a:t>
+            </a:r>
+            <a:endParaRPr b="0" lang="en-US" sz="1100" spc="-1" strike="noStrike">
+              <a:solidFill>
+                <a:srgbClr val="ffffff"/>
+              </a:solidFill>
+              <a:latin typeface="Arial"/>
+            </a:endParaRPr>
+          </a:p>
+          <a:p>
+            <a:pPr>
+              <a:lnSpc>
+                <a:spcPct val="100000"/>
+              </a:lnSpc>
+            </a:pPr>
+            <a:r>
+              <a:rPr b="0" lang="en-US" sz="1100" spc="-1" strike="noStrike">
+                <a:solidFill>
+                  <a:schemeClr val="lt1"/>
+                </a:solidFill>
+                <a:latin typeface="Calibri"/>
+                <a:ea typeface="DejaVu Sans"/>
+              </a:rPr>
+              <a:t>└──</a:t>
+            </a:r>
+            <a:r>
+              <a:rPr b="0" lang="en-US" sz="1100" spc="-1" strike="noStrike">
+                <a:solidFill>
+                  <a:schemeClr val="lt1"/>
+                </a:solidFill>
+                <a:latin typeface="Calibri"/>
+                <a:ea typeface="DejaVu Sans"/>
+              </a:rPr>
+              <a:t>&gt; Send to UI or Database?</a:t>
+            </a:r>
+            <a:endParaRPr b="0" lang="en-US" sz="1100" spc="-1" strike="noStrike">
+              <a:solidFill>
+                <a:srgbClr val="ffffff"/>
+              </a:solidFill>
+              <a:latin typeface="Arial"/>
+            </a:endParaRPr>
+          </a:p>
+          <a:p>
+            <a:pPr>
+              <a:lnSpc>
+                <a:spcPct val="100000"/>
+              </a:lnSpc>
+            </a:pPr>
+            <a:r>
+              <a:rPr b="0" lang="en-US" sz="1100" spc="-1" strike="noStrike">
+                <a:solidFill>
+                  <a:schemeClr val="lt1"/>
+                </a:solidFill>
+                <a:latin typeface="Calibri"/>
+                <a:ea typeface="DejaVu Sans"/>
+              </a:rPr>
+              <a:t>└── </a:t>
+            </a:r>
+            <a:r>
+              <a:rPr b="0" lang="en-US" sz="1100" spc="-1" strike="noStrike">
+                <a:solidFill>
+                  <a:schemeClr val="lt1"/>
+                </a:solidFill>
+                <a:latin typeface="Calibri"/>
+                <a:ea typeface="DejaVu Sans"/>
+              </a:rPr>
+              <a:t>Map with DateTimeFormatter (Format / Parse)</a:t>
+            </a:r>
+            <a:endParaRPr b="0" lang="en-US" sz="1100" spc="-1" strike="noStrike">
+              <a:solidFill>
+                <a:srgbClr val="ffffff"/>
+              </a:solidFill>
+              <a:latin typeface="Arial"/>
+            </a:endParaRPr>
+          </a:p>
+        </p:txBody>
+      </p:sp>
+      <p:sp>
+        <p:nvSpPr>
+          <p:cNvPr id="220" name="Rounded Rectangle 55"/>
+          <p:cNvSpPr/>
+          <p:nvPr/>
+        </p:nvSpPr>
+        <p:spPr>
+          <a:xfrm>
+            <a:off x="8028360" y="3182040"/>
+            <a:ext cx="3288960" cy="2740320"/>
+          </a:xfrm>
+          <a:prstGeom prst="roundRect">
+            <a:avLst>
+              <a:gd name="adj" fmla="val 16667"/>
+            </a:avLst>
+          </a:prstGeom>
+          <a:solidFill>
+            <a:srgbClr val="08080a"/>
+          </a:solidFill>
+          <a:ln>
+            <a:noFill/>
+          </a:ln>
+          <a:effectLst>
+            <a:outerShdw blurRad="39960" dir="5400000" dist="23040" rotWithShape="0">
+              <a:srgbClr val="000000">
+                <a:alpha val="35000"/>
+              </a:srgbClr>
+            </a:outerShdw>
+          </a:effectLst>
+        </p:spPr>
+        <p:style>
+          <a:lnRef idx="1">
+            <a:schemeClr val="accent1"/>
+          </a:lnRef>
+          <a:fillRef idx="3">
+            <a:schemeClr val="accent1"/>
+          </a:fillRef>
+          <a:effectRef idx="2">
+            <a:schemeClr val="accent1"/>
+          </a:effectRef>
+          <a:fontRef idx="minor"/>
+        </p:style>
+        <p:txBody>
+          <a:bodyPr lIns="90000" rIns="90000" tIns="45000" bIns="45000" anchor="ctr">
+            <a:noAutofit/>
+          </a:bodyPr>
+          <a:p>
+            <a:endParaRPr b="0" lang="en-US" sz="1800" spc="-1" strike="noStrike">
+              <a:solidFill>
+                <a:schemeClr val="lt1"/>
+              </a:solidFill>
+              <a:latin typeface="Calibri"/>
+              <a:ea typeface="DejaVu Sans"/>
+            </a:endParaRPr>
+          </a:p>
+        </p:txBody>
+      </p:sp>
+      <p:sp>
+        <p:nvSpPr>
+          <p:cNvPr id="221" name="Rounded Rectangle 56"/>
+          <p:cNvSpPr/>
+          <p:nvPr/>
+        </p:nvSpPr>
+        <p:spPr>
+          <a:xfrm>
+            <a:off x="8229600" y="2514600"/>
+            <a:ext cx="3657600" cy="4114800"/>
+          </a:xfrm>
+          <a:prstGeom prst="roundRect">
+            <a:avLst>
+              <a:gd name="adj" fmla="val 16667"/>
+            </a:avLst>
+          </a:prstGeom>
+          <a:solidFill>
+            <a:srgbClr val="16161c"/>
+          </a:solidFill>
+          <a:ln>
+            <a:solidFill>
+              <a:srgbClr val="464655"/>
+            </a:solidFill>
+            <a:round/>
+          </a:ln>
+          <a:effectLst>
+            <a:outerShdw blurRad="39960" dir="5400000" dist="23040" rotWithShape="0">
+              <a:srgbClr val="000000">
+                <a:alpha val="35000"/>
+              </a:srgbClr>
+            </a:outerShdw>
+          </a:effectLst>
+        </p:spPr>
+        <p:style>
+          <a:lnRef idx="1">
+            <a:schemeClr val="accent1"/>
+          </a:lnRef>
+          <a:fillRef idx="3">
+            <a:schemeClr val="accent1"/>
+          </a:fillRef>
+          <a:effectRef idx="2">
+            <a:schemeClr val="accent1"/>
+          </a:effectRef>
+          <a:fontRef idx="minor"/>
+        </p:style>
+        <p:txBody>
+          <a:bodyPr lIns="90000" rIns="90000" tIns="45000" bIns="45000" anchor="ctr">
+            <a:noAutofit/>
+          </a:bodyPr>
+          <a:p>
+            <a:pPr algn="ctr">
+              <a:lnSpc>
+                <a:spcPct val="100000"/>
+              </a:lnSpc>
+            </a:pPr>
+            <a:r>
+              <a:rPr b="0" lang="en-US" sz="800" spc="-1" strike="noStrike">
+                <a:solidFill>
+                  <a:srgbClr val="78ffc8"/>
+                </a:solidFill>
+                <a:latin typeface="Consolas"/>
+                <a:ea typeface="DejaVu Sans"/>
+              </a:rPr>
+              <a:t>public class TimeMastery {</a:t>
+            </a:r>
+            <a:endParaRPr b="0" lang="en-US" sz="800" spc="-1" strike="noStrike">
+              <a:solidFill>
+                <a:srgbClr val="ffffff"/>
+              </a:solidFill>
+              <a:latin typeface="Arial"/>
+            </a:endParaRPr>
+          </a:p>
+          <a:p>
+            <a:pPr algn="ctr">
+              <a:lnSpc>
+                <a:spcPct val="100000"/>
+              </a:lnSpc>
+            </a:pPr>
+            <a:r>
+              <a:rPr b="0" lang="en-US" sz="800" spc="-1" strike="noStrike">
+                <a:solidFill>
+                  <a:srgbClr val="78ffc8"/>
+                </a:solidFill>
+                <a:latin typeface="Consolas"/>
+                <a:ea typeface="DejaVu Sans"/>
+              </a:rPr>
+              <a:t>    </a:t>
+            </a:r>
+            <a:r>
+              <a:rPr b="0" lang="en-US" sz="800" spc="-1" strike="noStrike">
+                <a:solidFill>
+                  <a:srgbClr val="78ffc8"/>
+                </a:solidFill>
+                <a:latin typeface="Consolas"/>
+                <a:ea typeface="DejaVu Sans"/>
+              </a:rPr>
+              <a:t>public static void main(String[] args) {</a:t>
+            </a:r>
+            <a:endParaRPr b="0" lang="en-US" sz="800" spc="-1" strike="noStrike">
+              <a:solidFill>
+                <a:srgbClr val="ffffff"/>
+              </a:solidFill>
+              <a:latin typeface="Arial"/>
+            </a:endParaRPr>
+          </a:p>
+          <a:p>
+            <a:pPr algn="ctr">
+              <a:lnSpc>
+                <a:spcPct val="100000"/>
+              </a:lnSpc>
+            </a:pPr>
+            <a:r>
+              <a:rPr b="0" lang="en-US" sz="800" spc="-1" strike="noStrike">
+                <a:solidFill>
+                  <a:srgbClr val="78ffc8"/>
+                </a:solidFill>
+                <a:latin typeface="Consolas"/>
+                <a:ea typeface="DejaVu Sans"/>
+              </a:rPr>
+              <a:t>        </a:t>
+            </a:r>
+            <a:endParaRPr b="0" lang="en-US" sz="800" spc="-1" strike="noStrike">
+              <a:solidFill>
+                <a:srgbClr val="ffffff"/>
+              </a:solidFill>
+              <a:latin typeface="Arial"/>
+            </a:endParaRPr>
+          </a:p>
+          <a:p>
+            <a:pPr algn="ctr">
+              <a:lnSpc>
+                <a:spcPct val="100000"/>
+              </a:lnSpc>
+            </a:pPr>
+            <a:r>
+              <a:rPr b="0" lang="en-US" sz="800" spc="-1" strike="noStrike">
+                <a:solidFill>
+                  <a:srgbClr val="78ffc8"/>
+                </a:solidFill>
+                <a:latin typeface="Consolas"/>
+                <a:ea typeface="DejaVu Sans"/>
+              </a:rPr>
+              <a:t>        </a:t>
+            </a:r>
+            <a:r>
+              <a:rPr b="0" lang="en-US" sz="800" spc="-1" strike="noStrike">
+                <a:solidFill>
+                  <a:srgbClr val="78ffc8"/>
+                </a:solidFill>
+                <a:latin typeface="Consolas"/>
+                <a:ea typeface="DejaVu Sans"/>
+              </a:rPr>
+              <a:t>// 1. Human Timeline (Local)</a:t>
+            </a:r>
+            <a:endParaRPr b="0" lang="en-US" sz="800" spc="-1" strike="noStrike">
+              <a:solidFill>
+                <a:srgbClr val="ffffff"/>
+              </a:solidFill>
+              <a:latin typeface="Arial"/>
+            </a:endParaRPr>
+          </a:p>
+          <a:p>
+            <a:pPr algn="ctr">
+              <a:lnSpc>
+                <a:spcPct val="100000"/>
+              </a:lnSpc>
+            </a:pPr>
+            <a:r>
+              <a:rPr b="0" lang="en-US" sz="800" spc="-1" strike="noStrike">
+                <a:solidFill>
+                  <a:srgbClr val="78ffc8"/>
+                </a:solidFill>
+                <a:latin typeface="Consolas"/>
+                <a:ea typeface="DejaVu Sans"/>
+              </a:rPr>
+              <a:t>        </a:t>
+            </a:r>
+            <a:r>
+              <a:rPr b="0" lang="en-US" sz="800" spc="-1" strike="noStrike">
+                <a:solidFill>
+                  <a:srgbClr val="78ffc8"/>
+                </a:solidFill>
+                <a:latin typeface="Consolas"/>
+                <a:ea typeface="DejaVu Sans"/>
+              </a:rPr>
+              <a:t>LocalDateTime localMeeting = LocalDateTime</a:t>
+            </a:r>
+            <a:endParaRPr b="0" lang="en-US" sz="800" spc="-1" strike="noStrike">
+              <a:solidFill>
+                <a:srgbClr val="ffffff"/>
+              </a:solidFill>
+              <a:latin typeface="Arial"/>
+            </a:endParaRPr>
+          </a:p>
+          <a:p>
+            <a:pPr algn="ctr">
+              <a:lnSpc>
+                <a:spcPct val="100000"/>
+              </a:lnSpc>
+            </a:pPr>
+            <a:r>
+              <a:rPr b="0" lang="en-US" sz="800" spc="-1" strike="noStrike">
+                <a:solidFill>
+                  <a:srgbClr val="78ffc8"/>
+                </a:solidFill>
+                <a:latin typeface="Consolas"/>
+                <a:ea typeface="DejaVu Sans"/>
+              </a:rPr>
+              <a:t>                </a:t>
+            </a:r>
+            <a:r>
+              <a:rPr b="0" lang="en-US" sz="800" spc="-1" strike="noStrike">
+                <a:solidFill>
+                  <a:srgbClr val="78ffc8"/>
+                </a:solidFill>
+                <a:latin typeface="Consolas"/>
+                <a:ea typeface="DejaVu Sans"/>
+              </a:rPr>
+              <a:t>.of(2025, 10, 15, 9, 0);</a:t>
+            </a:r>
+            <a:endParaRPr b="0" lang="en-US" sz="800" spc="-1" strike="noStrike">
+              <a:solidFill>
+                <a:srgbClr val="ffffff"/>
+              </a:solidFill>
+              <a:latin typeface="Arial"/>
+            </a:endParaRPr>
+          </a:p>
+          <a:p>
+            <a:pPr algn="ctr">
+              <a:lnSpc>
+                <a:spcPct val="100000"/>
+              </a:lnSpc>
+            </a:pPr>
+            <a:endParaRPr b="0" lang="en-US" sz="800" spc="-1" strike="noStrike">
+              <a:solidFill>
+                <a:srgbClr val="ffffff"/>
+              </a:solidFill>
+              <a:latin typeface="Arial"/>
+            </a:endParaRPr>
+          </a:p>
+          <a:p>
+            <a:pPr algn="ctr">
+              <a:lnSpc>
+                <a:spcPct val="100000"/>
+              </a:lnSpc>
+            </a:pPr>
+            <a:r>
+              <a:rPr b="0" lang="en-US" sz="800" spc="-1" strike="noStrike">
+                <a:solidFill>
+                  <a:srgbClr val="78ffc8"/>
+                </a:solidFill>
+                <a:latin typeface="Consolas"/>
+                <a:ea typeface="DejaVu Sans"/>
+              </a:rPr>
+              <a:t>        </a:t>
+            </a:r>
+            <a:r>
+              <a:rPr b="0" lang="en-US" sz="800" spc="-1" strike="noStrike">
+                <a:solidFill>
+                  <a:srgbClr val="78ffc8"/>
+                </a:solidFill>
+                <a:latin typeface="Consolas"/>
+                <a:ea typeface="DejaVu Sans"/>
+              </a:rPr>
+              <a:t>// 2. Earth's Grid (Zoned)</a:t>
+            </a:r>
+            <a:endParaRPr b="0" lang="en-US" sz="800" spc="-1" strike="noStrike">
+              <a:solidFill>
+                <a:srgbClr val="ffffff"/>
+              </a:solidFill>
+              <a:latin typeface="Arial"/>
+            </a:endParaRPr>
+          </a:p>
+          <a:p>
+            <a:pPr algn="ctr">
+              <a:lnSpc>
+                <a:spcPct val="100000"/>
+              </a:lnSpc>
+            </a:pPr>
+            <a:r>
+              <a:rPr b="0" lang="en-US" sz="800" spc="-1" strike="noStrike">
+                <a:solidFill>
+                  <a:srgbClr val="78ffc8"/>
+                </a:solidFill>
+                <a:latin typeface="Consolas"/>
+                <a:ea typeface="DejaVu Sans"/>
+              </a:rPr>
+              <a:t>        </a:t>
+            </a:r>
+            <a:r>
+              <a:rPr b="0" lang="en-US" sz="800" spc="-1" strike="noStrike">
+                <a:solidFill>
+                  <a:srgbClr val="78ffc8"/>
+                </a:solidFill>
+                <a:latin typeface="Consolas"/>
+                <a:ea typeface="DejaVu Sans"/>
+              </a:rPr>
+              <a:t>ZoneId nyZone = ZoneId.of("America/New_York");</a:t>
+            </a:r>
+            <a:endParaRPr b="0" lang="en-US" sz="800" spc="-1" strike="noStrike">
+              <a:solidFill>
+                <a:srgbClr val="ffffff"/>
+              </a:solidFill>
+              <a:latin typeface="Arial"/>
+            </a:endParaRPr>
+          </a:p>
+          <a:p>
+            <a:pPr algn="ctr">
+              <a:lnSpc>
+                <a:spcPct val="100000"/>
+              </a:lnSpc>
+            </a:pPr>
+            <a:r>
+              <a:rPr b="0" lang="en-US" sz="800" spc="-1" strike="noStrike">
+                <a:solidFill>
+                  <a:srgbClr val="78ffc8"/>
+                </a:solidFill>
+                <a:latin typeface="Consolas"/>
+                <a:ea typeface="DejaVu Sans"/>
+              </a:rPr>
+              <a:t>        </a:t>
+            </a:r>
+            <a:r>
+              <a:rPr b="0" lang="en-US" sz="800" spc="-1" strike="noStrike">
+                <a:solidFill>
+                  <a:srgbClr val="78ffc8"/>
+                </a:solidFill>
+                <a:latin typeface="Consolas"/>
+                <a:ea typeface="DejaVu Sans"/>
+              </a:rPr>
+              <a:t>ZonedDateTime nyMeeting = ZonedDateTime</a:t>
+            </a:r>
+            <a:endParaRPr b="0" lang="en-US" sz="800" spc="-1" strike="noStrike">
+              <a:solidFill>
+                <a:srgbClr val="ffffff"/>
+              </a:solidFill>
+              <a:latin typeface="Arial"/>
+            </a:endParaRPr>
+          </a:p>
+          <a:p>
+            <a:pPr algn="ctr">
+              <a:lnSpc>
+                <a:spcPct val="100000"/>
+              </a:lnSpc>
+            </a:pPr>
+            <a:r>
+              <a:rPr b="0" lang="en-US" sz="800" spc="-1" strike="noStrike">
+                <a:solidFill>
+                  <a:srgbClr val="78ffc8"/>
+                </a:solidFill>
+                <a:latin typeface="Consolas"/>
+                <a:ea typeface="DejaVu Sans"/>
+              </a:rPr>
+              <a:t>                </a:t>
+            </a:r>
+            <a:r>
+              <a:rPr b="0" lang="en-US" sz="800" spc="-1" strike="noStrike">
+                <a:solidFill>
+                  <a:srgbClr val="78ffc8"/>
+                </a:solidFill>
+                <a:latin typeface="Consolas"/>
+                <a:ea typeface="DejaVu Sans"/>
+              </a:rPr>
+              <a:t>.of(localMeeting, nyZone);</a:t>
+            </a:r>
+            <a:endParaRPr b="0" lang="en-US" sz="800" spc="-1" strike="noStrike">
+              <a:solidFill>
+                <a:srgbClr val="ffffff"/>
+              </a:solidFill>
+              <a:latin typeface="Arial"/>
+            </a:endParaRPr>
+          </a:p>
+          <a:p>
+            <a:pPr algn="ctr">
+              <a:lnSpc>
+                <a:spcPct val="100000"/>
+              </a:lnSpc>
+            </a:pPr>
+            <a:endParaRPr b="0" lang="en-US" sz="800" spc="-1" strike="noStrike">
+              <a:solidFill>
+                <a:srgbClr val="ffffff"/>
+              </a:solidFill>
+              <a:latin typeface="Arial"/>
+            </a:endParaRPr>
+          </a:p>
+          <a:p>
+            <a:pPr algn="ctr">
+              <a:lnSpc>
+                <a:spcPct val="100000"/>
+              </a:lnSpc>
+            </a:pPr>
+            <a:r>
+              <a:rPr b="0" lang="en-US" sz="800" spc="-1" strike="noStrike">
+                <a:solidFill>
+                  <a:srgbClr val="78ffc8"/>
+                </a:solidFill>
+                <a:latin typeface="Consolas"/>
+                <a:ea typeface="DejaVu Sans"/>
+              </a:rPr>
+              <a:t>        </a:t>
+            </a:r>
+            <a:r>
+              <a:rPr b="0" lang="en-US" sz="800" spc="-1" strike="noStrike">
+                <a:solidFill>
+                  <a:srgbClr val="78ffc8"/>
+                </a:solidFill>
+                <a:latin typeface="Consolas"/>
+                <a:ea typeface="DejaVu Sans"/>
+              </a:rPr>
+              <a:t>// 3. Translation Layer (Formatting)</a:t>
+            </a:r>
+            <a:endParaRPr b="0" lang="en-US" sz="800" spc="-1" strike="noStrike">
+              <a:solidFill>
+                <a:srgbClr val="ffffff"/>
+              </a:solidFill>
+              <a:latin typeface="Arial"/>
+            </a:endParaRPr>
+          </a:p>
+          <a:p>
+            <a:pPr algn="ctr">
+              <a:lnSpc>
+                <a:spcPct val="100000"/>
+              </a:lnSpc>
+            </a:pPr>
+            <a:r>
+              <a:rPr b="0" lang="en-US" sz="800" spc="-1" strike="noStrike">
+                <a:solidFill>
+                  <a:srgbClr val="78ffc8"/>
+                </a:solidFill>
+                <a:latin typeface="Consolas"/>
+                <a:ea typeface="DejaVu Sans"/>
+              </a:rPr>
+              <a:t>        </a:t>
+            </a:r>
+            <a:r>
+              <a:rPr b="0" lang="en-US" sz="800" spc="-1" strike="noStrike">
+                <a:solidFill>
+                  <a:srgbClr val="78ffc8"/>
+                </a:solidFill>
+                <a:latin typeface="Consolas"/>
+                <a:ea typeface="DejaVu Sans"/>
+              </a:rPr>
+              <a:t>DateTimeFormatter fmt = DateTimeFormatter</a:t>
+            </a:r>
+            <a:endParaRPr b="0" lang="en-US" sz="800" spc="-1" strike="noStrike">
+              <a:solidFill>
+                <a:srgbClr val="ffffff"/>
+              </a:solidFill>
+              <a:latin typeface="Arial"/>
+            </a:endParaRPr>
+          </a:p>
+          <a:p>
+            <a:pPr algn="ctr">
+              <a:lnSpc>
+                <a:spcPct val="100000"/>
+              </a:lnSpc>
+            </a:pPr>
+            <a:r>
+              <a:rPr b="0" lang="en-US" sz="800" spc="-1" strike="noStrike">
+                <a:solidFill>
+                  <a:srgbClr val="78ffc8"/>
+                </a:solidFill>
+                <a:latin typeface="Consolas"/>
+                <a:ea typeface="DejaVu Sans"/>
+              </a:rPr>
+              <a:t>                </a:t>
+            </a:r>
+            <a:r>
+              <a:rPr b="0" lang="en-US" sz="800" spc="-1" strike="noStrike">
+                <a:solidFill>
+                  <a:srgbClr val="78ffc8"/>
+                </a:solidFill>
+                <a:latin typeface="Consolas"/>
+                <a:ea typeface="DejaVu Sans"/>
+              </a:rPr>
+              <a:t>.ofPattern("MMM dd, yyyy - HH:mm z");</a:t>
+            </a:r>
+            <a:endParaRPr b="0" lang="en-US" sz="800" spc="-1" strike="noStrike">
+              <a:solidFill>
+                <a:srgbClr val="ffffff"/>
+              </a:solidFill>
+              <a:latin typeface="Arial"/>
+            </a:endParaRPr>
+          </a:p>
+          <a:p>
+            <a:pPr algn="ctr">
+              <a:lnSpc>
+                <a:spcPct val="100000"/>
+              </a:lnSpc>
+            </a:pPr>
+            <a:r>
+              <a:rPr b="0" lang="en-US" sz="800" spc="-1" strike="noStrike">
+                <a:solidFill>
+                  <a:srgbClr val="78ffc8"/>
+                </a:solidFill>
+                <a:latin typeface="Consolas"/>
+                <a:ea typeface="DejaVu Sans"/>
+              </a:rPr>
+              <a:t>        </a:t>
+            </a:r>
+            <a:r>
+              <a:rPr b="0" lang="en-US" sz="800" spc="-1" strike="noStrike">
+                <a:solidFill>
+                  <a:srgbClr val="78ffc8"/>
+                </a:solidFill>
+                <a:latin typeface="Consolas"/>
+                <a:ea typeface="DejaVu Sans"/>
+              </a:rPr>
+              <a:t>System.out.println("Meeting: " </a:t>
+            </a:r>
+            <a:endParaRPr b="0" lang="en-US" sz="800" spc="-1" strike="noStrike">
+              <a:solidFill>
+                <a:srgbClr val="ffffff"/>
+              </a:solidFill>
+              <a:latin typeface="Arial"/>
+            </a:endParaRPr>
+          </a:p>
+          <a:p>
+            <a:pPr algn="ctr">
+              <a:lnSpc>
+                <a:spcPct val="100000"/>
+              </a:lnSpc>
+            </a:pPr>
+            <a:r>
+              <a:rPr b="0" lang="en-US" sz="800" spc="-1" strike="noStrike">
+                <a:solidFill>
+                  <a:srgbClr val="78ffc8"/>
+                </a:solidFill>
+                <a:latin typeface="Consolas"/>
+                <a:ea typeface="DejaVu Sans"/>
+              </a:rPr>
+              <a:t>                </a:t>
+            </a:r>
+            <a:r>
+              <a:rPr b="0" lang="en-US" sz="800" spc="-1" strike="noStrike">
+                <a:solidFill>
+                  <a:srgbClr val="78ffc8"/>
+                </a:solidFill>
+                <a:latin typeface="Consolas"/>
+                <a:ea typeface="DejaVu Sans"/>
+              </a:rPr>
+              <a:t>+ nyMeeting.format(fmt));</a:t>
+            </a:r>
+            <a:endParaRPr b="0" lang="en-US" sz="800" spc="-1" strike="noStrike">
+              <a:solidFill>
+                <a:srgbClr val="ffffff"/>
+              </a:solidFill>
+              <a:latin typeface="Arial"/>
+            </a:endParaRPr>
+          </a:p>
+          <a:p>
+            <a:pPr algn="ctr">
+              <a:lnSpc>
+                <a:spcPct val="100000"/>
+              </a:lnSpc>
+            </a:pPr>
+            <a:endParaRPr b="0" lang="en-US" sz="800" spc="-1" strike="noStrike">
+              <a:solidFill>
+                <a:srgbClr val="ffffff"/>
+              </a:solidFill>
+              <a:latin typeface="Arial"/>
+            </a:endParaRPr>
+          </a:p>
+          <a:p>
+            <a:pPr algn="ctr">
+              <a:lnSpc>
+                <a:spcPct val="100000"/>
+              </a:lnSpc>
+            </a:pPr>
+            <a:r>
+              <a:rPr b="0" lang="en-US" sz="800" spc="-1" strike="noStrike">
+                <a:solidFill>
+                  <a:srgbClr val="78ffc8"/>
+                </a:solidFill>
+                <a:latin typeface="Consolas"/>
+                <a:ea typeface="DejaVu Sans"/>
+              </a:rPr>
+              <a:t>        </a:t>
+            </a:r>
+            <a:r>
+              <a:rPr b="0" lang="en-US" sz="800" spc="-1" strike="noStrike">
+                <a:solidFill>
+                  <a:srgbClr val="78ffc8"/>
+                </a:solidFill>
+                <a:latin typeface="Consolas"/>
+                <a:ea typeface="DejaVu Sans"/>
+              </a:rPr>
+              <a:t>// 4. Measurement (Duration/Distance)</a:t>
+            </a:r>
+            <a:endParaRPr b="0" lang="en-US" sz="800" spc="-1" strike="noStrike">
+              <a:solidFill>
+                <a:srgbClr val="ffffff"/>
+              </a:solidFill>
+              <a:latin typeface="Arial"/>
+            </a:endParaRPr>
+          </a:p>
+          <a:p>
+            <a:pPr algn="ctr">
+              <a:lnSpc>
+                <a:spcPct val="100000"/>
+              </a:lnSpc>
+            </a:pPr>
+            <a:r>
+              <a:rPr b="0" lang="en-US" sz="800" spc="-1" strike="noStrike">
+                <a:solidFill>
+                  <a:srgbClr val="78ffc8"/>
+                </a:solidFill>
+                <a:latin typeface="Consolas"/>
+                <a:ea typeface="DejaVu Sans"/>
+              </a:rPr>
+              <a:t>        </a:t>
+            </a:r>
+            <a:r>
+              <a:rPr b="0" lang="en-US" sz="800" spc="-1" strike="noStrike">
+                <a:solidFill>
+                  <a:srgbClr val="78ffc8"/>
+                </a:solidFill>
+                <a:latin typeface="Consolas"/>
+                <a:ea typeface="DejaVu Sans"/>
+              </a:rPr>
+              <a:t>ZonedDateTime now = ZonedDateTime.now(nyZone);</a:t>
+            </a:r>
+            <a:endParaRPr b="0" lang="en-US" sz="800" spc="-1" strike="noStrike">
+              <a:solidFill>
+                <a:srgbClr val="ffffff"/>
+              </a:solidFill>
+              <a:latin typeface="Arial"/>
+            </a:endParaRPr>
+          </a:p>
+          <a:p>
+            <a:pPr algn="ctr">
+              <a:lnSpc>
+                <a:spcPct val="100000"/>
+              </a:lnSpc>
+            </a:pPr>
+            <a:r>
+              <a:rPr b="0" lang="en-US" sz="800" spc="-1" strike="noStrike">
+                <a:solidFill>
+                  <a:srgbClr val="78ffc8"/>
+                </a:solidFill>
+                <a:latin typeface="Consolas"/>
+                <a:ea typeface="DejaVu Sans"/>
+              </a:rPr>
+              <a:t>        </a:t>
+            </a:r>
+            <a:endParaRPr b="0" lang="en-US" sz="800" spc="-1" strike="noStrike">
+              <a:solidFill>
+                <a:srgbClr val="ffffff"/>
+              </a:solidFill>
+              <a:latin typeface="Arial"/>
+            </a:endParaRPr>
+          </a:p>
+          <a:p>
+            <a:pPr algn="ctr">
+              <a:lnSpc>
+                <a:spcPct val="100000"/>
+              </a:lnSpc>
+            </a:pPr>
+            <a:r>
+              <a:rPr b="0" lang="en-US" sz="800" spc="-1" strike="noStrike">
+                <a:solidFill>
+                  <a:srgbClr val="78ffc8"/>
+                </a:solidFill>
+                <a:latin typeface="Consolas"/>
+                <a:ea typeface="DejaVu Sans"/>
+              </a:rPr>
+              <a:t>        </a:t>
+            </a:r>
+            <a:r>
+              <a:rPr b="0" lang="en-US" sz="800" spc="-1" strike="noStrike">
+                <a:solidFill>
+                  <a:srgbClr val="78ffc8"/>
+                </a:solidFill>
+                <a:latin typeface="Consolas"/>
+                <a:ea typeface="DejaVu Sans"/>
+              </a:rPr>
+              <a:t>if (nyMeeting.isAfter(now)) {</a:t>
+            </a:r>
+            <a:endParaRPr b="0" lang="en-US" sz="800" spc="-1" strike="noStrike">
+              <a:solidFill>
+                <a:srgbClr val="ffffff"/>
+              </a:solidFill>
+              <a:latin typeface="Arial"/>
+            </a:endParaRPr>
+          </a:p>
+          <a:p>
+            <a:pPr algn="ctr">
+              <a:lnSpc>
+                <a:spcPct val="100000"/>
+              </a:lnSpc>
+            </a:pPr>
+            <a:r>
+              <a:rPr b="0" lang="en-US" sz="800" spc="-1" strike="noStrike">
+                <a:solidFill>
+                  <a:srgbClr val="78ffc8"/>
+                </a:solidFill>
+                <a:latin typeface="Consolas"/>
+                <a:ea typeface="DejaVu Sans"/>
+              </a:rPr>
+              <a:t>            </a:t>
+            </a:r>
+            <a:r>
+              <a:rPr b="0" lang="en-US" sz="800" spc="-1" strike="noStrike">
+                <a:solidFill>
+                  <a:srgbClr val="78ffc8"/>
+                </a:solidFill>
+                <a:latin typeface="Consolas"/>
+                <a:ea typeface="DejaVu Sans"/>
+              </a:rPr>
+              <a:t>Duration gap = Duration.between(now, nyMeeting);</a:t>
+            </a:r>
+            <a:endParaRPr b="0" lang="en-US" sz="800" spc="-1" strike="noStrike">
+              <a:solidFill>
+                <a:srgbClr val="ffffff"/>
+              </a:solidFill>
+              <a:latin typeface="Arial"/>
+            </a:endParaRPr>
+          </a:p>
+          <a:p>
+            <a:pPr algn="ctr">
+              <a:lnSpc>
+                <a:spcPct val="100000"/>
+              </a:lnSpc>
+            </a:pPr>
+            <a:r>
+              <a:rPr b="0" lang="en-US" sz="800" spc="-1" strike="noStrike">
+                <a:solidFill>
+                  <a:srgbClr val="78ffc8"/>
+                </a:solidFill>
+                <a:latin typeface="Consolas"/>
+                <a:ea typeface="DejaVu Sans"/>
+              </a:rPr>
+              <a:t>            </a:t>
+            </a:r>
+            <a:r>
+              <a:rPr b="0" lang="en-US" sz="800" spc="-1" strike="noStrike">
+                <a:solidFill>
+                  <a:srgbClr val="78ffc8"/>
+                </a:solidFill>
+                <a:latin typeface="Consolas"/>
+                <a:ea typeface="DejaVu Sans"/>
+              </a:rPr>
+              <a:t>System.out.println(gap.toDays() + " days left!");</a:t>
+            </a:r>
+            <a:endParaRPr b="0" lang="en-US" sz="800" spc="-1" strike="noStrike">
+              <a:solidFill>
+                <a:srgbClr val="ffffff"/>
+              </a:solidFill>
+              <a:latin typeface="Arial"/>
+            </a:endParaRPr>
+          </a:p>
+          <a:p>
+            <a:pPr algn="ctr">
+              <a:lnSpc>
+                <a:spcPct val="100000"/>
+              </a:lnSpc>
+            </a:pPr>
+            <a:r>
+              <a:rPr b="0" lang="en-US" sz="800" spc="-1" strike="noStrike">
+                <a:solidFill>
+                  <a:srgbClr val="78ffc8"/>
+                </a:solidFill>
+                <a:latin typeface="Consolas"/>
+                <a:ea typeface="DejaVu Sans"/>
+              </a:rPr>
+              <a:t>        </a:t>
+            </a:r>
+            <a:r>
+              <a:rPr b="0" lang="en-US" sz="800" spc="-1" strike="noStrike">
+                <a:solidFill>
+                  <a:srgbClr val="78ffc8"/>
+                </a:solidFill>
+                <a:latin typeface="Consolas"/>
+                <a:ea typeface="DejaVu Sans"/>
+              </a:rPr>
+              <a:t>} else {</a:t>
+            </a:r>
+            <a:endParaRPr b="0" lang="en-US" sz="800" spc="-1" strike="noStrike">
+              <a:solidFill>
+                <a:srgbClr val="ffffff"/>
+              </a:solidFill>
+              <a:latin typeface="Arial"/>
+            </a:endParaRPr>
+          </a:p>
+          <a:p>
+            <a:pPr algn="ctr">
+              <a:lnSpc>
+                <a:spcPct val="100000"/>
+              </a:lnSpc>
+            </a:pPr>
+            <a:r>
+              <a:rPr b="0" lang="en-US" sz="800" spc="-1" strike="noStrike">
+                <a:solidFill>
+                  <a:srgbClr val="78ffc8"/>
+                </a:solidFill>
+                <a:latin typeface="Consolas"/>
+                <a:ea typeface="DejaVu Sans"/>
+              </a:rPr>
+              <a:t>            </a:t>
+            </a:r>
+            <a:r>
+              <a:rPr b="0" lang="en-US" sz="800" spc="-1" strike="noStrike">
+                <a:solidFill>
+                  <a:srgbClr val="78ffc8"/>
+                </a:solidFill>
+                <a:latin typeface="Consolas"/>
+                <a:ea typeface="DejaVu Sans"/>
+              </a:rPr>
+              <a:t>System.out.println("Already passed.");</a:t>
+            </a:r>
+            <a:endParaRPr b="0" lang="en-US" sz="800" spc="-1" strike="noStrike">
+              <a:solidFill>
+                <a:srgbClr val="ffffff"/>
+              </a:solidFill>
+              <a:latin typeface="Arial"/>
+            </a:endParaRPr>
+          </a:p>
+          <a:p>
+            <a:pPr algn="ctr">
+              <a:lnSpc>
+                <a:spcPct val="100000"/>
+              </a:lnSpc>
+            </a:pPr>
+            <a:r>
+              <a:rPr b="0" lang="en-US" sz="800" spc="-1" strike="noStrike">
+                <a:solidFill>
+                  <a:srgbClr val="78ffc8"/>
+                </a:solidFill>
+                <a:latin typeface="Consolas"/>
+                <a:ea typeface="DejaVu Sans"/>
+              </a:rPr>
+              <a:t>        </a:t>
+            </a:r>
+            <a:r>
+              <a:rPr b="0" lang="en-US" sz="800" spc="-1" strike="noStrike">
+                <a:solidFill>
+                  <a:srgbClr val="78ffc8"/>
+                </a:solidFill>
+                <a:latin typeface="Consolas"/>
+                <a:ea typeface="DejaVu Sans"/>
+              </a:rPr>
+              <a:t>}</a:t>
+            </a:r>
+            <a:endParaRPr b="0" lang="en-US" sz="800" spc="-1" strike="noStrike">
+              <a:solidFill>
+                <a:srgbClr val="ffffff"/>
+              </a:solidFill>
+              <a:latin typeface="Arial"/>
+            </a:endParaRPr>
+          </a:p>
+          <a:p>
+            <a:pPr algn="ctr">
+              <a:lnSpc>
+                <a:spcPct val="100000"/>
+              </a:lnSpc>
+            </a:pPr>
+            <a:r>
+              <a:rPr b="0" lang="en-US" sz="800" spc="-1" strike="noStrike">
+                <a:solidFill>
+                  <a:srgbClr val="78ffc8"/>
+                </a:solidFill>
+                <a:latin typeface="Consolas"/>
+                <a:ea typeface="DejaVu Sans"/>
+              </a:rPr>
+              <a:t>    </a:t>
+            </a:r>
+            <a:r>
+              <a:rPr b="0" lang="en-US" sz="800" spc="-1" strike="noStrike">
+                <a:solidFill>
+                  <a:srgbClr val="78ffc8"/>
+                </a:solidFill>
+                <a:latin typeface="Consolas"/>
+                <a:ea typeface="DejaVu Sans"/>
+              </a:rPr>
+              <a:t>}</a:t>
+            </a:r>
+            <a:endParaRPr b="0" lang="en-US" sz="800" spc="-1" strike="noStrike">
+              <a:solidFill>
+                <a:srgbClr val="ffffff"/>
+              </a:solidFill>
+              <a:latin typeface="Arial"/>
+            </a:endParaRPr>
+          </a:p>
+          <a:p>
+            <a:pPr algn="ctr">
+              <a:lnSpc>
+                <a:spcPct val="100000"/>
+              </a:lnSpc>
+            </a:pPr>
+            <a:r>
+              <a:rPr b="0" lang="en-US" sz="800" spc="-1" strike="noStrike">
+                <a:solidFill>
+                  <a:srgbClr val="78ffc8"/>
+                </a:solidFill>
+                <a:latin typeface="Consolas"/>
+                <a:ea typeface="DejaVu Sans"/>
+              </a:rPr>
+              <a:t>}</a:t>
+            </a:r>
+            <a:endParaRPr b="0" lang="en-US" sz="800" spc="-1" strike="noStrike">
+              <a:solidFill>
+                <a:srgbClr val="ffffff"/>
+              </a:solidFill>
+              <a:latin typeface="Arial"/>
+            </a:endParaRPr>
+          </a:p>
+        </p:txBody>
+      </p:sp>
+      <p:sp>
+        <p:nvSpPr>
+          <p:cNvPr id="222" name="TextBox 23"/>
           <p:cNvSpPr/>
           <p:nvPr/>
         </p:nvSpPr>

--- a/Java/Java #4/EN/Java #4.pptx
+++ b/Java/Java #4/EN/Java #4.pptx
@@ -12,6 +12,7 @@
     <p:sldId id="260" r:id="rId7"/>
     <p:sldId id="261" r:id="rId8"/>
     <p:sldId id="262" r:id="rId9"/>
+    <p:sldId id="263" r:id="rId10"/>
   </p:sldIdLst>
   <p:sldSz cx="9144000" cy="6858000"/>
   <p:notesSz cx="7772400" cy="10058400"/>
@@ -69,7 +70,7 @@
         <p:txBody>
           <a:bodyPr/>
           <a:p>
-            <a:fld id="{D629C701-B00C-4DCB-BB1D-1543740781D5}" type="slidenum">
+            <a:fld id="{E60A9340-DDEE-44AC-A57D-B37723548C57}" type="slidenum">
               <a:t>&lt;#&gt;</a:t>
             </a:fld>
           </a:p>
@@ -278,7 +279,7 @@
         <p:txBody>
           <a:bodyPr/>
           <a:p>
-            <a:fld id="{EA964133-01CA-4543-B67D-4296C113F452}" type="slidenum">
+            <a:fld id="{2875B22C-DA32-43F4-A64A-612E7A5659DB}" type="slidenum">
               <a:t>&lt;#&gt;</a:t>
             </a:fld>
           </a:p>
@@ -573,7 +574,7 @@
         <p:txBody>
           <a:bodyPr/>
           <a:p>
-            <a:fld id="{C5C64549-3694-47FA-93A4-C1DF53D801D2}" type="slidenum">
+            <a:fld id="{033A92B1-D46D-436D-AAAE-4DBB42D5E542}" type="slidenum">
               <a:t>&lt;#&gt;</a:t>
             </a:fld>
           </a:p>
@@ -954,7 +955,7 @@
         <p:txBody>
           <a:bodyPr/>
           <a:p>
-            <a:fld id="{F9939FAD-74F7-4C39-9101-CF0DEF8C3B8B}" type="slidenum">
+            <a:fld id="{98393E42-C1C6-40BC-9DE2-A6D15435A198}" type="slidenum">
               <a:t>&lt;#&gt;</a:t>
             </a:fld>
           </a:p>
@@ -1117,7 +1118,7 @@
         <p:txBody>
           <a:bodyPr/>
           <a:p>
-            <a:fld id="{182FA720-1FD9-4C57-9BFB-9BDA214560FC}" type="slidenum">
+            <a:fld id="{18130314-F44B-425C-8B7A-460DD2919180}" type="slidenum">
               <a:t>&lt;#&gt;</a:t>
             </a:fld>
           </a:p>
@@ -1283,7 +1284,7 @@
         <p:txBody>
           <a:bodyPr/>
           <a:p>
-            <a:fld id="{46AF6A8D-231B-4139-BC97-AD77F1C95CA7}" type="slidenum">
+            <a:fld id="{A2AB3CD6-32C4-4FDF-ADEE-96F37703DEAA}" type="slidenum">
               <a:t>&lt;#&gt;</a:t>
             </a:fld>
           </a:p>
@@ -1492,7 +1493,7 @@
         <p:txBody>
           <a:bodyPr/>
           <a:p>
-            <a:fld id="{42053E97-7459-4E4F-816C-E152A667E700}" type="slidenum">
+            <a:fld id="{38ACF589-0D3F-48D2-87A4-5EF5C6F8F325}" type="slidenum">
               <a:t>&lt;#&gt;</a:t>
             </a:fld>
           </a:p>
@@ -1615,7 +1616,7 @@
         <p:txBody>
           <a:bodyPr/>
           <a:p>
-            <a:fld id="{F2E786D7-05EA-472F-AE14-EECFAC2B1E1E}" type="slidenum">
+            <a:fld id="{26C82B7C-91A8-479C-82AE-926F897B6F28}" type="slidenum">
               <a:t>&lt;#&gt;</a:t>
             </a:fld>
           </a:p>
@@ -1736,7 +1737,7 @@
         <p:txBody>
           <a:bodyPr/>
           <a:p>
-            <a:fld id="{6EC86901-79F3-45CA-8C76-A94EA32CB2AF}" type="slidenum">
+            <a:fld id="{48CD93A9-CB1C-4C58-A034-C412AEE407E2}" type="slidenum">
               <a:t>&lt;#&gt;</a:t>
             </a:fld>
           </a:p>
@@ -1988,7 +1989,7 @@
         <p:txBody>
           <a:bodyPr/>
           <a:p>
-            <a:fld id="{139FDB95-A9C0-4D43-8953-CF0B704806A7}" type="slidenum">
+            <a:fld id="{7E1DA97E-106B-478B-890F-4ECDCD6011D1}" type="slidenum">
               <a:t>&lt;#&gt;</a:t>
             </a:fld>
           </a:p>
@@ -2240,7 +2241,7 @@
         <p:txBody>
           <a:bodyPr/>
           <a:p>
-            <a:fld id="{6B7F32D8-2E19-4B17-92C0-E5EC687041E2}" type="slidenum">
+            <a:fld id="{961742D8-644F-4A7D-8F31-9B10CF75BA6E}" type="slidenum">
               <a:t>&lt;#&gt;</a:t>
             </a:fld>
           </a:p>
@@ -2492,7 +2493,7 @@
         <p:txBody>
           <a:bodyPr/>
           <a:p>
-            <a:fld id="{05635452-61CC-49B4-92F0-BA7D96EF9BDA}" type="slidenum">
+            <a:fld id="{94546998-E52A-448E-B4AB-F872EC5331A9}" type="slidenum">
               <a:t>&lt;#&gt;</a:t>
             </a:fld>
           </a:p>
@@ -2561,7 +2562,7 @@
         <p:spPr>
           <a:xfrm>
             <a:off x="3124080" y="6356520"/>
-            <a:ext cx="2892240" cy="361800"/>
+            <a:ext cx="2891880" cy="361440"/>
           </a:xfrm>
           <a:prstGeom prst="rect">
             <a:avLst/>
@@ -2633,7 +2634,7 @@
         <p:spPr>
           <a:xfrm>
             <a:off x="6553080" y="6356520"/>
-            <a:ext cx="2130480" cy="361800"/>
+            <a:ext cx="2130120" cy="361440"/>
           </a:xfrm>
           <a:prstGeom prst="rect">
             <a:avLst/>
@@ -2674,7 +2675,7 @@
                 <a:tab algn="l" pos="0"/>
               </a:tabLst>
             </a:pPr>
-            <a:fld id="{91025779-ED93-4024-B660-58B9161CC407}" type="slidenum">
+            <a:fld id="{6FC2C9B8-34B1-4E39-B7C1-533509606650}" type="slidenum">
               <a:rPr b="0" lang="en-US" sz="1200" spc="-1" strike="noStrike">
                 <a:solidFill>
                   <a:srgbClr val="8b8b8b"/>
@@ -2705,7 +2706,7 @@
         <p:spPr>
           <a:xfrm>
             <a:off x="457200" y="6356520"/>
-            <a:ext cx="2130480" cy="361800"/>
+            <a:ext cx="2130120" cy="361440"/>
           </a:xfrm>
           <a:prstGeom prst="rect">
             <a:avLst/>
@@ -3072,7 +3073,7 @@
         <p:spPr>
           <a:xfrm>
             <a:off x="0" y="0"/>
-            <a:ext cx="12185640" cy="6854760"/>
+            <a:ext cx="12185280" cy="6854400"/>
           </a:xfrm>
           <a:prstGeom prst="rect">
             <a:avLst/>
@@ -3132,7 +3133,7 @@
         <p:spPr>
           <a:xfrm>
             <a:off x="0" y="0"/>
-            <a:ext cx="15120" cy="6854760"/>
+            <a:ext cx="14760" cy="6854400"/>
           </a:xfrm>
           <a:prstGeom prst="rect">
             <a:avLst/>
@@ -3192,7 +3193,7 @@
         <p:spPr>
           <a:xfrm>
             <a:off x="914400" y="0"/>
-            <a:ext cx="15120" cy="6854760"/>
+            <a:ext cx="14760" cy="6854400"/>
           </a:xfrm>
           <a:prstGeom prst="rect">
             <a:avLst/>
@@ -3252,7 +3253,7 @@
         <p:spPr>
           <a:xfrm>
             <a:off x="1828800" y="0"/>
-            <a:ext cx="15120" cy="6854760"/>
+            <a:ext cx="14760" cy="6854400"/>
           </a:xfrm>
           <a:prstGeom prst="rect">
             <a:avLst/>
@@ -3312,7 +3313,7 @@
         <p:spPr>
           <a:xfrm>
             <a:off x="2743200" y="0"/>
-            <a:ext cx="15120" cy="6854760"/>
+            <a:ext cx="14760" cy="6854400"/>
           </a:xfrm>
           <a:prstGeom prst="rect">
             <a:avLst/>
@@ -3372,7 +3373,7 @@
         <p:spPr>
           <a:xfrm>
             <a:off x="3657600" y="0"/>
-            <a:ext cx="15120" cy="6854760"/>
+            <a:ext cx="14760" cy="6854400"/>
           </a:xfrm>
           <a:prstGeom prst="rect">
             <a:avLst/>
@@ -3432,7 +3433,7 @@
         <p:spPr>
           <a:xfrm>
             <a:off x="4572000" y="0"/>
-            <a:ext cx="15120" cy="6854760"/>
+            <a:ext cx="14760" cy="6854400"/>
           </a:xfrm>
           <a:prstGeom prst="rect">
             <a:avLst/>
@@ -3492,7 +3493,7 @@
         <p:spPr>
           <a:xfrm>
             <a:off x="5486400" y="0"/>
-            <a:ext cx="15120" cy="6854760"/>
+            <a:ext cx="14760" cy="6854400"/>
           </a:xfrm>
           <a:prstGeom prst="rect">
             <a:avLst/>
@@ -3552,7 +3553,7 @@
         <p:spPr>
           <a:xfrm>
             <a:off x="6400800" y="0"/>
-            <a:ext cx="15120" cy="6854760"/>
+            <a:ext cx="14760" cy="6854400"/>
           </a:xfrm>
           <a:prstGeom prst="rect">
             <a:avLst/>
@@ -3612,7 +3613,7 @@
         <p:spPr>
           <a:xfrm>
             <a:off x="7315200" y="0"/>
-            <a:ext cx="15120" cy="6854760"/>
+            <a:ext cx="14760" cy="6854400"/>
           </a:xfrm>
           <a:prstGeom prst="rect">
             <a:avLst/>
@@ -3672,7 +3673,7 @@
         <p:spPr>
           <a:xfrm>
             <a:off x="8229600" y="0"/>
-            <a:ext cx="15120" cy="6854760"/>
+            <a:ext cx="14760" cy="6854400"/>
           </a:xfrm>
           <a:prstGeom prst="rect">
             <a:avLst/>
@@ -3732,7 +3733,7 @@
         <p:spPr>
           <a:xfrm>
             <a:off x="9144000" y="0"/>
-            <a:ext cx="15120" cy="6854760"/>
+            <a:ext cx="14760" cy="6854400"/>
           </a:xfrm>
           <a:prstGeom prst="rect">
             <a:avLst/>
@@ -3792,7 +3793,7 @@
         <p:spPr>
           <a:xfrm>
             <a:off x="10058400" y="0"/>
-            <a:ext cx="15120" cy="6854760"/>
+            <a:ext cx="14760" cy="6854400"/>
           </a:xfrm>
           <a:prstGeom prst="rect">
             <a:avLst/>
@@ -3852,7 +3853,7 @@
         <p:spPr>
           <a:xfrm>
             <a:off x="10972800" y="0"/>
-            <a:ext cx="15120" cy="6854760"/>
+            <a:ext cx="14760" cy="6854400"/>
           </a:xfrm>
           <a:prstGeom prst="rect">
             <a:avLst/>
@@ -3912,7 +3913,7 @@
         <p:spPr>
           <a:xfrm>
             <a:off x="11887200" y="0"/>
-            <a:ext cx="15120" cy="6854760"/>
+            <a:ext cx="14760" cy="6854400"/>
           </a:xfrm>
           <a:prstGeom prst="rect">
             <a:avLst/>
@@ -3972,7 +3973,7 @@
         <p:spPr>
           <a:xfrm>
             <a:off x="0" y="0"/>
-            <a:ext cx="316800" cy="6854760"/>
+            <a:ext cx="316440" cy="6854400"/>
           </a:xfrm>
           <a:prstGeom prst="rect">
             <a:avLst/>
@@ -4032,7 +4033,7 @@
         <p:spPr>
           <a:xfrm>
             <a:off x="9875520" y="365760"/>
-            <a:ext cx="2008440" cy="499680"/>
+            <a:ext cx="2008080" cy="499320"/>
           </a:xfrm>
           <a:prstGeom prst="roundRect">
             <a:avLst>
@@ -4260,7 +4261,7 @@
         <p:spPr>
           <a:xfrm>
             <a:off x="987480" y="3182040"/>
-            <a:ext cx="3288600" cy="2739960"/>
+            <a:ext cx="3288240" cy="2739600"/>
           </a:xfrm>
           <a:prstGeom prst="roundRect">
             <a:avLst>
@@ -4322,7 +4323,7 @@
         <p:spPr>
           <a:xfrm>
             <a:off x="914400" y="3108960"/>
-            <a:ext cx="3288600" cy="2739960"/>
+            <a:ext cx="3288240" cy="2739600"/>
           </a:xfrm>
           <a:prstGeom prst="roundRect">
             <a:avLst>
@@ -4456,7 +4457,7 @@
         <p:spPr>
           <a:xfrm>
             <a:off x="4507920" y="3182040"/>
-            <a:ext cx="3288600" cy="2739960"/>
+            <a:ext cx="3288240" cy="2739600"/>
           </a:xfrm>
           <a:prstGeom prst="roundRect">
             <a:avLst>
@@ -4518,7 +4519,7 @@
         <p:spPr>
           <a:xfrm>
             <a:off x="4434840" y="3108960"/>
-            <a:ext cx="3288600" cy="2739960"/>
+            <a:ext cx="3288240" cy="2739600"/>
           </a:xfrm>
           <a:prstGeom prst="roundRect">
             <a:avLst>
@@ -4776,7 +4777,7 @@
         <p:spPr>
           <a:xfrm>
             <a:off x="8028360" y="3182040"/>
-            <a:ext cx="3288600" cy="2739960"/>
+            <a:ext cx="3288240" cy="2739600"/>
           </a:xfrm>
           <a:prstGeom prst="roundRect">
             <a:avLst>
@@ -4838,7 +4839,7 @@
         <p:spPr>
           <a:xfrm>
             <a:off x="7955280" y="2971800"/>
-            <a:ext cx="3929760" cy="3655440"/>
+            <a:ext cx="3929400" cy="3655080"/>
           </a:xfrm>
           <a:prstGeom prst="roundRect">
             <a:avLst>
@@ -5349,7 +5350,7 @@
         <p:spPr>
           <a:xfrm>
             <a:off x="0" y="0"/>
-            <a:ext cx="12186000" cy="6855120"/>
+            <a:ext cx="12185640" cy="6854760"/>
           </a:xfrm>
           <a:prstGeom prst="rect">
             <a:avLst/>
@@ -5409,7 +5410,7 @@
         <p:spPr>
           <a:xfrm>
             <a:off x="0" y="0"/>
-            <a:ext cx="15480" cy="6855120"/>
+            <a:ext cx="15120" cy="6854760"/>
           </a:xfrm>
           <a:prstGeom prst="rect">
             <a:avLst/>
@@ -5469,7 +5470,7 @@
         <p:spPr>
           <a:xfrm>
             <a:off x="914400" y="0"/>
-            <a:ext cx="15480" cy="6855120"/>
+            <a:ext cx="15120" cy="6854760"/>
           </a:xfrm>
           <a:prstGeom prst="rect">
             <a:avLst/>
@@ -5529,7 +5530,7 @@
         <p:spPr>
           <a:xfrm>
             <a:off x="1828800" y="0"/>
-            <a:ext cx="15480" cy="6855120"/>
+            <a:ext cx="15120" cy="6854760"/>
           </a:xfrm>
           <a:prstGeom prst="rect">
             <a:avLst/>
@@ -5589,7 +5590,7 @@
         <p:spPr>
           <a:xfrm>
             <a:off x="2743200" y="0"/>
-            <a:ext cx="15480" cy="6855120"/>
+            <a:ext cx="15120" cy="6854760"/>
           </a:xfrm>
           <a:prstGeom prst="rect">
             <a:avLst/>
@@ -5649,7 +5650,7 @@
         <p:spPr>
           <a:xfrm>
             <a:off x="3657600" y="0"/>
-            <a:ext cx="15480" cy="6855120"/>
+            <a:ext cx="15120" cy="6854760"/>
           </a:xfrm>
           <a:prstGeom prst="rect">
             <a:avLst/>
@@ -5709,7 +5710,7 @@
         <p:spPr>
           <a:xfrm>
             <a:off x="4572000" y="0"/>
-            <a:ext cx="15480" cy="6855120"/>
+            <a:ext cx="15120" cy="6854760"/>
           </a:xfrm>
           <a:prstGeom prst="rect">
             <a:avLst/>
@@ -5769,7 +5770,7 @@
         <p:spPr>
           <a:xfrm>
             <a:off x="5486400" y="0"/>
-            <a:ext cx="15480" cy="6855120"/>
+            <a:ext cx="15120" cy="6854760"/>
           </a:xfrm>
           <a:prstGeom prst="rect">
             <a:avLst/>
@@ -5829,7 +5830,7 @@
         <p:spPr>
           <a:xfrm>
             <a:off x="6400800" y="0"/>
-            <a:ext cx="15480" cy="6855120"/>
+            <a:ext cx="15120" cy="6854760"/>
           </a:xfrm>
           <a:prstGeom prst="rect">
             <a:avLst/>
@@ -5889,7 +5890,7 @@
         <p:spPr>
           <a:xfrm>
             <a:off x="7315200" y="0"/>
-            <a:ext cx="15480" cy="6855120"/>
+            <a:ext cx="15120" cy="6854760"/>
           </a:xfrm>
           <a:prstGeom prst="rect">
             <a:avLst/>
@@ -5949,7 +5950,7 @@
         <p:spPr>
           <a:xfrm>
             <a:off x="8229600" y="0"/>
-            <a:ext cx="15480" cy="6855120"/>
+            <a:ext cx="15120" cy="6854760"/>
           </a:xfrm>
           <a:prstGeom prst="rect">
             <a:avLst/>
@@ -6009,7 +6010,7 @@
         <p:spPr>
           <a:xfrm>
             <a:off x="9144000" y="0"/>
-            <a:ext cx="15480" cy="6855120"/>
+            <a:ext cx="15120" cy="6854760"/>
           </a:xfrm>
           <a:prstGeom prst="rect">
             <a:avLst/>
@@ -6069,7 +6070,7 @@
         <p:spPr>
           <a:xfrm>
             <a:off x="10058400" y="0"/>
-            <a:ext cx="15480" cy="6855120"/>
+            <a:ext cx="15120" cy="6854760"/>
           </a:xfrm>
           <a:prstGeom prst="rect">
             <a:avLst/>
@@ -6129,7 +6130,7 @@
         <p:spPr>
           <a:xfrm>
             <a:off x="10972800" y="0"/>
-            <a:ext cx="15480" cy="6855120"/>
+            <a:ext cx="15120" cy="6854760"/>
           </a:xfrm>
           <a:prstGeom prst="rect">
             <a:avLst/>
@@ -6189,7 +6190,7 @@
         <p:spPr>
           <a:xfrm>
             <a:off x="11887200" y="0"/>
-            <a:ext cx="15480" cy="6855120"/>
+            <a:ext cx="15120" cy="6854760"/>
           </a:xfrm>
           <a:prstGeom prst="rect">
             <a:avLst/>
@@ -6249,7 +6250,7 @@
         <p:spPr>
           <a:xfrm>
             <a:off x="0" y="0"/>
-            <a:ext cx="317160" cy="6855120"/>
+            <a:ext cx="316800" cy="6854760"/>
           </a:xfrm>
           <a:prstGeom prst="rect">
             <a:avLst/>
@@ -6309,7 +6310,7 @@
         <p:spPr>
           <a:xfrm>
             <a:off x="9875520" y="365760"/>
-            <a:ext cx="2008800" cy="500040"/>
+            <a:ext cx="2008440" cy="499680"/>
           </a:xfrm>
           <a:prstGeom prst="roundRect">
             <a:avLst>
@@ -6537,7 +6538,7 @@
         <p:spPr>
           <a:xfrm>
             <a:off x="987480" y="3182040"/>
-            <a:ext cx="3288960" cy="2740320"/>
+            <a:ext cx="3288600" cy="2739960"/>
           </a:xfrm>
           <a:prstGeom prst="roundRect">
             <a:avLst>
@@ -6599,7 +6600,7 @@
         <p:spPr>
           <a:xfrm>
             <a:off x="914400" y="3108960"/>
-            <a:ext cx="3288960" cy="3061440"/>
+            <a:ext cx="3288600" cy="3061080"/>
           </a:xfrm>
           <a:prstGeom prst="roundRect">
             <a:avLst>
@@ -6762,7 +6763,7 @@
         <p:spPr>
           <a:xfrm>
             <a:off x="4507920" y="3182040"/>
-            <a:ext cx="3288960" cy="2740320"/>
+            <a:ext cx="3288600" cy="2739960"/>
           </a:xfrm>
           <a:prstGeom prst="roundRect">
             <a:avLst>
@@ -6824,7 +6825,7 @@
         <p:spPr>
           <a:xfrm>
             <a:off x="4434840" y="2971800"/>
-            <a:ext cx="3288960" cy="3427200"/>
+            <a:ext cx="3288600" cy="3426840"/>
           </a:xfrm>
           <a:prstGeom prst="roundRect">
             <a:avLst>
@@ -7082,7 +7083,7 @@
         <p:spPr>
           <a:xfrm>
             <a:off x="8028360" y="3182040"/>
-            <a:ext cx="3288960" cy="2740320"/>
+            <a:ext cx="3288600" cy="2739960"/>
           </a:xfrm>
           <a:prstGeom prst="roundRect">
             <a:avLst>
@@ -7144,7 +7145,7 @@
         <p:spPr>
           <a:xfrm>
             <a:off x="7955280" y="3108960"/>
-            <a:ext cx="3701520" cy="3061440"/>
+            <a:ext cx="3701160" cy="3061080"/>
           </a:xfrm>
           <a:prstGeom prst="roundRect">
             <a:avLst>
@@ -7589,7 +7590,7 @@
         <p:spPr>
           <a:xfrm>
             <a:off x="0" y="0"/>
-            <a:ext cx="12186000" cy="6855120"/>
+            <a:ext cx="12185640" cy="6854760"/>
           </a:xfrm>
           <a:prstGeom prst="rect">
             <a:avLst/>
@@ -7649,7 +7650,7 @@
         <p:spPr>
           <a:xfrm>
             <a:off x="0" y="0"/>
-            <a:ext cx="15480" cy="6855120"/>
+            <a:ext cx="15120" cy="6854760"/>
           </a:xfrm>
           <a:prstGeom prst="rect">
             <a:avLst/>
@@ -7709,7 +7710,7 @@
         <p:spPr>
           <a:xfrm>
             <a:off x="914400" y="0"/>
-            <a:ext cx="15480" cy="6855120"/>
+            <a:ext cx="15120" cy="6854760"/>
           </a:xfrm>
           <a:prstGeom prst="rect">
             <a:avLst/>
@@ -7769,7 +7770,7 @@
         <p:spPr>
           <a:xfrm>
             <a:off x="1828800" y="0"/>
-            <a:ext cx="15480" cy="6855120"/>
+            <a:ext cx="15120" cy="6854760"/>
           </a:xfrm>
           <a:prstGeom prst="rect">
             <a:avLst/>
@@ -7829,7 +7830,7 @@
         <p:spPr>
           <a:xfrm>
             <a:off x="2743200" y="0"/>
-            <a:ext cx="15480" cy="6855120"/>
+            <a:ext cx="15120" cy="6854760"/>
           </a:xfrm>
           <a:prstGeom prst="rect">
             <a:avLst/>
@@ -7889,7 +7890,7 @@
         <p:spPr>
           <a:xfrm>
             <a:off x="3657600" y="0"/>
-            <a:ext cx="15480" cy="6855120"/>
+            <a:ext cx="15120" cy="6854760"/>
           </a:xfrm>
           <a:prstGeom prst="rect">
             <a:avLst/>
@@ -7949,7 +7950,7 @@
         <p:spPr>
           <a:xfrm>
             <a:off x="4572000" y="0"/>
-            <a:ext cx="15480" cy="6855120"/>
+            <a:ext cx="15120" cy="6854760"/>
           </a:xfrm>
           <a:prstGeom prst="rect">
             <a:avLst/>
@@ -8009,7 +8010,7 @@
         <p:spPr>
           <a:xfrm>
             <a:off x="5486400" y="0"/>
-            <a:ext cx="15480" cy="6855120"/>
+            <a:ext cx="15120" cy="6854760"/>
           </a:xfrm>
           <a:prstGeom prst="rect">
             <a:avLst/>
@@ -8069,7 +8070,7 @@
         <p:spPr>
           <a:xfrm>
             <a:off x="6400800" y="0"/>
-            <a:ext cx="15480" cy="6855120"/>
+            <a:ext cx="15120" cy="6854760"/>
           </a:xfrm>
           <a:prstGeom prst="rect">
             <a:avLst/>
@@ -8129,7 +8130,7 @@
         <p:spPr>
           <a:xfrm>
             <a:off x="7315200" y="0"/>
-            <a:ext cx="15480" cy="6855120"/>
+            <a:ext cx="15120" cy="6854760"/>
           </a:xfrm>
           <a:prstGeom prst="rect">
             <a:avLst/>
@@ -8189,7 +8190,7 @@
         <p:spPr>
           <a:xfrm>
             <a:off x="8229600" y="0"/>
-            <a:ext cx="15480" cy="6855120"/>
+            <a:ext cx="15120" cy="6854760"/>
           </a:xfrm>
           <a:prstGeom prst="rect">
             <a:avLst/>
@@ -8249,7 +8250,7 @@
         <p:spPr>
           <a:xfrm>
             <a:off x="9144000" y="0"/>
-            <a:ext cx="15480" cy="6855120"/>
+            <a:ext cx="15120" cy="6854760"/>
           </a:xfrm>
           <a:prstGeom prst="rect">
             <a:avLst/>
@@ -8309,7 +8310,7 @@
         <p:spPr>
           <a:xfrm>
             <a:off x="10058400" y="0"/>
-            <a:ext cx="15480" cy="6855120"/>
+            <a:ext cx="15120" cy="6854760"/>
           </a:xfrm>
           <a:prstGeom prst="rect">
             <a:avLst/>
@@ -8369,7 +8370,7 @@
         <p:spPr>
           <a:xfrm>
             <a:off x="10972800" y="0"/>
-            <a:ext cx="15480" cy="6855120"/>
+            <a:ext cx="15120" cy="6854760"/>
           </a:xfrm>
           <a:prstGeom prst="rect">
             <a:avLst/>
@@ -8429,7 +8430,7 @@
         <p:spPr>
           <a:xfrm>
             <a:off x="11887200" y="0"/>
-            <a:ext cx="15480" cy="6855120"/>
+            <a:ext cx="15120" cy="6854760"/>
           </a:xfrm>
           <a:prstGeom prst="rect">
             <a:avLst/>
@@ -8489,7 +8490,7 @@
         <p:spPr>
           <a:xfrm>
             <a:off x="0" y="0"/>
-            <a:ext cx="317160" cy="6855120"/>
+            <a:ext cx="316800" cy="6854760"/>
           </a:xfrm>
           <a:prstGeom prst="rect">
             <a:avLst/>
@@ -8549,7 +8550,7 @@
         <p:spPr>
           <a:xfrm>
             <a:off x="9875520" y="365760"/>
-            <a:ext cx="2008800" cy="500040"/>
+            <a:ext cx="2008440" cy="499680"/>
           </a:xfrm>
           <a:prstGeom prst="roundRect">
             <a:avLst>
@@ -8777,7 +8778,7 @@
         <p:spPr>
           <a:xfrm>
             <a:off x="987480" y="3182040"/>
-            <a:ext cx="3288960" cy="2740320"/>
+            <a:ext cx="3288600" cy="2739960"/>
           </a:xfrm>
           <a:prstGeom prst="roundRect">
             <a:avLst>
@@ -8839,7 +8840,7 @@
         <p:spPr>
           <a:xfrm>
             <a:off x="685800" y="2971800"/>
-            <a:ext cx="3517560" cy="3198600"/>
+            <a:ext cx="3517200" cy="3198240"/>
           </a:xfrm>
           <a:prstGeom prst="roundRect">
             <a:avLst>
@@ -9030,7 +9031,7 @@
         <p:spPr>
           <a:xfrm>
             <a:off x="4507920" y="3182040"/>
-            <a:ext cx="3288960" cy="2740320"/>
+            <a:ext cx="3288600" cy="2739960"/>
           </a:xfrm>
           <a:prstGeom prst="roundRect">
             <a:avLst>
@@ -9092,7 +9093,7 @@
         <p:spPr>
           <a:xfrm>
             <a:off x="4434840" y="2971800"/>
-            <a:ext cx="3288960" cy="3427200"/>
+            <a:ext cx="3288600" cy="3426840"/>
           </a:xfrm>
           <a:prstGeom prst="roundRect">
             <a:avLst>
@@ -9350,7 +9351,7 @@
         <p:spPr>
           <a:xfrm>
             <a:off x="8028360" y="3182040"/>
-            <a:ext cx="3288960" cy="2740320"/>
+            <a:ext cx="3288600" cy="2739960"/>
           </a:xfrm>
           <a:prstGeom prst="roundRect">
             <a:avLst>
@@ -9412,7 +9413,7 @@
         <p:spPr>
           <a:xfrm>
             <a:off x="7955280" y="3108960"/>
-            <a:ext cx="3701520" cy="3061440"/>
+            <a:ext cx="3701160" cy="3061080"/>
           </a:xfrm>
           <a:prstGeom prst="roundRect">
             <a:avLst>
@@ -9857,7 +9858,7 @@
         <p:spPr>
           <a:xfrm>
             <a:off x="0" y="0"/>
-            <a:ext cx="12186000" cy="6855120"/>
+            <a:ext cx="12185640" cy="6854760"/>
           </a:xfrm>
           <a:prstGeom prst="rect">
             <a:avLst/>
@@ -9917,7 +9918,7 @@
         <p:spPr>
           <a:xfrm>
             <a:off x="0" y="0"/>
-            <a:ext cx="15480" cy="6855120"/>
+            <a:ext cx="15120" cy="6854760"/>
           </a:xfrm>
           <a:prstGeom prst="rect">
             <a:avLst/>
@@ -9977,7 +9978,7 @@
         <p:spPr>
           <a:xfrm>
             <a:off x="914400" y="0"/>
-            <a:ext cx="15480" cy="6855120"/>
+            <a:ext cx="15120" cy="6854760"/>
           </a:xfrm>
           <a:prstGeom prst="rect">
             <a:avLst/>
@@ -10037,7 +10038,7 @@
         <p:spPr>
           <a:xfrm>
             <a:off x="1828800" y="0"/>
-            <a:ext cx="15480" cy="6855120"/>
+            <a:ext cx="15120" cy="6854760"/>
           </a:xfrm>
           <a:prstGeom prst="rect">
             <a:avLst/>
@@ -10097,7 +10098,7 @@
         <p:spPr>
           <a:xfrm>
             <a:off x="2743200" y="0"/>
-            <a:ext cx="15480" cy="6855120"/>
+            <a:ext cx="15120" cy="6854760"/>
           </a:xfrm>
           <a:prstGeom prst="rect">
             <a:avLst/>
@@ -10157,7 +10158,7 @@
         <p:spPr>
           <a:xfrm>
             <a:off x="3657600" y="0"/>
-            <a:ext cx="15480" cy="6855120"/>
+            <a:ext cx="15120" cy="6854760"/>
           </a:xfrm>
           <a:prstGeom prst="rect">
             <a:avLst/>
@@ -10217,7 +10218,7 @@
         <p:spPr>
           <a:xfrm>
             <a:off x="4572000" y="0"/>
-            <a:ext cx="15480" cy="6855120"/>
+            <a:ext cx="15120" cy="6854760"/>
           </a:xfrm>
           <a:prstGeom prst="rect">
             <a:avLst/>
@@ -10277,7 +10278,7 @@
         <p:spPr>
           <a:xfrm>
             <a:off x="5486400" y="0"/>
-            <a:ext cx="15480" cy="6855120"/>
+            <a:ext cx="15120" cy="6854760"/>
           </a:xfrm>
           <a:prstGeom prst="rect">
             <a:avLst/>
@@ -10337,7 +10338,7 @@
         <p:spPr>
           <a:xfrm>
             <a:off x="6400800" y="0"/>
-            <a:ext cx="15480" cy="6855120"/>
+            <a:ext cx="15120" cy="6854760"/>
           </a:xfrm>
           <a:prstGeom prst="rect">
             <a:avLst/>
@@ -10397,7 +10398,7 @@
         <p:spPr>
           <a:xfrm>
             <a:off x="7315200" y="0"/>
-            <a:ext cx="15480" cy="6855120"/>
+            <a:ext cx="15120" cy="6854760"/>
           </a:xfrm>
           <a:prstGeom prst="rect">
             <a:avLst/>
@@ -10457,7 +10458,7 @@
         <p:spPr>
           <a:xfrm>
             <a:off x="8229600" y="0"/>
-            <a:ext cx="15480" cy="6855120"/>
+            <a:ext cx="15120" cy="6854760"/>
           </a:xfrm>
           <a:prstGeom prst="rect">
             <a:avLst/>
@@ -10517,7 +10518,7 @@
         <p:spPr>
           <a:xfrm>
             <a:off x="9144000" y="0"/>
-            <a:ext cx="15480" cy="6855120"/>
+            <a:ext cx="15120" cy="6854760"/>
           </a:xfrm>
           <a:prstGeom prst="rect">
             <a:avLst/>
@@ -10577,7 +10578,7 @@
         <p:spPr>
           <a:xfrm>
             <a:off x="10058400" y="0"/>
-            <a:ext cx="15480" cy="6855120"/>
+            <a:ext cx="15120" cy="6854760"/>
           </a:xfrm>
           <a:prstGeom prst="rect">
             <a:avLst/>
@@ -10637,7 +10638,7 @@
         <p:spPr>
           <a:xfrm>
             <a:off x="10972800" y="0"/>
-            <a:ext cx="15480" cy="6855120"/>
+            <a:ext cx="15120" cy="6854760"/>
           </a:xfrm>
           <a:prstGeom prst="rect">
             <a:avLst/>
@@ -10697,7 +10698,7 @@
         <p:spPr>
           <a:xfrm>
             <a:off x="11887200" y="0"/>
-            <a:ext cx="15480" cy="6855120"/>
+            <a:ext cx="15120" cy="6854760"/>
           </a:xfrm>
           <a:prstGeom prst="rect">
             <a:avLst/>
@@ -10757,7 +10758,7 @@
         <p:spPr>
           <a:xfrm>
             <a:off x="0" y="0"/>
-            <a:ext cx="317160" cy="6855120"/>
+            <a:ext cx="316800" cy="6854760"/>
           </a:xfrm>
           <a:prstGeom prst="rect">
             <a:avLst/>
@@ -10817,7 +10818,7 @@
         <p:spPr>
           <a:xfrm>
             <a:off x="9875520" y="365760"/>
-            <a:ext cx="2008800" cy="500040"/>
+            <a:ext cx="2008440" cy="499680"/>
           </a:xfrm>
           <a:prstGeom prst="roundRect">
             <a:avLst>
@@ -10891,7 +10892,7 @@
         <p:spPr>
           <a:xfrm>
             <a:off x="2845800" y="914400"/>
-            <a:ext cx="5277960" cy="638280"/>
+            <a:ext cx="5277600" cy="638280"/>
           </a:xfrm>
           <a:prstGeom prst="rect">
             <a:avLst/>
@@ -10945,7 +10946,7 @@
         <p:spPr>
           <a:xfrm>
             <a:off x="1726200" y="1828800"/>
-            <a:ext cx="8034840" cy="576360"/>
+            <a:ext cx="8034480" cy="576360"/>
           </a:xfrm>
           <a:prstGeom prst="rect">
             <a:avLst/>
@@ -11022,7 +11023,7 @@
         <p:spPr>
           <a:xfrm>
             <a:off x="987480" y="3182040"/>
-            <a:ext cx="3288960" cy="2740320"/>
+            <a:ext cx="3288600" cy="2739960"/>
           </a:xfrm>
           <a:prstGeom prst="roundRect">
             <a:avLst>
@@ -11084,7 +11085,7 @@
         <p:spPr>
           <a:xfrm>
             <a:off x="685800" y="2971800"/>
-            <a:ext cx="3517560" cy="3198600"/>
+            <a:ext cx="3517200" cy="3198240"/>
           </a:xfrm>
           <a:prstGeom prst="roundRect">
             <a:avLst>
@@ -11275,7 +11276,7 @@
         <p:spPr>
           <a:xfrm>
             <a:off x="4507920" y="3182040"/>
-            <a:ext cx="3288960" cy="2740320"/>
+            <a:ext cx="3288600" cy="2739960"/>
           </a:xfrm>
           <a:prstGeom prst="roundRect">
             <a:avLst>
@@ -11337,7 +11338,7 @@
         <p:spPr>
           <a:xfrm>
             <a:off x="4434840" y="2971800"/>
-            <a:ext cx="3288960" cy="3427200"/>
+            <a:ext cx="3288600" cy="3426840"/>
           </a:xfrm>
           <a:prstGeom prst="roundRect">
             <a:avLst>
@@ -11549,7 +11550,7 @@
         <p:spPr>
           <a:xfrm>
             <a:off x="8028360" y="3182040"/>
-            <a:ext cx="3288960" cy="2740320"/>
+            <a:ext cx="3288600" cy="2739960"/>
           </a:xfrm>
           <a:prstGeom prst="roundRect">
             <a:avLst>
@@ -11611,7 +11612,7 @@
         <p:spPr>
           <a:xfrm>
             <a:off x="7955280" y="2743200"/>
-            <a:ext cx="3930840" cy="3885120"/>
+            <a:ext cx="3930480" cy="3884760"/>
           </a:xfrm>
           <a:prstGeom prst="roundRect">
             <a:avLst>
@@ -12171,7 +12172,7 @@
         <p:spPr>
           <a:xfrm>
             <a:off x="0" y="0"/>
-            <a:ext cx="12186000" cy="6855120"/>
+            <a:ext cx="12185640" cy="6854760"/>
           </a:xfrm>
           <a:prstGeom prst="rect">
             <a:avLst/>
@@ -12231,7 +12232,7 @@
         <p:spPr>
           <a:xfrm>
             <a:off x="0" y="0"/>
-            <a:ext cx="15480" cy="6855120"/>
+            <a:ext cx="15120" cy="6854760"/>
           </a:xfrm>
           <a:prstGeom prst="rect">
             <a:avLst/>
@@ -12291,7 +12292,7 @@
         <p:spPr>
           <a:xfrm>
             <a:off x="914400" y="0"/>
-            <a:ext cx="15480" cy="6855120"/>
+            <a:ext cx="15120" cy="6854760"/>
           </a:xfrm>
           <a:prstGeom prst="rect">
             <a:avLst/>
@@ -12351,7 +12352,7 @@
         <p:spPr>
           <a:xfrm>
             <a:off x="1828800" y="0"/>
-            <a:ext cx="15480" cy="6855120"/>
+            <a:ext cx="15120" cy="6854760"/>
           </a:xfrm>
           <a:prstGeom prst="rect">
             <a:avLst/>
@@ -12411,7 +12412,7 @@
         <p:spPr>
           <a:xfrm>
             <a:off x="2743200" y="0"/>
-            <a:ext cx="15480" cy="6855120"/>
+            <a:ext cx="15120" cy="6854760"/>
           </a:xfrm>
           <a:prstGeom prst="rect">
             <a:avLst/>
@@ -12471,7 +12472,7 @@
         <p:spPr>
           <a:xfrm>
             <a:off x="3657600" y="0"/>
-            <a:ext cx="15480" cy="6855120"/>
+            <a:ext cx="15120" cy="6854760"/>
           </a:xfrm>
           <a:prstGeom prst="rect">
             <a:avLst/>
@@ -12531,7 +12532,7 @@
         <p:spPr>
           <a:xfrm>
             <a:off x="4572000" y="0"/>
-            <a:ext cx="15480" cy="6855120"/>
+            <a:ext cx="15120" cy="6854760"/>
           </a:xfrm>
           <a:prstGeom prst="rect">
             <a:avLst/>
@@ -12591,7 +12592,7 @@
         <p:spPr>
           <a:xfrm>
             <a:off x="5486400" y="0"/>
-            <a:ext cx="15480" cy="6855120"/>
+            <a:ext cx="15120" cy="6854760"/>
           </a:xfrm>
           <a:prstGeom prst="rect">
             <a:avLst/>
@@ -12651,7 +12652,7 @@
         <p:spPr>
           <a:xfrm>
             <a:off x="6400800" y="0"/>
-            <a:ext cx="15480" cy="6855120"/>
+            <a:ext cx="15120" cy="6854760"/>
           </a:xfrm>
           <a:prstGeom prst="rect">
             <a:avLst/>
@@ -12711,7 +12712,7 @@
         <p:spPr>
           <a:xfrm>
             <a:off x="7315200" y="0"/>
-            <a:ext cx="15480" cy="6855120"/>
+            <a:ext cx="15120" cy="6854760"/>
           </a:xfrm>
           <a:prstGeom prst="rect">
             <a:avLst/>
@@ -12771,7 +12772,7 @@
         <p:spPr>
           <a:xfrm>
             <a:off x="8229600" y="0"/>
-            <a:ext cx="15480" cy="6855120"/>
+            <a:ext cx="15120" cy="6854760"/>
           </a:xfrm>
           <a:prstGeom prst="rect">
             <a:avLst/>
@@ -12831,7 +12832,7 @@
         <p:spPr>
           <a:xfrm>
             <a:off x="9144000" y="0"/>
-            <a:ext cx="15480" cy="6855120"/>
+            <a:ext cx="15120" cy="6854760"/>
           </a:xfrm>
           <a:prstGeom prst="rect">
             <a:avLst/>
@@ -12891,7 +12892,7 @@
         <p:spPr>
           <a:xfrm>
             <a:off x="10058400" y="0"/>
-            <a:ext cx="15480" cy="6855120"/>
+            <a:ext cx="15120" cy="6854760"/>
           </a:xfrm>
           <a:prstGeom prst="rect">
             <a:avLst/>
@@ -12951,7 +12952,7 @@
         <p:spPr>
           <a:xfrm>
             <a:off x="10972800" y="0"/>
-            <a:ext cx="15480" cy="6855120"/>
+            <a:ext cx="15120" cy="6854760"/>
           </a:xfrm>
           <a:prstGeom prst="rect">
             <a:avLst/>
@@ -13011,7 +13012,7 @@
         <p:spPr>
           <a:xfrm>
             <a:off x="11887200" y="0"/>
-            <a:ext cx="15480" cy="6855120"/>
+            <a:ext cx="15120" cy="6854760"/>
           </a:xfrm>
           <a:prstGeom prst="rect">
             <a:avLst/>
@@ -13071,7 +13072,7 @@
         <p:spPr>
           <a:xfrm>
             <a:off x="0" y="0"/>
-            <a:ext cx="317160" cy="6855120"/>
+            <a:ext cx="316800" cy="6854760"/>
           </a:xfrm>
           <a:prstGeom prst="rect">
             <a:avLst/>
@@ -13131,7 +13132,7 @@
         <p:spPr>
           <a:xfrm>
             <a:off x="9875520" y="365760"/>
-            <a:ext cx="2008800" cy="500040"/>
+            <a:ext cx="2008440" cy="499680"/>
           </a:xfrm>
           <a:prstGeom prst="roundRect">
             <a:avLst>
@@ -13259,7 +13260,7 @@
         <p:spPr>
           <a:xfrm>
             <a:off x="2278800" y="1828800"/>
-            <a:ext cx="6930000" cy="576360"/>
+            <a:ext cx="6929640" cy="576360"/>
           </a:xfrm>
           <a:prstGeom prst="rect">
             <a:avLst/>
@@ -13336,7 +13337,7 @@
         <p:spPr>
           <a:xfrm>
             <a:off x="987480" y="3182040"/>
-            <a:ext cx="3288960" cy="2740320"/>
+            <a:ext cx="3288600" cy="2739960"/>
           </a:xfrm>
           <a:prstGeom prst="roundRect">
             <a:avLst>
@@ -13398,7 +13399,7 @@
         <p:spPr>
           <a:xfrm>
             <a:off x="457200" y="2743200"/>
-            <a:ext cx="3746160" cy="3885480"/>
+            <a:ext cx="3745800" cy="3885120"/>
           </a:xfrm>
           <a:prstGeom prst="roundRect">
             <a:avLst>
@@ -13636,7 +13637,7 @@
         <p:spPr>
           <a:xfrm>
             <a:off x="4507920" y="3182040"/>
-            <a:ext cx="3288960" cy="2740320"/>
+            <a:ext cx="3288600" cy="2739960"/>
           </a:xfrm>
           <a:prstGeom prst="roundRect">
             <a:avLst>
@@ -13698,7 +13699,7 @@
         <p:spPr>
           <a:xfrm>
             <a:off x="4434840" y="2971800"/>
-            <a:ext cx="3288960" cy="3427200"/>
+            <a:ext cx="3288600" cy="3426840"/>
           </a:xfrm>
           <a:prstGeom prst="roundRect">
             <a:avLst>
@@ -13917,7 +13918,7 @@
         <p:spPr>
           <a:xfrm>
             <a:off x="8028360" y="3182040"/>
-            <a:ext cx="3288960" cy="2740320"/>
+            <a:ext cx="3288600" cy="2739960"/>
           </a:xfrm>
           <a:prstGeom prst="roundRect">
             <a:avLst>
@@ -13979,7 +13980,7 @@
         <p:spPr>
           <a:xfrm>
             <a:off x="8001000" y="3200400"/>
-            <a:ext cx="3474000" cy="2742480"/>
+            <a:ext cx="3473640" cy="2742120"/>
           </a:xfrm>
           <a:prstGeom prst="roundRect">
             <a:avLst>
@@ -14391,7 +14392,7 @@
         <p:spPr>
           <a:xfrm>
             <a:off x="0" y="0"/>
-            <a:ext cx="12185640" cy="6854760"/>
+            <a:ext cx="12185280" cy="6854400"/>
           </a:xfrm>
           <a:prstGeom prst="rect">
             <a:avLst/>
@@ -14451,7 +14452,7 @@
         <p:spPr>
           <a:xfrm>
             <a:off x="0" y="0"/>
-            <a:ext cx="15120" cy="6854760"/>
+            <a:ext cx="14760" cy="6854400"/>
           </a:xfrm>
           <a:prstGeom prst="rect">
             <a:avLst/>
@@ -14511,7 +14512,7 @@
         <p:spPr>
           <a:xfrm>
             <a:off x="914400" y="0"/>
-            <a:ext cx="15120" cy="6854760"/>
+            <a:ext cx="14760" cy="6854400"/>
           </a:xfrm>
           <a:prstGeom prst="rect">
             <a:avLst/>
@@ -14571,7 +14572,7 @@
         <p:spPr>
           <a:xfrm>
             <a:off x="1828800" y="0"/>
-            <a:ext cx="15120" cy="6854760"/>
+            <a:ext cx="14760" cy="6854400"/>
           </a:xfrm>
           <a:prstGeom prst="rect">
             <a:avLst/>
@@ -14631,7 +14632,7 @@
         <p:spPr>
           <a:xfrm>
             <a:off x="2743200" y="0"/>
-            <a:ext cx="15120" cy="6854760"/>
+            <a:ext cx="14760" cy="6854400"/>
           </a:xfrm>
           <a:prstGeom prst="rect">
             <a:avLst/>
@@ -14691,7 +14692,7 @@
         <p:spPr>
           <a:xfrm>
             <a:off x="3657600" y="0"/>
-            <a:ext cx="15120" cy="6854760"/>
+            <a:ext cx="14760" cy="6854400"/>
           </a:xfrm>
           <a:prstGeom prst="rect">
             <a:avLst/>
@@ -14751,7 +14752,7 @@
         <p:spPr>
           <a:xfrm>
             <a:off x="4572000" y="0"/>
-            <a:ext cx="15120" cy="6854760"/>
+            <a:ext cx="14760" cy="6854400"/>
           </a:xfrm>
           <a:prstGeom prst="rect">
             <a:avLst/>
@@ -14811,7 +14812,7 @@
         <p:spPr>
           <a:xfrm>
             <a:off x="5486400" y="0"/>
-            <a:ext cx="15120" cy="6854760"/>
+            <a:ext cx="14760" cy="6854400"/>
           </a:xfrm>
           <a:prstGeom prst="rect">
             <a:avLst/>
@@ -14871,7 +14872,7 @@
         <p:spPr>
           <a:xfrm>
             <a:off x="6400800" y="0"/>
-            <a:ext cx="15120" cy="6854760"/>
+            <a:ext cx="14760" cy="6854400"/>
           </a:xfrm>
           <a:prstGeom prst="rect">
             <a:avLst/>
@@ -14931,7 +14932,7 @@
         <p:spPr>
           <a:xfrm>
             <a:off x="7315200" y="0"/>
-            <a:ext cx="15120" cy="6854760"/>
+            <a:ext cx="14760" cy="6854400"/>
           </a:xfrm>
           <a:prstGeom prst="rect">
             <a:avLst/>
@@ -14991,7 +14992,7 @@
         <p:spPr>
           <a:xfrm>
             <a:off x="8229600" y="0"/>
-            <a:ext cx="15120" cy="6854760"/>
+            <a:ext cx="14760" cy="6854400"/>
           </a:xfrm>
           <a:prstGeom prst="rect">
             <a:avLst/>
@@ -15051,7 +15052,7 @@
         <p:spPr>
           <a:xfrm>
             <a:off x="9144000" y="0"/>
-            <a:ext cx="15120" cy="6854760"/>
+            <a:ext cx="14760" cy="6854400"/>
           </a:xfrm>
           <a:prstGeom prst="rect">
             <a:avLst/>
@@ -15111,7 +15112,7 @@
         <p:spPr>
           <a:xfrm>
             <a:off x="10058400" y="0"/>
-            <a:ext cx="15120" cy="6854760"/>
+            <a:ext cx="14760" cy="6854400"/>
           </a:xfrm>
           <a:prstGeom prst="rect">
             <a:avLst/>
@@ -15171,7 +15172,7 @@
         <p:spPr>
           <a:xfrm>
             <a:off x="10972800" y="0"/>
-            <a:ext cx="15120" cy="6854760"/>
+            <a:ext cx="14760" cy="6854400"/>
           </a:xfrm>
           <a:prstGeom prst="rect">
             <a:avLst/>
@@ -15231,7 +15232,7 @@
         <p:spPr>
           <a:xfrm>
             <a:off x="11887200" y="0"/>
-            <a:ext cx="15120" cy="6854760"/>
+            <a:ext cx="14760" cy="6854400"/>
           </a:xfrm>
           <a:prstGeom prst="rect">
             <a:avLst/>
@@ -15291,7 +15292,7 @@
         <p:spPr>
           <a:xfrm>
             <a:off x="0" y="0"/>
-            <a:ext cx="316800" cy="6854760"/>
+            <a:ext cx="316440" cy="6854400"/>
           </a:xfrm>
           <a:prstGeom prst="rect">
             <a:avLst/>
@@ -15351,7 +15352,7 @@
         <p:spPr>
           <a:xfrm>
             <a:off x="9875520" y="365760"/>
-            <a:ext cx="2008440" cy="499680"/>
+            <a:ext cx="2008080" cy="499320"/>
           </a:xfrm>
           <a:prstGeom prst="roundRect">
             <a:avLst>
@@ -15479,7 +15480,7 @@
         <p:spPr>
           <a:xfrm>
             <a:off x="668520" y="1600200"/>
-            <a:ext cx="10353600" cy="515880"/>
+            <a:ext cx="10353240" cy="515880"/>
           </a:xfrm>
           <a:prstGeom prst="rect">
             <a:avLst/>
@@ -15556,7 +15557,7 @@
         <p:spPr>
           <a:xfrm>
             <a:off x="987480" y="3182040"/>
-            <a:ext cx="3288600" cy="2739960"/>
+            <a:ext cx="3288240" cy="2739600"/>
           </a:xfrm>
           <a:prstGeom prst="roundRect">
             <a:avLst>
@@ -15618,7 +15619,7 @@
         <p:spPr>
           <a:xfrm>
             <a:off x="457200" y="2514600"/>
-            <a:ext cx="3745800" cy="4113720"/>
+            <a:ext cx="3745440" cy="4113360"/>
           </a:xfrm>
           <a:prstGeom prst="roundRect">
             <a:avLst>
@@ -15871,7 +15872,7 @@
         <p:spPr>
           <a:xfrm>
             <a:off x="4507920" y="3182040"/>
-            <a:ext cx="3288600" cy="2739960"/>
+            <a:ext cx="3288240" cy="2739600"/>
           </a:xfrm>
           <a:prstGeom prst="roundRect">
             <a:avLst>
@@ -15933,7 +15934,7 @@
         <p:spPr>
           <a:xfrm>
             <a:off x="4434840" y="2514600"/>
-            <a:ext cx="3288600" cy="3884040"/>
+            <a:ext cx="3288240" cy="3883680"/>
           </a:xfrm>
           <a:prstGeom prst="roundRect">
             <a:avLst>
@@ -16149,7 +16150,7 @@
         <p:spPr>
           <a:xfrm>
             <a:off x="8028360" y="3182040"/>
-            <a:ext cx="3288600" cy="2739960"/>
+            <a:ext cx="3288240" cy="2739600"/>
           </a:xfrm>
           <a:prstGeom prst="roundRect">
             <a:avLst>
@@ -16211,7 +16212,7 @@
         <p:spPr>
           <a:xfrm>
             <a:off x="8001000" y="2286000"/>
-            <a:ext cx="3657240" cy="4114440"/>
+            <a:ext cx="3656880" cy="4114080"/>
           </a:xfrm>
           <a:prstGeom prst="roundRect">
             <a:avLst>
@@ -16887,7 +16888,7 @@
         <p:spPr>
           <a:xfrm>
             <a:off x="0" y="0"/>
-            <a:ext cx="12186000" cy="6855120"/>
+            <a:ext cx="12185640" cy="6854760"/>
           </a:xfrm>
           <a:prstGeom prst="rect">
             <a:avLst/>
@@ -16923,6 +16924,11 @@
             <a:noAutofit/>
           </a:bodyPr>
           <a:p>
+            <a:pPr>
+              <a:lnSpc>
+                <a:spcPct val="100000"/>
+              </a:lnSpc>
+            </a:pPr>
             <a:endParaRPr b="0" lang="en-US" sz="1800" spc="-1" strike="noStrike">
               <a:solidFill>
                 <a:schemeClr val="lt1"/>
@@ -16942,7 +16948,7 @@
         <p:spPr>
           <a:xfrm>
             <a:off x="0" y="0"/>
-            <a:ext cx="15480" cy="6855120"/>
+            <a:ext cx="15120" cy="6854760"/>
           </a:xfrm>
           <a:prstGeom prst="rect">
             <a:avLst/>
@@ -16978,6 +16984,11 @@
             <a:noAutofit/>
           </a:bodyPr>
           <a:p>
+            <a:pPr>
+              <a:lnSpc>
+                <a:spcPct val="100000"/>
+              </a:lnSpc>
+            </a:pPr>
             <a:endParaRPr b="0" lang="en-US" sz="1800" spc="-1" strike="noStrike">
               <a:solidFill>
                 <a:schemeClr val="lt1"/>
@@ -16997,7 +17008,7 @@
         <p:spPr>
           <a:xfrm>
             <a:off x="914400" y="0"/>
-            <a:ext cx="15480" cy="6855120"/>
+            <a:ext cx="15120" cy="6854760"/>
           </a:xfrm>
           <a:prstGeom prst="rect">
             <a:avLst/>
@@ -17033,6 +17044,11 @@
             <a:noAutofit/>
           </a:bodyPr>
           <a:p>
+            <a:pPr>
+              <a:lnSpc>
+                <a:spcPct val="100000"/>
+              </a:lnSpc>
+            </a:pPr>
             <a:endParaRPr b="0" lang="en-US" sz="1800" spc="-1" strike="noStrike">
               <a:solidFill>
                 <a:schemeClr val="lt1"/>
@@ -17052,7 +17068,7 @@
         <p:spPr>
           <a:xfrm>
             <a:off x="1828800" y="0"/>
-            <a:ext cx="15480" cy="6855120"/>
+            <a:ext cx="15120" cy="6854760"/>
           </a:xfrm>
           <a:prstGeom prst="rect">
             <a:avLst/>
@@ -17088,6 +17104,11 @@
             <a:noAutofit/>
           </a:bodyPr>
           <a:p>
+            <a:pPr>
+              <a:lnSpc>
+                <a:spcPct val="100000"/>
+              </a:lnSpc>
+            </a:pPr>
             <a:endParaRPr b="0" lang="en-US" sz="1800" spc="-1" strike="noStrike">
               <a:solidFill>
                 <a:schemeClr val="lt1"/>
@@ -17107,7 +17128,7 @@
         <p:spPr>
           <a:xfrm>
             <a:off x="2743200" y="0"/>
-            <a:ext cx="15480" cy="6855120"/>
+            <a:ext cx="15120" cy="6854760"/>
           </a:xfrm>
           <a:prstGeom prst="rect">
             <a:avLst/>
@@ -17143,6 +17164,11 @@
             <a:noAutofit/>
           </a:bodyPr>
           <a:p>
+            <a:pPr>
+              <a:lnSpc>
+                <a:spcPct val="100000"/>
+              </a:lnSpc>
+            </a:pPr>
             <a:endParaRPr b="0" lang="en-US" sz="1800" spc="-1" strike="noStrike">
               <a:solidFill>
                 <a:schemeClr val="lt1"/>
@@ -17162,7 +17188,7 @@
         <p:spPr>
           <a:xfrm>
             <a:off x="3657600" y="0"/>
-            <a:ext cx="15480" cy="6855120"/>
+            <a:ext cx="15120" cy="6854760"/>
           </a:xfrm>
           <a:prstGeom prst="rect">
             <a:avLst/>
@@ -17198,6 +17224,11 @@
             <a:noAutofit/>
           </a:bodyPr>
           <a:p>
+            <a:pPr>
+              <a:lnSpc>
+                <a:spcPct val="100000"/>
+              </a:lnSpc>
+            </a:pPr>
             <a:endParaRPr b="0" lang="en-US" sz="1800" spc="-1" strike="noStrike">
               <a:solidFill>
                 <a:schemeClr val="lt1"/>
@@ -17217,7 +17248,7 @@
         <p:spPr>
           <a:xfrm>
             <a:off x="4572000" y="0"/>
-            <a:ext cx="15480" cy="6855120"/>
+            <a:ext cx="15120" cy="6854760"/>
           </a:xfrm>
           <a:prstGeom prst="rect">
             <a:avLst/>
@@ -17253,6 +17284,11 @@
             <a:noAutofit/>
           </a:bodyPr>
           <a:p>
+            <a:pPr>
+              <a:lnSpc>
+                <a:spcPct val="100000"/>
+              </a:lnSpc>
+            </a:pPr>
             <a:endParaRPr b="0" lang="en-US" sz="1800" spc="-1" strike="noStrike">
               <a:solidFill>
                 <a:schemeClr val="lt1"/>
@@ -17272,7 +17308,7 @@
         <p:spPr>
           <a:xfrm>
             <a:off x="5486400" y="0"/>
-            <a:ext cx="15480" cy="6855120"/>
+            <a:ext cx="15120" cy="6854760"/>
           </a:xfrm>
           <a:prstGeom prst="rect">
             <a:avLst/>
@@ -17308,6 +17344,11 @@
             <a:noAutofit/>
           </a:bodyPr>
           <a:p>
+            <a:pPr>
+              <a:lnSpc>
+                <a:spcPct val="100000"/>
+              </a:lnSpc>
+            </a:pPr>
             <a:endParaRPr b="0" lang="en-US" sz="1800" spc="-1" strike="noStrike">
               <a:solidFill>
                 <a:schemeClr val="lt1"/>
@@ -17327,7 +17368,7 @@
         <p:spPr>
           <a:xfrm>
             <a:off x="6400800" y="0"/>
-            <a:ext cx="15480" cy="6855120"/>
+            <a:ext cx="15120" cy="6854760"/>
           </a:xfrm>
           <a:prstGeom prst="rect">
             <a:avLst/>
@@ -17363,6 +17404,11 @@
             <a:noAutofit/>
           </a:bodyPr>
           <a:p>
+            <a:pPr>
+              <a:lnSpc>
+                <a:spcPct val="100000"/>
+              </a:lnSpc>
+            </a:pPr>
             <a:endParaRPr b="0" lang="en-US" sz="1800" spc="-1" strike="noStrike">
               <a:solidFill>
                 <a:schemeClr val="lt1"/>
@@ -17382,7 +17428,7 @@
         <p:spPr>
           <a:xfrm>
             <a:off x="7315200" y="0"/>
-            <a:ext cx="15480" cy="6855120"/>
+            <a:ext cx="15120" cy="6854760"/>
           </a:xfrm>
           <a:prstGeom prst="rect">
             <a:avLst/>
@@ -17418,6 +17464,11 @@
             <a:noAutofit/>
           </a:bodyPr>
           <a:p>
+            <a:pPr>
+              <a:lnSpc>
+                <a:spcPct val="100000"/>
+              </a:lnSpc>
+            </a:pPr>
             <a:endParaRPr b="0" lang="en-US" sz="1800" spc="-1" strike="noStrike">
               <a:solidFill>
                 <a:schemeClr val="lt1"/>
@@ -17437,7 +17488,7 @@
         <p:spPr>
           <a:xfrm>
             <a:off x="8229600" y="0"/>
-            <a:ext cx="15480" cy="6855120"/>
+            <a:ext cx="15120" cy="6854760"/>
           </a:xfrm>
           <a:prstGeom prst="rect">
             <a:avLst/>
@@ -17473,6 +17524,11 @@
             <a:noAutofit/>
           </a:bodyPr>
           <a:p>
+            <a:pPr>
+              <a:lnSpc>
+                <a:spcPct val="100000"/>
+              </a:lnSpc>
+            </a:pPr>
             <a:endParaRPr b="0" lang="en-US" sz="1800" spc="-1" strike="noStrike">
               <a:solidFill>
                 <a:schemeClr val="lt1"/>
@@ -17492,7 +17548,7 @@
         <p:spPr>
           <a:xfrm>
             <a:off x="9144000" y="0"/>
-            <a:ext cx="15480" cy="6855120"/>
+            <a:ext cx="15120" cy="6854760"/>
           </a:xfrm>
           <a:prstGeom prst="rect">
             <a:avLst/>
@@ -17528,6 +17584,11 @@
             <a:noAutofit/>
           </a:bodyPr>
           <a:p>
+            <a:pPr>
+              <a:lnSpc>
+                <a:spcPct val="100000"/>
+              </a:lnSpc>
+            </a:pPr>
             <a:endParaRPr b="0" lang="en-US" sz="1800" spc="-1" strike="noStrike">
               <a:solidFill>
                 <a:schemeClr val="lt1"/>
@@ -17547,7 +17608,7 @@
         <p:spPr>
           <a:xfrm>
             <a:off x="10058400" y="0"/>
-            <a:ext cx="15480" cy="6855120"/>
+            <a:ext cx="15120" cy="6854760"/>
           </a:xfrm>
           <a:prstGeom prst="rect">
             <a:avLst/>
@@ -17583,6 +17644,11 @@
             <a:noAutofit/>
           </a:bodyPr>
           <a:p>
+            <a:pPr>
+              <a:lnSpc>
+                <a:spcPct val="100000"/>
+              </a:lnSpc>
+            </a:pPr>
             <a:endParaRPr b="0" lang="en-US" sz="1800" spc="-1" strike="noStrike">
               <a:solidFill>
                 <a:schemeClr val="lt1"/>
@@ -17602,7 +17668,7 @@
         <p:spPr>
           <a:xfrm>
             <a:off x="10972800" y="0"/>
-            <a:ext cx="15480" cy="6855120"/>
+            <a:ext cx="15120" cy="6854760"/>
           </a:xfrm>
           <a:prstGeom prst="rect">
             <a:avLst/>
@@ -17638,6 +17704,11 @@
             <a:noAutofit/>
           </a:bodyPr>
           <a:p>
+            <a:pPr>
+              <a:lnSpc>
+                <a:spcPct val="100000"/>
+              </a:lnSpc>
+            </a:pPr>
             <a:endParaRPr b="0" lang="en-US" sz="1800" spc="-1" strike="noStrike">
               <a:solidFill>
                 <a:schemeClr val="lt1"/>
@@ -17657,7 +17728,7 @@
         <p:spPr>
           <a:xfrm>
             <a:off x="11887200" y="0"/>
-            <a:ext cx="15480" cy="6855120"/>
+            <a:ext cx="15120" cy="6854760"/>
           </a:xfrm>
           <a:prstGeom prst="rect">
             <a:avLst/>
@@ -17693,6 +17764,11 @@
             <a:noAutofit/>
           </a:bodyPr>
           <a:p>
+            <a:pPr>
+              <a:lnSpc>
+                <a:spcPct val="100000"/>
+              </a:lnSpc>
+            </a:pPr>
             <a:endParaRPr b="0" lang="en-US" sz="1800" spc="-1" strike="noStrike">
               <a:solidFill>
                 <a:schemeClr val="lt1"/>
@@ -17712,7 +17788,7 @@
         <p:spPr>
           <a:xfrm>
             <a:off x="0" y="0"/>
-            <a:ext cx="317160" cy="6855120"/>
+            <a:ext cx="316800" cy="6854760"/>
           </a:xfrm>
           <a:prstGeom prst="rect">
             <a:avLst/>
@@ -17748,6 +17824,11 @@
             <a:noAutofit/>
           </a:bodyPr>
           <a:p>
+            <a:pPr>
+              <a:lnSpc>
+                <a:spcPct val="100000"/>
+              </a:lnSpc>
+            </a:pPr>
             <a:endParaRPr b="0" lang="en-US" sz="1800" spc="-1" strike="noStrike">
               <a:solidFill>
                 <a:schemeClr val="lt1"/>
@@ -17767,7 +17848,7 @@
         <p:spPr>
           <a:xfrm>
             <a:off x="9875520" y="365760"/>
-            <a:ext cx="2008800" cy="500040"/>
+            <a:ext cx="2008440" cy="499680"/>
           </a:xfrm>
           <a:prstGeom prst="roundRect">
             <a:avLst>
@@ -17841,7 +17922,7 @@
         <p:spPr>
           <a:xfrm>
             <a:off x="1466280" y="914400"/>
-            <a:ext cx="8037360" cy="516960"/>
+            <a:ext cx="8037000" cy="516240"/>
           </a:xfrm>
           <a:prstGeom prst="rect">
             <a:avLst/>
@@ -17895,7 +17976,7 @@
         <p:spPr>
           <a:xfrm>
             <a:off x="1767600" y="1694880"/>
-            <a:ext cx="7952040" cy="819720"/>
+            <a:ext cx="7951680" cy="819720"/>
           </a:xfrm>
           <a:prstGeom prst="rect">
             <a:avLst/>
@@ -18005,7 +18086,7 @@
         <p:spPr>
           <a:xfrm>
             <a:off x="987480" y="3182040"/>
-            <a:ext cx="3288960" cy="2740320"/>
+            <a:ext cx="3288600" cy="2739960"/>
           </a:xfrm>
           <a:prstGeom prst="roundRect">
             <a:avLst>
@@ -18043,6 +18124,11 @@
             <a:noAutofit/>
           </a:bodyPr>
           <a:p>
+            <a:pPr>
+              <a:lnSpc>
+                <a:spcPct val="100000"/>
+              </a:lnSpc>
+            </a:pPr>
             <a:endParaRPr b="0" lang="en-US" sz="1800" spc="-1" strike="noStrike">
               <a:solidFill>
                 <a:schemeClr val="lt1"/>
@@ -18062,7 +18148,7 @@
         <p:spPr>
           <a:xfrm>
             <a:off x="457200" y="2743200"/>
-            <a:ext cx="3886200" cy="3885480"/>
+            <a:ext cx="3885840" cy="3885120"/>
           </a:xfrm>
           <a:prstGeom prst="roundRect">
             <a:avLst>
@@ -18376,7 +18462,7 @@
         <p:spPr>
           <a:xfrm>
             <a:off x="4507920" y="3182040"/>
-            <a:ext cx="3288960" cy="2740320"/>
+            <a:ext cx="3288600" cy="2739960"/>
           </a:xfrm>
           <a:prstGeom prst="roundRect">
             <a:avLst>
@@ -18414,6 +18500,11 @@
             <a:noAutofit/>
           </a:bodyPr>
           <a:p>
+            <a:pPr>
+              <a:lnSpc>
+                <a:spcPct val="100000"/>
+              </a:lnSpc>
+            </a:pPr>
             <a:endParaRPr b="0" lang="en-US" sz="1800" spc="-1" strike="noStrike">
               <a:solidFill>
                 <a:schemeClr val="lt1"/>
@@ -18433,7 +18524,7 @@
         <p:spPr>
           <a:xfrm>
             <a:off x="4572000" y="2743200"/>
-            <a:ext cx="3429000" cy="3657600"/>
+            <a:ext cx="3428640" cy="3657240"/>
           </a:xfrm>
           <a:prstGeom prst="roundRect">
             <a:avLst>
@@ -19008,7 +19099,7 @@
         <p:spPr>
           <a:xfrm>
             <a:off x="8028360" y="3182040"/>
-            <a:ext cx="3288960" cy="2740320"/>
+            <a:ext cx="3288600" cy="2739960"/>
           </a:xfrm>
           <a:prstGeom prst="roundRect">
             <a:avLst>
@@ -19046,6 +19137,11 @@
             <a:noAutofit/>
           </a:bodyPr>
           <a:p>
+            <a:pPr>
+              <a:lnSpc>
+                <a:spcPct val="100000"/>
+              </a:lnSpc>
+            </a:pPr>
             <a:endParaRPr b="0" lang="en-US" sz="1800" spc="-1" strike="noStrike">
               <a:solidFill>
                 <a:schemeClr val="lt1"/>
@@ -19065,7 +19161,7 @@
         <p:spPr>
           <a:xfrm>
             <a:off x="8229600" y="2514600"/>
-            <a:ext cx="3657600" cy="4114800"/>
+            <a:ext cx="3657240" cy="4114440"/>
           </a:xfrm>
           <a:prstGeom prst="roundRect">
             <a:avLst>
@@ -19967,6 +20063,2765 @@
       <p:sp>
         <p:nvSpPr>
           <p:cNvPr id="222" name="TextBox 23"/>
+          <p:cNvSpPr/>
+          <p:nvPr/>
+        </p:nvSpPr>
+        <p:spPr>
+          <a:xfrm>
+            <a:off x="4600080" y="6446520"/>
+            <a:ext cx="3051000" cy="363960"/>
+          </a:xfrm>
+          <a:prstGeom prst="rect">
+            <a:avLst/>
+          </a:prstGeom>
+          <a:noFill/>
+          <a:ln w="0">
+            <a:noFill/>
+          </a:ln>
+        </p:spPr>
+        <p:style>
+          <a:lnRef idx="0"/>
+          <a:fillRef idx="0"/>
+          <a:effectRef idx="0"/>
+          <a:fontRef idx="minor"/>
+        </p:style>
+        <p:txBody>
+          <a:bodyPr wrap="none" lIns="90000" rIns="90000" tIns="45000" bIns="45000" anchor="t">
+            <a:spAutoFit/>
+          </a:bodyPr>
+          <a:p>
+            <a:pPr>
+              <a:lnSpc>
+                <a:spcPct val="100000"/>
+              </a:lnSpc>
+            </a:pPr>
+            <a:r>
+              <a:rPr b="0" lang="en-US" sz="1800" spc="-1" strike="noStrike">
+                <a:solidFill>
+                  <a:srgbClr val="000000"/>
+                </a:solidFill>
+                <a:latin typeface="Calibri"/>
+                <a:ea typeface="DejaVu Sans"/>
+              </a:rPr>
+              <a:t>Java • Ultra Premium Template</a:t>
+            </a:r>
+            <a:endParaRPr b="0" lang="en-US" sz="1800" spc="-1" strike="noStrike">
+              <a:solidFill>
+                <a:srgbClr val="000000"/>
+              </a:solidFill>
+              <a:latin typeface="Arial"/>
+            </a:endParaRPr>
+          </a:p>
+        </p:txBody>
+      </p:sp>
+    </p:spTree>
+  </p:cSld>
+  <mc:AlternateContent>
+    <mc:Choice Requires="p14">
+      <p:transition spd="slow" p14:dur="2000"/>
+    </mc:Choice>
+    <mc:Fallback>
+      <p:transition spd="slow"/>
+    </mc:Fallback>
+  </mc:AlternateContent>
+</p:sld>
+</file>
+
+<file path=ppt/slides/slide8.xml><?xml version="1.0" encoding="utf-8"?>
+<p:sld xmlns:a="http://schemas.openxmlformats.org/drawingml/2006/main" xmlns:p="http://schemas.openxmlformats.org/presentationml/2006/main" xmlns:r="http://schemas.openxmlformats.org/officeDocument/2006/relationships" xmlns:p14="http://schemas.microsoft.com/office/powerpoint/2010/main" xmlns:p15="http://schemas.microsoft.com/office/powerpoint/2012/main" xmlns:mc="http://schemas.openxmlformats.org/markup-compatibility/2006">
+  <p:cSld>
+    <p:spTree>
+      <p:nvGrpSpPr>
+        <p:cNvPr id="1" name=""/>
+        <p:cNvGrpSpPr/>
+        <p:nvPr/>
+      </p:nvGrpSpPr>
+      <p:grpSpPr>
+        <a:xfrm>
+          <a:off x="0" y="0"/>
+          <a:ext cx="0" cy="0"/>
+          <a:chOff x="0" y="0"/>
+          <a:chExt cx="0" cy="0"/>
+        </a:xfrm>
+      </p:grpSpPr>
+      <p:sp>
+        <p:nvSpPr>
+          <p:cNvPr id="223" name="Rectangle 113"/>
+          <p:cNvSpPr/>
+          <p:nvPr/>
+        </p:nvSpPr>
+        <p:spPr>
+          <a:xfrm>
+            <a:off x="0" y="0"/>
+            <a:ext cx="12185280" cy="6854400"/>
+          </a:xfrm>
+          <a:prstGeom prst="rect">
+            <a:avLst/>
+          </a:prstGeom>
+          <a:solidFill>
+            <a:srgbClr val="0b0b0d"/>
+          </a:solidFill>
+          <a:ln>
+            <a:noFill/>
+          </a:ln>
+          <a:effectLst>
+            <a:outerShdw blurRad="39960" dir="5400000" dist="23040" rotWithShape="0">
+              <a:srgbClr val="000000">
+                <a:alpha val="35000"/>
+              </a:srgbClr>
+            </a:outerShdw>
+          </a:effectLst>
+        </p:spPr>
+        <p:style>
+          <a:lnRef idx="1">
+            <a:schemeClr val="accent1"/>
+          </a:lnRef>
+          <a:fillRef idx="3">
+            <a:schemeClr val="accent1"/>
+          </a:fillRef>
+          <a:effectRef idx="2">
+            <a:schemeClr val="accent1"/>
+          </a:effectRef>
+          <a:fontRef idx="minor"/>
+        </p:style>
+        <p:txBody>
+          <a:bodyPr lIns="90000" rIns="90000" tIns="45000" bIns="45000" anchor="ctr">
+            <a:noAutofit/>
+          </a:bodyPr>
+          <a:p>
+            <a:endParaRPr b="0" lang="en-US" sz="1800" spc="-1" strike="noStrike">
+              <a:solidFill>
+                <a:schemeClr val="lt1"/>
+              </a:solidFill>
+              <a:latin typeface="Calibri"/>
+              <a:ea typeface="DejaVu Sans"/>
+            </a:endParaRPr>
+          </a:p>
+        </p:txBody>
+      </p:sp>
+      <p:sp>
+        <p:nvSpPr>
+          <p:cNvPr id="224" name="Rectangle 114"/>
+          <p:cNvSpPr/>
+          <p:nvPr/>
+        </p:nvSpPr>
+        <p:spPr>
+          <a:xfrm>
+            <a:off x="0" y="0"/>
+            <a:ext cx="14760" cy="6854400"/>
+          </a:xfrm>
+          <a:prstGeom prst="rect">
+            <a:avLst/>
+          </a:prstGeom>
+          <a:solidFill>
+            <a:srgbClr val="121216"/>
+          </a:solidFill>
+          <a:ln>
+            <a:noFill/>
+          </a:ln>
+          <a:effectLst>
+            <a:outerShdw blurRad="39960" dir="5400000" dist="23040" rotWithShape="0">
+              <a:srgbClr val="000000">
+                <a:alpha val="35000"/>
+              </a:srgbClr>
+            </a:outerShdw>
+          </a:effectLst>
+        </p:spPr>
+        <p:style>
+          <a:lnRef idx="1">
+            <a:schemeClr val="accent1"/>
+          </a:lnRef>
+          <a:fillRef idx="3">
+            <a:schemeClr val="accent1"/>
+          </a:fillRef>
+          <a:effectRef idx="2">
+            <a:schemeClr val="accent1"/>
+          </a:effectRef>
+          <a:fontRef idx="minor"/>
+        </p:style>
+        <p:txBody>
+          <a:bodyPr lIns="90000" rIns="90000" tIns="45000" bIns="45000" anchor="ctr">
+            <a:noAutofit/>
+          </a:bodyPr>
+          <a:p>
+            <a:endParaRPr b="0" lang="en-US" sz="1800" spc="-1" strike="noStrike">
+              <a:solidFill>
+                <a:schemeClr val="lt1"/>
+              </a:solidFill>
+              <a:latin typeface="Calibri"/>
+              <a:ea typeface="DejaVu Sans"/>
+            </a:endParaRPr>
+          </a:p>
+        </p:txBody>
+      </p:sp>
+      <p:sp>
+        <p:nvSpPr>
+          <p:cNvPr id="225" name="Rectangle 115"/>
+          <p:cNvSpPr/>
+          <p:nvPr/>
+        </p:nvSpPr>
+        <p:spPr>
+          <a:xfrm>
+            <a:off x="914400" y="0"/>
+            <a:ext cx="14760" cy="6854400"/>
+          </a:xfrm>
+          <a:prstGeom prst="rect">
+            <a:avLst/>
+          </a:prstGeom>
+          <a:solidFill>
+            <a:srgbClr val="121216"/>
+          </a:solidFill>
+          <a:ln>
+            <a:noFill/>
+          </a:ln>
+          <a:effectLst>
+            <a:outerShdw blurRad="39960" dir="5400000" dist="23040" rotWithShape="0">
+              <a:srgbClr val="000000">
+                <a:alpha val="35000"/>
+              </a:srgbClr>
+            </a:outerShdw>
+          </a:effectLst>
+        </p:spPr>
+        <p:style>
+          <a:lnRef idx="1">
+            <a:schemeClr val="accent1"/>
+          </a:lnRef>
+          <a:fillRef idx="3">
+            <a:schemeClr val="accent1"/>
+          </a:fillRef>
+          <a:effectRef idx="2">
+            <a:schemeClr val="accent1"/>
+          </a:effectRef>
+          <a:fontRef idx="minor"/>
+        </p:style>
+        <p:txBody>
+          <a:bodyPr lIns="90000" rIns="90000" tIns="45000" bIns="45000" anchor="ctr">
+            <a:noAutofit/>
+          </a:bodyPr>
+          <a:p>
+            <a:endParaRPr b="0" lang="en-US" sz="1800" spc="-1" strike="noStrike">
+              <a:solidFill>
+                <a:schemeClr val="lt1"/>
+              </a:solidFill>
+              <a:latin typeface="Calibri"/>
+              <a:ea typeface="DejaVu Sans"/>
+            </a:endParaRPr>
+          </a:p>
+        </p:txBody>
+      </p:sp>
+      <p:sp>
+        <p:nvSpPr>
+          <p:cNvPr id="226" name="Rectangle 116"/>
+          <p:cNvSpPr/>
+          <p:nvPr/>
+        </p:nvSpPr>
+        <p:spPr>
+          <a:xfrm>
+            <a:off x="1828800" y="0"/>
+            <a:ext cx="14760" cy="6854400"/>
+          </a:xfrm>
+          <a:prstGeom prst="rect">
+            <a:avLst/>
+          </a:prstGeom>
+          <a:solidFill>
+            <a:srgbClr val="121216"/>
+          </a:solidFill>
+          <a:ln>
+            <a:noFill/>
+          </a:ln>
+          <a:effectLst>
+            <a:outerShdw blurRad="39960" dir="5400000" dist="23040" rotWithShape="0">
+              <a:srgbClr val="000000">
+                <a:alpha val="35000"/>
+              </a:srgbClr>
+            </a:outerShdw>
+          </a:effectLst>
+        </p:spPr>
+        <p:style>
+          <a:lnRef idx="1">
+            <a:schemeClr val="accent1"/>
+          </a:lnRef>
+          <a:fillRef idx="3">
+            <a:schemeClr val="accent1"/>
+          </a:fillRef>
+          <a:effectRef idx="2">
+            <a:schemeClr val="accent1"/>
+          </a:effectRef>
+          <a:fontRef idx="minor"/>
+        </p:style>
+        <p:txBody>
+          <a:bodyPr lIns="90000" rIns="90000" tIns="45000" bIns="45000" anchor="ctr">
+            <a:noAutofit/>
+          </a:bodyPr>
+          <a:p>
+            <a:endParaRPr b="0" lang="en-US" sz="1800" spc="-1" strike="noStrike">
+              <a:solidFill>
+                <a:schemeClr val="lt1"/>
+              </a:solidFill>
+              <a:latin typeface="Calibri"/>
+              <a:ea typeface="DejaVu Sans"/>
+            </a:endParaRPr>
+          </a:p>
+        </p:txBody>
+      </p:sp>
+      <p:sp>
+        <p:nvSpPr>
+          <p:cNvPr id="227" name="Rectangle 117"/>
+          <p:cNvSpPr/>
+          <p:nvPr/>
+        </p:nvSpPr>
+        <p:spPr>
+          <a:xfrm>
+            <a:off x="2743200" y="0"/>
+            <a:ext cx="14760" cy="6854400"/>
+          </a:xfrm>
+          <a:prstGeom prst="rect">
+            <a:avLst/>
+          </a:prstGeom>
+          <a:solidFill>
+            <a:srgbClr val="121216"/>
+          </a:solidFill>
+          <a:ln>
+            <a:noFill/>
+          </a:ln>
+          <a:effectLst>
+            <a:outerShdw blurRad="39960" dir="5400000" dist="23040" rotWithShape="0">
+              <a:srgbClr val="000000">
+                <a:alpha val="35000"/>
+              </a:srgbClr>
+            </a:outerShdw>
+          </a:effectLst>
+        </p:spPr>
+        <p:style>
+          <a:lnRef idx="1">
+            <a:schemeClr val="accent1"/>
+          </a:lnRef>
+          <a:fillRef idx="3">
+            <a:schemeClr val="accent1"/>
+          </a:fillRef>
+          <a:effectRef idx="2">
+            <a:schemeClr val="accent1"/>
+          </a:effectRef>
+          <a:fontRef idx="minor"/>
+        </p:style>
+        <p:txBody>
+          <a:bodyPr lIns="90000" rIns="90000" tIns="45000" bIns="45000" anchor="ctr">
+            <a:noAutofit/>
+          </a:bodyPr>
+          <a:p>
+            <a:endParaRPr b="0" lang="en-US" sz="1800" spc="-1" strike="noStrike">
+              <a:solidFill>
+                <a:schemeClr val="lt1"/>
+              </a:solidFill>
+              <a:latin typeface="Calibri"/>
+              <a:ea typeface="DejaVu Sans"/>
+            </a:endParaRPr>
+          </a:p>
+        </p:txBody>
+      </p:sp>
+      <p:sp>
+        <p:nvSpPr>
+          <p:cNvPr id="228" name="Rectangle 118"/>
+          <p:cNvSpPr/>
+          <p:nvPr/>
+        </p:nvSpPr>
+        <p:spPr>
+          <a:xfrm>
+            <a:off x="3657600" y="0"/>
+            <a:ext cx="14760" cy="6854400"/>
+          </a:xfrm>
+          <a:prstGeom prst="rect">
+            <a:avLst/>
+          </a:prstGeom>
+          <a:solidFill>
+            <a:srgbClr val="121216"/>
+          </a:solidFill>
+          <a:ln>
+            <a:noFill/>
+          </a:ln>
+          <a:effectLst>
+            <a:outerShdw blurRad="39960" dir="5400000" dist="23040" rotWithShape="0">
+              <a:srgbClr val="000000">
+                <a:alpha val="35000"/>
+              </a:srgbClr>
+            </a:outerShdw>
+          </a:effectLst>
+        </p:spPr>
+        <p:style>
+          <a:lnRef idx="1">
+            <a:schemeClr val="accent1"/>
+          </a:lnRef>
+          <a:fillRef idx="3">
+            <a:schemeClr val="accent1"/>
+          </a:fillRef>
+          <a:effectRef idx="2">
+            <a:schemeClr val="accent1"/>
+          </a:effectRef>
+          <a:fontRef idx="minor"/>
+        </p:style>
+        <p:txBody>
+          <a:bodyPr lIns="90000" rIns="90000" tIns="45000" bIns="45000" anchor="ctr">
+            <a:noAutofit/>
+          </a:bodyPr>
+          <a:p>
+            <a:endParaRPr b="0" lang="en-US" sz="1800" spc="-1" strike="noStrike">
+              <a:solidFill>
+                <a:schemeClr val="lt1"/>
+              </a:solidFill>
+              <a:latin typeface="Calibri"/>
+              <a:ea typeface="DejaVu Sans"/>
+            </a:endParaRPr>
+          </a:p>
+        </p:txBody>
+      </p:sp>
+      <p:sp>
+        <p:nvSpPr>
+          <p:cNvPr id="229" name="Rectangle 119"/>
+          <p:cNvSpPr/>
+          <p:nvPr/>
+        </p:nvSpPr>
+        <p:spPr>
+          <a:xfrm>
+            <a:off x="4572000" y="0"/>
+            <a:ext cx="14760" cy="6854400"/>
+          </a:xfrm>
+          <a:prstGeom prst="rect">
+            <a:avLst/>
+          </a:prstGeom>
+          <a:solidFill>
+            <a:srgbClr val="121216"/>
+          </a:solidFill>
+          <a:ln>
+            <a:noFill/>
+          </a:ln>
+          <a:effectLst>
+            <a:outerShdw blurRad="39960" dir="5400000" dist="23040" rotWithShape="0">
+              <a:srgbClr val="000000">
+                <a:alpha val="35000"/>
+              </a:srgbClr>
+            </a:outerShdw>
+          </a:effectLst>
+        </p:spPr>
+        <p:style>
+          <a:lnRef idx="1">
+            <a:schemeClr val="accent1"/>
+          </a:lnRef>
+          <a:fillRef idx="3">
+            <a:schemeClr val="accent1"/>
+          </a:fillRef>
+          <a:effectRef idx="2">
+            <a:schemeClr val="accent1"/>
+          </a:effectRef>
+          <a:fontRef idx="minor"/>
+        </p:style>
+        <p:txBody>
+          <a:bodyPr lIns="90000" rIns="90000" tIns="45000" bIns="45000" anchor="ctr">
+            <a:noAutofit/>
+          </a:bodyPr>
+          <a:p>
+            <a:endParaRPr b="0" lang="en-US" sz="1800" spc="-1" strike="noStrike">
+              <a:solidFill>
+                <a:schemeClr val="lt1"/>
+              </a:solidFill>
+              <a:latin typeface="Calibri"/>
+              <a:ea typeface="DejaVu Sans"/>
+            </a:endParaRPr>
+          </a:p>
+        </p:txBody>
+      </p:sp>
+      <p:sp>
+        <p:nvSpPr>
+          <p:cNvPr id="230" name="Rectangle 120"/>
+          <p:cNvSpPr/>
+          <p:nvPr/>
+        </p:nvSpPr>
+        <p:spPr>
+          <a:xfrm>
+            <a:off x="5486400" y="0"/>
+            <a:ext cx="14760" cy="6854400"/>
+          </a:xfrm>
+          <a:prstGeom prst="rect">
+            <a:avLst/>
+          </a:prstGeom>
+          <a:solidFill>
+            <a:srgbClr val="121216"/>
+          </a:solidFill>
+          <a:ln>
+            <a:noFill/>
+          </a:ln>
+          <a:effectLst>
+            <a:outerShdw blurRad="39960" dir="5400000" dist="23040" rotWithShape="0">
+              <a:srgbClr val="000000">
+                <a:alpha val="35000"/>
+              </a:srgbClr>
+            </a:outerShdw>
+          </a:effectLst>
+        </p:spPr>
+        <p:style>
+          <a:lnRef idx="1">
+            <a:schemeClr val="accent1"/>
+          </a:lnRef>
+          <a:fillRef idx="3">
+            <a:schemeClr val="accent1"/>
+          </a:fillRef>
+          <a:effectRef idx="2">
+            <a:schemeClr val="accent1"/>
+          </a:effectRef>
+          <a:fontRef idx="minor"/>
+        </p:style>
+        <p:txBody>
+          <a:bodyPr lIns="90000" rIns="90000" tIns="45000" bIns="45000" anchor="ctr">
+            <a:noAutofit/>
+          </a:bodyPr>
+          <a:p>
+            <a:endParaRPr b="0" lang="en-US" sz="1800" spc="-1" strike="noStrike">
+              <a:solidFill>
+                <a:schemeClr val="lt1"/>
+              </a:solidFill>
+              <a:latin typeface="Calibri"/>
+              <a:ea typeface="DejaVu Sans"/>
+            </a:endParaRPr>
+          </a:p>
+        </p:txBody>
+      </p:sp>
+      <p:sp>
+        <p:nvSpPr>
+          <p:cNvPr id="231" name="Rectangle 121"/>
+          <p:cNvSpPr/>
+          <p:nvPr/>
+        </p:nvSpPr>
+        <p:spPr>
+          <a:xfrm>
+            <a:off x="6400800" y="0"/>
+            <a:ext cx="14760" cy="6854400"/>
+          </a:xfrm>
+          <a:prstGeom prst="rect">
+            <a:avLst/>
+          </a:prstGeom>
+          <a:solidFill>
+            <a:srgbClr val="121216"/>
+          </a:solidFill>
+          <a:ln>
+            <a:noFill/>
+          </a:ln>
+          <a:effectLst>
+            <a:outerShdw blurRad="39960" dir="5400000" dist="23040" rotWithShape="0">
+              <a:srgbClr val="000000">
+                <a:alpha val="35000"/>
+              </a:srgbClr>
+            </a:outerShdw>
+          </a:effectLst>
+        </p:spPr>
+        <p:style>
+          <a:lnRef idx="1">
+            <a:schemeClr val="accent1"/>
+          </a:lnRef>
+          <a:fillRef idx="3">
+            <a:schemeClr val="accent1"/>
+          </a:fillRef>
+          <a:effectRef idx="2">
+            <a:schemeClr val="accent1"/>
+          </a:effectRef>
+          <a:fontRef idx="minor"/>
+        </p:style>
+        <p:txBody>
+          <a:bodyPr lIns="90000" rIns="90000" tIns="45000" bIns="45000" anchor="ctr">
+            <a:noAutofit/>
+          </a:bodyPr>
+          <a:p>
+            <a:endParaRPr b="0" lang="en-US" sz="1800" spc="-1" strike="noStrike">
+              <a:solidFill>
+                <a:schemeClr val="lt1"/>
+              </a:solidFill>
+              <a:latin typeface="Calibri"/>
+              <a:ea typeface="DejaVu Sans"/>
+            </a:endParaRPr>
+          </a:p>
+        </p:txBody>
+      </p:sp>
+      <p:sp>
+        <p:nvSpPr>
+          <p:cNvPr id="232" name="Rectangle 122"/>
+          <p:cNvSpPr/>
+          <p:nvPr/>
+        </p:nvSpPr>
+        <p:spPr>
+          <a:xfrm>
+            <a:off x="7315200" y="0"/>
+            <a:ext cx="14760" cy="6854400"/>
+          </a:xfrm>
+          <a:prstGeom prst="rect">
+            <a:avLst/>
+          </a:prstGeom>
+          <a:solidFill>
+            <a:srgbClr val="121216"/>
+          </a:solidFill>
+          <a:ln>
+            <a:noFill/>
+          </a:ln>
+          <a:effectLst>
+            <a:outerShdw blurRad="39960" dir="5400000" dist="23040" rotWithShape="0">
+              <a:srgbClr val="000000">
+                <a:alpha val="35000"/>
+              </a:srgbClr>
+            </a:outerShdw>
+          </a:effectLst>
+        </p:spPr>
+        <p:style>
+          <a:lnRef idx="1">
+            <a:schemeClr val="accent1"/>
+          </a:lnRef>
+          <a:fillRef idx="3">
+            <a:schemeClr val="accent1"/>
+          </a:fillRef>
+          <a:effectRef idx="2">
+            <a:schemeClr val="accent1"/>
+          </a:effectRef>
+          <a:fontRef idx="minor"/>
+        </p:style>
+        <p:txBody>
+          <a:bodyPr lIns="90000" rIns="90000" tIns="45000" bIns="45000" anchor="ctr">
+            <a:noAutofit/>
+          </a:bodyPr>
+          <a:p>
+            <a:endParaRPr b="0" lang="en-US" sz="1800" spc="-1" strike="noStrike">
+              <a:solidFill>
+                <a:schemeClr val="lt1"/>
+              </a:solidFill>
+              <a:latin typeface="Calibri"/>
+              <a:ea typeface="DejaVu Sans"/>
+            </a:endParaRPr>
+          </a:p>
+        </p:txBody>
+      </p:sp>
+      <p:sp>
+        <p:nvSpPr>
+          <p:cNvPr id="233" name="Rectangle 123"/>
+          <p:cNvSpPr/>
+          <p:nvPr/>
+        </p:nvSpPr>
+        <p:spPr>
+          <a:xfrm>
+            <a:off x="8229600" y="0"/>
+            <a:ext cx="14760" cy="6854400"/>
+          </a:xfrm>
+          <a:prstGeom prst="rect">
+            <a:avLst/>
+          </a:prstGeom>
+          <a:solidFill>
+            <a:srgbClr val="121216"/>
+          </a:solidFill>
+          <a:ln>
+            <a:noFill/>
+          </a:ln>
+          <a:effectLst>
+            <a:outerShdw blurRad="39960" dir="5400000" dist="23040" rotWithShape="0">
+              <a:srgbClr val="000000">
+                <a:alpha val="35000"/>
+              </a:srgbClr>
+            </a:outerShdw>
+          </a:effectLst>
+        </p:spPr>
+        <p:style>
+          <a:lnRef idx="1">
+            <a:schemeClr val="accent1"/>
+          </a:lnRef>
+          <a:fillRef idx="3">
+            <a:schemeClr val="accent1"/>
+          </a:fillRef>
+          <a:effectRef idx="2">
+            <a:schemeClr val="accent1"/>
+          </a:effectRef>
+          <a:fontRef idx="minor"/>
+        </p:style>
+        <p:txBody>
+          <a:bodyPr lIns="90000" rIns="90000" tIns="45000" bIns="45000" anchor="ctr">
+            <a:noAutofit/>
+          </a:bodyPr>
+          <a:p>
+            <a:endParaRPr b="0" lang="en-US" sz="1800" spc="-1" strike="noStrike">
+              <a:solidFill>
+                <a:schemeClr val="lt1"/>
+              </a:solidFill>
+              <a:latin typeface="Calibri"/>
+              <a:ea typeface="DejaVu Sans"/>
+            </a:endParaRPr>
+          </a:p>
+        </p:txBody>
+      </p:sp>
+      <p:sp>
+        <p:nvSpPr>
+          <p:cNvPr id="234" name="Rectangle 124"/>
+          <p:cNvSpPr/>
+          <p:nvPr/>
+        </p:nvSpPr>
+        <p:spPr>
+          <a:xfrm>
+            <a:off x="9144000" y="0"/>
+            <a:ext cx="14760" cy="6854400"/>
+          </a:xfrm>
+          <a:prstGeom prst="rect">
+            <a:avLst/>
+          </a:prstGeom>
+          <a:solidFill>
+            <a:srgbClr val="121216"/>
+          </a:solidFill>
+          <a:ln>
+            <a:noFill/>
+          </a:ln>
+          <a:effectLst>
+            <a:outerShdw blurRad="39960" dir="5400000" dist="23040" rotWithShape="0">
+              <a:srgbClr val="000000">
+                <a:alpha val="35000"/>
+              </a:srgbClr>
+            </a:outerShdw>
+          </a:effectLst>
+        </p:spPr>
+        <p:style>
+          <a:lnRef idx="1">
+            <a:schemeClr val="accent1"/>
+          </a:lnRef>
+          <a:fillRef idx="3">
+            <a:schemeClr val="accent1"/>
+          </a:fillRef>
+          <a:effectRef idx="2">
+            <a:schemeClr val="accent1"/>
+          </a:effectRef>
+          <a:fontRef idx="minor"/>
+        </p:style>
+        <p:txBody>
+          <a:bodyPr lIns="90000" rIns="90000" tIns="45000" bIns="45000" anchor="ctr">
+            <a:noAutofit/>
+          </a:bodyPr>
+          <a:p>
+            <a:endParaRPr b="0" lang="en-US" sz="1800" spc="-1" strike="noStrike">
+              <a:solidFill>
+                <a:schemeClr val="lt1"/>
+              </a:solidFill>
+              <a:latin typeface="Calibri"/>
+              <a:ea typeface="DejaVu Sans"/>
+            </a:endParaRPr>
+          </a:p>
+        </p:txBody>
+      </p:sp>
+      <p:sp>
+        <p:nvSpPr>
+          <p:cNvPr id="235" name="Rectangle 125"/>
+          <p:cNvSpPr/>
+          <p:nvPr/>
+        </p:nvSpPr>
+        <p:spPr>
+          <a:xfrm>
+            <a:off x="10058400" y="0"/>
+            <a:ext cx="14760" cy="6854400"/>
+          </a:xfrm>
+          <a:prstGeom prst="rect">
+            <a:avLst/>
+          </a:prstGeom>
+          <a:solidFill>
+            <a:srgbClr val="121216"/>
+          </a:solidFill>
+          <a:ln>
+            <a:noFill/>
+          </a:ln>
+          <a:effectLst>
+            <a:outerShdw blurRad="39960" dir="5400000" dist="23040" rotWithShape="0">
+              <a:srgbClr val="000000">
+                <a:alpha val="35000"/>
+              </a:srgbClr>
+            </a:outerShdw>
+          </a:effectLst>
+        </p:spPr>
+        <p:style>
+          <a:lnRef idx="1">
+            <a:schemeClr val="accent1"/>
+          </a:lnRef>
+          <a:fillRef idx="3">
+            <a:schemeClr val="accent1"/>
+          </a:fillRef>
+          <a:effectRef idx="2">
+            <a:schemeClr val="accent1"/>
+          </a:effectRef>
+          <a:fontRef idx="minor"/>
+        </p:style>
+        <p:txBody>
+          <a:bodyPr lIns="90000" rIns="90000" tIns="45000" bIns="45000" anchor="ctr">
+            <a:noAutofit/>
+          </a:bodyPr>
+          <a:p>
+            <a:endParaRPr b="0" lang="en-US" sz="1800" spc="-1" strike="noStrike">
+              <a:solidFill>
+                <a:schemeClr val="lt1"/>
+              </a:solidFill>
+              <a:latin typeface="Calibri"/>
+              <a:ea typeface="DejaVu Sans"/>
+            </a:endParaRPr>
+          </a:p>
+        </p:txBody>
+      </p:sp>
+      <p:sp>
+        <p:nvSpPr>
+          <p:cNvPr id="236" name="Rectangle 126"/>
+          <p:cNvSpPr/>
+          <p:nvPr/>
+        </p:nvSpPr>
+        <p:spPr>
+          <a:xfrm>
+            <a:off x="10972800" y="0"/>
+            <a:ext cx="14760" cy="6854400"/>
+          </a:xfrm>
+          <a:prstGeom prst="rect">
+            <a:avLst/>
+          </a:prstGeom>
+          <a:solidFill>
+            <a:srgbClr val="121216"/>
+          </a:solidFill>
+          <a:ln>
+            <a:noFill/>
+          </a:ln>
+          <a:effectLst>
+            <a:outerShdw blurRad="39960" dir="5400000" dist="23040" rotWithShape="0">
+              <a:srgbClr val="000000">
+                <a:alpha val="35000"/>
+              </a:srgbClr>
+            </a:outerShdw>
+          </a:effectLst>
+        </p:spPr>
+        <p:style>
+          <a:lnRef idx="1">
+            <a:schemeClr val="accent1"/>
+          </a:lnRef>
+          <a:fillRef idx="3">
+            <a:schemeClr val="accent1"/>
+          </a:fillRef>
+          <a:effectRef idx="2">
+            <a:schemeClr val="accent1"/>
+          </a:effectRef>
+          <a:fontRef idx="minor"/>
+        </p:style>
+        <p:txBody>
+          <a:bodyPr lIns="90000" rIns="90000" tIns="45000" bIns="45000" anchor="ctr">
+            <a:noAutofit/>
+          </a:bodyPr>
+          <a:p>
+            <a:endParaRPr b="0" lang="en-US" sz="1800" spc="-1" strike="noStrike">
+              <a:solidFill>
+                <a:schemeClr val="lt1"/>
+              </a:solidFill>
+              <a:latin typeface="Calibri"/>
+              <a:ea typeface="DejaVu Sans"/>
+            </a:endParaRPr>
+          </a:p>
+        </p:txBody>
+      </p:sp>
+      <p:sp>
+        <p:nvSpPr>
+          <p:cNvPr id="237" name="Rectangle 127"/>
+          <p:cNvSpPr/>
+          <p:nvPr/>
+        </p:nvSpPr>
+        <p:spPr>
+          <a:xfrm>
+            <a:off x="11887200" y="0"/>
+            <a:ext cx="14760" cy="6854400"/>
+          </a:xfrm>
+          <a:prstGeom prst="rect">
+            <a:avLst/>
+          </a:prstGeom>
+          <a:solidFill>
+            <a:srgbClr val="121216"/>
+          </a:solidFill>
+          <a:ln>
+            <a:noFill/>
+          </a:ln>
+          <a:effectLst>
+            <a:outerShdw blurRad="39960" dir="5400000" dist="23040" rotWithShape="0">
+              <a:srgbClr val="000000">
+                <a:alpha val="35000"/>
+              </a:srgbClr>
+            </a:outerShdw>
+          </a:effectLst>
+        </p:spPr>
+        <p:style>
+          <a:lnRef idx="1">
+            <a:schemeClr val="accent1"/>
+          </a:lnRef>
+          <a:fillRef idx="3">
+            <a:schemeClr val="accent1"/>
+          </a:fillRef>
+          <a:effectRef idx="2">
+            <a:schemeClr val="accent1"/>
+          </a:effectRef>
+          <a:fontRef idx="minor"/>
+        </p:style>
+        <p:txBody>
+          <a:bodyPr lIns="90000" rIns="90000" tIns="45000" bIns="45000" anchor="ctr">
+            <a:noAutofit/>
+          </a:bodyPr>
+          <a:p>
+            <a:endParaRPr b="0" lang="en-US" sz="1800" spc="-1" strike="noStrike">
+              <a:solidFill>
+                <a:schemeClr val="lt1"/>
+              </a:solidFill>
+              <a:latin typeface="Calibri"/>
+              <a:ea typeface="DejaVu Sans"/>
+            </a:endParaRPr>
+          </a:p>
+        </p:txBody>
+      </p:sp>
+      <p:sp>
+        <p:nvSpPr>
+          <p:cNvPr id="238" name="Rectangle 128"/>
+          <p:cNvSpPr/>
+          <p:nvPr/>
+        </p:nvSpPr>
+        <p:spPr>
+          <a:xfrm>
+            <a:off x="0" y="0"/>
+            <a:ext cx="316440" cy="6854400"/>
+          </a:xfrm>
+          <a:prstGeom prst="rect">
+            <a:avLst/>
+          </a:prstGeom>
+          <a:solidFill>
+            <a:srgbClr val="ff8c00"/>
+          </a:solidFill>
+          <a:ln>
+            <a:noFill/>
+          </a:ln>
+          <a:effectLst>
+            <a:outerShdw blurRad="39960" dir="5400000" dist="23040" rotWithShape="0">
+              <a:srgbClr val="000000">
+                <a:alpha val="35000"/>
+              </a:srgbClr>
+            </a:outerShdw>
+          </a:effectLst>
+        </p:spPr>
+        <p:style>
+          <a:lnRef idx="1">
+            <a:schemeClr val="accent1"/>
+          </a:lnRef>
+          <a:fillRef idx="3">
+            <a:schemeClr val="accent1"/>
+          </a:fillRef>
+          <a:effectRef idx="2">
+            <a:schemeClr val="accent1"/>
+          </a:effectRef>
+          <a:fontRef idx="minor"/>
+        </p:style>
+        <p:txBody>
+          <a:bodyPr lIns="90000" rIns="90000" tIns="45000" bIns="45000" anchor="ctr">
+            <a:noAutofit/>
+          </a:bodyPr>
+          <a:p>
+            <a:endParaRPr b="0" lang="en-US" sz="1800" spc="-1" strike="noStrike">
+              <a:solidFill>
+                <a:schemeClr val="lt1"/>
+              </a:solidFill>
+              <a:latin typeface="Calibri"/>
+              <a:ea typeface="DejaVu Sans"/>
+            </a:endParaRPr>
+          </a:p>
+        </p:txBody>
+      </p:sp>
+      <p:sp>
+        <p:nvSpPr>
+          <p:cNvPr id="239" name="Rounded Rectangle 57"/>
+          <p:cNvSpPr/>
+          <p:nvPr/>
+        </p:nvSpPr>
+        <p:spPr>
+          <a:xfrm>
+            <a:off x="9875520" y="365760"/>
+            <a:ext cx="2008080" cy="499320"/>
+          </a:xfrm>
+          <a:prstGeom prst="roundRect">
+            <a:avLst>
+              <a:gd name="adj" fmla="val 16667"/>
+            </a:avLst>
+          </a:prstGeom>
+          <a:solidFill>
+            <a:srgbClr val="1e1e24"/>
+          </a:solidFill>
+          <a:ln>
+            <a:solidFill>
+              <a:srgbClr val="ff8c00"/>
+            </a:solidFill>
+            <a:round/>
+          </a:ln>
+          <a:effectLst>
+            <a:outerShdw blurRad="39960" dir="5400000" dist="23040" rotWithShape="0">
+              <a:srgbClr val="000000">
+                <a:alpha val="35000"/>
+              </a:srgbClr>
+            </a:outerShdw>
+          </a:effectLst>
+        </p:spPr>
+        <p:style>
+          <a:lnRef idx="1">
+            <a:schemeClr val="accent1"/>
+          </a:lnRef>
+          <a:fillRef idx="3">
+            <a:schemeClr val="accent1"/>
+          </a:fillRef>
+          <a:effectRef idx="2">
+            <a:schemeClr val="accent1"/>
+          </a:effectRef>
+          <a:fontRef idx="minor"/>
+        </p:style>
+        <p:txBody>
+          <a:bodyPr lIns="90000" rIns="90000" tIns="45000" bIns="45000" anchor="ctr">
+            <a:noAutofit/>
+          </a:bodyPr>
+          <a:p>
+            <a:pPr algn="ctr">
+              <a:lnSpc>
+                <a:spcPct val="100000"/>
+              </a:lnSpc>
+            </a:pPr>
+            <a:r>
+              <a:rPr b="1" lang="en-US" sz="1400" spc="-1" strike="noStrike">
+                <a:solidFill>
+                  <a:srgbClr val="ffb45a"/>
+                </a:solidFill>
+                <a:latin typeface="Calibri"/>
+                <a:ea typeface="DejaVu Sans"/>
+              </a:rPr>
+              <a:t>JAVA CORE</a:t>
+            </a:r>
+            <a:endParaRPr b="0" lang="en-US" sz="1400" spc="-1" strike="noStrike">
+              <a:solidFill>
+                <a:srgbClr val="ffffff"/>
+              </a:solidFill>
+              <a:latin typeface="Arial"/>
+            </a:endParaRPr>
+          </a:p>
+        </p:txBody>
+      </p:sp>
+      <p:sp>
+        <p:nvSpPr>
+          <p:cNvPr id="240" name="TextBox 24"/>
+          <p:cNvSpPr/>
+          <p:nvPr/>
+        </p:nvSpPr>
+        <p:spPr>
+          <a:xfrm>
+            <a:off x="1737720" y="914400"/>
+            <a:ext cx="7493400" cy="639000"/>
+          </a:xfrm>
+          <a:prstGeom prst="rect">
+            <a:avLst/>
+          </a:prstGeom>
+          <a:noFill/>
+          <a:ln w="0">
+            <a:noFill/>
+          </a:ln>
+        </p:spPr>
+        <p:style>
+          <a:lnRef idx="0"/>
+          <a:fillRef idx="0"/>
+          <a:effectRef idx="0"/>
+          <a:fontRef idx="minor"/>
+        </p:style>
+        <p:txBody>
+          <a:bodyPr wrap="none" lIns="90000" rIns="90000" tIns="45000" bIns="45000" anchor="t">
+            <a:spAutoFit/>
+          </a:bodyPr>
+          <a:p>
+            <a:pPr>
+              <a:lnSpc>
+                <a:spcPct val="100000"/>
+              </a:lnSpc>
+            </a:pPr>
+            <a:r>
+              <a:rPr b="1" lang="en-US" sz="3600" spc="-1" strike="noStrike">
+                <a:solidFill>
+                  <a:srgbClr val="f5f5f5"/>
+                </a:solidFill>
+                <a:latin typeface="Calibri"/>
+                <a:ea typeface="DejaVu Sans"/>
+              </a:rPr>
+              <a:t>Introduction to Basic Operators in Java</a:t>
+            </a:r>
+            <a:endParaRPr b="0" lang="en-US" sz="3600" spc="-1" strike="noStrike">
+              <a:solidFill>
+                <a:srgbClr val="000000"/>
+              </a:solidFill>
+              <a:latin typeface="Arial"/>
+            </a:endParaRPr>
+          </a:p>
+        </p:txBody>
+      </p:sp>
+      <p:sp>
+        <p:nvSpPr>
+          <p:cNvPr id="241" name="TextBox 25"/>
+          <p:cNvSpPr/>
+          <p:nvPr/>
+        </p:nvSpPr>
+        <p:spPr>
+          <a:xfrm>
+            <a:off x="1964160" y="1664640"/>
+            <a:ext cx="7574040" cy="819720"/>
+          </a:xfrm>
+          <a:prstGeom prst="rect">
+            <a:avLst/>
+          </a:prstGeom>
+          <a:noFill/>
+          <a:ln w="0">
+            <a:noFill/>
+          </a:ln>
+        </p:spPr>
+        <p:style>
+          <a:lnRef idx="0"/>
+          <a:fillRef idx="0"/>
+          <a:effectRef idx="0"/>
+          <a:fontRef idx="minor"/>
+        </p:style>
+        <p:txBody>
+          <a:bodyPr wrap="none" lIns="90000" rIns="90000" tIns="45000" bIns="45000" anchor="t">
+            <a:spAutoFit/>
+          </a:bodyPr>
+          <a:p>
+            <a:pPr>
+              <a:lnSpc>
+                <a:spcPct val="100000"/>
+              </a:lnSpc>
+            </a:pPr>
+            <a:r>
+              <a:rPr b="0" lang="en-US" sz="1600" spc="-1" strike="noStrike">
+                <a:solidFill>
+                  <a:srgbClr val="aaaaaa"/>
+                </a:solidFill>
+                <a:latin typeface="Calibri"/>
+                <a:ea typeface="DejaVu Sans"/>
+              </a:rPr>
+              <a:t>In Java, operators are special symbols used to perform mathematical, logical, or relational </a:t>
+            </a:r>
+            <a:endParaRPr b="0" lang="en-US" sz="1600" spc="-1" strike="noStrike">
+              <a:solidFill>
+                <a:srgbClr val="000000"/>
+              </a:solidFill>
+              <a:latin typeface="Arial"/>
+            </a:endParaRPr>
+          </a:p>
+          <a:p>
+            <a:pPr>
+              <a:lnSpc>
+                <a:spcPct val="100000"/>
+              </a:lnSpc>
+            </a:pPr>
+            <a:r>
+              <a:rPr b="0" lang="en-US" sz="1600" spc="-1" strike="noStrike">
+                <a:solidFill>
+                  <a:srgbClr val="aaaaaa"/>
+                </a:solidFill>
+                <a:latin typeface="Calibri"/>
+                <a:ea typeface="DejaVu Sans"/>
+              </a:rPr>
+              <a:t>operations on variables and values. </a:t>
+            </a:r>
+            <a:endParaRPr b="0" lang="en-US" sz="1600" spc="-1" strike="noStrike">
+              <a:solidFill>
+                <a:srgbClr val="000000"/>
+              </a:solidFill>
+              <a:latin typeface="Arial"/>
+            </a:endParaRPr>
+          </a:p>
+          <a:p>
+            <a:pPr>
+              <a:lnSpc>
+                <a:spcPct val="100000"/>
+              </a:lnSpc>
+            </a:pPr>
+            <a:r>
+              <a:rPr b="0" lang="en-US" sz="1600" spc="-1" strike="noStrike">
+                <a:solidFill>
+                  <a:srgbClr val="aaaaaa"/>
+                </a:solidFill>
+                <a:latin typeface="Calibri"/>
+                <a:ea typeface="DejaVu Sans"/>
+              </a:rPr>
+              <a:t>The data items that operators act upon are called "Operands".</a:t>
+            </a:r>
+            <a:endParaRPr b="0" lang="en-US" sz="1600" spc="-1" strike="noStrike">
+              <a:solidFill>
+                <a:srgbClr val="000000"/>
+              </a:solidFill>
+              <a:latin typeface="Arial"/>
+            </a:endParaRPr>
+          </a:p>
+        </p:txBody>
+      </p:sp>
+      <p:sp>
+        <p:nvSpPr>
+          <p:cNvPr id="242" name="Rounded Rectangle 58"/>
+          <p:cNvSpPr/>
+          <p:nvPr/>
+        </p:nvSpPr>
+        <p:spPr>
+          <a:xfrm>
+            <a:off x="987480" y="3182040"/>
+            <a:ext cx="3288240" cy="2739600"/>
+          </a:xfrm>
+          <a:prstGeom prst="roundRect">
+            <a:avLst>
+              <a:gd name="adj" fmla="val 16667"/>
+            </a:avLst>
+          </a:prstGeom>
+          <a:solidFill>
+            <a:srgbClr val="08080a"/>
+          </a:solidFill>
+          <a:ln>
+            <a:noFill/>
+          </a:ln>
+          <a:effectLst>
+            <a:outerShdw blurRad="39960" dir="5400000" dist="23040" rotWithShape="0">
+              <a:srgbClr val="000000">
+                <a:alpha val="35000"/>
+              </a:srgbClr>
+            </a:outerShdw>
+          </a:effectLst>
+        </p:spPr>
+        <p:style>
+          <a:lnRef idx="1">
+            <a:schemeClr val="accent1"/>
+          </a:lnRef>
+          <a:fillRef idx="3">
+            <a:schemeClr val="accent1"/>
+          </a:fillRef>
+          <a:effectRef idx="2">
+            <a:schemeClr val="accent1"/>
+          </a:effectRef>
+          <a:fontRef idx="minor"/>
+        </p:style>
+        <p:txBody>
+          <a:bodyPr lIns="90000" rIns="90000" tIns="45000" bIns="45000" anchor="ctr">
+            <a:noAutofit/>
+          </a:bodyPr>
+          <a:p>
+            <a:endParaRPr b="0" lang="en-US" sz="1800" spc="-1" strike="noStrike">
+              <a:solidFill>
+                <a:schemeClr val="lt1"/>
+              </a:solidFill>
+              <a:latin typeface="Calibri"/>
+              <a:ea typeface="DejaVu Sans"/>
+            </a:endParaRPr>
+          </a:p>
+        </p:txBody>
+      </p:sp>
+      <p:sp>
+        <p:nvSpPr>
+          <p:cNvPr id="243" name="Rounded Rectangle 59"/>
+          <p:cNvSpPr/>
+          <p:nvPr/>
+        </p:nvSpPr>
+        <p:spPr>
+          <a:xfrm>
+            <a:off x="914400" y="2743200"/>
+            <a:ext cx="3288240" cy="3657240"/>
+          </a:xfrm>
+          <a:prstGeom prst="roundRect">
+            <a:avLst>
+              <a:gd name="adj" fmla="val 16667"/>
+            </a:avLst>
+          </a:prstGeom>
+          <a:solidFill>
+            <a:srgbClr val="16161c"/>
+          </a:solidFill>
+          <a:ln>
+            <a:solidFill>
+              <a:srgbClr val="464655"/>
+            </a:solidFill>
+            <a:round/>
+          </a:ln>
+          <a:effectLst>
+            <a:outerShdw blurRad="39960" dir="5400000" dist="23040" rotWithShape="0">
+              <a:srgbClr val="000000">
+                <a:alpha val="35000"/>
+              </a:srgbClr>
+            </a:outerShdw>
+          </a:effectLst>
+        </p:spPr>
+        <p:style>
+          <a:lnRef idx="1">
+            <a:schemeClr val="accent1"/>
+          </a:lnRef>
+          <a:fillRef idx="3">
+            <a:schemeClr val="accent1"/>
+          </a:fillRef>
+          <a:effectRef idx="2">
+            <a:schemeClr val="accent1"/>
+          </a:effectRef>
+          <a:fontRef idx="minor"/>
+        </p:style>
+        <p:txBody>
+          <a:bodyPr lIns="90000" rIns="90000" tIns="45000" bIns="45000" anchor="ctr">
+            <a:noAutofit/>
+          </a:bodyPr>
+          <a:p>
+            <a:pPr>
+              <a:lnSpc>
+                <a:spcPct val="100000"/>
+              </a:lnSpc>
+            </a:pPr>
+            <a:r>
+              <a:rPr b="1" lang="en-US" sz="1300" spc="-1" strike="noStrike">
+                <a:solidFill>
+                  <a:schemeClr val="lt1"/>
+                </a:solidFill>
+                <a:latin typeface="Calibri"/>
+                <a:ea typeface="DejaVu Sans"/>
+              </a:rPr>
+              <a:t>Basic Terminology:</a:t>
+            </a:r>
+            <a:endParaRPr b="0" lang="en-US" sz="1300" spc="-1" strike="noStrike">
+              <a:solidFill>
+                <a:srgbClr val="ffffff"/>
+              </a:solidFill>
+              <a:latin typeface="Arial"/>
+            </a:endParaRPr>
+          </a:p>
+          <a:p>
+            <a:pPr>
+              <a:lnSpc>
+                <a:spcPct val="100000"/>
+              </a:lnSpc>
+            </a:pPr>
+            <a:r>
+              <a:rPr b="1" lang="en-US" sz="1300" spc="-1" strike="noStrike">
+                <a:solidFill>
+                  <a:schemeClr val="lt1"/>
+                </a:solidFill>
+                <a:latin typeface="Calibri"/>
+                <a:ea typeface="DejaVu Sans"/>
+              </a:rPr>
+              <a:t>Operator: </a:t>
+            </a:r>
+            <a:r>
+              <a:rPr b="0" lang="en-US" sz="1300" spc="-1" strike="noStrike">
+                <a:solidFill>
+                  <a:schemeClr val="lt1"/>
+                </a:solidFill>
+                <a:latin typeface="Calibri"/>
+                <a:ea typeface="DejaVu Sans"/>
+              </a:rPr>
+              <a:t>The symbol performing the action (+, *, =).</a:t>
+            </a:r>
+            <a:endParaRPr b="0" lang="en-US" sz="1300" spc="-1" strike="noStrike">
+              <a:solidFill>
+                <a:srgbClr val="ffffff"/>
+              </a:solidFill>
+              <a:latin typeface="Arial"/>
+            </a:endParaRPr>
+          </a:p>
+          <a:p>
+            <a:pPr>
+              <a:lnSpc>
+                <a:spcPct val="100000"/>
+              </a:lnSpc>
+            </a:pPr>
+            <a:r>
+              <a:rPr b="1" lang="en-US" sz="1300" spc="-1" strike="noStrike">
+                <a:solidFill>
+                  <a:schemeClr val="lt1"/>
+                </a:solidFill>
+                <a:latin typeface="Calibri"/>
+                <a:ea typeface="DejaVu Sans"/>
+              </a:rPr>
+              <a:t>Operand: </a:t>
+            </a:r>
+            <a:r>
+              <a:rPr b="0" lang="en-US" sz="1300" spc="-1" strike="noStrike">
+                <a:solidFill>
+                  <a:schemeClr val="lt1"/>
+                </a:solidFill>
+                <a:latin typeface="Calibri"/>
+                <a:ea typeface="DejaVu Sans"/>
+              </a:rPr>
+              <a:t>The data being manipulated (x, 5).</a:t>
+            </a:r>
+            <a:endParaRPr b="0" lang="en-US" sz="1300" spc="-1" strike="noStrike">
+              <a:solidFill>
+                <a:srgbClr val="ffffff"/>
+              </a:solidFill>
+              <a:latin typeface="Arial"/>
+            </a:endParaRPr>
+          </a:p>
+          <a:p>
+            <a:pPr>
+              <a:lnSpc>
+                <a:spcPct val="100000"/>
+              </a:lnSpc>
+            </a:pPr>
+            <a:r>
+              <a:rPr b="0" lang="en-US" sz="1300" spc="-1" strike="noStrike">
+                <a:solidFill>
+                  <a:schemeClr val="lt1"/>
+                </a:solidFill>
+                <a:latin typeface="Calibri"/>
+                <a:ea typeface="DejaVu Sans"/>
+              </a:rPr>
+              <a:t>(e.g., In x + 5, + is the operator, x and 5 are operands.)</a:t>
+            </a:r>
+            <a:endParaRPr b="0" lang="en-US" sz="1300" spc="-1" strike="noStrike">
+              <a:solidFill>
+                <a:srgbClr val="ffffff"/>
+              </a:solidFill>
+              <a:latin typeface="Arial"/>
+            </a:endParaRPr>
+          </a:p>
+          <a:p>
+            <a:pPr>
+              <a:lnSpc>
+                <a:spcPct val="100000"/>
+              </a:lnSpc>
+            </a:pPr>
+            <a:endParaRPr b="0" lang="en-US" sz="1300" spc="-1" strike="noStrike">
+              <a:solidFill>
+                <a:srgbClr val="ffffff"/>
+              </a:solidFill>
+              <a:latin typeface="Arial"/>
+            </a:endParaRPr>
+          </a:p>
+          <a:p>
+            <a:pPr>
+              <a:lnSpc>
+                <a:spcPct val="100000"/>
+              </a:lnSpc>
+            </a:pPr>
+            <a:r>
+              <a:rPr b="1" lang="en-US" sz="1300" spc="-1" strike="noStrike">
+                <a:solidFill>
+                  <a:schemeClr val="lt1"/>
+                </a:solidFill>
+                <a:latin typeface="Calibri"/>
+                <a:ea typeface="DejaVu Sans"/>
+              </a:rPr>
+              <a:t>Common Operator Types:</a:t>
+            </a:r>
+            <a:endParaRPr b="0" lang="en-US" sz="1300" spc="-1" strike="noStrike">
+              <a:solidFill>
+                <a:srgbClr val="ffffff"/>
+              </a:solidFill>
+              <a:latin typeface="Arial"/>
+            </a:endParaRPr>
+          </a:p>
+          <a:p>
+            <a:pPr>
+              <a:lnSpc>
+                <a:spcPct val="100000"/>
+              </a:lnSpc>
+            </a:pPr>
+            <a:r>
+              <a:rPr b="0" lang="en-US" sz="1300" spc="-1" strike="noStrike">
+                <a:solidFill>
+                  <a:schemeClr val="lt1"/>
+                </a:solidFill>
+                <a:latin typeface="Calibri"/>
+                <a:ea typeface="DejaVu Sans"/>
+              </a:rPr>
+              <a:t>Arithmetic:</a:t>
+            </a:r>
+            <a:r>
+              <a:rPr b="1" lang="en-US" sz="1300" spc="-1" strike="noStrike">
+                <a:solidFill>
+                  <a:schemeClr val="lt1"/>
+                </a:solidFill>
+                <a:latin typeface="Calibri"/>
+                <a:ea typeface="DejaVu Sans"/>
+              </a:rPr>
+              <a:t>  Performs math calculations (+, -, *, /, % modulo).</a:t>
+            </a:r>
+            <a:endParaRPr b="0" lang="en-US" sz="1300" spc="-1" strike="noStrike">
+              <a:solidFill>
+                <a:srgbClr val="ffffff"/>
+              </a:solidFill>
+              <a:latin typeface="Arial"/>
+            </a:endParaRPr>
+          </a:p>
+          <a:p>
+            <a:pPr>
+              <a:lnSpc>
+                <a:spcPct val="100000"/>
+              </a:lnSpc>
+            </a:pPr>
+            <a:r>
+              <a:rPr b="0" lang="en-US" sz="1300" spc="-1" strike="noStrike">
+                <a:solidFill>
+                  <a:schemeClr val="lt1"/>
+                </a:solidFill>
+                <a:latin typeface="Calibri"/>
+                <a:ea typeface="DejaVu Sans"/>
+              </a:rPr>
+              <a:t>Relational:</a:t>
+            </a:r>
+            <a:r>
+              <a:rPr b="1" lang="en-US" sz="1300" spc="-1" strike="noStrike">
+                <a:solidFill>
+                  <a:schemeClr val="lt1"/>
+                </a:solidFill>
+                <a:latin typeface="Calibri"/>
+                <a:ea typeface="DejaVu Sans"/>
+              </a:rPr>
+              <a:t> Compares two values, returns true or false (==, !=, &gt;, &lt;).</a:t>
+            </a:r>
+            <a:endParaRPr b="0" lang="en-US" sz="1300" spc="-1" strike="noStrike">
+              <a:solidFill>
+                <a:srgbClr val="ffffff"/>
+              </a:solidFill>
+              <a:latin typeface="Arial"/>
+            </a:endParaRPr>
+          </a:p>
+          <a:p>
+            <a:pPr>
+              <a:lnSpc>
+                <a:spcPct val="100000"/>
+              </a:lnSpc>
+            </a:pPr>
+            <a:r>
+              <a:rPr b="0" lang="en-US" sz="1300" spc="-1" strike="noStrike">
+                <a:solidFill>
+                  <a:schemeClr val="lt1"/>
+                </a:solidFill>
+                <a:latin typeface="Calibri"/>
+                <a:ea typeface="DejaVu Sans"/>
+              </a:rPr>
+              <a:t>Logical:</a:t>
+            </a:r>
+            <a:r>
+              <a:rPr b="1" lang="en-US" sz="1300" spc="-1" strike="noStrike">
+                <a:solidFill>
+                  <a:schemeClr val="lt1"/>
+                </a:solidFill>
+                <a:latin typeface="Calibri"/>
+                <a:ea typeface="DejaVu Sans"/>
+              </a:rPr>
+              <a:t> Combines multiple boolean conditions (&amp;&amp; AND, || OR, ! NOT).</a:t>
+            </a:r>
+            <a:endParaRPr b="0" lang="en-US" sz="1300" spc="-1" strike="noStrike">
+              <a:solidFill>
+                <a:srgbClr val="ffffff"/>
+              </a:solidFill>
+              <a:latin typeface="Arial"/>
+            </a:endParaRPr>
+          </a:p>
+          <a:p>
+            <a:pPr>
+              <a:lnSpc>
+                <a:spcPct val="100000"/>
+              </a:lnSpc>
+            </a:pPr>
+            <a:r>
+              <a:rPr b="0" lang="en-US" sz="1300" spc="-1" strike="noStrike">
+                <a:solidFill>
+                  <a:schemeClr val="lt1"/>
+                </a:solidFill>
+                <a:latin typeface="Calibri"/>
+                <a:ea typeface="DejaVu Sans"/>
+              </a:rPr>
+              <a:t>Assignment:</a:t>
+            </a:r>
+            <a:r>
+              <a:rPr b="1" lang="en-US" sz="1300" spc="-1" strike="noStrike">
+                <a:solidFill>
+                  <a:schemeClr val="lt1"/>
+                </a:solidFill>
+                <a:latin typeface="Calibri"/>
+                <a:ea typeface="DejaVu Sans"/>
+              </a:rPr>
+              <a:t> Assigns the right-side value to the left-side variable (=, +=, *=).</a:t>
+            </a:r>
+            <a:endParaRPr b="0" lang="en-US" sz="1300" spc="-1" strike="noStrike">
+              <a:solidFill>
+                <a:srgbClr val="ffffff"/>
+              </a:solidFill>
+              <a:latin typeface="Arial"/>
+            </a:endParaRPr>
+          </a:p>
+        </p:txBody>
+      </p:sp>
+      <p:sp>
+        <p:nvSpPr>
+          <p:cNvPr id="244" name="Rounded Rectangle 60"/>
+          <p:cNvSpPr/>
+          <p:nvPr/>
+        </p:nvSpPr>
+        <p:spPr>
+          <a:xfrm>
+            <a:off x="4507920" y="3182040"/>
+            <a:ext cx="3288240" cy="2739600"/>
+          </a:xfrm>
+          <a:prstGeom prst="roundRect">
+            <a:avLst>
+              <a:gd name="adj" fmla="val 16667"/>
+            </a:avLst>
+          </a:prstGeom>
+          <a:solidFill>
+            <a:srgbClr val="08080a"/>
+          </a:solidFill>
+          <a:ln>
+            <a:noFill/>
+          </a:ln>
+          <a:effectLst>
+            <a:outerShdw blurRad="39960" dir="5400000" dist="23040" rotWithShape="0">
+              <a:srgbClr val="000000">
+                <a:alpha val="35000"/>
+              </a:srgbClr>
+            </a:outerShdw>
+          </a:effectLst>
+        </p:spPr>
+        <p:style>
+          <a:lnRef idx="1">
+            <a:schemeClr val="accent1"/>
+          </a:lnRef>
+          <a:fillRef idx="3">
+            <a:schemeClr val="accent1"/>
+          </a:fillRef>
+          <a:effectRef idx="2">
+            <a:schemeClr val="accent1"/>
+          </a:effectRef>
+          <a:fontRef idx="minor"/>
+        </p:style>
+        <p:txBody>
+          <a:bodyPr lIns="90000" rIns="90000" tIns="45000" bIns="45000" anchor="ctr">
+            <a:noAutofit/>
+          </a:bodyPr>
+          <a:p>
+            <a:endParaRPr b="0" lang="en-US" sz="1800" spc="-1" strike="noStrike">
+              <a:solidFill>
+                <a:schemeClr val="lt1"/>
+              </a:solidFill>
+              <a:latin typeface="Calibri"/>
+              <a:ea typeface="DejaVu Sans"/>
+            </a:endParaRPr>
+          </a:p>
+        </p:txBody>
+      </p:sp>
+      <p:sp>
+        <p:nvSpPr>
+          <p:cNvPr id="245" name="Rounded Rectangle 61"/>
+          <p:cNvSpPr/>
+          <p:nvPr/>
+        </p:nvSpPr>
+        <p:spPr>
+          <a:xfrm>
+            <a:off x="4434840" y="2743200"/>
+            <a:ext cx="3288240" cy="3657240"/>
+          </a:xfrm>
+          <a:prstGeom prst="roundRect">
+            <a:avLst>
+              <a:gd name="adj" fmla="val 16667"/>
+            </a:avLst>
+          </a:prstGeom>
+          <a:solidFill>
+            <a:srgbClr val="16161c"/>
+          </a:solidFill>
+          <a:ln>
+            <a:solidFill>
+              <a:srgbClr val="464655"/>
+            </a:solidFill>
+            <a:round/>
+          </a:ln>
+          <a:effectLst>
+            <a:outerShdw blurRad="39960" dir="5400000" dist="23040" rotWithShape="0">
+              <a:srgbClr val="000000">
+                <a:alpha val="35000"/>
+              </a:srgbClr>
+            </a:outerShdw>
+          </a:effectLst>
+        </p:spPr>
+        <p:style>
+          <a:lnRef idx="1">
+            <a:schemeClr val="accent1"/>
+          </a:lnRef>
+          <a:fillRef idx="3">
+            <a:schemeClr val="accent1"/>
+          </a:fillRef>
+          <a:effectRef idx="2">
+            <a:schemeClr val="accent1"/>
+          </a:effectRef>
+          <a:fontRef idx="minor"/>
+        </p:style>
+        <p:txBody>
+          <a:bodyPr lIns="90000" rIns="90000" tIns="45000" bIns="45000" anchor="ctr">
+            <a:noAutofit/>
+          </a:bodyPr>
+          <a:p>
+            <a:pPr>
+              <a:lnSpc>
+                <a:spcPct val="100000"/>
+              </a:lnSpc>
+            </a:pPr>
+            <a:r>
+              <a:rPr b="0" lang="en-US" sz="1500" spc="-1" strike="noStrike">
+                <a:solidFill>
+                  <a:schemeClr val="lt1"/>
+                </a:solidFill>
+                <a:latin typeface="Calibri"/>
+                <a:ea typeface="DejaVu Sans"/>
+              </a:rPr>
+              <a:t>[ Operator Execution Flow ]</a:t>
+            </a:r>
+            <a:endParaRPr b="0" lang="en-US" sz="1500" spc="-1" strike="noStrike">
+              <a:solidFill>
+                <a:srgbClr val="ffffff"/>
+              </a:solidFill>
+              <a:latin typeface="Arial"/>
+            </a:endParaRPr>
+          </a:p>
+          <a:p>
+            <a:pPr>
+              <a:lnSpc>
+                <a:spcPct val="100000"/>
+              </a:lnSpc>
+            </a:pPr>
+            <a:r>
+              <a:rPr b="0" lang="en-US" sz="1500" spc="-1" strike="noStrike">
+                <a:solidFill>
+                  <a:schemeClr val="lt1"/>
+                </a:solidFill>
+                <a:latin typeface="Calibri"/>
+                <a:ea typeface="DejaVu Sans"/>
+              </a:rPr>
+              <a:t>├──</a:t>
+            </a:r>
+            <a:r>
+              <a:rPr b="0" lang="en-US" sz="1500" spc="-1" strike="noStrike">
+                <a:solidFill>
+                  <a:schemeClr val="lt1"/>
+                </a:solidFill>
+                <a:latin typeface="Calibri"/>
+                <a:ea typeface="DejaVu Sans"/>
+              </a:rPr>
+              <a:t>&gt; 1. Data (Operands) defined in memory</a:t>
+            </a:r>
+            <a:endParaRPr b="0" lang="en-US" sz="1500" spc="-1" strike="noStrike">
+              <a:solidFill>
+                <a:srgbClr val="ffffff"/>
+              </a:solidFill>
+              <a:latin typeface="Arial"/>
+            </a:endParaRPr>
+          </a:p>
+          <a:p>
+            <a:pPr>
+              <a:lnSpc>
+                <a:spcPct val="100000"/>
+              </a:lnSpc>
+            </a:pPr>
+            <a:r>
+              <a:rPr b="0" lang="en-US" sz="1500" spc="-1" strike="noStrike">
+                <a:solidFill>
+                  <a:schemeClr val="lt1"/>
+                </a:solidFill>
+                <a:latin typeface="Calibri"/>
+                <a:ea typeface="DejaVu Sans"/>
+              </a:rPr>
+              <a:t>│ └── </a:t>
+            </a:r>
+            <a:r>
+              <a:rPr b="0" lang="en-US" sz="1500" spc="-1" strike="noStrike">
+                <a:solidFill>
+                  <a:schemeClr val="lt1"/>
+                </a:solidFill>
+                <a:latin typeface="Calibri"/>
+                <a:ea typeface="DejaVu Sans"/>
+              </a:rPr>
+              <a:t>e.g., int x = 10; int y = 5;</a:t>
+            </a:r>
+            <a:endParaRPr b="0" lang="en-US" sz="1500" spc="-1" strike="noStrike">
+              <a:solidFill>
+                <a:srgbClr val="ffffff"/>
+              </a:solidFill>
+              <a:latin typeface="Arial"/>
+            </a:endParaRPr>
+          </a:p>
+          <a:p>
+            <a:pPr>
+              <a:lnSpc>
+                <a:spcPct val="100000"/>
+              </a:lnSpc>
+            </a:pPr>
+            <a:r>
+              <a:rPr b="0" lang="en-US" sz="1500" spc="-1" strike="noStrike">
+                <a:solidFill>
+                  <a:schemeClr val="lt1"/>
+                </a:solidFill>
+                <a:latin typeface="Calibri"/>
+                <a:ea typeface="DejaVu Sans"/>
+              </a:rPr>
+              <a:t>│</a:t>
+            </a:r>
+            <a:endParaRPr b="0" lang="en-US" sz="1500" spc="-1" strike="noStrike">
+              <a:solidFill>
+                <a:srgbClr val="ffffff"/>
+              </a:solidFill>
+              <a:latin typeface="Arial"/>
+            </a:endParaRPr>
+          </a:p>
+          <a:p>
+            <a:pPr>
+              <a:lnSpc>
+                <a:spcPct val="100000"/>
+              </a:lnSpc>
+            </a:pPr>
+            <a:r>
+              <a:rPr b="0" lang="en-US" sz="1500" spc="-1" strike="noStrike">
+                <a:solidFill>
+                  <a:schemeClr val="lt1"/>
+                </a:solidFill>
+                <a:latin typeface="Calibri"/>
+                <a:ea typeface="DejaVu Sans"/>
+              </a:rPr>
+              <a:t>├──</a:t>
+            </a:r>
+            <a:r>
+              <a:rPr b="0" lang="en-US" sz="1500" spc="-1" strike="noStrike">
+                <a:solidFill>
+                  <a:schemeClr val="lt1"/>
+                </a:solidFill>
+                <a:latin typeface="Calibri"/>
+                <a:ea typeface="DejaVu Sans"/>
+              </a:rPr>
+              <a:t>&gt; 2. Expression is evaluated</a:t>
+            </a:r>
+            <a:endParaRPr b="0" lang="en-US" sz="1500" spc="-1" strike="noStrike">
+              <a:solidFill>
+                <a:srgbClr val="ffffff"/>
+              </a:solidFill>
+              <a:latin typeface="Arial"/>
+            </a:endParaRPr>
+          </a:p>
+          <a:p>
+            <a:pPr>
+              <a:lnSpc>
+                <a:spcPct val="100000"/>
+              </a:lnSpc>
+            </a:pPr>
+            <a:r>
+              <a:rPr b="0" lang="en-US" sz="1500" spc="-1" strike="noStrike">
+                <a:solidFill>
+                  <a:schemeClr val="lt1"/>
+                </a:solidFill>
+                <a:latin typeface="Calibri"/>
+                <a:ea typeface="DejaVu Sans"/>
+              </a:rPr>
+              <a:t>│ ├── </a:t>
+            </a:r>
+            <a:r>
+              <a:rPr b="0" lang="en-US" sz="1500" spc="-1" strike="noStrike">
+                <a:solidFill>
+                  <a:schemeClr val="lt1"/>
+                </a:solidFill>
+                <a:latin typeface="Calibri"/>
+                <a:ea typeface="DejaVu Sans"/>
+              </a:rPr>
+              <a:t>Arithmetic: x + y (Result: 15)</a:t>
+            </a:r>
+            <a:endParaRPr b="0" lang="en-US" sz="1500" spc="-1" strike="noStrike">
+              <a:solidFill>
+                <a:srgbClr val="ffffff"/>
+              </a:solidFill>
+              <a:latin typeface="Arial"/>
+            </a:endParaRPr>
+          </a:p>
+          <a:p>
+            <a:pPr>
+              <a:lnSpc>
+                <a:spcPct val="100000"/>
+              </a:lnSpc>
+            </a:pPr>
+            <a:r>
+              <a:rPr b="0" lang="en-US" sz="1500" spc="-1" strike="noStrike">
+                <a:solidFill>
+                  <a:schemeClr val="lt1"/>
+                </a:solidFill>
+                <a:latin typeface="Calibri"/>
+                <a:ea typeface="DejaVu Sans"/>
+              </a:rPr>
+              <a:t>│ └── </a:t>
+            </a:r>
+            <a:r>
+              <a:rPr b="0" lang="en-US" sz="1500" spc="-1" strike="noStrike">
+                <a:solidFill>
+                  <a:schemeClr val="lt1"/>
+                </a:solidFill>
+                <a:latin typeface="Calibri"/>
+                <a:ea typeface="DejaVu Sans"/>
+              </a:rPr>
+              <a:t>Relational: x &gt; y (Result: true)</a:t>
+            </a:r>
+            <a:endParaRPr b="0" lang="en-US" sz="1500" spc="-1" strike="noStrike">
+              <a:solidFill>
+                <a:srgbClr val="ffffff"/>
+              </a:solidFill>
+              <a:latin typeface="Arial"/>
+            </a:endParaRPr>
+          </a:p>
+          <a:p>
+            <a:pPr>
+              <a:lnSpc>
+                <a:spcPct val="100000"/>
+              </a:lnSpc>
+            </a:pPr>
+            <a:r>
+              <a:rPr b="0" lang="en-US" sz="1500" spc="-1" strike="noStrike">
+                <a:solidFill>
+                  <a:schemeClr val="lt1"/>
+                </a:solidFill>
+                <a:latin typeface="Calibri"/>
+                <a:ea typeface="DejaVu Sans"/>
+              </a:rPr>
+              <a:t>│</a:t>
+            </a:r>
+            <a:endParaRPr b="0" lang="en-US" sz="1500" spc="-1" strike="noStrike">
+              <a:solidFill>
+                <a:srgbClr val="ffffff"/>
+              </a:solidFill>
+              <a:latin typeface="Arial"/>
+            </a:endParaRPr>
+          </a:p>
+          <a:p>
+            <a:pPr>
+              <a:lnSpc>
+                <a:spcPct val="100000"/>
+              </a:lnSpc>
+            </a:pPr>
+            <a:r>
+              <a:rPr b="0" lang="en-US" sz="1500" spc="-1" strike="noStrike">
+                <a:solidFill>
+                  <a:schemeClr val="lt1"/>
+                </a:solidFill>
+                <a:latin typeface="Calibri"/>
+                <a:ea typeface="DejaVu Sans"/>
+              </a:rPr>
+              <a:t>├──</a:t>
+            </a:r>
+            <a:r>
+              <a:rPr b="0" lang="en-US" sz="1500" spc="-1" strike="noStrike">
+                <a:solidFill>
+                  <a:schemeClr val="lt1"/>
+                </a:solidFill>
+                <a:latin typeface="Calibri"/>
+                <a:ea typeface="DejaVu Sans"/>
+              </a:rPr>
+              <a:t>&gt; 3. Assignment Operator executes (=)</a:t>
+            </a:r>
+            <a:endParaRPr b="0" lang="en-US" sz="1500" spc="-1" strike="noStrike">
+              <a:solidFill>
+                <a:srgbClr val="ffffff"/>
+              </a:solidFill>
+              <a:latin typeface="Arial"/>
+            </a:endParaRPr>
+          </a:p>
+          <a:p>
+            <a:pPr>
+              <a:lnSpc>
+                <a:spcPct val="100000"/>
+              </a:lnSpc>
+            </a:pPr>
+            <a:r>
+              <a:rPr b="0" lang="en-US" sz="1500" spc="-1" strike="noStrike">
+                <a:solidFill>
+                  <a:schemeClr val="lt1"/>
+                </a:solidFill>
+                <a:latin typeface="Calibri"/>
+                <a:ea typeface="DejaVu Sans"/>
+              </a:rPr>
+              <a:t>│ └── </a:t>
+            </a:r>
+            <a:r>
+              <a:rPr b="0" lang="en-US" sz="1500" spc="-1" strike="noStrike">
+                <a:solidFill>
+                  <a:schemeClr val="lt1"/>
+                </a:solidFill>
+                <a:latin typeface="Calibri"/>
+                <a:ea typeface="DejaVu Sans"/>
+              </a:rPr>
+              <a:t>Evaluated result is stored in a variable</a:t>
+            </a:r>
+            <a:endParaRPr b="0" lang="en-US" sz="1500" spc="-1" strike="noStrike">
+              <a:solidFill>
+                <a:srgbClr val="ffffff"/>
+              </a:solidFill>
+              <a:latin typeface="Arial"/>
+            </a:endParaRPr>
+          </a:p>
+          <a:p>
+            <a:pPr>
+              <a:lnSpc>
+                <a:spcPct val="100000"/>
+              </a:lnSpc>
+            </a:pPr>
+            <a:r>
+              <a:rPr b="0" lang="en-US" sz="1500" spc="-1" strike="noStrike">
+                <a:solidFill>
+                  <a:schemeClr val="lt1"/>
+                </a:solidFill>
+                <a:latin typeface="Calibri"/>
+                <a:ea typeface="DejaVu Sans"/>
+              </a:rPr>
+              <a:t>│</a:t>
+            </a:r>
+            <a:endParaRPr b="0" lang="en-US" sz="1500" spc="-1" strike="noStrike">
+              <a:solidFill>
+                <a:srgbClr val="ffffff"/>
+              </a:solidFill>
+              <a:latin typeface="Arial"/>
+            </a:endParaRPr>
+          </a:p>
+          <a:p>
+            <a:pPr>
+              <a:lnSpc>
+                <a:spcPct val="100000"/>
+              </a:lnSpc>
+            </a:pPr>
+            <a:r>
+              <a:rPr b="0" lang="en-US" sz="1500" spc="-1" strike="noStrike">
+                <a:solidFill>
+                  <a:schemeClr val="lt1"/>
+                </a:solidFill>
+                <a:latin typeface="Calibri"/>
+                <a:ea typeface="DejaVu Sans"/>
+              </a:rPr>
+              <a:t>└──</a:t>
+            </a:r>
+            <a:r>
+              <a:rPr b="0" lang="en-US" sz="1500" spc="-1" strike="noStrike">
+                <a:solidFill>
+                  <a:schemeClr val="lt1"/>
+                </a:solidFill>
+                <a:latin typeface="Calibri"/>
+                <a:ea typeface="DejaVu Sans"/>
+              </a:rPr>
+              <a:t>&gt; 4. Result is ready for output/processing</a:t>
+            </a:r>
+            <a:endParaRPr b="0" lang="en-US" sz="1500" spc="-1" strike="noStrike">
+              <a:solidFill>
+                <a:srgbClr val="ffffff"/>
+              </a:solidFill>
+              <a:latin typeface="Arial"/>
+            </a:endParaRPr>
+          </a:p>
+        </p:txBody>
+      </p:sp>
+      <p:sp>
+        <p:nvSpPr>
+          <p:cNvPr id="246" name="Rounded Rectangle 62"/>
+          <p:cNvSpPr/>
+          <p:nvPr/>
+        </p:nvSpPr>
+        <p:spPr>
+          <a:xfrm>
+            <a:off x="8028360" y="3182040"/>
+            <a:ext cx="3288240" cy="2739600"/>
+          </a:xfrm>
+          <a:prstGeom prst="roundRect">
+            <a:avLst>
+              <a:gd name="adj" fmla="val 16667"/>
+            </a:avLst>
+          </a:prstGeom>
+          <a:solidFill>
+            <a:srgbClr val="08080a"/>
+          </a:solidFill>
+          <a:ln>
+            <a:noFill/>
+          </a:ln>
+          <a:effectLst>
+            <a:outerShdw blurRad="39960" dir="5400000" dist="23040" rotWithShape="0">
+              <a:srgbClr val="000000">
+                <a:alpha val="35000"/>
+              </a:srgbClr>
+            </a:outerShdw>
+          </a:effectLst>
+        </p:spPr>
+        <p:style>
+          <a:lnRef idx="1">
+            <a:schemeClr val="accent1"/>
+          </a:lnRef>
+          <a:fillRef idx="3">
+            <a:schemeClr val="accent1"/>
+          </a:fillRef>
+          <a:effectRef idx="2">
+            <a:schemeClr val="accent1"/>
+          </a:effectRef>
+          <a:fontRef idx="minor"/>
+        </p:style>
+        <p:txBody>
+          <a:bodyPr lIns="90000" rIns="90000" tIns="45000" bIns="45000" anchor="ctr">
+            <a:noAutofit/>
+          </a:bodyPr>
+          <a:p>
+            <a:endParaRPr b="0" lang="en-US" sz="1800" spc="-1" strike="noStrike">
+              <a:solidFill>
+                <a:schemeClr val="lt1"/>
+              </a:solidFill>
+              <a:latin typeface="Calibri"/>
+              <a:ea typeface="DejaVu Sans"/>
+            </a:endParaRPr>
+          </a:p>
+        </p:txBody>
+      </p:sp>
+      <p:sp>
+        <p:nvSpPr>
+          <p:cNvPr id="247" name="Rounded Rectangle 63"/>
+          <p:cNvSpPr/>
+          <p:nvPr/>
+        </p:nvSpPr>
+        <p:spPr>
+          <a:xfrm>
+            <a:off x="7955280" y="2743200"/>
+            <a:ext cx="3700800" cy="3655800"/>
+          </a:xfrm>
+          <a:prstGeom prst="roundRect">
+            <a:avLst>
+              <a:gd name="adj" fmla="val 16667"/>
+            </a:avLst>
+          </a:prstGeom>
+          <a:solidFill>
+            <a:srgbClr val="16161c"/>
+          </a:solidFill>
+          <a:ln>
+            <a:solidFill>
+              <a:srgbClr val="464655"/>
+            </a:solidFill>
+            <a:round/>
+          </a:ln>
+          <a:effectLst>
+            <a:outerShdw blurRad="39960" dir="5400000" dist="23040" rotWithShape="0">
+              <a:srgbClr val="000000">
+                <a:alpha val="35000"/>
+              </a:srgbClr>
+            </a:outerShdw>
+          </a:effectLst>
+        </p:spPr>
+        <p:style>
+          <a:lnRef idx="1">
+            <a:schemeClr val="accent1"/>
+          </a:lnRef>
+          <a:fillRef idx="3">
+            <a:schemeClr val="accent1"/>
+          </a:fillRef>
+          <a:effectRef idx="2">
+            <a:schemeClr val="accent1"/>
+          </a:effectRef>
+          <a:fontRef idx="minor"/>
+        </p:style>
+        <p:txBody>
+          <a:bodyPr lIns="90000" rIns="90000" tIns="45000" bIns="45000" anchor="ctr">
+            <a:noAutofit/>
+          </a:bodyPr>
+          <a:p>
+            <a:pPr algn="ctr">
+              <a:lnSpc>
+                <a:spcPct val="100000"/>
+              </a:lnSpc>
+            </a:pPr>
+            <a:r>
+              <a:rPr b="0" lang="en-US" sz="1000" spc="-1" strike="noStrike">
+                <a:solidFill>
+                  <a:srgbClr val="78ffc8"/>
+                </a:solidFill>
+                <a:latin typeface="Consolas"/>
+                <a:ea typeface="DejaVu Sans"/>
+              </a:rPr>
+              <a:t>public class OperatorIntro {</a:t>
+            </a:r>
+            <a:endParaRPr b="0" lang="en-US" sz="1000" spc="-1" strike="noStrike">
+              <a:solidFill>
+                <a:srgbClr val="ffffff"/>
+              </a:solidFill>
+              <a:latin typeface="Arial"/>
+            </a:endParaRPr>
+          </a:p>
+          <a:p>
+            <a:pPr algn="ctr">
+              <a:lnSpc>
+                <a:spcPct val="100000"/>
+              </a:lnSpc>
+            </a:pPr>
+            <a:r>
+              <a:rPr b="0" lang="en-US" sz="1000" spc="-1" strike="noStrike">
+                <a:solidFill>
+                  <a:srgbClr val="78ffc8"/>
+                </a:solidFill>
+                <a:latin typeface="Consolas"/>
+                <a:ea typeface="DejaVu Sans"/>
+              </a:rPr>
+              <a:t>    </a:t>
+            </a:r>
+            <a:r>
+              <a:rPr b="0" lang="en-US" sz="1000" spc="-1" strike="noStrike">
+                <a:solidFill>
+                  <a:srgbClr val="78ffc8"/>
+                </a:solidFill>
+                <a:latin typeface="Consolas"/>
+                <a:ea typeface="DejaVu Sans"/>
+              </a:rPr>
+              <a:t>public static void main(String[] args) {</a:t>
+            </a:r>
+            <a:endParaRPr b="0" lang="en-US" sz="1000" spc="-1" strike="noStrike">
+              <a:solidFill>
+                <a:srgbClr val="ffffff"/>
+              </a:solidFill>
+              <a:latin typeface="Arial"/>
+            </a:endParaRPr>
+          </a:p>
+          <a:p>
+            <a:pPr algn="ctr">
+              <a:lnSpc>
+                <a:spcPct val="100000"/>
+              </a:lnSpc>
+            </a:pPr>
+            <a:r>
+              <a:rPr b="0" lang="en-US" sz="1000" spc="-1" strike="noStrike">
+                <a:solidFill>
+                  <a:srgbClr val="78ffc8"/>
+                </a:solidFill>
+                <a:latin typeface="Consolas"/>
+                <a:ea typeface="DejaVu Sans"/>
+              </a:rPr>
+              <a:t>        </a:t>
+            </a:r>
+            <a:r>
+              <a:rPr b="0" lang="en-US" sz="1000" spc="-1" strike="noStrike">
+                <a:solidFill>
+                  <a:srgbClr val="78ffc8"/>
+                </a:solidFill>
+                <a:latin typeface="Consolas"/>
+                <a:ea typeface="DejaVu Sans"/>
+              </a:rPr>
+              <a:t>// 1. Assignment Operator</a:t>
+            </a:r>
+            <a:endParaRPr b="0" lang="en-US" sz="1000" spc="-1" strike="noStrike">
+              <a:solidFill>
+                <a:srgbClr val="ffffff"/>
+              </a:solidFill>
+              <a:latin typeface="Arial"/>
+            </a:endParaRPr>
+          </a:p>
+          <a:p>
+            <a:pPr algn="ctr">
+              <a:lnSpc>
+                <a:spcPct val="100000"/>
+              </a:lnSpc>
+            </a:pPr>
+            <a:r>
+              <a:rPr b="0" lang="en-US" sz="1000" spc="-1" strike="noStrike">
+                <a:solidFill>
+                  <a:srgbClr val="78ffc8"/>
+                </a:solidFill>
+                <a:latin typeface="Consolas"/>
+                <a:ea typeface="DejaVu Sans"/>
+              </a:rPr>
+              <a:t>        </a:t>
+            </a:r>
+            <a:r>
+              <a:rPr b="0" lang="en-US" sz="1000" spc="-1" strike="noStrike">
+                <a:solidFill>
+                  <a:srgbClr val="78ffc8"/>
+                </a:solidFill>
+                <a:latin typeface="Consolas"/>
+                <a:ea typeface="DejaVu Sans"/>
+              </a:rPr>
+              <a:t>int a = 15;</a:t>
+            </a:r>
+            <a:endParaRPr b="0" lang="en-US" sz="1000" spc="-1" strike="noStrike">
+              <a:solidFill>
+                <a:srgbClr val="ffffff"/>
+              </a:solidFill>
+              <a:latin typeface="Arial"/>
+            </a:endParaRPr>
+          </a:p>
+          <a:p>
+            <a:pPr algn="ctr">
+              <a:lnSpc>
+                <a:spcPct val="100000"/>
+              </a:lnSpc>
+            </a:pPr>
+            <a:r>
+              <a:rPr b="0" lang="en-US" sz="1000" spc="-1" strike="noStrike">
+                <a:solidFill>
+                  <a:srgbClr val="78ffc8"/>
+                </a:solidFill>
+                <a:latin typeface="Consolas"/>
+                <a:ea typeface="DejaVu Sans"/>
+              </a:rPr>
+              <a:t>        </a:t>
+            </a:r>
+            <a:r>
+              <a:rPr b="0" lang="en-US" sz="1000" spc="-1" strike="noStrike">
+                <a:solidFill>
+                  <a:srgbClr val="78ffc8"/>
+                </a:solidFill>
+                <a:latin typeface="Consolas"/>
+                <a:ea typeface="DejaVu Sans"/>
+              </a:rPr>
+              <a:t>int b = 4;</a:t>
+            </a:r>
+            <a:endParaRPr b="0" lang="en-US" sz="1000" spc="-1" strike="noStrike">
+              <a:solidFill>
+                <a:srgbClr val="ffffff"/>
+              </a:solidFill>
+              <a:latin typeface="Arial"/>
+            </a:endParaRPr>
+          </a:p>
+          <a:p>
+            <a:pPr algn="ctr">
+              <a:lnSpc>
+                <a:spcPct val="100000"/>
+              </a:lnSpc>
+            </a:pPr>
+            <a:r>
+              <a:rPr b="0" lang="en-US" sz="1000" spc="-1" strike="noStrike">
+                <a:solidFill>
+                  <a:srgbClr val="78ffc8"/>
+                </a:solidFill>
+                <a:latin typeface="Consolas"/>
+                <a:ea typeface="DejaVu Sans"/>
+              </a:rPr>
+              <a:t>        </a:t>
+            </a:r>
+            <a:r>
+              <a:rPr b="0" lang="en-US" sz="1000" spc="-1" strike="noStrike">
+                <a:solidFill>
+                  <a:srgbClr val="78ffc8"/>
+                </a:solidFill>
+                <a:latin typeface="Consolas"/>
+                <a:ea typeface="DejaVu Sans"/>
+              </a:rPr>
+              <a:t>// 2. Arithmetic Operators</a:t>
+            </a:r>
+            <a:endParaRPr b="0" lang="en-US" sz="1000" spc="-1" strike="noStrike">
+              <a:solidFill>
+                <a:srgbClr val="ffffff"/>
+              </a:solidFill>
+              <a:latin typeface="Arial"/>
+            </a:endParaRPr>
+          </a:p>
+          <a:p>
+            <a:pPr algn="ctr">
+              <a:lnSpc>
+                <a:spcPct val="100000"/>
+              </a:lnSpc>
+            </a:pPr>
+            <a:r>
+              <a:rPr b="0" lang="en-US" sz="1000" spc="-1" strike="noStrike">
+                <a:solidFill>
+                  <a:srgbClr val="78ffc8"/>
+                </a:solidFill>
+                <a:latin typeface="Consolas"/>
+                <a:ea typeface="DejaVu Sans"/>
+              </a:rPr>
+              <a:t>        </a:t>
+            </a:r>
+            <a:r>
+              <a:rPr b="0" lang="en-US" sz="1000" spc="-1" strike="noStrike">
+                <a:solidFill>
+                  <a:srgbClr val="78ffc8"/>
+                </a:solidFill>
+                <a:latin typeface="Consolas"/>
+                <a:ea typeface="DejaVu Sans"/>
+              </a:rPr>
+              <a:t>int sum = a + b;     // 19</a:t>
+            </a:r>
+            <a:endParaRPr b="0" lang="en-US" sz="1000" spc="-1" strike="noStrike">
+              <a:solidFill>
+                <a:srgbClr val="ffffff"/>
+              </a:solidFill>
+              <a:latin typeface="Arial"/>
+            </a:endParaRPr>
+          </a:p>
+          <a:p>
+            <a:pPr algn="ctr">
+              <a:lnSpc>
+                <a:spcPct val="100000"/>
+              </a:lnSpc>
+            </a:pPr>
+            <a:r>
+              <a:rPr b="0" lang="en-US" sz="1000" spc="-1" strike="noStrike">
+                <a:solidFill>
+                  <a:srgbClr val="78ffc8"/>
+                </a:solidFill>
+                <a:latin typeface="Consolas"/>
+                <a:ea typeface="DejaVu Sans"/>
+              </a:rPr>
+              <a:t>        </a:t>
+            </a:r>
+            <a:r>
+              <a:rPr b="0" lang="en-US" sz="1000" spc="-1" strike="noStrike">
+                <a:solidFill>
+                  <a:srgbClr val="78ffc8"/>
+                </a:solidFill>
+                <a:latin typeface="Consolas"/>
+                <a:ea typeface="DejaVu Sans"/>
+              </a:rPr>
+              <a:t>int remain = a % b;  // 3 (Modulus - remainder)</a:t>
+            </a:r>
+            <a:endParaRPr b="0" lang="en-US" sz="1000" spc="-1" strike="noStrike">
+              <a:solidFill>
+                <a:srgbClr val="ffffff"/>
+              </a:solidFill>
+              <a:latin typeface="Arial"/>
+            </a:endParaRPr>
+          </a:p>
+          <a:p>
+            <a:pPr algn="ctr">
+              <a:lnSpc>
+                <a:spcPct val="100000"/>
+              </a:lnSpc>
+            </a:pPr>
+            <a:r>
+              <a:rPr b="0" lang="en-US" sz="1000" spc="-1" strike="noStrike">
+                <a:solidFill>
+                  <a:srgbClr val="78ffc8"/>
+                </a:solidFill>
+                <a:latin typeface="Consolas"/>
+                <a:ea typeface="DejaVu Sans"/>
+              </a:rPr>
+              <a:t>        </a:t>
+            </a:r>
+            <a:r>
+              <a:rPr b="0" lang="en-US" sz="1000" spc="-1" strike="noStrike">
+                <a:solidFill>
+                  <a:srgbClr val="78ffc8"/>
+                </a:solidFill>
+                <a:latin typeface="Consolas"/>
+                <a:ea typeface="DejaVu Sans"/>
+              </a:rPr>
+              <a:t>// 3. Relational Operators</a:t>
+            </a:r>
+            <a:endParaRPr b="0" lang="en-US" sz="1000" spc="-1" strike="noStrike">
+              <a:solidFill>
+                <a:srgbClr val="ffffff"/>
+              </a:solidFill>
+              <a:latin typeface="Arial"/>
+            </a:endParaRPr>
+          </a:p>
+          <a:p>
+            <a:pPr algn="ctr">
+              <a:lnSpc>
+                <a:spcPct val="100000"/>
+              </a:lnSpc>
+            </a:pPr>
+            <a:r>
+              <a:rPr b="0" lang="en-US" sz="1000" spc="-1" strike="noStrike">
+                <a:solidFill>
+                  <a:srgbClr val="78ffc8"/>
+                </a:solidFill>
+                <a:latin typeface="Consolas"/>
+                <a:ea typeface="DejaVu Sans"/>
+              </a:rPr>
+              <a:t>        </a:t>
+            </a:r>
+            <a:r>
+              <a:rPr b="0" lang="en-US" sz="1000" spc="-1" strike="noStrike">
+                <a:solidFill>
+                  <a:srgbClr val="78ffc8"/>
+                </a:solidFill>
+                <a:latin typeface="Consolas"/>
+                <a:ea typeface="DejaVu Sans"/>
+              </a:rPr>
+              <a:t>boolean isGreater = (a &gt; b); // true</a:t>
+            </a:r>
+            <a:endParaRPr b="0" lang="en-US" sz="1000" spc="-1" strike="noStrike">
+              <a:solidFill>
+                <a:srgbClr val="ffffff"/>
+              </a:solidFill>
+              <a:latin typeface="Arial"/>
+            </a:endParaRPr>
+          </a:p>
+          <a:p>
+            <a:pPr algn="ctr">
+              <a:lnSpc>
+                <a:spcPct val="100000"/>
+              </a:lnSpc>
+            </a:pPr>
+            <a:r>
+              <a:rPr b="0" lang="en-US" sz="1000" spc="-1" strike="noStrike">
+                <a:solidFill>
+                  <a:srgbClr val="78ffc8"/>
+                </a:solidFill>
+                <a:latin typeface="Consolas"/>
+                <a:ea typeface="DejaVu Sans"/>
+              </a:rPr>
+              <a:t>        </a:t>
+            </a:r>
+            <a:r>
+              <a:rPr b="0" lang="en-US" sz="1000" spc="-1" strike="noStrike">
+                <a:solidFill>
+                  <a:srgbClr val="78ffc8"/>
+                </a:solidFill>
+                <a:latin typeface="Consolas"/>
+                <a:ea typeface="DejaVu Sans"/>
+              </a:rPr>
+              <a:t>boolean isEqual = (a == b);  // false</a:t>
+            </a:r>
+            <a:endParaRPr b="0" lang="en-US" sz="1000" spc="-1" strike="noStrike">
+              <a:solidFill>
+                <a:srgbClr val="ffffff"/>
+              </a:solidFill>
+              <a:latin typeface="Arial"/>
+            </a:endParaRPr>
+          </a:p>
+          <a:p>
+            <a:pPr algn="ctr">
+              <a:lnSpc>
+                <a:spcPct val="100000"/>
+              </a:lnSpc>
+            </a:pPr>
+            <a:r>
+              <a:rPr b="0" lang="en-US" sz="1000" spc="-1" strike="noStrike">
+                <a:solidFill>
+                  <a:srgbClr val="78ffc8"/>
+                </a:solidFill>
+                <a:latin typeface="Consolas"/>
+                <a:ea typeface="DejaVu Sans"/>
+              </a:rPr>
+              <a:t>        </a:t>
+            </a:r>
+            <a:r>
+              <a:rPr b="0" lang="en-US" sz="1000" spc="-1" strike="noStrike">
+                <a:solidFill>
+                  <a:srgbClr val="78ffc8"/>
+                </a:solidFill>
+                <a:latin typeface="Consolas"/>
+                <a:ea typeface="DejaVu Sans"/>
+              </a:rPr>
+              <a:t>// 4. Logical Operators</a:t>
+            </a:r>
+            <a:endParaRPr b="0" lang="en-US" sz="1000" spc="-1" strike="noStrike">
+              <a:solidFill>
+                <a:srgbClr val="ffffff"/>
+              </a:solidFill>
+              <a:latin typeface="Arial"/>
+            </a:endParaRPr>
+          </a:p>
+          <a:p>
+            <a:pPr algn="ctr">
+              <a:lnSpc>
+                <a:spcPct val="100000"/>
+              </a:lnSpc>
+            </a:pPr>
+            <a:r>
+              <a:rPr b="0" lang="en-US" sz="1000" spc="-1" strike="noStrike">
+                <a:solidFill>
+                  <a:srgbClr val="78ffc8"/>
+                </a:solidFill>
+                <a:latin typeface="Consolas"/>
+                <a:ea typeface="DejaVu Sans"/>
+              </a:rPr>
+              <a:t>        </a:t>
+            </a:r>
+            <a:r>
+              <a:rPr b="0" lang="en-US" sz="1000" spc="-1" strike="noStrike">
+                <a:solidFill>
+                  <a:srgbClr val="78ffc8"/>
+                </a:solidFill>
+                <a:latin typeface="Consolas"/>
+                <a:ea typeface="DejaVu Sans"/>
+              </a:rPr>
+              <a:t>// "Is 'a' &gt; 10 AND 'b' an even number?"</a:t>
+            </a:r>
+            <a:endParaRPr b="0" lang="en-US" sz="1000" spc="-1" strike="noStrike">
+              <a:solidFill>
+                <a:srgbClr val="ffffff"/>
+              </a:solidFill>
+              <a:latin typeface="Arial"/>
+            </a:endParaRPr>
+          </a:p>
+          <a:p>
+            <a:pPr algn="ctr">
+              <a:lnSpc>
+                <a:spcPct val="100000"/>
+              </a:lnSpc>
+            </a:pPr>
+            <a:r>
+              <a:rPr b="0" lang="en-US" sz="1000" spc="-1" strike="noStrike">
+                <a:solidFill>
+                  <a:srgbClr val="78ffc8"/>
+                </a:solidFill>
+                <a:latin typeface="Consolas"/>
+                <a:ea typeface="DejaVu Sans"/>
+              </a:rPr>
+              <a:t>        </a:t>
+            </a:r>
+            <a:r>
+              <a:rPr b="0" lang="en-US" sz="1000" spc="-1" strike="noStrike">
+                <a:solidFill>
+                  <a:srgbClr val="78ffc8"/>
+                </a:solidFill>
+                <a:latin typeface="Consolas"/>
+                <a:ea typeface="DejaVu Sans"/>
+              </a:rPr>
+              <a:t>boolean result = (a &gt; 10) &amp;&amp; (b % 2 == 0); </a:t>
+            </a:r>
+            <a:endParaRPr b="0" lang="en-US" sz="1000" spc="-1" strike="noStrike">
+              <a:solidFill>
+                <a:srgbClr val="ffffff"/>
+              </a:solidFill>
+              <a:latin typeface="Arial"/>
+            </a:endParaRPr>
+          </a:p>
+          <a:p>
+            <a:pPr algn="ctr">
+              <a:lnSpc>
+                <a:spcPct val="100000"/>
+              </a:lnSpc>
+            </a:pPr>
+            <a:r>
+              <a:rPr b="0" lang="en-US" sz="1000" spc="-1" strike="noStrike">
+                <a:solidFill>
+                  <a:srgbClr val="78ffc8"/>
+                </a:solidFill>
+                <a:latin typeface="Consolas"/>
+                <a:ea typeface="DejaVu Sans"/>
+              </a:rPr>
+              <a:t>        </a:t>
+            </a:r>
+            <a:r>
+              <a:rPr b="0" lang="en-US" sz="1000" spc="-1" strike="noStrike">
+                <a:solidFill>
+                  <a:srgbClr val="78ffc8"/>
+                </a:solidFill>
+                <a:latin typeface="Consolas"/>
+                <a:ea typeface="DejaVu Sans"/>
+              </a:rPr>
+              <a:t>System.out.println("Sum: " + sum);</a:t>
+            </a:r>
+            <a:endParaRPr b="0" lang="en-US" sz="1000" spc="-1" strike="noStrike">
+              <a:solidFill>
+                <a:srgbClr val="ffffff"/>
+              </a:solidFill>
+              <a:latin typeface="Arial"/>
+            </a:endParaRPr>
+          </a:p>
+          <a:p>
+            <a:pPr algn="ctr">
+              <a:lnSpc>
+                <a:spcPct val="100000"/>
+              </a:lnSpc>
+            </a:pPr>
+            <a:r>
+              <a:rPr b="0" lang="en-US" sz="1000" spc="-1" strike="noStrike">
+                <a:solidFill>
+                  <a:srgbClr val="78ffc8"/>
+                </a:solidFill>
+                <a:latin typeface="Consolas"/>
+                <a:ea typeface="DejaVu Sans"/>
+              </a:rPr>
+              <a:t>        </a:t>
+            </a:r>
+            <a:r>
+              <a:rPr b="0" lang="en-US" sz="1000" spc="-1" strike="noStrike">
+                <a:solidFill>
+                  <a:srgbClr val="78ffc8"/>
+                </a:solidFill>
+                <a:latin typeface="Consolas"/>
+                <a:ea typeface="DejaVu Sans"/>
+              </a:rPr>
+              <a:t>System.out.println("Remainder: " + remain);</a:t>
+            </a:r>
+            <a:endParaRPr b="0" lang="en-US" sz="1000" spc="-1" strike="noStrike">
+              <a:solidFill>
+                <a:srgbClr val="ffffff"/>
+              </a:solidFill>
+              <a:latin typeface="Arial"/>
+            </a:endParaRPr>
+          </a:p>
+          <a:p>
+            <a:pPr algn="ctr">
+              <a:lnSpc>
+                <a:spcPct val="100000"/>
+              </a:lnSpc>
+            </a:pPr>
+            <a:r>
+              <a:rPr b="0" lang="en-US" sz="1000" spc="-1" strike="noStrike">
+                <a:solidFill>
+                  <a:srgbClr val="78ffc8"/>
+                </a:solidFill>
+                <a:latin typeface="Consolas"/>
+                <a:ea typeface="DejaVu Sans"/>
+              </a:rPr>
+              <a:t>        </a:t>
+            </a:r>
+            <a:r>
+              <a:rPr b="0" lang="en-US" sz="1000" spc="-1" strike="noStrike">
+                <a:solidFill>
+                  <a:srgbClr val="78ffc8"/>
+                </a:solidFill>
+                <a:latin typeface="Consolas"/>
+                <a:ea typeface="DejaVu Sans"/>
+              </a:rPr>
+              <a:t>System.out.println("Logical Result: " + result);</a:t>
+            </a:r>
+            <a:endParaRPr b="0" lang="en-US" sz="1000" spc="-1" strike="noStrike">
+              <a:solidFill>
+                <a:srgbClr val="ffffff"/>
+              </a:solidFill>
+              <a:latin typeface="Arial"/>
+            </a:endParaRPr>
+          </a:p>
+          <a:p>
+            <a:pPr algn="ctr">
+              <a:lnSpc>
+                <a:spcPct val="100000"/>
+              </a:lnSpc>
+            </a:pPr>
+            <a:r>
+              <a:rPr b="0" lang="en-US" sz="1000" spc="-1" strike="noStrike">
+                <a:solidFill>
+                  <a:srgbClr val="78ffc8"/>
+                </a:solidFill>
+                <a:latin typeface="Consolas"/>
+                <a:ea typeface="DejaVu Sans"/>
+              </a:rPr>
+              <a:t>    </a:t>
+            </a:r>
+            <a:r>
+              <a:rPr b="0" lang="en-US" sz="1000" spc="-1" strike="noStrike">
+                <a:solidFill>
+                  <a:srgbClr val="78ffc8"/>
+                </a:solidFill>
+                <a:latin typeface="Consolas"/>
+                <a:ea typeface="DejaVu Sans"/>
+              </a:rPr>
+              <a:t>}</a:t>
+            </a:r>
+            <a:endParaRPr b="0" lang="en-US" sz="1000" spc="-1" strike="noStrike">
+              <a:solidFill>
+                <a:srgbClr val="ffffff"/>
+              </a:solidFill>
+              <a:latin typeface="Arial"/>
+            </a:endParaRPr>
+          </a:p>
+          <a:p>
+            <a:pPr algn="ctr">
+              <a:lnSpc>
+                <a:spcPct val="100000"/>
+              </a:lnSpc>
+            </a:pPr>
+            <a:r>
+              <a:rPr b="0" lang="en-US" sz="1000" spc="-1" strike="noStrike">
+                <a:solidFill>
+                  <a:srgbClr val="78ffc8"/>
+                </a:solidFill>
+                <a:latin typeface="Consolas"/>
+                <a:ea typeface="DejaVu Sans"/>
+              </a:rPr>
+              <a:t>}</a:t>
+            </a:r>
+            <a:endParaRPr b="0" lang="en-US" sz="1000" spc="-1" strike="noStrike">
+              <a:solidFill>
+                <a:srgbClr val="ffffff"/>
+              </a:solidFill>
+              <a:latin typeface="Arial"/>
+            </a:endParaRPr>
+          </a:p>
+        </p:txBody>
+      </p:sp>
+      <p:sp>
+        <p:nvSpPr>
+          <p:cNvPr id="248" name="TextBox 27"/>
           <p:cNvSpPr/>
           <p:nvPr/>
         </p:nvSpPr>

--- a/Java/Java #4/EN/Java #4.pptx
+++ b/Java/Java #4/EN/Java #4.pptx
@@ -13,6 +13,7 @@
     <p:sldId id="261" r:id="rId8"/>
     <p:sldId id="262" r:id="rId9"/>
     <p:sldId id="263" r:id="rId10"/>
+    <p:sldId id="264" r:id="rId11"/>
   </p:sldIdLst>
   <p:sldSz cx="9144000" cy="6858000"/>
   <p:notesSz cx="7772400" cy="10058400"/>
@@ -70,7 +71,7 @@
         <p:txBody>
           <a:bodyPr/>
           <a:p>
-            <a:fld id="{E60A9340-DDEE-44AC-A57D-B37723548C57}" type="slidenum">
+            <a:fld id="{22CD7935-3A16-4678-956B-DA3E8907E1E1}" type="slidenum">
               <a:t>&lt;#&gt;</a:t>
             </a:fld>
           </a:p>
@@ -279,7 +280,7 @@
         <p:txBody>
           <a:bodyPr/>
           <a:p>
-            <a:fld id="{2875B22C-DA32-43F4-A64A-612E7A5659DB}" type="slidenum">
+            <a:fld id="{349DD0EA-2B33-401F-A7C9-36A3B9B1AD6A}" type="slidenum">
               <a:t>&lt;#&gt;</a:t>
             </a:fld>
           </a:p>
@@ -574,7 +575,7 @@
         <p:txBody>
           <a:bodyPr/>
           <a:p>
-            <a:fld id="{033A92B1-D46D-436D-AAAE-4DBB42D5E542}" type="slidenum">
+            <a:fld id="{B7EAD84E-F8E6-4787-A9A2-4A9F123A8D95}" type="slidenum">
               <a:t>&lt;#&gt;</a:t>
             </a:fld>
           </a:p>
@@ -955,7 +956,7 @@
         <p:txBody>
           <a:bodyPr/>
           <a:p>
-            <a:fld id="{98393E42-C1C6-40BC-9DE2-A6D15435A198}" type="slidenum">
+            <a:fld id="{1293499C-2518-480E-AF62-19AC537E6066}" type="slidenum">
               <a:t>&lt;#&gt;</a:t>
             </a:fld>
           </a:p>
@@ -1118,7 +1119,7 @@
         <p:txBody>
           <a:bodyPr/>
           <a:p>
-            <a:fld id="{18130314-F44B-425C-8B7A-460DD2919180}" type="slidenum">
+            <a:fld id="{097CCA2F-E283-4071-8F1A-18CDEE3444AE}" type="slidenum">
               <a:t>&lt;#&gt;</a:t>
             </a:fld>
           </a:p>
@@ -1284,7 +1285,7 @@
         <p:txBody>
           <a:bodyPr/>
           <a:p>
-            <a:fld id="{A2AB3CD6-32C4-4FDF-ADEE-96F37703DEAA}" type="slidenum">
+            <a:fld id="{2FCB82FD-6926-4716-A259-1BC7482DE2BF}" type="slidenum">
               <a:t>&lt;#&gt;</a:t>
             </a:fld>
           </a:p>
@@ -1493,7 +1494,7 @@
         <p:txBody>
           <a:bodyPr/>
           <a:p>
-            <a:fld id="{38ACF589-0D3F-48D2-87A4-5EF5C6F8F325}" type="slidenum">
+            <a:fld id="{DAABD296-C21E-4453-AFEC-79D00A44DA41}" type="slidenum">
               <a:t>&lt;#&gt;</a:t>
             </a:fld>
           </a:p>
@@ -1616,7 +1617,7 @@
         <p:txBody>
           <a:bodyPr/>
           <a:p>
-            <a:fld id="{26C82B7C-91A8-479C-82AE-926F897B6F28}" type="slidenum">
+            <a:fld id="{E9C8815C-7ED9-4058-A4DA-35FB35CDC4F1}" type="slidenum">
               <a:t>&lt;#&gt;</a:t>
             </a:fld>
           </a:p>
@@ -1737,7 +1738,7 @@
         <p:txBody>
           <a:bodyPr/>
           <a:p>
-            <a:fld id="{48CD93A9-CB1C-4C58-A034-C412AEE407E2}" type="slidenum">
+            <a:fld id="{0C0B13F9-19F7-4025-832E-1EFB0603D43F}" type="slidenum">
               <a:t>&lt;#&gt;</a:t>
             </a:fld>
           </a:p>
@@ -1989,7 +1990,7 @@
         <p:txBody>
           <a:bodyPr/>
           <a:p>
-            <a:fld id="{7E1DA97E-106B-478B-890F-4ECDCD6011D1}" type="slidenum">
+            <a:fld id="{7229F33F-FF5F-4027-B581-89EE7FB11148}" type="slidenum">
               <a:t>&lt;#&gt;</a:t>
             </a:fld>
           </a:p>
@@ -2241,7 +2242,7 @@
         <p:txBody>
           <a:bodyPr/>
           <a:p>
-            <a:fld id="{961742D8-644F-4A7D-8F31-9B10CF75BA6E}" type="slidenum">
+            <a:fld id="{3AE986E7-F055-45B3-8F56-059E022F4FD4}" type="slidenum">
               <a:t>&lt;#&gt;</a:t>
             </a:fld>
           </a:p>
@@ -2493,7 +2494,7 @@
         <p:txBody>
           <a:bodyPr/>
           <a:p>
-            <a:fld id="{94546998-E52A-448E-B4AB-F872EC5331A9}" type="slidenum">
+            <a:fld id="{9F7E6E72-F823-41D5-9432-3F9D7E2CB883}" type="slidenum">
               <a:t>&lt;#&gt;</a:t>
             </a:fld>
           </a:p>
@@ -2562,7 +2563,7 @@
         <p:spPr>
           <a:xfrm>
             <a:off x="3124080" y="6356520"/>
-            <a:ext cx="2891880" cy="361440"/>
+            <a:ext cx="2891520" cy="361080"/>
           </a:xfrm>
           <a:prstGeom prst="rect">
             <a:avLst/>
@@ -2634,7 +2635,7 @@
         <p:spPr>
           <a:xfrm>
             <a:off x="6553080" y="6356520"/>
-            <a:ext cx="2130120" cy="361440"/>
+            <a:ext cx="2129760" cy="361080"/>
           </a:xfrm>
           <a:prstGeom prst="rect">
             <a:avLst/>
@@ -2675,7 +2676,7 @@
                 <a:tab algn="l" pos="0"/>
               </a:tabLst>
             </a:pPr>
-            <a:fld id="{6FC2C9B8-34B1-4E39-B7C1-533509606650}" type="slidenum">
+            <a:fld id="{8B14188A-A0D4-4ED7-8733-444220C84E72}" type="slidenum">
               <a:rPr b="0" lang="en-US" sz="1200" spc="-1" strike="noStrike">
                 <a:solidFill>
                   <a:srgbClr val="8b8b8b"/>
@@ -2706,7 +2707,7 @@
         <p:spPr>
           <a:xfrm>
             <a:off x="457200" y="6356520"/>
-            <a:ext cx="2130120" cy="361440"/>
+            <a:ext cx="2129760" cy="361080"/>
           </a:xfrm>
           <a:prstGeom prst="rect">
             <a:avLst/>
@@ -3073,7 +3074,7 @@
         <p:spPr>
           <a:xfrm>
             <a:off x="0" y="0"/>
-            <a:ext cx="12185280" cy="6854400"/>
+            <a:ext cx="12184920" cy="6854040"/>
           </a:xfrm>
           <a:prstGeom prst="rect">
             <a:avLst/>
@@ -3133,7 +3134,7 @@
         <p:spPr>
           <a:xfrm>
             <a:off x="0" y="0"/>
-            <a:ext cx="14760" cy="6854400"/>
+            <a:ext cx="14400" cy="6854040"/>
           </a:xfrm>
           <a:prstGeom prst="rect">
             <a:avLst/>
@@ -3193,7 +3194,7 @@
         <p:spPr>
           <a:xfrm>
             <a:off x="914400" y="0"/>
-            <a:ext cx="14760" cy="6854400"/>
+            <a:ext cx="14400" cy="6854040"/>
           </a:xfrm>
           <a:prstGeom prst="rect">
             <a:avLst/>
@@ -3253,7 +3254,7 @@
         <p:spPr>
           <a:xfrm>
             <a:off x="1828800" y="0"/>
-            <a:ext cx="14760" cy="6854400"/>
+            <a:ext cx="14400" cy="6854040"/>
           </a:xfrm>
           <a:prstGeom prst="rect">
             <a:avLst/>
@@ -3313,7 +3314,7 @@
         <p:spPr>
           <a:xfrm>
             <a:off x="2743200" y="0"/>
-            <a:ext cx="14760" cy="6854400"/>
+            <a:ext cx="14400" cy="6854040"/>
           </a:xfrm>
           <a:prstGeom prst="rect">
             <a:avLst/>
@@ -3373,7 +3374,7 @@
         <p:spPr>
           <a:xfrm>
             <a:off x="3657600" y="0"/>
-            <a:ext cx="14760" cy="6854400"/>
+            <a:ext cx="14400" cy="6854040"/>
           </a:xfrm>
           <a:prstGeom prst="rect">
             <a:avLst/>
@@ -3433,7 +3434,7 @@
         <p:spPr>
           <a:xfrm>
             <a:off x="4572000" y="0"/>
-            <a:ext cx="14760" cy="6854400"/>
+            <a:ext cx="14400" cy="6854040"/>
           </a:xfrm>
           <a:prstGeom prst="rect">
             <a:avLst/>
@@ -3493,7 +3494,7 @@
         <p:spPr>
           <a:xfrm>
             <a:off x="5486400" y="0"/>
-            <a:ext cx="14760" cy="6854400"/>
+            <a:ext cx="14400" cy="6854040"/>
           </a:xfrm>
           <a:prstGeom prst="rect">
             <a:avLst/>
@@ -3553,7 +3554,7 @@
         <p:spPr>
           <a:xfrm>
             <a:off x="6400800" y="0"/>
-            <a:ext cx="14760" cy="6854400"/>
+            <a:ext cx="14400" cy="6854040"/>
           </a:xfrm>
           <a:prstGeom prst="rect">
             <a:avLst/>
@@ -3613,7 +3614,7 @@
         <p:spPr>
           <a:xfrm>
             <a:off x="7315200" y="0"/>
-            <a:ext cx="14760" cy="6854400"/>
+            <a:ext cx="14400" cy="6854040"/>
           </a:xfrm>
           <a:prstGeom prst="rect">
             <a:avLst/>
@@ -3673,7 +3674,7 @@
         <p:spPr>
           <a:xfrm>
             <a:off x="8229600" y="0"/>
-            <a:ext cx="14760" cy="6854400"/>
+            <a:ext cx="14400" cy="6854040"/>
           </a:xfrm>
           <a:prstGeom prst="rect">
             <a:avLst/>
@@ -3733,7 +3734,7 @@
         <p:spPr>
           <a:xfrm>
             <a:off x="9144000" y="0"/>
-            <a:ext cx="14760" cy="6854400"/>
+            <a:ext cx="14400" cy="6854040"/>
           </a:xfrm>
           <a:prstGeom prst="rect">
             <a:avLst/>
@@ -3793,7 +3794,7 @@
         <p:spPr>
           <a:xfrm>
             <a:off x="10058400" y="0"/>
-            <a:ext cx="14760" cy="6854400"/>
+            <a:ext cx="14400" cy="6854040"/>
           </a:xfrm>
           <a:prstGeom prst="rect">
             <a:avLst/>
@@ -3853,7 +3854,7 @@
         <p:spPr>
           <a:xfrm>
             <a:off x="10972800" y="0"/>
-            <a:ext cx="14760" cy="6854400"/>
+            <a:ext cx="14400" cy="6854040"/>
           </a:xfrm>
           <a:prstGeom prst="rect">
             <a:avLst/>
@@ -3913,7 +3914,7 @@
         <p:spPr>
           <a:xfrm>
             <a:off x="11887200" y="0"/>
-            <a:ext cx="14760" cy="6854400"/>
+            <a:ext cx="14400" cy="6854040"/>
           </a:xfrm>
           <a:prstGeom prst="rect">
             <a:avLst/>
@@ -3973,7 +3974,7 @@
         <p:spPr>
           <a:xfrm>
             <a:off x="0" y="0"/>
-            <a:ext cx="316440" cy="6854400"/>
+            <a:ext cx="316080" cy="6854040"/>
           </a:xfrm>
           <a:prstGeom prst="rect">
             <a:avLst/>
@@ -4033,7 +4034,7 @@
         <p:spPr>
           <a:xfrm>
             <a:off x="9875520" y="365760"/>
-            <a:ext cx="2008080" cy="499320"/>
+            <a:ext cx="2007720" cy="498960"/>
           </a:xfrm>
           <a:prstGeom prst="roundRect">
             <a:avLst>
@@ -4261,7 +4262,7 @@
         <p:spPr>
           <a:xfrm>
             <a:off x="987480" y="3182040"/>
-            <a:ext cx="3288240" cy="2739600"/>
+            <a:ext cx="3287880" cy="2739240"/>
           </a:xfrm>
           <a:prstGeom prst="roundRect">
             <a:avLst>
@@ -4323,7 +4324,7 @@
         <p:spPr>
           <a:xfrm>
             <a:off x="914400" y="3108960"/>
-            <a:ext cx="3288240" cy="2739600"/>
+            <a:ext cx="3287880" cy="2739240"/>
           </a:xfrm>
           <a:prstGeom prst="roundRect">
             <a:avLst>
@@ -4457,7 +4458,7 @@
         <p:spPr>
           <a:xfrm>
             <a:off x="4507920" y="3182040"/>
-            <a:ext cx="3288240" cy="2739600"/>
+            <a:ext cx="3287880" cy="2739240"/>
           </a:xfrm>
           <a:prstGeom prst="roundRect">
             <a:avLst>
@@ -4519,7 +4520,7 @@
         <p:spPr>
           <a:xfrm>
             <a:off x="4434840" y="3108960"/>
-            <a:ext cx="3288240" cy="2739600"/>
+            <a:ext cx="3287880" cy="2739240"/>
           </a:xfrm>
           <a:prstGeom prst="roundRect">
             <a:avLst>
@@ -4777,7 +4778,7 @@
         <p:spPr>
           <a:xfrm>
             <a:off x="8028360" y="3182040"/>
-            <a:ext cx="3288240" cy="2739600"/>
+            <a:ext cx="3287880" cy="2739240"/>
           </a:xfrm>
           <a:prstGeom prst="roundRect">
             <a:avLst>
@@ -4839,7 +4840,7 @@
         <p:spPr>
           <a:xfrm>
             <a:off x="7955280" y="2971800"/>
-            <a:ext cx="3929400" cy="3655080"/>
+            <a:ext cx="3929040" cy="3654720"/>
           </a:xfrm>
           <a:prstGeom prst="roundRect">
             <a:avLst>
@@ -5350,7 +5351,7 @@
         <p:spPr>
           <a:xfrm>
             <a:off x="0" y="0"/>
-            <a:ext cx="12185640" cy="6854760"/>
+            <a:ext cx="12185280" cy="6854400"/>
           </a:xfrm>
           <a:prstGeom prst="rect">
             <a:avLst/>
@@ -5410,7 +5411,7 @@
         <p:spPr>
           <a:xfrm>
             <a:off x="0" y="0"/>
-            <a:ext cx="15120" cy="6854760"/>
+            <a:ext cx="14760" cy="6854400"/>
           </a:xfrm>
           <a:prstGeom prst="rect">
             <a:avLst/>
@@ -5470,7 +5471,7 @@
         <p:spPr>
           <a:xfrm>
             <a:off x="914400" y="0"/>
-            <a:ext cx="15120" cy="6854760"/>
+            <a:ext cx="14760" cy="6854400"/>
           </a:xfrm>
           <a:prstGeom prst="rect">
             <a:avLst/>
@@ -5530,7 +5531,7 @@
         <p:spPr>
           <a:xfrm>
             <a:off x="1828800" y="0"/>
-            <a:ext cx="15120" cy="6854760"/>
+            <a:ext cx="14760" cy="6854400"/>
           </a:xfrm>
           <a:prstGeom prst="rect">
             <a:avLst/>
@@ -5590,7 +5591,7 @@
         <p:spPr>
           <a:xfrm>
             <a:off x="2743200" y="0"/>
-            <a:ext cx="15120" cy="6854760"/>
+            <a:ext cx="14760" cy="6854400"/>
           </a:xfrm>
           <a:prstGeom prst="rect">
             <a:avLst/>
@@ -5650,7 +5651,7 @@
         <p:spPr>
           <a:xfrm>
             <a:off x="3657600" y="0"/>
-            <a:ext cx="15120" cy="6854760"/>
+            <a:ext cx="14760" cy="6854400"/>
           </a:xfrm>
           <a:prstGeom prst="rect">
             <a:avLst/>
@@ -5710,7 +5711,7 @@
         <p:spPr>
           <a:xfrm>
             <a:off x="4572000" y="0"/>
-            <a:ext cx="15120" cy="6854760"/>
+            <a:ext cx="14760" cy="6854400"/>
           </a:xfrm>
           <a:prstGeom prst="rect">
             <a:avLst/>
@@ -5770,7 +5771,7 @@
         <p:spPr>
           <a:xfrm>
             <a:off x="5486400" y="0"/>
-            <a:ext cx="15120" cy="6854760"/>
+            <a:ext cx="14760" cy="6854400"/>
           </a:xfrm>
           <a:prstGeom prst="rect">
             <a:avLst/>
@@ -5830,7 +5831,7 @@
         <p:spPr>
           <a:xfrm>
             <a:off x="6400800" y="0"/>
-            <a:ext cx="15120" cy="6854760"/>
+            <a:ext cx="14760" cy="6854400"/>
           </a:xfrm>
           <a:prstGeom prst="rect">
             <a:avLst/>
@@ -5890,7 +5891,7 @@
         <p:spPr>
           <a:xfrm>
             <a:off x="7315200" y="0"/>
-            <a:ext cx="15120" cy="6854760"/>
+            <a:ext cx="14760" cy="6854400"/>
           </a:xfrm>
           <a:prstGeom prst="rect">
             <a:avLst/>
@@ -5950,7 +5951,7 @@
         <p:spPr>
           <a:xfrm>
             <a:off x="8229600" y="0"/>
-            <a:ext cx="15120" cy="6854760"/>
+            <a:ext cx="14760" cy="6854400"/>
           </a:xfrm>
           <a:prstGeom prst="rect">
             <a:avLst/>
@@ -6010,7 +6011,7 @@
         <p:spPr>
           <a:xfrm>
             <a:off x="9144000" y="0"/>
-            <a:ext cx="15120" cy="6854760"/>
+            <a:ext cx="14760" cy="6854400"/>
           </a:xfrm>
           <a:prstGeom prst="rect">
             <a:avLst/>
@@ -6070,7 +6071,7 @@
         <p:spPr>
           <a:xfrm>
             <a:off x="10058400" y="0"/>
-            <a:ext cx="15120" cy="6854760"/>
+            <a:ext cx="14760" cy="6854400"/>
           </a:xfrm>
           <a:prstGeom prst="rect">
             <a:avLst/>
@@ -6130,7 +6131,7 @@
         <p:spPr>
           <a:xfrm>
             <a:off x="10972800" y="0"/>
-            <a:ext cx="15120" cy="6854760"/>
+            <a:ext cx="14760" cy="6854400"/>
           </a:xfrm>
           <a:prstGeom prst="rect">
             <a:avLst/>
@@ -6190,7 +6191,7 @@
         <p:spPr>
           <a:xfrm>
             <a:off x="11887200" y="0"/>
-            <a:ext cx="15120" cy="6854760"/>
+            <a:ext cx="14760" cy="6854400"/>
           </a:xfrm>
           <a:prstGeom prst="rect">
             <a:avLst/>
@@ -6250,7 +6251,7 @@
         <p:spPr>
           <a:xfrm>
             <a:off x="0" y="0"/>
-            <a:ext cx="316800" cy="6854760"/>
+            <a:ext cx="316440" cy="6854400"/>
           </a:xfrm>
           <a:prstGeom prst="rect">
             <a:avLst/>
@@ -6310,7 +6311,7 @@
         <p:spPr>
           <a:xfrm>
             <a:off x="9875520" y="365760"/>
-            <a:ext cx="2008440" cy="499680"/>
+            <a:ext cx="2008080" cy="499320"/>
           </a:xfrm>
           <a:prstGeom prst="roundRect">
             <a:avLst>
@@ -6538,7 +6539,7 @@
         <p:spPr>
           <a:xfrm>
             <a:off x="987480" y="3182040"/>
-            <a:ext cx="3288600" cy="2739960"/>
+            <a:ext cx="3288240" cy="2739600"/>
           </a:xfrm>
           <a:prstGeom prst="roundRect">
             <a:avLst>
@@ -6600,7 +6601,7 @@
         <p:spPr>
           <a:xfrm>
             <a:off x="914400" y="3108960"/>
-            <a:ext cx="3288600" cy="3061080"/>
+            <a:ext cx="3288240" cy="3060720"/>
           </a:xfrm>
           <a:prstGeom prst="roundRect">
             <a:avLst>
@@ -6763,7 +6764,7 @@
         <p:spPr>
           <a:xfrm>
             <a:off x="4507920" y="3182040"/>
-            <a:ext cx="3288600" cy="2739960"/>
+            <a:ext cx="3288240" cy="2739600"/>
           </a:xfrm>
           <a:prstGeom prst="roundRect">
             <a:avLst>
@@ -6825,7 +6826,7 @@
         <p:spPr>
           <a:xfrm>
             <a:off x="4434840" y="2971800"/>
-            <a:ext cx="3288600" cy="3426840"/>
+            <a:ext cx="3288240" cy="3426480"/>
           </a:xfrm>
           <a:prstGeom prst="roundRect">
             <a:avLst>
@@ -7083,7 +7084,7 @@
         <p:spPr>
           <a:xfrm>
             <a:off x="8028360" y="3182040"/>
-            <a:ext cx="3288600" cy="2739960"/>
+            <a:ext cx="3288240" cy="2739600"/>
           </a:xfrm>
           <a:prstGeom prst="roundRect">
             <a:avLst>
@@ -7145,7 +7146,7 @@
         <p:spPr>
           <a:xfrm>
             <a:off x="7955280" y="3108960"/>
-            <a:ext cx="3701160" cy="3061080"/>
+            <a:ext cx="3700800" cy="3060720"/>
           </a:xfrm>
           <a:prstGeom prst="roundRect">
             <a:avLst>
@@ -7590,7 +7591,7 @@
         <p:spPr>
           <a:xfrm>
             <a:off x="0" y="0"/>
-            <a:ext cx="12185640" cy="6854760"/>
+            <a:ext cx="12185280" cy="6854400"/>
           </a:xfrm>
           <a:prstGeom prst="rect">
             <a:avLst/>
@@ -7650,7 +7651,7 @@
         <p:spPr>
           <a:xfrm>
             <a:off x="0" y="0"/>
-            <a:ext cx="15120" cy="6854760"/>
+            <a:ext cx="14760" cy="6854400"/>
           </a:xfrm>
           <a:prstGeom prst="rect">
             <a:avLst/>
@@ -7710,7 +7711,7 @@
         <p:spPr>
           <a:xfrm>
             <a:off x="914400" y="0"/>
-            <a:ext cx="15120" cy="6854760"/>
+            <a:ext cx="14760" cy="6854400"/>
           </a:xfrm>
           <a:prstGeom prst="rect">
             <a:avLst/>
@@ -7770,7 +7771,7 @@
         <p:spPr>
           <a:xfrm>
             <a:off x="1828800" y="0"/>
-            <a:ext cx="15120" cy="6854760"/>
+            <a:ext cx="14760" cy="6854400"/>
           </a:xfrm>
           <a:prstGeom prst="rect">
             <a:avLst/>
@@ -7830,7 +7831,7 @@
         <p:spPr>
           <a:xfrm>
             <a:off x="2743200" y="0"/>
-            <a:ext cx="15120" cy="6854760"/>
+            <a:ext cx="14760" cy="6854400"/>
           </a:xfrm>
           <a:prstGeom prst="rect">
             <a:avLst/>
@@ -7890,7 +7891,7 @@
         <p:spPr>
           <a:xfrm>
             <a:off x="3657600" y="0"/>
-            <a:ext cx="15120" cy="6854760"/>
+            <a:ext cx="14760" cy="6854400"/>
           </a:xfrm>
           <a:prstGeom prst="rect">
             <a:avLst/>
@@ -7950,7 +7951,7 @@
         <p:spPr>
           <a:xfrm>
             <a:off x="4572000" y="0"/>
-            <a:ext cx="15120" cy="6854760"/>
+            <a:ext cx="14760" cy="6854400"/>
           </a:xfrm>
           <a:prstGeom prst="rect">
             <a:avLst/>
@@ -8010,7 +8011,7 @@
         <p:spPr>
           <a:xfrm>
             <a:off x="5486400" y="0"/>
-            <a:ext cx="15120" cy="6854760"/>
+            <a:ext cx="14760" cy="6854400"/>
           </a:xfrm>
           <a:prstGeom prst="rect">
             <a:avLst/>
@@ -8070,7 +8071,7 @@
         <p:spPr>
           <a:xfrm>
             <a:off x="6400800" y="0"/>
-            <a:ext cx="15120" cy="6854760"/>
+            <a:ext cx="14760" cy="6854400"/>
           </a:xfrm>
           <a:prstGeom prst="rect">
             <a:avLst/>
@@ -8130,7 +8131,7 @@
         <p:spPr>
           <a:xfrm>
             <a:off x="7315200" y="0"/>
-            <a:ext cx="15120" cy="6854760"/>
+            <a:ext cx="14760" cy="6854400"/>
           </a:xfrm>
           <a:prstGeom prst="rect">
             <a:avLst/>
@@ -8190,7 +8191,7 @@
         <p:spPr>
           <a:xfrm>
             <a:off x="8229600" y="0"/>
-            <a:ext cx="15120" cy="6854760"/>
+            <a:ext cx="14760" cy="6854400"/>
           </a:xfrm>
           <a:prstGeom prst="rect">
             <a:avLst/>
@@ -8250,7 +8251,7 @@
         <p:spPr>
           <a:xfrm>
             <a:off x="9144000" y="0"/>
-            <a:ext cx="15120" cy="6854760"/>
+            <a:ext cx="14760" cy="6854400"/>
           </a:xfrm>
           <a:prstGeom prst="rect">
             <a:avLst/>
@@ -8310,7 +8311,7 @@
         <p:spPr>
           <a:xfrm>
             <a:off x="10058400" y="0"/>
-            <a:ext cx="15120" cy="6854760"/>
+            <a:ext cx="14760" cy="6854400"/>
           </a:xfrm>
           <a:prstGeom prst="rect">
             <a:avLst/>
@@ -8370,7 +8371,7 @@
         <p:spPr>
           <a:xfrm>
             <a:off x="10972800" y="0"/>
-            <a:ext cx="15120" cy="6854760"/>
+            <a:ext cx="14760" cy="6854400"/>
           </a:xfrm>
           <a:prstGeom prst="rect">
             <a:avLst/>
@@ -8430,7 +8431,7 @@
         <p:spPr>
           <a:xfrm>
             <a:off x="11887200" y="0"/>
-            <a:ext cx="15120" cy="6854760"/>
+            <a:ext cx="14760" cy="6854400"/>
           </a:xfrm>
           <a:prstGeom prst="rect">
             <a:avLst/>
@@ -8490,7 +8491,7 @@
         <p:spPr>
           <a:xfrm>
             <a:off x="0" y="0"/>
-            <a:ext cx="316800" cy="6854760"/>
+            <a:ext cx="316440" cy="6854400"/>
           </a:xfrm>
           <a:prstGeom prst="rect">
             <a:avLst/>
@@ -8550,7 +8551,7 @@
         <p:spPr>
           <a:xfrm>
             <a:off x="9875520" y="365760"/>
-            <a:ext cx="2008440" cy="499680"/>
+            <a:ext cx="2008080" cy="499320"/>
           </a:xfrm>
           <a:prstGeom prst="roundRect">
             <a:avLst>
@@ -8778,7 +8779,7 @@
         <p:spPr>
           <a:xfrm>
             <a:off x="987480" y="3182040"/>
-            <a:ext cx="3288600" cy="2739960"/>
+            <a:ext cx="3288240" cy="2739600"/>
           </a:xfrm>
           <a:prstGeom prst="roundRect">
             <a:avLst>
@@ -8840,7 +8841,7 @@
         <p:spPr>
           <a:xfrm>
             <a:off x="685800" y="2971800"/>
-            <a:ext cx="3517200" cy="3198240"/>
+            <a:ext cx="3516840" cy="3197880"/>
           </a:xfrm>
           <a:prstGeom prst="roundRect">
             <a:avLst>
@@ -9031,7 +9032,7 @@
         <p:spPr>
           <a:xfrm>
             <a:off x="4507920" y="3182040"/>
-            <a:ext cx="3288600" cy="2739960"/>
+            <a:ext cx="3288240" cy="2739600"/>
           </a:xfrm>
           <a:prstGeom prst="roundRect">
             <a:avLst>
@@ -9093,7 +9094,7 @@
         <p:spPr>
           <a:xfrm>
             <a:off x="4434840" y="2971800"/>
-            <a:ext cx="3288600" cy="3426840"/>
+            <a:ext cx="3288240" cy="3426480"/>
           </a:xfrm>
           <a:prstGeom prst="roundRect">
             <a:avLst>
@@ -9351,7 +9352,7 @@
         <p:spPr>
           <a:xfrm>
             <a:off x="8028360" y="3182040"/>
-            <a:ext cx="3288600" cy="2739960"/>
+            <a:ext cx="3288240" cy="2739600"/>
           </a:xfrm>
           <a:prstGeom prst="roundRect">
             <a:avLst>
@@ -9413,7 +9414,7 @@
         <p:spPr>
           <a:xfrm>
             <a:off x="7955280" y="3108960"/>
-            <a:ext cx="3701160" cy="3061080"/>
+            <a:ext cx="3700800" cy="3060720"/>
           </a:xfrm>
           <a:prstGeom prst="roundRect">
             <a:avLst>
@@ -9858,7 +9859,7 @@
         <p:spPr>
           <a:xfrm>
             <a:off x="0" y="0"/>
-            <a:ext cx="12185640" cy="6854760"/>
+            <a:ext cx="12185280" cy="6854400"/>
           </a:xfrm>
           <a:prstGeom prst="rect">
             <a:avLst/>
@@ -9918,7 +9919,7 @@
         <p:spPr>
           <a:xfrm>
             <a:off x="0" y="0"/>
-            <a:ext cx="15120" cy="6854760"/>
+            <a:ext cx="14760" cy="6854400"/>
           </a:xfrm>
           <a:prstGeom prst="rect">
             <a:avLst/>
@@ -9978,7 +9979,7 @@
         <p:spPr>
           <a:xfrm>
             <a:off x="914400" y="0"/>
-            <a:ext cx="15120" cy="6854760"/>
+            <a:ext cx="14760" cy="6854400"/>
           </a:xfrm>
           <a:prstGeom prst="rect">
             <a:avLst/>
@@ -10038,7 +10039,7 @@
         <p:spPr>
           <a:xfrm>
             <a:off x="1828800" y="0"/>
-            <a:ext cx="15120" cy="6854760"/>
+            <a:ext cx="14760" cy="6854400"/>
           </a:xfrm>
           <a:prstGeom prst="rect">
             <a:avLst/>
@@ -10098,7 +10099,7 @@
         <p:spPr>
           <a:xfrm>
             <a:off x="2743200" y="0"/>
-            <a:ext cx="15120" cy="6854760"/>
+            <a:ext cx="14760" cy="6854400"/>
           </a:xfrm>
           <a:prstGeom prst="rect">
             <a:avLst/>
@@ -10158,7 +10159,7 @@
         <p:spPr>
           <a:xfrm>
             <a:off x="3657600" y="0"/>
-            <a:ext cx="15120" cy="6854760"/>
+            <a:ext cx="14760" cy="6854400"/>
           </a:xfrm>
           <a:prstGeom prst="rect">
             <a:avLst/>
@@ -10218,7 +10219,7 @@
         <p:spPr>
           <a:xfrm>
             <a:off x="4572000" y="0"/>
-            <a:ext cx="15120" cy="6854760"/>
+            <a:ext cx="14760" cy="6854400"/>
           </a:xfrm>
           <a:prstGeom prst="rect">
             <a:avLst/>
@@ -10278,7 +10279,7 @@
         <p:spPr>
           <a:xfrm>
             <a:off x="5486400" y="0"/>
-            <a:ext cx="15120" cy="6854760"/>
+            <a:ext cx="14760" cy="6854400"/>
           </a:xfrm>
           <a:prstGeom prst="rect">
             <a:avLst/>
@@ -10338,7 +10339,7 @@
         <p:spPr>
           <a:xfrm>
             <a:off x="6400800" y="0"/>
-            <a:ext cx="15120" cy="6854760"/>
+            <a:ext cx="14760" cy="6854400"/>
           </a:xfrm>
           <a:prstGeom prst="rect">
             <a:avLst/>
@@ -10398,7 +10399,7 @@
         <p:spPr>
           <a:xfrm>
             <a:off x="7315200" y="0"/>
-            <a:ext cx="15120" cy="6854760"/>
+            <a:ext cx="14760" cy="6854400"/>
           </a:xfrm>
           <a:prstGeom prst="rect">
             <a:avLst/>
@@ -10458,7 +10459,7 @@
         <p:spPr>
           <a:xfrm>
             <a:off x="8229600" y="0"/>
-            <a:ext cx="15120" cy="6854760"/>
+            <a:ext cx="14760" cy="6854400"/>
           </a:xfrm>
           <a:prstGeom prst="rect">
             <a:avLst/>
@@ -10518,7 +10519,7 @@
         <p:spPr>
           <a:xfrm>
             <a:off x="9144000" y="0"/>
-            <a:ext cx="15120" cy="6854760"/>
+            <a:ext cx="14760" cy="6854400"/>
           </a:xfrm>
           <a:prstGeom prst="rect">
             <a:avLst/>
@@ -10578,7 +10579,7 @@
         <p:spPr>
           <a:xfrm>
             <a:off x="10058400" y="0"/>
-            <a:ext cx="15120" cy="6854760"/>
+            <a:ext cx="14760" cy="6854400"/>
           </a:xfrm>
           <a:prstGeom prst="rect">
             <a:avLst/>
@@ -10638,7 +10639,7 @@
         <p:spPr>
           <a:xfrm>
             <a:off x="10972800" y="0"/>
-            <a:ext cx="15120" cy="6854760"/>
+            <a:ext cx="14760" cy="6854400"/>
           </a:xfrm>
           <a:prstGeom prst="rect">
             <a:avLst/>
@@ -10698,7 +10699,7 @@
         <p:spPr>
           <a:xfrm>
             <a:off x="11887200" y="0"/>
-            <a:ext cx="15120" cy="6854760"/>
+            <a:ext cx="14760" cy="6854400"/>
           </a:xfrm>
           <a:prstGeom prst="rect">
             <a:avLst/>
@@ -10758,7 +10759,7 @@
         <p:spPr>
           <a:xfrm>
             <a:off x="0" y="0"/>
-            <a:ext cx="316800" cy="6854760"/>
+            <a:ext cx="316440" cy="6854400"/>
           </a:xfrm>
           <a:prstGeom prst="rect">
             <a:avLst/>
@@ -10818,7 +10819,7 @@
         <p:spPr>
           <a:xfrm>
             <a:off x="9875520" y="365760"/>
-            <a:ext cx="2008440" cy="499680"/>
+            <a:ext cx="2008080" cy="499320"/>
           </a:xfrm>
           <a:prstGeom prst="roundRect">
             <a:avLst>
@@ -11023,7 +11024,7 @@
         <p:spPr>
           <a:xfrm>
             <a:off x="987480" y="3182040"/>
-            <a:ext cx="3288600" cy="2739960"/>
+            <a:ext cx="3288240" cy="2739600"/>
           </a:xfrm>
           <a:prstGeom prst="roundRect">
             <a:avLst>
@@ -11085,7 +11086,7 @@
         <p:spPr>
           <a:xfrm>
             <a:off x="685800" y="2971800"/>
-            <a:ext cx="3517200" cy="3198240"/>
+            <a:ext cx="3516840" cy="3197880"/>
           </a:xfrm>
           <a:prstGeom prst="roundRect">
             <a:avLst>
@@ -11276,7 +11277,7 @@
         <p:spPr>
           <a:xfrm>
             <a:off x="4507920" y="3182040"/>
-            <a:ext cx="3288600" cy="2739960"/>
+            <a:ext cx="3288240" cy="2739600"/>
           </a:xfrm>
           <a:prstGeom prst="roundRect">
             <a:avLst>
@@ -11338,7 +11339,7 @@
         <p:spPr>
           <a:xfrm>
             <a:off x="4434840" y="2971800"/>
-            <a:ext cx="3288600" cy="3426840"/>
+            <a:ext cx="3288240" cy="3426480"/>
           </a:xfrm>
           <a:prstGeom prst="roundRect">
             <a:avLst>
@@ -11550,7 +11551,7 @@
         <p:spPr>
           <a:xfrm>
             <a:off x="8028360" y="3182040"/>
-            <a:ext cx="3288600" cy="2739960"/>
+            <a:ext cx="3288240" cy="2739600"/>
           </a:xfrm>
           <a:prstGeom prst="roundRect">
             <a:avLst>
@@ -11612,7 +11613,7 @@
         <p:spPr>
           <a:xfrm>
             <a:off x="7955280" y="2743200"/>
-            <a:ext cx="3930480" cy="3884760"/>
+            <a:ext cx="3930120" cy="3884400"/>
           </a:xfrm>
           <a:prstGeom prst="roundRect">
             <a:avLst>
@@ -12172,7 +12173,7 @@
         <p:spPr>
           <a:xfrm>
             <a:off x="0" y="0"/>
-            <a:ext cx="12185640" cy="6854760"/>
+            <a:ext cx="12185280" cy="6854400"/>
           </a:xfrm>
           <a:prstGeom prst="rect">
             <a:avLst/>
@@ -12232,7 +12233,7 @@
         <p:spPr>
           <a:xfrm>
             <a:off x="0" y="0"/>
-            <a:ext cx="15120" cy="6854760"/>
+            <a:ext cx="14760" cy="6854400"/>
           </a:xfrm>
           <a:prstGeom prst="rect">
             <a:avLst/>
@@ -12292,7 +12293,7 @@
         <p:spPr>
           <a:xfrm>
             <a:off x="914400" y="0"/>
-            <a:ext cx="15120" cy="6854760"/>
+            <a:ext cx="14760" cy="6854400"/>
           </a:xfrm>
           <a:prstGeom prst="rect">
             <a:avLst/>
@@ -12352,7 +12353,7 @@
         <p:spPr>
           <a:xfrm>
             <a:off x="1828800" y="0"/>
-            <a:ext cx="15120" cy="6854760"/>
+            <a:ext cx="14760" cy="6854400"/>
           </a:xfrm>
           <a:prstGeom prst="rect">
             <a:avLst/>
@@ -12412,7 +12413,7 @@
         <p:spPr>
           <a:xfrm>
             <a:off x="2743200" y="0"/>
-            <a:ext cx="15120" cy="6854760"/>
+            <a:ext cx="14760" cy="6854400"/>
           </a:xfrm>
           <a:prstGeom prst="rect">
             <a:avLst/>
@@ -12472,7 +12473,7 @@
         <p:spPr>
           <a:xfrm>
             <a:off x="3657600" y="0"/>
-            <a:ext cx="15120" cy="6854760"/>
+            <a:ext cx="14760" cy="6854400"/>
           </a:xfrm>
           <a:prstGeom prst="rect">
             <a:avLst/>
@@ -12532,7 +12533,7 @@
         <p:spPr>
           <a:xfrm>
             <a:off x="4572000" y="0"/>
-            <a:ext cx="15120" cy="6854760"/>
+            <a:ext cx="14760" cy="6854400"/>
           </a:xfrm>
           <a:prstGeom prst="rect">
             <a:avLst/>
@@ -12592,7 +12593,7 @@
         <p:spPr>
           <a:xfrm>
             <a:off x="5486400" y="0"/>
-            <a:ext cx="15120" cy="6854760"/>
+            <a:ext cx="14760" cy="6854400"/>
           </a:xfrm>
           <a:prstGeom prst="rect">
             <a:avLst/>
@@ -12652,7 +12653,7 @@
         <p:spPr>
           <a:xfrm>
             <a:off x="6400800" y="0"/>
-            <a:ext cx="15120" cy="6854760"/>
+            <a:ext cx="14760" cy="6854400"/>
           </a:xfrm>
           <a:prstGeom prst="rect">
             <a:avLst/>
@@ -12712,7 +12713,7 @@
         <p:spPr>
           <a:xfrm>
             <a:off x="7315200" y="0"/>
-            <a:ext cx="15120" cy="6854760"/>
+            <a:ext cx="14760" cy="6854400"/>
           </a:xfrm>
           <a:prstGeom prst="rect">
             <a:avLst/>
@@ -12772,7 +12773,7 @@
         <p:spPr>
           <a:xfrm>
             <a:off x="8229600" y="0"/>
-            <a:ext cx="15120" cy="6854760"/>
+            <a:ext cx="14760" cy="6854400"/>
           </a:xfrm>
           <a:prstGeom prst="rect">
             <a:avLst/>
@@ -12832,7 +12833,7 @@
         <p:spPr>
           <a:xfrm>
             <a:off x="9144000" y="0"/>
-            <a:ext cx="15120" cy="6854760"/>
+            <a:ext cx="14760" cy="6854400"/>
           </a:xfrm>
           <a:prstGeom prst="rect">
             <a:avLst/>
@@ -12892,7 +12893,7 @@
         <p:spPr>
           <a:xfrm>
             <a:off x="10058400" y="0"/>
-            <a:ext cx="15120" cy="6854760"/>
+            <a:ext cx="14760" cy="6854400"/>
           </a:xfrm>
           <a:prstGeom prst="rect">
             <a:avLst/>
@@ -12952,7 +12953,7 @@
         <p:spPr>
           <a:xfrm>
             <a:off x="10972800" y="0"/>
-            <a:ext cx="15120" cy="6854760"/>
+            <a:ext cx="14760" cy="6854400"/>
           </a:xfrm>
           <a:prstGeom prst="rect">
             <a:avLst/>
@@ -13012,7 +13013,7 @@
         <p:spPr>
           <a:xfrm>
             <a:off x="11887200" y="0"/>
-            <a:ext cx="15120" cy="6854760"/>
+            <a:ext cx="14760" cy="6854400"/>
           </a:xfrm>
           <a:prstGeom prst="rect">
             <a:avLst/>
@@ -13072,7 +13073,7 @@
         <p:spPr>
           <a:xfrm>
             <a:off x="0" y="0"/>
-            <a:ext cx="316800" cy="6854760"/>
+            <a:ext cx="316440" cy="6854400"/>
           </a:xfrm>
           <a:prstGeom prst="rect">
             <a:avLst/>
@@ -13132,7 +13133,7 @@
         <p:spPr>
           <a:xfrm>
             <a:off x="9875520" y="365760"/>
-            <a:ext cx="2008440" cy="499680"/>
+            <a:ext cx="2008080" cy="499320"/>
           </a:xfrm>
           <a:prstGeom prst="roundRect">
             <a:avLst>
@@ -13260,7 +13261,7 @@
         <p:spPr>
           <a:xfrm>
             <a:off x="2278800" y="1828800"/>
-            <a:ext cx="6929640" cy="576360"/>
+            <a:ext cx="6929280" cy="576360"/>
           </a:xfrm>
           <a:prstGeom prst="rect">
             <a:avLst/>
@@ -13337,7 +13338,7 @@
         <p:spPr>
           <a:xfrm>
             <a:off x="987480" y="3182040"/>
-            <a:ext cx="3288600" cy="2739960"/>
+            <a:ext cx="3288240" cy="2739600"/>
           </a:xfrm>
           <a:prstGeom prst="roundRect">
             <a:avLst>
@@ -13399,7 +13400,7 @@
         <p:spPr>
           <a:xfrm>
             <a:off x="457200" y="2743200"/>
-            <a:ext cx="3745800" cy="3885120"/>
+            <a:ext cx="3745440" cy="3884760"/>
           </a:xfrm>
           <a:prstGeom prst="roundRect">
             <a:avLst>
@@ -13637,7 +13638,7 @@
         <p:spPr>
           <a:xfrm>
             <a:off x="4507920" y="3182040"/>
-            <a:ext cx="3288600" cy="2739960"/>
+            <a:ext cx="3288240" cy="2739600"/>
           </a:xfrm>
           <a:prstGeom prst="roundRect">
             <a:avLst>
@@ -13699,7 +13700,7 @@
         <p:spPr>
           <a:xfrm>
             <a:off x="4434840" y="2971800"/>
-            <a:ext cx="3288600" cy="3426840"/>
+            <a:ext cx="3288240" cy="3426480"/>
           </a:xfrm>
           <a:prstGeom prst="roundRect">
             <a:avLst>
@@ -13918,7 +13919,7 @@
         <p:spPr>
           <a:xfrm>
             <a:off x="8028360" y="3182040"/>
-            <a:ext cx="3288600" cy="2739960"/>
+            <a:ext cx="3288240" cy="2739600"/>
           </a:xfrm>
           <a:prstGeom prst="roundRect">
             <a:avLst>
@@ -13980,7 +13981,7 @@
         <p:spPr>
           <a:xfrm>
             <a:off x="8001000" y="3200400"/>
-            <a:ext cx="3473640" cy="2742120"/>
+            <a:ext cx="3473280" cy="2741760"/>
           </a:xfrm>
           <a:prstGeom prst="roundRect">
             <a:avLst>
@@ -14392,7 +14393,7 @@
         <p:spPr>
           <a:xfrm>
             <a:off x="0" y="0"/>
-            <a:ext cx="12185280" cy="6854400"/>
+            <a:ext cx="12184920" cy="6854040"/>
           </a:xfrm>
           <a:prstGeom prst="rect">
             <a:avLst/>
@@ -14452,7 +14453,7 @@
         <p:spPr>
           <a:xfrm>
             <a:off x="0" y="0"/>
-            <a:ext cx="14760" cy="6854400"/>
+            <a:ext cx="14400" cy="6854040"/>
           </a:xfrm>
           <a:prstGeom prst="rect">
             <a:avLst/>
@@ -14512,7 +14513,7 @@
         <p:spPr>
           <a:xfrm>
             <a:off x="914400" y="0"/>
-            <a:ext cx="14760" cy="6854400"/>
+            <a:ext cx="14400" cy="6854040"/>
           </a:xfrm>
           <a:prstGeom prst="rect">
             <a:avLst/>
@@ -14572,7 +14573,7 @@
         <p:spPr>
           <a:xfrm>
             <a:off x="1828800" y="0"/>
-            <a:ext cx="14760" cy="6854400"/>
+            <a:ext cx="14400" cy="6854040"/>
           </a:xfrm>
           <a:prstGeom prst="rect">
             <a:avLst/>
@@ -14632,7 +14633,7 @@
         <p:spPr>
           <a:xfrm>
             <a:off x="2743200" y="0"/>
-            <a:ext cx="14760" cy="6854400"/>
+            <a:ext cx="14400" cy="6854040"/>
           </a:xfrm>
           <a:prstGeom prst="rect">
             <a:avLst/>
@@ -14692,7 +14693,7 @@
         <p:spPr>
           <a:xfrm>
             <a:off x="3657600" y="0"/>
-            <a:ext cx="14760" cy="6854400"/>
+            <a:ext cx="14400" cy="6854040"/>
           </a:xfrm>
           <a:prstGeom prst="rect">
             <a:avLst/>
@@ -14752,7 +14753,7 @@
         <p:spPr>
           <a:xfrm>
             <a:off x="4572000" y="0"/>
-            <a:ext cx="14760" cy="6854400"/>
+            <a:ext cx="14400" cy="6854040"/>
           </a:xfrm>
           <a:prstGeom prst="rect">
             <a:avLst/>
@@ -14812,7 +14813,7 @@
         <p:spPr>
           <a:xfrm>
             <a:off x="5486400" y="0"/>
-            <a:ext cx="14760" cy="6854400"/>
+            <a:ext cx="14400" cy="6854040"/>
           </a:xfrm>
           <a:prstGeom prst="rect">
             <a:avLst/>
@@ -14872,7 +14873,7 @@
         <p:spPr>
           <a:xfrm>
             <a:off x="6400800" y="0"/>
-            <a:ext cx="14760" cy="6854400"/>
+            <a:ext cx="14400" cy="6854040"/>
           </a:xfrm>
           <a:prstGeom prst="rect">
             <a:avLst/>
@@ -14932,7 +14933,7 @@
         <p:spPr>
           <a:xfrm>
             <a:off x="7315200" y="0"/>
-            <a:ext cx="14760" cy="6854400"/>
+            <a:ext cx="14400" cy="6854040"/>
           </a:xfrm>
           <a:prstGeom prst="rect">
             <a:avLst/>
@@ -14992,7 +14993,7 @@
         <p:spPr>
           <a:xfrm>
             <a:off x="8229600" y="0"/>
-            <a:ext cx="14760" cy="6854400"/>
+            <a:ext cx="14400" cy="6854040"/>
           </a:xfrm>
           <a:prstGeom prst="rect">
             <a:avLst/>
@@ -15052,7 +15053,7 @@
         <p:spPr>
           <a:xfrm>
             <a:off x="9144000" y="0"/>
-            <a:ext cx="14760" cy="6854400"/>
+            <a:ext cx="14400" cy="6854040"/>
           </a:xfrm>
           <a:prstGeom prst="rect">
             <a:avLst/>
@@ -15112,7 +15113,7 @@
         <p:spPr>
           <a:xfrm>
             <a:off x="10058400" y="0"/>
-            <a:ext cx="14760" cy="6854400"/>
+            <a:ext cx="14400" cy="6854040"/>
           </a:xfrm>
           <a:prstGeom prst="rect">
             <a:avLst/>
@@ -15172,7 +15173,7 @@
         <p:spPr>
           <a:xfrm>
             <a:off x="10972800" y="0"/>
-            <a:ext cx="14760" cy="6854400"/>
+            <a:ext cx="14400" cy="6854040"/>
           </a:xfrm>
           <a:prstGeom prst="rect">
             <a:avLst/>
@@ -15232,7 +15233,7 @@
         <p:spPr>
           <a:xfrm>
             <a:off x="11887200" y="0"/>
-            <a:ext cx="14760" cy="6854400"/>
+            <a:ext cx="14400" cy="6854040"/>
           </a:xfrm>
           <a:prstGeom prst="rect">
             <a:avLst/>
@@ -15292,7 +15293,7 @@
         <p:spPr>
           <a:xfrm>
             <a:off x="0" y="0"/>
-            <a:ext cx="316440" cy="6854400"/>
+            <a:ext cx="316080" cy="6854040"/>
           </a:xfrm>
           <a:prstGeom prst="rect">
             <a:avLst/>
@@ -15352,7 +15353,7 @@
         <p:spPr>
           <a:xfrm>
             <a:off x="9875520" y="365760"/>
-            <a:ext cx="2008080" cy="499320"/>
+            <a:ext cx="2007720" cy="498960"/>
           </a:xfrm>
           <a:prstGeom prst="roundRect">
             <a:avLst>
@@ -15480,7 +15481,7 @@
         <p:spPr>
           <a:xfrm>
             <a:off x="668520" y="1600200"/>
-            <a:ext cx="10353240" cy="515880"/>
+            <a:ext cx="10352880" cy="515880"/>
           </a:xfrm>
           <a:prstGeom prst="rect">
             <a:avLst/>
@@ -15557,7 +15558,7 @@
         <p:spPr>
           <a:xfrm>
             <a:off x="987480" y="3182040"/>
-            <a:ext cx="3288240" cy="2739600"/>
+            <a:ext cx="3287880" cy="2739240"/>
           </a:xfrm>
           <a:prstGeom prst="roundRect">
             <a:avLst>
@@ -15619,7 +15620,7 @@
         <p:spPr>
           <a:xfrm>
             <a:off x="457200" y="2514600"/>
-            <a:ext cx="3745440" cy="4113360"/>
+            <a:ext cx="3745080" cy="4113000"/>
           </a:xfrm>
           <a:prstGeom prst="roundRect">
             <a:avLst>
@@ -15872,7 +15873,7 @@
         <p:spPr>
           <a:xfrm>
             <a:off x="4507920" y="3182040"/>
-            <a:ext cx="3288240" cy="2739600"/>
+            <a:ext cx="3287880" cy="2739240"/>
           </a:xfrm>
           <a:prstGeom prst="roundRect">
             <a:avLst>
@@ -15934,7 +15935,7 @@
         <p:spPr>
           <a:xfrm>
             <a:off x="4434840" y="2514600"/>
-            <a:ext cx="3288240" cy="3883680"/>
+            <a:ext cx="3287880" cy="3883320"/>
           </a:xfrm>
           <a:prstGeom prst="roundRect">
             <a:avLst>
@@ -16150,7 +16151,7 @@
         <p:spPr>
           <a:xfrm>
             <a:off x="8028360" y="3182040"/>
-            <a:ext cx="3288240" cy="2739600"/>
+            <a:ext cx="3287880" cy="2739240"/>
           </a:xfrm>
           <a:prstGeom prst="roundRect">
             <a:avLst>
@@ -16212,7 +16213,7 @@
         <p:spPr>
           <a:xfrm>
             <a:off x="8001000" y="2286000"/>
-            <a:ext cx="3656880" cy="4114080"/>
+            <a:ext cx="3656520" cy="4113720"/>
           </a:xfrm>
           <a:prstGeom prst="roundRect">
             <a:avLst>
@@ -16888,7 +16889,7 @@
         <p:spPr>
           <a:xfrm>
             <a:off x="0" y="0"/>
-            <a:ext cx="12185640" cy="6854760"/>
+            <a:ext cx="12185280" cy="6854400"/>
           </a:xfrm>
           <a:prstGeom prst="rect">
             <a:avLst/>
@@ -16948,7 +16949,7 @@
         <p:spPr>
           <a:xfrm>
             <a:off x="0" y="0"/>
-            <a:ext cx="15120" cy="6854760"/>
+            <a:ext cx="14760" cy="6854400"/>
           </a:xfrm>
           <a:prstGeom prst="rect">
             <a:avLst/>
@@ -17008,7 +17009,7 @@
         <p:spPr>
           <a:xfrm>
             <a:off x="914400" y="0"/>
-            <a:ext cx="15120" cy="6854760"/>
+            <a:ext cx="14760" cy="6854400"/>
           </a:xfrm>
           <a:prstGeom prst="rect">
             <a:avLst/>
@@ -17068,7 +17069,7 @@
         <p:spPr>
           <a:xfrm>
             <a:off x="1828800" y="0"/>
-            <a:ext cx="15120" cy="6854760"/>
+            <a:ext cx="14760" cy="6854400"/>
           </a:xfrm>
           <a:prstGeom prst="rect">
             <a:avLst/>
@@ -17128,7 +17129,7 @@
         <p:spPr>
           <a:xfrm>
             <a:off x="2743200" y="0"/>
-            <a:ext cx="15120" cy="6854760"/>
+            <a:ext cx="14760" cy="6854400"/>
           </a:xfrm>
           <a:prstGeom prst="rect">
             <a:avLst/>
@@ -17188,7 +17189,7 @@
         <p:spPr>
           <a:xfrm>
             <a:off x="3657600" y="0"/>
-            <a:ext cx="15120" cy="6854760"/>
+            <a:ext cx="14760" cy="6854400"/>
           </a:xfrm>
           <a:prstGeom prst="rect">
             <a:avLst/>
@@ -17248,7 +17249,7 @@
         <p:spPr>
           <a:xfrm>
             <a:off x="4572000" y="0"/>
-            <a:ext cx="15120" cy="6854760"/>
+            <a:ext cx="14760" cy="6854400"/>
           </a:xfrm>
           <a:prstGeom prst="rect">
             <a:avLst/>
@@ -17308,7 +17309,7 @@
         <p:spPr>
           <a:xfrm>
             <a:off x="5486400" y="0"/>
-            <a:ext cx="15120" cy="6854760"/>
+            <a:ext cx="14760" cy="6854400"/>
           </a:xfrm>
           <a:prstGeom prst="rect">
             <a:avLst/>
@@ -17368,7 +17369,7 @@
         <p:spPr>
           <a:xfrm>
             <a:off x="6400800" y="0"/>
-            <a:ext cx="15120" cy="6854760"/>
+            <a:ext cx="14760" cy="6854400"/>
           </a:xfrm>
           <a:prstGeom prst="rect">
             <a:avLst/>
@@ -17428,7 +17429,7 @@
         <p:spPr>
           <a:xfrm>
             <a:off x="7315200" y="0"/>
-            <a:ext cx="15120" cy="6854760"/>
+            <a:ext cx="14760" cy="6854400"/>
           </a:xfrm>
           <a:prstGeom prst="rect">
             <a:avLst/>
@@ -17488,7 +17489,7 @@
         <p:spPr>
           <a:xfrm>
             <a:off x="8229600" y="0"/>
-            <a:ext cx="15120" cy="6854760"/>
+            <a:ext cx="14760" cy="6854400"/>
           </a:xfrm>
           <a:prstGeom prst="rect">
             <a:avLst/>
@@ -17548,7 +17549,7 @@
         <p:spPr>
           <a:xfrm>
             <a:off x="9144000" y="0"/>
-            <a:ext cx="15120" cy="6854760"/>
+            <a:ext cx="14760" cy="6854400"/>
           </a:xfrm>
           <a:prstGeom prst="rect">
             <a:avLst/>
@@ -17608,7 +17609,7 @@
         <p:spPr>
           <a:xfrm>
             <a:off x="10058400" y="0"/>
-            <a:ext cx="15120" cy="6854760"/>
+            <a:ext cx="14760" cy="6854400"/>
           </a:xfrm>
           <a:prstGeom prst="rect">
             <a:avLst/>
@@ -17668,7 +17669,7 @@
         <p:spPr>
           <a:xfrm>
             <a:off x="10972800" y="0"/>
-            <a:ext cx="15120" cy="6854760"/>
+            <a:ext cx="14760" cy="6854400"/>
           </a:xfrm>
           <a:prstGeom prst="rect">
             <a:avLst/>
@@ -17728,7 +17729,7 @@
         <p:spPr>
           <a:xfrm>
             <a:off x="11887200" y="0"/>
-            <a:ext cx="15120" cy="6854760"/>
+            <a:ext cx="14760" cy="6854400"/>
           </a:xfrm>
           <a:prstGeom prst="rect">
             <a:avLst/>
@@ -17788,7 +17789,7 @@
         <p:spPr>
           <a:xfrm>
             <a:off x="0" y="0"/>
-            <a:ext cx="316800" cy="6854760"/>
+            <a:ext cx="316440" cy="6854400"/>
           </a:xfrm>
           <a:prstGeom prst="rect">
             <a:avLst/>
@@ -17848,7 +17849,7 @@
         <p:spPr>
           <a:xfrm>
             <a:off x="9875520" y="365760"/>
-            <a:ext cx="2008440" cy="499680"/>
+            <a:ext cx="2008080" cy="499320"/>
           </a:xfrm>
           <a:prstGeom prst="roundRect">
             <a:avLst>
@@ -17922,7 +17923,7 @@
         <p:spPr>
           <a:xfrm>
             <a:off x="1466280" y="914400"/>
-            <a:ext cx="8037000" cy="516240"/>
+            <a:ext cx="8036640" cy="516240"/>
           </a:xfrm>
           <a:prstGeom prst="rect">
             <a:avLst/>
@@ -17976,7 +17977,7 @@
         <p:spPr>
           <a:xfrm>
             <a:off x="1767600" y="1694880"/>
-            <a:ext cx="7951680" cy="819720"/>
+            <a:ext cx="7951320" cy="819720"/>
           </a:xfrm>
           <a:prstGeom prst="rect">
             <a:avLst/>
@@ -18086,7 +18087,7 @@
         <p:spPr>
           <a:xfrm>
             <a:off x="987480" y="3182040"/>
-            <a:ext cx="3288600" cy="2739960"/>
+            <a:ext cx="3288240" cy="2739600"/>
           </a:xfrm>
           <a:prstGeom prst="roundRect">
             <a:avLst>
@@ -18148,7 +18149,7 @@
         <p:spPr>
           <a:xfrm>
             <a:off x="457200" y="2743200"/>
-            <a:ext cx="3885840" cy="3885120"/>
+            <a:ext cx="3885480" cy="3884760"/>
           </a:xfrm>
           <a:prstGeom prst="roundRect">
             <a:avLst>
@@ -18462,7 +18463,7 @@
         <p:spPr>
           <a:xfrm>
             <a:off x="4507920" y="3182040"/>
-            <a:ext cx="3288600" cy="2739960"/>
+            <a:ext cx="3288240" cy="2739600"/>
           </a:xfrm>
           <a:prstGeom prst="roundRect">
             <a:avLst>
@@ -18524,7 +18525,7 @@
         <p:spPr>
           <a:xfrm>
             <a:off x="4572000" y="2743200"/>
-            <a:ext cx="3428640" cy="3657240"/>
+            <a:ext cx="3428280" cy="3656880"/>
           </a:xfrm>
           <a:prstGeom prst="roundRect">
             <a:avLst>
@@ -19099,7 +19100,7 @@
         <p:spPr>
           <a:xfrm>
             <a:off x="8028360" y="3182040"/>
-            <a:ext cx="3288600" cy="2739960"/>
+            <a:ext cx="3288240" cy="2739600"/>
           </a:xfrm>
           <a:prstGeom prst="roundRect">
             <a:avLst>
@@ -19161,7 +19162,7 @@
         <p:spPr>
           <a:xfrm>
             <a:off x="8229600" y="2514600"/>
-            <a:ext cx="3657240" cy="4114440"/>
+            <a:ext cx="3656880" cy="4114080"/>
           </a:xfrm>
           <a:prstGeom prst="roundRect">
             <a:avLst>
@@ -20153,7 +20154,7 @@
         <p:spPr>
           <a:xfrm>
             <a:off x="0" y="0"/>
-            <a:ext cx="12185280" cy="6854400"/>
+            <a:ext cx="12184920" cy="6854040"/>
           </a:xfrm>
           <a:prstGeom prst="rect">
             <a:avLst/>
@@ -20189,6 +20190,11 @@
             <a:noAutofit/>
           </a:bodyPr>
           <a:p>
+            <a:pPr>
+              <a:lnSpc>
+                <a:spcPct val="100000"/>
+              </a:lnSpc>
+            </a:pPr>
             <a:endParaRPr b="0" lang="en-US" sz="1800" spc="-1" strike="noStrike">
               <a:solidFill>
                 <a:schemeClr val="lt1"/>
@@ -20208,7 +20214,7 @@
         <p:spPr>
           <a:xfrm>
             <a:off x="0" y="0"/>
-            <a:ext cx="14760" cy="6854400"/>
+            <a:ext cx="14400" cy="6854040"/>
           </a:xfrm>
           <a:prstGeom prst="rect">
             <a:avLst/>
@@ -20244,6 +20250,11 @@
             <a:noAutofit/>
           </a:bodyPr>
           <a:p>
+            <a:pPr>
+              <a:lnSpc>
+                <a:spcPct val="100000"/>
+              </a:lnSpc>
+            </a:pPr>
             <a:endParaRPr b="0" lang="en-US" sz="1800" spc="-1" strike="noStrike">
               <a:solidFill>
                 <a:schemeClr val="lt1"/>
@@ -20263,7 +20274,7 @@
         <p:spPr>
           <a:xfrm>
             <a:off x="914400" y="0"/>
-            <a:ext cx="14760" cy="6854400"/>
+            <a:ext cx="14400" cy="6854040"/>
           </a:xfrm>
           <a:prstGeom prst="rect">
             <a:avLst/>
@@ -20299,6 +20310,11 @@
             <a:noAutofit/>
           </a:bodyPr>
           <a:p>
+            <a:pPr>
+              <a:lnSpc>
+                <a:spcPct val="100000"/>
+              </a:lnSpc>
+            </a:pPr>
             <a:endParaRPr b="0" lang="en-US" sz="1800" spc="-1" strike="noStrike">
               <a:solidFill>
                 <a:schemeClr val="lt1"/>
@@ -20318,7 +20334,7 @@
         <p:spPr>
           <a:xfrm>
             <a:off x="1828800" y="0"/>
-            <a:ext cx="14760" cy="6854400"/>
+            <a:ext cx="14400" cy="6854040"/>
           </a:xfrm>
           <a:prstGeom prst="rect">
             <a:avLst/>
@@ -20354,6 +20370,11 @@
             <a:noAutofit/>
           </a:bodyPr>
           <a:p>
+            <a:pPr>
+              <a:lnSpc>
+                <a:spcPct val="100000"/>
+              </a:lnSpc>
+            </a:pPr>
             <a:endParaRPr b="0" lang="en-US" sz="1800" spc="-1" strike="noStrike">
               <a:solidFill>
                 <a:schemeClr val="lt1"/>
@@ -20373,7 +20394,7 @@
         <p:spPr>
           <a:xfrm>
             <a:off x="2743200" y="0"/>
-            <a:ext cx="14760" cy="6854400"/>
+            <a:ext cx="14400" cy="6854040"/>
           </a:xfrm>
           <a:prstGeom prst="rect">
             <a:avLst/>
@@ -20409,6 +20430,11 @@
             <a:noAutofit/>
           </a:bodyPr>
           <a:p>
+            <a:pPr>
+              <a:lnSpc>
+                <a:spcPct val="100000"/>
+              </a:lnSpc>
+            </a:pPr>
             <a:endParaRPr b="0" lang="en-US" sz="1800" spc="-1" strike="noStrike">
               <a:solidFill>
                 <a:schemeClr val="lt1"/>
@@ -20428,7 +20454,7 @@
         <p:spPr>
           <a:xfrm>
             <a:off x="3657600" y="0"/>
-            <a:ext cx="14760" cy="6854400"/>
+            <a:ext cx="14400" cy="6854040"/>
           </a:xfrm>
           <a:prstGeom prst="rect">
             <a:avLst/>
@@ -20464,6 +20490,11 @@
             <a:noAutofit/>
           </a:bodyPr>
           <a:p>
+            <a:pPr>
+              <a:lnSpc>
+                <a:spcPct val="100000"/>
+              </a:lnSpc>
+            </a:pPr>
             <a:endParaRPr b="0" lang="en-US" sz="1800" spc="-1" strike="noStrike">
               <a:solidFill>
                 <a:schemeClr val="lt1"/>
@@ -20483,7 +20514,7 @@
         <p:spPr>
           <a:xfrm>
             <a:off x="4572000" y="0"/>
-            <a:ext cx="14760" cy="6854400"/>
+            <a:ext cx="14400" cy="6854040"/>
           </a:xfrm>
           <a:prstGeom prst="rect">
             <a:avLst/>
@@ -20519,6 +20550,11 @@
             <a:noAutofit/>
           </a:bodyPr>
           <a:p>
+            <a:pPr>
+              <a:lnSpc>
+                <a:spcPct val="100000"/>
+              </a:lnSpc>
+            </a:pPr>
             <a:endParaRPr b="0" lang="en-US" sz="1800" spc="-1" strike="noStrike">
               <a:solidFill>
                 <a:schemeClr val="lt1"/>
@@ -20538,7 +20574,7 @@
         <p:spPr>
           <a:xfrm>
             <a:off x="5486400" y="0"/>
-            <a:ext cx="14760" cy="6854400"/>
+            <a:ext cx="14400" cy="6854040"/>
           </a:xfrm>
           <a:prstGeom prst="rect">
             <a:avLst/>
@@ -20574,6 +20610,11 @@
             <a:noAutofit/>
           </a:bodyPr>
           <a:p>
+            <a:pPr>
+              <a:lnSpc>
+                <a:spcPct val="100000"/>
+              </a:lnSpc>
+            </a:pPr>
             <a:endParaRPr b="0" lang="en-US" sz="1800" spc="-1" strike="noStrike">
               <a:solidFill>
                 <a:schemeClr val="lt1"/>
@@ -20593,7 +20634,7 @@
         <p:spPr>
           <a:xfrm>
             <a:off x="6400800" y="0"/>
-            <a:ext cx="14760" cy="6854400"/>
+            <a:ext cx="14400" cy="6854040"/>
           </a:xfrm>
           <a:prstGeom prst="rect">
             <a:avLst/>
@@ -20629,6 +20670,11 @@
             <a:noAutofit/>
           </a:bodyPr>
           <a:p>
+            <a:pPr>
+              <a:lnSpc>
+                <a:spcPct val="100000"/>
+              </a:lnSpc>
+            </a:pPr>
             <a:endParaRPr b="0" lang="en-US" sz="1800" spc="-1" strike="noStrike">
               <a:solidFill>
                 <a:schemeClr val="lt1"/>
@@ -20648,7 +20694,7 @@
         <p:spPr>
           <a:xfrm>
             <a:off x="7315200" y="0"/>
-            <a:ext cx="14760" cy="6854400"/>
+            <a:ext cx="14400" cy="6854040"/>
           </a:xfrm>
           <a:prstGeom prst="rect">
             <a:avLst/>
@@ -20684,6 +20730,11 @@
             <a:noAutofit/>
           </a:bodyPr>
           <a:p>
+            <a:pPr>
+              <a:lnSpc>
+                <a:spcPct val="100000"/>
+              </a:lnSpc>
+            </a:pPr>
             <a:endParaRPr b="0" lang="en-US" sz="1800" spc="-1" strike="noStrike">
               <a:solidFill>
                 <a:schemeClr val="lt1"/>
@@ -20703,7 +20754,7 @@
         <p:spPr>
           <a:xfrm>
             <a:off x="8229600" y="0"/>
-            <a:ext cx="14760" cy="6854400"/>
+            <a:ext cx="14400" cy="6854040"/>
           </a:xfrm>
           <a:prstGeom prst="rect">
             <a:avLst/>
@@ -20739,6 +20790,11 @@
             <a:noAutofit/>
           </a:bodyPr>
           <a:p>
+            <a:pPr>
+              <a:lnSpc>
+                <a:spcPct val="100000"/>
+              </a:lnSpc>
+            </a:pPr>
             <a:endParaRPr b="0" lang="en-US" sz="1800" spc="-1" strike="noStrike">
               <a:solidFill>
                 <a:schemeClr val="lt1"/>
@@ -20758,7 +20814,7 @@
         <p:spPr>
           <a:xfrm>
             <a:off x="9144000" y="0"/>
-            <a:ext cx="14760" cy="6854400"/>
+            <a:ext cx="14400" cy="6854040"/>
           </a:xfrm>
           <a:prstGeom prst="rect">
             <a:avLst/>
@@ -20794,6 +20850,11 @@
             <a:noAutofit/>
           </a:bodyPr>
           <a:p>
+            <a:pPr>
+              <a:lnSpc>
+                <a:spcPct val="100000"/>
+              </a:lnSpc>
+            </a:pPr>
             <a:endParaRPr b="0" lang="en-US" sz="1800" spc="-1" strike="noStrike">
               <a:solidFill>
                 <a:schemeClr val="lt1"/>
@@ -20813,7 +20874,7 @@
         <p:spPr>
           <a:xfrm>
             <a:off x="10058400" y="0"/>
-            <a:ext cx="14760" cy="6854400"/>
+            <a:ext cx="14400" cy="6854040"/>
           </a:xfrm>
           <a:prstGeom prst="rect">
             <a:avLst/>
@@ -20849,6 +20910,11 @@
             <a:noAutofit/>
           </a:bodyPr>
           <a:p>
+            <a:pPr>
+              <a:lnSpc>
+                <a:spcPct val="100000"/>
+              </a:lnSpc>
+            </a:pPr>
             <a:endParaRPr b="0" lang="en-US" sz="1800" spc="-1" strike="noStrike">
               <a:solidFill>
                 <a:schemeClr val="lt1"/>
@@ -20868,7 +20934,7 @@
         <p:spPr>
           <a:xfrm>
             <a:off x="10972800" y="0"/>
-            <a:ext cx="14760" cy="6854400"/>
+            <a:ext cx="14400" cy="6854040"/>
           </a:xfrm>
           <a:prstGeom prst="rect">
             <a:avLst/>
@@ -20904,6 +20970,11 @@
             <a:noAutofit/>
           </a:bodyPr>
           <a:p>
+            <a:pPr>
+              <a:lnSpc>
+                <a:spcPct val="100000"/>
+              </a:lnSpc>
+            </a:pPr>
             <a:endParaRPr b="0" lang="en-US" sz="1800" spc="-1" strike="noStrike">
               <a:solidFill>
                 <a:schemeClr val="lt1"/>
@@ -20923,7 +20994,7 @@
         <p:spPr>
           <a:xfrm>
             <a:off x="11887200" y="0"/>
-            <a:ext cx="14760" cy="6854400"/>
+            <a:ext cx="14400" cy="6854040"/>
           </a:xfrm>
           <a:prstGeom prst="rect">
             <a:avLst/>
@@ -20959,6 +21030,11 @@
             <a:noAutofit/>
           </a:bodyPr>
           <a:p>
+            <a:pPr>
+              <a:lnSpc>
+                <a:spcPct val="100000"/>
+              </a:lnSpc>
+            </a:pPr>
             <a:endParaRPr b="0" lang="en-US" sz="1800" spc="-1" strike="noStrike">
               <a:solidFill>
                 <a:schemeClr val="lt1"/>
@@ -20978,7 +21054,7 @@
         <p:spPr>
           <a:xfrm>
             <a:off x="0" y="0"/>
-            <a:ext cx="316440" cy="6854400"/>
+            <a:ext cx="316080" cy="6854040"/>
           </a:xfrm>
           <a:prstGeom prst="rect">
             <a:avLst/>
@@ -21014,6 +21090,11 @@
             <a:noAutofit/>
           </a:bodyPr>
           <a:p>
+            <a:pPr>
+              <a:lnSpc>
+                <a:spcPct val="100000"/>
+              </a:lnSpc>
+            </a:pPr>
             <a:endParaRPr b="0" lang="en-US" sz="1800" spc="-1" strike="noStrike">
               <a:solidFill>
                 <a:schemeClr val="lt1"/>
@@ -21033,7 +21114,7 @@
         <p:spPr>
           <a:xfrm>
             <a:off x="9875520" y="365760"/>
-            <a:ext cx="2008080" cy="499320"/>
+            <a:ext cx="2007720" cy="498960"/>
           </a:xfrm>
           <a:prstGeom prst="roundRect">
             <a:avLst>
@@ -21107,7 +21188,7 @@
         <p:spPr>
           <a:xfrm>
             <a:off x="1737720" y="914400"/>
-            <a:ext cx="7493400" cy="639000"/>
+            <a:ext cx="7493400" cy="638280"/>
           </a:xfrm>
           <a:prstGeom prst="rect">
             <a:avLst/>
@@ -21161,7 +21242,7 @@
         <p:spPr>
           <a:xfrm>
             <a:off x="1964160" y="1664640"/>
-            <a:ext cx="7574040" cy="819720"/>
+            <a:ext cx="7573680" cy="819720"/>
           </a:xfrm>
           <a:prstGeom prst="rect">
             <a:avLst/>
@@ -21261,7 +21342,7 @@
         <p:spPr>
           <a:xfrm>
             <a:off x="987480" y="3182040"/>
-            <a:ext cx="3288240" cy="2739600"/>
+            <a:ext cx="3287880" cy="2739240"/>
           </a:xfrm>
           <a:prstGeom prst="roundRect">
             <a:avLst>
@@ -21299,6 +21380,11 @@
             <a:noAutofit/>
           </a:bodyPr>
           <a:p>
+            <a:pPr>
+              <a:lnSpc>
+                <a:spcPct val="100000"/>
+              </a:lnSpc>
+            </a:pPr>
             <a:endParaRPr b="0" lang="en-US" sz="1800" spc="-1" strike="noStrike">
               <a:solidFill>
                 <a:schemeClr val="lt1"/>
@@ -21318,7 +21404,7 @@
         <p:spPr>
           <a:xfrm>
             <a:off x="914400" y="2743200"/>
-            <a:ext cx="3288240" cy="3657240"/>
+            <a:ext cx="3287880" cy="3656880"/>
           </a:xfrm>
           <a:prstGeom prst="roundRect">
             <a:avLst>
@@ -21649,7 +21735,7 @@
         <p:spPr>
           <a:xfrm>
             <a:off x="4507920" y="3182040"/>
-            <a:ext cx="3288240" cy="2739600"/>
+            <a:ext cx="3287880" cy="2739240"/>
           </a:xfrm>
           <a:prstGeom prst="roundRect">
             <a:avLst>
@@ -21687,6 +21773,11 @@
             <a:noAutofit/>
           </a:bodyPr>
           <a:p>
+            <a:pPr>
+              <a:lnSpc>
+                <a:spcPct val="100000"/>
+              </a:lnSpc>
+            </a:pPr>
             <a:endParaRPr b="0" lang="en-US" sz="1800" spc="-1" strike="noStrike">
               <a:solidFill>
                 <a:schemeClr val="lt1"/>
@@ -21706,7 +21797,7 @@
         <p:spPr>
           <a:xfrm>
             <a:off x="4434840" y="2743200"/>
-            <a:ext cx="3288240" cy="3657240"/>
+            <a:ext cx="3287880" cy="3656880"/>
           </a:xfrm>
           <a:prstGeom prst="roundRect">
             <a:avLst>
@@ -22113,7 +22204,7 @@
         <p:spPr>
           <a:xfrm>
             <a:off x="8028360" y="3182040"/>
-            <a:ext cx="3288240" cy="2739600"/>
+            <a:ext cx="3287880" cy="2739240"/>
           </a:xfrm>
           <a:prstGeom prst="roundRect">
             <a:avLst>
@@ -22151,6 +22242,11 @@
             <a:noAutofit/>
           </a:bodyPr>
           <a:p>
+            <a:pPr>
+              <a:lnSpc>
+                <a:spcPct val="100000"/>
+              </a:lnSpc>
+            </a:pPr>
             <a:endParaRPr b="0" lang="en-US" sz="1800" spc="-1" strike="noStrike">
               <a:solidFill>
                 <a:schemeClr val="lt1"/>
@@ -22170,7 +22266,7 @@
         <p:spPr>
           <a:xfrm>
             <a:off x="7955280" y="2743200"/>
-            <a:ext cx="3700800" cy="3655800"/>
+            <a:ext cx="3700440" cy="3655440"/>
           </a:xfrm>
           <a:prstGeom prst="roundRect">
             <a:avLst>
@@ -22822,6 +22918,2680 @@
       <p:sp>
         <p:nvSpPr>
           <p:cNvPr id="248" name="TextBox 27"/>
+          <p:cNvSpPr/>
+          <p:nvPr/>
+        </p:nvSpPr>
+        <p:spPr>
+          <a:xfrm>
+            <a:off x="4600080" y="6446520"/>
+            <a:ext cx="3051000" cy="363960"/>
+          </a:xfrm>
+          <a:prstGeom prst="rect">
+            <a:avLst/>
+          </a:prstGeom>
+          <a:noFill/>
+          <a:ln w="0">
+            <a:noFill/>
+          </a:ln>
+        </p:spPr>
+        <p:style>
+          <a:lnRef idx="0"/>
+          <a:fillRef idx="0"/>
+          <a:effectRef idx="0"/>
+          <a:fontRef idx="minor"/>
+        </p:style>
+        <p:txBody>
+          <a:bodyPr wrap="none" lIns="90000" rIns="90000" tIns="45000" bIns="45000" anchor="t">
+            <a:spAutoFit/>
+          </a:bodyPr>
+          <a:p>
+            <a:pPr>
+              <a:lnSpc>
+                <a:spcPct val="100000"/>
+              </a:lnSpc>
+            </a:pPr>
+            <a:r>
+              <a:rPr b="0" lang="en-US" sz="1800" spc="-1" strike="noStrike">
+                <a:solidFill>
+                  <a:srgbClr val="000000"/>
+                </a:solidFill>
+                <a:latin typeface="Calibri"/>
+                <a:ea typeface="DejaVu Sans"/>
+              </a:rPr>
+              <a:t>Java • Ultra Premium Template</a:t>
+            </a:r>
+            <a:endParaRPr b="0" lang="en-US" sz="1800" spc="-1" strike="noStrike">
+              <a:solidFill>
+                <a:srgbClr val="000000"/>
+              </a:solidFill>
+              <a:latin typeface="Arial"/>
+            </a:endParaRPr>
+          </a:p>
+        </p:txBody>
+      </p:sp>
+    </p:spTree>
+  </p:cSld>
+  <mc:AlternateContent>
+    <mc:Choice Requires="p14">
+      <p:transition spd="slow" p14:dur="2000"/>
+    </mc:Choice>
+    <mc:Fallback>
+      <p:transition spd="slow"/>
+    </mc:Fallback>
+  </mc:AlternateContent>
+</p:sld>
+</file>
+
+<file path=ppt/slides/slide9.xml><?xml version="1.0" encoding="utf-8"?>
+<p:sld xmlns:a="http://schemas.openxmlformats.org/drawingml/2006/main" xmlns:p="http://schemas.openxmlformats.org/presentationml/2006/main" xmlns:r="http://schemas.openxmlformats.org/officeDocument/2006/relationships" xmlns:p14="http://schemas.microsoft.com/office/powerpoint/2010/main" xmlns:p15="http://schemas.microsoft.com/office/powerpoint/2012/main" xmlns:mc="http://schemas.openxmlformats.org/markup-compatibility/2006">
+  <p:cSld>
+    <p:spTree>
+      <p:nvGrpSpPr>
+        <p:cNvPr id="1" name=""/>
+        <p:cNvGrpSpPr/>
+        <p:nvPr/>
+      </p:nvGrpSpPr>
+      <p:grpSpPr>
+        <a:xfrm>
+          <a:off x="0" y="0"/>
+          <a:ext cx="0" cy="0"/>
+          <a:chOff x="0" y="0"/>
+          <a:chExt cx="0" cy="0"/>
+        </a:xfrm>
+      </p:grpSpPr>
+      <p:sp>
+        <p:nvSpPr>
+          <p:cNvPr id="249" name="Rectangle 129"/>
+          <p:cNvSpPr/>
+          <p:nvPr/>
+        </p:nvSpPr>
+        <p:spPr>
+          <a:xfrm>
+            <a:off x="0" y="0"/>
+            <a:ext cx="12184560" cy="6853680"/>
+          </a:xfrm>
+          <a:prstGeom prst="rect">
+            <a:avLst/>
+          </a:prstGeom>
+          <a:solidFill>
+            <a:srgbClr val="0b0b0d"/>
+          </a:solidFill>
+          <a:ln>
+            <a:noFill/>
+          </a:ln>
+          <a:effectLst>
+            <a:outerShdw blurRad="39960" dir="5400000" dist="23040" rotWithShape="0">
+              <a:srgbClr val="000000">
+                <a:alpha val="35000"/>
+              </a:srgbClr>
+            </a:outerShdw>
+          </a:effectLst>
+        </p:spPr>
+        <p:style>
+          <a:lnRef idx="1">
+            <a:schemeClr val="accent1"/>
+          </a:lnRef>
+          <a:fillRef idx="3">
+            <a:schemeClr val="accent1"/>
+          </a:fillRef>
+          <a:effectRef idx="2">
+            <a:schemeClr val="accent1"/>
+          </a:effectRef>
+          <a:fontRef idx="minor"/>
+        </p:style>
+        <p:txBody>
+          <a:bodyPr lIns="90000" rIns="90000" tIns="45000" bIns="45000" anchor="ctr">
+            <a:noAutofit/>
+          </a:bodyPr>
+          <a:p>
+            <a:endParaRPr b="0" lang="en-US" sz="1800" spc="-1" strike="noStrike">
+              <a:solidFill>
+                <a:schemeClr val="lt1"/>
+              </a:solidFill>
+              <a:latin typeface="Calibri"/>
+              <a:ea typeface="DejaVu Sans"/>
+            </a:endParaRPr>
+          </a:p>
+        </p:txBody>
+      </p:sp>
+      <p:sp>
+        <p:nvSpPr>
+          <p:cNvPr id="250" name="Rectangle 130"/>
+          <p:cNvSpPr/>
+          <p:nvPr/>
+        </p:nvSpPr>
+        <p:spPr>
+          <a:xfrm>
+            <a:off x="0" y="0"/>
+            <a:ext cx="14040" cy="6853680"/>
+          </a:xfrm>
+          <a:prstGeom prst="rect">
+            <a:avLst/>
+          </a:prstGeom>
+          <a:solidFill>
+            <a:srgbClr val="121216"/>
+          </a:solidFill>
+          <a:ln>
+            <a:noFill/>
+          </a:ln>
+          <a:effectLst>
+            <a:outerShdw blurRad="39960" dir="5400000" dist="23040" rotWithShape="0">
+              <a:srgbClr val="000000">
+                <a:alpha val="35000"/>
+              </a:srgbClr>
+            </a:outerShdw>
+          </a:effectLst>
+        </p:spPr>
+        <p:style>
+          <a:lnRef idx="1">
+            <a:schemeClr val="accent1"/>
+          </a:lnRef>
+          <a:fillRef idx="3">
+            <a:schemeClr val="accent1"/>
+          </a:fillRef>
+          <a:effectRef idx="2">
+            <a:schemeClr val="accent1"/>
+          </a:effectRef>
+          <a:fontRef idx="minor"/>
+        </p:style>
+        <p:txBody>
+          <a:bodyPr lIns="90000" rIns="90000" tIns="45000" bIns="45000" anchor="ctr">
+            <a:noAutofit/>
+          </a:bodyPr>
+          <a:p>
+            <a:endParaRPr b="0" lang="en-US" sz="1800" spc="-1" strike="noStrike">
+              <a:solidFill>
+                <a:schemeClr val="lt1"/>
+              </a:solidFill>
+              <a:latin typeface="Calibri"/>
+              <a:ea typeface="DejaVu Sans"/>
+            </a:endParaRPr>
+          </a:p>
+        </p:txBody>
+      </p:sp>
+      <p:sp>
+        <p:nvSpPr>
+          <p:cNvPr id="251" name="Rectangle 131"/>
+          <p:cNvSpPr/>
+          <p:nvPr/>
+        </p:nvSpPr>
+        <p:spPr>
+          <a:xfrm>
+            <a:off x="914400" y="0"/>
+            <a:ext cx="14040" cy="6853680"/>
+          </a:xfrm>
+          <a:prstGeom prst="rect">
+            <a:avLst/>
+          </a:prstGeom>
+          <a:solidFill>
+            <a:srgbClr val="121216"/>
+          </a:solidFill>
+          <a:ln>
+            <a:noFill/>
+          </a:ln>
+          <a:effectLst>
+            <a:outerShdw blurRad="39960" dir="5400000" dist="23040" rotWithShape="0">
+              <a:srgbClr val="000000">
+                <a:alpha val="35000"/>
+              </a:srgbClr>
+            </a:outerShdw>
+          </a:effectLst>
+        </p:spPr>
+        <p:style>
+          <a:lnRef idx="1">
+            <a:schemeClr val="accent1"/>
+          </a:lnRef>
+          <a:fillRef idx="3">
+            <a:schemeClr val="accent1"/>
+          </a:fillRef>
+          <a:effectRef idx="2">
+            <a:schemeClr val="accent1"/>
+          </a:effectRef>
+          <a:fontRef idx="minor"/>
+        </p:style>
+        <p:txBody>
+          <a:bodyPr lIns="90000" rIns="90000" tIns="45000" bIns="45000" anchor="ctr">
+            <a:noAutofit/>
+          </a:bodyPr>
+          <a:p>
+            <a:endParaRPr b="0" lang="en-US" sz="1800" spc="-1" strike="noStrike">
+              <a:solidFill>
+                <a:schemeClr val="lt1"/>
+              </a:solidFill>
+              <a:latin typeface="Calibri"/>
+              <a:ea typeface="DejaVu Sans"/>
+            </a:endParaRPr>
+          </a:p>
+        </p:txBody>
+      </p:sp>
+      <p:sp>
+        <p:nvSpPr>
+          <p:cNvPr id="252" name="Rectangle 132"/>
+          <p:cNvSpPr/>
+          <p:nvPr/>
+        </p:nvSpPr>
+        <p:spPr>
+          <a:xfrm>
+            <a:off x="1828800" y="0"/>
+            <a:ext cx="14040" cy="6853680"/>
+          </a:xfrm>
+          <a:prstGeom prst="rect">
+            <a:avLst/>
+          </a:prstGeom>
+          <a:solidFill>
+            <a:srgbClr val="121216"/>
+          </a:solidFill>
+          <a:ln>
+            <a:noFill/>
+          </a:ln>
+          <a:effectLst>
+            <a:outerShdw blurRad="39960" dir="5400000" dist="23040" rotWithShape="0">
+              <a:srgbClr val="000000">
+                <a:alpha val="35000"/>
+              </a:srgbClr>
+            </a:outerShdw>
+          </a:effectLst>
+        </p:spPr>
+        <p:style>
+          <a:lnRef idx="1">
+            <a:schemeClr val="accent1"/>
+          </a:lnRef>
+          <a:fillRef idx="3">
+            <a:schemeClr val="accent1"/>
+          </a:fillRef>
+          <a:effectRef idx="2">
+            <a:schemeClr val="accent1"/>
+          </a:effectRef>
+          <a:fontRef idx="minor"/>
+        </p:style>
+        <p:txBody>
+          <a:bodyPr lIns="90000" rIns="90000" tIns="45000" bIns="45000" anchor="ctr">
+            <a:noAutofit/>
+          </a:bodyPr>
+          <a:p>
+            <a:endParaRPr b="0" lang="en-US" sz="1800" spc="-1" strike="noStrike">
+              <a:solidFill>
+                <a:schemeClr val="lt1"/>
+              </a:solidFill>
+              <a:latin typeface="Calibri"/>
+              <a:ea typeface="DejaVu Sans"/>
+            </a:endParaRPr>
+          </a:p>
+        </p:txBody>
+      </p:sp>
+      <p:sp>
+        <p:nvSpPr>
+          <p:cNvPr id="253" name="Rectangle 133"/>
+          <p:cNvSpPr/>
+          <p:nvPr/>
+        </p:nvSpPr>
+        <p:spPr>
+          <a:xfrm>
+            <a:off x="2743200" y="0"/>
+            <a:ext cx="14040" cy="6853680"/>
+          </a:xfrm>
+          <a:prstGeom prst="rect">
+            <a:avLst/>
+          </a:prstGeom>
+          <a:solidFill>
+            <a:srgbClr val="121216"/>
+          </a:solidFill>
+          <a:ln>
+            <a:noFill/>
+          </a:ln>
+          <a:effectLst>
+            <a:outerShdw blurRad="39960" dir="5400000" dist="23040" rotWithShape="0">
+              <a:srgbClr val="000000">
+                <a:alpha val="35000"/>
+              </a:srgbClr>
+            </a:outerShdw>
+          </a:effectLst>
+        </p:spPr>
+        <p:style>
+          <a:lnRef idx="1">
+            <a:schemeClr val="accent1"/>
+          </a:lnRef>
+          <a:fillRef idx="3">
+            <a:schemeClr val="accent1"/>
+          </a:fillRef>
+          <a:effectRef idx="2">
+            <a:schemeClr val="accent1"/>
+          </a:effectRef>
+          <a:fontRef idx="minor"/>
+        </p:style>
+        <p:txBody>
+          <a:bodyPr lIns="90000" rIns="90000" tIns="45000" bIns="45000" anchor="ctr">
+            <a:noAutofit/>
+          </a:bodyPr>
+          <a:p>
+            <a:endParaRPr b="0" lang="en-US" sz="1800" spc="-1" strike="noStrike">
+              <a:solidFill>
+                <a:schemeClr val="lt1"/>
+              </a:solidFill>
+              <a:latin typeface="Calibri"/>
+              <a:ea typeface="DejaVu Sans"/>
+            </a:endParaRPr>
+          </a:p>
+        </p:txBody>
+      </p:sp>
+      <p:sp>
+        <p:nvSpPr>
+          <p:cNvPr id="254" name="Rectangle 134"/>
+          <p:cNvSpPr/>
+          <p:nvPr/>
+        </p:nvSpPr>
+        <p:spPr>
+          <a:xfrm>
+            <a:off x="3657600" y="0"/>
+            <a:ext cx="14040" cy="6853680"/>
+          </a:xfrm>
+          <a:prstGeom prst="rect">
+            <a:avLst/>
+          </a:prstGeom>
+          <a:solidFill>
+            <a:srgbClr val="121216"/>
+          </a:solidFill>
+          <a:ln>
+            <a:noFill/>
+          </a:ln>
+          <a:effectLst>
+            <a:outerShdw blurRad="39960" dir="5400000" dist="23040" rotWithShape="0">
+              <a:srgbClr val="000000">
+                <a:alpha val="35000"/>
+              </a:srgbClr>
+            </a:outerShdw>
+          </a:effectLst>
+        </p:spPr>
+        <p:style>
+          <a:lnRef idx="1">
+            <a:schemeClr val="accent1"/>
+          </a:lnRef>
+          <a:fillRef idx="3">
+            <a:schemeClr val="accent1"/>
+          </a:fillRef>
+          <a:effectRef idx="2">
+            <a:schemeClr val="accent1"/>
+          </a:effectRef>
+          <a:fontRef idx="minor"/>
+        </p:style>
+        <p:txBody>
+          <a:bodyPr lIns="90000" rIns="90000" tIns="45000" bIns="45000" anchor="ctr">
+            <a:noAutofit/>
+          </a:bodyPr>
+          <a:p>
+            <a:endParaRPr b="0" lang="en-US" sz="1800" spc="-1" strike="noStrike">
+              <a:solidFill>
+                <a:schemeClr val="lt1"/>
+              </a:solidFill>
+              <a:latin typeface="Calibri"/>
+              <a:ea typeface="DejaVu Sans"/>
+            </a:endParaRPr>
+          </a:p>
+        </p:txBody>
+      </p:sp>
+      <p:sp>
+        <p:nvSpPr>
+          <p:cNvPr id="255" name="Rectangle 135"/>
+          <p:cNvSpPr/>
+          <p:nvPr/>
+        </p:nvSpPr>
+        <p:spPr>
+          <a:xfrm>
+            <a:off x="4572000" y="0"/>
+            <a:ext cx="14040" cy="6853680"/>
+          </a:xfrm>
+          <a:prstGeom prst="rect">
+            <a:avLst/>
+          </a:prstGeom>
+          <a:solidFill>
+            <a:srgbClr val="121216"/>
+          </a:solidFill>
+          <a:ln>
+            <a:noFill/>
+          </a:ln>
+          <a:effectLst>
+            <a:outerShdw blurRad="39960" dir="5400000" dist="23040" rotWithShape="0">
+              <a:srgbClr val="000000">
+                <a:alpha val="35000"/>
+              </a:srgbClr>
+            </a:outerShdw>
+          </a:effectLst>
+        </p:spPr>
+        <p:style>
+          <a:lnRef idx="1">
+            <a:schemeClr val="accent1"/>
+          </a:lnRef>
+          <a:fillRef idx="3">
+            <a:schemeClr val="accent1"/>
+          </a:fillRef>
+          <a:effectRef idx="2">
+            <a:schemeClr val="accent1"/>
+          </a:effectRef>
+          <a:fontRef idx="minor"/>
+        </p:style>
+        <p:txBody>
+          <a:bodyPr lIns="90000" rIns="90000" tIns="45000" bIns="45000" anchor="ctr">
+            <a:noAutofit/>
+          </a:bodyPr>
+          <a:p>
+            <a:endParaRPr b="0" lang="en-US" sz="1800" spc="-1" strike="noStrike">
+              <a:solidFill>
+                <a:schemeClr val="lt1"/>
+              </a:solidFill>
+              <a:latin typeface="Calibri"/>
+              <a:ea typeface="DejaVu Sans"/>
+            </a:endParaRPr>
+          </a:p>
+        </p:txBody>
+      </p:sp>
+      <p:sp>
+        <p:nvSpPr>
+          <p:cNvPr id="256" name="Rectangle 136"/>
+          <p:cNvSpPr/>
+          <p:nvPr/>
+        </p:nvSpPr>
+        <p:spPr>
+          <a:xfrm>
+            <a:off x="5486400" y="0"/>
+            <a:ext cx="14040" cy="6853680"/>
+          </a:xfrm>
+          <a:prstGeom prst="rect">
+            <a:avLst/>
+          </a:prstGeom>
+          <a:solidFill>
+            <a:srgbClr val="121216"/>
+          </a:solidFill>
+          <a:ln>
+            <a:noFill/>
+          </a:ln>
+          <a:effectLst>
+            <a:outerShdw blurRad="39960" dir="5400000" dist="23040" rotWithShape="0">
+              <a:srgbClr val="000000">
+                <a:alpha val="35000"/>
+              </a:srgbClr>
+            </a:outerShdw>
+          </a:effectLst>
+        </p:spPr>
+        <p:style>
+          <a:lnRef idx="1">
+            <a:schemeClr val="accent1"/>
+          </a:lnRef>
+          <a:fillRef idx="3">
+            <a:schemeClr val="accent1"/>
+          </a:fillRef>
+          <a:effectRef idx="2">
+            <a:schemeClr val="accent1"/>
+          </a:effectRef>
+          <a:fontRef idx="minor"/>
+        </p:style>
+        <p:txBody>
+          <a:bodyPr lIns="90000" rIns="90000" tIns="45000" bIns="45000" anchor="ctr">
+            <a:noAutofit/>
+          </a:bodyPr>
+          <a:p>
+            <a:endParaRPr b="0" lang="en-US" sz="1800" spc="-1" strike="noStrike">
+              <a:solidFill>
+                <a:schemeClr val="lt1"/>
+              </a:solidFill>
+              <a:latin typeface="Calibri"/>
+              <a:ea typeface="DejaVu Sans"/>
+            </a:endParaRPr>
+          </a:p>
+        </p:txBody>
+      </p:sp>
+      <p:sp>
+        <p:nvSpPr>
+          <p:cNvPr id="257" name="Rectangle 137"/>
+          <p:cNvSpPr/>
+          <p:nvPr/>
+        </p:nvSpPr>
+        <p:spPr>
+          <a:xfrm>
+            <a:off x="6400800" y="0"/>
+            <a:ext cx="14040" cy="6853680"/>
+          </a:xfrm>
+          <a:prstGeom prst="rect">
+            <a:avLst/>
+          </a:prstGeom>
+          <a:solidFill>
+            <a:srgbClr val="121216"/>
+          </a:solidFill>
+          <a:ln>
+            <a:noFill/>
+          </a:ln>
+          <a:effectLst>
+            <a:outerShdw blurRad="39960" dir="5400000" dist="23040" rotWithShape="0">
+              <a:srgbClr val="000000">
+                <a:alpha val="35000"/>
+              </a:srgbClr>
+            </a:outerShdw>
+          </a:effectLst>
+        </p:spPr>
+        <p:style>
+          <a:lnRef idx="1">
+            <a:schemeClr val="accent1"/>
+          </a:lnRef>
+          <a:fillRef idx="3">
+            <a:schemeClr val="accent1"/>
+          </a:fillRef>
+          <a:effectRef idx="2">
+            <a:schemeClr val="accent1"/>
+          </a:effectRef>
+          <a:fontRef idx="minor"/>
+        </p:style>
+        <p:txBody>
+          <a:bodyPr lIns="90000" rIns="90000" tIns="45000" bIns="45000" anchor="ctr">
+            <a:noAutofit/>
+          </a:bodyPr>
+          <a:p>
+            <a:endParaRPr b="0" lang="en-US" sz="1800" spc="-1" strike="noStrike">
+              <a:solidFill>
+                <a:schemeClr val="lt1"/>
+              </a:solidFill>
+              <a:latin typeface="Calibri"/>
+              <a:ea typeface="DejaVu Sans"/>
+            </a:endParaRPr>
+          </a:p>
+        </p:txBody>
+      </p:sp>
+      <p:sp>
+        <p:nvSpPr>
+          <p:cNvPr id="258" name="Rectangle 138"/>
+          <p:cNvSpPr/>
+          <p:nvPr/>
+        </p:nvSpPr>
+        <p:spPr>
+          <a:xfrm>
+            <a:off x="7315200" y="0"/>
+            <a:ext cx="14040" cy="6853680"/>
+          </a:xfrm>
+          <a:prstGeom prst="rect">
+            <a:avLst/>
+          </a:prstGeom>
+          <a:solidFill>
+            <a:srgbClr val="121216"/>
+          </a:solidFill>
+          <a:ln>
+            <a:noFill/>
+          </a:ln>
+          <a:effectLst>
+            <a:outerShdw blurRad="39960" dir="5400000" dist="23040" rotWithShape="0">
+              <a:srgbClr val="000000">
+                <a:alpha val="35000"/>
+              </a:srgbClr>
+            </a:outerShdw>
+          </a:effectLst>
+        </p:spPr>
+        <p:style>
+          <a:lnRef idx="1">
+            <a:schemeClr val="accent1"/>
+          </a:lnRef>
+          <a:fillRef idx="3">
+            <a:schemeClr val="accent1"/>
+          </a:fillRef>
+          <a:effectRef idx="2">
+            <a:schemeClr val="accent1"/>
+          </a:effectRef>
+          <a:fontRef idx="minor"/>
+        </p:style>
+        <p:txBody>
+          <a:bodyPr lIns="90000" rIns="90000" tIns="45000" bIns="45000" anchor="ctr">
+            <a:noAutofit/>
+          </a:bodyPr>
+          <a:p>
+            <a:endParaRPr b="0" lang="en-US" sz="1800" spc="-1" strike="noStrike">
+              <a:solidFill>
+                <a:schemeClr val="lt1"/>
+              </a:solidFill>
+              <a:latin typeface="Calibri"/>
+              <a:ea typeface="DejaVu Sans"/>
+            </a:endParaRPr>
+          </a:p>
+        </p:txBody>
+      </p:sp>
+      <p:sp>
+        <p:nvSpPr>
+          <p:cNvPr id="259" name="Rectangle 139"/>
+          <p:cNvSpPr/>
+          <p:nvPr/>
+        </p:nvSpPr>
+        <p:spPr>
+          <a:xfrm>
+            <a:off x="8229600" y="0"/>
+            <a:ext cx="14040" cy="6853680"/>
+          </a:xfrm>
+          <a:prstGeom prst="rect">
+            <a:avLst/>
+          </a:prstGeom>
+          <a:solidFill>
+            <a:srgbClr val="121216"/>
+          </a:solidFill>
+          <a:ln>
+            <a:noFill/>
+          </a:ln>
+          <a:effectLst>
+            <a:outerShdw blurRad="39960" dir="5400000" dist="23040" rotWithShape="0">
+              <a:srgbClr val="000000">
+                <a:alpha val="35000"/>
+              </a:srgbClr>
+            </a:outerShdw>
+          </a:effectLst>
+        </p:spPr>
+        <p:style>
+          <a:lnRef idx="1">
+            <a:schemeClr val="accent1"/>
+          </a:lnRef>
+          <a:fillRef idx="3">
+            <a:schemeClr val="accent1"/>
+          </a:fillRef>
+          <a:effectRef idx="2">
+            <a:schemeClr val="accent1"/>
+          </a:effectRef>
+          <a:fontRef idx="minor"/>
+        </p:style>
+        <p:txBody>
+          <a:bodyPr lIns="90000" rIns="90000" tIns="45000" bIns="45000" anchor="ctr">
+            <a:noAutofit/>
+          </a:bodyPr>
+          <a:p>
+            <a:endParaRPr b="0" lang="en-US" sz="1800" spc="-1" strike="noStrike">
+              <a:solidFill>
+                <a:schemeClr val="lt1"/>
+              </a:solidFill>
+              <a:latin typeface="Calibri"/>
+              <a:ea typeface="DejaVu Sans"/>
+            </a:endParaRPr>
+          </a:p>
+        </p:txBody>
+      </p:sp>
+      <p:sp>
+        <p:nvSpPr>
+          <p:cNvPr id="260" name="Rectangle 140"/>
+          <p:cNvSpPr/>
+          <p:nvPr/>
+        </p:nvSpPr>
+        <p:spPr>
+          <a:xfrm>
+            <a:off x="9144000" y="0"/>
+            <a:ext cx="14040" cy="6853680"/>
+          </a:xfrm>
+          <a:prstGeom prst="rect">
+            <a:avLst/>
+          </a:prstGeom>
+          <a:solidFill>
+            <a:srgbClr val="121216"/>
+          </a:solidFill>
+          <a:ln>
+            <a:noFill/>
+          </a:ln>
+          <a:effectLst>
+            <a:outerShdw blurRad="39960" dir="5400000" dist="23040" rotWithShape="0">
+              <a:srgbClr val="000000">
+                <a:alpha val="35000"/>
+              </a:srgbClr>
+            </a:outerShdw>
+          </a:effectLst>
+        </p:spPr>
+        <p:style>
+          <a:lnRef idx="1">
+            <a:schemeClr val="accent1"/>
+          </a:lnRef>
+          <a:fillRef idx="3">
+            <a:schemeClr val="accent1"/>
+          </a:fillRef>
+          <a:effectRef idx="2">
+            <a:schemeClr val="accent1"/>
+          </a:effectRef>
+          <a:fontRef idx="minor"/>
+        </p:style>
+        <p:txBody>
+          <a:bodyPr lIns="90000" rIns="90000" tIns="45000" bIns="45000" anchor="ctr">
+            <a:noAutofit/>
+          </a:bodyPr>
+          <a:p>
+            <a:endParaRPr b="0" lang="en-US" sz="1800" spc="-1" strike="noStrike">
+              <a:solidFill>
+                <a:schemeClr val="lt1"/>
+              </a:solidFill>
+              <a:latin typeface="Calibri"/>
+              <a:ea typeface="DejaVu Sans"/>
+            </a:endParaRPr>
+          </a:p>
+        </p:txBody>
+      </p:sp>
+      <p:sp>
+        <p:nvSpPr>
+          <p:cNvPr id="261" name="Rectangle 141"/>
+          <p:cNvSpPr/>
+          <p:nvPr/>
+        </p:nvSpPr>
+        <p:spPr>
+          <a:xfrm>
+            <a:off x="10058400" y="0"/>
+            <a:ext cx="14040" cy="6853680"/>
+          </a:xfrm>
+          <a:prstGeom prst="rect">
+            <a:avLst/>
+          </a:prstGeom>
+          <a:solidFill>
+            <a:srgbClr val="121216"/>
+          </a:solidFill>
+          <a:ln>
+            <a:noFill/>
+          </a:ln>
+          <a:effectLst>
+            <a:outerShdw blurRad="39960" dir="5400000" dist="23040" rotWithShape="0">
+              <a:srgbClr val="000000">
+                <a:alpha val="35000"/>
+              </a:srgbClr>
+            </a:outerShdw>
+          </a:effectLst>
+        </p:spPr>
+        <p:style>
+          <a:lnRef idx="1">
+            <a:schemeClr val="accent1"/>
+          </a:lnRef>
+          <a:fillRef idx="3">
+            <a:schemeClr val="accent1"/>
+          </a:fillRef>
+          <a:effectRef idx="2">
+            <a:schemeClr val="accent1"/>
+          </a:effectRef>
+          <a:fontRef idx="minor"/>
+        </p:style>
+        <p:txBody>
+          <a:bodyPr lIns="90000" rIns="90000" tIns="45000" bIns="45000" anchor="ctr">
+            <a:noAutofit/>
+          </a:bodyPr>
+          <a:p>
+            <a:endParaRPr b="0" lang="en-US" sz="1800" spc="-1" strike="noStrike">
+              <a:solidFill>
+                <a:schemeClr val="lt1"/>
+              </a:solidFill>
+              <a:latin typeface="Calibri"/>
+              <a:ea typeface="DejaVu Sans"/>
+            </a:endParaRPr>
+          </a:p>
+        </p:txBody>
+      </p:sp>
+      <p:sp>
+        <p:nvSpPr>
+          <p:cNvPr id="262" name="Rectangle 142"/>
+          <p:cNvSpPr/>
+          <p:nvPr/>
+        </p:nvSpPr>
+        <p:spPr>
+          <a:xfrm>
+            <a:off x="10972800" y="0"/>
+            <a:ext cx="14040" cy="6853680"/>
+          </a:xfrm>
+          <a:prstGeom prst="rect">
+            <a:avLst/>
+          </a:prstGeom>
+          <a:solidFill>
+            <a:srgbClr val="121216"/>
+          </a:solidFill>
+          <a:ln>
+            <a:noFill/>
+          </a:ln>
+          <a:effectLst>
+            <a:outerShdw blurRad="39960" dir="5400000" dist="23040" rotWithShape="0">
+              <a:srgbClr val="000000">
+                <a:alpha val="35000"/>
+              </a:srgbClr>
+            </a:outerShdw>
+          </a:effectLst>
+        </p:spPr>
+        <p:style>
+          <a:lnRef idx="1">
+            <a:schemeClr val="accent1"/>
+          </a:lnRef>
+          <a:fillRef idx="3">
+            <a:schemeClr val="accent1"/>
+          </a:fillRef>
+          <a:effectRef idx="2">
+            <a:schemeClr val="accent1"/>
+          </a:effectRef>
+          <a:fontRef idx="minor"/>
+        </p:style>
+        <p:txBody>
+          <a:bodyPr lIns="90000" rIns="90000" tIns="45000" bIns="45000" anchor="ctr">
+            <a:noAutofit/>
+          </a:bodyPr>
+          <a:p>
+            <a:endParaRPr b="0" lang="en-US" sz="1800" spc="-1" strike="noStrike">
+              <a:solidFill>
+                <a:schemeClr val="lt1"/>
+              </a:solidFill>
+              <a:latin typeface="Calibri"/>
+              <a:ea typeface="DejaVu Sans"/>
+            </a:endParaRPr>
+          </a:p>
+        </p:txBody>
+      </p:sp>
+      <p:sp>
+        <p:nvSpPr>
+          <p:cNvPr id="263" name="Rectangle 143"/>
+          <p:cNvSpPr/>
+          <p:nvPr/>
+        </p:nvSpPr>
+        <p:spPr>
+          <a:xfrm>
+            <a:off x="11887200" y="0"/>
+            <a:ext cx="14040" cy="6853680"/>
+          </a:xfrm>
+          <a:prstGeom prst="rect">
+            <a:avLst/>
+          </a:prstGeom>
+          <a:solidFill>
+            <a:srgbClr val="121216"/>
+          </a:solidFill>
+          <a:ln>
+            <a:noFill/>
+          </a:ln>
+          <a:effectLst>
+            <a:outerShdw blurRad="39960" dir="5400000" dist="23040" rotWithShape="0">
+              <a:srgbClr val="000000">
+                <a:alpha val="35000"/>
+              </a:srgbClr>
+            </a:outerShdw>
+          </a:effectLst>
+        </p:spPr>
+        <p:style>
+          <a:lnRef idx="1">
+            <a:schemeClr val="accent1"/>
+          </a:lnRef>
+          <a:fillRef idx="3">
+            <a:schemeClr val="accent1"/>
+          </a:fillRef>
+          <a:effectRef idx="2">
+            <a:schemeClr val="accent1"/>
+          </a:effectRef>
+          <a:fontRef idx="minor"/>
+        </p:style>
+        <p:txBody>
+          <a:bodyPr lIns="90000" rIns="90000" tIns="45000" bIns="45000" anchor="ctr">
+            <a:noAutofit/>
+          </a:bodyPr>
+          <a:p>
+            <a:endParaRPr b="0" lang="en-US" sz="1800" spc="-1" strike="noStrike">
+              <a:solidFill>
+                <a:schemeClr val="lt1"/>
+              </a:solidFill>
+              <a:latin typeface="Calibri"/>
+              <a:ea typeface="DejaVu Sans"/>
+            </a:endParaRPr>
+          </a:p>
+        </p:txBody>
+      </p:sp>
+      <p:sp>
+        <p:nvSpPr>
+          <p:cNvPr id="264" name="Rectangle 144"/>
+          <p:cNvSpPr/>
+          <p:nvPr/>
+        </p:nvSpPr>
+        <p:spPr>
+          <a:xfrm>
+            <a:off x="0" y="0"/>
+            <a:ext cx="315720" cy="6853680"/>
+          </a:xfrm>
+          <a:prstGeom prst="rect">
+            <a:avLst/>
+          </a:prstGeom>
+          <a:solidFill>
+            <a:srgbClr val="ff8c00"/>
+          </a:solidFill>
+          <a:ln>
+            <a:noFill/>
+          </a:ln>
+          <a:effectLst>
+            <a:outerShdw blurRad="39960" dir="5400000" dist="23040" rotWithShape="0">
+              <a:srgbClr val="000000">
+                <a:alpha val="35000"/>
+              </a:srgbClr>
+            </a:outerShdw>
+          </a:effectLst>
+        </p:spPr>
+        <p:style>
+          <a:lnRef idx="1">
+            <a:schemeClr val="accent1"/>
+          </a:lnRef>
+          <a:fillRef idx="3">
+            <a:schemeClr val="accent1"/>
+          </a:fillRef>
+          <a:effectRef idx="2">
+            <a:schemeClr val="accent1"/>
+          </a:effectRef>
+          <a:fontRef idx="minor"/>
+        </p:style>
+        <p:txBody>
+          <a:bodyPr lIns="90000" rIns="90000" tIns="45000" bIns="45000" anchor="ctr">
+            <a:noAutofit/>
+          </a:bodyPr>
+          <a:p>
+            <a:endParaRPr b="0" lang="en-US" sz="1800" spc="-1" strike="noStrike">
+              <a:solidFill>
+                <a:schemeClr val="lt1"/>
+              </a:solidFill>
+              <a:latin typeface="Calibri"/>
+              <a:ea typeface="DejaVu Sans"/>
+            </a:endParaRPr>
+          </a:p>
+        </p:txBody>
+      </p:sp>
+      <p:sp>
+        <p:nvSpPr>
+          <p:cNvPr id="265" name="Rounded Rectangle 64"/>
+          <p:cNvSpPr/>
+          <p:nvPr/>
+        </p:nvSpPr>
+        <p:spPr>
+          <a:xfrm>
+            <a:off x="9875520" y="365760"/>
+            <a:ext cx="2007360" cy="498600"/>
+          </a:xfrm>
+          <a:prstGeom prst="roundRect">
+            <a:avLst>
+              <a:gd name="adj" fmla="val 16667"/>
+            </a:avLst>
+          </a:prstGeom>
+          <a:solidFill>
+            <a:srgbClr val="1e1e24"/>
+          </a:solidFill>
+          <a:ln>
+            <a:solidFill>
+              <a:srgbClr val="ff8c00"/>
+            </a:solidFill>
+            <a:round/>
+          </a:ln>
+          <a:effectLst>
+            <a:outerShdw blurRad="39960" dir="5400000" dist="23040" rotWithShape="0">
+              <a:srgbClr val="000000">
+                <a:alpha val="35000"/>
+              </a:srgbClr>
+            </a:outerShdw>
+          </a:effectLst>
+        </p:spPr>
+        <p:style>
+          <a:lnRef idx="1">
+            <a:schemeClr val="accent1"/>
+          </a:lnRef>
+          <a:fillRef idx="3">
+            <a:schemeClr val="accent1"/>
+          </a:fillRef>
+          <a:effectRef idx="2">
+            <a:schemeClr val="accent1"/>
+          </a:effectRef>
+          <a:fontRef idx="minor"/>
+        </p:style>
+        <p:txBody>
+          <a:bodyPr lIns="90000" rIns="90000" tIns="45000" bIns="45000" anchor="ctr">
+            <a:noAutofit/>
+          </a:bodyPr>
+          <a:p>
+            <a:pPr algn="ctr">
+              <a:lnSpc>
+                <a:spcPct val="100000"/>
+              </a:lnSpc>
+            </a:pPr>
+            <a:r>
+              <a:rPr b="1" lang="en-US" sz="1400" spc="-1" strike="noStrike">
+                <a:solidFill>
+                  <a:srgbClr val="ffb45a"/>
+                </a:solidFill>
+                <a:latin typeface="Calibri"/>
+                <a:ea typeface="DejaVu Sans"/>
+              </a:rPr>
+              <a:t>JAVA CORE</a:t>
+            </a:r>
+            <a:endParaRPr b="0" lang="en-US" sz="1400" spc="-1" strike="noStrike">
+              <a:solidFill>
+                <a:srgbClr val="ffffff"/>
+              </a:solidFill>
+              <a:latin typeface="Arial"/>
+            </a:endParaRPr>
+          </a:p>
+        </p:txBody>
+      </p:sp>
+      <p:sp>
+        <p:nvSpPr>
+          <p:cNvPr id="266" name="TextBox 28"/>
+          <p:cNvSpPr/>
+          <p:nvPr/>
+        </p:nvSpPr>
+        <p:spPr>
+          <a:xfrm>
+            <a:off x="2699280" y="914400"/>
+            <a:ext cx="5569920" cy="1186920"/>
+          </a:xfrm>
+          <a:prstGeom prst="rect">
+            <a:avLst/>
+          </a:prstGeom>
+          <a:noFill/>
+          <a:ln w="0">
+            <a:noFill/>
+          </a:ln>
+        </p:spPr>
+        <p:style>
+          <a:lnRef idx="0"/>
+          <a:fillRef idx="0"/>
+          <a:effectRef idx="0"/>
+          <a:fontRef idx="minor"/>
+        </p:style>
+        <p:txBody>
+          <a:bodyPr wrap="none" lIns="90000" rIns="90000" tIns="45000" bIns="45000" anchor="t">
+            <a:spAutoFit/>
+          </a:bodyPr>
+          <a:p>
+            <a:pPr>
+              <a:lnSpc>
+                <a:spcPct val="100000"/>
+              </a:lnSpc>
+            </a:pPr>
+            <a:r>
+              <a:rPr b="1" lang="en-US" sz="3600" spc="-1" strike="noStrike">
+                <a:solidFill>
+                  <a:srgbClr val="f5f5f5"/>
+                </a:solidFill>
+                <a:latin typeface="Calibri"/>
+                <a:ea typeface="DejaVu Sans"/>
+              </a:rPr>
+              <a:t>Arithmetic Operators in Java</a:t>
+            </a:r>
+            <a:endParaRPr b="0" lang="en-US" sz="3600" spc="-1" strike="noStrike">
+              <a:solidFill>
+                <a:srgbClr val="000000"/>
+              </a:solidFill>
+              <a:latin typeface="Arial"/>
+            </a:endParaRPr>
+          </a:p>
+          <a:p>
+            <a:pPr>
+              <a:lnSpc>
+                <a:spcPct val="100000"/>
+              </a:lnSpc>
+            </a:pPr>
+            <a:endParaRPr b="0" lang="en-US" sz="3600" spc="-1" strike="noStrike">
+              <a:solidFill>
+                <a:srgbClr val="000000"/>
+              </a:solidFill>
+              <a:latin typeface="Arial"/>
+            </a:endParaRPr>
+          </a:p>
+        </p:txBody>
+      </p:sp>
+      <p:sp>
+        <p:nvSpPr>
+          <p:cNvPr id="267" name="TextBox 29"/>
+          <p:cNvSpPr/>
+          <p:nvPr/>
+        </p:nvSpPr>
+        <p:spPr>
+          <a:xfrm>
+            <a:off x="2148480" y="1694880"/>
+            <a:ext cx="7272360" cy="819720"/>
+          </a:xfrm>
+          <a:prstGeom prst="rect">
+            <a:avLst/>
+          </a:prstGeom>
+          <a:noFill/>
+          <a:ln w="0">
+            <a:noFill/>
+          </a:ln>
+        </p:spPr>
+        <p:style>
+          <a:lnRef idx="0"/>
+          <a:fillRef idx="0"/>
+          <a:effectRef idx="0"/>
+          <a:fontRef idx="minor"/>
+        </p:style>
+        <p:txBody>
+          <a:bodyPr wrap="none" lIns="90000" rIns="90000" tIns="45000" bIns="45000" anchor="t">
+            <a:spAutoFit/>
+          </a:bodyPr>
+          <a:p>
+            <a:pPr>
+              <a:lnSpc>
+                <a:spcPct val="100000"/>
+              </a:lnSpc>
+            </a:pPr>
+            <a:r>
+              <a:rPr b="0" lang="en-US" sz="1600" spc="-1" strike="noStrike">
+                <a:solidFill>
+                  <a:srgbClr val="aaaaaa"/>
+                </a:solidFill>
+                <a:latin typeface="Calibri"/>
+                <a:ea typeface="DejaVu Sans"/>
+              </a:rPr>
+              <a:t>Arithmetic operators are used to perform basic mathematical operations on numbers. </a:t>
+            </a:r>
+            <a:endParaRPr b="0" lang="en-US" sz="1600" spc="-1" strike="noStrike">
+              <a:solidFill>
+                <a:srgbClr val="000000"/>
+              </a:solidFill>
+              <a:latin typeface="Arial"/>
+            </a:endParaRPr>
+          </a:p>
+          <a:p>
+            <a:pPr>
+              <a:lnSpc>
+                <a:spcPct val="100000"/>
+              </a:lnSpc>
+            </a:pPr>
+            <a:r>
+              <a:rPr b="0" lang="en-US" sz="1600" spc="-1" strike="noStrike">
+                <a:solidFill>
+                  <a:srgbClr val="aaaaaa"/>
+                </a:solidFill>
+                <a:latin typeface="Calibri"/>
+                <a:ea typeface="DejaVu Sans"/>
+              </a:rPr>
+              <a:t>Standard mathematical precedence (e.g., multiplication is evaluated before addition) </a:t>
+            </a:r>
+            <a:endParaRPr b="0" lang="en-US" sz="1600" spc="-1" strike="noStrike">
+              <a:solidFill>
+                <a:srgbClr val="000000"/>
+              </a:solidFill>
+              <a:latin typeface="Arial"/>
+            </a:endParaRPr>
+          </a:p>
+          <a:p>
+            <a:pPr>
+              <a:lnSpc>
+                <a:spcPct val="100000"/>
+              </a:lnSpc>
+            </a:pPr>
+            <a:r>
+              <a:rPr b="0" lang="en-US" sz="1600" spc="-1" strike="noStrike">
+                <a:solidFill>
+                  <a:srgbClr val="aaaaaa"/>
+                </a:solidFill>
+                <a:latin typeface="Calibri"/>
+                <a:ea typeface="DejaVu Sans"/>
+              </a:rPr>
+              <a:t>strictly applies in Java just like in algebra.</a:t>
+            </a:r>
+            <a:endParaRPr b="0" lang="en-US" sz="1600" spc="-1" strike="noStrike">
+              <a:solidFill>
+                <a:srgbClr val="000000"/>
+              </a:solidFill>
+              <a:latin typeface="Arial"/>
+            </a:endParaRPr>
+          </a:p>
+        </p:txBody>
+      </p:sp>
+      <p:sp>
+        <p:nvSpPr>
+          <p:cNvPr id="268" name="Rounded Rectangle 65"/>
+          <p:cNvSpPr/>
+          <p:nvPr/>
+        </p:nvSpPr>
+        <p:spPr>
+          <a:xfrm>
+            <a:off x="987480" y="3182040"/>
+            <a:ext cx="3287520" cy="2738880"/>
+          </a:xfrm>
+          <a:prstGeom prst="roundRect">
+            <a:avLst>
+              <a:gd name="adj" fmla="val 16667"/>
+            </a:avLst>
+          </a:prstGeom>
+          <a:solidFill>
+            <a:srgbClr val="08080a"/>
+          </a:solidFill>
+          <a:ln>
+            <a:noFill/>
+          </a:ln>
+          <a:effectLst>
+            <a:outerShdw blurRad="39960" dir="5400000" dist="23040" rotWithShape="0">
+              <a:srgbClr val="000000">
+                <a:alpha val="35000"/>
+              </a:srgbClr>
+            </a:outerShdw>
+          </a:effectLst>
+        </p:spPr>
+        <p:style>
+          <a:lnRef idx="1">
+            <a:schemeClr val="accent1"/>
+          </a:lnRef>
+          <a:fillRef idx="3">
+            <a:schemeClr val="accent1"/>
+          </a:fillRef>
+          <a:effectRef idx="2">
+            <a:schemeClr val="accent1"/>
+          </a:effectRef>
+          <a:fontRef idx="minor"/>
+        </p:style>
+        <p:txBody>
+          <a:bodyPr lIns="90000" rIns="90000" tIns="45000" bIns="45000" anchor="ctr">
+            <a:noAutofit/>
+          </a:bodyPr>
+          <a:p>
+            <a:endParaRPr b="0" lang="en-US" sz="1800" spc="-1" strike="noStrike">
+              <a:solidFill>
+                <a:schemeClr val="lt1"/>
+              </a:solidFill>
+              <a:latin typeface="Calibri"/>
+              <a:ea typeface="DejaVu Sans"/>
+            </a:endParaRPr>
+          </a:p>
+        </p:txBody>
+      </p:sp>
+      <p:sp>
+        <p:nvSpPr>
+          <p:cNvPr id="269" name="Rounded Rectangle 66"/>
+          <p:cNvSpPr/>
+          <p:nvPr/>
+        </p:nvSpPr>
+        <p:spPr>
+          <a:xfrm>
+            <a:off x="914400" y="3108960"/>
+            <a:ext cx="3287520" cy="3290760"/>
+          </a:xfrm>
+          <a:prstGeom prst="roundRect">
+            <a:avLst>
+              <a:gd name="adj" fmla="val 16667"/>
+            </a:avLst>
+          </a:prstGeom>
+          <a:solidFill>
+            <a:srgbClr val="16161c"/>
+          </a:solidFill>
+          <a:ln>
+            <a:solidFill>
+              <a:srgbClr val="464655"/>
+            </a:solidFill>
+            <a:round/>
+          </a:ln>
+          <a:effectLst>
+            <a:outerShdw blurRad="39960" dir="5400000" dist="23040" rotWithShape="0">
+              <a:srgbClr val="000000">
+                <a:alpha val="35000"/>
+              </a:srgbClr>
+            </a:outerShdw>
+          </a:effectLst>
+        </p:spPr>
+        <p:style>
+          <a:lnRef idx="1">
+            <a:schemeClr val="accent1"/>
+          </a:lnRef>
+          <a:fillRef idx="3">
+            <a:schemeClr val="accent1"/>
+          </a:fillRef>
+          <a:effectRef idx="2">
+            <a:schemeClr val="accent1"/>
+          </a:effectRef>
+          <a:fontRef idx="minor"/>
+        </p:style>
+        <p:txBody>
+          <a:bodyPr lIns="90000" rIns="90000" tIns="45000" bIns="45000" anchor="ctr">
+            <a:noAutofit/>
+          </a:bodyPr>
+          <a:p>
+            <a:pPr>
+              <a:lnSpc>
+                <a:spcPct val="100000"/>
+              </a:lnSpc>
+            </a:pPr>
+            <a:r>
+              <a:rPr b="0" lang="en-US" sz="1500" spc="-1" strike="noStrike">
+                <a:solidFill>
+                  <a:schemeClr val="lt1"/>
+                </a:solidFill>
+                <a:latin typeface="Calibri"/>
+                <a:ea typeface="DejaVu Sans"/>
+              </a:rPr>
+              <a:t>• </a:t>
+            </a:r>
+            <a:r>
+              <a:rPr b="0" lang="en-US" sz="1500" spc="-1" strike="noStrike">
+                <a:solidFill>
+                  <a:schemeClr val="lt1"/>
+                </a:solidFill>
+                <a:latin typeface="Calibri"/>
+                <a:ea typeface="DejaVu Sans"/>
+              </a:rPr>
+              <a:t>+ (Addition): </a:t>
+            </a:r>
+            <a:r>
+              <a:rPr b="1" lang="en-US" sz="1500" spc="-1" strike="noStrike">
+                <a:solidFill>
+                  <a:schemeClr val="lt1"/>
+                </a:solidFill>
+                <a:latin typeface="Calibri"/>
+                <a:ea typeface="DejaVu Sans"/>
+              </a:rPr>
+              <a:t>Adds numbers together. (Also concatenates Strings).</a:t>
+            </a:r>
+            <a:endParaRPr b="0" lang="en-US" sz="1500" spc="-1" strike="noStrike">
+              <a:solidFill>
+                <a:srgbClr val="ffffff"/>
+              </a:solidFill>
+              <a:latin typeface="Arial"/>
+            </a:endParaRPr>
+          </a:p>
+          <a:p>
+            <a:pPr>
+              <a:lnSpc>
+                <a:spcPct val="100000"/>
+              </a:lnSpc>
+            </a:pPr>
+            <a:r>
+              <a:rPr b="0" lang="en-US" sz="1500" spc="-1" strike="noStrike">
+                <a:solidFill>
+                  <a:schemeClr val="lt1"/>
+                </a:solidFill>
+                <a:latin typeface="Calibri"/>
+                <a:ea typeface="DejaVu Sans"/>
+              </a:rPr>
+              <a:t>• </a:t>
+            </a:r>
+            <a:r>
+              <a:rPr b="0" lang="en-US" sz="1500" spc="-1" strike="noStrike">
+                <a:solidFill>
+                  <a:schemeClr val="lt1"/>
+                </a:solidFill>
+                <a:latin typeface="Calibri"/>
+                <a:ea typeface="DejaVu Sans"/>
+              </a:rPr>
+              <a:t>- (Subtraction): </a:t>
+            </a:r>
+            <a:r>
+              <a:rPr b="1" lang="en-US" sz="1500" spc="-1" strike="noStrike">
+                <a:solidFill>
+                  <a:schemeClr val="lt1"/>
+                </a:solidFill>
+                <a:latin typeface="Calibri"/>
+                <a:ea typeface="DejaVu Sans"/>
+              </a:rPr>
+              <a:t>Subtracts the right operand from the left.</a:t>
+            </a:r>
+            <a:endParaRPr b="0" lang="en-US" sz="1500" spc="-1" strike="noStrike">
+              <a:solidFill>
+                <a:srgbClr val="ffffff"/>
+              </a:solidFill>
+              <a:latin typeface="Arial"/>
+            </a:endParaRPr>
+          </a:p>
+          <a:p>
+            <a:pPr>
+              <a:lnSpc>
+                <a:spcPct val="100000"/>
+              </a:lnSpc>
+            </a:pPr>
+            <a:r>
+              <a:rPr b="0" lang="en-US" sz="1500" spc="-1" strike="noStrike">
+                <a:solidFill>
+                  <a:schemeClr val="lt1"/>
+                </a:solidFill>
+                <a:latin typeface="Calibri"/>
+                <a:ea typeface="DejaVu Sans"/>
+              </a:rPr>
+              <a:t>• </a:t>
+            </a:r>
+            <a:r>
+              <a:rPr b="0" lang="en-US" sz="1500" spc="-1" strike="noStrike">
+                <a:solidFill>
+                  <a:schemeClr val="lt1"/>
+                </a:solidFill>
+                <a:latin typeface="Calibri"/>
+                <a:ea typeface="DejaVu Sans"/>
+              </a:rPr>
+              <a:t>* (Multiplication): </a:t>
+            </a:r>
+            <a:r>
+              <a:rPr b="1" lang="en-US" sz="1500" spc="-1" strike="noStrike">
+                <a:solidFill>
+                  <a:schemeClr val="lt1"/>
+                </a:solidFill>
+                <a:latin typeface="Calibri"/>
+                <a:ea typeface="DejaVu Sans"/>
+              </a:rPr>
+              <a:t>Multiplies two values.</a:t>
+            </a:r>
+            <a:endParaRPr b="0" lang="en-US" sz="1500" spc="-1" strike="noStrike">
+              <a:solidFill>
+                <a:srgbClr val="ffffff"/>
+              </a:solidFill>
+              <a:latin typeface="Arial"/>
+            </a:endParaRPr>
+          </a:p>
+          <a:p>
+            <a:pPr>
+              <a:lnSpc>
+                <a:spcPct val="100000"/>
+              </a:lnSpc>
+            </a:pPr>
+            <a:r>
+              <a:rPr b="0" lang="en-US" sz="1500" spc="-1" strike="noStrike">
+                <a:solidFill>
+                  <a:schemeClr val="lt1"/>
+                </a:solidFill>
+                <a:latin typeface="Calibri"/>
+                <a:ea typeface="DejaVu Sans"/>
+              </a:rPr>
+              <a:t>• </a:t>
+            </a:r>
+            <a:r>
+              <a:rPr b="0" lang="en-US" sz="1500" spc="-1" strike="noStrike">
+                <a:solidFill>
+                  <a:schemeClr val="lt1"/>
+                </a:solidFill>
+                <a:latin typeface="Calibri"/>
+                <a:ea typeface="DejaVu Sans"/>
+              </a:rPr>
+              <a:t>/ (Division): </a:t>
+            </a:r>
+            <a:r>
+              <a:rPr b="1" lang="en-US" sz="1500" spc="-1" strike="noStrike">
+                <a:solidFill>
+                  <a:schemeClr val="lt1"/>
+                </a:solidFill>
+                <a:latin typeface="Calibri"/>
+                <a:ea typeface="DejaVu Sans"/>
+              </a:rPr>
+              <a:t>Returns the quotient. (Note: Integer division drops decimals. Ex: 5 / 2 = 2)</a:t>
+            </a:r>
+            <a:endParaRPr b="0" lang="en-US" sz="1500" spc="-1" strike="noStrike">
+              <a:solidFill>
+                <a:srgbClr val="ffffff"/>
+              </a:solidFill>
+              <a:latin typeface="Arial"/>
+            </a:endParaRPr>
+          </a:p>
+          <a:p>
+            <a:pPr>
+              <a:lnSpc>
+                <a:spcPct val="100000"/>
+              </a:lnSpc>
+            </a:pPr>
+            <a:r>
+              <a:rPr b="0" lang="en-US" sz="1500" spc="-1" strike="noStrike">
+                <a:solidFill>
+                  <a:schemeClr val="lt1"/>
+                </a:solidFill>
+                <a:latin typeface="Calibri"/>
+                <a:ea typeface="DejaVu Sans"/>
+              </a:rPr>
+              <a:t>• </a:t>
+            </a:r>
+            <a:r>
+              <a:rPr b="0" lang="en-US" sz="1500" spc="-1" strike="noStrike">
+                <a:solidFill>
+                  <a:schemeClr val="lt1"/>
+                </a:solidFill>
+                <a:latin typeface="Calibri"/>
+                <a:ea typeface="DejaVu Sans"/>
+              </a:rPr>
+              <a:t>% (Modulo): </a:t>
+            </a:r>
+            <a:r>
+              <a:rPr b="1" lang="en-US" sz="1500" spc="-1" strike="noStrike">
+                <a:solidFill>
+                  <a:schemeClr val="lt1"/>
+                </a:solidFill>
+                <a:latin typeface="Calibri"/>
+                <a:ea typeface="DejaVu Sans"/>
+              </a:rPr>
+              <a:t>Returns the remainder of a division. Widely used to check odd/even numbers.</a:t>
+            </a:r>
+            <a:endParaRPr b="0" lang="en-US" sz="1500" spc="-1" strike="noStrike">
+              <a:solidFill>
+                <a:srgbClr val="ffffff"/>
+              </a:solidFill>
+              <a:latin typeface="Arial"/>
+            </a:endParaRPr>
+          </a:p>
+        </p:txBody>
+      </p:sp>
+      <p:sp>
+        <p:nvSpPr>
+          <p:cNvPr id="270" name="Rounded Rectangle 67"/>
+          <p:cNvSpPr/>
+          <p:nvPr/>
+        </p:nvSpPr>
+        <p:spPr>
+          <a:xfrm>
+            <a:off x="4507920" y="3182040"/>
+            <a:ext cx="3287520" cy="2738880"/>
+          </a:xfrm>
+          <a:prstGeom prst="roundRect">
+            <a:avLst>
+              <a:gd name="adj" fmla="val 16667"/>
+            </a:avLst>
+          </a:prstGeom>
+          <a:solidFill>
+            <a:srgbClr val="08080a"/>
+          </a:solidFill>
+          <a:ln>
+            <a:noFill/>
+          </a:ln>
+          <a:effectLst>
+            <a:outerShdw blurRad="39960" dir="5400000" dist="23040" rotWithShape="0">
+              <a:srgbClr val="000000">
+                <a:alpha val="35000"/>
+              </a:srgbClr>
+            </a:outerShdw>
+          </a:effectLst>
+        </p:spPr>
+        <p:style>
+          <a:lnRef idx="1">
+            <a:schemeClr val="accent1"/>
+          </a:lnRef>
+          <a:fillRef idx="3">
+            <a:schemeClr val="accent1"/>
+          </a:fillRef>
+          <a:effectRef idx="2">
+            <a:schemeClr val="accent1"/>
+          </a:effectRef>
+          <a:fontRef idx="minor"/>
+        </p:style>
+        <p:txBody>
+          <a:bodyPr lIns="90000" rIns="90000" tIns="45000" bIns="45000" anchor="ctr">
+            <a:noAutofit/>
+          </a:bodyPr>
+          <a:p>
+            <a:endParaRPr b="0" lang="en-US" sz="1800" spc="-1" strike="noStrike">
+              <a:solidFill>
+                <a:schemeClr val="lt1"/>
+              </a:solidFill>
+              <a:latin typeface="Calibri"/>
+              <a:ea typeface="DejaVu Sans"/>
+            </a:endParaRPr>
+          </a:p>
+        </p:txBody>
+      </p:sp>
+      <p:sp>
+        <p:nvSpPr>
+          <p:cNvPr id="271" name="Rounded Rectangle 68"/>
+          <p:cNvSpPr/>
+          <p:nvPr/>
+        </p:nvSpPr>
+        <p:spPr>
+          <a:xfrm>
+            <a:off x="4434840" y="3200400"/>
+            <a:ext cx="3287520" cy="3199320"/>
+          </a:xfrm>
+          <a:prstGeom prst="roundRect">
+            <a:avLst>
+              <a:gd name="adj" fmla="val 16667"/>
+            </a:avLst>
+          </a:prstGeom>
+          <a:solidFill>
+            <a:srgbClr val="16161c"/>
+          </a:solidFill>
+          <a:ln>
+            <a:solidFill>
+              <a:srgbClr val="464655"/>
+            </a:solidFill>
+            <a:round/>
+          </a:ln>
+          <a:effectLst>
+            <a:outerShdw blurRad="39960" dir="5400000" dist="23040" rotWithShape="0">
+              <a:srgbClr val="000000">
+                <a:alpha val="35000"/>
+              </a:srgbClr>
+            </a:outerShdw>
+          </a:effectLst>
+        </p:spPr>
+        <p:style>
+          <a:lnRef idx="1">
+            <a:schemeClr val="accent1"/>
+          </a:lnRef>
+          <a:fillRef idx="3">
+            <a:schemeClr val="accent1"/>
+          </a:fillRef>
+          <a:effectRef idx="2">
+            <a:schemeClr val="accent1"/>
+          </a:effectRef>
+          <a:fontRef idx="minor"/>
+        </p:style>
+        <p:txBody>
+          <a:bodyPr lIns="90000" rIns="90000" tIns="45000" bIns="45000" anchor="ctr">
+            <a:noAutofit/>
+          </a:bodyPr>
+          <a:p>
+            <a:pPr>
+              <a:lnSpc>
+                <a:spcPct val="100000"/>
+              </a:lnSpc>
+            </a:pPr>
+            <a:r>
+              <a:rPr b="0" lang="en-US" sz="1500" spc="-1" strike="noStrike">
+                <a:solidFill>
+                  <a:schemeClr val="lt1"/>
+                </a:solidFill>
+                <a:latin typeface="Calibri"/>
+                <a:ea typeface="DejaVu Sans"/>
+              </a:rPr>
+              <a:t>[ Operator Precedence ]</a:t>
+            </a:r>
+            <a:endParaRPr b="0" lang="en-US" sz="1500" spc="-1" strike="noStrike">
+              <a:solidFill>
+                <a:srgbClr val="ffffff"/>
+              </a:solidFill>
+              <a:latin typeface="Arial"/>
+            </a:endParaRPr>
+          </a:p>
+          <a:p>
+            <a:pPr>
+              <a:lnSpc>
+                <a:spcPct val="100000"/>
+              </a:lnSpc>
+            </a:pPr>
+            <a:r>
+              <a:rPr b="0" lang="en-US" sz="1500" spc="-1" strike="noStrike">
+                <a:solidFill>
+                  <a:schemeClr val="lt1"/>
+                </a:solidFill>
+                <a:latin typeface="Calibri"/>
+                <a:ea typeface="DejaVu Sans"/>
+              </a:rPr>
+              <a:t>├──</a:t>
+            </a:r>
+            <a:r>
+              <a:rPr b="0" lang="en-US" sz="1500" spc="-1" strike="noStrike">
+                <a:solidFill>
+                  <a:schemeClr val="lt1"/>
+                </a:solidFill>
+                <a:latin typeface="Calibri"/>
+                <a:ea typeface="DejaVu Sans"/>
+              </a:rPr>
+              <a:t>&gt; 1. Parentheses ()</a:t>
+            </a:r>
+            <a:endParaRPr b="0" lang="en-US" sz="1500" spc="-1" strike="noStrike">
+              <a:solidFill>
+                <a:srgbClr val="ffffff"/>
+              </a:solidFill>
+              <a:latin typeface="Arial"/>
+            </a:endParaRPr>
+          </a:p>
+          <a:p>
+            <a:pPr>
+              <a:lnSpc>
+                <a:spcPct val="100000"/>
+              </a:lnSpc>
+            </a:pPr>
+            <a:r>
+              <a:rPr b="0" lang="en-US" sz="1500" spc="-1" strike="noStrike">
+                <a:solidFill>
+                  <a:schemeClr val="lt1"/>
+                </a:solidFill>
+                <a:latin typeface="Calibri"/>
+                <a:ea typeface="DejaVu Sans"/>
+              </a:rPr>
+              <a:t>│ └── </a:t>
+            </a:r>
+            <a:r>
+              <a:rPr b="0" lang="en-US" sz="1500" spc="-1" strike="noStrike">
+                <a:solidFill>
+                  <a:schemeClr val="lt1"/>
+                </a:solidFill>
+                <a:latin typeface="Calibri"/>
+                <a:ea typeface="DejaVu Sans"/>
+              </a:rPr>
+              <a:t>Evaluated first, always.</a:t>
+            </a:r>
+            <a:endParaRPr b="0" lang="en-US" sz="1500" spc="-1" strike="noStrike">
+              <a:solidFill>
+                <a:srgbClr val="ffffff"/>
+              </a:solidFill>
+              <a:latin typeface="Arial"/>
+            </a:endParaRPr>
+          </a:p>
+          <a:p>
+            <a:pPr>
+              <a:lnSpc>
+                <a:spcPct val="100000"/>
+              </a:lnSpc>
+            </a:pPr>
+            <a:r>
+              <a:rPr b="0" lang="en-US" sz="1500" spc="-1" strike="noStrike">
+                <a:solidFill>
+                  <a:schemeClr val="lt1"/>
+                </a:solidFill>
+                <a:latin typeface="Calibri"/>
+                <a:ea typeface="DejaVu Sans"/>
+              </a:rPr>
+              <a:t>│</a:t>
+            </a:r>
+            <a:endParaRPr b="0" lang="en-US" sz="1500" spc="-1" strike="noStrike">
+              <a:solidFill>
+                <a:srgbClr val="ffffff"/>
+              </a:solidFill>
+              <a:latin typeface="Arial"/>
+            </a:endParaRPr>
+          </a:p>
+          <a:p>
+            <a:pPr>
+              <a:lnSpc>
+                <a:spcPct val="100000"/>
+              </a:lnSpc>
+            </a:pPr>
+            <a:r>
+              <a:rPr b="0" lang="en-US" sz="1500" spc="-1" strike="noStrike">
+                <a:solidFill>
+                  <a:schemeClr val="lt1"/>
+                </a:solidFill>
+                <a:latin typeface="Calibri"/>
+                <a:ea typeface="DejaVu Sans"/>
+              </a:rPr>
+              <a:t>├──</a:t>
+            </a:r>
+            <a:r>
+              <a:rPr b="0" lang="en-US" sz="1500" spc="-1" strike="noStrike">
+                <a:solidFill>
+                  <a:schemeClr val="lt1"/>
+                </a:solidFill>
+                <a:latin typeface="Calibri"/>
+                <a:ea typeface="DejaVu Sans"/>
+              </a:rPr>
+              <a:t>&gt; 2. Increment / Decrement ++, --</a:t>
+            </a:r>
+            <a:endParaRPr b="0" lang="en-US" sz="1500" spc="-1" strike="noStrike">
+              <a:solidFill>
+                <a:srgbClr val="ffffff"/>
+              </a:solidFill>
+              <a:latin typeface="Arial"/>
+            </a:endParaRPr>
+          </a:p>
+          <a:p>
+            <a:pPr>
+              <a:lnSpc>
+                <a:spcPct val="100000"/>
+              </a:lnSpc>
+            </a:pPr>
+            <a:r>
+              <a:rPr b="0" lang="en-US" sz="1500" spc="-1" strike="noStrike">
+                <a:solidFill>
+                  <a:schemeClr val="lt1"/>
+                </a:solidFill>
+                <a:latin typeface="Calibri"/>
+                <a:ea typeface="DejaVu Sans"/>
+              </a:rPr>
+              <a:t>│</a:t>
+            </a:r>
+            <a:endParaRPr b="0" lang="en-US" sz="1500" spc="-1" strike="noStrike">
+              <a:solidFill>
+                <a:srgbClr val="ffffff"/>
+              </a:solidFill>
+              <a:latin typeface="Arial"/>
+            </a:endParaRPr>
+          </a:p>
+          <a:p>
+            <a:pPr>
+              <a:lnSpc>
+                <a:spcPct val="100000"/>
+              </a:lnSpc>
+            </a:pPr>
+            <a:r>
+              <a:rPr b="0" lang="en-US" sz="1500" spc="-1" strike="noStrike">
+                <a:solidFill>
+                  <a:schemeClr val="lt1"/>
+                </a:solidFill>
+                <a:latin typeface="Calibri"/>
+                <a:ea typeface="DejaVu Sans"/>
+              </a:rPr>
+              <a:t>├──</a:t>
+            </a:r>
+            <a:r>
+              <a:rPr b="0" lang="en-US" sz="1500" spc="-1" strike="noStrike">
+                <a:solidFill>
+                  <a:schemeClr val="lt1"/>
+                </a:solidFill>
+                <a:latin typeface="Calibri"/>
+                <a:ea typeface="DejaVu Sans"/>
+              </a:rPr>
+              <a:t>&gt; 3. Multiply, Divide, Modulo *, /, %</a:t>
+            </a:r>
+            <a:endParaRPr b="0" lang="en-US" sz="1500" spc="-1" strike="noStrike">
+              <a:solidFill>
+                <a:srgbClr val="ffffff"/>
+              </a:solidFill>
+              <a:latin typeface="Arial"/>
+            </a:endParaRPr>
+          </a:p>
+          <a:p>
+            <a:pPr>
+              <a:lnSpc>
+                <a:spcPct val="100000"/>
+              </a:lnSpc>
+            </a:pPr>
+            <a:r>
+              <a:rPr b="0" lang="en-US" sz="1500" spc="-1" strike="noStrike">
+                <a:solidFill>
+                  <a:schemeClr val="lt1"/>
+                </a:solidFill>
+                <a:latin typeface="Calibri"/>
+                <a:ea typeface="DejaVu Sans"/>
+              </a:rPr>
+              <a:t>│ └── </a:t>
+            </a:r>
+            <a:r>
+              <a:rPr b="0" lang="en-US" sz="1500" spc="-1" strike="noStrike">
+                <a:solidFill>
+                  <a:schemeClr val="lt1"/>
+                </a:solidFill>
+                <a:latin typeface="Calibri"/>
+                <a:ea typeface="DejaVu Sans"/>
+              </a:rPr>
+              <a:t>Evaluated from left to right.</a:t>
+            </a:r>
+            <a:endParaRPr b="0" lang="en-US" sz="1500" spc="-1" strike="noStrike">
+              <a:solidFill>
+                <a:srgbClr val="ffffff"/>
+              </a:solidFill>
+              <a:latin typeface="Arial"/>
+            </a:endParaRPr>
+          </a:p>
+          <a:p>
+            <a:pPr>
+              <a:lnSpc>
+                <a:spcPct val="100000"/>
+              </a:lnSpc>
+            </a:pPr>
+            <a:r>
+              <a:rPr b="0" lang="en-US" sz="1500" spc="-1" strike="noStrike">
+                <a:solidFill>
+                  <a:schemeClr val="lt1"/>
+                </a:solidFill>
+                <a:latin typeface="Calibri"/>
+                <a:ea typeface="DejaVu Sans"/>
+              </a:rPr>
+              <a:t>│</a:t>
+            </a:r>
+            <a:endParaRPr b="0" lang="en-US" sz="1500" spc="-1" strike="noStrike">
+              <a:solidFill>
+                <a:srgbClr val="ffffff"/>
+              </a:solidFill>
+              <a:latin typeface="Arial"/>
+            </a:endParaRPr>
+          </a:p>
+          <a:p>
+            <a:pPr>
+              <a:lnSpc>
+                <a:spcPct val="100000"/>
+              </a:lnSpc>
+            </a:pPr>
+            <a:r>
+              <a:rPr b="0" lang="en-US" sz="1500" spc="-1" strike="noStrike">
+                <a:solidFill>
+                  <a:schemeClr val="lt1"/>
+                </a:solidFill>
+                <a:latin typeface="Calibri"/>
+                <a:ea typeface="DejaVu Sans"/>
+              </a:rPr>
+              <a:t>└──</a:t>
+            </a:r>
+            <a:r>
+              <a:rPr b="0" lang="en-US" sz="1500" spc="-1" strike="noStrike">
+                <a:solidFill>
+                  <a:schemeClr val="lt1"/>
+                </a:solidFill>
+                <a:latin typeface="Calibri"/>
+                <a:ea typeface="DejaVu Sans"/>
+              </a:rPr>
+              <a:t>&gt; 4. Add and Subtract +, -</a:t>
+            </a:r>
+            <a:endParaRPr b="0" lang="en-US" sz="1500" spc="-1" strike="noStrike">
+              <a:solidFill>
+                <a:srgbClr val="ffffff"/>
+              </a:solidFill>
+              <a:latin typeface="Arial"/>
+            </a:endParaRPr>
+          </a:p>
+          <a:p>
+            <a:pPr>
+              <a:lnSpc>
+                <a:spcPct val="100000"/>
+              </a:lnSpc>
+            </a:pPr>
+            <a:r>
+              <a:rPr b="0" lang="en-US" sz="1500" spc="-1" strike="noStrike">
+                <a:solidFill>
+                  <a:schemeClr val="lt1"/>
+                </a:solidFill>
+                <a:latin typeface="Calibri"/>
+                <a:ea typeface="DejaVu Sans"/>
+              </a:rPr>
+              <a:t>└── </a:t>
+            </a:r>
+            <a:r>
+              <a:rPr b="0" lang="en-US" sz="1500" spc="-1" strike="noStrike">
+                <a:solidFill>
+                  <a:schemeClr val="lt1"/>
+                </a:solidFill>
+                <a:latin typeface="Calibri"/>
+                <a:ea typeface="DejaVu Sans"/>
+              </a:rPr>
+              <a:t>Evaluated last.</a:t>
+            </a:r>
+            <a:endParaRPr b="0" lang="en-US" sz="1500" spc="-1" strike="noStrike">
+              <a:solidFill>
+                <a:srgbClr val="ffffff"/>
+              </a:solidFill>
+              <a:latin typeface="Arial"/>
+            </a:endParaRPr>
+          </a:p>
+        </p:txBody>
+      </p:sp>
+      <p:sp>
+        <p:nvSpPr>
+          <p:cNvPr id="272" name="Rounded Rectangle 69"/>
+          <p:cNvSpPr/>
+          <p:nvPr/>
+        </p:nvSpPr>
+        <p:spPr>
+          <a:xfrm>
+            <a:off x="8028360" y="3182040"/>
+            <a:ext cx="3287520" cy="2738880"/>
+          </a:xfrm>
+          <a:prstGeom prst="roundRect">
+            <a:avLst>
+              <a:gd name="adj" fmla="val 16667"/>
+            </a:avLst>
+          </a:prstGeom>
+          <a:solidFill>
+            <a:srgbClr val="08080a"/>
+          </a:solidFill>
+          <a:ln>
+            <a:noFill/>
+          </a:ln>
+          <a:effectLst>
+            <a:outerShdw blurRad="39960" dir="5400000" dist="23040" rotWithShape="0">
+              <a:srgbClr val="000000">
+                <a:alpha val="35000"/>
+              </a:srgbClr>
+            </a:outerShdw>
+          </a:effectLst>
+        </p:spPr>
+        <p:style>
+          <a:lnRef idx="1">
+            <a:schemeClr val="accent1"/>
+          </a:lnRef>
+          <a:fillRef idx="3">
+            <a:schemeClr val="accent1"/>
+          </a:fillRef>
+          <a:effectRef idx="2">
+            <a:schemeClr val="accent1"/>
+          </a:effectRef>
+          <a:fontRef idx="minor"/>
+        </p:style>
+        <p:txBody>
+          <a:bodyPr lIns="90000" rIns="90000" tIns="45000" bIns="45000" anchor="ctr">
+            <a:noAutofit/>
+          </a:bodyPr>
+          <a:p>
+            <a:endParaRPr b="0" lang="en-US" sz="1800" spc="-1" strike="noStrike">
+              <a:solidFill>
+                <a:schemeClr val="lt1"/>
+              </a:solidFill>
+              <a:latin typeface="Calibri"/>
+              <a:ea typeface="DejaVu Sans"/>
+            </a:endParaRPr>
+          </a:p>
+        </p:txBody>
+      </p:sp>
+      <p:sp>
+        <p:nvSpPr>
+          <p:cNvPr id="273" name="Rounded Rectangle 70"/>
+          <p:cNvSpPr/>
+          <p:nvPr/>
+        </p:nvSpPr>
+        <p:spPr>
+          <a:xfrm>
+            <a:off x="8003880" y="2971800"/>
+            <a:ext cx="3425760" cy="3426480"/>
+          </a:xfrm>
+          <a:prstGeom prst="roundRect">
+            <a:avLst>
+              <a:gd name="adj" fmla="val 16667"/>
+            </a:avLst>
+          </a:prstGeom>
+          <a:solidFill>
+            <a:srgbClr val="16161c"/>
+          </a:solidFill>
+          <a:ln>
+            <a:solidFill>
+              <a:srgbClr val="464655"/>
+            </a:solidFill>
+            <a:round/>
+          </a:ln>
+          <a:effectLst>
+            <a:outerShdw blurRad="39960" dir="5400000" dist="23040" rotWithShape="0">
+              <a:srgbClr val="000000">
+                <a:alpha val="35000"/>
+              </a:srgbClr>
+            </a:outerShdw>
+          </a:effectLst>
+        </p:spPr>
+        <p:style>
+          <a:lnRef idx="1">
+            <a:schemeClr val="accent1"/>
+          </a:lnRef>
+          <a:fillRef idx="3">
+            <a:schemeClr val="accent1"/>
+          </a:fillRef>
+          <a:effectRef idx="2">
+            <a:schemeClr val="accent1"/>
+          </a:effectRef>
+          <a:fontRef idx="minor"/>
+        </p:style>
+        <p:txBody>
+          <a:bodyPr lIns="90000" rIns="90000" tIns="45000" bIns="45000" anchor="ctr">
+            <a:noAutofit/>
+          </a:bodyPr>
+          <a:p>
+            <a:pPr algn="ctr">
+              <a:lnSpc>
+                <a:spcPct val="100000"/>
+              </a:lnSpc>
+            </a:pPr>
+            <a:r>
+              <a:rPr b="0" lang="en-US" sz="900" spc="-1" strike="noStrike">
+                <a:solidFill>
+                  <a:srgbClr val="78ffc8"/>
+                </a:solidFill>
+                <a:latin typeface="Consolas"/>
+                <a:ea typeface="DejaVu Sans"/>
+              </a:rPr>
+              <a:t>public class ArithmeticOps {</a:t>
+            </a:r>
+            <a:endParaRPr b="0" lang="en-US" sz="900" spc="-1" strike="noStrike">
+              <a:solidFill>
+                <a:srgbClr val="ffffff"/>
+              </a:solidFill>
+              <a:latin typeface="Arial"/>
+            </a:endParaRPr>
+          </a:p>
+          <a:p>
+            <a:pPr algn="ctr">
+              <a:lnSpc>
+                <a:spcPct val="100000"/>
+              </a:lnSpc>
+            </a:pPr>
+            <a:r>
+              <a:rPr b="0" lang="en-US" sz="900" spc="-1" strike="noStrike">
+                <a:solidFill>
+                  <a:srgbClr val="78ffc8"/>
+                </a:solidFill>
+                <a:latin typeface="Consolas"/>
+                <a:ea typeface="DejaVu Sans"/>
+              </a:rPr>
+              <a:t>    </a:t>
+            </a:r>
+            <a:r>
+              <a:rPr b="0" lang="en-US" sz="900" spc="-1" strike="noStrike">
+                <a:solidFill>
+                  <a:srgbClr val="78ffc8"/>
+                </a:solidFill>
+                <a:latin typeface="Consolas"/>
+                <a:ea typeface="DejaVu Sans"/>
+              </a:rPr>
+              <a:t>public static void main(String[] args) {</a:t>
+            </a:r>
+            <a:endParaRPr b="0" lang="en-US" sz="900" spc="-1" strike="noStrike">
+              <a:solidFill>
+                <a:srgbClr val="ffffff"/>
+              </a:solidFill>
+              <a:latin typeface="Arial"/>
+            </a:endParaRPr>
+          </a:p>
+          <a:p>
+            <a:pPr algn="ctr">
+              <a:lnSpc>
+                <a:spcPct val="100000"/>
+              </a:lnSpc>
+            </a:pPr>
+            <a:r>
+              <a:rPr b="0" lang="en-US" sz="900" spc="-1" strike="noStrike">
+                <a:solidFill>
+                  <a:srgbClr val="78ffc8"/>
+                </a:solidFill>
+                <a:latin typeface="Consolas"/>
+                <a:ea typeface="DejaVu Sans"/>
+              </a:rPr>
+              <a:t>        </a:t>
+            </a:r>
+            <a:r>
+              <a:rPr b="0" lang="en-US" sz="900" spc="-1" strike="noStrike">
+                <a:solidFill>
+                  <a:srgbClr val="78ffc8"/>
+                </a:solidFill>
+                <a:latin typeface="Consolas"/>
+                <a:ea typeface="DejaVu Sans"/>
+              </a:rPr>
+              <a:t>int a = 10;</a:t>
+            </a:r>
+            <a:endParaRPr b="0" lang="en-US" sz="900" spc="-1" strike="noStrike">
+              <a:solidFill>
+                <a:srgbClr val="ffffff"/>
+              </a:solidFill>
+              <a:latin typeface="Arial"/>
+            </a:endParaRPr>
+          </a:p>
+          <a:p>
+            <a:pPr algn="ctr">
+              <a:lnSpc>
+                <a:spcPct val="100000"/>
+              </a:lnSpc>
+            </a:pPr>
+            <a:r>
+              <a:rPr b="0" lang="en-US" sz="900" spc="-1" strike="noStrike">
+                <a:solidFill>
+                  <a:srgbClr val="78ffc8"/>
+                </a:solidFill>
+                <a:latin typeface="Consolas"/>
+                <a:ea typeface="DejaVu Sans"/>
+              </a:rPr>
+              <a:t>        </a:t>
+            </a:r>
+            <a:r>
+              <a:rPr b="0" lang="en-US" sz="900" spc="-1" strike="noStrike">
+                <a:solidFill>
+                  <a:srgbClr val="78ffc8"/>
+                </a:solidFill>
+                <a:latin typeface="Consolas"/>
+                <a:ea typeface="DejaVu Sans"/>
+              </a:rPr>
+              <a:t>int b = 3;</a:t>
+            </a:r>
+            <a:endParaRPr b="0" lang="en-US" sz="900" spc="-1" strike="noStrike">
+              <a:solidFill>
+                <a:srgbClr val="ffffff"/>
+              </a:solidFill>
+              <a:latin typeface="Arial"/>
+            </a:endParaRPr>
+          </a:p>
+          <a:p>
+            <a:pPr algn="ctr">
+              <a:lnSpc>
+                <a:spcPct val="100000"/>
+              </a:lnSpc>
+            </a:pPr>
+            <a:r>
+              <a:rPr b="0" lang="en-US" sz="900" spc="-1" strike="noStrike">
+                <a:solidFill>
+                  <a:srgbClr val="78ffc8"/>
+                </a:solidFill>
+                <a:latin typeface="Consolas"/>
+                <a:ea typeface="DejaVu Sans"/>
+              </a:rPr>
+              <a:t>        </a:t>
+            </a:r>
+            <a:r>
+              <a:rPr b="0" lang="en-US" sz="900" spc="-1" strike="noStrike">
+                <a:solidFill>
+                  <a:srgbClr val="78ffc8"/>
+                </a:solidFill>
+                <a:latin typeface="Consolas"/>
+                <a:ea typeface="DejaVu Sans"/>
+              </a:rPr>
+              <a:t>// Basic Operations</a:t>
+            </a:r>
+            <a:endParaRPr b="0" lang="en-US" sz="900" spc="-1" strike="noStrike">
+              <a:solidFill>
+                <a:srgbClr val="ffffff"/>
+              </a:solidFill>
+              <a:latin typeface="Arial"/>
+            </a:endParaRPr>
+          </a:p>
+          <a:p>
+            <a:pPr algn="ctr">
+              <a:lnSpc>
+                <a:spcPct val="100000"/>
+              </a:lnSpc>
+            </a:pPr>
+            <a:r>
+              <a:rPr b="0" lang="en-US" sz="900" spc="-1" strike="noStrike">
+                <a:solidFill>
+                  <a:srgbClr val="78ffc8"/>
+                </a:solidFill>
+                <a:latin typeface="Consolas"/>
+                <a:ea typeface="DejaVu Sans"/>
+              </a:rPr>
+              <a:t>        </a:t>
+            </a:r>
+            <a:r>
+              <a:rPr b="0" lang="en-US" sz="900" spc="-1" strike="noStrike">
+                <a:solidFill>
+                  <a:srgbClr val="78ffc8"/>
+                </a:solidFill>
+                <a:latin typeface="Consolas"/>
+                <a:ea typeface="DejaVu Sans"/>
+              </a:rPr>
+              <a:t>int sum = a + b; // 13</a:t>
+            </a:r>
+            <a:endParaRPr b="0" lang="en-US" sz="900" spc="-1" strike="noStrike">
+              <a:solidFill>
+                <a:srgbClr val="ffffff"/>
+              </a:solidFill>
+              <a:latin typeface="Arial"/>
+            </a:endParaRPr>
+          </a:p>
+          <a:p>
+            <a:pPr algn="ctr">
+              <a:lnSpc>
+                <a:spcPct val="100000"/>
+              </a:lnSpc>
+            </a:pPr>
+            <a:r>
+              <a:rPr b="0" lang="en-US" sz="900" spc="-1" strike="noStrike">
+                <a:solidFill>
+                  <a:srgbClr val="78ffc8"/>
+                </a:solidFill>
+                <a:latin typeface="Consolas"/>
+                <a:ea typeface="DejaVu Sans"/>
+              </a:rPr>
+              <a:t>        </a:t>
+            </a:r>
+            <a:r>
+              <a:rPr b="0" lang="en-US" sz="900" spc="-1" strike="noStrike">
+                <a:solidFill>
+                  <a:srgbClr val="78ffc8"/>
+                </a:solidFill>
+                <a:latin typeface="Consolas"/>
+                <a:ea typeface="DejaVu Sans"/>
+              </a:rPr>
+              <a:t>int div = a / b; // 3 (Decimals dropped)</a:t>
+            </a:r>
+            <a:endParaRPr b="0" lang="en-US" sz="900" spc="-1" strike="noStrike">
+              <a:solidFill>
+                <a:srgbClr val="ffffff"/>
+              </a:solidFill>
+              <a:latin typeface="Arial"/>
+            </a:endParaRPr>
+          </a:p>
+          <a:p>
+            <a:pPr algn="ctr">
+              <a:lnSpc>
+                <a:spcPct val="100000"/>
+              </a:lnSpc>
+            </a:pPr>
+            <a:r>
+              <a:rPr b="0" lang="en-US" sz="900" spc="-1" strike="noStrike">
+                <a:solidFill>
+                  <a:srgbClr val="78ffc8"/>
+                </a:solidFill>
+                <a:latin typeface="Consolas"/>
+                <a:ea typeface="DejaVu Sans"/>
+              </a:rPr>
+              <a:t>        </a:t>
+            </a:r>
+            <a:r>
+              <a:rPr b="0" lang="en-US" sz="900" spc="-1" strike="noStrike">
+                <a:solidFill>
+                  <a:srgbClr val="78ffc8"/>
+                </a:solidFill>
+                <a:latin typeface="Consolas"/>
+                <a:ea typeface="DejaVu Sans"/>
+              </a:rPr>
+              <a:t>int mod = a % b; // 1 (Remainder of 10/3)</a:t>
+            </a:r>
+            <a:endParaRPr b="0" lang="en-US" sz="900" spc="-1" strike="noStrike">
+              <a:solidFill>
+                <a:srgbClr val="ffffff"/>
+              </a:solidFill>
+              <a:latin typeface="Arial"/>
+            </a:endParaRPr>
+          </a:p>
+          <a:p>
+            <a:pPr algn="ctr">
+              <a:lnSpc>
+                <a:spcPct val="100000"/>
+              </a:lnSpc>
+            </a:pPr>
+            <a:r>
+              <a:rPr b="0" lang="en-US" sz="900" spc="-1" strike="noStrike">
+                <a:solidFill>
+                  <a:srgbClr val="78ffc8"/>
+                </a:solidFill>
+                <a:latin typeface="Consolas"/>
+                <a:ea typeface="DejaVu Sans"/>
+              </a:rPr>
+              <a:t>        </a:t>
+            </a:r>
+            <a:r>
+              <a:rPr b="0" lang="en-US" sz="900" spc="-1" strike="noStrike">
+                <a:solidFill>
+                  <a:srgbClr val="78ffc8"/>
+                </a:solidFill>
+                <a:latin typeface="Consolas"/>
+                <a:ea typeface="DejaVu Sans"/>
+              </a:rPr>
+              <a:t>// Precedence Rules</a:t>
+            </a:r>
+            <a:endParaRPr b="0" lang="en-US" sz="900" spc="-1" strike="noStrike">
+              <a:solidFill>
+                <a:srgbClr val="ffffff"/>
+              </a:solidFill>
+              <a:latin typeface="Arial"/>
+            </a:endParaRPr>
+          </a:p>
+          <a:p>
+            <a:pPr algn="ctr">
+              <a:lnSpc>
+                <a:spcPct val="100000"/>
+              </a:lnSpc>
+            </a:pPr>
+            <a:r>
+              <a:rPr b="0" lang="en-US" sz="900" spc="-1" strike="noStrike">
+                <a:solidFill>
+                  <a:srgbClr val="78ffc8"/>
+                </a:solidFill>
+                <a:latin typeface="Consolas"/>
+                <a:ea typeface="DejaVu Sans"/>
+              </a:rPr>
+              <a:t>        </a:t>
+            </a:r>
+            <a:r>
+              <a:rPr b="0" lang="en-US" sz="900" spc="-1" strike="noStrike">
+                <a:solidFill>
+                  <a:srgbClr val="78ffc8"/>
+                </a:solidFill>
+                <a:latin typeface="Consolas"/>
+                <a:ea typeface="DejaVu Sans"/>
+              </a:rPr>
+              <a:t>int noParen = a + b * 2;  // 16 (Multiply 1st)</a:t>
+            </a:r>
+            <a:endParaRPr b="0" lang="en-US" sz="900" spc="-1" strike="noStrike">
+              <a:solidFill>
+                <a:srgbClr val="ffffff"/>
+              </a:solidFill>
+              <a:latin typeface="Arial"/>
+            </a:endParaRPr>
+          </a:p>
+          <a:p>
+            <a:pPr algn="ctr">
+              <a:lnSpc>
+                <a:spcPct val="100000"/>
+              </a:lnSpc>
+            </a:pPr>
+            <a:r>
+              <a:rPr b="0" lang="en-US" sz="900" spc="-1" strike="noStrike">
+                <a:solidFill>
+                  <a:srgbClr val="78ffc8"/>
+                </a:solidFill>
+                <a:latin typeface="Consolas"/>
+                <a:ea typeface="DejaVu Sans"/>
+              </a:rPr>
+              <a:t>        </a:t>
+            </a:r>
+            <a:r>
+              <a:rPr b="0" lang="en-US" sz="900" spc="-1" strike="noStrike">
+                <a:solidFill>
+                  <a:srgbClr val="78ffc8"/>
+                </a:solidFill>
+                <a:latin typeface="Consolas"/>
+                <a:ea typeface="DejaVu Sans"/>
+              </a:rPr>
+              <a:t>int paren = (a + b) * 2;  // 26 (Brackets 1st)</a:t>
+            </a:r>
+            <a:endParaRPr b="0" lang="en-US" sz="900" spc="-1" strike="noStrike">
+              <a:solidFill>
+                <a:srgbClr val="ffffff"/>
+              </a:solidFill>
+              <a:latin typeface="Arial"/>
+            </a:endParaRPr>
+          </a:p>
+          <a:p>
+            <a:pPr algn="ctr">
+              <a:lnSpc>
+                <a:spcPct val="100000"/>
+              </a:lnSpc>
+            </a:pPr>
+            <a:r>
+              <a:rPr b="0" lang="en-US" sz="900" spc="-1" strike="noStrike">
+                <a:solidFill>
+                  <a:srgbClr val="78ffc8"/>
+                </a:solidFill>
+                <a:latin typeface="Consolas"/>
+                <a:ea typeface="DejaVu Sans"/>
+              </a:rPr>
+              <a:t>        </a:t>
+            </a:r>
+            <a:r>
+              <a:rPr b="0" lang="en-US" sz="900" spc="-1" strike="noStrike">
+                <a:solidFill>
+                  <a:srgbClr val="78ffc8"/>
+                </a:solidFill>
+                <a:latin typeface="Consolas"/>
+                <a:ea typeface="DejaVu Sans"/>
+              </a:rPr>
+              <a:t>// Increment Operator</a:t>
+            </a:r>
+            <a:endParaRPr b="0" lang="en-US" sz="900" spc="-1" strike="noStrike">
+              <a:solidFill>
+                <a:srgbClr val="ffffff"/>
+              </a:solidFill>
+              <a:latin typeface="Arial"/>
+            </a:endParaRPr>
+          </a:p>
+          <a:p>
+            <a:pPr algn="ctr">
+              <a:lnSpc>
+                <a:spcPct val="100000"/>
+              </a:lnSpc>
+            </a:pPr>
+            <a:r>
+              <a:rPr b="0" lang="en-US" sz="900" spc="-1" strike="noStrike">
+                <a:solidFill>
+                  <a:srgbClr val="78ffc8"/>
+                </a:solidFill>
+                <a:latin typeface="Consolas"/>
+                <a:ea typeface="DejaVu Sans"/>
+              </a:rPr>
+              <a:t>        </a:t>
+            </a:r>
+            <a:r>
+              <a:rPr b="0" lang="en-US" sz="900" spc="-1" strike="noStrike">
+                <a:solidFill>
+                  <a:srgbClr val="78ffc8"/>
+                </a:solidFill>
+                <a:latin typeface="Consolas"/>
+                <a:ea typeface="DejaVu Sans"/>
+              </a:rPr>
+              <a:t>int counter = 5;</a:t>
+            </a:r>
+            <a:endParaRPr b="0" lang="en-US" sz="900" spc="-1" strike="noStrike">
+              <a:solidFill>
+                <a:srgbClr val="ffffff"/>
+              </a:solidFill>
+              <a:latin typeface="Arial"/>
+            </a:endParaRPr>
+          </a:p>
+          <a:p>
+            <a:pPr algn="ctr">
+              <a:lnSpc>
+                <a:spcPct val="100000"/>
+              </a:lnSpc>
+            </a:pPr>
+            <a:r>
+              <a:rPr b="0" lang="en-US" sz="900" spc="-1" strike="noStrike">
+                <a:solidFill>
+                  <a:srgbClr val="78ffc8"/>
+                </a:solidFill>
+                <a:latin typeface="Consolas"/>
+                <a:ea typeface="DejaVu Sans"/>
+              </a:rPr>
+              <a:t>        </a:t>
+            </a:r>
+            <a:r>
+              <a:rPr b="0" lang="en-US" sz="900" spc="-1" strike="noStrike">
+                <a:solidFill>
+                  <a:srgbClr val="78ffc8"/>
+                </a:solidFill>
+                <a:latin typeface="Consolas"/>
+                <a:ea typeface="DejaVu Sans"/>
+              </a:rPr>
+              <a:t>counter++; // Value is now 6</a:t>
+            </a:r>
+            <a:endParaRPr b="0" lang="en-US" sz="900" spc="-1" strike="noStrike">
+              <a:solidFill>
+                <a:srgbClr val="ffffff"/>
+              </a:solidFill>
+              <a:latin typeface="Arial"/>
+            </a:endParaRPr>
+          </a:p>
+          <a:p>
+            <a:pPr algn="ctr">
+              <a:lnSpc>
+                <a:spcPct val="100000"/>
+              </a:lnSpc>
+            </a:pPr>
+            <a:r>
+              <a:rPr b="0" lang="en-US" sz="900" spc="-1" strike="noStrike">
+                <a:solidFill>
+                  <a:srgbClr val="78ffc8"/>
+                </a:solidFill>
+                <a:latin typeface="Consolas"/>
+                <a:ea typeface="DejaVu Sans"/>
+              </a:rPr>
+              <a:t>        </a:t>
+            </a:r>
+            <a:r>
+              <a:rPr b="0" lang="en-US" sz="900" spc="-1" strike="noStrike">
+                <a:solidFill>
+                  <a:srgbClr val="78ffc8"/>
+                </a:solidFill>
+                <a:latin typeface="Consolas"/>
+                <a:ea typeface="DejaVu Sans"/>
+              </a:rPr>
+              <a:t>System.out.println("Division: " + div);</a:t>
+            </a:r>
+            <a:endParaRPr b="0" lang="en-US" sz="900" spc="-1" strike="noStrike">
+              <a:solidFill>
+                <a:srgbClr val="ffffff"/>
+              </a:solidFill>
+              <a:latin typeface="Arial"/>
+            </a:endParaRPr>
+          </a:p>
+          <a:p>
+            <a:pPr algn="ctr">
+              <a:lnSpc>
+                <a:spcPct val="100000"/>
+              </a:lnSpc>
+            </a:pPr>
+            <a:r>
+              <a:rPr b="0" lang="en-US" sz="900" spc="-1" strike="noStrike">
+                <a:solidFill>
+                  <a:srgbClr val="78ffc8"/>
+                </a:solidFill>
+                <a:latin typeface="Consolas"/>
+                <a:ea typeface="DejaVu Sans"/>
+              </a:rPr>
+              <a:t>        </a:t>
+            </a:r>
+            <a:r>
+              <a:rPr b="0" lang="en-US" sz="900" spc="-1" strike="noStrike">
+                <a:solidFill>
+                  <a:srgbClr val="78ffc8"/>
+                </a:solidFill>
+                <a:latin typeface="Consolas"/>
+                <a:ea typeface="DejaVu Sans"/>
+              </a:rPr>
+              <a:t>System.out.println("Modulo: " + mod);</a:t>
+            </a:r>
+            <a:endParaRPr b="0" lang="en-US" sz="900" spc="-1" strike="noStrike">
+              <a:solidFill>
+                <a:srgbClr val="ffffff"/>
+              </a:solidFill>
+              <a:latin typeface="Arial"/>
+            </a:endParaRPr>
+          </a:p>
+          <a:p>
+            <a:pPr algn="ctr">
+              <a:lnSpc>
+                <a:spcPct val="100000"/>
+              </a:lnSpc>
+            </a:pPr>
+            <a:r>
+              <a:rPr b="0" lang="en-US" sz="900" spc="-1" strike="noStrike">
+                <a:solidFill>
+                  <a:srgbClr val="78ffc8"/>
+                </a:solidFill>
+                <a:latin typeface="Consolas"/>
+                <a:ea typeface="DejaVu Sans"/>
+              </a:rPr>
+              <a:t>        </a:t>
+            </a:r>
+            <a:r>
+              <a:rPr b="0" lang="en-US" sz="900" spc="-1" strike="noStrike">
+                <a:solidFill>
+                  <a:srgbClr val="78ffc8"/>
+                </a:solidFill>
+                <a:latin typeface="Consolas"/>
+                <a:ea typeface="DejaVu Sans"/>
+              </a:rPr>
+              <a:t>System.out.println("Counter: " + counter);</a:t>
+            </a:r>
+            <a:endParaRPr b="0" lang="en-US" sz="900" spc="-1" strike="noStrike">
+              <a:solidFill>
+                <a:srgbClr val="ffffff"/>
+              </a:solidFill>
+              <a:latin typeface="Arial"/>
+            </a:endParaRPr>
+          </a:p>
+          <a:p>
+            <a:pPr algn="ctr">
+              <a:lnSpc>
+                <a:spcPct val="100000"/>
+              </a:lnSpc>
+            </a:pPr>
+            <a:r>
+              <a:rPr b="0" lang="en-US" sz="900" spc="-1" strike="noStrike">
+                <a:solidFill>
+                  <a:srgbClr val="78ffc8"/>
+                </a:solidFill>
+                <a:latin typeface="Consolas"/>
+                <a:ea typeface="DejaVu Sans"/>
+              </a:rPr>
+              <a:t>    </a:t>
+            </a:r>
+            <a:r>
+              <a:rPr b="0" lang="en-US" sz="900" spc="-1" strike="noStrike">
+                <a:solidFill>
+                  <a:srgbClr val="78ffc8"/>
+                </a:solidFill>
+                <a:latin typeface="Consolas"/>
+                <a:ea typeface="DejaVu Sans"/>
+              </a:rPr>
+              <a:t>}</a:t>
+            </a:r>
+            <a:endParaRPr b="0" lang="en-US" sz="900" spc="-1" strike="noStrike">
+              <a:solidFill>
+                <a:srgbClr val="ffffff"/>
+              </a:solidFill>
+              <a:latin typeface="Arial"/>
+            </a:endParaRPr>
+          </a:p>
+          <a:p>
+            <a:pPr algn="ctr">
+              <a:lnSpc>
+                <a:spcPct val="100000"/>
+              </a:lnSpc>
+            </a:pPr>
+            <a:r>
+              <a:rPr b="0" lang="en-US" sz="900" spc="-1" strike="noStrike">
+                <a:solidFill>
+                  <a:srgbClr val="78ffc8"/>
+                </a:solidFill>
+                <a:latin typeface="Consolas"/>
+                <a:ea typeface="DejaVu Sans"/>
+              </a:rPr>
+              <a:t>}</a:t>
+            </a:r>
+            <a:endParaRPr b="0" lang="en-US" sz="900" spc="-1" strike="noStrike">
+              <a:solidFill>
+                <a:srgbClr val="ffffff"/>
+              </a:solidFill>
+              <a:latin typeface="Arial"/>
+            </a:endParaRPr>
+          </a:p>
+        </p:txBody>
+      </p:sp>
+      <p:sp>
+        <p:nvSpPr>
+          <p:cNvPr id="274" name="TextBox 30"/>
           <p:cNvSpPr/>
           <p:nvPr/>
         </p:nvSpPr>

--- a/Java/Java #4/EN/Java #4.pptx
+++ b/Java/Java #4/EN/Java #4.pptx
@@ -14,6 +14,7 @@
     <p:sldId id="262" r:id="rId9"/>
     <p:sldId id="263" r:id="rId10"/>
     <p:sldId id="264" r:id="rId11"/>
+    <p:sldId id="265" r:id="rId12"/>
   </p:sldIdLst>
   <p:sldSz cx="9144000" cy="6858000"/>
   <p:notesSz cx="7772400" cy="10058400"/>
@@ -71,7 +72,7 @@
         <p:txBody>
           <a:bodyPr/>
           <a:p>
-            <a:fld id="{22CD7935-3A16-4678-956B-DA3E8907E1E1}" type="slidenum">
+            <a:fld id="{26C54C2C-9E6E-419B-A1F8-2E8A7508EAC4}" type="slidenum">
               <a:t>&lt;#&gt;</a:t>
             </a:fld>
           </a:p>
@@ -280,7 +281,7 @@
         <p:txBody>
           <a:bodyPr/>
           <a:p>
-            <a:fld id="{349DD0EA-2B33-401F-A7C9-36A3B9B1AD6A}" type="slidenum">
+            <a:fld id="{DDE37F82-E7DE-4B8F-8764-2CC4317D132D}" type="slidenum">
               <a:t>&lt;#&gt;</a:t>
             </a:fld>
           </a:p>
@@ -575,7 +576,7 @@
         <p:txBody>
           <a:bodyPr/>
           <a:p>
-            <a:fld id="{B7EAD84E-F8E6-4787-A9A2-4A9F123A8D95}" type="slidenum">
+            <a:fld id="{579855FD-BC38-4A58-AB7B-33708F446EEF}" type="slidenum">
               <a:t>&lt;#&gt;</a:t>
             </a:fld>
           </a:p>
@@ -956,7 +957,7 @@
         <p:txBody>
           <a:bodyPr/>
           <a:p>
-            <a:fld id="{1293499C-2518-480E-AF62-19AC537E6066}" type="slidenum">
+            <a:fld id="{9007820D-9111-488D-A48E-73EF6CF871A5}" type="slidenum">
               <a:t>&lt;#&gt;</a:t>
             </a:fld>
           </a:p>
@@ -1119,7 +1120,7 @@
         <p:txBody>
           <a:bodyPr/>
           <a:p>
-            <a:fld id="{097CCA2F-E283-4071-8F1A-18CDEE3444AE}" type="slidenum">
+            <a:fld id="{51674CA3-0A2E-4D3D-BF08-88C2B1294163}" type="slidenum">
               <a:t>&lt;#&gt;</a:t>
             </a:fld>
           </a:p>
@@ -1285,7 +1286,7 @@
         <p:txBody>
           <a:bodyPr/>
           <a:p>
-            <a:fld id="{2FCB82FD-6926-4716-A259-1BC7482DE2BF}" type="slidenum">
+            <a:fld id="{C754D595-7F46-48BB-BB3C-210B393766A0}" type="slidenum">
               <a:t>&lt;#&gt;</a:t>
             </a:fld>
           </a:p>
@@ -1494,7 +1495,7 @@
         <p:txBody>
           <a:bodyPr/>
           <a:p>
-            <a:fld id="{DAABD296-C21E-4453-AFEC-79D00A44DA41}" type="slidenum">
+            <a:fld id="{228B0BC0-32BD-493B-BB33-26331D548A35}" type="slidenum">
               <a:t>&lt;#&gt;</a:t>
             </a:fld>
           </a:p>
@@ -1617,7 +1618,7 @@
         <p:txBody>
           <a:bodyPr/>
           <a:p>
-            <a:fld id="{E9C8815C-7ED9-4058-A4DA-35FB35CDC4F1}" type="slidenum">
+            <a:fld id="{4D32D896-012D-477C-AAF5-559B0A6826A5}" type="slidenum">
               <a:t>&lt;#&gt;</a:t>
             </a:fld>
           </a:p>
@@ -1738,7 +1739,7 @@
         <p:txBody>
           <a:bodyPr/>
           <a:p>
-            <a:fld id="{0C0B13F9-19F7-4025-832E-1EFB0603D43F}" type="slidenum">
+            <a:fld id="{5FAFB4EA-2765-4DB9-BCA2-AED0727F076A}" type="slidenum">
               <a:t>&lt;#&gt;</a:t>
             </a:fld>
           </a:p>
@@ -1990,7 +1991,7 @@
         <p:txBody>
           <a:bodyPr/>
           <a:p>
-            <a:fld id="{7229F33F-FF5F-4027-B581-89EE7FB11148}" type="slidenum">
+            <a:fld id="{2C96ED4B-BB6A-49C5-A7FF-289660321197}" type="slidenum">
               <a:t>&lt;#&gt;</a:t>
             </a:fld>
           </a:p>
@@ -2242,7 +2243,7 @@
         <p:txBody>
           <a:bodyPr/>
           <a:p>
-            <a:fld id="{3AE986E7-F055-45B3-8F56-059E022F4FD4}" type="slidenum">
+            <a:fld id="{CBD972E8-753D-457E-B4A0-DDFE7A2D8390}" type="slidenum">
               <a:t>&lt;#&gt;</a:t>
             </a:fld>
           </a:p>
@@ -2494,7 +2495,7 @@
         <p:txBody>
           <a:bodyPr/>
           <a:p>
-            <a:fld id="{9F7E6E72-F823-41D5-9432-3F9D7E2CB883}" type="slidenum">
+            <a:fld id="{6483F3D6-118D-4660-B2F4-993B7C827574}" type="slidenum">
               <a:t>&lt;#&gt;</a:t>
             </a:fld>
           </a:p>
@@ -2563,7 +2564,7 @@
         <p:spPr>
           <a:xfrm>
             <a:off x="3124080" y="6356520"/>
-            <a:ext cx="2891520" cy="361080"/>
+            <a:ext cx="2891160" cy="360720"/>
           </a:xfrm>
           <a:prstGeom prst="rect">
             <a:avLst/>
@@ -2635,7 +2636,7 @@
         <p:spPr>
           <a:xfrm>
             <a:off x="6553080" y="6356520"/>
-            <a:ext cx="2129760" cy="361080"/>
+            <a:ext cx="2129400" cy="360720"/>
           </a:xfrm>
           <a:prstGeom prst="rect">
             <a:avLst/>
@@ -2676,7 +2677,7 @@
                 <a:tab algn="l" pos="0"/>
               </a:tabLst>
             </a:pPr>
-            <a:fld id="{8B14188A-A0D4-4ED7-8733-444220C84E72}" type="slidenum">
+            <a:fld id="{02E76955-3845-4CA4-BADE-45918DA371D3}" type="slidenum">
               <a:rPr b="0" lang="en-US" sz="1200" spc="-1" strike="noStrike">
                 <a:solidFill>
                   <a:srgbClr val="8b8b8b"/>
@@ -2707,7 +2708,7 @@
         <p:spPr>
           <a:xfrm>
             <a:off x="457200" y="6356520"/>
-            <a:ext cx="2129760" cy="361080"/>
+            <a:ext cx="2129400" cy="360720"/>
           </a:xfrm>
           <a:prstGeom prst="rect">
             <a:avLst/>
@@ -3074,7 +3075,7 @@
         <p:spPr>
           <a:xfrm>
             <a:off x="0" y="0"/>
-            <a:ext cx="12184920" cy="6854040"/>
+            <a:ext cx="12184560" cy="6853680"/>
           </a:xfrm>
           <a:prstGeom prst="rect">
             <a:avLst/>
@@ -3134,7 +3135,7 @@
         <p:spPr>
           <a:xfrm>
             <a:off x="0" y="0"/>
-            <a:ext cx="14400" cy="6854040"/>
+            <a:ext cx="14040" cy="6853680"/>
           </a:xfrm>
           <a:prstGeom prst="rect">
             <a:avLst/>
@@ -3194,7 +3195,7 @@
         <p:spPr>
           <a:xfrm>
             <a:off x="914400" y="0"/>
-            <a:ext cx="14400" cy="6854040"/>
+            <a:ext cx="14040" cy="6853680"/>
           </a:xfrm>
           <a:prstGeom prst="rect">
             <a:avLst/>
@@ -3254,7 +3255,7 @@
         <p:spPr>
           <a:xfrm>
             <a:off x="1828800" y="0"/>
-            <a:ext cx="14400" cy="6854040"/>
+            <a:ext cx="14040" cy="6853680"/>
           </a:xfrm>
           <a:prstGeom prst="rect">
             <a:avLst/>
@@ -3314,7 +3315,7 @@
         <p:spPr>
           <a:xfrm>
             <a:off x="2743200" y="0"/>
-            <a:ext cx="14400" cy="6854040"/>
+            <a:ext cx="14040" cy="6853680"/>
           </a:xfrm>
           <a:prstGeom prst="rect">
             <a:avLst/>
@@ -3374,7 +3375,7 @@
         <p:spPr>
           <a:xfrm>
             <a:off x="3657600" y="0"/>
-            <a:ext cx="14400" cy="6854040"/>
+            <a:ext cx="14040" cy="6853680"/>
           </a:xfrm>
           <a:prstGeom prst="rect">
             <a:avLst/>
@@ -3434,7 +3435,7 @@
         <p:spPr>
           <a:xfrm>
             <a:off x="4572000" y="0"/>
-            <a:ext cx="14400" cy="6854040"/>
+            <a:ext cx="14040" cy="6853680"/>
           </a:xfrm>
           <a:prstGeom prst="rect">
             <a:avLst/>
@@ -3494,7 +3495,7 @@
         <p:spPr>
           <a:xfrm>
             <a:off x="5486400" y="0"/>
-            <a:ext cx="14400" cy="6854040"/>
+            <a:ext cx="14040" cy="6853680"/>
           </a:xfrm>
           <a:prstGeom prst="rect">
             <a:avLst/>
@@ -3554,7 +3555,7 @@
         <p:spPr>
           <a:xfrm>
             <a:off x="6400800" y="0"/>
-            <a:ext cx="14400" cy="6854040"/>
+            <a:ext cx="14040" cy="6853680"/>
           </a:xfrm>
           <a:prstGeom prst="rect">
             <a:avLst/>
@@ -3614,7 +3615,7 @@
         <p:spPr>
           <a:xfrm>
             <a:off x="7315200" y="0"/>
-            <a:ext cx="14400" cy="6854040"/>
+            <a:ext cx="14040" cy="6853680"/>
           </a:xfrm>
           <a:prstGeom prst="rect">
             <a:avLst/>
@@ -3674,7 +3675,7 @@
         <p:spPr>
           <a:xfrm>
             <a:off x="8229600" y="0"/>
-            <a:ext cx="14400" cy="6854040"/>
+            <a:ext cx="14040" cy="6853680"/>
           </a:xfrm>
           <a:prstGeom prst="rect">
             <a:avLst/>
@@ -3734,7 +3735,7 @@
         <p:spPr>
           <a:xfrm>
             <a:off x="9144000" y="0"/>
-            <a:ext cx="14400" cy="6854040"/>
+            <a:ext cx="14040" cy="6853680"/>
           </a:xfrm>
           <a:prstGeom prst="rect">
             <a:avLst/>
@@ -3794,7 +3795,7 @@
         <p:spPr>
           <a:xfrm>
             <a:off x="10058400" y="0"/>
-            <a:ext cx="14400" cy="6854040"/>
+            <a:ext cx="14040" cy="6853680"/>
           </a:xfrm>
           <a:prstGeom prst="rect">
             <a:avLst/>
@@ -3854,7 +3855,7 @@
         <p:spPr>
           <a:xfrm>
             <a:off x="10972800" y="0"/>
-            <a:ext cx="14400" cy="6854040"/>
+            <a:ext cx="14040" cy="6853680"/>
           </a:xfrm>
           <a:prstGeom prst="rect">
             <a:avLst/>
@@ -3914,7 +3915,7 @@
         <p:spPr>
           <a:xfrm>
             <a:off x="11887200" y="0"/>
-            <a:ext cx="14400" cy="6854040"/>
+            <a:ext cx="14040" cy="6853680"/>
           </a:xfrm>
           <a:prstGeom prst="rect">
             <a:avLst/>
@@ -3974,7 +3975,7 @@
         <p:spPr>
           <a:xfrm>
             <a:off x="0" y="0"/>
-            <a:ext cx="316080" cy="6854040"/>
+            <a:ext cx="315720" cy="6853680"/>
           </a:xfrm>
           <a:prstGeom prst="rect">
             <a:avLst/>
@@ -4034,7 +4035,7 @@
         <p:spPr>
           <a:xfrm>
             <a:off x="9875520" y="365760"/>
-            <a:ext cx="2007720" cy="498960"/>
+            <a:ext cx="2007360" cy="498600"/>
           </a:xfrm>
           <a:prstGeom prst="roundRect">
             <a:avLst>
@@ -4262,7 +4263,7 @@
         <p:spPr>
           <a:xfrm>
             <a:off x="987480" y="3182040"/>
-            <a:ext cx="3287880" cy="2739240"/>
+            <a:ext cx="3287520" cy="2738880"/>
           </a:xfrm>
           <a:prstGeom prst="roundRect">
             <a:avLst>
@@ -4324,7 +4325,7 @@
         <p:spPr>
           <a:xfrm>
             <a:off x="914400" y="3108960"/>
-            <a:ext cx="3287880" cy="2739240"/>
+            <a:ext cx="3287520" cy="2738880"/>
           </a:xfrm>
           <a:prstGeom prst="roundRect">
             <a:avLst>
@@ -4458,7 +4459,7 @@
         <p:spPr>
           <a:xfrm>
             <a:off x="4507920" y="3182040"/>
-            <a:ext cx="3287880" cy="2739240"/>
+            <a:ext cx="3287520" cy="2738880"/>
           </a:xfrm>
           <a:prstGeom prst="roundRect">
             <a:avLst>
@@ -4520,7 +4521,7 @@
         <p:spPr>
           <a:xfrm>
             <a:off x="4434840" y="3108960"/>
-            <a:ext cx="3287880" cy="2739240"/>
+            <a:ext cx="3287520" cy="2738880"/>
           </a:xfrm>
           <a:prstGeom prst="roundRect">
             <a:avLst>
@@ -4778,7 +4779,7 @@
         <p:spPr>
           <a:xfrm>
             <a:off x="8028360" y="3182040"/>
-            <a:ext cx="3287880" cy="2739240"/>
+            <a:ext cx="3287520" cy="2738880"/>
           </a:xfrm>
           <a:prstGeom prst="roundRect">
             <a:avLst>
@@ -4840,7 +4841,7 @@
         <p:spPr>
           <a:xfrm>
             <a:off x="7955280" y="2971800"/>
-            <a:ext cx="3929040" cy="3654720"/>
+            <a:ext cx="3928680" cy="3654360"/>
           </a:xfrm>
           <a:prstGeom prst="roundRect">
             <a:avLst>
@@ -5261,6 +5262,2557 @@
       <p:sp>
         <p:nvSpPr>
           <p:cNvPr id="66" name="TextBox 26"/>
+          <p:cNvSpPr/>
+          <p:nvPr/>
+        </p:nvSpPr>
+        <p:spPr>
+          <a:xfrm>
+            <a:off x="4600080" y="6446520"/>
+            <a:ext cx="3051000" cy="363960"/>
+          </a:xfrm>
+          <a:prstGeom prst="rect">
+            <a:avLst/>
+          </a:prstGeom>
+          <a:noFill/>
+          <a:ln w="0">
+            <a:noFill/>
+          </a:ln>
+        </p:spPr>
+        <p:style>
+          <a:lnRef idx="0"/>
+          <a:fillRef idx="0"/>
+          <a:effectRef idx="0"/>
+          <a:fontRef idx="minor"/>
+        </p:style>
+        <p:txBody>
+          <a:bodyPr wrap="none" lIns="90000" rIns="90000" tIns="45000" bIns="45000" anchor="t">
+            <a:spAutoFit/>
+          </a:bodyPr>
+          <a:p>
+            <a:pPr>
+              <a:lnSpc>
+                <a:spcPct val="100000"/>
+              </a:lnSpc>
+            </a:pPr>
+            <a:r>
+              <a:rPr b="0" lang="en-US" sz="1800" spc="-1" strike="noStrike">
+                <a:solidFill>
+                  <a:srgbClr val="000000"/>
+                </a:solidFill>
+                <a:latin typeface="Calibri"/>
+                <a:ea typeface="DejaVu Sans"/>
+              </a:rPr>
+              <a:t>Java • Ultra Premium Template</a:t>
+            </a:r>
+            <a:endParaRPr b="0" lang="en-US" sz="1800" spc="-1" strike="noStrike">
+              <a:solidFill>
+                <a:srgbClr val="000000"/>
+              </a:solidFill>
+              <a:latin typeface="Arial"/>
+            </a:endParaRPr>
+          </a:p>
+        </p:txBody>
+      </p:sp>
+    </p:spTree>
+  </p:cSld>
+  <mc:AlternateContent>
+    <mc:Choice Requires="p14">
+      <p:transition spd="slow" p14:dur="2000"/>
+    </mc:Choice>
+    <mc:Fallback>
+      <p:transition spd="slow"/>
+    </mc:Fallback>
+  </mc:AlternateContent>
+</p:sld>
+</file>
+
+<file path=ppt/slides/slide10.xml><?xml version="1.0" encoding="utf-8"?>
+<p:sld xmlns:a="http://schemas.openxmlformats.org/drawingml/2006/main" xmlns:p="http://schemas.openxmlformats.org/presentationml/2006/main" xmlns:r="http://schemas.openxmlformats.org/officeDocument/2006/relationships" xmlns:p14="http://schemas.microsoft.com/office/powerpoint/2010/main" xmlns:p15="http://schemas.microsoft.com/office/powerpoint/2012/main" xmlns:mc="http://schemas.openxmlformats.org/markup-compatibility/2006">
+  <p:cSld>
+    <p:spTree>
+      <p:nvGrpSpPr>
+        <p:cNvPr id="1" name=""/>
+        <p:cNvGrpSpPr/>
+        <p:nvPr/>
+      </p:nvGrpSpPr>
+      <p:grpSpPr>
+        <a:xfrm>
+          <a:off x="0" y="0"/>
+          <a:ext cx="0" cy="0"/>
+          <a:chOff x="0" y="0"/>
+          <a:chExt cx="0" cy="0"/>
+        </a:xfrm>
+      </p:grpSpPr>
+      <p:sp>
+        <p:nvSpPr>
+          <p:cNvPr id="275" name="Rectangle 145"/>
+          <p:cNvSpPr/>
+          <p:nvPr/>
+        </p:nvSpPr>
+        <p:spPr>
+          <a:xfrm>
+            <a:off x="0" y="0"/>
+            <a:ext cx="12184560" cy="6853680"/>
+          </a:xfrm>
+          <a:prstGeom prst="rect">
+            <a:avLst/>
+          </a:prstGeom>
+          <a:solidFill>
+            <a:srgbClr val="0b0b0d"/>
+          </a:solidFill>
+          <a:ln>
+            <a:noFill/>
+          </a:ln>
+          <a:effectLst>
+            <a:outerShdw blurRad="39960" dir="5400000" dist="23040" rotWithShape="0">
+              <a:srgbClr val="000000">
+                <a:alpha val="35000"/>
+              </a:srgbClr>
+            </a:outerShdw>
+          </a:effectLst>
+        </p:spPr>
+        <p:style>
+          <a:lnRef idx="1">
+            <a:schemeClr val="accent1"/>
+          </a:lnRef>
+          <a:fillRef idx="3">
+            <a:schemeClr val="accent1"/>
+          </a:fillRef>
+          <a:effectRef idx="2">
+            <a:schemeClr val="accent1"/>
+          </a:effectRef>
+          <a:fontRef idx="minor"/>
+        </p:style>
+        <p:txBody>
+          <a:bodyPr lIns="90000" rIns="90000" tIns="45000" bIns="45000" anchor="ctr">
+            <a:noAutofit/>
+          </a:bodyPr>
+          <a:p>
+            <a:endParaRPr b="0" lang="en-US" sz="1800" spc="-1" strike="noStrike">
+              <a:solidFill>
+                <a:schemeClr val="lt1"/>
+              </a:solidFill>
+              <a:latin typeface="Calibri"/>
+              <a:ea typeface="DejaVu Sans"/>
+            </a:endParaRPr>
+          </a:p>
+        </p:txBody>
+      </p:sp>
+      <p:sp>
+        <p:nvSpPr>
+          <p:cNvPr id="276" name="Rectangle 146"/>
+          <p:cNvSpPr/>
+          <p:nvPr/>
+        </p:nvSpPr>
+        <p:spPr>
+          <a:xfrm>
+            <a:off x="0" y="0"/>
+            <a:ext cx="14040" cy="6853680"/>
+          </a:xfrm>
+          <a:prstGeom prst="rect">
+            <a:avLst/>
+          </a:prstGeom>
+          <a:solidFill>
+            <a:srgbClr val="121216"/>
+          </a:solidFill>
+          <a:ln>
+            <a:noFill/>
+          </a:ln>
+          <a:effectLst>
+            <a:outerShdw blurRad="39960" dir="5400000" dist="23040" rotWithShape="0">
+              <a:srgbClr val="000000">
+                <a:alpha val="35000"/>
+              </a:srgbClr>
+            </a:outerShdw>
+          </a:effectLst>
+        </p:spPr>
+        <p:style>
+          <a:lnRef idx="1">
+            <a:schemeClr val="accent1"/>
+          </a:lnRef>
+          <a:fillRef idx="3">
+            <a:schemeClr val="accent1"/>
+          </a:fillRef>
+          <a:effectRef idx="2">
+            <a:schemeClr val="accent1"/>
+          </a:effectRef>
+          <a:fontRef idx="minor"/>
+        </p:style>
+        <p:txBody>
+          <a:bodyPr lIns="90000" rIns="90000" tIns="45000" bIns="45000" anchor="ctr">
+            <a:noAutofit/>
+          </a:bodyPr>
+          <a:p>
+            <a:endParaRPr b="0" lang="en-US" sz="1800" spc="-1" strike="noStrike">
+              <a:solidFill>
+                <a:schemeClr val="lt1"/>
+              </a:solidFill>
+              <a:latin typeface="Calibri"/>
+              <a:ea typeface="DejaVu Sans"/>
+            </a:endParaRPr>
+          </a:p>
+        </p:txBody>
+      </p:sp>
+      <p:sp>
+        <p:nvSpPr>
+          <p:cNvPr id="277" name="Rectangle 147"/>
+          <p:cNvSpPr/>
+          <p:nvPr/>
+        </p:nvSpPr>
+        <p:spPr>
+          <a:xfrm>
+            <a:off x="914400" y="0"/>
+            <a:ext cx="14040" cy="6853680"/>
+          </a:xfrm>
+          <a:prstGeom prst="rect">
+            <a:avLst/>
+          </a:prstGeom>
+          <a:solidFill>
+            <a:srgbClr val="121216"/>
+          </a:solidFill>
+          <a:ln>
+            <a:noFill/>
+          </a:ln>
+          <a:effectLst>
+            <a:outerShdw blurRad="39960" dir="5400000" dist="23040" rotWithShape="0">
+              <a:srgbClr val="000000">
+                <a:alpha val="35000"/>
+              </a:srgbClr>
+            </a:outerShdw>
+          </a:effectLst>
+        </p:spPr>
+        <p:style>
+          <a:lnRef idx="1">
+            <a:schemeClr val="accent1"/>
+          </a:lnRef>
+          <a:fillRef idx="3">
+            <a:schemeClr val="accent1"/>
+          </a:fillRef>
+          <a:effectRef idx="2">
+            <a:schemeClr val="accent1"/>
+          </a:effectRef>
+          <a:fontRef idx="minor"/>
+        </p:style>
+        <p:txBody>
+          <a:bodyPr lIns="90000" rIns="90000" tIns="45000" bIns="45000" anchor="ctr">
+            <a:noAutofit/>
+          </a:bodyPr>
+          <a:p>
+            <a:endParaRPr b="0" lang="en-US" sz="1800" spc="-1" strike="noStrike">
+              <a:solidFill>
+                <a:schemeClr val="lt1"/>
+              </a:solidFill>
+              <a:latin typeface="Calibri"/>
+              <a:ea typeface="DejaVu Sans"/>
+            </a:endParaRPr>
+          </a:p>
+        </p:txBody>
+      </p:sp>
+      <p:sp>
+        <p:nvSpPr>
+          <p:cNvPr id="278" name="Rectangle 148"/>
+          <p:cNvSpPr/>
+          <p:nvPr/>
+        </p:nvSpPr>
+        <p:spPr>
+          <a:xfrm>
+            <a:off x="1828800" y="0"/>
+            <a:ext cx="14040" cy="6853680"/>
+          </a:xfrm>
+          <a:prstGeom prst="rect">
+            <a:avLst/>
+          </a:prstGeom>
+          <a:solidFill>
+            <a:srgbClr val="121216"/>
+          </a:solidFill>
+          <a:ln>
+            <a:noFill/>
+          </a:ln>
+          <a:effectLst>
+            <a:outerShdw blurRad="39960" dir="5400000" dist="23040" rotWithShape="0">
+              <a:srgbClr val="000000">
+                <a:alpha val="35000"/>
+              </a:srgbClr>
+            </a:outerShdw>
+          </a:effectLst>
+        </p:spPr>
+        <p:style>
+          <a:lnRef idx="1">
+            <a:schemeClr val="accent1"/>
+          </a:lnRef>
+          <a:fillRef idx="3">
+            <a:schemeClr val="accent1"/>
+          </a:fillRef>
+          <a:effectRef idx="2">
+            <a:schemeClr val="accent1"/>
+          </a:effectRef>
+          <a:fontRef idx="minor"/>
+        </p:style>
+        <p:txBody>
+          <a:bodyPr lIns="90000" rIns="90000" tIns="45000" bIns="45000" anchor="ctr">
+            <a:noAutofit/>
+          </a:bodyPr>
+          <a:p>
+            <a:endParaRPr b="0" lang="en-US" sz="1800" spc="-1" strike="noStrike">
+              <a:solidFill>
+                <a:schemeClr val="lt1"/>
+              </a:solidFill>
+              <a:latin typeface="Calibri"/>
+              <a:ea typeface="DejaVu Sans"/>
+            </a:endParaRPr>
+          </a:p>
+        </p:txBody>
+      </p:sp>
+      <p:sp>
+        <p:nvSpPr>
+          <p:cNvPr id="279" name="Rectangle 149"/>
+          <p:cNvSpPr/>
+          <p:nvPr/>
+        </p:nvSpPr>
+        <p:spPr>
+          <a:xfrm>
+            <a:off x="2743200" y="0"/>
+            <a:ext cx="14040" cy="6853680"/>
+          </a:xfrm>
+          <a:prstGeom prst="rect">
+            <a:avLst/>
+          </a:prstGeom>
+          <a:solidFill>
+            <a:srgbClr val="121216"/>
+          </a:solidFill>
+          <a:ln>
+            <a:noFill/>
+          </a:ln>
+          <a:effectLst>
+            <a:outerShdw blurRad="39960" dir="5400000" dist="23040" rotWithShape="0">
+              <a:srgbClr val="000000">
+                <a:alpha val="35000"/>
+              </a:srgbClr>
+            </a:outerShdw>
+          </a:effectLst>
+        </p:spPr>
+        <p:style>
+          <a:lnRef idx="1">
+            <a:schemeClr val="accent1"/>
+          </a:lnRef>
+          <a:fillRef idx="3">
+            <a:schemeClr val="accent1"/>
+          </a:fillRef>
+          <a:effectRef idx="2">
+            <a:schemeClr val="accent1"/>
+          </a:effectRef>
+          <a:fontRef idx="minor"/>
+        </p:style>
+        <p:txBody>
+          <a:bodyPr lIns="90000" rIns="90000" tIns="45000" bIns="45000" anchor="ctr">
+            <a:noAutofit/>
+          </a:bodyPr>
+          <a:p>
+            <a:endParaRPr b="0" lang="en-US" sz="1800" spc="-1" strike="noStrike">
+              <a:solidFill>
+                <a:schemeClr val="lt1"/>
+              </a:solidFill>
+              <a:latin typeface="Calibri"/>
+              <a:ea typeface="DejaVu Sans"/>
+            </a:endParaRPr>
+          </a:p>
+        </p:txBody>
+      </p:sp>
+      <p:sp>
+        <p:nvSpPr>
+          <p:cNvPr id="280" name="Rectangle 150"/>
+          <p:cNvSpPr/>
+          <p:nvPr/>
+        </p:nvSpPr>
+        <p:spPr>
+          <a:xfrm>
+            <a:off x="3657600" y="0"/>
+            <a:ext cx="14040" cy="6853680"/>
+          </a:xfrm>
+          <a:prstGeom prst="rect">
+            <a:avLst/>
+          </a:prstGeom>
+          <a:solidFill>
+            <a:srgbClr val="121216"/>
+          </a:solidFill>
+          <a:ln>
+            <a:noFill/>
+          </a:ln>
+          <a:effectLst>
+            <a:outerShdw blurRad="39960" dir="5400000" dist="23040" rotWithShape="0">
+              <a:srgbClr val="000000">
+                <a:alpha val="35000"/>
+              </a:srgbClr>
+            </a:outerShdw>
+          </a:effectLst>
+        </p:spPr>
+        <p:style>
+          <a:lnRef idx="1">
+            <a:schemeClr val="accent1"/>
+          </a:lnRef>
+          <a:fillRef idx="3">
+            <a:schemeClr val="accent1"/>
+          </a:fillRef>
+          <a:effectRef idx="2">
+            <a:schemeClr val="accent1"/>
+          </a:effectRef>
+          <a:fontRef idx="minor"/>
+        </p:style>
+        <p:txBody>
+          <a:bodyPr lIns="90000" rIns="90000" tIns="45000" bIns="45000" anchor="ctr">
+            <a:noAutofit/>
+          </a:bodyPr>
+          <a:p>
+            <a:endParaRPr b="0" lang="en-US" sz="1800" spc="-1" strike="noStrike">
+              <a:solidFill>
+                <a:schemeClr val="lt1"/>
+              </a:solidFill>
+              <a:latin typeface="Calibri"/>
+              <a:ea typeface="DejaVu Sans"/>
+            </a:endParaRPr>
+          </a:p>
+        </p:txBody>
+      </p:sp>
+      <p:sp>
+        <p:nvSpPr>
+          <p:cNvPr id="281" name="Rectangle 151"/>
+          <p:cNvSpPr/>
+          <p:nvPr/>
+        </p:nvSpPr>
+        <p:spPr>
+          <a:xfrm>
+            <a:off x="4572000" y="0"/>
+            <a:ext cx="14040" cy="6853680"/>
+          </a:xfrm>
+          <a:prstGeom prst="rect">
+            <a:avLst/>
+          </a:prstGeom>
+          <a:solidFill>
+            <a:srgbClr val="121216"/>
+          </a:solidFill>
+          <a:ln>
+            <a:noFill/>
+          </a:ln>
+          <a:effectLst>
+            <a:outerShdw blurRad="39960" dir="5400000" dist="23040" rotWithShape="0">
+              <a:srgbClr val="000000">
+                <a:alpha val="35000"/>
+              </a:srgbClr>
+            </a:outerShdw>
+          </a:effectLst>
+        </p:spPr>
+        <p:style>
+          <a:lnRef idx="1">
+            <a:schemeClr val="accent1"/>
+          </a:lnRef>
+          <a:fillRef idx="3">
+            <a:schemeClr val="accent1"/>
+          </a:fillRef>
+          <a:effectRef idx="2">
+            <a:schemeClr val="accent1"/>
+          </a:effectRef>
+          <a:fontRef idx="minor"/>
+        </p:style>
+        <p:txBody>
+          <a:bodyPr lIns="90000" rIns="90000" tIns="45000" bIns="45000" anchor="ctr">
+            <a:noAutofit/>
+          </a:bodyPr>
+          <a:p>
+            <a:endParaRPr b="0" lang="en-US" sz="1800" spc="-1" strike="noStrike">
+              <a:solidFill>
+                <a:schemeClr val="lt1"/>
+              </a:solidFill>
+              <a:latin typeface="Calibri"/>
+              <a:ea typeface="DejaVu Sans"/>
+            </a:endParaRPr>
+          </a:p>
+        </p:txBody>
+      </p:sp>
+      <p:sp>
+        <p:nvSpPr>
+          <p:cNvPr id="282" name="Rectangle 152"/>
+          <p:cNvSpPr/>
+          <p:nvPr/>
+        </p:nvSpPr>
+        <p:spPr>
+          <a:xfrm>
+            <a:off x="5486400" y="0"/>
+            <a:ext cx="14040" cy="6853680"/>
+          </a:xfrm>
+          <a:prstGeom prst="rect">
+            <a:avLst/>
+          </a:prstGeom>
+          <a:solidFill>
+            <a:srgbClr val="121216"/>
+          </a:solidFill>
+          <a:ln>
+            <a:noFill/>
+          </a:ln>
+          <a:effectLst>
+            <a:outerShdw blurRad="39960" dir="5400000" dist="23040" rotWithShape="0">
+              <a:srgbClr val="000000">
+                <a:alpha val="35000"/>
+              </a:srgbClr>
+            </a:outerShdw>
+          </a:effectLst>
+        </p:spPr>
+        <p:style>
+          <a:lnRef idx="1">
+            <a:schemeClr val="accent1"/>
+          </a:lnRef>
+          <a:fillRef idx="3">
+            <a:schemeClr val="accent1"/>
+          </a:fillRef>
+          <a:effectRef idx="2">
+            <a:schemeClr val="accent1"/>
+          </a:effectRef>
+          <a:fontRef idx="minor"/>
+        </p:style>
+        <p:txBody>
+          <a:bodyPr lIns="90000" rIns="90000" tIns="45000" bIns="45000" anchor="ctr">
+            <a:noAutofit/>
+          </a:bodyPr>
+          <a:p>
+            <a:endParaRPr b="0" lang="en-US" sz="1800" spc="-1" strike="noStrike">
+              <a:solidFill>
+                <a:schemeClr val="lt1"/>
+              </a:solidFill>
+              <a:latin typeface="Calibri"/>
+              <a:ea typeface="DejaVu Sans"/>
+            </a:endParaRPr>
+          </a:p>
+        </p:txBody>
+      </p:sp>
+      <p:sp>
+        <p:nvSpPr>
+          <p:cNvPr id="283" name="Rectangle 153"/>
+          <p:cNvSpPr/>
+          <p:nvPr/>
+        </p:nvSpPr>
+        <p:spPr>
+          <a:xfrm>
+            <a:off x="6400800" y="0"/>
+            <a:ext cx="14040" cy="6853680"/>
+          </a:xfrm>
+          <a:prstGeom prst="rect">
+            <a:avLst/>
+          </a:prstGeom>
+          <a:solidFill>
+            <a:srgbClr val="121216"/>
+          </a:solidFill>
+          <a:ln>
+            <a:noFill/>
+          </a:ln>
+          <a:effectLst>
+            <a:outerShdw blurRad="39960" dir="5400000" dist="23040" rotWithShape="0">
+              <a:srgbClr val="000000">
+                <a:alpha val="35000"/>
+              </a:srgbClr>
+            </a:outerShdw>
+          </a:effectLst>
+        </p:spPr>
+        <p:style>
+          <a:lnRef idx="1">
+            <a:schemeClr val="accent1"/>
+          </a:lnRef>
+          <a:fillRef idx="3">
+            <a:schemeClr val="accent1"/>
+          </a:fillRef>
+          <a:effectRef idx="2">
+            <a:schemeClr val="accent1"/>
+          </a:effectRef>
+          <a:fontRef idx="minor"/>
+        </p:style>
+        <p:txBody>
+          <a:bodyPr lIns="90000" rIns="90000" tIns="45000" bIns="45000" anchor="ctr">
+            <a:noAutofit/>
+          </a:bodyPr>
+          <a:p>
+            <a:endParaRPr b="0" lang="en-US" sz="1800" spc="-1" strike="noStrike">
+              <a:solidFill>
+                <a:schemeClr val="lt1"/>
+              </a:solidFill>
+              <a:latin typeface="Calibri"/>
+              <a:ea typeface="DejaVu Sans"/>
+            </a:endParaRPr>
+          </a:p>
+        </p:txBody>
+      </p:sp>
+      <p:sp>
+        <p:nvSpPr>
+          <p:cNvPr id="284" name="Rectangle 154"/>
+          <p:cNvSpPr/>
+          <p:nvPr/>
+        </p:nvSpPr>
+        <p:spPr>
+          <a:xfrm>
+            <a:off x="7315200" y="0"/>
+            <a:ext cx="14040" cy="6853680"/>
+          </a:xfrm>
+          <a:prstGeom prst="rect">
+            <a:avLst/>
+          </a:prstGeom>
+          <a:solidFill>
+            <a:srgbClr val="121216"/>
+          </a:solidFill>
+          <a:ln>
+            <a:noFill/>
+          </a:ln>
+          <a:effectLst>
+            <a:outerShdw blurRad="39960" dir="5400000" dist="23040" rotWithShape="0">
+              <a:srgbClr val="000000">
+                <a:alpha val="35000"/>
+              </a:srgbClr>
+            </a:outerShdw>
+          </a:effectLst>
+        </p:spPr>
+        <p:style>
+          <a:lnRef idx="1">
+            <a:schemeClr val="accent1"/>
+          </a:lnRef>
+          <a:fillRef idx="3">
+            <a:schemeClr val="accent1"/>
+          </a:fillRef>
+          <a:effectRef idx="2">
+            <a:schemeClr val="accent1"/>
+          </a:effectRef>
+          <a:fontRef idx="minor"/>
+        </p:style>
+        <p:txBody>
+          <a:bodyPr lIns="90000" rIns="90000" tIns="45000" bIns="45000" anchor="ctr">
+            <a:noAutofit/>
+          </a:bodyPr>
+          <a:p>
+            <a:endParaRPr b="0" lang="en-US" sz="1800" spc="-1" strike="noStrike">
+              <a:solidFill>
+                <a:schemeClr val="lt1"/>
+              </a:solidFill>
+              <a:latin typeface="Calibri"/>
+              <a:ea typeface="DejaVu Sans"/>
+            </a:endParaRPr>
+          </a:p>
+        </p:txBody>
+      </p:sp>
+      <p:sp>
+        <p:nvSpPr>
+          <p:cNvPr id="285" name="Rectangle 155"/>
+          <p:cNvSpPr/>
+          <p:nvPr/>
+        </p:nvSpPr>
+        <p:spPr>
+          <a:xfrm>
+            <a:off x="8229600" y="0"/>
+            <a:ext cx="14040" cy="6853680"/>
+          </a:xfrm>
+          <a:prstGeom prst="rect">
+            <a:avLst/>
+          </a:prstGeom>
+          <a:solidFill>
+            <a:srgbClr val="121216"/>
+          </a:solidFill>
+          <a:ln>
+            <a:noFill/>
+          </a:ln>
+          <a:effectLst>
+            <a:outerShdw blurRad="39960" dir="5400000" dist="23040" rotWithShape="0">
+              <a:srgbClr val="000000">
+                <a:alpha val="35000"/>
+              </a:srgbClr>
+            </a:outerShdw>
+          </a:effectLst>
+        </p:spPr>
+        <p:style>
+          <a:lnRef idx="1">
+            <a:schemeClr val="accent1"/>
+          </a:lnRef>
+          <a:fillRef idx="3">
+            <a:schemeClr val="accent1"/>
+          </a:fillRef>
+          <a:effectRef idx="2">
+            <a:schemeClr val="accent1"/>
+          </a:effectRef>
+          <a:fontRef idx="minor"/>
+        </p:style>
+        <p:txBody>
+          <a:bodyPr lIns="90000" rIns="90000" tIns="45000" bIns="45000" anchor="ctr">
+            <a:noAutofit/>
+          </a:bodyPr>
+          <a:p>
+            <a:endParaRPr b="0" lang="en-US" sz="1800" spc="-1" strike="noStrike">
+              <a:solidFill>
+                <a:schemeClr val="lt1"/>
+              </a:solidFill>
+              <a:latin typeface="Calibri"/>
+              <a:ea typeface="DejaVu Sans"/>
+            </a:endParaRPr>
+          </a:p>
+        </p:txBody>
+      </p:sp>
+      <p:sp>
+        <p:nvSpPr>
+          <p:cNvPr id="286" name="Rectangle 156"/>
+          <p:cNvSpPr/>
+          <p:nvPr/>
+        </p:nvSpPr>
+        <p:spPr>
+          <a:xfrm>
+            <a:off x="9144000" y="0"/>
+            <a:ext cx="14040" cy="6853680"/>
+          </a:xfrm>
+          <a:prstGeom prst="rect">
+            <a:avLst/>
+          </a:prstGeom>
+          <a:solidFill>
+            <a:srgbClr val="121216"/>
+          </a:solidFill>
+          <a:ln>
+            <a:noFill/>
+          </a:ln>
+          <a:effectLst>
+            <a:outerShdw blurRad="39960" dir="5400000" dist="23040" rotWithShape="0">
+              <a:srgbClr val="000000">
+                <a:alpha val="35000"/>
+              </a:srgbClr>
+            </a:outerShdw>
+          </a:effectLst>
+        </p:spPr>
+        <p:style>
+          <a:lnRef idx="1">
+            <a:schemeClr val="accent1"/>
+          </a:lnRef>
+          <a:fillRef idx="3">
+            <a:schemeClr val="accent1"/>
+          </a:fillRef>
+          <a:effectRef idx="2">
+            <a:schemeClr val="accent1"/>
+          </a:effectRef>
+          <a:fontRef idx="minor"/>
+        </p:style>
+        <p:txBody>
+          <a:bodyPr lIns="90000" rIns="90000" tIns="45000" bIns="45000" anchor="ctr">
+            <a:noAutofit/>
+          </a:bodyPr>
+          <a:p>
+            <a:endParaRPr b="0" lang="en-US" sz="1800" spc="-1" strike="noStrike">
+              <a:solidFill>
+                <a:schemeClr val="lt1"/>
+              </a:solidFill>
+              <a:latin typeface="Calibri"/>
+              <a:ea typeface="DejaVu Sans"/>
+            </a:endParaRPr>
+          </a:p>
+        </p:txBody>
+      </p:sp>
+      <p:sp>
+        <p:nvSpPr>
+          <p:cNvPr id="287" name="Rectangle 157"/>
+          <p:cNvSpPr/>
+          <p:nvPr/>
+        </p:nvSpPr>
+        <p:spPr>
+          <a:xfrm>
+            <a:off x="10058400" y="0"/>
+            <a:ext cx="14040" cy="6853680"/>
+          </a:xfrm>
+          <a:prstGeom prst="rect">
+            <a:avLst/>
+          </a:prstGeom>
+          <a:solidFill>
+            <a:srgbClr val="121216"/>
+          </a:solidFill>
+          <a:ln>
+            <a:noFill/>
+          </a:ln>
+          <a:effectLst>
+            <a:outerShdw blurRad="39960" dir="5400000" dist="23040" rotWithShape="0">
+              <a:srgbClr val="000000">
+                <a:alpha val="35000"/>
+              </a:srgbClr>
+            </a:outerShdw>
+          </a:effectLst>
+        </p:spPr>
+        <p:style>
+          <a:lnRef idx="1">
+            <a:schemeClr val="accent1"/>
+          </a:lnRef>
+          <a:fillRef idx="3">
+            <a:schemeClr val="accent1"/>
+          </a:fillRef>
+          <a:effectRef idx="2">
+            <a:schemeClr val="accent1"/>
+          </a:effectRef>
+          <a:fontRef idx="minor"/>
+        </p:style>
+        <p:txBody>
+          <a:bodyPr lIns="90000" rIns="90000" tIns="45000" bIns="45000" anchor="ctr">
+            <a:noAutofit/>
+          </a:bodyPr>
+          <a:p>
+            <a:endParaRPr b="0" lang="en-US" sz="1800" spc="-1" strike="noStrike">
+              <a:solidFill>
+                <a:schemeClr val="lt1"/>
+              </a:solidFill>
+              <a:latin typeface="Calibri"/>
+              <a:ea typeface="DejaVu Sans"/>
+            </a:endParaRPr>
+          </a:p>
+        </p:txBody>
+      </p:sp>
+      <p:sp>
+        <p:nvSpPr>
+          <p:cNvPr id="288" name="Rectangle 158"/>
+          <p:cNvSpPr/>
+          <p:nvPr/>
+        </p:nvSpPr>
+        <p:spPr>
+          <a:xfrm>
+            <a:off x="10972800" y="0"/>
+            <a:ext cx="14040" cy="6853680"/>
+          </a:xfrm>
+          <a:prstGeom prst="rect">
+            <a:avLst/>
+          </a:prstGeom>
+          <a:solidFill>
+            <a:srgbClr val="121216"/>
+          </a:solidFill>
+          <a:ln>
+            <a:noFill/>
+          </a:ln>
+          <a:effectLst>
+            <a:outerShdw blurRad="39960" dir="5400000" dist="23040" rotWithShape="0">
+              <a:srgbClr val="000000">
+                <a:alpha val="35000"/>
+              </a:srgbClr>
+            </a:outerShdw>
+          </a:effectLst>
+        </p:spPr>
+        <p:style>
+          <a:lnRef idx="1">
+            <a:schemeClr val="accent1"/>
+          </a:lnRef>
+          <a:fillRef idx="3">
+            <a:schemeClr val="accent1"/>
+          </a:fillRef>
+          <a:effectRef idx="2">
+            <a:schemeClr val="accent1"/>
+          </a:effectRef>
+          <a:fontRef idx="minor"/>
+        </p:style>
+        <p:txBody>
+          <a:bodyPr lIns="90000" rIns="90000" tIns="45000" bIns="45000" anchor="ctr">
+            <a:noAutofit/>
+          </a:bodyPr>
+          <a:p>
+            <a:endParaRPr b="0" lang="en-US" sz="1800" spc="-1" strike="noStrike">
+              <a:solidFill>
+                <a:schemeClr val="lt1"/>
+              </a:solidFill>
+              <a:latin typeface="Calibri"/>
+              <a:ea typeface="DejaVu Sans"/>
+            </a:endParaRPr>
+          </a:p>
+        </p:txBody>
+      </p:sp>
+      <p:sp>
+        <p:nvSpPr>
+          <p:cNvPr id="289" name="Rectangle 159"/>
+          <p:cNvSpPr/>
+          <p:nvPr/>
+        </p:nvSpPr>
+        <p:spPr>
+          <a:xfrm>
+            <a:off x="11887200" y="0"/>
+            <a:ext cx="14040" cy="6853680"/>
+          </a:xfrm>
+          <a:prstGeom prst="rect">
+            <a:avLst/>
+          </a:prstGeom>
+          <a:solidFill>
+            <a:srgbClr val="121216"/>
+          </a:solidFill>
+          <a:ln>
+            <a:noFill/>
+          </a:ln>
+          <a:effectLst>
+            <a:outerShdw blurRad="39960" dir="5400000" dist="23040" rotWithShape="0">
+              <a:srgbClr val="000000">
+                <a:alpha val="35000"/>
+              </a:srgbClr>
+            </a:outerShdw>
+          </a:effectLst>
+        </p:spPr>
+        <p:style>
+          <a:lnRef idx="1">
+            <a:schemeClr val="accent1"/>
+          </a:lnRef>
+          <a:fillRef idx="3">
+            <a:schemeClr val="accent1"/>
+          </a:fillRef>
+          <a:effectRef idx="2">
+            <a:schemeClr val="accent1"/>
+          </a:effectRef>
+          <a:fontRef idx="minor"/>
+        </p:style>
+        <p:txBody>
+          <a:bodyPr lIns="90000" rIns="90000" tIns="45000" bIns="45000" anchor="ctr">
+            <a:noAutofit/>
+          </a:bodyPr>
+          <a:p>
+            <a:endParaRPr b="0" lang="en-US" sz="1800" spc="-1" strike="noStrike">
+              <a:solidFill>
+                <a:schemeClr val="lt1"/>
+              </a:solidFill>
+              <a:latin typeface="Calibri"/>
+              <a:ea typeface="DejaVu Sans"/>
+            </a:endParaRPr>
+          </a:p>
+        </p:txBody>
+      </p:sp>
+      <p:sp>
+        <p:nvSpPr>
+          <p:cNvPr id="290" name="Rectangle 160"/>
+          <p:cNvSpPr/>
+          <p:nvPr/>
+        </p:nvSpPr>
+        <p:spPr>
+          <a:xfrm>
+            <a:off x="0" y="0"/>
+            <a:ext cx="315720" cy="6853680"/>
+          </a:xfrm>
+          <a:prstGeom prst="rect">
+            <a:avLst/>
+          </a:prstGeom>
+          <a:solidFill>
+            <a:srgbClr val="ff8c00"/>
+          </a:solidFill>
+          <a:ln>
+            <a:noFill/>
+          </a:ln>
+          <a:effectLst>
+            <a:outerShdw blurRad="39960" dir="5400000" dist="23040" rotWithShape="0">
+              <a:srgbClr val="000000">
+                <a:alpha val="35000"/>
+              </a:srgbClr>
+            </a:outerShdw>
+          </a:effectLst>
+        </p:spPr>
+        <p:style>
+          <a:lnRef idx="1">
+            <a:schemeClr val="accent1"/>
+          </a:lnRef>
+          <a:fillRef idx="3">
+            <a:schemeClr val="accent1"/>
+          </a:fillRef>
+          <a:effectRef idx="2">
+            <a:schemeClr val="accent1"/>
+          </a:effectRef>
+          <a:fontRef idx="minor"/>
+        </p:style>
+        <p:txBody>
+          <a:bodyPr lIns="90000" rIns="90000" tIns="45000" bIns="45000" anchor="ctr">
+            <a:noAutofit/>
+          </a:bodyPr>
+          <a:p>
+            <a:endParaRPr b="0" lang="en-US" sz="1800" spc="-1" strike="noStrike">
+              <a:solidFill>
+                <a:schemeClr val="lt1"/>
+              </a:solidFill>
+              <a:latin typeface="Calibri"/>
+              <a:ea typeface="DejaVu Sans"/>
+            </a:endParaRPr>
+          </a:p>
+        </p:txBody>
+      </p:sp>
+      <p:sp>
+        <p:nvSpPr>
+          <p:cNvPr id="291" name="Rounded Rectangle 71"/>
+          <p:cNvSpPr/>
+          <p:nvPr/>
+        </p:nvSpPr>
+        <p:spPr>
+          <a:xfrm>
+            <a:off x="9875520" y="365760"/>
+            <a:ext cx="2007360" cy="498600"/>
+          </a:xfrm>
+          <a:prstGeom prst="roundRect">
+            <a:avLst>
+              <a:gd name="adj" fmla="val 16667"/>
+            </a:avLst>
+          </a:prstGeom>
+          <a:solidFill>
+            <a:srgbClr val="1e1e24"/>
+          </a:solidFill>
+          <a:ln>
+            <a:solidFill>
+              <a:srgbClr val="ff8c00"/>
+            </a:solidFill>
+            <a:round/>
+          </a:ln>
+          <a:effectLst>
+            <a:outerShdw blurRad="39960" dir="5400000" dist="23040" rotWithShape="0">
+              <a:srgbClr val="000000">
+                <a:alpha val="35000"/>
+              </a:srgbClr>
+            </a:outerShdw>
+          </a:effectLst>
+        </p:spPr>
+        <p:style>
+          <a:lnRef idx="1">
+            <a:schemeClr val="accent1"/>
+          </a:lnRef>
+          <a:fillRef idx="3">
+            <a:schemeClr val="accent1"/>
+          </a:fillRef>
+          <a:effectRef idx="2">
+            <a:schemeClr val="accent1"/>
+          </a:effectRef>
+          <a:fontRef idx="minor"/>
+        </p:style>
+        <p:txBody>
+          <a:bodyPr lIns="90000" rIns="90000" tIns="45000" bIns="45000" anchor="ctr">
+            <a:noAutofit/>
+          </a:bodyPr>
+          <a:p>
+            <a:pPr algn="ctr">
+              <a:lnSpc>
+                <a:spcPct val="100000"/>
+              </a:lnSpc>
+            </a:pPr>
+            <a:r>
+              <a:rPr b="1" lang="en-US" sz="1400" spc="-1" strike="noStrike">
+                <a:solidFill>
+                  <a:srgbClr val="ffb45a"/>
+                </a:solidFill>
+                <a:latin typeface="Calibri"/>
+                <a:ea typeface="DejaVu Sans"/>
+              </a:rPr>
+              <a:t>JAVA CORE</a:t>
+            </a:r>
+            <a:endParaRPr b="0" lang="en-US" sz="1400" spc="-1" strike="noStrike">
+              <a:solidFill>
+                <a:srgbClr val="ffffff"/>
+              </a:solidFill>
+              <a:latin typeface="Arial"/>
+            </a:endParaRPr>
+          </a:p>
+        </p:txBody>
+      </p:sp>
+      <p:sp>
+        <p:nvSpPr>
+          <p:cNvPr id="292" name="TextBox 31"/>
+          <p:cNvSpPr/>
+          <p:nvPr/>
+        </p:nvSpPr>
+        <p:spPr>
+          <a:xfrm>
+            <a:off x="1072440" y="914400"/>
+            <a:ext cx="8823600" cy="639000"/>
+          </a:xfrm>
+          <a:prstGeom prst="rect">
+            <a:avLst/>
+          </a:prstGeom>
+          <a:noFill/>
+          <a:ln w="0">
+            <a:noFill/>
+          </a:ln>
+        </p:spPr>
+        <p:style>
+          <a:lnRef idx="0"/>
+          <a:fillRef idx="0"/>
+          <a:effectRef idx="0"/>
+          <a:fontRef idx="minor"/>
+        </p:style>
+        <p:txBody>
+          <a:bodyPr wrap="none" lIns="90000" rIns="90000" tIns="45000" bIns="45000" anchor="t">
+            <a:spAutoFit/>
+          </a:bodyPr>
+          <a:p>
+            <a:pPr>
+              <a:lnSpc>
+                <a:spcPct val="100000"/>
+              </a:lnSpc>
+            </a:pPr>
+            <a:r>
+              <a:rPr b="1" lang="en-US" sz="3600" spc="-1" strike="noStrike">
+                <a:solidFill>
+                  <a:srgbClr val="f5f5f5"/>
+                </a:solidFill>
+                <a:latin typeface="Calibri"/>
+                <a:ea typeface="DejaVu Sans"/>
+              </a:rPr>
+              <a:t>Arithmetic Operators (Part 2: Prefix &amp; Postfix)</a:t>
+            </a:r>
+            <a:endParaRPr b="0" lang="en-US" sz="3600" spc="-1" strike="noStrike">
+              <a:solidFill>
+                <a:srgbClr val="000000"/>
+              </a:solidFill>
+              <a:latin typeface="Arial"/>
+            </a:endParaRPr>
+          </a:p>
+        </p:txBody>
+      </p:sp>
+      <p:sp>
+        <p:nvSpPr>
+          <p:cNvPr id="293" name="TextBox 32"/>
+          <p:cNvSpPr/>
+          <p:nvPr/>
+        </p:nvSpPr>
+        <p:spPr>
+          <a:xfrm>
+            <a:off x="2043720" y="1694880"/>
+            <a:ext cx="7482600" cy="819720"/>
+          </a:xfrm>
+          <a:prstGeom prst="rect">
+            <a:avLst/>
+          </a:prstGeom>
+          <a:noFill/>
+          <a:ln w="0">
+            <a:noFill/>
+          </a:ln>
+        </p:spPr>
+        <p:style>
+          <a:lnRef idx="0"/>
+          <a:fillRef idx="0"/>
+          <a:effectRef idx="0"/>
+          <a:fontRef idx="minor"/>
+        </p:style>
+        <p:txBody>
+          <a:bodyPr wrap="none" lIns="90000" rIns="90000" tIns="45000" bIns="45000" anchor="t">
+            <a:spAutoFit/>
+          </a:bodyPr>
+          <a:p>
+            <a:pPr>
+              <a:lnSpc>
+                <a:spcPct val="100000"/>
+              </a:lnSpc>
+            </a:pPr>
+            <a:r>
+              <a:rPr b="0" lang="en-US" sz="1600" spc="-1" strike="noStrike">
+                <a:solidFill>
+                  <a:srgbClr val="aaaaaa"/>
+                </a:solidFill>
+                <a:latin typeface="Calibri"/>
+                <a:ea typeface="DejaVu Sans"/>
+              </a:rPr>
+              <a:t>The most common arithmetic bugs stem from the </a:t>
+            </a:r>
+            <a:endParaRPr b="0" lang="en-US" sz="1600" spc="-1" strike="noStrike">
+              <a:solidFill>
+                <a:srgbClr val="000000"/>
+              </a:solidFill>
+              <a:latin typeface="Arial"/>
+            </a:endParaRPr>
+          </a:p>
+          <a:p>
+            <a:pPr>
+              <a:lnSpc>
+                <a:spcPct val="100000"/>
+              </a:lnSpc>
+            </a:pPr>
+            <a:r>
+              <a:rPr b="0" lang="en-US" sz="1600" spc="-1" strike="noStrike">
+                <a:solidFill>
+                  <a:srgbClr val="aaaaaa"/>
+                </a:solidFill>
+                <a:latin typeface="Calibri"/>
+                <a:ea typeface="DejaVu Sans"/>
+              </a:rPr>
+              <a:t>placement of increment/decrement operators (++, --) and integer division. </a:t>
+            </a:r>
+            <a:endParaRPr b="0" lang="en-US" sz="1600" spc="-1" strike="noStrike">
+              <a:solidFill>
+                <a:srgbClr val="000000"/>
+              </a:solidFill>
+              <a:latin typeface="Arial"/>
+            </a:endParaRPr>
+          </a:p>
+          <a:p>
+            <a:pPr>
+              <a:lnSpc>
+                <a:spcPct val="100000"/>
+              </a:lnSpc>
+            </a:pPr>
+            <a:r>
+              <a:rPr b="0" lang="en-US" sz="1600" spc="-1" strike="noStrike">
+                <a:solidFill>
+                  <a:srgbClr val="aaaaaa"/>
+                </a:solidFill>
+                <a:latin typeface="Calibri"/>
+                <a:ea typeface="DejaVu Sans"/>
+              </a:rPr>
+              <a:t>Placing the operator before or after the variable completely changes the execution order.</a:t>
+            </a:r>
+            <a:endParaRPr b="0" lang="en-US" sz="1600" spc="-1" strike="noStrike">
+              <a:solidFill>
+                <a:srgbClr val="000000"/>
+              </a:solidFill>
+              <a:latin typeface="Arial"/>
+            </a:endParaRPr>
+          </a:p>
+        </p:txBody>
+      </p:sp>
+      <p:sp>
+        <p:nvSpPr>
+          <p:cNvPr id="294" name="Rounded Rectangle 72"/>
+          <p:cNvSpPr/>
+          <p:nvPr/>
+        </p:nvSpPr>
+        <p:spPr>
+          <a:xfrm>
+            <a:off x="987480" y="3182040"/>
+            <a:ext cx="3287520" cy="2738880"/>
+          </a:xfrm>
+          <a:prstGeom prst="roundRect">
+            <a:avLst>
+              <a:gd name="adj" fmla="val 16667"/>
+            </a:avLst>
+          </a:prstGeom>
+          <a:solidFill>
+            <a:srgbClr val="08080a"/>
+          </a:solidFill>
+          <a:ln>
+            <a:noFill/>
+          </a:ln>
+          <a:effectLst>
+            <a:outerShdw blurRad="39960" dir="5400000" dist="23040" rotWithShape="0">
+              <a:srgbClr val="000000">
+                <a:alpha val="35000"/>
+              </a:srgbClr>
+            </a:outerShdw>
+          </a:effectLst>
+        </p:spPr>
+        <p:style>
+          <a:lnRef idx="1">
+            <a:schemeClr val="accent1"/>
+          </a:lnRef>
+          <a:fillRef idx="3">
+            <a:schemeClr val="accent1"/>
+          </a:fillRef>
+          <a:effectRef idx="2">
+            <a:schemeClr val="accent1"/>
+          </a:effectRef>
+          <a:fontRef idx="minor"/>
+        </p:style>
+        <p:txBody>
+          <a:bodyPr lIns="90000" rIns="90000" tIns="45000" bIns="45000" anchor="ctr">
+            <a:noAutofit/>
+          </a:bodyPr>
+          <a:p>
+            <a:endParaRPr b="0" lang="en-US" sz="1800" spc="-1" strike="noStrike">
+              <a:solidFill>
+                <a:schemeClr val="lt1"/>
+              </a:solidFill>
+              <a:latin typeface="Calibri"/>
+              <a:ea typeface="DejaVu Sans"/>
+            </a:endParaRPr>
+          </a:p>
+        </p:txBody>
+      </p:sp>
+      <p:sp>
+        <p:nvSpPr>
+          <p:cNvPr id="295" name="Rounded Rectangle 73"/>
+          <p:cNvSpPr/>
+          <p:nvPr/>
+        </p:nvSpPr>
+        <p:spPr>
+          <a:xfrm>
+            <a:off x="685800" y="2743200"/>
+            <a:ext cx="3516120" cy="3656520"/>
+          </a:xfrm>
+          <a:prstGeom prst="roundRect">
+            <a:avLst>
+              <a:gd name="adj" fmla="val 16667"/>
+            </a:avLst>
+          </a:prstGeom>
+          <a:solidFill>
+            <a:srgbClr val="16161c"/>
+          </a:solidFill>
+          <a:ln>
+            <a:solidFill>
+              <a:srgbClr val="464655"/>
+            </a:solidFill>
+            <a:round/>
+          </a:ln>
+          <a:effectLst>
+            <a:outerShdw blurRad="39960" dir="5400000" dist="23040" rotWithShape="0">
+              <a:srgbClr val="000000">
+                <a:alpha val="35000"/>
+              </a:srgbClr>
+            </a:outerShdw>
+          </a:effectLst>
+        </p:spPr>
+        <p:style>
+          <a:lnRef idx="1">
+            <a:schemeClr val="accent1"/>
+          </a:lnRef>
+          <a:fillRef idx="3">
+            <a:schemeClr val="accent1"/>
+          </a:fillRef>
+          <a:effectRef idx="2">
+            <a:schemeClr val="accent1"/>
+          </a:effectRef>
+          <a:fontRef idx="minor"/>
+        </p:style>
+        <p:txBody>
+          <a:bodyPr lIns="90000" rIns="90000" tIns="45000" bIns="45000" anchor="ctr">
+            <a:noAutofit/>
+          </a:bodyPr>
+          <a:p>
+            <a:pPr>
+              <a:lnSpc>
+                <a:spcPct val="100000"/>
+              </a:lnSpc>
+            </a:pPr>
+            <a:r>
+              <a:rPr b="1" lang="en-US" sz="1400" spc="-1" strike="noStrike">
+                <a:solidFill>
+                  <a:schemeClr val="lt1"/>
+                </a:solidFill>
+                <a:latin typeface="Calibri"/>
+                <a:ea typeface="DejaVu Sans"/>
+              </a:rPr>
+              <a:t>1. Prefix vs. Postfix Logic:</a:t>
+            </a:r>
+            <a:endParaRPr b="0" lang="en-US" sz="1400" spc="-1" strike="noStrike">
+              <a:solidFill>
+                <a:srgbClr val="ffffff"/>
+              </a:solidFill>
+              <a:latin typeface="Arial"/>
+            </a:endParaRPr>
+          </a:p>
+          <a:p>
+            <a:pPr>
+              <a:lnSpc>
+                <a:spcPct val="100000"/>
+              </a:lnSpc>
+            </a:pPr>
+            <a:r>
+              <a:rPr b="1" lang="en-US" sz="1400" spc="-1" strike="noStrike">
+                <a:solidFill>
+                  <a:schemeClr val="lt1"/>
+                </a:solidFill>
+                <a:latin typeface="Calibri"/>
+                <a:ea typeface="DejaVu Sans"/>
+              </a:rPr>
+              <a:t>Prefix (++a)</a:t>
+            </a:r>
+            <a:r>
+              <a:rPr b="0" lang="en-US" sz="1400" spc="-1" strike="noStrike">
+                <a:solidFill>
+                  <a:schemeClr val="lt1"/>
+                </a:solidFill>
+                <a:latin typeface="Calibri"/>
+                <a:ea typeface="DejaVu Sans"/>
+              </a:rPr>
+              <a:t>: Increases the value by 1 first, then uses the new value in the current expression.</a:t>
+            </a:r>
+            <a:endParaRPr b="0" lang="en-US" sz="1400" spc="-1" strike="noStrike">
+              <a:solidFill>
+                <a:srgbClr val="ffffff"/>
+              </a:solidFill>
+              <a:latin typeface="Arial"/>
+            </a:endParaRPr>
+          </a:p>
+          <a:p>
+            <a:pPr>
+              <a:lnSpc>
+                <a:spcPct val="100000"/>
+              </a:lnSpc>
+            </a:pPr>
+            <a:r>
+              <a:rPr b="0" lang="en-US" sz="1400" spc="-1" strike="noStrike">
+                <a:solidFill>
+                  <a:schemeClr val="lt1"/>
+                </a:solidFill>
+                <a:latin typeface="Calibri"/>
+                <a:ea typeface="DejaVu Sans"/>
+              </a:rPr>
+              <a:t> </a:t>
+            </a:r>
+            <a:r>
+              <a:rPr b="1" lang="en-US" sz="1400" spc="-1" strike="noStrike">
+                <a:solidFill>
+                  <a:schemeClr val="lt1"/>
+                </a:solidFill>
+                <a:latin typeface="Calibri"/>
+                <a:ea typeface="DejaVu Sans"/>
+              </a:rPr>
+              <a:t>Postfix (a++):</a:t>
+            </a:r>
+            <a:r>
+              <a:rPr b="0" lang="en-US" sz="1400" spc="-1" strike="noStrike">
+                <a:solidFill>
+                  <a:schemeClr val="lt1"/>
+                </a:solidFill>
+                <a:latin typeface="Calibri"/>
+                <a:ea typeface="DejaVu Sans"/>
+              </a:rPr>
+              <a:t> Uses the current value in the expression first, then increases it by 1 afterwards..</a:t>
+            </a:r>
+            <a:endParaRPr b="0" lang="en-US" sz="1400" spc="-1" strike="noStrike">
+              <a:solidFill>
+                <a:srgbClr val="ffffff"/>
+              </a:solidFill>
+              <a:latin typeface="Arial"/>
+            </a:endParaRPr>
+          </a:p>
+          <a:p>
+            <a:pPr>
+              <a:lnSpc>
+                <a:spcPct val="100000"/>
+              </a:lnSpc>
+            </a:pPr>
+            <a:endParaRPr b="0" lang="en-US" sz="1400" spc="-1" strike="noStrike">
+              <a:solidFill>
+                <a:srgbClr val="ffffff"/>
+              </a:solidFill>
+              <a:latin typeface="Arial"/>
+            </a:endParaRPr>
+          </a:p>
+          <a:p>
+            <a:pPr>
+              <a:lnSpc>
+                <a:spcPct val="100000"/>
+              </a:lnSpc>
+            </a:pPr>
+            <a:r>
+              <a:rPr b="1" lang="en-US" sz="1400" spc="-1" strike="noStrike">
+                <a:solidFill>
+                  <a:schemeClr val="lt1"/>
+                </a:solidFill>
+                <a:latin typeface="Calibri"/>
+                <a:ea typeface="DejaVu Sans"/>
+              </a:rPr>
+              <a:t>2. Integer Division Traps:</a:t>
+            </a:r>
+            <a:endParaRPr b="0" lang="en-US" sz="1400" spc="-1" strike="noStrike">
+              <a:solidFill>
+                <a:srgbClr val="ffffff"/>
+              </a:solidFill>
+              <a:latin typeface="Arial"/>
+            </a:endParaRPr>
+          </a:p>
+          <a:p>
+            <a:pPr marL="216000" indent="-216000">
+              <a:lnSpc>
+                <a:spcPct val="100000"/>
+              </a:lnSpc>
+              <a:buClr>
+                <a:srgbClr val="ffffff"/>
+              </a:buClr>
+              <a:buFont typeface="Wingdings" charset="2"/>
+              <a:buChar char=""/>
+            </a:pPr>
+            <a:r>
+              <a:rPr b="0" lang="en-US" sz="1400" spc="-1" strike="noStrike">
+                <a:solidFill>
+                  <a:schemeClr val="lt1"/>
+                </a:solidFill>
+                <a:latin typeface="Calibri"/>
+                <a:ea typeface="DejaVu Sans"/>
+              </a:rPr>
+              <a:t>If two integers (int) are divided, Java doesn't round; it truncates (throws away the decimal part). (Ex: 5 / 2 = 2).</a:t>
+            </a:r>
+            <a:endParaRPr b="0" lang="en-US" sz="1400" spc="-1" strike="noStrike">
+              <a:solidFill>
+                <a:srgbClr val="ffffff"/>
+              </a:solidFill>
+              <a:latin typeface="Arial"/>
+            </a:endParaRPr>
+          </a:p>
+          <a:p>
+            <a:pPr marL="216000" indent="-216000">
+              <a:lnSpc>
+                <a:spcPct val="100000"/>
+              </a:lnSpc>
+              <a:buClr>
+                <a:srgbClr val="ffffff"/>
+              </a:buClr>
+              <a:buFont typeface="Wingdings" charset="2"/>
+              <a:buChar char=""/>
+            </a:pPr>
+            <a:r>
+              <a:rPr b="0" lang="en-US" sz="1400" spc="-1" strike="noStrike">
+                <a:solidFill>
+                  <a:schemeClr val="lt1"/>
+                </a:solidFill>
+                <a:latin typeface="Calibri"/>
+                <a:ea typeface="DejaVu Sans"/>
+              </a:rPr>
+              <a:t>To get a precise decimal result, at least one operand must be a decimal type (double or float). (Ex: 5.0 / 2 = 2.5).</a:t>
+            </a:r>
+            <a:endParaRPr b="0" lang="en-US" sz="1400" spc="-1" strike="noStrike">
+              <a:solidFill>
+                <a:srgbClr val="ffffff"/>
+              </a:solidFill>
+              <a:latin typeface="Arial"/>
+            </a:endParaRPr>
+          </a:p>
+        </p:txBody>
+      </p:sp>
+      <p:sp>
+        <p:nvSpPr>
+          <p:cNvPr id="296" name="Rounded Rectangle 74"/>
+          <p:cNvSpPr/>
+          <p:nvPr/>
+        </p:nvSpPr>
+        <p:spPr>
+          <a:xfrm>
+            <a:off x="4507920" y="3182040"/>
+            <a:ext cx="3287520" cy="2738880"/>
+          </a:xfrm>
+          <a:prstGeom prst="roundRect">
+            <a:avLst>
+              <a:gd name="adj" fmla="val 16667"/>
+            </a:avLst>
+          </a:prstGeom>
+          <a:solidFill>
+            <a:srgbClr val="08080a"/>
+          </a:solidFill>
+          <a:ln>
+            <a:noFill/>
+          </a:ln>
+          <a:effectLst>
+            <a:outerShdw blurRad="39960" dir="5400000" dist="23040" rotWithShape="0">
+              <a:srgbClr val="000000">
+                <a:alpha val="35000"/>
+              </a:srgbClr>
+            </a:outerShdw>
+          </a:effectLst>
+        </p:spPr>
+        <p:style>
+          <a:lnRef idx="1">
+            <a:schemeClr val="accent1"/>
+          </a:lnRef>
+          <a:fillRef idx="3">
+            <a:schemeClr val="accent1"/>
+          </a:fillRef>
+          <a:effectRef idx="2">
+            <a:schemeClr val="accent1"/>
+          </a:effectRef>
+          <a:fontRef idx="minor"/>
+        </p:style>
+        <p:txBody>
+          <a:bodyPr lIns="90000" rIns="90000" tIns="45000" bIns="45000" anchor="ctr">
+            <a:noAutofit/>
+          </a:bodyPr>
+          <a:p>
+            <a:endParaRPr b="0" lang="en-US" sz="1800" spc="-1" strike="noStrike">
+              <a:solidFill>
+                <a:schemeClr val="lt1"/>
+              </a:solidFill>
+              <a:latin typeface="Calibri"/>
+              <a:ea typeface="DejaVu Sans"/>
+            </a:endParaRPr>
+          </a:p>
+        </p:txBody>
+      </p:sp>
+      <p:sp>
+        <p:nvSpPr>
+          <p:cNvPr id="297" name="Rounded Rectangle 75"/>
+          <p:cNvSpPr/>
+          <p:nvPr/>
+        </p:nvSpPr>
+        <p:spPr>
+          <a:xfrm>
+            <a:off x="4434840" y="2971800"/>
+            <a:ext cx="3287520" cy="3427920"/>
+          </a:xfrm>
+          <a:prstGeom prst="roundRect">
+            <a:avLst>
+              <a:gd name="adj" fmla="val 16667"/>
+            </a:avLst>
+          </a:prstGeom>
+          <a:solidFill>
+            <a:srgbClr val="16161c"/>
+          </a:solidFill>
+          <a:ln>
+            <a:solidFill>
+              <a:srgbClr val="464655"/>
+            </a:solidFill>
+            <a:round/>
+          </a:ln>
+          <a:effectLst>
+            <a:outerShdw blurRad="39960" dir="5400000" dist="23040" rotWithShape="0">
+              <a:srgbClr val="000000">
+                <a:alpha val="35000"/>
+              </a:srgbClr>
+            </a:outerShdw>
+          </a:effectLst>
+        </p:spPr>
+        <p:style>
+          <a:lnRef idx="1">
+            <a:schemeClr val="accent1"/>
+          </a:lnRef>
+          <a:fillRef idx="3">
+            <a:schemeClr val="accent1"/>
+          </a:fillRef>
+          <a:effectRef idx="2">
+            <a:schemeClr val="accent1"/>
+          </a:effectRef>
+          <a:fontRef idx="minor"/>
+        </p:style>
+        <p:txBody>
+          <a:bodyPr lIns="90000" rIns="90000" tIns="45000" bIns="45000" anchor="ctr">
+            <a:noAutofit/>
+          </a:bodyPr>
+          <a:p>
+            <a:pPr>
+              <a:lnSpc>
+                <a:spcPct val="100000"/>
+              </a:lnSpc>
+            </a:pPr>
+            <a:r>
+              <a:rPr b="0" lang="en-US" sz="1600" spc="-1" strike="noStrike">
+                <a:solidFill>
+                  <a:schemeClr val="lt1"/>
+                </a:solidFill>
+                <a:latin typeface="Calibri"/>
+                <a:ea typeface="DejaVu Sans"/>
+              </a:rPr>
+              <a:t>[ Prefix vs Postfix Execution ]</a:t>
+            </a:r>
+            <a:endParaRPr b="0" lang="en-US" sz="1600" spc="-1" strike="noStrike">
+              <a:solidFill>
+                <a:srgbClr val="ffffff"/>
+              </a:solidFill>
+              <a:latin typeface="Arial"/>
+            </a:endParaRPr>
+          </a:p>
+          <a:p>
+            <a:pPr>
+              <a:lnSpc>
+                <a:spcPct val="100000"/>
+              </a:lnSpc>
+            </a:pPr>
+            <a:r>
+              <a:rPr b="0" lang="en-US" sz="1600" spc="-1" strike="noStrike">
+                <a:solidFill>
+                  <a:schemeClr val="lt1"/>
+                </a:solidFill>
+                <a:latin typeface="Calibri"/>
+                <a:ea typeface="DejaVu Sans"/>
+              </a:rPr>
+              <a:t>Base Variable: int x = 5;</a:t>
+            </a:r>
+            <a:endParaRPr b="0" lang="en-US" sz="1600" spc="-1" strike="noStrike">
+              <a:solidFill>
+                <a:srgbClr val="ffffff"/>
+              </a:solidFill>
+              <a:latin typeface="Arial"/>
+            </a:endParaRPr>
+          </a:p>
+          <a:p>
+            <a:pPr>
+              <a:lnSpc>
+                <a:spcPct val="100000"/>
+              </a:lnSpc>
+            </a:pPr>
+            <a:r>
+              <a:rPr b="0" lang="en-US" sz="1600" spc="-1" strike="noStrike">
+                <a:solidFill>
+                  <a:schemeClr val="lt1"/>
+                </a:solidFill>
+                <a:latin typeface="Calibri"/>
+                <a:ea typeface="DejaVu Sans"/>
+              </a:rPr>
+              <a:t>├──</a:t>
+            </a:r>
+            <a:r>
+              <a:rPr b="0" lang="en-US" sz="1600" spc="-1" strike="noStrike">
+                <a:solidFill>
+                  <a:schemeClr val="lt1"/>
+                </a:solidFill>
+                <a:latin typeface="Calibri"/>
+                <a:ea typeface="DejaVu Sans"/>
+              </a:rPr>
+              <a:t>&gt; Prefix Usage: int y = ++x;</a:t>
+            </a:r>
+            <a:endParaRPr b="0" lang="en-US" sz="1600" spc="-1" strike="noStrike">
+              <a:solidFill>
+                <a:srgbClr val="ffffff"/>
+              </a:solidFill>
+              <a:latin typeface="Arial"/>
+            </a:endParaRPr>
+          </a:p>
+          <a:p>
+            <a:pPr>
+              <a:lnSpc>
+                <a:spcPct val="100000"/>
+              </a:lnSpc>
+            </a:pPr>
+            <a:r>
+              <a:rPr b="0" lang="en-US" sz="1600" spc="-1" strike="noStrike">
+                <a:solidFill>
+                  <a:schemeClr val="lt1"/>
+                </a:solidFill>
+                <a:latin typeface="Calibri"/>
+                <a:ea typeface="DejaVu Sans"/>
+              </a:rPr>
+              <a:t>│ </a:t>
+            </a:r>
+            <a:r>
+              <a:rPr b="0" lang="en-US" sz="1600" spc="-1" strike="noStrike">
+                <a:solidFill>
+                  <a:schemeClr val="lt1"/>
+                </a:solidFill>
+                <a:latin typeface="Calibri"/>
+                <a:ea typeface="DejaVu Sans"/>
+              </a:rPr>
+              <a:t>Step 1: Increase x (x becomes 6)</a:t>
+            </a:r>
+            <a:endParaRPr b="0" lang="en-US" sz="1600" spc="-1" strike="noStrike">
+              <a:solidFill>
+                <a:srgbClr val="ffffff"/>
+              </a:solidFill>
+              <a:latin typeface="Arial"/>
+            </a:endParaRPr>
+          </a:p>
+          <a:p>
+            <a:pPr>
+              <a:lnSpc>
+                <a:spcPct val="100000"/>
+              </a:lnSpc>
+            </a:pPr>
+            <a:r>
+              <a:rPr b="0" lang="en-US" sz="1600" spc="-1" strike="noStrike">
+                <a:solidFill>
+                  <a:schemeClr val="lt1"/>
+                </a:solidFill>
+                <a:latin typeface="Calibri"/>
+                <a:ea typeface="DejaVu Sans"/>
+              </a:rPr>
+              <a:t>│ </a:t>
+            </a:r>
+            <a:r>
+              <a:rPr b="0" lang="en-US" sz="1600" spc="-1" strike="noStrike">
+                <a:solidFill>
+                  <a:schemeClr val="lt1"/>
+                </a:solidFill>
+                <a:latin typeface="Calibri"/>
+                <a:ea typeface="DejaVu Sans"/>
+              </a:rPr>
+              <a:t>Step 2: Assign new x to y</a:t>
+            </a:r>
+            <a:endParaRPr b="0" lang="en-US" sz="1600" spc="-1" strike="noStrike">
+              <a:solidFill>
+                <a:srgbClr val="ffffff"/>
+              </a:solidFill>
+              <a:latin typeface="Arial"/>
+            </a:endParaRPr>
+          </a:p>
+          <a:p>
+            <a:pPr>
+              <a:lnSpc>
+                <a:spcPct val="100000"/>
+              </a:lnSpc>
+            </a:pPr>
+            <a:r>
+              <a:rPr b="0" lang="en-US" sz="1600" spc="-1" strike="noStrike">
+                <a:solidFill>
+                  <a:schemeClr val="lt1"/>
+                </a:solidFill>
+                <a:latin typeface="Calibri"/>
+                <a:ea typeface="DejaVu Sans"/>
+              </a:rPr>
+              <a:t>│ </a:t>
+            </a:r>
+            <a:r>
+              <a:rPr b="0" lang="en-US" sz="1600" spc="-1" strike="noStrike">
+                <a:solidFill>
+                  <a:schemeClr val="lt1"/>
+                </a:solidFill>
+                <a:latin typeface="Calibri"/>
+                <a:ea typeface="DejaVu Sans"/>
+              </a:rPr>
+              <a:t>Result: x = 6, y = 6</a:t>
+            </a:r>
+            <a:endParaRPr b="0" lang="en-US" sz="1600" spc="-1" strike="noStrike">
+              <a:solidFill>
+                <a:srgbClr val="ffffff"/>
+              </a:solidFill>
+              <a:latin typeface="Arial"/>
+            </a:endParaRPr>
+          </a:p>
+          <a:p>
+            <a:pPr>
+              <a:lnSpc>
+                <a:spcPct val="100000"/>
+              </a:lnSpc>
+            </a:pPr>
+            <a:r>
+              <a:rPr b="0" lang="en-US" sz="1600" spc="-1" strike="noStrike">
+                <a:solidFill>
+                  <a:schemeClr val="lt1"/>
+                </a:solidFill>
+                <a:latin typeface="Calibri"/>
+                <a:ea typeface="DejaVu Sans"/>
+              </a:rPr>
+              <a:t>│</a:t>
+            </a:r>
+            <a:endParaRPr b="0" lang="en-US" sz="1600" spc="-1" strike="noStrike">
+              <a:solidFill>
+                <a:srgbClr val="ffffff"/>
+              </a:solidFill>
+              <a:latin typeface="Arial"/>
+            </a:endParaRPr>
+          </a:p>
+          <a:p>
+            <a:pPr>
+              <a:lnSpc>
+                <a:spcPct val="100000"/>
+              </a:lnSpc>
+            </a:pPr>
+            <a:r>
+              <a:rPr b="0" lang="en-US" sz="1600" spc="-1" strike="noStrike">
+                <a:solidFill>
+                  <a:schemeClr val="lt1"/>
+                </a:solidFill>
+                <a:latin typeface="Calibri"/>
+                <a:ea typeface="DejaVu Sans"/>
+              </a:rPr>
+              <a:t>└──</a:t>
+            </a:r>
+            <a:r>
+              <a:rPr b="0" lang="en-US" sz="1600" spc="-1" strike="noStrike">
+                <a:solidFill>
+                  <a:schemeClr val="lt1"/>
+                </a:solidFill>
+                <a:latin typeface="Calibri"/>
+                <a:ea typeface="DejaVu Sans"/>
+              </a:rPr>
+              <a:t>&gt; Postfix Usage: int z = x++;</a:t>
+            </a:r>
+            <a:endParaRPr b="0" lang="en-US" sz="1600" spc="-1" strike="noStrike">
+              <a:solidFill>
+                <a:srgbClr val="ffffff"/>
+              </a:solidFill>
+              <a:latin typeface="Arial"/>
+            </a:endParaRPr>
+          </a:p>
+          <a:p>
+            <a:pPr>
+              <a:lnSpc>
+                <a:spcPct val="100000"/>
+              </a:lnSpc>
+            </a:pPr>
+            <a:r>
+              <a:rPr b="0" lang="en-US" sz="1600" spc="-1" strike="noStrike">
+                <a:solidFill>
+                  <a:schemeClr val="lt1"/>
+                </a:solidFill>
+                <a:latin typeface="Calibri"/>
+                <a:ea typeface="DejaVu Sans"/>
+              </a:rPr>
+              <a:t>Step 1: Assign current x to z (z = 5)</a:t>
+            </a:r>
+            <a:endParaRPr b="0" lang="en-US" sz="1600" spc="-1" strike="noStrike">
+              <a:solidFill>
+                <a:srgbClr val="ffffff"/>
+              </a:solidFill>
+              <a:latin typeface="Arial"/>
+            </a:endParaRPr>
+          </a:p>
+          <a:p>
+            <a:pPr>
+              <a:lnSpc>
+                <a:spcPct val="100000"/>
+              </a:lnSpc>
+            </a:pPr>
+            <a:r>
+              <a:rPr b="0" lang="en-US" sz="1600" spc="-1" strike="noStrike">
+                <a:solidFill>
+                  <a:schemeClr val="lt1"/>
+                </a:solidFill>
+                <a:latin typeface="Calibri"/>
+                <a:ea typeface="DejaVu Sans"/>
+              </a:rPr>
+              <a:t>Step 2: Increase x (x becomes 6)</a:t>
+            </a:r>
+            <a:endParaRPr b="0" lang="en-US" sz="1600" spc="-1" strike="noStrike">
+              <a:solidFill>
+                <a:srgbClr val="ffffff"/>
+              </a:solidFill>
+              <a:latin typeface="Arial"/>
+            </a:endParaRPr>
+          </a:p>
+          <a:p>
+            <a:pPr>
+              <a:lnSpc>
+                <a:spcPct val="100000"/>
+              </a:lnSpc>
+            </a:pPr>
+            <a:r>
+              <a:rPr b="0" lang="en-US" sz="1600" spc="-1" strike="noStrike">
+                <a:solidFill>
+                  <a:schemeClr val="lt1"/>
+                </a:solidFill>
+                <a:latin typeface="Calibri"/>
+                <a:ea typeface="DejaVu Sans"/>
+              </a:rPr>
+              <a:t>Result: x = 6, z = 5</a:t>
+            </a:r>
+            <a:endParaRPr b="0" lang="en-US" sz="1600" spc="-1" strike="noStrike">
+              <a:solidFill>
+                <a:srgbClr val="ffffff"/>
+              </a:solidFill>
+              <a:latin typeface="Arial"/>
+            </a:endParaRPr>
+          </a:p>
+        </p:txBody>
+      </p:sp>
+      <p:sp>
+        <p:nvSpPr>
+          <p:cNvPr id="298" name="Rounded Rectangle 76"/>
+          <p:cNvSpPr/>
+          <p:nvPr/>
+        </p:nvSpPr>
+        <p:spPr>
+          <a:xfrm>
+            <a:off x="8028360" y="3182040"/>
+            <a:ext cx="3287520" cy="2738880"/>
+          </a:xfrm>
+          <a:prstGeom prst="roundRect">
+            <a:avLst>
+              <a:gd name="adj" fmla="val 16667"/>
+            </a:avLst>
+          </a:prstGeom>
+          <a:solidFill>
+            <a:srgbClr val="08080a"/>
+          </a:solidFill>
+          <a:ln>
+            <a:noFill/>
+          </a:ln>
+          <a:effectLst>
+            <a:outerShdw blurRad="39960" dir="5400000" dist="23040" rotWithShape="0">
+              <a:srgbClr val="000000">
+                <a:alpha val="35000"/>
+              </a:srgbClr>
+            </a:outerShdw>
+          </a:effectLst>
+        </p:spPr>
+        <p:style>
+          <a:lnRef idx="1">
+            <a:schemeClr val="accent1"/>
+          </a:lnRef>
+          <a:fillRef idx="3">
+            <a:schemeClr val="accent1"/>
+          </a:fillRef>
+          <a:effectRef idx="2">
+            <a:schemeClr val="accent1"/>
+          </a:effectRef>
+          <a:fontRef idx="minor"/>
+        </p:style>
+        <p:txBody>
+          <a:bodyPr lIns="90000" rIns="90000" tIns="45000" bIns="45000" anchor="ctr">
+            <a:noAutofit/>
+          </a:bodyPr>
+          <a:p>
+            <a:endParaRPr b="0" lang="en-US" sz="1800" spc="-1" strike="noStrike">
+              <a:solidFill>
+                <a:schemeClr val="lt1"/>
+              </a:solidFill>
+              <a:latin typeface="Calibri"/>
+              <a:ea typeface="DejaVu Sans"/>
+            </a:endParaRPr>
+          </a:p>
+        </p:txBody>
+      </p:sp>
+      <p:sp>
+        <p:nvSpPr>
+          <p:cNvPr id="299" name="Rounded Rectangle 77"/>
+          <p:cNvSpPr/>
+          <p:nvPr/>
+        </p:nvSpPr>
+        <p:spPr>
+          <a:xfrm>
+            <a:off x="8001000" y="2743200"/>
+            <a:ext cx="3429000" cy="3655080"/>
+          </a:xfrm>
+          <a:prstGeom prst="roundRect">
+            <a:avLst>
+              <a:gd name="adj" fmla="val 16667"/>
+            </a:avLst>
+          </a:prstGeom>
+          <a:solidFill>
+            <a:srgbClr val="16161c"/>
+          </a:solidFill>
+          <a:ln>
+            <a:solidFill>
+              <a:srgbClr val="464655"/>
+            </a:solidFill>
+            <a:round/>
+          </a:ln>
+          <a:effectLst>
+            <a:outerShdw blurRad="39960" dir="5400000" dist="23040" rotWithShape="0">
+              <a:srgbClr val="000000">
+                <a:alpha val="35000"/>
+              </a:srgbClr>
+            </a:outerShdw>
+          </a:effectLst>
+        </p:spPr>
+        <p:style>
+          <a:lnRef idx="1">
+            <a:schemeClr val="accent1"/>
+          </a:lnRef>
+          <a:fillRef idx="3">
+            <a:schemeClr val="accent1"/>
+          </a:fillRef>
+          <a:effectRef idx="2">
+            <a:schemeClr val="accent1"/>
+          </a:effectRef>
+          <a:fontRef idx="minor"/>
+        </p:style>
+        <p:txBody>
+          <a:bodyPr lIns="90000" rIns="90000" tIns="45000" bIns="45000" anchor="ctr">
+            <a:noAutofit/>
+          </a:bodyPr>
+          <a:p>
+            <a:pPr algn="ctr">
+              <a:lnSpc>
+                <a:spcPct val="100000"/>
+              </a:lnSpc>
+            </a:pPr>
+            <a:r>
+              <a:rPr b="0" lang="en-US" sz="900" spc="-1" strike="noStrike">
+                <a:solidFill>
+                  <a:srgbClr val="78ffc8"/>
+                </a:solidFill>
+                <a:latin typeface="Consolas"/>
+                <a:ea typeface="DejaVu Sans"/>
+              </a:rPr>
+              <a:t>public class ArithmeticDetails {</a:t>
+            </a:r>
+            <a:endParaRPr b="0" lang="en-US" sz="900" spc="-1" strike="noStrike">
+              <a:solidFill>
+                <a:srgbClr val="ffffff"/>
+              </a:solidFill>
+              <a:latin typeface="Arial"/>
+            </a:endParaRPr>
+          </a:p>
+          <a:p>
+            <a:pPr algn="ctr">
+              <a:lnSpc>
+                <a:spcPct val="100000"/>
+              </a:lnSpc>
+            </a:pPr>
+            <a:r>
+              <a:rPr b="0" lang="en-US" sz="900" spc="-1" strike="noStrike">
+                <a:solidFill>
+                  <a:srgbClr val="78ffc8"/>
+                </a:solidFill>
+                <a:latin typeface="Consolas"/>
+                <a:ea typeface="DejaVu Sans"/>
+              </a:rPr>
+              <a:t>    </a:t>
+            </a:r>
+            <a:r>
+              <a:rPr b="0" lang="en-US" sz="900" spc="-1" strike="noStrike">
+                <a:solidFill>
+                  <a:srgbClr val="78ffc8"/>
+                </a:solidFill>
+                <a:latin typeface="Consolas"/>
+                <a:ea typeface="DejaVu Sans"/>
+              </a:rPr>
+              <a:t>public static void main(String[] args) {</a:t>
+            </a:r>
+            <a:endParaRPr b="0" lang="en-US" sz="900" spc="-1" strike="noStrike">
+              <a:solidFill>
+                <a:srgbClr val="ffffff"/>
+              </a:solidFill>
+              <a:latin typeface="Arial"/>
+            </a:endParaRPr>
+          </a:p>
+          <a:p>
+            <a:pPr algn="ctr">
+              <a:lnSpc>
+                <a:spcPct val="100000"/>
+              </a:lnSpc>
+            </a:pPr>
+            <a:r>
+              <a:rPr b="0" lang="en-US" sz="900" spc="-1" strike="noStrike">
+                <a:solidFill>
+                  <a:srgbClr val="78ffc8"/>
+                </a:solidFill>
+                <a:latin typeface="Consolas"/>
+                <a:ea typeface="DejaVu Sans"/>
+              </a:rPr>
+              <a:t>        </a:t>
+            </a:r>
+            <a:r>
+              <a:rPr b="0" lang="en-US" sz="900" spc="-1" strike="noStrike">
+                <a:solidFill>
+                  <a:srgbClr val="78ffc8"/>
+                </a:solidFill>
+                <a:latin typeface="Consolas"/>
+                <a:ea typeface="DejaVu Sans"/>
+              </a:rPr>
+              <a:t>// 1. PREFIX (Increment First, Use Later)</a:t>
+            </a:r>
+            <a:endParaRPr b="0" lang="en-US" sz="900" spc="-1" strike="noStrike">
+              <a:solidFill>
+                <a:srgbClr val="ffffff"/>
+              </a:solidFill>
+              <a:latin typeface="Arial"/>
+            </a:endParaRPr>
+          </a:p>
+          <a:p>
+            <a:pPr algn="ctr">
+              <a:lnSpc>
+                <a:spcPct val="100000"/>
+              </a:lnSpc>
+            </a:pPr>
+            <a:r>
+              <a:rPr b="0" lang="en-US" sz="900" spc="-1" strike="noStrike">
+                <a:solidFill>
+                  <a:srgbClr val="78ffc8"/>
+                </a:solidFill>
+                <a:latin typeface="Consolas"/>
+                <a:ea typeface="DejaVu Sans"/>
+              </a:rPr>
+              <a:t>        </a:t>
+            </a:r>
+            <a:r>
+              <a:rPr b="0" lang="en-US" sz="900" spc="-1" strike="noStrike">
+                <a:solidFill>
+                  <a:srgbClr val="78ffc8"/>
+                </a:solidFill>
+                <a:latin typeface="Consolas"/>
+                <a:ea typeface="DejaVu Sans"/>
+              </a:rPr>
+              <a:t>int a = 5;</a:t>
+            </a:r>
+            <a:endParaRPr b="0" lang="en-US" sz="900" spc="-1" strike="noStrike">
+              <a:solidFill>
+                <a:srgbClr val="ffffff"/>
+              </a:solidFill>
+              <a:latin typeface="Arial"/>
+            </a:endParaRPr>
+          </a:p>
+          <a:p>
+            <a:pPr algn="ctr">
+              <a:lnSpc>
+                <a:spcPct val="100000"/>
+              </a:lnSpc>
+            </a:pPr>
+            <a:r>
+              <a:rPr b="0" lang="en-US" sz="900" spc="-1" strike="noStrike">
+                <a:solidFill>
+                  <a:srgbClr val="78ffc8"/>
+                </a:solidFill>
+                <a:latin typeface="Consolas"/>
+                <a:ea typeface="DejaVu Sans"/>
+              </a:rPr>
+              <a:t>        </a:t>
+            </a:r>
+            <a:r>
+              <a:rPr b="0" lang="en-US" sz="900" spc="-1" strike="noStrike">
+                <a:solidFill>
+                  <a:srgbClr val="78ffc8"/>
+                </a:solidFill>
+                <a:latin typeface="Consolas"/>
+                <a:ea typeface="DejaVu Sans"/>
+              </a:rPr>
+              <a:t>int b = ++a; // a=6, then b is assigned 6</a:t>
+            </a:r>
+            <a:endParaRPr b="0" lang="en-US" sz="900" spc="-1" strike="noStrike">
+              <a:solidFill>
+                <a:srgbClr val="ffffff"/>
+              </a:solidFill>
+              <a:latin typeface="Arial"/>
+            </a:endParaRPr>
+          </a:p>
+          <a:p>
+            <a:pPr algn="ctr">
+              <a:lnSpc>
+                <a:spcPct val="100000"/>
+              </a:lnSpc>
+            </a:pPr>
+            <a:r>
+              <a:rPr b="0" lang="en-US" sz="900" spc="-1" strike="noStrike">
+                <a:solidFill>
+                  <a:srgbClr val="78ffc8"/>
+                </a:solidFill>
+                <a:latin typeface="Consolas"/>
+                <a:ea typeface="DejaVu Sans"/>
+              </a:rPr>
+              <a:t>        </a:t>
+            </a:r>
+            <a:r>
+              <a:rPr b="0" lang="en-US" sz="900" spc="-1" strike="noStrike">
+                <a:solidFill>
+                  <a:srgbClr val="78ffc8"/>
+                </a:solidFill>
+                <a:latin typeface="Consolas"/>
+                <a:ea typeface="DejaVu Sans"/>
+              </a:rPr>
+              <a:t>// 2. POSTFIX (Use First, Increment Later)</a:t>
+            </a:r>
+            <a:endParaRPr b="0" lang="en-US" sz="900" spc="-1" strike="noStrike">
+              <a:solidFill>
+                <a:srgbClr val="ffffff"/>
+              </a:solidFill>
+              <a:latin typeface="Arial"/>
+            </a:endParaRPr>
+          </a:p>
+          <a:p>
+            <a:pPr algn="ctr">
+              <a:lnSpc>
+                <a:spcPct val="100000"/>
+              </a:lnSpc>
+            </a:pPr>
+            <a:r>
+              <a:rPr b="0" lang="en-US" sz="900" spc="-1" strike="noStrike">
+                <a:solidFill>
+                  <a:srgbClr val="78ffc8"/>
+                </a:solidFill>
+                <a:latin typeface="Consolas"/>
+                <a:ea typeface="DejaVu Sans"/>
+              </a:rPr>
+              <a:t>        </a:t>
+            </a:r>
+            <a:r>
+              <a:rPr b="0" lang="en-US" sz="900" spc="-1" strike="noStrike">
+                <a:solidFill>
+                  <a:srgbClr val="78ffc8"/>
+                </a:solidFill>
+                <a:latin typeface="Consolas"/>
+                <a:ea typeface="DejaVu Sans"/>
+              </a:rPr>
+              <a:t>int x = 5;</a:t>
+            </a:r>
+            <a:endParaRPr b="0" lang="en-US" sz="900" spc="-1" strike="noStrike">
+              <a:solidFill>
+                <a:srgbClr val="ffffff"/>
+              </a:solidFill>
+              <a:latin typeface="Arial"/>
+            </a:endParaRPr>
+          </a:p>
+          <a:p>
+            <a:pPr algn="ctr">
+              <a:lnSpc>
+                <a:spcPct val="100000"/>
+              </a:lnSpc>
+            </a:pPr>
+            <a:r>
+              <a:rPr b="0" lang="en-US" sz="900" spc="-1" strike="noStrike">
+                <a:solidFill>
+                  <a:srgbClr val="78ffc8"/>
+                </a:solidFill>
+                <a:latin typeface="Consolas"/>
+                <a:ea typeface="DejaVu Sans"/>
+              </a:rPr>
+              <a:t>        </a:t>
+            </a:r>
+            <a:r>
+              <a:rPr b="0" lang="en-US" sz="900" spc="-1" strike="noStrike">
+                <a:solidFill>
+                  <a:srgbClr val="78ffc8"/>
+                </a:solidFill>
+                <a:latin typeface="Consolas"/>
+                <a:ea typeface="DejaVu Sans"/>
+              </a:rPr>
+              <a:t>int y = x++; // y gets 5, then x becomes 6</a:t>
+            </a:r>
+            <a:endParaRPr b="0" lang="en-US" sz="900" spc="-1" strike="noStrike">
+              <a:solidFill>
+                <a:srgbClr val="ffffff"/>
+              </a:solidFill>
+              <a:latin typeface="Arial"/>
+            </a:endParaRPr>
+          </a:p>
+          <a:p>
+            <a:pPr algn="ctr">
+              <a:lnSpc>
+                <a:spcPct val="100000"/>
+              </a:lnSpc>
+            </a:pPr>
+            <a:r>
+              <a:rPr b="0" lang="en-US" sz="900" spc="-1" strike="noStrike">
+                <a:solidFill>
+                  <a:srgbClr val="78ffc8"/>
+                </a:solidFill>
+                <a:latin typeface="Consolas"/>
+                <a:ea typeface="DejaVu Sans"/>
+              </a:rPr>
+              <a:t>        </a:t>
+            </a:r>
+            <a:r>
+              <a:rPr b="0" lang="en-US" sz="900" spc="-1" strike="noStrike">
+                <a:solidFill>
+                  <a:srgbClr val="78ffc8"/>
+                </a:solidFill>
+                <a:latin typeface="Consolas"/>
+                <a:ea typeface="DejaVu Sans"/>
+              </a:rPr>
+              <a:t>// 3. INTEGER DIVISION TRAP</a:t>
+            </a:r>
+            <a:endParaRPr b="0" lang="en-US" sz="900" spc="-1" strike="noStrike">
+              <a:solidFill>
+                <a:srgbClr val="ffffff"/>
+              </a:solidFill>
+              <a:latin typeface="Arial"/>
+            </a:endParaRPr>
+          </a:p>
+          <a:p>
+            <a:pPr algn="ctr">
+              <a:lnSpc>
+                <a:spcPct val="100000"/>
+              </a:lnSpc>
+            </a:pPr>
+            <a:r>
+              <a:rPr b="0" lang="en-US" sz="900" spc="-1" strike="noStrike">
+                <a:solidFill>
+                  <a:srgbClr val="78ffc8"/>
+                </a:solidFill>
+                <a:latin typeface="Consolas"/>
+                <a:ea typeface="DejaVu Sans"/>
+              </a:rPr>
+              <a:t>        </a:t>
+            </a:r>
+            <a:r>
+              <a:rPr b="0" lang="en-US" sz="900" spc="-1" strike="noStrike">
+                <a:solidFill>
+                  <a:srgbClr val="78ffc8"/>
+                </a:solidFill>
+                <a:latin typeface="Consolas"/>
+                <a:ea typeface="DejaVu Sans"/>
+              </a:rPr>
+              <a:t>int badDiv = 5 / 2;      // Result: 2</a:t>
+            </a:r>
+            <a:endParaRPr b="0" lang="en-US" sz="900" spc="-1" strike="noStrike">
+              <a:solidFill>
+                <a:srgbClr val="ffffff"/>
+              </a:solidFill>
+              <a:latin typeface="Arial"/>
+            </a:endParaRPr>
+          </a:p>
+          <a:p>
+            <a:pPr algn="ctr">
+              <a:lnSpc>
+                <a:spcPct val="100000"/>
+              </a:lnSpc>
+            </a:pPr>
+            <a:r>
+              <a:rPr b="0" lang="en-US" sz="900" spc="-1" strike="noStrike">
+                <a:solidFill>
+                  <a:srgbClr val="78ffc8"/>
+                </a:solidFill>
+                <a:latin typeface="Consolas"/>
+                <a:ea typeface="DejaVu Sans"/>
+              </a:rPr>
+              <a:t>        </a:t>
+            </a:r>
+            <a:r>
+              <a:rPr b="0" lang="en-US" sz="900" spc="-1" strike="noStrike">
+                <a:solidFill>
+                  <a:srgbClr val="78ffc8"/>
+                </a:solidFill>
+                <a:latin typeface="Consolas"/>
+                <a:ea typeface="DejaVu Sans"/>
+              </a:rPr>
+              <a:t>double trapDiv = 5 / 2;  // Result: 2.0</a:t>
+            </a:r>
+            <a:endParaRPr b="0" lang="en-US" sz="900" spc="-1" strike="noStrike">
+              <a:solidFill>
+                <a:srgbClr val="ffffff"/>
+              </a:solidFill>
+              <a:latin typeface="Arial"/>
+            </a:endParaRPr>
+          </a:p>
+          <a:p>
+            <a:pPr algn="ctr">
+              <a:lnSpc>
+                <a:spcPct val="100000"/>
+              </a:lnSpc>
+            </a:pPr>
+            <a:r>
+              <a:rPr b="0" lang="en-US" sz="900" spc="-1" strike="noStrike">
+                <a:solidFill>
+                  <a:srgbClr val="78ffc8"/>
+                </a:solidFill>
+                <a:latin typeface="Consolas"/>
+                <a:ea typeface="DejaVu Sans"/>
+              </a:rPr>
+              <a:t>        </a:t>
+            </a:r>
+            <a:r>
+              <a:rPr b="0" lang="en-US" sz="900" spc="-1" strike="noStrike">
+                <a:solidFill>
+                  <a:srgbClr val="78ffc8"/>
+                </a:solidFill>
+                <a:latin typeface="Consolas"/>
+                <a:ea typeface="DejaVu Sans"/>
+              </a:rPr>
+              <a:t>double goodDiv = 5.0 / 2;// Result: 2.5</a:t>
+            </a:r>
+            <a:endParaRPr b="0" lang="en-US" sz="900" spc="-1" strike="noStrike">
+              <a:solidFill>
+                <a:srgbClr val="ffffff"/>
+              </a:solidFill>
+              <a:latin typeface="Arial"/>
+            </a:endParaRPr>
+          </a:p>
+          <a:p>
+            <a:pPr algn="ctr">
+              <a:lnSpc>
+                <a:spcPct val="100000"/>
+              </a:lnSpc>
+            </a:pPr>
+            <a:r>
+              <a:rPr b="0" lang="en-US" sz="900" spc="-1" strike="noStrike">
+                <a:solidFill>
+                  <a:srgbClr val="78ffc8"/>
+                </a:solidFill>
+                <a:latin typeface="Consolas"/>
+                <a:ea typeface="DejaVu Sans"/>
+              </a:rPr>
+              <a:t>        </a:t>
+            </a:r>
+            <a:r>
+              <a:rPr b="0" lang="en-US" sz="900" spc="-1" strike="noStrike">
+                <a:solidFill>
+                  <a:srgbClr val="78ffc8"/>
+                </a:solidFill>
+                <a:latin typeface="Consolas"/>
+                <a:ea typeface="DejaVu Sans"/>
+              </a:rPr>
+              <a:t>System.out.println("Prefix b: " + b);</a:t>
+            </a:r>
+            <a:endParaRPr b="0" lang="en-US" sz="900" spc="-1" strike="noStrike">
+              <a:solidFill>
+                <a:srgbClr val="ffffff"/>
+              </a:solidFill>
+              <a:latin typeface="Arial"/>
+            </a:endParaRPr>
+          </a:p>
+          <a:p>
+            <a:pPr algn="ctr">
+              <a:lnSpc>
+                <a:spcPct val="100000"/>
+              </a:lnSpc>
+            </a:pPr>
+            <a:r>
+              <a:rPr b="0" lang="en-US" sz="900" spc="-1" strike="noStrike">
+                <a:solidFill>
+                  <a:srgbClr val="78ffc8"/>
+                </a:solidFill>
+                <a:latin typeface="Consolas"/>
+                <a:ea typeface="DejaVu Sans"/>
+              </a:rPr>
+              <a:t>        </a:t>
+            </a:r>
+            <a:r>
+              <a:rPr b="0" lang="en-US" sz="900" spc="-1" strike="noStrike">
+                <a:solidFill>
+                  <a:srgbClr val="78ffc8"/>
+                </a:solidFill>
+                <a:latin typeface="Consolas"/>
+                <a:ea typeface="DejaVu Sans"/>
+              </a:rPr>
+              <a:t>System.out.println("Postfix y: " + y);</a:t>
+            </a:r>
+            <a:endParaRPr b="0" lang="en-US" sz="900" spc="-1" strike="noStrike">
+              <a:solidFill>
+                <a:srgbClr val="ffffff"/>
+              </a:solidFill>
+              <a:latin typeface="Arial"/>
+            </a:endParaRPr>
+          </a:p>
+          <a:p>
+            <a:pPr algn="ctr">
+              <a:lnSpc>
+                <a:spcPct val="100000"/>
+              </a:lnSpc>
+            </a:pPr>
+            <a:r>
+              <a:rPr b="0" lang="en-US" sz="900" spc="-1" strike="noStrike">
+                <a:solidFill>
+                  <a:srgbClr val="78ffc8"/>
+                </a:solidFill>
+                <a:latin typeface="Consolas"/>
+                <a:ea typeface="DejaVu Sans"/>
+              </a:rPr>
+              <a:t>        </a:t>
+            </a:r>
+            <a:r>
+              <a:rPr b="0" lang="en-US" sz="900" spc="-1" strike="noStrike">
+                <a:solidFill>
+                  <a:srgbClr val="78ffc8"/>
+                </a:solidFill>
+                <a:latin typeface="Consolas"/>
+                <a:ea typeface="DejaVu Sans"/>
+              </a:rPr>
+              <a:t>System.out.println("Proper Div: " + goodDiv);</a:t>
+            </a:r>
+            <a:endParaRPr b="0" lang="en-US" sz="900" spc="-1" strike="noStrike">
+              <a:solidFill>
+                <a:srgbClr val="ffffff"/>
+              </a:solidFill>
+              <a:latin typeface="Arial"/>
+            </a:endParaRPr>
+          </a:p>
+          <a:p>
+            <a:pPr algn="ctr">
+              <a:lnSpc>
+                <a:spcPct val="100000"/>
+              </a:lnSpc>
+            </a:pPr>
+            <a:r>
+              <a:rPr b="0" lang="en-US" sz="900" spc="-1" strike="noStrike">
+                <a:solidFill>
+                  <a:srgbClr val="78ffc8"/>
+                </a:solidFill>
+                <a:latin typeface="Consolas"/>
+                <a:ea typeface="DejaVu Sans"/>
+              </a:rPr>
+              <a:t>    </a:t>
+            </a:r>
+            <a:r>
+              <a:rPr b="0" lang="en-US" sz="900" spc="-1" strike="noStrike">
+                <a:solidFill>
+                  <a:srgbClr val="78ffc8"/>
+                </a:solidFill>
+                <a:latin typeface="Consolas"/>
+                <a:ea typeface="DejaVu Sans"/>
+              </a:rPr>
+              <a:t>}</a:t>
+            </a:r>
+            <a:endParaRPr b="0" lang="en-US" sz="900" spc="-1" strike="noStrike">
+              <a:solidFill>
+                <a:srgbClr val="ffffff"/>
+              </a:solidFill>
+              <a:latin typeface="Arial"/>
+            </a:endParaRPr>
+          </a:p>
+          <a:p>
+            <a:pPr algn="ctr">
+              <a:lnSpc>
+                <a:spcPct val="100000"/>
+              </a:lnSpc>
+            </a:pPr>
+            <a:r>
+              <a:rPr b="0" lang="en-US" sz="900" spc="-1" strike="noStrike">
+                <a:solidFill>
+                  <a:srgbClr val="78ffc8"/>
+                </a:solidFill>
+                <a:latin typeface="Consolas"/>
+                <a:ea typeface="DejaVu Sans"/>
+              </a:rPr>
+              <a:t>}</a:t>
+            </a:r>
+            <a:endParaRPr b="0" lang="en-US" sz="900" spc="-1" strike="noStrike">
+              <a:solidFill>
+                <a:srgbClr val="ffffff"/>
+              </a:solidFill>
+              <a:latin typeface="Arial"/>
+            </a:endParaRPr>
+          </a:p>
+        </p:txBody>
+      </p:sp>
+      <p:sp>
+        <p:nvSpPr>
+          <p:cNvPr id="300" name="TextBox 33"/>
           <p:cNvSpPr/>
           <p:nvPr/>
         </p:nvSpPr>
@@ -5351,7 +7903,7 @@
         <p:spPr>
           <a:xfrm>
             <a:off x="0" y="0"/>
-            <a:ext cx="12185280" cy="6854400"/>
+            <a:ext cx="12184920" cy="6854040"/>
           </a:xfrm>
           <a:prstGeom prst="rect">
             <a:avLst/>
@@ -5411,7 +7963,7 @@
         <p:spPr>
           <a:xfrm>
             <a:off x="0" y="0"/>
-            <a:ext cx="14760" cy="6854400"/>
+            <a:ext cx="14400" cy="6854040"/>
           </a:xfrm>
           <a:prstGeom prst="rect">
             <a:avLst/>
@@ -5471,7 +8023,7 @@
         <p:spPr>
           <a:xfrm>
             <a:off x="914400" y="0"/>
-            <a:ext cx="14760" cy="6854400"/>
+            <a:ext cx="14400" cy="6854040"/>
           </a:xfrm>
           <a:prstGeom prst="rect">
             <a:avLst/>
@@ -5531,7 +8083,7 @@
         <p:spPr>
           <a:xfrm>
             <a:off x="1828800" y="0"/>
-            <a:ext cx="14760" cy="6854400"/>
+            <a:ext cx="14400" cy="6854040"/>
           </a:xfrm>
           <a:prstGeom prst="rect">
             <a:avLst/>
@@ -5591,7 +8143,7 @@
         <p:spPr>
           <a:xfrm>
             <a:off x="2743200" y="0"/>
-            <a:ext cx="14760" cy="6854400"/>
+            <a:ext cx="14400" cy="6854040"/>
           </a:xfrm>
           <a:prstGeom prst="rect">
             <a:avLst/>
@@ -5651,7 +8203,7 @@
         <p:spPr>
           <a:xfrm>
             <a:off x="3657600" y="0"/>
-            <a:ext cx="14760" cy="6854400"/>
+            <a:ext cx="14400" cy="6854040"/>
           </a:xfrm>
           <a:prstGeom prst="rect">
             <a:avLst/>
@@ -5711,7 +8263,7 @@
         <p:spPr>
           <a:xfrm>
             <a:off x="4572000" y="0"/>
-            <a:ext cx="14760" cy="6854400"/>
+            <a:ext cx="14400" cy="6854040"/>
           </a:xfrm>
           <a:prstGeom prst="rect">
             <a:avLst/>
@@ -5771,7 +8323,7 @@
         <p:spPr>
           <a:xfrm>
             <a:off x="5486400" y="0"/>
-            <a:ext cx="14760" cy="6854400"/>
+            <a:ext cx="14400" cy="6854040"/>
           </a:xfrm>
           <a:prstGeom prst="rect">
             <a:avLst/>
@@ -5831,7 +8383,7 @@
         <p:spPr>
           <a:xfrm>
             <a:off x="6400800" y="0"/>
-            <a:ext cx="14760" cy="6854400"/>
+            <a:ext cx="14400" cy="6854040"/>
           </a:xfrm>
           <a:prstGeom prst="rect">
             <a:avLst/>
@@ -5891,7 +8443,7 @@
         <p:spPr>
           <a:xfrm>
             <a:off x="7315200" y="0"/>
-            <a:ext cx="14760" cy="6854400"/>
+            <a:ext cx="14400" cy="6854040"/>
           </a:xfrm>
           <a:prstGeom prst="rect">
             <a:avLst/>
@@ -5951,7 +8503,7 @@
         <p:spPr>
           <a:xfrm>
             <a:off x="8229600" y="0"/>
-            <a:ext cx="14760" cy="6854400"/>
+            <a:ext cx="14400" cy="6854040"/>
           </a:xfrm>
           <a:prstGeom prst="rect">
             <a:avLst/>
@@ -6011,7 +8563,7 @@
         <p:spPr>
           <a:xfrm>
             <a:off x="9144000" y="0"/>
-            <a:ext cx="14760" cy="6854400"/>
+            <a:ext cx="14400" cy="6854040"/>
           </a:xfrm>
           <a:prstGeom prst="rect">
             <a:avLst/>
@@ -6071,7 +8623,7 @@
         <p:spPr>
           <a:xfrm>
             <a:off x="10058400" y="0"/>
-            <a:ext cx="14760" cy="6854400"/>
+            <a:ext cx="14400" cy="6854040"/>
           </a:xfrm>
           <a:prstGeom prst="rect">
             <a:avLst/>
@@ -6131,7 +8683,7 @@
         <p:spPr>
           <a:xfrm>
             <a:off x="10972800" y="0"/>
-            <a:ext cx="14760" cy="6854400"/>
+            <a:ext cx="14400" cy="6854040"/>
           </a:xfrm>
           <a:prstGeom prst="rect">
             <a:avLst/>
@@ -6191,7 +8743,7 @@
         <p:spPr>
           <a:xfrm>
             <a:off x="11887200" y="0"/>
-            <a:ext cx="14760" cy="6854400"/>
+            <a:ext cx="14400" cy="6854040"/>
           </a:xfrm>
           <a:prstGeom prst="rect">
             <a:avLst/>
@@ -6251,7 +8803,7 @@
         <p:spPr>
           <a:xfrm>
             <a:off x="0" y="0"/>
-            <a:ext cx="316440" cy="6854400"/>
+            <a:ext cx="316080" cy="6854040"/>
           </a:xfrm>
           <a:prstGeom prst="rect">
             <a:avLst/>
@@ -6311,7 +8863,7 @@
         <p:spPr>
           <a:xfrm>
             <a:off x="9875520" y="365760"/>
-            <a:ext cx="2008080" cy="499320"/>
+            <a:ext cx="2007720" cy="498960"/>
           </a:xfrm>
           <a:prstGeom prst="roundRect">
             <a:avLst>
@@ -6539,7 +9091,7 @@
         <p:spPr>
           <a:xfrm>
             <a:off x="987480" y="3182040"/>
-            <a:ext cx="3288240" cy="2739600"/>
+            <a:ext cx="3287880" cy="2739240"/>
           </a:xfrm>
           <a:prstGeom prst="roundRect">
             <a:avLst>
@@ -6601,7 +9153,7 @@
         <p:spPr>
           <a:xfrm>
             <a:off x="914400" y="3108960"/>
-            <a:ext cx="3288240" cy="3060720"/>
+            <a:ext cx="3287880" cy="3060360"/>
           </a:xfrm>
           <a:prstGeom prst="roundRect">
             <a:avLst>
@@ -6764,7 +9316,7 @@
         <p:spPr>
           <a:xfrm>
             <a:off x="4507920" y="3182040"/>
-            <a:ext cx="3288240" cy="2739600"/>
+            <a:ext cx="3287880" cy="2739240"/>
           </a:xfrm>
           <a:prstGeom prst="roundRect">
             <a:avLst>
@@ -6826,7 +9378,7 @@
         <p:spPr>
           <a:xfrm>
             <a:off x="4434840" y="2971800"/>
-            <a:ext cx="3288240" cy="3426480"/>
+            <a:ext cx="3287880" cy="3426120"/>
           </a:xfrm>
           <a:prstGeom prst="roundRect">
             <a:avLst>
@@ -7084,7 +9636,7 @@
         <p:spPr>
           <a:xfrm>
             <a:off x="8028360" y="3182040"/>
-            <a:ext cx="3288240" cy="2739600"/>
+            <a:ext cx="3287880" cy="2739240"/>
           </a:xfrm>
           <a:prstGeom prst="roundRect">
             <a:avLst>
@@ -7146,7 +9698,7 @@
         <p:spPr>
           <a:xfrm>
             <a:off x="7955280" y="3108960"/>
-            <a:ext cx="3700800" cy="3060720"/>
+            <a:ext cx="3700440" cy="3060360"/>
           </a:xfrm>
           <a:prstGeom prst="roundRect">
             <a:avLst>
@@ -7591,7 +10143,7 @@
         <p:spPr>
           <a:xfrm>
             <a:off x="0" y="0"/>
-            <a:ext cx="12185280" cy="6854400"/>
+            <a:ext cx="12184920" cy="6854040"/>
           </a:xfrm>
           <a:prstGeom prst="rect">
             <a:avLst/>
@@ -7651,7 +10203,7 @@
         <p:spPr>
           <a:xfrm>
             <a:off x="0" y="0"/>
-            <a:ext cx="14760" cy="6854400"/>
+            <a:ext cx="14400" cy="6854040"/>
           </a:xfrm>
           <a:prstGeom prst="rect">
             <a:avLst/>
@@ -7711,7 +10263,7 @@
         <p:spPr>
           <a:xfrm>
             <a:off x="914400" y="0"/>
-            <a:ext cx="14760" cy="6854400"/>
+            <a:ext cx="14400" cy="6854040"/>
           </a:xfrm>
           <a:prstGeom prst="rect">
             <a:avLst/>
@@ -7771,7 +10323,7 @@
         <p:spPr>
           <a:xfrm>
             <a:off x="1828800" y="0"/>
-            <a:ext cx="14760" cy="6854400"/>
+            <a:ext cx="14400" cy="6854040"/>
           </a:xfrm>
           <a:prstGeom prst="rect">
             <a:avLst/>
@@ -7831,7 +10383,7 @@
         <p:spPr>
           <a:xfrm>
             <a:off x="2743200" y="0"/>
-            <a:ext cx="14760" cy="6854400"/>
+            <a:ext cx="14400" cy="6854040"/>
           </a:xfrm>
           <a:prstGeom prst="rect">
             <a:avLst/>
@@ -7891,7 +10443,7 @@
         <p:spPr>
           <a:xfrm>
             <a:off x="3657600" y="0"/>
-            <a:ext cx="14760" cy="6854400"/>
+            <a:ext cx="14400" cy="6854040"/>
           </a:xfrm>
           <a:prstGeom prst="rect">
             <a:avLst/>
@@ -7951,7 +10503,7 @@
         <p:spPr>
           <a:xfrm>
             <a:off x="4572000" y="0"/>
-            <a:ext cx="14760" cy="6854400"/>
+            <a:ext cx="14400" cy="6854040"/>
           </a:xfrm>
           <a:prstGeom prst="rect">
             <a:avLst/>
@@ -8011,7 +10563,7 @@
         <p:spPr>
           <a:xfrm>
             <a:off x="5486400" y="0"/>
-            <a:ext cx="14760" cy="6854400"/>
+            <a:ext cx="14400" cy="6854040"/>
           </a:xfrm>
           <a:prstGeom prst="rect">
             <a:avLst/>
@@ -8071,7 +10623,7 @@
         <p:spPr>
           <a:xfrm>
             <a:off x="6400800" y="0"/>
-            <a:ext cx="14760" cy="6854400"/>
+            <a:ext cx="14400" cy="6854040"/>
           </a:xfrm>
           <a:prstGeom prst="rect">
             <a:avLst/>
@@ -8131,7 +10683,7 @@
         <p:spPr>
           <a:xfrm>
             <a:off x="7315200" y="0"/>
-            <a:ext cx="14760" cy="6854400"/>
+            <a:ext cx="14400" cy="6854040"/>
           </a:xfrm>
           <a:prstGeom prst="rect">
             <a:avLst/>
@@ -8191,7 +10743,7 @@
         <p:spPr>
           <a:xfrm>
             <a:off x="8229600" y="0"/>
-            <a:ext cx="14760" cy="6854400"/>
+            <a:ext cx="14400" cy="6854040"/>
           </a:xfrm>
           <a:prstGeom prst="rect">
             <a:avLst/>
@@ -8251,7 +10803,7 @@
         <p:spPr>
           <a:xfrm>
             <a:off x="9144000" y="0"/>
-            <a:ext cx="14760" cy="6854400"/>
+            <a:ext cx="14400" cy="6854040"/>
           </a:xfrm>
           <a:prstGeom prst="rect">
             <a:avLst/>
@@ -8311,7 +10863,7 @@
         <p:spPr>
           <a:xfrm>
             <a:off x="10058400" y="0"/>
-            <a:ext cx="14760" cy="6854400"/>
+            <a:ext cx="14400" cy="6854040"/>
           </a:xfrm>
           <a:prstGeom prst="rect">
             <a:avLst/>
@@ -8371,7 +10923,7 @@
         <p:spPr>
           <a:xfrm>
             <a:off x="10972800" y="0"/>
-            <a:ext cx="14760" cy="6854400"/>
+            <a:ext cx="14400" cy="6854040"/>
           </a:xfrm>
           <a:prstGeom prst="rect">
             <a:avLst/>
@@ -8431,7 +10983,7 @@
         <p:spPr>
           <a:xfrm>
             <a:off x="11887200" y="0"/>
-            <a:ext cx="14760" cy="6854400"/>
+            <a:ext cx="14400" cy="6854040"/>
           </a:xfrm>
           <a:prstGeom prst="rect">
             <a:avLst/>
@@ -8491,7 +11043,7 @@
         <p:spPr>
           <a:xfrm>
             <a:off x="0" y="0"/>
-            <a:ext cx="316440" cy="6854400"/>
+            <a:ext cx="316080" cy="6854040"/>
           </a:xfrm>
           <a:prstGeom prst="rect">
             <a:avLst/>
@@ -8551,7 +11103,7 @@
         <p:spPr>
           <a:xfrm>
             <a:off x="9875520" y="365760"/>
-            <a:ext cx="2008080" cy="499320"/>
+            <a:ext cx="2007720" cy="498960"/>
           </a:xfrm>
           <a:prstGeom prst="roundRect">
             <a:avLst>
@@ -8779,7 +11331,7 @@
         <p:spPr>
           <a:xfrm>
             <a:off x="987480" y="3182040"/>
-            <a:ext cx="3288240" cy="2739600"/>
+            <a:ext cx="3287880" cy="2739240"/>
           </a:xfrm>
           <a:prstGeom prst="roundRect">
             <a:avLst>
@@ -8841,7 +11393,7 @@
         <p:spPr>
           <a:xfrm>
             <a:off x="685800" y="2971800"/>
-            <a:ext cx="3516840" cy="3197880"/>
+            <a:ext cx="3516480" cy="3197520"/>
           </a:xfrm>
           <a:prstGeom prst="roundRect">
             <a:avLst>
@@ -9032,7 +11584,7 @@
         <p:spPr>
           <a:xfrm>
             <a:off x="4507920" y="3182040"/>
-            <a:ext cx="3288240" cy="2739600"/>
+            <a:ext cx="3287880" cy="2739240"/>
           </a:xfrm>
           <a:prstGeom prst="roundRect">
             <a:avLst>
@@ -9094,7 +11646,7 @@
         <p:spPr>
           <a:xfrm>
             <a:off x="4434840" y="2971800"/>
-            <a:ext cx="3288240" cy="3426480"/>
+            <a:ext cx="3287880" cy="3426120"/>
           </a:xfrm>
           <a:prstGeom prst="roundRect">
             <a:avLst>
@@ -9352,7 +11904,7 @@
         <p:spPr>
           <a:xfrm>
             <a:off x="8028360" y="3182040"/>
-            <a:ext cx="3288240" cy="2739600"/>
+            <a:ext cx="3287880" cy="2739240"/>
           </a:xfrm>
           <a:prstGeom prst="roundRect">
             <a:avLst>
@@ -9414,7 +11966,7 @@
         <p:spPr>
           <a:xfrm>
             <a:off x="7955280" y="3108960"/>
-            <a:ext cx="3700800" cy="3060720"/>
+            <a:ext cx="3700440" cy="3060360"/>
           </a:xfrm>
           <a:prstGeom prst="roundRect">
             <a:avLst>
@@ -9859,7 +12411,7 @@
         <p:spPr>
           <a:xfrm>
             <a:off x="0" y="0"/>
-            <a:ext cx="12185280" cy="6854400"/>
+            <a:ext cx="12184920" cy="6854040"/>
           </a:xfrm>
           <a:prstGeom prst="rect">
             <a:avLst/>
@@ -9919,7 +12471,7 @@
         <p:spPr>
           <a:xfrm>
             <a:off x="0" y="0"/>
-            <a:ext cx="14760" cy="6854400"/>
+            <a:ext cx="14400" cy="6854040"/>
           </a:xfrm>
           <a:prstGeom prst="rect">
             <a:avLst/>
@@ -9979,7 +12531,7 @@
         <p:spPr>
           <a:xfrm>
             <a:off x="914400" y="0"/>
-            <a:ext cx="14760" cy="6854400"/>
+            <a:ext cx="14400" cy="6854040"/>
           </a:xfrm>
           <a:prstGeom prst="rect">
             <a:avLst/>
@@ -10039,7 +12591,7 @@
         <p:spPr>
           <a:xfrm>
             <a:off x="1828800" y="0"/>
-            <a:ext cx="14760" cy="6854400"/>
+            <a:ext cx="14400" cy="6854040"/>
           </a:xfrm>
           <a:prstGeom prst="rect">
             <a:avLst/>
@@ -10099,7 +12651,7 @@
         <p:spPr>
           <a:xfrm>
             <a:off x="2743200" y="0"/>
-            <a:ext cx="14760" cy="6854400"/>
+            <a:ext cx="14400" cy="6854040"/>
           </a:xfrm>
           <a:prstGeom prst="rect">
             <a:avLst/>
@@ -10159,7 +12711,7 @@
         <p:spPr>
           <a:xfrm>
             <a:off x="3657600" y="0"/>
-            <a:ext cx="14760" cy="6854400"/>
+            <a:ext cx="14400" cy="6854040"/>
           </a:xfrm>
           <a:prstGeom prst="rect">
             <a:avLst/>
@@ -10219,7 +12771,7 @@
         <p:spPr>
           <a:xfrm>
             <a:off x="4572000" y="0"/>
-            <a:ext cx="14760" cy="6854400"/>
+            <a:ext cx="14400" cy="6854040"/>
           </a:xfrm>
           <a:prstGeom prst="rect">
             <a:avLst/>
@@ -10279,7 +12831,7 @@
         <p:spPr>
           <a:xfrm>
             <a:off x="5486400" y="0"/>
-            <a:ext cx="14760" cy="6854400"/>
+            <a:ext cx="14400" cy="6854040"/>
           </a:xfrm>
           <a:prstGeom prst="rect">
             <a:avLst/>
@@ -10339,7 +12891,7 @@
         <p:spPr>
           <a:xfrm>
             <a:off x="6400800" y="0"/>
-            <a:ext cx="14760" cy="6854400"/>
+            <a:ext cx="14400" cy="6854040"/>
           </a:xfrm>
           <a:prstGeom prst="rect">
             <a:avLst/>
@@ -10399,7 +12951,7 @@
         <p:spPr>
           <a:xfrm>
             <a:off x="7315200" y="0"/>
-            <a:ext cx="14760" cy="6854400"/>
+            <a:ext cx="14400" cy="6854040"/>
           </a:xfrm>
           <a:prstGeom prst="rect">
             <a:avLst/>
@@ -10459,7 +13011,7 @@
         <p:spPr>
           <a:xfrm>
             <a:off x="8229600" y="0"/>
-            <a:ext cx="14760" cy="6854400"/>
+            <a:ext cx="14400" cy="6854040"/>
           </a:xfrm>
           <a:prstGeom prst="rect">
             <a:avLst/>
@@ -10519,7 +13071,7 @@
         <p:spPr>
           <a:xfrm>
             <a:off x="9144000" y="0"/>
-            <a:ext cx="14760" cy="6854400"/>
+            <a:ext cx="14400" cy="6854040"/>
           </a:xfrm>
           <a:prstGeom prst="rect">
             <a:avLst/>
@@ -10579,7 +13131,7 @@
         <p:spPr>
           <a:xfrm>
             <a:off x="10058400" y="0"/>
-            <a:ext cx="14760" cy="6854400"/>
+            <a:ext cx="14400" cy="6854040"/>
           </a:xfrm>
           <a:prstGeom prst="rect">
             <a:avLst/>
@@ -10639,7 +13191,7 @@
         <p:spPr>
           <a:xfrm>
             <a:off x="10972800" y="0"/>
-            <a:ext cx="14760" cy="6854400"/>
+            <a:ext cx="14400" cy="6854040"/>
           </a:xfrm>
           <a:prstGeom prst="rect">
             <a:avLst/>
@@ -10699,7 +13251,7 @@
         <p:spPr>
           <a:xfrm>
             <a:off x="11887200" y="0"/>
-            <a:ext cx="14760" cy="6854400"/>
+            <a:ext cx="14400" cy="6854040"/>
           </a:xfrm>
           <a:prstGeom prst="rect">
             <a:avLst/>
@@ -10759,7 +13311,7 @@
         <p:spPr>
           <a:xfrm>
             <a:off x="0" y="0"/>
-            <a:ext cx="316440" cy="6854400"/>
+            <a:ext cx="316080" cy="6854040"/>
           </a:xfrm>
           <a:prstGeom prst="rect">
             <a:avLst/>
@@ -10819,7 +13371,7 @@
         <p:spPr>
           <a:xfrm>
             <a:off x="9875520" y="365760"/>
-            <a:ext cx="2008080" cy="499320"/>
+            <a:ext cx="2007720" cy="498960"/>
           </a:xfrm>
           <a:prstGeom prst="roundRect">
             <a:avLst>
@@ -11024,7 +13576,7 @@
         <p:spPr>
           <a:xfrm>
             <a:off x="987480" y="3182040"/>
-            <a:ext cx="3288240" cy="2739600"/>
+            <a:ext cx="3287880" cy="2739240"/>
           </a:xfrm>
           <a:prstGeom prst="roundRect">
             <a:avLst>
@@ -11086,7 +13638,7 @@
         <p:spPr>
           <a:xfrm>
             <a:off x="685800" y="2971800"/>
-            <a:ext cx="3516840" cy="3197880"/>
+            <a:ext cx="3516480" cy="3197520"/>
           </a:xfrm>
           <a:prstGeom prst="roundRect">
             <a:avLst>
@@ -11277,7 +13829,7 @@
         <p:spPr>
           <a:xfrm>
             <a:off x="4507920" y="3182040"/>
-            <a:ext cx="3288240" cy="2739600"/>
+            <a:ext cx="3287880" cy="2739240"/>
           </a:xfrm>
           <a:prstGeom prst="roundRect">
             <a:avLst>
@@ -11339,7 +13891,7 @@
         <p:spPr>
           <a:xfrm>
             <a:off x="4434840" y="2971800"/>
-            <a:ext cx="3288240" cy="3426480"/>
+            <a:ext cx="3287880" cy="3426120"/>
           </a:xfrm>
           <a:prstGeom prst="roundRect">
             <a:avLst>
@@ -11551,7 +14103,7 @@
         <p:spPr>
           <a:xfrm>
             <a:off x="8028360" y="3182040"/>
-            <a:ext cx="3288240" cy="2739600"/>
+            <a:ext cx="3287880" cy="2739240"/>
           </a:xfrm>
           <a:prstGeom prst="roundRect">
             <a:avLst>
@@ -11613,7 +14165,7 @@
         <p:spPr>
           <a:xfrm>
             <a:off x="7955280" y="2743200"/>
-            <a:ext cx="3930120" cy="3884400"/>
+            <a:ext cx="3929760" cy="3884040"/>
           </a:xfrm>
           <a:prstGeom prst="roundRect">
             <a:avLst>
@@ -12173,7 +14725,7 @@
         <p:spPr>
           <a:xfrm>
             <a:off x="0" y="0"/>
-            <a:ext cx="12185280" cy="6854400"/>
+            <a:ext cx="12184920" cy="6854040"/>
           </a:xfrm>
           <a:prstGeom prst="rect">
             <a:avLst/>
@@ -12233,7 +14785,7 @@
         <p:spPr>
           <a:xfrm>
             <a:off x="0" y="0"/>
-            <a:ext cx="14760" cy="6854400"/>
+            <a:ext cx="14400" cy="6854040"/>
           </a:xfrm>
           <a:prstGeom prst="rect">
             <a:avLst/>
@@ -12293,7 +14845,7 @@
         <p:spPr>
           <a:xfrm>
             <a:off x="914400" y="0"/>
-            <a:ext cx="14760" cy="6854400"/>
+            <a:ext cx="14400" cy="6854040"/>
           </a:xfrm>
           <a:prstGeom prst="rect">
             <a:avLst/>
@@ -12353,7 +14905,7 @@
         <p:spPr>
           <a:xfrm>
             <a:off x="1828800" y="0"/>
-            <a:ext cx="14760" cy="6854400"/>
+            <a:ext cx="14400" cy="6854040"/>
           </a:xfrm>
           <a:prstGeom prst="rect">
             <a:avLst/>
@@ -12413,7 +14965,7 @@
         <p:spPr>
           <a:xfrm>
             <a:off x="2743200" y="0"/>
-            <a:ext cx="14760" cy="6854400"/>
+            <a:ext cx="14400" cy="6854040"/>
           </a:xfrm>
           <a:prstGeom prst="rect">
             <a:avLst/>
@@ -12473,7 +15025,7 @@
         <p:spPr>
           <a:xfrm>
             <a:off x="3657600" y="0"/>
-            <a:ext cx="14760" cy="6854400"/>
+            <a:ext cx="14400" cy="6854040"/>
           </a:xfrm>
           <a:prstGeom prst="rect">
             <a:avLst/>
@@ -12533,7 +15085,7 @@
         <p:spPr>
           <a:xfrm>
             <a:off x="4572000" y="0"/>
-            <a:ext cx="14760" cy="6854400"/>
+            <a:ext cx="14400" cy="6854040"/>
           </a:xfrm>
           <a:prstGeom prst="rect">
             <a:avLst/>
@@ -12593,7 +15145,7 @@
         <p:spPr>
           <a:xfrm>
             <a:off x="5486400" y="0"/>
-            <a:ext cx="14760" cy="6854400"/>
+            <a:ext cx="14400" cy="6854040"/>
           </a:xfrm>
           <a:prstGeom prst="rect">
             <a:avLst/>
@@ -12653,7 +15205,7 @@
         <p:spPr>
           <a:xfrm>
             <a:off x="6400800" y="0"/>
-            <a:ext cx="14760" cy="6854400"/>
+            <a:ext cx="14400" cy="6854040"/>
           </a:xfrm>
           <a:prstGeom prst="rect">
             <a:avLst/>
@@ -12713,7 +15265,7 @@
         <p:spPr>
           <a:xfrm>
             <a:off x="7315200" y="0"/>
-            <a:ext cx="14760" cy="6854400"/>
+            <a:ext cx="14400" cy="6854040"/>
           </a:xfrm>
           <a:prstGeom prst="rect">
             <a:avLst/>
@@ -12773,7 +15325,7 @@
         <p:spPr>
           <a:xfrm>
             <a:off x="8229600" y="0"/>
-            <a:ext cx="14760" cy="6854400"/>
+            <a:ext cx="14400" cy="6854040"/>
           </a:xfrm>
           <a:prstGeom prst="rect">
             <a:avLst/>
@@ -12833,7 +15385,7 @@
         <p:spPr>
           <a:xfrm>
             <a:off x="9144000" y="0"/>
-            <a:ext cx="14760" cy="6854400"/>
+            <a:ext cx="14400" cy="6854040"/>
           </a:xfrm>
           <a:prstGeom prst="rect">
             <a:avLst/>
@@ -12893,7 +15445,7 @@
         <p:spPr>
           <a:xfrm>
             <a:off x="10058400" y="0"/>
-            <a:ext cx="14760" cy="6854400"/>
+            <a:ext cx="14400" cy="6854040"/>
           </a:xfrm>
           <a:prstGeom prst="rect">
             <a:avLst/>
@@ -12953,7 +15505,7 @@
         <p:spPr>
           <a:xfrm>
             <a:off x="10972800" y="0"/>
-            <a:ext cx="14760" cy="6854400"/>
+            <a:ext cx="14400" cy="6854040"/>
           </a:xfrm>
           <a:prstGeom prst="rect">
             <a:avLst/>
@@ -13013,7 +15565,7 @@
         <p:spPr>
           <a:xfrm>
             <a:off x="11887200" y="0"/>
-            <a:ext cx="14760" cy="6854400"/>
+            <a:ext cx="14400" cy="6854040"/>
           </a:xfrm>
           <a:prstGeom prst="rect">
             <a:avLst/>
@@ -13073,7 +15625,7 @@
         <p:spPr>
           <a:xfrm>
             <a:off x="0" y="0"/>
-            <a:ext cx="316440" cy="6854400"/>
+            <a:ext cx="316080" cy="6854040"/>
           </a:xfrm>
           <a:prstGeom prst="rect">
             <a:avLst/>
@@ -13133,7 +15685,7 @@
         <p:spPr>
           <a:xfrm>
             <a:off x="9875520" y="365760"/>
-            <a:ext cx="2008080" cy="499320"/>
+            <a:ext cx="2007720" cy="498960"/>
           </a:xfrm>
           <a:prstGeom prst="roundRect">
             <a:avLst>
@@ -13338,7 +15890,7 @@
         <p:spPr>
           <a:xfrm>
             <a:off x="987480" y="3182040"/>
-            <a:ext cx="3288240" cy="2739600"/>
+            <a:ext cx="3287880" cy="2739240"/>
           </a:xfrm>
           <a:prstGeom prst="roundRect">
             <a:avLst>
@@ -13400,7 +15952,7 @@
         <p:spPr>
           <a:xfrm>
             <a:off x="457200" y="2743200"/>
-            <a:ext cx="3745440" cy="3884760"/>
+            <a:ext cx="3745080" cy="3884400"/>
           </a:xfrm>
           <a:prstGeom prst="roundRect">
             <a:avLst>
@@ -13638,7 +16190,7 @@
         <p:spPr>
           <a:xfrm>
             <a:off x="4507920" y="3182040"/>
-            <a:ext cx="3288240" cy="2739600"/>
+            <a:ext cx="3287880" cy="2739240"/>
           </a:xfrm>
           <a:prstGeom prst="roundRect">
             <a:avLst>
@@ -13700,7 +16252,7 @@
         <p:spPr>
           <a:xfrm>
             <a:off x="4434840" y="2971800"/>
-            <a:ext cx="3288240" cy="3426480"/>
+            <a:ext cx="3287880" cy="3426120"/>
           </a:xfrm>
           <a:prstGeom prst="roundRect">
             <a:avLst>
@@ -13919,7 +16471,7 @@
         <p:spPr>
           <a:xfrm>
             <a:off x="8028360" y="3182040"/>
-            <a:ext cx="3288240" cy="2739600"/>
+            <a:ext cx="3287880" cy="2739240"/>
           </a:xfrm>
           <a:prstGeom prst="roundRect">
             <a:avLst>
@@ -13981,7 +16533,7 @@
         <p:spPr>
           <a:xfrm>
             <a:off x="8001000" y="3200400"/>
-            <a:ext cx="3473280" cy="2741760"/>
+            <a:ext cx="3472920" cy="2741400"/>
           </a:xfrm>
           <a:prstGeom prst="roundRect">
             <a:avLst>
@@ -14393,7 +16945,7 @@
         <p:spPr>
           <a:xfrm>
             <a:off x="0" y="0"/>
-            <a:ext cx="12184920" cy="6854040"/>
+            <a:ext cx="12184560" cy="6853680"/>
           </a:xfrm>
           <a:prstGeom prst="rect">
             <a:avLst/>
@@ -14453,7 +17005,7 @@
         <p:spPr>
           <a:xfrm>
             <a:off x="0" y="0"/>
-            <a:ext cx="14400" cy="6854040"/>
+            <a:ext cx="14040" cy="6853680"/>
           </a:xfrm>
           <a:prstGeom prst="rect">
             <a:avLst/>
@@ -14513,7 +17065,7 @@
         <p:spPr>
           <a:xfrm>
             <a:off x="914400" y="0"/>
-            <a:ext cx="14400" cy="6854040"/>
+            <a:ext cx="14040" cy="6853680"/>
           </a:xfrm>
           <a:prstGeom prst="rect">
             <a:avLst/>
@@ -14573,7 +17125,7 @@
         <p:spPr>
           <a:xfrm>
             <a:off x="1828800" y="0"/>
-            <a:ext cx="14400" cy="6854040"/>
+            <a:ext cx="14040" cy="6853680"/>
           </a:xfrm>
           <a:prstGeom prst="rect">
             <a:avLst/>
@@ -14633,7 +17185,7 @@
         <p:spPr>
           <a:xfrm>
             <a:off x="2743200" y="0"/>
-            <a:ext cx="14400" cy="6854040"/>
+            <a:ext cx="14040" cy="6853680"/>
           </a:xfrm>
           <a:prstGeom prst="rect">
             <a:avLst/>
@@ -14693,7 +17245,7 @@
         <p:spPr>
           <a:xfrm>
             <a:off x="3657600" y="0"/>
-            <a:ext cx="14400" cy="6854040"/>
+            <a:ext cx="14040" cy="6853680"/>
           </a:xfrm>
           <a:prstGeom prst="rect">
             <a:avLst/>
@@ -14753,7 +17305,7 @@
         <p:spPr>
           <a:xfrm>
             <a:off x="4572000" y="0"/>
-            <a:ext cx="14400" cy="6854040"/>
+            <a:ext cx="14040" cy="6853680"/>
           </a:xfrm>
           <a:prstGeom prst="rect">
             <a:avLst/>
@@ -14813,7 +17365,7 @@
         <p:spPr>
           <a:xfrm>
             <a:off x="5486400" y="0"/>
-            <a:ext cx="14400" cy="6854040"/>
+            <a:ext cx="14040" cy="6853680"/>
           </a:xfrm>
           <a:prstGeom prst="rect">
             <a:avLst/>
@@ -14873,7 +17425,7 @@
         <p:spPr>
           <a:xfrm>
             <a:off x="6400800" y="0"/>
-            <a:ext cx="14400" cy="6854040"/>
+            <a:ext cx="14040" cy="6853680"/>
           </a:xfrm>
           <a:prstGeom prst="rect">
             <a:avLst/>
@@ -14933,7 +17485,7 @@
         <p:spPr>
           <a:xfrm>
             <a:off x="7315200" y="0"/>
-            <a:ext cx="14400" cy="6854040"/>
+            <a:ext cx="14040" cy="6853680"/>
           </a:xfrm>
           <a:prstGeom prst="rect">
             <a:avLst/>
@@ -14993,7 +17545,7 @@
         <p:spPr>
           <a:xfrm>
             <a:off x="8229600" y="0"/>
-            <a:ext cx="14400" cy="6854040"/>
+            <a:ext cx="14040" cy="6853680"/>
           </a:xfrm>
           <a:prstGeom prst="rect">
             <a:avLst/>
@@ -15053,7 +17605,7 @@
         <p:spPr>
           <a:xfrm>
             <a:off x="9144000" y="0"/>
-            <a:ext cx="14400" cy="6854040"/>
+            <a:ext cx="14040" cy="6853680"/>
           </a:xfrm>
           <a:prstGeom prst="rect">
             <a:avLst/>
@@ -15113,7 +17665,7 @@
         <p:spPr>
           <a:xfrm>
             <a:off x="10058400" y="0"/>
-            <a:ext cx="14400" cy="6854040"/>
+            <a:ext cx="14040" cy="6853680"/>
           </a:xfrm>
           <a:prstGeom prst="rect">
             <a:avLst/>
@@ -15173,7 +17725,7 @@
         <p:spPr>
           <a:xfrm>
             <a:off x="10972800" y="0"/>
-            <a:ext cx="14400" cy="6854040"/>
+            <a:ext cx="14040" cy="6853680"/>
           </a:xfrm>
           <a:prstGeom prst="rect">
             <a:avLst/>
@@ -15233,7 +17785,7 @@
         <p:spPr>
           <a:xfrm>
             <a:off x="11887200" y="0"/>
-            <a:ext cx="14400" cy="6854040"/>
+            <a:ext cx="14040" cy="6853680"/>
           </a:xfrm>
           <a:prstGeom prst="rect">
             <a:avLst/>
@@ -15293,7 +17845,7 @@
         <p:spPr>
           <a:xfrm>
             <a:off x="0" y="0"/>
-            <a:ext cx="316080" cy="6854040"/>
+            <a:ext cx="315720" cy="6853680"/>
           </a:xfrm>
           <a:prstGeom prst="rect">
             <a:avLst/>
@@ -15353,7 +17905,7 @@
         <p:spPr>
           <a:xfrm>
             <a:off x="9875520" y="365760"/>
-            <a:ext cx="2007720" cy="498960"/>
+            <a:ext cx="2007360" cy="498600"/>
           </a:xfrm>
           <a:prstGeom prst="roundRect">
             <a:avLst>
@@ -15481,7 +18033,7 @@
         <p:spPr>
           <a:xfrm>
             <a:off x="668520" y="1600200"/>
-            <a:ext cx="10352880" cy="515880"/>
+            <a:ext cx="10352520" cy="515880"/>
           </a:xfrm>
           <a:prstGeom prst="rect">
             <a:avLst/>
@@ -15558,7 +18110,7 @@
         <p:spPr>
           <a:xfrm>
             <a:off x="987480" y="3182040"/>
-            <a:ext cx="3287880" cy="2739240"/>
+            <a:ext cx="3287520" cy="2738880"/>
           </a:xfrm>
           <a:prstGeom prst="roundRect">
             <a:avLst>
@@ -15620,7 +18172,7 @@
         <p:spPr>
           <a:xfrm>
             <a:off x="457200" y="2514600"/>
-            <a:ext cx="3745080" cy="4113000"/>
+            <a:ext cx="3744720" cy="4112640"/>
           </a:xfrm>
           <a:prstGeom prst="roundRect">
             <a:avLst>
@@ -15873,7 +18425,7 @@
         <p:spPr>
           <a:xfrm>
             <a:off x="4507920" y="3182040"/>
-            <a:ext cx="3287880" cy="2739240"/>
+            <a:ext cx="3287520" cy="2738880"/>
           </a:xfrm>
           <a:prstGeom prst="roundRect">
             <a:avLst>
@@ -15935,7 +18487,7 @@
         <p:spPr>
           <a:xfrm>
             <a:off x="4434840" y="2514600"/>
-            <a:ext cx="3287880" cy="3883320"/>
+            <a:ext cx="3287520" cy="3882960"/>
           </a:xfrm>
           <a:prstGeom prst="roundRect">
             <a:avLst>
@@ -16151,7 +18703,7 @@
         <p:spPr>
           <a:xfrm>
             <a:off x="8028360" y="3182040"/>
-            <a:ext cx="3287880" cy="2739240"/>
+            <a:ext cx="3287520" cy="2738880"/>
           </a:xfrm>
           <a:prstGeom prst="roundRect">
             <a:avLst>
@@ -16213,7 +18765,7 @@
         <p:spPr>
           <a:xfrm>
             <a:off x="8001000" y="2286000"/>
-            <a:ext cx="3656520" cy="4113720"/>
+            <a:ext cx="3656160" cy="4113360"/>
           </a:xfrm>
           <a:prstGeom prst="roundRect">
             <a:avLst>
@@ -16889,7 +19441,7 @@
         <p:spPr>
           <a:xfrm>
             <a:off x="0" y="0"/>
-            <a:ext cx="12185280" cy="6854400"/>
+            <a:ext cx="12184920" cy="6854040"/>
           </a:xfrm>
           <a:prstGeom prst="rect">
             <a:avLst/>
@@ -16949,7 +19501,7 @@
         <p:spPr>
           <a:xfrm>
             <a:off x="0" y="0"/>
-            <a:ext cx="14760" cy="6854400"/>
+            <a:ext cx="14400" cy="6854040"/>
           </a:xfrm>
           <a:prstGeom prst="rect">
             <a:avLst/>
@@ -17009,7 +19561,7 @@
         <p:spPr>
           <a:xfrm>
             <a:off x="914400" y="0"/>
-            <a:ext cx="14760" cy="6854400"/>
+            <a:ext cx="14400" cy="6854040"/>
           </a:xfrm>
           <a:prstGeom prst="rect">
             <a:avLst/>
@@ -17069,7 +19621,7 @@
         <p:spPr>
           <a:xfrm>
             <a:off x="1828800" y="0"/>
-            <a:ext cx="14760" cy="6854400"/>
+            <a:ext cx="14400" cy="6854040"/>
           </a:xfrm>
           <a:prstGeom prst="rect">
             <a:avLst/>
@@ -17129,7 +19681,7 @@
         <p:spPr>
           <a:xfrm>
             <a:off x="2743200" y="0"/>
-            <a:ext cx="14760" cy="6854400"/>
+            <a:ext cx="14400" cy="6854040"/>
           </a:xfrm>
           <a:prstGeom prst="rect">
             <a:avLst/>
@@ -17189,7 +19741,7 @@
         <p:spPr>
           <a:xfrm>
             <a:off x="3657600" y="0"/>
-            <a:ext cx="14760" cy="6854400"/>
+            <a:ext cx="14400" cy="6854040"/>
           </a:xfrm>
           <a:prstGeom prst="rect">
             <a:avLst/>
@@ -17249,7 +19801,7 @@
         <p:spPr>
           <a:xfrm>
             <a:off x="4572000" y="0"/>
-            <a:ext cx="14760" cy="6854400"/>
+            <a:ext cx="14400" cy="6854040"/>
           </a:xfrm>
           <a:prstGeom prst="rect">
             <a:avLst/>
@@ -17309,7 +19861,7 @@
         <p:spPr>
           <a:xfrm>
             <a:off x="5486400" y="0"/>
-            <a:ext cx="14760" cy="6854400"/>
+            <a:ext cx="14400" cy="6854040"/>
           </a:xfrm>
           <a:prstGeom prst="rect">
             <a:avLst/>
@@ -17369,7 +19921,7 @@
         <p:spPr>
           <a:xfrm>
             <a:off x="6400800" y="0"/>
-            <a:ext cx="14760" cy="6854400"/>
+            <a:ext cx="14400" cy="6854040"/>
           </a:xfrm>
           <a:prstGeom prst="rect">
             <a:avLst/>
@@ -17429,7 +19981,7 @@
         <p:spPr>
           <a:xfrm>
             <a:off x="7315200" y="0"/>
-            <a:ext cx="14760" cy="6854400"/>
+            <a:ext cx="14400" cy="6854040"/>
           </a:xfrm>
           <a:prstGeom prst="rect">
             <a:avLst/>
@@ -17489,7 +20041,7 @@
         <p:spPr>
           <a:xfrm>
             <a:off x="8229600" y="0"/>
-            <a:ext cx="14760" cy="6854400"/>
+            <a:ext cx="14400" cy="6854040"/>
           </a:xfrm>
           <a:prstGeom prst="rect">
             <a:avLst/>
@@ -17549,7 +20101,7 @@
         <p:spPr>
           <a:xfrm>
             <a:off x="9144000" y="0"/>
-            <a:ext cx="14760" cy="6854400"/>
+            <a:ext cx="14400" cy="6854040"/>
           </a:xfrm>
           <a:prstGeom prst="rect">
             <a:avLst/>
@@ -17609,7 +20161,7 @@
         <p:spPr>
           <a:xfrm>
             <a:off x="10058400" y="0"/>
-            <a:ext cx="14760" cy="6854400"/>
+            <a:ext cx="14400" cy="6854040"/>
           </a:xfrm>
           <a:prstGeom prst="rect">
             <a:avLst/>
@@ -17669,7 +20221,7 @@
         <p:spPr>
           <a:xfrm>
             <a:off x="10972800" y="0"/>
-            <a:ext cx="14760" cy="6854400"/>
+            <a:ext cx="14400" cy="6854040"/>
           </a:xfrm>
           <a:prstGeom prst="rect">
             <a:avLst/>
@@ -17729,7 +20281,7 @@
         <p:spPr>
           <a:xfrm>
             <a:off x="11887200" y="0"/>
-            <a:ext cx="14760" cy="6854400"/>
+            <a:ext cx="14400" cy="6854040"/>
           </a:xfrm>
           <a:prstGeom prst="rect">
             <a:avLst/>
@@ -17789,7 +20341,7 @@
         <p:spPr>
           <a:xfrm>
             <a:off x="0" y="0"/>
-            <a:ext cx="316440" cy="6854400"/>
+            <a:ext cx="316080" cy="6854040"/>
           </a:xfrm>
           <a:prstGeom prst="rect">
             <a:avLst/>
@@ -17849,7 +20401,7 @@
         <p:spPr>
           <a:xfrm>
             <a:off x="9875520" y="365760"/>
-            <a:ext cx="2008080" cy="499320"/>
+            <a:ext cx="2007720" cy="498960"/>
           </a:xfrm>
           <a:prstGeom prst="roundRect">
             <a:avLst>
@@ -17923,7 +20475,7 @@
         <p:spPr>
           <a:xfrm>
             <a:off x="1466280" y="914400"/>
-            <a:ext cx="8036640" cy="516240"/>
+            <a:ext cx="8036280" cy="516240"/>
           </a:xfrm>
           <a:prstGeom prst="rect">
             <a:avLst/>
@@ -17977,7 +20529,7 @@
         <p:spPr>
           <a:xfrm>
             <a:off x="1767600" y="1694880"/>
-            <a:ext cx="7951320" cy="819720"/>
+            <a:ext cx="7950960" cy="819720"/>
           </a:xfrm>
           <a:prstGeom prst="rect">
             <a:avLst/>
@@ -18087,7 +20639,7 @@
         <p:spPr>
           <a:xfrm>
             <a:off x="987480" y="3182040"/>
-            <a:ext cx="3288240" cy="2739600"/>
+            <a:ext cx="3287880" cy="2739240"/>
           </a:xfrm>
           <a:prstGeom prst="roundRect">
             <a:avLst>
@@ -18149,7 +20701,7 @@
         <p:spPr>
           <a:xfrm>
             <a:off x="457200" y="2743200"/>
-            <a:ext cx="3885480" cy="3884760"/>
+            <a:ext cx="3885120" cy="3884400"/>
           </a:xfrm>
           <a:prstGeom prst="roundRect">
             <a:avLst>
@@ -18463,7 +21015,7 @@
         <p:spPr>
           <a:xfrm>
             <a:off x="4507920" y="3182040"/>
-            <a:ext cx="3288240" cy="2739600"/>
+            <a:ext cx="3287880" cy="2739240"/>
           </a:xfrm>
           <a:prstGeom prst="roundRect">
             <a:avLst>
@@ -18525,7 +21077,7 @@
         <p:spPr>
           <a:xfrm>
             <a:off x="4572000" y="2743200"/>
-            <a:ext cx="3428280" cy="3656880"/>
+            <a:ext cx="3427920" cy="3656520"/>
           </a:xfrm>
           <a:prstGeom prst="roundRect">
             <a:avLst>
@@ -19100,7 +21652,7 @@
         <p:spPr>
           <a:xfrm>
             <a:off x="8028360" y="3182040"/>
-            <a:ext cx="3288240" cy="2739600"/>
+            <a:ext cx="3287880" cy="2739240"/>
           </a:xfrm>
           <a:prstGeom prst="roundRect">
             <a:avLst>
@@ -19162,7 +21714,7 @@
         <p:spPr>
           <a:xfrm>
             <a:off x="8229600" y="2514600"/>
-            <a:ext cx="3656880" cy="4114080"/>
+            <a:ext cx="3656520" cy="4113720"/>
           </a:xfrm>
           <a:prstGeom prst="roundRect">
             <a:avLst>
@@ -20154,7 +22706,7 @@
         <p:spPr>
           <a:xfrm>
             <a:off x="0" y="0"/>
-            <a:ext cx="12184920" cy="6854040"/>
+            <a:ext cx="12184560" cy="6853680"/>
           </a:xfrm>
           <a:prstGeom prst="rect">
             <a:avLst/>
@@ -20214,7 +22766,7 @@
         <p:spPr>
           <a:xfrm>
             <a:off x="0" y="0"/>
-            <a:ext cx="14400" cy="6854040"/>
+            <a:ext cx="14040" cy="6853680"/>
           </a:xfrm>
           <a:prstGeom prst="rect">
             <a:avLst/>
@@ -20274,7 +22826,7 @@
         <p:spPr>
           <a:xfrm>
             <a:off x="914400" y="0"/>
-            <a:ext cx="14400" cy="6854040"/>
+            <a:ext cx="14040" cy="6853680"/>
           </a:xfrm>
           <a:prstGeom prst="rect">
             <a:avLst/>
@@ -20334,7 +22886,7 @@
         <p:spPr>
           <a:xfrm>
             <a:off x="1828800" y="0"/>
-            <a:ext cx="14400" cy="6854040"/>
+            <a:ext cx="14040" cy="6853680"/>
           </a:xfrm>
           <a:prstGeom prst="rect">
             <a:avLst/>
@@ -20394,7 +22946,7 @@
         <p:spPr>
           <a:xfrm>
             <a:off x="2743200" y="0"/>
-            <a:ext cx="14400" cy="6854040"/>
+            <a:ext cx="14040" cy="6853680"/>
           </a:xfrm>
           <a:prstGeom prst="rect">
             <a:avLst/>
@@ -20454,7 +23006,7 @@
         <p:spPr>
           <a:xfrm>
             <a:off x="3657600" y="0"/>
-            <a:ext cx="14400" cy="6854040"/>
+            <a:ext cx="14040" cy="6853680"/>
           </a:xfrm>
           <a:prstGeom prst="rect">
             <a:avLst/>
@@ -20514,7 +23066,7 @@
         <p:spPr>
           <a:xfrm>
             <a:off x="4572000" y="0"/>
-            <a:ext cx="14400" cy="6854040"/>
+            <a:ext cx="14040" cy="6853680"/>
           </a:xfrm>
           <a:prstGeom prst="rect">
             <a:avLst/>
@@ -20574,7 +23126,7 @@
         <p:spPr>
           <a:xfrm>
             <a:off x="5486400" y="0"/>
-            <a:ext cx="14400" cy="6854040"/>
+            <a:ext cx="14040" cy="6853680"/>
           </a:xfrm>
           <a:prstGeom prst="rect">
             <a:avLst/>
@@ -20634,7 +23186,7 @@
         <p:spPr>
           <a:xfrm>
             <a:off x="6400800" y="0"/>
-            <a:ext cx="14400" cy="6854040"/>
+            <a:ext cx="14040" cy="6853680"/>
           </a:xfrm>
           <a:prstGeom prst="rect">
             <a:avLst/>
@@ -20694,7 +23246,7 @@
         <p:spPr>
           <a:xfrm>
             <a:off x="7315200" y="0"/>
-            <a:ext cx="14400" cy="6854040"/>
+            <a:ext cx="14040" cy="6853680"/>
           </a:xfrm>
           <a:prstGeom prst="rect">
             <a:avLst/>
@@ -20754,7 +23306,7 @@
         <p:spPr>
           <a:xfrm>
             <a:off x="8229600" y="0"/>
-            <a:ext cx="14400" cy="6854040"/>
+            <a:ext cx="14040" cy="6853680"/>
           </a:xfrm>
           <a:prstGeom prst="rect">
             <a:avLst/>
@@ -20814,7 +23366,7 @@
         <p:spPr>
           <a:xfrm>
             <a:off x="9144000" y="0"/>
-            <a:ext cx="14400" cy="6854040"/>
+            <a:ext cx="14040" cy="6853680"/>
           </a:xfrm>
           <a:prstGeom prst="rect">
             <a:avLst/>
@@ -20874,7 +23426,7 @@
         <p:spPr>
           <a:xfrm>
             <a:off x="10058400" y="0"/>
-            <a:ext cx="14400" cy="6854040"/>
+            <a:ext cx="14040" cy="6853680"/>
           </a:xfrm>
           <a:prstGeom prst="rect">
             <a:avLst/>
@@ -20934,7 +23486,7 @@
         <p:spPr>
           <a:xfrm>
             <a:off x="10972800" y="0"/>
-            <a:ext cx="14400" cy="6854040"/>
+            <a:ext cx="14040" cy="6853680"/>
           </a:xfrm>
           <a:prstGeom prst="rect">
             <a:avLst/>
@@ -20994,7 +23546,7 @@
         <p:spPr>
           <a:xfrm>
             <a:off x="11887200" y="0"/>
-            <a:ext cx="14400" cy="6854040"/>
+            <a:ext cx="14040" cy="6853680"/>
           </a:xfrm>
           <a:prstGeom prst="rect">
             <a:avLst/>
@@ -21054,7 +23606,7 @@
         <p:spPr>
           <a:xfrm>
             <a:off x="0" y="0"/>
-            <a:ext cx="316080" cy="6854040"/>
+            <a:ext cx="315720" cy="6853680"/>
           </a:xfrm>
           <a:prstGeom prst="rect">
             <a:avLst/>
@@ -21114,7 +23666,7 @@
         <p:spPr>
           <a:xfrm>
             <a:off x="9875520" y="365760"/>
-            <a:ext cx="2007720" cy="498960"/>
+            <a:ext cx="2007360" cy="498600"/>
           </a:xfrm>
           <a:prstGeom prst="roundRect">
             <a:avLst>
@@ -21242,7 +23794,7 @@
         <p:spPr>
           <a:xfrm>
             <a:off x="1964160" y="1664640"/>
-            <a:ext cx="7573680" cy="819720"/>
+            <a:ext cx="7573320" cy="819720"/>
           </a:xfrm>
           <a:prstGeom prst="rect">
             <a:avLst/>
@@ -21342,7 +23894,7 @@
         <p:spPr>
           <a:xfrm>
             <a:off x="987480" y="3182040"/>
-            <a:ext cx="3287880" cy="2739240"/>
+            <a:ext cx="3287520" cy="2738880"/>
           </a:xfrm>
           <a:prstGeom prst="roundRect">
             <a:avLst>
@@ -21404,7 +23956,7 @@
         <p:spPr>
           <a:xfrm>
             <a:off x="914400" y="2743200"/>
-            <a:ext cx="3287880" cy="3656880"/>
+            <a:ext cx="3287520" cy="3656520"/>
           </a:xfrm>
           <a:prstGeom prst="roundRect">
             <a:avLst>
@@ -21735,7 +24287,7 @@
         <p:spPr>
           <a:xfrm>
             <a:off x="4507920" y="3182040"/>
-            <a:ext cx="3287880" cy="2739240"/>
+            <a:ext cx="3287520" cy="2738880"/>
           </a:xfrm>
           <a:prstGeom prst="roundRect">
             <a:avLst>
@@ -21797,7 +24349,7 @@
         <p:spPr>
           <a:xfrm>
             <a:off x="4434840" y="2743200"/>
-            <a:ext cx="3287880" cy="3656880"/>
+            <a:ext cx="3287520" cy="3656520"/>
           </a:xfrm>
           <a:prstGeom prst="roundRect">
             <a:avLst>
@@ -22204,7 +24756,7 @@
         <p:spPr>
           <a:xfrm>
             <a:off x="8028360" y="3182040"/>
-            <a:ext cx="3287880" cy="2739240"/>
+            <a:ext cx="3287520" cy="2738880"/>
           </a:xfrm>
           <a:prstGeom prst="roundRect">
             <a:avLst>
@@ -22266,7 +24818,7 @@
         <p:spPr>
           <a:xfrm>
             <a:off x="7955280" y="2743200"/>
-            <a:ext cx="3700440" cy="3655440"/>
+            <a:ext cx="3700080" cy="3655080"/>
           </a:xfrm>
           <a:prstGeom prst="roundRect">
             <a:avLst>
@@ -23008,7 +25560,7 @@
         <p:spPr>
           <a:xfrm>
             <a:off x="0" y="0"/>
-            <a:ext cx="12184560" cy="6853680"/>
+            <a:ext cx="12184200" cy="6853320"/>
           </a:xfrm>
           <a:prstGeom prst="rect">
             <a:avLst/>
@@ -23044,6 +25596,11 @@
             <a:noAutofit/>
           </a:bodyPr>
           <a:p>
+            <a:pPr>
+              <a:lnSpc>
+                <a:spcPct val="100000"/>
+              </a:lnSpc>
+            </a:pPr>
             <a:endParaRPr b="0" lang="en-US" sz="1800" spc="-1" strike="noStrike">
               <a:solidFill>
                 <a:schemeClr val="lt1"/>
@@ -23063,7 +25620,7 @@
         <p:spPr>
           <a:xfrm>
             <a:off x="0" y="0"/>
-            <a:ext cx="14040" cy="6853680"/>
+            <a:ext cx="13680" cy="6853320"/>
           </a:xfrm>
           <a:prstGeom prst="rect">
             <a:avLst/>
@@ -23099,6 +25656,11 @@
             <a:noAutofit/>
           </a:bodyPr>
           <a:p>
+            <a:pPr>
+              <a:lnSpc>
+                <a:spcPct val="100000"/>
+              </a:lnSpc>
+            </a:pPr>
             <a:endParaRPr b="0" lang="en-US" sz="1800" spc="-1" strike="noStrike">
               <a:solidFill>
                 <a:schemeClr val="lt1"/>
@@ -23118,7 +25680,7 @@
         <p:spPr>
           <a:xfrm>
             <a:off x="914400" y="0"/>
-            <a:ext cx="14040" cy="6853680"/>
+            <a:ext cx="13680" cy="6853320"/>
           </a:xfrm>
           <a:prstGeom prst="rect">
             <a:avLst/>
@@ -23154,6 +25716,11 @@
             <a:noAutofit/>
           </a:bodyPr>
           <a:p>
+            <a:pPr>
+              <a:lnSpc>
+                <a:spcPct val="100000"/>
+              </a:lnSpc>
+            </a:pPr>
             <a:endParaRPr b="0" lang="en-US" sz="1800" spc="-1" strike="noStrike">
               <a:solidFill>
                 <a:schemeClr val="lt1"/>
@@ -23173,7 +25740,7 @@
         <p:spPr>
           <a:xfrm>
             <a:off x="1828800" y="0"/>
-            <a:ext cx="14040" cy="6853680"/>
+            <a:ext cx="13680" cy="6853320"/>
           </a:xfrm>
           <a:prstGeom prst="rect">
             <a:avLst/>
@@ -23209,6 +25776,11 @@
             <a:noAutofit/>
           </a:bodyPr>
           <a:p>
+            <a:pPr>
+              <a:lnSpc>
+                <a:spcPct val="100000"/>
+              </a:lnSpc>
+            </a:pPr>
             <a:endParaRPr b="0" lang="en-US" sz="1800" spc="-1" strike="noStrike">
               <a:solidFill>
                 <a:schemeClr val="lt1"/>
@@ -23228,7 +25800,7 @@
         <p:spPr>
           <a:xfrm>
             <a:off x="2743200" y="0"/>
-            <a:ext cx="14040" cy="6853680"/>
+            <a:ext cx="13680" cy="6853320"/>
           </a:xfrm>
           <a:prstGeom prst="rect">
             <a:avLst/>
@@ -23264,6 +25836,11 @@
             <a:noAutofit/>
           </a:bodyPr>
           <a:p>
+            <a:pPr>
+              <a:lnSpc>
+                <a:spcPct val="100000"/>
+              </a:lnSpc>
+            </a:pPr>
             <a:endParaRPr b="0" lang="en-US" sz="1800" spc="-1" strike="noStrike">
               <a:solidFill>
                 <a:schemeClr val="lt1"/>
@@ -23283,7 +25860,7 @@
         <p:spPr>
           <a:xfrm>
             <a:off x="3657600" y="0"/>
-            <a:ext cx="14040" cy="6853680"/>
+            <a:ext cx="13680" cy="6853320"/>
           </a:xfrm>
           <a:prstGeom prst="rect">
             <a:avLst/>
@@ -23319,6 +25896,11 @@
             <a:noAutofit/>
           </a:bodyPr>
           <a:p>
+            <a:pPr>
+              <a:lnSpc>
+                <a:spcPct val="100000"/>
+              </a:lnSpc>
+            </a:pPr>
             <a:endParaRPr b="0" lang="en-US" sz="1800" spc="-1" strike="noStrike">
               <a:solidFill>
                 <a:schemeClr val="lt1"/>
@@ -23338,7 +25920,7 @@
         <p:spPr>
           <a:xfrm>
             <a:off x="4572000" y="0"/>
-            <a:ext cx="14040" cy="6853680"/>
+            <a:ext cx="13680" cy="6853320"/>
           </a:xfrm>
           <a:prstGeom prst="rect">
             <a:avLst/>
@@ -23374,6 +25956,11 @@
             <a:noAutofit/>
           </a:bodyPr>
           <a:p>
+            <a:pPr>
+              <a:lnSpc>
+                <a:spcPct val="100000"/>
+              </a:lnSpc>
+            </a:pPr>
             <a:endParaRPr b="0" lang="en-US" sz="1800" spc="-1" strike="noStrike">
               <a:solidFill>
                 <a:schemeClr val="lt1"/>
@@ -23393,7 +25980,7 @@
         <p:spPr>
           <a:xfrm>
             <a:off x="5486400" y="0"/>
-            <a:ext cx="14040" cy="6853680"/>
+            <a:ext cx="13680" cy="6853320"/>
           </a:xfrm>
           <a:prstGeom prst="rect">
             <a:avLst/>
@@ -23429,6 +26016,11 @@
             <a:noAutofit/>
           </a:bodyPr>
           <a:p>
+            <a:pPr>
+              <a:lnSpc>
+                <a:spcPct val="100000"/>
+              </a:lnSpc>
+            </a:pPr>
             <a:endParaRPr b="0" lang="en-US" sz="1800" spc="-1" strike="noStrike">
               <a:solidFill>
                 <a:schemeClr val="lt1"/>
@@ -23448,7 +26040,7 @@
         <p:spPr>
           <a:xfrm>
             <a:off x="6400800" y="0"/>
-            <a:ext cx="14040" cy="6853680"/>
+            <a:ext cx="13680" cy="6853320"/>
           </a:xfrm>
           <a:prstGeom prst="rect">
             <a:avLst/>
@@ -23484,6 +26076,11 @@
             <a:noAutofit/>
           </a:bodyPr>
           <a:p>
+            <a:pPr>
+              <a:lnSpc>
+                <a:spcPct val="100000"/>
+              </a:lnSpc>
+            </a:pPr>
             <a:endParaRPr b="0" lang="en-US" sz="1800" spc="-1" strike="noStrike">
               <a:solidFill>
                 <a:schemeClr val="lt1"/>
@@ -23503,7 +26100,7 @@
         <p:spPr>
           <a:xfrm>
             <a:off x="7315200" y="0"/>
-            <a:ext cx="14040" cy="6853680"/>
+            <a:ext cx="13680" cy="6853320"/>
           </a:xfrm>
           <a:prstGeom prst="rect">
             <a:avLst/>
@@ -23539,6 +26136,11 @@
             <a:noAutofit/>
           </a:bodyPr>
           <a:p>
+            <a:pPr>
+              <a:lnSpc>
+                <a:spcPct val="100000"/>
+              </a:lnSpc>
+            </a:pPr>
             <a:endParaRPr b="0" lang="en-US" sz="1800" spc="-1" strike="noStrike">
               <a:solidFill>
                 <a:schemeClr val="lt1"/>
@@ -23558,7 +26160,7 @@
         <p:spPr>
           <a:xfrm>
             <a:off x="8229600" y="0"/>
-            <a:ext cx="14040" cy="6853680"/>
+            <a:ext cx="13680" cy="6853320"/>
           </a:xfrm>
           <a:prstGeom prst="rect">
             <a:avLst/>
@@ -23594,6 +26196,11 @@
             <a:noAutofit/>
           </a:bodyPr>
           <a:p>
+            <a:pPr>
+              <a:lnSpc>
+                <a:spcPct val="100000"/>
+              </a:lnSpc>
+            </a:pPr>
             <a:endParaRPr b="0" lang="en-US" sz="1800" spc="-1" strike="noStrike">
               <a:solidFill>
                 <a:schemeClr val="lt1"/>
@@ -23613,7 +26220,7 @@
         <p:spPr>
           <a:xfrm>
             <a:off x="9144000" y="0"/>
-            <a:ext cx="14040" cy="6853680"/>
+            <a:ext cx="13680" cy="6853320"/>
           </a:xfrm>
           <a:prstGeom prst="rect">
             <a:avLst/>
@@ -23649,6 +26256,11 @@
             <a:noAutofit/>
           </a:bodyPr>
           <a:p>
+            <a:pPr>
+              <a:lnSpc>
+                <a:spcPct val="100000"/>
+              </a:lnSpc>
+            </a:pPr>
             <a:endParaRPr b="0" lang="en-US" sz="1800" spc="-1" strike="noStrike">
               <a:solidFill>
                 <a:schemeClr val="lt1"/>
@@ -23668,7 +26280,7 @@
         <p:spPr>
           <a:xfrm>
             <a:off x="10058400" y="0"/>
-            <a:ext cx="14040" cy="6853680"/>
+            <a:ext cx="13680" cy="6853320"/>
           </a:xfrm>
           <a:prstGeom prst="rect">
             <a:avLst/>
@@ -23704,6 +26316,11 @@
             <a:noAutofit/>
           </a:bodyPr>
           <a:p>
+            <a:pPr>
+              <a:lnSpc>
+                <a:spcPct val="100000"/>
+              </a:lnSpc>
+            </a:pPr>
             <a:endParaRPr b="0" lang="en-US" sz="1800" spc="-1" strike="noStrike">
               <a:solidFill>
                 <a:schemeClr val="lt1"/>
@@ -23723,7 +26340,7 @@
         <p:spPr>
           <a:xfrm>
             <a:off x="10972800" y="0"/>
-            <a:ext cx="14040" cy="6853680"/>
+            <a:ext cx="13680" cy="6853320"/>
           </a:xfrm>
           <a:prstGeom prst="rect">
             <a:avLst/>
@@ -23759,6 +26376,11 @@
             <a:noAutofit/>
           </a:bodyPr>
           <a:p>
+            <a:pPr>
+              <a:lnSpc>
+                <a:spcPct val="100000"/>
+              </a:lnSpc>
+            </a:pPr>
             <a:endParaRPr b="0" lang="en-US" sz="1800" spc="-1" strike="noStrike">
               <a:solidFill>
                 <a:schemeClr val="lt1"/>
@@ -23778,7 +26400,7 @@
         <p:spPr>
           <a:xfrm>
             <a:off x="11887200" y="0"/>
-            <a:ext cx="14040" cy="6853680"/>
+            <a:ext cx="13680" cy="6853320"/>
           </a:xfrm>
           <a:prstGeom prst="rect">
             <a:avLst/>
@@ -23814,6 +26436,11 @@
             <a:noAutofit/>
           </a:bodyPr>
           <a:p>
+            <a:pPr>
+              <a:lnSpc>
+                <a:spcPct val="100000"/>
+              </a:lnSpc>
+            </a:pPr>
             <a:endParaRPr b="0" lang="en-US" sz="1800" spc="-1" strike="noStrike">
               <a:solidFill>
                 <a:schemeClr val="lt1"/>
@@ -23833,7 +26460,7 @@
         <p:spPr>
           <a:xfrm>
             <a:off x="0" y="0"/>
-            <a:ext cx="315720" cy="6853680"/>
+            <a:ext cx="315360" cy="6853320"/>
           </a:xfrm>
           <a:prstGeom prst="rect">
             <a:avLst/>
@@ -23869,6 +26496,11 @@
             <a:noAutofit/>
           </a:bodyPr>
           <a:p>
+            <a:pPr>
+              <a:lnSpc>
+                <a:spcPct val="100000"/>
+              </a:lnSpc>
+            </a:pPr>
             <a:endParaRPr b="0" lang="en-US" sz="1800" spc="-1" strike="noStrike">
               <a:solidFill>
                 <a:schemeClr val="lt1"/>
@@ -23888,7 +26520,7 @@
         <p:spPr>
           <a:xfrm>
             <a:off x="9875520" y="365760"/>
-            <a:ext cx="2007360" cy="498600"/>
+            <a:ext cx="2007000" cy="498240"/>
           </a:xfrm>
           <a:prstGeom prst="roundRect">
             <a:avLst>
@@ -23962,7 +26594,7 @@
         <p:spPr>
           <a:xfrm>
             <a:off x="2699280" y="914400"/>
-            <a:ext cx="5569920" cy="1186920"/>
+            <a:ext cx="5569560" cy="1186920"/>
           </a:xfrm>
           <a:prstGeom prst="rect">
             <a:avLst/>
@@ -24029,7 +26661,7 @@
         <p:spPr>
           <a:xfrm>
             <a:off x="2148480" y="1694880"/>
-            <a:ext cx="7272360" cy="819720"/>
+            <a:ext cx="7272000" cy="819720"/>
           </a:xfrm>
           <a:prstGeom prst="rect">
             <a:avLst/>
@@ -24129,7 +26761,7 @@
         <p:spPr>
           <a:xfrm>
             <a:off x="987480" y="3182040"/>
-            <a:ext cx="3287520" cy="2738880"/>
+            <a:ext cx="3287160" cy="2738520"/>
           </a:xfrm>
           <a:prstGeom prst="roundRect">
             <a:avLst>
@@ -24167,6 +26799,11 @@
             <a:noAutofit/>
           </a:bodyPr>
           <a:p>
+            <a:pPr>
+              <a:lnSpc>
+                <a:spcPct val="100000"/>
+              </a:lnSpc>
+            </a:pPr>
             <a:endParaRPr b="0" lang="en-US" sz="1800" spc="-1" strike="noStrike">
               <a:solidFill>
                 <a:schemeClr val="lt1"/>
@@ -24186,7 +26823,7 @@
         <p:spPr>
           <a:xfrm>
             <a:off x="914400" y="3108960"/>
-            <a:ext cx="3287520" cy="3290760"/>
+            <a:ext cx="3287160" cy="3290400"/>
           </a:xfrm>
           <a:prstGeom prst="roundRect">
             <a:avLst>
@@ -24452,7 +27089,7 @@
         <p:spPr>
           <a:xfrm>
             <a:off x="4507920" y="3182040"/>
-            <a:ext cx="3287520" cy="2738880"/>
+            <a:ext cx="3287160" cy="2738520"/>
           </a:xfrm>
           <a:prstGeom prst="roundRect">
             <a:avLst>
@@ -24490,6 +27127,11 @@
             <a:noAutofit/>
           </a:bodyPr>
           <a:p>
+            <a:pPr>
+              <a:lnSpc>
+                <a:spcPct val="100000"/>
+              </a:lnSpc>
+            </a:pPr>
             <a:endParaRPr b="0" lang="en-US" sz="1800" spc="-1" strike="noStrike">
               <a:solidFill>
                 <a:schemeClr val="lt1"/>
@@ -24509,7 +27151,7 @@
         <p:spPr>
           <a:xfrm>
             <a:off x="4434840" y="3200400"/>
-            <a:ext cx="3287520" cy="3199320"/>
+            <a:ext cx="3287160" cy="3198960"/>
           </a:xfrm>
           <a:prstGeom prst="roundRect">
             <a:avLst>
@@ -24883,7 +27525,7 @@
         <p:spPr>
           <a:xfrm>
             <a:off x="8028360" y="3182040"/>
-            <a:ext cx="3287520" cy="2738880"/>
+            <a:ext cx="3287160" cy="2738520"/>
           </a:xfrm>
           <a:prstGeom prst="roundRect">
             <a:avLst>
@@ -24921,6 +27563,11 @@
             <a:noAutofit/>
           </a:bodyPr>
           <a:p>
+            <a:pPr>
+              <a:lnSpc>
+                <a:spcPct val="100000"/>
+              </a:lnSpc>
+            </a:pPr>
             <a:endParaRPr b="0" lang="en-US" sz="1800" spc="-1" strike="noStrike">
               <a:solidFill>
                 <a:schemeClr val="lt1"/>
@@ -24940,7 +27587,7 @@
         <p:spPr>
           <a:xfrm>
             <a:off x="8003880" y="2971800"/>
-            <a:ext cx="3425760" cy="3426480"/>
+            <a:ext cx="3425400" cy="3426120"/>
           </a:xfrm>
           <a:prstGeom prst="roundRect">
             <a:avLst>

--- a/Java/Java #4/EN/Java #4.pptx
+++ b/Java/Java #4/EN/Java #4.pptx
@@ -15,6 +15,7 @@
     <p:sldId id="263" r:id="rId10"/>
     <p:sldId id="264" r:id="rId11"/>
     <p:sldId id="265" r:id="rId12"/>
+    <p:sldId id="266" r:id="rId13"/>
   </p:sldIdLst>
   <p:sldSz cx="9144000" cy="6858000"/>
   <p:notesSz cx="7772400" cy="10058400"/>
@@ -72,7 +73,7 @@
         <p:txBody>
           <a:bodyPr/>
           <a:p>
-            <a:fld id="{26C54C2C-9E6E-419B-A1F8-2E8A7508EAC4}" type="slidenum">
+            <a:fld id="{C980C8E5-3CB4-4AB4-86ED-376C317C6969}" type="slidenum">
               <a:t>&lt;#&gt;</a:t>
             </a:fld>
           </a:p>
@@ -281,7 +282,7 @@
         <p:txBody>
           <a:bodyPr/>
           <a:p>
-            <a:fld id="{DDE37F82-E7DE-4B8F-8764-2CC4317D132D}" type="slidenum">
+            <a:fld id="{19D21921-724B-4625-AA27-0CDADB836EDA}" type="slidenum">
               <a:t>&lt;#&gt;</a:t>
             </a:fld>
           </a:p>
@@ -576,7 +577,7 @@
         <p:txBody>
           <a:bodyPr/>
           <a:p>
-            <a:fld id="{579855FD-BC38-4A58-AB7B-33708F446EEF}" type="slidenum">
+            <a:fld id="{BA06C95D-C39F-4384-9F75-16B0D44A7566}" type="slidenum">
               <a:t>&lt;#&gt;</a:t>
             </a:fld>
           </a:p>
@@ -957,7 +958,7 @@
         <p:txBody>
           <a:bodyPr/>
           <a:p>
-            <a:fld id="{9007820D-9111-488D-A48E-73EF6CF871A5}" type="slidenum">
+            <a:fld id="{102447E3-6659-4CE7-AB2C-D28FA3B3E64B}" type="slidenum">
               <a:t>&lt;#&gt;</a:t>
             </a:fld>
           </a:p>
@@ -1120,7 +1121,7 @@
         <p:txBody>
           <a:bodyPr/>
           <a:p>
-            <a:fld id="{51674CA3-0A2E-4D3D-BF08-88C2B1294163}" type="slidenum">
+            <a:fld id="{2F958CE4-7211-46A5-8AE8-5F052DC9ACD4}" type="slidenum">
               <a:t>&lt;#&gt;</a:t>
             </a:fld>
           </a:p>
@@ -1286,7 +1287,7 @@
         <p:txBody>
           <a:bodyPr/>
           <a:p>
-            <a:fld id="{C754D595-7F46-48BB-BB3C-210B393766A0}" type="slidenum">
+            <a:fld id="{842D7254-2CC1-4747-8846-1533E25EB679}" type="slidenum">
               <a:t>&lt;#&gt;</a:t>
             </a:fld>
           </a:p>
@@ -1495,7 +1496,7 @@
         <p:txBody>
           <a:bodyPr/>
           <a:p>
-            <a:fld id="{228B0BC0-32BD-493B-BB33-26331D548A35}" type="slidenum">
+            <a:fld id="{278A0B88-55DA-4F25-9DA1-F62BCD192D77}" type="slidenum">
               <a:t>&lt;#&gt;</a:t>
             </a:fld>
           </a:p>
@@ -1618,7 +1619,7 @@
         <p:txBody>
           <a:bodyPr/>
           <a:p>
-            <a:fld id="{4D32D896-012D-477C-AAF5-559B0A6826A5}" type="slidenum">
+            <a:fld id="{8E4CBF18-EAF3-48F1-92FC-370AFB758A56}" type="slidenum">
               <a:t>&lt;#&gt;</a:t>
             </a:fld>
           </a:p>
@@ -1739,7 +1740,7 @@
         <p:txBody>
           <a:bodyPr/>
           <a:p>
-            <a:fld id="{5FAFB4EA-2765-4DB9-BCA2-AED0727F076A}" type="slidenum">
+            <a:fld id="{B6D1DBD3-6891-4FF3-8A82-271E868B28A2}" type="slidenum">
               <a:t>&lt;#&gt;</a:t>
             </a:fld>
           </a:p>
@@ -1991,7 +1992,7 @@
         <p:txBody>
           <a:bodyPr/>
           <a:p>
-            <a:fld id="{2C96ED4B-BB6A-49C5-A7FF-289660321197}" type="slidenum">
+            <a:fld id="{A88917ED-A51C-4506-93DB-4C6C3876E5AC}" type="slidenum">
               <a:t>&lt;#&gt;</a:t>
             </a:fld>
           </a:p>
@@ -2243,7 +2244,7 @@
         <p:txBody>
           <a:bodyPr/>
           <a:p>
-            <a:fld id="{CBD972E8-753D-457E-B4A0-DDFE7A2D8390}" type="slidenum">
+            <a:fld id="{4FCC72E3-F802-4031-99C7-EDCB8A413CB2}" type="slidenum">
               <a:t>&lt;#&gt;</a:t>
             </a:fld>
           </a:p>
@@ -2495,7 +2496,7 @@
         <p:txBody>
           <a:bodyPr/>
           <a:p>
-            <a:fld id="{6483F3D6-118D-4660-B2F4-993B7C827574}" type="slidenum">
+            <a:fld id="{0071D25F-5DD2-4917-8FF1-542526517642}" type="slidenum">
               <a:t>&lt;#&gt;</a:t>
             </a:fld>
           </a:p>
@@ -2564,7 +2565,7 @@
         <p:spPr>
           <a:xfrm>
             <a:off x="3124080" y="6356520"/>
-            <a:ext cx="2891160" cy="360720"/>
+            <a:ext cx="2890800" cy="360360"/>
           </a:xfrm>
           <a:prstGeom prst="rect">
             <a:avLst/>
@@ -2636,7 +2637,7 @@
         <p:spPr>
           <a:xfrm>
             <a:off x="6553080" y="6356520"/>
-            <a:ext cx="2129400" cy="360720"/>
+            <a:ext cx="2129040" cy="360360"/>
           </a:xfrm>
           <a:prstGeom prst="rect">
             <a:avLst/>
@@ -2677,7 +2678,7 @@
                 <a:tab algn="l" pos="0"/>
               </a:tabLst>
             </a:pPr>
-            <a:fld id="{02E76955-3845-4CA4-BADE-45918DA371D3}" type="slidenum">
+            <a:fld id="{72C6D7A8-70E0-4E60-A100-4B358F91A5D8}" type="slidenum">
               <a:rPr b="0" lang="en-US" sz="1200" spc="-1" strike="noStrike">
                 <a:solidFill>
                   <a:srgbClr val="8b8b8b"/>
@@ -2708,7 +2709,7 @@
         <p:spPr>
           <a:xfrm>
             <a:off x="457200" y="6356520"/>
-            <a:ext cx="2129400" cy="360720"/>
+            <a:ext cx="2129040" cy="360360"/>
           </a:xfrm>
           <a:prstGeom prst="rect">
             <a:avLst/>
@@ -3075,7 +3076,7 @@
         <p:spPr>
           <a:xfrm>
             <a:off x="0" y="0"/>
-            <a:ext cx="12184560" cy="6853680"/>
+            <a:ext cx="12184200" cy="6853320"/>
           </a:xfrm>
           <a:prstGeom prst="rect">
             <a:avLst/>
@@ -3135,7 +3136,7 @@
         <p:spPr>
           <a:xfrm>
             <a:off x="0" y="0"/>
-            <a:ext cx="14040" cy="6853680"/>
+            <a:ext cx="13680" cy="6853320"/>
           </a:xfrm>
           <a:prstGeom prst="rect">
             <a:avLst/>
@@ -3195,7 +3196,7 @@
         <p:spPr>
           <a:xfrm>
             <a:off x="914400" y="0"/>
-            <a:ext cx="14040" cy="6853680"/>
+            <a:ext cx="13680" cy="6853320"/>
           </a:xfrm>
           <a:prstGeom prst="rect">
             <a:avLst/>
@@ -3255,7 +3256,7 @@
         <p:spPr>
           <a:xfrm>
             <a:off x="1828800" y="0"/>
-            <a:ext cx="14040" cy="6853680"/>
+            <a:ext cx="13680" cy="6853320"/>
           </a:xfrm>
           <a:prstGeom prst="rect">
             <a:avLst/>
@@ -3315,7 +3316,7 @@
         <p:spPr>
           <a:xfrm>
             <a:off x="2743200" y="0"/>
-            <a:ext cx="14040" cy="6853680"/>
+            <a:ext cx="13680" cy="6853320"/>
           </a:xfrm>
           <a:prstGeom prst="rect">
             <a:avLst/>
@@ -3375,7 +3376,7 @@
         <p:spPr>
           <a:xfrm>
             <a:off x="3657600" y="0"/>
-            <a:ext cx="14040" cy="6853680"/>
+            <a:ext cx="13680" cy="6853320"/>
           </a:xfrm>
           <a:prstGeom prst="rect">
             <a:avLst/>
@@ -3435,7 +3436,7 @@
         <p:spPr>
           <a:xfrm>
             <a:off x="4572000" y="0"/>
-            <a:ext cx="14040" cy="6853680"/>
+            <a:ext cx="13680" cy="6853320"/>
           </a:xfrm>
           <a:prstGeom prst="rect">
             <a:avLst/>
@@ -3495,7 +3496,7 @@
         <p:spPr>
           <a:xfrm>
             <a:off x="5486400" y="0"/>
-            <a:ext cx="14040" cy="6853680"/>
+            <a:ext cx="13680" cy="6853320"/>
           </a:xfrm>
           <a:prstGeom prst="rect">
             <a:avLst/>
@@ -3555,7 +3556,7 @@
         <p:spPr>
           <a:xfrm>
             <a:off x="6400800" y="0"/>
-            <a:ext cx="14040" cy="6853680"/>
+            <a:ext cx="13680" cy="6853320"/>
           </a:xfrm>
           <a:prstGeom prst="rect">
             <a:avLst/>
@@ -3615,7 +3616,7 @@
         <p:spPr>
           <a:xfrm>
             <a:off x="7315200" y="0"/>
-            <a:ext cx="14040" cy="6853680"/>
+            <a:ext cx="13680" cy="6853320"/>
           </a:xfrm>
           <a:prstGeom prst="rect">
             <a:avLst/>
@@ -3675,7 +3676,7 @@
         <p:spPr>
           <a:xfrm>
             <a:off x="8229600" y="0"/>
-            <a:ext cx="14040" cy="6853680"/>
+            <a:ext cx="13680" cy="6853320"/>
           </a:xfrm>
           <a:prstGeom prst="rect">
             <a:avLst/>
@@ -3735,7 +3736,7 @@
         <p:spPr>
           <a:xfrm>
             <a:off x="9144000" y="0"/>
-            <a:ext cx="14040" cy="6853680"/>
+            <a:ext cx="13680" cy="6853320"/>
           </a:xfrm>
           <a:prstGeom prst="rect">
             <a:avLst/>
@@ -3795,7 +3796,7 @@
         <p:spPr>
           <a:xfrm>
             <a:off x="10058400" y="0"/>
-            <a:ext cx="14040" cy="6853680"/>
+            <a:ext cx="13680" cy="6853320"/>
           </a:xfrm>
           <a:prstGeom prst="rect">
             <a:avLst/>
@@ -3855,7 +3856,7 @@
         <p:spPr>
           <a:xfrm>
             <a:off x="10972800" y="0"/>
-            <a:ext cx="14040" cy="6853680"/>
+            <a:ext cx="13680" cy="6853320"/>
           </a:xfrm>
           <a:prstGeom prst="rect">
             <a:avLst/>
@@ -3915,7 +3916,7 @@
         <p:spPr>
           <a:xfrm>
             <a:off x="11887200" y="0"/>
-            <a:ext cx="14040" cy="6853680"/>
+            <a:ext cx="13680" cy="6853320"/>
           </a:xfrm>
           <a:prstGeom prst="rect">
             <a:avLst/>
@@ -3975,7 +3976,7 @@
         <p:spPr>
           <a:xfrm>
             <a:off x="0" y="0"/>
-            <a:ext cx="315720" cy="6853680"/>
+            <a:ext cx="315360" cy="6853320"/>
           </a:xfrm>
           <a:prstGeom prst="rect">
             <a:avLst/>
@@ -4035,7 +4036,7 @@
         <p:spPr>
           <a:xfrm>
             <a:off x="9875520" y="365760"/>
-            <a:ext cx="2007360" cy="498600"/>
+            <a:ext cx="2007000" cy="498240"/>
           </a:xfrm>
           <a:prstGeom prst="roundRect">
             <a:avLst>
@@ -4263,7 +4264,7 @@
         <p:spPr>
           <a:xfrm>
             <a:off x="987480" y="3182040"/>
-            <a:ext cx="3287520" cy="2738880"/>
+            <a:ext cx="3287160" cy="2738520"/>
           </a:xfrm>
           <a:prstGeom prst="roundRect">
             <a:avLst>
@@ -4325,7 +4326,7 @@
         <p:spPr>
           <a:xfrm>
             <a:off x="914400" y="3108960"/>
-            <a:ext cx="3287520" cy="2738880"/>
+            <a:ext cx="3287160" cy="2738520"/>
           </a:xfrm>
           <a:prstGeom prst="roundRect">
             <a:avLst>
@@ -4459,7 +4460,7 @@
         <p:spPr>
           <a:xfrm>
             <a:off x="4507920" y="3182040"/>
-            <a:ext cx="3287520" cy="2738880"/>
+            <a:ext cx="3287160" cy="2738520"/>
           </a:xfrm>
           <a:prstGeom prst="roundRect">
             <a:avLst>
@@ -4521,7 +4522,7 @@
         <p:spPr>
           <a:xfrm>
             <a:off x="4434840" y="3108960"/>
-            <a:ext cx="3287520" cy="2738880"/>
+            <a:ext cx="3287160" cy="2738520"/>
           </a:xfrm>
           <a:prstGeom prst="roundRect">
             <a:avLst>
@@ -4779,7 +4780,7 @@
         <p:spPr>
           <a:xfrm>
             <a:off x="8028360" y="3182040"/>
-            <a:ext cx="3287520" cy="2738880"/>
+            <a:ext cx="3287160" cy="2738520"/>
           </a:xfrm>
           <a:prstGeom prst="roundRect">
             <a:avLst>
@@ -4841,7 +4842,7 @@
         <p:spPr>
           <a:xfrm>
             <a:off x="7955280" y="2971800"/>
-            <a:ext cx="3928680" cy="3654360"/>
+            <a:ext cx="3928320" cy="3654000"/>
           </a:xfrm>
           <a:prstGeom prst="roundRect">
             <a:avLst>
@@ -5352,7 +5353,7 @@
         <p:spPr>
           <a:xfrm>
             <a:off x="0" y="0"/>
-            <a:ext cx="12184560" cy="6853680"/>
+            <a:ext cx="12184200" cy="6853320"/>
           </a:xfrm>
           <a:prstGeom prst="rect">
             <a:avLst/>
@@ -5388,6 +5389,11 @@
             <a:noAutofit/>
           </a:bodyPr>
           <a:p>
+            <a:pPr>
+              <a:lnSpc>
+                <a:spcPct val="100000"/>
+              </a:lnSpc>
+            </a:pPr>
             <a:endParaRPr b="0" lang="en-US" sz="1800" spc="-1" strike="noStrike">
               <a:solidFill>
                 <a:schemeClr val="lt1"/>
@@ -5407,7 +5413,7 @@
         <p:spPr>
           <a:xfrm>
             <a:off x="0" y="0"/>
-            <a:ext cx="14040" cy="6853680"/>
+            <a:ext cx="13680" cy="6853320"/>
           </a:xfrm>
           <a:prstGeom prst="rect">
             <a:avLst/>
@@ -5443,6 +5449,11 @@
             <a:noAutofit/>
           </a:bodyPr>
           <a:p>
+            <a:pPr>
+              <a:lnSpc>
+                <a:spcPct val="100000"/>
+              </a:lnSpc>
+            </a:pPr>
             <a:endParaRPr b="0" lang="en-US" sz="1800" spc="-1" strike="noStrike">
               <a:solidFill>
                 <a:schemeClr val="lt1"/>
@@ -5462,7 +5473,7 @@
         <p:spPr>
           <a:xfrm>
             <a:off x="914400" y="0"/>
-            <a:ext cx="14040" cy="6853680"/>
+            <a:ext cx="13680" cy="6853320"/>
           </a:xfrm>
           <a:prstGeom prst="rect">
             <a:avLst/>
@@ -5498,6 +5509,11 @@
             <a:noAutofit/>
           </a:bodyPr>
           <a:p>
+            <a:pPr>
+              <a:lnSpc>
+                <a:spcPct val="100000"/>
+              </a:lnSpc>
+            </a:pPr>
             <a:endParaRPr b="0" lang="en-US" sz="1800" spc="-1" strike="noStrike">
               <a:solidFill>
                 <a:schemeClr val="lt1"/>
@@ -5517,7 +5533,7 @@
         <p:spPr>
           <a:xfrm>
             <a:off x="1828800" y="0"/>
-            <a:ext cx="14040" cy="6853680"/>
+            <a:ext cx="13680" cy="6853320"/>
           </a:xfrm>
           <a:prstGeom prst="rect">
             <a:avLst/>
@@ -5553,6 +5569,11 @@
             <a:noAutofit/>
           </a:bodyPr>
           <a:p>
+            <a:pPr>
+              <a:lnSpc>
+                <a:spcPct val="100000"/>
+              </a:lnSpc>
+            </a:pPr>
             <a:endParaRPr b="0" lang="en-US" sz="1800" spc="-1" strike="noStrike">
               <a:solidFill>
                 <a:schemeClr val="lt1"/>
@@ -5572,7 +5593,7 @@
         <p:spPr>
           <a:xfrm>
             <a:off x="2743200" y="0"/>
-            <a:ext cx="14040" cy="6853680"/>
+            <a:ext cx="13680" cy="6853320"/>
           </a:xfrm>
           <a:prstGeom prst="rect">
             <a:avLst/>
@@ -5608,6 +5629,11 @@
             <a:noAutofit/>
           </a:bodyPr>
           <a:p>
+            <a:pPr>
+              <a:lnSpc>
+                <a:spcPct val="100000"/>
+              </a:lnSpc>
+            </a:pPr>
             <a:endParaRPr b="0" lang="en-US" sz="1800" spc="-1" strike="noStrike">
               <a:solidFill>
                 <a:schemeClr val="lt1"/>
@@ -5627,7 +5653,7 @@
         <p:spPr>
           <a:xfrm>
             <a:off x="3657600" y="0"/>
-            <a:ext cx="14040" cy="6853680"/>
+            <a:ext cx="13680" cy="6853320"/>
           </a:xfrm>
           <a:prstGeom prst="rect">
             <a:avLst/>
@@ -5663,6 +5689,11 @@
             <a:noAutofit/>
           </a:bodyPr>
           <a:p>
+            <a:pPr>
+              <a:lnSpc>
+                <a:spcPct val="100000"/>
+              </a:lnSpc>
+            </a:pPr>
             <a:endParaRPr b="0" lang="en-US" sz="1800" spc="-1" strike="noStrike">
               <a:solidFill>
                 <a:schemeClr val="lt1"/>
@@ -5682,7 +5713,7 @@
         <p:spPr>
           <a:xfrm>
             <a:off x="4572000" y="0"/>
-            <a:ext cx="14040" cy="6853680"/>
+            <a:ext cx="13680" cy="6853320"/>
           </a:xfrm>
           <a:prstGeom prst="rect">
             <a:avLst/>
@@ -5718,6 +5749,11 @@
             <a:noAutofit/>
           </a:bodyPr>
           <a:p>
+            <a:pPr>
+              <a:lnSpc>
+                <a:spcPct val="100000"/>
+              </a:lnSpc>
+            </a:pPr>
             <a:endParaRPr b="0" lang="en-US" sz="1800" spc="-1" strike="noStrike">
               <a:solidFill>
                 <a:schemeClr val="lt1"/>
@@ -5737,7 +5773,7 @@
         <p:spPr>
           <a:xfrm>
             <a:off x="5486400" y="0"/>
-            <a:ext cx="14040" cy="6853680"/>
+            <a:ext cx="13680" cy="6853320"/>
           </a:xfrm>
           <a:prstGeom prst="rect">
             <a:avLst/>
@@ -5773,6 +5809,11 @@
             <a:noAutofit/>
           </a:bodyPr>
           <a:p>
+            <a:pPr>
+              <a:lnSpc>
+                <a:spcPct val="100000"/>
+              </a:lnSpc>
+            </a:pPr>
             <a:endParaRPr b="0" lang="en-US" sz="1800" spc="-1" strike="noStrike">
               <a:solidFill>
                 <a:schemeClr val="lt1"/>
@@ -5792,7 +5833,7 @@
         <p:spPr>
           <a:xfrm>
             <a:off x="6400800" y="0"/>
-            <a:ext cx="14040" cy="6853680"/>
+            <a:ext cx="13680" cy="6853320"/>
           </a:xfrm>
           <a:prstGeom prst="rect">
             <a:avLst/>
@@ -5828,6 +5869,11 @@
             <a:noAutofit/>
           </a:bodyPr>
           <a:p>
+            <a:pPr>
+              <a:lnSpc>
+                <a:spcPct val="100000"/>
+              </a:lnSpc>
+            </a:pPr>
             <a:endParaRPr b="0" lang="en-US" sz="1800" spc="-1" strike="noStrike">
               <a:solidFill>
                 <a:schemeClr val="lt1"/>
@@ -5847,7 +5893,7 @@
         <p:spPr>
           <a:xfrm>
             <a:off x="7315200" y="0"/>
-            <a:ext cx="14040" cy="6853680"/>
+            <a:ext cx="13680" cy="6853320"/>
           </a:xfrm>
           <a:prstGeom prst="rect">
             <a:avLst/>
@@ -5883,6 +5929,11 @@
             <a:noAutofit/>
           </a:bodyPr>
           <a:p>
+            <a:pPr>
+              <a:lnSpc>
+                <a:spcPct val="100000"/>
+              </a:lnSpc>
+            </a:pPr>
             <a:endParaRPr b="0" lang="en-US" sz="1800" spc="-1" strike="noStrike">
               <a:solidFill>
                 <a:schemeClr val="lt1"/>
@@ -5902,7 +5953,7 @@
         <p:spPr>
           <a:xfrm>
             <a:off x="8229600" y="0"/>
-            <a:ext cx="14040" cy="6853680"/>
+            <a:ext cx="13680" cy="6853320"/>
           </a:xfrm>
           <a:prstGeom prst="rect">
             <a:avLst/>
@@ -5938,6 +5989,11 @@
             <a:noAutofit/>
           </a:bodyPr>
           <a:p>
+            <a:pPr>
+              <a:lnSpc>
+                <a:spcPct val="100000"/>
+              </a:lnSpc>
+            </a:pPr>
             <a:endParaRPr b="0" lang="en-US" sz="1800" spc="-1" strike="noStrike">
               <a:solidFill>
                 <a:schemeClr val="lt1"/>
@@ -5957,7 +6013,7 @@
         <p:spPr>
           <a:xfrm>
             <a:off x="9144000" y="0"/>
-            <a:ext cx="14040" cy="6853680"/>
+            <a:ext cx="13680" cy="6853320"/>
           </a:xfrm>
           <a:prstGeom prst="rect">
             <a:avLst/>
@@ -5993,6 +6049,11 @@
             <a:noAutofit/>
           </a:bodyPr>
           <a:p>
+            <a:pPr>
+              <a:lnSpc>
+                <a:spcPct val="100000"/>
+              </a:lnSpc>
+            </a:pPr>
             <a:endParaRPr b="0" lang="en-US" sz="1800" spc="-1" strike="noStrike">
               <a:solidFill>
                 <a:schemeClr val="lt1"/>
@@ -6012,7 +6073,7 @@
         <p:spPr>
           <a:xfrm>
             <a:off x="10058400" y="0"/>
-            <a:ext cx="14040" cy="6853680"/>
+            <a:ext cx="13680" cy="6853320"/>
           </a:xfrm>
           <a:prstGeom prst="rect">
             <a:avLst/>
@@ -6048,6 +6109,11 @@
             <a:noAutofit/>
           </a:bodyPr>
           <a:p>
+            <a:pPr>
+              <a:lnSpc>
+                <a:spcPct val="100000"/>
+              </a:lnSpc>
+            </a:pPr>
             <a:endParaRPr b="0" lang="en-US" sz="1800" spc="-1" strike="noStrike">
               <a:solidFill>
                 <a:schemeClr val="lt1"/>
@@ -6067,7 +6133,7 @@
         <p:spPr>
           <a:xfrm>
             <a:off x="10972800" y="0"/>
-            <a:ext cx="14040" cy="6853680"/>
+            <a:ext cx="13680" cy="6853320"/>
           </a:xfrm>
           <a:prstGeom prst="rect">
             <a:avLst/>
@@ -6103,6 +6169,11 @@
             <a:noAutofit/>
           </a:bodyPr>
           <a:p>
+            <a:pPr>
+              <a:lnSpc>
+                <a:spcPct val="100000"/>
+              </a:lnSpc>
+            </a:pPr>
             <a:endParaRPr b="0" lang="en-US" sz="1800" spc="-1" strike="noStrike">
               <a:solidFill>
                 <a:schemeClr val="lt1"/>
@@ -6122,7 +6193,7 @@
         <p:spPr>
           <a:xfrm>
             <a:off x="11887200" y="0"/>
-            <a:ext cx="14040" cy="6853680"/>
+            <a:ext cx="13680" cy="6853320"/>
           </a:xfrm>
           <a:prstGeom prst="rect">
             <a:avLst/>
@@ -6158,6 +6229,11 @@
             <a:noAutofit/>
           </a:bodyPr>
           <a:p>
+            <a:pPr>
+              <a:lnSpc>
+                <a:spcPct val="100000"/>
+              </a:lnSpc>
+            </a:pPr>
             <a:endParaRPr b="0" lang="en-US" sz="1800" spc="-1" strike="noStrike">
               <a:solidFill>
                 <a:schemeClr val="lt1"/>
@@ -6177,7 +6253,7 @@
         <p:spPr>
           <a:xfrm>
             <a:off x="0" y="0"/>
-            <a:ext cx="315720" cy="6853680"/>
+            <a:ext cx="315360" cy="6853320"/>
           </a:xfrm>
           <a:prstGeom prst="rect">
             <a:avLst/>
@@ -6213,6 +6289,11 @@
             <a:noAutofit/>
           </a:bodyPr>
           <a:p>
+            <a:pPr>
+              <a:lnSpc>
+                <a:spcPct val="100000"/>
+              </a:lnSpc>
+            </a:pPr>
             <a:endParaRPr b="0" lang="en-US" sz="1800" spc="-1" strike="noStrike">
               <a:solidFill>
                 <a:schemeClr val="lt1"/>
@@ -6232,7 +6313,7 @@
         <p:spPr>
           <a:xfrm>
             <a:off x="9875520" y="365760"/>
-            <a:ext cx="2007360" cy="498600"/>
+            <a:ext cx="2007000" cy="498240"/>
           </a:xfrm>
           <a:prstGeom prst="roundRect">
             <a:avLst>
@@ -6306,7 +6387,7 @@
         <p:spPr>
           <a:xfrm>
             <a:off x="1072440" y="914400"/>
-            <a:ext cx="8823600" cy="639000"/>
+            <a:ext cx="8823240" cy="638280"/>
           </a:xfrm>
           <a:prstGeom prst="rect">
             <a:avLst/>
@@ -6360,7 +6441,7 @@
         <p:spPr>
           <a:xfrm>
             <a:off x="2043720" y="1694880"/>
-            <a:ext cx="7482600" cy="819720"/>
+            <a:ext cx="7482240" cy="819720"/>
           </a:xfrm>
           <a:prstGeom prst="rect">
             <a:avLst/>
@@ -6460,7 +6541,7 @@
         <p:spPr>
           <a:xfrm>
             <a:off x="987480" y="3182040"/>
-            <a:ext cx="3287520" cy="2738880"/>
+            <a:ext cx="3287160" cy="2738520"/>
           </a:xfrm>
           <a:prstGeom prst="roundRect">
             <a:avLst>
@@ -6498,6 +6579,11 @@
             <a:noAutofit/>
           </a:bodyPr>
           <a:p>
+            <a:pPr>
+              <a:lnSpc>
+                <a:spcPct val="100000"/>
+              </a:lnSpc>
+            </a:pPr>
             <a:endParaRPr b="0" lang="en-US" sz="1800" spc="-1" strike="noStrike">
               <a:solidFill>
                 <a:schemeClr val="lt1"/>
@@ -6517,7 +6603,7 @@
         <p:spPr>
           <a:xfrm>
             <a:off x="685800" y="2743200"/>
-            <a:ext cx="3516120" cy="3656520"/>
+            <a:ext cx="3515760" cy="3656160"/>
           </a:xfrm>
           <a:prstGeom prst="roundRect">
             <a:avLst>
@@ -6759,7 +6845,7 @@
         <p:spPr>
           <a:xfrm>
             <a:off x="4507920" y="3182040"/>
-            <a:ext cx="3287520" cy="2738880"/>
+            <a:ext cx="3287160" cy="2738520"/>
           </a:xfrm>
           <a:prstGeom prst="roundRect">
             <a:avLst>
@@ -6797,6 +6883,11 @@
             <a:noAutofit/>
           </a:bodyPr>
           <a:p>
+            <a:pPr>
+              <a:lnSpc>
+                <a:spcPct val="100000"/>
+              </a:lnSpc>
+            </a:pPr>
             <a:endParaRPr b="0" lang="en-US" sz="1800" spc="-1" strike="noStrike">
               <a:solidFill>
                 <a:schemeClr val="lt1"/>
@@ -6816,7 +6907,7 @@
         <p:spPr>
           <a:xfrm>
             <a:off x="4434840" y="2971800"/>
-            <a:ext cx="3287520" cy="3427920"/>
+            <a:ext cx="3287160" cy="3427560"/>
           </a:xfrm>
           <a:prstGeom prst="roundRect">
             <a:avLst>
@@ -7170,7 +7261,7 @@
         <p:spPr>
           <a:xfrm>
             <a:off x="8028360" y="3182040"/>
-            <a:ext cx="3287520" cy="2738880"/>
+            <a:ext cx="3287160" cy="2738520"/>
           </a:xfrm>
           <a:prstGeom prst="roundRect">
             <a:avLst>
@@ -7208,6 +7299,11 @@
             <a:noAutofit/>
           </a:bodyPr>
           <a:p>
+            <a:pPr>
+              <a:lnSpc>
+                <a:spcPct val="100000"/>
+              </a:lnSpc>
+            </a:pPr>
             <a:endParaRPr b="0" lang="en-US" sz="1800" spc="-1" strike="noStrike">
               <a:solidFill>
                 <a:schemeClr val="lt1"/>
@@ -7227,7 +7323,7 @@
         <p:spPr>
           <a:xfrm>
             <a:off x="8001000" y="2743200"/>
-            <a:ext cx="3429000" cy="3655080"/>
+            <a:ext cx="3428640" cy="3654720"/>
           </a:xfrm>
           <a:prstGeom prst="roundRect">
             <a:avLst>
@@ -7813,6 +7909,2704 @@
       <p:sp>
         <p:nvSpPr>
           <p:cNvPr id="300" name="TextBox 33"/>
+          <p:cNvSpPr/>
+          <p:nvPr/>
+        </p:nvSpPr>
+        <p:spPr>
+          <a:xfrm>
+            <a:off x="4600080" y="6446520"/>
+            <a:ext cx="3051000" cy="363960"/>
+          </a:xfrm>
+          <a:prstGeom prst="rect">
+            <a:avLst/>
+          </a:prstGeom>
+          <a:noFill/>
+          <a:ln w="0">
+            <a:noFill/>
+          </a:ln>
+        </p:spPr>
+        <p:style>
+          <a:lnRef idx="0"/>
+          <a:fillRef idx="0"/>
+          <a:effectRef idx="0"/>
+          <a:fontRef idx="minor"/>
+        </p:style>
+        <p:txBody>
+          <a:bodyPr wrap="none" lIns="90000" rIns="90000" tIns="45000" bIns="45000" anchor="t">
+            <a:spAutoFit/>
+          </a:bodyPr>
+          <a:p>
+            <a:pPr>
+              <a:lnSpc>
+                <a:spcPct val="100000"/>
+              </a:lnSpc>
+            </a:pPr>
+            <a:r>
+              <a:rPr b="0" lang="en-US" sz="1800" spc="-1" strike="noStrike">
+                <a:solidFill>
+                  <a:srgbClr val="000000"/>
+                </a:solidFill>
+                <a:latin typeface="Calibri"/>
+                <a:ea typeface="DejaVu Sans"/>
+              </a:rPr>
+              <a:t>Java • Ultra Premium Template</a:t>
+            </a:r>
+            <a:endParaRPr b="0" lang="en-US" sz="1800" spc="-1" strike="noStrike">
+              <a:solidFill>
+                <a:srgbClr val="000000"/>
+              </a:solidFill>
+              <a:latin typeface="Arial"/>
+            </a:endParaRPr>
+          </a:p>
+        </p:txBody>
+      </p:sp>
+    </p:spTree>
+  </p:cSld>
+  <mc:AlternateContent>
+    <mc:Choice Requires="p14">
+      <p:transition spd="slow" p14:dur="2000"/>
+    </mc:Choice>
+    <mc:Fallback>
+      <p:transition spd="slow"/>
+    </mc:Fallback>
+  </mc:AlternateContent>
+</p:sld>
+</file>
+
+<file path=ppt/slides/slide11.xml><?xml version="1.0" encoding="utf-8"?>
+<p:sld xmlns:a="http://schemas.openxmlformats.org/drawingml/2006/main" xmlns:p="http://schemas.openxmlformats.org/presentationml/2006/main" xmlns:r="http://schemas.openxmlformats.org/officeDocument/2006/relationships" xmlns:p14="http://schemas.microsoft.com/office/powerpoint/2010/main" xmlns:p15="http://schemas.microsoft.com/office/powerpoint/2012/main" xmlns:mc="http://schemas.openxmlformats.org/markup-compatibility/2006">
+  <p:cSld>
+    <p:spTree>
+      <p:nvGrpSpPr>
+        <p:cNvPr id="1" name=""/>
+        <p:cNvGrpSpPr/>
+        <p:nvPr/>
+      </p:nvGrpSpPr>
+      <p:grpSpPr>
+        <a:xfrm>
+          <a:off x="0" y="0"/>
+          <a:ext cx="0" cy="0"/>
+          <a:chOff x="0" y="0"/>
+          <a:chExt cx="0" cy="0"/>
+        </a:xfrm>
+      </p:grpSpPr>
+      <p:sp>
+        <p:nvSpPr>
+          <p:cNvPr id="301" name="Rectangle 161"/>
+          <p:cNvSpPr/>
+          <p:nvPr/>
+        </p:nvSpPr>
+        <p:spPr>
+          <a:xfrm>
+            <a:off x="0" y="0"/>
+            <a:ext cx="12184200" cy="6853320"/>
+          </a:xfrm>
+          <a:prstGeom prst="rect">
+            <a:avLst/>
+          </a:prstGeom>
+          <a:solidFill>
+            <a:srgbClr val="0b0b0d"/>
+          </a:solidFill>
+          <a:ln>
+            <a:noFill/>
+          </a:ln>
+          <a:effectLst>
+            <a:outerShdw blurRad="39960" dir="5400000" dist="23040" rotWithShape="0">
+              <a:srgbClr val="000000">
+                <a:alpha val="35000"/>
+              </a:srgbClr>
+            </a:outerShdw>
+          </a:effectLst>
+        </p:spPr>
+        <p:style>
+          <a:lnRef idx="1">
+            <a:schemeClr val="accent1"/>
+          </a:lnRef>
+          <a:fillRef idx="3">
+            <a:schemeClr val="accent1"/>
+          </a:fillRef>
+          <a:effectRef idx="2">
+            <a:schemeClr val="accent1"/>
+          </a:effectRef>
+          <a:fontRef idx="minor"/>
+        </p:style>
+        <p:txBody>
+          <a:bodyPr lIns="90000" rIns="90000" tIns="45000" bIns="45000" anchor="ctr">
+            <a:noAutofit/>
+          </a:bodyPr>
+          <a:p>
+            <a:endParaRPr b="0" lang="en-US" sz="1800" spc="-1" strike="noStrike">
+              <a:solidFill>
+                <a:schemeClr val="lt1"/>
+              </a:solidFill>
+              <a:latin typeface="Calibri"/>
+              <a:ea typeface="DejaVu Sans"/>
+            </a:endParaRPr>
+          </a:p>
+        </p:txBody>
+      </p:sp>
+      <p:sp>
+        <p:nvSpPr>
+          <p:cNvPr id="302" name="Rectangle 162"/>
+          <p:cNvSpPr/>
+          <p:nvPr/>
+        </p:nvSpPr>
+        <p:spPr>
+          <a:xfrm>
+            <a:off x="0" y="0"/>
+            <a:ext cx="13680" cy="6853320"/>
+          </a:xfrm>
+          <a:prstGeom prst="rect">
+            <a:avLst/>
+          </a:prstGeom>
+          <a:solidFill>
+            <a:srgbClr val="121216"/>
+          </a:solidFill>
+          <a:ln>
+            <a:noFill/>
+          </a:ln>
+          <a:effectLst>
+            <a:outerShdw blurRad="39960" dir="5400000" dist="23040" rotWithShape="0">
+              <a:srgbClr val="000000">
+                <a:alpha val="35000"/>
+              </a:srgbClr>
+            </a:outerShdw>
+          </a:effectLst>
+        </p:spPr>
+        <p:style>
+          <a:lnRef idx="1">
+            <a:schemeClr val="accent1"/>
+          </a:lnRef>
+          <a:fillRef idx="3">
+            <a:schemeClr val="accent1"/>
+          </a:fillRef>
+          <a:effectRef idx="2">
+            <a:schemeClr val="accent1"/>
+          </a:effectRef>
+          <a:fontRef idx="minor"/>
+        </p:style>
+        <p:txBody>
+          <a:bodyPr lIns="90000" rIns="90000" tIns="45000" bIns="45000" anchor="ctr">
+            <a:noAutofit/>
+          </a:bodyPr>
+          <a:p>
+            <a:endParaRPr b="0" lang="en-US" sz="1800" spc="-1" strike="noStrike">
+              <a:solidFill>
+                <a:schemeClr val="lt1"/>
+              </a:solidFill>
+              <a:latin typeface="Calibri"/>
+              <a:ea typeface="DejaVu Sans"/>
+            </a:endParaRPr>
+          </a:p>
+        </p:txBody>
+      </p:sp>
+      <p:sp>
+        <p:nvSpPr>
+          <p:cNvPr id="303" name="Rectangle 163"/>
+          <p:cNvSpPr/>
+          <p:nvPr/>
+        </p:nvSpPr>
+        <p:spPr>
+          <a:xfrm>
+            <a:off x="914400" y="0"/>
+            <a:ext cx="13680" cy="6853320"/>
+          </a:xfrm>
+          <a:prstGeom prst="rect">
+            <a:avLst/>
+          </a:prstGeom>
+          <a:solidFill>
+            <a:srgbClr val="121216"/>
+          </a:solidFill>
+          <a:ln>
+            <a:noFill/>
+          </a:ln>
+          <a:effectLst>
+            <a:outerShdw blurRad="39960" dir="5400000" dist="23040" rotWithShape="0">
+              <a:srgbClr val="000000">
+                <a:alpha val="35000"/>
+              </a:srgbClr>
+            </a:outerShdw>
+          </a:effectLst>
+        </p:spPr>
+        <p:style>
+          <a:lnRef idx="1">
+            <a:schemeClr val="accent1"/>
+          </a:lnRef>
+          <a:fillRef idx="3">
+            <a:schemeClr val="accent1"/>
+          </a:fillRef>
+          <a:effectRef idx="2">
+            <a:schemeClr val="accent1"/>
+          </a:effectRef>
+          <a:fontRef idx="minor"/>
+        </p:style>
+        <p:txBody>
+          <a:bodyPr lIns="90000" rIns="90000" tIns="45000" bIns="45000" anchor="ctr">
+            <a:noAutofit/>
+          </a:bodyPr>
+          <a:p>
+            <a:endParaRPr b="0" lang="en-US" sz="1800" spc="-1" strike="noStrike">
+              <a:solidFill>
+                <a:schemeClr val="lt1"/>
+              </a:solidFill>
+              <a:latin typeface="Calibri"/>
+              <a:ea typeface="DejaVu Sans"/>
+            </a:endParaRPr>
+          </a:p>
+        </p:txBody>
+      </p:sp>
+      <p:sp>
+        <p:nvSpPr>
+          <p:cNvPr id="304" name="Rectangle 164"/>
+          <p:cNvSpPr/>
+          <p:nvPr/>
+        </p:nvSpPr>
+        <p:spPr>
+          <a:xfrm>
+            <a:off x="1828800" y="0"/>
+            <a:ext cx="13680" cy="6853320"/>
+          </a:xfrm>
+          <a:prstGeom prst="rect">
+            <a:avLst/>
+          </a:prstGeom>
+          <a:solidFill>
+            <a:srgbClr val="121216"/>
+          </a:solidFill>
+          <a:ln>
+            <a:noFill/>
+          </a:ln>
+          <a:effectLst>
+            <a:outerShdw blurRad="39960" dir="5400000" dist="23040" rotWithShape="0">
+              <a:srgbClr val="000000">
+                <a:alpha val="35000"/>
+              </a:srgbClr>
+            </a:outerShdw>
+          </a:effectLst>
+        </p:spPr>
+        <p:style>
+          <a:lnRef idx="1">
+            <a:schemeClr val="accent1"/>
+          </a:lnRef>
+          <a:fillRef idx="3">
+            <a:schemeClr val="accent1"/>
+          </a:fillRef>
+          <a:effectRef idx="2">
+            <a:schemeClr val="accent1"/>
+          </a:effectRef>
+          <a:fontRef idx="minor"/>
+        </p:style>
+        <p:txBody>
+          <a:bodyPr lIns="90000" rIns="90000" tIns="45000" bIns="45000" anchor="ctr">
+            <a:noAutofit/>
+          </a:bodyPr>
+          <a:p>
+            <a:endParaRPr b="0" lang="en-US" sz="1800" spc="-1" strike="noStrike">
+              <a:solidFill>
+                <a:schemeClr val="lt1"/>
+              </a:solidFill>
+              <a:latin typeface="Calibri"/>
+              <a:ea typeface="DejaVu Sans"/>
+            </a:endParaRPr>
+          </a:p>
+        </p:txBody>
+      </p:sp>
+      <p:sp>
+        <p:nvSpPr>
+          <p:cNvPr id="305" name="Rectangle 165"/>
+          <p:cNvSpPr/>
+          <p:nvPr/>
+        </p:nvSpPr>
+        <p:spPr>
+          <a:xfrm>
+            <a:off x="2743200" y="0"/>
+            <a:ext cx="13680" cy="6853320"/>
+          </a:xfrm>
+          <a:prstGeom prst="rect">
+            <a:avLst/>
+          </a:prstGeom>
+          <a:solidFill>
+            <a:srgbClr val="121216"/>
+          </a:solidFill>
+          <a:ln>
+            <a:noFill/>
+          </a:ln>
+          <a:effectLst>
+            <a:outerShdw blurRad="39960" dir="5400000" dist="23040" rotWithShape="0">
+              <a:srgbClr val="000000">
+                <a:alpha val="35000"/>
+              </a:srgbClr>
+            </a:outerShdw>
+          </a:effectLst>
+        </p:spPr>
+        <p:style>
+          <a:lnRef idx="1">
+            <a:schemeClr val="accent1"/>
+          </a:lnRef>
+          <a:fillRef idx="3">
+            <a:schemeClr val="accent1"/>
+          </a:fillRef>
+          <a:effectRef idx="2">
+            <a:schemeClr val="accent1"/>
+          </a:effectRef>
+          <a:fontRef idx="minor"/>
+        </p:style>
+        <p:txBody>
+          <a:bodyPr lIns="90000" rIns="90000" tIns="45000" bIns="45000" anchor="ctr">
+            <a:noAutofit/>
+          </a:bodyPr>
+          <a:p>
+            <a:endParaRPr b="0" lang="en-US" sz="1800" spc="-1" strike="noStrike">
+              <a:solidFill>
+                <a:schemeClr val="lt1"/>
+              </a:solidFill>
+              <a:latin typeface="Calibri"/>
+              <a:ea typeface="DejaVu Sans"/>
+            </a:endParaRPr>
+          </a:p>
+        </p:txBody>
+      </p:sp>
+      <p:sp>
+        <p:nvSpPr>
+          <p:cNvPr id="306" name="Rectangle 166"/>
+          <p:cNvSpPr/>
+          <p:nvPr/>
+        </p:nvSpPr>
+        <p:spPr>
+          <a:xfrm>
+            <a:off x="3657600" y="0"/>
+            <a:ext cx="13680" cy="6853320"/>
+          </a:xfrm>
+          <a:prstGeom prst="rect">
+            <a:avLst/>
+          </a:prstGeom>
+          <a:solidFill>
+            <a:srgbClr val="121216"/>
+          </a:solidFill>
+          <a:ln>
+            <a:noFill/>
+          </a:ln>
+          <a:effectLst>
+            <a:outerShdw blurRad="39960" dir="5400000" dist="23040" rotWithShape="0">
+              <a:srgbClr val="000000">
+                <a:alpha val="35000"/>
+              </a:srgbClr>
+            </a:outerShdw>
+          </a:effectLst>
+        </p:spPr>
+        <p:style>
+          <a:lnRef idx="1">
+            <a:schemeClr val="accent1"/>
+          </a:lnRef>
+          <a:fillRef idx="3">
+            <a:schemeClr val="accent1"/>
+          </a:fillRef>
+          <a:effectRef idx="2">
+            <a:schemeClr val="accent1"/>
+          </a:effectRef>
+          <a:fontRef idx="minor"/>
+        </p:style>
+        <p:txBody>
+          <a:bodyPr lIns="90000" rIns="90000" tIns="45000" bIns="45000" anchor="ctr">
+            <a:noAutofit/>
+          </a:bodyPr>
+          <a:p>
+            <a:endParaRPr b="0" lang="en-US" sz="1800" spc="-1" strike="noStrike">
+              <a:solidFill>
+                <a:schemeClr val="lt1"/>
+              </a:solidFill>
+              <a:latin typeface="Calibri"/>
+              <a:ea typeface="DejaVu Sans"/>
+            </a:endParaRPr>
+          </a:p>
+        </p:txBody>
+      </p:sp>
+      <p:sp>
+        <p:nvSpPr>
+          <p:cNvPr id="307" name="Rectangle 167"/>
+          <p:cNvSpPr/>
+          <p:nvPr/>
+        </p:nvSpPr>
+        <p:spPr>
+          <a:xfrm>
+            <a:off x="4572000" y="0"/>
+            <a:ext cx="13680" cy="6853320"/>
+          </a:xfrm>
+          <a:prstGeom prst="rect">
+            <a:avLst/>
+          </a:prstGeom>
+          <a:solidFill>
+            <a:srgbClr val="121216"/>
+          </a:solidFill>
+          <a:ln>
+            <a:noFill/>
+          </a:ln>
+          <a:effectLst>
+            <a:outerShdw blurRad="39960" dir="5400000" dist="23040" rotWithShape="0">
+              <a:srgbClr val="000000">
+                <a:alpha val="35000"/>
+              </a:srgbClr>
+            </a:outerShdw>
+          </a:effectLst>
+        </p:spPr>
+        <p:style>
+          <a:lnRef idx="1">
+            <a:schemeClr val="accent1"/>
+          </a:lnRef>
+          <a:fillRef idx="3">
+            <a:schemeClr val="accent1"/>
+          </a:fillRef>
+          <a:effectRef idx="2">
+            <a:schemeClr val="accent1"/>
+          </a:effectRef>
+          <a:fontRef idx="minor"/>
+        </p:style>
+        <p:txBody>
+          <a:bodyPr lIns="90000" rIns="90000" tIns="45000" bIns="45000" anchor="ctr">
+            <a:noAutofit/>
+          </a:bodyPr>
+          <a:p>
+            <a:endParaRPr b="0" lang="en-US" sz="1800" spc="-1" strike="noStrike">
+              <a:solidFill>
+                <a:schemeClr val="lt1"/>
+              </a:solidFill>
+              <a:latin typeface="Calibri"/>
+              <a:ea typeface="DejaVu Sans"/>
+            </a:endParaRPr>
+          </a:p>
+        </p:txBody>
+      </p:sp>
+      <p:sp>
+        <p:nvSpPr>
+          <p:cNvPr id="308" name="Rectangle 168"/>
+          <p:cNvSpPr/>
+          <p:nvPr/>
+        </p:nvSpPr>
+        <p:spPr>
+          <a:xfrm>
+            <a:off x="5486400" y="0"/>
+            <a:ext cx="13680" cy="6853320"/>
+          </a:xfrm>
+          <a:prstGeom prst="rect">
+            <a:avLst/>
+          </a:prstGeom>
+          <a:solidFill>
+            <a:srgbClr val="121216"/>
+          </a:solidFill>
+          <a:ln>
+            <a:noFill/>
+          </a:ln>
+          <a:effectLst>
+            <a:outerShdw blurRad="39960" dir="5400000" dist="23040" rotWithShape="0">
+              <a:srgbClr val="000000">
+                <a:alpha val="35000"/>
+              </a:srgbClr>
+            </a:outerShdw>
+          </a:effectLst>
+        </p:spPr>
+        <p:style>
+          <a:lnRef idx="1">
+            <a:schemeClr val="accent1"/>
+          </a:lnRef>
+          <a:fillRef idx="3">
+            <a:schemeClr val="accent1"/>
+          </a:fillRef>
+          <a:effectRef idx="2">
+            <a:schemeClr val="accent1"/>
+          </a:effectRef>
+          <a:fontRef idx="minor"/>
+        </p:style>
+        <p:txBody>
+          <a:bodyPr lIns="90000" rIns="90000" tIns="45000" bIns="45000" anchor="ctr">
+            <a:noAutofit/>
+          </a:bodyPr>
+          <a:p>
+            <a:endParaRPr b="0" lang="en-US" sz="1800" spc="-1" strike="noStrike">
+              <a:solidFill>
+                <a:schemeClr val="lt1"/>
+              </a:solidFill>
+              <a:latin typeface="Calibri"/>
+              <a:ea typeface="DejaVu Sans"/>
+            </a:endParaRPr>
+          </a:p>
+        </p:txBody>
+      </p:sp>
+      <p:sp>
+        <p:nvSpPr>
+          <p:cNvPr id="309" name="Rectangle 169"/>
+          <p:cNvSpPr/>
+          <p:nvPr/>
+        </p:nvSpPr>
+        <p:spPr>
+          <a:xfrm>
+            <a:off x="6400800" y="0"/>
+            <a:ext cx="13680" cy="6853320"/>
+          </a:xfrm>
+          <a:prstGeom prst="rect">
+            <a:avLst/>
+          </a:prstGeom>
+          <a:solidFill>
+            <a:srgbClr val="121216"/>
+          </a:solidFill>
+          <a:ln>
+            <a:noFill/>
+          </a:ln>
+          <a:effectLst>
+            <a:outerShdw blurRad="39960" dir="5400000" dist="23040" rotWithShape="0">
+              <a:srgbClr val="000000">
+                <a:alpha val="35000"/>
+              </a:srgbClr>
+            </a:outerShdw>
+          </a:effectLst>
+        </p:spPr>
+        <p:style>
+          <a:lnRef idx="1">
+            <a:schemeClr val="accent1"/>
+          </a:lnRef>
+          <a:fillRef idx="3">
+            <a:schemeClr val="accent1"/>
+          </a:fillRef>
+          <a:effectRef idx="2">
+            <a:schemeClr val="accent1"/>
+          </a:effectRef>
+          <a:fontRef idx="minor"/>
+        </p:style>
+        <p:txBody>
+          <a:bodyPr lIns="90000" rIns="90000" tIns="45000" bIns="45000" anchor="ctr">
+            <a:noAutofit/>
+          </a:bodyPr>
+          <a:p>
+            <a:endParaRPr b="0" lang="en-US" sz="1800" spc="-1" strike="noStrike">
+              <a:solidFill>
+                <a:schemeClr val="lt1"/>
+              </a:solidFill>
+              <a:latin typeface="Calibri"/>
+              <a:ea typeface="DejaVu Sans"/>
+            </a:endParaRPr>
+          </a:p>
+        </p:txBody>
+      </p:sp>
+      <p:sp>
+        <p:nvSpPr>
+          <p:cNvPr id="310" name="Rectangle 170"/>
+          <p:cNvSpPr/>
+          <p:nvPr/>
+        </p:nvSpPr>
+        <p:spPr>
+          <a:xfrm>
+            <a:off x="7315200" y="0"/>
+            <a:ext cx="13680" cy="6853320"/>
+          </a:xfrm>
+          <a:prstGeom prst="rect">
+            <a:avLst/>
+          </a:prstGeom>
+          <a:solidFill>
+            <a:srgbClr val="121216"/>
+          </a:solidFill>
+          <a:ln>
+            <a:noFill/>
+          </a:ln>
+          <a:effectLst>
+            <a:outerShdw blurRad="39960" dir="5400000" dist="23040" rotWithShape="0">
+              <a:srgbClr val="000000">
+                <a:alpha val="35000"/>
+              </a:srgbClr>
+            </a:outerShdw>
+          </a:effectLst>
+        </p:spPr>
+        <p:style>
+          <a:lnRef idx="1">
+            <a:schemeClr val="accent1"/>
+          </a:lnRef>
+          <a:fillRef idx="3">
+            <a:schemeClr val="accent1"/>
+          </a:fillRef>
+          <a:effectRef idx="2">
+            <a:schemeClr val="accent1"/>
+          </a:effectRef>
+          <a:fontRef idx="minor"/>
+        </p:style>
+        <p:txBody>
+          <a:bodyPr lIns="90000" rIns="90000" tIns="45000" bIns="45000" anchor="ctr">
+            <a:noAutofit/>
+          </a:bodyPr>
+          <a:p>
+            <a:endParaRPr b="0" lang="en-US" sz="1800" spc="-1" strike="noStrike">
+              <a:solidFill>
+                <a:schemeClr val="lt1"/>
+              </a:solidFill>
+              <a:latin typeface="Calibri"/>
+              <a:ea typeface="DejaVu Sans"/>
+            </a:endParaRPr>
+          </a:p>
+        </p:txBody>
+      </p:sp>
+      <p:sp>
+        <p:nvSpPr>
+          <p:cNvPr id="311" name="Rectangle 171"/>
+          <p:cNvSpPr/>
+          <p:nvPr/>
+        </p:nvSpPr>
+        <p:spPr>
+          <a:xfrm>
+            <a:off x="8229600" y="0"/>
+            <a:ext cx="13680" cy="6853320"/>
+          </a:xfrm>
+          <a:prstGeom prst="rect">
+            <a:avLst/>
+          </a:prstGeom>
+          <a:solidFill>
+            <a:srgbClr val="121216"/>
+          </a:solidFill>
+          <a:ln>
+            <a:noFill/>
+          </a:ln>
+          <a:effectLst>
+            <a:outerShdw blurRad="39960" dir="5400000" dist="23040" rotWithShape="0">
+              <a:srgbClr val="000000">
+                <a:alpha val="35000"/>
+              </a:srgbClr>
+            </a:outerShdw>
+          </a:effectLst>
+        </p:spPr>
+        <p:style>
+          <a:lnRef idx="1">
+            <a:schemeClr val="accent1"/>
+          </a:lnRef>
+          <a:fillRef idx="3">
+            <a:schemeClr val="accent1"/>
+          </a:fillRef>
+          <a:effectRef idx="2">
+            <a:schemeClr val="accent1"/>
+          </a:effectRef>
+          <a:fontRef idx="minor"/>
+        </p:style>
+        <p:txBody>
+          <a:bodyPr lIns="90000" rIns="90000" tIns="45000" bIns="45000" anchor="ctr">
+            <a:noAutofit/>
+          </a:bodyPr>
+          <a:p>
+            <a:endParaRPr b="0" lang="en-US" sz="1800" spc="-1" strike="noStrike">
+              <a:solidFill>
+                <a:schemeClr val="lt1"/>
+              </a:solidFill>
+              <a:latin typeface="Calibri"/>
+              <a:ea typeface="DejaVu Sans"/>
+            </a:endParaRPr>
+          </a:p>
+        </p:txBody>
+      </p:sp>
+      <p:sp>
+        <p:nvSpPr>
+          <p:cNvPr id="312" name="Rectangle 172"/>
+          <p:cNvSpPr/>
+          <p:nvPr/>
+        </p:nvSpPr>
+        <p:spPr>
+          <a:xfrm>
+            <a:off x="9144000" y="0"/>
+            <a:ext cx="13680" cy="6853320"/>
+          </a:xfrm>
+          <a:prstGeom prst="rect">
+            <a:avLst/>
+          </a:prstGeom>
+          <a:solidFill>
+            <a:srgbClr val="121216"/>
+          </a:solidFill>
+          <a:ln>
+            <a:noFill/>
+          </a:ln>
+          <a:effectLst>
+            <a:outerShdw blurRad="39960" dir="5400000" dist="23040" rotWithShape="0">
+              <a:srgbClr val="000000">
+                <a:alpha val="35000"/>
+              </a:srgbClr>
+            </a:outerShdw>
+          </a:effectLst>
+        </p:spPr>
+        <p:style>
+          <a:lnRef idx="1">
+            <a:schemeClr val="accent1"/>
+          </a:lnRef>
+          <a:fillRef idx="3">
+            <a:schemeClr val="accent1"/>
+          </a:fillRef>
+          <a:effectRef idx="2">
+            <a:schemeClr val="accent1"/>
+          </a:effectRef>
+          <a:fontRef idx="minor"/>
+        </p:style>
+        <p:txBody>
+          <a:bodyPr lIns="90000" rIns="90000" tIns="45000" bIns="45000" anchor="ctr">
+            <a:noAutofit/>
+          </a:bodyPr>
+          <a:p>
+            <a:endParaRPr b="0" lang="en-US" sz="1800" spc="-1" strike="noStrike">
+              <a:solidFill>
+                <a:schemeClr val="lt1"/>
+              </a:solidFill>
+              <a:latin typeface="Calibri"/>
+              <a:ea typeface="DejaVu Sans"/>
+            </a:endParaRPr>
+          </a:p>
+        </p:txBody>
+      </p:sp>
+      <p:sp>
+        <p:nvSpPr>
+          <p:cNvPr id="313" name="Rectangle 173"/>
+          <p:cNvSpPr/>
+          <p:nvPr/>
+        </p:nvSpPr>
+        <p:spPr>
+          <a:xfrm>
+            <a:off x="10058400" y="0"/>
+            <a:ext cx="13680" cy="6853320"/>
+          </a:xfrm>
+          <a:prstGeom prst="rect">
+            <a:avLst/>
+          </a:prstGeom>
+          <a:solidFill>
+            <a:srgbClr val="121216"/>
+          </a:solidFill>
+          <a:ln>
+            <a:noFill/>
+          </a:ln>
+          <a:effectLst>
+            <a:outerShdw blurRad="39960" dir="5400000" dist="23040" rotWithShape="0">
+              <a:srgbClr val="000000">
+                <a:alpha val="35000"/>
+              </a:srgbClr>
+            </a:outerShdw>
+          </a:effectLst>
+        </p:spPr>
+        <p:style>
+          <a:lnRef idx="1">
+            <a:schemeClr val="accent1"/>
+          </a:lnRef>
+          <a:fillRef idx="3">
+            <a:schemeClr val="accent1"/>
+          </a:fillRef>
+          <a:effectRef idx="2">
+            <a:schemeClr val="accent1"/>
+          </a:effectRef>
+          <a:fontRef idx="minor"/>
+        </p:style>
+        <p:txBody>
+          <a:bodyPr lIns="90000" rIns="90000" tIns="45000" bIns="45000" anchor="ctr">
+            <a:noAutofit/>
+          </a:bodyPr>
+          <a:p>
+            <a:endParaRPr b="0" lang="en-US" sz="1800" spc="-1" strike="noStrike">
+              <a:solidFill>
+                <a:schemeClr val="lt1"/>
+              </a:solidFill>
+              <a:latin typeface="Calibri"/>
+              <a:ea typeface="DejaVu Sans"/>
+            </a:endParaRPr>
+          </a:p>
+        </p:txBody>
+      </p:sp>
+      <p:sp>
+        <p:nvSpPr>
+          <p:cNvPr id="314" name="Rectangle 174"/>
+          <p:cNvSpPr/>
+          <p:nvPr/>
+        </p:nvSpPr>
+        <p:spPr>
+          <a:xfrm>
+            <a:off x="10972800" y="0"/>
+            <a:ext cx="13680" cy="6853320"/>
+          </a:xfrm>
+          <a:prstGeom prst="rect">
+            <a:avLst/>
+          </a:prstGeom>
+          <a:solidFill>
+            <a:srgbClr val="121216"/>
+          </a:solidFill>
+          <a:ln>
+            <a:noFill/>
+          </a:ln>
+          <a:effectLst>
+            <a:outerShdw blurRad="39960" dir="5400000" dist="23040" rotWithShape="0">
+              <a:srgbClr val="000000">
+                <a:alpha val="35000"/>
+              </a:srgbClr>
+            </a:outerShdw>
+          </a:effectLst>
+        </p:spPr>
+        <p:style>
+          <a:lnRef idx="1">
+            <a:schemeClr val="accent1"/>
+          </a:lnRef>
+          <a:fillRef idx="3">
+            <a:schemeClr val="accent1"/>
+          </a:fillRef>
+          <a:effectRef idx="2">
+            <a:schemeClr val="accent1"/>
+          </a:effectRef>
+          <a:fontRef idx="minor"/>
+        </p:style>
+        <p:txBody>
+          <a:bodyPr lIns="90000" rIns="90000" tIns="45000" bIns="45000" anchor="ctr">
+            <a:noAutofit/>
+          </a:bodyPr>
+          <a:p>
+            <a:endParaRPr b="0" lang="en-US" sz="1800" spc="-1" strike="noStrike">
+              <a:solidFill>
+                <a:schemeClr val="lt1"/>
+              </a:solidFill>
+              <a:latin typeface="Calibri"/>
+              <a:ea typeface="DejaVu Sans"/>
+            </a:endParaRPr>
+          </a:p>
+        </p:txBody>
+      </p:sp>
+      <p:sp>
+        <p:nvSpPr>
+          <p:cNvPr id="315" name="Rectangle 175"/>
+          <p:cNvSpPr/>
+          <p:nvPr/>
+        </p:nvSpPr>
+        <p:spPr>
+          <a:xfrm>
+            <a:off x="11887200" y="0"/>
+            <a:ext cx="13680" cy="6853320"/>
+          </a:xfrm>
+          <a:prstGeom prst="rect">
+            <a:avLst/>
+          </a:prstGeom>
+          <a:solidFill>
+            <a:srgbClr val="121216"/>
+          </a:solidFill>
+          <a:ln>
+            <a:noFill/>
+          </a:ln>
+          <a:effectLst>
+            <a:outerShdw blurRad="39960" dir="5400000" dist="23040" rotWithShape="0">
+              <a:srgbClr val="000000">
+                <a:alpha val="35000"/>
+              </a:srgbClr>
+            </a:outerShdw>
+          </a:effectLst>
+        </p:spPr>
+        <p:style>
+          <a:lnRef idx="1">
+            <a:schemeClr val="accent1"/>
+          </a:lnRef>
+          <a:fillRef idx="3">
+            <a:schemeClr val="accent1"/>
+          </a:fillRef>
+          <a:effectRef idx="2">
+            <a:schemeClr val="accent1"/>
+          </a:effectRef>
+          <a:fontRef idx="minor"/>
+        </p:style>
+        <p:txBody>
+          <a:bodyPr lIns="90000" rIns="90000" tIns="45000" bIns="45000" anchor="ctr">
+            <a:noAutofit/>
+          </a:bodyPr>
+          <a:p>
+            <a:endParaRPr b="0" lang="en-US" sz="1800" spc="-1" strike="noStrike">
+              <a:solidFill>
+                <a:schemeClr val="lt1"/>
+              </a:solidFill>
+              <a:latin typeface="Calibri"/>
+              <a:ea typeface="DejaVu Sans"/>
+            </a:endParaRPr>
+          </a:p>
+        </p:txBody>
+      </p:sp>
+      <p:sp>
+        <p:nvSpPr>
+          <p:cNvPr id="316" name="Rectangle 176"/>
+          <p:cNvSpPr/>
+          <p:nvPr/>
+        </p:nvSpPr>
+        <p:spPr>
+          <a:xfrm>
+            <a:off x="0" y="0"/>
+            <a:ext cx="315360" cy="6853320"/>
+          </a:xfrm>
+          <a:prstGeom prst="rect">
+            <a:avLst/>
+          </a:prstGeom>
+          <a:solidFill>
+            <a:srgbClr val="ff8c00"/>
+          </a:solidFill>
+          <a:ln>
+            <a:noFill/>
+          </a:ln>
+          <a:effectLst>
+            <a:outerShdw blurRad="39960" dir="5400000" dist="23040" rotWithShape="0">
+              <a:srgbClr val="000000">
+                <a:alpha val="35000"/>
+              </a:srgbClr>
+            </a:outerShdw>
+          </a:effectLst>
+        </p:spPr>
+        <p:style>
+          <a:lnRef idx="1">
+            <a:schemeClr val="accent1"/>
+          </a:lnRef>
+          <a:fillRef idx="3">
+            <a:schemeClr val="accent1"/>
+          </a:fillRef>
+          <a:effectRef idx="2">
+            <a:schemeClr val="accent1"/>
+          </a:effectRef>
+          <a:fontRef idx="minor"/>
+        </p:style>
+        <p:txBody>
+          <a:bodyPr lIns="90000" rIns="90000" tIns="45000" bIns="45000" anchor="ctr">
+            <a:noAutofit/>
+          </a:bodyPr>
+          <a:p>
+            <a:endParaRPr b="0" lang="en-US" sz="1800" spc="-1" strike="noStrike">
+              <a:solidFill>
+                <a:schemeClr val="lt1"/>
+              </a:solidFill>
+              <a:latin typeface="Calibri"/>
+              <a:ea typeface="DejaVu Sans"/>
+            </a:endParaRPr>
+          </a:p>
+        </p:txBody>
+      </p:sp>
+      <p:sp>
+        <p:nvSpPr>
+          <p:cNvPr id="317" name="Rounded Rectangle 78"/>
+          <p:cNvSpPr/>
+          <p:nvPr/>
+        </p:nvSpPr>
+        <p:spPr>
+          <a:xfrm>
+            <a:off x="9875520" y="365760"/>
+            <a:ext cx="2007000" cy="498240"/>
+          </a:xfrm>
+          <a:prstGeom prst="roundRect">
+            <a:avLst>
+              <a:gd name="adj" fmla="val 16667"/>
+            </a:avLst>
+          </a:prstGeom>
+          <a:solidFill>
+            <a:srgbClr val="1e1e24"/>
+          </a:solidFill>
+          <a:ln>
+            <a:solidFill>
+              <a:srgbClr val="ff8c00"/>
+            </a:solidFill>
+            <a:round/>
+          </a:ln>
+          <a:effectLst>
+            <a:outerShdw blurRad="39960" dir="5400000" dist="23040" rotWithShape="0">
+              <a:srgbClr val="000000">
+                <a:alpha val="35000"/>
+              </a:srgbClr>
+            </a:outerShdw>
+          </a:effectLst>
+        </p:spPr>
+        <p:style>
+          <a:lnRef idx="1">
+            <a:schemeClr val="accent1"/>
+          </a:lnRef>
+          <a:fillRef idx="3">
+            <a:schemeClr val="accent1"/>
+          </a:fillRef>
+          <a:effectRef idx="2">
+            <a:schemeClr val="accent1"/>
+          </a:effectRef>
+          <a:fontRef idx="minor"/>
+        </p:style>
+        <p:txBody>
+          <a:bodyPr lIns="90000" rIns="90000" tIns="45000" bIns="45000" anchor="ctr">
+            <a:noAutofit/>
+          </a:bodyPr>
+          <a:p>
+            <a:pPr algn="ctr">
+              <a:lnSpc>
+                <a:spcPct val="100000"/>
+              </a:lnSpc>
+            </a:pPr>
+            <a:r>
+              <a:rPr b="1" lang="en-US" sz="1400" spc="-1" strike="noStrike">
+                <a:solidFill>
+                  <a:srgbClr val="ffb45a"/>
+                </a:solidFill>
+                <a:latin typeface="Calibri"/>
+                <a:ea typeface="DejaVu Sans"/>
+              </a:rPr>
+              <a:t>JAVA CORE</a:t>
+            </a:r>
+            <a:endParaRPr b="0" lang="en-US" sz="1400" spc="-1" strike="noStrike">
+              <a:solidFill>
+                <a:srgbClr val="ffffff"/>
+              </a:solidFill>
+              <a:latin typeface="Arial"/>
+            </a:endParaRPr>
+          </a:p>
+        </p:txBody>
+      </p:sp>
+      <p:sp>
+        <p:nvSpPr>
+          <p:cNvPr id="318" name="TextBox 34"/>
+          <p:cNvSpPr/>
+          <p:nvPr/>
+        </p:nvSpPr>
+        <p:spPr>
+          <a:xfrm>
+            <a:off x="705600" y="914400"/>
+            <a:ext cx="9556920" cy="639000"/>
+          </a:xfrm>
+          <a:prstGeom prst="rect">
+            <a:avLst/>
+          </a:prstGeom>
+          <a:noFill/>
+          <a:ln w="0">
+            <a:noFill/>
+          </a:ln>
+        </p:spPr>
+        <p:style>
+          <a:lnRef idx="0"/>
+          <a:fillRef idx="0"/>
+          <a:effectRef idx="0"/>
+          <a:fontRef idx="minor"/>
+        </p:style>
+        <p:txBody>
+          <a:bodyPr wrap="none" lIns="90000" rIns="90000" tIns="45000" bIns="45000" anchor="t">
+            <a:spAutoFit/>
+          </a:bodyPr>
+          <a:p>
+            <a:pPr>
+              <a:lnSpc>
+                <a:spcPct val="100000"/>
+              </a:lnSpc>
+            </a:pPr>
+            <a:r>
+              <a:rPr b="1" lang="en-US" sz="3600" spc="-1" strike="noStrike">
+                <a:solidFill>
+                  <a:srgbClr val="f5f5f5"/>
+                </a:solidFill>
+                <a:latin typeface="Calibri"/>
+                <a:ea typeface="DejaVu Sans"/>
+              </a:rPr>
+              <a:t>Arithmetic Operators (Part 3: Shortcuts &amp; Strings)</a:t>
+            </a:r>
+            <a:endParaRPr b="0" lang="en-US" sz="3600" spc="-1" strike="noStrike">
+              <a:solidFill>
+                <a:srgbClr val="000000"/>
+              </a:solidFill>
+              <a:latin typeface="Arial"/>
+            </a:endParaRPr>
+          </a:p>
+        </p:txBody>
+      </p:sp>
+      <p:sp>
+        <p:nvSpPr>
+          <p:cNvPr id="319" name="TextBox 35"/>
+          <p:cNvSpPr/>
+          <p:nvPr/>
+        </p:nvSpPr>
+        <p:spPr>
+          <a:xfrm>
+            <a:off x="1482480" y="1694880"/>
+            <a:ext cx="8604360" cy="819720"/>
+          </a:xfrm>
+          <a:prstGeom prst="rect">
+            <a:avLst/>
+          </a:prstGeom>
+          <a:noFill/>
+          <a:ln w="0">
+            <a:noFill/>
+          </a:ln>
+        </p:spPr>
+        <p:style>
+          <a:lnRef idx="0"/>
+          <a:fillRef idx="0"/>
+          <a:effectRef idx="0"/>
+          <a:fontRef idx="minor"/>
+        </p:style>
+        <p:txBody>
+          <a:bodyPr wrap="none" lIns="90000" rIns="90000" tIns="45000" bIns="45000" anchor="t">
+            <a:spAutoFit/>
+          </a:bodyPr>
+          <a:p>
+            <a:pPr>
+              <a:lnSpc>
+                <a:spcPct val="100000"/>
+              </a:lnSpc>
+            </a:pPr>
+            <a:r>
+              <a:rPr b="0" lang="en-US" sz="1600" spc="-1" strike="noStrike">
+                <a:solidFill>
+                  <a:srgbClr val="aaaaaa"/>
+                </a:solidFill>
+                <a:latin typeface="Calibri"/>
+                <a:ea typeface="DejaVu Sans"/>
+              </a:rPr>
+              <a:t>Java offers shortcut operators to combine math and assignment into a single step, keeping code clean. </a:t>
+            </a:r>
+            <a:endParaRPr b="0" lang="en-US" sz="1600" spc="-1" strike="noStrike">
+              <a:solidFill>
+                <a:srgbClr val="000000"/>
+              </a:solidFill>
+              <a:latin typeface="Arial"/>
+            </a:endParaRPr>
+          </a:p>
+          <a:p>
+            <a:pPr>
+              <a:lnSpc>
+                <a:spcPct val="100000"/>
+              </a:lnSpc>
+            </a:pPr>
+            <a:r>
+              <a:rPr b="0" lang="en-US" sz="1600" spc="-1" strike="noStrike">
+                <a:solidFill>
+                  <a:srgbClr val="aaaaaa"/>
+                </a:solidFill>
+                <a:latin typeface="Calibri"/>
+                <a:ea typeface="DejaVu Sans"/>
+              </a:rPr>
+              <a:t>Additionally, the + operator has a dual identity: it performs mathematical addition for </a:t>
+            </a:r>
+            <a:endParaRPr b="0" lang="en-US" sz="1600" spc="-1" strike="noStrike">
+              <a:solidFill>
+                <a:srgbClr val="000000"/>
+              </a:solidFill>
+              <a:latin typeface="Arial"/>
+            </a:endParaRPr>
+          </a:p>
+          <a:p>
+            <a:pPr>
+              <a:lnSpc>
+                <a:spcPct val="100000"/>
+              </a:lnSpc>
+            </a:pPr>
+            <a:r>
+              <a:rPr b="0" lang="en-US" sz="1600" spc="-1" strike="noStrike">
+                <a:solidFill>
+                  <a:srgbClr val="aaaaaa"/>
+                </a:solidFill>
+                <a:latin typeface="Calibri"/>
+                <a:ea typeface="DejaVu Sans"/>
+              </a:rPr>
+              <a:t>numbers, but acts as a "glue" (concatenation) for Strings.</a:t>
+            </a:r>
+            <a:endParaRPr b="0" lang="en-US" sz="1600" spc="-1" strike="noStrike">
+              <a:solidFill>
+                <a:srgbClr val="000000"/>
+              </a:solidFill>
+              <a:latin typeface="Arial"/>
+            </a:endParaRPr>
+          </a:p>
+        </p:txBody>
+      </p:sp>
+      <p:sp>
+        <p:nvSpPr>
+          <p:cNvPr id="320" name="Rounded Rectangle 79"/>
+          <p:cNvSpPr/>
+          <p:nvPr/>
+        </p:nvSpPr>
+        <p:spPr>
+          <a:xfrm>
+            <a:off x="987480" y="3182040"/>
+            <a:ext cx="3287160" cy="2738520"/>
+          </a:xfrm>
+          <a:prstGeom prst="roundRect">
+            <a:avLst>
+              <a:gd name="adj" fmla="val 16667"/>
+            </a:avLst>
+          </a:prstGeom>
+          <a:solidFill>
+            <a:srgbClr val="08080a"/>
+          </a:solidFill>
+          <a:ln>
+            <a:noFill/>
+          </a:ln>
+          <a:effectLst>
+            <a:outerShdw blurRad="39960" dir="5400000" dist="23040" rotWithShape="0">
+              <a:srgbClr val="000000">
+                <a:alpha val="35000"/>
+              </a:srgbClr>
+            </a:outerShdw>
+          </a:effectLst>
+        </p:spPr>
+        <p:style>
+          <a:lnRef idx="1">
+            <a:schemeClr val="accent1"/>
+          </a:lnRef>
+          <a:fillRef idx="3">
+            <a:schemeClr val="accent1"/>
+          </a:fillRef>
+          <a:effectRef idx="2">
+            <a:schemeClr val="accent1"/>
+          </a:effectRef>
+          <a:fontRef idx="minor"/>
+        </p:style>
+        <p:txBody>
+          <a:bodyPr lIns="90000" rIns="90000" tIns="45000" bIns="45000" anchor="ctr">
+            <a:noAutofit/>
+          </a:bodyPr>
+          <a:p>
+            <a:endParaRPr b="0" lang="en-US" sz="1800" spc="-1" strike="noStrike">
+              <a:solidFill>
+                <a:schemeClr val="lt1"/>
+              </a:solidFill>
+              <a:latin typeface="Calibri"/>
+              <a:ea typeface="DejaVu Sans"/>
+            </a:endParaRPr>
+          </a:p>
+        </p:txBody>
+      </p:sp>
+      <p:sp>
+        <p:nvSpPr>
+          <p:cNvPr id="321" name="Rounded Rectangle 80"/>
+          <p:cNvSpPr/>
+          <p:nvPr/>
+        </p:nvSpPr>
+        <p:spPr>
+          <a:xfrm>
+            <a:off x="685800" y="2743200"/>
+            <a:ext cx="3515760" cy="3656160"/>
+          </a:xfrm>
+          <a:prstGeom prst="roundRect">
+            <a:avLst>
+              <a:gd name="adj" fmla="val 16667"/>
+            </a:avLst>
+          </a:prstGeom>
+          <a:solidFill>
+            <a:srgbClr val="16161c"/>
+          </a:solidFill>
+          <a:ln>
+            <a:solidFill>
+              <a:srgbClr val="464655"/>
+            </a:solidFill>
+            <a:round/>
+          </a:ln>
+          <a:effectLst>
+            <a:outerShdw blurRad="39960" dir="5400000" dist="23040" rotWithShape="0">
+              <a:srgbClr val="000000">
+                <a:alpha val="35000"/>
+              </a:srgbClr>
+            </a:outerShdw>
+          </a:effectLst>
+        </p:spPr>
+        <p:style>
+          <a:lnRef idx="1">
+            <a:schemeClr val="accent1"/>
+          </a:lnRef>
+          <a:fillRef idx="3">
+            <a:schemeClr val="accent1"/>
+          </a:fillRef>
+          <a:effectRef idx="2">
+            <a:schemeClr val="accent1"/>
+          </a:effectRef>
+          <a:fontRef idx="minor"/>
+        </p:style>
+        <p:txBody>
+          <a:bodyPr lIns="90000" rIns="90000" tIns="45000" bIns="45000" anchor="ctr">
+            <a:noAutofit/>
+          </a:bodyPr>
+          <a:p>
+            <a:pPr>
+              <a:lnSpc>
+                <a:spcPct val="100000"/>
+              </a:lnSpc>
+            </a:pPr>
+            <a:r>
+              <a:rPr b="1" lang="en-US" sz="1400" spc="-1" strike="noStrike">
+                <a:solidFill>
+                  <a:schemeClr val="lt1"/>
+                </a:solidFill>
+                <a:latin typeface="Calibri"/>
+                <a:ea typeface="DejaVu Sans"/>
+              </a:rPr>
+              <a:t>1. Compound Assignment:</a:t>
+            </a:r>
+            <a:endParaRPr b="0" lang="en-US" sz="1400" spc="-1" strike="noStrike">
+              <a:solidFill>
+                <a:srgbClr val="ffffff"/>
+              </a:solidFill>
+              <a:latin typeface="Arial"/>
+            </a:endParaRPr>
+          </a:p>
+          <a:p>
+            <a:pPr marL="216000" indent="-216000">
+              <a:lnSpc>
+                <a:spcPct val="100000"/>
+              </a:lnSpc>
+              <a:buClr>
+                <a:srgbClr val="ffffff"/>
+              </a:buClr>
+              <a:buFont typeface="Wingdings" charset="2"/>
+              <a:buChar char=""/>
+            </a:pPr>
+            <a:r>
+              <a:rPr b="0" lang="en-US" sz="1400" spc="-1" strike="noStrike">
+                <a:solidFill>
+                  <a:schemeClr val="lt1"/>
+                </a:solidFill>
+                <a:latin typeface="Calibri"/>
+                <a:ea typeface="DejaVu Sans"/>
+              </a:rPr>
+              <a:t>Combines arithmetic with assignment: +=, -=, *=, /=, %=.</a:t>
+            </a:r>
+            <a:endParaRPr b="0" lang="en-US" sz="1400" spc="-1" strike="noStrike">
+              <a:solidFill>
+                <a:srgbClr val="ffffff"/>
+              </a:solidFill>
+              <a:latin typeface="Arial"/>
+            </a:endParaRPr>
+          </a:p>
+          <a:p>
+            <a:pPr marL="216000" indent="-216000">
+              <a:lnSpc>
+                <a:spcPct val="100000"/>
+              </a:lnSpc>
+              <a:buClr>
+                <a:srgbClr val="ffffff"/>
+              </a:buClr>
+              <a:buFont typeface="Wingdings" charset="2"/>
+              <a:buChar char=""/>
+            </a:pPr>
+            <a:r>
+              <a:rPr b="0" lang="en-US" sz="1400" spc="-1" strike="noStrike">
+                <a:solidFill>
+                  <a:schemeClr val="lt1"/>
+                </a:solidFill>
+                <a:latin typeface="Calibri"/>
+                <a:ea typeface="DejaVu Sans"/>
+              </a:rPr>
+              <a:t>• </a:t>
+            </a:r>
+            <a:r>
+              <a:rPr b="0" lang="en-US" sz="1400" spc="-1" strike="noStrike">
+                <a:solidFill>
+                  <a:schemeClr val="lt1"/>
+                </a:solidFill>
+                <a:latin typeface="Calibri"/>
+                <a:ea typeface="DejaVu Sans"/>
+              </a:rPr>
+              <a:t>Ex: x += 5 is the exact shorthand for x = x + 5.</a:t>
+            </a:r>
+            <a:endParaRPr b="0" lang="en-US" sz="1400" spc="-1" strike="noStrike">
+              <a:solidFill>
+                <a:srgbClr val="ffffff"/>
+              </a:solidFill>
+              <a:latin typeface="Arial"/>
+            </a:endParaRPr>
+          </a:p>
+          <a:p>
+            <a:pPr marL="216000" indent="-216000">
+              <a:lnSpc>
+                <a:spcPct val="100000"/>
+              </a:lnSpc>
+              <a:buClr>
+                <a:srgbClr val="ffffff"/>
+              </a:buClr>
+              <a:buFont typeface="Wingdings" charset="2"/>
+              <a:buChar char=""/>
+            </a:pPr>
+            <a:r>
+              <a:rPr b="0" lang="en-US" sz="1400" spc="-1" strike="noStrike">
+                <a:solidFill>
+                  <a:schemeClr val="lt1"/>
+                </a:solidFill>
+                <a:latin typeface="Calibri"/>
+                <a:ea typeface="DejaVu Sans"/>
+              </a:rPr>
+              <a:t>Pro-Tip: They automatically handle type casting behind the scenes (e.g., adding an int to a byte without errors).</a:t>
+            </a:r>
+            <a:endParaRPr b="0" lang="en-US" sz="1400" spc="-1" strike="noStrike">
+              <a:solidFill>
+                <a:srgbClr val="ffffff"/>
+              </a:solidFill>
+              <a:latin typeface="Arial"/>
+            </a:endParaRPr>
+          </a:p>
+          <a:p>
+            <a:pPr marL="216000" indent="-216000">
+              <a:lnSpc>
+                <a:spcPct val="100000"/>
+              </a:lnSpc>
+              <a:buClr>
+                <a:srgbClr val="ffffff"/>
+              </a:buClr>
+              <a:buFont typeface="Wingdings" charset="2"/>
+              <a:buChar char=""/>
+            </a:pPr>
+            <a:endParaRPr b="0" lang="en-US" sz="1400" spc="-1" strike="noStrike">
+              <a:solidFill>
+                <a:srgbClr val="ffffff"/>
+              </a:solidFill>
+              <a:latin typeface="Arial"/>
+            </a:endParaRPr>
+          </a:p>
+          <a:p>
+            <a:pPr>
+              <a:lnSpc>
+                <a:spcPct val="100000"/>
+              </a:lnSpc>
+            </a:pPr>
+            <a:r>
+              <a:rPr b="1" lang="en-US" sz="1400" spc="-1" strike="noStrike">
+                <a:solidFill>
+                  <a:schemeClr val="lt1"/>
+                </a:solidFill>
+                <a:latin typeface="Calibri"/>
+                <a:ea typeface="DejaVu Sans"/>
+              </a:rPr>
+              <a:t>2. The Dual Role of +:</a:t>
+            </a:r>
+            <a:endParaRPr b="0" lang="en-US" sz="1400" spc="-1" strike="noStrike">
+              <a:solidFill>
+                <a:srgbClr val="ffffff"/>
+              </a:solidFill>
+              <a:latin typeface="Arial"/>
+            </a:endParaRPr>
+          </a:p>
+          <a:p>
+            <a:pPr marL="216000" indent="-216000">
+              <a:lnSpc>
+                <a:spcPct val="100000"/>
+              </a:lnSpc>
+              <a:buClr>
+                <a:srgbClr val="ffffff"/>
+              </a:buClr>
+              <a:buFont typeface="Wingdings" charset="2"/>
+              <a:buChar char=""/>
+            </a:pPr>
+            <a:r>
+              <a:rPr b="0" lang="en-US" sz="1400" spc="-1" strike="noStrike">
+                <a:solidFill>
+                  <a:schemeClr val="lt1"/>
+                </a:solidFill>
+                <a:latin typeface="Calibri"/>
+                <a:ea typeface="DejaVu Sans"/>
+              </a:rPr>
+              <a:t> </a:t>
+            </a:r>
+            <a:r>
+              <a:rPr b="0" lang="en-US" sz="1400" spc="-1" strike="noStrike">
+                <a:solidFill>
+                  <a:schemeClr val="lt1"/>
+                </a:solidFill>
+                <a:latin typeface="Calibri"/>
+                <a:ea typeface="DejaVu Sans"/>
+              </a:rPr>
+              <a:t>Number + Number = Math (Addition).</a:t>
+            </a:r>
+            <a:endParaRPr b="0" lang="en-US" sz="1400" spc="-1" strike="noStrike">
+              <a:solidFill>
+                <a:srgbClr val="ffffff"/>
+              </a:solidFill>
+              <a:latin typeface="Arial"/>
+            </a:endParaRPr>
+          </a:p>
+          <a:p>
+            <a:pPr marL="216000" indent="-216000">
+              <a:lnSpc>
+                <a:spcPct val="100000"/>
+              </a:lnSpc>
+              <a:buClr>
+                <a:srgbClr val="ffffff"/>
+              </a:buClr>
+              <a:buFont typeface="Wingdings" charset="2"/>
+              <a:buChar char=""/>
+            </a:pPr>
+            <a:r>
+              <a:rPr b="0" lang="en-US" sz="1400" spc="-1" strike="noStrike">
+                <a:solidFill>
+                  <a:schemeClr val="lt1"/>
+                </a:solidFill>
+                <a:latin typeface="Calibri"/>
+                <a:ea typeface="DejaVu Sans"/>
+              </a:rPr>
+              <a:t> </a:t>
+            </a:r>
+            <a:r>
+              <a:rPr b="0" lang="en-US" sz="1400" spc="-1" strike="noStrike">
+                <a:solidFill>
+                  <a:schemeClr val="lt1"/>
+                </a:solidFill>
+                <a:latin typeface="Calibri"/>
+                <a:ea typeface="DejaVu Sans"/>
+              </a:rPr>
+              <a:t>String + Anything = Text (Concatenation).</a:t>
+            </a:r>
+            <a:endParaRPr b="0" lang="en-US" sz="1400" spc="-1" strike="noStrike">
+              <a:solidFill>
+                <a:srgbClr val="ffffff"/>
+              </a:solidFill>
+              <a:latin typeface="Arial"/>
+            </a:endParaRPr>
+          </a:p>
+          <a:p>
+            <a:pPr marL="216000" indent="-216000">
+              <a:lnSpc>
+                <a:spcPct val="100000"/>
+              </a:lnSpc>
+              <a:buClr>
+                <a:srgbClr val="ffffff"/>
+              </a:buClr>
+              <a:buFont typeface="Wingdings" charset="2"/>
+              <a:buChar char=""/>
+            </a:pPr>
+            <a:r>
+              <a:rPr b="0" lang="en-US" sz="1400" spc="-1" strike="noStrike">
+                <a:solidFill>
+                  <a:schemeClr val="lt1"/>
+                </a:solidFill>
+                <a:latin typeface="Calibri"/>
+                <a:ea typeface="DejaVu Sans"/>
+              </a:rPr>
+              <a:t> </a:t>
+            </a:r>
+            <a:r>
+              <a:rPr b="0" lang="en-US" sz="1400" spc="-1" strike="noStrike">
+                <a:solidFill>
+                  <a:schemeClr val="lt1"/>
+                </a:solidFill>
+                <a:latin typeface="Calibri"/>
+                <a:ea typeface="DejaVu Sans"/>
+              </a:rPr>
+              <a:t>Execution flows strictly from Left to Right. If a String appears first, everything after it turns into text!</a:t>
+            </a:r>
+            <a:endParaRPr b="0" lang="en-US" sz="1400" spc="-1" strike="noStrike">
+              <a:solidFill>
+                <a:srgbClr val="ffffff"/>
+              </a:solidFill>
+              <a:latin typeface="Arial"/>
+            </a:endParaRPr>
+          </a:p>
+        </p:txBody>
+      </p:sp>
+      <p:sp>
+        <p:nvSpPr>
+          <p:cNvPr id="322" name="Rounded Rectangle 81"/>
+          <p:cNvSpPr/>
+          <p:nvPr/>
+        </p:nvSpPr>
+        <p:spPr>
+          <a:xfrm>
+            <a:off x="4507920" y="3182040"/>
+            <a:ext cx="3287160" cy="2738520"/>
+          </a:xfrm>
+          <a:prstGeom prst="roundRect">
+            <a:avLst>
+              <a:gd name="adj" fmla="val 16667"/>
+            </a:avLst>
+          </a:prstGeom>
+          <a:solidFill>
+            <a:srgbClr val="08080a"/>
+          </a:solidFill>
+          <a:ln>
+            <a:noFill/>
+          </a:ln>
+          <a:effectLst>
+            <a:outerShdw blurRad="39960" dir="5400000" dist="23040" rotWithShape="0">
+              <a:srgbClr val="000000">
+                <a:alpha val="35000"/>
+              </a:srgbClr>
+            </a:outerShdw>
+          </a:effectLst>
+        </p:spPr>
+        <p:style>
+          <a:lnRef idx="1">
+            <a:schemeClr val="accent1"/>
+          </a:lnRef>
+          <a:fillRef idx="3">
+            <a:schemeClr val="accent1"/>
+          </a:fillRef>
+          <a:effectRef idx="2">
+            <a:schemeClr val="accent1"/>
+          </a:effectRef>
+          <a:fontRef idx="minor"/>
+        </p:style>
+        <p:txBody>
+          <a:bodyPr lIns="90000" rIns="90000" tIns="45000" bIns="45000" anchor="ctr">
+            <a:noAutofit/>
+          </a:bodyPr>
+          <a:p>
+            <a:endParaRPr b="0" lang="en-US" sz="1800" spc="-1" strike="noStrike">
+              <a:solidFill>
+                <a:schemeClr val="lt1"/>
+              </a:solidFill>
+              <a:latin typeface="Calibri"/>
+              <a:ea typeface="DejaVu Sans"/>
+            </a:endParaRPr>
+          </a:p>
+        </p:txBody>
+      </p:sp>
+      <p:sp>
+        <p:nvSpPr>
+          <p:cNvPr id="323" name="Rounded Rectangle 82"/>
+          <p:cNvSpPr/>
+          <p:nvPr/>
+        </p:nvSpPr>
+        <p:spPr>
+          <a:xfrm>
+            <a:off x="4434840" y="2971800"/>
+            <a:ext cx="3287160" cy="3427560"/>
+          </a:xfrm>
+          <a:prstGeom prst="roundRect">
+            <a:avLst>
+              <a:gd name="adj" fmla="val 16667"/>
+            </a:avLst>
+          </a:prstGeom>
+          <a:solidFill>
+            <a:srgbClr val="16161c"/>
+          </a:solidFill>
+          <a:ln>
+            <a:solidFill>
+              <a:srgbClr val="464655"/>
+            </a:solidFill>
+            <a:round/>
+          </a:ln>
+          <a:effectLst>
+            <a:outerShdw blurRad="39960" dir="5400000" dist="23040" rotWithShape="0">
+              <a:srgbClr val="000000">
+                <a:alpha val="35000"/>
+              </a:srgbClr>
+            </a:outerShdw>
+          </a:effectLst>
+        </p:spPr>
+        <p:style>
+          <a:lnRef idx="1">
+            <a:schemeClr val="accent1"/>
+          </a:lnRef>
+          <a:fillRef idx="3">
+            <a:schemeClr val="accent1"/>
+          </a:fillRef>
+          <a:effectRef idx="2">
+            <a:schemeClr val="accent1"/>
+          </a:effectRef>
+          <a:fontRef idx="minor"/>
+        </p:style>
+        <p:txBody>
+          <a:bodyPr lIns="90000" rIns="90000" tIns="45000" bIns="45000" anchor="ctr">
+            <a:noAutofit/>
+          </a:bodyPr>
+          <a:p>
+            <a:pPr>
+              <a:lnSpc>
+                <a:spcPct val="100000"/>
+              </a:lnSpc>
+            </a:pPr>
+            <a:r>
+              <a:rPr b="0" lang="en-US" sz="1800" spc="-1" strike="noStrike">
+                <a:solidFill>
+                  <a:schemeClr val="lt1"/>
+                </a:solidFill>
+                <a:latin typeface="Calibri"/>
+                <a:ea typeface="DejaVu Sans"/>
+              </a:rPr>
+              <a:t>[ Left-to-Right Execution of + ]</a:t>
+            </a:r>
+            <a:endParaRPr b="0" lang="en-US" sz="1800" spc="-1" strike="noStrike">
+              <a:solidFill>
+                <a:srgbClr val="ffffff"/>
+              </a:solidFill>
+              <a:latin typeface="Arial"/>
+            </a:endParaRPr>
+          </a:p>
+          <a:p>
+            <a:pPr>
+              <a:lnSpc>
+                <a:spcPct val="100000"/>
+              </a:lnSpc>
+            </a:pPr>
+            <a:r>
+              <a:rPr b="0" lang="en-US" sz="1800" spc="-1" strike="noStrike">
+                <a:solidFill>
+                  <a:schemeClr val="lt1"/>
+                </a:solidFill>
+                <a:latin typeface="Calibri"/>
+                <a:ea typeface="DejaVu Sans"/>
+              </a:rPr>
+              <a:t>├──</a:t>
+            </a:r>
+            <a:r>
+              <a:rPr b="0" lang="en-US" sz="1800" spc="-1" strike="noStrike">
+                <a:solidFill>
+                  <a:schemeClr val="lt1"/>
+                </a:solidFill>
+                <a:latin typeface="Calibri"/>
+                <a:ea typeface="DejaVu Sans"/>
+              </a:rPr>
+              <a:t>&gt; Scenario 1: 10 + 5 + "A"</a:t>
+            </a:r>
+            <a:endParaRPr b="0" lang="en-US" sz="1800" spc="-1" strike="noStrike">
+              <a:solidFill>
+                <a:srgbClr val="ffffff"/>
+              </a:solidFill>
+              <a:latin typeface="Arial"/>
+            </a:endParaRPr>
+          </a:p>
+          <a:p>
+            <a:pPr>
+              <a:lnSpc>
+                <a:spcPct val="100000"/>
+              </a:lnSpc>
+            </a:pPr>
+            <a:r>
+              <a:rPr b="0" lang="en-US" sz="1800" spc="-1" strike="noStrike">
+                <a:solidFill>
+                  <a:schemeClr val="lt1"/>
+                </a:solidFill>
+                <a:latin typeface="Calibri"/>
+                <a:ea typeface="DejaVu Sans"/>
+              </a:rPr>
+              <a:t>│ </a:t>
+            </a:r>
+            <a:r>
+              <a:rPr b="0" lang="en-US" sz="1800" spc="-1" strike="noStrike">
+                <a:solidFill>
+                  <a:schemeClr val="lt1"/>
+                </a:solidFill>
+                <a:latin typeface="Calibri"/>
+                <a:ea typeface="DejaVu Sans"/>
+              </a:rPr>
+              <a:t>Step 1: Math! 10 + 5 = 15</a:t>
+            </a:r>
+            <a:endParaRPr b="0" lang="en-US" sz="1800" spc="-1" strike="noStrike">
+              <a:solidFill>
+                <a:srgbClr val="ffffff"/>
+              </a:solidFill>
+              <a:latin typeface="Arial"/>
+            </a:endParaRPr>
+          </a:p>
+          <a:p>
+            <a:pPr>
+              <a:lnSpc>
+                <a:spcPct val="100000"/>
+              </a:lnSpc>
+            </a:pPr>
+            <a:r>
+              <a:rPr b="0" lang="en-US" sz="1800" spc="-1" strike="noStrike">
+                <a:solidFill>
+                  <a:schemeClr val="lt1"/>
+                </a:solidFill>
+                <a:latin typeface="Calibri"/>
+                <a:ea typeface="DejaVu Sans"/>
+              </a:rPr>
+              <a:t>│ </a:t>
+            </a:r>
+            <a:r>
+              <a:rPr b="0" lang="en-US" sz="1800" spc="-1" strike="noStrike">
+                <a:solidFill>
+                  <a:schemeClr val="lt1"/>
+                </a:solidFill>
+                <a:latin typeface="Calibri"/>
+                <a:ea typeface="DejaVu Sans"/>
+              </a:rPr>
+              <a:t>Step 2: Text! 15 + "A" = "15A"</a:t>
+            </a:r>
+            <a:endParaRPr b="0" lang="en-US" sz="1800" spc="-1" strike="noStrike">
+              <a:solidFill>
+                <a:srgbClr val="ffffff"/>
+              </a:solidFill>
+              <a:latin typeface="Arial"/>
+            </a:endParaRPr>
+          </a:p>
+          <a:p>
+            <a:pPr>
+              <a:lnSpc>
+                <a:spcPct val="100000"/>
+              </a:lnSpc>
+            </a:pPr>
+            <a:r>
+              <a:rPr b="0" lang="en-US" sz="1800" spc="-1" strike="noStrike">
+                <a:solidFill>
+                  <a:schemeClr val="lt1"/>
+                </a:solidFill>
+                <a:latin typeface="Calibri"/>
+                <a:ea typeface="DejaVu Sans"/>
+              </a:rPr>
+              <a:t>│ </a:t>
+            </a:r>
+            <a:r>
+              <a:rPr b="0" lang="en-US" sz="1800" spc="-1" strike="noStrike">
+                <a:solidFill>
+                  <a:schemeClr val="lt1"/>
+                </a:solidFill>
+                <a:latin typeface="Calibri"/>
+                <a:ea typeface="DejaVu Sans"/>
+              </a:rPr>
+              <a:t>Result: "15A"</a:t>
+            </a:r>
+            <a:endParaRPr b="0" lang="en-US" sz="1800" spc="-1" strike="noStrike">
+              <a:solidFill>
+                <a:srgbClr val="ffffff"/>
+              </a:solidFill>
+              <a:latin typeface="Arial"/>
+            </a:endParaRPr>
+          </a:p>
+          <a:p>
+            <a:pPr>
+              <a:lnSpc>
+                <a:spcPct val="100000"/>
+              </a:lnSpc>
+            </a:pPr>
+            <a:r>
+              <a:rPr b="0" lang="en-US" sz="1800" spc="-1" strike="noStrike">
+                <a:solidFill>
+                  <a:schemeClr val="lt1"/>
+                </a:solidFill>
+                <a:latin typeface="Calibri"/>
+                <a:ea typeface="DejaVu Sans"/>
+              </a:rPr>
+              <a:t>│</a:t>
+            </a:r>
+            <a:endParaRPr b="0" lang="en-US" sz="1800" spc="-1" strike="noStrike">
+              <a:solidFill>
+                <a:srgbClr val="ffffff"/>
+              </a:solidFill>
+              <a:latin typeface="Arial"/>
+            </a:endParaRPr>
+          </a:p>
+          <a:p>
+            <a:pPr>
+              <a:lnSpc>
+                <a:spcPct val="100000"/>
+              </a:lnSpc>
+            </a:pPr>
+            <a:r>
+              <a:rPr b="0" lang="en-US" sz="1800" spc="-1" strike="noStrike">
+                <a:solidFill>
+                  <a:schemeClr val="lt1"/>
+                </a:solidFill>
+                <a:latin typeface="Calibri"/>
+                <a:ea typeface="DejaVu Sans"/>
+              </a:rPr>
+              <a:t>└──</a:t>
+            </a:r>
+            <a:r>
+              <a:rPr b="0" lang="en-US" sz="1800" spc="-1" strike="noStrike">
+                <a:solidFill>
+                  <a:schemeClr val="lt1"/>
+                </a:solidFill>
+                <a:latin typeface="Calibri"/>
+                <a:ea typeface="DejaVu Sans"/>
+              </a:rPr>
+              <a:t>&gt; Scenario 2: "A" + 10 + 5</a:t>
+            </a:r>
+            <a:endParaRPr b="0" lang="en-US" sz="1800" spc="-1" strike="noStrike">
+              <a:solidFill>
+                <a:srgbClr val="ffffff"/>
+              </a:solidFill>
+              <a:latin typeface="Arial"/>
+            </a:endParaRPr>
+          </a:p>
+          <a:p>
+            <a:pPr>
+              <a:lnSpc>
+                <a:spcPct val="100000"/>
+              </a:lnSpc>
+            </a:pPr>
+            <a:r>
+              <a:rPr b="0" lang="en-US" sz="1800" spc="-1" strike="noStrike">
+                <a:solidFill>
+                  <a:schemeClr val="lt1"/>
+                </a:solidFill>
+                <a:latin typeface="Calibri"/>
+                <a:ea typeface="DejaVu Sans"/>
+              </a:rPr>
+              <a:t>Step 1: Text! "A" + 10 = "A10"</a:t>
+            </a:r>
+            <a:endParaRPr b="0" lang="en-US" sz="1800" spc="-1" strike="noStrike">
+              <a:solidFill>
+                <a:srgbClr val="ffffff"/>
+              </a:solidFill>
+              <a:latin typeface="Arial"/>
+            </a:endParaRPr>
+          </a:p>
+          <a:p>
+            <a:pPr>
+              <a:lnSpc>
+                <a:spcPct val="100000"/>
+              </a:lnSpc>
+            </a:pPr>
+            <a:r>
+              <a:rPr b="0" lang="en-US" sz="1800" spc="-1" strike="noStrike">
+                <a:solidFill>
+                  <a:schemeClr val="lt1"/>
+                </a:solidFill>
+                <a:latin typeface="Calibri"/>
+                <a:ea typeface="DejaVu Sans"/>
+              </a:rPr>
+              <a:t>Step 2: Text! "A10" + 5 = "A105"</a:t>
+            </a:r>
+            <a:endParaRPr b="0" lang="en-US" sz="1800" spc="-1" strike="noStrike">
+              <a:solidFill>
+                <a:srgbClr val="ffffff"/>
+              </a:solidFill>
+              <a:latin typeface="Arial"/>
+            </a:endParaRPr>
+          </a:p>
+          <a:p>
+            <a:pPr>
+              <a:lnSpc>
+                <a:spcPct val="100000"/>
+              </a:lnSpc>
+            </a:pPr>
+            <a:r>
+              <a:rPr b="0" lang="en-US" sz="1800" spc="-1" strike="noStrike">
+                <a:solidFill>
+                  <a:schemeClr val="lt1"/>
+                </a:solidFill>
+                <a:latin typeface="Calibri"/>
+                <a:ea typeface="DejaVu Sans"/>
+              </a:rPr>
+              <a:t>Result: "A105" (Not A15!)</a:t>
+            </a:r>
+            <a:endParaRPr b="0" lang="en-US" sz="1800" spc="-1" strike="noStrike">
+              <a:solidFill>
+                <a:srgbClr val="ffffff"/>
+              </a:solidFill>
+              <a:latin typeface="Arial"/>
+            </a:endParaRPr>
+          </a:p>
+        </p:txBody>
+      </p:sp>
+      <p:sp>
+        <p:nvSpPr>
+          <p:cNvPr id="324" name="Rounded Rectangle 83"/>
+          <p:cNvSpPr/>
+          <p:nvPr/>
+        </p:nvSpPr>
+        <p:spPr>
+          <a:xfrm>
+            <a:off x="8028360" y="3182040"/>
+            <a:ext cx="3287160" cy="2738520"/>
+          </a:xfrm>
+          <a:prstGeom prst="roundRect">
+            <a:avLst>
+              <a:gd name="adj" fmla="val 16667"/>
+            </a:avLst>
+          </a:prstGeom>
+          <a:solidFill>
+            <a:srgbClr val="08080a"/>
+          </a:solidFill>
+          <a:ln>
+            <a:noFill/>
+          </a:ln>
+          <a:effectLst>
+            <a:outerShdw blurRad="39960" dir="5400000" dist="23040" rotWithShape="0">
+              <a:srgbClr val="000000">
+                <a:alpha val="35000"/>
+              </a:srgbClr>
+            </a:outerShdw>
+          </a:effectLst>
+        </p:spPr>
+        <p:style>
+          <a:lnRef idx="1">
+            <a:schemeClr val="accent1"/>
+          </a:lnRef>
+          <a:fillRef idx="3">
+            <a:schemeClr val="accent1"/>
+          </a:fillRef>
+          <a:effectRef idx="2">
+            <a:schemeClr val="accent1"/>
+          </a:effectRef>
+          <a:fontRef idx="minor"/>
+        </p:style>
+        <p:txBody>
+          <a:bodyPr lIns="90000" rIns="90000" tIns="45000" bIns="45000" anchor="ctr">
+            <a:noAutofit/>
+          </a:bodyPr>
+          <a:p>
+            <a:endParaRPr b="0" lang="en-US" sz="1800" spc="-1" strike="noStrike">
+              <a:solidFill>
+                <a:schemeClr val="lt1"/>
+              </a:solidFill>
+              <a:latin typeface="Calibri"/>
+              <a:ea typeface="DejaVu Sans"/>
+            </a:endParaRPr>
+          </a:p>
+        </p:txBody>
+      </p:sp>
+      <p:sp>
+        <p:nvSpPr>
+          <p:cNvPr id="325" name="Rounded Rectangle 84"/>
+          <p:cNvSpPr/>
+          <p:nvPr/>
+        </p:nvSpPr>
+        <p:spPr>
+          <a:xfrm>
+            <a:off x="8001000" y="2743200"/>
+            <a:ext cx="3428640" cy="3654720"/>
+          </a:xfrm>
+          <a:prstGeom prst="roundRect">
+            <a:avLst>
+              <a:gd name="adj" fmla="val 16667"/>
+            </a:avLst>
+          </a:prstGeom>
+          <a:solidFill>
+            <a:srgbClr val="16161c"/>
+          </a:solidFill>
+          <a:ln>
+            <a:solidFill>
+              <a:srgbClr val="464655"/>
+            </a:solidFill>
+            <a:round/>
+          </a:ln>
+          <a:effectLst>
+            <a:outerShdw blurRad="39960" dir="5400000" dist="23040" rotWithShape="0">
+              <a:srgbClr val="000000">
+                <a:alpha val="35000"/>
+              </a:srgbClr>
+            </a:outerShdw>
+          </a:effectLst>
+        </p:spPr>
+        <p:style>
+          <a:lnRef idx="1">
+            <a:schemeClr val="accent1"/>
+          </a:lnRef>
+          <a:fillRef idx="3">
+            <a:schemeClr val="accent1"/>
+          </a:fillRef>
+          <a:effectRef idx="2">
+            <a:schemeClr val="accent1"/>
+          </a:effectRef>
+          <a:fontRef idx="minor"/>
+        </p:style>
+        <p:txBody>
+          <a:bodyPr lIns="90000" rIns="90000" tIns="45000" bIns="45000" anchor="ctr">
+            <a:noAutofit/>
+          </a:bodyPr>
+          <a:p>
+            <a:pPr algn="ctr">
+              <a:lnSpc>
+                <a:spcPct val="100000"/>
+              </a:lnSpc>
+            </a:pPr>
+            <a:r>
+              <a:rPr b="0" lang="en-US" sz="900" spc="-1" strike="noStrike">
+                <a:solidFill>
+                  <a:srgbClr val="78ffc8"/>
+                </a:solidFill>
+                <a:latin typeface="Consolas"/>
+                <a:ea typeface="DejaVu Sans"/>
+              </a:rPr>
+              <a:t>public class ArithmeticTricks {</a:t>
+            </a:r>
+            <a:endParaRPr b="0" lang="en-US" sz="900" spc="-1" strike="noStrike">
+              <a:solidFill>
+                <a:srgbClr val="ffffff"/>
+              </a:solidFill>
+              <a:latin typeface="Arial"/>
+            </a:endParaRPr>
+          </a:p>
+          <a:p>
+            <a:pPr algn="ctr">
+              <a:lnSpc>
+                <a:spcPct val="100000"/>
+              </a:lnSpc>
+            </a:pPr>
+            <a:r>
+              <a:rPr b="0" lang="en-US" sz="900" spc="-1" strike="noStrike">
+                <a:solidFill>
+                  <a:srgbClr val="78ffc8"/>
+                </a:solidFill>
+                <a:latin typeface="Consolas"/>
+                <a:ea typeface="DejaVu Sans"/>
+              </a:rPr>
+              <a:t>    </a:t>
+            </a:r>
+            <a:r>
+              <a:rPr b="0" lang="en-US" sz="900" spc="-1" strike="noStrike">
+                <a:solidFill>
+                  <a:srgbClr val="78ffc8"/>
+                </a:solidFill>
+                <a:latin typeface="Consolas"/>
+                <a:ea typeface="DejaVu Sans"/>
+              </a:rPr>
+              <a:t>public static void main(String[] args) {</a:t>
+            </a:r>
+            <a:endParaRPr b="0" lang="en-US" sz="900" spc="-1" strike="noStrike">
+              <a:solidFill>
+                <a:srgbClr val="ffffff"/>
+              </a:solidFill>
+              <a:latin typeface="Arial"/>
+            </a:endParaRPr>
+          </a:p>
+          <a:p>
+            <a:pPr algn="ctr">
+              <a:lnSpc>
+                <a:spcPct val="100000"/>
+              </a:lnSpc>
+            </a:pPr>
+            <a:r>
+              <a:rPr b="0" lang="en-US" sz="900" spc="-1" strike="noStrike">
+                <a:solidFill>
+                  <a:srgbClr val="78ffc8"/>
+                </a:solidFill>
+                <a:latin typeface="Consolas"/>
+                <a:ea typeface="DejaVu Sans"/>
+              </a:rPr>
+              <a:t>        </a:t>
+            </a:r>
+            <a:r>
+              <a:rPr b="0" lang="en-US" sz="900" spc="-1" strike="noStrike">
+                <a:solidFill>
+                  <a:srgbClr val="78ffc8"/>
+                </a:solidFill>
+                <a:latin typeface="Consolas"/>
+                <a:ea typeface="DejaVu Sans"/>
+              </a:rPr>
+              <a:t>// 1. COMPOUND ASSIGNMENT</a:t>
+            </a:r>
+            <a:endParaRPr b="0" lang="en-US" sz="900" spc="-1" strike="noStrike">
+              <a:solidFill>
+                <a:srgbClr val="ffffff"/>
+              </a:solidFill>
+              <a:latin typeface="Arial"/>
+            </a:endParaRPr>
+          </a:p>
+          <a:p>
+            <a:pPr algn="ctr">
+              <a:lnSpc>
+                <a:spcPct val="100000"/>
+              </a:lnSpc>
+            </a:pPr>
+            <a:r>
+              <a:rPr b="0" lang="en-US" sz="900" spc="-1" strike="noStrike">
+                <a:solidFill>
+                  <a:srgbClr val="78ffc8"/>
+                </a:solidFill>
+                <a:latin typeface="Consolas"/>
+                <a:ea typeface="DejaVu Sans"/>
+              </a:rPr>
+              <a:t>        </a:t>
+            </a:r>
+            <a:r>
+              <a:rPr b="0" lang="en-US" sz="900" spc="-1" strike="noStrike">
+                <a:solidFill>
+                  <a:srgbClr val="78ffc8"/>
+                </a:solidFill>
+                <a:latin typeface="Consolas"/>
+                <a:ea typeface="DejaVu Sans"/>
+              </a:rPr>
+              <a:t>int score = 50;</a:t>
+            </a:r>
+            <a:endParaRPr b="0" lang="en-US" sz="900" spc="-1" strike="noStrike">
+              <a:solidFill>
+                <a:srgbClr val="ffffff"/>
+              </a:solidFill>
+              <a:latin typeface="Arial"/>
+            </a:endParaRPr>
+          </a:p>
+          <a:p>
+            <a:pPr algn="ctr">
+              <a:lnSpc>
+                <a:spcPct val="100000"/>
+              </a:lnSpc>
+            </a:pPr>
+            <a:r>
+              <a:rPr b="0" lang="en-US" sz="900" spc="-1" strike="noStrike">
+                <a:solidFill>
+                  <a:srgbClr val="78ffc8"/>
+                </a:solidFill>
+                <a:latin typeface="Consolas"/>
+                <a:ea typeface="DejaVu Sans"/>
+              </a:rPr>
+              <a:t>        </a:t>
+            </a:r>
+            <a:r>
+              <a:rPr b="0" lang="en-US" sz="900" spc="-1" strike="noStrike">
+                <a:solidFill>
+                  <a:srgbClr val="78ffc8"/>
+                </a:solidFill>
+                <a:latin typeface="Consolas"/>
+                <a:ea typeface="DejaVu Sans"/>
+              </a:rPr>
+              <a:t>score += 10; // score = score + 10 (60)</a:t>
+            </a:r>
+            <a:endParaRPr b="0" lang="en-US" sz="900" spc="-1" strike="noStrike">
+              <a:solidFill>
+                <a:srgbClr val="ffffff"/>
+              </a:solidFill>
+              <a:latin typeface="Arial"/>
+            </a:endParaRPr>
+          </a:p>
+          <a:p>
+            <a:pPr algn="ctr">
+              <a:lnSpc>
+                <a:spcPct val="100000"/>
+              </a:lnSpc>
+            </a:pPr>
+            <a:r>
+              <a:rPr b="0" lang="en-US" sz="900" spc="-1" strike="noStrike">
+                <a:solidFill>
+                  <a:srgbClr val="78ffc8"/>
+                </a:solidFill>
+                <a:latin typeface="Consolas"/>
+                <a:ea typeface="DejaVu Sans"/>
+              </a:rPr>
+              <a:t>        </a:t>
+            </a:r>
+            <a:r>
+              <a:rPr b="0" lang="en-US" sz="900" spc="-1" strike="noStrike">
+                <a:solidFill>
+                  <a:srgbClr val="78ffc8"/>
+                </a:solidFill>
+                <a:latin typeface="Consolas"/>
+                <a:ea typeface="DejaVu Sans"/>
+              </a:rPr>
+              <a:t>score /= 2;  // score = score / 2  (30)</a:t>
+            </a:r>
+            <a:endParaRPr b="0" lang="en-US" sz="900" spc="-1" strike="noStrike">
+              <a:solidFill>
+                <a:srgbClr val="ffffff"/>
+              </a:solidFill>
+              <a:latin typeface="Arial"/>
+            </a:endParaRPr>
+          </a:p>
+          <a:p>
+            <a:pPr algn="ctr">
+              <a:lnSpc>
+                <a:spcPct val="100000"/>
+              </a:lnSpc>
+            </a:pPr>
+            <a:r>
+              <a:rPr b="0" lang="en-US" sz="900" spc="-1" strike="noStrike">
+                <a:solidFill>
+                  <a:srgbClr val="78ffc8"/>
+                </a:solidFill>
+                <a:latin typeface="Consolas"/>
+                <a:ea typeface="DejaVu Sans"/>
+              </a:rPr>
+              <a:t>        </a:t>
+            </a:r>
+            <a:r>
+              <a:rPr b="0" lang="en-US" sz="900" spc="-1" strike="noStrike">
+                <a:solidFill>
+                  <a:srgbClr val="78ffc8"/>
+                </a:solidFill>
+                <a:latin typeface="Consolas"/>
+                <a:ea typeface="DejaVu Sans"/>
+              </a:rPr>
+              <a:t>// 2. CONCATENATION TRAPS</a:t>
+            </a:r>
+            <a:endParaRPr b="0" lang="en-US" sz="900" spc="-1" strike="noStrike">
+              <a:solidFill>
+                <a:srgbClr val="ffffff"/>
+              </a:solidFill>
+              <a:latin typeface="Arial"/>
+            </a:endParaRPr>
+          </a:p>
+          <a:p>
+            <a:pPr algn="ctr">
+              <a:lnSpc>
+                <a:spcPct val="100000"/>
+              </a:lnSpc>
+            </a:pPr>
+            <a:r>
+              <a:rPr b="0" lang="en-US" sz="900" spc="-1" strike="noStrike">
+                <a:solidFill>
+                  <a:srgbClr val="78ffc8"/>
+                </a:solidFill>
+                <a:latin typeface="Consolas"/>
+                <a:ea typeface="DejaVu Sans"/>
+              </a:rPr>
+              <a:t>        </a:t>
+            </a:r>
+            <a:r>
+              <a:rPr b="0" lang="en-US" sz="900" spc="-1" strike="noStrike">
+                <a:solidFill>
+                  <a:srgbClr val="78ffc8"/>
+                </a:solidFill>
+                <a:latin typeface="Consolas"/>
+                <a:ea typeface="DejaVu Sans"/>
+              </a:rPr>
+              <a:t>int x = 5;</a:t>
+            </a:r>
+            <a:endParaRPr b="0" lang="en-US" sz="900" spc="-1" strike="noStrike">
+              <a:solidFill>
+                <a:srgbClr val="ffffff"/>
+              </a:solidFill>
+              <a:latin typeface="Arial"/>
+            </a:endParaRPr>
+          </a:p>
+          <a:p>
+            <a:pPr algn="ctr">
+              <a:lnSpc>
+                <a:spcPct val="100000"/>
+              </a:lnSpc>
+            </a:pPr>
+            <a:r>
+              <a:rPr b="0" lang="en-US" sz="900" spc="-1" strike="noStrike">
+                <a:solidFill>
+                  <a:srgbClr val="78ffc8"/>
+                </a:solidFill>
+                <a:latin typeface="Consolas"/>
+                <a:ea typeface="DejaVu Sans"/>
+              </a:rPr>
+              <a:t>        </a:t>
+            </a:r>
+            <a:r>
+              <a:rPr b="0" lang="en-US" sz="900" spc="-1" strike="noStrike">
+                <a:solidFill>
+                  <a:srgbClr val="78ffc8"/>
+                </a:solidFill>
+                <a:latin typeface="Consolas"/>
+                <a:ea typeface="DejaVu Sans"/>
+              </a:rPr>
+              <a:t>int y = 5;</a:t>
+            </a:r>
+            <a:endParaRPr b="0" lang="en-US" sz="900" spc="-1" strike="noStrike">
+              <a:solidFill>
+                <a:srgbClr val="ffffff"/>
+              </a:solidFill>
+              <a:latin typeface="Arial"/>
+            </a:endParaRPr>
+          </a:p>
+          <a:p>
+            <a:pPr algn="ctr">
+              <a:lnSpc>
+                <a:spcPct val="100000"/>
+              </a:lnSpc>
+            </a:pPr>
+            <a:r>
+              <a:rPr b="0" lang="en-US" sz="900" spc="-1" strike="noStrike">
+                <a:solidFill>
+                  <a:srgbClr val="78ffc8"/>
+                </a:solidFill>
+                <a:latin typeface="Consolas"/>
+                <a:ea typeface="DejaVu Sans"/>
+              </a:rPr>
+              <a:t>        </a:t>
+            </a:r>
+            <a:r>
+              <a:rPr b="0" lang="en-US" sz="900" spc="-1" strike="noStrike">
+                <a:solidFill>
+                  <a:srgbClr val="78ffc8"/>
+                </a:solidFill>
+                <a:latin typeface="Consolas"/>
+                <a:ea typeface="DejaVu Sans"/>
+              </a:rPr>
+              <a:t>// Starts with numbers -&gt; Math first</a:t>
+            </a:r>
+            <a:endParaRPr b="0" lang="en-US" sz="900" spc="-1" strike="noStrike">
+              <a:solidFill>
+                <a:srgbClr val="ffffff"/>
+              </a:solidFill>
+              <a:latin typeface="Arial"/>
+            </a:endParaRPr>
+          </a:p>
+          <a:p>
+            <a:pPr algn="ctr">
+              <a:lnSpc>
+                <a:spcPct val="100000"/>
+              </a:lnSpc>
+            </a:pPr>
+            <a:r>
+              <a:rPr b="0" lang="en-US" sz="900" spc="-1" strike="noStrike">
+                <a:solidFill>
+                  <a:srgbClr val="78ffc8"/>
+                </a:solidFill>
+                <a:latin typeface="Consolas"/>
+                <a:ea typeface="DejaVu Sans"/>
+              </a:rPr>
+              <a:t>        </a:t>
+            </a:r>
+            <a:r>
+              <a:rPr b="0" lang="en-US" sz="900" spc="-1" strike="noStrike">
+                <a:solidFill>
+                  <a:srgbClr val="78ffc8"/>
+                </a:solidFill>
+                <a:latin typeface="Consolas"/>
+                <a:ea typeface="DejaVu Sans"/>
+              </a:rPr>
+              <a:t>String str1 = x + y + " Java"; // "10 Java"</a:t>
+            </a:r>
+            <a:endParaRPr b="0" lang="en-US" sz="900" spc="-1" strike="noStrike">
+              <a:solidFill>
+                <a:srgbClr val="ffffff"/>
+              </a:solidFill>
+              <a:latin typeface="Arial"/>
+            </a:endParaRPr>
+          </a:p>
+          <a:p>
+            <a:pPr algn="ctr">
+              <a:lnSpc>
+                <a:spcPct val="100000"/>
+              </a:lnSpc>
+            </a:pPr>
+            <a:r>
+              <a:rPr b="0" lang="en-US" sz="900" spc="-1" strike="noStrike">
+                <a:solidFill>
+                  <a:srgbClr val="78ffc8"/>
+                </a:solidFill>
+                <a:latin typeface="Consolas"/>
+                <a:ea typeface="DejaVu Sans"/>
+              </a:rPr>
+              <a:t>        </a:t>
+            </a:r>
+            <a:r>
+              <a:rPr b="0" lang="en-US" sz="900" spc="-1" strike="noStrike">
+                <a:solidFill>
+                  <a:srgbClr val="78ffc8"/>
+                </a:solidFill>
+                <a:latin typeface="Consolas"/>
+                <a:ea typeface="DejaVu Sans"/>
+              </a:rPr>
+              <a:t>// Starts with String -&gt; All Text!</a:t>
+            </a:r>
+            <a:endParaRPr b="0" lang="en-US" sz="900" spc="-1" strike="noStrike">
+              <a:solidFill>
+                <a:srgbClr val="ffffff"/>
+              </a:solidFill>
+              <a:latin typeface="Arial"/>
+            </a:endParaRPr>
+          </a:p>
+          <a:p>
+            <a:pPr algn="ctr">
+              <a:lnSpc>
+                <a:spcPct val="100000"/>
+              </a:lnSpc>
+            </a:pPr>
+            <a:r>
+              <a:rPr b="0" lang="en-US" sz="900" spc="-1" strike="noStrike">
+                <a:solidFill>
+                  <a:srgbClr val="78ffc8"/>
+                </a:solidFill>
+                <a:latin typeface="Consolas"/>
+                <a:ea typeface="DejaVu Sans"/>
+              </a:rPr>
+              <a:t>        </a:t>
+            </a:r>
+            <a:r>
+              <a:rPr b="0" lang="en-US" sz="900" spc="-1" strike="noStrike">
+                <a:solidFill>
+                  <a:srgbClr val="78ffc8"/>
+                </a:solidFill>
+                <a:latin typeface="Consolas"/>
+                <a:ea typeface="DejaVu Sans"/>
+              </a:rPr>
+              <a:t>String str2 = "Java " + x + y; // "Java 55"</a:t>
+            </a:r>
+            <a:endParaRPr b="0" lang="en-US" sz="900" spc="-1" strike="noStrike">
+              <a:solidFill>
+                <a:srgbClr val="ffffff"/>
+              </a:solidFill>
+              <a:latin typeface="Arial"/>
+            </a:endParaRPr>
+          </a:p>
+          <a:p>
+            <a:pPr algn="ctr">
+              <a:lnSpc>
+                <a:spcPct val="100000"/>
+              </a:lnSpc>
+            </a:pPr>
+            <a:r>
+              <a:rPr b="0" lang="en-US" sz="900" spc="-1" strike="noStrike">
+                <a:solidFill>
+                  <a:srgbClr val="78ffc8"/>
+                </a:solidFill>
+                <a:latin typeface="Consolas"/>
+                <a:ea typeface="DejaVu Sans"/>
+              </a:rPr>
+              <a:t>        </a:t>
+            </a:r>
+            <a:endParaRPr b="0" lang="en-US" sz="900" spc="-1" strike="noStrike">
+              <a:solidFill>
+                <a:srgbClr val="ffffff"/>
+              </a:solidFill>
+              <a:latin typeface="Arial"/>
+            </a:endParaRPr>
+          </a:p>
+          <a:p>
+            <a:pPr algn="ctr">
+              <a:lnSpc>
+                <a:spcPct val="100000"/>
+              </a:lnSpc>
+            </a:pPr>
+            <a:r>
+              <a:rPr b="0" lang="en-US" sz="900" spc="-1" strike="noStrike">
+                <a:solidFill>
+                  <a:srgbClr val="78ffc8"/>
+                </a:solidFill>
+                <a:latin typeface="Consolas"/>
+                <a:ea typeface="DejaVu Sans"/>
+              </a:rPr>
+              <a:t>        </a:t>
+            </a:r>
+            <a:r>
+              <a:rPr b="0" lang="en-US" sz="900" spc="-1" strike="noStrike">
+                <a:solidFill>
+                  <a:srgbClr val="78ffc8"/>
+                </a:solidFill>
+                <a:latin typeface="Consolas"/>
+                <a:ea typeface="DejaVu Sans"/>
+              </a:rPr>
+              <a:t>// Brackets force math first</a:t>
+            </a:r>
+            <a:endParaRPr b="0" lang="en-US" sz="900" spc="-1" strike="noStrike">
+              <a:solidFill>
+                <a:srgbClr val="ffffff"/>
+              </a:solidFill>
+              <a:latin typeface="Arial"/>
+            </a:endParaRPr>
+          </a:p>
+          <a:p>
+            <a:pPr algn="ctr">
+              <a:lnSpc>
+                <a:spcPct val="100000"/>
+              </a:lnSpc>
+            </a:pPr>
+            <a:r>
+              <a:rPr b="0" lang="en-US" sz="900" spc="-1" strike="noStrike">
+                <a:solidFill>
+                  <a:srgbClr val="78ffc8"/>
+                </a:solidFill>
+                <a:latin typeface="Consolas"/>
+                <a:ea typeface="DejaVu Sans"/>
+              </a:rPr>
+              <a:t>        </a:t>
+            </a:r>
+            <a:r>
+              <a:rPr b="0" lang="en-US" sz="900" spc="-1" strike="noStrike">
+                <a:solidFill>
+                  <a:srgbClr val="78ffc8"/>
+                </a:solidFill>
+                <a:latin typeface="Consolas"/>
+                <a:ea typeface="DejaVu Sans"/>
+              </a:rPr>
+              <a:t>String str3 = "Java " + (x+y); // "Java 10"</a:t>
+            </a:r>
+            <a:endParaRPr b="0" lang="en-US" sz="900" spc="-1" strike="noStrike">
+              <a:solidFill>
+                <a:srgbClr val="ffffff"/>
+              </a:solidFill>
+              <a:latin typeface="Arial"/>
+            </a:endParaRPr>
+          </a:p>
+          <a:p>
+            <a:pPr algn="ctr">
+              <a:lnSpc>
+                <a:spcPct val="100000"/>
+              </a:lnSpc>
+            </a:pPr>
+            <a:r>
+              <a:rPr b="0" lang="en-US" sz="900" spc="-1" strike="noStrike">
+                <a:solidFill>
+                  <a:srgbClr val="78ffc8"/>
+                </a:solidFill>
+                <a:latin typeface="Consolas"/>
+                <a:ea typeface="DejaVu Sans"/>
+              </a:rPr>
+              <a:t>        </a:t>
+            </a:r>
+            <a:r>
+              <a:rPr b="0" lang="en-US" sz="900" spc="-1" strike="noStrike">
+                <a:solidFill>
+                  <a:srgbClr val="78ffc8"/>
+                </a:solidFill>
+                <a:latin typeface="Consolas"/>
+                <a:ea typeface="DejaVu Sans"/>
+              </a:rPr>
+              <a:t>System.out.println("Final Score: " + score);</a:t>
+            </a:r>
+            <a:endParaRPr b="0" lang="en-US" sz="900" spc="-1" strike="noStrike">
+              <a:solidFill>
+                <a:srgbClr val="ffffff"/>
+              </a:solidFill>
+              <a:latin typeface="Arial"/>
+            </a:endParaRPr>
+          </a:p>
+          <a:p>
+            <a:pPr algn="ctr">
+              <a:lnSpc>
+                <a:spcPct val="100000"/>
+              </a:lnSpc>
+            </a:pPr>
+            <a:r>
+              <a:rPr b="0" lang="en-US" sz="900" spc="-1" strike="noStrike">
+                <a:solidFill>
+                  <a:srgbClr val="78ffc8"/>
+                </a:solidFill>
+                <a:latin typeface="Consolas"/>
+                <a:ea typeface="DejaVu Sans"/>
+              </a:rPr>
+              <a:t>        </a:t>
+            </a:r>
+            <a:r>
+              <a:rPr b="0" lang="en-US" sz="900" spc="-1" strike="noStrike">
+                <a:solidFill>
+                  <a:srgbClr val="78ffc8"/>
+                </a:solidFill>
+                <a:latin typeface="Consolas"/>
+                <a:ea typeface="DejaVu Sans"/>
+              </a:rPr>
+              <a:t>System.out.println("Str2: " + str2);</a:t>
+            </a:r>
+            <a:endParaRPr b="0" lang="en-US" sz="900" spc="-1" strike="noStrike">
+              <a:solidFill>
+                <a:srgbClr val="ffffff"/>
+              </a:solidFill>
+              <a:latin typeface="Arial"/>
+            </a:endParaRPr>
+          </a:p>
+          <a:p>
+            <a:pPr algn="ctr">
+              <a:lnSpc>
+                <a:spcPct val="100000"/>
+              </a:lnSpc>
+            </a:pPr>
+            <a:r>
+              <a:rPr b="0" lang="en-US" sz="900" spc="-1" strike="noStrike">
+                <a:solidFill>
+                  <a:srgbClr val="78ffc8"/>
+                </a:solidFill>
+                <a:latin typeface="Consolas"/>
+                <a:ea typeface="DejaVu Sans"/>
+              </a:rPr>
+              <a:t>    </a:t>
+            </a:r>
+            <a:r>
+              <a:rPr b="0" lang="en-US" sz="900" spc="-1" strike="noStrike">
+                <a:solidFill>
+                  <a:srgbClr val="78ffc8"/>
+                </a:solidFill>
+                <a:latin typeface="Consolas"/>
+                <a:ea typeface="DejaVu Sans"/>
+              </a:rPr>
+              <a:t>}</a:t>
+            </a:r>
+            <a:endParaRPr b="0" lang="en-US" sz="900" spc="-1" strike="noStrike">
+              <a:solidFill>
+                <a:srgbClr val="ffffff"/>
+              </a:solidFill>
+              <a:latin typeface="Arial"/>
+            </a:endParaRPr>
+          </a:p>
+          <a:p>
+            <a:pPr algn="ctr">
+              <a:lnSpc>
+                <a:spcPct val="100000"/>
+              </a:lnSpc>
+            </a:pPr>
+            <a:r>
+              <a:rPr b="0" lang="en-US" sz="900" spc="-1" strike="noStrike">
+                <a:solidFill>
+                  <a:srgbClr val="78ffc8"/>
+                </a:solidFill>
+                <a:latin typeface="Consolas"/>
+                <a:ea typeface="DejaVu Sans"/>
+              </a:rPr>
+              <a:t>}</a:t>
+            </a:r>
+            <a:endParaRPr b="0" lang="en-US" sz="900" spc="-1" strike="noStrike">
+              <a:solidFill>
+                <a:srgbClr val="ffffff"/>
+              </a:solidFill>
+              <a:latin typeface="Arial"/>
+            </a:endParaRPr>
+          </a:p>
+        </p:txBody>
+      </p:sp>
+      <p:sp>
+        <p:nvSpPr>
+          <p:cNvPr id="326" name="TextBox 36"/>
           <p:cNvSpPr/>
           <p:nvPr/>
         </p:nvSpPr>
@@ -7903,7 +10697,7 @@
         <p:spPr>
           <a:xfrm>
             <a:off x="0" y="0"/>
-            <a:ext cx="12184920" cy="6854040"/>
+            <a:ext cx="12184560" cy="6853680"/>
           </a:xfrm>
           <a:prstGeom prst="rect">
             <a:avLst/>
@@ -7963,7 +10757,7 @@
         <p:spPr>
           <a:xfrm>
             <a:off x="0" y="0"/>
-            <a:ext cx="14400" cy="6854040"/>
+            <a:ext cx="14040" cy="6853680"/>
           </a:xfrm>
           <a:prstGeom prst="rect">
             <a:avLst/>
@@ -8023,7 +10817,7 @@
         <p:spPr>
           <a:xfrm>
             <a:off x="914400" y="0"/>
-            <a:ext cx="14400" cy="6854040"/>
+            <a:ext cx="14040" cy="6853680"/>
           </a:xfrm>
           <a:prstGeom prst="rect">
             <a:avLst/>
@@ -8083,7 +10877,7 @@
         <p:spPr>
           <a:xfrm>
             <a:off x="1828800" y="0"/>
-            <a:ext cx="14400" cy="6854040"/>
+            <a:ext cx="14040" cy="6853680"/>
           </a:xfrm>
           <a:prstGeom prst="rect">
             <a:avLst/>
@@ -8143,7 +10937,7 @@
         <p:spPr>
           <a:xfrm>
             <a:off x="2743200" y="0"/>
-            <a:ext cx="14400" cy="6854040"/>
+            <a:ext cx="14040" cy="6853680"/>
           </a:xfrm>
           <a:prstGeom prst="rect">
             <a:avLst/>
@@ -8203,7 +10997,7 @@
         <p:spPr>
           <a:xfrm>
             <a:off x="3657600" y="0"/>
-            <a:ext cx="14400" cy="6854040"/>
+            <a:ext cx="14040" cy="6853680"/>
           </a:xfrm>
           <a:prstGeom prst="rect">
             <a:avLst/>
@@ -8263,7 +11057,7 @@
         <p:spPr>
           <a:xfrm>
             <a:off x="4572000" y="0"/>
-            <a:ext cx="14400" cy="6854040"/>
+            <a:ext cx="14040" cy="6853680"/>
           </a:xfrm>
           <a:prstGeom prst="rect">
             <a:avLst/>
@@ -8323,7 +11117,7 @@
         <p:spPr>
           <a:xfrm>
             <a:off x="5486400" y="0"/>
-            <a:ext cx="14400" cy="6854040"/>
+            <a:ext cx="14040" cy="6853680"/>
           </a:xfrm>
           <a:prstGeom prst="rect">
             <a:avLst/>
@@ -8383,7 +11177,7 @@
         <p:spPr>
           <a:xfrm>
             <a:off x="6400800" y="0"/>
-            <a:ext cx="14400" cy="6854040"/>
+            <a:ext cx="14040" cy="6853680"/>
           </a:xfrm>
           <a:prstGeom prst="rect">
             <a:avLst/>
@@ -8443,7 +11237,7 @@
         <p:spPr>
           <a:xfrm>
             <a:off x="7315200" y="0"/>
-            <a:ext cx="14400" cy="6854040"/>
+            <a:ext cx="14040" cy="6853680"/>
           </a:xfrm>
           <a:prstGeom prst="rect">
             <a:avLst/>
@@ -8503,7 +11297,7 @@
         <p:spPr>
           <a:xfrm>
             <a:off x="8229600" y="0"/>
-            <a:ext cx="14400" cy="6854040"/>
+            <a:ext cx="14040" cy="6853680"/>
           </a:xfrm>
           <a:prstGeom prst="rect">
             <a:avLst/>
@@ -8563,7 +11357,7 @@
         <p:spPr>
           <a:xfrm>
             <a:off x="9144000" y="0"/>
-            <a:ext cx="14400" cy="6854040"/>
+            <a:ext cx="14040" cy="6853680"/>
           </a:xfrm>
           <a:prstGeom prst="rect">
             <a:avLst/>
@@ -8623,7 +11417,7 @@
         <p:spPr>
           <a:xfrm>
             <a:off x="10058400" y="0"/>
-            <a:ext cx="14400" cy="6854040"/>
+            <a:ext cx="14040" cy="6853680"/>
           </a:xfrm>
           <a:prstGeom prst="rect">
             <a:avLst/>
@@ -8683,7 +11477,7 @@
         <p:spPr>
           <a:xfrm>
             <a:off x="10972800" y="0"/>
-            <a:ext cx="14400" cy="6854040"/>
+            <a:ext cx="14040" cy="6853680"/>
           </a:xfrm>
           <a:prstGeom prst="rect">
             <a:avLst/>
@@ -8743,7 +11537,7 @@
         <p:spPr>
           <a:xfrm>
             <a:off x="11887200" y="0"/>
-            <a:ext cx="14400" cy="6854040"/>
+            <a:ext cx="14040" cy="6853680"/>
           </a:xfrm>
           <a:prstGeom prst="rect">
             <a:avLst/>
@@ -8803,7 +11597,7 @@
         <p:spPr>
           <a:xfrm>
             <a:off x="0" y="0"/>
-            <a:ext cx="316080" cy="6854040"/>
+            <a:ext cx="315720" cy="6853680"/>
           </a:xfrm>
           <a:prstGeom prst="rect">
             <a:avLst/>
@@ -8863,7 +11657,7 @@
         <p:spPr>
           <a:xfrm>
             <a:off x="9875520" y="365760"/>
-            <a:ext cx="2007720" cy="498960"/>
+            <a:ext cx="2007360" cy="498600"/>
           </a:xfrm>
           <a:prstGeom prst="roundRect">
             <a:avLst>
@@ -9091,7 +11885,7 @@
         <p:spPr>
           <a:xfrm>
             <a:off x="987480" y="3182040"/>
-            <a:ext cx="3287880" cy="2739240"/>
+            <a:ext cx="3287520" cy="2738880"/>
           </a:xfrm>
           <a:prstGeom prst="roundRect">
             <a:avLst>
@@ -9153,7 +11947,7 @@
         <p:spPr>
           <a:xfrm>
             <a:off x="914400" y="3108960"/>
-            <a:ext cx="3287880" cy="3060360"/>
+            <a:ext cx="3287520" cy="3060000"/>
           </a:xfrm>
           <a:prstGeom prst="roundRect">
             <a:avLst>
@@ -9316,7 +12110,7 @@
         <p:spPr>
           <a:xfrm>
             <a:off x="4507920" y="3182040"/>
-            <a:ext cx="3287880" cy="2739240"/>
+            <a:ext cx="3287520" cy="2738880"/>
           </a:xfrm>
           <a:prstGeom prst="roundRect">
             <a:avLst>
@@ -9378,7 +12172,7 @@
         <p:spPr>
           <a:xfrm>
             <a:off x="4434840" y="2971800"/>
-            <a:ext cx="3287880" cy="3426120"/>
+            <a:ext cx="3287520" cy="3425760"/>
           </a:xfrm>
           <a:prstGeom prst="roundRect">
             <a:avLst>
@@ -9636,7 +12430,7 @@
         <p:spPr>
           <a:xfrm>
             <a:off x="8028360" y="3182040"/>
-            <a:ext cx="3287880" cy="2739240"/>
+            <a:ext cx="3287520" cy="2738880"/>
           </a:xfrm>
           <a:prstGeom prst="roundRect">
             <a:avLst>
@@ -9698,7 +12492,7 @@
         <p:spPr>
           <a:xfrm>
             <a:off x="7955280" y="3108960"/>
-            <a:ext cx="3700440" cy="3060360"/>
+            <a:ext cx="3700080" cy="3060000"/>
           </a:xfrm>
           <a:prstGeom prst="roundRect">
             <a:avLst>
@@ -10143,7 +12937,7 @@
         <p:spPr>
           <a:xfrm>
             <a:off x="0" y="0"/>
-            <a:ext cx="12184920" cy="6854040"/>
+            <a:ext cx="12184560" cy="6853680"/>
           </a:xfrm>
           <a:prstGeom prst="rect">
             <a:avLst/>
@@ -10203,7 +12997,7 @@
         <p:spPr>
           <a:xfrm>
             <a:off x="0" y="0"/>
-            <a:ext cx="14400" cy="6854040"/>
+            <a:ext cx="14040" cy="6853680"/>
           </a:xfrm>
           <a:prstGeom prst="rect">
             <a:avLst/>
@@ -10263,7 +13057,7 @@
         <p:spPr>
           <a:xfrm>
             <a:off x="914400" y="0"/>
-            <a:ext cx="14400" cy="6854040"/>
+            <a:ext cx="14040" cy="6853680"/>
           </a:xfrm>
           <a:prstGeom prst="rect">
             <a:avLst/>
@@ -10323,7 +13117,7 @@
         <p:spPr>
           <a:xfrm>
             <a:off x="1828800" y="0"/>
-            <a:ext cx="14400" cy="6854040"/>
+            <a:ext cx="14040" cy="6853680"/>
           </a:xfrm>
           <a:prstGeom prst="rect">
             <a:avLst/>
@@ -10383,7 +13177,7 @@
         <p:spPr>
           <a:xfrm>
             <a:off x="2743200" y="0"/>
-            <a:ext cx="14400" cy="6854040"/>
+            <a:ext cx="14040" cy="6853680"/>
           </a:xfrm>
           <a:prstGeom prst="rect">
             <a:avLst/>
@@ -10443,7 +13237,7 @@
         <p:spPr>
           <a:xfrm>
             <a:off x="3657600" y="0"/>
-            <a:ext cx="14400" cy="6854040"/>
+            <a:ext cx="14040" cy="6853680"/>
           </a:xfrm>
           <a:prstGeom prst="rect">
             <a:avLst/>
@@ -10503,7 +13297,7 @@
         <p:spPr>
           <a:xfrm>
             <a:off x="4572000" y="0"/>
-            <a:ext cx="14400" cy="6854040"/>
+            <a:ext cx="14040" cy="6853680"/>
           </a:xfrm>
           <a:prstGeom prst="rect">
             <a:avLst/>
@@ -10563,7 +13357,7 @@
         <p:spPr>
           <a:xfrm>
             <a:off x="5486400" y="0"/>
-            <a:ext cx="14400" cy="6854040"/>
+            <a:ext cx="14040" cy="6853680"/>
           </a:xfrm>
           <a:prstGeom prst="rect">
             <a:avLst/>
@@ -10623,7 +13417,7 @@
         <p:spPr>
           <a:xfrm>
             <a:off x="6400800" y="0"/>
-            <a:ext cx="14400" cy="6854040"/>
+            <a:ext cx="14040" cy="6853680"/>
           </a:xfrm>
           <a:prstGeom prst="rect">
             <a:avLst/>
@@ -10683,7 +13477,7 @@
         <p:spPr>
           <a:xfrm>
             <a:off x="7315200" y="0"/>
-            <a:ext cx="14400" cy="6854040"/>
+            <a:ext cx="14040" cy="6853680"/>
           </a:xfrm>
           <a:prstGeom prst="rect">
             <a:avLst/>
@@ -10743,7 +13537,7 @@
         <p:spPr>
           <a:xfrm>
             <a:off x="8229600" y="0"/>
-            <a:ext cx="14400" cy="6854040"/>
+            <a:ext cx="14040" cy="6853680"/>
           </a:xfrm>
           <a:prstGeom prst="rect">
             <a:avLst/>
@@ -10803,7 +13597,7 @@
         <p:spPr>
           <a:xfrm>
             <a:off x="9144000" y="0"/>
-            <a:ext cx="14400" cy="6854040"/>
+            <a:ext cx="14040" cy="6853680"/>
           </a:xfrm>
           <a:prstGeom prst="rect">
             <a:avLst/>
@@ -10863,7 +13657,7 @@
         <p:spPr>
           <a:xfrm>
             <a:off x="10058400" y="0"/>
-            <a:ext cx="14400" cy="6854040"/>
+            <a:ext cx="14040" cy="6853680"/>
           </a:xfrm>
           <a:prstGeom prst="rect">
             <a:avLst/>
@@ -10923,7 +13717,7 @@
         <p:spPr>
           <a:xfrm>
             <a:off x="10972800" y="0"/>
-            <a:ext cx="14400" cy="6854040"/>
+            <a:ext cx="14040" cy="6853680"/>
           </a:xfrm>
           <a:prstGeom prst="rect">
             <a:avLst/>
@@ -10983,7 +13777,7 @@
         <p:spPr>
           <a:xfrm>
             <a:off x="11887200" y="0"/>
-            <a:ext cx="14400" cy="6854040"/>
+            <a:ext cx="14040" cy="6853680"/>
           </a:xfrm>
           <a:prstGeom prst="rect">
             <a:avLst/>
@@ -11043,7 +13837,7 @@
         <p:spPr>
           <a:xfrm>
             <a:off x="0" y="0"/>
-            <a:ext cx="316080" cy="6854040"/>
+            <a:ext cx="315720" cy="6853680"/>
           </a:xfrm>
           <a:prstGeom prst="rect">
             <a:avLst/>
@@ -11103,7 +13897,7 @@
         <p:spPr>
           <a:xfrm>
             <a:off x="9875520" y="365760"/>
-            <a:ext cx="2007720" cy="498960"/>
+            <a:ext cx="2007360" cy="498600"/>
           </a:xfrm>
           <a:prstGeom prst="roundRect">
             <a:avLst>
@@ -11331,7 +14125,7 @@
         <p:spPr>
           <a:xfrm>
             <a:off x="987480" y="3182040"/>
-            <a:ext cx="3287880" cy="2739240"/>
+            <a:ext cx="3287520" cy="2738880"/>
           </a:xfrm>
           <a:prstGeom prst="roundRect">
             <a:avLst>
@@ -11393,7 +14187,7 @@
         <p:spPr>
           <a:xfrm>
             <a:off x="685800" y="2971800"/>
-            <a:ext cx="3516480" cy="3197520"/>
+            <a:ext cx="3516120" cy="3197160"/>
           </a:xfrm>
           <a:prstGeom prst="roundRect">
             <a:avLst>
@@ -11584,7 +14378,7 @@
         <p:spPr>
           <a:xfrm>
             <a:off x="4507920" y="3182040"/>
-            <a:ext cx="3287880" cy="2739240"/>
+            <a:ext cx="3287520" cy="2738880"/>
           </a:xfrm>
           <a:prstGeom prst="roundRect">
             <a:avLst>
@@ -11646,7 +14440,7 @@
         <p:spPr>
           <a:xfrm>
             <a:off x="4434840" y="2971800"/>
-            <a:ext cx="3287880" cy="3426120"/>
+            <a:ext cx="3287520" cy="3425760"/>
           </a:xfrm>
           <a:prstGeom prst="roundRect">
             <a:avLst>
@@ -11904,7 +14698,7 @@
         <p:spPr>
           <a:xfrm>
             <a:off x="8028360" y="3182040"/>
-            <a:ext cx="3287880" cy="2739240"/>
+            <a:ext cx="3287520" cy="2738880"/>
           </a:xfrm>
           <a:prstGeom prst="roundRect">
             <a:avLst>
@@ -11966,7 +14760,7 @@
         <p:spPr>
           <a:xfrm>
             <a:off x="7955280" y="3108960"/>
-            <a:ext cx="3700440" cy="3060360"/>
+            <a:ext cx="3700080" cy="3060000"/>
           </a:xfrm>
           <a:prstGeom prst="roundRect">
             <a:avLst>
@@ -12411,7 +15205,7 @@
         <p:spPr>
           <a:xfrm>
             <a:off x="0" y="0"/>
-            <a:ext cx="12184920" cy="6854040"/>
+            <a:ext cx="12184560" cy="6853680"/>
           </a:xfrm>
           <a:prstGeom prst="rect">
             <a:avLst/>
@@ -12471,7 +15265,7 @@
         <p:spPr>
           <a:xfrm>
             <a:off x="0" y="0"/>
-            <a:ext cx="14400" cy="6854040"/>
+            <a:ext cx="14040" cy="6853680"/>
           </a:xfrm>
           <a:prstGeom prst="rect">
             <a:avLst/>
@@ -12531,7 +15325,7 @@
         <p:spPr>
           <a:xfrm>
             <a:off x="914400" y="0"/>
-            <a:ext cx="14400" cy="6854040"/>
+            <a:ext cx="14040" cy="6853680"/>
           </a:xfrm>
           <a:prstGeom prst="rect">
             <a:avLst/>
@@ -12591,7 +15385,7 @@
         <p:spPr>
           <a:xfrm>
             <a:off x="1828800" y="0"/>
-            <a:ext cx="14400" cy="6854040"/>
+            <a:ext cx="14040" cy="6853680"/>
           </a:xfrm>
           <a:prstGeom prst="rect">
             <a:avLst/>
@@ -12651,7 +15445,7 @@
         <p:spPr>
           <a:xfrm>
             <a:off x="2743200" y="0"/>
-            <a:ext cx="14400" cy="6854040"/>
+            <a:ext cx="14040" cy="6853680"/>
           </a:xfrm>
           <a:prstGeom prst="rect">
             <a:avLst/>
@@ -12711,7 +15505,7 @@
         <p:spPr>
           <a:xfrm>
             <a:off x="3657600" y="0"/>
-            <a:ext cx="14400" cy="6854040"/>
+            <a:ext cx="14040" cy="6853680"/>
           </a:xfrm>
           <a:prstGeom prst="rect">
             <a:avLst/>
@@ -12771,7 +15565,7 @@
         <p:spPr>
           <a:xfrm>
             <a:off x="4572000" y="0"/>
-            <a:ext cx="14400" cy="6854040"/>
+            <a:ext cx="14040" cy="6853680"/>
           </a:xfrm>
           <a:prstGeom prst="rect">
             <a:avLst/>
@@ -12831,7 +15625,7 @@
         <p:spPr>
           <a:xfrm>
             <a:off x="5486400" y="0"/>
-            <a:ext cx="14400" cy="6854040"/>
+            <a:ext cx="14040" cy="6853680"/>
           </a:xfrm>
           <a:prstGeom prst="rect">
             <a:avLst/>
@@ -12891,7 +15685,7 @@
         <p:spPr>
           <a:xfrm>
             <a:off x="6400800" y="0"/>
-            <a:ext cx="14400" cy="6854040"/>
+            <a:ext cx="14040" cy="6853680"/>
           </a:xfrm>
           <a:prstGeom prst="rect">
             <a:avLst/>
@@ -12951,7 +15745,7 @@
         <p:spPr>
           <a:xfrm>
             <a:off x="7315200" y="0"/>
-            <a:ext cx="14400" cy="6854040"/>
+            <a:ext cx="14040" cy="6853680"/>
           </a:xfrm>
           <a:prstGeom prst="rect">
             <a:avLst/>
@@ -13011,7 +15805,7 @@
         <p:spPr>
           <a:xfrm>
             <a:off x="8229600" y="0"/>
-            <a:ext cx="14400" cy="6854040"/>
+            <a:ext cx="14040" cy="6853680"/>
           </a:xfrm>
           <a:prstGeom prst="rect">
             <a:avLst/>
@@ -13071,7 +15865,7 @@
         <p:spPr>
           <a:xfrm>
             <a:off x="9144000" y="0"/>
-            <a:ext cx="14400" cy="6854040"/>
+            <a:ext cx="14040" cy="6853680"/>
           </a:xfrm>
           <a:prstGeom prst="rect">
             <a:avLst/>
@@ -13131,7 +15925,7 @@
         <p:spPr>
           <a:xfrm>
             <a:off x="10058400" y="0"/>
-            <a:ext cx="14400" cy="6854040"/>
+            <a:ext cx="14040" cy="6853680"/>
           </a:xfrm>
           <a:prstGeom prst="rect">
             <a:avLst/>
@@ -13191,7 +15985,7 @@
         <p:spPr>
           <a:xfrm>
             <a:off x="10972800" y="0"/>
-            <a:ext cx="14400" cy="6854040"/>
+            <a:ext cx="14040" cy="6853680"/>
           </a:xfrm>
           <a:prstGeom prst="rect">
             <a:avLst/>
@@ -13251,7 +16045,7 @@
         <p:spPr>
           <a:xfrm>
             <a:off x="11887200" y="0"/>
-            <a:ext cx="14400" cy="6854040"/>
+            <a:ext cx="14040" cy="6853680"/>
           </a:xfrm>
           <a:prstGeom prst="rect">
             <a:avLst/>
@@ -13311,7 +16105,7 @@
         <p:spPr>
           <a:xfrm>
             <a:off x="0" y="0"/>
-            <a:ext cx="316080" cy="6854040"/>
+            <a:ext cx="315720" cy="6853680"/>
           </a:xfrm>
           <a:prstGeom prst="rect">
             <a:avLst/>
@@ -13371,7 +16165,7 @@
         <p:spPr>
           <a:xfrm>
             <a:off x="9875520" y="365760"/>
-            <a:ext cx="2007720" cy="498960"/>
+            <a:ext cx="2007360" cy="498600"/>
           </a:xfrm>
           <a:prstGeom prst="roundRect">
             <a:avLst>
@@ -13576,7 +16370,7 @@
         <p:spPr>
           <a:xfrm>
             <a:off x="987480" y="3182040"/>
-            <a:ext cx="3287880" cy="2739240"/>
+            <a:ext cx="3287520" cy="2738880"/>
           </a:xfrm>
           <a:prstGeom prst="roundRect">
             <a:avLst>
@@ -13638,7 +16432,7 @@
         <p:spPr>
           <a:xfrm>
             <a:off x="685800" y="2971800"/>
-            <a:ext cx="3516480" cy="3197520"/>
+            <a:ext cx="3516120" cy="3197160"/>
           </a:xfrm>
           <a:prstGeom prst="roundRect">
             <a:avLst>
@@ -13829,7 +16623,7 @@
         <p:spPr>
           <a:xfrm>
             <a:off x="4507920" y="3182040"/>
-            <a:ext cx="3287880" cy="2739240"/>
+            <a:ext cx="3287520" cy="2738880"/>
           </a:xfrm>
           <a:prstGeom prst="roundRect">
             <a:avLst>
@@ -13891,7 +16685,7 @@
         <p:spPr>
           <a:xfrm>
             <a:off x="4434840" y="2971800"/>
-            <a:ext cx="3287880" cy="3426120"/>
+            <a:ext cx="3287520" cy="3425760"/>
           </a:xfrm>
           <a:prstGeom prst="roundRect">
             <a:avLst>
@@ -14103,7 +16897,7 @@
         <p:spPr>
           <a:xfrm>
             <a:off x="8028360" y="3182040"/>
-            <a:ext cx="3287880" cy="2739240"/>
+            <a:ext cx="3287520" cy="2738880"/>
           </a:xfrm>
           <a:prstGeom prst="roundRect">
             <a:avLst>
@@ -14165,7 +16959,7 @@
         <p:spPr>
           <a:xfrm>
             <a:off x="7955280" y="2743200"/>
-            <a:ext cx="3929760" cy="3884040"/>
+            <a:ext cx="3929400" cy="3883680"/>
           </a:xfrm>
           <a:prstGeom prst="roundRect">
             <a:avLst>
@@ -14725,7 +17519,7 @@
         <p:spPr>
           <a:xfrm>
             <a:off x="0" y="0"/>
-            <a:ext cx="12184920" cy="6854040"/>
+            <a:ext cx="12184560" cy="6853680"/>
           </a:xfrm>
           <a:prstGeom prst="rect">
             <a:avLst/>
@@ -14785,7 +17579,7 @@
         <p:spPr>
           <a:xfrm>
             <a:off x="0" y="0"/>
-            <a:ext cx="14400" cy="6854040"/>
+            <a:ext cx="14040" cy="6853680"/>
           </a:xfrm>
           <a:prstGeom prst="rect">
             <a:avLst/>
@@ -14845,7 +17639,7 @@
         <p:spPr>
           <a:xfrm>
             <a:off x="914400" y="0"/>
-            <a:ext cx="14400" cy="6854040"/>
+            <a:ext cx="14040" cy="6853680"/>
           </a:xfrm>
           <a:prstGeom prst="rect">
             <a:avLst/>
@@ -14905,7 +17699,7 @@
         <p:spPr>
           <a:xfrm>
             <a:off x="1828800" y="0"/>
-            <a:ext cx="14400" cy="6854040"/>
+            <a:ext cx="14040" cy="6853680"/>
           </a:xfrm>
           <a:prstGeom prst="rect">
             <a:avLst/>
@@ -14965,7 +17759,7 @@
         <p:spPr>
           <a:xfrm>
             <a:off x="2743200" y="0"/>
-            <a:ext cx="14400" cy="6854040"/>
+            <a:ext cx="14040" cy="6853680"/>
           </a:xfrm>
           <a:prstGeom prst="rect">
             <a:avLst/>
@@ -15025,7 +17819,7 @@
         <p:spPr>
           <a:xfrm>
             <a:off x="3657600" y="0"/>
-            <a:ext cx="14400" cy="6854040"/>
+            <a:ext cx="14040" cy="6853680"/>
           </a:xfrm>
           <a:prstGeom prst="rect">
             <a:avLst/>
@@ -15085,7 +17879,7 @@
         <p:spPr>
           <a:xfrm>
             <a:off x="4572000" y="0"/>
-            <a:ext cx="14400" cy="6854040"/>
+            <a:ext cx="14040" cy="6853680"/>
           </a:xfrm>
           <a:prstGeom prst="rect">
             <a:avLst/>
@@ -15145,7 +17939,7 @@
         <p:spPr>
           <a:xfrm>
             <a:off x="5486400" y="0"/>
-            <a:ext cx="14400" cy="6854040"/>
+            <a:ext cx="14040" cy="6853680"/>
           </a:xfrm>
           <a:prstGeom prst="rect">
             <a:avLst/>
@@ -15205,7 +17999,7 @@
         <p:spPr>
           <a:xfrm>
             <a:off x="6400800" y="0"/>
-            <a:ext cx="14400" cy="6854040"/>
+            <a:ext cx="14040" cy="6853680"/>
           </a:xfrm>
           <a:prstGeom prst="rect">
             <a:avLst/>
@@ -15265,7 +18059,7 @@
         <p:spPr>
           <a:xfrm>
             <a:off x="7315200" y="0"/>
-            <a:ext cx="14400" cy="6854040"/>
+            <a:ext cx="14040" cy="6853680"/>
           </a:xfrm>
           <a:prstGeom prst="rect">
             <a:avLst/>
@@ -15325,7 +18119,7 @@
         <p:spPr>
           <a:xfrm>
             <a:off x="8229600" y="0"/>
-            <a:ext cx="14400" cy="6854040"/>
+            <a:ext cx="14040" cy="6853680"/>
           </a:xfrm>
           <a:prstGeom prst="rect">
             <a:avLst/>
@@ -15385,7 +18179,7 @@
         <p:spPr>
           <a:xfrm>
             <a:off x="9144000" y="0"/>
-            <a:ext cx="14400" cy="6854040"/>
+            <a:ext cx="14040" cy="6853680"/>
           </a:xfrm>
           <a:prstGeom prst="rect">
             <a:avLst/>
@@ -15445,7 +18239,7 @@
         <p:spPr>
           <a:xfrm>
             <a:off x="10058400" y="0"/>
-            <a:ext cx="14400" cy="6854040"/>
+            <a:ext cx="14040" cy="6853680"/>
           </a:xfrm>
           <a:prstGeom prst="rect">
             <a:avLst/>
@@ -15505,7 +18299,7 @@
         <p:spPr>
           <a:xfrm>
             <a:off x="10972800" y="0"/>
-            <a:ext cx="14400" cy="6854040"/>
+            <a:ext cx="14040" cy="6853680"/>
           </a:xfrm>
           <a:prstGeom prst="rect">
             <a:avLst/>
@@ -15565,7 +18359,7 @@
         <p:spPr>
           <a:xfrm>
             <a:off x="11887200" y="0"/>
-            <a:ext cx="14400" cy="6854040"/>
+            <a:ext cx="14040" cy="6853680"/>
           </a:xfrm>
           <a:prstGeom prst="rect">
             <a:avLst/>
@@ -15625,7 +18419,7 @@
         <p:spPr>
           <a:xfrm>
             <a:off x="0" y="0"/>
-            <a:ext cx="316080" cy="6854040"/>
+            <a:ext cx="315720" cy="6853680"/>
           </a:xfrm>
           <a:prstGeom prst="rect">
             <a:avLst/>
@@ -15685,7 +18479,7 @@
         <p:spPr>
           <a:xfrm>
             <a:off x="9875520" y="365760"/>
-            <a:ext cx="2007720" cy="498960"/>
+            <a:ext cx="2007360" cy="498600"/>
           </a:xfrm>
           <a:prstGeom prst="roundRect">
             <a:avLst>
@@ -15890,7 +18684,7 @@
         <p:spPr>
           <a:xfrm>
             <a:off x="987480" y="3182040"/>
-            <a:ext cx="3287880" cy="2739240"/>
+            <a:ext cx="3287520" cy="2738880"/>
           </a:xfrm>
           <a:prstGeom prst="roundRect">
             <a:avLst>
@@ -15952,7 +18746,7 @@
         <p:spPr>
           <a:xfrm>
             <a:off x="457200" y="2743200"/>
-            <a:ext cx="3745080" cy="3884400"/>
+            <a:ext cx="3744720" cy="3884040"/>
           </a:xfrm>
           <a:prstGeom prst="roundRect">
             <a:avLst>
@@ -16190,7 +18984,7 @@
         <p:spPr>
           <a:xfrm>
             <a:off x="4507920" y="3182040"/>
-            <a:ext cx="3287880" cy="2739240"/>
+            <a:ext cx="3287520" cy="2738880"/>
           </a:xfrm>
           <a:prstGeom prst="roundRect">
             <a:avLst>
@@ -16252,7 +19046,7 @@
         <p:spPr>
           <a:xfrm>
             <a:off x="4434840" y="2971800"/>
-            <a:ext cx="3287880" cy="3426120"/>
+            <a:ext cx="3287520" cy="3425760"/>
           </a:xfrm>
           <a:prstGeom prst="roundRect">
             <a:avLst>
@@ -16471,7 +19265,7 @@
         <p:spPr>
           <a:xfrm>
             <a:off x="8028360" y="3182040"/>
-            <a:ext cx="3287880" cy="2739240"/>
+            <a:ext cx="3287520" cy="2738880"/>
           </a:xfrm>
           <a:prstGeom prst="roundRect">
             <a:avLst>
@@ -16533,7 +19327,7 @@
         <p:spPr>
           <a:xfrm>
             <a:off x="8001000" y="3200400"/>
-            <a:ext cx="3472920" cy="2741400"/>
+            <a:ext cx="3472560" cy="2741040"/>
           </a:xfrm>
           <a:prstGeom prst="roundRect">
             <a:avLst>
@@ -16945,7 +19739,7 @@
         <p:spPr>
           <a:xfrm>
             <a:off x="0" y="0"/>
-            <a:ext cx="12184560" cy="6853680"/>
+            <a:ext cx="12184200" cy="6853320"/>
           </a:xfrm>
           <a:prstGeom prst="rect">
             <a:avLst/>
@@ -17005,7 +19799,7 @@
         <p:spPr>
           <a:xfrm>
             <a:off x="0" y="0"/>
-            <a:ext cx="14040" cy="6853680"/>
+            <a:ext cx="13680" cy="6853320"/>
           </a:xfrm>
           <a:prstGeom prst="rect">
             <a:avLst/>
@@ -17065,7 +19859,7 @@
         <p:spPr>
           <a:xfrm>
             <a:off x="914400" y="0"/>
-            <a:ext cx="14040" cy="6853680"/>
+            <a:ext cx="13680" cy="6853320"/>
           </a:xfrm>
           <a:prstGeom prst="rect">
             <a:avLst/>
@@ -17125,7 +19919,7 @@
         <p:spPr>
           <a:xfrm>
             <a:off x="1828800" y="0"/>
-            <a:ext cx="14040" cy="6853680"/>
+            <a:ext cx="13680" cy="6853320"/>
           </a:xfrm>
           <a:prstGeom prst="rect">
             <a:avLst/>
@@ -17185,7 +19979,7 @@
         <p:spPr>
           <a:xfrm>
             <a:off x="2743200" y="0"/>
-            <a:ext cx="14040" cy="6853680"/>
+            <a:ext cx="13680" cy="6853320"/>
           </a:xfrm>
           <a:prstGeom prst="rect">
             <a:avLst/>
@@ -17245,7 +20039,7 @@
         <p:spPr>
           <a:xfrm>
             <a:off x="3657600" y="0"/>
-            <a:ext cx="14040" cy="6853680"/>
+            <a:ext cx="13680" cy="6853320"/>
           </a:xfrm>
           <a:prstGeom prst="rect">
             <a:avLst/>
@@ -17305,7 +20099,7 @@
         <p:spPr>
           <a:xfrm>
             <a:off x="4572000" y="0"/>
-            <a:ext cx="14040" cy="6853680"/>
+            <a:ext cx="13680" cy="6853320"/>
           </a:xfrm>
           <a:prstGeom prst="rect">
             <a:avLst/>
@@ -17365,7 +20159,7 @@
         <p:spPr>
           <a:xfrm>
             <a:off x="5486400" y="0"/>
-            <a:ext cx="14040" cy="6853680"/>
+            <a:ext cx="13680" cy="6853320"/>
           </a:xfrm>
           <a:prstGeom prst="rect">
             <a:avLst/>
@@ -17425,7 +20219,7 @@
         <p:spPr>
           <a:xfrm>
             <a:off x="6400800" y="0"/>
-            <a:ext cx="14040" cy="6853680"/>
+            <a:ext cx="13680" cy="6853320"/>
           </a:xfrm>
           <a:prstGeom prst="rect">
             <a:avLst/>
@@ -17485,7 +20279,7 @@
         <p:spPr>
           <a:xfrm>
             <a:off x="7315200" y="0"/>
-            <a:ext cx="14040" cy="6853680"/>
+            <a:ext cx="13680" cy="6853320"/>
           </a:xfrm>
           <a:prstGeom prst="rect">
             <a:avLst/>
@@ -17545,7 +20339,7 @@
         <p:spPr>
           <a:xfrm>
             <a:off x="8229600" y="0"/>
-            <a:ext cx="14040" cy="6853680"/>
+            <a:ext cx="13680" cy="6853320"/>
           </a:xfrm>
           <a:prstGeom prst="rect">
             <a:avLst/>
@@ -17605,7 +20399,7 @@
         <p:spPr>
           <a:xfrm>
             <a:off x="9144000" y="0"/>
-            <a:ext cx="14040" cy="6853680"/>
+            <a:ext cx="13680" cy="6853320"/>
           </a:xfrm>
           <a:prstGeom prst="rect">
             <a:avLst/>
@@ -17665,7 +20459,7 @@
         <p:spPr>
           <a:xfrm>
             <a:off x="10058400" y="0"/>
-            <a:ext cx="14040" cy="6853680"/>
+            <a:ext cx="13680" cy="6853320"/>
           </a:xfrm>
           <a:prstGeom prst="rect">
             <a:avLst/>
@@ -17725,7 +20519,7 @@
         <p:spPr>
           <a:xfrm>
             <a:off x="10972800" y="0"/>
-            <a:ext cx="14040" cy="6853680"/>
+            <a:ext cx="13680" cy="6853320"/>
           </a:xfrm>
           <a:prstGeom prst="rect">
             <a:avLst/>
@@ -17785,7 +20579,7 @@
         <p:spPr>
           <a:xfrm>
             <a:off x="11887200" y="0"/>
-            <a:ext cx="14040" cy="6853680"/>
+            <a:ext cx="13680" cy="6853320"/>
           </a:xfrm>
           <a:prstGeom prst="rect">
             <a:avLst/>
@@ -17845,7 +20639,7 @@
         <p:spPr>
           <a:xfrm>
             <a:off x="0" y="0"/>
-            <a:ext cx="315720" cy="6853680"/>
+            <a:ext cx="315360" cy="6853320"/>
           </a:xfrm>
           <a:prstGeom prst="rect">
             <a:avLst/>
@@ -17905,7 +20699,7 @@
         <p:spPr>
           <a:xfrm>
             <a:off x="9875520" y="365760"/>
-            <a:ext cx="2007360" cy="498600"/>
+            <a:ext cx="2007000" cy="498240"/>
           </a:xfrm>
           <a:prstGeom prst="roundRect">
             <a:avLst>
@@ -18110,7 +20904,7 @@
         <p:spPr>
           <a:xfrm>
             <a:off x="987480" y="3182040"/>
-            <a:ext cx="3287520" cy="2738880"/>
+            <a:ext cx="3287160" cy="2738520"/>
           </a:xfrm>
           <a:prstGeom prst="roundRect">
             <a:avLst>
@@ -18172,7 +20966,7 @@
         <p:spPr>
           <a:xfrm>
             <a:off x="457200" y="2514600"/>
-            <a:ext cx="3744720" cy="4112640"/>
+            <a:ext cx="3744360" cy="4112280"/>
           </a:xfrm>
           <a:prstGeom prst="roundRect">
             <a:avLst>
@@ -18425,7 +21219,7 @@
         <p:spPr>
           <a:xfrm>
             <a:off x="4507920" y="3182040"/>
-            <a:ext cx="3287520" cy="2738880"/>
+            <a:ext cx="3287160" cy="2738520"/>
           </a:xfrm>
           <a:prstGeom prst="roundRect">
             <a:avLst>
@@ -18487,7 +21281,7 @@
         <p:spPr>
           <a:xfrm>
             <a:off x="4434840" y="2514600"/>
-            <a:ext cx="3287520" cy="3882960"/>
+            <a:ext cx="3287160" cy="3882600"/>
           </a:xfrm>
           <a:prstGeom prst="roundRect">
             <a:avLst>
@@ -18703,7 +21497,7 @@
         <p:spPr>
           <a:xfrm>
             <a:off x="8028360" y="3182040"/>
-            <a:ext cx="3287520" cy="2738880"/>
+            <a:ext cx="3287160" cy="2738520"/>
           </a:xfrm>
           <a:prstGeom prst="roundRect">
             <a:avLst>
@@ -18765,7 +21559,7 @@
         <p:spPr>
           <a:xfrm>
             <a:off x="8001000" y="2286000"/>
-            <a:ext cx="3656160" cy="4113360"/>
+            <a:ext cx="3655800" cy="4113000"/>
           </a:xfrm>
           <a:prstGeom prst="roundRect">
             <a:avLst>
@@ -19441,7 +22235,7 @@
         <p:spPr>
           <a:xfrm>
             <a:off x="0" y="0"/>
-            <a:ext cx="12184920" cy="6854040"/>
+            <a:ext cx="12184560" cy="6853680"/>
           </a:xfrm>
           <a:prstGeom prst="rect">
             <a:avLst/>
@@ -19501,7 +22295,7 @@
         <p:spPr>
           <a:xfrm>
             <a:off x="0" y="0"/>
-            <a:ext cx="14400" cy="6854040"/>
+            <a:ext cx="14040" cy="6853680"/>
           </a:xfrm>
           <a:prstGeom prst="rect">
             <a:avLst/>
@@ -19561,7 +22355,7 @@
         <p:spPr>
           <a:xfrm>
             <a:off x="914400" y="0"/>
-            <a:ext cx="14400" cy="6854040"/>
+            <a:ext cx="14040" cy="6853680"/>
           </a:xfrm>
           <a:prstGeom prst="rect">
             <a:avLst/>
@@ -19621,7 +22415,7 @@
         <p:spPr>
           <a:xfrm>
             <a:off x="1828800" y="0"/>
-            <a:ext cx="14400" cy="6854040"/>
+            <a:ext cx="14040" cy="6853680"/>
           </a:xfrm>
           <a:prstGeom prst="rect">
             <a:avLst/>
@@ -19681,7 +22475,7 @@
         <p:spPr>
           <a:xfrm>
             <a:off x="2743200" y="0"/>
-            <a:ext cx="14400" cy="6854040"/>
+            <a:ext cx="14040" cy="6853680"/>
           </a:xfrm>
           <a:prstGeom prst="rect">
             <a:avLst/>
@@ -19741,7 +22535,7 @@
         <p:spPr>
           <a:xfrm>
             <a:off x="3657600" y="0"/>
-            <a:ext cx="14400" cy="6854040"/>
+            <a:ext cx="14040" cy="6853680"/>
           </a:xfrm>
           <a:prstGeom prst="rect">
             <a:avLst/>
@@ -19801,7 +22595,7 @@
         <p:spPr>
           <a:xfrm>
             <a:off x="4572000" y="0"/>
-            <a:ext cx="14400" cy="6854040"/>
+            <a:ext cx="14040" cy="6853680"/>
           </a:xfrm>
           <a:prstGeom prst="rect">
             <a:avLst/>
@@ -19861,7 +22655,7 @@
         <p:spPr>
           <a:xfrm>
             <a:off x="5486400" y="0"/>
-            <a:ext cx="14400" cy="6854040"/>
+            <a:ext cx="14040" cy="6853680"/>
           </a:xfrm>
           <a:prstGeom prst="rect">
             <a:avLst/>
@@ -19921,7 +22715,7 @@
         <p:spPr>
           <a:xfrm>
             <a:off x="6400800" y="0"/>
-            <a:ext cx="14400" cy="6854040"/>
+            <a:ext cx="14040" cy="6853680"/>
           </a:xfrm>
           <a:prstGeom prst="rect">
             <a:avLst/>
@@ -19981,7 +22775,7 @@
         <p:spPr>
           <a:xfrm>
             <a:off x="7315200" y="0"/>
-            <a:ext cx="14400" cy="6854040"/>
+            <a:ext cx="14040" cy="6853680"/>
           </a:xfrm>
           <a:prstGeom prst="rect">
             <a:avLst/>
@@ -20041,7 +22835,7 @@
         <p:spPr>
           <a:xfrm>
             <a:off x="8229600" y="0"/>
-            <a:ext cx="14400" cy="6854040"/>
+            <a:ext cx="14040" cy="6853680"/>
           </a:xfrm>
           <a:prstGeom prst="rect">
             <a:avLst/>
@@ -20101,7 +22895,7 @@
         <p:spPr>
           <a:xfrm>
             <a:off x="9144000" y="0"/>
-            <a:ext cx="14400" cy="6854040"/>
+            <a:ext cx="14040" cy="6853680"/>
           </a:xfrm>
           <a:prstGeom prst="rect">
             <a:avLst/>
@@ -20161,7 +22955,7 @@
         <p:spPr>
           <a:xfrm>
             <a:off x="10058400" y="0"/>
-            <a:ext cx="14400" cy="6854040"/>
+            <a:ext cx="14040" cy="6853680"/>
           </a:xfrm>
           <a:prstGeom prst="rect">
             <a:avLst/>
@@ -20221,7 +23015,7 @@
         <p:spPr>
           <a:xfrm>
             <a:off x="10972800" y="0"/>
-            <a:ext cx="14400" cy="6854040"/>
+            <a:ext cx="14040" cy="6853680"/>
           </a:xfrm>
           <a:prstGeom prst="rect">
             <a:avLst/>
@@ -20281,7 +23075,7 @@
         <p:spPr>
           <a:xfrm>
             <a:off x="11887200" y="0"/>
-            <a:ext cx="14400" cy="6854040"/>
+            <a:ext cx="14040" cy="6853680"/>
           </a:xfrm>
           <a:prstGeom prst="rect">
             <a:avLst/>
@@ -20341,7 +23135,7 @@
         <p:spPr>
           <a:xfrm>
             <a:off x="0" y="0"/>
-            <a:ext cx="316080" cy="6854040"/>
+            <a:ext cx="315720" cy="6853680"/>
           </a:xfrm>
           <a:prstGeom prst="rect">
             <a:avLst/>
@@ -20401,7 +23195,7 @@
         <p:spPr>
           <a:xfrm>
             <a:off x="9875520" y="365760"/>
-            <a:ext cx="2007720" cy="498960"/>
+            <a:ext cx="2007360" cy="498600"/>
           </a:xfrm>
           <a:prstGeom prst="roundRect">
             <a:avLst>
@@ -20475,7 +23269,7 @@
         <p:spPr>
           <a:xfrm>
             <a:off x="1466280" y="914400"/>
-            <a:ext cx="8036280" cy="516240"/>
+            <a:ext cx="8035920" cy="516240"/>
           </a:xfrm>
           <a:prstGeom prst="rect">
             <a:avLst/>
@@ -20529,7 +23323,7 @@
         <p:spPr>
           <a:xfrm>
             <a:off x="1767600" y="1694880"/>
-            <a:ext cx="7950960" cy="819720"/>
+            <a:ext cx="7950600" cy="819720"/>
           </a:xfrm>
           <a:prstGeom prst="rect">
             <a:avLst/>
@@ -20639,7 +23433,7 @@
         <p:spPr>
           <a:xfrm>
             <a:off x="987480" y="3182040"/>
-            <a:ext cx="3287880" cy="2739240"/>
+            <a:ext cx="3287520" cy="2738880"/>
           </a:xfrm>
           <a:prstGeom prst="roundRect">
             <a:avLst>
@@ -20701,7 +23495,7 @@
         <p:spPr>
           <a:xfrm>
             <a:off x="457200" y="2743200"/>
-            <a:ext cx="3885120" cy="3884400"/>
+            <a:ext cx="3884760" cy="3884040"/>
           </a:xfrm>
           <a:prstGeom prst="roundRect">
             <a:avLst>
@@ -21015,7 +23809,7 @@
         <p:spPr>
           <a:xfrm>
             <a:off x="4507920" y="3182040"/>
-            <a:ext cx="3287880" cy="2739240"/>
+            <a:ext cx="3287520" cy="2738880"/>
           </a:xfrm>
           <a:prstGeom prst="roundRect">
             <a:avLst>
@@ -21077,7 +23871,7 @@
         <p:spPr>
           <a:xfrm>
             <a:off x="4572000" y="2743200"/>
-            <a:ext cx="3427920" cy="3656520"/>
+            <a:ext cx="3427560" cy="3656160"/>
           </a:xfrm>
           <a:prstGeom prst="roundRect">
             <a:avLst>
@@ -21652,7 +24446,7 @@
         <p:spPr>
           <a:xfrm>
             <a:off x="8028360" y="3182040"/>
-            <a:ext cx="3287880" cy="2739240"/>
+            <a:ext cx="3287520" cy="2738880"/>
           </a:xfrm>
           <a:prstGeom prst="roundRect">
             <a:avLst>
@@ -21714,7 +24508,7 @@
         <p:spPr>
           <a:xfrm>
             <a:off x="8229600" y="2514600"/>
-            <a:ext cx="3656520" cy="4113720"/>
+            <a:ext cx="3656160" cy="4113360"/>
           </a:xfrm>
           <a:prstGeom prst="roundRect">
             <a:avLst>
@@ -22706,7 +25500,7 @@
         <p:spPr>
           <a:xfrm>
             <a:off x="0" y="0"/>
-            <a:ext cx="12184560" cy="6853680"/>
+            <a:ext cx="12184200" cy="6853320"/>
           </a:xfrm>
           <a:prstGeom prst="rect">
             <a:avLst/>
@@ -22766,7 +25560,7 @@
         <p:spPr>
           <a:xfrm>
             <a:off x="0" y="0"/>
-            <a:ext cx="14040" cy="6853680"/>
+            <a:ext cx="13680" cy="6853320"/>
           </a:xfrm>
           <a:prstGeom prst="rect">
             <a:avLst/>
@@ -22826,7 +25620,7 @@
         <p:spPr>
           <a:xfrm>
             <a:off x="914400" y="0"/>
-            <a:ext cx="14040" cy="6853680"/>
+            <a:ext cx="13680" cy="6853320"/>
           </a:xfrm>
           <a:prstGeom prst="rect">
             <a:avLst/>
@@ -22886,7 +25680,7 @@
         <p:spPr>
           <a:xfrm>
             <a:off x="1828800" y="0"/>
-            <a:ext cx="14040" cy="6853680"/>
+            <a:ext cx="13680" cy="6853320"/>
           </a:xfrm>
           <a:prstGeom prst="rect">
             <a:avLst/>
@@ -22946,7 +25740,7 @@
         <p:spPr>
           <a:xfrm>
             <a:off x="2743200" y="0"/>
-            <a:ext cx="14040" cy="6853680"/>
+            <a:ext cx="13680" cy="6853320"/>
           </a:xfrm>
           <a:prstGeom prst="rect">
             <a:avLst/>
@@ -23006,7 +25800,7 @@
         <p:spPr>
           <a:xfrm>
             <a:off x="3657600" y="0"/>
-            <a:ext cx="14040" cy="6853680"/>
+            <a:ext cx="13680" cy="6853320"/>
           </a:xfrm>
           <a:prstGeom prst="rect">
             <a:avLst/>
@@ -23066,7 +25860,7 @@
         <p:spPr>
           <a:xfrm>
             <a:off x="4572000" y="0"/>
-            <a:ext cx="14040" cy="6853680"/>
+            <a:ext cx="13680" cy="6853320"/>
           </a:xfrm>
           <a:prstGeom prst="rect">
             <a:avLst/>
@@ -23126,7 +25920,7 @@
         <p:spPr>
           <a:xfrm>
             <a:off x="5486400" y="0"/>
-            <a:ext cx="14040" cy="6853680"/>
+            <a:ext cx="13680" cy="6853320"/>
           </a:xfrm>
           <a:prstGeom prst="rect">
             <a:avLst/>
@@ -23186,7 +25980,7 @@
         <p:spPr>
           <a:xfrm>
             <a:off x="6400800" y="0"/>
-            <a:ext cx="14040" cy="6853680"/>
+            <a:ext cx="13680" cy="6853320"/>
           </a:xfrm>
           <a:prstGeom prst="rect">
             <a:avLst/>
@@ -23246,7 +26040,7 @@
         <p:spPr>
           <a:xfrm>
             <a:off x="7315200" y="0"/>
-            <a:ext cx="14040" cy="6853680"/>
+            <a:ext cx="13680" cy="6853320"/>
           </a:xfrm>
           <a:prstGeom prst="rect">
             <a:avLst/>
@@ -23306,7 +26100,7 @@
         <p:spPr>
           <a:xfrm>
             <a:off x="8229600" y="0"/>
-            <a:ext cx="14040" cy="6853680"/>
+            <a:ext cx="13680" cy="6853320"/>
           </a:xfrm>
           <a:prstGeom prst="rect">
             <a:avLst/>
@@ -23366,7 +26160,7 @@
         <p:spPr>
           <a:xfrm>
             <a:off x="9144000" y="0"/>
-            <a:ext cx="14040" cy="6853680"/>
+            <a:ext cx="13680" cy="6853320"/>
           </a:xfrm>
           <a:prstGeom prst="rect">
             <a:avLst/>
@@ -23426,7 +26220,7 @@
         <p:spPr>
           <a:xfrm>
             <a:off x="10058400" y="0"/>
-            <a:ext cx="14040" cy="6853680"/>
+            <a:ext cx="13680" cy="6853320"/>
           </a:xfrm>
           <a:prstGeom prst="rect">
             <a:avLst/>
@@ -23486,7 +26280,7 @@
         <p:spPr>
           <a:xfrm>
             <a:off x="10972800" y="0"/>
-            <a:ext cx="14040" cy="6853680"/>
+            <a:ext cx="13680" cy="6853320"/>
           </a:xfrm>
           <a:prstGeom prst="rect">
             <a:avLst/>
@@ -23546,7 +26340,7 @@
         <p:spPr>
           <a:xfrm>
             <a:off x="11887200" y="0"/>
-            <a:ext cx="14040" cy="6853680"/>
+            <a:ext cx="13680" cy="6853320"/>
           </a:xfrm>
           <a:prstGeom prst="rect">
             <a:avLst/>
@@ -23606,7 +26400,7 @@
         <p:spPr>
           <a:xfrm>
             <a:off x="0" y="0"/>
-            <a:ext cx="315720" cy="6853680"/>
+            <a:ext cx="315360" cy="6853320"/>
           </a:xfrm>
           <a:prstGeom prst="rect">
             <a:avLst/>
@@ -23666,7 +26460,7 @@
         <p:spPr>
           <a:xfrm>
             <a:off x="9875520" y="365760"/>
-            <a:ext cx="2007360" cy="498600"/>
+            <a:ext cx="2007000" cy="498240"/>
           </a:xfrm>
           <a:prstGeom prst="roundRect">
             <a:avLst>
@@ -23794,7 +26588,7 @@
         <p:spPr>
           <a:xfrm>
             <a:off x="1964160" y="1664640"/>
-            <a:ext cx="7573320" cy="819720"/>
+            <a:ext cx="7572960" cy="819720"/>
           </a:xfrm>
           <a:prstGeom prst="rect">
             <a:avLst/>
@@ -23894,7 +26688,7 @@
         <p:spPr>
           <a:xfrm>
             <a:off x="987480" y="3182040"/>
-            <a:ext cx="3287520" cy="2738880"/>
+            <a:ext cx="3287160" cy="2738520"/>
           </a:xfrm>
           <a:prstGeom prst="roundRect">
             <a:avLst>
@@ -23956,7 +26750,7 @@
         <p:spPr>
           <a:xfrm>
             <a:off x="914400" y="2743200"/>
-            <a:ext cx="3287520" cy="3656520"/>
+            <a:ext cx="3287160" cy="3656160"/>
           </a:xfrm>
           <a:prstGeom prst="roundRect">
             <a:avLst>
@@ -24287,7 +27081,7 @@
         <p:spPr>
           <a:xfrm>
             <a:off x="4507920" y="3182040"/>
-            <a:ext cx="3287520" cy="2738880"/>
+            <a:ext cx="3287160" cy="2738520"/>
           </a:xfrm>
           <a:prstGeom prst="roundRect">
             <a:avLst>
@@ -24349,7 +27143,7 @@
         <p:spPr>
           <a:xfrm>
             <a:off x="4434840" y="2743200"/>
-            <a:ext cx="3287520" cy="3656520"/>
+            <a:ext cx="3287160" cy="3656160"/>
           </a:xfrm>
           <a:prstGeom prst="roundRect">
             <a:avLst>
@@ -24756,7 +27550,7 @@
         <p:spPr>
           <a:xfrm>
             <a:off x="8028360" y="3182040"/>
-            <a:ext cx="3287520" cy="2738880"/>
+            <a:ext cx="3287160" cy="2738520"/>
           </a:xfrm>
           <a:prstGeom prst="roundRect">
             <a:avLst>
@@ -24818,7 +27612,7 @@
         <p:spPr>
           <a:xfrm>
             <a:off x="7955280" y="2743200"/>
-            <a:ext cx="3700080" cy="3655080"/>
+            <a:ext cx="3699720" cy="3654720"/>
           </a:xfrm>
           <a:prstGeom prst="roundRect">
             <a:avLst>
@@ -25560,7 +28354,7 @@
         <p:spPr>
           <a:xfrm>
             <a:off x="0" y="0"/>
-            <a:ext cx="12184200" cy="6853320"/>
+            <a:ext cx="12183840" cy="6852960"/>
           </a:xfrm>
           <a:prstGeom prst="rect">
             <a:avLst/>
@@ -25620,7 +28414,7 @@
         <p:spPr>
           <a:xfrm>
             <a:off x="0" y="0"/>
-            <a:ext cx="13680" cy="6853320"/>
+            <a:ext cx="13320" cy="6852960"/>
           </a:xfrm>
           <a:prstGeom prst="rect">
             <a:avLst/>
@@ -25680,7 +28474,7 @@
         <p:spPr>
           <a:xfrm>
             <a:off x="914400" y="0"/>
-            <a:ext cx="13680" cy="6853320"/>
+            <a:ext cx="13320" cy="6852960"/>
           </a:xfrm>
           <a:prstGeom prst="rect">
             <a:avLst/>
@@ -25740,7 +28534,7 @@
         <p:spPr>
           <a:xfrm>
             <a:off x="1828800" y="0"/>
-            <a:ext cx="13680" cy="6853320"/>
+            <a:ext cx="13320" cy="6852960"/>
           </a:xfrm>
           <a:prstGeom prst="rect">
             <a:avLst/>
@@ -25800,7 +28594,7 @@
         <p:spPr>
           <a:xfrm>
             <a:off x="2743200" y="0"/>
-            <a:ext cx="13680" cy="6853320"/>
+            <a:ext cx="13320" cy="6852960"/>
           </a:xfrm>
           <a:prstGeom prst="rect">
             <a:avLst/>
@@ -25860,7 +28654,7 @@
         <p:spPr>
           <a:xfrm>
             <a:off x="3657600" y="0"/>
-            <a:ext cx="13680" cy="6853320"/>
+            <a:ext cx="13320" cy="6852960"/>
           </a:xfrm>
           <a:prstGeom prst="rect">
             <a:avLst/>
@@ -25920,7 +28714,7 @@
         <p:spPr>
           <a:xfrm>
             <a:off x="4572000" y="0"/>
-            <a:ext cx="13680" cy="6853320"/>
+            <a:ext cx="13320" cy="6852960"/>
           </a:xfrm>
           <a:prstGeom prst="rect">
             <a:avLst/>
@@ -25980,7 +28774,7 @@
         <p:spPr>
           <a:xfrm>
             <a:off x="5486400" y="0"/>
-            <a:ext cx="13680" cy="6853320"/>
+            <a:ext cx="13320" cy="6852960"/>
           </a:xfrm>
           <a:prstGeom prst="rect">
             <a:avLst/>
@@ -26040,7 +28834,7 @@
         <p:spPr>
           <a:xfrm>
             <a:off x="6400800" y="0"/>
-            <a:ext cx="13680" cy="6853320"/>
+            <a:ext cx="13320" cy="6852960"/>
           </a:xfrm>
           <a:prstGeom prst="rect">
             <a:avLst/>
@@ -26100,7 +28894,7 @@
         <p:spPr>
           <a:xfrm>
             <a:off x="7315200" y="0"/>
-            <a:ext cx="13680" cy="6853320"/>
+            <a:ext cx="13320" cy="6852960"/>
           </a:xfrm>
           <a:prstGeom prst="rect">
             <a:avLst/>
@@ -26160,7 +28954,7 @@
         <p:spPr>
           <a:xfrm>
             <a:off x="8229600" y="0"/>
-            <a:ext cx="13680" cy="6853320"/>
+            <a:ext cx="13320" cy="6852960"/>
           </a:xfrm>
           <a:prstGeom prst="rect">
             <a:avLst/>
@@ -26220,7 +29014,7 @@
         <p:spPr>
           <a:xfrm>
             <a:off x="9144000" y="0"/>
-            <a:ext cx="13680" cy="6853320"/>
+            <a:ext cx="13320" cy="6852960"/>
           </a:xfrm>
           <a:prstGeom prst="rect">
             <a:avLst/>
@@ -26280,7 +29074,7 @@
         <p:spPr>
           <a:xfrm>
             <a:off x="10058400" y="0"/>
-            <a:ext cx="13680" cy="6853320"/>
+            <a:ext cx="13320" cy="6852960"/>
           </a:xfrm>
           <a:prstGeom prst="rect">
             <a:avLst/>
@@ -26340,7 +29134,7 @@
         <p:spPr>
           <a:xfrm>
             <a:off x="10972800" y="0"/>
-            <a:ext cx="13680" cy="6853320"/>
+            <a:ext cx="13320" cy="6852960"/>
           </a:xfrm>
           <a:prstGeom prst="rect">
             <a:avLst/>
@@ -26400,7 +29194,7 @@
         <p:spPr>
           <a:xfrm>
             <a:off x="11887200" y="0"/>
-            <a:ext cx="13680" cy="6853320"/>
+            <a:ext cx="13320" cy="6852960"/>
           </a:xfrm>
           <a:prstGeom prst="rect">
             <a:avLst/>
@@ -26460,7 +29254,7 @@
         <p:spPr>
           <a:xfrm>
             <a:off x="0" y="0"/>
-            <a:ext cx="315360" cy="6853320"/>
+            <a:ext cx="315000" cy="6852960"/>
           </a:xfrm>
           <a:prstGeom prst="rect">
             <a:avLst/>
@@ -26520,7 +29314,7 @@
         <p:spPr>
           <a:xfrm>
             <a:off x="9875520" y="365760"/>
-            <a:ext cx="2007000" cy="498240"/>
+            <a:ext cx="2006640" cy="497880"/>
           </a:xfrm>
           <a:prstGeom prst="roundRect">
             <a:avLst>
@@ -26594,7 +29388,7 @@
         <p:spPr>
           <a:xfrm>
             <a:off x="2699280" y="914400"/>
-            <a:ext cx="5569560" cy="1186920"/>
+            <a:ext cx="5569200" cy="1186920"/>
           </a:xfrm>
           <a:prstGeom prst="rect">
             <a:avLst/>
@@ -26661,7 +29455,7 @@
         <p:spPr>
           <a:xfrm>
             <a:off x="2148480" y="1694880"/>
-            <a:ext cx="7272000" cy="819720"/>
+            <a:ext cx="7271640" cy="819720"/>
           </a:xfrm>
           <a:prstGeom prst="rect">
             <a:avLst/>
@@ -26761,7 +29555,7 @@
         <p:spPr>
           <a:xfrm>
             <a:off x="987480" y="3182040"/>
-            <a:ext cx="3287160" cy="2738520"/>
+            <a:ext cx="3286800" cy="2738160"/>
           </a:xfrm>
           <a:prstGeom prst="roundRect">
             <a:avLst>
@@ -26823,7 +29617,7 @@
         <p:spPr>
           <a:xfrm>
             <a:off x="914400" y="3108960"/>
-            <a:ext cx="3287160" cy="3290400"/>
+            <a:ext cx="3286800" cy="3290040"/>
           </a:xfrm>
           <a:prstGeom prst="roundRect">
             <a:avLst>
@@ -27089,7 +29883,7 @@
         <p:spPr>
           <a:xfrm>
             <a:off x="4507920" y="3182040"/>
-            <a:ext cx="3287160" cy="2738520"/>
+            <a:ext cx="3286800" cy="2738160"/>
           </a:xfrm>
           <a:prstGeom prst="roundRect">
             <a:avLst>
@@ -27151,7 +29945,7 @@
         <p:spPr>
           <a:xfrm>
             <a:off x="4434840" y="3200400"/>
-            <a:ext cx="3287160" cy="3198960"/>
+            <a:ext cx="3286800" cy="3198600"/>
           </a:xfrm>
           <a:prstGeom prst="roundRect">
             <a:avLst>
@@ -27525,7 +30319,7 @@
         <p:spPr>
           <a:xfrm>
             <a:off x="8028360" y="3182040"/>
-            <a:ext cx="3287160" cy="2738520"/>
+            <a:ext cx="3286800" cy="2738160"/>
           </a:xfrm>
           <a:prstGeom prst="roundRect">
             <a:avLst>
@@ -27587,7 +30381,7 @@
         <p:spPr>
           <a:xfrm>
             <a:off x="8003880" y="2971800"/>
-            <a:ext cx="3425400" cy="3426120"/>
+            <a:ext cx="3425040" cy="3425760"/>
           </a:xfrm>
           <a:prstGeom prst="roundRect">
             <a:avLst>

--- a/Java/Java #4/EN/Java #4.pptx
+++ b/Java/Java #4/EN/Java #4.pptx
@@ -16,6 +16,7 @@
     <p:sldId id="264" r:id="rId11"/>
     <p:sldId id="265" r:id="rId12"/>
     <p:sldId id="266" r:id="rId13"/>
+    <p:sldId id="267" r:id="rId14"/>
   </p:sldIdLst>
   <p:sldSz cx="9144000" cy="6858000"/>
   <p:notesSz cx="7772400" cy="10058400"/>
@@ -73,7 +74,7 @@
         <p:txBody>
           <a:bodyPr/>
           <a:p>
-            <a:fld id="{C980C8E5-3CB4-4AB4-86ED-376C317C6969}" type="slidenum">
+            <a:fld id="{5171F493-A494-4579-BC10-F60F6F56A636}" type="slidenum">
               <a:t>&lt;#&gt;</a:t>
             </a:fld>
           </a:p>
@@ -282,7 +283,7 @@
         <p:txBody>
           <a:bodyPr/>
           <a:p>
-            <a:fld id="{19D21921-724B-4625-AA27-0CDADB836EDA}" type="slidenum">
+            <a:fld id="{64F8F649-ABAC-4456-AC69-3FBBC10CCDC5}" type="slidenum">
               <a:t>&lt;#&gt;</a:t>
             </a:fld>
           </a:p>
@@ -577,7 +578,7 @@
         <p:txBody>
           <a:bodyPr/>
           <a:p>
-            <a:fld id="{BA06C95D-C39F-4384-9F75-16B0D44A7566}" type="slidenum">
+            <a:fld id="{58B2A62C-2D15-421D-96F0-B1208AE51782}" type="slidenum">
               <a:t>&lt;#&gt;</a:t>
             </a:fld>
           </a:p>
@@ -958,7 +959,7 @@
         <p:txBody>
           <a:bodyPr/>
           <a:p>
-            <a:fld id="{102447E3-6659-4CE7-AB2C-D28FA3B3E64B}" type="slidenum">
+            <a:fld id="{24794471-BDBF-4796-8151-BE0B8FE1B0C9}" type="slidenum">
               <a:t>&lt;#&gt;</a:t>
             </a:fld>
           </a:p>
@@ -1121,7 +1122,7 @@
         <p:txBody>
           <a:bodyPr/>
           <a:p>
-            <a:fld id="{2F958CE4-7211-46A5-8AE8-5F052DC9ACD4}" type="slidenum">
+            <a:fld id="{2429B645-0E8C-414E-9815-058DA1A9C685}" type="slidenum">
               <a:t>&lt;#&gt;</a:t>
             </a:fld>
           </a:p>
@@ -1287,7 +1288,7 @@
         <p:txBody>
           <a:bodyPr/>
           <a:p>
-            <a:fld id="{842D7254-2CC1-4747-8846-1533E25EB679}" type="slidenum">
+            <a:fld id="{4C3DC4AF-BFD5-41D7-9368-58F99F05A143}" type="slidenum">
               <a:t>&lt;#&gt;</a:t>
             </a:fld>
           </a:p>
@@ -1496,7 +1497,7 @@
         <p:txBody>
           <a:bodyPr/>
           <a:p>
-            <a:fld id="{278A0B88-55DA-4F25-9DA1-F62BCD192D77}" type="slidenum">
+            <a:fld id="{C5344044-E3D6-4673-B6F7-ACB71053DFA9}" type="slidenum">
               <a:t>&lt;#&gt;</a:t>
             </a:fld>
           </a:p>
@@ -1619,7 +1620,7 @@
         <p:txBody>
           <a:bodyPr/>
           <a:p>
-            <a:fld id="{8E4CBF18-EAF3-48F1-92FC-370AFB758A56}" type="slidenum">
+            <a:fld id="{6B1DC76F-4263-4A02-8E2D-38148D5EA88D}" type="slidenum">
               <a:t>&lt;#&gt;</a:t>
             </a:fld>
           </a:p>
@@ -1740,7 +1741,7 @@
         <p:txBody>
           <a:bodyPr/>
           <a:p>
-            <a:fld id="{B6D1DBD3-6891-4FF3-8A82-271E868B28A2}" type="slidenum">
+            <a:fld id="{3455502B-F33D-42D9-BD23-8A1A19DA8C57}" type="slidenum">
               <a:t>&lt;#&gt;</a:t>
             </a:fld>
           </a:p>
@@ -1992,7 +1993,7 @@
         <p:txBody>
           <a:bodyPr/>
           <a:p>
-            <a:fld id="{A88917ED-A51C-4506-93DB-4C6C3876E5AC}" type="slidenum">
+            <a:fld id="{D7690C15-786D-43D5-9E25-C22AD8077286}" type="slidenum">
               <a:t>&lt;#&gt;</a:t>
             </a:fld>
           </a:p>
@@ -2244,7 +2245,7 @@
         <p:txBody>
           <a:bodyPr/>
           <a:p>
-            <a:fld id="{4FCC72E3-F802-4031-99C7-EDCB8A413CB2}" type="slidenum">
+            <a:fld id="{84B038D2-1595-4542-910E-CE07F749B241}" type="slidenum">
               <a:t>&lt;#&gt;</a:t>
             </a:fld>
           </a:p>
@@ -2496,7 +2497,7 @@
         <p:txBody>
           <a:bodyPr/>
           <a:p>
-            <a:fld id="{0071D25F-5DD2-4917-8FF1-542526517642}" type="slidenum">
+            <a:fld id="{3FC69DDA-DC78-4398-A3D8-D299F3D8309A}" type="slidenum">
               <a:t>&lt;#&gt;</a:t>
             </a:fld>
           </a:p>
@@ -2565,7 +2566,7 @@
         <p:spPr>
           <a:xfrm>
             <a:off x="3124080" y="6356520"/>
-            <a:ext cx="2890800" cy="360360"/>
+            <a:ext cx="2890440" cy="360000"/>
           </a:xfrm>
           <a:prstGeom prst="rect">
             <a:avLst/>
@@ -2637,7 +2638,7 @@
         <p:spPr>
           <a:xfrm>
             <a:off x="6553080" y="6356520"/>
-            <a:ext cx="2129040" cy="360360"/>
+            <a:ext cx="2128680" cy="360000"/>
           </a:xfrm>
           <a:prstGeom prst="rect">
             <a:avLst/>
@@ -2678,7 +2679,7 @@
                 <a:tab algn="l" pos="0"/>
               </a:tabLst>
             </a:pPr>
-            <a:fld id="{72C6D7A8-70E0-4E60-A100-4B358F91A5D8}" type="slidenum">
+            <a:fld id="{C28F96C6-0FD7-44B7-8F69-A738BDF4DEC7}" type="slidenum">
               <a:rPr b="0" lang="en-US" sz="1200" spc="-1" strike="noStrike">
                 <a:solidFill>
                   <a:srgbClr val="8b8b8b"/>
@@ -2709,7 +2710,7 @@
         <p:spPr>
           <a:xfrm>
             <a:off x="457200" y="6356520"/>
-            <a:ext cx="2129040" cy="360360"/>
+            <a:ext cx="2128680" cy="360000"/>
           </a:xfrm>
           <a:prstGeom prst="rect">
             <a:avLst/>
@@ -3076,7 +3077,7 @@
         <p:spPr>
           <a:xfrm>
             <a:off x="0" y="0"/>
-            <a:ext cx="12184200" cy="6853320"/>
+            <a:ext cx="12183840" cy="6852960"/>
           </a:xfrm>
           <a:prstGeom prst="rect">
             <a:avLst/>
@@ -3136,7 +3137,7 @@
         <p:spPr>
           <a:xfrm>
             <a:off x="0" y="0"/>
-            <a:ext cx="13680" cy="6853320"/>
+            <a:ext cx="13320" cy="6852960"/>
           </a:xfrm>
           <a:prstGeom prst="rect">
             <a:avLst/>
@@ -3196,7 +3197,7 @@
         <p:spPr>
           <a:xfrm>
             <a:off x="914400" y="0"/>
-            <a:ext cx="13680" cy="6853320"/>
+            <a:ext cx="13320" cy="6852960"/>
           </a:xfrm>
           <a:prstGeom prst="rect">
             <a:avLst/>
@@ -3256,7 +3257,7 @@
         <p:spPr>
           <a:xfrm>
             <a:off x="1828800" y="0"/>
-            <a:ext cx="13680" cy="6853320"/>
+            <a:ext cx="13320" cy="6852960"/>
           </a:xfrm>
           <a:prstGeom prst="rect">
             <a:avLst/>
@@ -3316,7 +3317,7 @@
         <p:spPr>
           <a:xfrm>
             <a:off x="2743200" y="0"/>
-            <a:ext cx="13680" cy="6853320"/>
+            <a:ext cx="13320" cy="6852960"/>
           </a:xfrm>
           <a:prstGeom prst="rect">
             <a:avLst/>
@@ -3376,7 +3377,7 @@
         <p:spPr>
           <a:xfrm>
             <a:off x="3657600" y="0"/>
-            <a:ext cx="13680" cy="6853320"/>
+            <a:ext cx="13320" cy="6852960"/>
           </a:xfrm>
           <a:prstGeom prst="rect">
             <a:avLst/>
@@ -3436,7 +3437,7 @@
         <p:spPr>
           <a:xfrm>
             <a:off x="4572000" y="0"/>
-            <a:ext cx="13680" cy="6853320"/>
+            <a:ext cx="13320" cy="6852960"/>
           </a:xfrm>
           <a:prstGeom prst="rect">
             <a:avLst/>
@@ -3496,7 +3497,7 @@
         <p:spPr>
           <a:xfrm>
             <a:off x="5486400" y="0"/>
-            <a:ext cx="13680" cy="6853320"/>
+            <a:ext cx="13320" cy="6852960"/>
           </a:xfrm>
           <a:prstGeom prst="rect">
             <a:avLst/>
@@ -3556,7 +3557,7 @@
         <p:spPr>
           <a:xfrm>
             <a:off x="6400800" y="0"/>
-            <a:ext cx="13680" cy="6853320"/>
+            <a:ext cx="13320" cy="6852960"/>
           </a:xfrm>
           <a:prstGeom prst="rect">
             <a:avLst/>
@@ -3616,7 +3617,7 @@
         <p:spPr>
           <a:xfrm>
             <a:off x="7315200" y="0"/>
-            <a:ext cx="13680" cy="6853320"/>
+            <a:ext cx="13320" cy="6852960"/>
           </a:xfrm>
           <a:prstGeom prst="rect">
             <a:avLst/>
@@ -3676,7 +3677,7 @@
         <p:spPr>
           <a:xfrm>
             <a:off x="8229600" y="0"/>
-            <a:ext cx="13680" cy="6853320"/>
+            <a:ext cx="13320" cy="6852960"/>
           </a:xfrm>
           <a:prstGeom prst="rect">
             <a:avLst/>
@@ -3736,7 +3737,7 @@
         <p:spPr>
           <a:xfrm>
             <a:off x="9144000" y="0"/>
-            <a:ext cx="13680" cy="6853320"/>
+            <a:ext cx="13320" cy="6852960"/>
           </a:xfrm>
           <a:prstGeom prst="rect">
             <a:avLst/>
@@ -3796,7 +3797,7 @@
         <p:spPr>
           <a:xfrm>
             <a:off x="10058400" y="0"/>
-            <a:ext cx="13680" cy="6853320"/>
+            <a:ext cx="13320" cy="6852960"/>
           </a:xfrm>
           <a:prstGeom prst="rect">
             <a:avLst/>
@@ -3856,7 +3857,7 @@
         <p:spPr>
           <a:xfrm>
             <a:off x="10972800" y="0"/>
-            <a:ext cx="13680" cy="6853320"/>
+            <a:ext cx="13320" cy="6852960"/>
           </a:xfrm>
           <a:prstGeom prst="rect">
             <a:avLst/>
@@ -3916,7 +3917,7 @@
         <p:spPr>
           <a:xfrm>
             <a:off x="11887200" y="0"/>
-            <a:ext cx="13680" cy="6853320"/>
+            <a:ext cx="13320" cy="6852960"/>
           </a:xfrm>
           <a:prstGeom prst="rect">
             <a:avLst/>
@@ -3976,7 +3977,7 @@
         <p:spPr>
           <a:xfrm>
             <a:off x="0" y="0"/>
-            <a:ext cx="315360" cy="6853320"/>
+            <a:ext cx="315000" cy="6852960"/>
           </a:xfrm>
           <a:prstGeom prst="rect">
             <a:avLst/>
@@ -4036,7 +4037,7 @@
         <p:spPr>
           <a:xfrm>
             <a:off x="9875520" y="365760"/>
-            <a:ext cx="2007000" cy="498240"/>
+            <a:ext cx="2006640" cy="497880"/>
           </a:xfrm>
           <a:prstGeom prst="roundRect">
             <a:avLst>
@@ -4264,7 +4265,7 @@
         <p:spPr>
           <a:xfrm>
             <a:off x="987480" y="3182040"/>
-            <a:ext cx="3287160" cy="2738520"/>
+            <a:ext cx="3286800" cy="2738160"/>
           </a:xfrm>
           <a:prstGeom prst="roundRect">
             <a:avLst>
@@ -4326,7 +4327,7 @@
         <p:spPr>
           <a:xfrm>
             <a:off x="914400" y="3108960"/>
-            <a:ext cx="3287160" cy="2738520"/>
+            <a:ext cx="3286800" cy="2738160"/>
           </a:xfrm>
           <a:prstGeom prst="roundRect">
             <a:avLst>
@@ -4460,7 +4461,7 @@
         <p:spPr>
           <a:xfrm>
             <a:off x="4507920" y="3182040"/>
-            <a:ext cx="3287160" cy="2738520"/>
+            <a:ext cx="3286800" cy="2738160"/>
           </a:xfrm>
           <a:prstGeom prst="roundRect">
             <a:avLst>
@@ -4522,7 +4523,7 @@
         <p:spPr>
           <a:xfrm>
             <a:off x="4434840" y="3108960"/>
-            <a:ext cx="3287160" cy="2738520"/>
+            <a:ext cx="3286800" cy="2738160"/>
           </a:xfrm>
           <a:prstGeom prst="roundRect">
             <a:avLst>
@@ -4780,7 +4781,7 @@
         <p:spPr>
           <a:xfrm>
             <a:off x="8028360" y="3182040"/>
-            <a:ext cx="3287160" cy="2738520"/>
+            <a:ext cx="3286800" cy="2738160"/>
           </a:xfrm>
           <a:prstGeom prst="roundRect">
             <a:avLst>
@@ -4842,7 +4843,7 @@
         <p:spPr>
           <a:xfrm>
             <a:off x="7955280" y="2971800"/>
-            <a:ext cx="3928320" cy="3654000"/>
+            <a:ext cx="3927960" cy="3653640"/>
           </a:xfrm>
           <a:prstGeom prst="roundRect">
             <a:avLst>
@@ -5353,7 +5354,7 @@
         <p:spPr>
           <a:xfrm>
             <a:off x="0" y="0"/>
-            <a:ext cx="12184200" cy="6853320"/>
+            <a:ext cx="12183840" cy="6852960"/>
           </a:xfrm>
           <a:prstGeom prst="rect">
             <a:avLst/>
@@ -5413,7 +5414,7 @@
         <p:spPr>
           <a:xfrm>
             <a:off x="0" y="0"/>
-            <a:ext cx="13680" cy="6853320"/>
+            <a:ext cx="13320" cy="6852960"/>
           </a:xfrm>
           <a:prstGeom prst="rect">
             <a:avLst/>
@@ -5473,7 +5474,7 @@
         <p:spPr>
           <a:xfrm>
             <a:off x="914400" y="0"/>
-            <a:ext cx="13680" cy="6853320"/>
+            <a:ext cx="13320" cy="6852960"/>
           </a:xfrm>
           <a:prstGeom prst="rect">
             <a:avLst/>
@@ -5533,7 +5534,7 @@
         <p:spPr>
           <a:xfrm>
             <a:off x="1828800" y="0"/>
-            <a:ext cx="13680" cy="6853320"/>
+            <a:ext cx="13320" cy="6852960"/>
           </a:xfrm>
           <a:prstGeom prst="rect">
             <a:avLst/>
@@ -5593,7 +5594,7 @@
         <p:spPr>
           <a:xfrm>
             <a:off x="2743200" y="0"/>
-            <a:ext cx="13680" cy="6853320"/>
+            <a:ext cx="13320" cy="6852960"/>
           </a:xfrm>
           <a:prstGeom prst="rect">
             <a:avLst/>
@@ -5653,7 +5654,7 @@
         <p:spPr>
           <a:xfrm>
             <a:off x="3657600" y="0"/>
-            <a:ext cx="13680" cy="6853320"/>
+            <a:ext cx="13320" cy="6852960"/>
           </a:xfrm>
           <a:prstGeom prst="rect">
             <a:avLst/>
@@ -5713,7 +5714,7 @@
         <p:spPr>
           <a:xfrm>
             <a:off x="4572000" y="0"/>
-            <a:ext cx="13680" cy="6853320"/>
+            <a:ext cx="13320" cy="6852960"/>
           </a:xfrm>
           <a:prstGeom prst="rect">
             <a:avLst/>
@@ -5773,7 +5774,7 @@
         <p:spPr>
           <a:xfrm>
             <a:off x="5486400" y="0"/>
-            <a:ext cx="13680" cy="6853320"/>
+            <a:ext cx="13320" cy="6852960"/>
           </a:xfrm>
           <a:prstGeom prst="rect">
             <a:avLst/>
@@ -5833,7 +5834,7 @@
         <p:spPr>
           <a:xfrm>
             <a:off x="6400800" y="0"/>
-            <a:ext cx="13680" cy="6853320"/>
+            <a:ext cx="13320" cy="6852960"/>
           </a:xfrm>
           <a:prstGeom prst="rect">
             <a:avLst/>
@@ -5893,7 +5894,7 @@
         <p:spPr>
           <a:xfrm>
             <a:off x="7315200" y="0"/>
-            <a:ext cx="13680" cy="6853320"/>
+            <a:ext cx="13320" cy="6852960"/>
           </a:xfrm>
           <a:prstGeom prst="rect">
             <a:avLst/>
@@ -5953,7 +5954,7 @@
         <p:spPr>
           <a:xfrm>
             <a:off x="8229600" y="0"/>
-            <a:ext cx="13680" cy="6853320"/>
+            <a:ext cx="13320" cy="6852960"/>
           </a:xfrm>
           <a:prstGeom prst="rect">
             <a:avLst/>
@@ -6013,7 +6014,7 @@
         <p:spPr>
           <a:xfrm>
             <a:off x="9144000" y="0"/>
-            <a:ext cx="13680" cy="6853320"/>
+            <a:ext cx="13320" cy="6852960"/>
           </a:xfrm>
           <a:prstGeom prst="rect">
             <a:avLst/>
@@ -6073,7 +6074,7 @@
         <p:spPr>
           <a:xfrm>
             <a:off x="10058400" y="0"/>
-            <a:ext cx="13680" cy="6853320"/>
+            <a:ext cx="13320" cy="6852960"/>
           </a:xfrm>
           <a:prstGeom prst="rect">
             <a:avLst/>
@@ -6133,7 +6134,7 @@
         <p:spPr>
           <a:xfrm>
             <a:off x="10972800" y="0"/>
-            <a:ext cx="13680" cy="6853320"/>
+            <a:ext cx="13320" cy="6852960"/>
           </a:xfrm>
           <a:prstGeom prst="rect">
             <a:avLst/>
@@ -6193,7 +6194,7 @@
         <p:spPr>
           <a:xfrm>
             <a:off x="11887200" y="0"/>
-            <a:ext cx="13680" cy="6853320"/>
+            <a:ext cx="13320" cy="6852960"/>
           </a:xfrm>
           <a:prstGeom prst="rect">
             <a:avLst/>
@@ -6253,7 +6254,7 @@
         <p:spPr>
           <a:xfrm>
             <a:off x="0" y="0"/>
-            <a:ext cx="315360" cy="6853320"/>
+            <a:ext cx="315000" cy="6852960"/>
           </a:xfrm>
           <a:prstGeom prst="rect">
             <a:avLst/>
@@ -6313,7 +6314,7 @@
         <p:spPr>
           <a:xfrm>
             <a:off x="9875520" y="365760"/>
-            <a:ext cx="2007000" cy="498240"/>
+            <a:ext cx="2006640" cy="497880"/>
           </a:xfrm>
           <a:prstGeom prst="roundRect">
             <a:avLst>
@@ -6387,7 +6388,7 @@
         <p:spPr>
           <a:xfrm>
             <a:off x="1072440" y="914400"/>
-            <a:ext cx="8823240" cy="638280"/>
+            <a:ext cx="8822880" cy="638280"/>
           </a:xfrm>
           <a:prstGeom prst="rect">
             <a:avLst/>
@@ -6441,7 +6442,7 @@
         <p:spPr>
           <a:xfrm>
             <a:off x="2043720" y="1694880"/>
-            <a:ext cx="7482240" cy="819720"/>
+            <a:ext cx="7481880" cy="819720"/>
           </a:xfrm>
           <a:prstGeom prst="rect">
             <a:avLst/>
@@ -6541,7 +6542,7 @@
         <p:spPr>
           <a:xfrm>
             <a:off x="987480" y="3182040"/>
-            <a:ext cx="3287160" cy="2738520"/>
+            <a:ext cx="3286800" cy="2738160"/>
           </a:xfrm>
           <a:prstGeom prst="roundRect">
             <a:avLst>
@@ -6603,7 +6604,7 @@
         <p:spPr>
           <a:xfrm>
             <a:off x="685800" y="2743200"/>
-            <a:ext cx="3515760" cy="3656160"/>
+            <a:ext cx="3515400" cy="3655800"/>
           </a:xfrm>
           <a:prstGeom prst="roundRect">
             <a:avLst>
@@ -6845,7 +6846,7 @@
         <p:spPr>
           <a:xfrm>
             <a:off x="4507920" y="3182040"/>
-            <a:ext cx="3287160" cy="2738520"/>
+            <a:ext cx="3286800" cy="2738160"/>
           </a:xfrm>
           <a:prstGeom prst="roundRect">
             <a:avLst>
@@ -6907,7 +6908,7 @@
         <p:spPr>
           <a:xfrm>
             <a:off x="4434840" y="2971800"/>
-            <a:ext cx="3287160" cy="3427560"/>
+            <a:ext cx="3286800" cy="3427200"/>
           </a:xfrm>
           <a:prstGeom prst="roundRect">
             <a:avLst>
@@ -7261,7 +7262,7 @@
         <p:spPr>
           <a:xfrm>
             <a:off x="8028360" y="3182040"/>
-            <a:ext cx="3287160" cy="2738520"/>
+            <a:ext cx="3286800" cy="2738160"/>
           </a:xfrm>
           <a:prstGeom prst="roundRect">
             <a:avLst>
@@ -7323,7 +7324,7 @@
         <p:spPr>
           <a:xfrm>
             <a:off x="8001000" y="2743200"/>
-            <a:ext cx="3428640" cy="3654720"/>
+            <a:ext cx="3428280" cy="3654360"/>
           </a:xfrm>
           <a:prstGeom prst="roundRect">
             <a:avLst>
@@ -7999,7 +8000,7 @@
         <p:spPr>
           <a:xfrm>
             <a:off x="0" y="0"/>
-            <a:ext cx="12184200" cy="6853320"/>
+            <a:ext cx="12183840" cy="6852960"/>
           </a:xfrm>
           <a:prstGeom prst="rect">
             <a:avLst/>
@@ -8035,6 +8036,11 @@
             <a:noAutofit/>
           </a:bodyPr>
           <a:p>
+            <a:pPr>
+              <a:lnSpc>
+                <a:spcPct val="100000"/>
+              </a:lnSpc>
+            </a:pPr>
             <a:endParaRPr b="0" lang="en-US" sz="1800" spc="-1" strike="noStrike">
               <a:solidFill>
                 <a:schemeClr val="lt1"/>
@@ -8054,7 +8060,7 @@
         <p:spPr>
           <a:xfrm>
             <a:off x="0" y="0"/>
-            <a:ext cx="13680" cy="6853320"/>
+            <a:ext cx="13320" cy="6852960"/>
           </a:xfrm>
           <a:prstGeom prst="rect">
             <a:avLst/>
@@ -8090,6 +8096,11 @@
             <a:noAutofit/>
           </a:bodyPr>
           <a:p>
+            <a:pPr>
+              <a:lnSpc>
+                <a:spcPct val="100000"/>
+              </a:lnSpc>
+            </a:pPr>
             <a:endParaRPr b="0" lang="en-US" sz="1800" spc="-1" strike="noStrike">
               <a:solidFill>
                 <a:schemeClr val="lt1"/>
@@ -8109,7 +8120,7 @@
         <p:spPr>
           <a:xfrm>
             <a:off x="914400" y="0"/>
-            <a:ext cx="13680" cy="6853320"/>
+            <a:ext cx="13320" cy="6852960"/>
           </a:xfrm>
           <a:prstGeom prst="rect">
             <a:avLst/>
@@ -8145,6 +8156,11 @@
             <a:noAutofit/>
           </a:bodyPr>
           <a:p>
+            <a:pPr>
+              <a:lnSpc>
+                <a:spcPct val="100000"/>
+              </a:lnSpc>
+            </a:pPr>
             <a:endParaRPr b="0" lang="en-US" sz="1800" spc="-1" strike="noStrike">
               <a:solidFill>
                 <a:schemeClr val="lt1"/>
@@ -8164,7 +8180,7 @@
         <p:spPr>
           <a:xfrm>
             <a:off x="1828800" y="0"/>
-            <a:ext cx="13680" cy="6853320"/>
+            <a:ext cx="13320" cy="6852960"/>
           </a:xfrm>
           <a:prstGeom prst="rect">
             <a:avLst/>
@@ -8200,6 +8216,11 @@
             <a:noAutofit/>
           </a:bodyPr>
           <a:p>
+            <a:pPr>
+              <a:lnSpc>
+                <a:spcPct val="100000"/>
+              </a:lnSpc>
+            </a:pPr>
             <a:endParaRPr b="0" lang="en-US" sz="1800" spc="-1" strike="noStrike">
               <a:solidFill>
                 <a:schemeClr val="lt1"/>
@@ -8219,7 +8240,7 @@
         <p:spPr>
           <a:xfrm>
             <a:off x="2743200" y="0"/>
-            <a:ext cx="13680" cy="6853320"/>
+            <a:ext cx="13320" cy="6852960"/>
           </a:xfrm>
           <a:prstGeom prst="rect">
             <a:avLst/>
@@ -8255,6 +8276,11 @@
             <a:noAutofit/>
           </a:bodyPr>
           <a:p>
+            <a:pPr>
+              <a:lnSpc>
+                <a:spcPct val="100000"/>
+              </a:lnSpc>
+            </a:pPr>
             <a:endParaRPr b="0" lang="en-US" sz="1800" spc="-1" strike="noStrike">
               <a:solidFill>
                 <a:schemeClr val="lt1"/>
@@ -8274,7 +8300,7 @@
         <p:spPr>
           <a:xfrm>
             <a:off x="3657600" y="0"/>
-            <a:ext cx="13680" cy="6853320"/>
+            <a:ext cx="13320" cy="6852960"/>
           </a:xfrm>
           <a:prstGeom prst="rect">
             <a:avLst/>
@@ -8310,6 +8336,11 @@
             <a:noAutofit/>
           </a:bodyPr>
           <a:p>
+            <a:pPr>
+              <a:lnSpc>
+                <a:spcPct val="100000"/>
+              </a:lnSpc>
+            </a:pPr>
             <a:endParaRPr b="0" lang="en-US" sz="1800" spc="-1" strike="noStrike">
               <a:solidFill>
                 <a:schemeClr val="lt1"/>
@@ -8329,7 +8360,7 @@
         <p:spPr>
           <a:xfrm>
             <a:off x="4572000" y="0"/>
-            <a:ext cx="13680" cy="6853320"/>
+            <a:ext cx="13320" cy="6852960"/>
           </a:xfrm>
           <a:prstGeom prst="rect">
             <a:avLst/>
@@ -8365,6 +8396,11 @@
             <a:noAutofit/>
           </a:bodyPr>
           <a:p>
+            <a:pPr>
+              <a:lnSpc>
+                <a:spcPct val="100000"/>
+              </a:lnSpc>
+            </a:pPr>
             <a:endParaRPr b="0" lang="en-US" sz="1800" spc="-1" strike="noStrike">
               <a:solidFill>
                 <a:schemeClr val="lt1"/>
@@ -8384,7 +8420,7 @@
         <p:spPr>
           <a:xfrm>
             <a:off x="5486400" y="0"/>
-            <a:ext cx="13680" cy="6853320"/>
+            <a:ext cx="13320" cy="6852960"/>
           </a:xfrm>
           <a:prstGeom prst="rect">
             <a:avLst/>
@@ -8420,6 +8456,11 @@
             <a:noAutofit/>
           </a:bodyPr>
           <a:p>
+            <a:pPr>
+              <a:lnSpc>
+                <a:spcPct val="100000"/>
+              </a:lnSpc>
+            </a:pPr>
             <a:endParaRPr b="0" lang="en-US" sz="1800" spc="-1" strike="noStrike">
               <a:solidFill>
                 <a:schemeClr val="lt1"/>
@@ -8439,7 +8480,7 @@
         <p:spPr>
           <a:xfrm>
             <a:off x="6400800" y="0"/>
-            <a:ext cx="13680" cy="6853320"/>
+            <a:ext cx="13320" cy="6852960"/>
           </a:xfrm>
           <a:prstGeom prst="rect">
             <a:avLst/>
@@ -8475,6 +8516,11 @@
             <a:noAutofit/>
           </a:bodyPr>
           <a:p>
+            <a:pPr>
+              <a:lnSpc>
+                <a:spcPct val="100000"/>
+              </a:lnSpc>
+            </a:pPr>
             <a:endParaRPr b="0" lang="en-US" sz="1800" spc="-1" strike="noStrike">
               <a:solidFill>
                 <a:schemeClr val="lt1"/>
@@ -8494,7 +8540,7 @@
         <p:spPr>
           <a:xfrm>
             <a:off x="7315200" y="0"/>
-            <a:ext cx="13680" cy="6853320"/>
+            <a:ext cx="13320" cy="6852960"/>
           </a:xfrm>
           <a:prstGeom prst="rect">
             <a:avLst/>
@@ -8530,6 +8576,11 @@
             <a:noAutofit/>
           </a:bodyPr>
           <a:p>
+            <a:pPr>
+              <a:lnSpc>
+                <a:spcPct val="100000"/>
+              </a:lnSpc>
+            </a:pPr>
             <a:endParaRPr b="0" lang="en-US" sz="1800" spc="-1" strike="noStrike">
               <a:solidFill>
                 <a:schemeClr val="lt1"/>
@@ -8549,7 +8600,7 @@
         <p:spPr>
           <a:xfrm>
             <a:off x="8229600" y="0"/>
-            <a:ext cx="13680" cy="6853320"/>
+            <a:ext cx="13320" cy="6852960"/>
           </a:xfrm>
           <a:prstGeom prst="rect">
             <a:avLst/>
@@ -8585,6 +8636,11 @@
             <a:noAutofit/>
           </a:bodyPr>
           <a:p>
+            <a:pPr>
+              <a:lnSpc>
+                <a:spcPct val="100000"/>
+              </a:lnSpc>
+            </a:pPr>
             <a:endParaRPr b="0" lang="en-US" sz="1800" spc="-1" strike="noStrike">
               <a:solidFill>
                 <a:schemeClr val="lt1"/>
@@ -8604,7 +8660,7 @@
         <p:spPr>
           <a:xfrm>
             <a:off x="9144000" y="0"/>
-            <a:ext cx="13680" cy="6853320"/>
+            <a:ext cx="13320" cy="6852960"/>
           </a:xfrm>
           <a:prstGeom prst="rect">
             <a:avLst/>
@@ -8640,6 +8696,11 @@
             <a:noAutofit/>
           </a:bodyPr>
           <a:p>
+            <a:pPr>
+              <a:lnSpc>
+                <a:spcPct val="100000"/>
+              </a:lnSpc>
+            </a:pPr>
             <a:endParaRPr b="0" lang="en-US" sz="1800" spc="-1" strike="noStrike">
               <a:solidFill>
                 <a:schemeClr val="lt1"/>
@@ -8659,7 +8720,7 @@
         <p:spPr>
           <a:xfrm>
             <a:off x="10058400" y="0"/>
-            <a:ext cx="13680" cy="6853320"/>
+            <a:ext cx="13320" cy="6852960"/>
           </a:xfrm>
           <a:prstGeom prst="rect">
             <a:avLst/>
@@ -8695,6 +8756,11 @@
             <a:noAutofit/>
           </a:bodyPr>
           <a:p>
+            <a:pPr>
+              <a:lnSpc>
+                <a:spcPct val="100000"/>
+              </a:lnSpc>
+            </a:pPr>
             <a:endParaRPr b="0" lang="en-US" sz="1800" spc="-1" strike="noStrike">
               <a:solidFill>
                 <a:schemeClr val="lt1"/>
@@ -8714,7 +8780,7 @@
         <p:spPr>
           <a:xfrm>
             <a:off x="10972800" y="0"/>
-            <a:ext cx="13680" cy="6853320"/>
+            <a:ext cx="13320" cy="6852960"/>
           </a:xfrm>
           <a:prstGeom prst="rect">
             <a:avLst/>
@@ -8750,6 +8816,11 @@
             <a:noAutofit/>
           </a:bodyPr>
           <a:p>
+            <a:pPr>
+              <a:lnSpc>
+                <a:spcPct val="100000"/>
+              </a:lnSpc>
+            </a:pPr>
             <a:endParaRPr b="0" lang="en-US" sz="1800" spc="-1" strike="noStrike">
               <a:solidFill>
                 <a:schemeClr val="lt1"/>
@@ -8769,7 +8840,7 @@
         <p:spPr>
           <a:xfrm>
             <a:off x="11887200" y="0"/>
-            <a:ext cx="13680" cy="6853320"/>
+            <a:ext cx="13320" cy="6852960"/>
           </a:xfrm>
           <a:prstGeom prst="rect">
             <a:avLst/>
@@ -8805,6 +8876,11 @@
             <a:noAutofit/>
           </a:bodyPr>
           <a:p>
+            <a:pPr>
+              <a:lnSpc>
+                <a:spcPct val="100000"/>
+              </a:lnSpc>
+            </a:pPr>
             <a:endParaRPr b="0" lang="en-US" sz="1800" spc="-1" strike="noStrike">
               <a:solidFill>
                 <a:schemeClr val="lt1"/>
@@ -8824,7 +8900,7 @@
         <p:spPr>
           <a:xfrm>
             <a:off x="0" y="0"/>
-            <a:ext cx="315360" cy="6853320"/>
+            <a:ext cx="315000" cy="6852960"/>
           </a:xfrm>
           <a:prstGeom prst="rect">
             <a:avLst/>
@@ -8860,6 +8936,11 @@
             <a:noAutofit/>
           </a:bodyPr>
           <a:p>
+            <a:pPr>
+              <a:lnSpc>
+                <a:spcPct val="100000"/>
+              </a:lnSpc>
+            </a:pPr>
             <a:endParaRPr b="0" lang="en-US" sz="1800" spc="-1" strike="noStrike">
               <a:solidFill>
                 <a:schemeClr val="lt1"/>
@@ -8879,7 +8960,7 @@
         <p:spPr>
           <a:xfrm>
             <a:off x="9875520" y="365760"/>
-            <a:ext cx="2007000" cy="498240"/>
+            <a:ext cx="2006640" cy="497880"/>
           </a:xfrm>
           <a:prstGeom prst="roundRect">
             <a:avLst>
@@ -8953,7 +9034,7 @@
         <p:spPr>
           <a:xfrm>
             <a:off x="705600" y="914400"/>
-            <a:ext cx="9556920" cy="639000"/>
+            <a:ext cx="9556920" cy="638280"/>
           </a:xfrm>
           <a:prstGeom prst="rect">
             <a:avLst/>
@@ -9007,7 +9088,7 @@
         <p:spPr>
           <a:xfrm>
             <a:off x="1482480" y="1694880"/>
-            <a:ext cx="8604360" cy="819720"/>
+            <a:ext cx="8604000" cy="819720"/>
           </a:xfrm>
           <a:prstGeom prst="rect">
             <a:avLst/>
@@ -9107,7 +9188,7 @@
         <p:spPr>
           <a:xfrm>
             <a:off x="987480" y="3182040"/>
-            <a:ext cx="3287160" cy="2738520"/>
+            <a:ext cx="3286800" cy="2738160"/>
           </a:xfrm>
           <a:prstGeom prst="roundRect">
             <a:avLst>
@@ -9145,6 +9226,11 @@
             <a:noAutofit/>
           </a:bodyPr>
           <a:p>
+            <a:pPr>
+              <a:lnSpc>
+                <a:spcPct val="100000"/>
+              </a:lnSpc>
+            </a:pPr>
             <a:endParaRPr b="0" lang="en-US" sz="1800" spc="-1" strike="noStrike">
               <a:solidFill>
                 <a:schemeClr val="lt1"/>
@@ -9164,7 +9250,7 @@
         <p:spPr>
           <a:xfrm>
             <a:off x="685800" y="2743200"/>
-            <a:ext cx="3515760" cy="3656160"/>
+            <a:ext cx="3515400" cy="3655800"/>
           </a:xfrm>
           <a:prstGeom prst="roundRect">
             <a:avLst>
@@ -9322,6 +9408,42 @@
             </a:endParaRPr>
           </a:p>
           <a:p>
+            <a:pPr>
+              <a:lnSpc>
+                <a:spcPct val="100000"/>
+              </a:lnSpc>
+            </a:pPr>
+            <a:endParaRPr b="0" lang="en-US" sz="1400" spc="-1" strike="noStrike">
+              <a:solidFill>
+                <a:srgbClr val="ffffff"/>
+              </a:solidFill>
+              <a:latin typeface="Arial"/>
+            </a:endParaRPr>
+          </a:p>
+          <a:p>
+            <a:pPr>
+              <a:lnSpc>
+                <a:spcPct val="100000"/>
+              </a:lnSpc>
+            </a:pPr>
+            <a:r>
+              <a:rPr b="1" lang="en-US" sz="1400" spc="-1" strike="noStrike">
+                <a:solidFill>
+                  <a:schemeClr val="lt1"/>
+                </a:solidFill>
+                <a:latin typeface="Calibri"/>
+                <a:ea typeface="DejaVu Sans"/>
+              </a:rPr>
+              <a:t>2. The Dual Role of +:</a:t>
+            </a:r>
+            <a:endParaRPr b="0" lang="en-US" sz="1400" spc="-1" strike="noStrike">
+              <a:solidFill>
+                <a:srgbClr val="ffffff"/>
+              </a:solidFill>
+              <a:latin typeface="Arial"/>
+            </a:endParaRPr>
+          </a:p>
+          <a:p>
             <a:pPr marL="216000" indent="-216000">
               <a:lnSpc>
                 <a:spcPct val="100000"/>
@@ -9332,28 +9454,25 @@
               <a:buFont typeface="Wingdings" charset="2"/>
               <a:buChar char=""/>
             </a:pPr>
-            <a:endParaRPr b="0" lang="en-US" sz="1400" spc="-1" strike="noStrike">
-              <a:solidFill>
-                <a:srgbClr val="ffffff"/>
-              </a:solidFill>
-              <a:latin typeface="Arial"/>
-            </a:endParaRPr>
-          </a:p>
-          <a:p>
-            <a:pPr>
-              <a:lnSpc>
-                <a:spcPct val="100000"/>
-              </a:lnSpc>
-            </a:pPr>
-            <a:r>
-              <a:rPr b="1" lang="en-US" sz="1400" spc="-1" strike="noStrike">
+            <a:r>
+              <a:rPr b="0" lang="en-US" sz="1400" spc="-1" strike="noStrike">
                 <a:solidFill>
                   <a:schemeClr val="lt1"/>
                 </a:solidFill>
                 <a:latin typeface="Calibri"/>
                 <a:ea typeface="DejaVu Sans"/>
               </a:rPr>
-              <a:t>2. The Dual Role of +:</a:t>
+              <a:t> </a:t>
+            </a:r>
+            <a:r>
+              <a:rPr b="0" lang="en-US" sz="1400" spc="-1" strike="noStrike">
+                <a:solidFill>
+                  <a:schemeClr val="lt1"/>
+                </a:solidFill>
+                <a:latin typeface="Calibri"/>
+                <a:ea typeface="DejaVu Sans"/>
+              </a:rPr>
+              <a:t>Number + Number = Math (Addition).</a:t>
             </a:r>
             <a:endParaRPr b="0" lang="en-US" sz="1400" spc="-1" strike="noStrike">
               <a:solidFill>
@@ -9391,7 +9510,7 @@
                 <a:latin typeface="Calibri"/>
                 <a:ea typeface="DejaVu Sans"/>
               </a:rPr>
-              <a:t>Number + Number = Math (Addition).</a:t>
+              <a:t>String + Anything = Text (Concatenation).</a:t>
             </a:r>
             <a:endParaRPr b="0" lang="en-US" sz="1400" spc="-1" strike="noStrike">
               <a:solidFill>
@@ -9429,44 +9548,6 @@
                 <a:latin typeface="Calibri"/>
                 <a:ea typeface="DejaVu Sans"/>
               </a:rPr>
-              <a:t>String + Anything = Text (Concatenation).</a:t>
-            </a:r>
-            <a:endParaRPr b="0" lang="en-US" sz="1400" spc="-1" strike="noStrike">
-              <a:solidFill>
-                <a:srgbClr val="ffffff"/>
-              </a:solidFill>
-              <a:latin typeface="Arial"/>
-            </a:endParaRPr>
-          </a:p>
-          <a:p>
-            <a:pPr marL="216000" indent="-216000">
-              <a:lnSpc>
-                <a:spcPct val="100000"/>
-              </a:lnSpc>
-              <a:buClr>
-                <a:srgbClr val="ffffff"/>
-              </a:buClr>
-              <a:buFont typeface="Wingdings" charset="2"/>
-              <a:buChar char=""/>
-            </a:pPr>
-            <a:r>
-              <a:rPr b="0" lang="en-US" sz="1400" spc="-1" strike="noStrike">
-                <a:solidFill>
-                  <a:schemeClr val="lt1"/>
-                </a:solidFill>
-                <a:latin typeface="Calibri"/>
-                <a:ea typeface="DejaVu Sans"/>
-              </a:rPr>
-              <a:t> </a:t>
-            </a:r>
-            <a:r>
-              <a:rPr b="0" lang="en-US" sz="1400" spc="-1" strike="noStrike">
-                <a:solidFill>
-                  <a:schemeClr val="lt1"/>
-                </a:solidFill>
-                <a:latin typeface="Calibri"/>
-                <a:ea typeface="DejaVu Sans"/>
-              </a:rPr>
               <a:t>Execution flows strictly from Left to Right. If a String appears first, everything after it turns into text!</a:t>
             </a:r>
             <a:endParaRPr b="0" lang="en-US" sz="1400" spc="-1" strike="noStrike">
@@ -9487,7 +9568,7 @@
         <p:spPr>
           <a:xfrm>
             <a:off x="4507920" y="3182040"/>
-            <a:ext cx="3287160" cy="2738520"/>
+            <a:ext cx="3286800" cy="2738160"/>
           </a:xfrm>
           <a:prstGeom prst="roundRect">
             <a:avLst>
@@ -9525,6 +9606,11 @@
             <a:noAutofit/>
           </a:bodyPr>
           <a:p>
+            <a:pPr>
+              <a:lnSpc>
+                <a:spcPct val="100000"/>
+              </a:lnSpc>
+            </a:pPr>
             <a:endParaRPr b="0" lang="en-US" sz="1800" spc="-1" strike="noStrike">
               <a:solidFill>
                 <a:schemeClr val="lt1"/>
@@ -9544,7 +9630,7 @@
         <p:spPr>
           <a:xfrm>
             <a:off x="4434840" y="2971800"/>
-            <a:ext cx="3287160" cy="3427560"/>
+            <a:ext cx="3286800" cy="3427200"/>
           </a:xfrm>
           <a:prstGeom prst="roundRect">
             <a:avLst>
@@ -9875,7 +9961,7 @@
         <p:spPr>
           <a:xfrm>
             <a:off x="8028360" y="3182040"/>
-            <a:ext cx="3287160" cy="2738520"/>
+            <a:ext cx="3286800" cy="2738160"/>
           </a:xfrm>
           <a:prstGeom prst="roundRect">
             <a:avLst>
@@ -9913,6 +9999,11 @@
             <a:noAutofit/>
           </a:bodyPr>
           <a:p>
+            <a:pPr>
+              <a:lnSpc>
+                <a:spcPct val="100000"/>
+              </a:lnSpc>
+            </a:pPr>
             <a:endParaRPr b="0" lang="en-US" sz="1800" spc="-1" strike="noStrike">
               <a:solidFill>
                 <a:schemeClr val="lt1"/>
@@ -9932,7 +10023,7 @@
         <p:spPr>
           <a:xfrm>
             <a:off x="8001000" y="2743200"/>
-            <a:ext cx="3428640" cy="3654720"/>
+            <a:ext cx="3428280" cy="3654360"/>
           </a:xfrm>
           <a:prstGeom prst="roundRect">
             <a:avLst>
@@ -10607,6 +10698,2768 @@
       <p:sp>
         <p:nvSpPr>
           <p:cNvPr id="326" name="TextBox 36"/>
+          <p:cNvSpPr/>
+          <p:nvPr/>
+        </p:nvSpPr>
+        <p:spPr>
+          <a:xfrm>
+            <a:off x="4600080" y="6446520"/>
+            <a:ext cx="3051000" cy="363960"/>
+          </a:xfrm>
+          <a:prstGeom prst="rect">
+            <a:avLst/>
+          </a:prstGeom>
+          <a:noFill/>
+          <a:ln w="0">
+            <a:noFill/>
+          </a:ln>
+        </p:spPr>
+        <p:style>
+          <a:lnRef idx="0"/>
+          <a:fillRef idx="0"/>
+          <a:effectRef idx="0"/>
+          <a:fontRef idx="minor"/>
+        </p:style>
+        <p:txBody>
+          <a:bodyPr wrap="none" lIns="90000" rIns="90000" tIns="45000" bIns="45000" anchor="t">
+            <a:spAutoFit/>
+          </a:bodyPr>
+          <a:p>
+            <a:pPr>
+              <a:lnSpc>
+                <a:spcPct val="100000"/>
+              </a:lnSpc>
+            </a:pPr>
+            <a:r>
+              <a:rPr b="0" lang="en-US" sz="1800" spc="-1" strike="noStrike">
+                <a:solidFill>
+                  <a:srgbClr val="000000"/>
+                </a:solidFill>
+                <a:latin typeface="Calibri"/>
+                <a:ea typeface="DejaVu Sans"/>
+              </a:rPr>
+              <a:t>Java • Ultra Premium Template</a:t>
+            </a:r>
+            <a:endParaRPr b="0" lang="en-US" sz="1800" spc="-1" strike="noStrike">
+              <a:solidFill>
+                <a:srgbClr val="000000"/>
+              </a:solidFill>
+              <a:latin typeface="Arial"/>
+            </a:endParaRPr>
+          </a:p>
+        </p:txBody>
+      </p:sp>
+    </p:spTree>
+  </p:cSld>
+  <mc:AlternateContent>
+    <mc:Choice Requires="p14">
+      <p:transition spd="slow" p14:dur="2000"/>
+    </mc:Choice>
+    <mc:Fallback>
+      <p:transition spd="slow"/>
+    </mc:Fallback>
+  </mc:AlternateContent>
+</p:sld>
+</file>
+
+<file path=ppt/slides/slide12.xml><?xml version="1.0" encoding="utf-8"?>
+<p:sld xmlns:a="http://schemas.openxmlformats.org/drawingml/2006/main" xmlns:p="http://schemas.openxmlformats.org/presentationml/2006/main" xmlns:r="http://schemas.openxmlformats.org/officeDocument/2006/relationships" xmlns:p14="http://schemas.microsoft.com/office/powerpoint/2010/main" xmlns:p15="http://schemas.microsoft.com/office/powerpoint/2012/main" xmlns:mc="http://schemas.openxmlformats.org/markup-compatibility/2006">
+  <p:cSld>
+    <p:spTree>
+      <p:nvGrpSpPr>
+        <p:cNvPr id="1" name=""/>
+        <p:cNvGrpSpPr/>
+        <p:nvPr/>
+      </p:nvGrpSpPr>
+      <p:grpSpPr>
+        <a:xfrm>
+          <a:off x="0" y="0"/>
+          <a:ext cx="0" cy="0"/>
+          <a:chOff x="0" y="0"/>
+          <a:chExt cx="0" cy="0"/>
+        </a:xfrm>
+      </p:grpSpPr>
+      <p:sp>
+        <p:nvSpPr>
+          <p:cNvPr id="327" name="Rectangle 177"/>
+          <p:cNvSpPr/>
+          <p:nvPr/>
+        </p:nvSpPr>
+        <p:spPr>
+          <a:xfrm>
+            <a:off x="0" y="0"/>
+            <a:ext cx="12183840" cy="6852960"/>
+          </a:xfrm>
+          <a:prstGeom prst="rect">
+            <a:avLst/>
+          </a:prstGeom>
+          <a:solidFill>
+            <a:srgbClr val="0b0b0d"/>
+          </a:solidFill>
+          <a:ln>
+            <a:noFill/>
+          </a:ln>
+          <a:effectLst>
+            <a:outerShdw blurRad="39960" dir="5400000" dist="23040" rotWithShape="0">
+              <a:srgbClr val="000000">
+                <a:alpha val="35000"/>
+              </a:srgbClr>
+            </a:outerShdw>
+          </a:effectLst>
+        </p:spPr>
+        <p:style>
+          <a:lnRef idx="1">
+            <a:schemeClr val="accent1"/>
+          </a:lnRef>
+          <a:fillRef idx="3">
+            <a:schemeClr val="accent1"/>
+          </a:fillRef>
+          <a:effectRef idx="2">
+            <a:schemeClr val="accent1"/>
+          </a:effectRef>
+          <a:fontRef idx="minor"/>
+        </p:style>
+        <p:txBody>
+          <a:bodyPr lIns="90000" rIns="90000" tIns="45000" bIns="45000" anchor="ctr">
+            <a:noAutofit/>
+          </a:bodyPr>
+          <a:p>
+            <a:endParaRPr b="0" lang="en-US" sz="1800" spc="-1" strike="noStrike">
+              <a:solidFill>
+                <a:schemeClr val="lt1"/>
+              </a:solidFill>
+              <a:latin typeface="Calibri"/>
+              <a:ea typeface="DejaVu Sans"/>
+            </a:endParaRPr>
+          </a:p>
+        </p:txBody>
+      </p:sp>
+      <p:sp>
+        <p:nvSpPr>
+          <p:cNvPr id="328" name="Rectangle 178"/>
+          <p:cNvSpPr/>
+          <p:nvPr/>
+        </p:nvSpPr>
+        <p:spPr>
+          <a:xfrm>
+            <a:off x="0" y="0"/>
+            <a:ext cx="13320" cy="6852960"/>
+          </a:xfrm>
+          <a:prstGeom prst="rect">
+            <a:avLst/>
+          </a:prstGeom>
+          <a:solidFill>
+            <a:srgbClr val="121216"/>
+          </a:solidFill>
+          <a:ln>
+            <a:noFill/>
+          </a:ln>
+          <a:effectLst>
+            <a:outerShdw blurRad="39960" dir="5400000" dist="23040" rotWithShape="0">
+              <a:srgbClr val="000000">
+                <a:alpha val="35000"/>
+              </a:srgbClr>
+            </a:outerShdw>
+          </a:effectLst>
+        </p:spPr>
+        <p:style>
+          <a:lnRef idx="1">
+            <a:schemeClr val="accent1"/>
+          </a:lnRef>
+          <a:fillRef idx="3">
+            <a:schemeClr val="accent1"/>
+          </a:fillRef>
+          <a:effectRef idx="2">
+            <a:schemeClr val="accent1"/>
+          </a:effectRef>
+          <a:fontRef idx="minor"/>
+        </p:style>
+        <p:txBody>
+          <a:bodyPr lIns="90000" rIns="90000" tIns="45000" bIns="45000" anchor="ctr">
+            <a:noAutofit/>
+          </a:bodyPr>
+          <a:p>
+            <a:endParaRPr b="0" lang="en-US" sz="1800" spc="-1" strike="noStrike">
+              <a:solidFill>
+                <a:schemeClr val="lt1"/>
+              </a:solidFill>
+              <a:latin typeface="Calibri"/>
+              <a:ea typeface="DejaVu Sans"/>
+            </a:endParaRPr>
+          </a:p>
+        </p:txBody>
+      </p:sp>
+      <p:sp>
+        <p:nvSpPr>
+          <p:cNvPr id="329" name="Rectangle 179"/>
+          <p:cNvSpPr/>
+          <p:nvPr/>
+        </p:nvSpPr>
+        <p:spPr>
+          <a:xfrm>
+            <a:off x="914400" y="0"/>
+            <a:ext cx="13320" cy="6852960"/>
+          </a:xfrm>
+          <a:prstGeom prst="rect">
+            <a:avLst/>
+          </a:prstGeom>
+          <a:solidFill>
+            <a:srgbClr val="121216"/>
+          </a:solidFill>
+          <a:ln>
+            <a:noFill/>
+          </a:ln>
+          <a:effectLst>
+            <a:outerShdw blurRad="39960" dir="5400000" dist="23040" rotWithShape="0">
+              <a:srgbClr val="000000">
+                <a:alpha val="35000"/>
+              </a:srgbClr>
+            </a:outerShdw>
+          </a:effectLst>
+        </p:spPr>
+        <p:style>
+          <a:lnRef idx="1">
+            <a:schemeClr val="accent1"/>
+          </a:lnRef>
+          <a:fillRef idx="3">
+            <a:schemeClr val="accent1"/>
+          </a:fillRef>
+          <a:effectRef idx="2">
+            <a:schemeClr val="accent1"/>
+          </a:effectRef>
+          <a:fontRef idx="minor"/>
+        </p:style>
+        <p:txBody>
+          <a:bodyPr lIns="90000" rIns="90000" tIns="45000" bIns="45000" anchor="ctr">
+            <a:noAutofit/>
+          </a:bodyPr>
+          <a:p>
+            <a:endParaRPr b="0" lang="en-US" sz="1800" spc="-1" strike="noStrike">
+              <a:solidFill>
+                <a:schemeClr val="lt1"/>
+              </a:solidFill>
+              <a:latin typeface="Calibri"/>
+              <a:ea typeface="DejaVu Sans"/>
+            </a:endParaRPr>
+          </a:p>
+        </p:txBody>
+      </p:sp>
+      <p:sp>
+        <p:nvSpPr>
+          <p:cNvPr id="330" name="Rectangle 180"/>
+          <p:cNvSpPr/>
+          <p:nvPr/>
+        </p:nvSpPr>
+        <p:spPr>
+          <a:xfrm>
+            <a:off x="1828800" y="0"/>
+            <a:ext cx="13320" cy="6852960"/>
+          </a:xfrm>
+          <a:prstGeom prst="rect">
+            <a:avLst/>
+          </a:prstGeom>
+          <a:solidFill>
+            <a:srgbClr val="121216"/>
+          </a:solidFill>
+          <a:ln>
+            <a:noFill/>
+          </a:ln>
+          <a:effectLst>
+            <a:outerShdw blurRad="39960" dir="5400000" dist="23040" rotWithShape="0">
+              <a:srgbClr val="000000">
+                <a:alpha val="35000"/>
+              </a:srgbClr>
+            </a:outerShdw>
+          </a:effectLst>
+        </p:spPr>
+        <p:style>
+          <a:lnRef idx="1">
+            <a:schemeClr val="accent1"/>
+          </a:lnRef>
+          <a:fillRef idx="3">
+            <a:schemeClr val="accent1"/>
+          </a:fillRef>
+          <a:effectRef idx="2">
+            <a:schemeClr val="accent1"/>
+          </a:effectRef>
+          <a:fontRef idx="minor"/>
+        </p:style>
+        <p:txBody>
+          <a:bodyPr lIns="90000" rIns="90000" tIns="45000" bIns="45000" anchor="ctr">
+            <a:noAutofit/>
+          </a:bodyPr>
+          <a:p>
+            <a:endParaRPr b="0" lang="en-US" sz="1800" spc="-1" strike="noStrike">
+              <a:solidFill>
+                <a:schemeClr val="lt1"/>
+              </a:solidFill>
+              <a:latin typeface="Calibri"/>
+              <a:ea typeface="DejaVu Sans"/>
+            </a:endParaRPr>
+          </a:p>
+        </p:txBody>
+      </p:sp>
+      <p:sp>
+        <p:nvSpPr>
+          <p:cNvPr id="331" name="Rectangle 181"/>
+          <p:cNvSpPr/>
+          <p:nvPr/>
+        </p:nvSpPr>
+        <p:spPr>
+          <a:xfrm>
+            <a:off x="2743200" y="0"/>
+            <a:ext cx="13320" cy="6852960"/>
+          </a:xfrm>
+          <a:prstGeom prst="rect">
+            <a:avLst/>
+          </a:prstGeom>
+          <a:solidFill>
+            <a:srgbClr val="121216"/>
+          </a:solidFill>
+          <a:ln>
+            <a:noFill/>
+          </a:ln>
+          <a:effectLst>
+            <a:outerShdw blurRad="39960" dir="5400000" dist="23040" rotWithShape="0">
+              <a:srgbClr val="000000">
+                <a:alpha val="35000"/>
+              </a:srgbClr>
+            </a:outerShdw>
+          </a:effectLst>
+        </p:spPr>
+        <p:style>
+          <a:lnRef idx="1">
+            <a:schemeClr val="accent1"/>
+          </a:lnRef>
+          <a:fillRef idx="3">
+            <a:schemeClr val="accent1"/>
+          </a:fillRef>
+          <a:effectRef idx="2">
+            <a:schemeClr val="accent1"/>
+          </a:effectRef>
+          <a:fontRef idx="minor"/>
+        </p:style>
+        <p:txBody>
+          <a:bodyPr lIns="90000" rIns="90000" tIns="45000" bIns="45000" anchor="ctr">
+            <a:noAutofit/>
+          </a:bodyPr>
+          <a:p>
+            <a:endParaRPr b="0" lang="en-US" sz="1800" spc="-1" strike="noStrike">
+              <a:solidFill>
+                <a:schemeClr val="lt1"/>
+              </a:solidFill>
+              <a:latin typeface="Calibri"/>
+              <a:ea typeface="DejaVu Sans"/>
+            </a:endParaRPr>
+          </a:p>
+        </p:txBody>
+      </p:sp>
+      <p:sp>
+        <p:nvSpPr>
+          <p:cNvPr id="332" name="Rectangle 182"/>
+          <p:cNvSpPr/>
+          <p:nvPr/>
+        </p:nvSpPr>
+        <p:spPr>
+          <a:xfrm>
+            <a:off x="3657600" y="0"/>
+            <a:ext cx="13320" cy="6852960"/>
+          </a:xfrm>
+          <a:prstGeom prst="rect">
+            <a:avLst/>
+          </a:prstGeom>
+          <a:solidFill>
+            <a:srgbClr val="121216"/>
+          </a:solidFill>
+          <a:ln>
+            <a:noFill/>
+          </a:ln>
+          <a:effectLst>
+            <a:outerShdw blurRad="39960" dir="5400000" dist="23040" rotWithShape="0">
+              <a:srgbClr val="000000">
+                <a:alpha val="35000"/>
+              </a:srgbClr>
+            </a:outerShdw>
+          </a:effectLst>
+        </p:spPr>
+        <p:style>
+          <a:lnRef idx="1">
+            <a:schemeClr val="accent1"/>
+          </a:lnRef>
+          <a:fillRef idx="3">
+            <a:schemeClr val="accent1"/>
+          </a:fillRef>
+          <a:effectRef idx="2">
+            <a:schemeClr val="accent1"/>
+          </a:effectRef>
+          <a:fontRef idx="minor"/>
+        </p:style>
+        <p:txBody>
+          <a:bodyPr lIns="90000" rIns="90000" tIns="45000" bIns="45000" anchor="ctr">
+            <a:noAutofit/>
+          </a:bodyPr>
+          <a:p>
+            <a:endParaRPr b="0" lang="en-US" sz="1800" spc="-1" strike="noStrike">
+              <a:solidFill>
+                <a:schemeClr val="lt1"/>
+              </a:solidFill>
+              <a:latin typeface="Calibri"/>
+              <a:ea typeface="DejaVu Sans"/>
+            </a:endParaRPr>
+          </a:p>
+        </p:txBody>
+      </p:sp>
+      <p:sp>
+        <p:nvSpPr>
+          <p:cNvPr id="333" name="Rectangle 183"/>
+          <p:cNvSpPr/>
+          <p:nvPr/>
+        </p:nvSpPr>
+        <p:spPr>
+          <a:xfrm>
+            <a:off x="4572000" y="0"/>
+            <a:ext cx="13320" cy="6852960"/>
+          </a:xfrm>
+          <a:prstGeom prst="rect">
+            <a:avLst/>
+          </a:prstGeom>
+          <a:solidFill>
+            <a:srgbClr val="121216"/>
+          </a:solidFill>
+          <a:ln>
+            <a:noFill/>
+          </a:ln>
+          <a:effectLst>
+            <a:outerShdw blurRad="39960" dir="5400000" dist="23040" rotWithShape="0">
+              <a:srgbClr val="000000">
+                <a:alpha val="35000"/>
+              </a:srgbClr>
+            </a:outerShdw>
+          </a:effectLst>
+        </p:spPr>
+        <p:style>
+          <a:lnRef idx="1">
+            <a:schemeClr val="accent1"/>
+          </a:lnRef>
+          <a:fillRef idx="3">
+            <a:schemeClr val="accent1"/>
+          </a:fillRef>
+          <a:effectRef idx="2">
+            <a:schemeClr val="accent1"/>
+          </a:effectRef>
+          <a:fontRef idx="minor"/>
+        </p:style>
+        <p:txBody>
+          <a:bodyPr lIns="90000" rIns="90000" tIns="45000" bIns="45000" anchor="ctr">
+            <a:noAutofit/>
+          </a:bodyPr>
+          <a:p>
+            <a:endParaRPr b="0" lang="en-US" sz="1800" spc="-1" strike="noStrike">
+              <a:solidFill>
+                <a:schemeClr val="lt1"/>
+              </a:solidFill>
+              <a:latin typeface="Calibri"/>
+              <a:ea typeface="DejaVu Sans"/>
+            </a:endParaRPr>
+          </a:p>
+        </p:txBody>
+      </p:sp>
+      <p:sp>
+        <p:nvSpPr>
+          <p:cNvPr id="334" name="Rectangle 184"/>
+          <p:cNvSpPr/>
+          <p:nvPr/>
+        </p:nvSpPr>
+        <p:spPr>
+          <a:xfrm>
+            <a:off x="5486400" y="0"/>
+            <a:ext cx="13320" cy="6852960"/>
+          </a:xfrm>
+          <a:prstGeom prst="rect">
+            <a:avLst/>
+          </a:prstGeom>
+          <a:solidFill>
+            <a:srgbClr val="121216"/>
+          </a:solidFill>
+          <a:ln>
+            <a:noFill/>
+          </a:ln>
+          <a:effectLst>
+            <a:outerShdw blurRad="39960" dir="5400000" dist="23040" rotWithShape="0">
+              <a:srgbClr val="000000">
+                <a:alpha val="35000"/>
+              </a:srgbClr>
+            </a:outerShdw>
+          </a:effectLst>
+        </p:spPr>
+        <p:style>
+          <a:lnRef idx="1">
+            <a:schemeClr val="accent1"/>
+          </a:lnRef>
+          <a:fillRef idx="3">
+            <a:schemeClr val="accent1"/>
+          </a:fillRef>
+          <a:effectRef idx="2">
+            <a:schemeClr val="accent1"/>
+          </a:effectRef>
+          <a:fontRef idx="minor"/>
+        </p:style>
+        <p:txBody>
+          <a:bodyPr lIns="90000" rIns="90000" tIns="45000" bIns="45000" anchor="ctr">
+            <a:noAutofit/>
+          </a:bodyPr>
+          <a:p>
+            <a:endParaRPr b="0" lang="en-US" sz="1800" spc="-1" strike="noStrike">
+              <a:solidFill>
+                <a:schemeClr val="lt1"/>
+              </a:solidFill>
+              <a:latin typeface="Calibri"/>
+              <a:ea typeface="DejaVu Sans"/>
+            </a:endParaRPr>
+          </a:p>
+        </p:txBody>
+      </p:sp>
+      <p:sp>
+        <p:nvSpPr>
+          <p:cNvPr id="335" name="Rectangle 185"/>
+          <p:cNvSpPr/>
+          <p:nvPr/>
+        </p:nvSpPr>
+        <p:spPr>
+          <a:xfrm>
+            <a:off x="6400800" y="0"/>
+            <a:ext cx="13320" cy="6852960"/>
+          </a:xfrm>
+          <a:prstGeom prst="rect">
+            <a:avLst/>
+          </a:prstGeom>
+          <a:solidFill>
+            <a:srgbClr val="121216"/>
+          </a:solidFill>
+          <a:ln>
+            <a:noFill/>
+          </a:ln>
+          <a:effectLst>
+            <a:outerShdw blurRad="39960" dir="5400000" dist="23040" rotWithShape="0">
+              <a:srgbClr val="000000">
+                <a:alpha val="35000"/>
+              </a:srgbClr>
+            </a:outerShdw>
+          </a:effectLst>
+        </p:spPr>
+        <p:style>
+          <a:lnRef idx="1">
+            <a:schemeClr val="accent1"/>
+          </a:lnRef>
+          <a:fillRef idx="3">
+            <a:schemeClr val="accent1"/>
+          </a:fillRef>
+          <a:effectRef idx="2">
+            <a:schemeClr val="accent1"/>
+          </a:effectRef>
+          <a:fontRef idx="minor"/>
+        </p:style>
+        <p:txBody>
+          <a:bodyPr lIns="90000" rIns="90000" tIns="45000" bIns="45000" anchor="ctr">
+            <a:noAutofit/>
+          </a:bodyPr>
+          <a:p>
+            <a:endParaRPr b="0" lang="en-US" sz="1800" spc="-1" strike="noStrike">
+              <a:solidFill>
+                <a:schemeClr val="lt1"/>
+              </a:solidFill>
+              <a:latin typeface="Calibri"/>
+              <a:ea typeface="DejaVu Sans"/>
+            </a:endParaRPr>
+          </a:p>
+        </p:txBody>
+      </p:sp>
+      <p:sp>
+        <p:nvSpPr>
+          <p:cNvPr id="336" name="Rectangle 186"/>
+          <p:cNvSpPr/>
+          <p:nvPr/>
+        </p:nvSpPr>
+        <p:spPr>
+          <a:xfrm>
+            <a:off x="7315200" y="0"/>
+            <a:ext cx="13320" cy="6852960"/>
+          </a:xfrm>
+          <a:prstGeom prst="rect">
+            <a:avLst/>
+          </a:prstGeom>
+          <a:solidFill>
+            <a:srgbClr val="121216"/>
+          </a:solidFill>
+          <a:ln>
+            <a:noFill/>
+          </a:ln>
+          <a:effectLst>
+            <a:outerShdw blurRad="39960" dir="5400000" dist="23040" rotWithShape="0">
+              <a:srgbClr val="000000">
+                <a:alpha val="35000"/>
+              </a:srgbClr>
+            </a:outerShdw>
+          </a:effectLst>
+        </p:spPr>
+        <p:style>
+          <a:lnRef idx="1">
+            <a:schemeClr val="accent1"/>
+          </a:lnRef>
+          <a:fillRef idx="3">
+            <a:schemeClr val="accent1"/>
+          </a:fillRef>
+          <a:effectRef idx="2">
+            <a:schemeClr val="accent1"/>
+          </a:effectRef>
+          <a:fontRef idx="minor"/>
+        </p:style>
+        <p:txBody>
+          <a:bodyPr lIns="90000" rIns="90000" tIns="45000" bIns="45000" anchor="ctr">
+            <a:noAutofit/>
+          </a:bodyPr>
+          <a:p>
+            <a:endParaRPr b="0" lang="en-US" sz="1800" spc="-1" strike="noStrike">
+              <a:solidFill>
+                <a:schemeClr val="lt1"/>
+              </a:solidFill>
+              <a:latin typeface="Calibri"/>
+              <a:ea typeface="DejaVu Sans"/>
+            </a:endParaRPr>
+          </a:p>
+        </p:txBody>
+      </p:sp>
+      <p:sp>
+        <p:nvSpPr>
+          <p:cNvPr id="337" name="Rectangle 187"/>
+          <p:cNvSpPr/>
+          <p:nvPr/>
+        </p:nvSpPr>
+        <p:spPr>
+          <a:xfrm>
+            <a:off x="8229600" y="0"/>
+            <a:ext cx="13320" cy="6852960"/>
+          </a:xfrm>
+          <a:prstGeom prst="rect">
+            <a:avLst/>
+          </a:prstGeom>
+          <a:solidFill>
+            <a:srgbClr val="121216"/>
+          </a:solidFill>
+          <a:ln>
+            <a:noFill/>
+          </a:ln>
+          <a:effectLst>
+            <a:outerShdw blurRad="39960" dir="5400000" dist="23040" rotWithShape="0">
+              <a:srgbClr val="000000">
+                <a:alpha val="35000"/>
+              </a:srgbClr>
+            </a:outerShdw>
+          </a:effectLst>
+        </p:spPr>
+        <p:style>
+          <a:lnRef idx="1">
+            <a:schemeClr val="accent1"/>
+          </a:lnRef>
+          <a:fillRef idx="3">
+            <a:schemeClr val="accent1"/>
+          </a:fillRef>
+          <a:effectRef idx="2">
+            <a:schemeClr val="accent1"/>
+          </a:effectRef>
+          <a:fontRef idx="minor"/>
+        </p:style>
+        <p:txBody>
+          <a:bodyPr lIns="90000" rIns="90000" tIns="45000" bIns="45000" anchor="ctr">
+            <a:noAutofit/>
+          </a:bodyPr>
+          <a:p>
+            <a:endParaRPr b="0" lang="en-US" sz="1800" spc="-1" strike="noStrike">
+              <a:solidFill>
+                <a:schemeClr val="lt1"/>
+              </a:solidFill>
+              <a:latin typeface="Calibri"/>
+              <a:ea typeface="DejaVu Sans"/>
+            </a:endParaRPr>
+          </a:p>
+        </p:txBody>
+      </p:sp>
+      <p:sp>
+        <p:nvSpPr>
+          <p:cNvPr id="338" name="Rectangle 188"/>
+          <p:cNvSpPr/>
+          <p:nvPr/>
+        </p:nvSpPr>
+        <p:spPr>
+          <a:xfrm>
+            <a:off x="9144000" y="0"/>
+            <a:ext cx="13320" cy="6852960"/>
+          </a:xfrm>
+          <a:prstGeom prst="rect">
+            <a:avLst/>
+          </a:prstGeom>
+          <a:solidFill>
+            <a:srgbClr val="121216"/>
+          </a:solidFill>
+          <a:ln>
+            <a:noFill/>
+          </a:ln>
+          <a:effectLst>
+            <a:outerShdw blurRad="39960" dir="5400000" dist="23040" rotWithShape="0">
+              <a:srgbClr val="000000">
+                <a:alpha val="35000"/>
+              </a:srgbClr>
+            </a:outerShdw>
+          </a:effectLst>
+        </p:spPr>
+        <p:style>
+          <a:lnRef idx="1">
+            <a:schemeClr val="accent1"/>
+          </a:lnRef>
+          <a:fillRef idx="3">
+            <a:schemeClr val="accent1"/>
+          </a:fillRef>
+          <a:effectRef idx="2">
+            <a:schemeClr val="accent1"/>
+          </a:effectRef>
+          <a:fontRef idx="minor"/>
+        </p:style>
+        <p:txBody>
+          <a:bodyPr lIns="90000" rIns="90000" tIns="45000" bIns="45000" anchor="ctr">
+            <a:noAutofit/>
+          </a:bodyPr>
+          <a:p>
+            <a:endParaRPr b="0" lang="en-US" sz="1800" spc="-1" strike="noStrike">
+              <a:solidFill>
+                <a:schemeClr val="lt1"/>
+              </a:solidFill>
+              <a:latin typeface="Calibri"/>
+              <a:ea typeface="DejaVu Sans"/>
+            </a:endParaRPr>
+          </a:p>
+        </p:txBody>
+      </p:sp>
+      <p:sp>
+        <p:nvSpPr>
+          <p:cNvPr id="339" name="Rectangle 189"/>
+          <p:cNvSpPr/>
+          <p:nvPr/>
+        </p:nvSpPr>
+        <p:spPr>
+          <a:xfrm>
+            <a:off x="10058400" y="0"/>
+            <a:ext cx="13320" cy="6852960"/>
+          </a:xfrm>
+          <a:prstGeom prst="rect">
+            <a:avLst/>
+          </a:prstGeom>
+          <a:solidFill>
+            <a:srgbClr val="121216"/>
+          </a:solidFill>
+          <a:ln>
+            <a:noFill/>
+          </a:ln>
+          <a:effectLst>
+            <a:outerShdw blurRad="39960" dir="5400000" dist="23040" rotWithShape="0">
+              <a:srgbClr val="000000">
+                <a:alpha val="35000"/>
+              </a:srgbClr>
+            </a:outerShdw>
+          </a:effectLst>
+        </p:spPr>
+        <p:style>
+          <a:lnRef idx="1">
+            <a:schemeClr val="accent1"/>
+          </a:lnRef>
+          <a:fillRef idx="3">
+            <a:schemeClr val="accent1"/>
+          </a:fillRef>
+          <a:effectRef idx="2">
+            <a:schemeClr val="accent1"/>
+          </a:effectRef>
+          <a:fontRef idx="minor"/>
+        </p:style>
+        <p:txBody>
+          <a:bodyPr lIns="90000" rIns="90000" tIns="45000" bIns="45000" anchor="ctr">
+            <a:noAutofit/>
+          </a:bodyPr>
+          <a:p>
+            <a:endParaRPr b="0" lang="en-US" sz="1800" spc="-1" strike="noStrike">
+              <a:solidFill>
+                <a:schemeClr val="lt1"/>
+              </a:solidFill>
+              <a:latin typeface="Calibri"/>
+              <a:ea typeface="DejaVu Sans"/>
+            </a:endParaRPr>
+          </a:p>
+        </p:txBody>
+      </p:sp>
+      <p:sp>
+        <p:nvSpPr>
+          <p:cNvPr id="340" name="Rectangle 190"/>
+          <p:cNvSpPr/>
+          <p:nvPr/>
+        </p:nvSpPr>
+        <p:spPr>
+          <a:xfrm>
+            <a:off x="10972800" y="0"/>
+            <a:ext cx="13320" cy="6852960"/>
+          </a:xfrm>
+          <a:prstGeom prst="rect">
+            <a:avLst/>
+          </a:prstGeom>
+          <a:solidFill>
+            <a:srgbClr val="121216"/>
+          </a:solidFill>
+          <a:ln>
+            <a:noFill/>
+          </a:ln>
+          <a:effectLst>
+            <a:outerShdw blurRad="39960" dir="5400000" dist="23040" rotWithShape="0">
+              <a:srgbClr val="000000">
+                <a:alpha val="35000"/>
+              </a:srgbClr>
+            </a:outerShdw>
+          </a:effectLst>
+        </p:spPr>
+        <p:style>
+          <a:lnRef idx="1">
+            <a:schemeClr val="accent1"/>
+          </a:lnRef>
+          <a:fillRef idx="3">
+            <a:schemeClr val="accent1"/>
+          </a:fillRef>
+          <a:effectRef idx="2">
+            <a:schemeClr val="accent1"/>
+          </a:effectRef>
+          <a:fontRef idx="minor"/>
+        </p:style>
+        <p:txBody>
+          <a:bodyPr lIns="90000" rIns="90000" tIns="45000" bIns="45000" anchor="ctr">
+            <a:noAutofit/>
+          </a:bodyPr>
+          <a:p>
+            <a:endParaRPr b="0" lang="en-US" sz="1800" spc="-1" strike="noStrike">
+              <a:solidFill>
+                <a:schemeClr val="lt1"/>
+              </a:solidFill>
+              <a:latin typeface="Calibri"/>
+              <a:ea typeface="DejaVu Sans"/>
+            </a:endParaRPr>
+          </a:p>
+        </p:txBody>
+      </p:sp>
+      <p:sp>
+        <p:nvSpPr>
+          <p:cNvPr id="341" name="Rectangle 191"/>
+          <p:cNvSpPr/>
+          <p:nvPr/>
+        </p:nvSpPr>
+        <p:spPr>
+          <a:xfrm>
+            <a:off x="11887200" y="0"/>
+            <a:ext cx="13320" cy="6852960"/>
+          </a:xfrm>
+          <a:prstGeom prst="rect">
+            <a:avLst/>
+          </a:prstGeom>
+          <a:solidFill>
+            <a:srgbClr val="121216"/>
+          </a:solidFill>
+          <a:ln>
+            <a:noFill/>
+          </a:ln>
+          <a:effectLst>
+            <a:outerShdw blurRad="39960" dir="5400000" dist="23040" rotWithShape="0">
+              <a:srgbClr val="000000">
+                <a:alpha val="35000"/>
+              </a:srgbClr>
+            </a:outerShdw>
+          </a:effectLst>
+        </p:spPr>
+        <p:style>
+          <a:lnRef idx="1">
+            <a:schemeClr val="accent1"/>
+          </a:lnRef>
+          <a:fillRef idx="3">
+            <a:schemeClr val="accent1"/>
+          </a:fillRef>
+          <a:effectRef idx="2">
+            <a:schemeClr val="accent1"/>
+          </a:effectRef>
+          <a:fontRef idx="minor"/>
+        </p:style>
+        <p:txBody>
+          <a:bodyPr lIns="90000" rIns="90000" tIns="45000" bIns="45000" anchor="ctr">
+            <a:noAutofit/>
+          </a:bodyPr>
+          <a:p>
+            <a:endParaRPr b="0" lang="en-US" sz="1800" spc="-1" strike="noStrike">
+              <a:solidFill>
+                <a:schemeClr val="lt1"/>
+              </a:solidFill>
+              <a:latin typeface="Calibri"/>
+              <a:ea typeface="DejaVu Sans"/>
+            </a:endParaRPr>
+          </a:p>
+        </p:txBody>
+      </p:sp>
+      <p:sp>
+        <p:nvSpPr>
+          <p:cNvPr id="342" name="Rectangle 192"/>
+          <p:cNvSpPr/>
+          <p:nvPr/>
+        </p:nvSpPr>
+        <p:spPr>
+          <a:xfrm>
+            <a:off x="0" y="0"/>
+            <a:ext cx="315000" cy="6852960"/>
+          </a:xfrm>
+          <a:prstGeom prst="rect">
+            <a:avLst/>
+          </a:prstGeom>
+          <a:solidFill>
+            <a:srgbClr val="ff8c00"/>
+          </a:solidFill>
+          <a:ln>
+            <a:noFill/>
+          </a:ln>
+          <a:effectLst>
+            <a:outerShdw blurRad="39960" dir="5400000" dist="23040" rotWithShape="0">
+              <a:srgbClr val="000000">
+                <a:alpha val="35000"/>
+              </a:srgbClr>
+            </a:outerShdw>
+          </a:effectLst>
+        </p:spPr>
+        <p:style>
+          <a:lnRef idx="1">
+            <a:schemeClr val="accent1"/>
+          </a:lnRef>
+          <a:fillRef idx="3">
+            <a:schemeClr val="accent1"/>
+          </a:fillRef>
+          <a:effectRef idx="2">
+            <a:schemeClr val="accent1"/>
+          </a:effectRef>
+          <a:fontRef idx="minor"/>
+        </p:style>
+        <p:txBody>
+          <a:bodyPr lIns="90000" rIns="90000" tIns="45000" bIns="45000" anchor="ctr">
+            <a:noAutofit/>
+          </a:bodyPr>
+          <a:p>
+            <a:endParaRPr b="0" lang="en-US" sz="1800" spc="-1" strike="noStrike">
+              <a:solidFill>
+                <a:schemeClr val="lt1"/>
+              </a:solidFill>
+              <a:latin typeface="Calibri"/>
+              <a:ea typeface="DejaVu Sans"/>
+            </a:endParaRPr>
+          </a:p>
+        </p:txBody>
+      </p:sp>
+      <p:sp>
+        <p:nvSpPr>
+          <p:cNvPr id="343" name="Rounded Rectangle 85"/>
+          <p:cNvSpPr/>
+          <p:nvPr/>
+        </p:nvSpPr>
+        <p:spPr>
+          <a:xfrm>
+            <a:off x="9875520" y="365760"/>
+            <a:ext cx="2006640" cy="497880"/>
+          </a:xfrm>
+          <a:prstGeom prst="roundRect">
+            <a:avLst>
+              <a:gd name="adj" fmla="val 16667"/>
+            </a:avLst>
+          </a:prstGeom>
+          <a:solidFill>
+            <a:srgbClr val="1e1e24"/>
+          </a:solidFill>
+          <a:ln>
+            <a:solidFill>
+              <a:srgbClr val="ff8c00"/>
+            </a:solidFill>
+            <a:round/>
+          </a:ln>
+          <a:effectLst>
+            <a:outerShdw blurRad="39960" dir="5400000" dist="23040" rotWithShape="0">
+              <a:srgbClr val="000000">
+                <a:alpha val="35000"/>
+              </a:srgbClr>
+            </a:outerShdw>
+          </a:effectLst>
+        </p:spPr>
+        <p:style>
+          <a:lnRef idx="1">
+            <a:schemeClr val="accent1"/>
+          </a:lnRef>
+          <a:fillRef idx="3">
+            <a:schemeClr val="accent1"/>
+          </a:fillRef>
+          <a:effectRef idx="2">
+            <a:schemeClr val="accent1"/>
+          </a:effectRef>
+          <a:fontRef idx="minor"/>
+        </p:style>
+        <p:txBody>
+          <a:bodyPr lIns="90000" rIns="90000" tIns="45000" bIns="45000" anchor="ctr">
+            <a:noAutofit/>
+          </a:bodyPr>
+          <a:p>
+            <a:pPr algn="ctr">
+              <a:lnSpc>
+                <a:spcPct val="100000"/>
+              </a:lnSpc>
+            </a:pPr>
+            <a:r>
+              <a:rPr b="1" lang="en-US" sz="1400" spc="-1" strike="noStrike">
+                <a:solidFill>
+                  <a:srgbClr val="ffb45a"/>
+                </a:solidFill>
+                <a:latin typeface="Calibri"/>
+                <a:ea typeface="DejaVu Sans"/>
+              </a:rPr>
+              <a:t>JAVA CORE</a:t>
+            </a:r>
+            <a:endParaRPr b="0" lang="en-US" sz="1400" spc="-1" strike="noStrike">
+              <a:solidFill>
+                <a:srgbClr val="ffffff"/>
+              </a:solidFill>
+              <a:latin typeface="Arial"/>
+            </a:endParaRPr>
+          </a:p>
+        </p:txBody>
+      </p:sp>
+      <p:sp>
+        <p:nvSpPr>
+          <p:cNvPr id="344" name="TextBox 37"/>
+          <p:cNvSpPr/>
+          <p:nvPr/>
+        </p:nvSpPr>
+        <p:spPr>
+          <a:xfrm>
+            <a:off x="2768400" y="914400"/>
+            <a:ext cx="5431320" cy="516960"/>
+          </a:xfrm>
+          <a:prstGeom prst="rect">
+            <a:avLst/>
+          </a:prstGeom>
+          <a:noFill/>
+          <a:ln w="0">
+            <a:noFill/>
+          </a:ln>
+        </p:spPr>
+        <p:style>
+          <a:lnRef idx="0"/>
+          <a:fillRef idx="0"/>
+          <a:effectRef idx="0"/>
+          <a:fontRef idx="minor"/>
+        </p:style>
+        <p:txBody>
+          <a:bodyPr wrap="none" lIns="90000" rIns="90000" tIns="45000" bIns="45000" anchor="t">
+            <a:spAutoFit/>
+          </a:bodyPr>
+          <a:p>
+            <a:pPr>
+              <a:lnSpc>
+                <a:spcPct val="100000"/>
+              </a:lnSpc>
+            </a:pPr>
+            <a:r>
+              <a:rPr b="1" lang="en-US" sz="2800" spc="-1" strike="noStrike">
+                <a:solidFill>
+                  <a:srgbClr val="f5f5f5"/>
+                </a:solidFill>
+                <a:latin typeface="Calibri"/>
+                <a:ea typeface="DejaVu Sans"/>
+              </a:rPr>
+              <a:t>Arithmetic Operators: Tricky Details</a:t>
+            </a:r>
+            <a:endParaRPr b="0" lang="en-US" sz="2800" spc="-1" strike="noStrike">
+              <a:solidFill>
+                <a:srgbClr val="000000"/>
+              </a:solidFill>
+              <a:latin typeface="Arial"/>
+            </a:endParaRPr>
+          </a:p>
+        </p:txBody>
+      </p:sp>
+      <p:sp>
+        <p:nvSpPr>
+          <p:cNvPr id="345" name="TextBox 38"/>
+          <p:cNvSpPr/>
+          <p:nvPr/>
+        </p:nvSpPr>
+        <p:spPr>
+          <a:xfrm>
+            <a:off x="1257120" y="1694880"/>
+            <a:ext cx="9053640" cy="576360"/>
+          </a:xfrm>
+          <a:prstGeom prst="rect">
+            <a:avLst/>
+          </a:prstGeom>
+          <a:noFill/>
+          <a:ln w="0">
+            <a:noFill/>
+          </a:ln>
+        </p:spPr>
+        <p:style>
+          <a:lnRef idx="0"/>
+          <a:fillRef idx="0"/>
+          <a:effectRef idx="0"/>
+          <a:fontRef idx="minor"/>
+        </p:style>
+        <p:txBody>
+          <a:bodyPr wrap="none" lIns="90000" rIns="90000" tIns="45000" bIns="45000" anchor="t">
+            <a:spAutoFit/>
+          </a:bodyPr>
+          <a:p>
+            <a:pPr>
+              <a:lnSpc>
+                <a:spcPct val="100000"/>
+              </a:lnSpc>
+            </a:pPr>
+            <a:r>
+              <a:rPr b="0" lang="en-US" sz="1600" spc="-1" strike="noStrike">
+                <a:solidFill>
+                  <a:srgbClr val="aaaaaa"/>
+                </a:solidFill>
+                <a:latin typeface="Calibri"/>
+                <a:ea typeface="DejaVu Sans"/>
+              </a:rPr>
+              <a:t>Understanding how data types behave behind the scenes during math operations prevents critical bugs. </a:t>
+            </a:r>
+            <a:endParaRPr b="0" lang="en-US" sz="1600" spc="-1" strike="noStrike">
+              <a:solidFill>
+                <a:srgbClr val="000000"/>
+              </a:solidFill>
+              <a:latin typeface="Arial"/>
+            </a:endParaRPr>
+          </a:p>
+          <a:p>
+            <a:pPr>
+              <a:lnSpc>
+                <a:spcPct val="100000"/>
+              </a:lnSpc>
+            </a:pPr>
+            <a:r>
+              <a:rPr b="0" lang="en-US" sz="1600" spc="-1" strike="noStrike">
+                <a:solidFill>
+                  <a:srgbClr val="aaaaaa"/>
+                </a:solidFill>
+                <a:latin typeface="Calibri"/>
+                <a:ea typeface="DejaVu Sans"/>
+              </a:rPr>
+              <a:t>Division by zero rules, character arithmetic, and implicit type promotion are the most common traps in Java.</a:t>
+            </a:r>
+            <a:endParaRPr b="0" lang="en-US" sz="1600" spc="-1" strike="noStrike">
+              <a:solidFill>
+                <a:srgbClr val="000000"/>
+              </a:solidFill>
+              <a:latin typeface="Arial"/>
+            </a:endParaRPr>
+          </a:p>
+        </p:txBody>
+      </p:sp>
+      <p:sp>
+        <p:nvSpPr>
+          <p:cNvPr id="346" name="Rounded Rectangle 86"/>
+          <p:cNvSpPr/>
+          <p:nvPr/>
+        </p:nvSpPr>
+        <p:spPr>
+          <a:xfrm>
+            <a:off x="987480" y="3182040"/>
+            <a:ext cx="3286800" cy="2738160"/>
+          </a:xfrm>
+          <a:prstGeom prst="roundRect">
+            <a:avLst>
+              <a:gd name="adj" fmla="val 16667"/>
+            </a:avLst>
+          </a:prstGeom>
+          <a:solidFill>
+            <a:srgbClr val="08080a"/>
+          </a:solidFill>
+          <a:ln>
+            <a:noFill/>
+          </a:ln>
+          <a:effectLst>
+            <a:outerShdw blurRad="39960" dir="5400000" dist="23040" rotWithShape="0">
+              <a:srgbClr val="000000">
+                <a:alpha val="35000"/>
+              </a:srgbClr>
+            </a:outerShdw>
+          </a:effectLst>
+        </p:spPr>
+        <p:style>
+          <a:lnRef idx="1">
+            <a:schemeClr val="accent1"/>
+          </a:lnRef>
+          <a:fillRef idx="3">
+            <a:schemeClr val="accent1"/>
+          </a:fillRef>
+          <a:effectRef idx="2">
+            <a:schemeClr val="accent1"/>
+          </a:effectRef>
+          <a:fontRef idx="minor"/>
+        </p:style>
+        <p:txBody>
+          <a:bodyPr lIns="90000" rIns="90000" tIns="45000" bIns="45000" anchor="ctr">
+            <a:noAutofit/>
+          </a:bodyPr>
+          <a:p>
+            <a:endParaRPr b="0" lang="en-US" sz="1800" spc="-1" strike="noStrike">
+              <a:solidFill>
+                <a:schemeClr val="lt1"/>
+              </a:solidFill>
+              <a:latin typeface="Calibri"/>
+              <a:ea typeface="DejaVu Sans"/>
+            </a:endParaRPr>
+          </a:p>
+        </p:txBody>
+      </p:sp>
+      <p:sp>
+        <p:nvSpPr>
+          <p:cNvPr id="347" name="Rounded Rectangle 87"/>
+          <p:cNvSpPr/>
+          <p:nvPr/>
+        </p:nvSpPr>
+        <p:spPr>
+          <a:xfrm>
+            <a:off x="685800" y="2743200"/>
+            <a:ext cx="3515400" cy="3655800"/>
+          </a:xfrm>
+          <a:prstGeom prst="roundRect">
+            <a:avLst>
+              <a:gd name="adj" fmla="val 16667"/>
+            </a:avLst>
+          </a:prstGeom>
+          <a:solidFill>
+            <a:srgbClr val="16161c"/>
+          </a:solidFill>
+          <a:ln>
+            <a:solidFill>
+              <a:srgbClr val="464655"/>
+            </a:solidFill>
+            <a:round/>
+          </a:ln>
+          <a:effectLst>
+            <a:outerShdw blurRad="39960" dir="5400000" dist="23040" rotWithShape="0">
+              <a:srgbClr val="000000">
+                <a:alpha val="35000"/>
+              </a:srgbClr>
+            </a:outerShdw>
+          </a:effectLst>
+        </p:spPr>
+        <p:style>
+          <a:lnRef idx="1">
+            <a:schemeClr val="accent1"/>
+          </a:lnRef>
+          <a:fillRef idx="3">
+            <a:schemeClr val="accent1"/>
+          </a:fillRef>
+          <a:effectRef idx="2">
+            <a:schemeClr val="accent1"/>
+          </a:effectRef>
+          <a:fontRef idx="minor"/>
+        </p:style>
+        <p:txBody>
+          <a:bodyPr lIns="90000" rIns="90000" tIns="45000" bIns="45000" anchor="ctr">
+            <a:noAutofit/>
+          </a:bodyPr>
+          <a:p>
+            <a:pPr>
+              <a:lnSpc>
+                <a:spcPct val="100000"/>
+              </a:lnSpc>
+            </a:pPr>
+            <a:r>
+              <a:rPr b="1" lang="en-US" sz="1400" spc="-1" strike="noStrike">
+                <a:solidFill>
+                  <a:schemeClr val="lt1"/>
+                </a:solidFill>
+                <a:latin typeface="Calibri"/>
+                <a:ea typeface="DejaVu Sans"/>
+              </a:rPr>
+              <a:t>1. Zero Division (The Crash Trap):</a:t>
+            </a:r>
+            <a:endParaRPr b="0" lang="en-US" sz="1400" spc="-1" strike="noStrike">
+              <a:solidFill>
+                <a:srgbClr val="ffffff"/>
+              </a:solidFill>
+              <a:latin typeface="Arial"/>
+            </a:endParaRPr>
+          </a:p>
+          <a:p>
+            <a:pPr marL="216000" indent="-216000">
+              <a:lnSpc>
+                <a:spcPct val="100000"/>
+              </a:lnSpc>
+              <a:buClr>
+                <a:srgbClr val="ffffff"/>
+              </a:buClr>
+              <a:buFont typeface="Wingdings" charset="2"/>
+              <a:buChar char=""/>
+            </a:pPr>
+            <a:r>
+              <a:rPr b="0" lang="en-US" sz="1400" spc="-1" strike="noStrike">
+                <a:solidFill>
+                  <a:schemeClr val="lt1"/>
+                </a:solidFill>
+                <a:latin typeface="Calibri"/>
+                <a:ea typeface="DejaVu Sans"/>
+              </a:rPr>
+              <a:t>Dividing an integer (int) by 0 crashes the app (ArithmeticException).</a:t>
+            </a:r>
+            <a:endParaRPr b="0" lang="en-US" sz="1400" spc="-1" strike="noStrike">
+              <a:solidFill>
+                <a:srgbClr val="ffffff"/>
+              </a:solidFill>
+              <a:latin typeface="Arial"/>
+            </a:endParaRPr>
+          </a:p>
+          <a:p>
+            <a:pPr marL="216000" indent="-216000">
+              <a:lnSpc>
+                <a:spcPct val="100000"/>
+              </a:lnSpc>
+              <a:buClr>
+                <a:srgbClr val="ffffff"/>
+              </a:buClr>
+              <a:buFont typeface="Wingdings" charset="2"/>
+              <a:buChar char=""/>
+            </a:pPr>
+            <a:r>
+              <a:rPr b="0" lang="en-US" sz="1400" spc="-1" strike="noStrike">
+                <a:solidFill>
+                  <a:schemeClr val="lt1"/>
+                </a:solidFill>
+                <a:latin typeface="Calibri"/>
+                <a:ea typeface="DejaVu Sans"/>
+              </a:rPr>
+              <a:t>Dividing a decimal (double) by 0 does not crash; it safely returns Infinity or NaN (Not a Number).</a:t>
+            </a:r>
+            <a:endParaRPr b="0" lang="en-US" sz="1400" spc="-1" strike="noStrike">
+              <a:solidFill>
+                <a:srgbClr val="ffffff"/>
+              </a:solidFill>
+              <a:latin typeface="Arial"/>
+            </a:endParaRPr>
+          </a:p>
+          <a:p>
+            <a:pPr>
+              <a:lnSpc>
+                <a:spcPct val="100000"/>
+              </a:lnSpc>
+            </a:pPr>
+            <a:r>
+              <a:rPr b="1" lang="en-US" sz="1400" spc="-1" strike="noStrike">
+                <a:solidFill>
+                  <a:schemeClr val="lt1"/>
+                </a:solidFill>
+                <a:latin typeface="Calibri"/>
+                <a:ea typeface="DejaVu Sans"/>
+              </a:rPr>
+              <a:t>2. Char Arithmetic:</a:t>
+            </a:r>
+            <a:endParaRPr b="0" lang="en-US" sz="1400" spc="-1" strike="noStrike">
+              <a:solidFill>
+                <a:srgbClr val="ffffff"/>
+              </a:solidFill>
+              <a:latin typeface="Arial"/>
+            </a:endParaRPr>
+          </a:p>
+          <a:p>
+            <a:pPr>
+              <a:lnSpc>
+                <a:spcPct val="100000"/>
+              </a:lnSpc>
+            </a:pPr>
+            <a:r>
+              <a:rPr b="0" lang="en-US" sz="1400" spc="-1" strike="noStrike">
+                <a:solidFill>
+                  <a:schemeClr val="lt1"/>
+                </a:solidFill>
+                <a:latin typeface="Calibri"/>
+                <a:ea typeface="DejaVu Sans"/>
+              </a:rPr>
+              <a:t>char types hold numeric values (ASCII) behind the scenes. Adding chars performs math, it does not concatenate text. (Ex: 'A' = 65).</a:t>
+            </a:r>
+            <a:endParaRPr b="0" lang="en-US" sz="1400" spc="-1" strike="noStrike">
+              <a:solidFill>
+                <a:srgbClr val="ffffff"/>
+              </a:solidFill>
+              <a:latin typeface="Arial"/>
+            </a:endParaRPr>
+          </a:p>
+          <a:p>
+            <a:pPr>
+              <a:lnSpc>
+                <a:spcPct val="100000"/>
+              </a:lnSpc>
+            </a:pPr>
+            <a:r>
+              <a:rPr b="1" lang="en-US" sz="1400" spc="-1" strike="noStrike">
+                <a:solidFill>
+                  <a:schemeClr val="lt1"/>
+                </a:solidFill>
+                <a:latin typeface="Calibri"/>
+                <a:ea typeface="DejaVu Sans"/>
+              </a:rPr>
+              <a:t>3. Implicit Type Promotion:</a:t>
+            </a:r>
+            <a:endParaRPr b="0" lang="en-US" sz="1400" spc="-1" strike="noStrike">
+              <a:solidFill>
+                <a:srgbClr val="ffffff"/>
+              </a:solidFill>
+              <a:latin typeface="Arial"/>
+            </a:endParaRPr>
+          </a:p>
+          <a:p>
+            <a:pPr>
+              <a:lnSpc>
+                <a:spcPct val="100000"/>
+              </a:lnSpc>
+            </a:pPr>
+            <a:r>
+              <a:rPr b="0" lang="en-US" sz="1400" spc="-1" strike="noStrike">
+                <a:solidFill>
+                  <a:schemeClr val="lt1"/>
+                </a:solidFill>
+                <a:latin typeface="Calibri"/>
+                <a:ea typeface="DejaVu Sans"/>
+              </a:rPr>
+              <a:t>When adding two byte or short values, Java automatically promotes the result to an int. Assigning the result directly back to a byte causes a compile error!</a:t>
+            </a:r>
+            <a:endParaRPr b="0" lang="en-US" sz="1400" spc="-1" strike="noStrike">
+              <a:solidFill>
+                <a:srgbClr val="ffffff"/>
+              </a:solidFill>
+              <a:latin typeface="Arial"/>
+            </a:endParaRPr>
+          </a:p>
+        </p:txBody>
+      </p:sp>
+      <p:sp>
+        <p:nvSpPr>
+          <p:cNvPr id="348" name="Rounded Rectangle 88"/>
+          <p:cNvSpPr/>
+          <p:nvPr/>
+        </p:nvSpPr>
+        <p:spPr>
+          <a:xfrm>
+            <a:off x="4507920" y="3182040"/>
+            <a:ext cx="3286800" cy="2738160"/>
+          </a:xfrm>
+          <a:prstGeom prst="roundRect">
+            <a:avLst>
+              <a:gd name="adj" fmla="val 16667"/>
+            </a:avLst>
+          </a:prstGeom>
+          <a:solidFill>
+            <a:srgbClr val="08080a"/>
+          </a:solidFill>
+          <a:ln>
+            <a:noFill/>
+          </a:ln>
+          <a:effectLst>
+            <a:outerShdw blurRad="39960" dir="5400000" dist="23040" rotWithShape="0">
+              <a:srgbClr val="000000">
+                <a:alpha val="35000"/>
+              </a:srgbClr>
+            </a:outerShdw>
+          </a:effectLst>
+        </p:spPr>
+        <p:style>
+          <a:lnRef idx="1">
+            <a:schemeClr val="accent1"/>
+          </a:lnRef>
+          <a:fillRef idx="3">
+            <a:schemeClr val="accent1"/>
+          </a:fillRef>
+          <a:effectRef idx="2">
+            <a:schemeClr val="accent1"/>
+          </a:effectRef>
+          <a:fontRef idx="minor"/>
+        </p:style>
+        <p:txBody>
+          <a:bodyPr lIns="90000" rIns="90000" tIns="45000" bIns="45000" anchor="ctr">
+            <a:noAutofit/>
+          </a:bodyPr>
+          <a:p>
+            <a:endParaRPr b="0" lang="en-US" sz="1800" spc="-1" strike="noStrike">
+              <a:solidFill>
+                <a:schemeClr val="lt1"/>
+              </a:solidFill>
+              <a:latin typeface="Calibri"/>
+              <a:ea typeface="DejaVu Sans"/>
+            </a:endParaRPr>
+          </a:p>
+        </p:txBody>
+      </p:sp>
+      <p:sp>
+        <p:nvSpPr>
+          <p:cNvPr id="349" name="Rounded Rectangle 89"/>
+          <p:cNvSpPr/>
+          <p:nvPr/>
+        </p:nvSpPr>
+        <p:spPr>
+          <a:xfrm>
+            <a:off x="4434840" y="2971800"/>
+            <a:ext cx="3286800" cy="3427200"/>
+          </a:xfrm>
+          <a:prstGeom prst="roundRect">
+            <a:avLst>
+              <a:gd name="adj" fmla="val 16667"/>
+            </a:avLst>
+          </a:prstGeom>
+          <a:solidFill>
+            <a:srgbClr val="16161c"/>
+          </a:solidFill>
+          <a:ln>
+            <a:solidFill>
+              <a:srgbClr val="464655"/>
+            </a:solidFill>
+            <a:round/>
+          </a:ln>
+          <a:effectLst>
+            <a:outerShdw blurRad="39960" dir="5400000" dist="23040" rotWithShape="0">
+              <a:srgbClr val="000000">
+                <a:alpha val="35000"/>
+              </a:srgbClr>
+            </a:outerShdw>
+          </a:effectLst>
+        </p:spPr>
+        <p:style>
+          <a:lnRef idx="1">
+            <a:schemeClr val="accent1"/>
+          </a:lnRef>
+          <a:fillRef idx="3">
+            <a:schemeClr val="accent1"/>
+          </a:fillRef>
+          <a:effectRef idx="2">
+            <a:schemeClr val="accent1"/>
+          </a:effectRef>
+          <a:fontRef idx="minor"/>
+        </p:style>
+        <p:txBody>
+          <a:bodyPr lIns="90000" rIns="90000" tIns="45000" bIns="45000" anchor="ctr">
+            <a:noAutofit/>
+          </a:bodyPr>
+          <a:p>
+            <a:pPr>
+              <a:lnSpc>
+                <a:spcPct val="100000"/>
+              </a:lnSpc>
+            </a:pPr>
+            <a:r>
+              <a:rPr b="0" lang="en-US" sz="1600" spc="-1" strike="noStrike">
+                <a:solidFill>
+                  <a:schemeClr val="lt1"/>
+                </a:solidFill>
+                <a:latin typeface="Calibri"/>
+                <a:ea typeface="DejaVu Sans"/>
+              </a:rPr>
+              <a:t>[ Behind the Scenes Data Conversions ]</a:t>
+            </a:r>
+            <a:endParaRPr b="0" lang="en-US" sz="1600" spc="-1" strike="noStrike">
+              <a:solidFill>
+                <a:srgbClr val="ffffff"/>
+              </a:solidFill>
+              <a:latin typeface="Arial"/>
+            </a:endParaRPr>
+          </a:p>
+          <a:p>
+            <a:pPr>
+              <a:lnSpc>
+                <a:spcPct val="100000"/>
+              </a:lnSpc>
+            </a:pPr>
+            <a:r>
+              <a:rPr b="0" lang="en-US" sz="1600" spc="-1" strike="noStrike">
+                <a:solidFill>
+                  <a:schemeClr val="lt1"/>
+                </a:solidFill>
+                <a:latin typeface="Calibri"/>
+                <a:ea typeface="DejaVu Sans"/>
+              </a:rPr>
+              <a:t>├──</a:t>
+            </a:r>
+            <a:r>
+              <a:rPr b="0" lang="en-US" sz="1600" spc="-1" strike="noStrike">
+                <a:solidFill>
+                  <a:schemeClr val="lt1"/>
+                </a:solidFill>
+                <a:latin typeface="Calibri"/>
+                <a:ea typeface="DejaVu Sans"/>
+              </a:rPr>
+              <a:t>&gt; Zero Division</a:t>
+            </a:r>
+            <a:endParaRPr b="0" lang="en-US" sz="1600" spc="-1" strike="noStrike">
+              <a:solidFill>
+                <a:srgbClr val="ffffff"/>
+              </a:solidFill>
+              <a:latin typeface="Arial"/>
+            </a:endParaRPr>
+          </a:p>
+          <a:p>
+            <a:pPr>
+              <a:lnSpc>
+                <a:spcPct val="100000"/>
+              </a:lnSpc>
+            </a:pPr>
+            <a:r>
+              <a:rPr b="0" lang="en-US" sz="1600" spc="-1" strike="noStrike">
+                <a:solidFill>
+                  <a:schemeClr val="lt1"/>
+                </a:solidFill>
+                <a:latin typeface="Calibri"/>
+                <a:ea typeface="DejaVu Sans"/>
+              </a:rPr>
+              <a:t>│ ├── </a:t>
+            </a:r>
+            <a:r>
+              <a:rPr b="0" lang="en-US" sz="1600" spc="-1" strike="noStrike">
+                <a:solidFill>
+                  <a:schemeClr val="lt1"/>
+                </a:solidFill>
+                <a:latin typeface="Calibri"/>
+                <a:ea typeface="DejaVu Sans"/>
+              </a:rPr>
+              <a:t>5 / 0 ➔ ERROR! (Crash)</a:t>
+            </a:r>
+            <a:endParaRPr b="0" lang="en-US" sz="1600" spc="-1" strike="noStrike">
+              <a:solidFill>
+                <a:srgbClr val="ffffff"/>
+              </a:solidFill>
+              <a:latin typeface="Arial"/>
+            </a:endParaRPr>
+          </a:p>
+          <a:p>
+            <a:pPr>
+              <a:lnSpc>
+                <a:spcPct val="100000"/>
+              </a:lnSpc>
+            </a:pPr>
+            <a:r>
+              <a:rPr b="0" lang="en-US" sz="1600" spc="-1" strike="noStrike">
+                <a:solidFill>
+                  <a:schemeClr val="lt1"/>
+                </a:solidFill>
+                <a:latin typeface="Calibri"/>
+                <a:ea typeface="DejaVu Sans"/>
+              </a:rPr>
+              <a:t>│ ├── </a:t>
+            </a:r>
+            <a:r>
+              <a:rPr b="0" lang="en-US" sz="1600" spc="-1" strike="noStrike">
+                <a:solidFill>
+                  <a:schemeClr val="lt1"/>
+                </a:solidFill>
+                <a:latin typeface="Calibri"/>
+                <a:ea typeface="DejaVu Sans"/>
+              </a:rPr>
+              <a:t>5.0 / 0 ➔ Result: Infinity</a:t>
+            </a:r>
+            <a:endParaRPr b="0" lang="en-US" sz="1600" spc="-1" strike="noStrike">
+              <a:solidFill>
+                <a:srgbClr val="ffffff"/>
+              </a:solidFill>
+              <a:latin typeface="Arial"/>
+            </a:endParaRPr>
+          </a:p>
+          <a:p>
+            <a:pPr>
+              <a:lnSpc>
+                <a:spcPct val="100000"/>
+              </a:lnSpc>
+            </a:pPr>
+            <a:r>
+              <a:rPr b="0" lang="en-US" sz="1600" spc="-1" strike="noStrike">
+                <a:solidFill>
+                  <a:schemeClr val="lt1"/>
+                </a:solidFill>
+                <a:latin typeface="Calibri"/>
+                <a:ea typeface="DejaVu Sans"/>
+              </a:rPr>
+              <a:t>│ └── </a:t>
+            </a:r>
+            <a:r>
+              <a:rPr b="0" lang="en-US" sz="1600" spc="-1" strike="noStrike">
+                <a:solidFill>
+                  <a:schemeClr val="lt1"/>
+                </a:solidFill>
+                <a:latin typeface="Calibri"/>
+                <a:ea typeface="DejaVu Sans"/>
+              </a:rPr>
+              <a:t>0.0 / 0 ➔ Result: NaN</a:t>
+            </a:r>
+            <a:endParaRPr b="0" lang="en-US" sz="1600" spc="-1" strike="noStrike">
+              <a:solidFill>
+                <a:srgbClr val="ffffff"/>
+              </a:solidFill>
+              <a:latin typeface="Arial"/>
+            </a:endParaRPr>
+          </a:p>
+          <a:p>
+            <a:pPr>
+              <a:lnSpc>
+                <a:spcPct val="100000"/>
+              </a:lnSpc>
+            </a:pPr>
+            <a:r>
+              <a:rPr b="0" lang="en-US" sz="1600" spc="-1" strike="noStrike">
+                <a:solidFill>
+                  <a:schemeClr val="lt1"/>
+                </a:solidFill>
+                <a:latin typeface="Calibri"/>
+                <a:ea typeface="DejaVu Sans"/>
+              </a:rPr>
+              <a:t>│</a:t>
+            </a:r>
+            <a:endParaRPr b="0" lang="en-US" sz="1600" spc="-1" strike="noStrike">
+              <a:solidFill>
+                <a:srgbClr val="ffffff"/>
+              </a:solidFill>
+              <a:latin typeface="Arial"/>
+            </a:endParaRPr>
+          </a:p>
+          <a:p>
+            <a:pPr>
+              <a:lnSpc>
+                <a:spcPct val="100000"/>
+              </a:lnSpc>
+            </a:pPr>
+            <a:r>
+              <a:rPr b="0" lang="en-US" sz="1600" spc="-1" strike="noStrike">
+                <a:solidFill>
+                  <a:schemeClr val="lt1"/>
+                </a:solidFill>
+                <a:latin typeface="Calibri"/>
+                <a:ea typeface="DejaVu Sans"/>
+              </a:rPr>
+              <a:t>├──</a:t>
+            </a:r>
+            <a:r>
+              <a:rPr b="0" lang="en-US" sz="1600" spc="-1" strike="noStrike">
+                <a:solidFill>
+                  <a:schemeClr val="lt1"/>
+                </a:solidFill>
+                <a:latin typeface="Calibri"/>
+                <a:ea typeface="DejaVu Sans"/>
+              </a:rPr>
+              <a:t>&gt; Char Math</a:t>
+            </a:r>
+            <a:endParaRPr b="0" lang="en-US" sz="1600" spc="-1" strike="noStrike">
+              <a:solidFill>
+                <a:srgbClr val="ffffff"/>
+              </a:solidFill>
+              <a:latin typeface="Arial"/>
+            </a:endParaRPr>
+          </a:p>
+          <a:p>
+            <a:pPr>
+              <a:lnSpc>
+                <a:spcPct val="100000"/>
+              </a:lnSpc>
+            </a:pPr>
+            <a:r>
+              <a:rPr b="0" lang="en-US" sz="1600" spc="-1" strike="noStrike">
+                <a:solidFill>
+                  <a:schemeClr val="lt1"/>
+                </a:solidFill>
+                <a:latin typeface="Calibri"/>
+                <a:ea typeface="DejaVu Sans"/>
+              </a:rPr>
+              <a:t>│ └── </a:t>
+            </a:r>
+            <a:r>
+              <a:rPr b="0" lang="en-US" sz="1600" spc="-1" strike="noStrike">
+                <a:solidFill>
+                  <a:schemeClr val="lt1"/>
+                </a:solidFill>
+                <a:latin typeface="Calibri"/>
+                <a:ea typeface="DejaVu Sans"/>
+              </a:rPr>
+              <a:t>'A' + 1 ➔ 65 + 1 = 66</a:t>
+            </a:r>
+            <a:endParaRPr b="0" lang="en-US" sz="1600" spc="-1" strike="noStrike">
+              <a:solidFill>
+                <a:srgbClr val="ffffff"/>
+              </a:solidFill>
+              <a:latin typeface="Arial"/>
+            </a:endParaRPr>
+          </a:p>
+          <a:p>
+            <a:pPr>
+              <a:lnSpc>
+                <a:spcPct val="100000"/>
+              </a:lnSpc>
+            </a:pPr>
+            <a:r>
+              <a:rPr b="0" lang="en-US" sz="1600" spc="-1" strike="noStrike">
+                <a:solidFill>
+                  <a:schemeClr val="lt1"/>
+                </a:solidFill>
+                <a:latin typeface="Calibri"/>
+                <a:ea typeface="DejaVu Sans"/>
+              </a:rPr>
+              <a:t>│</a:t>
+            </a:r>
+            <a:endParaRPr b="0" lang="en-US" sz="1600" spc="-1" strike="noStrike">
+              <a:solidFill>
+                <a:srgbClr val="ffffff"/>
+              </a:solidFill>
+              <a:latin typeface="Arial"/>
+            </a:endParaRPr>
+          </a:p>
+          <a:p>
+            <a:pPr>
+              <a:lnSpc>
+                <a:spcPct val="100000"/>
+              </a:lnSpc>
+            </a:pPr>
+            <a:r>
+              <a:rPr b="0" lang="en-US" sz="1600" spc="-1" strike="noStrike">
+                <a:solidFill>
+                  <a:schemeClr val="lt1"/>
+                </a:solidFill>
+                <a:latin typeface="Calibri"/>
+                <a:ea typeface="DejaVu Sans"/>
+              </a:rPr>
+              <a:t>└──</a:t>
+            </a:r>
+            <a:r>
+              <a:rPr b="0" lang="en-US" sz="1600" spc="-1" strike="noStrike">
+                <a:solidFill>
+                  <a:schemeClr val="lt1"/>
+                </a:solidFill>
+                <a:latin typeface="Calibri"/>
+                <a:ea typeface="DejaVu Sans"/>
+              </a:rPr>
+              <a:t>&gt; Byte Addition</a:t>
+            </a:r>
+            <a:endParaRPr b="0" lang="en-US" sz="1600" spc="-1" strike="noStrike">
+              <a:solidFill>
+                <a:srgbClr val="ffffff"/>
+              </a:solidFill>
+              <a:latin typeface="Arial"/>
+            </a:endParaRPr>
+          </a:p>
+          <a:p>
+            <a:pPr>
+              <a:lnSpc>
+                <a:spcPct val="100000"/>
+              </a:lnSpc>
+            </a:pPr>
+            <a:r>
+              <a:rPr b="0" lang="en-US" sz="1600" spc="-1" strike="noStrike">
+                <a:solidFill>
+                  <a:schemeClr val="lt1"/>
+                </a:solidFill>
+                <a:latin typeface="Calibri"/>
+                <a:ea typeface="DejaVu Sans"/>
+              </a:rPr>
+              <a:t>├── </a:t>
+            </a:r>
+            <a:r>
+              <a:rPr b="0" lang="en-US" sz="1600" spc="-1" strike="noStrike">
+                <a:solidFill>
+                  <a:schemeClr val="lt1"/>
+                </a:solidFill>
+                <a:latin typeface="Calibri"/>
+                <a:ea typeface="DejaVu Sans"/>
+              </a:rPr>
+              <a:t>byte x = 10; byte y = 20;</a:t>
+            </a:r>
+            <a:endParaRPr b="0" lang="en-US" sz="1600" spc="-1" strike="noStrike">
+              <a:solidFill>
+                <a:srgbClr val="ffffff"/>
+              </a:solidFill>
+              <a:latin typeface="Arial"/>
+            </a:endParaRPr>
+          </a:p>
+          <a:p>
+            <a:pPr>
+              <a:lnSpc>
+                <a:spcPct val="100000"/>
+              </a:lnSpc>
+            </a:pPr>
+            <a:r>
+              <a:rPr b="0" lang="en-US" sz="1600" spc="-1" strike="noStrike">
+                <a:solidFill>
+                  <a:schemeClr val="lt1"/>
+                </a:solidFill>
+                <a:latin typeface="Calibri"/>
+                <a:ea typeface="DejaVu Sans"/>
+              </a:rPr>
+              <a:t>└── </a:t>
+            </a:r>
+            <a:r>
+              <a:rPr b="0" lang="en-US" sz="1600" spc="-1" strike="noStrike">
+                <a:solidFill>
+                  <a:schemeClr val="lt1"/>
+                </a:solidFill>
+                <a:latin typeface="Calibri"/>
+                <a:ea typeface="DejaVu Sans"/>
+              </a:rPr>
+              <a:t>byte z = x + y; ➔ ERROR! (Result is int)</a:t>
+            </a:r>
+            <a:endParaRPr b="0" lang="en-US" sz="1600" spc="-1" strike="noStrike">
+              <a:solidFill>
+                <a:srgbClr val="ffffff"/>
+              </a:solidFill>
+              <a:latin typeface="Arial"/>
+            </a:endParaRPr>
+          </a:p>
+        </p:txBody>
+      </p:sp>
+      <p:sp>
+        <p:nvSpPr>
+          <p:cNvPr id="350" name="Rounded Rectangle 90"/>
+          <p:cNvSpPr/>
+          <p:nvPr/>
+        </p:nvSpPr>
+        <p:spPr>
+          <a:xfrm>
+            <a:off x="8028360" y="3182040"/>
+            <a:ext cx="3286800" cy="2738160"/>
+          </a:xfrm>
+          <a:prstGeom prst="roundRect">
+            <a:avLst>
+              <a:gd name="adj" fmla="val 16667"/>
+            </a:avLst>
+          </a:prstGeom>
+          <a:solidFill>
+            <a:srgbClr val="08080a"/>
+          </a:solidFill>
+          <a:ln>
+            <a:noFill/>
+          </a:ln>
+          <a:effectLst>
+            <a:outerShdw blurRad="39960" dir="5400000" dist="23040" rotWithShape="0">
+              <a:srgbClr val="000000">
+                <a:alpha val="35000"/>
+              </a:srgbClr>
+            </a:outerShdw>
+          </a:effectLst>
+        </p:spPr>
+        <p:style>
+          <a:lnRef idx="1">
+            <a:schemeClr val="accent1"/>
+          </a:lnRef>
+          <a:fillRef idx="3">
+            <a:schemeClr val="accent1"/>
+          </a:fillRef>
+          <a:effectRef idx="2">
+            <a:schemeClr val="accent1"/>
+          </a:effectRef>
+          <a:fontRef idx="minor"/>
+        </p:style>
+        <p:txBody>
+          <a:bodyPr lIns="90000" rIns="90000" tIns="45000" bIns="45000" anchor="ctr">
+            <a:noAutofit/>
+          </a:bodyPr>
+          <a:p>
+            <a:endParaRPr b="0" lang="en-US" sz="1800" spc="-1" strike="noStrike">
+              <a:solidFill>
+                <a:schemeClr val="lt1"/>
+              </a:solidFill>
+              <a:latin typeface="Calibri"/>
+              <a:ea typeface="DejaVu Sans"/>
+            </a:endParaRPr>
+          </a:p>
+        </p:txBody>
+      </p:sp>
+      <p:sp>
+        <p:nvSpPr>
+          <p:cNvPr id="351" name="Rounded Rectangle 91"/>
+          <p:cNvSpPr/>
+          <p:nvPr/>
+        </p:nvSpPr>
+        <p:spPr>
+          <a:xfrm>
+            <a:off x="8001000" y="2514600"/>
+            <a:ext cx="3657600" cy="3885840"/>
+          </a:xfrm>
+          <a:prstGeom prst="roundRect">
+            <a:avLst>
+              <a:gd name="adj" fmla="val 16667"/>
+            </a:avLst>
+          </a:prstGeom>
+          <a:solidFill>
+            <a:srgbClr val="16161c"/>
+          </a:solidFill>
+          <a:ln>
+            <a:solidFill>
+              <a:srgbClr val="464655"/>
+            </a:solidFill>
+            <a:round/>
+          </a:ln>
+          <a:effectLst>
+            <a:outerShdw blurRad="39960" dir="5400000" dist="23040" rotWithShape="0">
+              <a:srgbClr val="000000">
+                <a:alpha val="35000"/>
+              </a:srgbClr>
+            </a:outerShdw>
+          </a:effectLst>
+        </p:spPr>
+        <p:style>
+          <a:lnRef idx="1">
+            <a:schemeClr val="accent1"/>
+          </a:lnRef>
+          <a:fillRef idx="3">
+            <a:schemeClr val="accent1"/>
+          </a:fillRef>
+          <a:effectRef idx="2">
+            <a:schemeClr val="accent1"/>
+          </a:effectRef>
+          <a:fontRef idx="minor"/>
+        </p:style>
+        <p:txBody>
+          <a:bodyPr lIns="90000" rIns="90000" tIns="45000" bIns="45000" anchor="ctr">
+            <a:noAutofit/>
+          </a:bodyPr>
+          <a:p>
+            <a:pPr algn="ctr">
+              <a:lnSpc>
+                <a:spcPct val="100000"/>
+              </a:lnSpc>
+            </a:pPr>
+            <a:r>
+              <a:rPr b="0" lang="en-US" sz="880" spc="-1" strike="noStrike">
+                <a:solidFill>
+                  <a:srgbClr val="78ffc8"/>
+                </a:solidFill>
+                <a:latin typeface="Consolas"/>
+                <a:ea typeface="DejaVu Sans"/>
+              </a:rPr>
+              <a:t>public class ArithmeticNuances {</a:t>
+            </a:r>
+            <a:endParaRPr b="0" lang="en-US" sz="880" spc="-1" strike="noStrike">
+              <a:solidFill>
+                <a:srgbClr val="ffffff"/>
+              </a:solidFill>
+              <a:latin typeface="Arial"/>
+            </a:endParaRPr>
+          </a:p>
+          <a:p>
+            <a:pPr algn="ctr">
+              <a:lnSpc>
+                <a:spcPct val="100000"/>
+              </a:lnSpc>
+            </a:pPr>
+            <a:r>
+              <a:rPr b="0" lang="en-US" sz="880" spc="-1" strike="noStrike">
+                <a:solidFill>
+                  <a:srgbClr val="78ffc8"/>
+                </a:solidFill>
+                <a:latin typeface="Consolas"/>
+                <a:ea typeface="DejaVu Sans"/>
+              </a:rPr>
+              <a:t>    </a:t>
+            </a:r>
+            <a:r>
+              <a:rPr b="0" lang="en-US" sz="880" spc="-1" strike="noStrike">
+                <a:solidFill>
+                  <a:srgbClr val="78ffc8"/>
+                </a:solidFill>
+                <a:latin typeface="Consolas"/>
+                <a:ea typeface="DejaVu Sans"/>
+              </a:rPr>
+              <a:t>public static void main(String[] args) {</a:t>
+            </a:r>
+            <a:endParaRPr b="0" lang="en-US" sz="880" spc="-1" strike="noStrike">
+              <a:solidFill>
+                <a:srgbClr val="ffffff"/>
+              </a:solidFill>
+              <a:latin typeface="Arial"/>
+            </a:endParaRPr>
+          </a:p>
+          <a:p>
+            <a:pPr algn="ctr">
+              <a:lnSpc>
+                <a:spcPct val="100000"/>
+              </a:lnSpc>
+            </a:pPr>
+            <a:r>
+              <a:rPr b="0" lang="en-US" sz="880" spc="-1" strike="noStrike">
+                <a:solidFill>
+                  <a:srgbClr val="78ffc8"/>
+                </a:solidFill>
+                <a:latin typeface="Consolas"/>
+                <a:ea typeface="DejaVu Sans"/>
+              </a:rPr>
+              <a:t>        </a:t>
+            </a:r>
+            <a:endParaRPr b="0" lang="en-US" sz="880" spc="-1" strike="noStrike">
+              <a:solidFill>
+                <a:srgbClr val="ffffff"/>
+              </a:solidFill>
+              <a:latin typeface="Arial"/>
+            </a:endParaRPr>
+          </a:p>
+          <a:p>
+            <a:pPr algn="ctr">
+              <a:lnSpc>
+                <a:spcPct val="100000"/>
+              </a:lnSpc>
+            </a:pPr>
+            <a:r>
+              <a:rPr b="0" lang="en-US" sz="880" spc="-1" strike="noStrike">
+                <a:solidFill>
+                  <a:srgbClr val="78ffc8"/>
+                </a:solidFill>
+                <a:latin typeface="Consolas"/>
+                <a:ea typeface="DejaVu Sans"/>
+              </a:rPr>
+              <a:t>        </a:t>
+            </a:r>
+            <a:r>
+              <a:rPr b="0" lang="en-US" sz="880" spc="-1" strike="noStrike">
+                <a:solidFill>
+                  <a:srgbClr val="78ffc8"/>
+                </a:solidFill>
+                <a:latin typeface="Consolas"/>
+                <a:ea typeface="DejaVu Sans"/>
+              </a:rPr>
+              <a:t>// 1. ZERO DIVISION TRAP</a:t>
+            </a:r>
+            <a:endParaRPr b="0" lang="en-US" sz="880" spc="-1" strike="noStrike">
+              <a:solidFill>
+                <a:srgbClr val="ffffff"/>
+              </a:solidFill>
+              <a:latin typeface="Arial"/>
+            </a:endParaRPr>
+          </a:p>
+          <a:p>
+            <a:pPr algn="ctr">
+              <a:lnSpc>
+                <a:spcPct val="100000"/>
+              </a:lnSpc>
+            </a:pPr>
+            <a:r>
+              <a:rPr b="0" lang="en-US" sz="880" spc="-1" strike="noStrike">
+                <a:solidFill>
+                  <a:srgbClr val="78ffc8"/>
+                </a:solidFill>
+                <a:latin typeface="Consolas"/>
+                <a:ea typeface="DejaVu Sans"/>
+              </a:rPr>
+              <a:t>        </a:t>
+            </a:r>
+            <a:r>
+              <a:rPr b="0" lang="en-US" sz="880" spc="-1" strike="noStrike">
+                <a:solidFill>
+                  <a:srgbClr val="78ffc8"/>
+                </a:solidFill>
+                <a:latin typeface="Consolas"/>
+                <a:ea typeface="DejaVu Sans"/>
+              </a:rPr>
+              <a:t>// int crash = 5 / 0; // Throws Exception!</a:t>
+            </a:r>
+            <a:endParaRPr b="0" lang="en-US" sz="880" spc="-1" strike="noStrike">
+              <a:solidFill>
+                <a:srgbClr val="ffffff"/>
+              </a:solidFill>
+              <a:latin typeface="Arial"/>
+            </a:endParaRPr>
+          </a:p>
+          <a:p>
+            <a:pPr algn="ctr">
+              <a:lnSpc>
+                <a:spcPct val="100000"/>
+              </a:lnSpc>
+            </a:pPr>
+            <a:r>
+              <a:rPr b="0" lang="en-US" sz="880" spc="-1" strike="noStrike">
+                <a:solidFill>
+                  <a:srgbClr val="78ffc8"/>
+                </a:solidFill>
+                <a:latin typeface="Consolas"/>
+                <a:ea typeface="DejaVu Sans"/>
+              </a:rPr>
+              <a:t>        </a:t>
+            </a:r>
+            <a:r>
+              <a:rPr b="0" lang="en-US" sz="880" spc="-1" strike="noStrike">
+                <a:solidFill>
+                  <a:srgbClr val="78ffc8"/>
+                </a:solidFill>
+                <a:latin typeface="Consolas"/>
+                <a:ea typeface="DejaVu Sans"/>
+              </a:rPr>
+              <a:t>double infinity = 5.0 / 0;   // Infinity</a:t>
+            </a:r>
+            <a:endParaRPr b="0" lang="en-US" sz="880" spc="-1" strike="noStrike">
+              <a:solidFill>
+                <a:srgbClr val="ffffff"/>
+              </a:solidFill>
+              <a:latin typeface="Arial"/>
+            </a:endParaRPr>
+          </a:p>
+          <a:p>
+            <a:pPr algn="ctr">
+              <a:lnSpc>
+                <a:spcPct val="100000"/>
+              </a:lnSpc>
+            </a:pPr>
+            <a:r>
+              <a:rPr b="0" lang="en-US" sz="880" spc="-1" strike="noStrike">
+                <a:solidFill>
+                  <a:srgbClr val="78ffc8"/>
+                </a:solidFill>
+                <a:latin typeface="Consolas"/>
+                <a:ea typeface="DejaVu Sans"/>
+              </a:rPr>
+              <a:t>        </a:t>
+            </a:r>
+            <a:r>
+              <a:rPr b="0" lang="en-US" sz="880" spc="-1" strike="noStrike">
+                <a:solidFill>
+                  <a:srgbClr val="78ffc8"/>
+                </a:solidFill>
+                <a:latin typeface="Consolas"/>
+                <a:ea typeface="DejaVu Sans"/>
+              </a:rPr>
+              <a:t>double undefined = 0.0 / 0.0;// NaN</a:t>
+            </a:r>
+            <a:endParaRPr b="0" lang="en-US" sz="880" spc="-1" strike="noStrike">
+              <a:solidFill>
+                <a:srgbClr val="ffffff"/>
+              </a:solidFill>
+              <a:latin typeface="Arial"/>
+            </a:endParaRPr>
+          </a:p>
+          <a:p>
+            <a:pPr algn="ctr">
+              <a:lnSpc>
+                <a:spcPct val="100000"/>
+              </a:lnSpc>
+            </a:pPr>
+            <a:r>
+              <a:rPr b="0" lang="en-US" sz="880" spc="-1" strike="noStrike">
+                <a:solidFill>
+                  <a:srgbClr val="78ffc8"/>
+                </a:solidFill>
+                <a:latin typeface="Consolas"/>
+                <a:ea typeface="DejaVu Sans"/>
+              </a:rPr>
+              <a:t>        </a:t>
+            </a:r>
+            <a:endParaRPr b="0" lang="en-US" sz="880" spc="-1" strike="noStrike">
+              <a:solidFill>
+                <a:srgbClr val="ffffff"/>
+              </a:solidFill>
+              <a:latin typeface="Arial"/>
+            </a:endParaRPr>
+          </a:p>
+          <a:p>
+            <a:pPr algn="ctr">
+              <a:lnSpc>
+                <a:spcPct val="100000"/>
+              </a:lnSpc>
+            </a:pPr>
+            <a:r>
+              <a:rPr b="0" lang="en-US" sz="880" spc="-1" strike="noStrike">
+                <a:solidFill>
+                  <a:srgbClr val="78ffc8"/>
+                </a:solidFill>
+                <a:latin typeface="Consolas"/>
+                <a:ea typeface="DejaVu Sans"/>
+              </a:rPr>
+              <a:t>        </a:t>
+            </a:r>
+            <a:r>
+              <a:rPr b="0" lang="en-US" sz="880" spc="-1" strike="noStrike">
+                <a:solidFill>
+                  <a:srgbClr val="78ffc8"/>
+                </a:solidFill>
+                <a:latin typeface="Consolas"/>
+                <a:ea typeface="DejaVu Sans"/>
+              </a:rPr>
+              <a:t>// 2. CHAR MATH</a:t>
+            </a:r>
+            <a:endParaRPr b="0" lang="en-US" sz="880" spc="-1" strike="noStrike">
+              <a:solidFill>
+                <a:srgbClr val="ffffff"/>
+              </a:solidFill>
+              <a:latin typeface="Arial"/>
+            </a:endParaRPr>
+          </a:p>
+          <a:p>
+            <a:pPr algn="ctr">
+              <a:lnSpc>
+                <a:spcPct val="100000"/>
+              </a:lnSpc>
+            </a:pPr>
+            <a:r>
+              <a:rPr b="0" lang="en-US" sz="880" spc="-1" strike="noStrike">
+                <a:solidFill>
+                  <a:srgbClr val="78ffc8"/>
+                </a:solidFill>
+                <a:latin typeface="Consolas"/>
+                <a:ea typeface="DejaVu Sans"/>
+              </a:rPr>
+              <a:t>        </a:t>
+            </a:r>
+            <a:r>
+              <a:rPr b="0" lang="en-US" sz="880" spc="-1" strike="noStrike">
+                <a:solidFill>
+                  <a:srgbClr val="78ffc8"/>
+                </a:solidFill>
+                <a:latin typeface="Consolas"/>
+                <a:ea typeface="DejaVu Sans"/>
+              </a:rPr>
+              <a:t>char letter = 'A'; // ASCII value is 65</a:t>
+            </a:r>
+            <a:endParaRPr b="0" lang="en-US" sz="880" spc="-1" strike="noStrike">
+              <a:solidFill>
+                <a:srgbClr val="ffffff"/>
+              </a:solidFill>
+              <a:latin typeface="Arial"/>
+            </a:endParaRPr>
+          </a:p>
+          <a:p>
+            <a:pPr algn="ctr">
+              <a:lnSpc>
+                <a:spcPct val="100000"/>
+              </a:lnSpc>
+            </a:pPr>
+            <a:r>
+              <a:rPr b="0" lang="en-US" sz="880" spc="-1" strike="noStrike">
+                <a:solidFill>
+                  <a:srgbClr val="78ffc8"/>
+                </a:solidFill>
+                <a:latin typeface="Consolas"/>
+                <a:ea typeface="DejaVu Sans"/>
+              </a:rPr>
+              <a:t>        </a:t>
+            </a:r>
+            <a:r>
+              <a:rPr b="0" lang="en-US" sz="880" spc="-1" strike="noStrike">
+                <a:solidFill>
+                  <a:srgbClr val="78ffc8"/>
+                </a:solidFill>
+                <a:latin typeface="Consolas"/>
+                <a:ea typeface="DejaVu Sans"/>
+              </a:rPr>
+              <a:t>int charSum = letter + 5; // Result: 70</a:t>
+            </a:r>
+            <a:endParaRPr b="0" lang="en-US" sz="880" spc="-1" strike="noStrike">
+              <a:solidFill>
+                <a:srgbClr val="ffffff"/>
+              </a:solidFill>
+              <a:latin typeface="Arial"/>
+            </a:endParaRPr>
+          </a:p>
+          <a:p>
+            <a:pPr algn="ctr">
+              <a:lnSpc>
+                <a:spcPct val="100000"/>
+              </a:lnSpc>
+            </a:pPr>
+            <a:r>
+              <a:rPr b="0" lang="en-US" sz="880" spc="-1" strike="noStrike">
+                <a:solidFill>
+                  <a:srgbClr val="78ffc8"/>
+                </a:solidFill>
+                <a:latin typeface="Consolas"/>
+                <a:ea typeface="DejaVu Sans"/>
+              </a:rPr>
+              <a:t>        </a:t>
+            </a:r>
+            <a:r>
+              <a:rPr b="0" lang="en-US" sz="880" spc="-1" strike="noStrike">
+                <a:solidFill>
+                  <a:srgbClr val="78ffc8"/>
+                </a:solidFill>
+                <a:latin typeface="Consolas"/>
+                <a:ea typeface="DejaVu Sans"/>
+              </a:rPr>
+              <a:t>char nextLetter = (char) (letter + 1); // 'B'</a:t>
+            </a:r>
+            <a:endParaRPr b="0" lang="en-US" sz="880" spc="-1" strike="noStrike">
+              <a:solidFill>
+                <a:srgbClr val="ffffff"/>
+              </a:solidFill>
+              <a:latin typeface="Arial"/>
+            </a:endParaRPr>
+          </a:p>
+          <a:p>
+            <a:pPr algn="ctr">
+              <a:lnSpc>
+                <a:spcPct val="100000"/>
+              </a:lnSpc>
+            </a:pPr>
+            <a:r>
+              <a:rPr b="0" lang="en-US" sz="880" spc="-1" strike="noStrike">
+                <a:solidFill>
+                  <a:srgbClr val="78ffc8"/>
+                </a:solidFill>
+                <a:latin typeface="Consolas"/>
+                <a:ea typeface="DejaVu Sans"/>
+              </a:rPr>
+              <a:t>        </a:t>
+            </a:r>
+            <a:endParaRPr b="0" lang="en-US" sz="880" spc="-1" strike="noStrike">
+              <a:solidFill>
+                <a:srgbClr val="ffffff"/>
+              </a:solidFill>
+              <a:latin typeface="Arial"/>
+            </a:endParaRPr>
+          </a:p>
+          <a:p>
+            <a:pPr algn="ctr">
+              <a:lnSpc>
+                <a:spcPct val="100000"/>
+              </a:lnSpc>
+            </a:pPr>
+            <a:r>
+              <a:rPr b="0" lang="en-US" sz="880" spc="-1" strike="noStrike">
+                <a:solidFill>
+                  <a:srgbClr val="78ffc8"/>
+                </a:solidFill>
+                <a:latin typeface="Consolas"/>
+                <a:ea typeface="DejaVu Sans"/>
+              </a:rPr>
+              <a:t>        </a:t>
+            </a:r>
+            <a:r>
+              <a:rPr b="0" lang="en-US" sz="880" spc="-1" strike="noStrike">
+                <a:solidFill>
+                  <a:srgbClr val="78ffc8"/>
+                </a:solidFill>
+                <a:latin typeface="Consolas"/>
+                <a:ea typeface="DejaVu Sans"/>
+              </a:rPr>
+              <a:t>// 3. IMPLICIT INT PROMOTION</a:t>
+            </a:r>
+            <a:endParaRPr b="0" lang="en-US" sz="880" spc="-1" strike="noStrike">
+              <a:solidFill>
+                <a:srgbClr val="ffffff"/>
+              </a:solidFill>
+              <a:latin typeface="Arial"/>
+            </a:endParaRPr>
+          </a:p>
+          <a:p>
+            <a:pPr algn="ctr">
+              <a:lnSpc>
+                <a:spcPct val="100000"/>
+              </a:lnSpc>
+            </a:pPr>
+            <a:r>
+              <a:rPr b="0" lang="en-US" sz="880" spc="-1" strike="noStrike">
+                <a:solidFill>
+                  <a:srgbClr val="78ffc8"/>
+                </a:solidFill>
+                <a:latin typeface="Consolas"/>
+                <a:ea typeface="DejaVu Sans"/>
+              </a:rPr>
+              <a:t>        </a:t>
+            </a:r>
+            <a:r>
+              <a:rPr b="0" lang="en-US" sz="880" spc="-1" strike="noStrike">
+                <a:solidFill>
+                  <a:srgbClr val="78ffc8"/>
+                </a:solidFill>
+                <a:latin typeface="Consolas"/>
+                <a:ea typeface="DejaVu Sans"/>
+              </a:rPr>
+              <a:t>byte b1 = 10;</a:t>
+            </a:r>
+            <a:endParaRPr b="0" lang="en-US" sz="880" spc="-1" strike="noStrike">
+              <a:solidFill>
+                <a:srgbClr val="ffffff"/>
+              </a:solidFill>
+              <a:latin typeface="Arial"/>
+            </a:endParaRPr>
+          </a:p>
+          <a:p>
+            <a:pPr algn="ctr">
+              <a:lnSpc>
+                <a:spcPct val="100000"/>
+              </a:lnSpc>
+            </a:pPr>
+            <a:r>
+              <a:rPr b="0" lang="en-US" sz="880" spc="-1" strike="noStrike">
+                <a:solidFill>
+                  <a:srgbClr val="78ffc8"/>
+                </a:solidFill>
+                <a:latin typeface="Consolas"/>
+                <a:ea typeface="DejaVu Sans"/>
+              </a:rPr>
+              <a:t>        </a:t>
+            </a:r>
+            <a:r>
+              <a:rPr b="0" lang="en-US" sz="880" spc="-1" strike="noStrike">
+                <a:solidFill>
+                  <a:srgbClr val="78ffc8"/>
+                </a:solidFill>
+                <a:latin typeface="Consolas"/>
+                <a:ea typeface="DejaVu Sans"/>
+              </a:rPr>
+              <a:t>byte b2 = 20;</a:t>
+            </a:r>
+            <a:endParaRPr b="0" lang="en-US" sz="880" spc="-1" strike="noStrike">
+              <a:solidFill>
+                <a:srgbClr val="ffffff"/>
+              </a:solidFill>
+              <a:latin typeface="Arial"/>
+            </a:endParaRPr>
+          </a:p>
+          <a:p>
+            <a:pPr algn="ctr">
+              <a:lnSpc>
+                <a:spcPct val="100000"/>
+              </a:lnSpc>
+            </a:pPr>
+            <a:r>
+              <a:rPr b="0" lang="en-US" sz="880" spc="-1" strike="noStrike">
+                <a:solidFill>
+                  <a:srgbClr val="78ffc8"/>
+                </a:solidFill>
+                <a:latin typeface="Consolas"/>
+                <a:ea typeface="DejaVu Sans"/>
+              </a:rPr>
+              <a:t>        </a:t>
+            </a:r>
+            <a:r>
+              <a:rPr b="0" lang="en-US" sz="880" spc="-1" strike="noStrike">
+                <a:solidFill>
+                  <a:srgbClr val="78ffc8"/>
+                </a:solidFill>
+                <a:latin typeface="Consolas"/>
+                <a:ea typeface="DejaVu Sans"/>
+              </a:rPr>
+              <a:t>// byte b3 = b1 + b2; // Compile Error!</a:t>
+            </a:r>
+            <a:endParaRPr b="0" lang="en-US" sz="880" spc="-1" strike="noStrike">
+              <a:solidFill>
+                <a:srgbClr val="ffffff"/>
+              </a:solidFill>
+              <a:latin typeface="Arial"/>
+            </a:endParaRPr>
+          </a:p>
+          <a:p>
+            <a:pPr algn="ctr">
+              <a:lnSpc>
+                <a:spcPct val="100000"/>
+              </a:lnSpc>
+            </a:pPr>
+            <a:r>
+              <a:rPr b="0" lang="en-US" sz="880" spc="-1" strike="noStrike">
+                <a:solidFill>
+                  <a:srgbClr val="78ffc8"/>
+                </a:solidFill>
+                <a:latin typeface="Consolas"/>
+                <a:ea typeface="DejaVu Sans"/>
+              </a:rPr>
+              <a:t>        </a:t>
+            </a:r>
+            <a:r>
+              <a:rPr b="0" lang="en-US" sz="880" spc="-1" strike="noStrike">
+                <a:solidFill>
+                  <a:srgbClr val="78ffc8"/>
+                </a:solidFill>
+                <a:latin typeface="Consolas"/>
+                <a:ea typeface="DejaVu Sans"/>
+              </a:rPr>
+              <a:t>int total = b1 + b2; // Correct way</a:t>
+            </a:r>
+            <a:endParaRPr b="0" lang="en-US" sz="880" spc="-1" strike="noStrike">
+              <a:solidFill>
+                <a:srgbClr val="ffffff"/>
+              </a:solidFill>
+              <a:latin typeface="Arial"/>
+            </a:endParaRPr>
+          </a:p>
+          <a:p>
+            <a:pPr algn="ctr">
+              <a:lnSpc>
+                <a:spcPct val="100000"/>
+              </a:lnSpc>
+            </a:pPr>
+            <a:r>
+              <a:rPr b="0" lang="en-US" sz="880" spc="-1" strike="noStrike">
+                <a:solidFill>
+                  <a:srgbClr val="78ffc8"/>
+                </a:solidFill>
+                <a:latin typeface="Consolas"/>
+                <a:ea typeface="DejaVu Sans"/>
+              </a:rPr>
+              <a:t>        </a:t>
+            </a:r>
+            <a:endParaRPr b="0" lang="en-US" sz="880" spc="-1" strike="noStrike">
+              <a:solidFill>
+                <a:srgbClr val="ffffff"/>
+              </a:solidFill>
+              <a:latin typeface="Arial"/>
+            </a:endParaRPr>
+          </a:p>
+          <a:p>
+            <a:pPr algn="ctr">
+              <a:lnSpc>
+                <a:spcPct val="100000"/>
+              </a:lnSpc>
+            </a:pPr>
+            <a:r>
+              <a:rPr b="0" lang="en-US" sz="880" spc="-1" strike="noStrike">
+                <a:solidFill>
+                  <a:srgbClr val="78ffc8"/>
+                </a:solidFill>
+                <a:latin typeface="Consolas"/>
+                <a:ea typeface="DejaVu Sans"/>
+              </a:rPr>
+              <a:t>        </a:t>
+            </a:r>
+            <a:r>
+              <a:rPr b="0" lang="en-US" sz="880" spc="-1" strike="noStrike">
+                <a:solidFill>
+                  <a:srgbClr val="78ffc8"/>
+                </a:solidFill>
+                <a:latin typeface="Consolas"/>
+                <a:ea typeface="DejaVu Sans"/>
+              </a:rPr>
+              <a:t>System.out.println("5.0 / 0 = " + infinity);</a:t>
+            </a:r>
+            <a:endParaRPr b="0" lang="en-US" sz="880" spc="-1" strike="noStrike">
+              <a:solidFill>
+                <a:srgbClr val="ffffff"/>
+              </a:solidFill>
+              <a:latin typeface="Arial"/>
+            </a:endParaRPr>
+          </a:p>
+          <a:p>
+            <a:pPr algn="ctr">
+              <a:lnSpc>
+                <a:spcPct val="100000"/>
+              </a:lnSpc>
+            </a:pPr>
+            <a:r>
+              <a:rPr b="0" lang="en-US" sz="880" spc="-1" strike="noStrike">
+                <a:solidFill>
+                  <a:srgbClr val="78ffc8"/>
+                </a:solidFill>
+                <a:latin typeface="Consolas"/>
+                <a:ea typeface="DejaVu Sans"/>
+              </a:rPr>
+              <a:t>        </a:t>
+            </a:r>
+            <a:r>
+              <a:rPr b="0" lang="en-US" sz="880" spc="-1" strike="noStrike">
+                <a:solidFill>
+                  <a:srgbClr val="78ffc8"/>
+                </a:solidFill>
+                <a:latin typeface="Consolas"/>
+                <a:ea typeface="DejaVu Sans"/>
+              </a:rPr>
+              <a:t>System.out.println("0.0 / 0.0 = " + undefined);</a:t>
+            </a:r>
+            <a:endParaRPr b="0" lang="en-US" sz="880" spc="-1" strike="noStrike">
+              <a:solidFill>
+                <a:srgbClr val="ffffff"/>
+              </a:solidFill>
+              <a:latin typeface="Arial"/>
+            </a:endParaRPr>
+          </a:p>
+          <a:p>
+            <a:pPr algn="ctr">
+              <a:lnSpc>
+                <a:spcPct val="100000"/>
+              </a:lnSpc>
+            </a:pPr>
+            <a:r>
+              <a:rPr b="0" lang="en-US" sz="880" spc="-1" strike="noStrike">
+                <a:solidFill>
+                  <a:srgbClr val="78ffc8"/>
+                </a:solidFill>
+                <a:latin typeface="Consolas"/>
+                <a:ea typeface="DejaVu Sans"/>
+              </a:rPr>
+              <a:t>        </a:t>
+            </a:r>
+            <a:r>
+              <a:rPr b="0" lang="en-US" sz="880" spc="-1" strike="noStrike">
+                <a:solidFill>
+                  <a:srgbClr val="78ffc8"/>
+                </a:solidFill>
+                <a:latin typeface="Consolas"/>
+                <a:ea typeface="DejaVu Sans"/>
+              </a:rPr>
+              <a:t>System.out.println("Char + 5 = " + charSum);</a:t>
+            </a:r>
+            <a:endParaRPr b="0" lang="en-US" sz="880" spc="-1" strike="noStrike">
+              <a:solidFill>
+                <a:srgbClr val="ffffff"/>
+              </a:solidFill>
+              <a:latin typeface="Arial"/>
+            </a:endParaRPr>
+          </a:p>
+          <a:p>
+            <a:pPr algn="ctr">
+              <a:lnSpc>
+                <a:spcPct val="100000"/>
+              </a:lnSpc>
+            </a:pPr>
+            <a:r>
+              <a:rPr b="0" lang="en-US" sz="880" spc="-1" strike="noStrike">
+                <a:solidFill>
+                  <a:srgbClr val="78ffc8"/>
+                </a:solidFill>
+                <a:latin typeface="Consolas"/>
+                <a:ea typeface="DejaVu Sans"/>
+              </a:rPr>
+              <a:t>    </a:t>
+            </a:r>
+            <a:r>
+              <a:rPr b="0" lang="en-US" sz="880" spc="-1" strike="noStrike">
+                <a:solidFill>
+                  <a:srgbClr val="78ffc8"/>
+                </a:solidFill>
+                <a:latin typeface="Consolas"/>
+                <a:ea typeface="DejaVu Sans"/>
+              </a:rPr>
+              <a:t>}</a:t>
+            </a:r>
+            <a:endParaRPr b="0" lang="en-US" sz="880" spc="-1" strike="noStrike">
+              <a:solidFill>
+                <a:srgbClr val="ffffff"/>
+              </a:solidFill>
+              <a:latin typeface="Arial"/>
+            </a:endParaRPr>
+          </a:p>
+          <a:p>
+            <a:pPr algn="ctr">
+              <a:lnSpc>
+                <a:spcPct val="100000"/>
+              </a:lnSpc>
+            </a:pPr>
+            <a:r>
+              <a:rPr b="0" lang="en-US" sz="880" spc="-1" strike="noStrike">
+                <a:solidFill>
+                  <a:srgbClr val="78ffc8"/>
+                </a:solidFill>
+                <a:latin typeface="Consolas"/>
+                <a:ea typeface="DejaVu Sans"/>
+              </a:rPr>
+              <a:t>}</a:t>
+            </a:r>
+            <a:endParaRPr b="0" lang="en-US" sz="880" spc="-1" strike="noStrike">
+              <a:solidFill>
+                <a:srgbClr val="ffffff"/>
+              </a:solidFill>
+              <a:latin typeface="Arial"/>
+            </a:endParaRPr>
+          </a:p>
+        </p:txBody>
+      </p:sp>
+      <p:sp>
+        <p:nvSpPr>
+          <p:cNvPr id="352" name="TextBox 39"/>
           <p:cNvSpPr/>
           <p:nvPr/>
         </p:nvSpPr>
@@ -10697,7 +13550,7 @@
         <p:spPr>
           <a:xfrm>
             <a:off x="0" y="0"/>
-            <a:ext cx="12184560" cy="6853680"/>
+            <a:ext cx="12184200" cy="6853320"/>
           </a:xfrm>
           <a:prstGeom prst="rect">
             <a:avLst/>
@@ -10757,7 +13610,7 @@
         <p:spPr>
           <a:xfrm>
             <a:off x="0" y="0"/>
-            <a:ext cx="14040" cy="6853680"/>
+            <a:ext cx="13680" cy="6853320"/>
           </a:xfrm>
           <a:prstGeom prst="rect">
             <a:avLst/>
@@ -10817,7 +13670,7 @@
         <p:spPr>
           <a:xfrm>
             <a:off x="914400" y="0"/>
-            <a:ext cx="14040" cy="6853680"/>
+            <a:ext cx="13680" cy="6853320"/>
           </a:xfrm>
           <a:prstGeom prst="rect">
             <a:avLst/>
@@ -10877,7 +13730,7 @@
         <p:spPr>
           <a:xfrm>
             <a:off x="1828800" y="0"/>
-            <a:ext cx="14040" cy="6853680"/>
+            <a:ext cx="13680" cy="6853320"/>
           </a:xfrm>
           <a:prstGeom prst="rect">
             <a:avLst/>
@@ -10937,7 +13790,7 @@
         <p:spPr>
           <a:xfrm>
             <a:off x="2743200" y="0"/>
-            <a:ext cx="14040" cy="6853680"/>
+            <a:ext cx="13680" cy="6853320"/>
           </a:xfrm>
           <a:prstGeom prst="rect">
             <a:avLst/>
@@ -10997,7 +13850,7 @@
         <p:spPr>
           <a:xfrm>
             <a:off x="3657600" y="0"/>
-            <a:ext cx="14040" cy="6853680"/>
+            <a:ext cx="13680" cy="6853320"/>
           </a:xfrm>
           <a:prstGeom prst="rect">
             <a:avLst/>
@@ -11057,7 +13910,7 @@
         <p:spPr>
           <a:xfrm>
             <a:off x="4572000" y="0"/>
-            <a:ext cx="14040" cy="6853680"/>
+            <a:ext cx="13680" cy="6853320"/>
           </a:xfrm>
           <a:prstGeom prst="rect">
             <a:avLst/>
@@ -11117,7 +13970,7 @@
         <p:spPr>
           <a:xfrm>
             <a:off x="5486400" y="0"/>
-            <a:ext cx="14040" cy="6853680"/>
+            <a:ext cx="13680" cy="6853320"/>
           </a:xfrm>
           <a:prstGeom prst="rect">
             <a:avLst/>
@@ -11177,7 +14030,7 @@
         <p:spPr>
           <a:xfrm>
             <a:off x="6400800" y="0"/>
-            <a:ext cx="14040" cy="6853680"/>
+            <a:ext cx="13680" cy="6853320"/>
           </a:xfrm>
           <a:prstGeom prst="rect">
             <a:avLst/>
@@ -11237,7 +14090,7 @@
         <p:spPr>
           <a:xfrm>
             <a:off x="7315200" y="0"/>
-            <a:ext cx="14040" cy="6853680"/>
+            <a:ext cx="13680" cy="6853320"/>
           </a:xfrm>
           <a:prstGeom prst="rect">
             <a:avLst/>
@@ -11297,7 +14150,7 @@
         <p:spPr>
           <a:xfrm>
             <a:off x="8229600" y="0"/>
-            <a:ext cx="14040" cy="6853680"/>
+            <a:ext cx="13680" cy="6853320"/>
           </a:xfrm>
           <a:prstGeom prst="rect">
             <a:avLst/>
@@ -11357,7 +14210,7 @@
         <p:spPr>
           <a:xfrm>
             <a:off x="9144000" y="0"/>
-            <a:ext cx="14040" cy="6853680"/>
+            <a:ext cx="13680" cy="6853320"/>
           </a:xfrm>
           <a:prstGeom prst="rect">
             <a:avLst/>
@@ -11417,7 +14270,7 @@
         <p:spPr>
           <a:xfrm>
             <a:off x="10058400" y="0"/>
-            <a:ext cx="14040" cy="6853680"/>
+            <a:ext cx="13680" cy="6853320"/>
           </a:xfrm>
           <a:prstGeom prst="rect">
             <a:avLst/>
@@ -11477,7 +14330,7 @@
         <p:spPr>
           <a:xfrm>
             <a:off x="10972800" y="0"/>
-            <a:ext cx="14040" cy="6853680"/>
+            <a:ext cx="13680" cy="6853320"/>
           </a:xfrm>
           <a:prstGeom prst="rect">
             <a:avLst/>
@@ -11537,7 +14390,7 @@
         <p:spPr>
           <a:xfrm>
             <a:off x="11887200" y="0"/>
-            <a:ext cx="14040" cy="6853680"/>
+            <a:ext cx="13680" cy="6853320"/>
           </a:xfrm>
           <a:prstGeom prst="rect">
             <a:avLst/>
@@ -11597,7 +14450,7 @@
         <p:spPr>
           <a:xfrm>
             <a:off x="0" y="0"/>
-            <a:ext cx="315720" cy="6853680"/>
+            <a:ext cx="315360" cy="6853320"/>
           </a:xfrm>
           <a:prstGeom prst="rect">
             <a:avLst/>
@@ -11657,7 +14510,7 @@
         <p:spPr>
           <a:xfrm>
             <a:off x="9875520" y="365760"/>
-            <a:ext cx="2007360" cy="498600"/>
+            <a:ext cx="2007000" cy="498240"/>
           </a:xfrm>
           <a:prstGeom prst="roundRect">
             <a:avLst>
@@ -11885,7 +14738,7 @@
         <p:spPr>
           <a:xfrm>
             <a:off x="987480" y="3182040"/>
-            <a:ext cx="3287520" cy="2738880"/>
+            <a:ext cx="3287160" cy="2738520"/>
           </a:xfrm>
           <a:prstGeom prst="roundRect">
             <a:avLst>
@@ -11947,7 +14800,7 @@
         <p:spPr>
           <a:xfrm>
             <a:off x="914400" y="3108960"/>
-            <a:ext cx="3287520" cy="3060000"/>
+            <a:ext cx="3287160" cy="3059640"/>
           </a:xfrm>
           <a:prstGeom prst="roundRect">
             <a:avLst>
@@ -12110,7 +14963,7 @@
         <p:spPr>
           <a:xfrm>
             <a:off x="4507920" y="3182040"/>
-            <a:ext cx="3287520" cy="2738880"/>
+            <a:ext cx="3287160" cy="2738520"/>
           </a:xfrm>
           <a:prstGeom prst="roundRect">
             <a:avLst>
@@ -12172,7 +15025,7 @@
         <p:spPr>
           <a:xfrm>
             <a:off x="4434840" y="2971800"/>
-            <a:ext cx="3287520" cy="3425760"/>
+            <a:ext cx="3287160" cy="3425400"/>
           </a:xfrm>
           <a:prstGeom prst="roundRect">
             <a:avLst>
@@ -12430,7 +15283,7 @@
         <p:spPr>
           <a:xfrm>
             <a:off x="8028360" y="3182040"/>
-            <a:ext cx="3287520" cy="2738880"/>
+            <a:ext cx="3287160" cy="2738520"/>
           </a:xfrm>
           <a:prstGeom prst="roundRect">
             <a:avLst>
@@ -12492,7 +15345,7 @@
         <p:spPr>
           <a:xfrm>
             <a:off x="7955280" y="3108960"/>
-            <a:ext cx="3700080" cy="3060000"/>
+            <a:ext cx="3699720" cy="3059640"/>
           </a:xfrm>
           <a:prstGeom prst="roundRect">
             <a:avLst>
@@ -12937,7 +15790,7 @@
         <p:spPr>
           <a:xfrm>
             <a:off x="0" y="0"/>
-            <a:ext cx="12184560" cy="6853680"/>
+            <a:ext cx="12184200" cy="6853320"/>
           </a:xfrm>
           <a:prstGeom prst="rect">
             <a:avLst/>
@@ -12997,7 +15850,7 @@
         <p:spPr>
           <a:xfrm>
             <a:off x="0" y="0"/>
-            <a:ext cx="14040" cy="6853680"/>
+            <a:ext cx="13680" cy="6853320"/>
           </a:xfrm>
           <a:prstGeom prst="rect">
             <a:avLst/>
@@ -13057,7 +15910,7 @@
         <p:spPr>
           <a:xfrm>
             <a:off x="914400" y="0"/>
-            <a:ext cx="14040" cy="6853680"/>
+            <a:ext cx="13680" cy="6853320"/>
           </a:xfrm>
           <a:prstGeom prst="rect">
             <a:avLst/>
@@ -13117,7 +15970,7 @@
         <p:spPr>
           <a:xfrm>
             <a:off x="1828800" y="0"/>
-            <a:ext cx="14040" cy="6853680"/>
+            <a:ext cx="13680" cy="6853320"/>
           </a:xfrm>
           <a:prstGeom prst="rect">
             <a:avLst/>
@@ -13177,7 +16030,7 @@
         <p:spPr>
           <a:xfrm>
             <a:off x="2743200" y="0"/>
-            <a:ext cx="14040" cy="6853680"/>
+            <a:ext cx="13680" cy="6853320"/>
           </a:xfrm>
           <a:prstGeom prst="rect">
             <a:avLst/>
@@ -13237,7 +16090,7 @@
         <p:spPr>
           <a:xfrm>
             <a:off x="3657600" y="0"/>
-            <a:ext cx="14040" cy="6853680"/>
+            <a:ext cx="13680" cy="6853320"/>
           </a:xfrm>
           <a:prstGeom prst="rect">
             <a:avLst/>
@@ -13297,7 +16150,7 @@
         <p:spPr>
           <a:xfrm>
             <a:off x="4572000" y="0"/>
-            <a:ext cx="14040" cy="6853680"/>
+            <a:ext cx="13680" cy="6853320"/>
           </a:xfrm>
           <a:prstGeom prst="rect">
             <a:avLst/>
@@ -13357,7 +16210,7 @@
         <p:spPr>
           <a:xfrm>
             <a:off x="5486400" y="0"/>
-            <a:ext cx="14040" cy="6853680"/>
+            <a:ext cx="13680" cy="6853320"/>
           </a:xfrm>
           <a:prstGeom prst="rect">
             <a:avLst/>
@@ -13417,7 +16270,7 @@
         <p:spPr>
           <a:xfrm>
             <a:off x="6400800" y="0"/>
-            <a:ext cx="14040" cy="6853680"/>
+            <a:ext cx="13680" cy="6853320"/>
           </a:xfrm>
           <a:prstGeom prst="rect">
             <a:avLst/>
@@ -13477,7 +16330,7 @@
         <p:spPr>
           <a:xfrm>
             <a:off x="7315200" y="0"/>
-            <a:ext cx="14040" cy="6853680"/>
+            <a:ext cx="13680" cy="6853320"/>
           </a:xfrm>
           <a:prstGeom prst="rect">
             <a:avLst/>
@@ -13537,7 +16390,7 @@
         <p:spPr>
           <a:xfrm>
             <a:off x="8229600" y="0"/>
-            <a:ext cx="14040" cy="6853680"/>
+            <a:ext cx="13680" cy="6853320"/>
           </a:xfrm>
           <a:prstGeom prst="rect">
             <a:avLst/>
@@ -13597,7 +16450,7 @@
         <p:spPr>
           <a:xfrm>
             <a:off x="9144000" y="0"/>
-            <a:ext cx="14040" cy="6853680"/>
+            <a:ext cx="13680" cy="6853320"/>
           </a:xfrm>
           <a:prstGeom prst="rect">
             <a:avLst/>
@@ -13657,7 +16510,7 @@
         <p:spPr>
           <a:xfrm>
             <a:off x="10058400" y="0"/>
-            <a:ext cx="14040" cy="6853680"/>
+            <a:ext cx="13680" cy="6853320"/>
           </a:xfrm>
           <a:prstGeom prst="rect">
             <a:avLst/>
@@ -13717,7 +16570,7 @@
         <p:spPr>
           <a:xfrm>
             <a:off x="10972800" y="0"/>
-            <a:ext cx="14040" cy="6853680"/>
+            <a:ext cx="13680" cy="6853320"/>
           </a:xfrm>
           <a:prstGeom prst="rect">
             <a:avLst/>
@@ -13777,7 +16630,7 @@
         <p:spPr>
           <a:xfrm>
             <a:off x="11887200" y="0"/>
-            <a:ext cx="14040" cy="6853680"/>
+            <a:ext cx="13680" cy="6853320"/>
           </a:xfrm>
           <a:prstGeom prst="rect">
             <a:avLst/>
@@ -13837,7 +16690,7 @@
         <p:spPr>
           <a:xfrm>
             <a:off x="0" y="0"/>
-            <a:ext cx="315720" cy="6853680"/>
+            <a:ext cx="315360" cy="6853320"/>
           </a:xfrm>
           <a:prstGeom prst="rect">
             <a:avLst/>
@@ -13897,7 +16750,7 @@
         <p:spPr>
           <a:xfrm>
             <a:off x="9875520" y="365760"/>
-            <a:ext cx="2007360" cy="498600"/>
+            <a:ext cx="2007000" cy="498240"/>
           </a:xfrm>
           <a:prstGeom prst="roundRect">
             <a:avLst>
@@ -14125,7 +16978,7 @@
         <p:spPr>
           <a:xfrm>
             <a:off x="987480" y="3182040"/>
-            <a:ext cx="3287520" cy="2738880"/>
+            <a:ext cx="3287160" cy="2738520"/>
           </a:xfrm>
           <a:prstGeom prst="roundRect">
             <a:avLst>
@@ -14187,7 +17040,7 @@
         <p:spPr>
           <a:xfrm>
             <a:off x="685800" y="2971800"/>
-            <a:ext cx="3516120" cy="3197160"/>
+            <a:ext cx="3515760" cy="3196800"/>
           </a:xfrm>
           <a:prstGeom prst="roundRect">
             <a:avLst>
@@ -14378,7 +17231,7 @@
         <p:spPr>
           <a:xfrm>
             <a:off x="4507920" y="3182040"/>
-            <a:ext cx="3287520" cy="2738880"/>
+            <a:ext cx="3287160" cy="2738520"/>
           </a:xfrm>
           <a:prstGeom prst="roundRect">
             <a:avLst>
@@ -14440,7 +17293,7 @@
         <p:spPr>
           <a:xfrm>
             <a:off x="4434840" y="2971800"/>
-            <a:ext cx="3287520" cy="3425760"/>
+            <a:ext cx="3287160" cy="3425400"/>
           </a:xfrm>
           <a:prstGeom prst="roundRect">
             <a:avLst>
@@ -14698,7 +17551,7 @@
         <p:spPr>
           <a:xfrm>
             <a:off x="8028360" y="3182040"/>
-            <a:ext cx="3287520" cy="2738880"/>
+            <a:ext cx="3287160" cy="2738520"/>
           </a:xfrm>
           <a:prstGeom prst="roundRect">
             <a:avLst>
@@ -14760,7 +17613,7 @@
         <p:spPr>
           <a:xfrm>
             <a:off x="7955280" y="3108960"/>
-            <a:ext cx="3700080" cy="3060000"/>
+            <a:ext cx="3699720" cy="3059640"/>
           </a:xfrm>
           <a:prstGeom prst="roundRect">
             <a:avLst>
@@ -15205,7 +18058,7 @@
         <p:spPr>
           <a:xfrm>
             <a:off x="0" y="0"/>
-            <a:ext cx="12184560" cy="6853680"/>
+            <a:ext cx="12184200" cy="6853320"/>
           </a:xfrm>
           <a:prstGeom prst="rect">
             <a:avLst/>
@@ -15265,7 +18118,7 @@
         <p:spPr>
           <a:xfrm>
             <a:off x="0" y="0"/>
-            <a:ext cx="14040" cy="6853680"/>
+            <a:ext cx="13680" cy="6853320"/>
           </a:xfrm>
           <a:prstGeom prst="rect">
             <a:avLst/>
@@ -15325,7 +18178,7 @@
         <p:spPr>
           <a:xfrm>
             <a:off x="914400" y="0"/>
-            <a:ext cx="14040" cy="6853680"/>
+            <a:ext cx="13680" cy="6853320"/>
           </a:xfrm>
           <a:prstGeom prst="rect">
             <a:avLst/>
@@ -15385,7 +18238,7 @@
         <p:spPr>
           <a:xfrm>
             <a:off x="1828800" y="0"/>
-            <a:ext cx="14040" cy="6853680"/>
+            <a:ext cx="13680" cy="6853320"/>
           </a:xfrm>
           <a:prstGeom prst="rect">
             <a:avLst/>
@@ -15445,7 +18298,7 @@
         <p:spPr>
           <a:xfrm>
             <a:off x="2743200" y="0"/>
-            <a:ext cx="14040" cy="6853680"/>
+            <a:ext cx="13680" cy="6853320"/>
           </a:xfrm>
           <a:prstGeom prst="rect">
             <a:avLst/>
@@ -15505,7 +18358,7 @@
         <p:spPr>
           <a:xfrm>
             <a:off x="3657600" y="0"/>
-            <a:ext cx="14040" cy="6853680"/>
+            <a:ext cx="13680" cy="6853320"/>
           </a:xfrm>
           <a:prstGeom prst="rect">
             <a:avLst/>
@@ -15565,7 +18418,7 @@
         <p:spPr>
           <a:xfrm>
             <a:off x="4572000" y="0"/>
-            <a:ext cx="14040" cy="6853680"/>
+            <a:ext cx="13680" cy="6853320"/>
           </a:xfrm>
           <a:prstGeom prst="rect">
             <a:avLst/>
@@ -15625,7 +18478,7 @@
         <p:spPr>
           <a:xfrm>
             <a:off x="5486400" y="0"/>
-            <a:ext cx="14040" cy="6853680"/>
+            <a:ext cx="13680" cy="6853320"/>
           </a:xfrm>
           <a:prstGeom prst="rect">
             <a:avLst/>
@@ -15685,7 +18538,7 @@
         <p:spPr>
           <a:xfrm>
             <a:off x="6400800" y="0"/>
-            <a:ext cx="14040" cy="6853680"/>
+            <a:ext cx="13680" cy="6853320"/>
           </a:xfrm>
           <a:prstGeom prst="rect">
             <a:avLst/>
@@ -15745,7 +18598,7 @@
         <p:spPr>
           <a:xfrm>
             <a:off x="7315200" y="0"/>
-            <a:ext cx="14040" cy="6853680"/>
+            <a:ext cx="13680" cy="6853320"/>
           </a:xfrm>
           <a:prstGeom prst="rect">
             <a:avLst/>
@@ -15805,7 +18658,7 @@
         <p:spPr>
           <a:xfrm>
             <a:off x="8229600" y="0"/>
-            <a:ext cx="14040" cy="6853680"/>
+            <a:ext cx="13680" cy="6853320"/>
           </a:xfrm>
           <a:prstGeom prst="rect">
             <a:avLst/>
@@ -15865,7 +18718,7 @@
         <p:spPr>
           <a:xfrm>
             <a:off x="9144000" y="0"/>
-            <a:ext cx="14040" cy="6853680"/>
+            <a:ext cx="13680" cy="6853320"/>
           </a:xfrm>
           <a:prstGeom prst="rect">
             <a:avLst/>
@@ -15925,7 +18778,7 @@
         <p:spPr>
           <a:xfrm>
             <a:off x="10058400" y="0"/>
-            <a:ext cx="14040" cy="6853680"/>
+            <a:ext cx="13680" cy="6853320"/>
           </a:xfrm>
           <a:prstGeom prst="rect">
             <a:avLst/>
@@ -15985,7 +18838,7 @@
         <p:spPr>
           <a:xfrm>
             <a:off x="10972800" y="0"/>
-            <a:ext cx="14040" cy="6853680"/>
+            <a:ext cx="13680" cy="6853320"/>
           </a:xfrm>
           <a:prstGeom prst="rect">
             <a:avLst/>
@@ -16045,7 +18898,7 @@
         <p:spPr>
           <a:xfrm>
             <a:off x="11887200" y="0"/>
-            <a:ext cx="14040" cy="6853680"/>
+            <a:ext cx="13680" cy="6853320"/>
           </a:xfrm>
           <a:prstGeom prst="rect">
             <a:avLst/>
@@ -16105,7 +18958,7 @@
         <p:spPr>
           <a:xfrm>
             <a:off x="0" y="0"/>
-            <a:ext cx="315720" cy="6853680"/>
+            <a:ext cx="315360" cy="6853320"/>
           </a:xfrm>
           <a:prstGeom prst="rect">
             <a:avLst/>
@@ -16165,7 +19018,7 @@
         <p:spPr>
           <a:xfrm>
             <a:off x="9875520" y="365760"/>
-            <a:ext cx="2007360" cy="498600"/>
+            <a:ext cx="2007000" cy="498240"/>
           </a:xfrm>
           <a:prstGeom prst="roundRect">
             <a:avLst>
@@ -16370,7 +19223,7 @@
         <p:spPr>
           <a:xfrm>
             <a:off x="987480" y="3182040"/>
-            <a:ext cx="3287520" cy="2738880"/>
+            <a:ext cx="3287160" cy="2738520"/>
           </a:xfrm>
           <a:prstGeom prst="roundRect">
             <a:avLst>
@@ -16432,7 +19285,7 @@
         <p:spPr>
           <a:xfrm>
             <a:off x="685800" y="2971800"/>
-            <a:ext cx="3516120" cy="3197160"/>
+            <a:ext cx="3515760" cy="3196800"/>
           </a:xfrm>
           <a:prstGeom prst="roundRect">
             <a:avLst>
@@ -16623,7 +19476,7 @@
         <p:spPr>
           <a:xfrm>
             <a:off x="4507920" y="3182040"/>
-            <a:ext cx="3287520" cy="2738880"/>
+            <a:ext cx="3287160" cy="2738520"/>
           </a:xfrm>
           <a:prstGeom prst="roundRect">
             <a:avLst>
@@ -16685,7 +19538,7 @@
         <p:spPr>
           <a:xfrm>
             <a:off x="4434840" y="2971800"/>
-            <a:ext cx="3287520" cy="3425760"/>
+            <a:ext cx="3287160" cy="3425400"/>
           </a:xfrm>
           <a:prstGeom prst="roundRect">
             <a:avLst>
@@ -16897,7 +19750,7 @@
         <p:spPr>
           <a:xfrm>
             <a:off x="8028360" y="3182040"/>
-            <a:ext cx="3287520" cy="2738880"/>
+            <a:ext cx="3287160" cy="2738520"/>
           </a:xfrm>
           <a:prstGeom prst="roundRect">
             <a:avLst>
@@ -16959,7 +19812,7 @@
         <p:spPr>
           <a:xfrm>
             <a:off x="7955280" y="2743200"/>
-            <a:ext cx="3929400" cy="3883680"/>
+            <a:ext cx="3929040" cy="3883320"/>
           </a:xfrm>
           <a:prstGeom prst="roundRect">
             <a:avLst>
@@ -17519,7 +20372,7 @@
         <p:spPr>
           <a:xfrm>
             <a:off x="0" y="0"/>
-            <a:ext cx="12184560" cy="6853680"/>
+            <a:ext cx="12184200" cy="6853320"/>
           </a:xfrm>
           <a:prstGeom prst="rect">
             <a:avLst/>
@@ -17579,7 +20432,7 @@
         <p:spPr>
           <a:xfrm>
             <a:off x="0" y="0"/>
-            <a:ext cx="14040" cy="6853680"/>
+            <a:ext cx="13680" cy="6853320"/>
           </a:xfrm>
           <a:prstGeom prst="rect">
             <a:avLst/>
@@ -17639,7 +20492,7 @@
         <p:spPr>
           <a:xfrm>
             <a:off x="914400" y="0"/>
-            <a:ext cx="14040" cy="6853680"/>
+            <a:ext cx="13680" cy="6853320"/>
           </a:xfrm>
           <a:prstGeom prst="rect">
             <a:avLst/>
@@ -17699,7 +20552,7 @@
         <p:spPr>
           <a:xfrm>
             <a:off x="1828800" y="0"/>
-            <a:ext cx="14040" cy="6853680"/>
+            <a:ext cx="13680" cy="6853320"/>
           </a:xfrm>
           <a:prstGeom prst="rect">
             <a:avLst/>
@@ -17759,7 +20612,7 @@
         <p:spPr>
           <a:xfrm>
             <a:off x="2743200" y="0"/>
-            <a:ext cx="14040" cy="6853680"/>
+            <a:ext cx="13680" cy="6853320"/>
           </a:xfrm>
           <a:prstGeom prst="rect">
             <a:avLst/>
@@ -17819,7 +20672,7 @@
         <p:spPr>
           <a:xfrm>
             <a:off x="3657600" y="0"/>
-            <a:ext cx="14040" cy="6853680"/>
+            <a:ext cx="13680" cy="6853320"/>
           </a:xfrm>
           <a:prstGeom prst="rect">
             <a:avLst/>
@@ -17879,7 +20732,7 @@
         <p:spPr>
           <a:xfrm>
             <a:off x="4572000" y="0"/>
-            <a:ext cx="14040" cy="6853680"/>
+            <a:ext cx="13680" cy="6853320"/>
           </a:xfrm>
           <a:prstGeom prst="rect">
             <a:avLst/>
@@ -17939,7 +20792,7 @@
         <p:spPr>
           <a:xfrm>
             <a:off x="5486400" y="0"/>
-            <a:ext cx="14040" cy="6853680"/>
+            <a:ext cx="13680" cy="6853320"/>
           </a:xfrm>
           <a:prstGeom prst="rect">
             <a:avLst/>
@@ -17999,7 +20852,7 @@
         <p:spPr>
           <a:xfrm>
             <a:off x="6400800" y="0"/>
-            <a:ext cx="14040" cy="6853680"/>
+            <a:ext cx="13680" cy="6853320"/>
           </a:xfrm>
           <a:prstGeom prst="rect">
             <a:avLst/>
@@ -18059,7 +20912,7 @@
         <p:spPr>
           <a:xfrm>
             <a:off x="7315200" y="0"/>
-            <a:ext cx="14040" cy="6853680"/>
+            <a:ext cx="13680" cy="6853320"/>
           </a:xfrm>
           <a:prstGeom prst="rect">
             <a:avLst/>
@@ -18119,7 +20972,7 @@
         <p:spPr>
           <a:xfrm>
             <a:off x="8229600" y="0"/>
-            <a:ext cx="14040" cy="6853680"/>
+            <a:ext cx="13680" cy="6853320"/>
           </a:xfrm>
           <a:prstGeom prst="rect">
             <a:avLst/>
@@ -18179,7 +21032,7 @@
         <p:spPr>
           <a:xfrm>
             <a:off x="9144000" y="0"/>
-            <a:ext cx="14040" cy="6853680"/>
+            <a:ext cx="13680" cy="6853320"/>
           </a:xfrm>
           <a:prstGeom prst="rect">
             <a:avLst/>
@@ -18239,7 +21092,7 @@
         <p:spPr>
           <a:xfrm>
             <a:off x="10058400" y="0"/>
-            <a:ext cx="14040" cy="6853680"/>
+            <a:ext cx="13680" cy="6853320"/>
           </a:xfrm>
           <a:prstGeom prst="rect">
             <a:avLst/>
@@ -18299,7 +21152,7 @@
         <p:spPr>
           <a:xfrm>
             <a:off x="10972800" y="0"/>
-            <a:ext cx="14040" cy="6853680"/>
+            <a:ext cx="13680" cy="6853320"/>
           </a:xfrm>
           <a:prstGeom prst="rect">
             <a:avLst/>
@@ -18359,7 +21212,7 @@
         <p:spPr>
           <a:xfrm>
             <a:off x="11887200" y="0"/>
-            <a:ext cx="14040" cy="6853680"/>
+            <a:ext cx="13680" cy="6853320"/>
           </a:xfrm>
           <a:prstGeom prst="rect">
             <a:avLst/>
@@ -18419,7 +21272,7 @@
         <p:spPr>
           <a:xfrm>
             <a:off x="0" y="0"/>
-            <a:ext cx="315720" cy="6853680"/>
+            <a:ext cx="315360" cy="6853320"/>
           </a:xfrm>
           <a:prstGeom prst="rect">
             <a:avLst/>
@@ -18479,7 +21332,7 @@
         <p:spPr>
           <a:xfrm>
             <a:off x="9875520" y="365760"/>
-            <a:ext cx="2007360" cy="498600"/>
+            <a:ext cx="2007000" cy="498240"/>
           </a:xfrm>
           <a:prstGeom prst="roundRect">
             <a:avLst>
@@ -18684,7 +21537,7 @@
         <p:spPr>
           <a:xfrm>
             <a:off x="987480" y="3182040"/>
-            <a:ext cx="3287520" cy="2738880"/>
+            <a:ext cx="3287160" cy="2738520"/>
           </a:xfrm>
           <a:prstGeom prst="roundRect">
             <a:avLst>
@@ -18746,7 +21599,7 @@
         <p:spPr>
           <a:xfrm>
             <a:off x="457200" y="2743200"/>
-            <a:ext cx="3744720" cy="3884040"/>
+            <a:ext cx="3744360" cy="3883680"/>
           </a:xfrm>
           <a:prstGeom prst="roundRect">
             <a:avLst>
@@ -18984,7 +21837,7 @@
         <p:spPr>
           <a:xfrm>
             <a:off x="4507920" y="3182040"/>
-            <a:ext cx="3287520" cy="2738880"/>
+            <a:ext cx="3287160" cy="2738520"/>
           </a:xfrm>
           <a:prstGeom prst="roundRect">
             <a:avLst>
@@ -19046,7 +21899,7 @@
         <p:spPr>
           <a:xfrm>
             <a:off x="4434840" y="2971800"/>
-            <a:ext cx="3287520" cy="3425760"/>
+            <a:ext cx="3287160" cy="3425400"/>
           </a:xfrm>
           <a:prstGeom prst="roundRect">
             <a:avLst>
@@ -19265,7 +22118,7 @@
         <p:spPr>
           <a:xfrm>
             <a:off x="8028360" y="3182040"/>
-            <a:ext cx="3287520" cy="2738880"/>
+            <a:ext cx="3287160" cy="2738520"/>
           </a:xfrm>
           <a:prstGeom prst="roundRect">
             <a:avLst>
@@ -19327,7 +22180,7 @@
         <p:spPr>
           <a:xfrm>
             <a:off x="8001000" y="3200400"/>
-            <a:ext cx="3472560" cy="2741040"/>
+            <a:ext cx="3472200" cy="2740680"/>
           </a:xfrm>
           <a:prstGeom prst="roundRect">
             <a:avLst>
@@ -19739,7 +22592,7 @@
         <p:spPr>
           <a:xfrm>
             <a:off x="0" y="0"/>
-            <a:ext cx="12184200" cy="6853320"/>
+            <a:ext cx="12183840" cy="6852960"/>
           </a:xfrm>
           <a:prstGeom prst="rect">
             <a:avLst/>
@@ -19799,7 +22652,7 @@
         <p:spPr>
           <a:xfrm>
             <a:off x="0" y="0"/>
-            <a:ext cx="13680" cy="6853320"/>
+            <a:ext cx="13320" cy="6852960"/>
           </a:xfrm>
           <a:prstGeom prst="rect">
             <a:avLst/>
@@ -19859,7 +22712,7 @@
         <p:spPr>
           <a:xfrm>
             <a:off x="914400" y="0"/>
-            <a:ext cx="13680" cy="6853320"/>
+            <a:ext cx="13320" cy="6852960"/>
           </a:xfrm>
           <a:prstGeom prst="rect">
             <a:avLst/>
@@ -19919,7 +22772,7 @@
         <p:spPr>
           <a:xfrm>
             <a:off x="1828800" y="0"/>
-            <a:ext cx="13680" cy="6853320"/>
+            <a:ext cx="13320" cy="6852960"/>
           </a:xfrm>
           <a:prstGeom prst="rect">
             <a:avLst/>
@@ -19979,7 +22832,7 @@
         <p:spPr>
           <a:xfrm>
             <a:off x="2743200" y="0"/>
-            <a:ext cx="13680" cy="6853320"/>
+            <a:ext cx="13320" cy="6852960"/>
           </a:xfrm>
           <a:prstGeom prst="rect">
             <a:avLst/>
@@ -20039,7 +22892,7 @@
         <p:spPr>
           <a:xfrm>
             <a:off x="3657600" y="0"/>
-            <a:ext cx="13680" cy="6853320"/>
+            <a:ext cx="13320" cy="6852960"/>
           </a:xfrm>
           <a:prstGeom prst="rect">
             <a:avLst/>
@@ -20099,7 +22952,7 @@
         <p:spPr>
           <a:xfrm>
             <a:off x="4572000" y="0"/>
-            <a:ext cx="13680" cy="6853320"/>
+            <a:ext cx="13320" cy="6852960"/>
           </a:xfrm>
           <a:prstGeom prst="rect">
             <a:avLst/>
@@ -20159,7 +23012,7 @@
         <p:spPr>
           <a:xfrm>
             <a:off x="5486400" y="0"/>
-            <a:ext cx="13680" cy="6853320"/>
+            <a:ext cx="13320" cy="6852960"/>
           </a:xfrm>
           <a:prstGeom prst="rect">
             <a:avLst/>
@@ -20219,7 +23072,7 @@
         <p:spPr>
           <a:xfrm>
             <a:off x="6400800" y="0"/>
-            <a:ext cx="13680" cy="6853320"/>
+            <a:ext cx="13320" cy="6852960"/>
           </a:xfrm>
           <a:prstGeom prst="rect">
             <a:avLst/>
@@ -20279,7 +23132,7 @@
         <p:spPr>
           <a:xfrm>
             <a:off x="7315200" y="0"/>
-            <a:ext cx="13680" cy="6853320"/>
+            <a:ext cx="13320" cy="6852960"/>
           </a:xfrm>
           <a:prstGeom prst="rect">
             <a:avLst/>
@@ -20339,7 +23192,7 @@
         <p:spPr>
           <a:xfrm>
             <a:off x="8229600" y="0"/>
-            <a:ext cx="13680" cy="6853320"/>
+            <a:ext cx="13320" cy="6852960"/>
           </a:xfrm>
           <a:prstGeom prst="rect">
             <a:avLst/>
@@ -20399,7 +23252,7 @@
         <p:spPr>
           <a:xfrm>
             <a:off x="9144000" y="0"/>
-            <a:ext cx="13680" cy="6853320"/>
+            <a:ext cx="13320" cy="6852960"/>
           </a:xfrm>
           <a:prstGeom prst="rect">
             <a:avLst/>
@@ -20459,7 +23312,7 @@
         <p:spPr>
           <a:xfrm>
             <a:off x="10058400" y="0"/>
-            <a:ext cx="13680" cy="6853320"/>
+            <a:ext cx="13320" cy="6852960"/>
           </a:xfrm>
           <a:prstGeom prst="rect">
             <a:avLst/>
@@ -20519,7 +23372,7 @@
         <p:spPr>
           <a:xfrm>
             <a:off x="10972800" y="0"/>
-            <a:ext cx="13680" cy="6853320"/>
+            <a:ext cx="13320" cy="6852960"/>
           </a:xfrm>
           <a:prstGeom prst="rect">
             <a:avLst/>
@@ -20579,7 +23432,7 @@
         <p:spPr>
           <a:xfrm>
             <a:off x="11887200" y="0"/>
-            <a:ext cx="13680" cy="6853320"/>
+            <a:ext cx="13320" cy="6852960"/>
           </a:xfrm>
           <a:prstGeom prst="rect">
             <a:avLst/>
@@ -20639,7 +23492,7 @@
         <p:spPr>
           <a:xfrm>
             <a:off x="0" y="0"/>
-            <a:ext cx="315360" cy="6853320"/>
+            <a:ext cx="315000" cy="6852960"/>
           </a:xfrm>
           <a:prstGeom prst="rect">
             <a:avLst/>
@@ -20699,7 +23552,7 @@
         <p:spPr>
           <a:xfrm>
             <a:off x="9875520" y="365760"/>
-            <a:ext cx="2007000" cy="498240"/>
+            <a:ext cx="2006640" cy="497880"/>
           </a:xfrm>
           <a:prstGeom prst="roundRect">
             <a:avLst>
@@ -20904,7 +23757,7 @@
         <p:spPr>
           <a:xfrm>
             <a:off x="987480" y="3182040"/>
-            <a:ext cx="3287160" cy="2738520"/>
+            <a:ext cx="3286800" cy="2738160"/>
           </a:xfrm>
           <a:prstGeom prst="roundRect">
             <a:avLst>
@@ -20966,7 +23819,7 @@
         <p:spPr>
           <a:xfrm>
             <a:off x="457200" y="2514600"/>
-            <a:ext cx="3744360" cy="4112280"/>
+            <a:ext cx="3744000" cy="4111920"/>
           </a:xfrm>
           <a:prstGeom prst="roundRect">
             <a:avLst>
@@ -21219,7 +24072,7 @@
         <p:spPr>
           <a:xfrm>
             <a:off x="4507920" y="3182040"/>
-            <a:ext cx="3287160" cy="2738520"/>
+            <a:ext cx="3286800" cy="2738160"/>
           </a:xfrm>
           <a:prstGeom prst="roundRect">
             <a:avLst>
@@ -21281,7 +24134,7 @@
         <p:spPr>
           <a:xfrm>
             <a:off x="4434840" y="2514600"/>
-            <a:ext cx="3287160" cy="3882600"/>
+            <a:ext cx="3286800" cy="3882240"/>
           </a:xfrm>
           <a:prstGeom prst="roundRect">
             <a:avLst>
@@ -21497,7 +24350,7 @@
         <p:spPr>
           <a:xfrm>
             <a:off x="8028360" y="3182040"/>
-            <a:ext cx="3287160" cy="2738520"/>
+            <a:ext cx="3286800" cy="2738160"/>
           </a:xfrm>
           <a:prstGeom prst="roundRect">
             <a:avLst>
@@ -21559,7 +24412,7 @@
         <p:spPr>
           <a:xfrm>
             <a:off x="8001000" y="2286000"/>
-            <a:ext cx="3655800" cy="4113000"/>
+            <a:ext cx="3655440" cy="4112640"/>
           </a:xfrm>
           <a:prstGeom prst="roundRect">
             <a:avLst>
@@ -22235,7 +25088,7 @@
         <p:spPr>
           <a:xfrm>
             <a:off x="0" y="0"/>
-            <a:ext cx="12184560" cy="6853680"/>
+            <a:ext cx="12184200" cy="6853320"/>
           </a:xfrm>
           <a:prstGeom prst="rect">
             <a:avLst/>
@@ -22295,7 +25148,7 @@
         <p:spPr>
           <a:xfrm>
             <a:off x="0" y="0"/>
-            <a:ext cx="14040" cy="6853680"/>
+            <a:ext cx="13680" cy="6853320"/>
           </a:xfrm>
           <a:prstGeom prst="rect">
             <a:avLst/>
@@ -22355,7 +25208,7 @@
         <p:spPr>
           <a:xfrm>
             <a:off x="914400" y="0"/>
-            <a:ext cx="14040" cy="6853680"/>
+            <a:ext cx="13680" cy="6853320"/>
           </a:xfrm>
           <a:prstGeom prst="rect">
             <a:avLst/>
@@ -22415,7 +25268,7 @@
         <p:spPr>
           <a:xfrm>
             <a:off x="1828800" y="0"/>
-            <a:ext cx="14040" cy="6853680"/>
+            <a:ext cx="13680" cy="6853320"/>
           </a:xfrm>
           <a:prstGeom prst="rect">
             <a:avLst/>
@@ -22475,7 +25328,7 @@
         <p:spPr>
           <a:xfrm>
             <a:off x="2743200" y="0"/>
-            <a:ext cx="14040" cy="6853680"/>
+            <a:ext cx="13680" cy="6853320"/>
           </a:xfrm>
           <a:prstGeom prst="rect">
             <a:avLst/>
@@ -22535,7 +25388,7 @@
         <p:spPr>
           <a:xfrm>
             <a:off x="3657600" y="0"/>
-            <a:ext cx="14040" cy="6853680"/>
+            <a:ext cx="13680" cy="6853320"/>
           </a:xfrm>
           <a:prstGeom prst="rect">
             <a:avLst/>
@@ -22595,7 +25448,7 @@
         <p:spPr>
           <a:xfrm>
             <a:off x="4572000" y="0"/>
-            <a:ext cx="14040" cy="6853680"/>
+            <a:ext cx="13680" cy="6853320"/>
           </a:xfrm>
           <a:prstGeom prst="rect">
             <a:avLst/>
@@ -22655,7 +25508,7 @@
         <p:spPr>
           <a:xfrm>
             <a:off x="5486400" y="0"/>
-            <a:ext cx="14040" cy="6853680"/>
+            <a:ext cx="13680" cy="6853320"/>
           </a:xfrm>
           <a:prstGeom prst="rect">
             <a:avLst/>
@@ -22715,7 +25568,7 @@
         <p:spPr>
           <a:xfrm>
             <a:off x="6400800" y="0"/>
-            <a:ext cx="14040" cy="6853680"/>
+            <a:ext cx="13680" cy="6853320"/>
           </a:xfrm>
           <a:prstGeom prst="rect">
             <a:avLst/>
@@ -22775,7 +25628,7 @@
         <p:spPr>
           <a:xfrm>
             <a:off x="7315200" y="0"/>
-            <a:ext cx="14040" cy="6853680"/>
+            <a:ext cx="13680" cy="6853320"/>
           </a:xfrm>
           <a:prstGeom prst="rect">
             <a:avLst/>
@@ -22835,7 +25688,7 @@
         <p:spPr>
           <a:xfrm>
             <a:off x="8229600" y="0"/>
-            <a:ext cx="14040" cy="6853680"/>
+            <a:ext cx="13680" cy="6853320"/>
           </a:xfrm>
           <a:prstGeom prst="rect">
             <a:avLst/>
@@ -22895,7 +25748,7 @@
         <p:spPr>
           <a:xfrm>
             <a:off x="9144000" y="0"/>
-            <a:ext cx="14040" cy="6853680"/>
+            <a:ext cx="13680" cy="6853320"/>
           </a:xfrm>
           <a:prstGeom prst="rect">
             <a:avLst/>
@@ -22955,7 +25808,7 @@
         <p:spPr>
           <a:xfrm>
             <a:off x="10058400" y="0"/>
-            <a:ext cx="14040" cy="6853680"/>
+            <a:ext cx="13680" cy="6853320"/>
           </a:xfrm>
           <a:prstGeom prst="rect">
             <a:avLst/>
@@ -23015,7 +25868,7 @@
         <p:spPr>
           <a:xfrm>
             <a:off x="10972800" y="0"/>
-            <a:ext cx="14040" cy="6853680"/>
+            <a:ext cx="13680" cy="6853320"/>
           </a:xfrm>
           <a:prstGeom prst="rect">
             <a:avLst/>
@@ -23075,7 +25928,7 @@
         <p:spPr>
           <a:xfrm>
             <a:off x="11887200" y="0"/>
-            <a:ext cx="14040" cy="6853680"/>
+            <a:ext cx="13680" cy="6853320"/>
           </a:xfrm>
           <a:prstGeom prst="rect">
             <a:avLst/>
@@ -23135,7 +25988,7 @@
         <p:spPr>
           <a:xfrm>
             <a:off x="0" y="0"/>
-            <a:ext cx="315720" cy="6853680"/>
+            <a:ext cx="315360" cy="6853320"/>
           </a:xfrm>
           <a:prstGeom prst="rect">
             <a:avLst/>
@@ -23195,7 +26048,7 @@
         <p:spPr>
           <a:xfrm>
             <a:off x="9875520" y="365760"/>
-            <a:ext cx="2007360" cy="498600"/>
+            <a:ext cx="2007000" cy="498240"/>
           </a:xfrm>
           <a:prstGeom prst="roundRect">
             <a:avLst>
@@ -23433,7 +26286,7 @@
         <p:spPr>
           <a:xfrm>
             <a:off x="987480" y="3182040"/>
-            <a:ext cx="3287520" cy="2738880"/>
+            <a:ext cx="3287160" cy="2738520"/>
           </a:xfrm>
           <a:prstGeom prst="roundRect">
             <a:avLst>
@@ -23495,7 +26348,7 @@
         <p:spPr>
           <a:xfrm>
             <a:off x="457200" y="2743200"/>
-            <a:ext cx="3884760" cy="3884040"/>
+            <a:ext cx="3884400" cy="3883680"/>
           </a:xfrm>
           <a:prstGeom prst="roundRect">
             <a:avLst>
@@ -23809,7 +26662,7 @@
         <p:spPr>
           <a:xfrm>
             <a:off x="4507920" y="3182040"/>
-            <a:ext cx="3287520" cy="2738880"/>
+            <a:ext cx="3287160" cy="2738520"/>
           </a:xfrm>
           <a:prstGeom prst="roundRect">
             <a:avLst>
@@ -23871,7 +26724,7 @@
         <p:spPr>
           <a:xfrm>
             <a:off x="4572000" y="2743200"/>
-            <a:ext cx="3427560" cy="3656160"/>
+            <a:ext cx="3427200" cy="3655800"/>
           </a:xfrm>
           <a:prstGeom prst="roundRect">
             <a:avLst>
@@ -24446,7 +27299,7 @@
         <p:spPr>
           <a:xfrm>
             <a:off x="8028360" y="3182040"/>
-            <a:ext cx="3287520" cy="2738880"/>
+            <a:ext cx="3287160" cy="2738520"/>
           </a:xfrm>
           <a:prstGeom prst="roundRect">
             <a:avLst>
@@ -24508,7 +27361,7 @@
         <p:spPr>
           <a:xfrm>
             <a:off x="8229600" y="2514600"/>
-            <a:ext cx="3656160" cy="4113360"/>
+            <a:ext cx="3655800" cy="4113000"/>
           </a:xfrm>
           <a:prstGeom prst="roundRect">
             <a:avLst>
@@ -25500,7 +28353,7 @@
         <p:spPr>
           <a:xfrm>
             <a:off x="0" y="0"/>
-            <a:ext cx="12184200" cy="6853320"/>
+            <a:ext cx="12183840" cy="6852960"/>
           </a:xfrm>
           <a:prstGeom prst="rect">
             <a:avLst/>
@@ -25560,7 +28413,7 @@
         <p:spPr>
           <a:xfrm>
             <a:off x="0" y="0"/>
-            <a:ext cx="13680" cy="6853320"/>
+            <a:ext cx="13320" cy="6852960"/>
           </a:xfrm>
           <a:prstGeom prst="rect">
             <a:avLst/>
@@ -25620,7 +28473,7 @@
         <p:spPr>
           <a:xfrm>
             <a:off x="914400" y="0"/>
-            <a:ext cx="13680" cy="6853320"/>
+            <a:ext cx="13320" cy="6852960"/>
           </a:xfrm>
           <a:prstGeom prst="rect">
             <a:avLst/>
@@ -25680,7 +28533,7 @@
         <p:spPr>
           <a:xfrm>
             <a:off x="1828800" y="0"/>
-            <a:ext cx="13680" cy="6853320"/>
+            <a:ext cx="13320" cy="6852960"/>
           </a:xfrm>
           <a:prstGeom prst="rect">
             <a:avLst/>
@@ -25740,7 +28593,7 @@
         <p:spPr>
           <a:xfrm>
             <a:off x="2743200" y="0"/>
-            <a:ext cx="13680" cy="6853320"/>
+            <a:ext cx="13320" cy="6852960"/>
           </a:xfrm>
           <a:prstGeom prst="rect">
             <a:avLst/>
@@ -25800,7 +28653,7 @@
         <p:spPr>
           <a:xfrm>
             <a:off x="3657600" y="0"/>
-            <a:ext cx="13680" cy="6853320"/>
+            <a:ext cx="13320" cy="6852960"/>
           </a:xfrm>
           <a:prstGeom prst="rect">
             <a:avLst/>
@@ -25860,7 +28713,7 @@
         <p:spPr>
           <a:xfrm>
             <a:off x="4572000" y="0"/>
-            <a:ext cx="13680" cy="6853320"/>
+            <a:ext cx="13320" cy="6852960"/>
           </a:xfrm>
           <a:prstGeom prst="rect">
             <a:avLst/>
@@ -25920,7 +28773,7 @@
         <p:spPr>
           <a:xfrm>
             <a:off x="5486400" y="0"/>
-            <a:ext cx="13680" cy="6853320"/>
+            <a:ext cx="13320" cy="6852960"/>
           </a:xfrm>
           <a:prstGeom prst="rect">
             <a:avLst/>
@@ -25980,7 +28833,7 @@
         <p:spPr>
           <a:xfrm>
             <a:off x="6400800" y="0"/>
-            <a:ext cx="13680" cy="6853320"/>
+            <a:ext cx="13320" cy="6852960"/>
           </a:xfrm>
           <a:prstGeom prst="rect">
             <a:avLst/>
@@ -26040,7 +28893,7 @@
         <p:spPr>
           <a:xfrm>
             <a:off x="7315200" y="0"/>
-            <a:ext cx="13680" cy="6853320"/>
+            <a:ext cx="13320" cy="6852960"/>
           </a:xfrm>
           <a:prstGeom prst="rect">
             <a:avLst/>
@@ -26100,7 +28953,7 @@
         <p:spPr>
           <a:xfrm>
             <a:off x="8229600" y="0"/>
-            <a:ext cx="13680" cy="6853320"/>
+            <a:ext cx="13320" cy="6852960"/>
           </a:xfrm>
           <a:prstGeom prst="rect">
             <a:avLst/>
@@ -26160,7 +29013,7 @@
         <p:spPr>
           <a:xfrm>
             <a:off x="9144000" y="0"/>
-            <a:ext cx="13680" cy="6853320"/>
+            <a:ext cx="13320" cy="6852960"/>
           </a:xfrm>
           <a:prstGeom prst="rect">
             <a:avLst/>
@@ -26220,7 +29073,7 @@
         <p:spPr>
           <a:xfrm>
             <a:off x="10058400" y="0"/>
-            <a:ext cx="13680" cy="6853320"/>
+            <a:ext cx="13320" cy="6852960"/>
           </a:xfrm>
           <a:prstGeom prst="rect">
             <a:avLst/>
@@ -26280,7 +29133,7 @@
         <p:spPr>
           <a:xfrm>
             <a:off x="10972800" y="0"/>
-            <a:ext cx="13680" cy="6853320"/>
+            <a:ext cx="13320" cy="6852960"/>
           </a:xfrm>
           <a:prstGeom prst="rect">
             <a:avLst/>
@@ -26340,7 +29193,7 @@
         <p:spPr>
           <a:xfrm>
             <a:off x="11887200" y="0"/>
-            <a:ext cx="13680" cy="6853320"/>
+            <a:ext cx="13320" cy="6852960"/>
           </a:xfrm>
           <a:prstGeom prst="rect">
             <a:avLst/>
@@ -26400,7 +29253,7 @@
         <p:spPr>
           <a:xfrm>
             <a:off x="0" y="0"/>
-            <a:ext cx="315360" cy="6853320"/>
+            <a:ext cx="315000" cy="6852960"/>
           </a:xfrm>
           <a:prstGeom prst="rect">
             <a:avLst/>
@@ -26460,7 +29313,7 @@
         <p:spPr>
           <a:xfrm>
             <a:off x="9875520" y="365760"/>
-            <a:ext cx="2007000" cy="498240"/>
+            <a:ext cx="2006640" cy="497880"/>
           </a:xfrm>
           <a:prstGeom prst="roundRect">
             <a:avLst>
@@ -26588,7 +29441,7 @@
         <p:spPr>
           <a:xfrm>
             <a:off x="1964160" y="1664640"/>
-            <a:ext cx="7572960" cy="819720"/>
+            <a:ext cx="7572600" cy="819720"/>
           </a:xfrm>
           <a:prstGeom prst="rect">
             <a:avLst/>
@@ -26688,7 +29541,7 @@
         <p:spPr>
           <a:xfrm>
             <a:off x="987480" y="3182040"/>
-            <a:ext cx="3287160" cy="2738520"/>
+            <a:ext cx="3286800" cy="2738160"/>
           </a:xfrm>
           <a:prstGeom prst="roundRect">
             <a:avLst>
@@ -26750,7 +29603,7 @@
         <p:spPr>
           <a:xfrm>
             <a:off x="914400" y="2743200"/>
-            <a:ext cx="3287160" cy="3656160"/>
+            <a:ext cx="3286800" cy="3655800"/>
           </a:xfrm>
           <a:prstGeom prst="roundRect">
             <a:avLst>
@@ -27081,7 +29934,7 @@
         <p:spPr>
           <a:xfrm>
             <a:off x="4507920" y="3182040"/>
-            <a:ext cx="3287160" cy="2738520"/>
+            <a:ext cx="3286800" cy="2738160"/>
           </a:xfrm>
           <a:prstGeom prst="roundRect">
             <a:avLst>
@@ -27143,7 +29996,7 @@
         <p:spPr>
           <a:xfrm>
             <a:off x="4434840" y="2743200"/>
-            <a:ext cx="3287160" cy="3656160"/>
+            <a:ext cx="3286800" cy="3655800"/>
           </a:xfrm>
           <a:prstGeom prst="roundRect">
             <a:avLst>
@@ -27550,7 +30403,7 @@
         <p:spPr>
           <a:xfrm>
             <a:off x="8028360" y="3182040"/>
-            <a:ext cx="3287160" cy="2738520"/>
+            <a:ext cx="3286800" cy="2738160"/>
           </a:xfrm>
           <a:prstGeom prst="roundRect">
             <a:avLst>
@@ -27612,7 +30465,7 @@
         <p:spPr>
           <a:xfrm>
             <a:off x="7955280" y="2743200"/>
-            <a:ext cx="3699720" cy="3654720"/>
+            <a:ext cx="3699360" cy="3654360"/>
           </a:xfrm>
           <a:prstGeom prst="roundRect">
             <a:avLst>
@@ -28354,7 +31207,7 @@
         <p:spPr>
           <a:xfrm>
             <a:off x="0" y="0"/>
-            <a:ext cx="12183840" cy="6852960"/>
+            <a:ext cx="12183480" cy="6852600"/>
           </a:xfrm>
           <a:prstGeom prst="rect">
             <a:avLst/>
@@ -28414,7 +31267,7 @@
         <p:spPr>
           <a:xfrm>
             <a:off x="0" y="0"/>
-            <a:ext cx="13320" cy="6852960"/>
+            <a:ext cx="12960" cy="6852600"/>
           </a:xfrm>
           <a:prstGeom prst="rect">
             <a:avLst/>
@@ -28474,7 +31327,7 @@
         <p:spPr>
           <a:xfrm>
             <a:off x="914400" y="0"/>
-            <a:ext cx="13320" cy="6852960"/>
+            <a:ext cx="12960" cy="6852600"/>
           </a:xfrm>
           <a:prstGeom prst="rect">
             <a:avLst/>
@@ -28534,7 +31387,7 @@
         <p:spPr>
           <a:xfrm>
             <a:off x="1828800" y="0"/>
-            <a:ext cx="13320" cy="6852960"/>
+            <a:ext cx="12960" cy="6852600"/>
           </a:xfrm>
           <a:prstGeom prst="rect">
             <a:avLst/>
@@ -28594,7 +31447,7 @@
         <p:spPr>
           <a:xfrm>
             <a:off x="2743200" y="0"/>
-            <a:ext cx="13320" cy="6852960"/>
+            <a:ext cx="12960" cy="6852600"/>
           </a:xfrm>
           <a:prstGeom prst="rect">
             <a:avLst/>
@@ -28654,7 +31507,7 @@
         <p:spPr>
           <a:xfrm>
             <a:off x="3657600" y="0"/>
-            <a:ext cx="13320" cy="6852960"/>
+            <a:ext cx="12960" cy="6852600"/>
           </a:xfrm>
           <a:prstGeom prst="rect">
             <a:avLst/>
@@ -28714,7 +31567,7 @@
         <p:spPr>
           <a:xfrm>
             <a:off x="4572000" y="0"/>
-            <a:ext cx="13320" cy="6852960"/>
+            <a:ext cx="12960" cy="6852600"/>
           </a:xfrm>
           <a:prstGeom prst="rect">
             <a:avLst/>
@@ -28774,7 +31627,7 @@
         <p:spPr>
           <a:xfrm>
             <a:off x="5486400" y="0"/>
-            <a:ext cx="13320" cy="6852960"/>
+            <a:ext cx="12960" cy="6852600"/>
           </a:xfrm>
           <a:prstGeom prst="rect">
             <a:avLst/>
@@ -28834,7 +31687,7 @@
         <p:spPr>
           <a:xfrm>
             <a:off x="6400800" y="0"/>
-            <a:ext cx="13320" cy="6852960"/>
+            <a:ext cx="12960" cy="6852600"/>
           </a:xfrm>
           <a:prstGeom prst="rect">
             <a:avLst/>
@@ -28894,7 +31747,7 @@
         <p:spPr>
           <a:xfrm>
             <a:off x="7315200" y="0"/>
-            <a:ext cx="13320" cy="6852960"/>
+            <a:ext cx="12960" cy="6852600"/>
           </a:xfrm>
           <a:prstGeom prst="rect">
             <a:avLst/>
@@ -28954,7 +31807,7 @@
         <p:spPr>
           <a:xfrm>
             <a:off x="8229600" y="0"/>
-            <a:ext cx="13320" cy="6852960"/>
+            <a:ext cx="12960" cy="6852600"/>
           </a:xfrm>
           <a:prstGeom prst="rect">
             <a:avLst/>
@@ -29014,7 +31867,7 @@
         <p:spPr>
           <a:xfrm>
             <a:off x="9144000" y="0"/>
-            <a:ext cx="13320" cy="6852960"/>
+            <a:ext cx="12960" cy="6852600"/>
           </a:xfrm>
           <a:prstGeom prst="rect">
             <a:avLst/>
@@ -29074,7 +31927,7 @@
         <p:spPr>
           <a:xfrm>
             <a:off x="10058400" y="0"/>
-            <a:ext cx="13320" cy="6852960"/>
+            <a:ext cx="12960" cy="6852600"/>
           </a:xfrm>
           <a:prstGeom prst="rect">
             <a:avLst/>
@@ -29134,7 +31987,7 @@
         <p:spPr>
           <a:xfrm>
             <a:off x="10972800" y="0"/>
-            <a:ext cx="13320" cy="6852960"/>
+            <a:ext cx="12960" cy="6852600"/>
           </a:xfrm>
           <a:prstGeom prst="rect">
             <a:avLst/>
@@ -29194,7 +32047,7 @@
         <p:spPr>
           <a:xfrm>
             <a:off x="11887200" y="0"/>
-            <a:ext cx="13320" cy="6852960"/>
+            <a:ext cx="12960" cy="6852600"/>
           </a:xfrm>
           <a:prstGeom prst="rect">
             <a:avLst/>
@@ -29254,7 +32107,7 @@
         <p:spPr>
           <a:xfrm>
             <a:off x="0" y="0"/>
-            <a:ext cx="315000" cy="6852960"/>
+            <a:ext cx="314640" cy="6852600"/>
           </a:xfrm>
           <a:prstGeom prst="rect">
             <a:avLst/>
@@ -29314,7 +32167,7 @@
         <p:spPr>
           <a:xfrm>
             <a:off x="9875520" y="365760"/>
-            <a:ext cx="2006640" cy="497880"/>
+            <a:ext cx="2006280" cy="497520"/>
           </a:xfrm>
           <a:prstGeom prst="roundRect">
             <a:avLst>
@@ -29388,7 +32241,7 @@
         <p:spPr>
           <a:xfrm>
             <a:off x="2699280" y="914400"/>
-            <a:ext cx="5569200" cy="1186920"/>
+            <a:ext cx="5568840" cy="1186920"/>
           </a:xfrm>
           <a:prstGeom prst="rect">
             <a:avLst/>
@@ -29455,7 +32308,7 @@
         <p:spPr>
           <a:xfrm>
             <a:off x="2148480" y="1694880"/>
-            <a:ext cx="7271640" cy="819720"/>
+            <a:ext cx="7271280" cy="819720"/>
           </a:xfrm>
           <a:prstGeom prst="rect">
             <a:avLst/>
@@ -29555,7 +32408,7 @@
         <p:spPr>
           <a:xfrm>
             <a:off x="987480" y="3182040"/>
-            <a:ext cx="3286800" cy="2738160"/>
+            <a:ext cx="3286440" cy="2737800"/>
           </a:xfrm>
           <a:prstGeom prst="roundRect">
             <a:avLst>
@@ -29617,7 +32470,7 @@
         <p:spPr>
           <a:xfrm>
             <a:off x="914400" y="3108960"/>
-            <a:ext cx="3286800" cy="3290040"/>
+            <a:ext cx="3286440" cy="3289680"/>
           </a:xfrm>
           <a:prstGeom prst="roundRect">
             <a:avLst>
@@ -29883,7 +32736,7 @@
         <p:spPr>
           <a:xfrm>
             <a:off x="4507920" y="3182040"/>
-            <a:ext cx="3286800" cy="2738160"/>
+            <a:ext cx="3286440" cy="2737800"/>
           </a:xfrm>
           <a:prstGeom prst="roundRect">
             <a:avLst>
@@ -29945,7 +32798,7 @@
         <p:spPr>
           <a:xfrm>
             <a:off x="4434840" y="3200400"/>
-            <a:ext cx="3286800" cy="3198600"/>
+            <a:ext cx="3286440" cy="3198240"/>
           </a:xfrm>
           <a:prstGeom prst="roundRect">
             <a:avLst>
@@ -30319,7 +33172,7 @@
         <p:spPr>
           <a:xfrm>
             <a:off x="8028360" y="3182040"/>
-            <a:ext cx="3286800" cy="2738160"/>
+            <a:ext cx="3286440" cy="2737800"/>
           </a:xfrm>
           <a:prstGeom prst="roundRect">
             <a:avLst>
@@ -30381,7 +33234,7 @@
         <p:spPr>
           <a:xfrm>
             <a:off x="8003880" y="2971800"/>
-            <a:ext cx="3425040" cy="3425760"/>
+            <a:ext cx="3424680" cy="3425400"/>
           </a:xfrm>
           <a:prstGeom prst="roundRect">
             <a:avLst>

--- a/Java/Java #4/EN/Java #4.pptx
+++ b/Java/Java #4/EN/Java #4.pptx
@@ -17,6 +17,7 @@
     <p:sldId id="265" r:id="rId12"/>
     <p:sldId id="266" r:id="rId13"/>
     <p:sldId id="267" r:id="rId14"/>
+    <p:sldId id="268" r:id="rId15"/>
   </p:sldIdLst>
   <p:sldSz cx="9144000" cy="6858000"/>
   <p:notesSz cx="7772400" cy="10058400"/>
@@ -74,7 +75,7 @@
         <p:txBody>
           <a:bodyPr/>
           <a:p>
-            <a:fld id="{5171F493-A494-4579-BC10-F60F6F56A636}" type="slidenum">
+            <a:fld id="{AB9A5327-AEB1-402C-99F7-E9247B9703FC}" type="slidenum">
               <a:t>&lt;#&gt;</a:t>
             </a:fld>
           </a:p>
@@ -283,7 +284,7 @@
         <p:txBody>
           <a:bodyPr/>
           <a:p>
-            <a:fld id="{64F8F649-ABAC-4456-AC69-3FBBC10CCDC5}" type="slidenum">
+            <a:fld id="{6F7E379A-6E81-4E62-8473-4D7BBC24F334}" type="slidenum">
               <a:t>&lt;#&gt;</a:t>
             </a:fld>
           </a:p>
@@ -578,7 +579,7 @@
         <p:txBody>
           <a:bodyPr/>
           <a:p>
-            <a:fld id="{58B2A62C-2D15-421D-96F0-B1208AE51782}" type="slidenum">
+            <a:fld id="{C1885820-6317-4550-BD3E-96C9A87B04FC}" type="slidenum">
               <a:t>&lt;#&gt;</a:t>
             </a:fld>
           </a:p>
@@ -959,7 +960,7 @@
         <p:txBody>
           <a:bodyPr/>
           <a:p>
-            <a:fld id="{24794471-BDBF-4796-8151-BE0B8FE1B0C9}" type="slidenum">
+            <a:fld id="{67699285-2C77-474B-820F-B92AF960A0F3}" type="slidenum">
               <a:t>&lt;#&gt;</a:t>
             </a:fld>
           </a:p>
@@ -1122,7 +1123,7 @@
         <p:txBody>
           <a:bodyPr/>
           <a:p>
-            <a:fld id="{2429B645-0E8C-414E-9815-058DA1A9C685}" type="slidenum">
+            <a:fld id="{C4BC5BFA-D948-4486-ACDB-521999AADBCB}" type="slidenum">
               <a:t>&lt;#&gt;</a:t>
             </a:fld>
           </a:p>
@@ -1288,7 +1289,7 @@
         <p:txBody>
           <a:bodyPr/>
           <a:p>
-            <a:fld id="{4C3DC4AF-BFD5-41D7-9368-58F99F05A143}" type="slidenum">
+            <a:fld id="{CA375110-56E4-42EE-B0DA-87717210ACB8}" type="slidenum">
               <a:t>&lt;#&gt;</a:t>
             </a:fld>
           </a:p>
@@ -1497,7 +1498,7 @@
         <p:txBody>
           <a:bodyPr/>
           <a:p>
-            <a:fld id="{C5344044-E3D6-4673-B6F7-ACB71053DFA9}" type="slidenum">
+            <a:fld id="{C32CFCA6-E17E-4D79-BE49-BF9D497942D0}" type="slidenum">
               <a:t>&lt;#&gt;</a:t>
             </a:fld>
           </a:p>
@@ -1620,7 +1621,7 @@
         <p:txBody>
           <a:bodyPr/>
           <a:p>
-            <a:fld id="{6B1DC76F-4263-4A02-8E2D-38148D5EA88D}" type="slidenum">
+            <a:fld id="{2C7D766E-5D0E-4512-AD8F-27555D7EC485}" type="slidenum">
               <a:t>&lt;#&gt;</a:t>
             </a:fld>
           </a:p>
@@ -1741,7 +1742,7 @@
         <p:txBody>
           <a:bodyPr/>
           <a:p>
-            <a:fld id="{3455502B-F33D-42D9-BD23-8A1A19DA8C57}" type="slidenum">
+            <a:fld id="{25102D93-59EF-4BBB-A56C-F8822F5275A5}" type="slidenum">
               <a:t>&lt;#&gt;</a:t>
             </a:fld>
           </a:p>
@@ -1993,7 +1994,7 @@
         <p:txBody>
           <a:bodyPr/>
           <a:p>
-            <a:fld id="{D7690C15-786D-43D5-9E25-C22AD8077286}" type="slidenum">
+            <a:fld id="{25582E87-7D52-4574-95E6-8A843464140D}" type="slidenum">
               <a:t>&lt;#&gt;</a:t>
             </a:fld>
           </a:p>
@@ -2245,7 +2246,7 @@
         <p:txBody>
           <a:bodyPr/>
           <a:p>
-            <a:fld id="{84B038D2-1595-4542-910E-CE07F749B241}" type="slidenum">
+            <a:fld id="{D8C02973-2C88-4F7A-AE55-C410468B81C7}" type="slidenum">
               <a:t>&lt;#&gt;</a:t>
             </a:fld>
           </a:p>
@@ -2497,7 +2498,7 @@
         <p:txBody>
           <a:bodyPr/>
           <a:p>
-            <a:fld id="{3FC69DDA-DC78-4398-A3D8-D299F3D8309A}" type="slidenum">
+            <a:fld id="{E581A8C2-1A5E-4225-8DD7-95C90E63F5B5}" type="slidenum">
               <a:t>&lt;#&gt;</a:t>
             </a:fld>
           </a:p>
@@ -2566,7 +2567,7 @@
         <p:spPr>
           <a:xfrm>
             <a:off x="3124080" y="6356520"/>
-            <a:ext cx="2890440" cy="360000"/>
+            <a:ext cx="2890080" cy="359640"/>
           </a:xfrm>
           <a:prstGeom prst="rect">
             <a:avLst/>
@@ -2638,7 +2639,7 @@
         <p:spPr>
           <a:xfrm>
             <a:off x="6553080" y="6356520"/>
-            <a:ext cx="2128680" cy="360000"/>
+            <a:ext cx="2128320" cy="359640"/>
           </a:xfrm>
           <a:prstGeom prst="rect">
             <a:avLst/>
@@ -2679,7 +2680,7 @@
                 <a:tab algn="l" pos="0"/>
               </a:tabLst>
             </a:pPr>
-            <a:fld id="{C28F96C6-0FD7-44B7-8F69-A738BDF4DEC7}" type="slidenum">
+            <a:fld id="{D31B7203-9D8D-4C1B-A0CD-EE9F05F44EB9}" type="slidenum">
               <a:rPr b="0" lang="en-US" sz="1200" spc="-1" strike="noStrike">
                 <a:solidFill>
                   <a:srgbClr val="8b8b8b"/>
@@ -2710,7 +2711,7 @@
         <p:spPr>
           <a:xfrm>
             <a:off x="457200" y="6356520"/>
-            <a:ext cx="2128680" cy="360000"/>
+            <a:ext cx="2128320" cy="359640"/>
           </a:xfrm>
           <a:prstGeom prst="rect">
             <a:avLst/>
@@ -3077,7 +3078,7 @@
         <p:spPr>
           <a:xfrm>
             <a:off x="0" y="0"/>
-            <a:ext cx="12183840" cy="6852960"/>
+            <a:ext cx="12183480" cy="6852600"/>
           </a:xfrm>
           <a:prstGeom prst="rect">
             <a:avLst/>
@@ -3137,7 +3138,7 @@
         <p:spPr>
           <a:xfrm>
             <a:off x="0" y="0"/>
-            <a:ext cx="13320" cy="6852960"/>
+            <a:ext cx="12960" cy="6852600"/>
           </a:xfrm>
           <a:prstGeom prst="rect">
             <a:avLst/>
@@ -3197,7 +3198,7 @@
         <p:spPr>
           <a:xfrm>
             <a:off x="914400" y="0"/>
-            <a:ext cx="13320" cy="6852960"/>
+            <a:ext cx="12960" cy="6852600"/>
           </a:xfrm>
           <a:prstGeom prst="rect">
             <a:avLst/>
@@ -3257,7 +3258,7 @@
         <p:spPr>
           <a:xfrm>
             <a:off x="1828800" y="0"/>
-            <a:ext cx="13320" cy="6852960"/>
+            <a:ext cx="12960" cy="6852600"/>
           </a:xfrm>
           <a:prstGeom prst="rect">
             <a:avLst/>
@@ -3317,7 +3318,7 @@
         <p:spPr>
           <a:xfrm>
             <a:off x="2743200" y="0"/>
-            <a:ext cx="13320" cy="6852960"/>
+            <a:ext cx="12960" cy="6852600"/>
           </a:xfrm>
           <a:prstGeom prst="rect">
             <a:avLst/>
@@ -3377,7 +3378,7 @@
         <p:spPr>
           <a:xfrm>
             <a:off x="3657600" y="0"/>
-            <a:ext cx="13320" cy="6852960"/>
+            <a:ext cx="12960" cy="6852600"/>
           </a:xfrm>
           <a:prstGeom prst="rect">
             <a:avLst/>
@@ -3437,7 +3438,7 @@
         <p:spPr>
           <a:xfrm>
             <a:off x="4572000" y="0"/>
-            <a:ext cx="13320" cy="6852960"/>
+            <a:ext cx="12960" cy="6852600"/>
           </a:xfrm>
           <a:prstGeom prst="rect">
             <a:avLst/>
@@ -3497,7 +3498,7 @@
         <p:spPr>
           <a:xfrm>
             <a:off x="5486400" y="0"/>
-            <a:ext cx="13320" cy="6852960"/>
+            <a:ext cx="12960" cy="6852600"/>
           </a:xfrm>
           <a:prstGeom prst="rect">
             <a:avLst/>
@@ -3557,7 +3558,7 @@
         <p:spPr>
           <a:xfrm>
             <a:off x="6400800" y="0"/>
-            <a:ext cx="13320" cy="6852960"/>
+            <a:ext cx="12960" cy="6852600"/>
           </a:xfrm>
           <a:prstGeom prst="rect">
             <a:avLst/>
@@ -3617,7 +3618,7 @@
         <p:spPr>
           <a:xfrm>
             <a:off x="7315200" y="0"/>
-            <a:ext cx="13320" cy="6852960"/>
+            <a:ext cx="12960" cy="6852600"/>
           </a:xfrm>
           <a:prstGeom prst="rect">
             <a:avLst/>
@@ -3677,7 +3678,7 @@
         <p:spPr>
           <a:xfrm>
             <a:off x="8229600" y="0"/>
-            <a:ext cx="13320" cy="6852960"/>
+            <a:ext cx="12960" cy="6852600"/>
           </a:xfrm>
           <a:prstGeom prst="rect">
             <a:avLst/>
@@ -3737,7 +3738,7 @@
         <p:spPr>
           <a:xfrm>
             <a:off x="9144000" y="0"/>
-            <a:ext cx="13320" cy="6852960"/>
+            <a:ext cx="12960" cy="6852600"/>
           </a:xfrm>
           <a:prstGeom prst="rect">
             <a:avLst/>
@@ -3797,7 +3798,7 @@
         <p:spPr>
           <a:xfrm>
             <a:off x="10058400" y="0"/>
-            <a:ext cx="13320" cy="6852960"/>
+            <a:ext cx="12960" cy="6852600"/>
           </a:xfrm>
           <a:prstGeom prst="rect">
             <a:avLst/>
@@ -3857,7 +3858,7 @@
         <p:spPr>
           <a:xfrm>
             <a:off x="10972800" y="0"/>
-            <a:ext cx="13320" cy="6852960"/>
+            <a:ext cx="12960" cy="6852600"/>
           </a:xfrm>
           <a:prstGeom prst="rect">
             <a:avLst/>
@@ -3917,7 +3918,7 @@
         <p:spPr>
           <a:xfrm>
             <a:off x="11887200" y="0"/>
-            <a:ext cx="13320" cy="6852960"/>
+            <a:ext cx="12960" cy="6852600"/>
           </a:xfrm>
           <a:prstGeom prst="rect">
             <a:avLst/>
@@ -3977,7 +3978,7 @@
         <p:spPr>
           <a:xfrm>
             <a:off x="0" y="0"/>
-            <a:ext cx="315000" cy="6852960"/>
+            <a:ext cx="314640" cy="6852600"/>
           </a:xfrm>
           <a:prstGeom prst="rect">
             <a:avLst/>
@@ -4037,7 +4038,7 @@
         <p:spPr>
           <a:xfrm>
             <a:off x="9875520" y="365760"/>
-            <a:ext cx="2006640" cy="497880"/>
+            <a:ext cx="2006280" cy="497520"/>
           </a:xfrm>
           <a:prstGeom prst="roundRect">
             <a:avLst>
@@ -4265,7 +4266,7 @@
         <p:spPr>
           <a:xfrm>
             <a:off x="987480" y="3182040"/>
-            <a:ext cx="3286800" cy="2738160"/>
+            <a:ext cx="3286440" cy="2737800"/>
           </a:xfrm>
           <a:prstGeom prst="roundRect">
             <a:avLst>
@@ -4327,7 +4328,7 @@
         <p:spPr>
           <a:xfrm>
             <a:off x="914400" y="3108960"/>
-            <a:ext cx="3286800" cy="2738160"/>
+            <a:ext cx="3286440" cy="2737800"/>
           </a:xfrm>
           <a:prstGeom prst="roundRect">
             <a:avLst>
@@ -4461,7 +4462,7 @@
         <p:spPr>
           <a:xfrm>
             <a:off x="4507920" y="3182040"/>
-            <a:ext cx="3286800" cy="2738160"/>
+            <a:ext cx="3286440" cy="2737800"/>
           </a:xfrm>
           <a:prstGeom prst="roundRect">
             <a:avLst>
@@ -4523,7 +4524,7 @@
         <p:spPr>
           <a:xfrm>
             <a:off x="4434840" y="3108960"/>
-            <a:ext cx="3286800" cy="2738160"/>
+            <a:ext cx="3286440" cy="2737800"/>
           </a:xfrm>
           <a:prstGeom prst="roundRect">
             <a:avLst>
@@ -4781,7 +4782,7 @@
         <p:spPr>
           <a:xfrm>
             <a:off x="8028360" y="3182040"/>
-            <a:ext cx="3286800" cy="2738160"/>
+            <a:ext cx="3286440" cy="2737800"/>
           </a:xfrm>
           <a:prstGeom prst="roundRect">
             <a:avLst>
@@ -4843,7 +4844,7 @@
         <p:spPr>
           <a:xfrm>
             <a:off x="7955280" y="2971800"/>
-            <a:ext cx="3927960" cy="3653640"/>
+            <a:ext cx="3927600" cy="3653280"/>
           </a:xfrm>
           <a:prstGeom prst="roundRect">
             <a:avLst>
@@ -5354,7 +5355,7 @@
         <p:spPr>
           <a:xfrm>
             <a:off x="0" y="0"/>
-            <a:ext cx="12183840" cy="6852960"/>
+            <a:ext cx="12183480" cy="6852600"/>
           </a:xfrm>
           <a:prstGeom prst="rect">
             <a:avLst/>
@@ -5414,7 +5415,7 @@
         <p:spPr>
           <a:xfrm>
             <a:off x="0" y="0"/>
-            <a:ext cx="13320" cy="6852960"/>
+            <a:ext cx="12960" cy="6852600"/>
           </a:xfrm>
           <a:prstGeom prst="rect">
             <a:avLst/>
@@ -5474,7 +5475,7 @@
         <p:spPr>
           <a:xfrm>
             <a:off x="914400" y="0"/>
-            <a:ext cx="13320" cy="6852960"/>
+            <a:ext cx="12960" cy="6852600"/>
           </a:xfrm>
           <a:prstGeom prst="rect">
             <a:avLst/>
@@ -5534,7 +5535,7 @@
         <p:spPr>
           <a:xfrm>
             <a:off x="1828800" y="0"/>
-            <a:ext cx="13320" cy="6852960"/>
+            <a:ext cx="12960" cy="6852600"/>
           </a:xfrm>
           <a:prstGeom prst="rect">
             <a:avLst/>
@@ -5594,7 +5595,7 @@
         <p:spPr>
           <a:xfrm>
             <a:off x="2743200" y="0"/>
-            <a:ext cx="13320" cy="6852960"/>
+            <a:ext cx="12960" cy="6852600"/>
           </a:xfrm>
           <a:prstGeom prst="rect">
             <a:avLst/>
@@ -5654,7 +5655,7 @@
         <p:spPr>
           <a:xfrm>
             <a:off x="3657600" y="0"/>
-            <a:ext cx="13320" cy="6852960"/>
+            <a:ext cx="12960" cy="6852600"/>
           </a:xfrm>
           <a:prstGeom prst="rect">
             <a:avLst/>
@@ -5714,7 +5715,7 @@
         <p:spPr>
           <a:xfrm>
             <a:off x="4572000" y="0"/>
-            <a:ext cx="13320" cy="6852960"/>
+            <a:ext cx="12960" cy="6852600"/>
           </a:xfrm>
           <a:prstGeom prst="rect">
             <a:avLst/>
@@ -5774,7 +5775,7 @@
         <p:spPr>
           <a:xfrm>
             <a:off x="5486400" y="0"/>
-            <a:ext cx="13320" cy="6852960"/>
+            <a:ext cx="12960" cy="6852600"/>
           </a:xfrm>
           <a:prstGeom prst="rect">
             <a:avLst/>
@@ -5834,7 +5835,7 @@
         <p:spPr>
           <a:xfrm>
             <a:off x="6400800" y="0"/>
-            <a:ext cx="13320" cy="6852960"/>
+            <a:ext cx="12960" cy="6852600"/>
           </a:xfrm>
           <a:prstGeom prst="rect">
             <a:avLst/>
@@ -5894,7 +5895,7 @@
         <p:spPr>
           <a:xfrm>
             <a:off x="7315200" y="0"/>
-            <a:ext cx="13320" cy="6852960"/>
+            <a:ext cx="12960" cy="6852600"/>
           </a:xfrm>
           <a:prstGeom prst="rect">
             <a:avLst/>
@@ -5954,7 +5955,7 @@
         <p:spPr>
           <a:xfrm>
             <a:off x="8229600" y="0"/>
-            <a:ext cx="13320" cy="6852960"/>
+            <a:ext cx="12960" cy="6852600"/>
           </a:xfrm>
           <a:prstGeom prst="rect">
             <a:avLst/>
@@ -6014,7 +6015,7 @@
         <p:spPr>
           <a:xfrm>
             <a:off x="9144000" y="0"/>
-            <a:ext cx="13320" cy="6852960"/>
+            <a:ext cx="12960" cy="6852600"/>
           </a:xfrm>
           <a:prstGeom prst="rect">
             <a:avLst/>
@@ -6074,7 +6075,7 @@
         <p:spPr>
           <a:xfrm>
             <a:off x="10058400" y="0"/>
-            <a:ext cx="13320" cy="6852960"/>
+            <a:ext cx="12960" cy="6852600"/>
           </a:xfrm>
           <a:prstGeom prst="rect">
             <a:avLst/>
@@ -6134,7 +6135,7 @@
         <p:spPr>
           <a:xfrm>
             <a:off x="10972800" y="0"/>
-            <a:ext cx="13320" cy="6852960"/>
+            <a:ext cx="12960" cy="6852600"/>
           </a:xfrm>
           <a:prstGeom prst="rect">
             <a:avLst/>
@@ -6194,7 +6195,7 @@
         <p:spPr>
           <a:xfrm>
             <a:off x="11887200" y="0"/>
-            <a:ext cx="13320" cy="6852960"/>
+            <a:ext cx="12960" cy="6852600"/>
           </a:xfrm>
           <a:prstGeom prst="rect">
             <a:avLst/>
@@ -6254,7 +6255,7 @@
         <p:spPr>
           <a:xfrm>
             <a:off x="0" y="0"/>
-            <a:ext cx="315000" cy="6852960"/>
+            <a:ext cx="314640" cy="6852600"/>
           </a:xfrm>
           <a:prstGeom prst="rect">
             <a:avLst/>
@@ -6314,7 +6315,7 @@
         <p:spPr>
           <a:xfrm>
             <a:off x="9875520" y="365760"/>
-            <a:ext cx="2006640" cy="497880"/>
+            <a:ext cx="2006280" cy="497520"/>
           </a:xfrm>
           <a:prstGeom prst="roundRect">
             <a:avLst>
@@ -6388,7 +6389,7 @@
         <p:spPr>
           <a:xfrm>
             <a:off x="1072440" y="914400"/>
-            <a:ext cx="8822880" cy="638280"/>
+            <a:ext cx="8822520" cy="638280"/>
           </a:xfrm>
           <a:prstGeom prst="rect">
             <a:avLst/>
@@ -6442,7 +6443,7 @@
         <p:spPr>
           <a:xfrm>
             <a:off x="2043720" y="1694880"/>
-            <a:ext cx="7481880" cy="819720"/>
+            <a:ext cx="7481520" cy="819720"/>
           </a:xfrm>
           <a:prstGeom prst="rect">
             <a:avLst/>
@@ -6542,7 +6543,7 @@
         <p:spPr>
           <a:xfrm>
             <a:off x="987480" y="3182040"/>
-            <a:ext cx="3286800" cy="2738160"/>
+            <a:ext cx="3286440" cy="2737800"/>
           </a:xfrm>
           <a:prstGeom prst="roundRect">
             <a:avLst>
@@ -6604,7 +6605,7 @@
         <p:spPr>
           <a:xfrm>
             <a:off x="685800" y="2743200"/>
-            <a:ext cx="3515400" cy="3655800"/>
+            <a:ext cx="3515040" cy="3655440"/>
           </a:xfrm>
           <a:prstGeom prst="roundRect">
             <a:avLst>
@@ -6846,7 +6847,7 @@
         <p:spPr>
           <a:xfrm>
             <a:off x="4507920" y="3182040"/>
-            <a:ext cx="3286800" cy="2738160"/>
+            <a:ext cx="3286440" cy="2737800"/>
           </a:xfrm>
           <a:prstGeom prst="roundRect">
             <a:avLst>
@@ -6908,7 +6909,7 @@
         <p:spPr>
           <a:xfrm>
             <a:off x="4434840" y="2971800"/>
-            <a:ext cx="3286800" cy="3427200"/>
+            <a:ext cx="3286440" cy="3426840"/>
           </a:xfrm>
           <a:prstGeom prst="roundRect">
             <a:avLst>
@@ -7262,7 +7263,7 @@
         <p:spPr>
           <a:xfrm>
             <a:off x="8028360" y="3182040"/>
-            <a:ext cx="3286800" cy="2738160"/>
+            <a:ext cx="3286440" cy="2737800"/>
           </a:xfrm>
           <a:prstGeom prst="roundRect">
             <a:avLst>
@@ -7324,7 +7325,7 @@
         <p:spPr>
           <a:xfrm>
             <a:off x="8001000" y="2743200"/>
-            <a:ext cx="3428280" cy="3654360"/>
+            <a:ext cx="3427920" cy="3654000"/>
           </a:xfrm>
           <a:prstGeom prst="roundRect">
             <a:avLst>
@@ -8000,7 +8001,7 @@
         <p:spPr>
           <a:xfrm>
             <a:off x="0" y="0"/>
-            <a:ext cx="12183840" cy="6852960"/>
+            <a:ext cx="12183480" cy="6852600"/>
           </a:xfrm>
           <a:prstGeom prst="rect">
             <a:avLst/>
@@ -8060,7 +8061,7 @@
         <p:spPr>
           <a:xfrm>
             <a:off x="0" y="0"/>
-            <a:ext cx="13320" cy="6852960"/>
+            <a:ext cx="12960" cy="6852600"/>
           </a:xfrm>
           <a:prstGeom prst="rect">
             <a:avLst/>
@@ -8120,7 +8121,7 @@
         <p:spPr>
           <a:xfrm>
             <a:off x="914400" y="0"/>
-            <a:ext cx="13320" cy="6852960"/>
+            <a:ext cx="12960" cy="6852600"/>
           </a:xfrm>
           <a:prstGeom prst="rect">
             <a:avLst/>
@@ -8180,7 +8181,7 @@
         <p:spPr>
           <a:xfrm>
             <a:off x="1828800" y="0"/>
-            <a:ext cx="13320" cy="6852960"/>
+            <a:ext cx="12960" cy="6852600"/>
           </a:xfrm>
           <a:prstGeom prst="rect">
             <a:avLst/>
@@ -8240,7 +8241,7 @@
         <p:spPr>
           <a:xfrm>
             <a:off x="2743200" y="0"/>
-            <a:ext cx="13320" cy="6852960"/>
+            <a:ext cx="12960" cy="6852600"/>
           </a:xfrm>
           <a:prstGeom prst="rect">
             <a:avLst/>
@@ -8300,7 +8301,7 @@
         <p:spPr>
           <a:xfrm>
             <a:off x="3657600" y="0"/>
-            <a:ext cx="13320" cy="6852960"/>
+            <a:ext cx="12960" cy="6852600"/>
           </a:xfrm>
           <a:prstGeom prst="rect">
             <a:avLst/>
@@ -8360,7 +8361,7 @@
         <p:spPr>
           <a:xfrm>
             <a:off x="4572000" y="0"/>
-            <a:ext cx="13320" cy="6852960"/>
+            <a:ext cx="12960" cy="6852600"/>
           </a:xfrm>
           <a:prstGeom prst="rect">
             <a:avLst/>
@@ -8420,7 +8421,7 @@
         <p:spPr>
           <a:xfrm>
             <a:off x="5486400" y="0"/>
-            <a:ext cx="13320" cy="6852960"/>
+            <a:ext cx="12960" cy="6852600"/>
           </a:xfrm>
           <a:prstGeom prst="rect">
             <a:avLst/>
@@ -8480,7 +8481,7 @@
         <p:spPr>
           <a:xfrm>
             <a:off x="6400800" y="0"/>
-            <a:ext cx="13320" cy="6852960"/>
+            <a:ext cx="12960" cy="6852600"/>
           </a:xfrm>
           <a:prstGeom prst="rect">
             <a:avLst/>
@@ -8540,7 +8541,7 @@
         <p:spPr>
           <a:xfrm>
             <a:off x="7315200" y="0"/>
-            <a:ext cx="13320" cy="6852960"/>
+            <a:ext cx="12960" cy="6852600"/>
           </a:xfrm>
           <a:prstGeom prst="rect">
             <a:avLst/>
@@ -8600,7 +8601,7 @@
         <p:spPr>
           <a:xfrm>
             <a:off x="8229600" y="0"/>
-            <a:ext cx="13320" cy="6852960"/>
+            <a:ext cx="12960" cy="6852600"/>
           </a:xfrm>
           <a:prstGeom prst="rect">
             <a:avLst/>
@@ -8660,7 +8661,7 @@
         <p:spPr>
           <a:xfrm>
             <a:off x="9144000" y="0"/>
-            <a:ext cx="13320" cy="6852960"/>
+            <a:ext cx="12960" cy="6852600"/>
           </a:xfrm>
           <a:prstGeom prst="rect">
             <a:avLst/>
@@ -8720,7 +8721,7 @@
         <p:spPr>
           <a:xfrm>
             <a:off x="10058400" y="0"/>
-            <a:ext cx="13320" cy="6852960"/>
+            <a:ext cx="12960" cy="6852600"/>
           </a:xfrm>
           <a:prstGeom prst="rect">
             <a:avLst/>
@@ -8780,7 +8781,7 @@
         <p:spPr>
           <a:xfrm>
             <a:off x="10972800" y="0"/>
-            <a:ext cx="13320" cy="6852960"/>
+            <a:ext cx="12960" cy="6852600"/>
           </a:xfrm>
           <a:prstGeom prst="rect">
             <a:avLst/>
@@ -8840,7 +8841,7 @@
         <p:spPr>
           <a:xfrm>
             <a:off x="11887200" y="0"/>
-            <a:ext cx="13320" cy="6852960"/>
+            <a:ext cx="12960" cy="6852600"/>
           </a:xfrm>
           <a:prstGeom prst="rect">
             <a:avLst/>
@@ -8900,7 +8901,7 @@
         <p:spPr>
           <a:xfrm>
             <a:off x="0" y="0"/>
-            <a:ext cx="315000" cy="6852960"/>
+            <a:ext cx="314640" cy="6852600"/>
           </a:xfrm>
           <a:prstGeom prst="rect">
             <a:avLst/>
@@ -8960,7 +8961,7 @@
         <p:spPr>
           <a:xfrm>
             <a:off x="9875520" y="365760"/>
-            <a:ext cx="2006640" cy="497880"/>
+            <a:ext cx="2006280" cy="497520"/>
           </a:xfrm>
           <a:prstGeom prst="roundRect">
             <a:avLst>
@@ -9088,7 +9089,7 @@
         <p:spPr>
           <a:xfrm>
             <a:off x="1482480" y="1694880"/>
-            <a:ext cx="8604000" cy="819720"/>
+            <a:ext cx="8603640" cy="819720"/>
           </a:xfrm>
           <a:prstGeom prst="rect">
             <a:avLst/>
@@ -9188,7 +9189,7 @@
         <p:spPr>
           <a:xfrm>
             <a:off x="987480" y="3182040"/>
-            <a:ext cx="3286800" cy="2738160"/>
+            <a:ext cx="3286440" cy="2737800"/>
           </a:xfrm>
           <a:prstGeom prst="roundRect">
             <a:avLst>
@@ -9250,7 +9251,7 @@
         <p:spPr>
           <a:xfrm>
             <a:off x="685800" y="2743200"/>
-            <a:ext cx="3515400" cy="3655800"/>
+            <a:ext cx="3515040" cy="3655440"/>
           </a:xfrm>
           <a:prstGeom prst="roundRect">
             <a:avLst>
@@ -9568,7 +9569,7 @@
         <p:spPr>
           <a:xfrm>
             <a:off x="4507920" y="3182040"/>
-            <a:ext cx="3286800" cy="2738160"/>
+            <a:ext cx="3286440" cy="2737800"/>
           </a:xfrm>
           <a:prstGeom prst="roundRect">
             <a:avLst>
@@ -9630,7 +9631,7 @@
         <p:spPr>
           <a:xfrm>
             <a:off x="4434840" y="2971800"/>
-            <a:ext cx="3286800" cy="3427200"/>
+            <a:ext cx="3286440" cy="3426840"/>
           </a:xfrm>
           <a:prstGeom prst="roundRect">
             <a:avLst>
@@ -9961,7 +9962,7 @@
         <p:spPr>
           <a:xfrm>
             <a:off x="8028360" y="3182040"/>
-            <a:ext cx="3286800" cy="2738160"/>
+            <a:ext cx="3286440" cy="2737800"/>
           </a:xfrm>
           <a:prstGeom prst="roundRect">
             <a:avLst>
@@ -10023,7 +10024,7 @@
         <p:spPr>
           <a:xfrm>
             <a:off x="8001000" y="2743200"/>
-            <a:ext cx="3428280" cy="3654360"/>
+            <a:ext cx="3427920" cy="3654000"/>
           </a:xfrm>
           <a:prstGeom prst="roundRect">
             <a:avLst>
@@ -10788,7 +10789,7 @@
         <p:spPr>
           <a:xfrm>
             <a:off x="0" y="0"/>
-            <a:ext cx="12183840" cy="6852960"/>
+            <a:ext cx="12183480" cy="6852600"/>
           </a:xfrm>
           <a:prstGeom prst="rect">
             <a:avLst/>
@@ -10824,6 +10825,11 @@
             <a:noAutofit/>
           </a:bodyPr>
           <a:p>
+            <a:pPr>
+              <a:lnSpc>
+                <a:spcPct val="100000"/>
+              </a:lnSpc>
+            </a:pPr>
             <a:endParaRPr b="0" lang="en-US" sz="1800" spc="-1" strike="noStrike">
               <a:solidFill>
                 <a:schemeClr val="lt1"/>
@@ -10843,7 +10849,7 @@
         <p:spPr>
           <a:xfrm>
             <a:off x="0" y="0"/>
-            <a:ext cx="13320" cy="6852960"/>
+            <a:ext cx="12960" cy="6852600"/>
           </a:xfrm>
           <a:prstGeom prst="rect">
             <a:avLst/>
@@ -10879,6 +10885,11 @@
             <a:noAutofit/>
           </a:bodyPr>
           <a:p>
+            <a:pPr>
+              <a:lnSpc>
+                <a:spcPct val="100000"/>
+              </a:lnSpc>
+            </a:pPr>
             <a:endParaRPr b="0" lang="en-US" sz="1800" spc="-1" strike="noStrike">
               <a:solidFill>
                 <a:schemeClr val="lt1"/>
@@ -10898,7 +10909,7 @@
         <p:spPr>
           <a:xfrm>
             <a:off x="914400" y="0"/>
-            <a:ext cx="13320" cy="6852960"/>
+            <a:ext cx="12960" cy="6852600"/>
           </a:xfrm>
           <a:prstGeom prst="rect">
             <a:avLst/>
@@ -10934,6 +10945,11 @@
             <a:noAutofit/>
           </a:bodyPr>
           <a:p>
+            <a:pPr>
+              <a:lnSpc>
+                <a:spcPct val="100000"/>
+              </a:lnSpc>
+            </a:pPr>
             <a:endParaRPr b="0" lang="en-US" sz="1800" spc="-1" strike="noStrike">
               <a:solidFill>
                 <a:schemeClr val="lt1"/>
@@ -10953,7 +10969,7 @@
         <p:spPr>
           <a:xfrm>
             <a:off x="1828800" y="0"/>
-            <a:ext cx="13320" cy="6852960"/>
+            <a:ext cx="12960" cy="6852600"/>
           </a:xfrm>
           <a:prstGeom prst="rect">
             <a:avLst/>
@@ -10989,6 +11005,11 @@
             <a:noAutofit/>
           </a:bodyPr>
           <a:p>
+            <a:pPr>
+              <a:lnSpc>
+                <a:spcPct val="100000"/>
+              </a:lnSpc>
+            </a:pPr>
             <a:endParaRPr b="0" lang="en-US" sz="1800" spc="-1" strike="noStrike">
               <a:solidFill>
                 <a:schemeClr val="lt1"/>
@@ -11008,7 +11029,7 @@
         <p:spPr>
           <a:xfrm>
             <a:off x="2743200" y="0"/>
-            <a:ext cx="13320" cy="6852960"/>
+            <a:ext cx="12960" cy="6852600"/>
           </a:xfrm>
           <a:prstGeom prst="rect">
             <a:avLst/>
@@ -11044,6 +11065,11 @@
             <a:noAutofit/>
           </a:bodyPr>
           <a:p>
+            <a:pPr>
+              <a:lnSpc>
+                <a:spcPct val="100000"/>
+              </a:lnSpc>
+            </a:pPr>
             <a:endParaRPr b="0" lang="en-US" sz="1800" spc="-1" strike="noStrike">
               <a:solidFill>
                 <a:schemeClr val="lt1"/>
@@ -11063,7 +11089,7 @@
         <p:spPr>
           <a:xfrm>
             <a:off x="3657600" y="0"/>
-            <a:ext cx="13320" cy="6852960"/>
+            <a:ext cx="12960" cy="6852600"/>
           </a:xfrm>
           <a:prstGeom prst="rect">
             <a:avLst/>
@@ -11099,6 +11125,11 @@
             <a:noAutofit/>
           </a:bodyPr>
           <a:p>
+            <a:pPr>
+              <a:lnSpc>
+                <a:spcPct val="100000"/>
+              </a:lnSpc>
+            </a:pPr>
             <a:endParaRPr b="0" lang="en-US" sz="1800" spc="-1" strike="noStrike">
               <a:solidFill>
                 <a:schemeClr val="lt1"/>
@@ -11118,7 +11149,7 @@
         <p:spPr>
           <a:xfrm>
             <a:off x="4572000" y="0"/>
-            <a:ext cx="13320" cy="6852960"/>
+            <a:ext cx="12960" cy="6852600"/>
           </a:xfrm>
           <a:prstGeom prst="rect">
             <a:avLst/>
@@ -11154,6 +11185,11 @@
             <a:noAutofit/>
           </a:bodyPr>
           <a:p>
+            <a:pPr>
+              <a:lnSpc>
+                <a:spcPct val="100000"/>
+              </a:lnSpc>
+            </a:pPr>
             <a:endParaRPr b="0" lang="en-US" sz="1800" spc="-1" strike="noStrike">
               <a:solidFill>
                 <a:schemeClr val="lt1"/>
@@ -11173,7 +11209,7 @@
         <p:spPr>
           <a:xfrm>
             <a:off x="5486400" y="0"/>
-            <a:ext cx="13320" cy="6852960"/>
+            <a:ext cx="12960" cy="6852600"/>
           </a:xfrm>
           <a:prstGeom prst="rect">
             <a:avLst/>
@@ -11209,6 +11245,11 @@
             <a:noAutofit/>
           </a:bodyPr>
           <a:p>
+            <a:pPr>
+              <a:lnSpc>
+                <a:spcPct val="100000"/>
+              </a:lnSpc>
+            </a:pPr>
             <a:endParaRPr b="0" lang="en-US" sz="1800" spc="-1" strike="noStrike">
               <a:solidFill>
                 <a:schemeClr val="lt1"/>
@@ -11228,7 +11269,7 @@
         <p:spPr>
           <a:xfrm>
             <a:off x="6400800" y="0"/>
-            <a:ext cx="13320" cy="6852960"/>
+            <a:ext cx="12960" cy="6852600"/>
           </a:xfrm>
           <a:prstGeom prst="rect">
             <a:avLst/>
@@ -11264,6 +11305,11 @@
             <a:noAutofit/>
           </a:bodyPr>
           <a:p>
+            <a:pPr>
+              <a:lnSpc>
+                <a:spcPct val="100000"/>
+              </a:lnSpc>
+            </a:pPr>
             <a:endParaRPr b="0" lang="en-US" sz="1800" spc="-1" strike="noStrike">
               <a:solidFill>
                 <a:schemeClr val="lt1"/>
@@ -11283,7 +11329,7 @@
         <p:spPr>
           <a:xfrm>
             <a:off x="7315200" y="0"/>
-            <a:ext cx="13320" cy="6852960"/>
+            <a:ext cx="12960" cy="6852600"/>
           </a:xfrm>
           <a:prstGeom prst="rect">
             <a:avLst/>
@@ -11319,6 +11365,11 @@
             <a:noAutofit/>
           </a:bodyPr>
           <a:p>
+            <a:pPr>
+              <a:lnSpc>
+                <a:spcPct val="100000"/>
+              </a:lnSpc>
+            </a:pPr>
             <a:endParaRPr b="0" lang="en-US" sz="1800" spc="-1" strike="noStrike">
               <a:solidFill>
                 <a:schemeClr val="lt1"/>
@@ -11338,7 +11389,7 @@
         <p:spPr>
           <a:xfrm>
             <a:off x="8229600" y="0"/>
-            <a:ext cx="13320" cy="6852960"/>
+            <a:ext cx="12960" cy="6852600"/>
           </a:xfrm>
           <a:prstGeom prst="rect">
             <a:avLst/>
@@ -11374,6 +11425,11 @@
             <a:noAutofit/>
           </a:bodyPr>
           <a:p>
+            <a:pPr>
+              <a:lnSpc>
+                <a:spcPct val="100000"/>
+              </a:lnSpc>
+            </a:pPr>
             <a:endParaRPr b="0" lang="en-US" sz="1800" spc="-1" strike="noStrike">
               <a:solidFill>
                 <a:schemeClr val="lt1"/>
@@ -11393,7 +11449,7 @@
         <p:spPr>
           <a:xfrm>
             <a:off x="9144000" y="0"/>
-            <a:ext cx="13320" cy="6852960"/>
+            <a:ext cx="12960" cy="6852600"/>
           </a:xfrm>
           <a:prstGeom prst="rect">
             <a:avLst/>
@@ -11429,6 +11485,11 @@
             <a:noAutofit/>
           </a:bodyPr>
           <a:p>
+            <a:pPr>
+              <a:lnSpc>
+                <a:spcPct val="100000"/>
+              </a:lnSpc>
+            </a:pPr>
             <a:endParaRPr b="0" lang="en-US" sz="1800" spc="-1" strike="noStrike">
               <a:solidFill>
                 <a:schemeClr val="lt1"/>
@@ -11448,7 +11509,7 @@
         <p:spPr>
           <a:xfrm>
             <a:off x="10058400" y="0"/>
-            <a:ext cx="13320" cy="6852960"/>
+            <a:ext cx="12960" cy="6852600"/>
           </a:xfrm>
           <a:prstGeom prst="rect">
             <a:avLst/>
@@ -11484,6 +11545,11 @@
             <a:noAutofit/>
           </a:bodyPr>
           <a:p>
+            <a:pPr>
+              <a:lnSpc>
+                <a:spcPct val="100000"/>
+              </a:lnSpc>
+            </a:pPr>
             <a:endParaRPr b="0" lang="en-US" sz="1800" spc="-1" strike="noStrike">
               <a:solidFill>
                 <a:schemeClr val="lt1"/>
@@ -11503,7 +11569,7 @@
         <p:spPr>
           <a:xfrm>
             <a:off x="10972800" y="0"/>
-            <a:ext cx="13320" cy="6852960"/>
+            <a:ext cx="12960" cy="6852600"/>
           </a:xfrm>
           <a:prstGeom prst="rect">
             <a:avLst/>
@@ -11539,6 +11605,11 @@
             <a:noAutofit/>
           </a:bodyPr>
           <a:p>
+            <a:pPr>
+              <a:lnSpc>
+                <a:spcPct val="100000"/>
+              </a:lnSpc>
+            </a:pPr>
             <a:endParaRPr b="0" lang="en-US" sz="1800" spc="-1" strike="noStrike">
               <a:solidFill>
                 <a:schemeClr val="lt1"/>
@@ -11558,7 +11629,7 @@
         <p:spPr>
           <a:xfrm>
             <a:off x="11887200" y="0"/>
-            <a:ext cx="13320" cy="6852960"/>
+            <a:ext cx="12960" cy="6852600"/>
           </a:xfrm>
           <a:prstGeom prst="rect">
             <a:avLst/>
@@ -11594,6 +11665,11 @@
             <a:noAutofit/>
           </a:bodyPr>
           <a:p>
+            <a:pPr>
+              <a:lnSpc>
+                <a:spcPct val="100000"/>
+              </a:lnSpc>
+            </a:pPr>
             <a:endParaRPr b="0" lang="en-US" sz="1800" spc="-1" strike="noStrike">
               <a:solidFill>
                 <a:schemeClr val="lt1"/>
@@ -11613,7 +11689,7 @@
         <p:spPr>
           <a:xfrm>
             <a:off x="0" y="0"/>
-            <a:ext cx="315000" cy="6852960"/>
+            <a:ext cx="314640" cy="6852600"/>
           </a:xfrm>
           <a:prstGeom prst="rect">
             <a:avLst/>
@@ -11649,6 +11725,11 @@
             <a:noAutofit/>
           </a:bodyPr>
           <a:p>
+            <a:pPr>
+              <a:lnSpc>
+                <a:spcPct val="100000"/>
+              </a:lnSpc>
+            </a:pPr>
             <a:endParaRPr b="0" lang="en-US" sz="1800" spc="-1" strike="noStrike">
               <a:solidFill>
                 <a:schemeClr val="lt1"/>
@@ -11668,7 +11749,7 @@
         <p:spPr>
           <a:xfrm>
             <a:off x="9875520" y="365760"/>
-            <a:ext cx="2006640" cy="497880"/>
+            <a:ext cx="2006280" cy="497520"/>
           </a:xfrm>
           <a:prstGeom prst="roundRect">
             <a:avLst>
@@ -11742,7 +11823,7 @@
         <p:spPr>
           <a:xfrm>
             <a:off x="2768400" y="914400"/>
-            <a:ext cx="5431320" cy="516960"/>
+            <a:ext cx="5430960" cy="516240"/>
           </a:xfrm>
           <a:prstGeom prst="rect">
             <a:avLst/>
@@ -11796,7 +11877,7 @@
         <p:spPr>
           <a:xfrm>
             <a:off x="1257120" y="1694880"/>
-            <a:ext cx="9053640" cy="576360"/>
+            <a:ext cx="9053280" cy="576360"/>
           </a:xfrm>
           <a:prstGeom prst="rect">
             <a:avLst/>
@@ -11873,7 +11954,7 @@
         <p:spPr>
           <a:xfrm>
             <a:off x="987480" y="3182040"/>
-            <a:ext cx="3286800" cy="2738160"/>
+            <a:ext cx="3286440" cy="2737800"/>
           </a:xfrm>
           <a:prstGeom prst="roundRect">
             <a:avLst>
@@ -11911,6 +11992,11 @@
             <a:noAutofit/>
           </a:bodyPr>
           <a:p>
+            <a:pPr>
+              <a:lnSpc>
+                <a:spcPct val="100000"/>
+              </a:lnSpc>
+            </a:pPr>
             <a:endParaRPr b="0" lang="en-US" sz="1800" spc="-1" strike="noStrike">
               <a:solidFill>
                 <a:schemeClr val="lt1"/>
@@ -11930,7 +12016,7 @@
         <p:spPr>
           <a:xfrm>
             <a:off x="685800" y="2743200"/>
-            <a:ext cx="3515400" cy="3655800"/>
+            <a:ext cx="3515040" cy="3655440"/>
           </a:xfrm>
           <a:prstGeom prst="roundRect">
             <a:avLst>
@@ -12152,7 +12238,7 @@
         <p:spPr>
           <a:xfrm>
             <a:off x="4507920" y="3182040"/>
-            <a:ext cx="3286800" cy="2738160"/>
+            <a:ext cx="3286440" cy="2737800"/>
           </a:xfrm>
           <a:prstGeom prst="roundRect">
             <a:avLst>
@@ -12190,6 +12276,11 @@
             <a:noAutofit/>
           </a:bodyPr>
           <a:p>
+            <a:pPr>
+              <a:lnSpc>
+                <a:spcPct val="100000"/>
+              </a:lnSpc>
+            </a:pPr>
             <a:endParaRPr b="0" lang="en-US" sz="1800" spc="-1" strike="noStrike">
               <a:solidFill>
                 <a:schemeClr val="lt1"/>
@@ -12209,7 +12300,7 @@
         <p:spPr>
           <a:xfrm>
             <a:off x="4434840" y="2971800"/>
-            <a:ext cx="3286800" cy="3427200"/>
+            <a:ext cx="3286440" cy="3426840"/>
           </a:xfrm>
           <a:prstGeom prst="roundRect">
             <a:avLst>
@@ -12626,7 +12717,7 @@
         <p:spPr>
           <a:xfrm>
             <a:off x="8028360" y="3182040"/>
-            <a:ext cx="3286800" cy="2738160"/>
+            <a:ext cx="3286440" cy="2737800"/>
           </a:xfrm>
           <a:prstGeom prst="roundRect">
             <a:avLst>
@@ -12664,6 +12755,11 @@
             <a:noAutofit/>
           </a:bodyPr>
           <a:p>
+            <a:pPr>
+              <a:lnSpc>
+                <a:spcPct val="100000"/>
+              </a:lnSpc>
+            </a:pPr>
             <a:endParaRPr b="0" lang="en-US" sz="1800" spc="-1" strike="noStrike">
               <a:solidFill>
                 <a:schemeClr val="lt1"/>
@@ -12683,7 +12779,7 @@
         <p:spPr>
           <a:xfrm>
             <a:off x="8001000" y="2514600"/>
-            <a:ext cx="3657600" cy="3885840"/>
+            <a:ext cx="3657240" cy="3885480"/>
           </a:xfrm>
           <a:prstGeom prst="roundRect">
             <a:avLst>
@@ -13460,6 +13556,2923 @@
       <p:sp>
         <p:nvSpPr>
           <p:cNvPr id="352" name="TextBox 39"/>
+          <p:cNvSpPr/>
+          <p:nvPr/>
+        </p:nvSpPr>
+        <p:spPr>
+          <a:xfrm>
+            <a:off x="4600080" y="6446520"/>
+            <a:ext cx="3051000" cy="363960"/>
+          </a:xfrm>
+          <a:prstGeom prst="rect">
+            <a:avLst/>
+          </a:prstGeom>
+          <a:noFill/>
+          <a:ln w="0">
+            <a:noFill/>
+          </a:ln>
+        </p:spPr>
+        <p:style>
+          <a:lnRef idx="0"/>
+          <a:fillRef idx="0"/>
+          <a:effectRef idx="0"/>
+          <a:fontRef idx="minor"/>
+        </p:style>
+        <p:txBody>
+          <a:bodyPr wrap="none" lIns="90000" rIns="90000" tIns="45000" bIns="45000" anchor="t">
+            <a:spAutoFit/>
+          </a:bodyPr>
+          <a:p>
+            <a:pPr>
+              <a:lnSpc>
+                <a:spcPct val="100000"/>
+              </a:lnSpc>
+            </a:pPr>
+            <a:r>
+              <a:rPr b="0" lang="en-US" sz="1800" spc="-1" strike="noStrike">
+                <a:solidFill>
+                  <a:srgbClr val="000000"/>
+                </a:solidFill>
+                <a:latin typeface="Calibri"/>
+                <a:ea typeface="DejaVu Sans"/>
+              </a:rPr>
+              <a:t>Java • Ultra Premium Template</a:t>
+            </a:r>
+            <a:endParaRPr b="0" lang="en-US" sz="1800" spc="-1" strike="noStrike">
+              <a:solidFill>
+                <a:srgbClr val="000000"/>
+              </a:solidFill>
+              <a:latin typeface="Arial"/>
+            </a:endParaRPr>
+          </a:p>
+        </p:txBody>
+      </p:sp>
+    </p:spTree>
+  </p:cSld>
+  <mc:AlternateContent>
+    <mc:Choice Requires="p14">
+      <p:transition spd="slow" p14:dur="2000"/>
+    </mc:Choice>
+    <mc:Fallback>
+      <p:transition spd="slow"/>
+    </mc:Fallback>
+  </mc:AlternateContent>
+</p:sld>
+</file>
+
+<file path=ppt/slides/slide13.xml><?xml version="1.0" encoding="utf-8"?>
+<p:sld xmlns:a="http://schemas.openxmlformats.org/drawingml/2006/main" xmlns:p="http://schemas.openxmlformats.org/presentationml/2006/main" xmlns:r="http://schemas.openxmlformats.org/officeDocument/2006/relationships" xmlns:p14="http://schemas.microsoft.com/office/powerpoint/2010/main" xmlns:p15="http://schemas.microsoft.com/office/powerpoint/2012/main" xmlns:mc="http://schemas.openxmlformats.org/markup-compatibility/2006">
+  <p:cSld>
+    <p:spTree>
+      <p:nvGrpSpPr>
+        <p:cNvPr id="1" name=""/>
+        <p:cNvGrpSpPr/>
+        <p:nvPr/>
+      </p:nvGrpSpPr>
+      <p:grpSpPr>
+        <a:xfrm>
+          <a:off x="0" y="0"/>
+          <a:ext cx="0" cy="0"/>
+          <a:chOff x="0" y="0"/>
+          <a:chExt cx="0" cy="0"/>
+        </a:xfrm>
+      </p:grpSpPr>
+      <p:sp>
+        <p:nvSpPr>
+          <p:cNvPr id="353" name="Rectangle 193"/>
+          <p:cNvSpPr/>
+          <p:nvPr/>
+        </p:nvSpPr>
+        <p:spPr>
+          <a:xfrm>
+            <a:off x="0" y="0"/>
+            <a:ext cx="12183480" cy="6852600"/>
+          </a:xfrm>
+          <a:prstGeom prst="rect">
+            <a:avLst/>
+          </a:prstGeom>
+          <a:solidFill>
+            <a:srgbClr val="0b0b0d"/>
+          </a:solidFill>
+          <a:ln>
+            <a:noFill/>
+          </a:ln>
+          <a:effectLst>
+            <a:outerShdw blurRad="39960" dir="5400000" dist="23040" rotWithShape="0">
+              <a:srgbClr val="000000">
+                <a:alpha val="35000"/>
+              </a:srgbClr>
+            </a:outerShdw>
+          </a:effectLst>
+        </p:spPr>
+        <p:style>
+          <a:lnRef idx="1">
+            <a:schemeClr val="accent1"/>
+          </a:lnRef>
+          <a:fillRef idx="3">
+            <a:schemeClr val="accent1"/>
+          </a:fillRef>
+          <a:effectRef idx="2">
+            <a:schemeClr val="accent1"/>
+          </a:effectRef>
+          <a:fontRef idx="minor"/>
+        </p:style>
+        <p:txBody>
+          <a:bodyPr lIns="90000" rIns="90000" tIns="45000" bIns="45000" anchor="ctr">
+            <a:noAutofit/>
+          </a:bodyPr>
+          <a:p>
+            <a:endParaRPr b="0" lang="en-US" sz="1800" spc="-1" strike="noStrike">
+              <a:solidFill>
+                <a:schemeClr val="lt1"/>
+              </a:solidFill>
+              <a:latin typeface="Calibri"/>
+              <a:ea typeface="DejaVu Sans"/>
+            </a:endParaRPr>
+          </a:p>
+        </p:txBody>
+      </p:sp>
+      <p:sp>
+        <p:nvSpPr>
+          <p:cNvPr id="354" name="Rectangle 194"/>
+          <p:cNvSpPr/>
+          <p:nvPr/>
+        </p:nvSpPr>
+        <p:spPr>
+          <a:xfrm>
+            <a:off x="0" y="0"/>
+            <a:ext cx="12960" cy="6852600"/>
+          </a:xfrm>
+          <a:prstGeom prst="rect">
+            <a:avLst/>
+          </a:prstGeom>
+          <a:solidFill>
+            <a:srgbClr val="121216"/>
+          </a:solidFill>
+          <a:ln>
+            <a:noFill/>
+          </a:ln>
+          <a:effectLst>
+            <a:outerShdw blurRad="39960" dir="5400000" dist="23040" rotWithShape="0">
+              <a:srgbClr val="000000">
+                <a:alpha val="35000"/>
+              </a:srgbClr>
+            </a:outerShdw>
+          </a:effectLst>
+        </p:spPr>
+        <p:style>
+          <a:lnRef idx="1">
+            <a:schemeClr val="accent1"/>
+          </a:lnRef>
+          <a:fillRef idx="3">
+            <a:schemeClr val="accent1"/>
+          </a:fillRef>
+          <a:effectRef idx="2">
+            <a:schemeClr val="accent1"/>
+          </a:effectRef>
+          <a:fontRef idx="minor"/>
+        </p:style>
+        <p:txBody>
+          <a:bodyPr lIns="90000" rIns="90000" tIns="45000" bIns="45000" anchor="ctr">
+            <a:noAutofit/>
+          </a:bodyPr>
+          <a:p>
+            <a:endParaRPr b="0" lang="en-US" sz="1800" spc="-1" strike="noStrike">
+              <a:solidFill>
+                <a:schemeClr val="lt1"/>
+              </a:solidFill>
+              <a:latin typeface="Calibri"/>
+              <a:ea typeface="DejaVu Sans"/>
+            </a:endParaRPr>
+          </a:p>
+        </p:txBody>
+      </p:sp>
+      <p:sp>
+        <p:nvSpPr>
+          <p:cNvPr id="355" name="Rectangle 195"/>
+          <p:cNvSpPr/>
+          <p:nvPr/>
+        </p:nvSpPr>
+        <p:spPr>
+          <a:xfrm>
+            <a:off x="914400" y="0"/>
+            <a:ext cx="12960" cy="6852600"/>
+          </a:xfrm>
+          <a:prstGeom prst="rect">
+            <a:avLst/>
+          </a:prstGeom>
+          <a:solidFill>
+            <a:srgbClr val="121216"/>
+          </a:solidFill>
+          <a:ln>
+            <a:noFill/>
+          </a:ln>
+          <a:effectLst>
+            <a:outerShdw blurRad="39960" dir="5400000" dist="23040" rotWithShape="0">
+              <a:srgbClr val="000000">
+                <a:alpha val="35000"/>
+              </a:srgbClr>
+            </a:outerShdw>
+          </a:effectLst>
+        </p:spPr>
+        <p:style>
+          <a:lnRef idx="1">
+            <a:schemeClr val="accent1"/>
+          </a:lnRef>
+          <a:fillRef idx="3">
+            <a:schemeClr val="accent1"/>
+          </a:fillRef>
+          <a:effectRef idx="2">
+            <a:schemeClr val="accent1"/>
+          </a:effectRef>
+          <a:fontRef idx="minor"/>
+        </p:style>
+        <p:txBody>
+          <a:bodyPr lIns="90000" rIns="90000" tIns="45000" bIns="45000" anchor="ctr">
+            <a:noAutofit/>
+          </a:bodyPr>
+          <a:p>
+            <a:endParaRPr b="0" lang="en-US" sz="1800" spc="-1" strike="noStrike">
+              <a:solidFill>
+                <a:schemeClr val="lt1"/>
+              </a:solidFill>
+              <a:latin typeface="Calibri"/>
+              <a:ea typeface="DejaVu Sans"/>
+            </a:endParaRPr>
+          </a:p>
+        </p:txBody>
+      </p:sp>
+      <p:sp>
+        <p:nvSpPr>
+          <p:cNvPr id="356" name="Rectangle 196"/>
+          <p:cNvSpPr/>
+          <p:nvPr/>
+        </p:nvSpPr>
+        <p:spPr>
+          <a:xfrm>
+            <a:off x="1828800" y="0"/>
+            <a:ext cx="12960" cy="6852600"/>
+          </a:xfrm>
+          <a:prstGeom prst="rect">
+            <a:avLst/>
+          </a:prstGeom>
+          <a:solidFill>
+            <a:srgbClr val="121216"/>
+          </a:solidFill>
+          <a:ln>
+            <a:noFill/>
+          </a:ln>
+          <a:effectLst>
+            <a:outerShdw blurRad="39960" dir="5400000" dist="23040" rotWithShape="0">
+              <a:srgbClr val="000000">
+                <a:alpha val="35000"/>
+              </a:srgbClr>
+            </a:outerShdw>
+          </a:effectLst>
+        </p:spPr>
+        <p:style>
+          <a:lnRef idx="1">
+            <a:schemeClr val="accent1"/>
+          </a:lnRef>
+          <a:fillRef idx="3">
+            <a:schemeClr val="accent1"/>
+          </a:fillRef>
+          <a:effectRef idx="2">
+            <a:schemeClr val="accent1"/>
+          </a:effectRef>
+          <a:fontRef idx="minor"/>
+        </p:style>
+        <p:txBody>
+          <a:bodyPr lIns="90000" rIns="90000" tIns="45000" bIns="45000" anchor="ctr">
+            <a:noAutofit/>
+          </a:bodyPr>
+          <a:p>
+            <a:endParaRPr b="0" lang="en-US" sz="1800" spc="-1" strike="noStrike">
+              <a:solidFill>
+                <a:schemeClr val="lt1"/>
+              </a:solidFill>
+              <a:latin typeface="Calibri"/>
+              <a:ea typeface="DejaVu Sans"/>
+            </a:endParaRPr>
+          </a:p>
+        </p:txBody>
+      </p:sp>
+      <p:sp>
+        <p:nvSpPr>
+          <p:cNvPr id="357" name="Rectangle 197"/>
+          <p:cNvSpPr/>
+          <p:nvPr/>
+        </p:nvSpPr>
+        <p:spPr>
+          <a:xfrm>
+            <a:off x="2743200" y="0"/>
+            <a:ext cx="12960" cy="6852600"/>
+          </a:xfrm>
+          <a:prstGeom prst="rect">
+            <a:avLst/>
+          </a:prstGeom>
+          <a:solidFill>
+            <a:srgbClr val="121216"/>
+          </a:solidFill>
+          <a:ln>
+            <a:noFill/>
+          </a:ln>
+          <a:effectLst>
+            <a:outerShdw blurRad="39960" dir="5400000" dist="23040" rotWithShape="0">
+              <a:srgbClr val="000000">
+                <a:alpha val="35000"/>
+              </a:srgbClr>
+            </a:outerShdw>
+          </a:effectLst>
+        </p:spPr>
+        <p:style>
+          <a:lnRef idx="1">
+            <a:schemeClr val="accent1"/>
+          </a:lnRef>
+          <a:fillRef idx="3">
+            <a:schemeClr val="accent1"/>
+          </a:fillRef>
+          <a:effectRef idx="2">
+            <a:schemeClr val="accent1"/>
+          </a:effectRef>
+          <a:fontRef idx="minor"/>
+        </p:style>
+        <p:txBody>
+          <a:bodyPr lIns="90000" rIns="90000" tIns="45000" bIns="45000" anchor="ctr">
+            <a:noAutofit/>
+          </a:bodyPr>
+          <a:p>
+            <a:endParaRPr b="0" lang="en-US" sz="1800" spc="-1" strike="noStrike">
+              <a:solidFill>
+                <a:schemeClr val="lt1"/>
+              </a:solidFill>
+              <a:latin typeface="Calibri"/>
+              <a:ea typeface="DejaVu Sans"/>
+            </a:endParaRPr>
+          </a:p>
+        </p:txBody>
+      </p:sp>
+      <p:sp>
+        <p:nvSpPr>
+          <p:cNvPr id="358" name="Rectangle 198"/>
+          <p:cNvSpPr/>
+          <p:nvPr/>
+        </p:nvSpPr>
+        <p:spPr>
+          <a:xfrm>
+            <a:off x="3657600" y="0"/>
+            <a:ext cx="12960" cy="6852600"/>
+          </a:xfrm>
+          <a:prstGeom prst="rect">
+            <a:avLst/>
+          </a:prstGeom>
+          <a:solidFill>
+            <a:srgbClr val="121216"/>
+          </a:solidFill>
+          <a:ln>
+            <a:noFill/>
+          </a:ln>
+          <a:effectLst>
+            <a:outerShdw blurRad="39960" dir="5400000" dist="23040" rotWithShape="0">
+              <a:srgbClr val="000000">
+                <a:alpha val="35000"/>
+              </a:srgbClr>
+            </a:outerShdw>
+          </a:effectLst>
+        </p:spPr>
+        <p:style>
+          <a:lnRef idx="1">
+            <a:schemeClr val="accent1"/>
+          </a:lnRef>
+          <a:fillRef idx="3">
+            <a:schemeClr val="accent1"/>
+          </a:fillRef>
+          <a:effectRef idx="2">
+            <a:schemeClr val="accent1"/>
+          </a:effectRef>
+          <a:fontRef idx="minor"/>
+        </p:style>
+        <p:txBody>
+          <a:bodyPr lIns="90000" rIns="90000" tIns="45000" bIns="45000" anchor="ctr">
+            <a:noAutofit/>
+          </a:bodyPr>
+          <a:p>
+            <a:endParaRPr b="0" lang="en-US" sz="1800" spc="-1" strike="noStrike">
+              <a:solidFill>
+                <a:schemeClr val="lt1"/>
+              </a:solidFill>
+              <a:latin typeface="Calibri"/>
+              <a:ea typeface="DejaVu Sans"/>
+            </a:endParaRPr>
+          </a:p>
+        </p:txBody>
+      </p:sp>
+      <p:sp>
+        <p:nvSpPr>
+          <p:cNvPr id="359" name="Rectangle 199"/>
+          <p:cNvSpPr/>
+          <p:nvPr/>
+        </p:nvSpPr>
+        <p:spPr>
+          <a:xfrm>
+            <a:off x="4572000" y="0"/>
+            <a:ext cx="12960" cy="6852600"/>
+          </a:xfrm>
+          <a:prstGeom prst="rect">
+            <a:avLst/>
+          </a:prstGeom>
+          <a:solidFill>
+            <a:srgbClr val="121216"/>
+          </a:solidFill>
+          <a:ln>
+            <a:noFill/>
+          </a:ln>
+          <a:effectLst>
+            <a:outerShdw blurRad="39960" dir="5400000" dist="23040" rotWithShape="0">
+              <a:srgbClr val="000000">
+                <a:alpha val="35000"/>
+              </a:srgbClr>
+            </a:outerShdw>
+          </a:effectLst>
+        </p:spPr>
+        <p:style>
+          <a:lnRef idx="1">
+            <a:schemeClr val="accent1"/>
+          </a:lnRef>
+          <a:fillRef idx="3">
+            <a:schemeClr val="accent1"/>
+          </a:fillRef>
+          <a:effectRef idx="2">
+            <a:schemeClr val="accent1"/>
+          </a:effectRef>
+          <a:fontRef idx="minor"/>
+        </p:style>
+        <p:txBody>
+          <a:bodyPr lIns="90000" rIns="90000" tIns="45000" bIns="45000" anchor="ctr">
+            <a:noAutofit/>
+          </a:bodyPr>
+          <a:p>
+            <a:endParaRPr b="0" lang="en-US" sz="1800" spc="-1" strike="noStrike">
+              <a:solidFill>
+                <a:schemeClr val="lt1"/>
+              </a:solidFill>
+              <a:latin typeface="Calibri"/>
+              <a:ea typeface="DejaVu Sans"/>
+            </a:endParaRPr>
+          </a:p>
+        </p:txBody>
+      </p:sp>
+      <p:sp>
+        <p:nvSpPr>
+          <p:cNvPr id="360" name="Rectangle 200"/>
+          <p:cNvSpPr/>
+          <p:nvPr/>
+        </p:nvSpPr>
+        <p:spPr>
+          <a:xfrm>
+            <a:off x="5486400" y="0"/>
+            <a:ext cx="12960" cy="6852600"/>
+          </a:xfrm>
+          <a:prstGeom prst="rect">
+            <a:avLst/>
+          </a:prstGeom>
+          <a:solidFill>
+            <a:srgbClr val="121216"/>
+          </a:solidFill>
+          <a:ln>
+            <a:noFill/>
+          </a:ln>
+          <a:effectLst>
+            <a:outerShdw blurRad="39960" dir="5400000" dist="23040" rotWithShape="0">
+              <a:srgbClr val="000000">
+                <a:alpha val="35000"/>
+              </a:srgbClr>
+            </a:outerShdw>
+          </a:effectLst>
+        </p:spPr>
+        <p:style>
+          <a:lnRef idx="1">
+            <a:schemeClr val="accent1"/>
+          </a:lnRef>
+          <a:fillRef idx="3">
+            <a:schemeClr val="accent1"/>
+          </a:fillRef>
+          <a:effectRef idx="2">
+            <a:schemeClr val="accent1"/>
+          </a:effectRef>
+          <a:fontRef idx="minor"/>
+        </p:style>
+        <p:txBody>
+          <a:bodyPr lIns="90000" rIns="90000" tIns="45000" bIns="45000" anchor="ctr">
+            <a:noAutofit/>
+          </a:bodyPr>
+          <a:p>
+            <a:endParaRPr b="0" lang="en-US" sz="1800" spc="-1" strike="noStrike">
+              <a:solidFill>
+                <a:schemeClr val="lt1"/>
+              </a:solidFill>
+              <a:latin typeface="Calibri"/>
+              <a:ea typeface="DejaVu Sans"/>
+            </a:endParaRPr>
+          </a:p>
+        </p:txBody>
+      </p:sp>
+      <p:sp>
+        <p:nvSpPr>
+          <p:cNvPr id="361" name="Rectangle 201"/>
+          <p:cNvSpPr/>
+          <p:nvPr/>
+        </p:nvSpPr>
+        <p:spPr>
+          <a:xfrm>
+            <a:off x="6400800" y="0"/>
+            <a:ext cx="12960" cy="6852600"/>
+          </a:xfrm>
+          <a:prstGeom prst="rect">
+            <a:avLst/>
+          </a:prstGeom>
+          <a:solidFill>
+            <a:srgbClr val="121216"/>
+          </a:solidFill>
+          <a:ln>
+            <a:noFill/>
+          </a:ln>
+          <a:effectLst>
+            <a:outerShdw blurRad="39960" dir="5400000" dist="23040" rotWithShape="0">
+              <a:srgbClr val="000000">
+                <a:alpha val="35000"/>
+              </a:srgbClr>
+            </a:outerShdw>
+          </a:effectLst>
+        </p:spPr>
+        <p:style>
+          <a:lnRef idx="1">
+            <a:schemeClr val="accent1"/>
+          </a:lnRef>
+          <a:fillRef idx="3">
+            <a:schemeClr val="accent1"/>
+          </a:fillRef>
+          <a:effectRef idx="2">
+            <a:schemeClr val="accent1"/>
+          </a:effectRef>
+          <a:fontRef idx="minor"/>
+        </p:style>
+        <p:txBody>
+          <a:bodyPr lIns="90000" rIns="90000" tIns="45000" bIns="45000" anchor="ctr">
+            <a:noAutofit/>
+          </a:bodyPr>
+          <a:p>
+            <a:endParaRPr b="0" lang="en-US" sz="1800" spc="-1" strike="noStrike">
+              <a:solidFill>
+                <a:schemeClr val="lt1"/>
+              </a:solidFill>
+              <a:latin typeface="Calibri"/>
+              <a:ea typeface="DejaVu Sans"/>
+            </a:endParaRPr>
+          </a:p>
+        </p:txBody>
+      </p:sp>
+      <p:sp>
+        <p:nvSpPr>
+          <p:cNvPr id="362" name="Rectangle 202"/>
+          <p:cNvSpPr/>
+          <p:nvPr/>
+        </p:nvSpPr>
+        <p:spPr>
+          <a:xfrm>
+            <a:off x="7315200" y="0"/>
+            <a:ext cx="12960" cy="6852600"/>
+          </a:xfrm>
+          <a:prstGeom prst="rect">
+            <a:avLst/>
+          </a:prstGeom>
+          <a:solidFill>
+            <a:srgbClr val="121216"/>
+          </a:solidFill>
+          <a:ln>
+            <a:noFill/>
+          </a:ln>
+          <a:effectLst>
+            <a:outerShdw blurRad="39960" dir="5400000" dist="23040" rotWithShape="0">
+              <a:srgbClr val="000000">
+                <a:alpha val="35000"/>
+              </a:srgbClr>
+            </a:outerShdw>
+          </a:effectLst>
+        </p:spPr>
+        <p:style>
+          <a:lnRef idx="1">
+            <a:schemeClr val="accent1"/>
+          </a:lnRef>
+          <a:fillRef idx="3">
+            <a:schemeClr val="accent1"/>
+          </a:fillRef>
+          <a:effectRef idx="2">
+            <a:schemeClr val="accent1"/>
+          </a:effectRef>
+          <a:fontRef idx="minor"/>
+        </p:style>
+        <p:txBody>
+          <a:bodyPr lIns="90000" rIns="90000" tIns="45000" bIns="45000" anchor="ctr">
+            <a:noAutofit/>
+          </a:bodyPr>
+          <a:p>
+            <a:endParaRPr b="0" lang="en-US" sz="1800" spc="-1" strike="noStrike">
+              <a:solidFill>
+                <a:schemeClr val="lt1"/>
+              </a:solidFill>
+              <a:latin typeface="Calibri"/>
+              <a:ea typeface="DejaVu Sans"/>
+            </a:endParaRPr>
+          </a:p>
+        </p:txBody>
+      </p:sp>
+      <p:sp>
+        <p:nvSpPr>
+          <p:cNvPr id="363" name="Rectangle 203"/>
+          <p:cNvSpPr/>
+          <p:nvPr/>
+        </p:nvSpPr>
+        <p:spPr>
+          <a:xfrm>
+            <a:off x="8229600" y="0"/>
+            <a:ext cx="12960" cy="6852600"/>
+          </a:xfrm>
+          <a:prstGeom prst="rect">
+            <a:avLst/>
+          </a:prstGeom>
+          <a:solidFill>
+            <a:srgbClr val="121216"/>
+          </a:solidFill>
+          <a:ln>
+            <a:noFill/>
+          </a:ln>
+          <a:effectLst>
+            <a:outerShdw blurRad="39960" dir="5400000" dist="23040" rotWithShape="0">
+              <a:srgbClr val="000000">
+                <a:alpha val="35000"/>
+              </a:srgbClr>
+            </a:outerShdw>
+          </a:effectLst>
+        </p:spPr>
+        <p:style>
+          <a:lnRef idx="1">
+            <a:schemeClr val="accent1"/>
+          </a:lnRef>
+          <a:fillRef idx="3">
+            <a:schemeClr val="accent1"/>
+          </a:fillRef>
+          <a:effectRef idx="2">
+            <a:schemeClr val="accent1"/>
+          </a:effectRef>
+          <a:fontRef idx="minor"/>
+        </p:style>
+        <p:txBody>
+          <a:bodyPr lIns="90000" rIns="90000" tIns="45000" bIns="45000" anchor="ctr">
+            <a:noAutofit/>
+          </a:bodyPr>
+          <a:p>
+            <a:endParaRPr b="0" lang="en-US" sz="1800" spc="-1" strike="noStrike">
+              <a:solidFill>
+                <a:schemeClr val="lt1"/>
+              </a:solidFill>
+              <a:latin typeface="Calibri"/>
+              <a:ea typeface="DejaVu Sans"/>
+            </a:endParaRPr>
+          </a:p>
+        </p:txBody>
+      </p:sp>
+      <p:sp>
+        <p:nvSpPr>
+          <p:cNvPr id="364" name="Rectangle 204"/>
+          <p:cNvSpPr/>
+          <p:nvPr/>
+        </p:nvSpPr>
+        <p:spPr>
+          <a:xfrm>
+            <a:off x="9144000" y="0"/>
+            <a:ext cx="12960" cy="6852600"/>
+          </a:xfrm>
+          <a:prstGeom prst="rect">
+            <a:avLst/>
+          </a:prstGeom>
+          <a:solidFill>
+            <a:srgbClr val="121216"/>
+          </a:solidFill>
+          <a:ln>
+            <a:noFill/>
+          </a:ln>
+          <a:effectLst>
+            <a:outerShdw blurRad="39960" dir="5400000" dist="23040" rotWithShape="0">
+              <a:srgbClr val="000000">
+                <a:alpha val="35000"/>
+              </a:srgbClr>
+            </a:outerShdw>
+          </a:effectLst>
+        </p:spPr>
+        <p:style>
+          <a:lnRef idx="1">
+            <a:schemeClr val="accent1"/>
+          </a:lnRef>
+          <a:fillRef idx="3">
+            <a:schemeClr val="accent1"/>
+          </a:fillRef>
+          <a:effectRef idx="2">
+            <a:schemeClr val="accent1"/>
+          </a:effectRef>
+          <a:fontRef idx="minor"/>
+        </p:style>
+        <p:txBody>
+          <a:bodyPr lIns="90000" rIns="90000" tIns="45000" bIns="45000" anchor="ctr">
+            <a:noAutofit/>
+          </a:bodyPr>
+          <a:p>
+            <a:endParaRPr b="0" lang="en-US" sz="1800" spc="-1" strike="noStrike">
+              <a:solidFill>
+                <a:schemeClr val="lt1"/>
+              </a:solidFill>
+              <a:latin typeface="Calibri"/>
+              <a:ea typeface="DejaVu Sans"/>
+            </a:endParaRPr>
+          </a:p>
+        </p:txBody>
+      </p:sp>
+      <p:sp>
+        <p:nvSpPr>
+          <p:cNvPr id="365" name="Rectangle 205"/>
+          <p:cNvSpPr/>
+          <p:nvPr/>
+        </p:nvSpPr>
+        <p:spPr>
+          <a:xfrm>
+            <a:off x="10058400" y="0"/>
+            <a:ext cx="12960" cy="6852600"/>
+          </a:xfrm>
+          <a:prstGeom prst="rect">
+            <a:avLst/>
+          </a:prstGeom>
+          <a:solidFill>
+            <a:srgbClr val="121216"/>
+          </a:solidFill>
+          <a:ln>
+            <a:noFill/>
+          </a:ln>
+          <a:effectLst>
+            <a:outerShdw blurRad="39960" dir="5400000" dist="23040" rotWithShape="0">
+              <a:srgbClr val="000000">
+                <a:alpha val="35000"/>
+              </a:srgbClr>
+            </a:outerShdw>
+          </a:effectLst>
+        </p:spPr>
+        <p:style>
+          <a:lnRef idx="1">
+            <a:schemeClr val="accent1"/>
+          </a:lnRef>
+          <a:fillRef idx="3">
+            <a:schemeClr val="accent1"/>
+          </a:fillRef>
+          <a:effectRef idx="2">
+            <a:schemeClr val="accent1"/>
+          </a:effectRef>
+          <a:fontRef idx="minor"/>
+        </p:style>
+        <p:txBody>
+          <a:bodyPr lIns="90000" rIns="90000" tIns="45000" bIns="45000" anchor="ctr">
+            <a:noAutofit/>
+          </a:bodyPr>
+          <a:p>
+            <a:endParaRPr b="0" lang="en-US" sz="1800" spc="-1" strike="noStrike">
+              <a:solidFill>
+                <a:schemeClr val="lt1"/>
+              </a:solidFill>
+              <a:latin typeface="Calibri"/>
+              <a:ea typeface="DejaVu Sans"/>
+            </a:endParaRPr>
+          </a:p>
+        </p:txBody>
+      </p:sp>
+      <p:sp>
+        <p:nvSpPr>
+          <p:cNvPr id="366" name="Rectangle 206"/>
+          <p:cNvSpPr/>
+          <p:nvPr/>
+        </p:nvSpPr>
+        <p:spPr>
+          <a:xfrm>
+            <a:off x="10972800" y="0"/>
+            <a:ext cx="12960" cy="6852600"/>
+          </a:xfrm>
+          <a:prstGeom prst="rect">
+            <a:avLst/>
+          </a:prstGeom>
+          <a:solidFill>
+            <a:srgbClr val="121216"/>
+          </a:solidFill>
+          <a:ln>
+            <a:noFill/>
+          </a:ln>
+          <a:effectLst>
+            <a:outerShdw blurRad="39960" dir="5400000" dist="23040" rotWithShape="0">
+              <a:srgbClr val="000000">
+                <a:alpha val="35000"/>
+              </a:srgbClr>
+            </a:outerShdw>
+          </a:effectLst>
+        </p:spPr>
+        <p:style>
+          <a:lnRef idx="1">
+            <a:schemeClr val="accent1"/>
+          </a:lnRef>
+          <a:fillRef idx="3">
+            <a:schemeClr val="accent1"/>
+          </a:fillRef>
+          <a:effectRef idx="2">
+            <a:schemeClr val="accent1"/>
+          </a:effectRef>
+          <a:fontRef idx="minor"/>
+        </p:style>
+        <p:txBody>
+          <a:bodyPr lIns="90000" rIns="90000" tIns="45000" bIns="45000" anchor="ctr">
+            <a:noAutofit/>
+          </a:bodyPr>
+          <a:p>
+            <a:endParaRPr b="0" lang="en-US" sz="1800" spc="-1" strike="noStrike">
+              <a:solidFill>
+                <a:schemeClr val="lt1"/>
+              </a:solidFill>
+              <a:latin typeface="Calibri"/>
+              <a:ea typeface="DejaVu Sans"/>
+            </a:endParaRPr>
+          </a:p>
+        </p:txBody>
+      </p:sp>
+      <p:sp>
+        <p:nvSpPr>
+          <p:cNvPr id="367" name="Rectangle 207"/>
+          <p:cNvSpPr/>
+          <p:nvPr/>
+        </p:nvSpPr>
+        <p:spPr>
+          <a:xfrm>
+            <a:off x="11887200" y="0"/>
+            <a:ext cx="12960" cy="6852600"/>
+          </a:xfrm>
+          <a:prstGeom prst="rect">
+            <a:avLst/>
+          </a:prstGeom>
+          <a:solidFill>
+            <a:srgbClr val="121216"/>
+          </a:solidFill>
+          <a:ln>
+            <a:noFill/>
+          </a:ln>
+          <a:effectLst>
+            <a:outerShdw blurRad="39960" dir="5400000" dist="23040" rotWithShape="0">
+              <a:srgbClr val="000000">
+                <a:alpha val="35000"/>
+              </a:srgbClr>
+            </a:outerShdw>
+          </a:effectLst>
+        </p:spPr>
+        <p:style>
+          <a:lnRef idx="1">
+            <a:schemeClr val="accent1"/>
+          </a:lnRef>
+          <a:fillRef idx="3">
+            <a:schemeClr val="accent1"/>
+          </a:fillRef>
+          <a:effectRef idx="2">
+            <a:schemeClr val="accent1"/>
+          </a:effectRef>
+          <a:fontRef idx="minor"/>
+        </p:style>
+        <p:txBody>
+          <a:bodyPr lIns="90000" rIns="90000" tIns="45000" bIns="45000" anchor="ctr">
+            <a:noAutofit/>
+          </a:bodyPr>
+          <a:p>
+            <a:endParaRPr b="0" lang="en-US" sz="1800" spc="-1" strike="noStrike">
+              <a:solidFill>
+                <a:schemeClr val="lt1"/>
+              </a:solidFill>
+              <a:latin typeface="Calibri"/>
+              <a:ea typeface="DejaVu Sans"/>
+            </a:endParaRPr>
+          </a:p>
+        </p:txBody>
+      </p:sp>
+      <p:sp>
+        <p:nvSpPr>
+          <p:cNvPr id="368" name="Rectangle 208"/>
+          <p:cNvSpPr/>
+          <p:nvPr/>
+        </p:nvSpPr>
+        <p:spPr>
+          <a:xfrm>
+            <a:off x="0" y="0"/>
+            <a:ext cx="314640" cy="6852600"/>
+          </a:xfrm>
+          <a:prstGeom prst="rect">
+            <a:avLst/>
+          </a:prstGeom>
+          <a:solidFill>
+            <a:srgbClr val="ff8c00"/>
+          </a:solidFill>
+          <a:ln>
+            <a:noFill/>
+          </a:ln>
+          <a:effectLst>
+            <a:outerShdw blurRad="39960" dir="5400000" dist="23040" rotWithShape="0">
+              <a:srgbClr val="000000">
+                <a:alpha val="35000"/>
+              </a:srgbClr>
+            </a:outerShdw>
+          </a:effectLst>
+        </p:spPr>
+        <p:style>
+          <a:lnRef idx="1">
+            <a:schemeClr val="accent1"/>
+          </a:lnRef>
+          <a:fillRef idx="3">
+            <a:schemeClr val="accent1"/>
+          </a:fillRef>
+          <a:effectRef idx="2">
+            <a:schemeClr val="accent1"/>
+          </a:effectRef>
+          <a:fontRef idx="minor"/>
+        </p:style>
+        <p:txBody>
+          <a:bodyPr lIns="90000" rIns="90000" tIns="45000" bIns="45000" anchor="ctr">
+            <a:noAutofit/>
+          </a:bodyPr>
+          <a:p>
+            <a:endParaRPr b="0" lang="en-US" sz="1800" spc="-1" strike="noStrike">
+              <a:solidFill>
+                <a:schemeClr val="lt1"/>
+              </a:solidFill>
+              <a:latin typeface="Calibri"/>
+              <a:ea typeface="DejaVu Sans"/>
+            </a:endParaRPr>
+          </a:p>
+        </p:txBody>
+      </p:sp>
+      <p:sp>
+        <p:nvSpPr>
+          <p:cNvPr id="369" name="Rounded Rectangle 92"/>
+          <p:cNvSpPr/>
+          <p:nvPr/>
+        </p:nvSpPr>
+        <p:spPr>
+          <a:xfrm>
+            <a:off x="9875520" y="365760"/>
+            <a:ext cx="2006280" cy="497520"/>
+          </a:xfrm>
+          <a:prstGeom prst="roundRect">
+            <a:avLst>
+              <a:gd name="adj" fmla="val 16667"/>
+            </a:avLst>
+          </a:prstGeom>
+          <a:solidFill>
+            <a:srgbClr val="1e1e24"/>
+          </a:solidFill>
+          <a:ln>
+            <a:solidFill>
+              <a:srgbClr val="ff8c00"/>
+            </a:solidFill>
+            <a:round/>
+          </a:ln>
+          <a:effectLst>
+            <a:outerShdw blurRad="39960" dir="5400000" dist="23040" rotWithShape="0">
+              <a:srgbClr val="000000">
+                <a:alpha val="35000"/>
+              </a:srgbClr>
+            </a:outerShdw>
+          </a:effectLst>
+        </p:spPr>
+        <p:style>
+          <a:lnRef idx="1">
+            <a:schemeClr val="accent1"/>
+          </a:lnRef>
+          <a:fillRef idx="3">
+            <a:schemeClr val="accent1"/>
+          </a:fillRef>
+          <a:effectRef idx="2">
+            <a:schemeClr val="accent1"/>
+          </a:effectRef>
+          <a:fontRef idx="minor"/>
+        </p:style>
+        <p:txBody>
+          <a:bodyPr lIns="90000" rIns="90000" tIns="45000" bIns="45000" anchor="ctr">
+            <a:noAutofit/>
+          </a:bodyPr>
+          <a:p>
+            <a:pPr algn="ctr">
+              <a:lnSpc>
+                <a:spcPct val="100000"/>
+              </a:lnSpc>
+            </a:pPr>
+            <a:r>
+              <a:rPr b="1" lang="en-US" sz="1400" spc="-1" strike="noStrike">
+                <a:solidFill>
+                  <a:srgbClr val="ffb45a"/>
+                </a:solidFill>
+                <a:latin typeface="Calibri"/>
+                <a:ea typeface="DejaVu Sans"/>
+              </a:rPr>
+              <a:t>JAVA CORE</a:t>
+            </a:r>
+            <a:endParaRPr b="0" lang="en-US" sz="1400" spc="-1" strike="noStrike">
+              <a:solidFill>
+                <a:srgbClr val="ffffff"/>
+              </a:solidFill>
+              <a:latin typeface="Arial"/>
+            </a:endParaRPr>
+          </a:p>
+        </p:txBody>
+      </p:sp>
+      <p:sp>
+        <p:nvSpPr>
+          <p:cNvPr id="370" name="TextBox 40"/>
+          <p:cNvSpPr/>
+          <p:nvPr/>
+        </p:nvSpPr>
+        <p:spPr>
+          <a:xfrm>
+            <a:off x="1534680" y="914400"/>
+            <a:ext cx="7898760" cy="639000"/>
+          </a:xfrm>
+          <a:prstGeom prst="rect">
+            <a:avLst/>
+          </a:prstGeom>
+          <a:noFill/>
+          <a:ln w="0">
+            <a:noFill/>
+          </a:ln>
+        </p:spPr>
+        <p:style>
+          <a:lnRef idx="0"/>
+          <a:fillRef idx="0"/>
+          <a:effectRef idx="0"/>
+          <a:fontRef idx="minor"/>
+        </p:style>
+        <p:txBody>
+          <a:bodyPr wrap="none" lIns="90000" rIns="90000" tIns="45000" bIns="45000" anchor="t">
+            <a:spAutoFit/>
+          </a:bodyPr>
+          <a:p>
+            <a:pPr>
+              <a:lnSpc>
+                <a:spcPct val="100000"/>
+              </a:lnSpc>
+            </a:pPr>
+            <a:r>
+              <a:rPr b="1" lang="en-US" sz="3600" spc="-1" strike="noStrike">
+                <a:solidFill>
+                  <a:srgbClr val="f5f5f5"/>
+                </a:solidFill>
+                <a:latin typeface="Calibri"/>
+                <a:ea typeface="DejaVu Sans"/>
+              </a:rPr>
+              <a:t>Real-World Math: Restaurant Bill Splitter</a:t>
+            </a:r>
+            <a:endParaRPr b="0" lang="en-US" sz="3600" spc="-1" strike="noStrike">
+              <a:solidFill>
+                <a:srgbClr val="000000"/>
+              </a:solidFill>
+              <a:latin typeface="Arial"/>
+            </a:endParaRPr>
+          </a:p>
+        </p:txBody>
+      </p:sp>
+      <p:sp>
+        <p:nvSpPr>
+          <p:cNvPr id="371" name="TextBox 41"/>
+          <p:cNvSpPr/>
+          <p:nvPr/>
+        </p:nvSpPr>
+        <p:spPr>
+          <a:xfrm>
+            <a:off x="1296000" y="1694880"/>
+            <a:ext cx="8976240" cy="819720"/>
+          </a:xfrm>
+          <a:prstGeom prst="rect">
+            <a:avLst/>
+          </a:prstGeom>
+          <a:noFill/>
+          <a:ln w="0">
+            <a:noFill/>
+          </a:ln>
+        </p:spPr>
+        <p:style>
+          <a:lnRef idx="0"/>
+          <a:fillRef idx="0"/>
+          <a:effectRef idx="0"/>
+          <a:fontRef idx="minor"/>
+        </p:style>
+        <p:txBody>
+          <a:bodyPr wrap="none" lIns="90000" rIns="90000" tIns="45000" bIns="45000" anchor="t">
+            <a:spAutoFit/>
+          </a:bodyPr>
+          <a:p>
+            <a:pPr>
+              <a:lnSpc>
+                <a:spcPct val="100000"/>
+              </a:lnSpc>
+            </a:pPr>
+            <a:r>
+              <a:rPr b="0" lang="en-US" sz="1600" spc="-1" strike="noStrike">
+                <a:solidFill>
+                  <a:srgbClr val="aaaaaa"/>
+                </a:solidFill>
+                <a:latin typeface="Calibri"/>
+                <a:ea typeface="DejaVu Sans"/>
+              </a:rPr>
+              <a:t>In real-world applications, arithmetic operators are the engine of business logic. Let's build a mini-app that </a:t>
+            </a:r>
+            <a:endParaRPr b="0" lang="en-US" sz="1600" spc="-1" strike="noStrike">
+              <a:solidFill>
+                <a:srgbClr val="000000"/>
+              </a:solidFill>
+              <a:latin typeface="Arial"/>
+            </a:endParaRPr>
+          </a:p>
+          <a:p>
+            <a:pPr>
+              <a:lnSpc>
+                <a:spcPct val="100000"/>
+              </a:lnSpc>
+            </a:pPr>
+            <a:r>
+              <a:rPr b="0" lang="en-US" sz="1600" spc="-1" strike="noStrike">
+                <a:solidFill>
+                  <a:srgbClr val="aaaaaa"/>
+                </a:solidFill>
+                <a:latin typeface="Calibri"/>
+                <a:ea typeface="DejaVu Sans"/>
+              </a:rPr>
+              <a:t>calculates a restaurant bill, applies a discount, adds tax/tip using compound operators,</a:t>
+            </a:r>
+            <a:endParaRPr b="0" lang="en-US" sz="1600" spc="-1" strike="noStrike">
+              <a:solidFill>
+                <a:srgbClr val="000000"/>
+              </a:solidFill>
+              <a:latin typeface="Arial"/>
+            </a:endParaRPr>
+          </a:p>
+          <a:p>
+            <a:pPr>
+              <a:lnSpc>
+                <a:spcPct val="100000"/>
+              </a:lnSpc>
+            </a:pPr>
+            <a:r>
+              <a:rPr b="0" lang="en-US" sz="1600" spc="-1" strike="noStrike">
+                <a:solidFill>
+                  <a:srgbClr val="aaaaaa"/>
+                </a:solidFill>
+                <a:latin typeface="Calibri"/>
+                <a:ea typeface="DejaVu Sans"/>
+              </a:rPr>
+              <a:t> </a:t>
+            </a:r>
+            <a:r>
+              <a:rPr b="0" lang="en-US" sz="1600" spc="-1" strike="noStrike">
+                <a:solidFill>
+                  <a:srgbClr val="aaaaaa"/>
+                </a:solidFill>
+                <a:latin typeface="Calibri"/>
+                <a:ea typeface="DejaVu Sans"/>
+              </a:rPr>
+              <a:t>and safely splits the final cost among friends.</a:t>
+            </a:r>
+            <a:endParaRPr b="0" lang="en-US" sz="1600" spc="-1" strike="noStrike">
+              <a:solidFill>
+                <a:srgbClr val="000000"/>
+              </a:solidFill>
+              <a:latin typeface="Arial"/>
+            </a:endParaRPr>
+          </a:p>
+        </p:txBody>
+      </p:sp>
+      <p:sp>
+        <p:nvSpPr>
+          <p:cNvPr id="372" name="Rounded Rectangle 93"/>
+          <p:cNvSpPr/>
+          <p:nvPr/>
+        </p:nvSpPr>
+        <p:spPr>
+          <a:xfrm>
+            <a:off x="987480" y="3182040"/>
+            <a:ext cx="3286440" cy="2737800"/>
+          </a:xfrm>
+          <a:prstGeom prst="roundRect">
+            <a:avLst>
+              <a:gd name="adj" fmla="val 16667"/>
+            </a:avLst>
+          </a:prstGeom>
+          <a:solidFill>
+            <a:srgbClr val="08080a"/>
+          </a:solidFill>
+          <a:ln>
+            <a:noFill/>
+          </a:ln>
+          <a:effectLst>
+            <a:outerShdw blurRad="39960" dir="5400000" dist="23040" rotWithShape="0">
+              <a:srgbClr val="000000">
+                <a:alpha val="35000"/>
+              </a:srgbClr>
+            </a:outerShdw>
+          </a:effectLst>
+        </p:spPr>
+        <p:style>
+          <a:lnRef idx="1">
+            <a:schemeClr val="accent1"/>
+          </a:lnRef>
+          <a:fillRef idx="3">
+            <a:schemeClr val="accent1"/>
+          </a:fillRef>
+          <a:effectRef idx="2">
+            <a:schemeClr val="accent1"/>
+          </a:effectRef>
+          <a:fontRef idx="minor"/>
+        </p:style>
+        <p:txBody>
+          <a:bodyPr lIns="90000" rIns="90000" tIns="45000" bIns="45000" anchor="ctr">
+            <a:noAutofit/>
+          </a:bodyPr>
+          <a:p>
+            <a:endParaRPr b="0" lang="en-US" sz="1800" spc="-1" strike="noStrike">
+              <a:solidFill>
+                <a:schemeClr val="lt1"/>
+              </a:solidFill>
+              <a:latin typeface="Calibri"/>
+              <a:ea typeface="DejaVu Sans"/>
+            </a:endParaRPr>
+          </a:p>
+        </p:txBody>
+      </p:sp>
+      <p:sp>
+        <p:nvSpPr>
+          <p:cNvPr id="373" name="Rounded Rectangle 94"/>
+          <p:cNvSpPr/>
+          <p:nvPr/>
+        </p:nvSpPr>
+        <p:spPr>
+          <a:xfrm>
+            <a:off x="685800" y="2971800"/>
+            <a:ext cx="3200400" cy="3429000"/>
+          </a:xfrm>
+          <a:prstGeom prst="roundRect">
+            <a:avLst>
+              <a:gd name="adj" fmla="val 16667"/>
+            </a:avLst>
+          </a:prstGeom>
+          <a:solidFill>
+            <a:srgbClr val="16161c"/>
+          </a:solidFill>
+          <a:ln>
+            <a:solidFill>
+              <a:srgbClr val="464655"/>
+            </a:solidFill>
+            <a:round/>
+          </a:ln>
+          <a:effectLst>
+            <a:outerShdw blurRad="39960" dir="5400000" dist="23040" rotWithShape="0">
+              <a:srgbClr val="000000">
+                <a:alpha val="35000"/>
+              </a:srgbClr>
+            </a:outerShdw>
+          </a:effectLst>
+        </p:spPr>
+        <p:style>
+          <a:lnRef idx="1">
+            <a:schemeClr val="accent1"/>
+          </a:lnRef>
+          <a:fillRef idx="3">
+            <a:schemeClr val="accent1"/>
+          </a:fillRef>
+          <a:effectRef idx="2">
+            <a:schemeClr val="accent1"/>
+          </a:effectRef>
+          <a:fontRef idx="minor"/>
+        </p:style>
+        <p:txBody>
+          <a:bodyPr lIns="90000" rIns="90000" tIns="45000" bIns="45000" anchor="ctr">
+            <a:noAutofit/>
+          </a:bodyPr>
+          <a:p>
+            <a:pPr>
+              <a:lnSpc>
+                <a:spcPct val="100000"/>
+              </a:lnSpc>
+            </a:pPr>
+            <a:r>
+              <a:rPr b="1" lang="en-US" sz="1400" spc="-1" strike="noStrike">
+                <a:solidFill>
+                  <a:schemeClr val="lt1"/>
+                </a:solidFill>
+                <a:latin typeface="Calibri"/>
+                <a:ea typeface="DejaVu Sans"/>
+              </a:rPr>
+              <a:t>Mapping Operators to Business Rules:</a:t>
+            </a:r>
+            <a:endParaRPr b="0" lang="en-US" sz="1400" spc="-1" strike="noStrike">
+              <a:solidFill>
+                <a:srgbClr val="ffffff"/>
+              </a:solidFill>
+              <a:latin typeface="Arial"/>
+            </a:endParaRPr>
+          </a:p>
+          <a:p>
+            <a:pPr marL="216000" indent="-216000">
+              <a:lnSpc>
+                <a:spcPct val="100000"/>
+              </a:lnSpc>
+              <a:buClr>
+                <a:srgbClr val="ffffff"/>
+              </a:buClr>
+              <a:buFont typeface="Wingdings" charset="2"/>
+              <a:buChar char=""/>
+            </a:pPr>
+            <a:r>
+              <a:rPr b="0" lang="en-US" sz="1400" spc="-1" strike="noStrike">
+                <a:solidFill>
+                  <a:schemeClr val="lt1"/>
+                </a:solidFill>
+                <a:latin typeface="Calibri"/>
+                <a:ea typeface="DejaVu Sans"/>
+              </a:rPr>
+              <a:t>Accumulation (+=):</a:t>
+            </a:r>
+            <a:r>
+              <a:rPr b="1" lang="en-US" sz="1400" spc="-1" strike="noStrike">
+                <a:solidFill>
+                  <a:schemeClr val="lt1"/>
+                </a:solidFill>
+                <a:latin typeface="Calibri"/>
+                <a:ea typeface="DejaVu Sans"/>
+              </a:rPr>
+              <a:t> Used to add multiple items to a shopping cart or a digital bill.</a:t>
+            </a:r>
+            <a:endParaRPr b="0" lang="en-US" sz="1400" spc="-1" strike="noStrike">
+              <a:solidFill>
+                <a:srgbClr val="ffffff"/>
+              </a:solidFill>
+              <a:latin typeface="Arial"/>
+            </a:endParaRPr>
+          </a:p>
+          <a:p>
+            <a:pPr marL="216000" indent="-216000">
+              <a:lnSpc>
+                <a:spcPct val="100000"/>
+              </a:lnSpc>
+              <a:buClr>
+                <a:srgbClr val="ffffff"/>
+              </a:buClr>
+              <a:buFont typeface="Wingdings" charset="2"/>
+              <a:buChar char=""/>
+            </a:pPr>
+            <a:r>
+              <a:rPr b="0" lang="en-US" sz="1400" spc="-1" strike="noStrike">
+                <a:solidFill>
+                  <a:schemeClr val="lt1"/>
+                </a:solidFill>
+                <a:latin typeface="Calibri"/>
+                <a:ea typeface="DejaVu Sans"/>
+              </a:rPr>
+              <a:t>Discounts (-=):</a:t>
+            </a:r>
+            <a:r>
+              <a:rPr b="1" lang="en-US" sz="1400" spc="-1" strike="noStrike">
+                <a:solidFill>
+                  <a:schemeClr val="lt1"/>
+                </a:solidFill>
+                <a:latin typeface="Calibri"/>
+                <a:ea typeface="DejaVu Sans"/>
+              </a:rPr>
+              <a:t> Used to subtract coupons or promotional deductions.</a:t>
+            </a:r>
+            <a:endParaRPr b="0" lang="en-US" sz="1400" spc="-1" strike="noStrike">
+              <a:solidFill>
+                <a:srgbClr val="ffffff"/>
+              </a:solidFill>
+              <a:latin typeface="Arial"/>
+            </a:endParaRPr>
+          </a:p>
+          <a:p>
+            <a:pPr marL="216000" indent="-216000">
+              <a:lnSpc>
+                <a:spcPct val="100000"/>
+              </a:lnSpc>
+              <a:buClr>
+                <a:srgbClr val="ffffff"/>
+              </a:buClr>
+              <a:buFont typeface="Wingdings" charset="2"/>
+              <a:buChar char=""/>
+            </a:pPr>
+            <a:r>
+              <a:rPr b="0" lang="en-US" sz="1400" spc="-1" strike="noStrike">
+                <a:solidFill>
+                  <a:schemeClr val="lt1"/>
+                </a:solidFill>
+                <a:latin typeface="Calibri"/>
+                <a:ea typeface="DejaVu Sans"/>
+              </a:rPr>
+              <a:t>Tax &amp; Tip (*=):</a:t>
+            </a:r>
+            <a:r>
+              <a:rPr b="1" lang="en-US" sz="1400" spc="-1" strike="noStrike">
+                <a:solidFill>
+                  <a:schemeClr val="lt1"/>
+                </a:solidFill>
+                <a:latin typeface="Calibri"/>
+                <a:ea typeface="DejaVu Sans"/>
+              </a:rPr>
+              <a:t> Used to apply percentages. Multiplying by 1.25 instantly adds a 25% increase to the existing total.</a:t>
+            </a:r>
+            <a:endParaRPr b="0" lang="en-US" sz="1400" spc="-1" strike="noStrike">
+              <a:solidFill>
+                <a:srgbClr val="ffffff"/>
+              </a:solidFill>
+              <a:latin typeface="Arial"/>
+            </a:endParaRPr>
+          </a:p>
+          <a:p>
+            <a:pPr marL="216000" indent="-216000">
+              <a:lnSpc>
+                <a:spcPct val="100000"/>
+              </a:lnSpc>
+              <a:buClr>
+                <a:srgbClr val="ffffff"/>
+              </a:buClr>
+              <a:buFont typeface="Wingdings" charset="2"/>
+              <a:buChar char=""/>
+            </a:pPr>
+            <a:r>
+              <a:rPr b="0" lang="en-US" sz="1400" spc="-1" strike="noStrike">
+                <a:solidFill>
+                  <a:schemeClr val="lt1"/>
+                </a:solidFill>
+                <a:latin typeface="Calibri"/>
+                <a:ea typeface="DejaVu Sans"/>
+              </a:rPr>
+              <a:t>Fair Split (/):</a:t>
+            </a:r>
+            <a:r>
+              <a:rPr b="1" lang="en-US" sz="1400" spc="-1" strike="noStrike">
+                <a:solidFill>
+                  <a:schemeClr val="lt1"/>
+                </a:solidFill>
+                <a:latin typeface="Calibri"/>
+                <a:ea typeface="DejaVu Sans"/>
+              </a:rPr>
+              <a:t> Used to divide the final double amount by the number of guests.</a:t>
+            </a:r>
+            <a:endParaRPr b="0" lang="en-US" sz="1400" spc="-1" strike="noStrike">
+              <a:solidFill>
+                <a:srgbClr val="ffffff"/>
+              </a:solidFill>
+              <a:latin typeface="Arial"/>
+            </a:endParaRPr>
+          </a:p>
+        </p:txBody>
+      </p:sp>
+      <p:sp>
+        <p:nvSpPr>
+          <p:cNvPr id="374" name="Rounded Rectangle 95"/>
+          <p:cNvSpPr/>
+          <p:nvPr/>
+        </p:nvSpPr>
+        <p:spPr>
+          <a:xfrm>
+            <a:off x="4507920" y="3182040"/>
+            <a:ext cx="3286440" cy="2737800"/>
+          </a:xfrm>
+          <a:prstGeom prst="roundRect">
+            <a:avLst>
+              <a:gd name="adj" fmla="val 16667"/>
+            </a:avLst>
+          </a:prstGeom>
+          <a:solidFill>
+            <a:srgbClr val="08080a"/>
+          </a:solidFill>
+          <a:ln>
+            <a:noFill/>
+          </a:ln>
+          <a:effectLst>
+            <a:outerShdw blurRad="39960" dir="5400000" dist="23040" rotWithShape="0">
+              <a:srgbClr val="000000">
+                <a:alpha val="35000"/>
+              </a:srgbClr>
+            </a:outerShdw>
+          </a:effectLst>
+        </p:spPr>
+        <p:style>
+          <a:lnRef idx="1">
+            <a:schemeClr val="accent1"/>
+          </a:lnRef>
+          <a:fillRef idx="3">
+            <a:schemeClr val="accent1"/>
+          </a:fillRef>
+          <a:effectRef idx="2">
+            <a:schemeClr val="accent1"/>
+          </a:effectRef>
+          <a:fontRef idx="minor"/>
+        </p:style>
+        <p:txBody>
+          <a:bodyPr lIns="90000" rIns="90000" tIns="45000" bIns="45000" anchor="ctr">
+            <a:noAutofit/>
+          </a:bodyPr>
+          <a:p>
+            <a:endParaRPr b="0" lang="en-US" sz="1800" spc="-1" strike="noStrike">
+              <a:solidFill>
+                <a:schemeClr val="lt1"/>
+              </a:solidFill>
+              <a:latin typeface="Calibri"/>
+              <a:ea typeface="DejaVu Sans"/>
+            </a:endParaRPr>
+          </a:p>
+        </p:txBody>
+      </p:sp>
+      <p:sp>
+        <p:nvSpPr>
+          <p:cNvPr id="375" name="Rounded Rectangle 96"/>
+          <p:cNvSpPr/>
+          <p:nvPr/>
+        </p:nvSpPr>
+        <p:spPr>
+          <a:xfrm>
+            <a:off x="4257360" y="2971800"/>
+            <a:ext cx="3286440" cy="3426840"/>
+          </a:xfrm>
+          <a:prstGeom prst="roundRect">
+            <a:avLst>
+              <a:gd name="adj" fmla="val 16667"/>
+            </a:avLst>
+          </a:prstGeom>
+          <a:solidFill>
+            <a:srgbClr val="16161c"/>
+          </a:solidFill>
+          <a:ln>
+            <a:solidFill>
+              <a:srgbClr val="464655"/>
+            </a:solidFill>
+            <a:round/>
+          </a:ln>
+          <a:effectLst>
+            <a:outerShdw blurRad="39960" dir="5400000" dist="23040" rotWithShape="0">
+              <a:srgbClr val="000000">
+                <a:alpha val="35000"/>
+              </a:srgbClr>
+            </a:outerShdw>
+          </a:effectLst>
+        </p:spPr>
+        <p:style>
+          <a:lnRef idx="1">
+            <a:schemeClr val="accent1"/>
+          </a:lnRef>
+          <a:fillRef idx="3">
+            <a:schemeClr val="accent1"/>
+          </a:fillRef>
+          <a:effectRef idx="2">
+            <a:schemeClr val="accent1"/>
+          </a:effectRef>
+          <a:fontRef idx="minor"/>
+        </p:style>
+        <p:txBody>
+          <a:bodyPr lIns="90000" rIns="90000" tIns="45000" bIns="45000" anchor="ctr">
+            <a:noAutofit/>
+          </a:bodyPr>
+          <a:p>
+            <a:pPr>
+              <a:lnSpc>
+                <a:spcPct val="100000"/>
+              </a:lnSpc>
+            </a:pPr>
+            <a:r>
+              <a:rPr b="0" lang="en-US" sz="1400" spc="-1" strike="noStrike">
+                <a:solidFill>
+                  <a:schemeClr val="lt1"/>
+                </a:solidFill>
+                <a:latin typeface="Calibri"/>
+                <a:ea typeface="DejaVu Sans"/>
+              </a:rPr>
+              <a:t>[ The Billing Workflow ]</a:t>
+            </a:r>
+            <a:endParaRPr b="0" lang="en-US" sz="1400" spc="-1" strike="noStrike">
+              <a:solidFill>
+                <a:srgbClr val="ffffff"/>
+              </a:solidFill>
+              <a:latin typeface="Arial"/>
+            </a:endParaRPr>
+          </a:p>
+          <a:p>
+            <a:pPr>
+              <a:lnSpc>
+                <a:spcPct val="100000"/>
+              </a:lnSpc>
+            </a:pPr>
+            <a:r>
+              <a:rPr b="0" lang="en-US" sz="1400" spc="-1" strike="noStrike">
+                <a:solidFill>
+                  <a:schemeClr val="lt1"/>
+                </a:solidFill>
+                <a:latin typeface="Calibri"/>
+                <a:ea typeface="DejaVu Sans"/>
+              </a:rPr>
+              <a:t>├──</a:t>
+            </a:r>
+            <a:r>
+              <a:rPr b="0" lang="en-US" sz="1400" spc="-1" strike="noStrike">
+                <a:solidFill>
+                  <a:schemeClr val="lt1"/>
+                </a:solidFill>
+                <a:latin typeface="Calibri"/>
+                <a:ea typeface="DejaVu Sans"/>
+              </a:rPr>
+              <a:t>&gt; 1. Open Table</a:t>
+            </a:r>
+            <a:endParaRPr b="0" lang="en-US" sz="1400" spc="-1" strike="noStrike">
+              <a:solidFill>
+                <a:srgbClr val="ffffff"/>
+              </a:solidFill>
+              <a:latin typeface="Arial"/>
+            </a:endParaRPr>
+          </a:p>
+          <a:p>
+            <a:pPr>
+              <a:lnSpc>
+                <a:spcPct val="100000"/>
+              </a:lnSpc>
+            </a:pPr>
+            <a:r>
+              <a:rPr b="0" lang="en-US" sz="1400" spc="-1" strike="noStrike">
+                <a:solidFill>
+                  <a:schemeClr val="lt1"/>
+                </a:solidFill>
+                <a:latin typeface="Calibri"/>
+                <a:ea typeface="DejaVu Sans"/>
+              </a:rPr>
+              <a:t>│ └── </a:t>
+            </a:r>
+            <a:r>
+              <a:rPr b="0" lang="en-US" sz="1400" spc="-1" strike="noStrike">
+                <a:solidFill>
+                  <a:schemeClr val="lt1"/>
+                </a:solidFill>
+                <a:latin typeface="Calibri"/>
+                <a:ea typeface="DejaVu Sans"/>
+              </a:rPr>
+              <a:t>bill = 0.0</a:t>
+            </a:r>
+            <a:endParaRPr b="0" lang="en-US" sz="1400" spc="-1" strike="noStrike">
+              <a:solidFill>
+                <a:srgbClr val="ffffff"/>
+              </a:solidFill>
+              <a:latin typeface="Arial"/>
+            </a:endParaRPr>
+          </a:p>
+          <a:p>
+            <a:pPr>
+              <a:lnSpc>
+                <a:spcPct val="100000"/>
+              </a:lnSpc>
+            </a:pPr>
+            <a:r>
+              <a:rPr b="0" lang="en-US" sz="1400" spc="-1" strike="noStrike">
+                <a:solidFill>
+                  <a:schemeClr val="lt1"/>
+                </a:solidFill>
+                <a:latin typeface="Calibri"/>
+                <a:ea typeface="DejaVu Sans"/>
+              </a:rPr>
+              <a:t>│</a:t>
+            </a:r>
+            <a:endParaRPr b="0" lang="en-US" sz="1400" spc="-1" strike="noStrike">
+              <a:solidFill>
+                <a:srgbClr val="ffffff"/>
+              </a:solidFill>
+              <a:latin typeface="Arial"/>
+            </a:endParaRPr>
+          </a:p>
+          <a:p>
+            <a:pPr>
+              <a:lnSpc>
+                <a:spcPct val="100000"/>
+              </a:lnSpc>
+            </a:pPr>
+            <a:r>
+              <a:rPr b="0" lang="en-US" sz="1400" spc="-1" strike="noStrike">
+                <a:solidFill>
+                  <a:schemeClr val="lt1"/>
+                </a:solidFill>
+                <a:latin typeface="Calibri"/>
+                <a:ea typeface="DejaVu Sans"/>
+              </a:rPr>
+              <a:t>├──</a:t>
+            </a:r>
+            <a:r>
+              <a:rPr b="0" lang="en-US" sz="1400" spc="-1" strike="noStrike">
+                <a:solidFill>
+                  <a:schemeClr val="lt1"/>
+                </a:solidFill>
+                <a:latin typeface="Calibri"/>
+                <a:ea typeface="DejaVu Sans"/>
+              </a:rPr>
+              <a:t>&gt; 2. Add Orders (Accumulate)</a:t>
+            </a:r>
+            <a:endParaRPr b="0" lang="en-US" sz="1400" spc="-1" strike="noStrike">
+              <a:solidFill>
+                <a:srgbClr val="ffffff"/>
+              </a:solidFill>
+              <a:latin typeface="Arial"/>
+            </a:endParaRPr>
+          </a:p>
+          <a:p>
+            <a:pPr>
+              <a:lnSpc>
+                <a:spcPct val="100000"/>
+              </a:lnSpc>
+            </a:pPr>
+            <a:r>
+              <a:rPr b="0" lang="en-US" sz="1400" spc="-1" strike="noStrike">
+                <a:solidFill>
+                  <a:schemeClr val="lt1"/>
+                </a:solidFill>
+                <a:latin typeface="Calibri"/>
+                <a:ea typeface="DejaVu Sans"/>
+              </a:rPr>
+              <a:t>│ └── </a:t>
+            </a:r>
+            <a:r>
+              <a:rPr b="0" lang="en-US" sz="1400" spc="-1" strike="noStrike">
+                <a:solidFill>
+                  <a:schemeClr val="lt1"/>
+                </a:solidFill>
+                <a:latin typeface="Calibri"/>
+                <a:ea typeface="DejaVu Sans"/>
+              </a:rPr>
+              <a:t>bill += itemPrice</a:t>
+            </a:r>
+            <a:endParaRPr b="0" lang="en-US" sz="1400" spc="-1" strike="noStrike">
+              <a:solidFill>
+                <a:srgbClr val="ffffff"/>
+              </a:solidFill>
+              <a:latin typeface="Arial"/>
+            </a:endParaRPr>
+          </a:p>
+          <a:p>
+            <a:pPr>
+              <a:lnSpc>
+                <a:spcPct val="100000"/>
+              </a:lnSpc>
+            </a:pPr>
+            <a:r>
+              <a:rPr b="0" lang="en-US" sz="1400" spc="-1" strike="noStrike">
+                <a:solidFill>
+                  <a:schemeClr val="lt1"/>
+                </a:solidFill>
+                <a:latin typeface="Calibri"/>
+                <a:ea typeface="DejaVu Sans"/>
+              </a:rPr>
+              <a:t>│</a:t>
+            </a:r>
+            <a:endParaRPr b="0" lang="en-US" sz="1400" spc="-1" strike="noStrike">
+              <a:solidFill>
+                <a:srgbClr val="ffffff"/>
+              </a:solidFill>
+              <a:latin typeface="Arial"/>
+            </a:endParaRPr>
+          </a:p>
+          <a:p>
+            <a:pPr>
+              <a:lnSpc>
+                <a:spcPct val="100000"/>
+              </a:lnSpc>
+            </a:pPr>
+            <a:r>
+              <a:rPr b="0" lang="en-US" sz="1400" spc="-1" strike="noStrike">
+                <a:solidFill>
+                  <a:schemeClr val="lt1"/>
+                </a:solidFill>
+                <a:latin typeface="Calibri"/>
+                <a:ea typeface="DejaVu Sans"/>
+              </a:rPr>
+              <a:t>├──</a:t>
+            </a:r>
+            <a:r>
+              <a:rPr b="0" lang="en-US" sz="1400" spc="-1" strike="noStrike">
+                <a:solidFill>
+                  <a:schemeClr val="lt1"/>
+                </a:solidFill>
+                <a:latin typeface="Calibri"/>
+                <a:ea typeface="DejaVu Sans"/>
+              </a:rPr>
+              <a:t>&gt; 3. Apply Promo Code</a:t>
+            </a:r>
+            <a:endParaRPr b="0" lang="en-US" sz="1400" spc="-1" strike="noStrike">
+              <a:solidFill>
+                <a:srgbClr val="ffffff"/>
+              </a:solidFill>
+              <a:latin typeface="Arial"/>
+            </a:endParaRPr>
+          </a:p>
+          <a:p>
+            <a:pPr>
+              <a:lnSpc>
+                <a:spcPct val="100000"/>
+              </a:lnSpc>
+            </a:pPr>
+            <a:r>
+              <a:rPr b="0" lang="en-US" sz="1400" spc="-1" strike="noStrike">
+                <a:solidFill>
+                  <a:schemeClr val="lt1"/>
+                </a:solidFill>
+                <a:latin typeface="Calibri"/>
+                <a:ea typeface="DejaVu Sans"/>
+              </a:rPr>
+              <a:t>│ └── </a:t>
+            </a:r>
+            <a:r>
+              <a:rPr b="0" lang="en-US" sz="1400" spc="-1" strike="noStrike">
+                <a:solidFill>
+                  <a:schemeClr val="lt1"/>
+                </a:solidFill>
+                <a:latin typeface="Calibri"/>
+                <a:ea typeface="DejaVu Sans"/>
+              </a:rPr>
+              <a:t>bill -= discount</a:t>
+            </a:r>
+            <a:endParaRPr b="0" lang="en-US" sz="1400" spc="-1" strike="noStrike">
+              <a:solidFill>
+                <a:srgbClr val="ffffff"/>
+              </a:solidFill>
+              <a:latin typeface="Arial"/>
+            </a:endParaRPr>
+          </a:p>
+          <a:p>
+            <a:pPr>
+              <a:lnSpc>
+                <a:spcPct val="100000"/>
+              </a:lnSpc>
+            </a:pPr>
+            <a:r>
+              <a:rPr b="0" lang="en-US" sz="1400" spc="-1" strike="noStrike">
+                <a:solidFill>
+                  <a:schemeClr val="lt1"/>
+                </a:solidFill>
+                <a:latin typeface="Calibri"/>
+                <a:ea typeface="DejaVu Sans"/>
+              </a:rPr>
+              <a:t>│</a:t>
+            </a:r>
+            <a:endParaRPr b="0" lang="en-US" sz="1400" spc="-1" strike="noStrike">
+              <a:solidFill>
+                <a:srgbClr val="ffffff"/>
+              </a:solidFill>
+              <a:latin typeface="Arial"/>
+            </a:endParaRPr>
+          </a:p>
+          <a:p>
+            <a:pPr>
+              <a:lnSpc>
+                <a:spcPct val="100000"/>
+              </a:lnSpc>
+            </a:pPr>
+            <a:r>
+              <a:rPr b="0" lang="en-US" sz="1400" spc="-1" strike="noStrike">
+                <a:solidFill>
+                  <a:schemeClr val="lt1"/>
+                </a:solidFill>
+                <a:latin typeface="Calibri"/>
+                <a:ea typeface="DejaVu Sans"/>
+              </a:rPr>
+              <a:t>├──</a:t>
+            </a:r>
+            <a:r>
+              <a:rPr b="0" lang="en-US" sz="1400" spc="-1" strike="noStrike">
+                <a:solidFill>
+                  <a:schemeClr val="lt1"/>
+                </a:solidFill>
+                <a:latin typeface="Calibri"/>
+                <a:ea typeface="DejaVu Sans"/>
+              </a:rPr>
+              <a:t>&gt; 4. Add Tax &amp; Tip</a:t>
+            </a:r>
+            <a:endParaRPr b="0" lang="en-US" sz="1400" spc="-1" strike="noStrike">
+              <a:solidFill>
+                <a:srgbClr val="ffffff"/>
+              </a:solidFill>
+              <a:latin typeface="Arial"/>
+            </a:endParaRPr>
+          </a:p>
+          <a:p>
+            <a:pPr>
+              <a:lnSpc>
+                <a:spcPct val="100000"/>
+              </a:lnSpc>
+            </a:pPr>
+            <a:r>
+              <a:rPr b="0" lang="en-US" sz="1400" spc="-1" strike="noStrike">
+                <a:solidFill>
+                  <a:schemeClr val="lt1"/>
+                </a:solidFill>
+                <a:latin typeface="Calibri"/>
+                <a:ea typeface="DejaVu Sans"/>
+              </a:rPr>
+              <a:t>│ └── </a:t>
+            </a:r>
+            <a:r>
+              <a:rPr b="0" lang="en-US" sz="1400" spc="-1" strike="noStrike">
+                <a:solidFill>
+                  <a:schemeClr val="lt1"/>
+                </a:solidFill>
+                <a:latin typeface="Calibri"/>
+                <a:ea typeface="DejaVu Sans"/>
+              </a:rPr>
+              <a:t>bill *= 1.25 (adds 25%)</a:t>
+            </a:r>
+            <a:endParaRPr b="0" lang="en-US" sz="1400" spc="-1" strike="noStrike">
+              <a:solidFill>
+                <a:srgbClr val="ffffff"/>
+              </a:solidFill>
+              <a:latin typeface="Arial"/>
+            </a:endParaRPr>
+          </a:p>
+          <a:p>
+            <a:pPr>
+              <a:lnSpc>
+                <a:spcPct val="100000"/>
+              </a:lnSpc>
+            </a:pPr>
+            <a:r>
+              <a:rPr b="0" lang="en-US" sz="1400" spc="-1" strike="noStrike">
+                <a:solidFill>
+                  <a:schemeClr val="lt1"/>
+                </a:solidFill>
+                <a:latin typeface="Calibri"/>
+                <a:ea typeface="DejaVu Sans"/>
+              </a:rPr>
+              <a:t>│</a:t>
+            </a:r>
+            <a:endParaRPr b="0" lang="en-US" sz="1400" spc="-1" strike="noStrike">
+              <a:solidFill>
+                <a:srgbClr val="ffffff"/>
+              </a:solidFill>
+              <a:latin typeface="Arial"/>
+            </a:endParaRPr>
+          </a:p>
+          <a:p>
+            <a:pPr>
+              <a:lnSpc>
+                <a:spcPct val="100000"/>
+              </a:lnSpc>
+            </a:pPr>
+            <a:r>
+              <a:rPr b="0" lang="en-US" sz="1400" spc="-1" strike="noStrike">
+                <a:solidFill>
+                  <a:schemeClr val="lt1"/>
+                </a:solidFill>
+                <a:latin typeface="Calibri"/>
+                <a:ea typeface="DejaVu Sans"/>
+              </a:rPr>
+              <a:t>└──</a:t>
+            </a:r>
+            <a:r>
+              <a:rPr b="0" lang="en-US" sz="1400" spc="-1" strike="noStrike">
+                <a:solidFill>
+                  <a:schemeClr val="lt1"/>
+                </a:solidFill>
+                <a:latin typeface="Calibri"/>
+                <a:ea typeface="DejaVu Sans"/>
+              </a:rPr>
+              <a:t>&gt; 5. Split the Bill</a:t>
+            </a:r>
+            <a:endParaRPr b="0" lang="en-US" sz="1400" spc="-1" strike="noStrike">
+              <a:solidFill>
+                <a:srgbClr val="ffffff"/>
+              </a:solidFill>
+              <a:latin typeface="Arial"/>
+            </a:endParaRPr>
+          </a:p>
+          <a:p>
+            <a:pPr>
+              <a:lnSpc>
+                <a:spcPct val="100000"/>
+              </a:lnSpc>
+            </a:pPr>
+            <a:r>
+              <a:rPr b="0" lang="en-US" sz="1400" spc="-1" strike="noStrike">
+                <a:solidFill>
+                  <a:schemeClr val="lt1"/>
+                </a:solidFill>
+                <a:latin typeface="Calibri"/>
+                <a:ea typeface="DejaVu Sans"/>
+              </a:rPr>
+              <a:t>└── </a:t>
+            </a:r>
+            <a:r>
+              <a:rPr b="0" lang="en-US" sz="1400" spc="-1" strike="noStrike">
+                <a:solidFill>
+                  <a:schemeClr val="lt1"/>
+                </a:solidFill>
+                <a:latin typeface="Calibri"/>
+                <a:ea typeface="DejaVu Sans"/>
+              </a:rPr>
+              <a:t>perPerson = bill / guests</a:t>
+            </a:r>
+            <a:endParaRPr b="0" lang="en-US" sz="1400" spc="-1" strike="noStrike">
+              <a:solidFill>
+                <a:srgbClr val="ffffff"/>
+              </a:solidFill>
+              <a:latin typeface="Arial"/>
+            </a:endParaRPr>
+          </a:p>
+        </p:txBody>
+      </p:sp>
+      <p:sp>
+        <p:nvSpPr>
+          <p:cNvPr id="376" name="Rounded Rectangle 97"/>
+          <p:cNvSpPr/>
+          <p:nvPr/>
+        </p:nvSpPr>
+        <p:spPr>
+          <a:xfrm>
+            <a:off x="8028360" y="3182040"/>
+            <a:ext cx="3286440" cy="2737800"/>
+          </a:xfrm>
+          <a:prstGeom prst="roundRect">
+            <a:avLst>
+              <a:gd name="adj" fmla="val 16667"/>
+            </a:avLst>
+          </a:prstGeom>
+          <a:solidFill>
+            <a:srgbClr val="08080a"/>
+          </a:solidFill>
+          <a:ln>
+            <a:noFill/>
+          </a:ln>
+          <a:effectLst>
+            <a:outerShdw blurRad="39960" dir="5400000" dist="23040" rotWithShape="0">
+              <a:srgbClr val="000000">
+                <a:alpha val="35000"/>
+              </a:srgbClr>
+            </a:outerShdw>
+          </a:effectLst>
+        </p:spPr>
+        <p:style>
+          <a:lnRef idx="1">
+            <a:schemeClr val="accent1"/>
+          </a:lnRef>
+          <a:fillRef idx="3">
+            <a:schemeClr val="accent1"/>
+          </a:fillRef>
+          <a:effectRef idx="2">
+            <a:schemeClr val="accent1"/>
+          </a:effectRef>
+          <a:fontRef idx="minor"/>
+        </p:style>
+        <p:txBody>
+          <a:bodyPr lIns="90000" rIns="90000" tIns="45000" bIns="45000" anchor="ctr">
+            <a:noAutofit/>
+          </a:bodyPr>
+          <a:p>
+            <a:endParaRPr b="0" lang="en-US" sz="1800" spc="-1" strike="noStrike">
+              <a:solidFill>
+                <a:schemeClr val="lt1"/>
+              </a:solidFill>
+              <a:latin typeface="Calibri"/>
+              <a:ea typeface="DejaVu Sans"/>
+            </a:endParaRPr>
+          </a:p>
+        </p:txBody>
+      </p:sp>
+      <p:sp>
+        <p:nvSpPr>
+          <p:cNvPr id="377" name="Rounded Rectangle 98"/>
+          <p:cNvSpPr/>
+          <p:nvPr/>
+        </p:nvSpPr>
+        <p:spPr>
+          <a:xfrm>
+            <a:off x="8001000" y="2514600"/>
+            <a:ext cx="3427920" cy="3886200"/>
+          </a:xfrm>
+          <a:prstGeom prst="roundRect">
+            <a:avLst>
+              <a:gd name="adj" fmla="val 16667"/>
+            </a:avLst>
+          </a:prstGeom>
+          <a:solidFill>
+            <a:srgbClr val="16161c"/>
+          </a:solidFill>
+          <a:ln>
+            <a:solidFill>
+              <a:srgbClr val="464655"/>
+            </a:solidFill>
+            <a:round/>
+          </a:ln>
+          <a:effectLst>
+            <a:outerShdw blurRad="39960" dir="5400000" dist="23040" rotWithShape="0">
+              <a:srgbClr val="000000">
+                <a:alpha val="35000"/>
+              </a:srgbClr>
+            </a:outerShdw>
+          </a:effectLst>
+        </p:spPr>
+        <p:style>
+          <a:lnRef idx="1">
+            <a:schemeClr val="accent1"/>
+          </a:lnRef>
+          <a:fillRef idx="3">
+            <a:schemeClr val="accent1"/>
+          </a:fillRef>
+          <a:effectRef idx="2">
+            <a:schemeClr val="accent1"/>
+          </a:effectRef>
+          <a:fontRef idx="minor"/>
+        </p:style>
+        <p:txBody>
+          <a:bodyPr lIns="90000" rIns="90000" tIns="45000" bIns="45000" anchor="ctr">
+            <a:noAutofit/>
+          </a:bodyPr>
+          <a:p>
+            <a:pPr algn="ctr">
+              <a:lnSpc>
+                <a:spcPct val="100000"/>
+              </a:lnSpc>
+            </a:pPr>
+            <a:r>
+              <a:rPr b="0" lang="en-US" sz="900" spc="-1" strike="noStrike">
+                <a:solidFill>
+                  <a:srgbClr val="78ffc8"/>
+                </a:solidFill>
+                <a:latin typeface="Consolas"/>
+                <a:ea typeface="DejaVu Sans"/>
+              </a:rPr>
+              <a:t>public class RestaurantBill {</a:t>
+            </a:r>
+            <a:endParaRPr b="0" lang="en-US" sz="900" spc="-1" strike="noStrike">
+              <a:solidFill>
+                <a:srgbClr val="ffffff"/>
+              </a:solidFill>
+              <a:latin typeface="Arial"/>
+            </a:endParaRPr>
+          </a:p>
+          <a:p>
+            <a:pPr algn="ctr">
+              <a:lnSpc>
+                <a:spcPct val="100000"/>
+              </a:lnSpc>
+            </a:pPr>
+            <a:r>
+              <a:rPr b="0" lang="en-US" sz="900" spc="-1" strike="noStrike">
+                <a:solidFill>
+                  <a:srgbClr val="78ffc8"/>
+                </a:solidFill>
+                <a:latin typeface="Consolas"/>
+                <a:ea typeface="DejaVu Sans"/>
+              </a:rPr>
+              <a:t>    </a:t>
+            </a:r>
+            <a:r>
+              <a:rPr b="0" lang="en-US" sz="900" spc="-1" strike="noStrike">
+                <a:solidFill>
+                  <a:srgbClr val="78ffc8"/>
+                </a:solidFill>
+                <a:latin typeface="Consolas"/>
+                <a:ea typeface="DejaVu Sans"/>
+              </a:rPr>
+              <a:t>public static void main(String[] args) {</a:t>
+            </a:r>
+            <a:endParaRPr b="0" lang="en-US" sz="900" spc="-1" strike="noStrike">
+              <a:solidFill>
+                <a:srgbClr val="ffffff"/>
+              </a:solidFill>
+              <a:latin typeface="Arial"/>
+            </a:endParaRPr>
+          </a:p>
+          <a:p>
+            <a:pPr algn="ctr">
+              <a:lnSpc>
+                <a:spcPct val="100000"/>
+              </a:lnSpc>
+            </a:pPr>
+            <a:endParaRPr b="0" lang="en-US" sz="900" spc="-1" strike="noStrike">
+              <a:solidFill>
+                <a:srgbClr val="ffffff"/>
+              </a:solidFill>
+              <a:latin typeface="Arial"/>
+            </a:endParaRPr>
+          </a:p>
+          <a:p>
+            <a:pPr algn="ctr">
+              <a:lnSpc>
+                <a:spcPct val="100000"/>
+              </a:lnSpc>
+            </a:pPr>
+            <a:r>
+              <a:rPr b="0" lang="en-US" sz="900" spc="-1" strike="noStrike">
+                <a:solidFill>
+                  <a:srgbClr val="78ffc8"/>
+                </a:solidFill>
+                <a:latin typeface="Consolas"/>
+                <a:ea typeface="DejaVu Sans"/>
+              </a:rPr>
+              <a:t>        </a:t>
+            </a:r>
+            <a:r>
+              <a:rPr b="0" lang="en-US" sz="900" spc="-1" strike="noStrike">
+                <a:solidFill>
+                  <a:srgbClr val="78ffc8"/>
+                </a:solidFill>
+                <a:latin typeface="Consolas"/>
+                <a:ea typeface="DejaVu Sans"/>
+              </a:rPr>
+              <a:t>// 1. Initial State</a:t>
+            </a:r>
+            <a:endParaRPr b="0" lang="en-US" sz="900" spc="-1" strike="noStrike">
+              <a:solidFill>
+                <a:srgbClr val="ffffff"/>
+              </a:solidFill>
+              <a:latin typeface="Arial"/>
+            </a:endParaRPr>
+          </a:p>
+          <a:p>
+            <a:pPr algn="ctr">
+              <a:lnSpc>
+                <a:spcPct val="100000"/>
+              </a:lnSpc>
+            </a:pPr>
+            <a:r>
+              <a:rPr b="0" lang="en-US" sz="900" spc="-1" strike="noStrike">
+                <a:solidFill>
+                  <a:srgbClr val="78ffc8"/>
+                </a:solidFill>
+                <a:latin typeface="Consolas"/>
+                <a:ea typeface="DejaVu Sans"/>
+              </a:rPr>
+              <a:t>        </a:t>
+            </a:r>
+            <a:r>
+              <a:rPr b="0" lang="en-US" sz="900" spc="-1" strike="noStrike">
+                <a:solidFill>
+                  <a:srgbClr val="78ffc8"/>
+                </a:solidFill>
+                <a:latin typeface="Consolas"/>
+                <a:ea typeface="DejaVu Sans"/>
+              </a:rPr>
+              <a:t>double bill = 0.0;</a:t>
+            </a:r>
+            <a:endParaRPr b="0" lang="en-US" sz="900" spc="-1" strike="noStrike">
+              <a:solidFill>
+                <a:srgbClr val="ffffff"/>
+              </a:solidFill>
+              <a:latin typeface="Arial"/>
+            </a:endParaRPr>
+          </a:p>
+          <a:p>
+            <a:pPr algn="ctr">
+              <a:lnSpc>
+                <a:spcPct val="100000"/>
+              </a:lnSpc>
+            </a:pPr>
+            <a:r>
+              <a:rPr b="0" lang="en-US" sz="900" spc="-1" strike="noStrike">
+                <a:solidFill>
+                  <a:srgbClr val="78ffc8"/>
+                </a:solidFill>
+                <a:latin typeface="Consolas"/>
+                <a:ea typeface="DejaVu Sans"/>
+              </a:rPr>
+              <a:t>        </a:t>
+            </a:r>
+            <a:r>
+              <a:rPr b="0" lang="en-US" sz="900" spc="-1" strike="noStrike">
+                <a:solidFill>
+                  <a:srgbClr val="78ffc8"/>
+                </a:solidFill>
+                <a:latin typeface="Consolas"/>
+                <a:ea typeface="DejaVu Sans"/>
+              </a:rPr>
+              <a:t>int guests = 3;</a:t>
+            </a:r>
+            <a:endParaRPr b="0" lang="en-US" sz="900" spc="-1" strike="noStrike">
+              <a:solidFill>
+                <a:srgbClr val="ffffff"/>
+              </a:solidFill>
+              <a:latin typeface="Arial"/>
+            </a:endParaRPr>
+          </a:p>
+          <a:p>
+            <a:pPr algn="ctr">
+              <a:lnSpc>
+                <a:spcPct val="100000"/>
+              </a:lnSpc>
+            </a:pPr>
+            <a:endParaRPr b="0" lang="en-US" sz="900" spc="-1" strike="noStrike">
+              <a:solidFill>
+                <a:srgbClr val="ffffff"/>
+              </a:solidFill>
+              <a:latin typeface="Arial"/>
+            </a:endParaRPr>
+          </a:p>
+          <a:p>
+            <a:pPr algn="ctr">
+              <a:lnSpc>
+                <a:spcPct val="100000"/>
+              </a:lnSpc>
+            </a:pPr>
+            <a:r>
+              <a:rPr b="0" lang="en-US" sz="900" spc="-1" strike="noStrike">
+                <a:solidFill>
+                  <a:srgbClr val="78ffc8"/>
+                </a:solidFill>
+                <a:latin typeface="Consolas"/>
+                <a:ea typeface="DejaVu Sans"/>
+              </a:rPr>
+              <a:t>        </a:t>
+            </a:r>
+            <a:r>
+              <a:rPr b="0" lang="en-US" sz="900" spc="-1" strike="noStrike">
+                <a:solidFill>
+                  <a:srgbClr val="78ffc8"/>
+                </a:solidFill>
+                <a:latin typeface="Consolas"/>
+                <a:ea typeface="DejaVu Sans"/>
+              </a:rPr>
+              <a:t>// 2. Add Items (Compound Addition)</a:t>
+            </a:r>
+            <a:endParaRPr b="0" lang="en-US" sz="900" spc="-1" strike="noStrike">
+              <a:solidFill>
+                <a:srgbClr val="ffffff"/>
+              </a:solidFill>
+              <a:latin typeface="Arial"/>
+            </a:endParaRPr>
+          </a:p>
+          <a:p>
+            <a:pPr algn="ctr">
+              <a:lnSpc>
+                <a:spcPct val="100000"/>
+              </a:lnSpc>
+            </a:pPr>
+            <a:r>
+              <a:rPr b="0" lang="en-US" sz="900" spc="-1" strike="noStrike">
+                <a:solidFill>
+                  <a:srgbClr val="78ffc8"/>
+                </a:solidFill>
+                <a:latin typeface="Consolas"/>
+                <a:ea typeface="DejaVu Sans"/>
+              </a:rPr>
+              <a:t>        </a:t>
+            </a:r>
+            <a:r>
+              <a:rPr b="0" lang="en-US" sz="900" spc="-1" strike="noStrike">
+                <a:solidFill>
+                  <a:srgbClr val="78ffc8"/>
+                </a:solidFill>
+                <a:latin typeface="Consolas"/>
+                <a:ea typeface="DejaVu Sans"/>
+              </a:rPr>
+              <a:t>bill += 25.50; // Pizza</a:t>
+            </a:r>
+            <a:endParaRPr b="0" lang="en-US" sz="900" spc="-1" strike="noStrike">
+              <a:solidFill>
+                <a:srgbClr val="ffffff"/>
+              </a:solidFill>
+              <a:latin typeface="Arial"/>
+            </a:endParaRPr>
+          </a:p>
+          <a:p>
+            <a:pPr algn="ctr">
+              <a:lnSpc>
+                <a:spcPct val="100000"/>
+              </a:lnSpc>
+            </a:pPr>
+            <a:r>
+              <a:rPr b="0" lang="en-US" sz="900" spc="-1" strike="noStrike">
+                <a:solidFill>
+                  <a:srgbClr val="78ffc8"/>
+                </a:solidFill>
+                <a:latin typeface="Consolas"/>
+                <a:ea typeface="DejaVu Sans"/>
+              </a:rPr>
+              <a:t>        </a:t>
+            </a:r>
+            <a:r>
+              <a:rPr b="0" lang="en-US" sz="900" spc="-1" strike="noStrike">
+                <a:solidFill>
+                  <a:srgbClr val="78ffc8"/>
+                </a:solidFill>
+                <a:latin typeface="Consolas"/>
+                <a:ea typeface="DejaVu Sans"/>
+              </a:rPr>
+              <a:t>bill += 14.00; // Pasta</a:t>
+            </a:r>
+            <a:endParaRPr b="0" lang="en-US" sz="900" spc="-1" strike="noStrike">
+              <a:solidFill>
+                <a:srgbClr val="ffffff"/>
+              </a:solidFill>
+              <a:latin typeface="Arial"/>
+            </a:endParaRPr>
+          </a:p>
+          <a:p>
+            <a:pPr algn="ctr">
+              <a:lnSpc>
+                <a:spcPct val="100000"/>
+              </a:lnSpc>
+            </a:pPr>
+            <a:r>
+              <a:rPr b="0" lang="en-US" sz="900" spc="-1" strike="noStrike">
+                <a:solidFill>
+                  <a:srgbClr val="78ffc8"/>
+                </a:solidFill>
+                <a:latin typeface="Consolas"/>
+                <a:ea typeface="DejaVu Sans"/>
+              </a:rPr>
+              <a:t>        </a:t>
+            </a:r>
+            <a:r>
+              <a:rPr b="0" lang="en-US" sz="900" spc="-1" strike="noStrike">
+                <a:solidFill>
+                  <a:srgbClr val="78ffc8"/>
+                </a:solidFill>
+                <a:latin typeface="Consolas"/>
+                <a:ea typeface="DejaVu Sans"/>
+              </a:rPr>
+              <a:t>bill += 10.50; // Drinks</a:t>
+            </a:r>
+            <a:endParaRPr b="0" lang="en-US" sz="900" spc="-1" strike="noStrike">
+              <a:solidFill>
+                <a:srgbClr val="ffffff"/>
+              </a:solidFill>
+              <a:latin typeface="Arial"/>
+            </a:endParaRPr>
+          </a:p>
+          <a:p>
+            <a:pPr algn="ctr">
+              <a:lnSpc>
+                <a:spcPct val="100000"/>
+              </a:lnSpc>
+            </a:pPr>
+            <a:r>
+              <a:rPr b="0" lang="en-US" sz="900" spc="-1" strike="noStrike">
+                <a:solidFill>
+                  <a:srgbClr val="78ffc8"/>
+                </a:solidFill>
+                <a:latin typeface="Consolas"/>
+                <a:ea typeface="DejaVu Sans"/>
+              </a:rPr>
+              <a:t>        </a:t>
+            </a:r>
+            <a:r>
+              <a:rPr b="0" lang="en-US" sz="900" spc="-1" strike="noStrike">
+                <a:solidFill>
+                  <a:srgbClr val="78ffc8"/>
+                </a:solidFill>
+                <a:latin typeface="Consolas"/>
+                <a:ea typeface="DejaVu Sans"/>
+              </a:rPr>
+              <a:t>// Subtotal is now 50.00</a:t>
+            </a:r>
+            <a:endParaRPr b="0" lang="en-US" sz="900" spc="-1" strike="noStrike">
+              <a:solidFill>
+                <a:srgbClr val="ffffff"/>
+              </a:solidFill>
+              <a:latin typeface="Arial"/>
+            </a:endParaRPr>
+          </a:p>
+          <a:p>
+            <a:pPr algn="ctr">
+              <a:lnSpc>
+                <a:spcPct val="100000"/>
+              </a:lnSpc>
+            </a:pPr>
+            <a:endParaRPr b="0" lang="en-US" sz="900" spc="-1" strike="noStrike">
+              <a:solidFill>
+                <a:srgbClr val="ffffff"/>
+              </a:solidFill>
+              <a:latin typeface="Arial"/>
+            </a:endParaRPr>
+          </a:p>
+          <a:p>
+            <a:pPr algn="ctr">
+              <a:lnSpc>
+                <a:spcPct val="100000"/>
+              </a:lnSpc>
+            </a:pPr>
+            <a:r>
+              <a:rPr b="0" lang="en-US" sz="900" spc="-1" strike="noStrike">
+                <a:solidFill>
+                  <a:srgbClr val="78ffc8"/>
+                </a:solidFill>
+                <a:latin typeface="Consolas"/>
+                <a:ea typeface="DejaVu Sans"/>
+              </a:rPr>
+              <a:t>        </a:t>
+            </a:r>
+            <a:r>
+              <a:rPr b="0" lang="en-US" sz="900" spc="-1" strike="noStrike">
+                <a:solidFill>
+                  <a:srgbClr val="78ffc8"/>
+                </a:solidFill>
+                <a:latin typeface="Consolas"/>
+                <a:ea typeface="DejaVu Sans"/>
+              </a:rPr>
+              <a:t>// 3. Apply a $5 Coupon</a:t>
+            </a:r>
+            <a:endParaRPr b="0" lang="en-US" sz="900" spc="-1" strike="noStrike">
+              <a:solidFill>
+                <a:srgbClr val="ffffff"/>
+              </a:solidFill>
+              <a:latin typeface="Arial"/>
+            </a:endParaRPr>
+          </a:p>
+          <a:p>
+            <a:pPr algn="ctr">
+              <a:lnSpc>
+                <a:spcPct val="100000"/>
+              </a:lnSpc>
+            </a:pPr>
+            <a:r>
+              <a:rPr b="0" lang="en-US" sz="900" spc="-1" strike="noStrike">
+                <a:solidFill>
+                  <a:srgbClr val="78ffc8"/>
+                </a:solidFill>
+                <a:latin typeface="Consolas"/>
+                <a:ea typeface="DejaVu Sans"/>
+              </a:rPr>
+              <a:t>        </a:t>
+            </a:r>
+            <a:r>
+              <a:rPr b="0" lang="en-US" sz="900" spc="-1" strike="noStrike">
+                <a:solidFill>
+                  <a:srgbClr val="78ffc8"/>
+                </a:solidFill>
+                <a:latin typeface="Consolas"/>
+                <a:ea typeface="DejaVu Sans"/>
+              </a:rPr>
+              <a:t>bill -= 5.00;  // Subtotal is 45.00</a:t>
+            </a:r>
+            <a:endParaRPr b="0" lang="en-US" sz="900" spc="-1" strike="noStrike">
+              <a:solidFill>
+                <a:srgbClr val="ffffff"/>
+              </a:solidFill>
+              <a:latin typeface="Arial"/>
+            </a:endParaRPr>
+          </a:p>
+          <a:p>
+            <a:pPr algn="ctr">
+              <a:lnSpc>
+                <a:spcPct val="100000"/>
+              </a:lnSpc>
+            </a:pPr>
+            <a:r>
+              <a:rPr b="0" lang="en-US" sz="900" spc="-1" strike="noStrike">
+                <a:solidFill>
+                  <a:srgbClr val="78ffc8"/>
+                </a:solidFill>
+                <a:latin typeface="Consolas"/>
+                <a:ea typeface="DejaVu Sans"/>
+              </a:rPr>
+              <a:t>        </a:t>
+            </a:r>
+            <a:endParaRPr b="0" lang="en-US" sz="900" spc="-1" strike="noStrike">
+              <a:solidFill>
+                <a:srgbClr val="ffffff"/>
+              </a:solidFill>
+              <a:latin typeface="Arial"/>
+            </a:endParaRPr>
+          </a:p>
+          <a:p>
+            <a:pPr algn="ctr">
+              <a:lnSpc>
+                <a:spcPct val="100000"/>
+              </a:lnSpc>
+            </a:pPr>
+            <a:r>
+              <a:rPr b="0" lang="en-US" sz="900" spc="-1" strike="noStrike">
+                <a:solidFill>
+                  <a:srgbClr val="78ffc8"/>
+                </a:solidFill>
+                <a:latin typeface="Consolas"/>
+                <a:ea typeface="DejaVu Sans"/>
+              </a:rPr>
+              <a:t>        </a:t>
+            </a:r>
+            <a:r>
+              <a:rPr b="0" lang="en-US" sz="900" spc="-1" strike="noStrike">
+                <a:solidFill>
+                  <a:srgbClr val="78ffc8"/>
+                </a:solidFill>
+                <a:latin typeface="Consolas"/>
+                <a:ea typeface="DejaVu Sans"/>
+              </a:rPr>
+              <a:t>// 4. Apply 25% Tax &amp; Tip together</a:t>
+            </a:r>
+            <a:endParaRPr b="0" lang="en-US" sz="900" spc="-1" strike="noStrike">
+              <a:solidFill>
+                <a:srgbClr val="ffffff"/>
+              </a:solidFill>
+              <a:latin typeface="Arial"/>
+            </a:endParaRPr>
+          </a:p>
+          <a:p>
+            <a:pPr algn="ctr">
+              <a:lnSpc>
+                <a:spcPct val="100000"/>
+              </a:lnSpc>
+            </a:pPr>
+            <a:r>
+              <a:rPr b="0" lang="en-US" sz="900" spc="-1" strike="noStrike">
+                <a:solidFill>
+                  <a:srgbClr val="78ffc8"/>
+                </a:solidFill>
+                <a:latin typeface="Consolas"/>
+                <a:ea typeface="DejaVu Sans"/>
+              </a:rPr>
+              <a:t>        </a:t>
+            </a:r>
+            <a:r>
+              <a:rPr b="0" lang="en-US" sz="900" spc="-1" strike="noStrike">
+                <a:solidFill>
+                  <a:srgbClr val="78ffc8"/>
+                </a:solidFill>
+                <a:latin typeface="Consolas"/>
+                <a:ea typeface="DejaVu Sans"/>
+              </a:rPr>
+              <a:t>// Multiplies current bill by 1.25</a:t>
+            </a:r>
+            <a:endParaRPr b="0" lang="en-US" sz="900" spc="-1" strike="noStrike">
+              <a:solidFill>
+                <a:srgbClr val="ffffff"/>
+              </a:solidFill>
+              <a:latin typeface="Arial"/>
+            </a:endParaRPr>
+          </a:p>
+          <a:p>
+            <a:pPr algn="ctr">
+              <a:lnSpc>
+                <a:spcPct val="100000"/>
+              </a:lnSpc>
+            </a:pPr>
+            <a:r>
+              <a:rPr b="0" lang="en-US" sz="900" spc="-1" strike="noStrike">
+                <a:solidFill>
+                  <a:srgbClr val="78ffc8"/>
+                </a:solidFill>
+                <a:latin typeface="Consolas"/>
+                <a:ea typeface="DejaVu Sans"/>
+              </a:rPr>
+              <a:t>        </a:t>
+            </a:r>
+            <a:r>
+              <a:rPr b="0" lang="en-US" sz="900" spc="-1" strike="noStrike">
+                <a:solidFill>
+                  <a:srgbClr val="78ffc8"/>
+                </a:solidFill>
+                <a:latin typeface="Consolas"/>
+                <a:ea typeface="DejaVu Sans"/>
+              </a:rPr>
+              <a:t>bill *= 1.25;  // Final total: 56.25</a:t>
+            </a:r>
+            <a:endParaRPr b="0" lang="en-US" sz="900" spc="-1" strike="noStrike">
+              <a:solidFill>
+                <a:srgbClr val="ffffff"/>
+              </a:solidFill>
+              <a:latin typeface="Arial"/>
+            </a:endParaRPr>
+          </a:p>
+          <a:p>
+            <a:pPr algn="ctr">
+              <a:lnSpc>
+                <a:spcPct val="100000"/>
+              </a:lnSpc>
+            </a:pPr>
+            <a:endParaRPr b="0" lang="en-US" sz="900" spc="-1" strike="noStrike">
+              <a:solidFill>
+                <a:srgbClr val="ffffff"/>
+              </a:solidFill>
+              <a:latin typeface="Arial"/>
+            </a:endParaRPr>
+          </a:p>
+          <a:p>
+            <a:pPr algn="ctr">
+              <a:lnSpc>
+                <a:spcPct val="100000"/>
+              </a:lnSpc>
+            </a:pPr>
+            <a:r>
+              <a:rPr b="0" lang="en-US" sz="900" spc="-1" strike="noStrike">
+                <a:solidFill>
+                  <a:srgbClr val="78ffc8"/>
+                </a:solidFill>
+                <a:latin typeface="Consolas"/>
+                <a:ea typeface="DejaVu Sans"/>
+              </a:rPr>
+              <a:t>        </a:t>
+            </a:r>
+            <a:r>
+              <a:rPr b="0" lang="en-US" sz="900" spc="-1" strike="noStrike">
+                <a:solidFill>
+                  <a:srgbClr val="78ffc8"/>
+                </a:solidFill>
+                <a:latin typeface="Consolas"/>
+                <a:ea typeface="DejaVu Sans"/>
+              </a:rPr>
+              <a:t>// 5. Split among guests</a:t>
+            </a:r>
+            <a:endParaRPr b="0" lang="en-US" sz="900" spc="-1" strike="noStrike">
+              <a:solidFill>
+                <a:srgbClr val="ffffff"/>
+              </a:solidFill>
+              <a:latin typeface="Arial"/>
+            </a:endParaRPr>
+          </a:p>
+          <a:p>
+            <a:pPr algn="ctr">
+              <a:lnSpc>
+                <a:spcPct val="100000"/>
+              </a:lnSpc>
+            </a:pPr>
+            <a:r>
+              <a:rPr b="0" lang="en-US" sz="900" spc="-1" strike="noStrike">
+                <a:solidFill>
+                  <a:srgbClr val="78ffc8"/>
+                </a:solidFill>
+                <a:latin typeface="Consolas"/>
+                <a:ea typeface="DejaVu Sans"/>
+              </a:rPr>
+              <a:t>        </a:t>
+            </a:r>
+            <a:r>
+              <a:rPr b="0" lang="en-US" sz="900" spc="-1" strike="noStrike">
+                <a:solidFill>
+                  <a:srgbClr val="78ffc8"/>
+                </a:solidFill>
+                <a:latin typeface="Consolas"/>
+                <a:ea typeface="DejaVu Sans"/>
+              </a:rPr>
+              <a:t>double perPerson = bill / guests;</a:t>
+            </a:r>
+            <a:endParaRPr b="0" lang="en-US" sz="900" spc="-1" strike="noStrike">
+              <a:solidFill>
+                <a:srgbClr val="ffffff"/>
+              </a:solidFill>
+              <a:latin typeface="Arial"/>
+            </a:endParaRPr>
+          </a:p>
+          <a:p>
+            <a:pPr algn="ctr">
+              <a:lnSpc>
+                <a:spcPct val="100000"/>
+              </a:lnSpc>
+            </a:pPr>
+            <a:r>
+              <a:rPr b="0" lang="en-US" sz="900" spc="-1" strike="noStrike">
+                <a:solidFill>
+                  <a:srgbClr val="78ffc8"/>
+                </a:solidFill>
+                <a:latin typeface="Consolas"/>
+                <a:ea typeface="DejaVu Sans"/>
+              </a:rPr>
+              <a:t>        </a:t>
+            </a:r>
+            <a:endParaRPr b="0" lang="en-US" sz="900" spc="-1" strike="noStrike">
+              <a:solidFill>
+                <a:srgbClr val="ffffff"/>
+              </a:solidFill>
+              <a:latin typeface="Arial"/>
+            </a:endParaRPr>
+          </a:p>
+          <a:p>
+            <a:pPr algn="ctr">
+              <a:lnSpc>
+                <a:spcPct val="100000"/>
+              </a:lnSpc>
+            </a:pPr>
+            <a:r>
+              <a:rPr b="0" lang="en-US" sz="900" spc="-1" strike="noStrike">
+                <a:solidFill>
+                  <a:srgbClr val="78ffc8"/>
+                </a:solidFill>
+                <a:latin typeface="Consolas"/>
+                <a:ea typeface="DejaVu Sans"/>
+              </a:rPr>
+              <a:t>        </a:t>
+            </a:r>
+            <a:r>
+              <a:rPr b="0" lang="en-US" sz="900" spc="-1" strike="noStrike">
+                <a:solidFill>
+                  <a:srgbClr val="78ffc8"/>
+                </a:solidFill>
+                <a:latin typeface="Consolas"/>
+                <a:ea typeface="DejaVu Sans"/>
+              </a:rPr>
+              <a:t>System.out.println("Total: $" + bill);</a:t>
+            </a:r>
+            <a:endParaRPr b="0" lang="en-US" sz="900" spc="-1" strike="noStrike">
+              <a:solidFill>
+                <a:srgbClr val="ffffff"/>
+              </a:solidFill>
+              <a:latin typeface="Arial"/>
+            </a:endParaRPr>
+          </a:p>
+          <a:p>
+            <a:pPr algn="ctr">
+              <a:lnSpc>
+                <a:spcPct val="100000"/>
+              </a:lnSpc>
+            </a:pPr>
+            <a:r>
+              <a:rPr b="0" lang="en-US" sz="900" spc="-1" strike="noStrike">
+                <a:solidFill>
+                  <a:srgbClr val="78ffc8"/>
+                </a:solidFill>
+                <a:latin typeface="Consolas"/>
+                <a:ea typeface="DejaVu Sans"/>
+              </a:rPr>
+              <a:t>        </a:t>
+            </a:r>
+            <a:r>
+              <a:rPr b="0" lang="en-US" sz="900" spc="-1" strike="noStrike">
+                <a:solidFill>
+                  <a:srgbClr val="78ffc8"/>
+                </a:solidFill>
+                <a:latin typeface="Consolas"/>
+                <a:ea typeface="DejaVu Sans"/>
+              </a:rPr>
+              <a:t>System.out.println("Each pays: $" + perPerson);</a:t>
+            </a:r>
+            <a:endParaRPr b="0" lang="en-US" sz="900" spc="-1" strike="noStrike">
+              <a:solidFill>
+                <a:srgbClr val="ffffff"/>
+              </a:solidFill>
+              <a:latin typeface="Arial"/>
+            </a:endParaRPr>
+          </a:p>
+          <a:p>
+            <a:pPr algn="ctr">
+              <a:lnSpc>
+                <a:spcPct val="100000"/>
+              </a:lnSpc>
+            </a:pPr>
+            <a:r>
+              <a:rPr b="0" lang="en-US" sz="900" spc="-1" strike="noStrike">
+                <a:solidFill>
+                  <a:srgbClr val="78ffc8"/>
+                </a:solidFill>
+                <a:latin typeface="Consolas"/>
+                <a:ea typeface="DejaVu Sans"/>
+              </a:rPr>
+              <a:t>    </a:t>
+            </a:r>
+            <a:r>
+              <a:rPr b="0" lang="en-US" sz="900" spc="-1" strike="noStrike">
+                <a:solidFill>
+                  <a:srgbClr val="78ffc8"/>
+                </a:solidFill>
+                <a:latin typeface="Consolas"/>
+                <a:ea typeface="DejaVu Sans"/>
+              </a:rPr>
+              <a:t>}</a:t>
+            </a:r>
+            <a:endParaRPr b="0" lang="en-US" sz="900" spc="-1" strike="noStrike">
+              <a:solidFill>
+                <a:srgbClr val="ffffff"/>
+              </a:solidFill>
+              <a:latin typeface="Arial"/>
+            </a:endParaRPr>
+          </a:p>
+          <a:p>
+            <a:pPr algn="ctr">
+              <a:lnSpc>
+                <a:spcPct val="100000"/>
+              </a:lnSpc>
+            </a:pPr>
+            <a:r>
+              <a:rPr b="0" lang="en-US" sz="900" spc="-1" strike="noStrike">
+                <a:solidFill>
+                  <a:srgbClr val="78ffc8"/>
+                </a:solidFill>
+                <a:latin typeface="Consolas"/>
+                <a:ea typeface="DejaVu Sans"/>
+              </a:rPr>
+              <a:t>}</a:t>
+            </a:r>
+            <a:endParaRPr b="0" lang="en-US" sz="900" spc="-1" strike="noStrike">
+              <a:solidFill>
+                <a:srgbClr val="ffffff"/>
+              </a:solidFill>
+              <a:latin typeface="Arial"/>
+            </a:endParaRPr>
+          </a:p>
+        </p:txBody>
+      </p:sp>
+      <p:sp>
+        <p:nvSpPr>
+          <p:cNvPr id="378" name="TextBox 42"/>
           <p:cNvSpPr/>
           <p:nvPr/>
         </p:nvSpPr>
@@ -13550,7 +16563,7 @@
         <p:spPr>
           <a:xfrm>
             <a:off x="0" y="0"/>
-            <a:ext cx="12184200" cy="6853320"/>
+            <a:ext cx="12183840" cy="6852960"/>
           </a:xfrm>
           <a:prstGeom prst="rect">
             <a:avLst/>
@@ -13610,7 +16623,7 @@
         <p:spPr>
           <a:xfrm>
             <a:off x="0" y="0"/>
-            <a:ext cx="13680" cy="6853320"/>
+            <a:ext cx="13320" cy="6852960"/>
           </a:xfrm>
           <a:prstGeom prst="rect">
             <a:avLst/>
@@ -13670,7 +16683,7 @@
         <p:spPr>
           <a:xfrm>
             <a:off x="914400" y="0"/>
-            <a:ext cx="13680" cy="6853320"/>
+            <a:ext cx="13320" cy="6852960"/>
           </a:xfrm>
           <a:prstGeom prst="rect">
             <a:avLst/>
@@ -13730,7 +16743,7 @@
         <p:spPr>
           <a:xfrm>
             <a:off x="1828800" y="0"/>
-            <a:ext cx="13680" cy="6853320"/>
+            <a:ext cx="13320" cy="6852960"/>
           </a:xfrm>
           <a:prstGeom prst="rect">
             <a:avLst/>
@@ -13790,7 +16803,7 @@
         <p:spPr>
           <a:xfrm>
             <a:off x="2743200" y="0"/>
-            <a:ext cx="13680" cy="6853320"/>
+            <a:ext cx="13320" cy="6852960"/>
           </a:xfrm>
           <a:prstGeom prst="rect">
             <a:avLst/>
@@ -13850,7 +16863,7 @@
         <p:spPr>
           <a:xfrm>
             <a:off x="3657600" y="0"/>
-            <a:ext cx="13680" cy="6853320"/>
+            <a:ext cx="13320" cy="6852960"/>
           </a:xfrm>
           <a:prstGeom prst="rect">
             <a:avLst/>
@@ -13910,7 +16923,7 @@
         <p:spPr>
           <a:xfrm>
             <a:off x="4572000" y="0"/>
-            <a:ext cx="13680" cy="6853320"/>
+            <a:ext cx="13320" cy="6852960"/>
           </a:xfrm>
           <a:prstGeom prst="rect">
             <a:avLst/>
@@ -13970,7 +16983,7 @@
         <p:spPr>
           <a:xfrm>
             <a:off x="5486400" y="0"/>
-            <a:ext cx="13680" cy="6853320"/>
+            <a:ext cx="13320" cy="6852960"/>
           </a:xfrm>
           <a:prstGeom prst="rect">
             <a:avLst/>
@@ -14030,7 +17043,7 @@
         <p:spPr>
           <a:xfrm>
             <a:off x="6400800" y="0"/>
-            <a:ext cx="13680" cy="6853320"/>
+            <a:ext cx="13320" cy="6852960"/>
           </a:xfrm>
           <a:prstGeom prst="rect">
             <a:avLst/>
@@ -14090,7 +17103,7 @@
         <p:spPr>
           <a:xfrm>
             <a:off x="7315200" y="0"/>
-            <a:ext cx="13680" cy="6853320"/>
+            <a:ext cx="13320" cy="6852960"/>
           </a:xfrm>
           <a:prstGeom prst="rect">
             <a:avLst/>
@@ -14150,7 +17163,7 @@
         <p:spPr>
           <a:xfrm>
             <a:off x="8229600" y="0"/>
-            <a:ext cx="13680" cy="6853320"/>
+            <a:ext cx="13320" cy="6852960"/>
           </a:xfrm>
           <a:prstGeom prst="rect">
             <a:avLst/>
@@ -14210,7 +17223,7 @@
         <p:spPr>
           <a:xfrm>
             <a:off x="9144000" y="0"/>
-            <a:ext cx="13680" cy="6853320"/>
+            <a:ext cx="13320" cy="6852960"/>
           </a:xfrm>
           <a:prstGeom prst="rect">
             <a:avLst/>
@@ -14270,7 +17283,7 @@
         <p:spPr>
           <a:xfrm>
             <a:off x="10058400" y="0"/>
-            <a:ext cx="13680" cy="6853320"/>
+            <a:ext cx="13320" cy="6852960"/>
           </a:xfrm>
           <a:prstGeom prst="rect">
             <a:avLst/>
@@ -14330,7 +17343,7 @@
         <p:spPr>
           <a:xfrm>
             <a:off x="10972800" y="0"/>
-            <a:ext cx="13680" cy="6853320"/>
+            <a:ext cx="13320" cy="6852960"/>
           </a:xfrm>
           <a:prstGeom prst="rect">
             <a:avLst/>
@@ -14390,7 +17403,7 @@
         <p:spPr>
           <a:xfrm>
             <a:off x="11887200" y="0"/>
-            <a:ext cx="13680" cy="6853320"/>
+            <a:ext cx="13320" cy="6852960"/>
           </a:xfrm>
           <a:prstGeom prst="rect">
             <a:avLst/>
@@ -14450,7 +17463,7 @@
         <p:spPr>
           <a:xfrm>
             <a:off x="0" y="0"/>
-            <a:ext cx="315360" cy="6853320"/>
+            <a:ext cx="315000" cy="6852960"/>
           </a:xfrm>
           <a:prstGeom prst="rect">
             <a:avLst/>
@@ -14510,7 +17523,7 @@
         <p:spPr>
           <a:xfrm>
             <a:off x="9875520" y="365760"/>
-            <a:ext cx="2007000" cy="498240"/>
+            <a:ext cx="2006640" cy="497880"/>
           </a:xfrm>
           <a:prstGeom prst="roundRect">
             <a:avLst>
@@ -14738,7 +17751,7 @@
         <p:spPr>
           <a:xfrm>
             <a:off x="987480" y="3182040"/>
-            <a:ext cx="3287160" cy="2738520"/>
+            <a:ext cx="3286800" cy="2738160"/>
           </a:xfrm>
           <a:prstGeom prst="roundRect">
             <a:avLst>
@@ -14800,7 +17813,7 @@
         <p:spPr>
           <a:xfrm>
             <a:off x="914400" y="3108960"/>
-            <a:ext cx="3287160" cy="3059640"/>
+            <a:ext cx="3286800" cy="3059280"/>
           </a:xfrm>
           <a:prstGeom prst="roundRect">
             <a:avLst>
@@ -14963,7 +17976,7 @@
         <p:spPr>
           <a:xfrm>
             <a:off x="4507920" y="3182040"/>
-            <a:ext cx="3287160" cy="2738520"/>
+            <a:ext cx="3286800" cy="2738160"/>
           </a:xfrm>
           <a:prstGeom prst="roundRect">
             <a:avLst>
@@ -15025,7 +18038,7 @@
         <p:spPr>
           <a:xfrm>
             <a:off x="4434840" y="2971800"/>
-            <a:ext cx="3287160" cy="3425400"/>
+            <a:ext cx="3286800" cy="3425040"/>
           </a:xfrm>
           <a:prstGeom prst="roundRect">
             <a:avLst>
@@ -15283,7 +18296,7 @@
         <p:spPr>
           <a:xfrm>
             <a:off x="8028360" y="3182040"/>
-            <a:ext cx="3287160" cy="2738520"/>
+            <a:ext cx="3286800" cy="2738160"/>
           </a:xfrm>
           <a:prstGeom prst="roundRect">
             <a:avLst>
@@ -15345,7 +18358,7 @@
         <p:spPr>
           <a:xfrm>
             <a:off x="7955280" y="3108960"/>
-            <a:ext cx="3699720" cy="3059640"/>
+            <a:ext cx="3699360" cy="3059280"/>
           </a:xfrm>
           <a:prstGeom prst="roundRect">
             <a:avLst>
@@ -15790,7 +18803,7 @@
         <p:spPr>
           <a:xfrm>
             <a:off x="0" y="0"/>
-            <a:ext cx="12184200" cy="6853320"/>
+            <a:ext cx="12183840" cy="6852960"/>
           </a:xfrm>
           <a:prstGeom prst="rect">
             <a:avLst/>
@@ -15850,7 +18863,7 @@
         <p:spPr>
           <a:xfrm>
             <a:off x="0" y="0"/>
-            <a:ext cx="13680" cy="6853320"/>
+            <a:ext cx="13320" cy="6852960"/>
           </a:xfrm>
           <a:prstGeom prst="rect">
             <a:avLst/>
@@ -15910,7 +18923,7 @@
         <p:spPr>
           <a:xfrm>
             <a:off x="914400" y="0"/>
-            <a:ext cx="13680" cy="6853320"/>
+            <a:ext cx="13320" cy="6852960"/>
           </a:xfrm>
           <a:prstGeom prst="rect">
             <a:avLst/>
@@ -15970,7 +18983,7 @@
         <p:spPr>
           <a:xfrm>
             <a:off x="1828800" y="0"/>
-            <a:ext cx="13680" cy="6853320"/>
+            <a:ext cx="13320" cy="6852960"/>
           </a:xfrm>
           <a:prstGeom prst="rect">
             <a:avLst/>
@@ -16030,7 +19043,7 @@
         <p:spPr>
           <a:xfrm>
             <a:off x="2743200" y="0"/>
-            <a:ext cx="13680" cy="6853320"/>
+            <a:ext cx="13320" cy="6852960"/>
           </a:xfrm>
           <a:prstGeom prst="rect">
             <a:avLst/>
@@ -16090,7 +19103,7 @@
         <p:spPr>
           <a:xfrm>
             <a:off x="3657600" y="0"/>
-            <a:ext cx="13680" cy="6853320"/>
+            <a:ext cx="13320" cy="6852960"/>
           </a:xfrm>
           <a:prstGeom prst="rect">
             <a:avLst/>
@@ -16150,7 +19163,7 @@
         <p:spPr>
           <a:xfrm>
             <a:off x="4572000" y="0"/>
-            <a:ext cx="13680" cy="6853320"/>
+            <a:ext cx="13320" cy="6852960"/>
           </a:xfrm>
           <a:prstGeom prst="rect">
             <a:avLst/>
@@ -16210,7 +19223,7 @@
         <p:spPr>
           <a:xfrm>
             <a:off x="5486400" y="0"/>
-            <a:ext cx="13680" cy="6853320"/>
+            <a:ext cx="13320" cy="6852960"/>
           </a:xfrm>
           <a:prstGeom prst="rect">
             <a:avLst/>
@@ -16270,7 +19283,7 @@
         <p:spPr>
           <a:xfrm>
             <a:off x="6400800" y="0"/>
-            <a:ext cx="13680" cy="6853320"/>
+            <a:ext cx="13320" cy="6852960"/>
           </a:xfrm>
           <a:prstGeom prst="rect">
             <a:avLst/>
@@ -16330,7 +19343,7 @@
         <p:spPr>
           <a:xfrm>
             <a:off x="7315200" y="0"/>
-            <a:ext cx="13680" cy="6853320"/>
+            <a:ext cx="13320" cy="6852960"/>
           </a:xfrm>
           <a:prstGeom prst="rect">
             <a:avLst/>
@@ -16390,7 +19403,7 @@
         <p:spPr>
           <a:xfrm>
             <a:off x="8229600" y="0"/>
-            <a:ext cx="13680" cy="6853320"/>
+            <a:ext cx="13320" cy="6852960"/>
           </a:xfrm>
           <a:prstGeom prst="rect">
             <a:avLst/>
@@ -16450,7 +19463,7 @@
         <p:spPr>
           <a:xfrm>
             <a:off x="9144000" y="0"/>
-            <a:ext cx="13680" cy="6853320"/>
+            <a:ext cx="13320" cy="6852960"/>
           </a:xfrm>
           <a:prstGeom prst="rect">
             <a:avLst/>
@@ -16510,7 +19523,7 @@
         <p:spPr>
           <a:xfrm>
             <a:off x="10058400" y="0"/>
-            <a:ext cx="13680" cy="6853320"/>
+            <a:ext cx="13320" cy="6852960"/>
           </a:xfrm>
           <a:prstGeom prst="rect">
             <a:avLst/>
@@ -16570,7 +19583,7 @@
         <p:spPr>
           <a:xfrm>
             <a:off x="10972800" y="0"/>
-            <a:ext cx="13680" cy="6853320"/>
+            <a:ext cx="13320" cy="6852960"/>
           </a:xfrm>
           <a:prstGeom prst="rect">
             <a:avLst/>
@@ -16630,7 +19643,7 @@
         <p:spPr>
           <a:xfrm>
             <a:off x="11887200" y="0"/>
-            <a:ext cx="13680" cy="6853320"/>
+            <a:ext cx="13320" cy="6852960"/>
           </a:xfrm>
           <a:prstGeom prst="rect">
             <a:avLst/>
@@ -16690,7 +19703,7 @@
         <p:spPr>
           <a:xfrm>
             <a:off x="0" y="0"/>
-            <a:ext cx="315360" cy="6853320"/>
+            <a:ext cx="315000" cy="6852960"/>
           </a:xfrm>
           <a:prstGeom prst="rect">
             <a:avLst/>
@@ -16750,7 +19763,7 @@
         <p:spPr>
           <a:xfrm>
             <a:off x="9875520" y="365760"/>
-            <a:ext cx="2007000" cy="498240"/>
+            <a:ext cx="2006640" cy="497880"/>
           </a:xfrm>
           <a:prstGeom prst="roundRect">
             <a:avLst>
@@ -16978,7 +19991,7 @@
         <p:spPr>
           <a:xfrm>
             <a:off x="987480" y="3182040"/>
-            <a:ext cx="3287160" cy="2738520"/>
+            <a:ext cx="3286800" cy="2738160"/>
           </a:xfrm>
           <a:prstGeom prst="roundRect">
             <a:avLst>
@@ -17040,7 +20053,7 @@
         <p:spPr>
           <a:xfrm>
             <a:off x="685800" y="2971800"/>
-            <a:ext cx="3515760" cy="3196800"/>
+            <a:ext cx="3515400" cy="3196440"/>
           </a:xfrm>
           <a:prstGeom prst="roundRect">
             <a:avLst>
@@ -17231,7 +20244,7 @@
         <p:spPr>
           <a:xfrm>
             <a:off x="4507920" y="3182040"/>
-            <a:ext cx="3287160" cy="2738520"/>
+            <a:ext cx="3286800" cy="2738160"/>
           </a:xfrm>
           <a:prstGeom prst="roundRect">
             <a:avLst>
@@ -17293,7 +20306,7 @@
         <p:spPr>
           <a:xfrm>
             <a:off x="4434840" y="2971800"/>
-            <a:ext cx="3287160" cy="3425400"/>
+            <a:ext cx="3286800" cy="3425040"/>
           </a:xfrm>
           <a:prstGeom prst="roundRect">
             <a:avLst>
@@ -17551,7 +20564,7 @@
         <p:spPr>
           <a:xfrm>
             <a:off x="8028360" y="3182040"/>
-            <a:ext cx="3287160" cy="2738520"/>
+            <a:ext cx="3286800" cy="2738160"/>
           </a:xfrm>
           <a:prstGeom prst="roundRect">
             <a:avLst>
@@ -17613,7 +20626,7 @@
         <p:spPr>
           <a:xfrm>
             <a:off x="7955280" y="3108960"/>
-            <a:ext cx="3699720" cy="3059640"/>
+            <a:ext cx="3699360" cy="3059280"/>
           </a:xfrm>
           <a:prstGeom prst="roundRect">
             <a:avLst>
@@ -18058,7 +21071,7 @@
         <p:spPr>
           <a:xfrm>
             <a:off x="0" y="0"/>
-            <a:ext cx="12184200" cy="6853320"/>
+            <a:ext cx="12183840" cy="6852960"/>
           </a:xfrm>
           <a:prstGeom prst="rect">
             <a:avLst/>
@@ -18118,7 +21131,7 @@
         <p:spPr>
           <a:xfrm>
             <a:off x="0" y="0"/>
-            <a:ext cx="13680" cy="6853320"/>
+            <a:ext cx="13320" cy="6852960"/>
           </a:xfrm>
           <a:prstGeom prst="rect">
             <a:avLst/>
@@ -18178,7 +21191,7 @@
         <p:spPr>
           <a:xfrm>
             <a:off x="914400" y="0"/>
-            <a:ext cx="13680" cy="6853320"/>
+            <a:ext cx="13320" cy="6852960"/>
           </a:xfrm>
           <a:prstGeom prst="rect">
             <a:avLst/>
@@ -18238,7 +21251,7 @@
         <p:spPr>
           <a:xfrm>
             <a:off x="1828800" y="0"/>
-            <a:ext cx="13680" cy="6853320"/>
+            <a:ext cx="13320" cy="6852960"/>
           </a:xfrm>
           <a:prstGeom prst="rect">
             <a:avLst/>
@@ -18298,7 +21311,7 @@
         <p:spPr>
           <a:xfrm>
             <a:off x="2743200" y="0"/>
-            <a:ext cx="13680" cy="6853320"/>
+            <a:ext cx="13320" cy="6852960"/>
           </a:xfrm>
           <a:prstGeom prst="rect">
             <a:avLst/>
@@ -18358,7 +21371,7 @@
         <p:spPr>
           <a:xfrm>
             <a:off x="3657600" y="0"/>
-            <a:ext cx="13680" cy="6853320"/>
+            <a:ext cx="13320" cy="6852960"/>
           </a:xfrm>
           <a:prstGeom prst="rect">
             <a:avLst/>
@@ -18418,7 +21431,7 @@
         <p:spPr>
           <a:xfrm>
             <a:off x="4572000" y="0"/>
-            <a:ext cx="13680" cy="6853320"/>
+            <a:ext cx="13320" cy="6852960"/>
           </a:xfrm>
           <a:prstGeom prst="rect">
             <a:avLst/>
@@ -18478,7 +21491,7 @@
         <p:spPr>
           <a:xfrm>
             <a:off x="5486400" y="0"/>
-            <a:ext cx="13680" cy="6853320"/>
+            <a:ext cx="13320" cy="6852960"/>
           </a:xfrm>
           <a:prstGeom prst="rect">
             <a:avLst/>
@@ -18538,7 +21551,7 @@
         <p:spPr>
           <a:xfrm>
             <a:off x="6400800" y="0"/>
-            <a:ext cx="13680" cy="6853320"/>
+            <a:ext cx="13320" cy="6852960"/>
           </a:xfrm>
           <a:prstGeom prst="rect">
             <a:avLst/>
@@ -18598,7 +21611,7 @@
         <p:spPr>
           <a:xfrm>
             <a:off x="7315200" y="0"/>
-            <a:ext cx="13680" cy="6853320"/>
+            <a:ext cx="13320" cy="6852960"/>
           </a:xfrm>
           <a:prstGeom prst="rect">
             <a:avLst/>
@@ -18658,7 +21671,7 @@
         <p:spPr>
           <a:xfrm>
             <a:off x="8229600" y="0"/>
-            <a:ext cx="13680" cy="6853320"/>
+            <a:ext cx="13320" cy="6852960"/>
           </a:xfrm>
           <a:prstGeom prst="rect">
             <a:avLst/>
@@ -18718,7 +21731,7 @@
         <p:spPr>
           <a:xfrm>
             <a:off x="9144000" y="0"/>
-            <a:ext cx="13680" cy="6853320"/>
+            <a:ext cx="13320" cy="6852960"/>
           </a:xfrm>
           <a:prstGeom prst="rect">
             <a:avLst/>
@@ -18778,7 +21791,7 @@
         <p:spPr>
           <a:xfrm>
             <a:off x="10058400" y="0"/>
-            <a:ext cx="13680" cy="6853320"/>
+            <a:ext cx="13320" cy="6852960"/>
           </a:xfrm>
           <a:prstGeom prst="rect">
             <a:avLst/>
@@ -18838,7 +21851,7 @@
         <p:spPr>
           <a:xfrm>
             <a:off x="10972800" y="0"/>
-            <a:ext cx="13680" cy="6853320"/>
+            <a:ext cx="13320" cy="6852960"/>
           </a:xfrm>
           <a:prstGeom prst="rect">
             <a:avLst/>
@@ -18898,7 +21911,7 @@
         <p:spPr>
           <a:xfrm>
             <a:off x="11887200" y="0"/>
-            <a:ext cx="13680" cy="6853320"/>
+            <a:ext cx="13320" cy="6852960"/>
           </a:xfrm>
           <a:prstGeom prst="rect">
             <a:avLst/>
@@ -18958,7 +21971,7 @@
         <p:spPr>
           <a:xfrm>
             <a:off x="0" y="0"/>
-            <a:ext cx="315360" cy="6853320"/>
+            <a:ext cx="315000" cy="6852960"/>
           </a:xfrm>
           <a:prstGeom prst="rect">
             <a:avLst/>
@@ -19018,7 +22031,7 @@
         <p:spPr>
           <a:xfrm>
             <a:off x="9875520" y="365760"/>
-            <a:ext cx="2007000" cy="498240"/>
+            <a:ext cx="2006640" cy="497880"/>
           </a:xfrm>
           <a:prstGeom prst="roundRect">
             <a:avLst>
@@ -19223,7 +22236,7 @@
         <p:spPr>
           <a:xfrm>
             <a:off x="987480" y="3182040"/>
-            <a:ext cx="3287160" cy="2738520"/>
+            <a:ext cx="3286800" cy="2738160"/>
           </a:xfrm>
           <a:prstGeom prst="roundRect">
             <a:avLst>
@@ -19285,7 +22298,7 @@
         <p:spPr>
           <a:xfrm>
             <a:off x="685800" y="2971800"/>
-            <a:ext cx="3515760" cy="3196800"/>
+            <a:ext cx="3515400" cy="3196440"/>
           </a:xfrm>
           <a:prstGeom prst="roundRect">
             <a:avLst>
@@ -19476,7 +22489,7 @@
         <p:spPr>
           <a:xfrm>
             <a:off x="4507920" y="3182040"/>
-            <a:ext cx="3287160" cy="2738520"/>
+            <a:ext cx="3286800" cy="2738160"/>
           </a:xfrm>
           <a:prstGeom prst="roundRect">
             <a:avLst>
@@ -19538,7 +22551,7 @@
         <p:spPr>
           <a:xfrm>
             <a:off x="4434840" y="2971800"/>
-            <a:ext cx="3287160" cy="3425400"/>
+            <a:ext cx="3286800" cy="3425040"/>
           </a:xfrm>
           <a:prstGeom prst="roundRect">
             <a:avLst>
@@ -19750,7 +22763,7 @@
         <p:spPr>
           <a:xfrm>
             <a:off x="8028360" y="3182040"/>
-            <a:ext cx="3287160" cy="2738520"/>
+            <a:ext cx="3286800" cy="2738160"/>
           </a:xfrm>
           <a:prstGeom prst="roundRect">
             <a:avLst>
@@ -19812,7 +22825,7 @@
         <p:spPr>
           <a:xfrm>
             <a:off x="7955280" y="2743200"/>
-            <a:ext cx="3929040" cy="3883320"/>
+            <a:ext cx="3928680" cy="3882960"/>
           </a:xfrm>
           <a:prstGeom prst="roundRect">
             <a:avLst>
@@ -20372,7 +23385,7 @@
         <p:spPr>
           <a:xfrm>
             <a:off x="0" y="0"/>
-            <a:ext cx="12184200" cy="6853320"/>
+            <a:ext cx="12183840" cy="6852960"/>
           </a:xfrm>
           <a:prstGeom prst="rect">
             <a:avLst/>
@@ -20432,7 +23445,7 @@
         <p:spPr>
           <a:xfrm>
             <a:off x="0" y="0"/>
-            <a:ext cx="13680" cy="6853320"/>
+            <a:ext cx="13320" cy="6852960"/>
           </a:xfrm>
           <a:prstGeom prst="rect">
             <a:avLst/>
@@ -20492,7 +23505,7 @@
         <p:spPr>
           <a:xfrm>
             <a:off x="914400" y="0"/>
-            <a:ext cx="13680" cy="6853320"/>
+            <a:ext cx="13320" cy="6852960"/>
           </a:xfrm>
           <a:prstGeom prst="rect">
             <a:avLst/>
@@ -20552,7 +23565,7 @@
         <p:spPr>
           <a:xfrm>
             <a:off x="1828800" y="0"/>
-            <a:ext cx="13680" cy="6853320"/>
+            <a:ext cx="13320" cy="6852960"/>
           </a:xfrm>
           <a:prstGeom prst="rect">
             <a:avLst/>
@@ -20612,7 +23625,7 @@
         <p:spPr>
           <a:xfrm>
             <a:off x="2743200" y="0"/>
-            <a:ext cx="13680" cy="6853320"/>
+            <a:ext cx="13320" cy="6852960"/>
           </a:xfrm>
           <a:prstGeom prst="rect">
             <a:avLst/>
@@ -20672,7 +23685,7 @@
         <p:spPr>
           <a:xfrm>
             <a:off x="3657600" y="0"/>
-            <a:ext cx="13680" cy="6853320"/>
+            <a:ext cx="13320" cy="6852960"/>
           </a:xfrm>
           <a:prstGeom prst="rect">
             <a:avLst/>
@@ -20732,7 +23745,7 @@
         <p:spPr>
           <a:xfrm>
             <a:off x="4572000" y="0"/>
-            <a:ext cx="13680" cy="6853320"/>
+            <a:ext cx="13320" cy="6852960"/>
           </a:xfrm>
           <a:prstGeom prst="rect">
             <a:avLst/>
@@ -20792,7 +23805,7 @@
         <p:spPr>
           <a:xfrm>
             <a:off x="5486400" y="0"/>
-            <a:ext cx="13680" cy="6853320"/>
+            <a:ext cx="13320" cy="6852960"/>
           </a:xfrm>
           <a:prstGeom prst="rect">
             <a:avLst/>
@@ -20852,7 +23865,7 @@
         <p:spPr>
           <a:xfrm>
             <a:off x="6400800" y="0"/>
-            <a:ext cx="13680" cy="6853320"/>
+            <a:ext cx="13320" cy="6852960"/>
           </a:xfrm>
           <a:prstGeom prst="rect">
             <a:avLst/>
@@ -20912,7 +23925,7 @@
         <p:spPr>
           <a:xfrm>
             <a:off x="7315200" y="0"/>
-            <a:ext cx="13680" cy="6853320"/>
+            <a:ext cx="13320" cy="6852960"/>
           </a:xfrm>
           <a:prstGeom prst="rect">
             <a:avLst/>
@@ -20972,7 +23985,7 @@
         <p:spPr>
           <a:xfrm>
             <a:off x="8229600" y="0"/>
-            <a:ext cx="13680" cy="6853320"/>
+            <a:ext cx="13320" cy="6852960"/>
           </a:xfrm>
           <a:prstGeom prst="rect">
             <a:avLst/>
@@ -21032,7 +24045,7 @@
         <p:spPr>
           <a:xfrm>
             <a:off x="9144000" y="0"/>
-            <a:ext cx="13680" cy="6853320"/>
+            <a:ext cx="13320" cy="6852960"/>
           </a:xfrm>
           <a:prstGeom prst="rect">
             <a:avLst/>
@@ -21092,7 +24105,7 @@
         <p:spPr>
           <a:xfrm>
             <a:off x="10058400" y="0"/>
-            <a:ext cx="13680" cy="6853320"/>
+            <a:ext cx="13320" cy="6852960"/>
           </a:xfrm>
           <a:prstGeom prst="rect">
             <a:avLst/>
@@ -21152,7 +24165,7 @@
         <p:spPr>
           <a:xfrm>
             <a:off x="10972800" y="0"/>
-            <a:ext cx="13680" cy="6853320"/>
+            <a:ext cx="13320" cy="6852960"/>
           </a:xfrm>
           <a:prstGeom prst="rect">
             <a:avLst/>
@@ -21212,7 +24225,7 @@
         <p:spPr>
           <a:xfrm>
             <a:off x="11887200" y="0"/>
-            <a:ext cx="13680" cy="6853320"/>
+            <a:ext cx="13320" cy="6852960"/>
           </a:xfrm>
           <a:prstGeom prst="rect">
             <a:avLst/>
@@ -21272,7 +24285,7 @@
         <p:spPr>
           <a:xfrm>
             <a:off x="0" y="0"/>
-            <a:ext cx="315360" cy="6853320"/>
+            <a:ext cx="315000" cy="6852960"/>
           </a:xfrm>
           <a:prstGeom prst="rect">
             <a:avLst/>
@@ -21332,7 +24345,7 @@
         <p:spPr>
           <a:xfrm>
             <a:off x="9875520" y="365760"/>
-            <a:ext cx="2007000" cy="498240"/>
+            <a:ext cx="2006640" cy="497880"/>
           </a:xfrm>
           <a:prstGeom prst="roundRect">
             <a:avLst>
@@ -21537,7 +24550,7 @@
         <p:spPr>
           <a:xfrm>
             <a:off x="987480" y="3182040"/>
-            <a:ext cx="3287160" cy="2738520"/>
+            <a:ext cx="3286800" cy="2738160"/>
           </a:xfrm>
           <a:prstGeom prst="roundRect">
             <a:avLst>
@@ -21599,7 +24612,7 @@
         <p:spPr>
           <a:xfrm>
             <a:off x="457200" y="2743200"/>
-            <a:ext cx="3744360" cy="3883680"/>
+            <a:ext cx="3744000" cy="3883320"/>
           </a:xfrm>
           <a:prstGeom prst="roundRect">
             <a:avLst>
@@ -21837,7 +24850,7 @@
         <p:spPr>
           <a:xfrm>
             <a:off x="4507920" y="3182040"/>
-            <a:ext cx="3287160" cy="2738520"/>
+            <a:ext cx="3286800" cy="2738160"/>
           </a:xfrm>
           <a:prstGeom prst="roundRect">
             <a:avLst>
@@ -21899,7 +24912,7 @@
         <p:spPr>
           <a:xfrm>
             <a:off x="4434840" y="2971800"/>
-            <a:ext cx="3287160" cy="3425400"/>
+            <a:ext cx="3286800" cy="3425040"/>
           </a:xfrm>
           <a:prstGeom prst="roundRect">
             <a:avLst>
@@ -22118,7 +25131,7 @@
         <p:spPr>
           <a:xfrm>
             <a:off x="8028360" y="3182040"/>
-            <a:ext cx="3287160" cy="2738520"/>
+            <a:ext cx="3286800" cy="2738160"/>
           </a:xfrm>
           <a:prstGeom prst="roundRect">
             <a:avLst>
@@ -22180,7 +25193,7 @@
         <p:spPr>
           <a:xfrm>
             <a:off x="8001000" y="3200400"/>
-            <a:ext cx="3472200" cy="2740680"/>
+            <a:ext cx="3471840" cy="2740320"/>
           </a:xfrm>
           <a:prstGeom prst="roundRect">
             <a:avLst>
@@ -22592,7 +25605,7 @@
         <p:spPr>
           <a:xfrm>
             <a:off x="0" y="0"/>
-            <a:ext cx="12183840" cy="6852960"/>
+            <a:ext cx="12183480" cy="6852600"/>
           </a:xfrm>
           <a:prstGeom prst="rect">
             <a:avLst/>
@@ -22652,7 +25665,7 @@
         <p:spPr>
           <a:xfrm>
             <a:off x="0" y="0"/>
-            <a:ext cx="13320" cy="6852960"/>
+            <a:ext cx="12960" cy="6852600"/>
           </a:xfrm>
           <a:prstGeom prst="rect">
             <a:avLst/>
@@ -22712,7 +25725,7 @@
         <p:spPr>
           <a:xfrm>
             <a:off x="914400" y="0"/>
-            <a:ext cx="13320" cy="6852960"/>
+            <a:ext cx="12960" cy="6852600"/>
           </a:xfrm>
           <a:prstGeom prst="rect">
             <a:avLst/>
@@ -22772,7 +25785,7 @@
         <p:spPr>
           <a:xfrm>
             <a:off x="1828800" y="0"/>
-            <a:ext cx="13320" cy="6852960"/>
+            <a:ext cx="12960" cy="6852600"/>
           </a:xfrm>
           <a:prstGeom prst="rect">
             <a:avLst/>
@@ -22832,7 +25845,7 @@
         <p:spPr>
           <a:xfrm>
             <a:off x="2743200" y="0"/>
-            <a:ext cx="13320" cy="6852960"/>
+            <a:ext cx="12960" cy="6852600"/>
           </a:xfrm>
           <a:prstGeom prst="rect">
             <a:avLst/>
@@ -22892,7 +25905,7 @@
         <p:spPr>
           <a:xfrm>
             <a:off x="3657600" y="0"/>
-            <a:ext cx="13320" cy="6852960"/>
+            <a:ext cx="12960" cy="6852600"/>
           </a:xfrm>
           <a:prstGeom prst="rect">
             <a:avLst/>
@@ -22952,7 +25965,7 @@
         <p:spPr>
           <a:xfrm>
             <a:off x="4572000" y="0"/>
-            <a:ext cx="13320" cy="6852960"/>
+            <a:ext cx="12960" cy="6852600"/>
           </a:xfrm>
           <a:prstGeom prst="rect">
             <a:avLst/>
@@ -23012,7 +26025,7 @@
         <p:spPr>
           <a:xfrm>
             <a:off x="5486400" y="0"/>
-            <a:ext cx="13320" cy="6852960"/>
+            <a:ext cx="12960" cy="6852600"/>
           </a:xfrm>
           <a:prstGeom prst="rect">
             <a:avLst/>
@@ -23072,7 +26085,7 @@
         <p:spPr>
           <a:xfrm>
             <a:off x="6400800" y="0"/>
-            <a:ext cx="13320" cy="6852960"/>
+            <a:ext cx="12960" cy="6852600"/>
           </a:xfrm>
           <a:prstGeom prst="rect">
             <a:avLst/>
@@ -23132,7 +26145,7 @@
         <p:spPr>
           <a:xfrm>
             <a:off x="7315200" y="0"/>
-            <a:ext cx="13320" cy="6852960"/>
+            <a:ext cx="12960" cy="6852600"/>
           </a:xfrm>
           <a:prstGeom prst="rect">
             <a:avLst/>
@@ -23192,7 +26205,7 @@
         <p:spPr>
           <a:xfrm>
             <a:off x="8229600" y="0"/>
-            <a:ext cx="13320" cy="6852960"/>
+            <a:ext cx="12960" cy="6852600"/>
           </a:xfrm>
           <a:prstGeom prst="rect">
             <a:avLst/>
@@ -23252,7 +26265,7 @@
         <p:spPr>
           <a:xfrm>
             <a:off x="9144000" y="0"/>
-            <a:ext cx="13320" cy="6852960"/>
+            <a:ext cx="12960" cy="6852600"/>
           </a:xfrm>
           <a:prstGeom prst="rect">
             <a:avLst/>
@@ -23312,7 +26325,7 @@
         <p:spPr>
           <a:xfrm>
             <a:off x="10058400" y="0"/>
-            <a:ext cx="13320" cy="6852960"/>
+            <a:ext cx="12960" cy="6852600"/>
           </a:xfrm>
           <a:prstGeom prst="rect">
             <a:avLst/>
@@ -23372,7 +26385,7 @@
         <p:spPr>
           <a:xfrm>
             <a:off x="10972800" y="0"/>
-            <a:ext cx="13320" cy="6852960"/>
+            <a:ext cx="12960" cy="6852600"/>
           </a:xfrm>
           <a:prstGeom prst="rect">
             <a:avLst/>
@@ -23432,7 +26445,7 @@
         <p:spPr>
           <a:xfrm>
             <a:off x="11887200" y="0"/>
-            <a:ext cx="13320" cy="6852960"/>
+            <a:ext cx="12960" cy="6852600"/>
           </a:xfrm>
           <a:prstGeom prst="rect">
             <a:avLst/>
@@ -23492,7 +26505,7 @@
         <p:spPr>
           <a:xfrm>
             <a:off x="0" y="0"/>
-            <a:ext cx="315000" cy="6852960"/>
+            <a:ext cx="314640" cy="6852600"/>
           </a:xfrm>
           <a:prstGeom prst="rect">
             <a:avLst/>
@@ -23552,7 +26565,7 @@
         <p:spPr>
           <a:xfrm>
             <a:off x="9875520" y="365760"/>
-            <a:ext cx="2006640" cy="497880"/>
+            <a:ext cx="2006280" cy="497520"/>
           </a:xfrm>
           <a:prstGeom prst="roundRect">
             <a:avLst>
@@ -23757,7 +26770,7 @@
         <p:spPr>
           <a:xfrm>
             <a:off x="987480" y="3182040"/>
-            <a:ext cx="3286800" cy="2738160"/>
+            <a:ext cx="3286440" cy="2737800"/>
           </a:xfrm>
           <a:prstGeom prst="roundRect">
             <a:avLst>
@@ -23819,7 +26832,7 @@
         <p:spPr>
           <a:xfrm>
             <a:off x="457200" y="2514600"/>
-            <a:ext cx="3744000" cy="4111920"/>
+            <a:ext cx="3743640" cy="4111560"/>
           </a:xfrm>
           <a:prstGeom prst="roundRect">
             <a:avLst>
@@ -24072,7 +27085,7 @@
         <p:spPr>
           <a:xfrm>
             <a:off x="4507920" y="3182040"/>
-            <a:ext cx="3286800" cy="2738160"/>
+            <a:ext cx="3286440" cy="2737800"/>
           </a:xfrm>
           <a:prstGeom prst="roundRect">
             <a:avLst>
@@ -24134,7 +27147,7 @@
         <p:spPr>
           <a:xfrm>
             <a:off x="4434840" y="2514600"/>
-            <a:ext cx="3286800" cy="3882240"/>
+            <a:ext cx="3286440" cy="3881880"/>
           </a:xfrm>
           <a:prstGeom prst="roundRect">
             <a:avLst>
@@ -24350,7 +27363,7 @@
         <p:spPr>
           <a:xfrm>
             <a:off x="8028360" y="3182040"/>
-            <a:ext cx="3286800" cy="2738160"/>
+            <a:ext cx="3286440" cy="2737800"/>
           </a:xfrm>
           <a:prstGeom prst="roundRect">
             <a:avLst>
@@ -24412,7 +27425,7 @@
         <p:spPr>
           <a:xfrm>
             <a:off x="8001000" y="2286000"/>
-            <a:ext cx="3655440" cy="4112640"/>
+            <a:ext cx="3655080" cy="4112280"/>
           </a:xfrm>
           <a:prstGeom prst="roundRect">
             <a:avLst>
@@ -25088,7 +28101,7 @@
         <p:spPr>
           <a:xfrm>
             <a:off x="0" y="0"/>
-            <a:ext cx="12184200" cy="6853320"/>
+            <a:ext cx="12183840" cy="6852960"/>
           </a:xfrm>
           <a:prstGeom prst="rect">
             <a:avLst/>
@@ -25148,7 +28161,7 @@
         <p:spPr>
           <a:xfrm>
             <a:off x="0" y="0"/>
-            <a:ext cx="13680" cy="6853320"/>
+            <a:ext cx="13320" cy="6852960"/>
           </a:xfrm>
           <a:prstGeom prst="rect">
             <a:avLst/>
@@ -25208,7 +28221,7 @@
         <p:spPr>
           <a:xfrm>
             <a:off x="914400" y="0"/>
-            <a:ext cx="13680" cy="6853320"/>
+            <a:ext cx="13320" cy="6852960"/>
           </a:xfrm>
           <a:prstGeom prst="rect">
             <a:avLst/>
@@ -25268,7 +28281,7 @@
         <p:spPr>
           <a:xfrm>
             <a:off x="1828800" y="0"/>
-            <a:ext cx="13680" cy="6853320"/>
+            <a:ext cx="13320" cy="6852960"/>
           </a:xfrm>
           <a:prstGeom prst="rect">
             <a:avLst/>
@@ -25328,7 +28341,7 @@
         <p:spPr>
           <a:xfrm>
             <a:off x="2743200" y="0"/>
-            <a:ext cx="13680" cy="6853320"/>
+            <a:ext cx="13320" cy="6852960"/>
           </a:xfrm>
           <a:prstGeom prst="rect">
             <a:avLst/>
@@ -25388,7 +28401,7 @@
         <p:spPr>
           <a:xfrm>
             <a:off x="3657600" y="0"/>
-            <a:ext cx="13680" cy="6853320"/>
+            <a:ext cx="13320" cy="6852960"/>
           </a:xfrm>
           <a:prstGeom prst="rect">
             <a:avLst/>
@@ -25448,7 +28461,7 @@
         <p:spPr>
           <a:xfrm>
             <a:off x="4572000" y="0"/>
-            <a:ext cx="13680" cy="6853320"/>
+            <a:ext cx="13320" cy="6852960"/>
           </a:xfrm>
           <a:prstGeom prst="rect">
             <a:avLst/>
@@ -25508,7 +28521,7 @@
         <p:spPr>
           <a:xfrm>
             <a:off x="5486400" y="0"/>
-            <a:ext cx="13680" cy="6853320"/>
+            <a:ext cx="13320" cy="6852960"/>
           </a:xfrm>
           <a:prstGeom prst="rect">
             <a:avLst/>
@@ -25568,7 +28581,7 @@
         <p:spPr>
           <a:xfrm>
             <a:off x="6400800" y="0"/>
-            <a:ext cx="13680" cy="6853320"/>
+            <a:ext cx="13320" cy="6852960"/>
           </a:xfrm>
           <a:prstGeom prst="rect">
             <a:avLst/>
@@ -25628,7 +28641,7 @@
         <p:spPr>
           <a:xfrm>
             <a:off x="7315200" y="0"/>
-            <a:ext cx="13680" cy="6853320"/>
+            <a:ext cx="13320" cy="6852960"/>
           </a:xfrm>
           <a:prstGeom prst="rect">
             <a:avLst/>
@@ -25688,7 +28701,7 @@
         <p:spPr>
           <a:xfrm>
             <a:off x="8229600" y="0"/>
-            <a:ext cx="13680" cy="6853320"/>
+            <a:ext cx="13320" cy="6852960"/>
           </a:xfrm>
           <a:prstGeom prst="rect">
             <a:avLst/>
@@ -25748,7 +28761,7 @@
         <p:spPr>
           <a:xfrm>
             <a:off x="9144000" y="0"/>
-            <a:ext cx="13680" cy="6853320"/>
+            <a:ext cx="13320" cy="6852960"/>
           </a:xfrm>
           <a:prstGeom prst="rect">
             <a:avLst/>
@@ -25808,7 +28821,7 @@
         <p:spPr>
           <a:xfrm>
             <a:off x="10058400" y="0"/>
-            <a:ext cx="13680" cy="6853320"/>
+            <a:ext cx="13320" cy="6852960"/>
           </a:xfrm>
           <a:prstGeom prst="rect">
             <a:avLst/>
@@ -25868,7 +28881,7 @@
         <p:spPr>
           <a:xfrm>
             <a:off x="10972800" y="0"/>
-            <a:ext cx="13680" cy="6853320"/>
+            <a:ext cx="13320" cy="6852960"/>
           </a:xfrm>
           <a:prstGeom prst="rect">
             <a:avLst/>
@@ -25928,7 +28941,7 @@
         <p:spPr>
           <a:xfrm>
             <a:off x="11887200" y="0"/>
-            <a:ext cx="13680" cy="6853320"/>
+            <a:ext cx="13320" cy="6852960"/>
           </a:xfrm>
           <a:prstGeom prst="rect">
             <a:avLst/>
@@ -25988,7 +29001,7 @@
         <p:spPr>
           <a:xfrm>
             <a:off x="0" y="0"/>
-            <a:ext cx="315360" cy="6853320"/>
+            <a:ext cx="315000" cy="6852960"/>
           </a:xfrm>
           <a:prstGeom prst="rect">
             <a:avLst/>
@@ -26048,7 +29061,7 @@
         <p:spPr>
           <a:xfrm>
             <a:off x="9875520" y="365760"/>
-            <a:ext cx="2007000" cy="498240"/>
+            <a:ext cx="2006640" cy="497880"/>
           </a:xfrm>
           <a:prstGeom prst="roundRect">
             <a:avLst>
@@ -26286,7 +29299,7 @@
         <p:spPr>
           <a:xfrm>
             <a:off x="987480" y="3182040"/>
-            <a:ext cx="3287160" cy="2738520"/>
+            <a:ext cx="3286800" cy="2738160"/>
           </a:xfrm>
           <a:prstGeom prst="roundRect">
             <a:avLst>
@@ -26348,7 +29361,7 @@
         <p:spPr>
           <a:xfrm>
             <a:off x="457200" y="2743200"/>
-            <a:ext cx="3884400" cy="3883680"/>
+            <a:ext cx="3884040" cy="3883320"/>
           </a:xfrm>
           <a:prstGeom prst="roundRect">
             <a:avLst>
@@ -26662,7 +29675,7 @@
         <p:spPr>
           <a:xfrm>
             <a:off x="4507920" y="3182040"/>
-            <a:ext cx="3287160" cy="2738520"/>
+            <a:ext cx="3286800" cy="2738160"/>
           </a:xfrm>
           <a:prstGeom prst="roundRect">
             <a:avLst>
@@ -26724,7 +29737,7 @@
         <p:spPr>
           <a:xfrm>
             <a:off x="4572000" y="2743200"/>
-            <a:ext cx="3427200" cy="3655800"/>
+            <a:ext cx="3426840" cy="3655440"/>
           </a:xfrm>
           <a:prstGeom prst="roundRect">
             <a:avLst>
@@ -27299,7 +30312,7 @@
         <p:spPr>
           <a:xfrm>
             <a:off x="8028360" y="3182040"/>
-            <a:ext cx="3287160" cy="2738520"/>
+            <a:ext cx="3286800" cy="2738160"/>
           </a:xfrm>
           <a:prstGeom prst="roundRect">
             <a:avLst>
@@ -27361,7 +30374,7 @@
         <p:spPr>
           <a:xfrm>
             <a:off x="8229600" y="2514600"/>
-            <a:ext cx="3655800" cy="4113000"/>
+            <a:ext cx="3655440" cy="4112640"/>
           </a:xfrm>
           <a:prstGeom prst="roundRect">
             <a:avLst>
@@ -28353,7 +31366,7 @@
         <p:spPr>
           <a:xfrm>
             <a:off x="0" y="0"/>
-            <a:ext cx="12183840" cy="6852960"/>
+            <a:ext cx="12183480" cy="6852600"/>
           </a:xfrm>
           <a:prstGeom prst="rect">
             <a:avLst/>
@@ -28413,7 +31426,7 @@
         <p:spPr>
           <a:xfrm>
             <a:off x="0" y="0"/>
-            <a:ext cx="13320" cy="6852960"/>
+            <a:ext cx="12960" cy="6852600"/>
           </a:xfrm>
           <a:prstGeom prst="rect">
             <a:avLst/>
@@ -28473,7 +31486,7 @@
         <p:spPr>
           <a:xfrm>
             <a:off x="914400" y="0"/>
-            <a:ext cx="13320" cy="6852960"/>
+            <a:ext cx="12960" cy="6852600"/>
           </a:xfrm>
           <a:prstGeom prst="rect">
             <a:avLst/>
@@ -28533,7 +31546,7 @@
         <p:spPr>
           <a:xfrm>
             <a:off x="1828800" y="0"/>
-            <a:ext cx="13320" cy="6852960"/>
+            <a:ext cx="12960" cy="6852600"/>
           </a:xfrm>
           <a:prstGeom prst="rect">
             <a:avLst/>
@@ -28593,7 +31606,7 @@
         <p:spPr>
           <a:xfrm>
             <a:off x="2743200" y="0"/>
-            <a:ext cx="13320" cy="6852960"/>
+            <a:ext cx="12960" cy="6852600"/>
           </a:xfrm>
           <a:prstGeom prst="rect">
             <a:avLst/>
@@ -28653,7 +31666,7 @@
         <p:spPr>
           <a:xfrm>
             <a:off x="3657600" y="0"/>
-            <a:ext cx="13320" cy="6852960"/>
+            <a:ext cx="12960" cy="6852600"/>
           </a:xfrm>
           <a:prstGeom prst="rect">
             <a:avLst/>
@@ -28713,7 +31726,7 @@
         <p:spPr>
           <a:xfrm>
             <a:off x="4572000" y="0"/>
-            <a:ext cx="13320" cy="6852960"/>
+            <a:ext cx="12960" cy="6852600"/>
           </a:xfrm>
           <a:prstGeom prst="rect">
             <a:avLst/>
@@ -28773,7 +31786,7 @@
         <p:spPr>
           <a:xfrm>
             <a:off x="5486400" y="0"/>
-            <a:ext cx="13320" cy="6852960"/>
+            <a:ext cx="12960" cy="6852600"/>
           </a:xfrm>
           <a:prstGeom prst="rect">
             <a:avLst/>
@@ -28833,7 +31846,7 @@
         <p:spPr>
           <a:xfrm>
             <a:off x="6400800" y="0"/>
-            <a:ext cx="13320" cy="6852960"/>
+            <a:ext cx="12960" cy="6852600"/>
           </a:xfrm>
           <a:prstGeom prst="rect">
             <a:avLst/>
@@ -28893,7 +31906,7 @@
         <p:spPr>
           <a:xfrm>
             <a:off x="7315200" y="0"/>
-            <a:ext cx="13320" cy="6852960"/>
+            <a:ext cx="12960" cy="6852600"/>
           </a:xfrm>
           <a:prstGeom prst="rect">
             <a:avLst/>
@@ -28953,7 +31966,7 @@
         <p:spPr>
           <a:xfrm>
             <a:off x="8229600" y="0"/>
-            <a:ext cx="13320" cy="6852960"/>
+            <a:ext cx="12960" cy="6852600"/>
           </a:xfrm>
           <a:prstGeom prst="rect">
             <a:avLst/>
@@ -29013,7 +32026,7 @@
         <p:spPr>
           <a:xfrm>
             <a:off x="9144000" y="0"/>
-            <a:ext cx="13320" cy="6852960"/>
+            <a:ext cx="12960" cy="6852600"/>
           </a:xfrm>
           <a:prstGeom prst="rect">
             <a:avLst/>
@@ -29073,7 +32086,7 @@
         <p:spPr>
           <a:xfrm>
             <a:off x="10058400" y="0"/>
-            <a:ext cx="13320" cy="6852960"/>
+            <a:ext cx="12960" cy="6852600"/>
           </a:xfrm>
           <a:prstGeom prst="rect">
             <a:avLst/>
@@ -29133,7 +32146,7 @@
         <p:spPr>
           <a:xfrm>
             <a:off x="10972800" y="0"/>
-            <a:ext cx="13320" cy="6852960"/>
+            <a:ext cx="12960" cy="6852600"/>
           </a:xfrm>
           <a:prstGeom prst="rect">
             <a:avLst/>
@@ -29193,7 +32206,7 @@
         <p:spPr>
           <a:xfrm>
             <a:off x="11887200" y="0"/>
-            <a:ext cx="13320" cy="6852960"/>
+            <a:ext cx="12960" cy="6852600"/>
           </a:xfrm>
           <a:prstGeom prst="rect">
             <a:avLst/>
@@ -29253,7 +32266,7 @@
         <p:spPr>
           <a:xfrm>
             <a:off x="0" y="0"/>
-            <a:ext cx="315000" cy="6852960"/>
+            <a:ext cx="314640" cy="6852600"/>
           </a:xfrm>
           <a:prstGeom prst="rect">
             <a:avLst/>
@@ -29313,7 +32326,7 @@
         <p:spPr>
           <a:xfrm>
             <a:off x="9875520" y="365760"/>
-            <a:ext cx="2006640" cy="497880"/>
+            <a:ext cx="2006280" cy="497520"/>
           </a:xfrm>
           <a:prstGeom prst="roundRect">
             <a:avLst>
@@ -29541,7 +32554,7 @@
         <p:spPr>
           <a:xfrm>
             <a:off x="987480" y="3182040"/>
-            <a:ext cx="3286800" cy="2738160"/>
+            <a:ext cx="3286440" cy="2737800"/>
           </a:xfrm>
           <a:prstGeom prst="roundRect">
             <a:avLst>
@@ -29603,7 +32616,7 @@
         <p:spPr>
           <a:xfrm>
             <a:off x="914400" y="2743200"/>
-            <a:ext cx="3286800" cy="3655800"/>
+            <a:ext cx="3286440" cy="3655440"/>
           </a:xfrm>
           <a:prstGeom prst="roundRect">
             <a:avLst>
@@ -29934,7 +32947,7 @@
         <p:spPr>
           <a:xfrm>
             <a:off x="4507920" y="3182040"/>
-            <a:ext cx="3286800" cy="2738160"/>
+            <a:ext cx="3286440" cy="2737800"/>
           </a:xfrm>
           <a:prstGeom prst="roundRect">
             <a:avLst>
@@ -29996,7 +33009,7 @@
         <p:spPr>
           <a:xfrm>
             <a:off x="4434840" y="2743200"/>
-            <a:ext cx="3286800" cy="3655800"/>
+            <a:ext cx="3286440" cy="3655440"/>
           </a:xfrm>
           <a:prstGeom prst="roundRect">
             <a:avLst>
@@ -30403,7 +33416,7 @@
         <p:spPr>
           <a:xfrm>
             <a:off x="8028360" y="3182040"/>
-            <a:ext cx="3286800" cy="2738160"/>
+            <a:ext cx="3286440" cy="2737800"/>
           </a:xfrm>
           <a:prstGeom prst="roundRect">
             <a:avLst>
@@ -30465,7 +33478,7 @@
         <p:spPr>
           <a:xfrm>
             <a:off x="7955280" y="2743200"/>
-            <a:ext cx="3699360" cy="3654360"/>
+            <a:ext cx="3699000" cy="3654000"/>
           </a:xfrm>
           <a:prstGeom prst="roundRect">
             <a:avLst>
@@ -31207,7 +34220,7 @@
         <p:spPr>
           <a:xfrm>
             <a:off x="0" y="0"/>
-            <a:ext cx="12183480" cy="6852600"/>
+            <a:ext cx="12183120" cy="6852240"/>
           </a:xfrm>
           <a:prstGeom prst="rect">
             <a:avLst/>
@@ -31267,7 +34280,7 @@
         <p:spPr>
           <a:xfrm>
             <a:off x="0" y="0"/>
-            <a:ext cx="12960" cy="6852600"/>
+            <a:ext cx="12600" cy="6852240"/>
           </a:xfrm>
           <a:prstGeom prst="rect">
             <a:avLst/>
@@ -31327,7 +34340,7 @@
         <p:spPr>
           <a:xfrm>
             <a:off x="914400" y="0"/>
-            <a:ext cx="12960" cy="6852600"/>
+            <a:ext cx="12600" cy="6852240"/>
           </a:xfrm>
           <a:prstGeom prst="rect">
             <a:avLst/>
@@ -31387,7 +34400,7 @@
         <p:spPr>
           <a:xfrm>
             <a:off x="1828800" y="0"/>
-            <a:ext cx="12960" cy="6852600"/>
+            <a:ext cx="12600" cy="6852240"/>
           </a:xfrm>
           <a:prstGeom prst="rect">
             <a:avLst/>
@@ -31447,7 +34460,7 @@
         <p:spPr>
           <a:xfrm>
             <a:off x="2743200" y="0"/>
-            <a:ext cx="12960" cy="6852600"/>
+            <a:ext cx="12600" cy="6852240"/>
           </a:xfrm>
           <a:prstGeom prst="rect">
             <a:avLst/>
@@ -31507,7 +34520,7 @@
         <p:spPr>
           <a:xfrm>
             <a:off x="3657600" y="0"/>
-            <a:ext cx="12960" cy="6852600"/>
+            <a:ext cx="12600" cy="6852240"/>
           </a:xfrm>
           <a:prstGeom prst="rect">
             <a:avLst/>
@@ -31567,7 +34580,7 @@
         <p:spPr>
           <a:xfrm>
             <a:off x="4572000" y="0"/>
-            <a:ext cx="12960" cy="6852600"/>
+            <a:ext cx="12600" cy="6852240"/>
           </a:xfrm>
           <a:prstGeom prst="rect">
             <a:avLst/>
@@ -31627,7 +34640,7 @@
         <p:spPr>
           <a:xfrm>
             <a:off x="5486400" y="0"/>
-            <a:ext cx="12960" cy="6852600"/>
+            <a:ext cx="12600" cy="6852240"/>
           </a:xfrm>
           <a:prstGeom prst="rect">
             <a:avLst/>
@@ -31687,7 +34700,7 @@
         <p:spPr>
           <a:xfrm>
             <a:off x="6400800" y="0"/>
-            <a:ext cx="12960" cy="6852600"/>
+            <a:ext cx="12600" cy="6852240"/>
           </a:xfrm>
           <a:prstGeom prst="rect">
             <a:avLst/>
@@ -31747,7 +34760,7 @@
         <p:spPr>
           <a:xfrm>
             <a:off x="7315200" y="0"/>
-            <a:ext cx="12960" cy="6852600"/>
+            <a:ext cx="12600" cy="6852240"/>
           </a:xfrm>
           <a:prstGeom prst="rect">
             <a:avLst/>
@@ -31807,7 +34820,7 @@
         <p:spPr>
           <a:xfrm>
             <a:off x="8229600" y="0"/>
-            <a:ext cx="12960" cy="6852600"/>
+            <a:ext cx="12600" cy="6852240"/>
           </a:xfrm>
           <a:prstGeom prst="rect">
             <a:avLst/>
@@ -31867,7 +34880,7 @@
         <p:spPr>
           <a:xfrm>
             <a:off x="9144000" y="0"/>
-            <a:ext cx="12960" cy="6852600"/>
+            <a:ext cx="12600" cy="6852240"/>
           </a:xfrm>
           <a:prstGeom prst="rect">
             <a:avLst/>
@@ -31927,7 +34940,7 @@
         <p:spPr>
           <a:xfrm>
             <a:off x="10058400" y="0"/>
-            <a:ext cx="12960" cy="6852600"/>
+            <a:ext cx="12600" cy="6852240"/>
           </a:xfrm>
           <a:prstGeom prst="rect">
             <a:avLst/>
@@ -31987,7 +35000,7 @@
         <p:spPr>
           <a:xfrm>
             <a:off x="10972800" y="0"/>
-            <a:ext cx="12960" cy="6852600"/>
+            <a:ext cx="12600" cy="6852240"/>
           </a:xfrm>
           <a:prstGeom prst="rect">
             <a:avLst/>
@@ -32047,7 +35060,7 @@
         <p:spPr>
           <a:xfrm>
             <a:off x="11887200" y="0"/>
-            <a:ext cx="12960" cy="6852600"/>
+            <a:ext cx="12600" cy="6852240"/>
           </a:xfrm>
           <a:prstGeom prst="rect">
             <a:avLst/>
@@ -32107,7 +35120,7 @@
         <p:spPr>
           <a:xfrm>
             <a:off x="0" y="0"/>
-            <a:ext cx="314640" cy="6852600"/>
+            <a:ext cx="314280" cy="6852240"/>
           </a:xfrm>
           <a:prstGeom prst="rect">
             <a:avLst/>
@@ -32167,7 +35180,7 @@
         <p:spPr>
           <a:xfrm>
             <a:off x="9875520" y="365760"/>
-            <a:ext cx="2006280" cy="497520"/>
+            <a:ext cx="2005920" cy="497160"/>
           </a:xfrm>
           <a:prstGeom prst="roundRect">
             <a:avLst>
@@ -32241,7 +35254,7 @@
         <p:spPr>
           <a:xfrm>
             <a:off x="2699280" y="914400"/>
-            <a:ext cx="5568840" cy="1186920"/>
+            <a:ext cx="5568480" cy="1186920"/>
           </a:xfrm>
           <a:prstGeom prst="rect">
             <a:avLst/>
@@ -32308,7 +35321,7 @@
         <p:spPr>
           <a:xfrm>
             <a:off x="2148480" y="1694880"/>
-            <a:ext cx="7271280" cy="819720"/>
+            <a:ext cx="7270920" cy="819720"/>
           </a:xfrm>
           <a:prstGeom prst="rect">
             <a:avLst/>
@@ -32408,7 +35421,7 @@
         <p:spPr>
           <a:xfrm>
             <a:off x="987480" y="3182040"/>
-            <a:ext cx="3286440" cy="2737800"/>
+            <a:ext cx="3286080" cy="2737440"/>
           </a:xfrm>
           <a:prstGeom prst="roundRect">
             <a:avLst>
@@ -32470,7 +35483,7 @@
         <p:spPr>
           <a:xfrm>
             <a:off x="914400" y="3108960"/>
-            <a:ext cx="3286440" cy="3289680"/>
+            <a:ext cx="3286080" cy="3289320"/>
           </a:xfrm>
           <a:prstGeom prst="roundRect">
             <a:avLst>
@@ -32736,7 +35749,7 @@
         <p:spPr>
           <a:xfrm>
             <a:off x="4507920" y="3182040"/>
-            <a:ext cx="3286440" cy="2737800"/>
+            <a:ext cx="3286080" cy="2737440"/>
           </a:xfrm>
           <a:prstGeom prst="roundRect">
             <a:avLst>
@@ -32798,7 +35811,7 @@
         <p:spPr>
           <a:xfrm>
             <a:off x="4434840" y="3200400"/>
-            <a:ext cx="3286440" cy="3198240"/>
+            <a:ext cx="3286080" cy="3197880"/>
           </a:xfrm>
           <a:prstGeom prst="roundRect">
             <a:avLst>
@@ -33172,7 +36185,7 @@
         <p:spPr>
           <a:xfrm>
             <a:off x="8028360" y="3182040"/>
-            <a:ext cx="3286440" cy="2737800"/>
+            <a:ext cx="3286080" cy="2737440"/>
           </a:xfrm>
           <a:prstGeom prst="roundRect">
             <a:avLst>
@@ -33234,7 +36247,7 @@
         <p:spPr>
           <a:xfrm>
             <a:off x="8003880" y="2971800"/>
-            <a:ext cx="3424680" cy="3425400"/>
+            <a:ext cx="3424320" cy="3425040"/>
           </a:xfrm>
           <a:prstGeom prst="roundRect">
             <a:avLst>

--- a/Java/Java #4/EN/Java #4.pptx
+++ b/Java/Java #4/EN/Java #4.pptx
@@ -18,6 +18,7 @@
     <p:sldId id="266" r:id="rId13"/>
     <p:sldId id="267" r:id="rId14"/>
     <p:sldId id="268" r:id="rId15"/>
+    <p:sldId id="269" r:id="rId16"/>
   </p:sldIdLst>
   <p:sldSz cx="9144000" cy="6858000"/>
   <p:notesSz cx="7772400" cy="10058400"/>
@@ -75,7 +76,7 @@
         <p:txBody>
           <a:bodyPr/>
           <a:p>
-            <a:fld id="{AB9A5327-AEB1-402C-99F7-E9247B9703FC}" type="slidenum">
+            <a:fld id="{410C2A3F-A0C4-4CDF-8293-C681F571DEAA}" type="slidenum">
               <a:t>&lt;#&gt;</a:t>
             </a:fld>
           </a:p>
@@ -284,7 +285,7 @@
         <p:txBody>
           <a:bodyPr/>
           <a:p>
-            <a:fld id="{6F7E379A-6E81-4E62-8473-4D7BBC24F334}" type="slidenum">
+            <a:fld id="{A9D77AE6-180E-4AA9-8077-BD56A6FA258D}" type="slidenum">
               <a:t>&lt;#&gt;</a:t>
             </a:fld>
           </a:p>
@@ -579,7 +580,7 @@
         <p:txBody>
           <a:bodyPr/>
           <a:p>
-            <a:fld id="{C1885820-6317-4550-BD3E-96C9A87B04FC}" type="slidenum">
+            <a:fld id="{5288E102-4514-4553-ABCA-8BFD333C3E1D}" type="slidenum">
               <a:t>&lt;#&gt;</a:t>
             </a:fld>
           </a:p>
@@ -960,7 +961,7 @@
         <p:txBody>
           <a:bodyPr/>
           <a:p>
-            <a:fld id="{67699285-2C77-474B-820F-B92AF960A0F3}" type="slidenum">
+            <a:fld id="{3FCAD035-09E4-41A9-A8E6-3A3F59D7A710}" type="slidenum">
               <a:t>&lt;#&gt;</a:t>
             </a:fld>
           </a:p>
@@ -1123,7 +1124,7 @@
         <p:txBody>
           <a:bodyPr/>
           <a:p>
-            <a:fld id="{C4BC5BFA-D948-4486-ACDB-521999AADBCB}" type="slidenum">
+            <a:fld id="{35B127E2-478F-4FEE-894E-1ED0ACA634FB}" type="slidenum">
               <a:t>&lt;#&gt;</a:t>
             </a:fld>
           </a:p>
@@ -1289,7 +1290,7 @@
         <p:txBody>
           <a:bodyPr/>
           <a:p>
-            <a:fld id="{CA375110-56E4-42EE-B0DA-87717210ACB8}" type="slidenum">
+            <a:fld id="{9536E41E-1F5A-4027-B462-E02F3268FF8B}" type="slidenum">
               <a:t>&lt;#&gt;</a:t>
             </a:fld>
           </a:p>
@@ -1498,7 +1499,7 @@
         <p:txBody>
           <a:bodyPr/>
           <a:p>
-            <a:fld id="{C32CFCA6-E17E-4D79-BE49-BF9D497942D0}" type="slidenum">
+            <a:fld id="{008D530A-2AE9-4132-9BD7-DB42E18F3738}" type="slidenum">
               <a:t>&lt;#&gt;</a:t>
             </a:fld>
           </a:p>
@@ -1621,7 +1622,7 @@
         <p:txBody>
           <a:bodyPr/>
           <a:p>
-            <a:fld id="{2C7D766E-5D0E-4512-AD8F-27555D7EC485}" type="slidenum">
+            <a:fld id="{1337ED58-122D-4D1B-9070-C467CA8C9C25}" type="slidenum">
               <a:t>&lt;#&gt;</a:t>
             </a:fld>
           </a:p>
@@ -1742,7 +1743,7 @@
         <p:txBody>
           <a:bodyPr/>
           <a:p>
-            <a:fld id="{25102D93-59EF-4BBB-A56C-F8822F5275A5}" type="slidenum">
+            <a:fld id="{FC29B60B-2E90-4F9E-B574-DF03C45C1256}" type="slidenum">
               <a:t>&lt;#&gt;</a:t>
             </a:fld>
           </a:p>
@@ -1994,7 +1995,7 @@
         <p:txBody>
           <a:bodyPr/>
           <a:p>
-            <a:fld id="{25582E87-7D52-4574-95E6-8A843464140D}" type="slidenum">
+            <a:fld id="{21667F4F-BE54-4418-B87A-B70CBC67A27C}" type="slidenum">
               <a:t>&lt;#&gt;</a:t>
             </a:fld>
           </a:p>
@@ -2246,7 +2247,7 @@
         <p:txBody>
           <a:bodyPr/>
           <a:p>
-            <a:fld id="{D8C02973-2C88-4F7A-AE55-C410468B81C7}" type="slidenum">
+            <a:fld id="{BB35F09D-A693-4ED2-ABF1-B3468D793D0B}" type="slidenum">
               <a:t>&lt;#&gt;</a:t>
             </a:fld>
           </a:p>
@@ -2498,7 +2499,7 @@
         <p:txBody>
           <a:bodyPr/>
           <a:p>
-            <a:fld id="{E581A8C2-1A5E-4225-8DD7-95C90E63F5B5}" type="slidenum">
+            <a:fld id="{1948CD04-DEF7-42BF-99BD-F79F8358F13D}" type="slidenum">
               <a:t>&lt;#&gt;</a:t>
             </a:fld>
           </a:p>
@@ -2567,7 +2568,7 @@
         <p:spPr>
           <a:xfrm>
             <a:off x="3124080" y="6356520"/>
-            <a:ext cx="2890080" cy="359640"/>
+            <a:ext cx="2889720" cy="359280"/>
           </a:xfrm>
           <a:prstGeom prst="rect">
             <a:avLst/>
@@ -2639,7 +2640,7 @@
         <p:spPr>
           <a:xfrm>
             <a:off x="6553080" y="6356520"/>
-            <a:ext cx="2128320" cy="359640"/>
+            <a:ext cx="2127960" cy="359280"/>
           </a:xfrm>
           <a:prstGeom prst="rect">
             <a:avLst/>
@@ -2680,7 +2681,7 @@
                 <a:tab algn="l" pos="0"/>
               </a:tabLst>
             </a:pPr>
-            <a:fld id="{D31B7203-9D8D-4C1B-A0CD-EE9F05F44EB9}" type="slidenum">
+            <a:fld id="{C2966FB2-BD10-4907-9BF6-0F564A9E17D1}" type="slidenum">
               <a:rPr b="0" lang="en-US" sz="1200" spc="-1" strike="noStrike">
                 <a:solidFill>
                   <a:srgbClr val="8b8b8b"/>
@@ -2711,7 +2712,7 @@
         <p:spPr>
           <a:xfrm>
             <a:off x="457200" y="6356520"/>
-            <a:ext cx="2128320" cy="359640"/>
+            <a:ext cx="2127960" cy="359280"/>
           </a:xfrm>
           <a:prstGeom prst="rect">
             <a:avLst/>
@@ -3078,7 +3079,7 @@
         <p:spPr>
           <a:xfrm>
             <a:off x="0" y="0"/>
-            <a:ext cx="12183480" cy="6852600"/>
+            <a:ext cx="12183120" cy="6852240"/>
           </a:xfrm>
           <a:prstGeom prst="rect">
             <a:avLst/>
@@ -3138,7 +3139,7 @@
         <p:spPr>
           <a:xfrm>
             <a:off x="0" y="0"/>
-            <a:ext cx="12960" cy="6852600"/>
+            <a:ext cx="12600" cy="6852240"/>
           </a:xfrm>
           <a:prstGeom prst="rect">
             <a:avLst/>
@@ -3198,7 +3199,7 @@
         <p:spPr>
           <a:xfrm>
             <a:off x="914400" y="0"/>
-            <a:ext cx="12960" cy="6852600"/>
+            <a:ext cx="12600" cy="6852240"/>
           </a:xfrm>
           <a:prstGeom prst="rect">
             <a:avLst/>
@@ -3258,7 +3259,7 @@
         <p:spPr>
           <a:xfrm>
             <a:off x="1828800" y="0"/>
-            <a:ext cx="12960" cy="6852600"/>
+            <a:ext cx="12600" cy="6852240"/>
           </a:xfrm>
           <a:prstGeom prst="rect">
             <a:avLst/>
@@ -3318,7 +3319,7 @@
         <p:spPr>
           <a:xfrm>
             <a:off x="2743200" y="0"/>
-            <a:ext cx="12960" cy="6852600"/>
+            <a:ext cx="12600" cy="6852240"/>
           </a:xfrm>
           <a:prstGeom prst="rect">
             <a:avLst/>
@@ -3378,7 +3379,7 @@
         <p:spPr>
           <a:xfrm>
             <a:off x="3657600" y="0"/>
-            <a:ext cx="12960" cy="6852600"/>
+            <a:ext cx="12600" cy="6852240"/>
           </a:xfrm>
           <a:prstGeom prst="rect">
             <a:avLst/>
@@ -3438,7 +3439,7 @@
         <p:spPr>
           <a:xfrm>
             <a:off x="4572000" y="0"/>
-            <a:ext cx="12960" cy="6852600"/>
+            <a:ext cx="12600" cy="6852240"/>
           </a:xfrm>
           <a:prstGeom prst="rect">
             <a:avLst/>
@@ -3498,7 +3499,7 @@
         <p:spPr>
           <a:xfrm>
             <a:off x="5486400" y="0"/>
-            <a:ext cx="12960" cy="6852600"/>
+            <a:ext cx="12600" cy="6852240"/>
           </a:xfrm>
           <a:prstGeom prst="rect">
             <a:avLst/>
@@ -3558,7 +3559,7 @@
         <p:spPr>
           <a:xfrm>
             <a:off x="6400800" y="0"/>
-            <a:ext cx="12960" cy="6852600"/>
+            <a:ext cx="12600" cy="6852240"/>
           </a:xfrm>
           <a:prstGeom prst="rect">
             <a:avLst/>
@@ -3618,7 +3619,7 @@
         <p:spPr>
           <a:xfrm>
             <a:off x="7315200" y="0"/>
-            <a:ext cx="12960" cy="6852600"/>
+            <a:ext cx="12600" cy="6852240"/>
           </a:xfrm>
           <a:prstGeom prst="rect">
             <a:avLst/>
@@ -3678,7 +3679,7 @@
         <p:spPr>
           <a:xfrm>
             <a:off x="8229600" y="0"/>
-            <a:ext cx="12960" cy="6852600"/>
+            <a:ext cx="12600" cy="6852240"/>
           </a:xfrm>
           <a:prstGeom prst="rect">
             <a:avLst/>
@@ -3738,7 +3739,7 @@
         <p:spPr>
           <a:xfrm>
             <a:off x="9144000" y="0"/>
-            <a:ext cx="12960" cy="6852600"/>
+            <a:ext cx="12600" cy="6852240"/>
           </a:xfrm>
           <a:prstGeom prst="rect">
             <a:avLst/>
@@ -3798,7 +3799,7 @@
         <p:spPr>
           <a:xfrm>
             <a:off x="10058400" y="0"/>
-            <a:ext cx="12960" cy="6852600"/>
+            <a:ext cx="12600" cy="6852240"/>
           </a:xfrm>
           <a:prstGeom prst="rect">
             <a:avLst/>
@@ -3858,7 +3859,7 @@
         <p:spPr>
           <a:xfrm>
             <a:off x="10972800" y="0"/>
-            <a:ext cx="12960" cy="6852600"/>
+            <a:ext cx="12600" cy="6852240"/>
           </a:xfrm>
           <a:prstGeom prst="rect">
             <a:avLst/>
@@ -3918,7 +3919,7 @@
         <p:spPr>
           <a:xfrm>
             <a:off x="11887200" y="0"/>
-            <a:ext cx="12960" cy="6852600"/>
+            <a:ext cx="12600" cy="6852240"/>
           </a:xfrm>
           <a:prstGeom prst="rect">
             <a:avLst/>
@@ -3978,7 +3979,7 @@
         <p:spPr>
           <a:xfrm>
             <a:off x="0" y="0"/>
-            <a:ext cx="314640" cy="6852600"/>
+            <a:ext cx="314280" cy="6852240"/>
           </a:xfrm>
           <a:prstGeom prst="rect">
             <a:avLst/>
@@ -4038,7 +4039,7 @@
         <p:spPr>
           <a:xfrm>
             <a:off x="9875520" y="365760"/>
-            <a:ext cx="2006280" cy="497520"/>
+            <a:ext cx="2005920" cy="497160"/>
           </a:xfrm>
           <a:prstGeom prst="roundRect">
             <a:avLst>
@@ -4266,7 +4267,7 @@
         <p:spPr>
           <a:xfrm>
             <a:off x="987480" y="3182040"/>
-            <a:ext cx="3286440" cy="2737800"/>
+            <a:ext cx="3286080" cy="2737440"/>
           </a:xfrm>
           <a:prstGeom prst="roundRect">
             <a:avLst>
@@ -4328,7 +4329,7 @@
         <p:spPr>
           <a:xfrm>
             <a:off x="914400" y="3108960"/>
-            <a:ext cx="3286440" cy="2737800"/>
+            <a:ext cx="3286080" cy="2737440"/>
           </a:xfrm>
           <a:prstGeom prst="roundRect">
             <a:avLst>
@@ -4462,7 +4463,7 @@
         <p:spPr>
           <a:xfrm>
             <a:off x="4507920" y="3182040"/>
-            <a:ext cx="3286440" cy="2737800"/>
+            <a:ext cx="3286080" cy="2737440"/>
           </a:xfrm>
           <a:prstGeom prst="roundRect">
             <a:avLst>
@@ -4524,7 +4525,7 @@
         <p:spPr>
           <a:xfrm>
             <a:off x="4434840" y="3108960"/>
-            <a:ext cx="3286440" cy="2737800"/>
+            <a:ext cx="3286080" cy="2737440"/>
           </a:xfrm>
           <a:prstGeom prst="roundRect">
             <a:avLst>
@@ -4782,7 +4783,7 @@
         <p:spPr>
           <a:xfrm>
             <a:off x="8028360" y="3182040"/>
-            <a:ext cx="3286440" cy="2737800"/>
+            <a:ext cx="3286080" cy="2737440"/>
           </a:xfrm>
           <a:prstGeom prst="roundRect">
             <a:avLst>
@@ -4844,7 +4845,7 @@
         <p:spPr>
           <a:xfrm>
             <a:off x="7955280" y="2971800"/>
-            <a:ext cx="3927600" cy="3653280"/>
+            <a:ext cx="3927240" cy="3652920"/>
           </a:xfrm>
           <a:prstGeom prst="roundRect">
             <a:avLst>
@@ -5355,7 +5356,7 @@
         <p:spPr>
           <a:xfrm>
             <a:off x="0" y="0"/>
-            <a:ext cx="12183480" cy="6852600"/>
+            <a:ext cx="12183120" cy="6852240"/>
           </a:xfrm>
           <a:prstGeom prst="rect">
             <a:avLst/>
@@ -5415,7 +5416,7 @@
         <p:spPr>
           <a:xfrm>
             <a:off x="0" y="0"/>
-            <a:ext cx="12960" cy="6852600"/>
+            <a:ext cx="12600" cy="6852240"/>
           </a:xfrm>
           <a:prstGeom prst="rect">
             <a:avLst/>
@@ -5475,7 +5476,7 @@
         <p:spPr>
           <a:xfrm>
             <a:off x="914400" y="0"/>
-            <a:ext cx="12960" cy="6852600"/>
+            <a:ext cx="12600" cy="6852240"/>
           </a:xfrm>
           <a:prstGeom prst="rect">
             <a:avLst/>
@@ -5535,7 +5536,7 @@
         <p:spPr>
           <a:xfrm>
             <a:off x="1828800" y="0"/>
-            <a:ext cx="12960" cy="6852600"/>
+            <a:ext cx="12600" cy="6852240"/>
           </a:xfrm>
           <a:prstGeom prst="rect">
             <a:avLst/>
@@ -5595,7 +5596,7 @@
         <p:spPr>
           <a:xfrm>
             <a:off x="2743200" y="0"/>
-            <a:ext cx="12960" cy="6852600"/>
+            <a:ext cx="12600" cy="6852240"/>
           </a:xfrm>
           <a:prstGeom prst="rect">
             <a:avLst/>
@@ -5655,7 +5656,7 @@
         <p:spPr>
           <a:xfrm>
             <a:off x="3657600" y="0"/>
-            <a:ext cx="12960" cy="6852600"/>
+            <a:ext cx="12600" cy="6852240"/>
           </a:xfrm>
           <a:prstGeom prst="rect">
             <a:avLst/>
@@ -5715,7 +5716,7 @@
         <p:spPr>
           <a:xfrm>
             <a:off x="4572000" y="0"/>
-            <a:ext cx="12960" cy="6852600"/>
+            <a:ext cx="12600" cy="6852240"/>
           </a:xfrm>
           <a:prstGeom prst="rect">
             <a:avLst/>
@@ -5775,7 +5776,7 @@
         <p:spPr>
           <a:xfrm>
             <a:off x="5486400" y="0"/>
-            <a:ext cx="12960" cy="6852600"/>
+            <a:ext cx="12600" cy="6852240"/>
           </a:xfrm>
           <a:prstGeom prst="rect">
             <a:avLst/>
@@ -5835,7 +5836,7 @@
         <p:spPr>
           <a:xfrm>
             <a:off x="6400800" y="0"/>
-            <a:ext cx="12960" cy="6852600"/>
+            <a:ext cx="12600" cy="6852240"/>
           </a:xfrm>
           <a:prstGeom prst="rect">
             <a:avLst/>
@@ -5895,7 +5896,7 @@
         <p:spPr>
           <a:xfrm>
             <a:off x="7315200" y="0"/>
-            <a:ext cx="12960" cy="6852600"/>
+            <a:ext cx="12600" cy="6852240"/>
           </a:xfrm>
           <a:prstGeom prst="rect">
             <a:avLst/>
@@ -5955,7 +5956,7 @@
         <p:spPr>
           <a:xfrm>
             <a:off x="8229600" y="0"/>
-            <a:ext cx="12960" cy="6852600"/>
+            <a:ext cx="12600" cy="6852240"/>
           </a:xfrm>
           <a:prstGeom prst="rect">
             <a:avLst/>
@@ -6015,7 +6016,7 @@
         <p:spPr>
           <a:xfrm>
             <a:off x="9144000" y="0"/>
-            <a:ext cx="12960" cy="6852600"/>
+            <a:ext cx="12600" cy="6852240"/>
           </a:xfrm>
           <a:prstGeom prst="rect">
             <a:avLst/>
@@ -6075,7 +6076,7 @@
         <p:spPr>
           <a:xfrm>
             <a:off x="10058400" y="0"/>
-            <a:ext cx="12960" cy="6852600"/>
+            <a:ext cx="12600" cy="6852240"/>
           </a:xfrm>
           <a:prstGeom prst="rect">
             <a:avLst/>
@@ -6135,7 +6136,7 @@
         <p:spPr>
           <a:xfrm>
             <a:off x="10972800" y="0"/>
-            <a:ext cx="12960" cy="6852600"/>
+            <a:ext cx="12600" cy="6852240"/>
           </a:xfrm>
           <a:prstGeom prst="rect">
             <a:avLst/>
@@ -6195,7 +6196,7 @@
         <p:spPr>
           <a:xfrm>
             <a:off x="11887200" y="0"/>
-            <a:ext cx="12960" cy="6852600"/>
+            <a:ext cx="12600" cy="6852240"/>
           </a:xfrm>
           <a:prstGeom prst="rect">
             <a:avLst/>
@@ -6255,7 +6256,7 @@
         <p:spPr>
           <a:xfrm>
             <a:off x="0" y="0"/>
-            <a:ext cx="314640" cy="6852600"/>
+            <a:ext cx="314280" cy="6852240"/>
           </a:xfrm>
           <a:prstGeom prst="rect">
             <a:avLst/>
@@ -6315,7 +6316,7 @@
         <p:spPr>
           <a:xfrm>
             <a:off x="9875520" y="365760"/>
-            <a:ext cx="2006280" cy="497520"/>
+            <a:ext cx="2005920" cy="497160"/>
           </a:xfrm>
           <a:prstGeom prst="roundRect">
             <a:avLst>
@@ -6389,7 +6390,7 @@
         <p:spPr>
           <a:xfrm>
             <a:off x="1072440" y="914400"/>
-            <a:ext cx="8822520" cy="638280"/>
+            <a:ext cx="8822160" cy="638280"/>
           </a:xfrm>
           <a:prstGeom prst="rect">
             <a:avLst/>
@@ -6443,7 +6444,7 @@
         <p:spPr>
           <a:xfrm>
             <a:off x="2043720" y="1694880"/>
-            <a:ext cx="7481520" cy="819720"/>
+            <a:ext cx="7481160" cy="819720"/>
           </a:xfrm>
           <a:prstGeom prst="rect">
             <a:avLst/>
@@ -6543,7 +6544,7 @@
         <p:spPr>
           <a:xfrm>
             <a:off x="987480" y="3182040"/>
-            <a:ext cx="3286440" cy="2737800"/>
+            <a:ext cx="3286080" cy="2737440"/>
           </a:xfrm>
           <a:prstGeom prst="roundRect">
             <a:avLst>
@@ -6605,7 +6606,7 @@
         <p:spPr>
           <a:xfrm>
             <a:off x="685800" y="2743200"/>
-            <a:ext cx="3515040" cy="3655440"/>
+            <a:ext cx="3514680" cy="3655080"/>
           </a:xfrm>
           <a:prstGeom prst="roundRect">
             <a:avLst>
@@ -6847,7 +6848,7 @@
         <p:spPr>
           <a:xfrm>
             <a:off x="4507920" y="3182040"/>
-            <a:ext cx="3286440" cy="2737800"/>
+            <a:ext cx="3286080" cy="2737440"/>
           </a:xfrm>
           <a:prstGeom prst="roundRect">
             <a:avLst>
@@ -6909,7 +6910,7 @@
         <p:spPr>
           <a:xfrm>
             <a:off x="4434840" y="2971800"/>
-            <a:ext cx="3286440" cy="3426840"/>
+            <a:ext cx="3286080" cy="3426480"/>
           </a:xfrm>
           <a:prstGeom prst="roundRect">
             <a:avLst>
@@ -7263,7 +7264,7 @@
         <p:spPr>
           <a:xfrm>
             <a:off x="8028360" y="3182040"/>
-            <a:ext cx="3286440" cy="2737800"/>
+            <a:ext cx="3286080" cy="2737440"/>
           </a:xfrm>
           <a:prstGeom prst="roundRect">
             <a:avLst>
@@ -7325,7 +7326,7 @@
         <p:spPr>
           <a:xfrm>
             <a:off x="8001000" y="2743200"/>
-            <a:ext cx="3427920" cy="3654000"/>
+            <a:ext cx="3427560" cy="3653640"/>
           </a:xfrm>
           <a:prstGeom prst="roundRect">
             <a:avLst>
@@ -8001,7 +8002,7 @@
         <p:spPr>
           <a:xfrm>
             <a:off x="0" y="0"/>
-            <a:ext cx="12183480" cy="6852600"/>
+            <a:ext cx="12183120" cy="6852240"/>
           </a:xfrm>
           <a:prstGeom prst="rect">
             <a:avLst/>
@@ -8061,7 +8062,7 @@
         <p:spPr>
           <a:xfrm>
             <a:off x="0" y="0"/>
-            <a:ext cx="12960" cy="6852600"/>
+            <a:ext cx="12600" cy="6852240"/>
           </a:xfrm>
           <a:prstGeom prst="rect">
             <a:avLst/>
@@ -8121,7 +8122,7 @@
         <p:spPr>
           <a:xfrm>
             <a:off x="914400" y="0"/>
-            <a:ext cx="12960" cy="6852600"/>
+            <a:ext cx="12600" cy="6852240"/>
           </a:xfrm>
           <a:prstGeom prst="rect">
             <a:avLst/>
@@ -8181,7 +8182,7 @@
         <p:spPr>
           <a:xfrm>
             <a:off x="1828800" y="0"/>
-            <a:ext cx="12960" cy="6852600"/>
+            <a:ext cx="12600" cy="6852240"/>
           </a:xfrm>
           <a:prstGeom prst="rect">
             <a:avLst/>
@@ -8241,7 +8242,7 @@
         <p:spPr>
           <a:xfrm>
             <a:off x="2743200" y="0"/>
-            <a:ext cx="12960" cy="6852600"/>
+            <a:ext cx="12600" cy="6852240"/>
           </a:xfrm>
           <a:prstGeom prst="rect">
             <a:avLst/>
@@ -8301,7 +8302,7 @@
         <p:spPr>
           <a:xfrm>
             <a:off x="3657600" y="0"/>
-            <a:ext cx="12960" cy="6852600"/>
+            <a:ext cx="12600" cy="6852240"/>
           </a:xfrm>
           <a:prstGeom prst="rect">
             <a:avLst/>
@@ -8361,7 +8362,7 @@
         <p:spPr>
           <a:xfrm>
             <a:off x="4572000" y="0"/>
-            <a:ext cx="12960" cy="6852600"/>
+            <a:ext cx="12600" cy="6852240"/>
           </a:xfrm>
           <a:prstGeom prst="rect">
             <a:avLst/>
@@ -8421,7 +8422,7 @@
         <p:spPr>
           <a:xfrm>
             <a:off x="5486400" y="0"/>
-            <a:ext cx="12960" cy="6852600"/>
+            <a:ext cx="12600" cy="6852240"/>
           </a:xfrm>
           <a:prstGeom prst="rect">
             <a:avLst/>
@@ -8481,7 +8482,7 @@
         <p:spPr>
           <a:xfrm>
             <a:off x="6400800" y="0"/>
-            <a:ext cx="12960" cy="6852600"/>
+            <a:ext cx="12600" cy="6852240"/>
           </a:xfrm>
           <a:prstGeom prst="rect">
             <a:avLst/>
@@ -8541,7 +8542,7 @@
         <p:spPr>
           <a:xfrm>
             <a:off x="7315200" y="0"/>
-            <a:ext cx="12960" cy="6852600"/>
+            <a:ext cx="12600" cy="6852240"/>
           </a:xfrm>
           <a:prstGeom prst="rect">
             <a:avLst/>
@@ -8601,7 +8602,7 @@
         <p:spPr>
           <a:xfrm>
             <a:off x="8229600" y="0"/>
-            <a:ext cx="12960" cy="6852600"/>
+            <a:ext cx="12600" cy="6852240"/>
           </a:xfrm>
           <a:prstGeom prst="rect">
             <a:avLst/>
@@ -8661,7 +8662,7 @@
         <p:spPr>
           <a:xfrm>
             <a:off x="9144000" y="0"/>
-            <a:ext cx="12960" cy="6852600"/>
+            <a:ext cx="12600" cy="6852240"/>
           </a:xfrm>
           <a:prstGeom prst="rect">
             <a:avLst/>
@@ -8721,7 +8722,7 @@
         <p:spPr>
           <a:xfrm>
             <a:off x="10058400" y="0"/>
-            <a:ext cx="12960" cy="6852600"/>
+            <a:ext cx="12600" cy="6852240"/>
           </a:xfrm>
           <a:prstGeom prst="rect">
             <a:avLst/>
@@ -8781,7 +8782,7 @@
         <p:spPr>
           <a:xfrm>
             <a:off x="10972800" y="0"/>
-            <a:ext cx="12960" cy="6852600"/>
+            <a:ext cx="12600" cy="6852240"/>
           </a:xfrm>
           <a:prstGeom prst="rect">
             <a:avLst/>
@@ -8841,7 +8842,7 @@
         <p:spPr>
           <a:xfrm>
             <a:off x="11887200" y="0"/>
-            <a:ext cx="12960" cy="6852600"/>
+            <a:ext cx="12600" cy="6852240"/>
           </a:xfrm>
           <a:prstGeom prst="rect">
             <a:avLst/>
@@ -8901,7 +8902,7 @@
         <p:spPr>
           <a:xfrm>
             <a:off x="0" y="0"/>
-            <a:ext cx="314640" cy="6852600"/>
+            <a:ext cx="314280" cy="6852240"/>
           </a:xfrm>
           <a:prstGeom prst="rect">
             <a:avLst/>
@@ -8961,7 +8962,7 @@
         <p:spPr>
           <a:xfrm>
             <a:off x="9875520" y="365760"/>
-            <a:ext cx="2006280" cy="497520"/>
+            <a:ext cx="2005920" cy="497160"/>
           </a:xfrm>
           <a:prstGeom prst="roundRect">
             <a:avLst>
@@ -9089,7 +9090,7 @@
         <p:spPr>
           <a:xfrm>
             <a:off x="1482480" y="1694880"/>
-            <a:ext cx="8603640" cy="819720"/>
+            <a:ext cx="8603280" cy="819720"/>
           </a:xfrm>
           <a:prstGeom prst="rect">
             <a:avLst/>
@@ -9189,7 +9190,7 @@
         <p:spPr>
           <a:xfrm>
             <a:off x="987480" y="3182040"/>
-            <a:ext cx="3286440" cy="2737800"/>
+            <a:ext cx="3286080" cy="2737440"/>
           </a:xfrm>
           <a:prstGeom prst="roundRect">
             <a:avLst>
@@ -9251,7 +9252,7 @@
         <p:spPr>
           <a:xfrm>
             <a:off x="685800" y="2743200"/>
-            <a:ext cx="3515040" cy="3655440"/>
+            <a:ext cx="3514680" cy="3655080"/>
           </a:xfrm>
           <a:prstGeom prst="roundRect">
             <a:avLst>
@@ -9569,7 +9570,7 @@
         <p:spPr>
           <a:xfrm>
             <a:off x="4507920" y="3182040"/>
-            <a:ext cx="3286440" cy="2737800"/>
+            <a:ext cx="3286080" cy="2737440"/>
           </a:xfrm>
           <a:prstGeom prst="roundRect">
             <a:avLst>
@@ -9631,7 +9632,7 @@
         <p:spPr>
           <a:xfrm>
             <a:off x="4434840" y="2971800"/>
-            <a:ext cx="3286440" cy="3426840"/>
+            <a:ext cx="3286080" cy="3426480"/>
           </a:xfrm>
           <a:prstGeom prst="roundRect">
             <a:avLst>
@@ -9962,7 +9963,7 @@
         <p:spPr>
           <a:xfrm>
             <a:off x="8028360" y="3182040"/>
-            <a:ext cx="3286440" cy="2737800"/>
+            <a:ext cx="3286080" cy="2737440"/>
           </a:xfrm>
           <a:prstGeom prst="roundRect">
             <a:avLst>
@@ -10024,7 +10025,7 @@
         <p:spPr>
           <a:xfrm>
             <a:off x="8001000" y="2743200"/>
-            <a:ext cx="3427920" cy="3654000"/>
+            <a:ext cx="3427560" cy="3653640"/>
           </a:xfrm>
           <a:prstGeom prst="roundRect">
             <a:avLst>
@@ -10789,7 +10790,7 @@
         <p:spPr>
           <a:xfrm>
             <a:off x="0" y="0"/>
-            <a:ext cx="12183480" cy="6852600"/>
+            <a:ext cx="12183120" cy="6852240"/>
           </a:xfrm>
           <a:prstGeom prst="rect">
             <a:avLst/>
@@ -10849,7 +10850,7 @@
         <p:spPr>
           <a:xfrm>
             <a:off x="0" y="0"/>
-            <a:ext cx="12960" cy="6852600"/>
+            <a:ext cx="12600" cy="6852240"/>
           </a:xfrm>
           <a:prstGeom prst="rect">
             <a:avLst/>
@@ -10909,7 +10910,7 @@
         <p:spPr>
           <a:xfrm>
             <a:off x="914400" y="0"/>
-            <a:ext cx="12960" cy="6852600"/>
+            <a:ext cx="12600" cy="6852240"/>
           </a:xfrm>
           <a:prstGeom prst="rect">
             <a:avLst/>
@@ -10969,7 +10970,7 @@
         <p:spPr>
           <a:xfrm>
             <a:off x="1828800" y="0"/>
-            <a:ext cx="12960" cy="6852600"/>
+            <a:ext cx="12600" cy="6852240"/>
           </a:xfrm>
           <a:prstGeom prst="rect">
             <a:avLst/>
@@ -11029,7 +11030,7 @@
         <p:spPr>
           <a:xfrm>
             <a:off x="2743200" y="0"/>
-            <a:ext cx="12960" cy="6852600"/>
+            <a:ext cx="12600" cy="6852240"/>
           </a:xfrm>
           <a:prstGeom prst="rect">
             <a:avLst/>
@@ -11089,7 +11090,7 @@
         <p:spPr>
           <a:xfrm>
             <a:off x="3657600" y="0"/>
-            <a:ext cx="12960" cy="6852600"/>
+            <a:ext cx="12600" cy="6852240"/>
           </a:xfrm>
           <a:prstGeom prst="rect">
             <a:avLst/>
@@ -11149,7 +11150,7 @@
         <p:spPr>
           <a:xfrm>
             <a:off x="4572000" y="0"/>
-            <a:ext cx="12960" cy="6852600"/>
+            <a:ext cx="12600" cy="6852240"/>
           </a:xfrm>
           <a:prstGeom prst="rect">
             <a:avLst/>
@@ -11209,7 +11210,7 @@
         <p:spPr>
           <a:xfrm>
             <a:off x="5486400" y="0"/>
-            <a:ext cx="12960" cy="6852600"/>
+            <a:ext cx="12600" cy="6852240"/>
           </a:xfrm>
           <a:prstGeom prst="rect">
             <a:avLst/>
@@ -11269,7 +11270,7 @@
         <p:spPr>
           <a:xfrm>
             <a:off x="6400800" y="0"/>
-            <a:ext cx="12960" cy="6852600"/>
+            <a:ext cx="12600" cy="6852240"/>
           </a:xfrm>
           <a:prstGeom prst="rect">
             <a:avLst/>
@@ -11329,7 +11330,7 @@
         <p:spPr>
           <a:xfrm>
             <a:off x="7315200" y="0"/>
-            <a:ext cx="12960" cy="6852600"/>
+            <a:ext cx="12600" cy="6852240"/>
           </a:xfrm>
           <a:prstGeom prst="rect">
             <a:avLst/>
@@ -11389,7 +11390,7 @@
         <p:spPr>
           <a:xfrm>
             <a:off x="8229600" y="0"/>
-            <a:ext cx="12960" cy="6852600"/>
+            <a:ext cx="12600" cy="6852240"/>
           </a:xfrm>
           <a:prstGeom prst="rect">
             <a:avLst/>
@@ -11449,7 +11450,7 @@
         <p:spPr>
           <a:xfrm>
             <a:off x="9144000" y="0"/>
-            <a:ext cx="12960" cy="6852600"/>
+            <a:ext cx="12600" cy="6852240"/>
           </a:xfrm>
           <a:prstGeom prst="rect">
             <a:avLst/>
@@ -11509,7 +11510,7 @@
         <p:spPr>
           <a:xfrm>
             <a:off x="10058400" y="0"/>
-            <a:ext cx="12960" cy="6852600"/>
+            <a:ext cx="12600" cy="6852240"/>
           </a:xfrm>
           <a:prstGeom prst="rect">
             <a:avLst/>
@@ -11569,7 +11570,7 @@
         <p:spPr>
           <a:xfrm>
             <a:off x="10972800" y="0"/>
-            <a:ext cx="12960" cy="6852600"/>
+            <a:ext cx="12600" cy="6852240"/>
           </a:xfrm>
           <a:prstGeom prst="rect">
             <a:avLst/>
@@ -11629,7 +11630,7 @@
         <p:spPr>
           <a:xfrm>
             <a:off x="11887200" y="0"/>
-            <a:ext cx="12960" cy="6852600"/>
+            <a:ext cx="12600" cy="6852240"/>
           </a:xfrm>
           <a:prstGeom prst="rect">
             <a:avLst/>
@@ -11689,7 +11690,7 @@
         <p:spPr>
           <a:xfrm>
             <a:off x="0" y="0"/>
-            <a:ext cx="314640" cy="6852600"/>
+            <a:ext cx="314280" cy="6852240"/>
           </a:xfrm>
           <a:prstGeom prst="rect">
             <a:avLst/>
@@ -11749,7 +11750,7 @@
         <p:spPr>
           <a:xfrm>
             <a:off x="9875520" y="365760"/>
-            <a:ext cx="2006280" cy="497520"/>
+            <a:ext cx="2005920" cy="497160"/>
           </a:xfrm>
           <a:prstGeom prst="roundRect">
             <a:avLst>
@@ -11823,7 +11824,7 @@
         <p:spPr>
           <a:xfrm>
             <a:off x="2768400" y="914400"/>
-            <a:ext cx="5430960" cy="516240"/>
+            <a:ext cx="5430600" cy="516240"/>
           </a:xfrm>
           <a:prstGeom prst="rect">
             <a:avLst/>
@@ -11877,7 +11878,7 @@
         <p:spPr>
           <a:xfrm>
             <a:off x="1257120" y="1694880"/>
-            <a:ext cx="9053280" cy="576360"/>
+            <a:ext cx="9052920" cy="576360"/>
           </a:xfrm>
           <a:prstGeom prst="rect">
             <a:avLst/>
@@ -11954,7 +11955,7 @@
         <p:spPr>
           <a:xfrm>
             <a:off x="987480" y="3182040"/>
-            <a:ext cx="3286440" cy="2737800"/>
+            <a:ext cx="3286080" cy="2737440"/>
           </a:xfrm>
           <a:prstGeom prst="roundRect">
             <a:avLst>
@@ -12016,7 +12017,7 @@
         <p:spPr>
           <a:xfrm>
             <a:off x="685800" y="2743200"/>
-            <a:ext cx="3515040" cy="3655440"/>
+            <a:ext cx="3514680" cy="3655080"/>
           </a:xfrm>
           <a:prstGeom prst="roundRect">
             <a:avLst>
@@ -12238,7 +12239,7 @@
         <p:spPr>
           <a:xfrm>
             <a:off x="4507920" y="3182040"/>
-            <a:ext cx="3286440" cy="2737800"/>
+            <a:ext cx="3286080" cy="2737440"/>
           </a:xfrm>
           <a:prstGeom prst="roundRect">
             <a:avLst>
@@ -12300,7 +12301,7 @@
         <p:spPr>
           <a:xfrm>
             <a:off x="4434840" y="2971800"/>
-            <a:ext cx="3286440" cy="3426840"/>
+            <a:ext cx="3286080" cy="3426480"/>
           </a:xfrm>
           <a:prstGeom prst="roundRect">
             <a:avLst>
@@ -12717,7 +12718,7 @@
         <p:spPr>
           <a:xfrm>
             <a:off x="8028360" y="3182040"/>
-            <a:ext cx="3286440" cy="2737800"/>
+            <a:ext cx="3286080" cy="2737440"/>
           </a:xfrm>
           <a:prstGeom prst="roundRect">
             <a:avLst>
@@ -12779,7 +12780,7 @@
         <p:spPr>
           <a:xfrm>
             <a:off x="8001000" y="2514600"/>
-            <a:ext cx="3657240" cy="3885480"/>
+            <a:ext cx="3656880" cy="3885120"/>
           </a:xfrm>
           <a:prstGeom prst="roundRect">
             <a:avLst>
@@ -13646,7 +13647,7 @@
         <p:spPr>
           <a:xfrm>
             <a:off x="0" y="0"/>
-            <a:ext cx="12183480" cy="6852600"/>
+            <a:ext cx="12183120" cy="6852240"/>
           </a:xfrm>
           <a:prstGeom prst="rect">
             <a:avLst/>
@@ -13682,6 +13683,11 @@
             <a:noAutofit/>
           </a:bodyPr>
           <a:p>
+            <a:pPr>
+              <a:lnSpc>
+                <a:spcPct val="100000"/>
+              </a:lnSpc>
+            </a:pPr>
             <a:endParaRPr b="0" lang="en-US" sz="1800" spc="-1" strike="noStrike">
               <a:solidFill>
                 <a:schemeClr val="lt1"/>
@@ -13701,7 +13707,7 @@
         <p:spPr>
           <a:xfrm>
             <a:off x="0" y="0"/>
-            <a:ext cx="12960" cy="6852600"/>
+            <a:ext cx="12600" cy="6852240"/>
           </a:xfrm>
           <a:prstGeom prst="rect">
             <a:avLst/>
@@ -13737,6 +13743,11 @@
             <a:noAutofit/>
           </a:bodyPr>
           <a:p>
+            <a:pPr>
+              <a:lnSpc>
+                <a:spcPct val="100000"/>
+              </a:lnSpc>
+            </a:pPr>
             <a:endParaRPr b="0" lang="en-US" sz="1800" spc="-1" strike="noStrike">
               <a:solidFill>
                 <a:schemeClr val="lt1"/>
@@ -13756,7 +13767,7 @@
         <p:spPr>
           <a:xfrm>
             <a:off x="914400" y="0"/>
-            <a:ext cx="12960" cy="6852600"/>
+            <a:ext cx="12600" cy="6852240"/>
           </a:xfrm>
           <a:prstGeom prst="rect">
             <a:avLst/>
@@ -13792,6 +13803,11 @@
             <a:noAutofit/>
           </a:bodyPr>
           <a:p>
+            <a:pPr>
+              <a:lnSpc>
+                <a:spcPct val="100000"/>
+              </a:lnSpc>
+            </a:pPr>
             <a:endParaRPr b="0" lang="en-US" sz="1800" spc="-1" strike="noStrike">
               <a:solidFill>
                 <a:schemeClr val="lt1"/>
@@ -13811,7 +13827,7 @@
         <p:spPr>
           <a:xfrm>
             <a:off x="1828800" y="0"/>
-            <a:ext cx="12960" cy="6852600"/>
+            <a:ext cx="12600" cy="6852240"/>
           </a:xfrm>
           <a:prstGeom prst="rect">
             <a:avLst/>
@@ -13847,6 +13863,11 @@
             <a:noAutofit/>
           </a:bodyPr>
           <a:p>
+            <a:pPr>
+              <a:lnSpc>
+                <a:spcPct val="100000"/>
+              </a:lnSpc>
+            </a:pPr>
             <a:endParaRPr b="0" lang="en-US" sz="1800" spc="-1" strike="noStrike">
               <a:solidFill>
                 <a:schemeClr val="lt1"/>
@@ -13866,7 +13887,7 @@
         <p:spPr>
           <a:xfrm>
             <a:off x="2743200" y="0"/>
-            <a:ext cx="12960" cy="6852600"/>
+            <a:ext cx="12600" cy="6852240"/>
           </a:xfrm>
           <a:prstGeom prst="rect">
             <a:avLst/>
@@ -13902,6 +13923,11 @@
             <a:noAutofit/>
           </a:bodyPr>
           <a:p>
+            <a:pPr>
+              <a:lnSpc>
+                <a:spcPct val="100000"/>
+              </a:lnSpc>
+            </a:pPr>
             <a:endParaRPr b="0" lang="en-US" sz="1800" spc="-1" strike="noStrike">
               <a:solidFill>
                 <a:schemeClr val="lt1"/>
@@ -13921,7 +13947,7 @@
         <p:spPr>
           <a:xfrm>
             <a:off x="3657600" y="0"/>
-            <a:ext cx="12960" cy="6852600"/>
+            <a:ext cx="12600" cy="6852240"/>
           </a:xfrm>
           <a:prstGeom prst="rect">
             <a:avLst/>
@@ -13957,6 +13983,11 @@
             <a:noAutofit/>
           </a:bodyPr>
           <a:p>
+            <a:pPr>
+              <a:lnSpc>
+                <a:spcPct val="100000"/>
+              </a:lnSpc>
+            </a:pPr>
             <a:endParaRPr b="0" lang="en-US" sz="1800" spc="-1" strike="noStrike">
               <a:solidFill>
                 <a:schemeClr val="lt1"/>
@@ -13976,7 +14007,7 @@
         <p:spPr>
           <a:xfrm>
             <a:off x="4572000" y="0"/>
-            <a:ext cx="12960" cy="6852600"/>
+            <a:ext cx="12600" cy="6852240"/>
           </a:xfrm>
           <a:prstGeom prst="rect">
             <a:avLst/>
@@ -14012,6 +14043,11 @@
             <a:noAutofit/>
           </a:bodyPr>
           <a:p>
+            <a:pPr>
+              <a:lnSpc>
+                <a:spcPct val="100000"/>
+              </a:lnSpc>
+            </a:pPr>
             <a:endParaRPr b="0" lang="en-US" sz="1800" spc="-1" strike="noStrike">
               <a:solidFill>
                 <a:schemeClr val="lt1"/>
@@ -14031,7 +14067,7 @@
         <p:spPr>
           <a:xfrm>
             <a:off x="5486400" y="0"/>
-            <a:ext cx="12960" cy="6852600"/>
+            <a:ext cx="12600" cy="6852240"/>
           </a:xfrm>
           <a:prstGeom prst="rect">
             <a:avLst/>
@@ -14067,6 +14103,11 @@
             <a:noAutofit/>
           </a:bodyPr>
           <a:p>
+            <a:pPr>
+              <a:lnSpc>
+                <a:spcPct val="100000"/>
+              </a:lnSpc>
+            </a:pPr>
             <a:endParaRPr b="0" lang="en-US" sz="1800" spc="-1" strike="noStrike">
               <a:solidFill>
                 <a:schemeClr val="lt1"/>
@@ -14086,7 +14127,7 @@
         <p:spPr>
           <a:xfrm>
             <a:off x="6400800" y="0"/>
-            <a:ext cx="12960" cy="6852600"/>
+            <a:ext cx="12600" cy="6852240"/>
           </a:xfrm>
           <a:prstGeom prst="rect">
             <a:avLst/>
@@ -14122,6 +14163,11 @@
             <a:noAutofit/>
           </a:bodyPr>
           <a:p>
+            <a:pPr>
+              <a:lnSpc>
+                <a:spcPct val="100000"/>
+              </a:lnSpc>
+            </a:pPr>
             <a:endParaRPr b="0" lang="en-US" sz="1800" spc="-1" strike="noStrike">
               <a:solidFill>
                 <a:schemeClr val="lt1"/>
@@ -14141,7 +14187,7 @@
         <p:spPr>
           <a:xfrm>
             <a:off x="7315200" y="0"/>
-            <a:ext cx="12960" cy="6852600"/>
+            <a:ext cx="12600" cy="6852240"/>
           </a:xfrm>
           <a:prstGeom prst="rect">
             <a:avLst/>
@@ -14177,6 +14223,11 @@
             <a:noAutofit/>
           </a:bodyPr>
           <a:p>
+            <a:pPr>
+              <a:lnSpc>
+                <a:spcPct val="100000"/>
+              </a:lnSpc>
+            </a:pPr>
             <a:endParaRPr b="0" lang="en-US" sz="1800" spc="-1" strike="noStrike">
               <a:solidFill>
                 <a:schemeClr val="lt1"/>
@@ -14196,7 +14247,7 @@
         <p:spPr>
           <a:xfrm>
             <a:off x="8229600" y="0"/>
-            <a:ext cx="12960" cy="6852600"/>
+            <a:ext cx="12600" cy="6852240"/>
           </a:xfrm>
           <a:prstGeom prst="rect">
             <a:avLst/>
@@ -14232,6 +14283,11 @@
             <a:noAutofit/>
           </a:bodyPr>
           <a:p>
+            <a:pPr>
+              <a:lnSpc>
+                <a:spcPct val="100000"/>
+              </a:lnSpc>
+            </a:pPr>
             <a:endParaRPr b="0" lang="en-US" sz="1800" spc="-1" strike="noStrike">
               <a:solidFill>
                 <a:schemeClr val="lt1"/>
@@ -14251,7 +14307,7 @@
         <p:spPr>
           <a:xfrm>
             <a:off x="9144000" y="0"/>
-            <a:ext cx="12960" cy="6852600"/>
+            <a:ext cx="12600" cy="6852240"/>
           </a:xfrm>
           <a:prstGeom prst="rect">
             <a:avLst/>
@@ -14287,6 +14343,11 @@
             <a:noAutofit/>
           </a:bodyPr>
           <a:p>
+            <a:pPr>
+              <a:lnSpc>
+                <a:spcPct val="100000"/>
+              </a:lnSpc>
+            </a:pPr>
             <a:endParaRPr b="0" lang="en-US" sz="1800" spc="-1" strike="noStrike">
               <a:solidFill>
                 <a:schemeClr val="lt1"/>
@@ -14306,7 +14367,7 @@
         <p:spPr>
           <a:xfrm>
             <a:off x="10058400" y="0"/>
-            <a:ext cx="12960" cy="6852600"/>
+            <a:ext cx="12600" cy="6852240"/>
           </a:xfrm>
           <a:prstGeom prst="rect">
             <a:avLst/>
@@ -14342,6 +14403,11 @@
             <a:noAutofit/>
           </a:bodyPr>
           <a:p>
+            <a:pPr>
+              <a:lnSpc>
+                <a:spcPct val="100000"/>
+              </a:lnSpc>
+            </a:pPr>
             <a:endParaRPr b="0" lang="en-US" sz="1800" spc="-1" strike="noStrike">
               <a:solidFill>
                 <a:schemeClr val="lt1"/>
@@ -14361,7 +14427,7 @@
         <p:spPr>
           <a:xfrm>
             <a:off x="10972800" y="0"/>
-            <a:ext cx="12960" cy="6852600"/>
+            <a:ext cx="12600" cy="6852240"/>
           </a:xfrm>
           <a:prstGeom prst="rect">
             <a:avLst/>
@@ -14397,6 +14463,11 @@
             <a:noAutofit/>
           </a:bodyPr>
           <a:p>
+            <a:pPr>
+              <a:lnSpc>
+                <a:spcPct val="100000"/>
+              </a:lnSpc>
+            </a:pPr>
             <a:endParaRPr b="0" lang="en-US" sz="1800" spc="-1" strike="noStrike">
               <a:solidFill>
                 <a:schemeClr val="lt1"/>
@@ -14416,7 +14487,7 @@
         <p:spPr>
           <a:xfrm>
             <a:off x="11887200" y="0"/>
-            <a:ext cx="12960" cy="6852600"/>
+            <a:ext cx="12600" cy="6852240"/>
           </a:xfrm>
           <a:prstGeom prst="rect">
             <a:avLst/>
@@ -14452,6 +14523,11 @@
             <a:noAutofit/>
           </a:bodyPr>
           <a:p>
+            <a:pPr>
+              <a:lnSpc>
+                <a:spcPct val="100000"/>
+              </a:lnSpc>
+            </a:pPr>
             <a:endParaRPr b="0" lang="en-US" sz="1800" spc="-1" strike="noStrike">
               <a:solidFill>
                 <a:schemeClr val="lt1"/>
@@ -14471,7 +14547,7 @@
         <p:spPr>
           <a:xfrm>
             <a:off x="0" y="0"/>
-            <a:ext cx="314640" cy="6852600"/>
+            <a:ext cx="314280" cy="6852240"/>
           </a:xfrm>
           <a:prstGeom prst="rect">
             <a:avLst/>
@@ -14507,6 +14583,11 @@
             <a:noAutofit/>
           </a:bodyPr>
           <a:p>
+            <a:pPr>
+              <a:lnSpc>
+                <a:spcPct val="100000"/>
+              </a:lnSpc>
+            </a:pPr>
             <a:endParaRPr b="0" lang="en-US" sz="1800" spc="-1" strike="noStrike">
               <a:solidFill>
                 <a:schemeClr val="lt1"/>
@@ -14526,7 +14607,7 @@
         <p:spPr>
           <a:xfrm>
             <a:off x="9875520" y="365760"/>
-            <a:ext cx="2006280" cy="497520"/>
+            <a:ext cx="2005920" cy="497160"/>
           </a:xfrm>
           <a:prstGeom prst="roundRect">
             <a:avLst>
@@ -14600,7 +14681,7 @@
         <p:spPr>
           <a:xfrm>
             <a:off x="1534680" y="914400"/>
-            <a:ext cx="7898760" cy="639000"/>
+            <a:ext cx="7898400" cy="638280"/>
           </a:xfrm>
           <a:prstGeom prst="rect">
             <a:avLst/>
@@ -14654,7 +14735,7 @@
         <p:spPr>
           <a:xfrm>
             <a:off x="1296000" y="1694880"/>
-            <a:ext cx="8976240" cy="819720"/>
+            <a:ext cx="8975880" cy="819720"/>
           </a:xfrm>
           <a:prstGeom prst="rect">
             <a:avLst/>
@@ -14764,7 +14845,7 @@
         <p:spPr>
           <a:xfrm>
             <a:off x="987480" y="3182040"/>
-            <a:ext cx="3286440" cy="2737800"/>
+            <a:ext cx="3286080" cy="2737440"/>
           </a:xfrm>
           <a:prstGeom prst="roundRect">
             <a:avLst>
@@ -14802,6 +14883,11 @@
             <a:noAutofit/>
           </a:bodyPr>
           <a:p>
+            <a:pPr>
+              <a:lnSpc>
+                <a:spcPct val="100000"/>
+              </a:lnSpc>
+            </a:pPr>
             <a:endParaRPr b="0" lang="en-US" sz="1800" spc="-1" strike="noStrike">
               <a:solidFill>
                 <a:schemeClr val="lt1"/>
@@ -14821,7 +14907,7 @@
         <p:spPr>
           <a:xfrm>
             <a:off x="685800" y="2971800"/>
-            <a:ext cx="3200400" cy="3429000"/>
+            <a:ext cx="3200040" cy="3428640"/>
           </a:xfrm>
           <a:prstGeom prst="roundRect">
             <a:avLst>
@@ -15047,7 +15133,7 @@
         <p:spPr>
           <a:xfrm>
             <a:off x="4507920" y="3182040"/>
-            <a:ext cx="3286440" cy="2737800"/>
+            <a:ext cx="3286080" cy="2737440"/>
           </a:xfrm>
           <a:prstGeom prst="roundRect">
             <a:avLst>
@@ -15085,6 +15171,11 @@
             <a:noAutofit/>
           </a:bodyPr>
           <a:p>
+            <a:pPr>
+              <a:lnSpc>
+                <a:spcPct val="100000"/>
+              </a:lnSpc>
+            </a:pPr>
             <a:endParaRPr b="0" lang="en-US" sz="1800" spc="-1" strike="noStrike">
               <a:solidFill>
                 <a:schemeClr val="lt1"/>
@@ -15104,7 +15195,7 @@
         <p:spPr>
           <a:xfrm>
             <a:off x="4257360" y="2971800"/>
-            <a:ext cx="3286440" cy="3426840"/>
+            <a:ext cx="3286080" cy="3426480"/>
           </a:xfrm>
           <a:prstGeom prst="roundRect">
             <a:avLst>
@@ -15600,7 +15691,7 @@
         <p:spPr>
           <a:xfrm>
             <a:off x="8028360" y="3182040"/>
-            <a:ext cx="3286440" cy="2737800"/>
+            <a:ext cx="3286080" cy="2737440"/>
           </a:xfrm>
           <a:prstGeom prst="roundRect">
             <a:avLst>
@@ -15638,6 +15729,11 @@
             <a:noAutofit/>
           </a:bodyPr>
           <a:p>
+            <a:pPr>
+              <a:lnSpc>
+                <a:spcPct val="100000"/>
+              </a:lnSpc>
+            </a:pPr>
             <a:endParaRPr b="0" lang="en-US" sz="1800" spc="-1" strike="noStrike">
               <a:solidFill>
                 <a:schemeClr val="lt1"/>
@@ -15657,7 +15753,7 @@
         <p:spPr>
           <a:xfrm>
             <a:off x="8001000" y="2514600"/>
-            <a:ext cx="3427920" cy="3886200"/>
+            <a:ext cx="3427560" cy="3885840"/>
           </a:xfrm>
           <a:prstGeom prst="roundRect">
             <a:avLst>
@@ -16473,6 +16569,2596 @@
       <p:sp>
         <p:nvSpPr>
           <p:cNvPr id="378" name="TextBox 42"/>
+          <p:cNvSpPr/>
+          <p:nvPr/>
+        </p:nvSpPr>
+        <p:spPr>
+          <a:xfrm>
+            <a:off x="4600080" y="6446520"/>
+            <a:ext cx="3051000" cy="363960"/>
+          </a:xfrm>
+          <a:prstGeom prst="rect">
+            <a:avLst/>
+          </a:prstGeom>
+          <a:noFill/>
+          <a:ln w="0">
+            <a:noFill/>
+          </a:ln>
+        </p:spPr>
+        <p:style>
+          <a:lnRef idx="0"/>
+          <a:fillRef idx="0"/>
+          <a:effectRef idx="0"/>
+          <a:fontRef idx="minor"/>
+        </p:style>
+        <p:txBody>
+          <a:bodyPr wrap="none" lIns="90000" rIns="90000" tIns="45000" bIns="45000" anchor="t">
+            <a:spAutoFit/>
+          </a:bodyPr>
+          <a:p>
+            <a:pPr>
+              <a:lnSpc>
+                <a:spcPct val="100000"/>
+              </a:lnSpc>
+            </a:pPr>
+            <a:r>
+              <a:rPr b="0" lang="en-US" sz="1800" spc="-1" strike="noStrike">
+                <a:solidFill>
+                  <a:srgbClr val="000000"/>
+                </a:solidFill>
+                <a:latin typeface="Calibri"/>
+                <a:ea typeface="DejaVu Sans"/>
+              </a:rPr>
+              <a:t>Java • Ultra Premium Template</a:t>
+            </a:r>
+            <a:endParaRPr b="0" lang="en-US" sz="1800" spc="-1" strike="noStrike">
+              <a:solidFill>
+                <a:srgbClr val="000000"/>
+              </a:solidFill>
+              <a:latin typeface="Arial"/>
+            </a:endParaRPr>
+          </a:p>
+        </p:txBody>
+      </p:sp>
+    </p:spTree>
+  </p:cSld>
+  <mc:AlternateContent>
+    <mc:Choice Requires="p14">
+      <p:transition spd="slow" p14:dur="2000"/>
+    </mc:Choice>
+    <mc:Fallback>
+      <p:transition spd="slow"/>
+    </mc:Fallback>
+  </mc:AlternateContent>
+</p:sld>
+</file>
+
+<file path=ppt/slides/slide14.xml><?xml version="1.0" encoding="utf-8"?>
+<p:sld xmlns:a="http://schemas.openxmlformats.org/drawingml/2006/main" xmlns:p="http://schemas.openxmlformats.org/presentationml/2006/main" xmlns:r="http://schemas.openxmlformats.org/officeDocument/2006/relationships" xmlns:p14="http://schemas.microsoft.com/office/powerpoint/2010/main" xmlns:p15="http://schemas.microsoft.com/office/powerpoint/2012/main" xmlns:mc="http://schemas.openxmlformats.org/markup-compatibility/2006">
+  <p:cSld>
+    <p:spTree>
+      <p:nvGrpSpPr>
+        <p:cNvPr id="1" name=""/>
+        <p:cNvGrpSpPr/>
+        <p:nvPr/>
+      </p:nvGrpSpPr>
+      <p:grpSpPr>
+        <a:xfrm>
+          <a:off x="0" y="0"/>
+          <a:ext cx="0" cy="0"/>
+          <a:chOff x="0" y="0"/>
+          <a:chExt cx="0" cy="0"/>
+        </a:xfrm>
+      </p:grpSpPr>
+      <p:sp>
+        <p:nvSpPr>
+          <p:cNvPr id="379" name="Rectangle 209"/>
+          <p:cNvSpPr/>
+          <p:nvPr/>
+        </p:nvSpPr>
+        <p:spPr>
+          <a:xfrm>
+            <a:off x="0" y="0"/>
+            <a:ext cx="12183120" cy="6852240"/>
+          </a:xfrm>
+          <a:prstGeom prst="rect">
+            <a:avLst/>
+          </a:prstGeom>
+          <a:solidFill>
+            <a:srgbClr val="0b0b0d"/>
+          </a:solidFill>
+          <a:ln>
+            <a:noFill/>
+          </a:ln>
+          <a:effectLst>
+            <a:outerShdw blurRad="39960" dir="5400000" dist="23040" rotWithShape="0">
+              <a:srgbClr val="000000">
+                <a:alpha val="35000"/>
+              </a:srgbClr>
+            </a:outerShdw>
+          </a:effectLst>
+        </p:spPr>
+        <p:style>
+          <a:lnRef idx="1">
+            <a:schemeClr val="accent1"/>
+          </a:lnRef>
+          <a:fillRef idx="3">
+            <a:schemeClr val="accent1"/>
+          </a:fillRef>
+          <a:effectRef idx="2">
+            <a:schemeClr val="accent1"/>
+          </a:effectRef>
+          <a:fontRef idx="minor"/>
+        </p:style>
+        <p:txBody>
+          <a:bodyPr lIns="90000" rIns="90000" tIns="45000" bIns="45000" anchor="ctr">
+            <a:noAutofit/>
+          </a:bodyPr>
+          <a:p>
+            <a:endParaRPr b="0" lang="en-US" sz="1800" spc="-1" strike="noStrike">
+              <a:solidFill>
+                <a:schemeClr val="lt1"/>
+              </a:solidFill>
+              <a:latin typeface="Calibri"/>
+              <a:ea typeface="DejaVu Sans"/>
+            </a:endParaRPr>
+          </a:p>
+        </p:txBody>
+      </p:sp>
+      <p:sp>
+        <p:nvSpPr>
+          <p:cNvPr id="380" name="Rectangle 210"/>
+          <p:cNvSpPr/>
+          <p:nvPr/>
+        </p:nvSpPr>
+        <p:spPr>
+          <a:xfrm>
+            <a:off x="0" y="0"/>
+            <a:ext cx="12600" cy="6852240"/>
+          </a:xfrm>
+          <a:prstGeom prst="rect">
+            <a:avLst/>
+          </a:prstGeom>
+          <a:solidFill>
+            <a:srgbClr val="121216"/>
+          </a:solidFill>
+          <a:ln>
+            <a:noFill/>
+          </a:ln>
+          <a:effectLst>
+            <a:outerShdw blurRad="39960" dir="5400000" dist="23040" rotWithShape="0">
+              <a:srgbClr val="000000">
+                <a:alpha val="35000"/>
+              </a:srgbClr>
+            </a:outerShdw>
+          </a:effectLst>
+        </p:spPr>
+        <p:style>
+          <a:lnRef idx="1">
+            <a:schemeClr val="accent1"/>
+          </a:lnRef>
+          <a:fillRef idx="3">
+            <a:schemeClr val="accent1"/>
+          </a:fillRef>
+          <a:effectRef idx="2">
+            <a:schemeClr val="accent1"/>
+          </a:effectRef>
+          <a:fontRef idx="minor"/>
+        </p:style>
+        <p:txBody>
+          <a:bodyPr lIns="90000" rIns="90000" tIns="45000" bIns="45000" anchor="ctr">
+            <a:noAutofit/>
+          </a:bodyPr>
+          <a:p>
+            <a:endParaRPr b="0" lang="en-US" sz="1800" spc="-1" strike="noStrike">
+              <a:solidFill>
+                <a:schemeClr val="lt1"/>
+              </a:solidFill>
+              <a:latin typeface="Calibri"/>
+              <a:ea typeface="DejaVu Sans"/>
+            </a:endParaRPr>
+          </a:p>
+        </p:txBody>
+      </p:sp>
+      <p:sp>
+        <p:nvSpPr>
+          <p:cNvPr id="381" name="Rectangle 211"/>
+          <p:cNvSpPr/>
+          <p:nvPr/>
+        </p:nvSpPr>
+        <p:spPr>
+          <a:xfrm>
+            <a:off x="914400" y="0"/>
+            <a:ext cx="12600" cy="6852240"/>
+          </a:xfrm>
+          <a:prstGeom prst="rect">
+            <a:avLst/>
+          </a:prstGeom>
+          <a:solidFill>
+            <a:srgbClr val="121216"/>
+          </a:solidFill>
+          <a:ln>
+            <a:noFill/>
+          </a:ln>
+          <a:effectLst>
+            <a:outerShdw blurRad="39960" dir="5400000" dist="23040" rotWithShape="0">
+              <a:srgbClr val="000000">
+                <a:alpha val="35000"/>
+              </a:srgbClr>
+            </a:outerShdw>
+          </a:effectLst>
+        </p:spPr>
+        <p:style>
+          <a:lnRef idx="1">
+            <a:schemeClr val="accent1"/>
+          </a:lnRef>
+          <a:fillRef idx="3">
+            <a:schemeClr val="accent1"/>
+          </a:fillRef>
+          <a:effectRef idx="2">
+            <a:schemeClr val="accent1"/>
+          </a:effectRef>
+          <a:fontRef idx="minor"/>
+        </p:style>
+        <p:txBody>
+          <a:bodyPr lIns="90000" rIns="90000" tIns="45000" bIns="45000" anchor="ctr">
+            <a:noAutofit/>
+          </a:bodyPr>
+          <a:p>
+            <a:endParaRPr b="0" lang="en-US" sz="1800" spc="-1" strike="noStrike">
+              <a:solidFill>
+                <a:schemeClr val="lt1"/>
+              </a:solidFill>
+              <a:latin typeface="Calibri"/>
+              <a:ea typeface="DejaVu Sans"/>
+            </a:endParaRPr>
+          </a:p>
+        </p:txBody>
+      </p:sp>
+      <p:sp>
+        <p:nvSpPr>
+          <p:cNvPr id="382" name="Rectangle 212"/>
+          <p:cNvSpPr/>
+          <p:nvPr/>
+        </p:nvSpPr>
+        <p:spPr>
+          <a:xfrm>
+            <a:off x="1828800" y="0"/>
+            <a:ext cx="12600" cy="6852240"/>
+          </a:xfrm>
+          <a:prstGeom prst="rect">
+            <a:avLst/>
+          </a:prstGeom>
+          <a:solidFill>
+            <a:srgbClr val="121216"/>
+          </a:solidFill>
+          <a:ln>
+            <a:noFill/>
+          </a:ln>
+          <a:effectLst>
+            <a:outerShdw blurRad="39960" dir="5400000" dist="23040" rotWithShape="0">
+              <a:srgbClr val="000000">
+                <a:alpha val="35000"/>
+              </a:srgbClr>
+            </a:outerShdw>
+          </a:effectLst>
+        </p:spPr>
+        <p:style>
+          <a:lnRef idx="1">
+            <a:schemeClr val="accent1"/>
+          </a:lnRef>
+          <a:fillRef idx="3">
+            <a:schemeClr val="accent1"/>
+          </a:fillRef>
+          <a:effectRef idx="2">
+            <a:schemeClr val="accent1"/>
+          </a:effectRef>
+          <a:fontRef idx="minor"/>
+        </p:style>
+        <p:txBody>
+          <a:bodyPr lIns="90000" rIns="90000" tIns="45000" bIns="45000" anchor="ctr">
+            <a:noAutofit/>
+          </a:bodyPr>
+          <a:p>
+            <a:endParaRPr b="0" lang="en-US" sz="1800" spc="-1" strike="noStrike">
+              <a:solidFill>
+                <a:schemeClr val="lt1"/>
+              </a:solidFill>
+              <a:latin typeface="Calibri"/>
+              <a:ea typeface="DejaVu Sans"/>
+            </a:endParaRPr>
+          </a:p>
+        </p:txBody>
+      </p:sp>
+      <p:sp>
+        <p:nvSpPr>
+          <p:cNvPr id="383" name="Rectangle 213"/>
+          <p:cNvSpPr/>
+          <p:nvPr/>
+        </p:nvSpPr>
+        <p:spPr>
+          <a:xfrm>
+            <a:off x="2743200" y="0"/>
+            <a:ext cx="12600" cy="6852240"/>
+          </a:xfrm>
+          <a:prstGeom prst="rect">
+            <a:avLst/>
+          </a:prstGeom>
+          <a:solidFill>
+            <a:srgbClr val="121216"/>
+          </a:solidFill>
+          <a:ln>
+            <a:noFill/>
+          </a:ln>
+          <a:effectLst>
+            <a:outerShdw blurRad="39960" dir="5400000" dist="23040" rotWithShape="0">
+              <a:srgbClr val="000000">
+                <a:alpha val="35000"/>
+              </a:srgbClr>
+            </a:outerShdw>
+          </a:effectLst>
+        </p:spPr>
+        <p:style>
+          <a:lnRef idx="1">
+            <a:schemeClr val="accent1"/>
+          </a:lnRef>
+          <a:fillRef idx="3">
+            <a:schemeClr val="accent1"/>
+          </a:fillRef>
+          <a:effectRef idx="2">
+            <a:schemeClr val="accent1"/>
+          </a:effectRef>
+          <a:fontRef idx="minor"/>
+        </p:style>
+        <p:txBody>
+          <a:bodyPr lIns="90000" rIns="90000" tIns="45000" bIns="45000" anchor="ctr">
+            <a:noAutofit/>
+          </a:bodyPr>
+          <a:p>
+            <a:endParaRPr b="0" lang="en-US" sz="1800" spc="-1" strike="noStrike">
+              <a:solidFill>
+                <a:schemeClr val="lt1"/>
+              </a:solidFill>
+              <a:latin typeface="Calibri"/>
+              <a:ea typeface="DejaVu Sans"/>
+            </a:endParaRPr>
+          </a:p>
+        </p:txBody>
+      </p:sp>
+      <p:sp>
+        <p:nvSpPr>
+          <p:cNvPr id="384" name="Rectangle 214"/>
+          <p:cNvSpPr/>
+          <p:nvPr/>
+        </p:nvSpPr>
+        <p:spPr>
+          <a:xfrm>
+            <a:off x="3657600" y="0"/>
+            <a:ext cx="12600" cy="6852240"/>
+          </a:xfrm>
+          <a:prstGeom prst="rect">
+            <a:avLst/>
+          </a:prstGeom>
+          <a:solidFill>
+            <a:srgbClr val="121216"/>
+          </a:solidFill>
+          <a:ln>
+            <a:noFill/>
+          </a:ln>
+          <a:effectLst>
+            <a:outerShdw blurRad="39960" dir="5400000" dist="23040" rotWithShape="0">
+              <a:srgbClr val="000000">
+                <a:alpha val="35000"/>
+              </a:srgbClr>
+            </a:outerShdw>
+          </a:effectLst>
+        </p:spPr>
+        <p:style>
+          <a:lnRef idx="1">
+            <a:schemeClr val="accent1"/>
+          </a:lnRef>
+          <a:fillRef idx="3">
+            <a:schemeClr val="accent1"/>
+          </a:fillRef>
+          <a:effectRef idx="2">
+            <a:schemeClr val="accent1"/>
+          </a:effectRef>
+          <a:fontRef idx="minor"/>
+        </p:style>
+        <p:txBody>
+          <a:bodyPr lIns="90000" rIns="90000" tIns="45000" bIns="45000" anchor="ctr">
+            <a:noAutofit/>
+          </a:bodyPr>
+          <a:p>
+            <a:endParaRPr b="0" lang="en-US" sz="1800" spc="-1" strike="noStrike">
+              <a:solidFill>
+                <a:schemeClr val="lt1"/>
+              </a:solidFill>
+              <a:latin typeface="Calibri"/>
+              <a:ea typeface="DejaVu Sans"/>
+            </a:endParaRPr>
+          </a:p>
+        </p:txBody>
+      </p:sp>
+      <p:sp>
+        <p:nvSpPr>
+          <p:cNvPr id="385" name="Rectangle 215"/>
+          <p:cNvSpPr/>
+          <p:nvPr/>
+        </p:nvSpPr>
+        <p:spPr>
+          <a:xfrm>
+            <a:off x="4572000" y="0"/>
+            <a:ext cx="12600" cy="6852240"/>
+          </a:xfrm>
+          <a:prstGeom prst="rect">
+            <a:avLst/>
+          </a:prstGeom>
+          <a:solidFill>
+            <a:srgbClr val="121216"/>
+          </a:solidFill>
+          <a:ln>
+            <a:noFill/>
+          </a:ln>
+          <a:effectLst>
+            <a:outerShdw blurRad="39960" dir="5400000" dist="23040" rotWithShape="0">
+              <a:srgbClr val="000000">
+                <a:alpha val="35000"/>
+              </a:srgbClr>
+            </a:outerShdw>
+          </a:effectLst>
+        </p:spPr>
+        <p:style>
+          <a:lnRef idx="1">
+            <a:schemeClr val="accent1"/>
+          </a:lnRef>
+          <a:fillRef idx="3">
+            <a:schemeClr val="accent1"/>
+          </a:fillRef>
+          <a:effectRef idx="2">
+            <a:schemeClr val="accent1"/>
+          </a:effectRef>
+          <a:fontRef idx="minor"/>
+        </p:style>
+        <p:txBody>
+          <a:bodyPr lIns="90000" rIns="90000" tIns="45000" bIns="45000" anchor="ctr">
+            <a:noAutofit/>
+          </a:bodyPr>
+          <a:p>
+            <a:endParaRPr b="0" lang="en-US" sz="1800" spc="-1" strike="noStrike">
+              <a:solidFill>
+                <a:schemeClr val="lt1"/>
+              </a:solidFill>
+              <a:latin typeface="Calibri"/>
+              <a:ea typeface="DejaVu Sans"/>
+            </a:endParaRPr>
+          </a:p>
+        </p:txBody>
+      </p:sp>
+      <p:sp>
+        <p:nvSpPr>
+          <p:cNvPr id="386" name="Rectangle 216"/>
+          <p:cNvSpPr/>
+          <p:nvPr/>
+        </p:nvSpPr>
+        <p:spPr>
+          <a:xfrm>
+            <a:off x="5486400" y="0"/>
+            <a:ext cx="12600" cy="6852240"/>
+          </a:xfrm>
+          <a:prstGeom prst="rect">
+            <a:avLst/>
+          </a:prstGeom>
+          <a:solidFill>
+            <a:srgbClr val="121216"/>
+          </a:solidFill>
+          <a:ln>
+            <a:noFill/>
+          </a:ln>
+          <a:effectLst>
+            <a:outerShdw blurRad="39960" dir="5400000" dist="23040" rotWithShape="0">
+              <a:srgbClr val="000000">
+                <a:alpha val="35000"/>
+              </a:srgbClr>
+            </a:outerShdw>
+          </a:effectLst>
+        </p:spPr>
+        <p:style>
+          <a:lnRef idx="1">
+            <a:schemeClr val="accent1"/>
+          </a:lnRef>
+          <a:fillRef idx="3">
+            <a:schemeClr val="accent1"/>
+          </a:fillRef>
+          <a:effectRef idx="2">
+            <a:schemeClr val="accent1"/>
+          </a:effectRef>
+          <a:fontRef idx="minor"/>
+        </p:style>
+        <p:txBody>
+          <a:bodyPr lIns="90000" rIns="90000" tIns="45000" bIns="45000" anchor="ctr">
+            <a:noAutofit/>
+          </a:bodyPr>
+          <a:p>
+            <a:endParaRPr b="0" lang="en-US" sz="1800" spc="-1" strike="noStrike">
+              <a:solidFill>
+                <a:schemeClr val="lt1"/>
+              </a:solidFill>
+              <a:latin typeface="Calibri"/>
+              <a:ea typeface="DejaVu Sans"/>
+            </a:endParaRPr>
+          </a:p>
+        </p:txBody>
+      </p:sp>
+      <p:sp>
+        <p:nvSpPr>
+          <p:cNvPr id="387" name="Rectangle 217"/>
+          <p:cNvSpPr/>
+          <p:nvPr/>
+        </p:nvSpPr>
+        <p:spPr>
+          <a:xfrm>
+            <a:off x="6400800" y="0"/>
+            <a:ext cx="12600" cy="6852240"/>
+          </a:xfrm>
+          <a:prstGeom prst="rect">
+            <a:avLst/>
+          </a:prstGeom>
+          <a:solidFill>
+            <a:srgbClr val="121216"/>
+          </a:solidFill>
+          <a:ln>
+            <a:noFill/>
+          </a:ln>
+          <a:effectLst>
+            <a:outerShdw blurRad="39960" dir="5400000" dist="23040" rotWithShape="0">
+              <a:srgbClr val="000000">
+                <a:alpha val="35000"/>
+              </a:srgbClr>
+            </a:outerShdw>
+          </a:effectLst>
+        </p:spPr>
+        <p:style>
+          <a:lnRef idx="1">
+            <a:schemeClr val="accent1"/>
+          </a:lnRef>
+          <a:fillRef idx="3">
+            <a:schemeClr val="accent1"/>
+          </a:fillRef>
+          <a:effectRef idx="2">
+            <a:schemeClr val="accent1"/>
+          </a:effectRef>
+          <a:fontRef idx="minor"/>
+        </p:style>
+        <p:txBody>
+          <a:bodyPr lIns="90000" rIns="90000" tIns="45000" bIns="45000" anchor="ctr">
+            <a:noAutofit/>
+          </a:bodyPr>
+          <a:p>
+            <a:endParaRPr b="0" lang="en-US" sz="1800" spc="-1" strike="noStrike">
+              <a:solidFill>
+                <a:schemeClr val="lt1"/>
+              </a:solidFill>
+              <a:latin typeface="Calibri"/>
+              <a:ea typeface="DejaVu Sans"/>
+            </a:endParaRPr>
+          </a:p>
+        </p:txBody>
+      </p:sp>
+      <p:sp>
+        <p:nvSpPr>
+          <p:cNvPr id="388" name="Rectangle 218"/>
+          <p:cNvSpPr/>
+          <p:nvPr/>
+        </p:nvSpPr>
+        <p:spPr>
+          <a:xfrm>
+            <a:off x="7315200" y="0"/>
+            <a:ext cx="12600" cy="6852240"/>
+          </a:xfrm>
+          <a:prstGeom prst="rect">
+            <a:avLst/>
+          </a:prstGeom>
+          <a:solidFill>
+            <a:srgbClr val="121216"/>
+          </a:solidFill>
+          <a:ln>
+            <a:noFill/>
+          </a:ln>
+          <a:effectLst>
+            <a:outerShdw blurRad="39960" dir="5400000" dist="23040" rotWithShape="0">
+              <a:srgbClr val="000000">
+                <a:alpha val="35000"/>
+              </a:srgbClr>
+            </a:outerShdw>
+          </a:effectLst>
+        </p:spPr>
+        <p:style>
+          <a:lnRef idx="1">
+            <a:schemeClr val="accent1"/>
+          </a:lnRef>
+          <a:fillRef idx="3">
+            <a:schemeClr val="accent1"/>
+          </a:fillRef>
+          <a:effectRef idx="2">
+            <a:schemeClr val="accent1"/>
+          </a:effectRef>
+          <a:fontRef idx="minor"/>
+        </p:style>
+        <p:txBody>
+          <a:bodyPr lIns="90000" rIns="90000" tIns="45000" bIns="45000" anchor="ctr">
+            <a:noAutofit/>
+          </a:bodyPr>
+          <a:p>
+            <a:endParaRPr b="0" lang="en-US" sz="1800" spc="-1" strike="noStrike">
+              <a:solidFill>
+                <a:schemeClr val="lt1"/>
+              </a:solidFill>
+              <a:latin typeface="Calibri"/>
+              <a:ea typeface="DejaVu Sans"/>
+            </a:endParaRPr>
+          </a:p>
+        </p:txBody>
+      </p:sp>
+      <p:sp>
+        <p:nvSpPr>
+          <p:cNvPr id="389" name="Rectangle 219"/>
+          <p:cNvSpPr/>
+          <p:nvPr/>
+        </p:nvSpPr>
+        <p:spPr>
+          <a:xfrm>
+            <a:off x="8229600" y="0"/>
+            <a:ext cx="12600" cy="6852240"/>
+          </a:xfrm>
+          <a:prstGeom prst="rect">
+            <a:avLst/>
+          </a:prstGeom>
+          <a:solidFill>
+            <a:srgbClr val="121216"/>
+          </a:solidFill>
+          <a:ln>
+            <a:noFill/>
+          </a:ln>
+          <a:effectLst>
+            <a:outerShdw blurRad="39960" dir="5400000" dist="23040" rotWithShape="0">
+              <a:srgbClr val="000000">
+                <a:alpha val="35000"/>
+              </a:srgbClr>
+            </a:outerShdw>
+          </a:effectLst>
+        </p:spPr>
+        <p:style>
+          <a:lnRef idx="1">
+            <a:schemeClr val="accent1"/>
+          </a:lnRef>
+          <a:fillRef idx="3">
+            <a:schemeClr val="accent1"/>
+          </a:fillRef>
+          <a:effectRef idx="2">
+            <a:schemeClr val="accent1"/>
+          </a:effectRef>
+          <a:fontRef idx="minor"/>
+        </p:style>
+        <p:txBody>
+          <a:bodyPr lIns="90000" rIns="90000" tIns="45000" bIns="45000" anchor="ctr">
+            <a:noAutofit/>
+          </a:bodyPr>
+          <a:p>
+            <a:endParaRPr b="0" lang="en-US" sz="1800" spc="-1" strike="noStrike">
+              <a:solidFill>
+                <a:schemeClr val="lt1"/>
+              </a:solidFill>
+              <a:latin typeface="Calibri"/>
+              <a:ea typeface="DejaVu Sans"/>
+            </a:endParaRPr>
+          </a:p>
+        </p:txBody>
+      </p:sp>
+      <p:sp>
+        <p:nvSpPr>
+          <p:cNvPr id="390" name="Rectangle 220"/>
+          <p:cNvSpPr/>
+          <p:nvPr/>
+        </p:nvSpPr>
+        <p:spPr>
+          <a:xfrm>
+            <a:off x="9144000" y="0"/>
+            <a:ext cx="12600" cy="6852240"/>
+          </a:xfrm>
+          <a:prstGeom prst="rect">
+            <a:avLst/>
+          </a:prstGeom>
+          <a:solidFill>
+            <a:srgbClr val="121216"/>
+          </a:solidFill>
+          <a:ln>
+            <a:noFill/>
+          </a:ln>
+          <a:effectLst>
+            <a:outerShdw blurRad="39960" dir="5400000" dist="23040" rotWithShape="0">
+              <a:srgbClr val="000000">
+                <a:alpha val="35000"/>
+              </a:srgbClr>
+            </a:outerShdw>
+          </a:effectLst>
+        </p:spPr>
+        <p:style>
+          <a:lnRef idx="1">
+            <a:schemeClr val="accent1"/>
+          </a:lnRef>
+          <a:fillRef idx="3">
+            <a:schemeClr val="accent1"/>
+          </a:fillRef>
+          <a:effectRef idx="2">
+            <a:schemeClr val="accent1"/>
+          </a:effectRef>
+          <a:fontRef idx="minor"/>
+        </p:style>
+        <p:txBody>
+          <a:bodyPr lIns="90000" rIns="90000" tIns="45000" bIns="45000" anchor="ctr">
+            <a:noAutofit/>
+          </a:bodyPr>
+          <a:p>
+            <a:endParaRPr b="0" lang="en-US" sz="1800" spc="-1" strike="noStrike">
+              <a:solidFill>
+                <a:schemeClr val="lt1"/>
+              </a:solidFill>
+              <a:latin typeface="Calibri"/>
+              <a:ea typeface="DejaVu Sans"/>
+            </a:endParaRPr>
+          </a:p>
+        </p:txBody>
+      </p:sp>
+      <p:sp>
+        <p:nvSpPr>
+          <p:cNvPr id="391" name="Rectangle 221"/>
+          <p:cNvSpPr/>
+          <p:nvPr/>
+        </p:nvSpPr>
+        <p:spPr>
+          <a:xfrm>
+            <a:off x="10058400" y="0"/>
+            <a:ext cx="12600" cy="6852240"/>
+          </a:xfrm>
+          <a:prstGeom prst="rect">
+            <a:avLst/>
+          </a:prstGeom>
+          <a:solidFill>
+            <a:srgbClr val="121216"/>
+          </a:solidFill>
+          <a:ln>
+            <a:noFill/>
+          </a:ln>
+          <a:effectLst>
+            <a:outerShdw blurRad="39960" dir="5400000" dist="23040" rotWithShape="0">
+              <a:srgbClr val="000000">
+                <a:alpha val="35000"/>
+              </a:srgbClr>
+            </a:outerShdw>
+          </a:effectLst>
+        </p:spPr>
+        <p:style>
+          <a:lnRef idx="1">
+            <a:schemeClr val="accent1"/>
+          </a:lnRef>
+          <a:fillRef idx="3">
+            <a:schemeClr val="accent1"/>
+          </a:fillRef>
+          <a:effectRef idx="2">
+            <a:schemeClr val="accent1"/>
+          </a:effectRef>
+          <a:fontRef idx="minor"/>
+        </p:style>
+        <p:txBody>
+          <a:bodyPr lIns="90000" rIns="90000" tIns="45000" bIns="45000" anchor="ctr">
+            <a:noAutofit/>
+          </a:bodyPr>
+          <a:p>
+            <a:endParaRPr b="0" lang="en-US" sz="1800" spc="-1" strike="noStrike">
+              <a:solidFill>
+                <a:schemeClr val="lt1"/>
+              </a:solidFill>
+              <a:latin typeface="Calibri"/>
+              <a:ea typeface="DejaVu Sans"/>
+            </a:endParaRPr>
+          </a:p>
+        </p:txBody>
+      </p:sp>
+      <p:sp>
+        <p:nvSpPr>
+          <p:cNvPr id="392" name="Rectangle 222"/>
+          <p:cNvSpPr/>
+          <p:nvPr/>
+        </p:nvSpPr>
+        <p:spPr>
+          <a:xfrm>
+            <a:off x="10972800" y="0"/>
+            <a:ext cx="12600" cy="6852240"/>
+          </a:xfrm>
+          <a:prstGeom prst="rect">
+            <a:avLst/>
+          </a:prstGeom>
+          <a:solidFill>
+            <a:srgbClr val="121216"/>
+          </a:solidFill>
+          <a:ln>
+            <a:noFill/>
+          </a:ln>
+          <a:effectLst>
+            <a:outerShdw blurRad="39960" dir="5400000" dist="23040" rotWithShape="0">
+              <a:srgbClr val="000000">
+                <a:alpha val="35000"/>
+              </a:srgbClr>
+            </a:outerShdw>
+          </a:effectLst>
+        </p:spPr>
+        <p:style>
+          <a:lnRef idx="1">
+            <a:schemeClr val="accent1"/>
+          </a:lnRef>
+          <a:fillRef idx="3">
+            <a:schemeClr val="accent1"/>
+          </a:fillRef>
+          <a:effectRef idx="2">
+            <a:schemeClr val="accent1"/>
+          </a:effectRef>
+          <a:fontRef idx="minor"/>
+        </p:style>
+        <p:txBody>
+          <a:bodyPr lIns="90000" rIns="90000" tIns="45000" bIns="45000" anchor="ctr">
+            <a:noAutofit/>
+          </a:bodyPr>
+          <a:p>
+            <a:endParaRPr b="0" lang="en-US" sz="1800" spc="-1" strike="noStrike">
+              <a:solidFill>
+                <a:schemeClr val="lt1"/>
+              </a:solidFill>
+              <a:latin typeface="Calibri"/>
+              <a:ea typeface="DejaVu Sans"/>
+            </a:endParaRPr>
+          </a:p>
+        </p:txBody>
+      </p:sp>
+      <p:sp>
+        <p:nvSpPr>
+          <p:cNvPr id="393" name="Rectangle 223"/>
+          <p:cNvSpPr/>
+          <p:nvPr/>
+        </p:nvSpPr>
+        <p:spPr>
+          <a:xfrm>
+            <a:off x="11887200" y="0"/>
+            <a:ext cx="12600" cy="6852240"/>
+          </a:xfrm>
+          <a:prstGeom prst="rect">
+            <a:avLst/>
+          </a:prstGeom>
+          <a:solidFill>
+            <a:srgbClr val="121216"/>
+          </a:solidFill>
+          <a:ln>
+            <a:noFill/>
+          </a:ln>
+          <a:effectLst>
+            <a:outerShdw blurRad="39960" dir="5400000" dist="23040" rotWithShape="0">
+              <a:srgbClr val="000000">
+                <a:alpha val="35000"/>
+              </a:srgbClr>
+            </a:outerShdw>
+          </a:effectLst>
+        </p:spPr>
+        <p:style>
+          <a:lnRef idx="1">
+            <a:schemeClr val="accent1"/>
+          </a:lnRef>
+          <a:fillRef idx="3">
+            <a:schemeClr val="accent1"/>
+          </a:fillRef>
+          <a:effectRef idx="2">
+            <a:schemeClr val="accent1"/>
+          </a:effectRef>
+          <a:fontRef idx="minor"/>
+        </p:style>
+        <p:txBody>
+          <a:bodyPr lIns="90000" rIns="90000" tIns="45000" bIns="45000" anchor="ctr">
+            <a:noAutofit/>
+          </a:bodyPr>
+          <a:p>
+            <a:endParaRPr b="0" lang="en-US" sz="1800" spc="-1" strike="noStrike">
+              <a:solidFill>
+                <a:schemeClr val="lt1"/>
+              </a:solidFill>
+              <a:latin typeface="Calibri"/>
+              <a:ea typeface="DejaVu Sans"/>
+            </a:endParaRPr>
+          </a:p>
+        </p:txBody>
+      </p:sp>
+      <p:sp>
+        <p:nvSpPr>
+          <p:cNvPr id="394" name="Rectangle 224"/>
+          <p:cNvSpPr/>
+          <p:nvPr/>
+        </p:nvSpPr>
+        <p:spPr>
+          <a:xfrm>
+            <a:off x="0" y="0"/>
+            <a:ext cx="314280" cy="6852240"/>
+          </a:xfrm>
+          <a:prstGeom prst="rect">
+            <a:avLst/>
+          </a:prstGeom>
+          <a:solidFill>
+            <a:srgbClr val="ff8c00"/>
+          </a:solidFill>
+          <a:ln>
+            <a:noFill/>
+          </a:ln>
+          <a:effectLst>
+            <a:outerShdw blurRad="39960" dir="5400000" dist="23040" rotWithShape="0">
+              <a:srgbClr val="000000">
+                <a:alpha val="35000"/>
+              </a:srgbClr>
+            </a:outerShdw>
+          </a:effectLst>
+        </p:spPr>
+        <p:style>
+          <a:lnRef idx="1">
+            <a:schemeClr val="accent1"/>
+          </a:lnRef>
+          <a:fillRef idx="3">
+            <a:schemeClr val="accent1"/>
+          </a:fillRef>
+          <a:effectRef idx="2">
+            <a:schemeClr val="accent1"/>
+          </a:effectRef>
+          <a:fontRef idx="minor"/>
+        </p:style>
+        <p:txBody>
+          <a:bodyPr lIns="90000" rIns="90000" tIns="45000" bIns="45000" anchor="ctr">
+            <a:noAutofit/>
+          </a:bodyPr>
+          <a:p>
+            <a:endParaRPr b="0" lang="en-US" sz="1800" spc="-1" strike="noStrike">
+              <a:solidFill>
+                <a:schemeClr val="lt1"/>
+              </a:solidFill>
+              <a:latin typeface="Calibri"/>
+              <a:ea typeface="DejaVu Sans"/>
+            </a:endParaRPr>
+          </a:p>
+        </p:txBody>
+      </p:sp>
+      <p:sp>
+        <p:nvSpPr>
+          <p:cNvPr id="395" name="Rounded Rectangle 99"/>
+          <p:cNvSpPr/>
+          <p:nvPr/>
+        </p:nvSpPr>
+        <p:spPr>
+          <a:xfrm>
+            <a:off x="9875520" y="365760"/>
+            <a:ext cx="2005920" cy="497160"/>
+          </a:xfrm>
+          <a:prstGeom prst="roundRect">
+            <a:avLst>
+              <a:gd name="adj" fmla="val 16667"/>
+            </a:avLst>
+          </a:prstGeom>
+          <a:solidFill>
+            <a:srgbClr val="1e1e24"/>
+          </a:solidFill>
+          <a:ln>
+            <a:solidFill>
+              <a:srgbClr val="ff8c00"/>
+            </a:solidFill>
+            <a:round/>
+          </a:ln>
+          <a:effectLst>
+            <a:outerShdw blurRad="39960" dir="5400000" dist="23040" rotWithShape="0">
+              <a:srgbClr val="000000">
+                <a:alpha val="35000"/>
+              </a:srgbClr>
+            </a:outerShdw>
+          </a:effectLst>
+        </p:spPr>
+        <p:style>
+          <a:lnRef idx="1">
+            <a:schemeClr val="accent1"/>
+          </a:lnRef>
+          <a:fillRef idx="3">
+            <a:schemeClr val="accent1"/>
+          </a:fillRef>
+          <a:effectRef idx="2">
+            <a:schemeClr val="accent1"/>
+          </a:effectRef>
+          <a:fontRef idx="minor"/>
+        </p:style>
+        <p:txBody>
+          <a:bodyPr lIns="90000" rIns="90000" tIns="45000" bIns="45000" anchor="ctr">
+            <a:noAutofit/>
+          </a:bodyPr>
+          <a:p>
+            <a:pPr algn="ctr">
+              <a:lnSpc>
+                <a:spcPct val="100000"/>
+              </a:lnSpc>
+            </a:pPr>
+            <a:r>
+              <a:rPr b="1" lang="en-US" sz="1400" spc="-1" strike="noStrike">
+                <a:solidFill>
+                  <a:srgbClr val="ffb45a"/>
+                </a:solidFill>
+                <a:latin typeface="Calibri"/>
+                <a:ea typeface="DejaVu Sans"/>
+              </a:rPr>
+              <a:t>JAVA CORE</a:t>
+            </a:r>
+            <a:endParaRPr b="0" lang="en-US" sz="1400" spc="-1" strike="noStrike">
+              <a:solidFill>
+                <a:srgbClr val="ffffff"/>
+              </a:solidFill>
+              <a:latin typeface="Arial"/>
+            </a:endParaRPr>
+          </a:p>
+        </p:txBody>
+      </p:sp>
+      <p:sp>
+        <p:nvSpPr>
+          <p:cNvPr id="396" name="TextBox 43"/>
+          <p:cNvSpPr/>
+          <p:nvPr/>
+        </p:nvSpPr>
+        <p:spPr>
+          <a:xfrm>
+            <a:off x="1859040" y="732600"/>
+            <a:ext cx="7249320" cy="639000"/>
+          </a:xfrm>
+          <a:prstGeom prst="rect">
+            <a:avLst/>
+          </a:prstGeom>
+          <a:noFill/>
+          <a:ln w="0">
+            <a:noFill/>
+          </a:ln>
+        </p:spPr>
+        <p:style>
+          <a:lnRef idx="0"/>
+          <a:fillRef idx="0"/>
+          <a:effectRef idx="0"/>
+          <a:fontRef idx="minor"/>
+        </p:style>
+        <p:txBody>
+          <a:bodyPr wrap="none" lIns="90000" rIns="90000" tIns="45000" bIns="45000" anchor="t">
+            <a:spAutoFit/>
+          </a:bodyPr>
+          <a:p>
+            <a:pPr>
+              <a:lnSpc>
+                <a:spcPct val="100000"/>
+              </a:lnSpc>
+            </a:pPr>
+            <a:r>
+              <a:rPr b="1" lang="en-US" sz="3600" spc="-1" strike="noStrike">
+                <a:solidFill>
+                  <a:srgbClr val="f5f5f5"/>
+                </a:solidFill>
+                <a:latin typeface="Calibri"/>
+                <a:ea typeface="DejaVu Sans"/>
+              </a:rPr>
+              <a:t>Arithmetic Operators: Final Summary</a:t>
+            </a:r>
+            <a:endParaRPr b="0" lang="en-US" sz="3600" spc="-1" strike="noStrike">
+              <a:solidFill>
+                <a:srgbClr val="000000"/>
+              </a:solidFill>
+              <a:latin typeface="Arial"/>
+            </a:endParaRPr>
+          </a:p>
+        </p:txBody>
+      </p:sp>
+      <p:sp>
+        <p:nvSpPr>
+          <p:cNvPr id="397" name="TextBox 44"/>
+          <p:cNvSpPr/>
+          <p:nvPr/>
+        </p:nvSpPr>
+        <p:spPr>
+          <a:xfrm>
+            <a:off x="876240" y="1600200"/>
+            <a:ext cx="9815760" cy="576360"/>
+          </a:xfrm>
+          <a:prstGeom prst="rect">
+            <a:avLst/>
+          </a:prstGeom>
+          <a:noFill/>
+          <a:ln w="0">
+            <a:noFill/>
+          </a:ln>
+        </p:spPr>
+        <p:style>
+          <a:lnRef idx="0"/>
+          <a:fillRef idx="0"/>
+          <a:effectRef idx="0"/>
+          <a:fontRef idx="minor"/>
+        </p:style>
+        <p:txBody>
+          <a:bodyPr wrap="none" lIns="90000" rIns="90000" tIns="45000" bIns="45000" anchor="t">
+            <a:spAutoFit/>
+          </a:bodyPr>
+          <a:p>
+            <a:pPr>
+              <a:lnSpc>
+                <a:spcPct val="100000"/>
+              </a:lnSpc>
+            </a:pPr>
+            <a:r>
+              <a:rPr b="0" lang="en-US" sz="1600" spc="-1" strike="noStrike">
+                <a:solidFill>
+                  <a:srgbClr val="aaaaaa"/>
+                </a:solidFill>
+                <a:latin typeface="Calibri"/>
+                <a:ea typeface="DejaVu Sans"/>
+              </a:rPr>
+              <a:t>Arithmetic operators are the foundation of data manipulation and business logic in Java. Choosing the right operator, </a:t>
+            </a:r>
+            <a:endParaRPr b="0" lang="en-US" sz="1600" spc="-1" strike="noStrike">
+              <a:solidFill>
+                <a:srgbClr val="000000"/>
+              </a:solidFill>
+              <a:latin typeface="Arial"/>
+            </a:endParaRPr>
+          </a:p>
+          <a:p>
+            <a:pPr>
+              <a:lnSpc>
+                <a:spcPct val="100000"/>
+              </a:lnSpc>
+            </a:pPr>
+            <a:r>
+              <a:rPr b="0" lang="en-US" sz="1600" spc="-1" strike="noStrike">
+                <a:solidFill>
+                  <a:srgbClr val="aaaaaa"/>
+                </a:solidFill>
+                <a:latin typeface="Calibri"/>
+                <a:ea typeface="DejaVu Sans"/>
+              </a:rPr>
+              <a:t>watching your data types, and understanding execution precedence are the golden rules for bug-free code.</a:t>
+            </a:r>
+            <a:endParaRPr b="0" lang="en-US" sz="1600" spc="-1" strike="noStrike">
+              <a:solidFill>
+                <a:srgbClr val="000000"/>
+              </a:solidFill>
+              <a:latin typeface="Arial"/>
+            </a:endParaRPr>
+          </a:p>
+        </p:txBody>
+      </p:sp>
+      <p:sp>
+        <p:nvSpPr>
+          <p:cNvPr id="398" name="Rounded Rectangle 100"/>
+          <p:cNvSpPr/>
+          <p:nvPr/>
+        </p:nvSpPr>
+        <p:spPr>
+          <a:xfrm>
+            <a:off x="987480" y="3182040"/>
+            <a:ext cx="3286080" cy="2737440"/>
+          </a:xfrm>
+          <a:prstGeom prst="roundRect">
+            <a:avLst>
+              <a:gd name="adj" fmla="val 16667"/>
+            </a:avLst>
+          </a:prstGeom>
+          <a:solidFill>
+            <a:srgbClr val="08080a"/>
+          </a:solidFill>
+          <a:ln>
+            <a:noFill/>
+          </a:ln>
+          <a:effectLst>
+            <a:outerShdw blurRad="39960" dir="5400000" dist="23040" rotWithShape="0">
+              <a:srgbClr val="000000">
+                <a:alpha val="35000"/>
+              </a:srgbClr>
+            </a:outerShdw>
+          </a:effectLst>
+        </p:spPr>
+        <p:style>
+          <a:lnRef idx="1">
+            <a:schemeClr val="accent1"/>
+          </a:lnRef>
+          <a:fillRef idx="3">
+            <a:schemeClr val="accent1"/>
+          </a:fillRef>
+          <a:effectRef idx="2">
+            <a:schemeClr val="accent1"/>
+          </a:effectRef>
+          <a:fontRef idx="minor"/>
+        </p:style>
+        <p:txBody>
+          <a:bodyPr lIns="90000" rIns="90000" tIns="45000" bIns="45000" anchor="ctr">
+            <a:noAutofit/>
+          </a:bodyPr>
+          <a:p>
+            <a:endParaRPr b="0" lang="en-US" sz="1800" spc="-1" strike="noStrike">
+              <a:solidFill>
+                <a:schemeClr val="lt1"/>
+              </a:solidFill>
+              <a:latin typeface="Calibri"/>
+              <a:ea typeface="DejaVu Sans"/>
+            </a:endParaRPr>
+          </a:p>
+        </p:txBody>
+      </p:sp>
+      <p:sp>
+        <p:nvSpPr>
+          <p:cNvPr id="399" name="Rounded Rectangle 101"/>
+          <p:cNvSpPr/>
+          <p:nvPr/>
+        </p:nvSpPr>
+        <p:spPr>
+          <a:xfrm>
+            <a:off x="685800" y="2971800"/>
+            <a:ext cx="3200040" cy="3428640"/>
+          </a:xfrm>
+          <a:prstGeom prst="roundRect">
+            <a:avLst>
+              <a:gd name="adj" fmla="val 16667"/>
+            </a:avLst>
+          </a:prstGeom>
+          <a:solidFill>
+            <a:srgbClr val="16161c"/>
+          </a:solidFill>
+          <a:ln>
+            <a:solidFill>
+              <a:srgbClr val="464655"/>
+            </a:solidFill>
+            <a:round/>
+          </a:ln>
+          <a:effectLst>
+            <a:outerShdw blurRad="39960" dir="5400000" dist="23040" rotWithShape="0">
+              <a:srgbClr val="000000">
+                <a:alpha val="35000"/>
+              </a:srgbClr>
+            </a:outerShdw>
+          </a:effectLst>
+        </p:spPr>
+        <p:style>
+          <a:lnRef idx="1">
+            <a:schemeClr val="accent1"/>
+          </a:lnRef>
+          <a:fillRef idx="3">
+            <a:schemeClr val="accent1"/>
+          </a:fillRef>
+          <a:effectRef idx="2">
+            <a:schemeClr val="accent1"/>
+          </a:effectRef>
+          <a:fontRef idx="minor"/>
+        </p:style>
+        <p:txBody>
+          <a:bodyPr lIns="90000" rIns="90000" tIns="45000" bIns="45000" anchor="ctr">
+            <a:noAutofit/>
+          </a:bodyPr>
+          <a:p>
+            <a:pPr>
+              <a:lnSpc>
+                <a:spcPct val="100000"/>
+              </a:lnSpc>
+            </a:pPr>
+            <a:r>
+              <a:rPr b="1" lang="en-US" sz="1400" spc="-1" strike="noStrike">
+                <a:solidFill>
+                  <a:schemeClr val="lt1"/>
+                </a:solidFill>
+                <a:latin typeface="Calibri"/>
+                <a:ea typeface="DejaVu Sans"/>
+              </a:rPr>
+              <a:t>The Golden Rules to Remember:</a:t>
+            </a:r>
+            <a:endParaRPr b="0" lang="en-US" sz="1400" spc="-1" strike="noStrike">
+              <a:solidFill>
+                <a:srgbClr val="ffffff"/>
+              </a:solidFill>
+              <a:latin typeface="Arial"/>
+            </a:endParaRPr>
+          </a:p>
+          <a:p>
+            <a:pPr marL="216000" indent="-216000">
+              <a:lnSpc>
+                <a:spcPct val="100000"/>
+              </a:lnSpc>
+              <a:buClr>
+                <a:srgbClr val="ffffff"/>
+              </a:buClr>
+              <a:buFont typeface="Wingdings" charset="2"/>
+              <a:buChar char=""/>
+            </a:pPr>
+            <a:r>
+              <a:rPr b="0" lang="en-US" sz="1400" spc="-1" strike="noStrike">
+                <a:solidFill>
+                  <a:schemeClr val="lt1"/>
+                </a:solidFill>
+                <a:latin typeface="Calibri"/>
+                <a:ea typeface="DejaVu Sans"/>
+              </a:rPr>
+              <a:t>The Big 5: +, -, *, /, and % (Modulo).</a:t>
+            </a:r>
+            <a:endParaRPr b="0" lang="en-US" sz="1400" spc="-1" strike="noStrike">
+              <a:solidFill>
+                <a:srgbClr val="ffffff"/>
+              </a:solidFill>
+              <a:latin typeface="Arial"/>
+            </a:endParaRPr>
+          </a:p>
+          <a:p>
+            <a:pPr marL="216000" indent="-216000">
+              <a:lnSpc>
+                <a:spcPct val="100000"/>
+              </a:lnSpc>
+              <a:buClr>
+                <a:srgbClr val="ffffff"/>
+              </a:buClr>
+              <a:buFont typeface="Wingdings" charset="2"/>
+              <a:buChar char=""/>
+            </a:pPr>
+            <a:r>
+              <a:rPr b="0" lang="en-US" sz="1400" spc="-1" strike="noStrike">
+                <a:solidFill>
+                  <a:schemeClr val="lt1"/>
+                </a:solidFill>
+                <a:latin typeface="Calibri"/>
+                <a:ea typeface="DejaVu Sans"/>
+              </a:rPr>
+              <a:t>Precedence: Multiplication, division, and modulo always run before addition/subtraction. Parentheses () override all rules.</a:t>
+            </a:r>
+            <a:endParaRPr b="0" lang="en-US" sz="1400" spc="-1" strike="noStrike">
+              <a:solidFill>
+                <a:srgbClr val="ffffff"/>
+              </a:solidFill>
+              <a:latin typeface="Arial"/>
+            </a:endParaRPr>
+          </a:p>
+          <a:p>
+            <a:pPr marL="216000" indent="-216000">
+              <a:lnSpc>
+                <a:spcPct val="100000"/>
+              </a:lnSpc>
+              <a:buClr>
+                <a:srgbClr val="ffffff"/>
+              </a:buClr>
+              <a:buFont typeface="Wingdings" charset="2"/>
+              <a:buChar char=""/>
+            </a:pPr>
+            <a:r>
+              <a:rPr b="0" lang="en-US" sz="1400" spc="-1" strike="noStrike">
+                <a:solidFill>
+                  <a:schemeClr val="lt1"/>
+                </a:solidFill>
+                <a:latin typeface="Calibri"/>
+                <a:ea typeface="DejaVu Sans"/>
+              </a:rPr>
+              <a:t>Division Trap: Dividing two integers (int) always drops the decimal. For precision, at least one operand must be a double.</a:t>
+            </a:r>
+            <a:endParaRPr b="0" lang="en-US" sz="1400" spc="-1" strike="noStrike">
+              <a:solidFill>
+                <a:srgbClr val="ffffff"/>
+              </a:solidFill>
+              <a:latin typeface="Arial"/>
+            </a:endParaRPr>
+          </a:p>
+          <a:p>
+            <a:pPr marL="216000" indent="-216000">
+              <a:lnSpc>
+                <a:spcPct val="100000"/>
+              </a:lnSpc>
+              <a:buClr>
+                <a:srgbClr val="ffffff"/>
+              </a:buClr>
+              <a:buFont typeface="Wingdings" charset="2"/>
+              <a:buChar char=""/>
+            </a:pPr>
+            <a:r>
+              <a:rPr b="0" lang="en-US" sz="1400" spc="-1" strike="noStrike">
+                <a:solidFill>
+                  <a:schemeClr val="lt1"/>
+                </a:solidFill>
+                <a:latin typeface="Calibri"/>
+                <a:ea typeface="DejaVu Sans"/>
+              </a:rPr>
+              <a:t>Shortcuts: ++/-- (increment/decrement) and +=/*= (compound assignments) make code much cleaner and easier to read.</a:t>
+            </a:r>
+            <a:endParaRPr b="0" lang="en-US" sz="1400" spc="-1" strike="noStrike">
+              <a:solidFill>
+                <a:srgbClr val="ffffff"/>
+              </a:solidFill>
+              <a:latin typeface="Arial"/>
+            </a:endParaRPr>
+          </a:p>
+        </p:txBody>
+      </p:sp>
+      <p:sp>
+        <p:nvSpPr>
+          <p:cNvPr id="400" name="Rounded Rectangle 102"/>
+          <p:cNvSpPr/>
+          <p:nvPr/>
+        </p:nvSpPr>
+        <p:spPr>
+          <a:xfrm>
+            <a:off x="4507920" y="3182040"/>
+            <a:ext cx="3286080" cy="2737440"/>
+          </a:xfrm>
+          <a:prstGeom prst="roundRect">
+            <a:avLst>
+              <a:gd name="adj" fmla="val 16667"/>
+            </a:avLst>
+          </a:prstGeom>
+          <a:solidFill>
+            <a:srgbClr val="08080a"/>
+          </a:solidFill>
+          <a:ln>
+            <a:noFill/>
+          </a:ln>
+          <a:effectLst>
+            <a:outerShdw blurRad="39960" dir="5400000" dist="23040" rotWithShape="0">
+              <a:srgbClr val="000000">
+                <a:alpha val="35000"/>
+              </a:srgbClr>
+            </a:outerShdw>
+          </a:effectLst>
+        </p:spPr>
+        <p:style>
+          <a:lnRef idx="1">
+            <a:schemeClr val="accent1"/>
+          </a:lnRef>
+          <a:fillRef idx="3">
+            <a:schemeClr val="accent1"/>
+          </a:fillRef>
+          <a:effectRef idx="2">
+            <a:schemeClr val="accent1"/>
+          </a:effectRef>
+          <a:fontRef idx="minor"/>
+        </p:style>
+        <p:txBody>
+          <a:bodyPr lIns="90000" rIns="90000" tIns="45000" bIns="45000" anchor="ctr">
+            <a:noAutofit/>
+          </a:bodyPr>
+          <a:p>
+            <a:endParaRPr b="0" lang="en-US" sz="1800" spc="-1" strike="noStrike">
+              <a:solidFill>
+                <a:schemeClr val="lt1"/>
+              </a:solidFill>
+              <a:latin typeface="Calibri"/>
+              <a:ea typeface="DejaVu Sans"/>
+            </a:endParaRPr>
+          </a:p>
+        </p:txBody>
+      </p:sp>
+      <p:sp>
+        <p:nvSpPr>
+          <p:cNvPr id="401" name="Rounded Rectangle 103"/>
+          <p:cNvSpPr/>
+          <p:nvPr/>
+        </p:nvSpPr>
+        <p:spPr>
+          <a:xfrm>
+            <a:off x="4257360" y="2971800"/>
+            <a:ext cx="3286080" cy="3426480"/>
+          </a:xfrm>
+          <a:prstGeom prst="roundRect">
+            <a:avLst>
+              <a:gd name="adj" fmla="val 16667"/>
+            </a:avLst>
+          </a:prstGeom>
+          <a:solidFill>
+            <a:srgbClr val="16161c"/>
+          </a:solidFill>
+          <a:ln>
+            <a:solidFill>
+              <a:srgbClr val="464655"/>
+            </a:solidFill>
+            <a:round/>
+          </a:ln>
+          <a:effectLst>
+            <a:outerShdw blurRad="39960" dir="5400000" dist="23040" rotWithShape="0">
+              <a:srgbClr val="000000">
+                <a:alpha val="35000"/>
+              </a:srgbClr>
+            </a:outerShdw>
+          </a:effectLst>
+        </p:spPr>
+        <p:style>
+          <a:lnRef idx="1">
+            <a:schemeClr val="accent1"/>
+          </a:lnRef>
+          <a:fillRef idx="3">
+            <a:schemeClr val="accent1"/>
+          </a:fillRef>
+          <a:effectRef idx="2">
+            <a:schemeClr val="accent1"/>
+          </a:effectRef>
+          <a:fontRef idx="minor"/>
+        </p:style>
+        <p:txBody>
+          <a:bodyPr lIns="90000" rIns="90000" tIns="45000" bIns="45000" anchor="ctr">
+            <a:noAutofit/>
+          </a:bodyPr>
+          <a:p>
+            <a:pPr>
+              <a:lnSpc>
+                <a:spcPct val="100000"/>
+              </a:lnSpc>
+            </a:pPr>
+            <a:r>
+              <a:rPr b="0" lang="en-US" sz="1400" spc="-1" strike="noStrike">
+                <a:solidFill>
+                  <a:schemeClr val="lt1"/>
+                </a:solidFill>
+                <a:latin typeface="Calibri"/>
+                <a:ea typeface="DejaVu Sans"/>
+              </a:rPr>
+              <a:t>[ The Developer's Checklist ]</a:t>
+            </a:r>
+            <a:endParaRPr b="0" lang="en-US" sz="1400" spc="-1" strike="noStrike">
+              <a:solidFill>
+                <a:srgbClr val="ffffff"/>
+              </a:solidFill>
+              <a:latin typeface="Arial"/>
+            </a:endParaRPr>
+          </a:p>
+          <a:p>
+            <a:pPr>
+              <a:lnSpc>
+                <a:spcPct val="100000"/>
+              </a:lnSpc>
+            </a:pPr>
+            <a:r>
+              <a:rPr b="0" lang="en-US" sz="1400" spc="-1" strike="noStrike">
+                <a:solidFill>
+                  <a:schemeClr val="lt1"/>
+                </a:solidFill>
+                <a:latin typeface="Calibri"/>
+                <a:ea typeface="DejaVu Sans"/>
+              </a:rPr>
+              <a:t>├──</a:t>
+            </a:r>
+            <a:r>
+              <a:rPr b="0" lang="en-US" sz="1400" spc="-1" strike="noStrike">
+                <a:solidFill>
+                  <a:schemeClr val="lt1"/>
+                </a:solidFill>
+                <a:latin typeface="Calibri"/>
+                <a:ea typeface="DejaVu Sans"/>
+              </a:rPr>
+              <a:t>&gt; Checking for Odd or Even?</a:t>
+            </a:r>
+            <a:endParaRPr b="0" lang="en-US" sz="1400" spc="-1" strike="noStrike">
+              <a:solidFill>
+                <a:srgbClr val="ffffff"/>
+              </a:solidFill>
+              <a:latin typeface="Arial"/>
+            </a:endParaRPr>
+          </a:p>
+          <a:p>
+            <a:pPr>
+              <a:lnSpc>
+                <a:spcPct val="100000"/>
+              </a:lnSpc>
+            </a:pPr>
+            <a:r>
+              <a:rPr b="0" lang="en-US" sz="1400" spc="-1" strike="noStrike">
+                <a:solidFill>
+                  <a:schemeClr val="lt1"/>
+                </a:solidFill>
+                <a:latin typeface="Calibri"/>
+                <a:ea typeface="DejaVu Sans"/>
+              </a:rPr>
+              <a:t>│ └── </a:t>
+            </a:r>
+            <a:r>
+              <a:rPr b="0" lang="en-US" sz="1400" spc="-1" strike="noStrike">
+                <a:solidFill>
+                  <a:schemeClr val="lt1"/>
+                </a:solidFill>
+                <a:latin typeface="Calibri"/>
+                <a:ea typeface="DejaVu Sans"/>
+              </a:rPr>
+              <a:t>Always use % 2!</a:t>
+            </a:r>
+            <a:endParaRPr b="0" lang="en-US" sz="1400" spc="-1" strike="noStrike">
+              <a:solidFill>
+                <a:srgbClr val="ffffff"/>
+              </a:solidFill>
+              <a:latin typeface="Arial"/>
+            </a:endParaRPr>
+          </a:p>
+          <a:p>
+            <a:pPr>
+              <a:lnSpc>
+                <a:spcPct val="100000"/>
+              </a:lnSpc>
+            </a:pPr>
+            <a:r>
+              <a:rPr b="0" lang="en-US" sz="1400" spc="-1" strike="noStrike">
+                <a:solidFill>
+                  <a:schemeClr val="lt1"/>
+                </a:solidFill>
+                <a:latin typeface="Calibri"/>
+                <a:ea typeface="DejaVu Sans"/>
+              </a:rPr>
+              <a:t>│</a:t>
+            </a:r>
+            <a:endParaRPr b="0" lang="en-US" sz="1400" spc="-1" strike="noStrike">
+              <a:solidFill>
+                <a:srgbClr val="ffffff"/>
+              </a:solidFill>
+              <a:latin typeface="Arial"/>
+            </a:endParaRPr>
+          </a:p>
+          <a:p>
+            <a:pPr>
+              <a:lnSpc>
+                <a:spcPct val="100000"/>
+              </a:lnSpc>
+            </a:pPr>
+            <a:r>
+              <a:rPr b="0" lang="en-US" sz="1400" spc="-1" strike="noStrike">
+                <a:solidFill>
+                  <a:schemeClr val="lt1"/>
+                </a:solidFill>
+                <a:latin typeface="Calibri"/>
+                <a:ea typeface="DejaVu Sans"/>
+              </a:rPr>
+              <a:t>├──</a:t>
+            </a:r>
+            <a:r>
+              <a:rPr b="0" lang="en-US" sz="1400" spc="-1" strike="noStrike">
+                <a:solidFill>
+                  <a:schemeClr val="lt1"/>
+                </a:solidFill>
+                <a:latin typeface="Calibri"/>
+                <a:ea typeface="DejaVu Sans"/>
+              </a:rPr>
+              <a:t>&gt; Need decimals in a division?</a:t>
+            </a:r>
+            <a:endParaRPr b="0" lang="en-US" sz="1400" spc="-1" strike="noStrike">
+              <a:solidFill>
+                <a:srgbClr val="ffffff"/>
+              </a:solidFill>
+              <a:latin typeface="Arial"/>
+            </a:endParaRPr>
+          </a:p>
+          <a:p>
+            <a:pPr>
+              <a:lnSpc>
+                <a:spcPct val="100000"/>
+              </a:lnSpc>
+            </a:pPr>
+            <a:r>
+              <a:rPr b="0" lang="en-US" sz="1400" spc="-1" strike="noStrike">
+                <a:solidFill>
+                  <a:schemeClr val="lt1"/>
+                </a:solidFill>
+                <a:latin typeface="Calibri"/>
+                <a:ea typeface="DejaVu Sans"/>
+              </a:rPr>
+              <a:t>│ └── </a:t>
+            </a:r>
+            <a:r>
+              <a:rPr b="0" lang="en-US" sz="1400" spc="-1" strike="noStrike">
+                <a:solidFill>
+                  <a:schemeClr val="lt1"/>
+                </a:solidFill>
+                <a:latin typeface="Calibri"/>
+                <a:ea typeface="DejaVu Sans"/>
+              </a:rPr>
+              <a:t>Make one number a double (e.g., 2.0)!</a:t>
+            </a:r>
+            <a:endParaRPr b="0" lang="en-US" sz="1400" spc="-1" strike="noStrike">
+              <a:solidFill>
+                <a:srgbClr val="ffffff"/>
+              </a:solidFill>
+              <a:latin typeface="Arial"/>
+            </a:endParaRPr>
+          </a:p>
+          <a:p>
+            <a:pPr>
+              <a:lnSpc>
+                <a:spcPct val="100000"/>
+              </a:lnSpc>
+            </a:pPr>
+            <a:r>
+              <a:rPr b="0" lang="en-US" sz="1400" spc="-1" strike="noStrike">
+                <a:solidFill>
+                  <a:schemeClr val="lt1"/>
+                </a:solidFill>
+                <a:latin typeface="Calibri"/>
+                <a:ea typeface="DejaVu Sans"/>
+              </a:rPr>
+              <a:t>│</a:t>
+            </a:r>
+            <a:endParaRPr b="0" lang="en-US" sz="1400" spc="-1" strike="noStrike">
+              <a:solidFill>
+                <a:srgbClr val="ffffff"/>
+              </a:solidFill>
+              <a:latin typeface="Arial"/>
+            </a:endParaRPr>
+          </a:p>
+          <a:p>
+            <a:pPr>
+              <a:lnSpc>
+                <a:spcPct val="100000"/>
+              </a:lnSpc>
+            </a:pPr>
+            <a:r>
+              <a:rPr b="0" lang="en-US" sz="1400" spc="-1" strike="noStrike">
+                <a:solidFill>
+                  <a:schemeClr val="lt1"/>
+                </a:solidFill>
+                <a:latin typeface="Calibri"/>
+                <a:ea typeface="DejaVu Sans"/>
+              </a:rPr>
+              <a:t>├──</a:t>
+            </a:r>
+            <a:r>
+              <a:rPr b="0" lang="en-US" sz="1400" spc="-1" strike="noStrike">
+                <a:solidFill>
+                  <a:schemeClr val="lt1"/>
+                </a:solidFill>
+                <a:latin typeface="Calibri"/>
+                <a:ea typeface="DejaVu Sans"/>
+              </a:rPr>
+              <a:t>&gt; Want to force execution order?</a:t>
+            </a:r>
+            <a:endParaRPr b="0" lang="en-US" sz="1400" spc="-1" strike="noStrike">
+              <a:solidFill>
+                <a:srgbClr val="ffffff"/>
+              </a:solidFill>
+              <a:latin typeface="Arial"/>
+            </a:endParaRPr>
+          </a:p>
+          <a:p>
+            <a:pPr>
+              <a:lnSpc>
+                <a:spcPct val="100000"/>
+              </a:lnSpc>
+            </a:pPr>
+            <a:r>
+              <a:rPr b="0" lang="en-US" sz="1400" spc="-1" strike="noStrike">
+                <a:solidFill>
+                  <a:schemeClr val="lt1"/>
+                </a:solidFill>
+                <a:latin typeface="Calibri"/>
+                <a:ea typeface="DejaVu Sans"/>
+              </a:rPr>
+              <a:t>│ └── </a:t>
+            </a:r>
+            <a:r>
+              <a:rPr b="0" lang="en-US" sz="1400" spc="-1" strike="noStrike">
+                <a:solidFill>
+                  <a:schemeClr val="lt1"/>
+                </a:solidFill>
+                <a:latin typeface="Calibri"/>
+                <a:ea typeface="DejaVu Sans"/>
+              </a:rPr>
+              <a:t>Wrap the math in parentheses ()!</a:t>
+            </a:r>
+            <a:endParaRPr b="0" lang="en-US" sz="1400" spc="-1" strike="noStrike">
+              <a:solidFill>
+                <a:srgbClr val="ffffff"/>
+              </a:solidFill>
+              <a:latin typeface="Arial"/>
+            </a:endParaRPr>
+          </a:p>
+          <a:p>
+            <a:pPr>
+              <a:lnSpc>
+                <a:spcPct val="100000"/>
+              </a:lnSpc>
+            </a:pPr>
+            <a:r>
+              <a:rPr b="0" lang="en-US" sz="1400" spc="-1" strike="noStrike">
+                <a:solidFill>
+                  <a:schemeClr val="lt1"/>
+                </a:solidFill>
+                <a:latin typeface="Calibri"/>
+                <a:ea typeface="DejaVu Sans"/>
+              </a:rPr>
+              <a:t>│</a:t>
+            </a:r>
+            <a:endParaRPr b="0" lang="en-US" sz="1400" spc="-1" strike="noStrike">
+              <a:solidFill>
+                <a:srgbClr val="ffffff"/>
+              </a:solidFill>
+              <a:latin typeface="Arial"/>
+            </a:endParaRPr>
+          </a:p>
+          <a:p>
+            <a:pPr>
+              <a:lnSpc>
+                <a:spcPct val="100000"/>
+              </a:lnSpc>
+            </a:pPr>
+            <a:r>
+              <a:rPr b="0" lang="en-US" sz="1400" spc="-1" strike="noStrike">
+                <a:solidFill>
+                  <a:schemeClr val="lt1"/>
+                </a:solidFill>
+                <a:latin typeface="Calibri"/>
+                <a:ea typeface="DejaVu Sans"/>
+              </a:rPr>
+              <a:t>└──</a:t>
+            </a:r>
+            <a:r>
+              <a:rPr b="0" lang="en-US" sz="1400" spc="-1" strike="noStrike">
+                <a:solidFill>
+                  <a:schemeClr val="lt1"/>
+                </a:solidFill>
+                <a:latin typeface="Calibri"/>
+                <a:ea typeface="DejaVu Sans"/>
+              </a:rPr>
+              <a:t>&gt; Updating an existing variable?</a:t>
+            </a:r>
+            <a:endParaRPr b="0" lang="en-US" sz="1400" spc="-1" strike="noStrike">
+              <a:solidFill>
+                <a:srgbClr val="ffffff"/>
+              </a:solidFill>
+              <a:latin typeface="Arial"/>
+            </a:endParaRPr>
+          </a:p>
+          <a:p>
+            <a:pPr>
+              <a:lnSpc>
+                <a:spcPct val="100000"/>
+              </a:lnSpc>
+            </a:pPr>
+            <a:r>
+              <a:rPr b="0" lang="en-US" sz="1400" spc="-1" strike="noStrike">
+                <a:solidFill>
+                  <a:schemeClr val="lt1"/>
+                </a:solidFill>
+                <a:latin typeface="Calibri"/>
+                <a:ea typeface="DejaVu Sans"/>
+              </a:rPr>
+              <a:t>└── </a:t>
+            </a:r>
+            <a:r>
+              <a:rPr b="0" lang="en-US" sz="1400" spc="-1" strike="noStrike">
+                <a:solidFill>
+                  <a:schemeClr val="lt1"/>
+                </a:solidFill>
+                <a:latin typeface="Calibri"/>
+                <a:ea typeface="DejaVu Sans"/>
+              </a:rPr>
+              <a:t>Use x += 5 instead of x = x + 5!</a:t>
+            </a:r>
+            <a:endParaRPr b="0" lang="en-US" sz="1400" spc="-1" strike="noStrike">
+              <a:solidFill>
+                <a:srgbClr val="ffffff"/>
+              </a:solidFill>
+              <a:latin typeface="Arial"/>
+            </a:endParaRPr>
+          </a:p>
+        </p:txBody>
+      </p:sp>
+      <p:sp>
+        <p:nvSpPr>
+          <p:cNvPr id="402" name="Rounded Rectangle 104"/>
+          <p:cNvSpPr/>
+          <p:nvPr/>
+        </p:nvSpPr>
+        <p:spPr>
+          <a:xfrm>
+            <a:off x="8028360" y="3182040"/>
+            <a:ext cx="3286080" cy="2737440"/>
+          </a:xfrm>
+          <a:prstGeom prst="roundRect">
+            <a:avLst>
+              <a:gd name="adj" fmla="val 16667"/>
+            </a:avLst>
+          </a:prstGeom>
+          <a:solidFill>
+            <a:srgbClr val="08080a"/>
+          </a:solidFill>
+          <a:ln>
+            <a:noFill/>
+          </a:ln>
+          <a:effectLst>
+            <a:outerShdw blurRad="39960" dir="5400000" dist="23040" rotWithShape="0">
+              <a:srgbClr val="000000">
+                <a:alpha val="35000"/>
+              </a:srgbClr>
+            </a:outerShdw>
+          </a:effectLst>
+        </p:spPr>
+        <p:style>
+          <a:lnRef idx="1">
+            <a:schemeClr val="accent1"/>
+          </a:lnRef>
+          <a:fillRef idx="3">
+            <a:schemeClr val="accent1"/>
+          </a:fillRef>
+          <a:effectRef idx="2">
+            <a:schemeClr val="accent1"/>
+          </a:effectRef>
+          <a:fontRef idx="minor"/>
+        </p:style>
+        <p:txBody>
+          <a:bodyPr lIns="90000" rIns="90000" tIns="45000" bIns="45000" anchor="ctr">
+            <a:noAutofit/>
+          </a:bodyPr>
+          <a:p>
+            <a:endParaRPr b="0" lang="en-US" sz="1800" spc="-1" strike="noStrike">
+              <a:solidFill>
+                <a:schemeClr val="lt1"/>
+              </a:solidFill>
+              <a:latin typeface="Calibri"/>
+              <a:ea typeface="DejaVu Sans"/>
+            </a:endParaRPr>
+          </a:p>
+        </p:txBody>
+      </p:sp>
+      <p:sp>
+        <p:nvSpPr>
+          <p:cNvPr id="403" name="Rounded Rectangle 105"/>
+          <p:cNvSpPr/>
+          <p:nvPr/>
+        </p:nvSpPr>
+        <p:spPr>
+          <a:xfrm>
+            <a:off x="8001000" y="2514600"/>
+            <a:ext cx="3427560" cy="3885840"/>
+          </a:xfrm>
+          <a:prstGeom prst="roundRect">
+            <a:avLst>
+              <a:gd name="adj" fmla="val 16667"/>
+            </a:avLst>
+          </a:prstGeom>
+          <a:solidFill>
+            <a:srgbClr val="16161c"/>
+          </a:solidFill>
+          <a:ln>
+            <a:solidFill>
+              <a:srgbClr val="464655"/>
+            </a:solidFill>
+            <a:round/>
+          </a:ln>
+          <a:effectLst>
+            <a:outerShdw blurRad="39960" dir="5400000" dist="23040" rotWithShape="0">
+              <a:srgbClr val="000000">
+                <a:alpha val="35000"/>
+              </a:srgbClr>
+            </a:outerShdw>
+          </a:effectLst>
+        </p:spPr>
+        <p:style>
+          <a:lnRef idx="1">
+            <a:schemeClr val="accent1"/>
+          </a:lnRef>
+          <a:fillRef idx="3">
+            <a:schemeClr val="accent1"/>
+          </a:fillRef>
+          <a:effectRef idx="2">
+            <a:schemeClr val="accent1"/>
+          </a:effectRef>
+          <a:fontRef idx="minor"/>
+        </p:style>
+        <p:txBody>
+          <a:bodyPr lIns="90000" rIns="90000" tIns="45000" bIns="45000" anchor="ctr">
+            <a:noAutofit/>
+          </a:bodyPr>
+          <a:p>
+            <a:pPr algn="ctr">
+              <a:lnSpc>
+                <a:spcPct val="100000"/>
+              </a:lnSpc>
+            </a:pPr>
+            <a:r>
+              <a:rPr b="0" lang="en-US" sz="950" spc="-1" strike="noStrike">
+                <a:solidFill>
+                  <a:srgbClr val="78ffc8"/>
+                </a:solidFill>
+                <a:latin typeface="Consolas"/>
+                <a:ea typeface="DejaVu Sans"/>
+              </a:rPr>
+              <a:t>public class ArithmeticSummary {</a:t>
+            </a:r>
+            <a:endParaRPr b="0" lang="en-US" sz="950" spc="-1" strike="noStrike">
+              <a:solidFill>
+                <a:srgbClr val="ffffff"/>
+              </a:solidFill>
+              <a:latin typeface="Arial"/>
+            </a:endParaRPr>
+          </a:p>
+          <a:p>
+            <a:pPr algn="ctr">
+              <a:lnSpc>
+                <a:spcPct val="100000"/>
+              </a:lnSpc>
+            </a:pPr>
+            <a:r>
+              <a:rPr b="0" lang="en-US" sz="950" spc="-1" strike="noStrike">
+                <a:solidFill>
+                  <a:srgbClr val="78ffc8"/>
+                </a:solidFill>
+                <a:latin typeface="Consolas"/>
+                <a:ea typeface="DejaVu Sans"/>
+              </a:rPr>
+              <a:t>    </a:t>
+            </a:r>
+            <a:r>
+              <a:rPr b="0" lang="en-US" sz="950" spc="-1" strike="noStrike">
+                <a:solidFill>
+                  <a:srgbClr val="78ffc8"/>
+                </a:solidFill>
+                <a:latin typeface="Consolas"/>
+                <a:ea typeface="DejaVu Sans"/>
+              </a:rPr>
+              <a:t>public static void main(String[] args) {</a:t>
+            </a:r>
+            <a:endParaRPr b="0" lang="en-US" sz="950" spc="-1" strike="noStrike">
+              <a:solidFill>
+                <a:srgbClr val="ffffff"/>
+              </a:solidFill>
+              <a:latin typeface="Arial"/>
+            </a:endParaRPr>
+          </a:p>
+          <a:p>
+            <a:pPr algn="ctr">
+              <a:lnSpc>
+                <a:spcPct val="100000"/>
+              </a:lnSpc>
+            </a:pPr>
+            <a:endParaRPr b="0" lang="en-US" sz="950" spc="-1" strike="noStrike">
+              <a:solidFill>
+                <a:srgbClr val="ffffff"/>
+              </a:solidFill>
+              <a:latin typeface="Arial"/>
+            </a:endParaRPr>
+          </a:p>
+          <a:p>
+            <a:pPr algn="ctr">
+              <a:lnSpc>
+                <a:spcPct val="100000"/>
+              </a:lnSpc>
+            </a:pPr>
+            <a:r>
+              <a:rPr b="0" lang="en-US" sz="950" spc="-1" strike="noStrike">
+                <a:solidFill>
+                  <a:srgbClr val="78ffc8"/>
+                </a:solidFill>
+                <a:latin typeface="Consolas"/>
+                <a:ea typeface="DejaVu Sans"/>
+              </a:rPr>
+              <a:t>        </a:t>
+            </a:r>
+            <a:r>
+              <a:rPr b="0" lang="en-US" sz="950" spc="-1" strike="noStrike">
+                <a:solidFill>
+                  <a:srgbClr val="78ffc8"/>
+                </a:solidFill>
+                <a:latin typeface="Consolas"/>
+                <a:ea typeface="DejaVu Sans"/>
+              </a:rPr>
+              <a:t>int num = 10;</a:t>
+            </a:r>
+            <a:endParaRPr b="0" lang="en-US" sz="950" spc="-1" strike="noStrike">
+              <a:solidFill>
+                <a:srgbClr val="ffffff"/>
+              </a:solidFill>
+              <a:latin typeface="Arial"/>
+            </a:endParaRPr>
+          </a:p>
+          <a:p>
+            <a:pPr algn="ctr">
+              <a:lnSpc>
+                <a:spcPct val="100000"/>
+              </a:lnSpc>
+            </a:pPr>
+            <a:endParaRPr b="0" lang="en-US" sz="950" spc="-1" strike="noStrike">
+              <a:solidFill>
+                <a:srgbClr val="ffffff"/>
+              </a:solidFill>
+              <a:latin typeface="Arial"/>
+            </a:endParaRPr>
+          </a:p>
+          <a:p>
+            <a:pPr algn="ctr">
+              <a:lnSpc>
+                <a:spcPct val="100000"/>
+              </a:lnSpc>
+            </a:pPr>
+            <a:r>
+              <a:rPr b="0" lang="en-US" sz="950" spc="-1" strike="noStrike">
+                <a:solidFill>
+                  <a:srgbClr val="78ffc8"/>
+                </a:solidFill>
+                <a:latin typeface="Consolas"/>
+                <a:ea typeface="DejaVu Sans"/>
+              </a:rPr>
+              <a:t>        </a:t>
+            </a:r>
+            <a:r>
+              <a:rPr b="0" lang="en-US" sz="950" spc="-1" strike="noStrike">
+                <a:solidFill>
+                  <a:srgbClr val="78ffc8"/>
+                </a:solidFill>
+                <a:latin typeface="Consolas"/>
+                <a:ea typeface="DejaVu Sans"/>
+              </a:rPr>
+              <a:t>// 1. Precedence &amp; Modulo</a:t>
+            </a:r>
+            <a:endParaRPr b="0" lang="en-US" sz="950" spc="-1" strike="noStrike">
+              <a:solidFill>
+                <a:srgbClr val="ffffff"/>
+              </a:solidFill>
+              <a:latin typeface="Arial"/>
+            </a:endParaRPr>
+          </a:p>
+          <a:p>
+            <a:pPr algn="ctr">
+              <a:lnSpc>
+                <a:spcPct val="100000"/>
+              </a:lnSpc>
+            </a:pPr>
+            <a:r>
+              <a:rPr b="0" lang="en-US" sz="950" spc="-1" strike="noStrike">
+                <a:solidFill>
+                  <a:srgbClr val="78ffc8"/>
+                </a:solidFill>
+                <a:latin typeface="Consolas"/>
+                <a:ea typeface="DejaVu Sans"/>
+              </a:rPr>
+              <a:t>        </a:t>
+            </a:r>
+            <a:r>
+              <a:rPr b="0" lang="en-US" sz="950" spc="-1" strike="noStrike">
+                <a:solidFill>
+                  <a:srgbClr val="78ffc8"/>
+                </a:solidFill>
+                <a:latin typeface="Consolas"/>
+                <a:ea typeface="DejaVu Sans"/>
+              </a:rPr>
+              <a:t>// Remainder of 15 / 4 = 3</a:t>
+            </a:r>
+            <a:endParaRPr b="0" lang="en-US" sz="950" spc="-1" strike="noStrike">
+              <a:solidFill>
+                <a:srgbClr val="ffffff"/>
+              </a:solidFill>
+              <a:latin typeface="Arial"/>
+            </a:endParaRPr>
+          </a:p>
+          <a:p>
+            <a:pPr algn="ctr">
+              <a:lnSpc>
+                <a:spcPct val="100000"/>
+              </a:lnSpc>
+            </a:pPr>
+            <a:r>
+              <a:rPr b="0" lang="en-US" sz="950" spc="-1" strike="noStrike">
+                <a:solidFill>
+                  <a:srgbClr val="78ffc8"/>
+                </a:solidFill>
+                <a:latin typeface="Consolas"/>
+                <a:ea typeface="DejaVu Sans"/>
+              </a:rPr>
+              <a:t>        </a:t>
+            </a:r>
+            <a:r>
+              <a:rPr b="0" lang="en-US" sz="950" spc="-1" strike="noStrike">
+                <a:solidFill>
+                  <a:srgbClr val="78ffc8"/>
+                </a:solidFill>
+                <a:latin typeface="Consolas"/>
+                <a:ea typeface="DejaVu Sans"/>
+              </a:rPr>
+              <a:t>int result = (num + 5) % 4; </a:t>
+            </a:r>
+            <a:endParaRPr b="0" lang="en-US" sz="950" spc="-1" strike="noStrike">
+              <a:solidFill>
+                <a:srgbClr val="ffffff"/>
+              </a:solidFill>
+              <a:latin typeface="Arial"/>
+            </a:endParaRPr>
+          </a:p>
+          <a:p>
+            <a:pPr algn="ctr">
+              <a:lnSpc>
+                <a:spcPct val="100000"/>
+              </a:lnSpc>
+            </a:pPr>
+            <a:endParaRPr b="0" lang="en-US" sz="950" spc="-1" strike="noStrike">
+              <a:solidFill>
+                <a:srgbClr val="ffffff"/>
+              </a:solidFill>
+              <a:latin typeface="Arial"/>
+            </a:endParaRPr>
+          </a:p>
+          <a:p>
+            <a:pPr algn="ctr">
+              <a:lnSpc>
+                <a:spcPct val="100000"/>
+              </a:lnSpc>
+            </a:pPr>
+            <a:r>
+              <a:rPr b="0" lang="en-US" sz="950" spc="-1" strike="noStrike">
+                <a:solidFill>
+                  <a:srgbClr val="78ffc8"/>
+                </a:solidFill>
+                <a:latin typeface="Consolas"/>
+                <a:ea typeface="DejaVu Sans"/>
+              </a:rPr>
+              <a:t>        </a:t>
+            </a:r>
+            <a:r>
+              <a:rPr b="0" lang="en-US" sz="950" spc="-1" strike="noStrike">
+                <a:solidFill>
+                  <a:srgbClr val="78ffc8"/>
+                </a:solidFill>
+                <a:latin typeface="Consolas"/>
+                <a:ea typeface="DejaVu Sans"/>
+              </a:rPr>
+              <a:t>// 2. Decimal Division (Precision)</a:t>
+            </a:r>
+            <a:endParaRPr b="0" lang="en-US" sz="950" spc="-1" strike="noStrike">
+              <a:solidFill>
+                <a:srgbClr val="ffffff"/>
+              </a:solidFill>
+              <a:latin typeface="Arial"/>
+            </a:endParaRPr>
+          </a:p>
+          <a:p>
+            <a:pPr algn="ctr">
+              <a:lnSpc>
+                <a:spcPct val="100000"/>
+              </a:lnSpc>
+            </a:pPr>
+            <a:r>
+              <a:rPr b="0" lang="en-US" sz="950" spc="-1" strike="noStrike">
+                <a:solidFill>
+                  <a:srgbClr val="78ffc8"/>
+                </a:solidFill>
+                <a:latin typeface="Consolas"/>
+                <a:ea typeface="DejaVu Sans"/>
+              </a:rPr>
+              <a:t>        </a:t>
+            </a:r>
+            <a:r>
+              <a:rPr b="0" lang="en-US" sz="950" spc="-1" strike="noStrike">
+                <a:solidFill>
+                  <a:srgbClr val="78ffc8"/>
+                </a:solidFill>
+                <a:latin typeface="Consolas"/>
+                <a:ea typeface="DejaVu Sans"/>
+              </a:rPr>
+              <a:t>// Using 4.0 prevents int truncation</a:t>
+            </a:r>
+            <a:endParaRPr b="0" lang="en-US" sz="950" spc="-1" strike="noStrike">
+              <a:solidFill>
+                <a:srgbClr val="ffffff"/>
+              </a:solidFill>
+              <a:latin typeface="Arial"/>
+            </a:endParaRPr>
+          </a:p>
+          <a:p>
+            <a:pPr algn="ctr">
+              <a:lnSpc>
+                <a:spcPct val="100000"/>
+              </a:lnSpc>
+            </a:pPr>
+            <a:r>
+              <a:rPr b="0" lang="en-US" sz="950" spc="-1" strike="noStrike">
+                <a:solidFill>
+                  <a:srgbClr val="78ffc8"/>
+                </a:solidFill>
+                <a:latin typeface="Consolas"/>
+                <a:ea typeface="DejaVu Sans"/>
+              </a:rPr>
+              <a:t>        </a:t>
+            </a:r>
+            <a:r>
+              <a:rPr b="0" lang="en-US" sz="950" spc="-1" strike="noStrike">
+                <a:solidFill>
+                  <a:srgbClr val="78ffc8"/>
+                </a:solidFill>
+                <a:latin typeface="Consolas"/>
+                <a:ea typeface="DejaVu Sans"/>
+              </a:rPr>
+              <a:t>double div = num / 4.0; // 2.5</a:t>
+            </a:r>
+            <a:endParaRPr b="0" lang="en-US" sz="950" spc="-1" strike="noStrike">
+              <a:solidFill>
+                <a:srgbClr val="ffffff"/>
+              </a:solidFill>
+              <a:latin typeface="Arial"/>
+            </a:endParaRPr>
+          </a:p>
+          <a:p>
+            <a:pPr algn="ctr">
+              <a:lnSpc>
+                <a:spcPct val="100000"/>
+              </a:lnSpc>
+            </a:pPr>
+            <a:endParaRPr b="0" lang="en-US" sz="950" spc="-1" strike="noStrike">
+              <a:solidFill>
+                <a:srgbClr val="ffffff"/>
+              </a:solidFill>
+              <a:latin typeface="Arial"/>
+            </a:endParaRPr>
+          </a:p>
+          <a:p>
+            <a:pPr algn="ctr">
+              <a:lnSpc>
+                <a:spcPct val="100000"/>
+              </a:lnSpc>
+            </a:pPr>
+            <a:r>
+              <a:rPr b="0" lang="en-US" sz="950" spc="-1" strike="noStrike">
+                <a:solidFill>
+                  <a:srgbClr val="78ffc8"/>
+                </a:solidFill>
+                <a:latin typeface="Consolas"/>
+                <a:ea typeface="DejaVu Sans"/>
+              </a:rPr>
+              <a:t>        </a:t>
+            </a:r>
+            <a:r>
+              <a:rPr b="0" lang="en-US" sz="950" spc="-1" strike="noStrike">
+                <a:solidFill>
+                  <a:srgbClr val="78ffc8"/>
+                </a:solidFill>
+                <a:latin typeface="Consolas"/>
+                <a:ea typeface="DejaVu Sans"/>
+              </a:rPr>
+              <a:t>// 3. Compound &amp; Increment</a:t>
+            </a:r>
+            <a:endParaRPr b="0" lang="en-US" sz="950" spc="-1" strike="noStrike">
+              <a:solidFill>
+                <a:srgbClr val="ffffff"/>
+              </a:solidFill>
+              <a:latin typeface="Arial"/>
+            </a:endParaRPr>
+          </a:p>
+          <a:p>
+            <a:pPr algn="ctr">
+              <a:lnSpc>
+                <a:spcPct val="100000"/>
+              </a:lnSpc>
+            </a:pPr>
+            <a:r>
+              <a:rPr b="0" lang="en-US" sz="950" spc="-1" strike="noStrike">
+                <a:solidFill>
+                  <a:srgbClr val="78ffc8"/>
+                </a:solidFill>
+                <a:latin typeface="Consolas"/>
+                <a:ea typeface="DejaVu Sans"/>
+              </a:rPr>
+              <a:t>        </a:t>
+            </a:r>
+            <a:r>
+              <a:rPr b="0" lang="en-US" sz="950" spc="-1" strike="noStrike">
+                <a:solidFill>
+                  <a:srgbClr val="78ffc8"/>
+                </a:solidFill>
+                <a:latin typeface="Consolas"/>
+                <a:ea typeface="DejaVu Sans"/>
+              </a:rPr>
+              <a:t>num += 5; // Becomes 15</a:t>
+            </a:r>
+            <a:endParaRPr b="0" lang="en-US" sz="950" spc="-1" strike="noStrike">
+              <a:solidFill>
+                <a:srgbClr val="ffffff"/>
+              </a:solidFill>
+              <a:latin typeface="Arial"/>
+            </a:endParaRPr>
+          </a:p>
+          <a:p>
+            <a:pPr algn="ctr">
+              <a:lnSpc>
+                <a:spcPct val="100000"/>
+              </a:lnSpc>
+            </a:pPr>
+            <a:r>
+              <a:rPr b="0" lang="en-US" sz="950" spc="-1" strike="noStrike">
+                <a:solidFill>
+                  <a:srgbClr val="78ffc8"/>
+                </a:solidFill>
+                <a:latin typeface="Consolas"/>
+                <a:ea typeface="DejaVu Sans"/>
+              </a:rPr>
+              <a:t>        </a:t>
+            </a:r>
+            <a:r>
+              <a:rPr b="0" lang="en-US" sz="950" spc="-1" strike="noStrike">
+                <a:solidFill>
+                  <a:srgbClr val="78ffc8"/>
+                </a:solidFill>
+                <a:latin typeface="Consolas"/>
+                <a:ea typeface="DejaVu Sans"/>
+              </a:rPr>
+              <a:t>num++;    // Becomes 16</a:t>
+            </a:r>
+            <a:endParaRPr b="0" lang="en-US" sz="950" spc="-1" strike="noStrike">
+              <a:solidFill>
+                <a:srgbClr val="ffffff"/>
+              </a:solidFill>
+              <a:latin typeface="Arial"/>
+            </a:endParaRPr>
+          </a:p>
+          <a:p>
+            <a:pPr algn="ctr">
+              <a:lnSpc>
+                <a:spcPct val="100000"/>
+              </a:lnSpc>
+            </a:pPr>
+            <a:endParaRPr b="0" lang="en-US" sz="950" spc="-1" strike="noStrike">
+              <a:solidFill>
+                <a:srgbClr val="ffffff"/>
+              </a:solidFill>
+              <a:latin typeface="Arial"/>
+            </a:endParaRPr>
+          </a:p>
+          <a:p>
+            <a:pPr algn="ctr">
+              <a:lnSpc>
+                <a:spcPct val="100000"/>
+              </a:lnSpc>
+            </a:pPr>
+            <a:r>
+              <a:rPr b="0" lang="en-US" sz="950" spc="-1" strike="noStrike">
+                <a:solidFill>
+                  <a:srgbClr val="78ffc8"/>
+                </a:solidFill>
+                <a:latin typeface="Consolas"/>
+                <a:ea typeface="DejaVu Sans"/>
+              </a:rPr>
+              <a:t>        </a:t>
+            </a:r>
+            <a:r>
+              <a:rPr b="0" lang="en-US" sz="950" spc="-1" strike="noStrike">
+                <a:solidFill>
+                  <a:srgbClr val="78ffc8"/>
+                </a:solidFill>
+                <a:latin typeface="Consolas"/>
+                <a:ea typeface="DejaVu Sans"/>
+              </a:rPr>
+              <a:t>System.out.println("Modulo: " + result);</a:t>
+            </a:r>
+            <a:endParaRPr b="0" lang="en-US" sz="950" spc="-1" strike="noStrike">
+              <a:solidFill>
+                <a:srgbClr val="ffffff"/>
+              </a:solidFill>
+              <a:latin typeface="Arial"/>
+            </a:endParaRPr>
+          </a:p>
+          <a:p>
+            <a:pPr algn="ctr">
+              <a:lnSpc>
+                <a:spcPct val="100000"/>
+              </a:lnSpc>
+            </a:pPr>
+            <a:r>
+              <a:rPr b="0" lang="en-US" sz="950" spc="-1" strike="noStrike">
+                <a:solidFill>
+                  <a:srgbClr val="78ffc8"/>
+                </a:solidFill>
+                <a:latin typeface="Consolas"/>
+                <a:ea typeface="DejaVu Sans"/>
+              </a:rPr>
+              <a:t>        </a:t>
+            </a:r>
+            <a:r>
+              <a:rPr b="0" lang="en-US" sz="950" spc="-1" strike="noStrike">
+                <a:solidFill>
+                  <a:srgbClr val="78ffc8"/>
+                </a:solidFill>
+                <a:latin typeface="Consolas"/>
+                <a:ea typeface="DejaVu Sans"/>
+              </a:rPr>
+              <a:t>System.out.println("Division: " + div);</a:t>
+            </a:r>
+            <a:endParaRPr b="0" lang="en-US" sz="950" spc="-1" strike="noStrike">
+              <a:solidFill>
+                <a:srgbClr val="ffffff"/>
+              </a:solidFill>
+              <a:latin typeface="Arial"/>
+            </a:endParaRPr>
+          </a:p>
+          <a:p>
+            <a:pPr algn="ctr">
+              <a:lnSpc>
+                <a:spcPct val="100000"/>
+              </a:lnSpc>
+            </a:pPr>
+            <a:r>
+              <a:rPr b="0" lang="en-US" sz="950" spc="-1" strike="noStrike">
+                <a:solidFill>
+                  <a:srgbClr val="78ffc8"/>
+                </a:solidFill>
+                <a:latin typeface="Consolas"/>
+                <a:ea typeface="DejaVu Sans"/>
+              </a:rPr>
+              <a:t>        </a:t>
+            </a:r>
+            <a:r>
+              <a:rPr b="0" lang="en-US" sz="950" spc="-1" strike="noStrike">
+                <a:solidFill>
+                  <a:srgbClr val="78ffc8"/>
+                </a:solidFill>
+                <a:latin typeface="Consolas"/>
+                <a:ea typeface="DejaVu Sans"/>
+              </a:rPr>
+              <a:t>System.out.println("Final Num: " + num);</a:t>
+            </a:r>
+            <a:endParaRPr b="0" lang="en-US" sz="950" spc="-1" strike="noStrike">
+              <a:solidFill>
+                <a:srgbClr val="ffffff"/>
+              </a:solidFill>
+              <a:latin typeface="Arial"/>
+            </a:endParaRPr>
+          </a:p>
+          <a:p>
+            <a:pPr algn="ctr">
+              <a:lnSpc>
+                <a:spcPct val="100000"/>
+              </a:lnSpc>
+            </a:pPr>
+            <a:r>
+              <a:rPr b="0" lang="en-US" sz="950" spc="-1" strike="noStrike">
+                <a:solidFill>
+                  <a:srgbClr val="78ffc8"/>
+                </a:solidFill>
+                <a:latin typeface="Consolas"/>
+                <a:ea typeface="DejaVu Sans"/>
+              </a:rPr>
+              <a:t>    </a:t>
+            </a:r>
+            <a:r>
+              <a:rPr b="0" lang="en-US" sz="950" spc="-1" strike="noStrike">
+                <a:solidFill>
+                  <a:srgbClr val="78ffc8"/>
+                </a:solidFill>
+                <a:latin typeface="Consolas"/>
+                <a:ea typeface="DejaVu Sans"/>
+              </a:rPr>
+              <a:t>}</a:t>
+            </a:r>
+            <a:endParaRPr b="0" lang="en-US" sz="950" spc="-1" strike="noStrike">
+              <a:solidFill>
+                <a:srgbClr val="ffffff"/>
+              </a:solidFill>
+              <a:latin typeface="Arial"/>
+            </a:endParaRPr>
+          </a:p>
+          <a:p>
+            <a:pPr algn="ctr">
+              <a:lnSpc>
+                <a:spcPct val="100000"/>
+              </a:lnSpc>
+            </a:pPr>
+            <a:r>
+              <a:rPr b="0" lang="en-US" sz="950" spc="-1" strike="noStrike">
+                <a:solidFill>
+                  <a:srgbClr val="78ffc8"/>
+                </a:solidFill>
+                <a:latin typeface="Consolas"/>
+                <a:ea typeface="DejaVu Sans"/>
+              </a:rPr>
+              <a:t>}</a:t>
+            </a:r>
+            <a:endParaRPr b="0" lang="en-US" sz="950" spc="-1" strike="noStrike">
+              <a:solidFill>
+                <a:srgbClr val="ffffff"/>
+              </a:solidFill>
+              <a:latin typeface="Arial"/>
+            </a:endParaRPr>
+          </a:p>
+        </p:txBody>
+      </p:sp>
+      <p:sp>
+        <p:nvSpPr>
+          <p:cNvPr id="404" name="TextBox 45"/>
           <p:cNvSpPr/>
           <p:nvPr/>
         </p:nvSpPr>
@@ -16563,7 +19249,7 @@
         <p:spPr>
           <a:xfrm>
             <a:off x="0" y="0"/>
-            <a:ext cx="12183840" cy="6852960"/>
+            <a:ext cx="12183480" cy="6852600"/>
           </a:xfrm>
           <a:prstGeom prst="rect">
             <a:avLst/>
@@ -16623,7 +19309,7 @@
         <p:spPr>
           <a:xfrm>
             <a:off x="0" y="0"/>
-            <a:ext cx="13320" cy="6852960"/>
+            <a:ext cx="12960" cy="6852600"/>
           </a:xfrm>
           <a:prstGeom prst="rect">
             <a:avLst/>
@@ -16683,7 +19369,7 @@
         <p:spPr>
           <a:xfrm>
             <a:off x="914400" y="0"/>
-            <a:ext cx="13320" cy="6852960"/>
+            <a:ext cx="12960" cy="6852600"/>
           </a:xfrm>
           <a:prstGeom prst="rect">
             <a:avLst/>
@@ -16743,7 +19429,7 @@
         <p:spPr>
           <a:xfrm>
             <a:off x="1828800" y="0"/>
-            <a:ext cx="13320" cy="6852960"/>
+            <a:ext cx="12960" cy="6852600"/>
           </a:xfrm>
           <a:prstGeom prst="rect">
             <a:avLst/>
@@ -16803,7 +19489,7 @@
         <p:spPr>
           <a:xfrm>
             <a:off x="2743200" y="0"/>
-            <a:ext cx="13320" cy="6852960"/>
+            <a:ext cx="12960" cy="6852600"/>
           </a:xfrm>
           <a:prstGeom prst="rect">
             <a:avLst/>
@@ -16863,7 +19549,7 @@
         <p:spPr>
           <a:xfrm>
             <a:off x="3657600" y="0"/>
-            <a:ext cx="13320" cy="6852960"/>
+            <a:ext cx="12960" cy="6852600"/>
           </a:xfrm>
           <a:prstGeom prst="rect">
             <a:avLst/>
@@ -16923,7 +19609,7 @@
         <p:spPr>
           <a:xfrm>
             <a:off x="4572000" y="0"/>
-            <a:ext cx="13320" cy="6852960"/>
+            <a:ext cx="12960" cy="6852600"/>
           </a:xfrm>
           <a:prstGeom prst="rect">
             <a:avLst/>
@@ -16983,7 +19669,7 @@
         <p:spPr>
           <a:xfrm>
             <a:off x="5486400" y="0"/>
-            <a:ext cx="13320" cy="6852960"/>
+            <a:ext cx="12960" cy="6852600"/>
           </a:xfrm>
           <a:prstGeom prst="rect">
             <a:avLst/>
@@ -17043,7 +19729,7 @@
         <p:spPr>
           <a:xfrm>
             <a:off x="6400800" y="0"/>
-            <a:ext cx="13320" cy="6852960"/>
+            <a:ext cx="12960" cy="6852600"/>
           </a:xfrm>
           <a:prstGeom prst="rect">
             <a:avLst/>
@@ -17103,7 +19789,7 @@
         <p:spPr>
           <a:xfrm>
             <a:off x="7315200" y="0"/>
-            <a:ext cx="13320" cy="6852960"/>
+            <a:ext cx="12960" cy="6852600"/>
           </a:xfrm>
           <a:prstGeom prst="rect">
             <a:avLst/>
@@ -17163,7 +19849,7 @@
         <p:spPr>
           <a:xfrm>
             <a:off x="8229600" y="0"/>
-            <a:ext cx="13320" cy="6852960"/>
+            <a:ext cx="12960" cy="6852600"/>
           </a:xfrm>
           <a:prstGeom prst="rect">
             <a:avLst/>
@@ -17223,7 +19909,7 @@
         <p:spPr>
           <a:xfrm>
             <a:off x="9144000" y="0"/>
-            <a:ext cx="13320" cy="6852960"/>
+            <a:ext cx="12960" cy="6852600"/>
           </a:xfrm>
           <a:prstGeom prst="rect">
             <a:avLst/>
@@ -17283,7 +19969,7 @@
         <p:spPr>
           <a:xfrm>
             <a:off x="10058400" y="0"/>
-            <a:ext cx="13320" cy="6852960"/>
+            <a:ext cx="12960" cy="6852600"/>
           </a:xfrm>
           <a:prstGeom prst="rect">
             <a:avLst/>
@@ -17343,7 +20029,7 @@
         <p:spPr>
           <a:xfrm>
             <a:off x="10972800" y="0"/>
-            <a:ext cx="13320" cy="6852960"/>
+            <a:ext cx="12960" cy="6852600"/>
           </a:xfrm>
           <a:prstGeom prst="rect">
             <a:avLst/>
@@ -17403,7 +20089,7 @@
         <p:spPr>
           <a:xfrm>
             <a:off x="11887200" y="0"/>
-            <a:ext cx="13320" cy="6852960"/>
+            <a:ext cx="12960" cy="6852600"/>
           </a:xfrm>
           <a:prstGeom prst="rect">
             <a:avLst/>
@@ -17463,7 +20149,7 @@
         <p:spPr>
           <a:xfrm>
             <a:off x="0" y="0"/>
-            <a:ext cx="315000" cy="6852960"/>
+            <a:ext cx="314640" cy="6852600"/>
           </a:xfrm>
           <a:prstGeom prst="rect">
             <a:avLst/>
@@ -17523,7 +20209,7 @@
         <p:spPr>
           <a:xfrm>
             <a:off x="9875520" y="365760"/>
-            <a:ext cx="2006640" cy="497880"/>
+            <a:ext cx="2006280" cy="497520"/>
           </a:xfrm>
           <a:prstGeom prst="roundRect">
             <a:avLst>
@@ -17751,7 +20437,7 @@
         <p:spPr>
           <a:xfrm>
             <a:off x="987480" y="3182040"/>
-            <a:ext cx="3286800" cy="2738160"/>
+            <a:ext cx="3286440" cy="2737800"/>
           </a:xfrm>
           <a:prstGeom prst="roundRect">
             <a:avLst>
@@ -17813,7 +20499,7 @@
         <p:spPr>
           <a:xfrm>
             <a:off x="914400" y="3108960"/>
-            <a:ext cx="3286800" cy="3059280"/>
+            <a:ext cx="3286440" cy="3058920"/>
           </a:xfrm>
           <a:prstGeom prst="roundRect">
             <a:avLst>
@@ -17976,7 +20662,7 @@
         <p:spPr>
           <a:xfrm>
             <a:off x="4507920" y="3182040"/>
-            <a:ext cx="3286800" cy="2738160"/>
+            <a:ext cx="3286440" cy="2737800"/>
           </a:xfrm>
           <a:prstGeom prst="roundRect">
             <a:avLst>
@@ -18038,7 +20724,7 @@
         <p:spPr>
           <a:xfrm>
             <a:off x="4434840" y="2971800"/>
-            <a:ext cx="3286800" cy="3425040"/>
+            <a:ext cx="3286440" cy="3424680"/>
           </a:xfrm>
           <a:prstGeom prst="roundRect">
             <a:avLst>
@@ -18296,7 +20982,7 @@
         <p:spPr>
           <a:xfrm>
             <a:off x="8028360" y="3182040"/>
-            <a:ext cx="3286800" cy="2738160"/>
+            <a:ext cx="3286440" cy="2737800"/>
           </a:xfrm>
           <a:prstGeom prst="roundRect">
             <a:avLst>
@@ -18358,7 +21044,7 @@
         <p:spPr>
           <a:xfrm>
             <a:off x="7955280" y="3108960"/>
-            <a:ext cx="3699360" cy="3059280"/>
+            <a:ext cx="3699000" cy="3058920"/>
           </a:xfrm>
           <a:prstGeom prst="roundRect">
             <a:avLst>
@@ -18803,7 +21489,7 @@
         <p:spPr>
           <a:xfrm>
             <a:off x="0" y="0"/>
-            <a:ext cx="12183840" cy="6852960"/>
+            <a:ext cx="12183480" cy="6852600"/>
           </a:xfrm>
           <a:prstGeom prst="rect">
             <a:avLst/>
@@ -18863,7 +21549,7 @@
         <p:spPr>
           <a:xfrm>
             <a:off x="0" y="0"/>
-            <a:ext cx="13320" cy="6852960"/>
+            <a:ext cx="12960" cy="6852600"/>
           </a:xfrm>
           <a:prstGeom prst="rect">
             <a:avLst/>
@@ -18923,7 +21609,7 @@
         <p:spPr>
           <a:xfrm>
             <a:off x="914400" y="0"/>
-            <a:ext cx="13320" cy="6852960"/>
+            <a:ext cx="12960" cy="6852600"/>
           </a:xfrm>
           <a:prstGeom prst="rect">
             <a:avLst/>
@@ -18983,7 +21669,7 @@
         <p:spPr>
           <a:xfrm>
             <a:off x="1828800" y="0"/>
-            <a:ext cx="13320" cy="6852960"/>
+            <a:ext cx="12960" cy="6852600"/>
           </a:xfrm>
           <a:prstGeom prst="rect">
             <a:avLst/>
@@ -19043,7 +21729,7 @@
         <p:spPr>
           <a:xfrm>
             <a:off x="2743200" y="0"/>
-            <a:ext cx="13320" cy="6852960"/>
+            <a:ext cx="12960" cy="6852600"/>
           </a:xfrm>
           <a:prstGeom prst="rect">
             <a:avLst/>
@@ -19103,7 +21789,7 @@
         <p:spPr>
           <a:xfrm>
             <a:off x="3657600" y="0"/>
-            <a:ext cx="13320" cy="6852960"/>
+            <a:ext cx="12960" cy="6852600"/>
           </a:xfrm>
           <a:prstGeom prst="rect">
             <a:avLst/>
@@ -19163,7 +21849,7 @@
         <p:spPr>
           <a:xfrm>
             <a:off x="4572000" y="0"/>
-            <a:ext cx="13320" cy="6852960"/>
+            <a:ext cx="12960" cy="6852600"/>
           </a:xfrm>
           <a:prstGeom prst="rect">
             <a:avLst/>
@@ -19223,7 +21909,7 @@
         <p:spPr>
           <a:xfrm>
             <a:off x="5486400" y="0"/>
-            <a:ext cx="13320" cy="6852960"/>
+            <a:ext cx="12960" cy="6852600"/>
           </a:xfrm>
           <a:prstGeom prst="rect">
             <a:avLst/>
@@ -19283,7 +21969,7 @@
         <p:spPr>
           <a:xfrm>
             <a:off x="6400800" y="0"/>
-            <a:ext cx="13320" cy="6852960"/>
+            <a:ext cx="12960" cy="6852600"/>
           </a:xfrm>
           <a:prstGeom prst="rect">
             <a:avLst/>
@@ -19343,7 +22029,7 @@
         <p:spPr>
           <a:xfrm>
             <a:off x="7315200" y="0"/>
-            <a:ext cx="13320" cy="6852960"/>
+            <a:ext cx="12960" cy="6852600"/>
           </a:xfrm>
           <a:prstGeom prst="rect">
             <a:avLst/>
@@ -19403,7 +22089,7 @@
         <p:spPr>
           <a:xfrm>
             <a:off x="8229600" y="0"/>
-            <a:ext cx="13320" cy="6852960"/>
+            <a:ext cx="12960" cy="6852600"/>
           </a:xfrm>
           <a:prstGeom prst="rect">
             <a:avLst/>
@@ -19463,7 +22149,7 @@
         <p:spPr>
           <a:xfrm>
             <a:off x="9144000" y="0"/>
-            <a:ext cx="13320" cy="6852960"/>
+            <a:ext cx="12960" cy="6852600"/>
           </a:xfrm>
           <a:prstGeom prst="rect">
             <a:avLst/>
@@ -19523,7 +22209,7 @@
         <p:spPr>
           <a:xfrm>
             <a:off x="10058400" y="0"/>
-            <a:ext cx="13320" cy="6852960"/>
+            <a:ext cx="12960" cy="6852600"/>
           </a:xfrm>
           <a:prstGeom prst="rect">
             <a:avLst/>
@@ -19583,7 +22269,7 @@
         <p:spPr>
           <a:xfrm>
             <a:off x="10972800" y="0"/>
-            <a:ext cx="13320" cy="6852960"/>
+            <a:ext cx="12960" cy="6852600"/>
           </a:xfrm>
           <a:prstGeom prst="rect">
             <a:avLst/>
@@ -19643,7 +22329,7 @@
         <p:spPr>
           <a:xfrm>
             <a:off x="11887200" y="0"/>
-            <a:ext cx="13320" cy="6852960"/>
+            <a:ext cx="12960" cy="6852600"/>
           </a:xfrm>
           <a:prstGeom prst="rect">
             <a:avLst/>
@@ -19703,7 +22389,7 @@
         <p:spPr>
           <a:xfrm>
             <a:off x="0" y="0"/>
-            <a:ext cx="315000" cy="6852960"/>
+            <a:ext cx="314640" cy="6852600"/>
           </a:xfrm>
           <a:prstGeom prst="rect">
             <a:avLst/>
@@ -19763,7 +22449,7 @@
         <p:spPr>
           <a:xfrm>
             <a:off x="9875520" y="365760"/>
-            <a:ext cx="2006640" cy="497880"/>
+            <a:ext cx="2006280" cy="497520"/>
           </a:xfrm>
           <a:prstGeom prst="roundRect">
             <a:avLst>
@@ -19991,7 +22677,7 @@
         <p:spPr>
           <a:xfrm>
             <a:off x="987480" y="3182040"/>
-            <a:ext cx="3286800" cy="2738160"/>
+            <a:ext cx="3286440" cy="2737800"/>
           </a:xfrm>
           <a:prstGeom prst="roundRect">
             <a:avLst>
@@ -20053,7 +22739,7 @@
         <p:spPr>
           <a:xfrm>
             <a:off x="685800" y="2971800"/>
-            <a:ext cx="3515400" cy="3196440"/>
+            <a:ext cx="3515040" cy="3196080"/>
           </a:xfrm>
           <a:prstGeom prst="roundRect">
             <a:avLst>
@@ -20244,7 +22930,7 @@
         <p:spPr>
           <a:xfrm>
             <a:off x="4507920" y="3182040"/>
-            <a:ext cx="3286800" cy="2738160"/>
+            <a:ext cx="3286440" cy="2737800"/>
           </a:xfrm>
           <a:prstGeom prst="roundRect">
             <a:avLst>
@@ -20306,7 +22992,7 @@
         <p:spPr>
           <a:xfrm>
             <a:off x="4434840" y="2971800"/>
-            <a:ext cx="3286800" cy="3425040"/>
+            <a:ext cx="3286440" cy="3424680"/>
           </a:xfrm>
           <a:prstGeom prst="roundRect">
             <a:avLst>
@@ -20564,7 +23250,7 @@
         <p:spPr>
           <a:xfrm>
             <a:off x="8028360" y="3182040"/>
-            <a:ext cx="3286800" cy="2738160"/>
+            <a:ext cx="3286440" cy="2737800"/>
           </a:xfrm>
           <a:prstGeom prst="roundRect">
             <a:avLst>
@@ -20626,7 +23312,7 @@
         <p:spPr>
           <a:xfrm>
             <a:off x="7955280" y="3108960"/>
-            <a:ext cx="3699360" cy="3059280"/>
+            <a:ext cx="3699000" cy="3058920"/>
           </a:xfrm>
           <a:prstGeom prst="roundRect">
             <a:avLst>
@@ -21071,7 +23757,7 @@
         <p:spPr>
           <a:xfrm>
             <a:off x="0" y="0"/>
-            <a:ext cx="12183840" cy="6852960"/>
+            <a:ext cx="12183480" cy="6852600"/>
           </a:xfrm>
           <a:prstGeom prst="rect">
             <a:avLst/>
@@ -21131,7 +23817,7 @@
         <p:spPr>
           <a:xfrm>
             <a:off x="0" y="0"/>
-            <a:ext cx="13320" cy="6852960"/>
+            <a:ext cx="12960" cy="6852600"/>
           </a:xfrm>
           <a:prstGeom prst="rect">
             <a:avLst/>
@@ -21191,7 +23877,7 @@
         <p:spPr>
           <a:xfrm>
             <a:off x="914400" y="0"/>
-            <a:ext cx="13320" cy="6852960"/>
+            <a:ext cx="12960" cy="6852600"/>
           </a:xfrm>
           <a:prstGeom prst="rect">
             <a:avLst/>
@@ -21251,7 +23937,7 @@
         <p:spPr>
           <a:xfrm>
             <a:off x="1828800" y="0"/>
-            <a:ext cx="13320" cy="6852960"/>
+            <a:ext cx="12960" cy="6852600"/>
           </a:xfrm>
           <a:prstGeom prst="rect">
             <a:avLst/>
@@ -21311,7 +23997,7 @@
         <p:spPr>
           <a:xfrm>
             <a:off x="2743200" y="0"/>
-            <a:ext cx="13320" cy="6852960"/>
+            <a:ext cx="12960" cy="6852600"/>
           </a:xfrm>
           <a:prstGeom prst="rect">
             <a:avLst/>
@@ -21371,7 +24057,7 @@
         <p:spPr>
           <a:xfrm>
             <a:off x="3657600" y="0"/>
-            <a:ext cx="13320" cy="6852960"/>
+            <a:ext cx="12960" cy="6852600"/>
           </a:xfrm>
           <a:prstGeom prst="rect">
             <a:avLst/>
@@ -21431,7 +24117,7 @@
         <p:spPr>
           <a:xfrm>
             <a:off x="4572000" y="0"/>
-            <a:ext cx="13320" cy="6852960"/>
+            <a:ext cx="12960" cy="6852600"/>
           </a:xfrm>
           <a:prstGeom prst="rect">
             <a:avLst/>
@@ -21491,7 +24177,7 @@
         <p:spPr>
           <a:xfrm>
             <a:off x="5486400" y="0"/>
-            <a:ext cx="13320" cy="6852960"/>
+            <a:ext cx="12960" cy="6852600"/>
           </a:xfrm>
           <a:prstGeom prst="rect">
             <a:avLst/>
@@ -21551,7 +24237,7 @@
         <p:spPr>
           <a:xfrm>
             <a:off x="6400800" y="0"/>
-            <a:ext cx="13320" cy="6852960"/>
+            <a:ext cx="12960" cy="6852600"/>
           </a:xfrm>
           <a:prstGeom prst="rect">
             <a:avLst/>
@@ -21611,7 +24297,7 @@
         <p:spPr>
           <a:xfrm>
             <a:off x="7315200" y="0"/>
-            <a:ext cx="13320" cy="6852960"/>
+            <a:ext cx="12960" cy="6852600"/>
           </a:xfrm>
           <a:prstGeom prst="rect">
             <a:avLst/>
@@ -21671,7 +24357,7 @@
         <p:spPr>
           <a:xfrm>
             <a:off x="8229600" y="0"/>
-            <a:ext cx="13320" cy="6852960"/>
+            <a:ext cx="12960" cy="6852600"/>
           </a:xfrm>
           <a:prstGeom prst="rect">
             <a:avLst/>
@@ -21731,7 +24417,7 @@
         <p:spPr>
           <a:xfrm>
             <a:off x="9144000" y="0"/>
-            <a:ext cx="13320" cy="6852960"/>
+            <a:ext cx="12960" cy="6852600"/>
           </a:xfrm>
           <a:prstGeom prst="rect">
             <a:avLst/>
@@ -21791,7 +24477,7 @@
         <p:spPr>
           <a:xfrm>
             <a:off x="10058400" y="0"/>
-            <a:ext cx="13320" cy="6852960"/>
+            <a:ext cx="12960" cy="6852600"/>
           </a:xfrm>
           <a:prstGeom prst="rect">
             <a:avLst/>
@@ -21851,7 +24537,7 @@
         <p:spPr>
           <a:xfrm>
             <a:off x="10972800" y="0"/>
-            <a:ext cx="13320" cy="6852960"/>
+            <a:ext cx="12960" cy="6852600"/>
           </a:xfrm>
           <a:prstGeom prst="rect">
             <a:avLst/>
@@ -21911,7 +24597,7 @@
         <p:spPr>
           <a:xfrm>
             <a:off x="11887200" y="0"/>
-            <a:ext cx="13320" cy="6852960"/>
+            <a:ext cx="12960" cy="6852600"/>
           </a:xfrm>
           <a:prstGeom prst="rect">
             <a:avLst/>
@@ -21971,7 +24657,7 @@
         <p:spPr>
           <a:xfrm>
             <a:off x="0" y="0"/>
-            <a:ext cx="315000" cy="6852960"/>
+            <a:ext cx="314640" cy="6852600"/>
           </a:xfrm>
           <a:prstGeom prst="rect">
             <a:avLst/>
@@ -22031,7 +24717,7 @@
         <p:spPr>
           <a:xfrm>
             <a:off x="9875520" y="365760"/>
-            <a:ext cx="2006640" cy="497880"/>
+            <a:ext cx="2006280" cy="497520"/>
           </a:xfrm>
           <a:prstGeom prst="roundRect">
             <a:avLst>
@@ -22236,7 +24922,7 @@
         <p:spPr>
           <a:xfrm>
             <a:off x="987480" y="3182040"/>
-            <a:ext cx="3286800" cy="2738160"/>
+            <a:ext cx="3286440" cy="2737800"/>
           </a:xfrm>
           <a:prstGeom prst="roundRect">
             <a:avLst>
@@ -22298,7 +24984,7 @@
         <p:spPr>
           <a:xfrm>
             <a:off x="685800" y="2971800"/>
-            <a:ext cx="3515400" cy="3196440"/>
+            <a:ext cx="3515040" cy="3196080"/>
           </a:xfrm>
           <a:prstGeom prst="roundRect">
             <a:avLst>
@@ -22489,7 +25175,7 @@
         <p:spPr>
           <a:xfrm>
             <a:off x="4507920" y="3182040"/>
-            <a:ext cx="3286800" cy="2738160"/>
+            <a:ext cx="3286440" cy="2737800"/>
           </a:xfrm>
           <a:prstGeom prst="roundRect">
             <a:avLst>
@@ -22551,7 +25237,7 @@
         <p:spPr>
           <a:xfrm>
             <a:off x="4434840" y="2971800"/>
-            <a:ext cx="3286800" cy="3425040"/>
+            <a:ext cx="3286440" cy="3424680"/>
           </a:xfrm>
           <a:prstGeom prst="roundRect">
             <a:avLst>
@@ -22763,7 +25449,7 @@
         <p:spPr>
           <a:xfrm>
             <a:off x="8028360" y="3182040"/>
-            <a:ext cx="3286800" cy="2738160"/>
+            <a:ext cx="3286440" cy="2737800"/>
           </a:xfrm>
           <a:prstGeom prst="roundRect">
             <a:avLst>
@@ -22825,7 +25511,7 @@
         <p:spPr>
           <a:xfrm>
             <a:off x="7955280" y="2743200"/>
-            <a:ext cx="3928680" cy="3882960"/>
+            <a:ext cx="3928320" cy="3882600"/>
           </a:xfrm>
           <a:prstGeom prst="roundRect">
             <a:avLst>
@@ -23385,7 +26071,7 @@
         <p:spPr>
           <a:xfrm>
             <a:off x="0" y="0"/>
-            <a:ext cx="12183840" cy="6852960"/>
+            <a:ext cx="12183480" cy="6852600"/>
           </a:xfrm>
           <a:prstGeom prst="rect">
             <a:avLst/>
@@ -23445,7 +26131,7 @@
         <p:spPr>
           <a:xfrm>
             <a:off x="0" y="0"/>
-            <a:ext cx="13320" cy="6852960"/>
+            <a:ext cx="12960" cy="6852600"/>
           </a:xfrm>
           <a:prstGeom prst="rect">
             <a:avLst/>
@@ -23505,7 +26191,7 @@
         <p:spPr>
           <a:xfrm>
             <a:off x="914400" y="0"/>
-            <a:ext cx="13320" cy="6852960"/>
+            <a:ext cx="12960" cy="6852600"/>
           </a:xfrm>
           <a:prstGeom prst="rect">
             <a:avLst/>
@@ -23565,7 +26251,7 @@
         <p:spPr>
           <a:xfrm>
             <a:off x="1828800" y="0"/>
-            <a:ext cx="13320" cy="6852960"/>
+            <a:ext cx="12960" cy="6852600"/>
           </a:xfrm>
           <a:prstGeom prst="rect">
             <a:avLst/>
@@ -23625,7 +26311,7 @@
         <p:spPr>
           <a:xfrm>
             <a:off x="2743200" y="0"/>
-            <a:ext cx="13320" cy="6852960"/>
+            <a:ext cx="12960" cy="6852600"/>
           </a:xfrm>
           <a:prstGeom prst="rect">
             <a:avLst/>
@@ -23685,7 +26371,7 @@
         <p:spPr>
           <a:xfrm>
             <a:off x="3657600" y="0"/>
-            <a:ext cx="13320" cy="6852960"/>
+            <a:ext cx="12960" cy="6852600"/>
           </a:xfrm>
           <a:prstGeom prst="rect">
             <a:avLst/>
@@ -23745,7 +26431,7 @@
         <p:spPr>
           <a:xfrm>
             <a:off x="4572000" y="0"/>
-            <a:ext cx="13320" cy="6852960"/>
+            <a:ext cx="12960" cy="6852600"/>
           </a:xfrm>
           <a:prstGeom prst="rect">
             <a:avLst/>
@@ -23805,7 +26491,7 @@
         <p:spPr>
           <a:xfrm>
             <a:off x="5486400" y="0"/>
-            <a:ext cx="13320" cy="6852960"/>
+            <a:ext cx="12960" cy="6852600"/>
           </a:xfrm>
           <a:prstGeom prst="rect">
             <a:avLst/>
@@ -23865,7 +26551,7 @@
         <p:spPr>
           <a:xfrm>
             <a:off x="6400800" y="0"/>
-            <a:ext cx="13320" cy="6852960"/>
+            <a:ext cx="12960" cy="6852600"/>
           </a:xfrm>
           <a:prstGeom prst="rect">
             <a:avLst/>
@@ -23925,7 +26611,7 @@
         <p:spPr>
           <a:xfrm>
             <a:off x="7315200" y="0"/>
-            <a:ext cx="13320" cy="6852960"/>
+            <a:ext cx="12960" cy="6852600"/>
           </a:xfrm>
           <a:prstGeom prst="rect">
             <a:avLst/>
@@ -23985,7 +26671,7 @@
         <p:spPr>
           <a:xfrm>
             <a:off x="8229600" y="0"/>
-            <a:ext cx="13320" cy="6852960"/>
+            <a:ext cx="12960" cy="6852600"/>
           </a:xfrm>
           <a:prstGeom prst="rect">
             <a:avLst/>
@@ -24045,7 +26731,7 @@
         <p:spPr>
           <a:xfrm>
             <a:off x="9144000" y="0"/>
-            <a:ext cx="13320" cy="6852960"/>
+            <a:ext cx="12960" cy="6852600"/>
           </a:xfrm>
           <a:prstGeom prst="rect">
             <a:avLst/>
@@ -24105,7 +26791,7 @@
         <p:spPr>
           <a:xfrm>
             <a:off x="10058400" y="0"/>
-            <a:ext cx="13320" cy="6852960"/>
+            <a:ext cx="12960" cy="6852600"/>
           </a:xfrm>
           <a:prstGeom prst="rect">
             <a:avLst/>
@@ -24165,7 +26851,7 @@
         <p:spPr>
           <a:xfrm>
             <a:off x="10972800" y="0"/>
-            <a:ext cx="13320" cy="6852960"/>
+            <a:ext cx="12960" cy="6852600"/>
           </a:xfrm>
           <a:prstGeom prst="rect">
             <a:avLst/>
@@ -24225,7 +26911,7 @@
         <p:spPr>
           <a:xfrm>
             <a:off x="11887200" y="0"/>
-            <a:ext cx="13320" cy="6852960"/>
+            <a:ext cx="12960" cy="6852600"/>
           </a:xfrm>
           <a:prstGeom prst="rect">
             <a:avLst/>
@@ -24285,7 +26971,7 @@
         <p:spPr>
           <a:xfrm>
             <a:off x="0" y="0"/>
-            <a:ext cx="315000" cy="6852960"/>
+            <a:ext cx="314640" cy="6852600"/>
           </a:xfrm>
           <a:prstGeom prst="rect">
             <a:avLst/>
@@ -24345,7 +27031,7 @@
         <p:spPr>
           <a:xfrm>
             <a:off x="9875520" y="365760"/>
-            <a:ext cx="2006640" cy="497880"/>
+            <a:ext cx="2006280" cy="497520"/>
           </a:xfrm>
           <a:prstGeom prst="roundRect">
             <a:avLst>
@@ -24550,7 +27236,7 @@
         <p:spPr>
           <a:xfrm>
             <a:off x="987480" y="3182040"/>
-            <a:ext cx="3286800" cy="2738160"/>
+            <a:ext cx="3286440" cy="2737800"/>
           </a:xfrm>
           <a:prstGeom prst="roundRect">
             <a:avLst>
@@ -24612,7 +27298,7 @@
         <p:spPr>
           <a:xfrm>
             <a:off x="457200" y="2743200"/>
-            <a:ext cx="3744000" cy="3883320"/>
+            <a:ext cx="3743640" cy="3882960"/>
           </a:xfrm>
           <a:prstGeom prst="roundRect">
             <a:avLst>
@@ -24850,7 +27536,7 @@
         <p:spPr>
           <a:xfrm>
             <a:off x="4507920" y="3182040"/>
-            <a:ext cx="3286800" cy="2738160"/>
+            <a:ext cx="3286440" cy="2737800"/>
           </a:xfrm>
           <a:prstGeom prst="roundRect">
             <a:avLst>
@@ -24912,7 +27598,7 @@
         <p:spPr>
           <a:xfrm>
             <a:off x="4434840" y="2971800"/>
-            <a:ext cx="3286800" cy="3425040"/>
+            <a:ext cx="3286440" cy="3424680"/>
           </a:xfrm>
           <a:prstGeom prst="roundRect">
             <a:avLst>
@@ -25131,7 +27817,7 @@
         <p:spPr>
           <a:xfrm>
             <a:off x="8028360" y="3182040"/>
-            <a:ext cx="3286800" cy="2738160"/>
+            <a:ext cx="3286440" cy="2737800"/>
           </a:xfrm>
           <a:prstGeom prst="roundRect">
             <a:avLst>
@@ -25193,7 +27879,7 @@
         <p:spPr>
           <a:xfrm>
             <a:off x="8001000" y="3200400"/>
-            <a:ext cx="3471840" cy="2740320"/>
+            <a:ext cx="3471480" cy="2739960"/>
           </a:xfrm>
           <a:prstGeom prst="roundRect">
             <a:avLst>
@@ -25605,7 +28291,7 @@
         <p:spPr>
           <a:xfrm>
             <a:off x="0" y="0"/>
-            <a:ext cx="12183480" cy="6852600"/>
+            <a:ext cx="12183120" cy="6852240"/>
           </a:xfrm>
           <a:prstGeom prst="rect">
             <a:avLst/>
@@ -25665,7 +28351,7 @@
         <p:spPr>
           <a:xfrm>
             <a:off x="0" y="0"/>
-            <a:ext cx="12960" cy="6852600"/>
+            <a:ext cx="12600" cy="6852240"/>
           </a:xfrm>
           <a:prstGeom prst="rect">
             <a:avLst/>
@@ -25725,7 +28411,7 @@
         <p:spPr>
           <a:xfrm>
             <a:off x="914400" y="0"/>
-            <a:ext cx="12960" cy="6852600"/>
+            <a:ext cx="12600" cy="6852240"/>
           </a:xfrm>
           <a:prstGeom prst="rect">
             <a:avLst/>
@@ -25785,7 +28471,7 @@
         <p:spPr>
           <a:xfrm>
             <a:off x="1828800" y="0"/>
-            <a:ext cx="12960" cy="6852600"/>
+            <a:ext cx="12600" cy="6852240"/>
           </a:xfrm>
           <a:prstGeom prst="rect">
             <a:avLst/>
@@ -25845,7 +28531,7 @@
         <p:spPr>
           <a:xfrm>
             <a:off x="2743200" y="0"/>
-            <a:ext cx="12960" cy="6852600"/>
+            <a:ext cx="12600" cy="6852240"/>
           </a:xfrm>
           <a:prstGeom prst="rect">
             <a:avLst/>
@@ -25905,7 +28591,7 @@
         <p:spPr>
           <a:xfrm>
             <a:off x="3657600" y="0"/>
-            <a:ext cx="12960" cy="6852600"/>
+            <a:ext cx="12600" cy="6852240"/>
           </a:xfrm>
           <a:prstGeom prst="rect">
             <a:avLst/>
@@ -25965,7 +28651,7 @@
         <p:spPr>
           <a:xfrm>
             <a:off x="4572000" y="0"/>
-            <a:ext cx="12960" cy="6852600"/>
+            <a:ext cx="12600" cy="6852240"/>
           </a:xfrm>
           <a:prstGeom prst="rect">
             <a:avLst/>
@@ -26025,7 +28711,7 @@
         <p:spPr>
           <a:xfrm>
             <a:off x="5486400" y="0"/>
-            <a:ext cx="12960" cy="6852600"/>
+            <a:ext cx="12600" cy="6852240"/>
           </a:xfrm>
           <a:prstGeom prst="rect">
             <a:avLst/>
@@ -26085,7 +28771,7 @@
         <p:spPr>
           <a:xfrm>
             <a:off x="6400800" y="0"/>
-            <a:ext cx="12960" cy="6852600"/>
+            <a:ext cx="12600" cy="6852240"/>
           </a:xfrm>
           <a:prstGeom prst="rect">
             <a:avLst/>
@@ -26145,7 +28831,7 @@
         <p:spPr>
           <a:xfrm>
             <a:off x="7315200" y="0"/>
-            <a:ext cx="12960" cy="6852600"/>
+            <a:ext cx="12600" cy="6852240"/>
           </a:xfrm>
           <a:prstGeom prst="rect">
             <a:avLst/>
@@ -26205,7 +28891,7 @@
         <p:spPr>
           <a:xfrm>
             <a:off x="8229600" y="0"/>
-            <a:ext cx="12960" cy="6852600"/>
+            <a:ext cx="12600" cy="6852240"/>
           </a:xfrm>
           <a:prstGeom prst="rect">
             <a:avLst/>
@@ -26265,7 +28951,7 @@
         <p:spPr>
           <a:xfrm>
             <a:off x="9144000" y="0"/>
-            <a:ext cx="12960" cy="6852600"/>
+            <a:ext cx="12600" cy="6852240"/>
           </a:xfrm>
           <a:prstGeom prst="rect">
             <a:avLst/>
@@ -26325,7 +29011,7 @@
         <p:spPr>
           <a:xfrm>
             <a:off x="10058400" y="0"/>
-            <a:ext cx="12960" cy="6852600"/>
+            <a:ext cx="12600" cy="6852240"/>
           </a:xfrm>
           <a:prstGeom prst="rect">
             <a:avLst/>
@@ -26385,7 +29071,7 @@
         <p:spPr>
           <a:xfrm>
             <a:off x="10972800" y="0"/>
-            <a:ext cx="12960" cy="6852600"/>
+            <a:ext cx="12600" cy="6852240"/>
           </a:xfrm>
           <a:prstGeom prst="rect">
             <a:avLst/>
@@ -26445,7 +29131,7 @@
         <p:spPr>
           <a:xfrm>
             <a:off x="11887200" y="0"/>
-            <a:ext cx="12960" cy="6852600"/>
+            <a:ext cx="12600" cy="6852240"/>
           </a:xfrm>
           <a:prstGeom prst="rect">
             <a:avLst/>
@@ -26505,7 +29191,7 @@
         <p:spPr>
           <a:xfrm>
             <a:off x="0" y="0"/>
-            <a:ext cx="314640" cy="6852600"/>
+            <a:ext cx="314280" cy="6852240"/>
           </a:xfrm>
           <a:prstGeom prst="rect">
             <a:avLst/>
@@ -26565,7 +29251,7 @@
         <p:spPr>
           <a:xfrm>
             <a:off x="9875520" y="365760"/>
-            <a:ext cx="2006280" cy="497520"/>
+            <a:ext cx="2005920" cy="497160"/>
           </a:xfrm>
           <a:prstGeom prst="roundRect">
             <a:avLst>
@@ -26770,7 +29456,7 @@
         <p:spPr>
           <a:xfrm>
             <a:off x="987480" y="3182040"/>
-            <a:ext cx="3286440" cy="2737800"/>
+            <a:ext cx="3286080" cy="2737440"/>
           </a:xfrm>
           <a:prstGeom prst="roundRect">
             <a:avLst>
@@ -26832,7 +29518,7 @@
         <p:spPr>
           <a:xfrm>
             <a:off x="457200" y="2514600"/>
-            <a:ext cx="3743640" cy="4111560"/>
+            <a:ext cx="3743280" cy="4111200"/>
           </a:xfrm>
           <a:prstGeom prst="roundRect">
             <a:avLst>
@@ -27085,7 +29771,7 @@
         <p:spPr>
           <a:xfrm>
             <a:off x="4507920" y="3182040"/>
-            <a:ext cx="3286440" cy="2737800"/>
+            <a:ext cx="3286080" cy="2737440"/>
           </a:xfrm>
           <a:prstGeom prst="roundRect">
             <a:avLst>
@@ -27147,7 +29833,7 @@
         <p:spPr>
           <a:xfrm>
             <a:off x="4434840" y="2514600"/>
-            <a:ext cx="3286440" cy="3881880"/>
+            <a:ext cx="3286080" cy="3881520"/>
           </a:xfrm>
           <a:prstGeom prst="roundRect">
             <a:avLst>
@@ -27363,7 +30049,7 @@
         <p:spPr>
           <a:xfrm>
             <a:off x="8028360" y="3182040"/>
-            <a:ext cx="3286440" cy="2737800"/>
+            <a:ext cx="3286080" cy="2737440"/>
           </a:xfrm>
           <a:prstGeom prst="roundRect">
             <a:avLst>
@@ -27425,7 +30111,7 @@
         <p:spPr>
           <a:xfrm>
             <a:off x="8001000" y="2286000"/>
-            <a:ext cx="3655080" cy="4112280"/>
+            <a:ext cx="3654720" cy="4111920"/>
           </a:xfrm>
           <a:prstGeom prst="roundRect">
             <a:avLst>
@@ -28101,7 +30787,7 @@
         <p:spPr>
           <a:xfrm>
             <a:off x="0" y="0"/>
-            <a:ext cx="12183840" cy="6852960"/>
+            <a:ext cx="12183480" cy="6852600"/>
           </a:xfrm>
           <a:prstGeom prst="rect">
             <a:avLst/>
@@ -28161,7 +30847,7 @@
         <p:spPr>
           <a:xfrm>
             <a:off x="0" y="0"/>
-            <a:ext cx="13320" cy="6852960"/>
+            <a:ext cx="12960" cy="6852600"/>
           </a:xfrm>
           <a:prstGeom prst="rect">
             <a:avLst/>
@@ -28221,7 +30907,7 @@
         <p:spPr>
           <a:xfrm>
             <a:off x="914400" y="0"/>
-            <a:ext cx="13320" cy="6852960"/>
+            <a:ext cx="12960" cy="6852600"/>
           </a:xfrm>
           <a:prstGeom prst="rect">
             <a:avLst/>
@@ -28281,7 +30967,7 @@
         <p:spPr>
           <a:xfrm>
             <a:off x="1828800" y="0"/>
-            <a:ext cx="13320" cy="6852960"/>
+            <a:ext cx="12960" cy="6852600"/>
           </a:xfrm>
           <a:prstGeom prst="rect">
             <a:avLst/>
@@ -28341,7 +31027,7 @@
         <p:spPr>
           <a:xfrm>
             <a:off x="2743200" y="0"/>
-            <a:ext cx="13320" cy="6852960"/>
+            <a:ext cx="12960" cy="6852600"/>
           </a:xfrm>
           <a:prstGeom prst="rect">
             <a:avLst/>
@@ -28401,7 +31087,7 @@
         <p:spPr>
           <a:xfrm>
             <a:off x="3657600" y="0"/>
-            <a:ext cx="13320" cy="6852960"/>
+            <a:ext cx="12960" cy="6852600"/>
           </a:xfrm>
           <a:prstGeom prst="rect">
             <a:avLst/>
@@ -28461,7 +31147,7 @@
         <p:spPr>
           <a:xfrm>
             <a:off x="4572000" y="0"/>
-            <a:ext cx="13320" cy="6852960"/>
+            <a:ext cx="12960" cy="6852600"/>
           </a:xfrm>
           <a:prstGeom prst="rect">
             <a:avLst/>
@@ -28521,7 +31207,7 @@
         <p:spPr>
           <a:xfrm>
             <a:off x="5486400" y="0"/>
-            <a:ext cx="13320" cy="6852960"/>
+            <a:ext cx="12960" cy="6852600"/>
           </a:xfrm>
           <a:prstGeom prst="rect">
             <a:avLst/>
@@ -28581,7 +31267,7 @@
         <p:spPr>
           <a:xfrm>
             <a:off x="6400800" y="0"/>
-            <a:ext cx="13320" cy="6852960"/>
+            <a:ext cx="12960" cy="6852600"/>
           </a:xfrm>
           <a:prstGeom prst="rect">
             <a:avLst/>
@@ -28641,7 +31327,7 @@
         <p:spPr>
           <a:xfrm>
             <a:off x="7315200" y="0"/>
-            <a:ext cx="13320" cy="6852960"/>
+            <a:ext cx="12960" cy="6852600"/>
           </a:xfrm>
           <a:prstGeom prst="rect">
             <a:avLst/>
@@ -28701,7 +31387,7 @@
         <p:spPr>
           <a:xfrm>
             <a:off x="8229600" y="0"/>
-            <a:ext cx="13320" cy="6852960"/>
+            <a:ext cx="12960" cy="6852600"/>
           </a:xfrm>
           <a:prstGeom prst="rect">
             <a:avLst/>
@@ -28761,7 +31447,7 @@
         <p:spPr>
           <a:xfrm>
             <a:off x="9144000" y="0"/>
-            <a:ext cx="13320" cy="6852960"/>
+            <a:ext cx="12960" cy="6852600"/>
           </a:xfrm>
           <a:prstGeom prst="rect">
             <a:avLst/>
@@ -28821,7 +31507,7 @@
         <p:spPr>
           <a:xfrm>
             <a:off x="10058400" y="0"/>
-            <a:ext cx="13320" cy="6852960"/>
+            <a:ext cx="12960" cy="6852600"/>
           </a:xfrm>
           <a:prstGeom prst="rect">
             <a:avLst/>
@@ -28881,7 +31567,7 @@
         <p:spPr>
           <a:xfrm>
             <a:off x="10972800" y="0"/>
-            <a:ext cx="13320" cy="6852960"/>
+            <a:ext cx="12960" cy="6852600"/>
           </a:xfrm>
           <a:prstGeom prst="rect">
             <a:avLst/>
@@ -28941,7 +31627,7 @@
         <p:spPr>
           <a:xfrm>
             <a:off x="11887200" y="0"/>
-            <a:ext cx="13320" cy="6852960"/>
+            <a:ext cx="12960" cy="6852600"/>
           </a:xfrm>
           <a:prstGeom prst="rect">
             <a:avLst/>
@@ -29001,7 +31687,7 @@
         <p:spPr>
           <a:xfrm>
             <a:off x="0" y="0"/>
-            <a:ext cx="315000" cy="6852960"/>
+            <a:ext cx="314640" cy="6852600"/>
           </a:xfrm>
           <a:prstGeom prst="rect">
             <a:avLst/>
@@ -29061,7 +31747,7 @@
         <p:spPr>
           <a:xfrm>
             <a:off x="9875520" y="365760"/>
-            <a:ext cx="2006640" cy="497880"/>
+            <a:ext cx="2006280" cy="497520"/>
           </a:xfrm>
           <a:prstGeom prst="roundRect">
             <a:avLst>
@@ -29299,7 +31985,7 @@
         <p:spPr>
           <a:xfrm>
             <a:off x="987480" y="3182040"/>
-            <a:ext cx="3286800" cy="2738160"/>
+            <a:ext cx="3286440" cy="2737800"/>
           </a:xfrm>
           <a:prstGeom prst="roundRect">
             <a:avLst>
@@ -29361,7 +32047,7 @@
         <p:spPr>
           <a:xfrm>
             <a:off x="457200" y="2743200"/>
-            <a:ext cx="3884040" cy="3883320"/>
+            <a:ext cx="3883680" cy="3882960"/>
           </a:xfrm>
           <a:prstGeom prst="roundRect">
             <a:avLst>
@@ -29675,7 +32361,7 @@
         <p:spPr>
           <a:xfrm>
             <a:off x="4507920" y="3182040"/>
-            <a:ext cx="3286800" cy="2738160"/>
+            <a:ext cx="3286440" cy="2737800"/>
           </a:xfrm>
           <a:prstGeom prst="roundRect">
             <a:avLst>
@@ -29737,7 +32423,7 @@
         <p:spPr>
           <a:xfrm>
             <a:off x="4572000" y="2743200"/>
-            <a:ext cx="3426840" cy="3655440"/>
+            <a:ext cx="3426480" cy="3655080"/>
           </a:xfrm>
           <a:prstGeom prst="roundRect">
             <a:avLst>
@@ -30312,7 +32998,7 @@
         <p:spPr>
           <a:xfrm>
             <a:off x="8028360" y="3182040"/>
-            <a:ext cx="3286800" cy="2738160"/>
+            <a:ext cx="3286440" cy="2737800"/>
           </a:xfrm>
           <a:prstGeom prst="roundRect">
             <a:avLst>
@@ -30374,7 +33060,7 @@
         <p:spPr>
           <a:xfrm>
             <a:off x="8229600" y="2514600"/>
-            <a:ext cx="3655440" cy="4112640"/>
+            <a:ext cx="3655080" cy="4112280"/>
           </a:xfrm>
           <a:prstGeom prst="roundRect">
             <a:avLst>
@@ -31366,7 +34052,7 @@
         <p:spPr>
           <a:xfrm>
             <a:off x="0" y="0"/>
-            <a:ext cx="12183480" cy="6852600"/>
+            <a:ext cx="12183120" cy="6852240"/>
           </a:xfrm>
           <a:prstGeom prst="rect">
             <a:avLst/>
@@ -31426,7 +34112,7 @@
         <p:spPr>
           <a:xfrm>
             <a:off x="0" y="0"/>
-            <a:ext cx="12960" cy="6852600"/>
+            <a:ext cx="12600" cy="6852240"/>
           </a:xfrm>
           <a:prstGeom prst="rect">
             <a:avLst/>
@@ -31486,7 +34172,7 @@
         <p:spPr>
           <a:xfrm>
             <a:off x="914400" y="0"/>
-            <a:ext cx="12960" cy="6852600"/>
+            <a:ext cx="12600" cy="6852240"/>
           </a:xfrm>
           <a:prstGeom prst="rect">
             <a:avLst/>
@@ -31546,7 +34232,7 @@
         <p:spPr>
           <a:xfrm>
             <a:off x="1828800" y="0"/>
-            <a:ext cx="12960" cy="6852600"/>
+            <a:ext cx="12600" cy="6852240"/>
           </a:xfrm>
           <a:prstGeom prst="rect">
             <a:avLst/>
@@ -31606,7 +34292,7 @@
         <p:spPr>
           <a:xfrm>
             <a:off x="2743200" y="0"/>
-            <a:ext cx="12960" cy="6852600"/>
+            <a:ext cx="12600" cy="6852240"/>
           </a:xfrm>
           <a:prstGeom prst="rect">
             <a:avLst/>
@@ -31666,7 +34352,7 @@
         <p:spPr>
           <a:xfrm>
             <a:off x="3657600" y="0"/>
-            <a:ext cx="12960" cy="6852600"/>
+            <a:ext cx="12600" cy="6852240"/>
           </a:xfrm>
           <a:prstGeom prst="rect">
             <a:avLst/>
@@ -31726,7 +34412,7 @@
         <p:spPr>
           <a:xfrm>
             <a:off x="4572000" y="0"/>
-            <a:ext cx="12960" cy="6852600"/>
+            <a:ext cx="12600" cy="6852240"/>
           </a:xfrm>
           <a:prstGeom prst="rect">
             <a:avLst/>
@@ -31786,7 +34472,7 @@
         <p:spPr>
           <a:xfrm>
             <a:off x="5486400" y="0"/>
-            <a:ext cx="12960" cy="6852600"/>
+            <a:ext cx="12600" cy="6852240"/>
           </a:xfrm>
           <a:prstGeom prst="rect">
             <a:avLst/>
@@ -31846,7 +34532,7 @@
         <p:spPr>
           <a:xfrm>
             <a:off x="6400800" y="0"/>
-            <a:ext cx="12960" cy="6852600"/>
+            <a:ext cx="12600" cy="6852240"/>
           </a:xfrm>
           <a:prstGeom prst="rect">
             <a:avLst/>
@@ -31906,7 +34592,7 @@
         <p:spPr>
           <a:xfrm>
             <a:off x="7315200" y="0"/>
-            <a:ext cx="12960" cy="6852600"/>
+            <a:ext cx="12600" cy="6852240"/>
           </a:xfrm>
           <a:prstGeom prst="rect">
             <a:avLst/>
@@ -31966,7 +34652,7 @@
         <p:spPr>
           <a:xfrm>
             <a:off x="8229600" y="0"/>
-            <a:ext cx="12960" cy="6852600"/>
+            <a:ext cx="12600" cy="6852240"/>
           </a:xfrm>
           <a:prstGeom prst="rect">
             <a:avLst/>
@@ -32026,7 +34712,7 @@
         <p:spPr>
           <a:xfrm>
             <a:off x="9144000" y="0"/>
-            <a:ext cx="12960" cy="6852600"/>
+            <a:ext cx="12600" cy="6852240"/>
           </a:xfrm>
           <a:prstGeom prst="rect">
             <a:avLst/>
@@ -32086,7 +34772,7 @@
         <p:spPr>
           <a:xfrm>
             <a:off x="10058400" y="0"/>
-            <a:ext cx="12960" cy="6852600"/>
+            <a:ext cx="12600" cy="6852240"/>
           </a:xfrm>
           <a:prstGeom prst="rect">
             <a:avLst/>
@@ -32146,7 +34832,7 @@
         <p:spPr>
           <a:xfrm>
             <a:off x="10972800" y="0"/>
-            <a:ext cx="12960" cy="6852600"/>
+            <a:ext cx="12600" cy="6852240"/>
           </a:xfrm>
           <a:prstGeom prst="rect">
             <a:avLst/>
@@ -32206,7 +34892,7 @@
         <p:spPr>
           <a:xfrm>
             <a:off x="11887200" y="0"/>
-            <a:ext cx="12960" cy="6852600"/>
+            <a:ext cx="12600" cy="6852240"/>
           </a:xfrm>
           <a:prstGeom prst="rect">
             <a:avLst/>
@@ -32266,7 +34952,7 @@
         <p:spPr>
           <a:xfrm>
             <a:off x="0" y="0"/>
-            <a:ext cx="314640" cy="6852600"/>
+            <a:ext cx="314280" cy="6852240"/>
           </a:xfrm>
           <a:prstGeom prst="rect">
             <a:avLst/>
@@ -32326,7 +35012,7 @@
         <p:spPr>
           <a:xfrm>
             <a:off x="9875520" y="365760"/>
-            <a:ext cx="2006280" cy="497520"/>
+            <a:ext cx="2005920" cy="497160"/>
           </a:xfrm>
           <a:prstGeom prst="roundRect">
             <a:avLst>
@@ -32554,7 +35240,7 @@
         <p:spPr>
           <a:xfrm>
             <a:off x="987480" y="3182040"/>
-            <a:ext cx="3286440" cy="2737800"/>
+            <a:ext cx="3286080" cy="2737440"/>
           </a:xfrm>
           <a:prstGeom prst="roundRect">
             <a:avLst>
@@ -32616,7 +35302,7 @@
         <p:spPr>
           <a:xfrm>
             <a:off x="914400" y="2743200"/>
-            <a:ext cx="3286440" cy="3655440"/>
+            <a:ext cx="3286080" cy="3655080"/>
           </a:xfrm>
           <a:prstGeom prst="roundRect">
             <a:avLst>
@@ -32947,7 +35633,7 @@
         <p:spPr>
           <a:xfrm>
             <a:off x="4507920" y="3182040"/>
-            <a:ext cx="3286440" cy="2737800"/>
+            <a:ext cx="3286080" cy="2737440"/>
           </a:xfrm>
           <a:prstGeom prst="roundRect">
             <a:avLst>
@@ -33009,7 +35695,7 @@
         <p:spPr>
           <a:xfrm>
             <a:off x="4434840" y="2743200"/>
-            <a:ext cx="3286440" cy="3655440"/>
+            <a:ext cx="3286080" cy="3655080"/>
           </a:xfrm>
           <a:prstGeom prst="roundRect">
             <a:avLst>
@@ -33416,7 +36102,7 @@
         <p:spPr>
           <a:xfrm>
             <a:off x="8028360" y="3182040"/>
-            <a:ext cx="3286440" cy="2737800"/>
+            <a:ext cx="3286080" cy="2737440"/>
           </a:xfrm>
           <a:prstGeom prst="roundRect">
             <a:avLst>
@@ -33478,7 +36164,7 @@
         <p:spPr>
           <a:xfrm>
             <a:off x="7955280" y="2743200"/>
-            <a:ext cx="3699000" cy="3654000"/>
+            <a:ext cx="3698640" cy="3653640"/>
           </a:xfrm>
           <a:prstGeom prst="roundRect">
             <a:avLst>
@@ -34220,7 +36906,7 @@
         <p:spPr>
           <a:xfrm>
             <a:off x="0" y="0"/>
-            <a:ext cx="12183120" cy="6852240"/>
+            <a:ext cx="12182760" cy="6851880"/>
           </a:xfrm>
           <a:prstGeom prst="rect">
             <a:avLst/>
@@ -34280,7 +36966,7 @@
         <p:spPr>
           <a:xfrm>
             <a:off x="0" y="0"/>
-            <a:ext cx="12600" cy="6852240"/>
+            <a:ext cx="12240" cy="6851880"/>
           </a:xfrm>
           <a:prstGeom prst="rect">
             <a:avLst/>
@@ -34340,7 +37026,7 @@
         <p:spPr>
           <a:xfrm>
             <a:off x="914400" y="0"/>
-            <a:ext cx="12600" cy="6852240"/>
+            <a:ext cx="12240" cy="6851880"/>
           </a:xfrm>
           <a:prstGeom prst="rect">
             <a:avLst/>
@@ -34400,7 +37086,7 @@
         <p:spPr>
           <a:xfrm>
             <a:off x="1828800" y="0"/>
-            <a:ext cx="12600" cy="6852240"/>
+            <a:ext cx="12240" cy="6851880"/>
           </a:xfrm>
           <a:prstGeom prst="rect">
             <a:avLst/>
@@ -34460,7 +37146,7 @@
         <p:spPr>
           <a:xfrm>
             <a:off x="2743200" y="0"/>
-            <a:ext cx="12600" cy="6852240"/>
+            <a:ext cx="12240" cy="6851880"/>
           </a:xfrm>
           <a:prstGeom prst="rect">
             <a:avLst/>
@@ -34520,7 +37206,7 @@
         <p:spPr>
           <a:xfrm>
             <a:off x="3657600" y="0"/>
-            <a:ext cx="12600" cy="6852240"/>
+            <a:ext cx="12240" cy="6851880"/>
           </a:xfrm>
           <a:prstGeom prst="rect">
             <a:avLst/>
@@ -34580,7 +37266,7 @@
         <p:spPr>
           <a:xfrm>
             <a:off x="4572000" y="0"/>
-            <a:ext cx="12600" cy="6852240"/>
+            <a:ext cx="12240" cy="6851880"/>
           </a:xfrm>
           <a:prstGeom prst="rect">
             <a:avLst/>
@@ -34640,7 +37326,7 @@
         <p:spPr>
           <a:xfrm>
             <a:off x="5486400" y="0"/>
-            <a:ext cx="12600" cy="6852240"/>
+            <a:ext cx="12240" cy="6851880"/>
           </a:xfrm>
           <a:prstGeom prst="rect">
             <a:avLst/>
@@ -34700,7 +37386,7 @@
         <p:spPr>
           <a:xfrm>
             <a:off x="6400800" y="0"/>
-            <a:ext cx="12600" cy="6852240"/>
+            <a:ext cx="12240" cy="6851880"/>
           </a:xfrm>
           <a:prstGeom prst="rect">
             <a:avLst/>
@@ -34760,7 +37446,7 @@
         <p:spPr>
           <a:xfrm>
             <a:off x="7315200" y="0"/>
-            <a:ext cx="12600" cy="6852240"/>
+            <a:ext cx="12240" cy="6851880"/>
           </a:xfrm>
           <a:prstGeom prst="rect">
             <a:avLst/>
@@ -34820,7 +37506,7 @@
         <p:spPr>
           <a:xfrm>
             <a:off x="8229600" y="0"/>
-            <a:ext cx="12600" cy="6852240"/>
+            <a:ext cx="12240" cy="6851880"/>
           </a:xfrm>
           <a:prstGeom prst="rect">
             <a:avLst/>
@@ -34880,7 +37566,7 @@
         <p:spPr>
           <a:xfrm>
             <a:off x="9144000" y="0"/>
-            <a:ext cx="12600" cy="6852240"/>
+            <a:ext cx="12240" cy="6851880"/>
           </a:xfrm>
           <a:prstGeom prst="rect">
             <a:avLst/>
@@ -34940,7 +37626,7 @@
         <p:spPr>
           <a:xfrm>
             <a:off x="10058400" y="0"/>
-            <a:ext cx="12600" cy="6852240"/>
+            <a:ext cx="12240" cy="6851880"/>
           </a:xfrm>
           <a:prstGeom prst="rect">
             <a:avLst/>
@@ -35000,7 +37686,7 @@
         <p:spPr>
           <a:xfrm>
             <a:off x="10972800" y="0"/>
-            <a:ext cx="12600" cy="6852240"/>
+            <a:ext cx="12240" cy="6851880"/>
           </a:xfrm>
           <a:prstGeom prst="rect">
             <a:avLst/>
@@ -35060,7 +37746,7 @@
         <p:spPr>
           <a:xfrm>
             <a:off x="11887200" y="0"/>
-            <a:ext cx="12600" cy="6852240"/>
+            <a:ext cx="12240" cy="6851880"/>
           </a:xfrm>
           <a:prstGeom prst="rect">
             <a:avLst/>
@@ -35120,7 +37806,7 @@
         <p:spPr>
           <a:xfrm>
             <a:off x="0" y="0"/>
-            <a:ext cx="314280" cy="6852240"/>
+            <a:ext cx="313920" cy="6851880"/>
           </a:xfrm>
           <a:prstGeom prst="rect">
             <a:avLst/>
@@ -35180,7 +37866,7 @@
         <p:spPr>
           <a:xfrm>
             <a:off x="9875520" y="365760"/>
-            <a:ext cx="2005920" cy="497160"/>
+            <a:ext cx="2005560" cy="496800"/>
           </a:xfrm>
           <a:prstGeom prst="roundRect">
             <a:avLst>
@@ -35421,7 +38107,7 @@
         <p:spPr>
           <a:xfrm>
             <a:off x="987480" y="3182040"/>
-            <a:ext cx="3286080" cy="2737440"/>
+            <a:ext cx="3285720" cy="2737080"/>
           </a:xfrm>
           <a:prstGeom prst="roundRect">
             <a:avLst>
@@ -35483,7 +38169,7 @@
         <p:spPr>
           <a:xfrm>
             <a:off x="914400" y="3108960"/>
-            <a:ext cx="3286080" cy="3289320"/>
+            <a:ext cx="3285720" cy="3288960"/>
           </a:xfrm>
           <a:prstGeom prst="roundRect">
             <a:avLst>
@@ -35749,7 +38435,7 @@
         <p:spPr>
           <a:xfrm>
             <a:off x="4507920" y="3182040"/>
-            <a:ext cx="3286080" cy="2737440"/>
+            <a:ext cx="3285720" cy="2737080"/>
           </a:xfrm>
           <a:prstGeom prst="roundRect">
             <a:avLst>
@@ -35811,7 +38497,7 @@
         <p:spPr>
           <a:xfrm>
             <a:off x="4434840" y="3200400"/>
-            <a:ext cx="3286080" cy="3197880"/>
+            <a:ext cx="3285720" cy="3197520"/>
           </a:xfrm>
           <a:prstGeom prst="roundRect">
             <a:avLst>
@@ -36185,7 +38871,7 @@
         <p:spPr>
           <a:xfrm>
             <a:off x="8028360" y="3182040"/>
-            <a:ext cx="3286080" cy="2737440"/>
+            <a:ext cx="3285720" cy="2737080"/>
           </a:xfrm>
           <a:prstGeom prst="roundRect">
             <a:avLst>
@@ -36247,7 +38933,7 @@
         <p:spPr>
           <a:xfrm>
             <a:off x="8003880" y="2971800"/>
-            <a:ext cx="3424320" cy="3425040"/>
+            <a:ext cx="3423960" cy="3424680"/>
           </a:xfrm>
           <a:prstGeom prst="roundRect">
             <a:avLst>

--- a/Java/Java #4/EN/Java #4.pptx
+++ b/Java/Java #4/EN/Java #4.pptx
@@ -19,6 +19,7 @@
     <p:sldId id="267" r:id="rId14"/>
     <p:sldId id="268" r:id="rId15"/>
     <p:sldId id="269" r:id="rId16"/>
+    <p:sldId id="270" r:id="rId17"/>
   </p:sldIdLst>
   <p:sldSz cx="9144000" cy="6858000"/>
   <p:notesSz cx="7772400" cy="10058400"/>
@@ -76,7 +77,7 @@
         <p:txBody>
           <a:bodyPr/>
           <a:p>
-            <a:fld id="{410C2A3F-A0C4-4CDF-8293-C681F571DEAA}" type="slidenum">
+            <a:fld id="{F9F46972-C2A7-40F1-8D23-86528F11D235}" type="slidenum">
               <a:t>&lt;#&gt;</a:t>
             </a:fld>
           </a:p>
@@ -285,7 +286,7 @@
         <p:txBody>
           <a:bodyPr/>
           <a:p>
-            <a:fld id="{A9D77AE6-180E-4AA9-8077-BD56A6FA258D}" type="slidenum">
+            <a:fld id="{5135D215-6D7D-4004-AACA-E2810C0D705C}" type="slidenum">
               <a:t>&lt;#&gt;</a:t>
             </a:fld>
           </a:p>
@@ -580,7 +581,7 @@
         <p:txBody>
           <a:bodyPr/>
           <a:p>
-            <a:fld id="{5288E102-4514-4553-ABCA-8BFD333C3E1D}" type="slidenum">
+            <a:fld id="{A14C2D28-A64B-4F51-8B13-3F520412F929}" type="slidenum">
               <a:t>&lt;#&gt;</a:t>
             </a:fld>
           </a:p>
@@ -961,7 +962,7 @@
         <p:txBody>
           <a:bodyPr/>
           <a:p>
-            <a:fld id="{3FCAD035-09E4-41A9-A8E6-3A3F59D7A710}" type="slidenum">
+            <a:fld id="{41B993EF-A834-4555-8BBA-42FF30A1A9F4}" type="slidenum">
               <a:t>&lt;#&gt;</a:t>
             </a:fld>
           </a:p>
@@ -1124,7 +1125,7 @@
         <p:txBody>
           <a:bodyPr/>
           <a:p>
-            <a:fld id="{35B127E2-478F-4FEE-894E-1ED0ACA634FB}" type="slidenum">
+            <a:fld id="{9606CBCF-5E5D-4A56-A4E5-BD112407E0D7}" type="slidenum">
               <a:t>&lt;#&gt;</a:t>
             </a:fld>
           </a:p>
@@ -1290,7 +1291,7 @@
         <p:txBody>
           <a:bodyPr/>
           <a:p>
-            <a:fld id="{9536E41E-1F5A-4027-B462-E02F3268FF8B}" type="slidenum">
+            <a:fld id="{92AF9B98-8CEC-4514-98A4-6C5DB125DF8B}" type="slidenum">
               <a:t>&lt;#&gt;</a:t>
             </a:fld>
           </a:p>
@@ -1499,7 +1500,7 @@
         <p:txBody>
           <a:bodyPr/>
           <a:p>
-            <a:fld id="{008D530A-2AE9-4132-9BD7-DB42E18F3738}" type="slidenum">
+            <a:fld id="{F689F8C8-07AA-4482-AB64-6AEC9BF6ABD1}" type="slidenum">
               <a:t>&lt;#&gt;</a:t>
             </a:fld>
           </a:p>
@@ -1622,7 +1623,7 @@
         <p:txBody>
           <a:bodyPr/>
           <a:p>
-            <a:fld id="{1337ED58-122D-4D1B-9070-C467CA8C9C25}" type="slidenum">
+            <a:fld id="{66ED3DC6-0E1E-40A8-B6E1-2E0FE761C28D}" type="slidenum">
               <a:t>&lt;#&gt;</a:t>
             </a:fld>
           </a:p>
@@ -1743,7 +1744,7 @@
         <p:txBody>
           <a:bodyPr/>
           <a:p>
-            <a:fld id="{FC29B60B-2E90-4F9E-B574-DF03C45C1256}" type="slidenum">
+            <a:fld id="{E0C1EEE5-D92D-492A-A8C5-4AD796DAF49C}" type="slidenum">
               <a:t>&lt;#&gt;</a:t>
             </a:fld>
           </a:p>
@@ -1995,7 +1996,7 @@
         <p:txBody>
           <a:bodyPr/>
           <a:p>
-            <a:fld id="{21667F4F-BE54-4418-B87A-B70CBC67A27C}" type="slidenum">
+            <a:fld id="{FE820DCE-7825-4579-B85D-5632CF99A3EC}" type="slidenum">
               <a:t>&lt;#&gt;</a:t>
             </a:fld>
           </a:p>
@@ -2247,7 +2248,7 @@
         <p:txBody>
           <a:bodyPr/>
           <a:p>
-            <a:fld id="{BB35F09D-A693-4ED2-ABF1-B3468D793D0B}" type="slidenum">
+            <a:fld id="{CB3ADA6B-5D0E-4EB2-848E-07ADEF9A03A5}" type="slidenum">
               <a:t>&lt;#&gt;</a:t>
             </a:fld>
           </a:p>
@@ -2499,7 +2500,7 @@
         <p:txBody>
           <a:bodyPr/>
           <a:p>
-            <a:fld id="{1948CD04-DEF7-42BF-99BD-F79F8358F13D}" type="slidenum">
+            <a:fld id="{5DA570CD-DF99-47C9-BC13-8A51B1853E2D}" type="slidenum">
               <a:t>&lt;#&gt;</a:t>
             </a:fld>
           </a:p>
@@ -2568,7 +2569,7 @@
         <p:spPr>
           <a:xfrm>
             <a:off x="3124080" y="6356520"/>
-            <a:ext cx="2889720" cy="359280"/>
+            <a:ext cx="2889360" cy="358920"/>
           </a:xfrm>
           <a:prstGeom prst="rect">
             <a:avLst/>
@@ -2640,7 +2641,7 @@
         <p:spPr>
           <a:xfrm>
             <a:off x="6553080" y="6356520"/>
-            <a:ext cx="2127960" cy="359280"/>
+            <a:ext cx="2127600" cy="358920"/>
           </a:xfrm>
           <a:prstGeom prst="rect">
             <a:avLst/>
@@ -2681,7 +2682,7 @@
                 <a:tab algn="l" pos="0"/>
               </a:tabLst>
             </a:pPr>
-            <a:fld id="{C2966FB2-BD10-4907-9BF6-0F564A9E17D1}" type="slidenum">
+            <a:fld id="{690268F1-F205-4178-B55B-3C5BC9BB2344}" type="slidenum">
               <a:rPr b="0" lang="en-US" sz="1200" spc="-1" strike="noStrike">
                 <a:solidFill>
                   <a:srgbClr val="8b8b8b"/>
@@ -2712,7 +2713,7 @@
         <p:spPr>
           <a:xfrm>
             <a:off x="457200" y="6356520"/>
-            <a:ext cx="2127960" cy="359280"/>
+            <a:ext cx="2127600" cy="358920"/>
           </a:xfrm>
           <a:prstGeom prst="rect">
             <a:avLst/>
@@ -3079,7 +3080,7 @@
         <p:spPr>
           <a:xfrm>
             <a:off x="0" y="0"/>
-            <a:ext cx="12183120" cy="6852240"/>
+            <a:ext cx="12182760" cy="6851880"/>
           </a:xfrm>
           <a:prstGeom prst="rect">
             <a:avLst/>
@@ -3139,7 +3140,7 @@
         <p:spPr>
           <a:xfrm>
             <a:off x="0" y="0"/>
-            <a:ext cx="12600" cy="6852240"/>
+            <a:ext cx="12240" cy="6851880"/>
           </a:xfrm>
           <a:prstGeom prst="rect">
             <a:avLst/>
@@ -3199,7 +3200,7 @@
         <p:spPr>
           <a:xfrm>
             <a:off x="914400" y="0"/>
-            <a:ext cx="12600" cy="6852240"/>
+            <a:ext cx="12240" cy="6851880"/>
           </a:xfrm>
           <a:prstGeom prst="rect">
             <a:avLst/>
@@ -3259,7 +3260,7 @@
         <p:spPr>
           <a:xfrm>
             <a:off x="1828800" y="0"/>
-            <a:ext cx="12600" cy="6852240"/>
+            <a:ext cx="12240" cy="6851880"/>
           </a:xfrm>
           <a:prstGeom prst="rect">
             <a:avLst/>
@@ -3319,7 +3320,7 @@
         <p:spPr>
           <a:xfrm>
             <a:off x="2743200" y="0"/>
-            <a:ext cx="12600" cy="6852240"/>
+            <a:ext cx="12240" cy="6851880"/>
           </a:xfrm>
           <a:prstGeom prst="rect">
             <a:avLst/>
@@ -3379,7 +3380,7 @@
         <p:spPr>
           <a:xfrm>
             <a:off x="3657600" y="0"/>
-            <a:ext cx="12600" cy="6852240"/>
+            <a:ext cx="12240" cy="6851880"/>
           </a:xfrm>
           <a:prstGeom prst="rect">
             <a:avLst/>
@@ -3439,7 +3440,7 @@
         <p:spPr>
           <a:xfrm>
             <a:off x="4572000" y="0"/>
-            <a:ext cx="12600" cy="6852240"/>
+            <a:ext cx="12240" cy="6851880"/>
           </a:xfrm>
           <a:prstGeom prst="rect">
             <a:avLst/>
@@ -3499,7 +3500,7 @@
         <p:spPr>
           <a:xfrm>
             <a:off x="5486400" y="0"/>
-            <a:ext cx="12600" cy="6852240"/>
+            <a:ext cx="12240" cy="6851880"/>
           </a:xfrm>
           <a:prstGeom prst="rect">
             <a:avLst/>
@@ -3559,7 +3560,7 @@
         <p:spPr>
           <a:xfrm>
             <a:off x="6400800" y="0"/>
-            <a:ext cx="12600" cy="6852240"/>
+            <a:ext cx="12240" cy="6851880"/>
           </a:xfrm>
           <a:prstGeom prst="rect">
             <a:avLst/>
@@ -3619,7 +3620,7 @@
         <p:spPr>
           <a:xfrm>
             <a:off x="7315200" y="0"/>
-            <a:ext cx="12600" cy="6852240"/>
+            <a:ext cx="12240" cy="6851880"/>
           </a:xfrm>
           <a:prstGeom prst="rect">
             <a:avLst/>
@@ -3679,7 +3680,7 @@
         <p:spPr>
           <a:xfrm>
             <a:off x="8229600" y="0"/>
-            <a:ext cx="12600" cy="6852240"/>
+            <a:ext cx="12240" cy="6851880"/>
           </a:xfrm>
           <a:prstGeom prst="rect">
             <a:avLst/>
@@ -3739,7 +3740,7 @@
         <p:spPr>
           <a:xfrm>
             <a:off x="9144000" y="0"/>
-            <a:ext cx="12600" cy="6852240"/>
+            <a:ext cx="12240" cy="6851880"/>
           </a:xfrm>
           <a:prstGeom prst="rect">
             <a:avLst/>
@@ -3799,7 +3800,7 @@
         <p:spPr>
           <a:xfrm>
             <a:off x="10058400" y="0"/>
-            <a:ext cx="12600" cy="6852240"/>
+            <a:ext cx="12240" cy="6851880"/>
           </a:xfrm>
           <a:prstGeom prst="rect">
             <a:avLst/>
@@ -3859,7 +3860,7 @@
         <p:spPr>
           <a:xfrm>
             <a:off x="10972800" y="0"/>
-            <a:ext cx="12600" cy="6852240"/>
+            <a:ext cx="12240" cy="6851880"/>
           </a:xfrm>
           <a:prstGeom prst="rect">
             <a:avLst/>
@@ -3919,7 +3920,7 @@
         <p:spPr>
           <a:xfrm>
             <a:off x="11887200" y="0"/>
-            <a:ext cx="12600" cy="6852240"/>
+            <a:ext cx="12240" cy="6851880"/>
           </a:xfrm>
           <a:prstGeom prst="rect">
             <a:avLst/>
@@ -3979,7 +3980,7 @@
         <p:spPr>
           <a:xfrm>
             <a:off x="0" y="0"/>
-            <a:ext cx="314280" cy="6852240"/>
+            <a:ext cx="313920" cy="6851880"/>
           </a:xfrm>
           <a:prstGeom prst="rect">
             <a:avLst/>
@@ -4039,7 +4040,7 @@
         <p:spPr>
           <a:xfrm>
             <a:off x="9875520" y="365760"/>
-            <a:ext cx="2005920" cy="497160"/>
+            <a:ext cx="2005560" cy="496800"/>
           </a:xfrm>
           <a:prstGeom prst="roundRect">
             <a:avLst>
@@ -4267,7 +4268,7 @@
         <p:spPr>
           <a:xfrm>
             <a:off x="987480" y="3182040"/>
-            <a:ext cx="3286080" cy="2737440"/>
+            <a:ext cx="3285720" cy="2737080"/>
           </a:xfrm>
           <a:prstGeom prst="roundRect">
             <a:avLst>
@@ -4329,7 +4330,7 @@
         <p:spPr>
           <a:xfrm>
             <a:off x="914400" y="3108960"/>
-            <a:ext cx="3286080" cy="2737440"/>
+            <a:ext cx="3285720" cy="2737080"/>
           </a:xfrm>
           <a:prstGeom prst="roundRect">
             <a:avLst>
@@ -4463,7 +4464,7 @@
         <p:spPr>
           <a:xfrm>
             <a:off x="4507920" y="3182040"/>
-            <a:ext cx="3286080" cy="2737440"/>
+            <a:ext cx="3285720" cy="2737080"/>
           </a:xfrm>
           <a:prstGeom prst="roundRect">
             <a:avLst>
@@ -4525,7 +4526,7 @@
         <p:spPr>
           <a:xfrm>
             <a:off x="4434840" y="3108960"/>
-            <a:ext cx="3286080" cy="2737440"/>
+            <a:ext cx="3285720" cy="2737080"/>
           </a:xfrm>
           <a:prstGeom prst="roundRect">
             <a:avLst>
@@ -4783,7 +4784,7 @@
         <p:spPr>
           <a:xfrm>
             <a:off x="8028360" y="3182040"/>
-            <a:ext cx="3286080" cy="2737440"/>
+            <a:ext cx="3285720" cy="2737080"/>
           </a:xfrm>
           <a:prstGeom prst="roundRect">
             <a:avLst>
@@ -4845,7 +4846,7 @@
         <p:spPr>
           <a:xfrm>
             <a:off x="7955280" y="2971800"/>
-            <a:ext cx="3927240" cy="3652920"/>
+            <a:ext cx="3926880" cy="3652560"/>
           </a:xfrm>
           <a:prstGeom prst="roundRect">
             <a:avLst>
@@ -5356,7 +5357,7 @@
         <p:spPr>
           <a:xfrm>
             <a:off x="0" y="0"/>
-            <a:ext cx="12183120" cy="6852240"/>
+            <a:ext cx="12182760" cy="6851880"/>
           </a:xfrm>
           <a:prstGeom prst="rect">
             <a:avLst/>
@@ -5416,7 +5417,7 @@
         <p:spPr>
           <a:xfrm>
             <a:off x="0" y="0"/>
-            <a:ext cx="12600" cy="6852240"/>
+            <a:ext cx="12240" cy="6851880"/>
           </a:xfrm>
           <a:prstGeom prst="rect">
             <a:avLst/>
@@ -5476,7 +5477,7 @@
         <p:spPr>
           <a:xfrm>
             <a:off x="914400" y="0"/>
-            <a:ext cx="12600" cy="6852240"/>
+            <a:ext cx="12240" cy="6851880"/>
           </a:xfrm>
           <a:prstGeom prst="rect">
             <a:avLst/>
@@ -5536,7 +5537,7 @@
         <p:spPr>
           <a:xfrm>
             <a:off x="1828800" y="0"/>
-            <a:ext cx="12600" cy="6852240"/>
+            <a:ext cx="12240" cy="6851880"/>
           </a:xfrm>
           <a:prstGeom prst="rect">
             <a:avLst/>
@@ -5596,7 +5597,7 @@
         <p:spPr>
           <a:xfrm>
             <a:off x="2743200" y="0"/>
-            <a:ext cx="12600" cy="6852240"/>
+            <a:ext cx="12240" cy="6851880"/>
           </a:xfrm>
           <a:prstGeom prst="rect">
             <a:avLst/>
@@ -5656,7 +5657,7 @@
         <p:spPr>
           <a:xfrm>
             <a:off x="3657600" y="0"/>
-            <a:ext cx="12600" cy="6852240"/>
+            <a:ext cx="12240" cy="6851880"/>
           </a:xfrm>
           <a:prstGeom prst="rect">
             <a:avLst/>
@@ -5716,7 +5717,7 @@
         <p:spPr>
           <a:xfrm>
             <a:off x="4572000" y="0"/>
-            <a:ext cx="12600" cy="6852240"/>
+            <a:ext cx="12240" cy="6851880"/>
           </a:xfrm>
           <a:prstGeom prst="rect">
             <a:avLst/>
@@ -5776,7 +5777,7 @@
         <p:spPr>
           <a:xfrm>
             <a:off x="5486400" y="0"/>
-            <a:ext cx="12600" cy="6852240"/>
+            <a:ext cx="12240" cy="6851880"/>
           </a:xfrm>
           <a:prstGeom prst="rect">
             <a:avLst/>
@@ -5836,7 +5837,7 @@
         <p:spPr>
           <a:xfrm>
             <a:off x="6400800" y="0"/>
-            <a:ext cx="12600" cy="6852240"/>
+            <a:ext cx="12240" cy="6851880"/>
           </a:xfrm>
           <a:prstGeom prst="rect">
             <a:avLst/>
@@ -5896,7 +5897,7 @@
         <p:spPr>
           <a:xfrm>
             <a:off x="7315200" y="0"/>
-            <a:ext cx="12600" cy="6852240"/>
+            <a:ext cx="12240" cy="6851880"/>
           </a:xfrm>
           <a:prstGeom prst="rect">
             <a:avLst/>
@@ -5956,7 +5957,7 @@
         <p:spPr>
           <a:xfrm>
             <a:off x="8229600" y="0"/>
-            <a:ext cx="12600" cy="6852240"/>
+            <a:ext cx="12240" cy="6851880"/>
           </a:xfrm>
           <a:prstGeom prst="rect">
             <a:avLst/>
@@ -6016,7 +6017,7 @@
         <p:spPr>
           <a:xfrm>
             <a:off x="9144000" y="0"/>
-            <a:ext cx="12600" cy="6852240"/>
+            <a:ext cx="12240" cy="6851880"/>
           </a:xfrm>
           <a:prstGeom prst="rect">
             <a:avLst/>
@@ -6076,7 +6077,7 @@
         <p:spPr>
           <a:xfrm>
             <a:off x="10058400" y="0"/>
-            <a:ext cx="12600" cy="6852240"/>
+            <a:ext cx="12240" cy="6851880"/>
           </a:xfrm>
           <a:prstGeom prst="rect">
             <a:avLst/>
@@ -6136,7 +6137,7 @@
         <p:spPr>
           <a:xfrm>
             <a:off x="10972800" y="0"/>
-            <a:ext cx="12600" cy="6852240"/>
+            <a:ext cx="12240" cy="6851880"/>
           </a:xfrm>
           <a:prstGeom prst="rect">
             <a:avLst/>
@@ -6196,7 +6197,7 @@
         <p:spPr>
           <a:xfrm>
             <a:off x="11887200" y="0"/>
-            <a:ext cx="12600" cy="6852240"/>
+            <a:ext cx="12240" cy="6851880"/>
           </a:xfrm>
           <a:prstGeom prst="rect">
             <a:avLst/>
@@ -6256,7 +6257,7 @@
         <p:spPr>
           <a:xfrm>
             <a:off x="0" y="0"/>
-            <a:ext cx="314280" cy="6852240"/>
+            <a:ext cx="313920" cy="6851880"/>
           </a:xfrm>
           <a:prstGeom prst="rect">
             <a:avLst/>
@@ -6316,7 +6317,7 @@
         <p:spPr>
           <a:xfrm>
             <a:off x="9875520" y="365760"/>
-            <a:ext cx="2005920" cy="497160"/>
+            <a:ext cx="2005560" cy="496800"/>
           </a:xfrm>
           <a:prstGeom prst="roundRect">
             <a:avLst>
@@ -6544,7 +6545,7 @@
         <p:spPr>
           <a:xfrm>
             <a:off x="987480" y="3182040"/>
-            <a:ext cx="3286080" cy="2737440"/>
+            <a:ext cx="3285720" cy="2737080"/>
           </a:xfrm>
           <a:prstGeom prst="roundRect">
             <a:avLst>
@@ -6606,7 +6607,7 @@
         <p:spPr>
           <a:xfrm>
             <a:off x="685800" y="2743200"/>
-            <a:ext cx="3514680" cy="3655080"/>
+            <a:ext cx="3514320" cy="3654720"/>
           </a:xfrm>
           <a:prstGeom prst="roundRect">
             <a:avLst>
@@ -6848,7 +6849,7 @@
         <p:spPr>
           <a:xfrm>
             <a:off x="4507920" y="3182040"/>
-            <a:ext cx="3286080" cy="2737440"/>
+            <a:ext cx="3285720" cy="2737080"/>
           </a:xfrm>
           <a:prstGeom prst="roundRect">
             <a:avLst>
@@ -6910,7 +6911,7 @@
         <p:spPr>
           <a:xfrm>
             <a:off x="4434840" y="2971800"/>
-            <a:ext cx="3286080" cy="3426480"/>
+            <a:ext cx="3285720" cy="3426120"/>
           </a:xfrm>
           <a:prstGeom prst="roundRect">
             <a:avLst>
@@ -7264,7 +7265,7 @@
         <p:spPr>
           <a:xfrm>
             <a:off x="8028360" y="3182040"/>
-            <a:ext cx="3286080" cy="2737440"/>
+            <a:ext cx="3285720" cy="2737080"/>
           </a:xfrm>
           <a:prstGeom prst="roundRect">
             <a:avLst>
@@ -7326,7 +7327,7 @@
         <p:spPr>
           <a:xfrm>
             <a:off x="8001000" y="2743200"/>
-            <a:ext cx="3427560" cy="3653640"/>
+            <a:ext cx="3427200" cy="3653280"/>
           </a:xfrm>
           <a:prstGeom prst="roundRect">
             <a:avLst>
@@ -8002,7 +8003,7 @@
         <p:spPr>
           <a:xfrm>
             <a:off x="0" y="0"/>
-            <a:ext cx="12183120" cy="6852240"/>
+            <a:ext cx="12182760" cy="6851880"/>
           </a:xfrm>
           <a:prstGeom prst="rect">
             <a:avLst/>
@@ -8062,7 +8063,7 @@
         <p:spPr>
           <a:xfrm>
             <a:off x="0" y="0"/>
-            <a:ext cx="12600" cy="6852240"/>
+            <a:ext cx="12240" cy="6851880"/>
           </a:xfrm>
           <a:prstGeom prst="rect">
             <a:avLst/>
@@ -8122,7 +8123,7 @@
         <p:spPr>
           <a:xfrm>
             <a:off x="914400" y="0"/>
-            <a:ext cx="12600" cy="6852240"/>
+            <a:ext cx="12240" cy="6851880"/>
           </a:xfrm>
           <a:prstGeom prst="rect">
             <a:avLst/>
@@ -8182,7 +8183,7 @@
         <p:spPr>
           <a:xfrm>
             <a:off x="1828800" y="0"/>
-            <a:ext cx="12600" cy="6852240"/>
+            <a:ext cx="12240" cy="6851880"/>
           </a:xfrm>
           <a:prstGeom prst="rect">
             <a:avLst/>
@@ -8242,7 +8243,7 @@
         <p:spPr>
           <a:xfrm>
             <a:off x="2743200" y="0"/>
-            <a:ext cx="12600" cy="6852240"/>
+            <a:ext cx="12240" cy="6851880"/>
           </a:xfrm>
           <a:prstGeom prst="rect">
             <a:avLst/>
@@ -8302,7 +8303,7 @@
         <p:spPr>
           <a:xfrm>
             <a:off x="3657600" y="0"/>
-            <a:ext cx="12600" cy="6852240"/>
+            <a:ext cx="12240" cy="6851880"/>
           </a:xfrm>
           <a:prstGeom prst="rect">
             <a:avLst/>
@@ -8362,7 +8363,7 @@
         <p:spPr>
           <a:xfrm>
             <a:off x="4572000" y="0"/>
-            <a:ext cx="12600" cy="6852240"/>
+            <a:ext cx="12240" cy="6851880"/>
           </a:xfrm>
           <a:prstGeom prst="rect">
             <a:avLst/>
@@ -8422,7 +8423,7 @@
         <p:spPr>
           <a:xfrm>
             <a:off x="5486400" y="0"/>
-            <a:ext cx="12600" cy="6852240"/>
+            <a:ext cx="12240" cy="6851880"/>
           </a:xfrm>
           <a:prstGeom prst="rect">
             <a:avLst/>
@@ -8482,7 +8483,7 @@
         <p:spPr>
           <a:xfrm>
             <a:off x="6400800" y="0"/>
-            <a:ext cx="12600" cy="6852240"/>
+            <a:ext cx="12240" cy="6851880"/>
           </a:xfrm>
           <a:prstGeom prst="rect">
             <a:avLst/>
@@ -8542,7 +8543,7 @@
         <p:spPr>
           <a:xfrm>
             <a:off x="7315200" y="0"/>
-            <a:ext cx="12600" cy="6852240"/>
+            <a:ext cx="12240" cy="6851880"/>
           </a:xfrm>
           <a:prstGeom prst="rect">
             <a:avLst/>
@@ -8602,7 +8603,7 @@
         <p:spPr>
           <a:xfrm>
             <a:off x="8229600" y="0"/>
-            <a:ext cx="12600" cy="6852240"/>
+            <a:ext cx="12240" cy="6851880"/>
           </a:xfrm>
           <a:prstGeom prst="rect">
             <a:avLst/>
@@ -8662,7 +8663,7 @@
         <p:spPr>
           <a:xfrm>
             <a:off x="9144000" y="0"/>
-            <a:ext cx="12600" cy="6852240"/>
+            <a:ext cx="12240" cy="6851880"/>
           </a:xfrm>
           <a:prstGeom prst="rect">
             <a:avLst/>
@@ -8722,7 +8723,7 @@
         <p:spPr>
           <a:xfrm>
             <a:off x="10058400" y="0"/>
-            <a:ext cx="12600" cy="6852240"/>
+            <a:ext cx="12240" cy="6851880"/>
           </a:xfrm>
           <a:prstGeom prst="rect">
             <a:avLst/>
@@ -8782,7 +8783,7 @@
         <p:spPr>
           <a:xfrm>
             <a:off x="10972800" y="0"/>
-            <a:ext cx="12600" cy="6852240"/>
+            <a:ext cx="12240" cy="6851880"/>
           </a:xfrm>
           <a:prstGeom prst="rect">
             <a:avLst/>
@@ -8842,7 +8843,7 @@
         <p:spPr>
           <a:xfrm>
             <a:off x="11887200" y="0"/>
-            <a:ext cx="12600" cy="6852240"/>
+            <a:ext cx="12240" cy="6851880"/>
           </a:xfrm>
           <a:prstGeom prst="rect">
             <a:avLst/>
@@ -8902,7 +8903,7 @@
         <p:spPr>
           <a:xfrm>
             <a:off x="0" y="0"/>
-            <a:ext cx="314280" cy="6852240"/>
+            <a:ext cx="313920" cy="6851880"/>
           </a:xfrm>
           <a:prstGeom prst="rect">
             <a:avLst/>
@@ -8962,7 +8963,7 @@
         <p:spPr>
           <a:xfrm>
             <a:off x="9875520" y="365760"/>
-            <a:ext cx="2005920" cy="497160"/>
+            <a:ext cx="2005560" cy="496800"/>
           </a:xfrm>
           <a:prstGeom prst="roundRect">
             <a:avLst>
@@ -9090,7 +9091,7 @@
         <p:spPr>
           <a:xfrm>
             <a:off x="1482480" y="1694880"/>
-            <a:ext cx="8603280" cy="819720"/>
+            <a:ext cx="8602920" cy="819720"/>
           </a:xfrm>
           <a:prstGeom prst="rect">
             <a:avLst/>
@@ -9190,7 +9191,7 @@
         <p:spPr>
           <a:xfrm>
             <a:off x="987480" y="3182040"/>
-            <a:ext cx="3286080" cy="2737440"/>
+            <a:ext cx="3285720" cy="2737080"/>
           </a:xfrm>
           <a:prstGeom prst="roundRect">
             <a:avLst>
@@ -9252,7 +9253,7 @@
         <p:spPr>
           <a:xfrm>
             <a:off x="685800" y="2743200"/>
-            <a:ext cx="3514680" cy="3655080"/>
+            <a:ext cx="3514320" cy="3654720"/>
           </a:xfrm>
           <a:prstGeom prst="roundRect">
             <a:avLst>
@@ -9570,7 +9571,7 @@
         <p:spPr>
           <a:xfrm>
             <a:off x="4507920" y="3182040"/>
-            <a:ext cx="3286080" cy="2737440"/>
+            <a:ext cx="3285720" cy="2737080"/>
           </a:xfrm>
           <a:prstGeom prst="roundRect">
             <a:avLst>
@@ -9632,7 +9633,7 @@
         <p:spPr>
           <a:xfrm>
             <a:off x="4434840" y="2971800"/>
-            <a:ext cx="3286080" cy="3426480"/>
+            <a:ext cx="3285720" cy="3426120"/>
           </a:xfrm>
           <a:prstGeom prst="roundRect">
             <a:avLst>
@@ -9963,7 +9964,7 @@
         <p:spPr>
           <a:xfrm>
             <a:off x="8028360" y="3182040"/>
-            <a:ext cx="3286080" cy="2737440"/>
+            <a:ext cx="3285720" cy="2737080"/>
           </a:xfrm>
           <a:prstGeom prst="roundRect">
             <a:avLst>
@@ -10025,7 +10026,7 @@
         <p:spPr>
           <a:xfrm>
             <a:off x="8001000" y="2743200"/>
-            <a:ext cx="3427560" cy="3653640"/>
+            <a:ext cx="3427200" cy="3653280"/>
           </a:xfrm>
           <a:prstGeom prst="roundRect">
             <a:avLst>
@@ -10790,7 +10791,7 @@
         <p:spPr>
           <a:xfrm>
             <a:off x="0" y="0"/>
-            <a:ext cx="12183120" cy="6852240"/>
+            <a:ext cx="12182760" cy="6851880"/>
           </a:xfrm>
           <a:prstGeom prst="rect">
             <a:avLst/>
@@ -10850,7 +10851,7 @@
         <p:spPr>
           <a:xfrm>
             <a:off x="0" y="0"/>
-            <a:ext cx="12600" cy="6852240"/>
+            <a:ext cx="12240" cy="6851880"/>
           </a:xfrm>
           <a:prstGeom prst="rect">
             <a:avLst/>
@@ -10910,7 +10911,7 @@
         <p:spPr>
           <a:xfrm>
             <a:off x="914400" y="0"/>
-            <a:ext cx="12600" cy="6852240"/>
+            <a:ext cx="12240" cy="6851880"/>
           </a:xfrm>
           <a:prstGeom prst="rect">
             <a:avLst/>
@@ -10970,7 +10971,7 @@
         <p:spPr>
           <a:xfrm>
             <a:off x="1828800" y="0"/>
-            <a:ext cx="12600" cy="6852240"/>
+            <a:ext cx="12240" cy="6851880"/>
           </a:xfrm>
           <a:prstGeom prst="rect">
             <a:avLst/>
@@ -11030,7 +11031,7 @@
         <p:spPr>
           <a:xfrm>
             <a:off x="2743200" y="0"/>
-            <a:ext cx="12600" cy="6852240"/>
+            <a:ext cx="12240" cy="6851880"/>
           </a:xfrm>
           <a:prstGeom prst="rect">
             <a:avLst/>
@@ -11090,7 +11091,7 @@
         <p:spPr>
           <a:xfrm>
             <a:off x="3657600" y="0"/>
-            <a:ext cx="12600" cy="6852240"/>
+            <a:ext cx="12240" cy="6851880"/>
           </a:xfrm>
           <a:prstGeom prst="rect">
             <a:avLst/>
@@ -11150,7 +11151,7 @@
         <p:spPr>
           <a:xfrm>
             <a:off x="4572000" y="0"/>
-            <a:ext cx="12600" cy="6852240"/>
+            <a:ext cx="12240" cy="6851880"/>
           </a:xfrm>
           <a:prstGeom prst="rect">
             <a:avLst/>
@@ -11210,7 +11211,7 @@
         <p:spPr>
           <a:xfrm>
             <a:off x="5486400" y="0"/>
-            <a:ext cx="12600" cy="6852240"/>
+            <a:ext cx="12240" cy="6851880"/>
           </a:xfrm>
           <a:prstGeom prst="rect">
             <a:avLst/>
@@ -11270,7 +11271,7 @@
         <p:spPr>
           <a:xfrm>
             <a:off x="6400800" y="0"/>
-            <a:ext cx="12600" cy="6852240"/>
+            <a:ext cx="12240" cy="6851880"/>
           </a:xfrm>
           <a:prstGeom prst="rect">
             <a:avLst/>
@@ -11330,7 +11331,7 @@
         <p:spPr>
           <a:xfrm>
             <a:off x="7315200" y="0"/>
-            <a:ext cx="12600" cy="6852240"/>
+            <a:ext cx="12240" cy="6851880"/>
           </a:xfrm>
           <a:prstGeom prst="rect">
             <a:avLst/>
@@ -11390,7 +11391,7 @@
         <p:spPr>
           <a:xfrm>
             <a:off x="8229600" y="0"/>
-            <a:ext cx="12600" cy="6852240"/>
+            <a:ext cx="12240" cy="6851880"/>
           </a:xfrm>
           <a:prstGeom prst="rect">
             <a:avLst/>
@@ -11450,7 +11451,7 @@
         <p:spPr>
           <a:xfrm>
             <a:off x="9144000" y="0"/>
-            <a:ext cx="12600" cy="6852240"/>
+            <a:ext cx="12240" cy="6851880"/>
           </a:xfrm>
           <a:prstGeom prst="rect">
             <a:avLst/>
@@ -11510,7 +11511,7 @@
         <p:spPr>
           <a:xfrm>
             <a:off x="10058400" y="0"/>
-            <a:ext cx="12600" cy="6852240"/>
+            <a:ext cx="12240" cy="6851880"/>
           </a:xfrm>
           <a:prstGeom prst="rect">
             <a:avLst/>
@@ -11570,7 +11571,7 @@
         <p:spPr>
           <a:xfrm>
             <a:off x="10972800" y="0"/>
-            <a:ext cx="12600" cy="6852240"/>
+            <a:ext cx="12240" cy="6851880"/>
           </a:xfrm>
           <a:prstGeom prst="rect">
             <a:avLst/>
@@ -11630,7 +11631,7 @@
         <p:spPr>
           <a:xfrm>
             <a:off x="11887200" y="0"/>
-            <a:ext cx="12600" cy="6852240"/>
+            <a:ext cx="12240" cy="6851880"/>
           </a:xfrm>
           <a:prstGeom prst="rect">
             <a:avLst/>
@@ -11690,7 +11691,7 @@
         <p:spPr>
           <a:xfrm>
             <a:off x="0" y="0"/>
-            <a:ext cx="314280" cy="6852240"/>
+            <a:ext cx="313920" cy="6851880"/>
           </a:xfrm>
           <a:prstGeom prst="rect">
             <a:avLst/>
@@ -11750,7 +11751,7 @@
         <p:spPr>
           <a:xfrm>
             <a:off x="9875520" y="365760"/>
-            <a:ext cx="2005920" cy="497160"/>
+            <a:ext cx="2005560" cy="496800"/>
           </a:xfrm>
           <a:prstGeom prst="roundRect">
             <a:avLst>
@@ -11824,7 +11825,7 @@
         <p:spPr>
           <a:xfrm>
             <a:off x="2768400" y="914400"/>
-            <a:ext cx="5430600" cy="516240"/>
+            <a:ext cx="5430240" cy="516240"/>
           </a:xfrm>
           <a:prstGeom prst="rect">
             <a:avLst/>
@@ -11878,7 +11879,7 @@
         <p:spPr>
           <a:xfrm>
             <a:off x="1257120" y="1694880"/>
-            <a:ext cx="9052920" cy="576360"/>
+            <a:ext cx="9052560" cy="576360"/>
           </a:xfrm>
           <a:prstGeom prst="rect">
             <a:avLst/>
@@ -11955,7 +11956,7 @@
         <p:spPr>
           <a:xfrm>
             <a:off x="987480" y="3182040"/>
-            <a:ext cx="3286080" cy="2737440"/>
+            <a:ext cx="3285720" cy="2737080"/>
           </a:xfrm>
           <a:prstGeom prst="roundRect">
             <a:avLst>
@@ -12017,7 +12018,7 @@
         <p:spPr>
           <a:xfrm>
             <a:off x="685800" y="2743200"/>
-            <a:ext cx="3514680" cy="3655080"/>
+            <a:ext cx="3514320" cy="3654720"/>
           </a:xfrm>
           <a:prstGeom prst="roundRect">
             <a:avLst>
@@ -12239,7 +12240,7 @@
         <p:spPr>
           <a:xfrm>
             <a:off x="4507920" y="3182040"/>
-            <a:ext cx="3286080" cy="2737440"/>
+            <a:ext cx="3285720" cy="2737080"/>
           </a:xfrm>
           <a:prstGeom prst="roundRect">
             <a:avLst>
@@ -12301,7 +12302,7 @@
         <p:spPr>
           <a:xfrm>
             <a:off x="4434840" y="2971800"/>
-            <a:ext cx="3286080" cy="3426480"/>
+            <a:ext cx="3285720" cy="3426120"/>
           </a:xfrm>
           <a:prstGeom prst="roundRect">
             <a:avLst>
@@ -12718,7 +12719,7 @@
         <p:spPr>
           <a:xfrm>
             <a:off x="8028360" y="3182040"/>
-            <a:ext cx="3286080" cy="2737440"/>
+            <a:ext cx="3285720" cy="2737080"/>
           </a:xfrm>
           <a:prstGeom prst="roundRect">
             <a:avLst>
@@ -12780,7 +12781,7 @@
         <p:spPr>
           <a:xfrm>
             <a:off x="8001000" y="2514600"/>
-            <a:ext cx="3656880" cy="3885120"/>
+            <a:ext cx="3656520" cy="3884760"/>
           </a:xfrm>
           <a:prstGeom prst="roundRect">
             <a:avLst>
@@ -13647,7 +13648,7 @@
         <p:spPr>
           <a:xfrm>
             <a:off x="0" y="0"/>
-            <a:ext cx="12183120" cy="6852240"/>
+            <a:ext cx="12182760" cy="6851880"/>
           </a:xfrm>
           <a:prstGeom prst="rect">
             <a:avLst/>
@@ -13707,7 +13708,7 @@
         <p:spPr>
           <a:xfrm>
             <a:off x="0" y="0"/>
-            <a:ext cx="12600" cy="6852240"/>
+            <a:ext cx="12240" cy="6851880"/>
           </a:xfrm>
           <a:prstGeom prst="rect">
             <a:avLst/>
@@ -13767,7 +13768,7 @@
         <p:spPr>
           <a:xfrm>
             <a:off x="914400" y="0"/>
-            <a:ext cx="12600" cy="6852240"/>
+            <a:ext cx="12240" cy="6851880"/>
           </a:xfrm>
           <a:prstGeom prst="rect">
             <a:avLst/>
@@ -13827,7 +13828,7 @@
         <p:spPr>
           <a:xfrm>
             <a:off x="1828800" y="0"/>
-            <a:ext cx="12600" cy="6852240"/>
+            <a:ext cx="12240" cy="6851880"/>
           </a:xfrm>
           <a:prstGeom prst="rect">
             <a:avLst/>
@@ -13887,7 +13888,7 @@
         <p:spPr>
           <a:xfrm>
             <a:off x="2743200" y="0"/>
-            <a:ext cx="12600" cy="6852240"/>
+            <a:ext cx="12240" cy="6851880"/>
           </a:xfrm>
           <a:prstGeom prst="rect">
             <a:avLst/>
@@ -13947,7 +13948,7 @@
         <p:spPr>
           <a:xfrm>
             <a:off x="3657600" y="0"/>
-            <a:ext cx="12600" cy="6852240"/>
+            <a:ext cx="12240" cy="6851880"/>
           </a:xfrm>
           <a:prstGeom prst="rect">
             <a:avLst/>
@@ -14007,7 +14008,7 @@
         <p:spPr>
           <a:xfrm>
             <a:off x="4572000" y="0"/>
-            <a:ext cx="12600" cy="6852240"/>
+            <a:ext cx="12240" cy="6851880"/>
           </a:xfrm>
           <a:prstGeom prst="rect">
             <a:avLst/>
@@ -14067,7 +14068,7 @@
         <p:spPr>
           <a:xfrm>
             <a:off x="5486400" y="0"/>
-            <a:ext cx="12600" cy="6852240"/>
+            <a:ext cx="12240" cy="6851880"/>
           </a:xfrm>
           <a:prstGeom prst="rect">
             <a:avLst/>
@@ -14127,7 +14128,7 @@
         <p:spPr>
           <a:xfrm>
             <a:off x="6400800" y="0"/>
-            <a:ext cx="12600" cy="6852240"/>
+            <a:ext cx="12240" cy="6851880"/>
           </a:xfrm>
           <a:prstGeom prst="rect">
             <a:avLst/>
@@ -14187,7 +14188,7 @@
         <p:spPr>
           <a:xfrm>
             <a:off x="7315200" y="0"/>
-            <a:ext cx="12600" cy="6852240"/>
+            <a:ext cx="12240" cy="6851880"/>
           </a:xfrm>
           <a:prstGeom prst="rect">
             <a:avLst/>
@@ -14247,7 +14248,7 @@
         <p:spPr>
           <a:xfrm>
             <a:off x="8229600" y="0"/>
-            <a:ext cx="12600" cy="6852240"/>
+            <a:ext cx="12240" cy="6851880"/>
           </a:xfrm>
           <a:prstGeom prst="rect">
             <a:avLst/>
@@ -14307,7 +14308,7 @@
         <p:spPr>
           <a:xfrm>
             <a:off x="9144000" y="0"/>
-            <a:ext cx="12600" cy="6852240"/>
+            <a:ext cx="12240" cy="6851880"/>
           </a:xfrm>
           <a:prstGeom prst="rect">
             <a:avLst/>
@@ -14367,7 +14368,7 @@
         <p:spPr>
           <a:xfrm>
             <a:off x="10058400" y="0"/>
-            <a:ext cx="12600" cy="6852240"/>
+            <a:ext cx="12240" cy="6851880"/>
           </a:xfrm>
           <a:prstGeom prst="rect">
             <a:avLst/>
@@ -14427,7 +14428,7 @@
         <p:spPr>
           <a:xfrm>
             <a:off x="10972800" y="0"/>
-            <a:ext cx="12600" cy="6852240"/>
+            <a:ext cx="12240" cy="6851880"/>
           </a:xfrm>
           <a:prstGeom prst="rect">
             <a:avLst/>
@@ -14487,7 +14488,7 @@
         <p:spPr>
           <a:xfrm>
             <a:off x="11887200" y="0"/>
-            <a:ext cx="12600" cy="6852240"/>
+            <a:ext cx="12240" cy="6851880"/>
           </a:xfrm>
           <a:prstGeom prst="rect">
             <a:avLst/>
@@ -14547,7 +14548,7 @@
         <p:spPr>
           <a:xfrm>
             <a:off x="0" y="0"/>
-            <a:ext cx="314280" cy="6852240"/>
+            <a:ext cx="313920" cy="6851880"/>
           </a:xfrm>
           <a:prstGeom prst="rect">
             <a:avLst/>
@@ -14607,7 +14608,7 @@
         <p:spPr>
           <a:xfrm>
             <a:off x="9875520" y="365760"/>
-            <a:ext cx="2005920" cy="497160"/>
+            <a:ext cx="2005560" cy="496800"/>
           </a:xfrm>
           <a:prstGeom prst="roundRect">
             <a:avLst>
@@ -14681,7 +14682,7 @@
         <p:spPr>
           <a:xfrm>
             <a:off x="1534680" y="914400"/>
-            <a:ext cx="7898400" cy="638280"/>
+            <a:ext cx="7898040" cy="638280"/>
           </a:xfrm>
           <a:prstGeom prst="rect">
             <a:avLst/>
@@ -14735,7 +14736,7 @@
         <p:spPr>
           <a:xfrm>
             <a:off x="1296000" y="1694880"/>
-            <a:ext cx="8975880" cy="819720"/>
+            <a:ext cx="8975520" cy="819720"/>
           </a:xfrm>
           <a:prstGeom prst="rect">
             <a:avLst/>
@@ -14845,7 +14846,7 @@
         <p:spPr>
           <a:xfrm>
             <a:off x="987480" y="3182040"/>
-            <a:ext cx="3286080" cy="2737440"/>
+            <a:ext cx="3285720" cy="2737080"/>
           </a:xfrm>
           <a:prstGeom prst="roundRect">
             <a:avLst>
@@ -14907,7 +14908,7 @@
         <p:spPr>
           <a:xfrm>
             <a:off x="685800" y="2971800"/>
-            <a:ext cx="3200040" cy="3428640"/>
+            <a:ext cx="3199680" cy="3428280"/>
           </a:xfrm>
           <a:prstGeom prst="roundRect">
             <a:avLst>
@@ -15133,7 +15134,7 @@
         <p:spPr>
           <a:xfrm>
             <a:off x="4507920" y="3182040"/>
-            <a:ext cx="3286080" cy="2737440"/>
+            <a:ext cx="3285720" cy="2737080"/>
           </a:xfrm>
           <a:prstGeom prst="roundRect">
             <a:avLst>
@@ -15195,7 +15196,7 @@
         <p:spPr>
           <a:xfrm>
             <a:off x="4257360" y="2971800"/>
-            <a:ext cx="3286080" cy="3426480"/>
+            <a:ext cx="3285720" cy="3426120"/>
           </a:xfrm>
           <a:prstGeom prst="roundRect">
             <a:avLst>
@@ -15691,7 +15692,7 @@
         <p:spPr>
           <a:xfrm>
             <a:off x="8028360" y="3182040"/>
-            <a:ext cx="3286080" cy="2737440"/>
+            <a:ext cx="3285720" cy="2737080"/>
           </a:xfrm>
           <a:prstGeom prst="roundRect">
             <a:avLst>
@@ -15753,7 +15754,7 @@
         <p:spPr>
           <a:xfrm>
             <a:off x="8001000" y="2514600"/>
-            <a:ext cx="3427560" cy="3885840"/>
+            <a:ext cx="3427200" cy="3885480"/>
           </a:xfrm>
           <a:prstGeom prst="roundRect">
             <a:avLst>
@@ -16659,7 +16660,7 @@
         <p:spPr>
           <a:xfrm>
             <a:off x="0" y="0"/>
-            <a:ext cx="12183120" cy="6852240"/>
+            <a:ext cx="12182760" cy="6851880"/>
           </a:xfrm>
           <a:prstGeom prst="rect">
             <a:avLst/>
@@ -16695,6 +16696,11 @@
             <a:noAutofit/>
           </a:bodyPr>
           <a:p>
+            <a:pPr>
+              <a:lnSpc>
+                <a:spcPct val="100000"/>
+              </a:lnSpc>
+            </a:pPr>
             <a:endParaRPr b="0" lang="en-US" sz="1800" spc="-1" strike="noStrike">
               <a:solidFill>
                 <a:schemeClr val="lt1"/>
@@ -16714,7 +16720,7 @@
         <p:spPr>
           <a:xfrm>
             <a:off x="0" y="0"/>
-            <a:ext cx="12600" cy="6852240"/>
+            <a:ext cx="12240" cy="6851880"/>
           </a:xfrm>
           <a:prstGeom prst="rect">
             <a:avLst/>
@@ -16750,6 +16756,11 @@
             <a:noAutofit/>
           </a:bodyPr>
           <a:p>
+            <a:pPr>
+              <a:lnSpc>
+                <a:spcPct val="100000"/>
+              </a:lnSpc>
+            </a:pPr>
             <a:endParaRPr b="0" lang="en-US" sz="1800" spc="-1" strike="noStrike">
               <a:solidFill>
                 <a:schemeClr val="lt1"/>
@@ -16769,7 +16780,7 @@
         <p:spPr>
           <a:xfrm>
             <a:off x="914400" y="0"/>
-            <a:ext cx="12600" cy="6852240"/>
+            <a:ext cx="12240" cy="6851880"/>
           </a:xfrm>
           <a:prstGeom prst="rect">
             <a:avLst/>
@@ -16805,6 +16816,11 @@
             <a:noAutofit/>
           </a:bodyPr>
           <a:p>
+            <a:pPr>
+              <a:lnSpc>
+                <a:spcPct val="100000"/>
+              </a:lnSpc>
+            </a:pPr>
             <a:endParaRPr b="0" lang="en-US" sz="1800" spc="-1" strike="noStrike">
               <a:solidFill>
                 <a:schemeClr val="lt1"/>
@@ -16824,7 +16840,7 @@
         <p:spPr>
           <a:xfrm>
             <a:off x="1828800" y="0"/>
-            <a:ext cx="12600" cy="6852240"/>
+            <a:ext cx="12240" cy="6851880"/>
           </a:xfrm>
           <a:prstGeom prst="rect">
             <a:avLst/>
@@ -16860,6 +16876,11 @@
             <a:noAutofit/>
           </a:bodyPr>
           <a:p>
+            <a:pPr>
+              <a:lnSpc>
+                <a:spcPct val="100000"/>
+              </a:lnSpc>
+            </a:pPr>
             <a:endParaRPr b="0" lang="en-US" sz="1800" spc="-1" strike="noStrike">
               <a:solidFill>
                 <a:schemeClr val="lt1"/>
@@ -16879,7 +16900,7 @@
         <p:spPr>
           <a:xfrm>
             <a:off x="2743200" y="0"/>
-            <a:ext cx="12600" cy="6852240"/>
+            <a:ext cx="12240" cy="6851880"/>
           </a:xfrm>
           <a:prstGeom prst="rect">
             <a:avLst/>
@@ -16915,6 +16936,11 @@
             <a:noAutofit/>
           </a:bodyPr>
           <a:p>
+            <a:pPr>
+              <a:lnSpc>
+                <a:spcPct val="100000"/>
+              </a:lnSpc>
+            </a:pPr>
             <a:endParaRPr b="0" lang="en-US" sz="1800" spc="-1" strike="noStrike">
               <a:solidFill>
                 <a:schemeClr val="lt1"/>
@@ -16934,7 +16960,7 @@
         <p:spPr>
           <a:xfrm>
             <a:off x="3657600" y="0"/>
-            <a:ext cx="12600" cy="6852240"/>
+            <a:ext cx="12240" cy="6851880"/>
           </a:xfrm>
           <a:prstGeom prst="rect">
             <a:avLst/>
@@ -16970,6 +16996,11 @@
             <a:noAutofit/>
           </a:bodyPr>
           <a:p>
+            <a:pPr>
+              <a:lnSpc>
+                <a:spcPct val="100000"/>
+              </a:lnSpc>
+            </a:pPr>
             <a:endParaRPr b="0" lang="en-US" sz="1800" spc="-1" strike="noStrike">
               <a:solidFill>
                 <a:schemeClr val="lt1"/>
@@ -16989,7 +17020,7 @@
         <p:spPr>
           <a:xfrm>
             <a:off x="4572000" y="0"/>
-            <a:ext cx="12600" cy="6852240"/>
+            <a:ext cx="12240" cy="6851880"/>
           </a:xfrm>
           <a:prstGeom prst="rect">
             <a:avLst/>
@@ -17025,6 +17056,11 @@
             <a:noAutofit/>
           </a:bodyPr>
           <a:p>
+            <a:pPr>
+              <a:lnSpc>
+                <a:spcPct val="100000"/>
+              </a:lnSpc>
+            </a:pPr>
             <a:endParaRPr b="0" lang="en-US" sz="1800" spc="-1" strike="noStrike">
               <a:solidFill>
                 <a:schemeClr val="lt1"/>
@@ -17044,7 +17080,7 @@
         <p:spPr>
           <a:xfrm>
             <a:off x="5486400" y="0"/>
-            <a:ext cx="12600" cy="6852240"/>
+            <a:ext cx="12240" cy="6851880"/>
           </a:xfrm>
           <a:prstGeom prst="rect">
             <a:avLst/>
@@ -17080,6 +17116,11 @@
             <a:noAutofit/>
           </a:bodyPr>
           <a:p>
+            <a:pPr>
+              <a:lnSpc>
+                <a:spcPct val="100000"/>
+              </a:lnSpc>
+            </a:pPr>
             <a:endParaRPr b="0" lang="en-US" sz="1800" spc="-1" strike="noStrike">
               <a:solidFill>
                 <a:schemeClr val="lt1"/>
@@ -17099,7 +17140,7 @@
         <p:spPr>
           <a:xfrm>
             <a:off x="6400800" y="0"/>
-            <a:ext cx="12600" cy="6852240"/>
+            <a:ext cx="12240" cy="6851880"/>
           </a:xfrm>
           <a:prstGeom prst="rect">
             <a:avLst/>
@@ -17135,6 +17176,11 @@
             <a:noAutofit/>
           </a:bodyPr>
           <a:p>
+            <a:pPr>
+              <a:lnSpc>
+                <a:spcPct val="100000"/>
+              </a:lnSpc>
+            </a:pPr>
             <a:endParaRPr b="0" lang="en-US" sz="1800" spc="-1" strike="noStrike">
               <a:solidFill>
                 <a:schemeClr val="lt1"/>
@@ -17154,7 +17200,7 @@
         <p:spPr>
           <a:xfrm>
             <a:off x="7315200" y="0"/>
-            <a:ext cx="12600" cy="6852240"/>
+            <a:ext cx="12240" cy="6851880"/>
           </a:xfrm>
           <a:prstGeom prst="rect">
             <a:avLst/>
@@ -17190,6 +17236,11 @@
             <a:noAutofit/>
           </a:bodyPr>
           <a:p>
+            <a:pPr>
+              <a:lnSpc>
+                <a:spcPct val="100000"/>
+              </a:lnSpc>
+            </a:pPr>
             <a:endParaRPr b="0" lang="en-US" sz="1800" spc="-1" strike="noStrike">
               <a:solidFill>
                 <a:schemeClr val="lt1"/>
@@ -17209,7 +17260,7 @@
         <p:spPr>
           <a:xfrm>
             <a:off x="8229600" y="0"/>
-            <a:ext cx="12600" cy="6852240"/>
+            <a:ext cx="12240" cy="6851880"/>
           </a:xfrm>
           <a:prstGeom prst="rect">
             <a:avLst/>
@@ -17245,6 +17296,11 @@
             <a:noAutofit/>
           </a:bodyPr>
           <a:p>
+            <a:pPr>
+              <a:lnSpc>
+                <a:spcPct val="100000"/>
+              </a:lnSpc>
+            </a:pPr>
             <a:endParaRPr b="0" lang="en-US" sz="1800" spc="-1" strike="noStrike">
               <a:solidFill>
                 <a:schemeClr val="lt1"/>
@@ -17264,7 +17320,7 @@
         <p:spPr>
           <a:xfrm>
             <a:off x="9144000" y="0"/>
-            <a:ext cx="12600" cy="6852240"/>
+            <a:ext cx="12240" cy="6851880"/>
           </a:xfrm>
           <a:prstGeom prst="rect">
             <a:avLst/>
@@ -17300,6 +17356,11 @@
             <a:noAutofit/>
           </a:bodyPr>
           <a:p>
+            <a:pPr>
+              <a:lnSpc>
+                <a:spcPct val="100000"/>
+              </a:lnSpc>
+            </a:pPr>
             <a:endParaRPr b="0" lang="en-US" sz="1800" spc="-1" strike="noStrike">
               <a:solidFill>
                 <a:schemeClr val="lt1"/>
@@ -17319,7 +17380,7 @@
         <p:spPr>
           <a:xfrm>
             <a:off x="10058400" y="0"/>
-            <a:ext cx="12600" cy="6852240"/>
+            <a:ext cx="12240" cy="6851880"/>
           </a:xfrm>
           <a:prstGeom prst="rect">
             <a:avLst/>
@@ -17355,6 +17416,11 @@
             <a:noAutofit/>
           </a:bodyPr>
           <a:p>
+            <a:pPr>
+              <a:lnSpc>
+                <a:spcPct val="100000"/>
+              </a:lnSpc>
+            </a:pPr>
             <a:endParaRPr b="0" lang="en-US" sz="1800" spc="-1" strike="noStrike">
               <a:solidFill>
                 <a:schemeClr val="lt1"/>
@@ -17374,7 +17440,7 @@
         <p:spPr>
           <a:xfrm>
             <a:off x="10972800" y="0"/>
-            <a:ext cx="12600" cy="6852240"/>
+            <a:ext cx="12240" cy="6851880"/>
           </a:xfrm>
           <a:prstGeom prst="rect">
             <a:avLst/>
@@ -17410,6 +17476,11 @@
             <a:noAutofit/>
           </a:bodyPr>
           <a:p>
+            <a:pPr>
+              <a:lnSpc>
+                <a:spcPct val="100000"/>
+              </a:lnSpc>
+            </a:pPr>
             <a:endParaRPr b="0" lang="en-US" sz="1800" spc="-1" strike="noStrike">
               <a:solidFill>
                 <a:schemeClr val="lt1"/>
@@ -17429,7 +17500,7 @@
         <p:spPr>
           <a:xfrm>
             <a:off x="11887200" y="0"/>
-            <a:ext cx="12600" cy="6852240"/>
+            <a:ext cx="12240" cy="6851880"/>
           </a:xfrm>
           <a:prstGeom prst="rect">
             <a:avLst/>
@@ -17465,6 +17536,11 @@
             <a:noAutofit/>
           </a:bodyPr>
           <a:p>
+            <a:pPr>
+              <a:lnSpc>
+                <a:spcPct val="100000"/>
+              </a:lnSpc>
+            </a:pPr>
             <a:endParaRPr b="0" lang="en-US" sz="1800" spc="-1" strike="noStrike">
               <a:solidFill>
                 <a:schemeClr val="lt1"/>
@@ -17484,7 +17560,7 @@
         <p:spPr>
           <a:xfrm>
             <a:off x="0" y="0"/>
-            <a:ext cx="314280" cy="6852240"/>
+            <a:ext cx="313920" cy="6851880"/>
           </a:xfrm>
           <a:prstGeom prst="rect">
             <a:avLst/>
@@ -17520,6 +17596,11 @@
             <a:noAutofit/>
           </a:bodyPr>
           <a:p>
+            <a:pPr>
+              <a:lnSpc>
+                <a:spcPct val="100000"/>
+              </a:lnSpc>
+            </a:pPr>
             <a:endParaRPr b="0" lang="en-US" sz="1800" spc="-1" strike="noStrike">
               <a:solidFill>
                 <a:schemeClr val="lt1"/>
@@ -17539,7 +17620,7 @@
         <p:spPr>
           <a:xfrm>
             <a:off x="9875520" y="365760"/>
-            <a:ext cx="2005920" cy="497160"/>
+            <a:ext cx="2005560" cy="496800"/>
           </a:xfrm>
           <a:prstGeom prst="roundRect">
             <a:avLst>
@@ -17613,7 +17694,7 @@
         <p:spPr>
           <a:xfrm>
             <a:off x="1859040" y="732600"/>
-            <a:ext cx="7249320" cy="639000"/>
+            <a:ext cx="7249320" cy="638280"/>
           </a:xfrm>
           <a:prstGeom prst="rect">
             <a:avLst/>
@@ -17667,7 +17748,7 @@
         <p:spPr>
           <a:xfrm>
             <a:off x="876240" y="1600200"/>
-            <a:ext cx="9815760" cy="576360"/>
+            <a:ext cx="9815400" cy="576360"/>
           </a:xfrm>
           <a:prstGeom prst="rect">
             <a:avLst/>
@@ -17744,7 +17825,7 @@
         <p:spPr>
           <a:xfrm>
             <a:off x="987480" y="3182040"/>
-            <a:ext cx="3286080" cy="2737440"/>
+            <a:ext cx="3285720" cy="2737080"/>
           </a:xfrm>
           <a:prstGeom prst="roundRect">
             <a:avLst>
@@ -17782,6 +17863,11 @@
             <a:noAutofit/>
           </a:bodyPr>
           <a:p>
+            <a:pPr>
+              <a:lnSpc>
+                <a:spcPct val="100000"/>
+              </a:lnSpc>
+            </a:pPr>
             <a:endParaRPr b="0" lang="en-US" sz="1800" spc="-1" strike="noStrike">
               <a:solidFill>
                 <a:schemeClr val="lt1"/>
@@ -17801,7 +17887,7 @@
         <p:spPr>
           <a:xfrm>
             <a:off x="685800" y="2971800"/>
-            <a:ext cx="3200040" cy="3428640"/>
+            <a:ext cx="3199680" cy="3428280"/>
           </a:xfrm>
           <a:prstGeom prst="roundRect">
             <a:avLst>
@@ -17987,7 +18073,7 @@
         <p:spPr>
           <a:xfrm>
             <a:off x="4507920" y="3182040"/>
-            <a:ext cx="3286080" cy="2737440"/>
+            <a:ext cx="3285720" cy="2737080"/>
           </a:xfrm>
           <a:prstGeom prst="roundRect">
             <a:avLst>
@@ -18025,6 +18111,11 @@
             <a:noAutofit/>
           </a:bodyPr>
           <a:p>
+            <a:pPr>
+              <a:lnSpc>
+                <a:spcPct val="100000"/>
+              </a:lnSpc>
+            </a:pPr>
             <a:endParaRPr b="0" lang="en-US" sz="1800" spc="-1" strike="noStrike">
               <a:solidFill>
                 <a:schemeClr val="lt1"/>
@@ -18044,7 +18135,7 @@
         <p:spPr>
           <a:xfrm>
             <a:off x="4257360" y="2971800"/>
-            <a:ext cx="3286080" cy="3426480"/>
+            <a:ext cx="3285720" cy="3426120"/>
           </a:xfrm>
           <a:prstGeom prst="roundRect">
             <a:avLst>
@@ -18451,7 +18542,7 @@
         <p:spPr>
           <a:xfrm>
             <a:off x="8028360" y="3182040"/>
-            <a:ext cx="3286080" cy="2737440"/>
+            <a:ext cx="3285720" cy="2737080"/>
           </a:xfrm>
           <a:prstGeom prst="roundRect">
             <a:avLst>
@@ -18489,6 +18580,11 @@
             <a:noAutofit/>
           </a:bodyPr>
           <a:p>
+            <a:pPr>
+              <a:lnSpc>
+                <a:spcPct val="100000"/>
+              </a:lnSpc>
+            </a:pPr>
             <a:endParaRPr b="0" lang="en-US" sz="1800" spc="-1" strike="noStrike">
               <a:solidFill>
                 <a:schemeClr val="lt1"/>
@@ -18508,7 +18604,7 @@
         <p:spPr>
           <a:xfrm>
             <a:off x="8001000" y="2514600"/>
-            <a:ext cx="3427560" cy="3885840"/>
+            <a:ext cx="3427200" cy="3885480"/>
           </a:xfrm>
           <a:prstGeom prst="roundRect">
             <a:avLst>
@@ -19159,6 +19255,2639 @@
       <p:sp>
         <p:nvSpPr>
           <p:cNvPr id="404" name="TextBox 45"/>
+          <p:cNvSpPr/>
+          <p:nvPr/>
+        </p:nvSpPr>
+        <p:spPr>
+          <a:xfrm>
+            <a:off x="4600080" y="6446520"/>
+            <a:ext cx="3051000" cy="363960"/>
+          </a:xfrm>
+          <a:prstGeom prst="rect">
+            <a:avLst/>
+          </a:prstGeom>
+          <a:noFill/>
+          <a:ln w="0">
+            <a:noFill/>
+          </a:ln>
+        </p:spPr>
+        <p:style>
+          <a:lnRef idx="0"/>
+          <a:fillRef idx="0"/>
+          <a:effectRef idx="0"/>
+          <a:fontRef idx="minor"/>
+        </p:style>
+        <p:txBody>
+          <a:bodyPr wrap="none" lIns="90000" rIns="90000" tIns="45000" bIns="45000" anchor="t">
+            <a:spAutoFit/>
+          </a:bodyPr>
+          <a:p>
+            <a:pPr>
+              <a:lnSpc>
+                <a:spcPct val="100000"/>
+              </a:lnSpc>
+            </a:pPr>
+            <a:r>
+              <a:rPr b="0" lang="en-US" sz="1800" spc="-1" strike="noStrike">
+                <a:solidFill>
+                  <a:srgbClr val="000000"/>
+                </a:solidFill>
+                <a:latin typeface="Calibri"/>
+                <a:ea typeface="DejaVu Sans"/>
+              </a:rPr>
+              <a:t>Java • Ultra Premium Template</a:t>
+            </a:r>
+            <a:endParaRPr b="0" lang="en-US" sz="1800" spc="-1" strike="noStrike">
+              <a:solidFill>
+                <a:srgbClr val="000000"/>
+              </a:solidFill>
+              <a:latin typeface="Arial"/>
+            </a:endParaRPr>
+          </a:p>
+        </p:txBody>
+      </p:sp>
+    </p:spTree>
+  </p:cSld>
+  <mc:AlternateContent>
+    <mc:Choice Requires="p14">
+      <p:transition spd="slow" p14:dur="2000"/>
+    </mc:Choice>
+    <mc:Fallback>
+      <p:transition spd="slow"/>
+    </mc:Fallback>
+  </mc:AlternateContent>
+</p:sld>
+</file>
+
+<file path=ppt/slides/slide15.xml><?xml version="1.0" encoding="utf-8"?>
+<p:sld xmlns:a="http://schemas.openxmlformats.org/drawingml/2006/main" xmlns:p="http://schemas.openxmlformats.org/presentationml/2006/main" xmlns:r="http://schemas.openxmlformats.org/officeDocument/2006/relationships" xmlns:p14="http://schemas.microsoft.com/office/powerpoint/2010/main" xmlns:p15="http://schemas.microsoft.com/office/powerpoint/2012/main" xmlns:mc="http://schemas.openxmlformats.org/markup-compatibility/2006">
+  <p:cSld>
+    <p:spTree>
+      <p:nvGrpSpPr>
+        <p:cNvPr id="1" name=""/>
+        <p:cNvGrpSpPr/>
+        <p:nvPr/>
+      </p:nvGrpSpPr>
+      <p:grpSpPr>
+        <a:xfrm>
+          <a:off x="0" y="0"/>
+          <a:ext cx="0" cy="0"/>
+          <a:chOff x="0" y="0"/>
+          <a:chExt cx="0" cy="0"/>
+        </a:xfrm>
+      </p:grpSpPr>
+      <p:sp>
+        <p:nvSpPr>
+          <p:cNvPr id="405" name="Rectangle 225"/>
+          <p:cNvSpPr/>
+          <p:nvPr/>
+        </p:nvSpPr>
+        <p:spPr>
+          <a:xfrm>
+            <a:off x="0" y="0"/>
+            <a:ext cx="12182760" cy="6851880"/>
+          </a:xfrm>
+          <a:prstGeom prst="rect">
+            <a:avLst/>
+          </a:prstGeom>
+          <a:solidFill>
+            <a:srgbClr val="0b0b0d"/>
+          </a:solidFill>
+          <a:ln>
+            <a:noFill/>
+          </a:ln>
+          <a:effectLst>
+            <a:outerShdw blurRad="39960" dir="5400000" dist="23040" rotWithShape="0">
+              <a:srgbClr val="000000">
+                <a:alpha val="35000"/>
+              </a:srgbClr>
+            </a:outerShdw>
+          </a:effectLst>
+        </p:spPr>
+        <p:style>
+          <a:lnRef idx="1">
+            <a:schemeClr val="accent1"/>
+          </a:lnRef>
+          <a:fillRef idx="3">
+            <a:schemeClr val="accent1"/>
+          </a:fillRef>
+          <a:effectRef idx="2">
+            <a:schemeClr val="accent1"/>
+          </a:effectRef>
+          <a:fontRef idx="minor"/>
+        </p:style>
+        <p:txBody>
+          <a:bodyPr lIns="90000" rIns="90000" tIns="45000" bIns="45000" anchor="ctr">
+            <a:noAutofit/>
+          </a:bodyPr>
+          <a:p>
+            <a:endParaRPr b="0" lang="en-US" sz="1800" spc="-1" strike="noStrike">
+              <a:solidFill>
+                <a:schemeClr val="lt1"/>
+              </a:solidFill>
+              <a:latin typeface="Calibri"/>
+              <a:ea typeface="DejaVu Sans"/>
+            </a:endParaRPr>
+          </a:p>
+        </p:txBody>
+      </p:sp>
+      <p:sp>
+        <p:nvSpPr>
+          <p:cNvPr id="406" name="Rectangle 226"/>
+          <p:cNvSpPr/>
+          <p:nvPr/>
+        </p:nvSpPr>
+        <p:spPr>
+          <a:xfrm>
+            <a:off x="0" y="0"/>
+            <a:ext cx="12240" cy="6851880"/>
+          </a:xfrm>
+          <a:prstGeom prst="rect">
+            <a:avLst/>
+          </a:prstGeom>
+          <a:solidFill>
+            <a:srgbClr val="121216"/>
+          </a:solidFill>
+          <a:ln>
+            <a:noFill/>
+          </a:ln>
+          <a:effectLst>
+            <a:outerShdw blurRad="39960" dir="5400000" dist="23040" rotWithShape="0">
+              <a:srgbClr val="000000">
+                <a:alpha val="35000"/>
+              </a:srgbClr>
+            </a:outerShdw>
+          </a:effectLst>
+        </p:spPr>
+        <p:style>
+          <a:lnRef idx="1">
+            <a:schemeClr val="accent1"/>
+          </a:lnRef>
+          <a:fillRef idx="3">
+            <a:schemeClr val="accent1"/>
+          </a:fillRef>
+          <a:effectRef idx="2">
+            <a:schemeClr val="accent1"/>
+          </a:effectRef>
+          <a:fontRef idx="minor"/>
+        </p:style>
+        <p:txBody>
+          <a:bodyPr lIns="90000" rIns="90000" tIns="45000" bIns="45000" anchor="ctr">
+            <a:noAutofit/>
+          </a:bodyPr>
+          <a:p>
+            <a:endParaRPr b="0" lang="en-US" sz="1800" spc="-1" strike="noStrike">
+              <a:solidFill>
+                <a:schemeClr val="lt1"/>
+              </a:solidFill>
+              <a:latin typeface="Calibri"/>
+              <a:ea typeface="DejaVu Sans"/>
+            </a:endParaRPr>
+          </a:p>
+        </p:txBody>
+      </p:sp>
+      <p:sp>
+        <p:nvSpPr>
+          <p:cNvPr id="407" name="Rectangle 227"/>
+          <p:cNvSpPr/>
+          <p:nvPr/>
+        </p:nvSpPr>
+        <p:spPr>
+          <a:xfrm>
+            <a:off x="914400" y="0"/>
+            <a:ext cx="12240" cy="6851880"/>
+          </a:xfrm>
+          <a:prstGeom prst="rect">
+            <a:avLst/>
+          </a:prstGeom>
+          <a:solidFill>
+            <a:srgbClr val="121216"/>
+          </a:solidFill>
+          <a:ln>
+            <a:noFill/>
+          </a:ln>
+          <a:effectLst>
+            <a:outerShdw blurRad="39960" dir="5400000" dist="23040" rotWithShape="0">
+              <a:srgbClr val="000000">
+                <a:alpha val="35000"/>
+              </a:srgbClr>
+            </a:outerShdw>
+          </a:effectLst>
+        </p:spPr>
+        <p:style>
+          <a:lnRef idx="1">
+            <a:schemeClr val="accent1"/>
+          </a:lnRef>
+          <a:fillRef idx="3">
+            <a:schemeClr val="accent1"/>
+          </a:fillRef>
+          <a:effectRef idx="2">
+            <a:schemeClr val="accent1"/>
+          </a:effectRef>
+          <a:fontRef idx="minor"/>
+        </p:style>
+        <p:txBody>
+          <a:bodyPr lIns="90000" rIns="90000" tIns="45000" bIns="45000" anchor="ctr">
+            <a:noAutofit/>
+          </a:bodyPr>
+          <a:p>
+            <a:endParaRPr b="0" lang="en-US" sz="1800" spc="-1" strike="noStrike">
+              <a:solidFill>
+                <a:schemeClr val="lt1"/>
+              </a:solidFill>
+              <a:latin typeface="Calibri"/>
+              <a:ea typeface="DejaVu Sans"/>
+            </a:endParaRPr>
+          </a:p>
+        </p:txBody>
+      </p:sp>
+      <p:sp>
+        <p:nvSpPr>
+          <p:cNvPr id="408" name="Rectangle 228"/>
+          <p:cNvSpPr/>
+          <p:nvPr/>
+        </p:nvSpPr>
+        <p:spPr>
+          <a:xfrm>
+            <a:off x="1828800" y="0"/>
+            <a:ext cx="12240" cy="6851880"/>
+          </a:xfrm>
+          <a:prstGeom prst="rect">
+            <a:avLst/>
+          </a:prstGeom>
+          <a:solidFill>
+            <a:srgbClr val="121216"/>
+          </a:solidFill>
+          <a:ln>
+            <a:noFill/>
+          </a:ln>
+          <a:effectLst>
+            <a:outerShdw blurRad="39960" dir="5400000" dist="23040" rotWithShape="0">
+              <a:srgbClr val="000000">
+                <a:alpha val="35000"/>
+              </a:srgbClr>
+            </a:outerShdw>
+          </a:effectLst>
+        </p:spPr>
+        <p:style>
+          <a:lnRef idx="1">
+            <a:schemeClr val="accent1"/>
+          </a:lnRef>
+          <a:fillRef idx="3">
+            <a:schemeClr val="accent1"/>
+          </a:fillRef>
+          <a:effectRef idx="2">
+            <a:schemeClr val="accent1"/>
+          </a:effectRef>
+          <a:fontRef idx="minor"/>
+        </p:style>
+        <p:txBody>
+          <a:bodyPr lIns="90000" rIns="90000" tIns="45000" bIns="45000" anchor="ctr">
+            <a:noAutofit/>
+          </a:bodyPr>
+          <a:p>
+            <a:endParaRPr b="0" lang="en-US" sz="1800" spc="-1" strike="noStrike">
+              <a:solidFill>
+                <a:schemeClr val="lt1"/>
+              </a:solidFill>
+              <a:latin typeface="Calibri"/>
+              <a:ea typeface="DejaVu Sans"/>
+            </a:endParaRPr>
+          </a:p>
+        </p:txBody>
+      </p:sp>
+      <p:sp>
+        <p:nvSpPr>
+          <p:cNvPr id="409" name="Rectangle 229"/>
+          <p:cNvSpPr/>
+          <p:nvPr/>
+        </p:nvSpPr>
+        <p:spPr>
+          <a:xfrm>
+            <a:off x="2743200" y="0"/>
+            <a:ext cx="12240" cy="6851880"/>
+          </a:xfrm>
+          <a:prstGeom prst="rect">
+            <a:avLst/>
+          </a:prstGeom>
+          <a:solidFill>
+            <a:srgbClr val="121216"/>
+          </a:solidFill>
+          <a:ln>
+            <a:noFill/>
+          </a:ln>
+          <a:effectLst>
+            <a:outerShdw blurRad="39960" dir="5400000" dist="23040" rotWithShape="0">
+              <a:srgbClr val="000000">
+                <a:alpha val="35000"/>
+              </a:srgbClr>
+            </a:outerShdw>
+          </a:effectLst>
+        </p:spPr>
+        <p:style>
+          <a:lnRef idx="1">
+            <a:schemeClr val="accent1"/>
+          </a:lnRef>
+          <a:fillRef idx="3">
+            <a:schemeClr val="accent1"/>
+          </a:fillRef>
+          <a:effectRef idx="2">
+            <a:schemeClr val="accent1"/>
+          </a:effectRef>
+          <a:fontRef idx="minor"/>
+        </p:style>
+        <p:txBody>
+          <a:bodyPr lIns="90000" rIns="90000" tIns="45000" bIns="45000" anchor="ctr">
+            <a:noAutofit/>
+          </a:bodyPr>
+          <a:p>
+            <a:endParaRPr b="0" lang="en-US" sz="1800" spc="-1" strike="noStrike">
+              <a:solidFill>
+                <a:schemeClr val="lt1"/>
+              </a:solidFill>
+              <a:latin typeface="Calibri"/>
+              <a:ea typeface="DejaVu Sans"/>
+            </a:endParaRPr>
+          </a:p>
+        </p:txBody>
+      </p:sp>
+      <p:sp>
+        <p:nvSpPr>
+          <p:cNvPr id="410" name="Rectangle 230"/>
+          <p:cNvSpPr/>
+          <p:nvPr/>
+        </p:nvSpPr>
+        <p:spPr>
+          <a:xfrm>
+            <a:off x="3657600" y="0"/>
+            <a:ext cx="12240" cy="6851880"/>
+          </a:xfrm>
+          <a:prstGeom prst="rect">
+            <a:avLst/>
+          </a:prstGeom>
+          <a:solidFill>
+            <a:srgbClr val="121216"/>
+          </a:solidFill>
+          <a:ln>
+            <a:noFill/>
+          </a:ln>
+          <a:effectLst>
+            <a:outerShdw blurRad="39960" dir="5400000" dist="23040" rotWithShape="0">
+              <a:srgbClr val="000000">
+                <a:alpha val="35000"/>
+              </a:srgbClr>
+            </a:outerShdw>
+          </a:effectLst>
+        </p:spPr>
+        <p:style>
+          <a:lnRef idx="1">
+            <a:schemeClr val="accent1"/>
+          </a:lnRef>
+          <a:fillRef idx="3">
+            <a:schemeClr val="accent1"/>
+          </a:fillRef>
+          <a:effectRef idx="2">
+            <a:schemeClr val="accent1"/>
+          </a:effectRef>
+          <a:fontRef idx="minor"/>
+        </p:style>
+        <p:txBody>
+          <a:bodyPr lIns="90000" rIns="90000" tIns="45000" bIns="45000" anchor="ctr">
+            <a:noAutofit/>
+          </a:bodyPr>
+          <a:p>
+            <a:endParaRPr b="0" lang="en-US" sz="1800" spc="-1" strike="noStrike">
+              <a:solidFill>
+                <a:schemeClr val="lt1"/>
+              </a:solidFill>
+              <a:latin typeface="Calibri"/>
+              <a:ea typeface="DejaVu Sans"/>
+            </a:endParaRPr>
+          </a:p>
+        </p:txBody>
+      </p:sp>
+      <p:sp>
+        <p:nvSpPr>
+          <p:cNvPr id="411" name="Rectangle 231"/>
+          <p:cNvSpPr/>
+          <p:nvPr/>
+        </p:nvSpPr>
+        <p:spPr>
+          <a:xfrm>
+            <a:off x="4572000" y="0"/>
+            <a:ext cx="12240" cy="6851880"/>
+          </a:xfrm>
+          <a:prstGeom prst="rect">
+            <a:avLst/>
+          </a:prstGeom>
+          <a:solidFill>
+            <a:srgbClr val="121216"/>
+          </a:solidFill>
+          <a:ln>
+            <a:noFill/>
+          </a:ln>
+          <a:effectLst>
+            <a:outerShdw blurRad="39960" dir="5400000" dist="23040" rotWithShape="0">
+              <a:srgbClr val="000000">
+                <a:alpha val="35000"/>
+              </a:srgbClr>
+            </a:outerShdw>
+          </a:effectLst>
+        </p:spPr>
+        <p:style>
+          <a:lnRef idx="1">
+            <a:schemeClr val="accent1"/>
+          </a:lnRef>
+          <a:fillRef idx="3">
+            <a:schemeClr val="accent1"/>
+          </a:fillRef>
+          <a:effectRef idx="2">
+            <a:schemeClr val="accent1"/>
+          </a:effectRef>
+          <a:fontRef idx="minor"/>
+        </p:style>
+        <p:txBody>
+          <a:bodyPr lIns="90000" rIns="90000" tIns="45000" bIns="45000" anchor="ctr">
+            <a:noAutofit/>
+          </a:bodyPr>
+          <a:p>
+            <a:endParaRPr b="0" lang="en-US" sz="1800" spc="-1" strike="noStrike">
+              <a:solidFill>
+                <a:schemeClr val="lt1"/>
+              </a:solidFill>
+              <a:latin typeface="Calibri"/>
+              <a:ea typeface="DejaVu Sans"/>
+            </a:endParaRPr>
+          </a:p>
+        </p:txBody>
+      </p:sp>
+      <p:sp>
+        <p:nvSpPr>
+          <p:cNvPr id="412" name="Rectangle 232"/>
+          <p:cNvSpPr/>
+          <p:nvPr/>
+        </p:nvSpPr>
+        <p:spPr>
+          <a:xfrm>
+            <a:off x="5486400" y="0"/>
+            <a:ext cx="12240" cy="6851880"/>
+          </a:xfrm>
+          <a:prstGeom prst="rect">
+            <a:avLst/>
+          </a:prstGeom>
+          <a:solidFill>
+            <a:srgbClr val="121216"/>
+          </a:solidFill>
+          <a:ln>
+            <a:noFill/>
+          </a:ln>
+          <a:effectLst>
+            <a:outerShdw blurRad="39960" dir="5400000" dist="23040" rotWithShape="0">
+              <a:srgbClr val="000000">
+                <a:alpha val="35000"/>
+              </a:srgbClr>
+            </a:outerShdw>
+          </a:effectLst>
+        </p:spPr>
+        <p:style>
+          <a:lnRef idx="1">
+            <a:schemeClr val="accent1"/>
+          </a:lnRef>
+          <a:fillRef idx="3">
+            <a:schemeClr val="accent1"/>
+          </a:fillRef>
+          <a:effectRef idx="2">
+            <a:schemeClr val="accent1"/>
+          </a:effectRef>
+          <a:fontRef idx="minor"/>
+        </p:style>
+        <p:txBody>
+          <a:bodyPr lIns="90000" rIns="90000" tIns="45000" bIns="45000" anchor="ctr">
+            <a:noAutofit/>
+          </a:bodyPr>
+          <a:p>
+            <a:endParaRPr b="0" lang="en-US" sz="1800" spc="-1" strike="noStrike">
+              <a:solidFill>
+                <a:schemeClr val="lt1"/>
+              </a:solidFill>
+              <a:latin typeface="Calibri"/>
+              <a:ea typeface="DejaVu Sans"/>
+            </a:endParaRPr>
+          </a:p>
+        </p:txBody>
+      </p:sp>
+      <p:sp>
+        <p:nvSpPr>
+          <p:cNvPr id="413" name="Rectangle 233"/>
+          <p:cNvSpPr/>
+          <p:nvPr/>
+        </p:nvSpPr>
+        <p:spPr>
+          <a:xfrm>
+            <a:off x="6400800" y="0"/>
+            <a:ext cx="12240" cy="6851880"/>
+          </a:xfrm>
+          <a:prstGeom prst="rect">
+            <a:avLst/>
+          </a:prstGeom>
+          <a:solidFill>
+            <a:srgbClr val="121216"/>
+          </a:solidFill>
+          <a:ln>
+            <a:noFill/>
+          </a:ln>
+          <a:effectLst>
+            <a:outerShdw blurRad="39960" dir="5400000" dist="23040" rotWithShape="0">
+              <a:srgbClr val="000000">
+                <a:alpha val="35000"/>
+              </a:srgbClr>
+            </a:outerShdw>
+          </a:effectLst>
+        </p:spPr>
+        <p:style>
+          <a:lnRef idx="1">
+            <a:schemeClr val="accent1"/>
+          </a:lnRef>
+          <a:fillRef idx="3">
+            <a:schemeClr val="accent1"/>
+          </a:fillRef>
+          <a:effectRef idx="2">
+            <a:schemeClr val="accent1"/>
+          </a:effectRef>
+          <a:fontRef idx="minor"/>
+        </p:style>
+        <p:txBody>
+          <a:bodyPr lIns="90000" rIns="90000" tIns="45000" bIns="45000" anchor="ctr">
+            <a:noAutofit/>
+          </a:bodyPr>
+          <a:p>
+            <a:endParaRPr b="0" lang="en-US" sz="1800" spc="-1" strike="noStrike">
+              <a:solidFill>
+                <a:schemeClr val="lt1"/>
+              </a:solidFill>
+              <a:latin typeface="Calibri"/>
+              <a:ea typeface="DejaVu Sans"/>
+            </a:endParaRPr>
+          </a:p>
+        </p:txBody>
+      </p:sp>
+      <p:sp>
+        <p:nvSpPr>
+          <p:cNvPr id="414" name="Rectangle 234"/>
+          <p:cNvSpPr/>
+          <p:nvPr/>
+        </p:nvSpPr>
+        <p:spPr>
+          <a:xfrm>
+            <a:off x="7315200" y="0"/>
+            <a:ext cx="12240" cy="6851880"/>
+          </a:xfrm>
+          <a:prstGeom prst="rect">
+            <a:avLst/>
+          </a:prstGeom>
+          <a:solidFill>
+            <a:srgbClr val="121216"/>
+          </a:solidFill>
+          <a:ln>
+            <a:noFill/>
+          </a:ln>
+          <a:effectLst>
+            <a:outerShdw blurRad="39960" dir="5400000" dist="23040" rotWithShape="0">
+              <a:srgbClr val="000000">
+                <a:alpha val="35000"/>
+              </a:srgbClr>
+            </a:outerShdw>
+          </a:effectLst>
+        </p:spPr>
+        <p:style>
+          <a:lnRef idx="1">
+            <a:schemeClr val="accent1"/>
+          </a:lnRef>
+          <a:fillRef idx="3">
+            <a:schemeClr val="accent1"/>
+          </a:fillRef>
+          <a:effectRef idx="2">
+            <a:schemeClr val="accent1"/>
+          </a:effectRef>
+          <a:fontRef idx="minor"/>
+        </p:style>
+        <p:txBody>
+          <a:bodyPr lIns="90000" rIns="90000" tIns="45000" bIns="45000" anchor="ctr">
+            <a:noAutofit/>
+          </a:bodyPr>
+          <a:p>
+            <a:endParaRPr b="0" lang="en-US" sz="1800" spc="-1" strike="noStrike">
+              <a:solidFill>
+                <a:schemeClr val="lt1"/>
+              </a:solidFill>
+              <a:latin typeface="Calibri"/>
+              <a:ea typeface="DejaVu Sans"/>
+            </a:endParaRPr>
+          </a:p>
+        </p:txBody>
+      </p:sp>
+      <p:sp>
+        <p:nvSpPr>
+          <p:cNvPr id="415" name="Rectangle 235"/>
+          <p:cNvSpPr/>
+          <p:nvPr/>
+        </p:nvSpPr>
+        <p:spPr>
+          <a:xfrm>
+            <a:off x="8229600" y="0"/>
+            <a:ext cx="12240" cy="6851880"/>
+          </a:xfrm>
+          <a:prstGeom prst="rect">
+            <a:avLst/>
+          </a:prstGeom>
+          <a:solidFill>
+            <a:srgbClr val="121216"/>
+          </a:solidFill>
+          <a:ln>
+            <a:noFill/>
+          </a:ln>
+          <a:effectLst>
+            <a:outerShdw blurRad="39960" dir="5400000" dist="23040" rotWithShape="0">
+              <a:srgbClr val="000000">
+                <a:alpha val="35000"/>
+              </a:srgbClr>
+            </a:outerShdw>
+          </a:effectLst>
+        </p:spPr>
+        <p:style>
+          <a:lnRef idx="1">
+            <a:schemeClr val="accent1"/>
+          </a:lnRef>
+          <a:fillRef idx="3">
+            <a:schemeClr val="accent1"/>
+          </a:fillRef>
+          <a:effectRef idx="2">
+            <a:schemeClr val="accent1"/>
+          </a:effectRef>
+          <a:fontRef idx="minor"/>
+        </p:style>
+        <p:txBody>
+          <a:bodyPr lIns="90000" rIns="90000" tIns="45000" bIns="45000" anchor="ctr">
+            <a:noAutofit/>
+          </a:bodyPr>
+          <a:p>
+            <a:endParaRPr b="0" lang="en-US" sz="1800" spc="-1" strike="noStrike">
+              <a:solidFill>
+                <a:schemeClr val="lt1"/>
+              </a:solidFill>
+              <a:latin typeface="Calibri"/>
+              <a:ea typeface="DejaVu Sans"/>
+            </a:endParaRPr>
+          </a:p>
+        </p:txBody>
+      </p:sp>
+      <p:sp>
+        <p:nvSpPr>
+          <p:cNvPr id="416" name="Rectangle 236"/>
+          <p:cNvSpPr/>
+          <p:nvPr/>
+        </p:nvSpPr>
+        <p:spPr>
+          <a:xfrm>
+            <a:off x="9144000" y="0"/>
+            <a:ext cx="12240" cy="6851880"/>
+          </a:xfrm>
+          <a:prstGeom prst="rect">
+            <a:avLst/>
+          </a:prstGeom>
+          <a:solidFill>
+            <a:srgbClr val="121216"/>
+          </a:solidFill>
+          <a:ln>
+            <a:noFill/>
+          </a:ln>
+          <a:effectLst>
+            <a:outerShdw blurRad="39960" dir="5400000" dist="23040" rotWithShape="0">
+              <a:srgbClr val="000000">
+                <a:alpha val="35000"/>
+              </a:srgbClr>
+            </a:outerShdw>
+          </a:effectLst>
+        </p:spPr>
+        <p:style>
+          <a:lnRef idx="1">
+            <a:schemeClr val="accent1"/>
+          </a:lnRef>
+          <a:fillRef idx="3">
+            <a:schemeClr val="accent1"/>
+          </a:fillRef>
+          <a:effectRef idx="2">
+            <a:schemeClr val="accent1"/>
+          </a:effectRef>
+          <a:fontRef idx="minor"/>
+        </p:style>
+        <p:txBody>
+          <a:bodyPr lIns="90000" rIns="90000" tIns="45000" bIns="45000" anchor="ctr">
+            <a:noAutofit/>
+          </a:bodyPr>
+          <a:p>
+            <a:endParaRPr b="0" lang="en-US" sz="1800" spc="-1" strike="noStrike">
+              <a:solidFill>
+                <a:schemeClr